--- a/docs/presentation/MedScience-3.0-设计汇报.pptx
+++ b/docs/presentation/MedScience-3.0-设计汇报.pptx
@@ -116,18 +116,18 @@
   <p:extLst>
     <p:ext uri="{521415D9-36F7-43E2-AB2F-B90AF26B5E84}">
       <p14:sectionLst xmlns:p14="http://schemas.microsoft.com/office/powerpoint/2010/main">
-        <p14:section name="开篇" id="{3f689fd5-f1cc-3779-25ae-a44d73958973}">
+        <p14:section name="开篇" id="{30cd2282-8c3b-bf45-568b-6976de948efb}">
           <p14:sldIdLst>
             <p14:sldId id="256"/>
           </p14:sldIdLst>
         </p14:section>
-        <p14:section name="为什么" id="{1fd3a710-1749-6ff3-86f9-17bb2fc6e2cc}">
+        <p14:section name="为什么" id="{e8846e3b-1c05-a9da-fc79-000a8cc82f83}">
           <p14:sldIdLst>
             <p14:sldId id="257"/>
             <p14:sldId id="258"/>
           </p14:sldIdLst>
         </p14:section>
-        <p14:section name="怎么设计" id="{018758b2-bfc9-b330-5da2-59b652a220b2}">
+        <p14:section name="怎么设计" id="{6d02e187-1e23-22ea-a2ba-d733955ea61d}">
           <p14:sldIdLst>
             <p14:sldId id="259"/>
             <p14:sldId id="260"/>
@@ -136,12 +136,12 @@
             <p14:sldId id="263"/>
           </p14:sldIdLst>
         </p14:section>
-        <p14:section name="怎么用" id="{3c21cfa5-f4a0-8386-490b-d371cb2bcddb}">
+        <p14:section name="怎么用" id="{1caef6a9-7ff0-7aaa-f0be-84f2742cf5fe}">
           <p14:sldIdLst>
             <p14:sldId id="264"/>
           </p14:sldIdLst>
         </p14:section>
-        <p14:section name="下一步" id="{d36b21c3-b3a8-62f3-2654-5ccb5dcc592b}">
+        <p14:section name="下一步" id="{d3da458c-6392-84e5-e3b3-3f45159ab0b4}">
           <p14:sldIdLst>
             <p14:sldId id="265"/>
           </p14:sldIdLst>
@@ -195,7 +195,7 @@
               <a:lstStyle/>
               <a:p>
                 <a:pPr>
-                  <a:defRPr b="0" i="0" strike="noStrike" sz="1100" u="none">
+                  <a:defRPr b="0" i="0" strike="noStrike" sz="1000" u="none">
                     <a:solidFill>
                       <a:srgbClr val="1B2533"/>
                     </a:solidFill>
@@ -219,13 +219,13 @@
                 <c:ptCount val="3"/>
                 <c:lvl>
                   <c:pt idx="0">
-                    <c:v>UniProt 序列信息</c:v>
+                    <c:v>UniProt 序列</c:v>
                   </c:pt>
                   <c:pt idx="1">
                     <c:v>临床试验登记</c:v>
                   </c:pt>
                   <c:pt idx="2">
-                    <c:v>ChEMBL 活性数据</c:v>
+                    <c:v>ChEMBL 活性</c:v>
                   </c:pt>
                 </c:lvl>
               </c:multiLvlStrCache>
@@ -257,7 +257,7 @@
             <a:lstStyle/>
             <a:p>
               <a:pPr>
-                <a:defRPr b="0" i="0" strike="noStrike" sz="1100" u="none">
+                <a:defRPr b="0" i="0" strike="noStrike" sz="1000" u="none">
                   <a:solidFill>
                     <a:srgbClr val="1B2533"/>
                   </a:solidFill>
@@ -274,7 +274,7 @@
           <c:showBubbleSize val="0"/>
           <c:showLeaderLines val="0"/>
         </c:dLbls>
-        <c:gapWidth val="60"/>
+        <c:gapWidth val="50"/>
         <c:overlap val="0"/>
         <c:axId val="2094734554"/>
         <c:axId val="2094734552"/>
@@ -305,7 +305,7 @@
           <a:lstStyle/>
           <a:p>
             <a:pPr>
-              <a:defRPr sz="1100" b="0" i="0" u="none" strike="noStrike">
+              <a:defRPr sz="1000" b="0" i="0" u="none" strike="noStrike">
                 <a:solidFill>
                   <a:srgbClr val="1B2533"/>
                 </a:solidFill>
@@ -325,6 +325,7 @@
         <c:axId val="2094734552"/>
         <c:scaling>
           <c:orientation val="minMax"/>
+          <c:max val="0.33"/>
         </c:scaling>
         <c:delete val="1"/>
         <c:axPos val="b"/>
@@ -779,7 +780,7 @@
           <a:p>
             <a:r>
               <a:rPr lang="en-US" dirty="0"/>
-              <a:t>开场一句话：MedScience 是一个面向生物医学的科研智能体工作站。3.0 的重点不是让 AI 说得更多，而是让它的结论站得住：有证据、能撤回、可信度说得清，并且数据留在本机。</a:t>
+              <a:t>开场一句话：MedScience 是一个面向生物医学研究的科研智能体系统，不是通用聊天助手。3.0 的重点不是让 AI 说得更多，而是让它的结论站得住：有证据、能撤回、可信度说得清，并且数据留在本机。</a:t>
             </a:r>
             <a:endParaRPr lang="en-US" dirty="0"/>
           </a:p>
@@ -1219,7 +1220,7 @@
           <a:p>
             <a:r>
               <a:rPr lang="en-US" dirty="0"/>
-              <a:t>上排是一次提问的完整路径，每一步下面的小字是这一步产生的数据。绿色四步由 3.0 新增的证据治理层完成。下方是回路：导入撤稿数据后扫描账本，被撤稿的证据被撤销，依赖它的结论在同一操作里自动转为“有争议”，原因写入哈希链，可以审计。</a:t>
+              <a:t>上排是一次科研提问的完整路径，每一步下面的小字是这一步产生的数据。绿色四步由 3.0 新增的证据治理层完成。下方是回路：科研结论的依据会被新研究推翻，比如药品因新的安全性试验撤市。证据在账本里被标记后，依赖它的结论在同一操作里自动转为“有争议”，原因写入哈希链，可以审计；恢复证据不会自动恢复结论，需要重新论证。下一页用罗非昔布的完整例子说明。</a:t>
             </a:r>
             <a:endParaRPr lang="en-US" dirty="0"/>
           </a:p>
@@ -1307,7 +1308,7 @@
           <a:p>
             <a:r>
               <a:rPr lang="en-US" dirty="0"/>
-              <a:t>这是 3.0 的核心。证据和结论有六种状态，只能沿箭头迁移：新证据先是候选，通过准入门禁才算已验证，否则隔离。关键是依赖级联：一篇论文被撤稿，依赖它的结论自动转为“有争议”，不需要人工排查。所有变更写入哈希链，可审计、防篡改。</a:t>
+              <a:t>这是 3.0 的核心。证据和结论有六种状态，只能沿箭头迁移：新证据先是候选，通过准入门禁才算已验证，否则隔离。关键是依赖级联，用罗非昔布举例：账本里有两条已验证结论，A“可作关节炎长期镇痛”依据上市批准和 VIGOR 试验，B“胃肠道风险低于萘普生”只依据 VIGOR。2004 年 APPROVe 试验显示长期服用心血管风险升高，药品撤市，审查人把“上市批准”证据标为已撤销，A 自动转为有争议，B 不依赖它，保持不变。2005 年期刊对 VIGOR 发布关注声明，导入后自动扫描，B 也转为有争议。整个过程不需要人工逐条排查，每一步的原因都写入哈希链。这个例子已写成自动化测试，文献编号经 PubMed 核实。</a:t>
             </a:r>
             <a:endParaRPr lang="en-US" dirty="0"/>
           </a:p>
@@ -1395,7 +1396,7 @@
           <a:p>
             <a:r>
               <a:rPr lang="en-US" dirty="0"/>
-              <a:t>左边：意见分歧时，不靠多轮辩论说服对方，而是挑“最能分出高下”的下一次查询。图里是一个例子，先查 ChEMBL 活性数据信息量最大；工具失败只扣预算，不会被当成反对意见。右边：结论以“可能结果的集合”给出，集合里只有一个答案才下结论；两个都可能就是证据不足，空集说明情况罕见。校准后错误率有理论保证，没校准时系统会明确说明，不给虚假的可信度。</a:t>
+              <a:t>左边是信息增益取证。背景：专家意见不一时，与其多轮辩论，不如先做最能分出对错的那次查询，这是贝叶斯实验设计的思路。分歧度：把意见汇成“支持”和“反驳”的概率，用熵除以最大熵，0 是已有定论，1 是五五开。信息增益：每个查询有一张结果概率表，比如 ChEMBL 在假设成立时有 60% 的机会查到强活性，不成立时只有 10%；用它算出查询前后不确定度的预期差值，就是预期信息增益。例子是“TYK2 抑制可用于治疗银屑病”：从五五开出发，ChEMBL 的增益最大，所以先查；查到强活性后支持概率升到 0.86，再查临床试验，升到 0.95，分歧度从 1.0 降到 0.28。UniProt 增益最低，因为无论假设对错靶点几乎都能查到序列。需要说明：概率表目前是人工设定的，正式实验前要用标注数据估计。右边是共形三分判定：用一批已知结果的历史假设校准，结论以“可能成立的结果集合”给出，集合里只有一个答案才下结论；两个都可能就是证据不足。校准后错误率有统计保证，没校准时系统会明确说明。</a:t>
             </a:r>
             <a:endParaRPr lang="en-US" dirty="0"/>
           </a:p>
@@ -1645,11 +1646,11 @@
 
 <file path=ppt/slideLayouts/slideLayout2.xml><?xml version="1.0" encoding="utf-8"?>
 <p:sldLayout xmlns:a="http://schemas.openxmlformats.org/drawingml/2006/main" xmlns:r="http://schemas.openxmlformats.org/officeDocument/2006/relationships" xmlns:p="http://schemas.openxmlformats.org/presentationml/2006/main" preserve="1">
-  <p:cSld name="TITLE_DARK">
+  <p:cSld name="TITLE_LIGHT">
     <p:bg>
       <p:bgPr>
         <a:solidFill>
-          <a:srgbClr val="0F2A44"/>
+          <a:srgbClr val="FFFFFF"/>
         </a:solidFill>
       </p:bgPr>
     </p:bg>
@@ -1669,10 +1670,50 @@
       </p:grpSpPr>
       <p:sp>
         <p:nvSpPr>
-          <p:cNvPr id="2" name="Text 0"/>
+          <p:cNvPr id="2" name="Shape 0"/>
+          <p:cNvSpPr/>
+          <p:nvPr/>
+        </p:nvSpPr>
+        <p:spPr>
+          <a:xfrm>
+            <a:off x="548640" y="1783080"/>
+            <a:ext cx="1005840" cy="82296"/>
+          </a:xfrm>
+          <a:prstGeom prst="rect">
+            <a:avLst/>
+          </a:prstGeom>
+          <a:solidFill>
+            <a:srgbClr val="0E8A7E"/>
+          </a:solidFill>
+          <a:ln/>
+        </p:spPr>
+      </p:sp>
+      <p:sp>
+        <p:nvSpPr>
+          <p:cNvPr id="3" name="Shape 1"/>
+          <p:cNvSpPr/>
+          <p:nvPr/>
+        </p:nvSpPr>
+        <p:spPr>
+          <a:xfrm>
+            <a:off x="0" y="6583680"/>
+            <a:ext cx="12191695" cy="274320"/>
+          </a:xfrm>
+          <a:prstGeom prst="rect">
+            <a:avLst/>
+          </a:prstGeom>
+          <a:solidFill>
+            <a:srgbClr val="F2F5F8"/>
+          </a:solidFill>
+          <a:ln/>
+        </p:spPr>
+      </p:sp>
+      <p:sp>
+        <p:nvSpPr>
+          <p:cNvPr id="4" name="Text 2"/>
           <p:cNvSpPr/>
           <p:nvPr>
-            <p:ph idx="100" type="title" hasCustomPrompt="1"/>
+            <p:ph idx="102" type="title" hasCustomPrompt="1"/>
           </p:nvPr>
         </p:nvSpPr>
         <p:spPr>
@@ -1693,7 +1734,7 @@
               <a:buNone/>
               <a:defRPr lang="en-US" sz="4800" b="1" dirty="0">
                 <a:solidFill>
-                  <a:schemeClr val="bg1"/>
+                  <a:schemeClr val="tx2"/>
                 </a:solidFill>
               </a:defRPr>
             </a:lvl1pPr>
@@ -1708,10 +1749,10 @@
       </p:sp>
       <p:sp>
         <p:nvSpPr>
-          <p:cNvPr id="3" name="Text 0"/>
+          <p:cNvPr id="5" name="Text 2"/>
           <p:cNvSpPr/>
           <p:nvPr>
-            <p:ph idx="101" type="body" hasCustomPrompt="1"/>
+            <p:ph idx="103" type="body" hasCustomPrompt="1"/>
           </p:nvPr>
         </p:nvSpPr>
         <p:spPr>
@@ -1732,7 +1773,7 @@
               <a:buNone/>
               <a:defRPr lang="en-US" sz="2200" dirty="0">
                 <a:solidFill>
-                  <a:schemeClr val="bg1"/>
+                  <a:schemeClr val="tx1"/>
                 </a:solidFill>
               </a:defRPr>
             </a:lvl1pPr>
@@ -2287,10 +2328,10 @@
       </p:grpSpPr>
       <p:sp>
         <p:nvSpPr>
-          <p:cNvPr id="2" name="Text 0"/>
+          <p:cNvPr id="2" name="Text 2"/>
           <p:cNvSpPr/>
           <p:nvPr>
-            <p:ph idx="100" type="title" hasCustomPrompt="1"/>
+            <p:ph idx="102" type="title" hasCustomPrompt="1"/>
           </p:nvPr>
         </p:nvSpPr>
         <p:spPr>
@@ -2314,7 +2355,7 @@
             <a:r>
               <a:rPr lang="en-US" sz="4800" b="1" dirty="0">
                 <a:solidFill>
-                  <a:schemeClr val="bg1"/>
+                  <a:schemeClr val="tx2"/>
                 </a:solidFill>
               </a:rPr>
               <a:t>MedScience 3.0</a:t>
@@ -2325,10 +2366,10 @@
       </p:sp>
       <p:sp>
         <p:nvSpPr>
-          <p:cNvPr id="3" name="Text 0"/>
+          <p:cNvPr id="3" name="Text 2"/>
           <p:cNvSpPr/>
           <p:nvPr>
-            <p:ph idx="101" type="body" hasCustomPrompt="1"/>
+            <p:ph idx="103" type="body" hasCustomPrompt="1"/>
           </p:nvPr>
         </p:nvSpPr>
         <p:spPr>
@@ -2352,10 +2393,10 @@
             <a:r>
               <a:rPr lang="en-US" sz="2200" dirty="0">
                 <a:solidFill>
-                  <a:schemeClr val="bg1"/>
-                </a:solidFill>
-              </a:rPr>
-              <a:t>可信科研智能体工作站 · 设计汇报</a:t>
+                  <a:schemeClr val="tx1"/>
+                </a:solidFill>
+              </a:rPr>
+              <a:t>面向生物医学研究的科研智能体系统 · 设计汇报</a:t>
             </a:r>
             <a:endParaRPr lang="en-US" sz="2200" dirty="0"/>
           </a:p>
@@ -2366,7 +2407,7 @@
             <a:r>
               <a:rPr lang="en-US" sz="1600" dirty="0">
                 <a:solidFill>
-                  <a:srgbClr val="B9C7D6"/>
+                  <a:srgbClr val="5B6B7C"/>
                 </a:solidFill>
               </a:rPr>
               <a:t>让每一个科研结论都有据可查、可以撤回、说得清可信度</a:t>
@@ -2402,7 +2443,7 @@
             <a:r>
               <a:rPr lang="en-US" sz="1300" dirty="0">
                 <a:solidFill>
-                  <a:srgbClr val="B9C7D6"/>
+                  <a:schemeClr val="accent6"/>
                 </a:solidFill>
               </a:rPr>
               <a:t>2026 年 10 月  ·  版本 v3.0.0（预发布）</a:t>
@@ -2514,7 +2555,7 @@
       </p:sp>
       <p:sp>
         <p:nvSpPr>
-          <p:cNvPr id="4" name="card-204"/>
+          <p:cNvPr id="4" name="card-220"/>
           <p:cNvSpPr/>
           <p:nvPr/>
         </p:nvSpPr>
@@ -2541,7 +2582,7 @@
       </p:sp>
       <p:sp>
         <p:nvSpPr>
-          <p:cNvPr id="5" name="badge-205"/>
+          <p:cNvPr id="5" name="badge-221"/>
           <p:cNvSpPr/>
           <p:nvPr/>
         </p:nvSpPr>
@@ -2583,7 +2624,7 @@
       </p:sp>
       <p:sp>
         <p:nvSpPr>
-          <p:cNvPr id="6" name="label-206"/>
+          <p:cNvPr id="6" name="label-222"/>
           <p:cNvSpPr txBox="1"/>
           <p:nvPr/>
         </p:nvSpPr>
@@ -2619,7 +2660,7 @@
       </p:sp>
       <p:sp>
         <p:nvSpPr>
-          <p:cNvPr id="7" name="bullets-207"/>
+          <p:cNvPr id="7" name="bullets-223"/>
           <p:cNvSpPr txBox="1"/>
           <p:nvPr/>
         </p:nvSpPr>
@@ -2713,7 +2754,7 @@
       </p:sp>
       <p:sp>
         <p:nvSpPr>
-          <p:cNvPr id="8" name="card-208"/>
+          <p:cNvPr id="8" name="card-224"/>
           <p:cNvSpPr/>
           <p:nvPr/>
         </p:nvSpPr>
@@ -2740,7 +2781,7 @@
       </p:sp>
       <p:sp>
         <p:nvSpPr>
-          <p:cNvPr id="9" name="badge-209"/>
+          <p:cNvPr id="9" name="badge-225"/>
           <p:cNvSpPr/>
           <p:nvPr/>
         </p:nvSpPr>
@@ -2782,7 +2823,7 @@
       </p:sp>
       <p:sp>
         <p:nvSpPr>
-          <p:cNvPr id="10" name="label-210"/>
+          <p:cNvPr id="10" name="label-226"/>
           <p:cNvSpPr txBox="1"/>
           <p:nvPr/>
         </p:nvSpPr>
@@ -2818,7 +2859,7 @@
       </p:sp>
       <p:sp>
         <p:nvSpPr>
-          <p:cNvPr id="11" name="bullets-211"/>
+          <p:cNvPr id="11" name="bullets-227"/>
           <p:cNvSpPr txBox="1"/>
           <p:nvPr/>
         </p:nvSpPr>
@@ -2894,7 +2935,7 @@
       </p:sp>
       <p:sp>
         <p:nvSpPr>
-          <p:cNvPr id="12" name="card-212"/>
+          <p:cNvPr id="12" name="card-228"/>
           <p:cNvSpPr/>
           <p:nvPr/>
         </p:nvSpPr>
@@ -2921,7 +2962,7 @@
       </p:sp>
       <p:sp>
         <p:nvSpPr>
-          <p:cNvPr id="13" name="badge-213"/>
+          <p:cNvPr id="13" name="badge-229"/>
           <p:cNvSpPr/>
           <p:nvPr/>
         </p:nvSpPr>
@@ -2963,7 +3004,7 @@
       </p:sp>
       <p:sp>
         <p:nvSpPr>
-          <p:cNvPr id="14" name="label-214"/>
+          <p:cNvPr id="14" name="label-230"/>
           <p:cNvSpPr txBox="1"/>
           <p:nvPr/>
         </p:nvSpPr>
@@ -2999,7 +3040,7 @@
       </p:sp>
       <p:sp>
         <p:nvSpPr>
-          <p:cNvPr id="15" name="bullets-215"/>
+          <p:cNvPr id="15" name="bullets-231"/>
           <p:cNvSpPr txBox="1"/>
           <p:nvPr/>
         </p:nvSpPr>
@@ -3075,7 +3116,7 @@
       </p:sp>
       <p:sp>
         <p:nvSpPr>
-          <p:cNvPr id="16" name="ask-216"/>
+          <p:cNvPr id="16" name="ask-232"/>
           <p:cNvSpPr/>
           <p:nvPr/>
         </p:nvSpPr>
@@ -3102,7 +3143,7 @@
       </p:sp>
       <p:sp>
         <p:nvSpPr>
-          <p:cNvPr id="17" name="label-217"/>
+          <p:cNvPr id="17" name="label-233"/>
           <p:cNvSpPr txBox="1"/>
           <p:nvPr/>
         </p:nvSpPr>
@@ -3276,7 +3317,7 @@
                   <a:schemeClr val="accent6"/>
                 </a:solidFill>
               </a:rPr>
-              <a:t>一句话：让 AI 科研助手的结论有证据、能撤回、说得清可信度，并且数据不出本机。</a:t>
+              <a:t>一句话：面向生物医学研究——让科研结论有证据、能撤回、说得清可信度，科研数据不出本机。</a:t>
             </a:r>
             <a:endParaRPr lang="en-US" sz="1500" dirty="0"/>
           </a:p>
@@ -3417,7 +3458,7 @@
                   <a:schemeClr val="tx1"/>
                 </a:solidFill>
               </a:rPr>
-              <a:t>AI 科研助手能很快给出结论，但结论依据什么、依据失效后怎么办、可信度到底多高，往往说不清。</a:t>
+              <a:t>AI 能很快给出科研结论，但依据哪些文献和数据、依据被新研究推翻后怎么办、可信度多高，往往说不清。</a:t>
             </a:r>
             <a:endParaRPr lang="en-US" sz="1500" dirty="0"/>
           </a:p>
@@ -3558,7 +3599,7 @@
                   <a:schemeClr val="tx1"/>
                 </a:solidFill>
               </a:rPr>
-              <a:t>三类设计：证据治理（结论必须挂靠已验证的证据）、多智能体协作（专家分工、审查把关）、本地运行（数据在本机，复用已有 AI 订阅）。</a:t>
+              <a:t>三类设计：证据治理（结论必须挂靠已验证的文献与数据库证据）、多智能体协作（像课题组一样分工、审查把关）、本地运行（科研与临床数据留在本机）。</a:t>
             </a:r>
             <a:endParaRPr lang="en-US" sz="1500" dirty="0"/>
           </a:p>
@@ -3843,7 +3884,7 @@
                   <a:schemeClr val="accent6"/>
                 </a:solidFill>
               </a:rPr>
-              <a:t>领域专家角色</a:t>
+              <a:t>科研领域专家角色</a:t>
             </a:r>
             <a:endParaRPr lang="en-US" sz="1300" dirty="0"/>
           </a:p>
@@ -4095,7 +4136,7 @@
                   <a:schemeClr val="tx2"/>
                 </a:solidFill>
               </a:rPr>
-              <a:t>问题与定位：四个痛点，同类方案与我们的不同回应</a:t>
+              <a:t>问题与定位：科研场景的四个痛点</a:t>
             </a:r>
             <a:endParaRPr lang="en-US" sz="2800" dirty="0"/>
           </a:p>
@@ -4133,7 +4174,7 @@
                   <a:schemeClr val="accent6"/>
                 </a:solidFill>
               </a:rPr>
-              <a:t>同类系统各有所长；MedScience 的差异在于“结论治理”与“本地可用”。</a:t>
+              <a:t>同类科研智能体各有所长；MedScience 的差异在于“结论治理”与“本地可用”。</a:t>
             </a:r>
             <a:endParaRPr lang="en-US" sz="1500" dirty="0"/>
           </a:p>
@@ -4411,7 +4452,7 @@
                           <a:ea typeface="Microsoft YaHei" pitchFamily="34" charset="-122"/>
                           <a:cs typeface="Microsoft YaHei" pitchFamily="34" charset="-120"/>
                         </a:rPr>
-                        <a:t>引用的论文后来被撤稿，结论仍被反复使用</a:t>
+                        <a:t>依据的试验或数据被新研究推翻，结论仍被反复引用</a:t>
                       </a:r>
                       <a:endParaRPr lang="en-US" sz="1300" dirty="0">
                         <a:latin typeface="Microsoft YaHei" charset="0"/>
@@ -4638,7 +4679,7 @@
                           <a:ea typeface="Microsoft YaHei" pitchFamily="34" charset="-122"/>
                           <a:cs typeface="Microsoft YaHei" pitchFamily="34" charset="-120"/>
                         </a:rPr>
-                        <a:t>② “多问几个 AI”不等于更可靠</a:t>
+                        <a:t>② 专家意见分歧时，下一步查什么</a:t>
                       </a:r>
                       <a:endParaRPr lang="en-US" sz="1300" dirty="0">
                         <a:latin typeface="Microsoft YaHei" charset="0"/>
@@ -4659,7 +4700,7 @@
                           <a:ea typeface="Microsoft YaHei" pitchFamily="34" charset="-122"/>
                           <a:cs typeface="Microsoft YaHei" pitchFamily="34" charset="-120"/>
                         </a:rPr>
-                        <a:t>智能体易互相附和，多轮讨论耗算力</a:t>
+                        <a:t>多轮辩论易互相附和，且耗算力</a:t>
                       </a:r>
                       <a:endParaRPr lang="en-US" sz="1300" dirty="0">
                         <a:latin typeface="Microsoft YaHei" charset="0"/>
@@ -4886,7 +4927,7 @@
                           <a:ea typeface="Microsoft YaHei" pitchFamily="34" charset="-122"/>
                           <a:cs typeface="Microsoft YaHei" pitchFamily="34" charset="-120"/>
                         </a:rPr>
-                        <a:t>③ 可信度说不清</a:t>
+                        <a:t>③ 假设成立与否，可信度说不清</a:t>
                       </a:r>
                       <a:endParaRPr lang="en-US" sz="1300" dirty="0">
                         <a:latin typeface="Microsoft YaHei" charset="0"/>
@@ -5523,7 +5564,7 @@
                   <a:schemeClr val="accent6"/>
                 </a:solidFill>
               </a:rPr>
-              <a:t>均为智能体系统层面的架构设计，不修改基础大模型；底层模型可以随时替换。</a:t>
+              <a:t>均为科研智能体系统层面的架构设计，不修改基础大模型；底层模型可以随时替换。</a:t>
             </a:r>
             <a:endParaRPr lang="en-US" sz="1500" dirty="0"/>
           </a:p>
@@ -6727,7 +6768,7 @@
                   <a:schemeClr val="tx1"/>
                 </a:solidFill>
               </a:rPr>
-              <a:t>科研工具连接器</a:t>
+              <a:t>科研数据库连接器</a:t>
             </a:r>
             <a:endParaRPr lang="en-US" sz="1250" dirty="0"/>
           </a:p>
@@ -7269,7 +7310,7 @@
                   <a:schemeClr val="tx2"/>
                 </a:solidFill>
               </a:rPr>
-              <a:t>一次研究提问的数据流转</a:t>
+              <a:t>一次科研提问的数据流转</a:t>
             </a:r>
             <a:endParaRPr lang="en-US" sz="2800" dirty="0"/>
           </a:p>
@@ -7307,7 +7348,7 @@
                   <a:schemeClr val="accent6"/>
                 </a:solidFill>
               </a:rPr>
-              <a:t>每一步都留下记录；依据失效时，结论会被“追回”。</a:t>
+              <a:t>每一步都留下记录；依据被新研究推翻时，结论会被“追回”。</a:t>
             </a:r>
             <a:endParaRPr lang="en-US" sz="1500" dirty="0"/>
           </a:p>
@@ -8577,7 +8618,7 @@
                   <a:schemeClr val="tx2"/>
                 </a:solidFill>
               </a:rPr>
-              <a:t>依据失效时的回路（撤稿 / 关注声明）</a:t>
+              <a:t>依据被推翻时的回路</a:t>
             </a:r>
             <a:endParaRPr lang="en-US" sz="1500" dirty="0"/>
           </a:p>
@@ -8621,7 +8662,7 @@
                   <a:schemeClr val="tx1"/>
                 </a:solidFill>
               </a:rPr>
-              <a:t>导入撤稿数据</a:t>
+              <a:t>新研究推翻依据</a:t>
             </a:r>
             <a:endParaRPr lang="en-US" sz="1300" dirty="0"/>
           </a:p>
@@ -8635,7 +8676,7 @@
                   <a:schemeClr val="tx1"/>
                 </a:solidFill>
               </a:rPr>
-              <a:t>（Retraction Watch 等）</a:t>
+              <a:t>（如药品撤市、新试验结果）</a:t>
             </a:r>
             <a:endParaRPr lang="en-US" sz="1300" dirty="0"/>
           </a:p>
@@ -8703,7 +8744,21 @@
                   <a:schemeClr val="tx1"/>
                 </a:solidFill>
               </a:rPr>
-              <a:t>扫描整个证据账本</a:t>
+              <a:t>在账本中标记该证据</a:t>
+            </a:r>
+            <a:endParaRPr lang="en-US" sz="1300" dirty="0"/>
+          </a:p>
+          <a:p>
+            <a:pPr algn="ctr" indent="0" marL="0">
+              <a:buNone/>
+            </a:pPr>
+            <a:r>
+              <a:rPr lang="en-US" sz="1300" dirty="0">
+                <a:solidFill>
+                  <a:schemeClr val="tx1"/>
+                </a:solidFill>
+              </a:rPr>
+              <a:t>（审查人标注 / 自动扫描）</a:t>
             </a:r>
             <a:endParaRPr lang="en-US" sz="1300" dirty="0"/>
           </a:p>
@@ -8771,7 +8826,21 @@
                   <a:schemeClr val="tx1"/>
                 </a:solidFill>
               </a:rPr>
-              <a:t>相关证据：撤销 / 标为有争议</a:t>
+              <a:t>依赖它的结论：</a:t>
+            </a:r>
+            <a:endParaRPr lang="en-US" sz="1300" dirty="0"/>
+          </a:p>
+          <a:p>
+            <a:pPr algn="ctr" indent="0" marL="0">
+              <a:buNone/>
+            </a:pPr>
+            <a:r>
+              <a:rPr lang="en-US" sz="1300" dirty="0">
+                <a:solidFill>
+                  <a:schemeClr val="tx1"/>
+                </a:solidFill>
+              </a:rPr>
+              <a:t>自动转为“有争议”</a:t>
             </a:r>
             <a:endParaRPr lang="en-US" sz="1300" dirty="0"/>
           </a:p>
@@ -8839,7 +8908,7 @@
                   <a:schemeClr val="tx1"/>
                 </a:solidFill>
               </a:rPr>
-              <a:t>依赖它的结论：</a:t>
+              <a:t>提示复核：重新论证，</a:t>
             </a:r>
             <a:endParaRPr lang="en-US" sz="1300" dirty="0"/>
           </a:p>
@@ -8853,7 +8922,7 @@
                   <a:schemeClr val="tx1"/>
                 </a:solidFill>
               </a:rPr>
-              <a:t>自动转为“有争议”</a:t>
+              <a:t>或以新结论取代</a:t>
             </a:r>
             <a:endParaRPr lang="en-US" sz="1300" dirty="0"/>
           </a:p>
@@ -8889,7 +8958,7 @@
                   <a:schemeClr val="accent6"/>
                 </a:solidFill>
               </a:rPr>
-              <a:t>同一次操作完成，并写入哈希链记录原因；恢复证据不会自动恢复结论，需要重新核验。</a:t>
+              <a:t>例：2004 年罗非昔布（Vioxx）因 APPROVe 试验显示心血管风险升高而撤市 → “上市批准”证据被撤销 → “可用于关节炎长期镇痛”的结论自动降级。</a:t>
             </a:r>
             <a:endParaRPr lang="en-US" sz="1150" dirty="0"/>
           </a:p>
@@ -9035,7 +9104,7 @@
                   <a:schemeClr val="accent6"/>
                 </a:solidFill>
               </a:rPr>
-              <a:t>A 类设计点 ①：每条证据经准入门禁才算数；依据失效，结论自动降级。</a:t>
+              <a:t>A 类设计点 ①：每条证据经准入门禁才算数；依据被推翻，结论自动降级。</a:t>
             </a:r>
             <a:endParaRPr lang="en-US" sz="1500" dirty="0"/>
           </a:p>
@@ -9363,7 +9432,7 @@
                   <a:schemeClr val="accent6"/>
                 </a:solidFill>
               </a:rPr>
-              <a:t>来源撤稿</a:t>
+              <a:t>撤市 / 撤稿</a:t>
             </a:r>
             <a:endParaRPr lang="en-US" sz="1100" dirty="0"/>
           </a:p>
@@ -9673,12 +9742,12 @@
         </p:nvSpPr>
         <p:spPr>
           <a:xfrm>
-            <a:off x="548640" y="4800600"/>
-            <a:ext cx="6400800" cy="1188720"/>
+            <a:off x="548640" y="4590288"/>
+            <a:ext cx="6400800" cy="1737360"/>
           </a:xfrm>
           <a:prstGeom prst="roundRect">
             <a:avLst>
-              <a:gd name="adj" fmla="val 7692"/>
+              <a:gd name="adj" fmla="val 5263"/>
             </a:avLst>
           </a:prstGeom>
           <a:solidFill>
@@ -9700,8 +9769,8 @@
         </p:nvSpPr>
         <p:spPr>
           <a:xfrm>
-            <a:off x="777240" y="4919472"/>
-            <a:ext cx="5943600" cy="320040"/>
+            <a:off x="777240" y="4681728"/>
+            <a:ext cx="4206240" cy="292608"/>
           </a:xfrm>
           <a:prstGeom prst="rect">
             <a:avLst/>
@@ -9710,7 +9779,7 @@
           <a:ln/>
         </p:spPr>
         <p:txBody>
-          <a:bodyPr wrap="square" lIns="0" tIns="0" rIns="0" bIns="0" rtlCol="0" anchor="t"/>
+          <a:bodyPr wrap="square" lIns="0" tIns="0" rIns="0" bIns="0" rtlCol="0" anchor="ctr"/>
           <a:lstStyle/>
           <a:p>
             <a:pPr algn="l" indent="0" marL="0">
@@ -9722,7 +9791,7 @@
                   <a:schemeClr val="tx2"/>
                 </a:solidFill>
               </a:rPr>
-              <a:t>举例：一篇论文被撤稿</a:t>
+              <a:t>举例：罗非昔布（Vioxx）的两条结论</a:t>
             </a:r>
             <a:endParaRPr lang="en-US" sz="1400" dirty="0"/>
           </a:p>
@@ -9736,8 +9805,8 @@
         </p:nvSpPr>
         <p:spPr>
           <a:xfrm>
-            <a:off x="777240" y="5285232"/>
-            <a:ext cx="5943600" cy="640080"/>
+            <a:off x="4754880" y="4681728"/>
+            <a:ext cx="1965960" cy="292608"/>
           </a:xfrm>
           <a:prstGeom prst="rect">
             <a:avLst/>
@@ -9746,27 +9815,1197 @@
           <a:ln/>
         </p:spPr>
         <p:txBody>
-          <a:bodyPr wrap="square" lIns="0" tIns="0" rIns="0" bIns="0" rtlCol="0" anchor="t"/>
-          <a:lstStyle/>
-          <a:p>
-            <a:pPr algn="l" indent="0" marL="0">
-              <a:buNone/>
-            </a:pPr>
-            <a:r>
-              <a:rPr lang="en-US" sz="1300" dirty="0">
+          <a:bodyPr wrap="square" lIns="0" tIns="0" rIns="0" bIns="0" rtlCol="0" anchor="ctr"/>
+          <a:lstStyle/>
+          <a:p>
+            <a:pPr algn="r" indent="0" marL="0">
+              <a:buNone/>
+            </a:pPr>
+            <a:r>
+              <a:rPr lang="en-US" sz="1050" dirty="0">
                 <a:solidFill>
                   <a:schemeClr val="accent6"/>
                 </a:solidFill>
               </a:rPr>
-              <a:t>该证据转为“已撤销” → 引用它的所有已验证结论，在同一次操作中转为“有争议”，并记录原因。测试用例中，受影响的已验证结论由 2 条降为 0 条。</a:t>
-            </a:r>
-            <a:endParaRPr lang="en-US" sz="1300" dirty="0"/>
-          </a:p>
-        </p:txBody>
-      </p:sp>
-      <p:sp>
-        <p:nvSpPr>
-          <p:cNvPr id="25" name="badge-129"/>
+              <a:t>已写成自动化测试</a:t>
+            </a:r>
+            <a:endParaRPr lang="en-US" sz="1050" dirty="0"/>
+          </a:p>
+        </p:txBody>
+      </p:sp>
+      <p:graphicFrame>
+        <p:nvGraphicFramePr>
+          <p:cNvPr id="7" name="table-129"/>
+          <p:cNvGraphicFramePr>
+            <a:graphicFrameLocks noGrp="1"/>
+          </p:cNvGraphicFramePr>
+          <p:nvPr>
+            <p:extLst>
+              <p:ext uri="{D42A27DB-BD31-4B8C-83A1-F6EECF244321}">
+                <p14:modId xmlns:p14="http://schemas.microsoft.com/office/powerpoint/2010/main" val="1579011935"/>
+              </p:ext>
+            </p:extLst>
+          </p:nvPr>
+        </p:nvGraphicFramePr>
+        <p:xfrm>
+          <a:off x="777240" y="5029200"/>
+          <a:ext cx="5943600" cy="914400"/>
+        </p:xfrm>
+        <a:graphic>
+          <a:graphicData uri="http://schemas.openxmlformats.org/drawingml/2006/table">
+            <a:tbl>
+              <a:tblPr/>
+              <a:tblGrid>
+                <a:gridCol w="960120"/>
+                <a:gridCol w="2057400"/>
+                <a:gridCol w="1280160"/>
+                <a:gridCol w="1645920"/>
+              </a:tblGrid>
+              <a:tr h="420624">
+                <a:tc>
+                  <a:txBody>
+                    <a:bodyPr/>
+                    <a:lstStyle/>
+                    <a:p>
+                      <a:pPr indent="0" marL="0">
+                        <a:buNone/>
+                      </a:pPr>
+                      <a:r>
+                        <a:rPr lang="en-US" sz="1050" b="1" dirty="0">
+                          <a:solidFill>
+                            <a:srgbClr val="0F2A44"/>
+                          </a:solidFill>
+                          <a:latin typeface="Microsoft YaHei" pitchFamily="34" charset="0"/>
+                          <a:ea typeface="Microsoft YaHei" pitchFamily="34" charset="-122"/>
+                          <a:cs typeface="Microsoft YaHei" pitchFamily="34" charset="-120"/>
+                        </a:rPr>
+                        <a:t>时间</a:t>
+                      </a:r>
+                      <a:endParaRPr lang="en-US" sz="1050" dirty="0">
+                        <a:latin typeface="Microsoft YaHei" charset="0"/>
+                        <a:ea typeface="Microsoft YaHei" charset="0"/>
+                        <a:cs typeface="Microsoft YaHei" charset="0"/>
+                      </a:endParaRPr>
+                    </a:p>
+                  </a:txBody>
+                  <a:tcPr marL="54864" marR="54864" marT="18288" marB="18288" anchor="ctr">
+                    <a:lnL w="6350" cap="flat" cmpd="sng" algn="ctr">
+                      <a:solidFill>
+                        <a:srgbClr val="E6D3BC"/>
+                      </a:solidFill>
+                      <a:prstDash val="solid"/>
+                      <a:round/>
+                      <a:headEnd type="none" w="med" len="med"/>
+                      <a:tailEnd type="none" w="med" len="med"/>
+                    </a:lnL>
+                    <a:lnR w="6350" cap="flat" cmpd="sng" algn="ctr">
+                      <a:solidFill>
+                        <a:srgbClr val="E6D3BC"/>
+                      </a:solidFill>
+                      <a:prstDash val="solid"/>
+                      <a:round/>
+                      <a:headEnd type="none" w="med" len="med"/>
+                      <a:tailEnd type="none" w="med" len="med"/>
+                    </a:lnR>
+                    <a:lnT w="6350" cap="flat" cmpd="sng" algn="ctr">
+                      <a:solidFill>
+                        <a:srgbClr val="E6D3BC"/>
+                      </a:solidFill>
+                      <a:prstDash val="solid"/>
+                      <a:round/>
+                      <a:headEnd type="none" w="med" len="med"/>
+                      <a:tailEnd type="none" w="med" len="med"/>
+                    </a:lnT>
+                    <a:lnB w="6350" cap="flat" cmpd="sng" algn="ctr">
+                      <a:solidFill>
+                        <a:srgbClr val="E6D3BC"/>
+                      </a:solidFill>
+                      <a:prstDash val="solid"/>
+                      <a:round/>
+                      <a:headEnd type="none" w="med" len="med"/>
+                      <a:tailEnd type="none" w="med" len="med"/>
+                    </a:lnB>
+                    <a:solidFill>
+                      <a:srgbClr val="F3E3CF"/>
+                    </a:solidFill>
+                  </a:tcPr>
+                </a:tc>
+                <a:tc>
+                  <a:txBody>
+                    <a:bodyPr/>
+                    <a:lstStyle/>
+                    <a:p>
+                      <a:pPr indent="0" marL="0">
+                        <a:buNone/>
+                      </a:pPr>
+                      <a:r>
+                        <a:rPr lang="en-US" sz="1050" b="1" dirty="0">
+                          <a:solidFill>
+                            <a:srgbClr val="0F2A44"/>
+                          </a:solidFill>
+                          <a:latin typeface="Microsoft YaHei" pitchFamily="34" charset="0"/>
+                          <a:ea typeface="Microsoft YaHei" pitchFamily="34" charset="-122"/>
+                          <a:cs typeface="Microsoft YaHei" pitchFamily="34" charset="-120"/>
+                        </a:rPr>
+                        <a:t>事件</a:t>
+                      </a:r>
+                      <a:endParaRPr lang="en-US" sz="1050" dirty="0">
+                        <a:latin typeface="Microsoft YaHei" charset="0"/>
+                        <a:ea typeface="Microsoft YaHei" charset="0"/>
+                        <a:cs typeface="Microsoft YaHei" charset="0"/>
+                      </a:endParaRPr>
+                    </a:p>
+                  </a:txBody>
+                  <a:tcPr marL="54864" marR="54864" marT="18288" marB="18288" anchor="ctr">
+                    <a:lnL w="6350" cap="flat" cmpd="sng" algn="ctr">
+                      <a:solidFill>
+                        <a:srgbClr val="E6D3BC"/>
+                      </a:solidFill>
+                      <a:prstDash val="solid"/>
+                      <a:round/>
+                      <a:headEnd type="none" w="med" len="med"/>
+                      <a:tailEnd type="none" w="med" len="med"/>
+                    </a:lnL>
+                    <a:lnR w="6350" cap="flat" cmpd="sng" algn="ctr">
+                      <a:solidFill>
+                        <a:srgbClr val="E6D3BC"/>
+                      </a:solidFill>
+                      <a:prstDash val="solid"/>
+                      <a:round/>
+                      <a:headEnd type="none" w="med" len="med"/>
+                      <a:tailEnd type="none" w="med" len="med"/>
+                    </a:lnR>
+                    <a:lnT w="6350" cap="flat" cmpd="sng" algn="ctr">
+                      <a:solidFill>
+                        <a:srgbClr val="E6D3BC"/>
+                      </a:solidFill>
+                      <a:prstDash val="solid"/>
+                      <a:round/>
+                      <a:headEnd type="none" w="med" len="med"/>
+                      <a:tailEnd type="none" w="med" len="med"/>
+                    </a:lnT>
+                    <a:lnB w="6350" cap="flat" cmpd="sng" algn="ctr">
+                      <a:solidFill>
+                        <a:srgbClr val="E6D3BC"/>
+                      </a:solidFill>
+                      <a:prstDash val="solid"/>
+                      <a:round/>
+                      <a:headEnd type="none" w="med" len="med"/>
+                      <a:tailEnd type="none" w="med" len="med"/>
+                    </a:lnB>
+                    <a:solidFill>
+                      <a:srgbClr val="F3E3CF"/>
+                    </a:solidFill>
+                  </a:tcPr>
+                </a:tc>
+                <a:tc>
+                  <a:txBody>
+                    <a:bodyPr/>
+                    <a:lstStyle/>
+                    <a:p>
+                      <a:pPr indent="0" marL="0">
+                        <a:buNone/>
+                      </a:pPr>
+                      <a:r>
+                        <a:rPr lang="en-US" sz="1050" b="1" dirty="0">
+                          <a:solidFill>
+                            <a:srgbClr val="0F2A44"/>
+                          </a:solidFill>
+                          <a:latin typeface="Microsoft YaHei" pitchFamily="34" charset="0"/>
+                          <a:ea typeface="Microsoft YaHei" pitchFamily="34" charset="-122"/>
+                          <a:cs typeface="Microsoft YaHei" pitchFamily="34" charset="-120"/>
+                        </a:rPr>
+                        <a:t>结论 A</a:t>
+                      </a:r>
+                      <a:endParaRPr lang="en-US" sz="1050" dirty="0">
+                        <a:latin typeface="Microsoft YaHei" charset="0"/>
+                        <a:ea typeface="Microsoft YaHei" charset="0"/>
+                        <a:cs typeface="Microsoft YaHei" charset="0"/>
+                      </a:endParaRPr>
+                    </a:p>
+                    <a:p>
+                      <a:pPr indent="0" marL="0">
+                        <a:buNone/>
+                      </a:pPr>
+                      <a:r>
+                        <a:rPr lang="en-US" sz="1050" b="1" dirty="0">
+                          <a:solidFill>
+                            <a:srgbClr val="0F2A44"/>
+                          </a:solidFill>
+                          <a:latin typeface="Microsoft YaHei" pitchFamily="34" charset="0"/>
+                          <a:ea typeface="Microsoft YaHei" pitchFamily="34" charset="-122"/>
+                          <a:cs typeface="Microsoft YaHei" pitchFamily="34" charset="-120"/>
+                        </a:rPr>
+                        <a:t>关节炎长期镇痛</a:t>
+                      </a:r>
+                      <a:endParaRPr lang="en-US" sz="1050" dirty="0">
+                        <a:latin typeface="Microsoft YaHei" charset="0"/>
+                        <a:ea typeface="Microsoft YaHei" charset="0"/>
+                        <a:cs typeface="Microsoft YaHei" charset="0"/>
+                      </a:endParaRPr>
+                    </a:p>
+                  </a:txBody>
+                  <a:tcPr marL="54864" marR="54864" marT="18288" marB="18288" anchor="ctr">
+                    <a:lnL w="6350" cap="flat" cmpd="sng" algn="ctr">
+                      <a:solidFill>
+                        <a:srgbClr val="E6D3BC"/>
+                      </a:solidFill>
+                      <a:prstDash val="solid"/>
+                      <a:round/>
+                      <a:headEnd type="none" w="med" len="med"/>
+                      <a:tailEnd type="none" w="med" len="med"/>
+                    </a:lnL>
+                    <a:lnR w="6350" cap="flat" cmpd="sng" algn="ctr">
+                      <a:solidFill>
+                        <a:srgbClr val="E6D3BC"/>
+                      </a:solidFill>
+                      <a:prstDash val="solid"/>
+                      <a:round/>
+                      <a:headEnd type="none" w="med" len="med"/>
+                      <a:tailEnd type="none" w="med" len="med"/>
+                    </a:lnR>
+                    <a:lnT w="6350" cap="flat" cmpd="sng" algn="ctr">
+                      <a:solidFill>
+                        <a:srgbClr val="E6D3BC"/>
+                      </a:solidFill>
+                      <a:prstDash val="solid"/>
+                      <a:round/>
+                      <a:headEnd type="none" w="med" len="med"/>
+                      <a:tailEnd type="none" w="med" len="med"/>
+                    </a:lnT>
+                    <a:lnB w="6350" cap="flat" cmpd="sng" algn="ctr">
+                      <a:solidFill>
+                        <a:srgbClr val="E6D3BC"/>
+                      </a:solidFill>
+                      <a:prstDash val="solid"/>
+                      <a:round/>
+                      <a:headEnd type="none" w="med" len="med"/>
+                      <a:tailEnd type="none" w="med" len="med"/>
+                    </a:lnB>
+                    <a:solidFill>
+                      <a:srgbClr val="F3E3CF"/>
+                    </a:solidFill>
+                  </a:tcPr>
+                </a:tc>
+                <a:tc>
+                  <a:txBody>
+                    <a:bodyPr/>
+                    <a:lstStyle/>
+                    <a:p>
+                      <a:pPr indent="0" marL="0">
+                        <a:buNone/>
+                      </a:pPr>
+                      <a:r>
+                        <a:rPr lang="en-US" sz="1050" b="1" dirty="0">
+                          <a:solidFill>
+                            <a:srgbClr val="0F2A44"/>
+                          </a:solidFill>
+                          <a:latin typeface="Microsoft YaHei" pitchFamily="34" charset="0"/>
+                          <a:ea typeface="Microsoft YaHei" pitchFamily="34" charset="-122"/>
+                          <a:cs typeface="Microsoft YaHei" pitchFamily="34" charset="-120"/>
+                        </a:rPr>
+                        <a:t>结论 B</a:t>
+                      </a:r>
+                      <a:endParaRPr lang="en-US" sz="1050" dirty="0">
+                        <a:latin typeface="Microsoft YaHei" charset="0"/>
+                        <a:ea typeface="Microsoft YaHei" charset="0"/>
+                        <a:cs typeface="Microsoft YaHei" charset="0"/>
+                      </a:endParaRPr>
+                    </a:p>
+                    <a:p>
+                      <a:pPr indent="0" marL="0">
+                        <a:buNone/>
+                      </a:pPr>
+                      <a:r>
+                        <a:rPr lang="en-US" sz="1050" b="1" dirty="0">
+                          <a:solidFill>
+                            <a:srgbClr val="0F2A44"/>
+                          </a:solidFill>
+                          <a:latin typeface="Microsoft YaHei" pitchFamily="34" charset="0"/>
+                          <a:ea typeface="Microsoft YaHei" pitchFamily="34" charset="-122"/>
+                          <a:cs typeface="Microsoft YaHei" pitchFamily="34" charset="-120"/>
+                        </a:rPr>
+                        <a:t>胃肠道风险低于萘普生</a:t>
+                      </a:r>
+                      <a:endParaRPr lang="en-US" sz="1050" dirty="0">
+                        <a:latin typeface="Microsoft YaHei" charset="0"/>
+                        <a:ea typeface="Microsoft YaHei" charset="0"/>
+                        <a:cs typeface="Microsoft YaHei" charset="0"/>
+                      </a:endParaRPr>
+                    </a:p>
+                  </a:txBody>
+                  <a:tcPr marL="54864" marR="54864" marT="18288" marB="18288" anchor="ctr">
+                    <a:lnL w="6350" cap="flat" cmpd="sng" algn="ctr">
+                      <a:solidFill>
+                        <a:srgbClr val="E6D3BC"/>
+                      </a:solidFill>
+                      <a:prstDash val="solid"/>
+                      <a:round/>
+                      <a:headEnd type="none" w="med" len="med"/>
+                      <a:tailEnd type="none" w="med" len="med"/>
+                    </a:lnL>
+                    <a:lnR w="6350" cap="flat" cmpd="sng" algn="ctr">
+                      <a:solidFill>
+                        <a:srgbClr val="E6D3BC"/>
+                      </a:solidFill>
+                      <a:prstDash val="solid"/>
+                      <a:round/>
+                      <a:headEnd type="none" w="med" len="med"/>
+                      <a:tailEnd type="none" w="med" len="med"/>
+                    </a:lnR>
+                    <a:lnT w="6350" cap="flat" cmpd="sng" algn="ctr">
+                      <a:solidFill>
+                        <a:srgbClr val="E6D3BC"/>
+                      </a:solidFill>
+                      <a:prstDash val="solid"/>
+                      <a:round/>
+                      <a:headEnd type="none" w="med" len="med"/>
+                      <a:tailEnd type="none" w="med" len="med"/>
+                    </a:lnT>
+                    <a:lnB w="6350" cap="flat" cmpd="sng" algn="ctr">
+                      <a:solidFill>
+                        <a:srgbClr val="E6D3BC"/>
+                      </a:solidFill>
+                      <a:prstDash val="solid"/>
+                      <a:round/>
+                      <a:headEnd type="none" w="med" len="med"/>
+                      <a:tailEnd type="none" w="med" len="med"/>
+                    </a:lnB>
+                    <a:solidFill>
+                      <a:srgbClr val="F3E3CF"/>
+                    </a:solidFill>
+                  </a:tcPr>
+                </a:tc>
+              </a:tr>
+              <a:tr h="265176">
+                <a:tc>
+                  <a:txBody>
+                    <a:bodyPr/>
+                    <a:lstStyle/>
+                    <a:p>
+                      <a:pPr indent="0" marL="0">
+                        <a:buNone/>
+                      </a:pPr>
+                      <a:r>
+                        <a:rPr lang="en-US" sz="1050" dirty="0">
+                          <a:solidFill>
+                            <a:srgbClr val="1B2533"/>
+                          </a:solidFill>
+                          <a:latin typeface="Microsoft YaHei" pitchFamily="34" charset="0"/>
+                          <a:ea typeface="Microsoft YaHei" pitchFamily="34" charset="-122"/>
+                          <a:cs typeface="Microsoft YaHei" pitchFamily="34" charset="-120"/>
+                        </a:rPr>
+                        <a:t>1999–2000</a:t>
+                      </a:r>
+                      <a:endParaRPr lang="en-US" sz="1050" dirty="0">
+                        <a:latin typeface="Microsoft YaHei" charset="0"/>
+                        <a:ea typeface="Microsoft YaHei" charset="0"/>
+                        <a:cs typeface="Microsoft YaHei" charset="0"/>
+                      </a:endParaRPr>
+                    </a:p>
+                  </a:txBody>
+                  <a:tcPr marL="54864" marR="54864" marT="18288" marB="18288" anchor="ctr">
+                    <a:lnL w="6350" cap="flat" cmpd="sng" algn="ctr">
+                      <a:solidFill>
+                        <a:srgbClr val="E6D3BC"/>
+                      </a:solidFill>
+                      <a:prstDash val="solid"/>
+                      <a:round/>
+                      <a:headEnd type="none" w="med" len="med"/>
+                      <a:tailEnd type="none" w="med" len="med"/>
+                    </a:lnL>
+                    <a:lnR w="6350" cap="flat" cmpd="sng" algn="ctr">
+                      <a:solidFill>
+                        <a:srgbClr val="E6D3BC"/>
+                      </a:solidFill>
+                      <a:prstDash val="solid"/>
+                      <a:round/>
+                      <a:headEnd type="none" w="med" len="med"/>
+                      <a:tailEnd type="none" w="med" len="med"/>
+                    </a:lnR>
+                    <a:lnT w="6350" cap="flat" cmpd="sng" algn="ctr">
+                      <a:solidFill>
+                        <a:srgbClr val="E6D3BC"/>
+                      </a:solidFill>
+                      <a:prstDash val="solid"/>
+                      <a:round/>
+                      <a:headEnd type="none" w="med" len="med"/>
+                      <a:tailEnd type="none" w="med" len="med"/>
+                    </a:lnT>
+                    <a:lnB w="6350" cap="flat" cmpd="sng" algn="ctr">
+                      <a:solidFill>
+                        <a:srgbClr val="E6D3BC"/>
+                      </a:solidFill>
+                      <a:prstDash val="solid"/>
+                      <a:round/>
+                      <a:headEnd type="none" w="med" len="med"/>
+                      <a:tailEnd type="none" w="med" len="med"/>
+                    </a:lnB>
+                    <a:solidFill>
+                      <a:srgbClr val="FFFFFF"/>
+                    </a:solidFill>
+                  </a:tcPr>
+                </a:tc>
+                <a:tc>
+                  <a:txBody>
+                    <a:bodyPr/>
+                    <a:lstStyle/>
+                    <a:p>
+                      <a:pPr indent="0" marL="0">
+                        <a:buNone/>
+                      </a:pPr>
+                      <a:r>
+                        <a:rPr lang="en-US" sz="1050" dirty="0">
+                          <a:solidFill>
+                            <a:srgbClr val="1B2533"/>
+                          </a:solidFill>
+                          <a:latin typeface="Microsoft YaHei" pitchFamily="34" charset="0"/>
+                          <a:ea typeface="Microsoft YaHei" pitchFamily="34" charset="-122"/>
+                          <a:cs typeface="Microsoft YaHei" pitchFamily="34" charset="-120"/>
+                        </a:rPr>
+                        <a:t>上市批准 + VIGOR 试验</a:t>
+                      </a:r>
+                      <a:endParaRPr lang="en-US" sz="1050" dirty="0">
+                        <a:latin typeface="Microsoft YaHei" charset="0"/>
+                        <a:ea typeface="Microsoft YaHei" charset="0"/>
+                        <a:cs typeface="Microsoft YaHei" charset="0"/>
+                      </a:endParaRPr>
+                    </a:p>
+                  </a:txBody>
+                  <a:tcPr marL="54864" marR="54864" marT="18288" marB="18288" anchor="ctr">
+                    <a:lnL w="6350" cap="flat" cmpd="sng" algn="ctr">
+                      <a:solidFill>
+                        <a:srgbClr val="E6D3BC"/>
+                      </a:solidFill>
+                      <a:prstDash val="solid"/>
+                      <a:round/>
+                      <a:headEnd type="none" w="med" len="med"/>
+                      <a:tailEnd type="none" w="med" len="med"/>
+                    </a:lnL>
+                    <a:lnR w="6350" cap="flat" cmpd="sng" algn="ctr">
+                      <a:solidFill>
+                        <a:srgbClr val="E6D3BC"/>
+                      </a:solidFill>
+                      <a:prstDash val="solid"/>
+                      <a:round/>
+                      <a:headEnd type="none" w="med" len="med"/>
+                      <a:tailEnd type="none" w="med" len="med"/>
+                    </a:lnR>
+                    <a:lnT w="6350" cap="flat" cmpd="sng" algn="ctr">
+                      <a:solidFill>
+                        <a:srgbClr val="E6D3BC"/>
+                      </a:solidFill>
+                      <a:prstDash val="solid"/>
+                      <a:round/>
+                      <a:headEnd type="none" w="med" len="med"/>
+                      <a:tailEnd type="none" w="med" len="med"/>
+                    </a:lnT>
+                    <a:lnB w="6350" cap="flat" cmpd="sng" algn="ctr">
+                      <a:solidFill>
+                        <a:srgbClr val="E6D3BC"/>
+                      </a:solidFill>
+                      <a:prstDash val="solid"/>
+                      <a:round/>
+                      <a:headEnd type="none" w="med" len="med"/>
+                      <a:tailEnd type="none" w="med" len="med"/>
+                    </a:lnB>
+                    <a:solidFill>
+                      <a:srgbClr val="FFFFFF"/>
+                    </a:solidFill>
+                  </a:tcPr>
+                </a:tc>
+                <a:tc>
+                  <a:txBody>
+                    <a:bodyPr/>
+                    <a:lstStyle/>
+                    <a:p>
+                      <a:pPr indent="0" marL="0">
+                        <a:buNone/>
+                      </a:pPr>
+                      <a:r>
+                        <a:rPr lang="en-US" sz="1050" b="1" dirty="0">
+                          <a:solidFill>
+                            <a:srgbClr val="0E8A7E"/>
+                          </a:solidFill>
+                          <a:latin typeface="Microsoft YaHei" pitchFamily="34" charset="0"/>
+                          <a:ea typeface="Microsoft YaHei" pitchFamily="34" charset="-122"/>
+                          <a:cs typeface="Microsoft YaHei" pitchFamily="34" charset="-120"/>
+                        </a:rPr>
+                        <a:t>已验证</a:t>
+                      </a:r>
+                      <a:endParaRPr lang="en-US" sz="1050" dirty="0">
+                        <a:latin typeface="Microsoft YaHei" charset="0"/>
+                        <a:ea typeface="Microsoft YaHei" charset="0"/>
+                        <a:cs typeface="Microsoft YaHei" charset="0"/>
+                      </a:endParaRPr>
+                    </a:p>
+                  </a:txBody>
+                  <a:tcPr marL="54864" marR="54864" marT="18288" marB="18288" anchor="ctr">
+                    <a:lnL w="6350" cap="flat" cmpd="sng" algn="ctr">
+                      <a:solidFill>
+                        <a:srgbClr val="E6D3BC"/>
+                      </a:solidFill>
+                      <a:prstDash val="solid"/>
+                      <a:round/>
+                      <a:headEnd type="none" w="med" len="med"/>
+                      <a:tailEnd type="none" w="med" len="med"/>
+                    </a:lnL>
+                    <a:lnR w="6350" cap="flat" cmpd="sng" algn="ctr">
+                      <a:solidFill>
+                        <a:srgbClr val="E6D3BC"/>
+                      </a:solidFill>
+                      <a:prstDash val="solid"/>
+                      <a:round/>
+                      <a:headEnd type="none" w="med" len="med"/>
+                      <a:tailEnd type="none" w="med" len="med"/>
+                    </a:lnR>
+                    <a:lnT w="6350" cap="flat" cmpd="sng" algn="ctr">
+                      <a:solidFill>
+                        <a:srgbClr val="E6D3BC"/>
+                      </a:solidFill>
+                      <a:prstDash val="solid"/>
+                      <a:round/>
+                      <a:headEnd type="none" w="med" len="med"/>
+                      <a:tailEnd type="none" w="med" len="med"/>
+                    </a:lnT>
+                    <a:lnB w="6350" cap="flat" cmpd="sng" algn="ctr">
+                      <a:solidFill>
+                        <a:srgbClr val="E6D3BC"/>
+                      </a:solidFill>
+                      <a:prstDash val="solid"/>
+                      <a:round/>
+                      <a:headEnd type="none" w="med" len="med"/>
+                      <a:tailEnd type="none" w="med" len="med"/>
+                    </a:lnB>
+                    <a:solidFill>
+                      <a:srgbClr val="FFFFFF"/>
+                    </a:solidFill>
+                  </a:tcPr>
+                </a:tc>
+                <a:tc>
+                  <a:txBody>
+                    <a:bodyPr/>
+                    <a:lstStyle/>
+                    <a:p>
+                      <a:pPr indent="0" marL="0">
+                        <a:buNone/>
+                      </a:pPr>
+                      <a:r>
+                        <a:rPr lang="en-US" sz="1050" b="1" dirty="0">
+                          <a:solidFill>
+                            <a:srgbClr val="0E8A7E"/>
+                          </a:solidFill>
+                          <a:latin typeface="Microsoft YaHei" pitchFamily="34" charset="0"/>
+                          <a:ea typeface="Microsoft YaHei" pitchFamily="34" charset="-122"/>
+                          <a:cs typeface="Microsoft YaHei" pitchFamily="34" charset="-120"/>
+                        </a:rPr>
+                        <a:t>已验证</a:t>
+                      </a:r>
+                      <a:endParaRPr lang="en-US" sz="1050" dirty="0">
+                        <a:latin typeface="Microsoft YaHei" charset="0"/>
+                        <a:ea typeface="Microsoft YaHei" charset="0"/>
+                        <a:cs typeface="Microsoft YaHei" charset="0"/>
+                      </a:endParaRPr>
+                    </a:p>
+                  </a:txBody>
+                  <a:tcPr marL="54864" marR="54864" marT="18288" marB="18288" anchor="ctr">
+                    <a:lnL w="6350" cap="flat" cmpd="sng" algn="ctr">
+                      <a:solidFill>
+                        <a:srgbClr val="E6D3BC"/>
+                      </a:solidFill>
+                      <a:prstDash val="solid"/>
+                      <a:round/>
+                      <a:headEnd type="none" w="med" len="med"/>
+                      <a:tailEnd type="none" w="med" len="med"/>
+                    </a:lnL>
+                    <a:lnR w="6350" cap="flat" cmpd="sng" algn="ctr">
+                      <a:solidFill>
+                        <a:srgbClr val="E6D3BC"/>
+                      </a:solidFill>
+                      <a:prstDash val="solid"/>
+                      <a:round/>
+                      <a:headEnd type="none" w="med" len="med"/>
+                      <a:tailEnd type="none" w="med" len="med"/>
+                    </a:lnR>
+                    <a:lnT w="6350" cap="flat" cmpd="sng" algn="ctr">
+                      <a:solidFill>
+                        <a:srgbClr val="E6D3BC"/>
+                      </a:solidFill>
+                      <a:prstDash val="solid"/>
+                      <a:round/>
+                      <a:headEnd type="none" w="med" len="med"/>
+                      <a:tailEnd type="none" w="med" len="med"/>
+                    </a:lnT>
+                    <a:lnB w="6350" cap="flat" cmpd="sng" algn="ctr">
+                      <a:solidFill>
+                        <a:srgbClr val="E6D3BC"/>
+                      </a:solidFill>
+                      <a:prstDash val="solid"/>
+                      <a:round/>
+                      <a:headEnd type="none" w="med" len="med"/>
+                      <a:tailEnd type="none" w="med" len="med"/>
+                    </a:lnB>
+                    <a:solidFill>
+                      <a:srgbClr val="FFFFFF"/>
+                    </a:solidFill>
+                  </a:tcPr>
+                </a:tc>
+              </a:tr>
+              <a:tr h="265176">
+                <a:tc>
+                  <a:txBody>
+                    <a:bodyPr/>
+                    <a:lstStyle/>
+                    <a:p>
+                      <a:pPr indent="0" marL="0">
+                        <a:buNone/>
+                      </a:pPr>
+                      <a:r>
+                        <a:rPr lang="en-US" sz="1050" dirty="0">
+                          <a:solidFill>
+                            <a:srgbClr val="1B2533"/>
+                          </a:solidFill>
+                          <a:latin typeface="Microsoft YaHei" pitchFamily="34" charset="0"/>
+                          <a:ea typeface="Microsoft YaHei" pitchFamily="34" charset="-122"/>
+                          <a:cs typeface="Microsoft YaHei" pitchFamily="34" charset="-120"/>
+                        </a:rPr>
+                        <a:t>2004</a:t>
+                      </a:r>
+                      <a:endParaRPr lang="en-US" sz="1050" dirty="0">
+                        <a:latin typeface="Microsoft YaHei" charset="0"/>
+                        <a:ea typeface="Microsoft YaHei" charset="0"/>
+                        <a:cs typeface="Microsoft YaHei" charset="0"/>
+                      </a:endParaRPr>
+                    </a:p>
+                  </a:txBody>
+                  <a:tcPr marL="54864" marR="54864" marT="18288" marB="18288" anchor="ctr">
+                    <a:lnL w="6350" cap="flat" cmpd="sng" algn="ctr">
+                      <a:solidFill>
+                        <a:srgbClr val="E6D3BC"/>
+                      </a:solidFill>
+                      <a:prstDash val="solid"/>
+                      <a:round/>
+                      <a:headEnd type="none" w="med" len="med"/>
+                      <a:tailEnd type="none" w="med" len="med"/>
+                    </a:lnL>
+                    <a:lnR w="6350" cap="flat" cmpd="sng" algn="ctr">
+                      <a:solidFill>
+                        <a:srgbClr val="E6D3BC"/>
+                      </a:solidFill>
+                      <a:prstDash val="solid"/>
+                      <a:round/>
+                      <a:headEnd type="none" w="med" len="med"/>
+                      <a:tailEnd type="none" w="med" len="med"/>
+                    </a:lnR>
+                    <a:lnT w="6350" cap="flat" cmpd="sng" algn="ctr">
+                      <a:solidFill>
+                        <a:srgbClr val="E6D3BC"/>
+                      </a:solidFill>
+                      <a:prstDash val="solid"/>
+                      <a:round/>
+                      <a:headEnd type="none" w="med" len="med"/>
+                      <a:tailEnd type="none" w="med" len="med"/>
+                    </a:lnT>
+                    <a:lnB w="6350" cap="flat" cmpd="sng" algn="ctr">
+                      <a:solidFill>
+                        <a:srgbClr val="E6D3BC"/>
+                      </a:solidFill>
+                      <a:prstDash val="solid"/>
+                      <a:round/>
+                      <a:headEnd type="none" w="med" len="med"/>
+                      <a:tailEnd type="none" w="med" len="med"/>
+                    </a:lnB>
+                    <a:solidFill>
+                      <a:srgbClr val="FFFFFF"/>
+                    </a:solidFill>
+                  </a:tcPr>
+                </a:tc>
+                <a:tc>
+                  <a:txBody>
+                    <a:bodyPr/>
+                    <a:lstStyle/>
+                    <a:p>
+                      <a:pPr indent="0" marL="0">
+                        <a:buNone/>
+                      </a:pPr>
+                      <a:r>
+                        <a:rPr lang="en-US" sz="1050" dirty="0">
+                          <a:solidFill>
+                            <a:srgbClr val="1B2533"/>
+                          </a:solidFill>
+                          <a:latin typeface="Microsoft YaHei" pitchFamily="34" charset="0"/>
+                          <a:ea typeface="Microsoft YaHei" pitchFamily="34" charset="-122"/>
+                          <a:cs typeface="Microsoft YaHei" pitchFamily="34" charset="-120"/>
+                        </a:rPr>
+                        <a:t>APPROVe 试验后撤市</a:t>
+                      </a:r>
+                      <a:endParaRPr lang="en-US" sz="1050" dirty="0">
+                        <a:latin typeface="Microsoft YaHei" charset="0"/>
+                        <a:ea typeface="Microsoft YaHei" charset="0"/>
+                        <a:cs typeface="Microsoft YaHei" charset="0"/>
+                      </a:endParaRPr>
+                    </a:p>
+                  </a:txBody>
+                  <a:tcPr marL="54864" marR="54864" marT="18288" marB="18288" anchor="ctr">
+                    <a:lnL w="6350" cap="flat" cmpd="sng" algn="ctr">
+                      <a:solidFill>
+                        <a:srgbClr val="E6D3BC"/>
+                      </a:solidFill>
+                      <a:prstDash val="solid"/>
+                      <a:round/>
+                      <a:headEnd type="none" w="med" len="med"/>
+                      <a:tailEnd type="none" w="med" len="med"/>
+                    </a:lnL>
+                    <a:lnR w="6350" cap="flat" cmpd="sng" algn="ctr">
+                      <a:solidFill>
+                        <a:srgbClr val="E6D3BC"/>
+                      </a:solidFill>
+                      <a:prstDash val="solid"/>
+                      <a:round/>
+                      <a:headEnd type="none" w="med" len="med"/>
+                      <a:tailEnd type="none" w="med" len="med"/>
+                    </a:lnR>
+                    <a:lnT w="6350" cap="flat" cmpd="sng" algn="ctr">
+                      <a:solidFill>
+                        <a:srgbClr val="E6D3BC"/>
+                      </a:solidFill>
+                      <a:prstDash val="solid"/>
+                      <a:round/>
+                      <a:headEnd type="none" w="med" len="med"/>
+                      <a:tailEnd type="none" w="med" len="med"/>
+                    </a:lnT>
+                    <a:lnB w="6350" cap="flat" cmpd="sng" algn="ctr">
+                      <a:solidFill>
+                        <a:srgbClr val="E6D3BC"/>
+                      </a:solidFill>
+                      <a:prstDash val="solid"/>
+                      <a:round/>
+                      <a:headEnd type="none" w="med" len="med"/>
+                      <a:tailEnd type="none" w="med" len="med"/>
+                    </a:lnB>
+                    <a:solidFill>
+                      <a:srgbClr val="FFFFFF"/>
+                    </a:solidFill>
+                  </a:tcPr>
+                </a:tc>
+                <a:tc>
+                  <a:txBody>
+                    <a:bodyPr/>
+                    <a:lstStyle/>
+                    <a:p>
+                      <a:pPr indent="0" marL="0">
+                        <a:buNone/>
+                      </a:pPr>
+                      <a:r>
+                        <a:rPr lang="en-US" sz="1050" b="1" dirty="0">
+                          <a:solidFill>
+                            <a:srgbClr val="C9792A"/>
+                          </a:solidFill>
+                          <a:latin typeface="Microsoft YaHei" pitchFamily="34" charset="0"/>
+                          <a:ea typeface="Microsoft YaHei" pitchFamily="34" charset="-122"/>
+                          <a:cs typeface="Microsoft YaHei" pitchFamily="34" charset="-120"/>
+                        </a:rPr>
+                        <a:t>→ 有争议</a:t>
+                      </a:r>
+                      <a:endParaRPr lang="en-US" sz="1050" dirty="0">
+                        <a:latin typeface="Microsoft YaHei" charset="0"/>
+                        <a:ea typeface="Microsoft YaHei" charset="0"/>
+                        <a:cs typeface="Microsoft YaHei" charset="0"/>
+                      </a:endParaRPr>
+                    </a:p>
+                  </a:txBody>
+                  <a:tcPr marL="54864" marR="54864" marT="18288" marB="18288" anchor="ctr">
+                    <a:lnL w="6350" cap="flat" cmpd="sng" algn="ctr">
+                      <a:solidFill>
+                        <a:srgbClr val="E6D3BC"/>
+                      </a:solidFill>
+                      <a:prstDash val="solid"/>
+                      <a:round/>
+                      <a:headEnd type="none" w="med" len="med"/>
+                      <a:tailEnd type="none" w="med" len="med"/>
+                    </a:lnL>
+                    <a:lnR w="6350" cap="flat" cmpd="sng" algn="ctr">
+                      <a:solidFill>
+                        <a:srgbClr val="E6D3BC"/>
+                      </a:solidFill>
+                      <a:prstDash val="solid"/>
+                      <a:round/>
+                      <a:headEnd type="none" w="med" len="med"/>
+                      <a:tailEnd type="none" w="med" len="med"/>
+                    </a:lnR>
+                    <a:lnT w="6350" cap="flat" cmpd="sng" algn="ctr">
+                      <a:solidFill>
+                        <a:srgbClr val="E6D3BC"/>
+                      </a:solidFill>
+                      <a:prstDash val="solid"/>
+                      <a:round/>
+                      <a:headEnd type="none" w="med" len="med"/>
+                      <a:tailEnd type="none" w="med" len="med"/>
+                    </a:lnT>
+                    <a:lnB w="6350" cap="flat" cmpd="sng" algn="ctr">
+                      <a:solidFill>
+                        <a:srgbClr val="E6D3BC"/>
+                      </a:solidFill>
+                      <a:prstDash val="solid"/>
+                      <a:round/>
+                      <a:headEnd type="none" w="med" len="med"/>
+                      <a:tailEnd type="none" w="med" len="med"/>
+                    </a:lnB>
+                    <a:solidFill>
+                      <a:srgbClr val="FFFFFF"/>
+                    </a:solidFill>
+                  </a:tcPr>
+                </a:tc>
+                <a:tc>
+                  <a:txBody>
+                    <a:bodyPr/>
+                    <a:lstStyle/>
+                    <a:p>
+                      <a:pPr indent="0" marL="0">
+                        <a:buNone/>
+                      </a:pPr>
+                      <a:r>
+                        <a:rPr lang="en-US" sz="1050" dirty="0">
+                          <a:solidFill>
+                            <a:srgbClr val="1B2533"/>
+                          </a:solidFill>
+                          <a:latin typeface="Microsoft YaHei" pitchFamily="34" charset="0"/>
+                          <a:ea typeface="Microsoft YaHei" pitchFamily="34" charset="-122"/>
+                          <a:cs typeface="Microsoft YaHei" pitchFamily="34" charset="-120"/>
+                        </a:rPr>
+                        <a:t>不受影响</a:t>
+                      </a:r>
+                      <a:endParaRPr lang="en-US" sz="1050" dirty="0">
+                        <a:latin typeface="Microsoft YaHei" charset="0"/>
+                        <a:ea typeface="Microsoft YaHei" charset="0"/>
+                        <a:cs typeface="Microsoft YaHei" charset="0"/>
+                      </a:endParaRPr>
+                    </a:p>
+                  </a:txBody>
+                  <a:tcPr marL="54864" marR="54864" marT="18288" marB="18288" anchor="ctr">
+                    <a:lnL w="6350" cap="flat" cmpd="sng" algn="ctr">
+                      <a:solidFill>
+                        <a:srgbClr val="E6D3BC"/>
+                      </a:solidFill>
+                      <a:prstDash val="solid"/>
+                      <a:round/>
+                      <a:headEnd type="none" w="med" len="med"/>
+                      <a:tailEnd type="none" w="med" len="med"/>
+                    </a:lnL>
+                    <a:lnR w="6350" cap="flat" cmpd="sng" algn="ctr">
+                      <a:solidFill>
+                        <a:srgbClr val="E6D3BC"/>
+                      </a:solidFill>
+                      <a:prstDash val="solid"/>
+                      <a:round/>
+                      <a:headEnd type="none" w="med" len="med"/>
+                      <a:tailEnd type="none" w="med" len="med"/>
+                    </a:lnR>
+                    <a:lnT w="6350" cap="flat" cmpd="sng" algn="ctr">
+                      <a:solidFill>
+                        <a:srgbClr val="E6D3BC"/>
+                      </a:solidFill>
+                      <a:prstDash val="solid"/>
+                      <a:round/>
+                      <a:headEnd type="none" w="med" len="med"/>
+                      <a:tailEnd type="none" w="med" len="med"/>
+                    </a:lnT>
+                    <a:lnB w="6350" cap="flat" cmpd="sng" algn="ctr">
+                      <a:solidFill>
+                        <a:srgbClr val="E6D3BC"/>
+                      </a:solidFill>
+                      <a:prstDash val="solid"/>
+                      <a:round/>
+                      <a:headEnd type="none" w="med" len="med"/>
+                      <a:tailEnd type="none" w="med" len="med"/>
+                    </a:lnB>
+                    <a:solidFill>
+                      <a:srgbClr val="FFFFFF"/>
+                    </a:solidFill>
+                  </a:tcPr>
+                </a:tc>
+              </a:tr>
+              <a:tr h="265176">
+                <a:tc>
+                  <a:txBody>
+                    <a:bodyPr/>
+                    <a:lstStyle/>
+                    <a:p>
+                      <a:pPr indent="0" marL="0">
+                        <a:buNone/>
+                      </a:pPr>
+                      <a:r>
+                        <a:rPr lang="en-US" sz="1050" dirty="0">
+                          <a:solidFill>
+                            <a:srgbClr val="1B2533"/>
+                          </a:solidFill>
+                          <a:latin typeface="Microsoft YaHei" pitchFamily="34" charset="0"/>
+                          <a:ea typeface="Microsoft YaHei" pitchFamily="34" charset="-122"/>
+                          <a:cs typeface="Microsoft YaHei" pitchFamily="34" charset="-120"/>
+                        </a:rPr>
+                        <a:t>2005</a:t>
+                      </a:r>
+                      <a:endParaRPr lang="en-US" sz="1050" dirty="0">
+                        <a:latin typeface="Microsoft YaHei" charset="0"/>
+                        <a:ea typeface="Microsoft YaHei" charset="0"/>
+                        <a:cs typeface="Microsoft YaHei" charset="0"/>
+                      </a:endParaRPr>
+                    </a:p>
+                  </a:txBody>
+                  <a:tcPr marL="54864" marR="54864" marT="18288" marB="18288" anchor="ctr">
+                    <a:lnL w="6350" cap="flat" cmpd="sng" algn="ctr">
+                      <a:solidFill>
+                        <a:srgbClr val="E6D3BC"/>
+                      </a:solidFill>
+                      <a:prstDash val="solid"/>
+                      <a:round/>
+                      <a:headEnd type="none" w="med" len="med"/>
+                      <a:tailEnd type="none" w="med" len="med"/>
+                    </a:lnL>
+                    <a:lnR w="6350" cap="flat" cmpd="sng" algn="ctr">
+                      <a:solidFill>
+                        <a:srgbClr val="E6D3BC"/>
+                      </a:solidFill>
+                      <a:prstDash val="solid"/>
+                      <a:round/>
+                      <a:headEnd type="none" w="med" len="med"/>
+                      <a:tailEnd type="none" w="med" len="med"/>
+                    </a:lnR>
+                    <a:lnT w="6350" cap="flat" cmpd="sng" algn="ctr">
+                      <a:solidFill>
+                        <a:srgbClr val="E6D3BC"/>
+                      </a:solidFill>
+                      <a:prstDash val="solid"/>
+                      <a:round/>
+                      <a:headEnd type="none" w="med" len="med"/>
+                      <a:tailEnd type="none" w="med" len="med"/>
+                    </a:lnT>
+                    <a:lnB w="6350" cap="flat" cmpd="sng" algn="ctr">
+                      <a:solidFill>
+                        <a:srgbClr val="E6D3BC"/>
+                      </a:solidFill>
+                      <a:prstDash val="solid"/>
+                      <a:round/>
+                      <a:headEnd type="none" w="med" len="med"/>
+                      <a:tailEnd type="none" w="med" len="med"/>
+                    </a:lnB>
+                    <a:solidFill>
+                      <a:srgbClr val="FFFFFF"/>
+                    </a:solidFill>
+                  </a:tcPr>
+                </a:tc>
+                <a:tc>
+                  <a:txBody>
+                    <a:bodyPr/>
+                    <a:lstStyle/>
+                    <a:p>
+                      <a:pPr indent="0" marL="0">
+                        <a:buNone/>
+                      </a:pPr>
+                      <a:r>
+                        <a:rPr lang="en-US" sz="1050" dirty="0">
+                          <a:solidFill>
+                            <a:srgbClr val="1B2533"/>
+                          </a:solidFill>
+                          <a:latin typeface="Microsoft YaHei" pitchFamily="34" charset="0"/>
+                          <a:ea typeface="Microsoft YaHei" pitchFamily="34" charset="-122"/>
+                          <a:cs typeface="Microsoft YaHei" pitchFamily="34" charset="-120"/>
+                        </a:rPr>
+                        <a:t>期刊对 VIGOR 发关注声明</a:t>
+                      </a:r>
+                      <a:endParaRPr lang="en-US" sz="1050" dirty="0">
+                        <a:latin typeface="Microsoft YaHei" charset="0"/>
+                        <a:ea typeface="Microsoft YaHei" charset="0"/>
+                        <a:cs typeface="Microsoft YaHei" charset="0"/>
+                      </a:endParaRPr>
+                    </a:p>
+                  </a:txBody>
+                  <a:tcPr marL="54864" marR="54864" marT="18288" marB="18288" anchor="ctr">
+                    <a:lnL w="6350" cap="flat" cmpd="sng" algn="ctr">
+                      <a:solidFill>
+                        <a:srgbClr val="E6D3BC"/>
+                      </a:solidFill>
+                      <a:prstDash val="solid"/>
+                      <a:round/>
+                      <a:headEnd type="none" w="med" len="med"/>
+                      <a:tailEnd type="none" w="med" len="med"/>
+                    </a:lnL>
+                    <a:lnR w="6350" cap="flat" cmpd="sng" algn="ctr">
+                      <a:solidFill>
+                        <a:srgbClr val="E6D3BC"/>
+                      </a:solidFill>
+                      <a:prstDash val="solid"/>
+                      <a:round/>
+                      <a:headEnd type="none" w="med" len="med"/>
+                      <a:tailEnd type="none" w="med" len="med"/>
+                    </a:lnR>
+                    <a:lnT w="6350" cap="flat" cmpd="sng" algn="ctr">
+                      <a:solidFill>
+                        <a:srgbClr val="E6D3BC"/>
+                      </a:solidFill>
+                      <a:prstDash val="solid"/>
+                      <a:round/>
+                      <a:headEnd type="none" w="med" len="med"/>
+                      <a:tailEnd type="none" w="med" len="med"/>
+                    </a:lnT>
+                    <a:lnB w="6350" cap="flat" cmpd="sng" algn="ctr">
+                      <a:solidFill>
+                        <a:srgbClr val="E6D3BC"/>
+                      </a:solidFill>
+                      <a:prstDash val="solid"/>
+                      <a:round/>
+                      <a:headEnd type="none" w="med" len="med"/>
+                      <a:tailEnd type="none" w="med" len="med"/>
+                    </a:lnB>
+                    <a:solidFill>
+                      <a:srgbClr val="FFFFFF"/>
+                    </a:solidFill>
+                  </a:tcPr>
+                </a:tc>
+                <a:tc>
+                  <a:txBody>
+                    <a:bodyPr/>
+                    <a:lstStyle/>
+                    <a:p>
+                      <a:pPr indent="0" marL="0">
+                        <a:buNone/>
+                      </a:pPr>
+                      <a:r>
+                        <a:rPr lang="en-US" sz="1050" dirty="0">
+                          <a:solidFill>
+                            <a:srgbClr val="C9792A"/>
+                          </a:solidFill>
+                          <a:latin typeface="Microsoft YaHei" pitchFamily="34" charset="0"/>
+                          <a:ea typeface="Microsoft YaHei" pitchFamily="34" charset="-122"/>
+                          <a:cs typeface="Microsoft YaHei" pitchFamily="34" charset="-120"/>
+                        </a:rPr>
+                        <a:t>有争议</a:t>
+                      </a:r>
+                      <a:endParaRPr lang="en-US" sz="1050" dirty="0">
+                        <a:latin typeface="Microsoft YaHei" charset="0"/>
+                        <a:ea typeface="Microsoft YaHei" charset="0"/>
+                        <a:cs typeface="Microsoft YaHei" charset="0"/>
+                      </a:endParaRPr>
+                    </a:p>
+                  </a:txBody>
+                  <a:tcPr marL="54864" marR="54864" marT="18288" marB="18288" anchor="ctr">
+                    <a:lnL w="6350" cap="flat" cmpd="sng" algn="ctr">
+                      <a:solidFill>
+                        <a:srgbClr val="E6D3BC"/>
+                      </a:solidFill>
+                      <a:prstDash val="solid"/>
+                      <a:round/>
+                      <a:headEnd type="none" w="med" len="med"/>
+                      <a:tailEnd type="none" w="med" len="med"/>
+                    </a:lnL>
+                    <a:lnR w="6350" cap="flat" cmpd="sng" algn="ctr">
+                      <a:solidFill>
+                        <a:srgbClr val="E6D3BC"/>
+                      </a:solidFill>
+                      <a:prstDash val="solid"/>
+                      <a:round/>
+                      <a:headEnd type="none" w="med" len="med"/>
+                      <a:tailEnd type="none" w="med" len="med"/>
+                    </a:lnR>
+                    <a:lnT w="6350" cap="flat" cmpd="sng" algn="ctr">
+                      <a:solidFill>
+                        <a:srgbClr val="E6D3BC"/>
+                      </a:solidFill>
+                      <a:prstDash val="solid"/>
+                      <a:round/>
+                      <a:headEnd type="none" w="med" len="med"/>
+                      <a:tailEnd type="none" w="med" len="med"/>
+                    </a:lnT>
+                    <a:lnB w="6350" cap="flat" cmpd="sng" algn="ctr">
+                      <a:solidFill>
+                        <a:srgbClr val="E6D3BC"/>
+                      </a:solidFill>
+                      <a:prstDash val="solid"/>
+                      <a:round/>
+                      <a:headEnd type="none" w="med" len="med"/>
+                      <a:tailEnd type="none" w="med" len="med"/>
+                    </a:lnB>
+                    <a:solidFill>
+                      <a:srgbClr val="FFFFFF"/>
+                    </a:solidFill>
+                  </a:tcPr>
+                </a:tc>
+                <a:tc>
+                  <a:txBody>
+                    <a:bodyPr/>
+                    <a:lstStyle/>
+                    <a:p>
+                      <a:pPr indent="0" marL="0">
+                        <a:buNone/>
+                      </a:pPr>
+                      <a:r>
+                        <a:rPr lang="en-US" sz="1050" b="1" dirty="0">
+                          <a:solidFill>
+                            <a:srgbClr val="C9792A"/>
+                          </a:solidFill>
+                          <a:latin typeface="Microsoft YaHei" pitchFamily="34" charset="0"/>
+                          <a:ea typeface="Microsoft YaHei" pitchFamily="34" charset="-122"/>
+                          <a:cs typeface="Microsoft YaHei" pitchFamily="34" charset="-120"/>
+                        </a:rPr>
+                        <a:t>→ 有争议（扫描）</a:t>
+                      </a:r>
+                      <a:endParaRPr lang="en-US" sz="1050" dirty="0">
+                        <a:latin typeface="Microsoft YaHei" charset="0"/>
+                        <a:ea typeface="Microsoft YaHei" charset="0"/>
+                        <a:cs typeface="Microsoft YaHei" charset="0"/>
+                      </a:endParaRPr>
+                    </a:p>
+                  </a:txBody>
+                  <a:tcPr marL="54864" marR="54864" marT="18288" marB="18288" anchor="ctr">
+                    <a:lnL w="6350" cap="flat" cmpd="sng" algn="ctr">
+                      <a:solidFill>
+                        <a:srgbClr val="E6D3BC"/>
+                      </a:solidFill>
+                      <a:prstDash val="solid"/>
+                      <a:round/>
+                      <a:headEnd type="none" w="med" len="med"/>
+                      <a:tailEnd type="none" w="med" len="med"/>
+                    </a:lnL>
+                    <a:lnR w="6350" cap="flat" cmpd="sng" algn="ctr">
+                      <a:solidFill>
+                        <a:srgbClr val="E6D3BC"/>
+                      </a:solidFill>
+                      <a:prstDash val="solid"/>
+                      <a:round/>
+                      <a:headEnd type="none" w="med" len="med"/>
+                      <a:tailEnd type="none" w="med" len="med"/>
+                    </a:lnR>
+                    <a:lnT w="6350" cap="flat" cmpd="sng" algn="ctr">
+                      <a:solidFill>
+                        <a:srgbClr val="E6D3BC"/>
+                      </a:solidFill>
+                      <a:prstDash val="solid"/>
+                      <a:round/>
+                      <a:headEnd type="none" w="med" len="med"/>
+                      <a:tailEnd type="none" w="med" len="med"/>
+                    </a:lnT>
+                    <a:lnB w="6350" cap="flat" cmpd="sng" algn="ctr">
+                      <a:solidFill>
+                        <a:srgbClr val="E6D3BC"/>
+                      </a:solidFill>
+                      <a:prstDash val="solid"/>
+                      <a:round/>
+                      <a:headEnd type="none" w="med" len="med"/>
+                      <a:tailEnd type="none" w="med" len="med"/>
+                    </a:lnB>
+                    <a:solidFill>
+                      <a:srgbClr val="FFFFFF"/>
+                    </a:solidFill>
+                  </a:tcPr>
+                </a:tc>
+              </a:tr>
+            </a:tbl>
+          </a:graphicData>
+        </a:graphic>
+      </p:graphicFrame>
+      <p:sp>
+        <p:nvSpPr>
+          <p:cNvPr id="26" name="badge-130"/>
           <p:cNvSpPr/>
           <p:nvPr/>
         </p:nvSpPr>
@@ -9808,7 +11047,7 @@
       </p:sp>
       <p:sp>
         <p:nvSpPr>
-          <p:cNvPr id="26" name="label-130"/>
+          <p:cNvPr id="27" name="label-131"/>
           <p:cNvSpPr txBox="1"/>
           <p:nvPr/>
         </p:nvSpPr>
@@ -9844,7 +11083,7 @@
       </p:sp>
       <p:sp>
         <p:nvSpPr>
-          <p:cNvPr id="27" name="label-131"/>
+          <p:cNvPr id="28" name="label-132"/>
           <p:cNvSpPr txBox="1"/>
           <p:nvPr/>
         </p:nvSpPr>
@@ -9880,7 +11119,7 @@
       </p:sp>
       <p:sp>
         <p:nvSpPr>
-          <p:cNvPr id="28" name="badge-132"/>
+          <p:cNvPr id="29" name="badge-133"/>
           <p:cNvSpPr/>
           <p:nvPr/>
         </p:nvSpPr>
@@ -9922,7 +11161,7 @@
       </p:sp>
       <p:sp>
         <p:nvSpPr>
-          <p:cNvPr id="29" name="label-133"/>
+          <p:cNvPr id="30" name="label-134"/>
           <p:cNvSpPr txBox="1"/>
           <p:nvPr/>
         </p:nvSpPr>
@@ -9958,7 +11197,7 @@
       </p:sp>
       <p:sp>
         <p:nvSpPr>
-          <p:cNvPr id="30" name="label-134"/>
+          <p:cNvPr id="31" name="label-135"/>
           <p:cNvSpPr txBox="1"/>
           <p:nvPr/>
         </p:nvSpPr>
@@ -9994,7 +11233,7 @@
       </p:sp>
       <p:sp>
         <p:nvSpPr>
-          <p:cNvPr id="31" name="badge-135"/>
+          <p:cNvPr id="32" name="badge-136"/>
           <p:cNvSpPr/>
           <p:nvPr/>
         </p:nvSpPr>
@@ -10036,7 +11275,7 @@
       </p:sp>
       <p:sp>
         <p:nvSpPr>
-          <p:cNvPr id="32" name="label-136"/>
+          <p:cNvPr id="33" name="label-137"/>
           <p:cNvSpPr txBox="1"/>
           <p:nvPr/>
         </p:nvSpPr>
@@ -10072,7 +11311,7 @@
       </p:sp>
       <p:sp>
         <p:nvSpPr>
-          <p:cNvPr id="33" name="label-137"/>
+          <p:cNvPr id="34" name="label-138"/>
           <p:cNvSpPr txBox="1"/>
           <p:nvPr/>
         </p:nvSpPr>
@@ -10208,7 +11447,7 @@
                   <a:schemeClr val="tx2"/>
                 </a:solidFill>
               </a:rPr>
-              <a:t>另外两个设计点：分歧时怎么取证，结论怎么下</a:t>
+              <a:t>设计点②③：分歧时先查什么，结论何时能下</a:t>
             </a:r>
             <a:endParaRPr lang="en-US" sz="2800" dirty="0"/>
           </a:p>
@@ -10246,7 +11485,7 @@
                   <a:schemeClr val="accent6"/>
                 </a:solidFill>
               </a:rPr>
-              <a:t>A 类设计点 ② 与 ③：先查最能分出高下的证据；只有证据足够区分时才下结论。</a:t>
+              <a:t>A 类设计点 ② 与 ③：用信息论量化分歧、挑选查询；用统计校准决定能否下结论。</a:t>
             </a:r>
             <a:endParaRPr lang="en-US" sz="1500" dirty="0"/>
           </a:p>
@@ -10254,18 +11493,18 @@
       </p:sp>
       <p:sp>
         <p:nvSpPr>
-          <p:cNvPr id="4" name="card-138"/>
+          <p:cNvPr id="4" name="card-139"/>
           <p:cNvSpPr/>
           <p:nvPr/>
         </p:nvSpPr>
         <p:spPr>
           <a:xfrm>
-            <a:off x="548640" y="1600200"/>
-            <a:ext cx="5410048" cy="4572000"/>
+            <a:off x="548640" y="1554480"/>
+            <a:ext cx="6903720" cy="4526280"/>
           </a:xfrm>
           <a:prstGeom prst="roundRect">
             <a:avLst>
-              <a:gd name="adj" fmla="val 2000"/>
+              <a:gd name="adj" fmla="val 2020"/>
             </a:avLst>
           </a:prstGeom>
           <a:solidFill>
@@ -10281,13 +11520,13 @@
       </p:sp>
       <p:sp>
         <p:nvSpPr>
-          <p:cNvPr id="5" name="badge-139"/>
+          <p:cNvPr id="5" name="badge-140"/>
           <p:cNvSpPr/>
           <p:nvPr/>
         </p:nvSpPr>
         <p:spPr>
           <a:xfrm>
-            <a:off x="822960" y="1810512"/>
+            <a:off x="822960" y="1737360"/>
             <a:ext cx="384048" cy="384048"/>
           </a:xfrm>
           <a:prstGeom prst="ellipse">
@@ -10323,14 +11562,14 @@
       </p:sp>
       <p:sp>
         <p:nvSpPr>
-          <p:cNvPr id="6" name="label-140"/>
+          <p:cNvPr id="6" name="label-141"/>
           <p:cNvSpPr txBox="1"/>
           <p:nvPr/>
         </p:nvSpPr>
         <p:spPr>
           <a:xfrm>
-            <a:off x="1325880" y="1783080"/>
-            <a:ext cx="4404208" cy="411480"/>
+            <a:off x="1325880" y="1709928"/>
+            <a:ext cx="3657600" cy="411480"/>
           </a:xfrm>
           <a:prstGeom prst="rect">
             <a:avLst/>
@@ -10359,14 +11598,14 @@
       </p:sp>
       <p:sp>
         <p:nvSpPr>
-          <p:cNvPr id="7" name="label-141"/>
+          <p:cNvPr id="7" name="label-142"/>
           <p:cNvSpPr txBox="1"/>
           <p:nvPr/>
         </p:nvSpPr>
         <p:spPr>
           <a:xfrm>
             <a:off x="822960" y="2286000"/>
-            <a:ext cx="4861408" cy="566928"/>
+            <a:ext cx="3200400" cy="256032"/>
           </a:xfrm>
           <a:prstGeom prst="rect">
             <a:avLst/>
@@ -10382,12 +11621,12 @@
               <a:buNone/>
             </a:pPr>
             <a:r>
-              <a:rPr lang="en-US" sz="1250" dirty="0">
-                <a:solidFill>
-                  <a:schemeClr val="tx1"/>
-                </a:solidFill>
-              </a:rPr>
-              <a:t>汇总专家意见 → 计算分歧度 → 选“预期信息增益 ÷ 成本”最高的查询 → 更新判断 → 足够确定即停，分歧大则升级专家</a:t>
+              <a:rPr lang="en-US" sz="1250" b="1" dirty="0">
+                <a:solidFill>
+                  <a:schemeClr val="accent1"/>
+                </a:solidFill>
+              </a:rPr>
+              <a:t>背景</a:t>
             </a:r>
             <a:endParaRPr lang="en-US" sz="1250" dirty="0"/>
           </a:p>
@@ -10395,14 +11634,14 @@
       </p:sp>
       <p:sp>
         <p:nvSpPr>
-          <p:cNvPr id="8" name="label-142"/>
+          <p:cNvPr id="8" name="label-143"/>
           <p:cNvSpPr txBox="1"/>
           <p:nvPr/>
         </p:nvSpPr>
         <p:spPr>
           <a:xfrm>
-            <a:off x="822960" y="2926080"/>
-            <a:ext cx="4861408" cy="274320"/>
+            <a:off x="822960" y="2560320"/>
+            <a:ext cx="3200400" cy="594360"/>
           </a:xfrm>
           <a:prstGeom prst="rect">
             <a:avLst/>
@@ -10418,26 +11657,283 @@
               <a:buNone/>
             </a:pPr>
             <a:r>
-              <a:rPr lang="en-US" sz="1200" b="1" dirty="0">
+              <a:rPr lang="en-US" sz="1150" dirty="0">
+                <a:solidFill>
+                  <a:schemeClr val="tx1"/>
+                </a:solidFill>
+              </a:rPr>
+              <a:t>专家意见不一时，多轮辩论既耗算力又容易互相附和。借鉴贝叶斯实验设计（Lindley, 1956）：先做“最能分出对错”的那次查询。</a:t>
+            </a:r>
+            <a:endParaRPr lang="en-US" sz="1150" dirty="0"/>
+          </a:p>
+        </p:txBody>
+      </p:sp>
+      <p:sp>
+        <p:nvSpPr>
+          <p:cNvPr id="9" name="label-144"/>
+          <p:cNvSpPr txBox="1"/>
+          <p:nvPr/>
+        </p:nvSpPr>
+        <p:spPr>
+          <a:xfrm>
+            <a:off x="822960" y="3264408"/>
+            <a:ext cx="3200400" cy="256032"/>
+          </a:xfrm>
+          <a:prstGeom prst="rect">
+            <a:avLst/>
+          </a:prstGeom>
+          <a:noFill/>
+          <a:ln/>
+        </p:spPr>
+        <p:txBody>
+          <a:bodyPr wrap="square" lIns="0" tIns="0" rIns="0" bIns="0" rtlCol="0" anchor="t"/>
+          <a:lstStyle/>
+          <a:p>
+            <a:pPr algn="l" indent="0" marL="0">
+              <a:buNone/>
+            </a:pPr>
+            <a:r>
+              <a:rPr lang="en-US" sz="1250" b="1" dirty="0">
+                <a:solidFill>
+                  <a:schemeClr val="accent1"/>
+                </a:solidFill>
+              </a:rPr>
+              <a:t>分歧度怎么算</a:t>
+            </a:r>
+            <a:endParaRPr lang="en-US" sz="1250" dirty="0"/>
+          </a:p>
+        </p:txBody>
+      </p:sp>
+      <p:sp>
+        <p:nvSpPr>
+          <p:cNvPr id="10" name="label-145"/>
+          <p:cNvSpPr txBox="1"/>
+          <p:nvPr/>
+        </p:nvSpPr>
+        <p:spPr>
+          <a:xfrm>
+            <a:off x="822960" y="3538728"/>
+            <a:ext cx="3200400" cy="594360"/>
+          </a:xfrm>
+          <a:prstGeom prst="rect">
+            <a:avLst/>
+          </a:prstGeom>
+          <a:noFill/>
+          <a:ln/>
+        </p:spPr>
+        <p:txBody>
+          <a:bodyPr wrap="square" lIns="0" tIns="0" rIns="0" bIns="0" rtlCol="0" anchor="t"/>
+          <a:lstStyle/>
+          <a:p>
+            <a:pPr algn="l" indent="0" marL="0">
+              <a:buNone/>
+            </a:pPr>
+            <a:r>
+              <a:rPr lang="en-US" sz="1150" dirty="0">
+                <a:solidFill>
+                  <a:schemeClr val="tx1"/>
+                </a:solidFill>
+              </a:rPr>
+              <a:t>把专家意见汇成对“支持 / 反驳”的概率判断 p；分歧度 = 熵 H(p) ÷ 最大熵。0 表示已有定论，1 表示五五开。</a:t>
+            </a:r>
+            <a:endParaRPr lang="en-US" sz="1150" dirty="0"/>
+          </a:p>
+        </p:txBody>
+      </p:sp>
+      <p:sp>
+        <p:nvSpPr>
+          <p:cNvPr id="11" name="label-146"/>
+          <p:cNvSpPr txBox="1"/>
+          <p:nvPr/>
+        </p:nvSpPr>
+        <p:spPr>
+          <a:xfrm>
+            <a:off x="822960" y="4242816"/>
+            <a:ext cx="3200400" cy="256032"/>
+          </a:xfrm>
+          <a:prstGeom prst="rect">
+            <a:avLst/>
+          </a:prstGeom>
+          <a:noFill/>
+          <a:ln/>
+        </p:spPr>
+        <p:txBody>
+          <a:bodyPr wrap="square" lIns="0" tIns="0" rIns="0" bIns="0" rtlCol="0" anchor="t"/>
+          <a:lstStyle/>
+          <a:p>
+            <a:pPr algn="l" indent="0" marL="0">
+              <a:buNone/>
+            </a:pPr>
+            <a:r>
+              <a:rPr lang="en-US" sz="1250" b="1" dirty="0">
+                <a:solidFill>
+                  <a:schemeClr val="accent1"/>
+                </a:solidFill>
+              </a:rPr>
+              <a:t>信息增益怎么得到</a:t>
+            </a:r>
+            <a:endParaRPr lang="en-US" sz="1250" dirty="0"/>
+          </a:p>
+        </p:txBody>
+      </p:sp>
+      <p:sp>
+        <p:nvSpPr>
+          <p:cNvPr id="12" name="label-147"/>
+          <p:cNvSpPr txBox="1"/>
+          <p:nvPr/>
+        </p:nvSpPr>
+        <p:spPr>
+          <a:xfrm>
+            <a:off x="822960" y="4517136"/>
+            <a:ext cx="3200400" cy="1325880"/>
+          </a:xfrm>
+          <a:prstGeom prst="rect">
+            <a:avLst/>
+          </a:prstGeom>
+          <a:noFill/>
+          <a:ln/>
+        </p:spPr>
+        <p:txBody>
+          <a:bodyPr wrap="square" lIns="0" tIns="0" rIns="0" bIns="0" rtlCol="0" anchor="t"/>
+          <a:lstStyle/>
+          <a:p>
+            <a:pPr algn="l" indent="0" marL="0">
+              <a:buNone/>
+            </a:pPr>
+            <a:r>
+              <a:rPr lang="en-US" sz="1150" dirty="0">
+                <a:solidFill>
+                  <a:schemeClr val="tx1"/>
+                </a:solidFill>
+              </a:rPr>
+              <a:t>每个查询有一张“结果概率表”。如 ChEMBL：假设成立时查到强活性（≤1 µM）的概率为 60%，不成立时仅 10%。</a:t>
+            </a:r>
+            <a:endParaRPr lang="en-US" sz="1150" dirty="0"/>
+          </a:p>
+          <a:p>
+            <a:pPr algn="l" indent="0" marL="0">
+              <a:buNone/>
+            </a:pPr>
+            <a:r>
+              <a:rPr lang="en-US" sz="1150" dirty="0">
+                <a:solidFill>
+                  <a:schemeClr val="tx1"/>
+                </a:solidFill>
+              </a:rPr>
+              <a:t>预期信息增益 = 查询前的不确定度 − 查询后平均剩余的不确定度（单位：比特），按“增益 ÷ 成本”排序。</a:t>
+            </a:r>
+            <a:endParaRPr lang="en-US" sz="1150" dirty="0"/>
+          </a:p>
+        </p:txBody>
+      </p:sp>
+      <p:sp>
+        <p:nvSpPr>
+          <p:cNvPr id="13" name="panel-148"/>
+          <p:cNvSpPr/>
+          <p:nvPr/>
+        </p:nvSpPr>
+        <p:spPr>
+          <a:xfrm>
+            <a:off x="4251960" y="2240280"/>
+            <a:ext cx="2971800" cy="3657600"/>
+          </a:xfrm>
+          <a:prstGeom prst="roundRect">
+            <a:avLst>
+              <a:gd name="adj" fmla="val 1846"/>
+            </a:avLst>
+          </a:prstGeom>
+          <a:solidFill>
+            <a:srgbClr val="FFFFFF"/>
+          </a:solidFill>
+          <a:ln w="9525">
+            <a:solidFill>
+              <a:srgbClr val="D5DCE4"/>
+            </a:solidFill>
+            <a:prstDash val="solid"/>
+          </a:ln>
+        </p:spPr>
+      </p:sp>
+      <p:sp>
+        <p:nvSpPr>
+          <p:cNvPr id="14" name="label-149"/>
+          <p:cNvSpPr txBox="1"/>
+          <p:nvPr/>
+        </p:nvSpPr>
+        <p:spPr>
+          <a:xfrm>
+            <a:off x="4389120" y="2331720"/>
+            <a:ext cx="2697480" cy="457200"/>
+          </a:xfrm>
+          <a:prstGeom prst="rect">
+            <a:avLst/>
+          </a:prstGeom>
+          <a:noFill/>
+          <a:ln/>
+        </p:spPr>
+        <p:txBody>
+          <a:bodyPr wrap="square" lIns="0" tIns="0" rIns="0" bIns="0" rtlCol="0" anchor="t"/>
+          <a:lstStyle/>
+          <a:p>
+            <a:pPr algn="l" indent="0" marL="0">
+              <a:buNone/>
+            </a:pPr>
+            <a:r>
+              <a:rPr lang="en-US" sz="1150" b="1" dirty="0">
                 <a:solidFill>
                   <a:schemeClr val="tx2"/>
                 </a:solidFill>
               </a:rPr>
-              <a:t>示例：同一问题下三类查询的预期信息增益（比特）</a:t>
-            </a:r>
-            <a:endParaRPr lang="en-US" sz="1200" dirty="0"/>
+              <a:t>例：假设“TYK2 抑制可用于治疗银屑病”，起点 50 / 50（分歧度 1.0）</a:t>
+            </a:r>
+            <a:endParaRPr lang="en-US" sz="1150" dirty="0"/>
+          </a:p>
+        </p:txBody>
+      </p:sp>
+      <p:sp>
+        <p:nvSpPr>
+          <p:cNvPr id="15" name="label-150"/>
+          <p:cNvSpPr txBox="1"/>
+          <p:nvPr/>
+        </p:nvSpPr>
+        <p:spPr>
+          <a:xfrm>
+            <a:off x="4389120" y="2807208"/>
+            <a:ext cx="2697480" cy="237744"/>
+          </a:xfrm>
+          <a:prstGeom prst="rect">
+            <a:avLst/>
+          </a:prstGeom>
+          <a:noFill/>
+          <a:ln/>
+        </p:spPr>
+        <p:txBody>
+          <a:bodyPr wrap="square" lIns="0" tIns="0" rIns="0" bIns="0" rtlCol="0" anchor="t"/>
+          <a:lstStyle/>
+          <a:p>
+            <a:pPr algn="l" indent="0" marL="0">
+              <a:buNone/>
+            </a:pPr>
+            <a:r>
+              <a:rPr lang="en-US" sz="1050" dirty="0">
+                <a:solidFill>
+                  <a:schemeClr val="accent6"/>
+                </a:solidFill>
+              </a:rPr>
+              <a:t>第一步，三种查询的预期信息增益（比特）</a:t>
+            </a:r>
+            <a:endParaRPr lang="en-US" sz="1050" dirty="0"/>
           </a:p>
         </p:txBody>
       </p:sp>
       <p:graphicFrame>
         <p:nvGraphicFramePr>
-          <p:cNvPr id="9" name="chart-143" descr=""/>
+          <p:cNvPr id="16" name="chart-151" descr=""/>
           <p:cNvGraphicFramePr/>
           <p:nvPr/>
         </p:nvGraphicFramePr>
         <p:xfrm>
-          <a:off x="685800" y="3200400"/>
-          <a:ext cx="5135728" cy="1828800"/>
+          <a:off x="4270248" y="2999232"/>
+          <a:ext cx="2880360" cy="1188720"/>
         </p:xfrm>
         <a:graphic xmlns:a="http://schemas.openxmlformats.org/drawingml/2006/main">
           <a:graphicData uri="http://schemas.openxmlformats.org/drawingml/2006/chart">
@@ -10447,14 +11943,14 @@
       </p:graphicFrame>
       <p:sp>
         <p:nvSpPr>
-          <p:cNvPr id="10" name="label-144"/>
+          <p:cNvPr id="17" name="label-152"/>
           <p:cNvSpPr txBox="1"/>
           <p:nvPr/>
         </p:nvSpPr>
         <p:spPr>
           <a:xfrm>
-            <a:off x="822960" y="5120640"/>
-            <a:ext cx="4861408" cy="914400"/>
+            <a:off x="4389120" y="4206240"/>
+            <a:ext cx="2697480" cy="457200"/>
           </a:xfrm>
           <a:prstGeom prst="rect">
             <a:avLst/>
@@ -10470,31 +11966,259 @@
               <a:buNone/>
             </a:pPr>
             <a:r>
-              <a:rPr lang="en-US" sz="1250" dirty="0">
+              <a:rPr lang="en-US" sz="1050" dirty="0">
                 <a:solidFill>
                   <a:schemeClr val="tx1"/>
                 </a:solidFill>
               </a:rPr>
-              <a:t>先查 ChEMBL 活性数据最能区分“支持 / 反驳”（默认参数下的数值）。工具调用失败只消耗预算，绝不当作反证。</a:t>
-            </a:r>
-            <a:endParaRPr lang="en-US" sz="1250" dirty="0"/>
-          </a:p>
-        </p:txBody>
-      </p:sp>
-      <p:sp>
-        <p:nvSpPr>
-          <p:cNvPr id="11" name="card-145"/>
+              <a:t>UniProt 最低：无论假设对错，靶点几乎都能查到序列，查了也分不出对错。</a:t>
+            </a:r>
+            <a:endParaRPr lang="en-US" sz="1050" dirty="0"/>
+          </a:p>
+        </p:txBody>
+      </p:sp>
+      <p:sp>
+        <p:nvSpPr>
+          <p:cNvPr id="18" name="badge-153"/>
           <p:cNvSpPr/>
           <p:nvPr/>
         </p:nvSpPr>
         <p:spPr>
           <a:xfrm>
-            <a:off x="6233008" y="1600200"/>
-            <a:ext cx="5410048" cy="4572000"/>
+            <a:off x="4389120" y="4791456"/>
+            <a:ext cx="292608" cy="292608"/>
+          </a:xfrm>
+          <a:prstGeom prst="ellipse">
+            <a:avLst/>
+          </a:prstGeom>
+          <a:solidFill>
+            <a:schemeClr val="accent2"/>
+          </a:solidFill>
+          <a:ln w="6350">
+            <a:solidFill>
+              <a:schemeClr val="accent2"/>
+            </a:solidFill>
+          </a:ln>
+        </p:spPr>
+        <p:txBody>
+          <a:bodyPr wrap="square" lIns="0" tIns="0" rIns="0" bIns="0" rtlCol="0" anchor="ctr"/>
+          <a:lstStyle/>
+          <a:p>
+            <a:pPr algn="ctr" indent="0" marL="0">
+              <a:buNone/>
+            </a:pPr>
+            <a:r>
+              <a:rPr lang="en-US" sz="1200" b="1" dirty="0">
+                <a:solidFill>
+                  <a:schemeClr val="bg1"/>
+                </a:solidFill>
+              </a:rPr>
+              <a:t>1</a:t>
+            </a:r>
+            <a:endParaRPr lang="en-US" sz="1200" dirty="0"/>
+          </a:p>
+        </p:txBody>
+      </p:sp>
+      <p:sp>
+        <p:nvSpPr>
+          <p:cNvPr id="19" name="label-154"/>
+          <p:cNvSpPr txBox="1"/>
+          <p:nvPr/>
+        </p:nvSpPr>
+        <p:spPr>
+          <a:xfrm>
+            <a:off x="4782312" y="4736592"/>
+            <a:ext cx="2331720" cy="237744"/>
+          </a:xfrm>
+          <a:prstGeom prst="rect">
+            <a:avLst/>
+          </a:prstGeom>
+          <a:noFill/>
+          <a:ln/>
+        </p:spPr>
+        <p:txBody>
+          <a:bodyPr wrap="square" lIns="0" tIns="0" rIns="0" bIns="0" rtlCol="0" anchor="t"/>
+          <a:lstStyle/>
+          <a:p>
+            <a:pPr algn="l" indent="0" marL="0">
+              <a:buNone/>
+            </a:pPr>
+            <a:r>
+              <a:rPr lang="en-US" sz="1100" b="1" dirty="0">
+                <a:solidFill>
+                  <a:schemeClr val="tx2"/>
+                </a:solidFill>
+              </a:rPr>
+              <a:t>ChEMBL 查到强活性</a:t>
+            </a:r>
+            <a:endParaRPr lang="en-US" sz="1100" dirty="0"/>
+          </a:p>
+        </p:txBody>
+      </p:sp>
+      <p:sp>
+        <p:nvSpPr>
+          <p:cNvPr id="20" name="label-155"/>
+          <p:cNvSpPr txBox="1"/>
+          <p:nvPr/>
+        </p:nvSpPr>
+        <p:spPr>
+          <a:xfrm>
+            <a:off x="4782312" y="4974336"/>
+            <a:ext cx="2331720" cy="237744"/>
+          </a:xfrm>
+          <a:prstGeom prst="rect">
+            <a:avLst/>
+          </a:prstGeom>
+          <a:noFill/>
+          <a:ln/>
+        </p:spPr>
+        <p:txBody>
+          <a:bodyPr wrap="square" lIns="0" tIns="0" rIns="0" bIns="0" rtlCol="0" anchor="t"/>
+          <a:lstStyle/>
+          <a:p>
+            <a:pPr algn="l" indent="0" marL="0">
+              <a:buNone/>
+            </a:pPr>
+            <a:r>
+              <a:rPr lang="en-US" sz="1050" dirty="0">
+                <a:solidFill>
+                  <a:schemeClr val="tx1"/>
+                </a:solidFill>
+              </a:rPr>
+              <a:t>支持概率 0.50 → 0.86</a:t>
+            </a:r>
+            <a:endParaRPr lang="en-US" sz="1050" dirty="0"/>
+          </a:p>
+        </p:txBody>
+      </p:sp>
+      <p:sp>
+        <p:nvSpPr>
+          <p:cNvPr id="21" name="badge-156"/>
+          <p:cNvSpPr/>
+          <p:nvPr/>
+        </p:nvSpPr>
+        <p:spPr>
+          <a:xfrm>
+            <a:off x="4389120" y="5340096"/>
+            <a:ext cx="292608" cy="292608"/>
+          </a:xfrm>
+          <a:prstGeom prst="ellipse">
+            <a:avLst/>
+          </a:prstGeom>
+          <a:solidFill>
+            <a:schemeClr val="accent2"/>
+          </a:solidFill>
+          <a:ln w="6350">
+            <a:solidFill>
+              <a:schemeClr val="accent2"/>
+            </a:solidFill>
+          </a:ln>
+        </p:spPr>
+        <p:txBody>
+          <a:bodyPr wrap="square" lIns="0" tIns="0" rIns="0" bIns="0" rtlCol="0" anchor="ctr"/>
+          <a:lstStyle/>
+          <a:p>
+            <a:pPr algn="ctr" indent="0" marL="0">
+              <a:buNone/>
+            </a:pPr>
+            <a:r>
+              <a:rPr lang="en-US" sz="1200" b="1" dirty="0">
+                <a:solidFill>
+                  <a:schemeClr val="bg1"/>
+                </a:solidFill>
+              </a:rPr>
+              <a:t>2</a:t>
+            </a:r>
+            <a:endParaRPr lang="en-US" sz="1200" dirty="0"/>
+          </a:p>
+        </p:txBody>
+      </p:sp>
+      <p:sp>
+        <p:nvSpPr>
+          <p:cNvPr id="22" name="label-157"/>
+          <p:cNvSpPr txBox="1"/>
+          <p:nvPr/>
+        </p:nvSpPr>
+        <p:spPr>
+          <a:xfrm>
+            <a:off x="4782312" y="5285232"/>
+            <a:ext cx="2331720" cy="237744"/>
+          </a:xfrm>
+          <a:prstGeom prst="rect">
+            <a:avLst/>
+          </a:prstGeom>
+          <a:noFill/>
+          <a:ln/>
+        </p:spPr>
+        <p:txBody>
+          <a:bodyPr wrap="square" lIns="0" tIns="0" rIns="0" bIns="0" rtlCol="0" anchor="t"/>
+          <a:lstStyle/>
+          <a:p>
+            <a:pPr algn="l" indent="0" marL="0">
+              <a:buNone/>
+            </a:pPr>
+            <a:r>
+              <a:rPr lang="en-US" sz="1100" b="1" dirty="0">
+                <a:solidFill>
+                  <a:schemeClr val="tx2"/>
+                </a:solidFill>
+              </a:rPr>
+              <a:t>再查临床试验：有登记</a:t>
+            </a:r>
+            <a:endParaRPr lang="en-US" sz="1100" dirty="0"/>
+          </a:p>
+        </p:txBody>
+      </p:sp>
+      <p:sp>
+        <p:nvSpPr>
+          <p:cNvPr id="23" name="label-158"/>
+          <p:cNvSpPr txBox="1"/>
+          <p:nvPr/>
+        </p:nvSpPr>
+        <p:spPr>
+          <a:xfrm>
+            <a:off x="4782312" y="5522976"/>
+            <a:ext cx="2331720" cy="237744"/>
+          </a:xfrm>
+          <a:prstGeom prst="rect">
+            <a:avLst/>
+          </a:prstGeom>
+          <a:noFill/>
+          <a:ln/>
+        </p:spPr>
+        <p:txBody>
+          <a:bodyPr wrap="square" lIns="0" tIns="0" rIns="0" bIns="0" rtlCol="0" anchor="t"/>
+          <a:lstStyle/>
+          <a:p>
+            <a:pPr algn="l" indent="0" marL="0">
+              <a:buNone/>
+            </a:pPr>
+            <a:r>
+              <a:rPr lang="en-US" sz="1050" dirty="0">
+                <a:solidFill>
+                  <a:schemeClr val="tx1"/>
+                </a:solidFill>
+              </a:rPr>
+              <a:t>0.86 → 0.95，分歧度降至 0.28</a:t>
+            </a:r>
+            <a:endParaRPr lang="en-US" sz="1050" dirty="0"/>
+          </a:p>
+        </p:txBody>
+      </p:sp>
+      <p:sp>
+        <p:nvSpPr>
+          <p:cNvPr id="24" name="card-159"/>
+          <p:cNvSpPr/>
+          <p:nvPr/>
+        </p:nvSpPr>
+        <p:spPr>
+          <a:xfrm>
+            <a:off x="7726680" y="1554480"/>
+            <a:ext cx="3916375" cy="4526280"/>
           </a:xfrm>
           <a:prstGeom prst="roundRect">
             <a:avLst>
-              <a:gd name="adj" fmla="val 2000"/>
+              <a:gd name="adj" fmla="val 2335"/>
             </a:avLst>
           </a:prstGeom>
           <a:solidFill>
@@ -10510,13 +12234,13 @@
       </p:sp>
       <p:sp>
         <p:nvSpPr>
-          <p:cNvPr id="12" name="badge-146"/>
+          <p:cNvPr id="25" name="badge-160"/>
           <p:cNvSpPr/>
           <p:nvPr/>
         </p:nvSpPr>
         <p:spPr>
           <a:xfrm>
-            <a:off x="6507328" y="1810512"/>
+            <a:off x="8001000" y="1737360"/>
             <a:ext cx="384048" cy="384048"/>
           </a:xfrm>
           <a:prstGeom prst="ellipse">
@@ -10552,14 +12276,14 @@
       </p:sp>
       <p:sp>
         <p:nvSpPr>
-          <p:cNvPr id="13" name="label-147"/>
+          <p:cNvPr id="26" name="label-161"/>
           <p:cNvSpPr txBox="1"/>
           <p:nvPr/>
         </p:nvSpPr>
         <p:spPr>
           <a:xfrm>
-            <a:off x="7010248" y="1783080"/>
-            <a:ext cx="4404208" cy="411480"/>
+            <a:off x="8503920" y="1709928"/>
+            <a:ext cx="2910535" cy="411480"/>
           </a:xfrm>
           <a:prstGeom prst="rect">
             <a:avLst/>
@@ -10588,14 +12312,14 @@
       </p:sp>
       <p:sp>
         <p:nvSpPr>
-          <p:cNvPr id="14" name="label-148"/>
+          <p:cNvPr id="27" name="label-162"/>
           <p:cNvSpPr txBox="1"/>
           <p:nvPr/>
         </p:nvSpPr>
         <p:spPr>
           <a:xfrm>
-            <a:off x="6507328" y="2286000"/>
-            <a:ext cx="4861408" cy="566928"/>
+            <a:off x="8001000" y="2286000"/>
+            <a:ext cx="3367735" cy="256032"/>
           </a:xfrm>
           <a:prstGeom prst="rect">
             <a:avLst/>
@@ -10611,20 +12335,56 @@
               <a:buNone/>
             </a:pPr>
             <a:r>
-              <a:rPr lang="en-US" sz="1250" dirty="0">
+              <a:rPr lang="en-US" sz="1250" b="1" dirty="0">
+                <a:solidFill>
+                  <a:schemeClr val="accent1"/>
+                </a:solidFill>
+              </a:rPr>
+              <a:t>背景</a:t>
+            </a:r>
+            <a:endParaRPr lang="en-US" sz="1250" dirty="0"/>
+          </a:p>
+        </p:txBody>
+      </p:sp>
+      <p:sp>
+        <p:nvSpPr>
+          <p:cNvPr id="28" name="label-163"/>
+          <p:cNvSpPr txBox="1"/>
+          <p:nvPr/>
+        </p:nvSpPr>
+        <p:spPr>
+          <a:xfrm>
+            <a:off x="8001000" y="2560320"/>
+            <a:ext cx="3367735" cy="868680"/>
+          </a:xfrm>
+          <a:prstGeom prst="rect">
+            <a:avLst/>
+          </a:prstGeom>
+          <a:noFill/>
+          <a:ln/>
+        </p:spPr>
+        <p:txBody>
+          <a:bodyPr wrap="square" lIns="0" tIns="0" rIns="0" bIns="0" rtlCol="0" anchor="t"/>
+          <a:lstStyle/>
+          <a:p>
+            <a:pPr algn="l" indent="0" marL="0">
+              <a:buNone/>
+            </a:pPr>
+            <a:r>
+              <a:rPr lang="en-US" sz="1150" dirty="0">
                 <a:solidFill>
                   <a:schemeClr val="tx1"/>
                 </a:solidFill>
               </a:rPr>
-              <a:t>不给一个拍脑袋的分数，而是给出在错误率 α 下“可能成立的结果集合”：</a:t>
-            </a:r>
-            <a:endParaRPr lang="en-US" sz="1250" dirty="0"/>
+              <a:t>共形预测（Vovk 等）是一种统计方法：用一批已标注结果的历史假设做校准，保证“出错率不超过 α”。它不给分数，而是给出可能成立的结果集合：</a:t>
+            </a:r>
+            <a:endParaRPr lang="en-US" sz="1150" dirty="0"/>
           </a:p>
         </p:txBody>
       </p:sp>
       <p:graphicFrame>
         <p:nvGraphicFramePr>
-          <p:cNvPr id="8" name="table-149"/>
+          <p:cNvPr id="8" name="table-164"/>
           <p:cNvGraphicFramePr>
             <a:graphicFrameLocks noGrp="1"/>
           </p:cNvGraphicFramePr>
@@ -10637,19 +12397,19 @@
           </p:nvPr>
         </p:nvGraphicFramePr>
         <p:xfrm>
-          <a:off x="6507328" y="2926080"/>
-          <a:ext cx="4861408" cy="914400"/>
+          <a:off x="8001000" y="3474720"/>
+          <a:ext cx="3367735" cy="914400"/>
         </p:xfrm>
         <a:graphic>
           <a:graphicData uri="http://schemas.openxmlformats.org/drawingml/2006/table">
             <a:tbl>
               <a:tblPr/>
               <a:tblGrid>
-                <a:gridCol w="1417320"/>
-                <a:gridCol w="868680"/>
-                <a:gridCol w="2575408"/>
+                <a:gridCol w="1298448"/>
+                <a:gridCol w="658368"/>
+                <a:gridCol w="1410919"/>
               </a:tblGrid>
-              <a:tr h="384048">
+              <a:tr h="329184">
                 <a:tc>
                   <a:txBody>
                     <a:bodyPr/>
@@ -10659,7 +12419,7 @@
                         <a:buNone/>
                       </a:pPr>
                       <a:r>
-                        <a:rPr lang="en-US" sz="1250" b="1" dirty="0">
+                        <a:rPr lang="en-US" sz="1100" b="1" dirty="0">
                           <a:solidFill>
                             <a:srgbClr val="FFFFFF"/>
                           </a:solidFill>
@@ -10669,14 +12429,14 @@
                         </a:rPr>
                         <a:t>结果集合</a:t>
                       </a:r>
-                      <a:endParaRPr lang="en-US" sz="1250" dirty="0">
+                      <a:endParaRPr lang="en-US" sz="1100" dirty="0">
                         <a:latin typeface="Microsoft YaHei" charset="0"/>
                         <a:ea typeface="Microsoft YaHei" charset="0"/>
                         <a:cs typeface="Microsoft YaHei" charset="0"/>
                       </a:endParaRPr>
                     </a:p>
                   </a:txBody>
-                  <a:tcPr marL="91440" marR="91440" marT="36576" marB="36576" anchor="ctr">
+                  <a:tcPr marL="64008" marR="64008" marT="27432" marB="27432" anchor="ctr">
                     <a:lnL w="9525" cap="flat" cmpd="sng" algn="ctr">
                       <a:solidFill>
                         <a:srgbClr val="D5DCE4"/>
@@ -10727,7 +12487,7 @@
                         <a:buNone/>
                       </a:pPr>
                       <a:r>
-                        <a:rPr lang="en-US" sz="1250" b="1" dirty="0">
+                        <a:rPr lang="en-US" sz="1100" b="1" dirty="0">
                           <a:solidFill>
                             <a:srgbClr val="FFFFFF"/>
                           </a:solidFill>
@@ -10737,14 +12497,14 @@
                         </a:rPr>
                         <a:t>判定</a:t>
                       </a:r>
-                      <a:endParaRPr lang="en-US" sz="1250" dirty="0">
+                      <a:endParaRPr lang="en-US" sz="1100" dirty="0">
                         <a:latin typeface="Microsoft YaHei" charset="0"/>
                         <a:ea typeface="Microsoft YaHei" charset="0"/>
                         <a:cs typeface="Microsoft YaHei" charset="0"/>
                       </a:endParaRPr>
                     </a:p>
                   </a:txBody>
-                  <a:tcPr marL="91440" marR="91440" marT="36576" marB="36576" anchor="ctr">
+                  <a:tcPr marL="64008" marR="64008" marT="27432" marB="27432" anchor="ctr">
                     <a:lnL w="9525" cap="flat" cmpd="sng" algn="ctr">
                       <a:solidFill>
                         <a:srgbClr val="D5DCE4"/>
@@ -10795,7 +12555,7 @@
                         <a:buNone/>
                       </a:pPr>
                       <a:r>
-                        <a:rPr lang="en-US" sz="1250" b="1" dirty="0">
+                        <a:rPr lang="en-US" sz="1100" b="1" dirty="0">
                           <a:solidFill>
                             <a:srgbClr val="FFFFFF"/>
                           </a:solidFill>
@@ -10805,14 +12565,14 @@
                         </a:rPr>
                         <a:t>含义</a:t>
                       </a:r>
-                      <a:endParaRPr lang="en-US" sz="1250" dirty="0">
+                      <a:endParaRPr lang="en-US" sz="1100" dirty="0">
                         <a:latin typeface="Microsoft YaHei" charset="0"/>
                         <a:ea typeface="Microsoft YaHei" charset="0"/>
                         <a:cs typeface="Microsoft YaHei" charset="0"/>
                       </a:endParaRPr>
                     </a:p>
                   </a:txBody>
-                  <a:tcPr marL="91440" marR="91440" marT="36576" marB="36576" anchor="ctr">
+                  <a:tcPr marL="64008" marR="64008" marT="27432" marB="27432" anchor="ctr">
                     <a:lnL w="9525" cap="flat" cmpd="sng" algn="ctr">
                       <a:solidFill>
                         <a:srgbClr val="D5DCE4"/>
@@ -10855,7 +12615,7 @@
                   </a:tcPr>
                 </a:tc>
               </a:tr>
-              <a:tr h="384048">
+              <a:tr h="329184">
                 <a:tc>
                   <a:txBody>
                     <a:bodyPr/>
@@ -10865,7 +12625,7 @@
                         <a:buNone/>
                       </a:pPr>
                       <a:r>
-                        <a:rPr lang="en-US" sz="1250" b="1" dirty="0">
+                        <a:rPr lang="en-US" sz="1100" b="1" dirty="0">
                           <a:solidFill>
                             <a:srgbClr val="1B2533"/>
                           </a:solidFill>
@@ -10875,14 +12635,14 @@
                         </a:rPr>
                         <a:t>{ 支持 }</a:t>
                       </a:r>
-                      <a:endParaRPr lang="en-US" sz="1250" dirty="0">
+                      <a:endParaRPr lang="en-US" sz="1100" dirty="0">
                         <a:latin typeface="Microsoft YaHei" charset="0"/>
                         <a:ea typeface="Microsoft YaHei" charset="0"/>
                         <a:cs typeface="Microsoft YaHei" charset="0"/>
                       </a:endParaRPr>
                     </a:p>
                   </a:txBody>
-                  <a:tcPr marL="91440" marR="91440" marT="36576" marB="36576" anchor="ctr">
+                  <a:tcPr marL="64008" marR="64008" marT="27432" marB="27432" anchor="ctr">
                     <a:lnL w="9525" cap="flat" cmpd="sng" algn="ctr">
                       <a:solidFill>
                         <a:srgbClr val="D5DCE4"/>
@@ -10933,7 +12693,7 @@
                         <a:buNone/>
                       </a:pPr>
                       <a:r>
-                        <a:rPr lang="en-US" sz="1250" b="1" dirty="0">
+                        <a:rPr lang="en-US" sz="1100" b="1" dirty="0">
                           <a:solidFill>
                             <a:srgbClr val="0E8A7E"/>
                           </a:solidFill>
@@ -10943,14 +12703,14 @@
                         </a:rPr>
                         <a:t>支持</a:t>
                       </a:r>
-                      <a:endParaRPr lang="en-US" sz="1250" dirty="0">
+                      <a:endParaRPr lang="en-US" sz="1100" dirty="0">
                         <a:latin typeface="Microsoft YaHei" charset="0"/>
                         <a:ea typeface="Microsoft YaHei" charset="0"/>
                         <a:cs typeface="Microsoft YaHei" charset="0"/>
                       </a:endParaRPr>
                     </a:p>
                   </a:txBody>
-                  <a:tcPr marL="91440" marR="91440" marT="36576" marB="36576" anchor="ctr">
+                  <a:tcPr marL="64008" marR="64008" marT="27432" marB="27432" anchor="ctr">
                     <a:lnL w="9525" cap="flat" cmpd="sng" algn="ctr">
                       <a:solidFill>
                         <a:srgbClr val="D5DCE4"/>
@@ -11001,7 +12761,7 @@
                         <a:buNone/>
                       </a:pPr>
                       <a:r>
-                        <a:rPr lang="en-US" sz="1250" dirty="0">
+                        <a:rPr lang="en-US" sz="1100" dirty="0">
                           <a:solidFill>
                             <a:srgbClr val="1B2533"/>
                           </a:solidFill>
@@ -11009,16 +12769,16 @@
                           <a:ea typeface="Microsoft YaHei" pitchFamily="34" charset="-122"/>
                           <a:cs typeface="Microsoft YaHei" pitchFamily="34" charset="-120"/>
                         </a:rPr>
-                        <a:t>只有“支持”与校准数据相符</a:t>
+                        <a:t>只有“支持”说得通</a:t>
                       </a:r>
-                      <a:endParaRPr lang="en-US" sz="1250" dirty="0">
+                      <a:endParaRPr lang="en-US" sz="1100" dirty="0">
                         <a:latin typeface="Microsoft YaHei" charset="0"/>
                         <a:ea typeface="Microsoft YaHei" charset="0"/>
                         <a:cs typeface="Microsoft YaHei" charset="0"/>
                       </a:endParaRPr>
                     </a:p>
                   </a:txBody>
-                  <a:tcPr marL="91440" marR="91440" marT="36576" marB="36576" anchor="ctr">
+                  <a:tcPr marL="64008" marR="64008" marT="27432" marB="27432" anchor="ctr">
                     <a:lnL w="9525" cap="flat" cmpd="sng" algn="ctr">
                       <a:solidFill>
                         <a:srgbClr val="D5DCE4"/>
@@ -11061,7 +12821,7 @@
                   </a:tcPr>
                 </a:tc>
               </a:tr>
-              <a:tr h="384048">
+              <a:tr h="329184">
                 <a:tc>
                   <a:txBody>
                     <a:bodyPr/>
@@ -11071,7 +12831,7 @@
                         <a:buNone/>
                       </a:pPr>
                       <a:r>
-                        <a:rPr lang="en-US" sz="1250" b="1" dirty="0">
+                        <a:rPr lang="en-US" sz="1100" b="1" dirty="0">
                           <a:solidFill>
                             <a:srgbClr val="1B2533"/>
                           </a:solidFill>
@@ -11081,14 +12841,14 @@
                         </a:rPr>
                         <a:t>{ 反驳 }</a:t>
                       </a:r>
-                      <a:endParaRPr lang="en-US" sz="1250" dirty="0">
+                      <a:endParaRPr lang="en-US" sz="1100" dirty="0">
                         <a:latin typeface="Microsoft YaHei" charset="0"/>
                         <a:ea typeface="Microsoft YaHei" charset="0"/>
                         <a:cs typeface="Microsoft YaHei" charset="0"/>
                       </a:endParaRPr>
                     </a:p>
                   </a:txBody>
-                  <a:tcPr marL="91440" marR="91440" marT="36576" marB="36576" anchor="ctr">
+                  <a:tcPr marL="64008" marR="64008" marT="27432" marB="27432" anchor="ctr">
                     <a:lnL w="9525" cap="flat" cmpd="sng" algn="ctr">
                       <a:solidFill>
                         <a:srgbClr val="D5DCE4"/>
@@ -11139,7 +12899,7 @@
                         <a:buNone/>
                       </a:pPr>
                       <a:r>
-                        <a:rPr lang="en-US" sz="1250" b="1" dirty="0">
+                        <a:rPr lang="en-US" sz="1100" b="1" dirty="0">
                           <a:solidFill>
                             <a:srgbClr val="B4233A"/>
                           </a:solidFill>
@@ -11149,14 +12909,14 @@
                         </a:rPr>
                         <a:t>反驳</a:t>
                       </a:r>
-                      <a:endParaRPr lang="en-US" sz="1250" dirty="0">
+                      <a:endParaRPr lang="en-US" sz="1100" dirty="0">
                         <a:latin typeface="Microsoft YaHei" charset="0"/>
                         <a:ea typeface="Microsoft YaHei" charset="0"/>
                         <a:cs typeface="Microsoft YaHei" charset="0"/>
                       </a:endParaRPr>
                     </a:p>
                   </a:txBody>
-                  <a:tcPr marL="91440" marR="91440" marT="36576" marB="36576" anchor="ctr">
+                  <a:tcPr marL="64008" marR="64008" marT="27432" marB="27432" anchor="ctr">
                     <a:lnL w="9525" cap="flat" cmpd="sng" algn="ctr">
                       <a:solidFill>
                         <a:srgbClr val="D5DCE4"/>
@@ -11207,7 +12967,7 @@
                         <a:buNone/>
                       </a:pPr>
                       <a:r>
-                        <a:rPr lang="en-US" sz="1250" dirty="0">
+                        <a:rPr lang="en-US" sz="1100" dirty="0">
                           <a:solidFill>
                             <a:srgbClr val="1B2533"/>
                           </a:solidFill>
@@ -11215,16 +12975,16 @@
                           <a:ea typeface="Microsoft YaHei" pitchFamily="34" charset="-122"/>
                           <a:cs typeface="Microsoft YaHei" pitchFamily="34" charset="-120"/>
                         </a:rPr>
-                        <a:t>只有“反驳”与校准数据相符</a:t>
+                        <a:t>只有“反驳”说得通</a:t>
                       </a:r>
-                      <a:endParaRPr lang="en-US" sz="1250" dirty="0">
+                      <a:endParaRPr lang="en-US" sz="1100" dirty="0">
                         <a:latin typeface="Microsoft YaHei" charset="0"/>
                         <a:ea typeface="Microsoft YaHei" charset="0"/>
                         <a:cs typeface="Microsoft YaHei" charset="0"/>
                       </a:endParaRPr>
                     </a:p>
                   </a:txBody>
-                  <a:tcPr marL="91440" marR="91440" marT="36576" marB="36576" anchor="ctr">
+                  <a:tcPr marL="64008" marR="64008" marT="27432" marB="27432" anchor="ctr">
                     <a:lnL w="9525" cap="flat" cmpd="sng" algn="ctr">
                       <a:solidFill>
                         <a:srgbClr val="D5DCE4"/>
@@ -11267,7 +13027,7 @@
                   </a:tcPr>
                 </a:tc>
               </a:tr>
-              <a:tr h="384048">
+              <a:tr h="329184">
                 <a:tc>
                   <a:txBody>
                     <a:bodyPr/>
@@ -11277,7 +13037,7 @@
                         <a:buNone/>
                       </a:pPr>
                       <a:r>
-                        <a:rPr lang="en-US" sz="1250" b="1" dirty="0">
+                        <a:rPr lang="en-US" sz="1100" b="1" dirty="0">
                           <a:solidFill>
                             <a:srgbClr val="1B2533"/>
                           </a:solidFill>
@@ -11287,14 +13047,14 @@
                         </a:rPr>
                         <a:t>{ 支持，反驳 }</a:t>
                       </a:r>
-                      <a:endParaRPr lang="en-US" sz="1250" dirty="0">
+                      <a:endParaRPr lang="en-US" sz="1100" dirty="0">
                         <a:latin typeface="Microsoft YaHei" charset="0"/>
                         <a:ea typeface="Microsoft YaHei" charset="0"/>
                         <a:cs typeface="Microsoft YaHei" charset="0"/>
                       </a:endParaRPr>
                     </a:p>
                   </a:txBody>
-                  <a:tcPr marL="91440" marR="91440" marT="36576" marB="36576" anchor="ctr">
+                  <a:tcPr marL="64008" marR="64008" marT="27432" marB="27432" anchor="ctr">
                     <a:lnL w="9525" cap="flat" cmpd="sng" algn="ctr">
                       <a:solidFill>
                         <a:srgbClr val="D5DCE4"/>
@@ -11345,7 +13105,7 @@
                         <a:buNone/>
                       </a:pPr>
                       <a:r>
-                        <a:rPr lang="en-US" sz="1250" b="1" dirty="0">
+                        <a:rPr lang="en-US" sz="1100" b="1" dirty="0">
                           <a:solidFill>
                             <a:srgbClr val="C9792A"/>
                           </a:solidFill>
@@ -11355,14 +13115,14 @@
                         </a:rPr>
                         <a:t>不确定</a:t>
                       </a:r>
-                      <a:endParaRPr lang="en-US" sz="1250" dirty="0">
+                      <a:endParaRPr lang="en-US" sz="1100" dirty="0">
                         <a:latin typeface="Microsoft YaHei" charset="0"/>
                         <a:ea typeface="Microsoft YaHei" charset="0"/>
                         <a:cs typeface="Microsoft YaHei" charset="0"/>
                       </a:endParaRPr>
                     </a:p>
                   </a:txBody>
-                  <a:tcPr marL="91440" marR="91440" marT="36576" marB="36576" anchor="ctr">
+                  <a:tcPr marL="64008" marR="64008" marT="27432" marB="27432" anchor="ctr">
                     <a:lnL w="9525" cap="flat" cmpd="sng" algn="ctr">
                       <a:solidFill>
                         <a:srgbClr val="D5DCE4"/>
@@ -11413,7 +13173,7 @@
                         <a:buNone/>
                       </a:pPr>
                       <a:r>
-                        <a:rPr lang="en-US" sz="1250" dirty="0">
+                        <a:rPr lang="en-US" sz="1100" dirty="0">
                           <a:solidFill>
                             <a:srgbClr val="1B2533"/>
                           </a:solidFill>
@@ -11421,16 +13181,16 @@
                           <a:ea typeface="Microsoft YaHei" pitchFamily="34" charset="-122"/>
                           <a:cs typeface="Microsoft YaHei" pitchFamily="34" charset="-120"/>
                         </a:rPr>
-                        <a:t>证据无法区分两种结果</a:t>
+                        <a:t>证据分不出</a:t>
                       </a:r>
-                      <a:endParaRPr lang="en-US" sz="1250" dirty="0">
+                      <a:endParaRPr lang="en-US" sz="1100" dirty="0">
                         <a:latin typeface="Microsoft YaHei" charset="0"/>
                         <a:ea typeface="Microsoft YaHei" charset="0"/>
                         <a:cs typeface="Microsoft YaHei" charset="0"/>
                       </a:endParaRPr>
                     </a:p>
                   </a:txBody>
-                  <a:tcPr marL="91440" marR="91440" marT="36576" marB="36576" anchor="ctr">
+                  <a:tcPr marL="64008" marR="64008" marT="27432" marB="27432" anchor="ctr">
                     <a:lnL w="9525" cap="flat" cmpd="sng" algn="ctr">
                       <a:solidFill>
                         <a:srgbClr val="D5DCE4"/>
@@ -11473,7 +13233,7 @@
                   </a:tcPr>
                 </a:tc>
               </a:tr>
-              <a:tr h="384048">
+              <a:tr h="329184">
                 <a:tc>
                   <a:txBody>
                     <a:bodyPr/>
@@ -11483,7 +13243,7 @@
                         <a:buNone/>
                       </a:pPr>
                       <a:r>
-                        <a:rPr lang="en-US" sz="1250" b="1" dirty="0">
+                        <a:rPr lang="en-US" sz="1100" b="1" dirty="0">
                           <a:solidFill>
                             <a:srgbClr val="1B2533"/>
                           </a:solidFill>
@@ -11493,14 +13253,14 @@
                         </a:rPr>
                         <a:t>{ }（空）</a:t>
                       </a:r>
-                      <a:endParaRPr lang="en-US" sz="1250" dirty="0">
+                      <a:endParaRPr lang="en-US" sz="1100" dirty="0">
                         <a:latin typeface="Microsoft YaHei" charset="0"/>
                         <a:ea typeface="Microsoft YaHei" charset="0"/>
                         <a:cs typeface="Microsoft YaHei" charset="0"/>
                       </a:endParaRPr>
                     </a:p>
                   </a:txBody>
-                  <a:tcPr marL="91440" marR="91440" marT="36576" marB="36576" anchor="ctr">
+                  <a:tcPr marL="64008" marR="64008" marT="27432" marB="27432" anchor="ctr">
                     <a:lnL w="9525" cap="flat" cmpd="sng" algn="ctr">
                       <a:solidFill>
                         <a:srgbClr val="D5DCE4"/>
@@ -11551,7 +13311,7 @@
                         <a:buNone/>
                       </a:pPr>
                       <a:r>
-                        <a:rPr lang="en-US" sz="1250" b="1" dirty="0">
+                        <a:rPr lang="en-US" sz="1100" b="1" dirty="0">
                           <a:solidFill>
                             <a:srgbClr val="C9792A"/>
                           </a:solidFill>
@@ -11561,14 +13321,14 @@
                         </a:rPr>
                         <a:t>不确定</a:t>
                       </a:r>
-                      <a:endParaRPr lang="en-US" sz="1250" dirty="0">
+                      <a:endParaRPr lang="en-US" sz="1100" dirty="0">
                         <a:latin typeface="Microsoft YaHei" charset="0"/>
                         <a:ea typeface="Microsoft YaHei" charset="0"/>
                         <a:cs typeface="Microsoft YaHei" charset="0"/>
                       </a:endParaRPr>
                     </a:p>
                   </a:txBody>
-                  <a:tcPr marL="91440" marR="91440" marT="36576" marB="36576" anchor="ctr">
+                  <a:tcPr marL="64008" marR="64008" marT="27432" marB="27432" anchor="ctr">
                     <a:lnL w="9525" cap="flat" cmpd="sng" algn="ctr">
                       <a:solidFill>
                         <a:srgbClr val="D5DCE4"/>
@@ -11619,7 +13379,7 @@
                         <a:buNone/>
                       </a:pPr>
                       <a:r>
-                        <a:rPr lang="en-US" sz="1250" dirty="0">
+                        <a:rPr lang="en-US" sz="1100" dirty="0">
                           <a:solidFill>
                             <a:srgbClr val="1B2533"/>
                           </a:solidFill>
@@ -11627,16 +13387,16 @@
                           <a:ea typeface="Microsoft YaHei" pitchFamily="34" charset="-122"/>
                           <a:cs typeface="Microsoft YaHei" pitchFamily="34" charset="-120"/>
                         </a:rPr>
-                        <a:t>情况罕见，需人工复核</a:t>
+                        <a:t>罕见，需人工复核</a:t>
                       </a:r>
-                      <a:endParaRPr lang="en-US" sz="1250" dirty="0">
+                      <a:endParaRPr lang="en-US" sz="1100" dirty="0">
                         <a:latin typeface="Microsoft YaHei" charset="0"/>
                         <a:ea typeface="Microsoft YaHei" charset="0"/>
                         <a:cs typeface="Microsoft YaHei" charset="0"/>
                       </a:endParaRPr>
                     </a:p>
                   </a:txBody>
-                  <a:tcPr marL="91440" marR="91440" marT="36576" marB="36576" anchor="ctr">
+                  <a:tcPr marL="64008" marR="64008" marT="27432" marB="27432" anchor="ctr">
                     <a:lnL w="9525" cap="flat" cmpd="sng" algn="ctr">
                       <a:solidFill>
                         <a:srgbClr val="D5DCE4"/>
@@ -11685,14 +13445,14 @@
       </p:graphicFrame>
       <p:sp>
         <p:nvSpPr>
-          <p:cNvPr id="16" name="label-150"/>
+          <p:cNvPr id="30" name="label-165"/>
           <p:cNvSpPr txBox="1"/>
           <p:nvPr/>
         </p:nvSpPr>
         <p:spPr>
           <a:xfrm>
-            <a:off x="6507328" y="5120640"/>
-            <a:ext cx="4861408" cy="914400"/>
+            <a:off x="8001000" y="5257800"/>
+            <a:ext cx="3367735" cy="731520"/>
           </a:xfrm>
           <a:prstGeom prst="rect">
             <a:avLst/>
@@ -11708,14 +13468,50 @@
               <a:buNone/>
             </a:pPr>
             <a:r>
-              <a:rPr lang="en-US" sz="1250" dirty="0">
+              <a:rPr lang="en-US" sz="1100" dirty="0">
                 <a:solidFill>
                   <a:schemeClr val="tx1"/>
                 </a:solidFill>
               </a:rPr>
-              <a:t>校准后每一类的出错率不超过 α（如 10%）；未校准时界面明确显示“未校准”，不声称覆盖率。评分只看证据，与靶点名称无关。</a:t>
-            </a:r>
-            <a:endParaRPr lang="en-US" sz="1250" dirty="0"/>
+              <a:t>校准后每类出错率不超过 α（如 10%）；未校准时界面明确显示“未校准”。评分只看证据，与靶点名称无关。</a:t>
+            </a:r>
+            <a:endParaRPr lang="en-US" sz="1100" dirty="0"/>
+          </a:p>
+        </p:txBody>
+      </p:sp>
+      <p:sp>
+        <p:nvSpPr>
+          <p:cNvPr id="31" name="label-166"/>
+          <p:cNvSpPr txBox="1"/>
+          <p:nvPr/>
+        </p:nvSpPr>
+        <p:spPr>
+          <a:xfrm>
+            <a:off x="548640" y="6153912"/>
+            <a:ext cx="11094415" cy="274320"/>
+          </a:xfrm>
+          <a:prstGeom prst="rect">
+            <a:avLst/>
+          </a:prstGeom>
+          <a:noFill/>
+          <a:ln/>
+        </p:spPr>
+        <p:txBody>
+          <a:bodyPr wrap="square" lIns="0" tIns="0" rIns="0" bIns="0" rtlCol="0" anchor="t"/>
+          <a:lstStyle/>
+          <a:p>
+            <a:pPr algn="l" indent="0" marL="0">
+              <a:buNone/>
+            </a:pPr>
+            <a:r>
+              <a:rPr lang="en-US" sz="1000" dirty="0">
+                <a:solidFill>
+                  <a:schemeClr val="accent6"/>
+                </a:solidFill>
+              </a:rPr>
+              <a:t>说明：结果概率表目前为人工设定的先验，正式实验前需用标注数据估计（已提供估计函数）；专家意见作为起点的接口已实现，目前每个假设分支从 50 / 50 起步。</a:t>
+            </a:r>
+            <a:endParaRPr lang="en-US" sz="1000" dirty="0"/>
           </a:p>
         </p:txBody>
       </p:sp>
@@ -11867,7 +13663,7 @@
       </p:sp>
       <p:sp>
         <p:nvSpPr>
-          <p:cNvPr id="4" name="card-151"/>
+          <p:cNvPr id="4" name="card-167"/>
           <p:cNvSpPr/>
           <p:nvPr/>
         </p:nvSpPr>
@@ -11894,7 +13690,7 @@
       </p:sp>
       <p:sp>
         <p:nvSpPr>
-          <p:cNvPr id="5" name="tag-152"/>
+          <p:cNvPr id="5" name="tag-168"/>
           <p:cNvSpPr/>
           <p:nvPr/>
         </p:nvSpPr>
@@ -11938,7 +13734,7 @@
       </p:sp>
       <p:sp>
         <p:nvSpPr>
-          <p:cNvPr id="6" name="label-153"/>
+          <p:cNvPr id="6" name="label-169"/>
           <p:cNvSpPr txBox="1"/>
           <p:nvPr/>
         </p:nvSpPr>
@@ -11974,7 +13770,7 @@
       </p:sp>
       <p:sp>
         <p:nvSpPr>
-          <p:cNvPr id="7" name="box-154"/>
+          <p:cNvPr id="7" name="box-170"/>
           <p:cNvSpPr/>
           <p:nvPr/>
         </p:nvSpPr>
@@ -12018,7 +13814,7 @@
       </p:sp>
       <p:sp>
         <p:nvSpPr>
-          <p:cNvPr id="8" name="arrow-155"/>
+          <p:cNvPr id="8" name="arrow-171"/>
           <p:cNvSpPr/>
           <p:nvPr/>
         </p:nvSpPr>
@@ -12042,7 +13838,7 @@
       </p:sp>
       <p:sp>
         <p:nvSpPr>
-          <p:cNvPr id="9" name="box-156"/>
+          <p:cNvPr id="9" name="box-172"/>
           <p:cNvSpPr/>
           <p:nvPr/>
         </p:nvSpPr>
@@ -12086,7 +13882,7 @@
       </p:sp>
       <p:sp>
         <p:nvSpPr>
-          <p:cNvPr id="10" name="arrow-157"/>
+          <p:cNvPr id="10" name="arrow-173"/>
           <p:cNvSpPr/>
           <p:nvPr/>
         </p:nvSpPr>
@@ -12110,7 +13906,7 @@
       </p:sp>
       <p:sp>
         <p:nvSpPr>
-          <p:cNvPr id="11" name="box-158"/>
+          <p:cNvPr id="11" name="box-174"/>
           <p:cNvSpPr/>
           <p:nvPr/>
         </p:nvSpPr>
@@ -12154,7 +13950,7 @@
       </p:sp>
       <p:sp>
         <p:nvSpPr>
-          <p:cNvPr id="12" name="arrow-159"/>
+          <p:cNvPr id="12" name="arrow-175"/>
           <p:cNvSpPr/>
           <p:nvPr/>
         </p:nvSpPr>
@@ -12178,7 +13974,7 @@
       </p:sp>
       <p:sp>
         <p:nvSpPr>
-          <p:cNvPr id="13" name="box-160"/>
+          <p:cNvPr id="13" name="box-176"/>
           <p:cNvSpPr/>
           <p:nvPr/>
         </p:nvSpPr>
@@ -12222,7 +14018,7 @@
       </p:sp>
       <p:sp>
         <p:nvSpPr>
-          <p:cNvPr id="14" name="arrow-161"/>
+          <p:cNvPr id="14" name="arrow-177"/>
           <p:cNvSpPr/>
           <p:nvPr/>
         </p:nvSpPr>
@@ -12246,7 +14042,7 @@
       </p:sp>
       <p:sp>
         <p:nvSpPr>
-          <p:cNvPr id="15" name="box-162"/>
+          <p:cNvPr id="15" name="box-178"/>
           <p:cNvSpPr/>
           <p:nvPr/>
         </p:nvSpPr>
@@ -12290,7 +14086,7 @@
       </p:sp>
       <p:sp>
         <p:nvSpPr>
-          <p:cNvPr id="16" name="bullets-163"/>
+          <p:cNvPr id="16" name="bullets-179"/>
           <p:cNvSpPr txBox="1"/>
           <p:nvPr/>
         </p:nvSpPr>
@@ -12366,7 +14162,7 @@
       </p:sp>
       <p:sp>
         <p:nvSpPr>
-          <p:cNvPr id="17" name="label-164"/>
+          <p:cNvPr id="17" name="label-180"/>
           <p:cNvSpPr txBox="1"/>
           <p:nvPr/>
         </p:nvSpPr>
@@ -12402,7 +14198,7 @@
       </p:sp>
       <p:sp>
         <p:nvSpPr>
-          <p:cNvPr id="18" name="label-165"/>
+          <p:cNvPr id="18" name="label-181"/>
           <p:cNvSpPr txBox="1"/>
           <p:nvPr/>
         </p:nvSpPr>
@@ -12438,7 +14234,7 @@
       </p:sp>
       <p:sp>
         <p:nvSpPr>
-          <p:cNvPr id="19" name="label-166"/>
+          <p:cNvPr id="19" name="label-182"/>
           <p:cNvSpPr txBox="1"/>
           <p:nvPr/>
         </p:nvSpPr>
@@ -12474,7 +14270,7 @@
       </p:sp>
       <p:sp>
         <p:nvSpPr>
-          <p:cNvPr id="20" name="label-167"/>
+          <p:cNvPr id="20" name="label-183"/>
           <p:cNvSpPr txBox="1"/>
           <p:nvPr/>
         </p:nvSpPr>
@@ -12510,7 +14306,7 @@
       </p:sp>
       <p:sp>
         <p:nvSpPr>
-          <p:cNvPr id="21" name="label-168"/>
+          <p:cNvPr id="21" name="label-184"/>
           <p:cNvSpPr txBox="1"/>
           <p:nvPr/>
         </p:nvSpPr>
@@ -12546,7 +14342,7 @@
       </p:sp>
       <p:sp>
         <p:nvSpPr>
-          <p:cNvPr id="22" name="label-169"/>
+          <p:cNvPr id="22" name="label-185"/>
           <p:cNvSpPr txBox="1"/>
           <p:nvPr/>
         </p:nvSpPr>
@@ -12582,7 +14378,7 @@
       </p:sp>
       <p:sp>
         <p:nvSpPr>
-          <p:cNvPr id="23" name="card-170"/>
+          <p:cNvPr id="23" name="card-186"/>
           <p:cNvSpPr/>
           <p:nvPr/>
         </p:nvSpPr>
@@ -12609,7 +14405,7 @@
       </p:sp>
       <p:sp>
         <p:nvSpPr>
-          <p:cNvPr id="24" name="tag-171"/>
+          <p:cNvPr id="24" name="tag-187"/>
           <p:cNvSpPr/>
           <p:nvPr/>
         </p:nvSpPr>
@@ -12653,7 +14449,7 @@
       </p:sp>
       <p:sp>
         <p:nvSpPr>
-          <p:cNvPr id="25" name="label-172"/>
+          <p:cNvPr id="25" name="label-188"/>
           <p:cNvSpPr txBox="1"/>
           <p:nvPr/>
         </p:nvSpPr>
@@ -12689,7 +14485,7 @@
       </p:sp>
       <p:sp>
         <p:nvSpPr>
-          <p:cNvPr id="26" name="box-173"/>
+          <p:cNvPr id="26" name="box-189"/>
           <p:cNvSpPr/>
           <p:nvPr/>
         </p:nvSpPr>
@@ -12733,7 +14529,7 @@
       </p:sp>
       <p:sp>
         <p:nvSpPr>
-          <p:cNvPr id="27" name="arrow-174"/>
+          <p:cNvPr id="27" name="arrow-190"/>
           <p:cNvSpPr/>
           <p:nvPr/>
         </p:nvSpPr>
@@ -12757,7 +14553,7 @@
       </p:sp>
       <p:sp>
         <p:nvSpPr>
-          <p:cNvPr id="28" name="box-175"/>
+          <p:cNvPr id="28" name="box-191"/>
           <p:cNvSpPr/>
           <p:nvPr/>
         </p:nvSpPr>
@@ -12801,7 +14597,7 @@
       </p:sp>
       <p:sp>
         <p:nvSpPr>
-          <p:cNvPr id="29" name="arrow-176"/>
+          <p:cNvPr id="29" name="arrow-192"/>
           <p:cNvSpPr/>
           <p:nvPr/>
         </p:nvSpPr>
@@ -12825,7 +14621,7 @@
       </p:sp>
       <p:sp>
         <p:nvSpPr>
-          <p:cNvPr id="30" name="arrow-177"/>
+          <p:cNvPr id="30" name="arrow-193"/>
           <p:cNvSpPr/>
           <p:nvPr/>
         </p:nvSpPr>
@@ -12849,7 +14645,7 @@
       </p:sp>
       <p:sp>
         <p:nvSpPr>
-          <p:cNvPr id="31" name="box-178"/>
+          <p:cNvPr id="31" name="box-194"/>
           <p:cNvSpPr/>
           <p:nvPr/>
         </p:nvSpPr>
@@ -12893,7 +14689,7 @@
       </p:sp>
       <p:sp>
         <p:nvSpPr>
-          <p:cNvPr id="32" name="box-179"/>
+          <p:cNvPr id="32" name="box-195"/>
           <p:cNvSpPr/>
           <p:nvPr/>
         </p:nvSpPr>
@@ -12937,7 +14733,7 @@
       </p:sp>
       <p:sp>
         <p:nvSpPr>
-          <p:cNvPr id="33" name="bullets-180"/>
+          <p:cNvPr id="33" name="bullets-196"/>
           <p:cNvSpPr txBox="1"/>
           <p:nvPr/>
         </p:nvSpPr>
@@ -13013,7 +14809,7 @@
       </p:sp>
       <p:sp>
         <p:nvSpPr>
-          <p:cNvPr id="34" name="label-181"/>
+          <p:cNvPr id="34" name="label-197"/>
           <p:cNvSpPr txBox="1"/>
           <p:nvPr/>
         </p:nvSpPr>
@@ -13195,7 +14991,7 @@
       </p:sp>
       <p:sp>
         <p:nvSpPr>
-          <p:cNvPr id="4" name="label-182"/>
+          <p:cNvPr id="4" name="label-198"/>
           <p:cNvSpPr txBox="1"/>
           <p:nvPr/>
         </p:nvSpPr>
@@ -13231,7 +15027,7 @@
       </p:sp>
       <p:sp>
         <p:nvSpPr>
-          <p:cNvPr id="5" name="badge-183"/>
+          <p:cNvPr id="5" name="badge-199"/>
           <p:cNvSpPr/>
           <p:nvPr/>
         </p:nvSpPr>
@@ -13273,7 +15069,7 @@
       </p:sp>
       <p:sp>
         <p:nvSpPr>
-          <p:cNvPr id="6" name="label-184"/>
+          <p:cNvPr id="6" name="label-200"/>
           <p:cNvSpPr txBox="1"/>
           <p:nvPr/>
         </p:nvSpPr>
@@ -13309,7 +15105,7 @@
       </p:sp>
       <p:sp>
         <p:nvSpPr>
-          <p:cNvPr id="7" name="label-185"/>
+          <p:cNvPr id="7" name="label-201"/>
           <p:cNvSpPr txBox="1"/>
           <p:nvPr/>
         </p:nvSpPr>
@@ -13345,7 +15141,7 @@
       </p:sp>
       <p:sp>
         <p:nvSpPr>
-          <p:cNvPr id="8" name="badge-186"/>
+          <p:cNvPr id="8" name="badge-202"/>
           <p:cNvSpPr/>
           <p:nvPr/>
         </p:nvSpPr>
@@ -13387,7 +15183,7 @@
       </p:sp>
       <p:sp>
         <p:nvSpPr>
-          <p:cNvPr id="9" name="label-187"/>
+          <p:cNvPr id="9" name="label-203"/>
           <p:cNvSpPr txBox="1"/>
           <p:nvPr/>
         </p:nvSpPr>
@@ -13423,7 +15219,7 @@
       </p:sp>
       <p:sp>
         <p:nvSpPr>
-          <p:cNvPr id="10" name="label-188"/>
+          <p:cNvPr id="10" name="label-204"/>
           <p:cNvSpPr txBox="1"/>
           <p:nvPr/>
         </p:nvSpPr>
@@ -13459,7 +15255,7 @@
       </p:sp>
       <p:sp>
         <p:nvSpPr>
-          <p:cNvPr id="11" name="badge-189"/>
+          <p:cNvPr id="11" name="badge-205"/>
           <p:cNvSpPr/>
           <p:nvPr/>
         </p:nvSpPr>
@@ -13501,7 +15297,7 @@
       </p:sp>
       <p:sp>
         <p:nvSpPr>
-          <p:cNvPr id="12" name="label-190"/>
+          <p:cNvPr id="12" name="label-206"/>
           <p:cNvSpPr txBox="1"/>
           <p:nvPr/>
         </p:nvSpPr>
@@ -13537,7 +15333,7 @@
       </p:sp>
       <p:sp>
         <p:nvSpPr>
-          <p:cNvPr id="13" name="label-191"/>
+          <p:cNvPr id="13" name="label-207"/>
           <p:cNvSpPr txBox="1"/>
           <p:nvPr/>
         </p:nvSpPr>
@@ -13573,7 +15369,7 @@
       </p:sp>
       <p:pic>
         <p:nvPicPr>
-          <p:cNvPr id="14" name="screenshot-192" descr="自动检测到本机的 Claude Code">    </p:cNvPr>
+          <p:cNvPr id="14" name="screenshot-208" descr="自动检测到本机的 Claude Code">    </p:cNvPr>
           <p:cNvPicPr>
             <a:picLocks noChangeAspect="1"/>
           </p:cNvPicPr>
@@ -13597,7 +15393,7 @@
       </p:pic>
       <p:sp>
         <p:nvSpPr>
-          <p:cNvPr id="15" name="frame-193"/>
+          <p:cNvPr id="15" name="frame-209"/>
           <p:cNvSpPr/>
           <p:nvPr/>
         </p:nvSpPr>
@@ -13624,7 +15420,7 @@
       </p:sp>
       <p:sp>
         <p:nvSpPr>
-          <p:cNvPr id="16" name="label-194"/>
+          <p:cNvPr id="16" name="label-210"/>
           <p:cNvSpPr txBox="1"/>
           <p:nvPr/>
         </p:nvSpPr>
@@ -13660,7 +15456,7 @@
       </p:sp>
       <p:pic>
         <p:nvPicPr>
-          <p:cNvPr id="17" name="screenshot-195" descr="usage-ask-mention.jpg">    </p:cNvPr>
+          <p:cNvPr id="17" name="screenshot-211" descr="usage-ask-mention.jpg">    </p:cNvPr>
           <p:cNvPicPr>
             <a:picLocks noChangeAspect="1"/>
           </p:cNvPicPr>
@@ -13684,7 +15480,7 @@
       </p:pic>
       <p:sp>
         <p:nvSpPr>
-          <p:cNvPr id="18" name="frame-196"/>
+          <p:cNvPr id="18" name="frame-212"/>
           <p:cNvSpPr/>
           <p:nvPr/>
         </p:nvSpPr>
@@ -13711,7 +15507,7 @@
       </p:sp>
       <p:pic>
         <p:nvPicPr>
-          <p:cNvPr id="19" name="screenshot-197" descr="@ 点名专家；工具调用逐步可查">    </p:cNvPr>
+          <p:cNvPr id="19" name="screenshot-213" descr="@ 点名专家；工具调用逐步可查">    </p:cNvPr>
           <p:cNvPicPr>
             <a:picLocks noChangeAspect="1"/>
           </p:cNvPicPr>
@@ -13735,7 +15531,7 @@
       </p:pic>
       <p:sp>
         <p:nvSpPr>
-          <p:cNvPr id="20" name="frame-198"/>
+          <p:cNvPr id="20" name="frame-214"/>
           <p:cNvSpPr/>
           <p:nvPr/>
         </p:nvSpPr>
@@ -13762,7 +15558,7 @@
       </p:sp>
       <p:sp>
         <p:nvSpPr>
-          <p:cNvPr id="21" name="label-199"/>
+          <p:cNvPr id="21" name="label-215"/>
           <p:cNvSpPr txBox="1"/>
           <p:nvPr/>
         </p:nvSpPr>
@@ -13798,7 +15594,7 @@
       </p:sp>
       <p:pic>
         <p:nvPicPr>
-          <p:cNvPr id="22" name="screenshot-200" descr="证据账本：状态、来源、完整历史">    </p:cNvPr>
+          <p:cNvPr id="22" name="screenshot-216" descr="证据账本：状态、来源、完整历史">    </p:cNvPr>
           <p:cNvPicPr>
             <a:picLocks noChangeAspect="1"/>
           </p:cNvPicPr>
@@ -13822,7 +15618,7 @@
       </p:pic>
       <p:sp>
         <p:nvSpPr>
-          <p:cNvPr id="23" name="frame-201"/>
+          <p:cNvPr id="23" name="frame-217"/>
           <p:cNvSpPr/>
           <p:nvPr/>
         </p:nvSpPr>
@@ -13849,7 +15645,7 @@
       </p:sp>
       <p:sp>
         <p:nvSpPr>
-          <p:cNvPr id="24" name="label-202"/>
+          <p:cNvPr id="24" name="label-218"/>
           <p:cNvSpPr txBox="1"/>
           <p:nvPr/>
         </p:nvSpPr>
@@ -13885,7 +15681,7 @@
       </p:sp>
       <p:sp>
         <p:nvSpPr>
-          <p:cNvPr id="25" name="label-203"/>
+          <p:cNvPr id="25" name="label-219"/>
           <p:cNvSpPr txBox="1"/>
           <p:nvPr/>
         </p:nvSpPr>

--- a/docs/presentation/MedScience-3.0-设计汇报.pptx
+++ b/docs/presentation/MedScience-3.0-设计汇报.pptx
@@ -15,9 +15,10 @@
     <p:sldId id="263" r:id="rId9"/>
     <p:sldId id="264" r:id="rId10"/>
     <p:sldId id="265" r:id="rId11"/>
+    <p:sldId id="266" r:id="rId12"/>
   </p:sldIdLst>
   <p:notesMasterIdLst>
-    <p:notesMasterId r:id="rId12"/>
+    <p:notesMasterId r:id="rId13"/>
   </p:notesMasterIdLst>
   <p:sldSz cx="12192000" cy="6858000"/>
   <p:notesSz cx="6858000" cy="12192000"/>
@@ -116,34 +117,35 @@
   <p:extLst>
     <p:ext uri="{521415D9-36F7-43E2-AB2F-B90AF26B5E84}">
       <p14:sectionLst xmlns:p14="http://schemas.microsoft.com/office/powerpoint/2010/main">
-        <p14:section name="开篇" id="{30cd2282-8c3b-bf45-568b-6976de948efb}">
+        <p14:section name="开篇" id="{acb74e37-9c4e-7c4f-c908-bac3683bfd3d}">
           <p14:sldIdLst>
             <p14:sldId id="256"/>
           </p14:sldIdLst>
         </p14:section>
-        <p14:section name="为什么" id="{e8846e3b-1c05-a9da-fc79-000a8cc82f83}">
+        <p14:section name="为什么" id="{b1d40a9f-efc3-837c-6c94-e791f2897bfb}">
           <p14:sldIdLst>
             <p14:sldId id="257"/>
             <p14:sldId id="258"/>
           </p14:sldIdLst>
         </p14:section>
-        <p14:section name="怎么设计" id="{6d02e187-1e23-22ea-a2ba-d733955ea61d}">
+        <p14:section name="怎么设计" id="{51d15244-e086-9867-c2ec-c2686594f1a6}">
           <p14:sldIdLst>
             <p14:sldId id="259"/>
             <p14:sldId id="260"/>
             <p14:sldId id="261"/>
             <p14:sldId id="262"/>
             <p14:sldId id="263"/>
-          </p14:sldIdLst>
-        </p14:section>
-        <p14:section name="怎么用" id="{1caef6a9-7ff0-7aaa-f0be-84f2742cf5fe}">
-          <p14:sldIdLst>
             <p14:sldId id="264"/>
           </p14:sldIdLst>
         </p14:section>
-        <p14:section name="下一步" id="{d3da458c-6392-84e5-e3b3-3f45159ab0b4}">
+        <p14:section name="怎么用" id="{028fb603-29a9-7cd6-c483-2ce86833ef5c}">
           <p14:sldIdLst>
             <p14:sldId id="265"/>
+          </p14:sldIdLst>
+        </p14:section>
+        <p14:section name="下一步" id="{00ddf30f-863a-08a1-7a12-cb7de6a2ec62}">
+          <p14:sldIdLst>
+            <p14:sldId id="266"/>
           </p14:sldIdLst>
         </p14:section>
       </p14:sectionLst>
@@ -153,236 +155,6 @@
     </p:ext>
   </p:extLst>
 </p:presentation>
-</file>
-
-<file path=ppt/charts/chart1.xml><?xml version="1.0" encoding="utf-8"?>
-<c:chartSpace xmlns:c="http://schemas.openxmlformats.org/drawingml/2006/chart" xmlns:a="http://schemas.openxmlformats.org/drawingml/2006/main" xmlns:r="http://schemas.openxmlformats.org/officeDocument/2006/relationships">
-  <c:date1904 val="0"/>
-  <c:roundedCorners val="1"/>
-  <c:chart>
-    <c:autoTitleDeleted val="1"/>
-    <c:plotArea>
-      <c:layout/>
-      <c:barChart>
-        <c:barDir val="bar"/>
-        <c:grouping val="clustered"/>
-        <c:varyColors val="0"/>
-        <c:ser>
-          <c:idx val="0"/>
-          <c:order val="0"/>
-          <c:tx>
-            <c:strRef>
-              <c:f>Sheet1!$B$1</c:f>
-              <c:strCache>
-                <c:ptCount val="1"/>
-                <c:pt idx="0">
-                  <c:v>预期信息增益</c:v>
-                </c:pt>
-              </c:strCache>
-            </c:strRef>
-          </c:tx>
-          <c:spPr>
-            <a:solidFill>
-              <a:srgbClr val="0E8A7E"/>
-            </a:solidFill>
-            <a:effectLst/>
-          </c:spPr>
-          <c:invertIfNegative val="0"/>
-          <c:dLbls>
-            <c:numFmt formatCode="0.000" sourceLinked="0"/>
-            <c:txPr>
-              <a:bodyPr/>
-              <a:lstStyle/>
-              <a:p>
-                <a:pPr>
-                  <a:defRPr b="0" i="0" strike="noStrike" sz="1000" u="none">
-                    <a:solidFill>
-                      <a:srgbClr val="1B2533"/>
-                    </a:solidFill>
-                    <a:latin typeface="+mn-lt"/>
-                  </a:defRPr>
-                </a:pPr>
-              </a:p>
-            </c:txPr>
-            <c:showLegendKey val="0"/>
-            <c:showVal val="1"/>
-            <c:showCatName val="0"/>
-            <c:showSerName val="0"/>
-            <c:showPercent val="0"/>
-            <c:showBubbleSize val="0"/>
-            <c:showLeaderLines val="0"/>
-          </c:dLbls>
-          <c:cat>
-            <c:multiLvlStrRef>
-              <c:f>Sheet1!$A$2:$A$4</c:f>
-              <c:multiLvlStrCache>
-                <c:ptCount val="3"/>
-                <c:lvl>
-                  <c:pt idx="0">
-                    <c:v>UniProt 序列</c:v>
-                  </c:pt>
-                  <c:pt idx="1">
-                    <c:v>临床试验登记</c:v>
-                  </c:pt>
-                  <c:pt idx="2">
-                    <c:v>ChEMBL 活性</c:v>
-                  </c:pt>
-                </c:lvl>
-              </c:multiLvlStrCache>
-            </c:multiLvlStrRef>
-          </c:cat>
-          <c:val>
-            <c:numRef>
-              <c:f>Sheet1!$B$2:$B$4</c:f>
-              <c:numCache>
-                <c:formatCode>General</c:formatCode>
-                <c:ptCount val="3"/>
-                <c:pt idx="0">
-                  <c:v>0.039</c:v>
-                </c:pt>
-                <c:pt idx="1">
-                  <c:v>0.105</c:v>
-                </c:pt>
-                <c:pt idx="2">
-                  <c:v>0.259</c:v>
-                </c:pt>
-              </c:numCache>
-            </c:numRef>
-          </c:val>
-        </c:ser>
-        <c:dLbls>
-          <c:numFmt formatCode="0.000" sourceLinked="0"/>
-          <c:txPr>
-            <a:bodyPr/>
-            <a:lstStyle/>
-            <a:p>
-              <a:pPr>
-                <a:defRPr b="0" i="0" strike="noStrike" sz="1000" u="none">
-                  <a:solidFill>
-                    <a:srgbClr val="1B2533"/>
-                  </a:solidFill>
-                  <a:latin typeface="+mn-lt"/>
-                </a:defRPr>
-              </a:pPr>
-            </a:p>
-          </c:txPr>
-          <c:showLegendKey val="0"/>
-          <c:showVal val="1"/>
-          <c:showCatName val="0"/>
-          <c:showSerName val="0"/>
-          <c:showPercent val="0"/>
-          <c:showBubbleSize val="0"/>
-          <c:showLeaderLines val="0"/>
-        </c:dLbls>
-        <c:gapWidth val="50"/>
-        <c:overlap val="0"/>
-        <c:axId val="2094734554"/>
-        <c:axId val="2094734552"/>
-        <c:axId val="2094734556"/>
-      </c:barChart>
-      <c:catAx>
-        <c:axId val="2094734554"/>
-        <c:scaling>
-          <c:orientation val="minMax"/>
-        </c:scaling>
-        <c:delete val="0"/>
-        <c:axPos val="l"/>
-        <c:numFmt formatCode="General" sourceLinked="1"/>
-        <c:majorTickMark val="out"/>
-        <c:minorTickMark val="none"/>
-        <c:tickLblPos val="nextTo"/>
-        <c:spPr>
-          <a:ln w="12700" cap="flat">
-            <a:solidFill>
-              <a:srgbClr val="888888"/>
-            </a:solidFill>
-            <a:prstDash val="solid"/>
-            <a:round/>
-          </a:ln>
-        </c:spPr>
-        <c:txPr>
-          <a:bodyPr/>
-          <a:lstStyle/>
-          <a:p>
-            <a:pPr>
-              <a:defRPr sz="1000" b="0" i="0" u="none" strike="noStrike">
-                <a:solidFill>
-                  <a:srgbClr val="1B2533"/>
-                </a:solidFill>
-                <a:latin typeface="+mn-lt"/>
-              </a:defRPr>
-            </a:pPr>
-            <a:endParaRPr lang="en-US"/>
-          </a:p>
-        </c:txPr>
-        <c:crossAx val="2094734552"/>
-        <c:crosses val="autoZero"/>
-        <c:auto val="1"/>
-        <c:lblAlgn val="ctr"/>
-        <c:noMultiLvlLbl val="1"/>
-      </c:catAx>
-      <c:valAx>
-        <c:axId val="2094734552"/>
-        <c:scaling>
-          <c:orientation val="minMax"/>
-          <c:max val="0.33"/>
-        </c:scaling>
-        <c:delete val="1"/>
-        <c:axPos val="b"/>
-        <c:numFmt formatCode="General" sourceLinked="0"/>
-        <c:majorTickMark val="out"/>
-        <c:minorTickMark val="none"/>
-        <c:tickLblPos val="low"/>
-        <c:spPr>
-          <a:ln w="12700" cap="flat">
-            <a:solidFill>
-              <a:srgbClr val="888888"/>
-            </a:solidFill>
-            <a:prstDash val="solid"/>
-            <a:round/>
-          </a:ln>
-        </c:spPr>
-        <c:txPr>
-          <a:bodyPr/>
-          <a:lstStyle/>
-          <a:p>
-            <a:pPr>
-              <a:defRPr sz="1200" b="0" i="0" u="none" strike="noStrike">
-                <a:solidFill>
-                  <a:srgbClr val="000000"/>
-                </a:solidFill>
-                <a:latin typeface="Arial"/>
-              </a:defRPr>
-            </a:pPr>
-            <a:endParaRPr lang="en-US"/>
-          </a:p>
-        </c:txPr>
-        <c:crossAx val="2094734554"/>
-        <c:crosses val="autoZero"/>
-        <c:crossBetween val="between"/>
-      </c:valAx>
-      <c:spPr>
-        <a:noFill/>
-        <a:ln>
-          <a:noFill/>
-        </a:ln>
-        <a:effectLst/>
-      </c:spPr>
-    </c:plotArea>
-    <c:plotVisOnly val="1"/>
-    <c:dispBlanksAs val="span"/>
-  </c:chart>
-  <c:spPr>
-    <a:noFill/>
-    <a:ln>
-      <a:noFill/>
-    </a:ln>
-    <a:effectLst/>
-  </c:spPr>
-  <c:externalData r:id="rId1">
-    <c:autoUpdate val="0"/>
-  </c:externalData>
-</c:chartSpace>
 </file>
 
 <file path=ppt/notesMasters/notesMaster1.xml><?xml version="1.0" encoding="utf-8"?>
@@ -868,7 +640,7 @@
           <a:p>
             <a:r>
               <a:rPr lang="en-US" dirty="0"/>
-              <a:t>最后是进展和请求。设计已全部落地并发布，可以下载试用；尚待验证的是有效性。最需要的支持是领域专家标注一批真实假设，用于校准和评测，然后做同等预算的对照实验，结果稳定后发布正式版并整理论文。</a:t>
+              <a:t>四步即可：安装、配置运行时、提问、查看证据。左图是运行时自动检测到本机的 Claude Code；中间是用 @ 点名专家，以及智能体调用工具的记录；右图是证据账本，每条证据的状态、来源和完整历史都能查到。截图都来自真实运行的 3.0 应用。</a:t>
             </a:r>
             <a:endParaRPr lang="en-US" dirty="0"/>
           </a:p>
@@ -892,6 +664,94 @@
             <a:fld id="{F7021451-1387-4CA6-816F-3879F97B5CBC}" type="slidenum">
               <a:rPr lang="en-US"/>
               <a:t>10</a:t>
+            </a:fld>
+            <a:endParaRPr lang="en-US"/>
+          </a:p>
+        </p:txBody>
+      </p:sp>
+    </p:spTree>
+    <p:extLst>
+      <p:ext uri="{BB962C8B-B14F-4D97-AF65-F5344CB8AC3E}">
+        <p14:creationId xmlns:p14="http://schemas.microsoft.com/office/powerpoint/2010/main" val="1024086991"/>
+      </p:ext>
+    </p:extLst>
+  </p:cSld>
+  <p:clrMapOvr>
+    <a:masterClrMapping/>
+  </p:clrMapOvr>
+</p:notes>
+</file>
+
+<file path=ppt/notesSlides/notesSlide11.xml><?xml version="1.0" encoding="utf-8"?>
+<p:notes xmlns:a="http://schemas.openxmlformats.org/drawingml/2006/main" xmlns:r="http://schemas.openxmlformats.org/officeDocument/2006/relationships" xmlns:p="http://schemas.openxmlformats.org/presentationml/2006/main">
+  <p:cSld>
+    <p:spTree>
+      <p:nvGrpSpPr>
+        <p:cNvPr id="1" name=""/>
+        <p:cNvGrpSpPr/>
+        <p:nvPr/>
+      </p:nvGrpSpPr>
+      <p:grpSpPr>
+        <a:xfrm>
+          <a:off x="0" y="0"/>
+          <a:ext cx="0" cy="0"/>
+          <a:chOff x="0" y="0"/>
+          <a:chExt cx="0" cy="0"/>
+        </a:xfrm>
+      </p:grpSpPr>
+      <p:sp>
+        <p:nvSpPr>
+          <p:cNvPr id="2" name="Slide Image Placeholder 1"/>
+          <p:cNvSpPr>
+            <a:spLocks noGrp="1" noRot="1" noChangeAspect="1"/>
+          </p:cNvSpPr>
+          <p:nvPr>
+            <p:ph type="sldImg"/>
+          </p:nvPr>
+        </p:nvSpPr>
+        <p:spPr/>
+      </p:sp>
+      <p:sp>
+        <p:nvSpPr>
+          <p:cNvPr id="3" name="Notes Placeholder 2"/>
+          <p:cNvSpPr>
+            <a:spLocks noGrp="1"/>
+          </p:cNvSpPr>
+          <p:nvPr>
+            <p:ph type="body" idx="1"/>
+          </p:nvPr>
+        </p:nvSpPr>
+        <p:spPr/>
+        <p:txBody>
+          <a:bodyPr/>
+          <a:lstStyle/>
+          <a:p>
+            <a:r>
+              <a:rPr lang="en-US" dirty="0"/>
+              <a:t>最后是进展和请求。设计已全部落地并发布，可以下载试用；尚待验证的是有效性。最需要的支持是领域专家标注一批真实假设，用于校准和评测，然后做同等预算的对照实验，结果稳定后发布正式版并整理论文。</a:t>
+            </a:r>
+            <a:endParaRPr lang="en-US" dirty="0"/>
+          </a:p>
+        </p:txBody>
+      </p:sp>
+      <p:sp>
+        <p:nvSpPr>
+          <p:cNvPr id="4" name="Slide Number Placeholder 3"/>
+          <p:cNvSpPr>
+            <a:spLocks noGrp="1"/>
+          </p:cNvSpPr>
+          <p:nvPr>
+            <p:ph type="sldNum" sz="quarter" idx="10"/>
+          </p:nvPr>
+        </p:nvSpPr>
+        <p:spPr/>
+        <p:txBody>
+          <a:bodyPr/>
+          <a:lstStyle/>
+          <a:p>
+            <a:fld id="{F7021451-1387-4CA6-816F-3879F97B5CBC}" type="slidenum">
+              <a:rPr lang="en-US"/>
+              <a:t>11</a:t>
             </a:fld>
             <a:endParaRPr lang="en-US"/>
           </a:p>
@@ -956,7 +816,7 @@
           <a:p>
             <a:r>
               <a:rPr lang="en-US" dirty="0"/>
-              <a:t>这一页给出全貌：问题是什么、我们怎么做、做到哪一步。后面按“为什么、怎么设计、怎么用、下一步”的顺序展开，共 10 页。</a:t>
+              <a:t>这一页给出全貌：问题是什么、我们怎么做、做到哪一步。后面按“为什么、怎么设计、怎么用、下一步”的顺序展开，共 11 页。</a:t>
             </a:r>
             <a:endParaRPr lang="en-US" dirty="0"/>
           </a:p>
@@ -1220,7 +1080,7 @@
           <a:p>
             <a:r>
               <a:rPr lang="en-US" dirty="0"/>
-              <a:t>上排是一次科研提问的完整路径，每一步下面的小字是这一步产生的数据。绿色四步由 3.0 新增的证据治理层完成。下方是回路：科研结论的依据会被新研究推翻，比如药品因新的安全性试验撤市。证据在账本里被标记后，依赖它的结论在同一操作里自动转为“有争议”，原因写入哈希链，可以审计；恢复证据不会自动恢复结论，需要重新论证。下一页用罗非昔布的完整例子说明。</a:t>
+              <a:t>上排是一次科研提问的完整路径，每一步下面的小字是这一步产生的数据。绿色四步由 3.0 新增的证据治理层完成。下方是回路：科研结论的依据会被新研究推翻，比如药品因新的安全性试验撤市。证据在账本里被标记后，依赖它的结论在同一操作里自动转为“有争议”，原因写入哈希链，可以审计；恢复证据不会自动恢复结论，需要重新论证。后面两页用伏塞洛托和 Makena 两个真实案例说明。</a:t>
             </a:r>
             <a:endParaRPr lang="en-US" dirty="0"/>
           </a:p>
@@ -1308,7 +1168,7 @@
           <a:p>
             <a:r>
               <a:rPr lang="en-US" dirty="0"/>
-              <a:t>这是 3.0 的核心。证据和结论有六种状态，只能沿箭头迁移：新证据先是候选，通过准入门禁才算已验证，否则隔离。关键是依赖级联，用罗非昔布举例：账本里有两条已验证结论，A“可作关节炎长期镇痛”依据上市批准和 VIGOR 试验，B“胃肠道风险低于萘普生”只依据 VIGOR。2004 年 APPROVe 试验显示长期服用心血管风险升高，药品撤市，审查人把“上市批准”证据标为已撤销，A 自动转为有争议，B 不依赖它，保持不变。2005 年期刊对 VIGOR 发布关注声明，导入后自动扫描，B 也转为有争议。整个过程不需要人工逐条排查，每一步的原因都写入哈希链。这个例子已写成自动化测试，文献编号经 PubMed 核实。</a:t>
+              <a:t>这是 3.0 的核心。证据和结论有六种状态，只能沿箭头迁移：新证据先是候选，通过准入门禁才算已验证，否则隔离。准入门禁检查的是来源能否追溯、是否过期、数值是否在物理范围内、是否含未授权的患者数据、是否已被撤稿，不评价研究质量本身。关键是依赖级联，用伏塞洛托举例：2019 年它凭 HOPE 试验中血红蛋白升高获得加速批准，账本里有两条已验证结论，A“可用于治疗镰状细胞病”依据批准和 HOPE 试验，B“能提高血红蛋白”只依据 HOPE。2024 年上市后数据显示血管闭塞危象和死亡增多，药品全球撤市，审查人把“批准”证据标为已撤销，A 自动转为有争议；B 不依赖批准，保持不变，因为血红蛋白确实升高了。这正是替代指标改善不等于临床获益的典型例子。这个例子已写成自动化测试，文献编号经 PubMed 核实。</a:t>
             </a:r>
             <a:endParaRPr lang="en-US" dirty="0"/>
           </a:p>
@@ -1396,7 +1256,7 @@
           <a:p>
             <a:r>
               <a:rPr lang="en-US" dirty="0"/>
-              <a:t>左边是信息增益取证。背景：专家意见不一时，与其多轮辩论，不如先做最能分出对错的那次查询，这是贝叶斯实验设计的思路。分歧度：把意见汇成“支持”和“反驳”的概率，用熵除以最大熵，0 是已有定论，1 是五五开。信息增益：每个查询有一张结果概率表，比如 ChEMBL 在假设成立时有 60% 的机会查到强活性，不成立时只有 10%；用它算出查询前后不确定度的预期差值，就是预期信息增益。例子是“TYK2 抑制可用于治疗银屑病”：从五五开出发，ChEMBL 的增益最大，所以先查；查到强活性后支持概率升到 0.86，再查临床试验，升到 0.95，分歧度从 1.0 降到 0.28。UniProt 增益最低，因为无论假设对错靶点几乎都能查到序列。需要说明：概率表目前是人工设定的，正式实验前要用标注数据估计。右边是共形三分判定：用一批已知结果的历史假设校准，结论以“可能成立的结果集合”给出，集合里只有一个答案才下结论；两个都可能就是证据不足。校准后错误率有统计保证，没校准时系统会明确说明。</a:t>
+              <a:t>第二个案例换一个角度：不是药品撤市，而是证据之间互相矛盾。17-羟孕酮己酸酯（Makena）在 2003 年的 Meis 试验中显示能降低复发性早产风险，2011 年据此获得加速批准。确证性试验 PROLONG 在 2019 到 2020 年发表，没有重复出这个效果，FDA 在 2023 年撤销批准。在账本里，PROLONG 作为反证录入后，结论 A 转为“有争议”，但 Meis 试验并没有被删除，两项试验的分歧被如实保留，系统不替人裁决。2023 年批准撤销，新结论 A′“确证试验未见效果”通过验证后取代 A，A 的完整历史仍可查。这个例子同样写成了自动化测试。需要说明：反证录入和结论取代目前通过接口完成，界面上的入口还没有做。</a:t>
             </a:r>
             <a:endParaRPr lang="en-US" dirty="0"/>
           </a:p>
@@ -1484,7 +1344,7 @@
           <a:p>
             <a:r>
               <a:rPr lang="en-US" dirty="0"/>
-              <a:t>左边是多智能体协作：队长拆解任务，成员并行，交接时每条发现都要附证据编号，再过质量门，最后成文。内置 26 位专家、15 个团队模板。右边是本地运行时：很多团队已经买了 ChatGPT（Codex）或 Claude 的订阅，MedScience 可以直接调用本机已登录的命令行工具，沿用现有额度，不需要 API 密钥。注意除 Codex 和 Claude Code 外其他工具是通用接入，并请确认订阅条款允许这样使用。</a:t>
+              <a:t>左边是信息增益取证。先用类比：医生分辨流感和感冒，量体温没用，因为两种病都发烧；流感抗原检测结果差别大，所以先做。信息增益就是给每项查询“能把两种可能分开多少”打分。例子是“GLP-1 受体激动剂可用于减重”，起点五五开。看表格：查靶点序列，假设成立时 95% 能查到，不成立时也有 80%，差别很小，相当于量体温；查强活性药物，成立时 60%、不成立时只有 10%，差别最大，所以先查。实际过程：查到司美格鲁肽对 GLP-1 受体亲和力 0.38 纳摩尔，支持概率从 0.50 升到 0.86；再查到三期试验 STEP 1，升到 0.95，分歧度从 1.0 降到 0.28。技术上，分歧度是当前判断的熵除以最大熵，信息增益是查询前的熵减去查询后平均剩余的熵，单位是比特；概率表目前是人工设定的先验，正式实验前要用标注数据估计，所以第一步的增益与具体药物无关。右边是共形三分判定：用一批已知结果的历史假设校准，结论以“可能成立的结果集合”给出，集合里只有一个答案才下结论；两个都可能就是证据不足。校准后错误率有统计保证，没校准时系统会明确说明。</a:t>
             </a:r>
             <a:endParaRPr lang="en-US" dirty="0"/>
           </a:p>
@@ -1572,7 +1432,7 @@
           <a:p>
             <a:r>
               <a:rPr lang="en-US" dirty="0"/>
-              <a:t>四步即可：安装、配置运行时、提问、查看证据。左图是运行时自动检测到本机的 Claude Code；中间是用 @ 点名专家，以及智能体调用工具的记录；右图是证据账本，每条证据的状态、来源和完整历史都能查到。截图都来自真实运行的 3.0 应用。</a:t>
+              <a:t>左边是多智能体协作：队长拆解任务，成员并行，交接时每条发现都要附证据编号，再过质量门，最后成文。内置 26 位专家、15 个团队模板。右边是本地运行时：很多团队已经买了 ChatGPT（Codex）或 Claude 的订阅，MedScience 可以直接调用本机已登录的命令行工具，沿用现有额度，不需要 API 密钥。注意除 Codex 和 Claude Code 外其他工具是通用接入，并请确认订阅条款允许这样使用。</a:t>
             </a:r>
             <a:endParaRPr lang="en-US" dirty="0"/>
           </a:p>
@@ -2509,7 +2369,7 @@
                   <a:schemeClr val="tx2"/>
                 </a:solidFill>
               </a:rPr>
-              <a:t>当前进展与下一步</a:t>
+              <a:t>使用说明：四步完成一次可追溯的研究</a:t>
             </a:r>
             <a:endParaRPr lang="en-US" sz="2800" dirty="0"/>
           </a:p>
@@ -2547,6 +2407,878 @@
                   <a:schemeClr val="accent6"/>
                 </a:solidFill>
               </a:rPr>
+              <a:t>截图来自真实运行的 v3.0 应用。</a:t>
+            </a:r>
+            <a:endParaRPr lang="en-US" sz="1500" dirty="0"/>
+          </a:p>
+        </p:txBody>
+      </p:sp>
+      <p:sp>
+        <p:nvSpPr>
+          <p:cNvPr id="4" name="label-232"/>
+          <p:cNvSpPr txBox="1"/>
+          <p:nvPr/>
+        </p:nvSpPr>
+        <p:spPr>
+          <a:xfrm>
+            <a:off x="548640" y="1481328"/>
+            <a:ext cx="11094415" cy="292608"/>
+          </a:xfrm>
+          <a:prstGeom prst="rect">
+            <a:avLst/>
+          </a:prstGeom>
+          <a:noFill/>
+          <a:ln/>
+        </p:spPr>
+        <p:txBody>
+          <a:bodyPr wrap="square" lIns="0" tIns="0" rIns="0" bIns="0" rtlCol="0" anchor="t"/>
+          <a:lstStyle/>
+          <a:p>
+            <a:pPr algn="l" indent="0" marL="0">
+              <a:buNone/>
+            </a:pPr>
+            <a:r>
+              <a:rPr lang="en-US" sz="1300" dirty="0">
+                <a:solidFill>
+                  <a:schemeClr val="tx1"/>
+                </a:solidFill>
+              </a:rPr>
+              <a:t>① 安装：从 GitHub Releases 下载对应平台安装包；或在源码目录运行 npm run web，用浏览器打开。</a:t>
+            </a:r>
+            <a:endParaRPr lang="en-US" sz="1300" dirty="0"/>
+          </a:p>
+        </p:txBody>
+      </p:sp>
+      <p:sp>
+        <p:nvSpPr>
+          <p:cNvPr id="5" name="badge-233"/>
+          <p:cNvSpPr/>
+          <p:nvPr/>
+        </p:nvSpPr>
+        <p:spPr>
+          <a:xfrm>
+            <a:off x="548640" y="1901952"/>
+            <a:ext cx="347472" cy="347472"/>
+          </a:xfrm>
+          <a:prstGeom prst="ellipse">
+            <a:avLst/>
+          </a:prstGeom>
+          <a:solidFill>
+            <a:schemeClr val="accent2"/>
+          </a:solidFill>
+          <a:ln w="6350">
+            <a:solidFill>
+              <a:schemeClr val="accent2"/>
+            </a:solidFill>
+          </a:ln>
+        </p:spPr>
+        <p:txBody>
+          <a:bodyPr wrap="square" lIns="0" tIns="0" rIns="0" bIns="0" rtlCol="0" anchor="ctr"/>
+          <a:lstStyle/>
+          <a:p>
+            <a:pPr algn="ctr" indent="0" marL="0">
+              <a:buNone/>
+            </a:pPr>
+            <a:r>
+              <a:rPr lang="en-US" sz="1200" b="1" dirty="0">
+                <a:solidFill>
+                  <a:schemeClr val="bg1"/>
+                </a:solidFill>
+              </a:rPr>
+              <a:t>2</a:t>
+            </a:r>
+            <a:endParaRPr lang="en-US" sz="1200" dirty="0"/>
+          </a:p>
+        </p:txBody>
+      </p:sp>
+      <p:sp>
+        <p:nvSpPr>
+          <p:cNvPr id="6" name="label-234"/>
+          <p:cNvSpPr txBox="1"/>
+          <p:nvPr/>
+        </p:nvSpPr>
+        <p:spPr>
+          <a:xfrm>
+            <a:off x="1005840" y="1883664"/>
+            <a:ext cx="3027578" cy="384048"/>
+          </a:xfrm>
+          <a:prstGeom prst="rect">
+            <a:avLst/>
+          </a:prstGeom>
+          <a:noFill/>
+          <a:ln/>
+        </p:spPr>
+        <p:txBody>
+          <a:bodyPr wrap="square" lIns="0" tIns="0" rIns="0" bIns="0" rtlCol="0" anchor="ctr"/>
+          <a:lstStyle/>
+          <a:p>
+            <a:pPr algn="l" indent="0" marL="0">
+              <a:buNone/>
+            </a:pPr>
+            <a:r>
+              <a:rPr lang="en-US" sz="1600" b="1" dirty="0">
+                <a:solidFill>
+                  <a:schemeClr val="tx2"/>
+                </a:solidFill>
+              </a:rPr>
+              <a:t>配置运行时</a:t>
+            </a:r>
+            <a:endParaRPr lang="en-US" sz="1600" dirty="0"/>
+          </a:p>
+        </p:txBody>
+      </p:sp>
+      <p:sp>
+        <p:nvSpPr>
+          <p:cNvPr id="7" name="label-235"/>
+          <p:cNvSpPr txBox="1"/>
+          <p:nvPr/>
+        </p:nvSpPr>
+        <p:spPr>
+          <a:xfrm>
+            <a:off x="548640" y="2304288"/>
+            <a:ext cx="3484778" cy="502920"/>
+          </a:xfrm>
+          <a:prstGeom prst="rect">
+            <a:avLst/>
+          </a:prstGeom>
+          <a:noFill/>
+          <a:ln/>
+        </p:spPr>
+        <p:txBody>
+          <a:bodyPr wrap="square" lIns="0" tIns="0" rIns="0" bIns="0" rtlCol="0" anchor="t"/>
+          <a:lstStyle/>
+          <a:p>
+            <a:pPr algn="l" indent="0" marL="0">
+              <a:buNone/>
+            </a:pPr>
+            <a:r>
+              <a:rPr lang="en-US" sz="1200" dirty="0">
+                <a:solidFill>
+                  <a:schemeClr val="tx1"/>
+                </a:solidFill>
+              </a:rPr>
+              <a:t>安装后打开“运行时（模型配置）”，绑定本机 AI 命令行工具或填写模型 API。</a:t>
+            </a:r>
+            <a:endParaRPr lang="en-US" sz="1200" dirty="0"/>
+          </a:p>
+        </p:txBody>
+      </p:sp>
+      <p:sp>
+        <p:nvSpPr>
+          <p:cNvPr id="8" name="badge-236"/>
+          <p:cNvSpPr/>
+          <p:nvPr/>
+        </p:nvSpPr>
+        <p:spPr>
+          <a:xfrm>
+            <a:off x="4353458" y="1901952"/>
+            <a:ext cx="347472" cy="347472"/>
+          </a:xfrm>
+          <a:prstGeom prst="ellipse">
+            <a:avLst/>
+          </a:prstGeom>
+          <a:solidFill>
+            <a:schemeClr val="accent2"/>
+          </a:solidFill>
+          <a:ln w="6350">
+            <a:solidFill>
+              <a:schemeClr val="accent2"/>
+            </a:solidFill>
+          </a:ln>
+        </p:spPr>
+        <p:txBody>
+          <a:bodyPr wrap="square" lIns="0" tIns="0" rIns="0" bIns="0" rtlCol="0" anchor="ctr"/>
+          <a:lstStyle/>
+          <a:p>
+            <a:pPr algn="ctr" indent="0" marL="0">
+              <a:buNone/>
+            </a:pPr>
+            <a:r>
+              <a:rPr lang="en-US" sz="1200" b="1" dirty="0">
+                <a:solidFill>
+                  <a:schemeClr val="bg1"/>
+                </a:solidFill>
+              </a:rPr>
+              <a:t>3</a:t>
+            </a:r>
+            <a:endParaRPr lang="en-US" sz="1200" dirty="0"/>
+          </a:p>
+        </p:txBody>
+      </p:sp>
+      <p:sp>
+        <p:nvSpPr>
+          <p:cNvPr id="9" name="label-237"/>
+          <p:cNvSpPr txBox="1"/>
+          <p:nvPr/>
+        </p:nvSpPr>
+        <p:spPr>
+          <a:xfrm>
+            <a:off x="4810658" y="1883664"/>
+            <a:ext cx="3027578" cy="384048"/>
+          </a:xfrm>
+          <a:prstGeom prst="rect">
+            <a:avLst/>
+          </a:prstGeom>
+          <a:noFill/>
+          <a:ln/>
+        </p:spPr>
+        <p:txBody>
+          <a:bodyPr wrap="square" lIns="0" tIns="0" rIns="0" bIns="0" rtlCol="0" anchor="ctr"/>
+          <a:lstStyle/>
+          <a:p>
+            <a:pPr algn="l" indent="0" marL="0">
+              <a:buNone/>
+            </a:pPr>
+            <a:r>
+              <a:rPr lang="en-US" sz="1600" b="1" dirty="0">
+                <a:solidFill>
+                  <a:schemeClr val="tx2"/>
+                </a:solidFill>
+              </a:rPr>
+              <a:t>提问</a:t>
+            </a:r>
+            <a:endParaRPr lang="en-US" sz="1600" dirty="0"/>
+          </a:p>
+        </p:txBody>
+      </p:sp>
+      <p:sp>
+        <p:nvSpPr>
+          <p:cNvPr id="10" name="label-238"/>
+          <p:cNvSpPr txBox="1"/>
+          <p:nvPr/>
+        </p:nvSpPr>
+        <p:spPr>
+          <a:xfrm>
+            <a:off x="4353458" y="2304288"/>
+            <a:ext cx="3484778" cy="502920"/>
+          </a:xfrm>
+          <a:prstGeom prst="rect">
+            <a:avLst/>
+          </a:prstGeom>
+          <a:noFill/>
+          <a:ln/>
+        </p:spPr>
+        <p:txBody>
+          <a:bodyPr wrap="square" lIns="0" tIns="0" rIns="0" bIns="0" rtlCol="0" anchor="t"/>
+          <a:lstStyle/>
+          <a:p>
+            <a:pPr algn="l" indent="0" marL="0">
+              <a:buNone/>
+            </a:pPr>
+            <a:r>
+              <a:rPr lang="en-US" sz="1200" dirty="0">
+                <a:solidFill>
+                  <a:schemeClr val="tx1"/>
+                </a:solidFill>
+              </a:rPr>
+              <a:t>直接提问；输入 @ 点名专家，或交给科研小队。</a:t>
+            </a:r>
+            <a:endParaRPr lang="en-US" sz="1200" dirty="0"/>
+          </a:p>
+        </p:txBody>
+      </p:sp>
+      <p:sp>
+        <p:nvSpPr>
+          <p:cNvPr id="11" name="badge-239"/>
+          <p:cNvSpPr/>
+          <p:nvPr/>
+        </p:nvSpPr>
+        <p:spPr>
+          <a:xfrm>
+            <a:off x="8158277" y="1901952"/>
+            <a:ext cx="347472" cy="347472"/>
+          </a:xfrm>
+          <a:prstGeom prst="ellipse">
+            <a:avLst/>
+          </a:prstGeom>
+          <a:solidFill>
+            <a:schemeClr val="accent2"/>
+          </a:solidFill>
+          <a:ln w="6350">
+            <a:solidFill>
+              <a:schemeClr val="accent2"/>
+            </a:solidFill>
+          </a:ln>
+        </p:spPr>
+        <p:txBody>
+          <a:bodyPr wrap="square" lIns="0" tIns="0" rIns="0" bIns="0" rtlCol="0" anchor="ctr"/>
+          <a:lstStyle/>
+          <a:p>
+            <a:pPr algn="ctr" indent="0" marL="0">
+              <a:buNone/>
+            </a:pPr>
+            <a:r>
+              <a:rPr lang="en-US" sz="1200" b="1" dirty="0">
+                <a:solidFill>
+                  <a:schemeClr val="bg1"/>
+                </a:solidFill>
+              </a:rPr>
+              <a:t>4</a:t>
+            </a:r>
+            <a:endParaRPr lang="en-US" sz="1200" dirty="0"/>
+          </a:p>
+        </p:txBody>
+      </p:sp>
+      <p:sp>
+        <p:nvSpPr>
+          <p:cNvPr id="12" name="label-240"/>
+          <p:cNvSpPr txBox="1"/>
+          <p:nvPr/>
+        </p:nvSpPr>
+        <p:spPr>
+          <a:xfrm>
+            <a:off x="8615477" y="1883664"/>
+            <a:ext cx="3027578" cy="384048"/>
+          </a:xfrm>
+          <a:prstGeom prst="rect">
+            <a:avLst/>
+          </a:prstGeom>
+          <a:noFill/>
+          <a:ln/>
+        </p:spPr>
+        <p:txBody>
+          <a:bodyPr wrap="square" lIns="0" tIns="0" rIns="0" bIns="0" rtlCol="0" anchor="ctr"/>
+          <a:lstStyle/>
+          <a:p>
+            <a:pPr algn="l" indent="0" marL="0">
+              <a:buNone/>
+            </a:pPr>
+            <a:r>
+              <a:rPr lang="en-US" sz="1600" b="1" dirty="0">
+                <a:solidFill>
+                  <a:schemeClr val="tx2"/>
+                </a:solidFill>
+              </a:rPr>
+              <a:t>查看证据</a:t>
+            </a:r>
+            <a:endParaRPr lang="en-US" sz="1600" dirty="0"/>
+          </a:p>
+        </p:txBody>
+      </p:sp>
+      <p:sp>
+        <p:nvSpPr>
+          <p:cNvPr id="13" name="label-241"/>
+          <p:cNvSpPr txBox="1"/>
+          <p:nvPr/>
+        </p:nvSpPr>
+        <p:spPr>
+          <a:xfrm>
+            <a:off x="8158277" y="2304288"/>
+            <a:ext cx="3484778" cy="502920"/>
+          </a:xfrm>
+          <a:prstGeom prst="rect">
+            <a:avLst/>
+          </a:prstGeom>
+          <a:noFill/>
+          <a:ln/>
+        </p:spPr>
+        <p:txBody>
+          <a:bodyPr wrap="square" lIns="0" tIns="0" rIns="0" bIns="0" rtlCol="0" anchor="t"/>
+          <a:lstStyle/>
+          <a:p>
+            <a:pPr algn="l" indent="0" marL="0">
+              <a:buNone/>
+            </a:pPr>
+            <a:r>
+              <a:rPr lang="en-US" sz="1200" dirty="0">
+                <a:solidFill>
+                  <a:schemeClr val="tx1"/>
+                </a:solidFill>
+              </a:rPr>
+              <a:t>在“证据账本”查看每条证据的状态、来源与历史。</a:t>
+            </a:r>
+            <a:endParaRPr lang="en-US" sz="1200" dirty="0"/>
+          </a:p>
+        </p:txBody>
+      </p:sp>
+      <p:pic>
+        <p:nvPicPr>
+          <p:cNvPr id="14" name="screenshot-242" descr="自动检测到本机的 Claude Code">    </p:cNvPr>
+          <p:cNvPicPr>
+            <a:picLocks noChangeAspect="1"/>
+          </p:cNvPicPr>
+          <p:nvPr/>
+        </p:nvPicPr>
+        <p:blipFill>
+          <a:blip r:embed="rId1"/>
+          <a:stretch>
+            <a:fillRect/>
+          </a:stretch>
+        </p:blipFill>
+        <p:spPr>
+          <a:xfrm>
+            <a:off x="927854" y="2880360"/>
+            <a:ext cx="2726350" cy="2834640"/>
+          </a:xfrm>
+          <a:prstGeom prst="rect">
+            <a:avLst/>
+          </a:prstGeom>
+        </p:spPr>
+      </p:pic>
+      <p:sp>
+        <p:nvSpPr>
+          <p:cNvPr id="15" name="frame-243"/>
+          <p:cNvSpPr/>
+          <p:nvPr/>
+        </p:nvSpPr>
+        <p:spPr>
+          <a:xfrm>
+            <a:off x="927854" y="2880360"/>
+            <a:ext cx="2726350" cy="2834640"/>
+          </a:xfrm>
+          <a:prstGeom prst="rect">
+            <a:avLst/>
+          </a:prstGeom>
+          <a:solidFill>
+            <a:srgbClr val="FFFFFF">
+              <a:alpha val="0"/>
+            </a:srgbClr>
+          </a:solidFill>
+          <a:ln w="9525">
+            <a:solidFill>
+              <a:srgbClr val="D5DCE4"/>
+            </a:solidFill>
+            <a:prstDash val="solid"/>
+          </a:ln>
+        </p:spPr>
+      </p:sp>
+      <p:sp>
+        <p:nvSpPr>
+          <p:cNvPr id="16" name="label-244"/>
+          <p:cNvSpPr txBox="1"/>
+          <p:nvPr/>
+        </p:nvSpPr>
+        <p:spPr>
+          <a:xfrm>
+            <a:off x="927854" y="5788152"/>
+            <a:ext cx="2726350" cy="292608"/>
+          </a:xfrm>
+          <a:prstGeom prst="rect">
+            <a:avLst/>
+          </a:prstGeom>
+          <a:noFill/>
+          <a:ln/>
+        </p:spPr>
+        <p:txBody>
+          <a:bodyPr wrap="square" lIns="0" tIns="0" rIns="0" bIns="0" rtlCol="0" anchor="t"/>
+          <a:lstStyle/>
+          <a:p>
+            <a:pPr algn="ctr" indent="0" marL="0">
+              <a:buNone/>
+            </a:pPr>
+            <a:r>
+              <a:rPr lang="en-US" sz="1100" dirty="0">
+                <a:solidFill>
+                  <a:schemeClr val="accent6"/>
+                </a:solidFill>
+              </a:rPr>
+              <a:t>自动检测到本机的 Claude Code</a:t>
+            </a:r>
+            <a:endParaRPr lang="en-US" sz="1100" dirty="0"/>
+          </a:p>
+        </p:txBody>
+      </p:sp>
+      <p:pic>
+        <p:nvPicPr>
+          <p:cNvPr id="17" name="screenshot-245" descr="usage-ask-mention.jpg">    </p:cNvPr>
+          <p:cNvPicPr>
+            <a:picLocks noChangeAspect="1"/>
+          </p:cNvPicPr>
+          <p:nvPr/>
+        </p:nvPicPr>
+        <p:blipFill>
+          <a:blip r:embed="rId2"/>
+          <a:stretch>
+            <a:fillRect/>
+          </a:stretch>
+        </p:blipFill>
+        <p:spPr>
+          <a:xfrm>
+            <a:off x="4353458" y="2880360"/>
+            <a:ext cx="3484778" cy="867323"/>
+          </a:xfrm>
+          <a:prstGeom prst="rect">
+            <a:avLst/>
+          </a:prstGeom>
+        </p:spPr>
+      </p:pic>
+      <p:sp>
+        <p:nvSpPr>
+          <p:cNvPr id="18" name="frame-246"/>
+          <p:cNvSpPr/>
+          <p:nvPr/>
+        </p:nvSpPr>
+        <p:spPr>
+          <a:xfrm>
+            <a:off x="4353458" y="2880360"/>
+            <a:ext cx="3484778" cy="867323"/>
+          </a:xfrm>
+          <a:prstGeom prst="rect">
+            <a:avLst/>
+          </a:prstGeom>
+          <a:solidFill>
+            <a:srgbClr val="FFFFFF">
+              <a:alpha val="0"/>
+            </a:srgbClr>
+          </a:solidFill>
+          <a:ln w="9525">
+            <a:solidFill>
+              <a:srgbClr val="D5DCE4"/>
+            </a:solidFill>
+            <a:prstDash val="solid"/>
+          </a:ln>
+        </p:spPr>
+      </p:sp>
+      <p:pic>
+        <p:nvPicPr>
+          <p:cNvPr id="19" name="screenshot-247" descr="@ 点名专家；工具调用逐步可查">    </p:cNvPr>
+          <p:cNvPicPr>
+            <a:picLocks noChangeAspect="1"/>
+          </p:cNvPicPr>
+          <p:nvPr/>
+        </p:nvPicPr>
+        <p:blipFill>
+          <a:blip r:embed="rId3"/>
+          <a:stretch>
+            <a:fillRect/>
+          </a:stretch>
+        </p:blipFill>
+        <p:spPr>
+          <a:xfrm>
+            <a:off x="4353458" y="3931920"/>
+            <a:ext cx="3484778" cy="1184825"/>
+          </a:xfrm>
+          <a:prstGeom prst="rect">
+            <a:avLst/>
+          </a:prstGeom>
+        </p:spPr>
+      </p:pic>
+      <p:sp>
+        <p:nvSpPr>
+          <p:cNvPr id="20" name="frame-248"/>
+          <p:cNvSpPr/>
+          <p:nvPr/>
+        </p:nvSpPr>
+        <p:spPr>
+          <a:xfrm>
+            <a:off x="4353458" y="3931920"/>
+            <a:ext cx="3484778" cy="1184825"/>
+          </a:xfrm>
+          <a:prstGeom prst="rect">
+            <a:avLst/>
+          </a:prstGeom>
+          <a:solidFill>
+            <a:srgbClr val="FFFFFF">
+              <a:alpha val="0"/>
+            </a:srgbClr>
+          </a:solidFill>
+          <a:ln w="9525">
+            <a:solidFill>
+              <a:srgbClr val="D5DCE4"/>
+            </a:solidFill>
+            <a:prstDash val="solid"/>
+          </a:ln>
+        </p:spPr>
+      </p:sp>
+      <p:sp>
+        <p:nvSpPr>
+          <p:cNvPr id="21" name="label-249"/>
+          <p:cNvSpPr txBox="1"/>
+          <p:nvPr/>
+        </p:nvSpPr>
+        <p:spPr>
+          <a:xfrm>
+            <a:off x="4353458" y="5189897"/>
+            <a:ext cx="3484778" cy="292608"/>
+          </a:xfrm>
+          <a:prstGeom prst="rect">
+            <a:avLst/>
+          </a:prstGeom>
+          <a:noFill/>
+          <a:ln/>
+        </p:spPr>
+        <p:txBody>
+          <a:bodyPr wrap="square" lIns="0" tIns="0" rIns="0" bIns="0" rtlCol="0" anchor="t"/>
+          <a:lstStyle/>
+          <a:p>
+            <a:pPr algn="ctr" indent="0" marL="0">
+              <a:buNone/>
+            </a:pPr>
+            <a:r>
+              <a:rPr lang="en-US" sz="1100" dirty="0">
+                <a:solidFill>
+                  <a:schemeClr val="accent6"/>
+                </a:solidFill>
+              </a:rPr>
+              <a:t>@ 点名专家；工具调用逐步可查</a:t>
+            </a:r>
+            <a:endParaRPr lang="en-US" sz="1100" dirty="0"/>
+          </a:p>
+        </p:txBody>
+      </p:sp>
+      <p:pic>
+        <p:nvPicPr>
+          <p:cNvPr id="22" name="screenshot-250" descr="证据账本：状态、来源、完整历史">    </p:cNvPr>
+          <p:cNvPicPr>
+            <a:picLocks noChangeAspect="1"/>
+          </p:cNvPicPr>
+          <p:nvPr/>
+        </p:nvPicPr>
+        <p:blipFill>
+          <a:blip r:embed="rId4"/>
+          <a:stretch>
+            <a:fillRect/>
+          </a:stretch>
+        </p:blipFill>
+        <p:spPr>
+          <a:xfrm>
+            <a:off x="8158277" y="2880360"/>
+            <a:ext cx="3484778" cy="2462577"/>
+          </a:xfrm>
+          <a:prstGeom prst="rect">
+            <a:avLst/>
+          </a:prstGeom>
+        </p:spPr>
+      </p:pic>
+      <p:sp>
+        <p:nvSpPr>
+          <p:cNvPr id="23" name="frame-251"/>
+          <p:cNvSpPr/>
+          <p:nvPr/>
+        </p:nvSpPr>
+        <p:spPr>
+          <a:xfrm>
+            <a:off x="8158277" y="2880360"/>
+            <a:ext cx="3484778" cy="2462577"/>
+          </a:xfrm>
+          <a:prstGeom prst="rect">
+            <a:avLst/>
+          </a:prstGeom>
+          <a:solidFill>
+            <a:srgbClr val="FFFFFF">
+              <a:alpha val="0"/>
+            </a:srgbClr>
+          </a:solidFill>
+          <a:ln w="9525">
+            <a:solidFill>
+              <a:srgbClr val="D5DCE4"/>
+            </a:solidFill>
+            <a:prstDash val="solid"/>
+          </a:ln>
+        </p:spPr>
+      </p:sp>
+      <p:sp>
+        <p:nvSpPr>
+          <p:cNvPr id="24" name="label-252"/>
+          <p:cNvSpPr txBox="1"/>
+          <p:nvPr/>
+        </p:nvSpPr>
+        <p:spPr>
+          <a:xfrm>
+            <a:off x="8158277" y="5416089"/>
+            <a:ext cx="3484778" cy="292608"/>
+          </a:xfrm>
+          <a:prstGeom prst="rect">
+            <a:avLst/>
+          </a:prstGeom>
+          <a:noFill/>
+          <a:ln/>
+        </p:spPr>
+        <p:txBody>
+          <a:bodyPr wrap="square" lIns="0" tIns="0" rIns="0" bIns="0" rtlCol="0" anchor="t"/>
+          <a:lstStyle/>
+          <a:p>
+            <a:pPr algn="ctr" indent="0" marL="0">
+              <a:buNone/>
+            </a:pPr>
+            <a:r>
+              <a:rPr lang="en-US" sz="1100" dirty="0">
+                <a:solidFill>
+                  <a:schemeClr val="accent6"/>
+                </a:solidFill>
+              </a:rPr>
+              <a:t>证据账本：状态、来源、完整历史</a:t>
+            </a:r>
+            <a:endParaRPr lang="en-US" sz="1100" dirty="0"/>
+          </a:p>
+        </p:txBody>
+      </p:sp>
+      <p:sp>
+        <p:nvSpPr>
+          <p:cNvPr id="25" name="label-253"/>
+          <p:cNvSpPr txBox="1"/>
+          <p:nvPr/>
+        </p:nvSpPr>
+        <p:spPr>
+          <a:xfrm>
+            <a:off x="548640" y="6172200"/>
+            <a:ext cx="11094415" cy="256032"/>
+          </a:xfrm>
+          <a:prstGeom prst="rect">
+            <a:avLst/>
+          </a:prstGeom>
+          <a:noFill/>
+          <a:ln/>
+        </p:spPr>
+        <p:txBody>
+          <a:bodyPr wrap="square" lIns="0" tIns="0" rIns="0" bIns="0" rtlCol="0" anchor="t"/>
+          <a:lstStyle/>
+          <a:p>
+            <a:pPr algn="l" indent="0" marL="0">
+              <a:buNone/>
+            </a:pPr>
+            <a:r>
+              <a:rPr lang="en-US" sz="1050" dirty="0">
+                <a:solidFill>
+                  <a:schemeClr val="accent6"/>
+                </a:solidFill>
+              </a:rPr>
+              <a:t>演示环境使用离线示例模型生成文字；文献为 PubMed 实时检索结果。</a:t>
+            </a:r>
+            <a:endParaRPr lang="en-US" sz="1050" dirty="0"/>
+          </a:p>
+        </p:txBody>
+      </p:sp>
+      <p:sp>
+        <p:nvSpPr>
+          <p:cNvPr id="25" name="Slide Number Placeholder 0"/>
+          <p:cNvSpPr>
+            <a:spLocks noGrp="1"/>
+          </p:cNvSpPr>
+          <p:nvPr>
+            <p:ph type="sldNum" sz="quarter" idx="4294967295"/>
+          </p:nvPr>
+        </p:nvSpPr>
+        <p:spPr>
+          <a:xfrm>
+            <a:off x="11094415" y="6446520"/>
+            <a:ext cx="548640" cy="274320"/>
+          </a:xfrm>
+          <a:prstGeom prst="rect">
+            <a:avLst/>
+          </a:prstGeom>
+          <a:extLst>
+            <a:ext uri="{C572A759-6A51-4108-AA02-DFA0A04FC94B}">
+              <ma14:wrappingTextBoxFlag xmlns:ma14="http://schemas.microsoft.com/office/mac/drawingml/2011/main" val="0"/>
+            </a:ext>
+          </a:extLst>
+        </p:spPr>
+        <p:txBody>
+          <a:bodyPr/>
+          <a:lstStyle>
+            <a:lvl1pPr>
+              <a:defRPr sz="1000">
+                <a:solidFill>
+                  <a:schemeClr val="accent6"/>
+                </a:solidFill>
+              </a:defRPr>
+            </a:lvl1pPr>
+          </a:lstStyle>
+          <a:p>
+            <a:pPr algn="r"/>
+            <a:fld id="{F7021451-1387-4CA6-816F-3879F97B5CBC}" type="slidenum">
+              <a:rPr b="0" lang="en-US"/>
+              <a:t>10</a:t>
+            </a:fld>
+            <a:endParaRPr lang="en-US"/>
+          </a:p>
+        </p:txBody>
+      </p:sp>
+    </p:spTree>
+  </p:cSld>
+  <p:clrMapOvr>
+    <a:masterClrMapping/>
+  </p:clrMapOvr>
+</p:sld>
+</file>
+
+<file path=ppt/slides/slide11.xml><?xml version="1.0" encoding="utf-8"?>
+<p:sld xmlns:a="http://schemas.openxmlformats.org/drawingml/2006/main" xmlns:r="http://schemas.openxmlformats.org/officeDocument/2006/relationships" xmlns:p="http://schemas.openxmlformats.org/presentationml/2006/main">
+  <p:cSld name="Slide 11">
+    <p:spTree>
+      <p:nvGrpSpPr>
+        <p:cNvPr id="1" name=""/>
+        <p:cNvGrpSpPr/>
+        <p:nvPr/>
+      </p:nvGrpSpPr>
+      <p:grpSpPr>
+        <a:xfrm>
+          <a:off x="0" y="0"/>
+          <a:ext cx="0" cy="0"/>
+          <a:chOff x="0" y="0"/>
+          <a:chExt cx="0" cy="0"/>
+        </a:xfrm>
+      </p:grpSpPr>
+      <p:sp>
+        <p:nvSpPr>
+          <p:cNvPr id="2" name="Text 0"/>
+          <p:cNvSpPr/>
+          <p:nvPr>
+            <p:ph idx="100" type="title" hasCustomPrompt="1"/>
+          </p:nvPr>
+        </p:nvSpPr>
+        <p:spPr>
+          <a:xfrm>
+            <a:off x="548640" y="320040"/>
+            <a:ext cx="11094415" cy="640080"/>
+          </a:xfrm>
+          <a:prstGeom prst="rect">
+            <a:avLst/>
+          </a:prstGeom>
+          <a:noFill/>
+          <a:ln/>
+        </p:spPr>
+        <p:txBody>
+          <a:bodyPr wrap="square" lIns="0" tIns="0" rIns="0" bIns="0" rtlCol="0" anchor="ctr"/>
+          <a:lstStyle/>
+          <a:p>
+            <a:pPr algn="l" indent="0" marL="0">
+              <a:buNone/>
+            </a:pPr>
+            <a:r>
+              <a:rPr lang="en-US" sz="2800" b="1" dirty="0">
+                <a:solidFill>
+                  <a:schemeClr val="tx2"/>
+                </a:solidFill>
+              </a:rPr>
+              <a:t>当前进展与下一步</a:t>
+            </a:r>
+            <a:endParaRPr lang="en-US" sz="2800" dirty="0"/>
+          </a:p>
+        </p:txBody>
+      </p:sp>
+      <p:sp>
+        <p:nvSpPr>
+          <p:cNvPr id="3" name="Text 0"/>
+          <p:cNvSpPr/>
+          <p:nvPr>
+            <p:ph idx="101" type="body" hasCustomPrompt="1"/>
+          </p:nvPr>
+        </p:nvSpPr>
+        <p:spPr>
+          <a:xfrm>
+            <a:off x="548640" y="960120"/>
+            <a:ext cx="11094415" cy="411480"/>
+          </a:xfrm>
+          <a:prstGeom prst="rect">
+            <a:avLst/>
+          </a:prstGeom>
+          <a:noFill/>
+          <a:ln/>
+        </p:spPr>
+        <p:txBody>
+          <a:bodyPr wrap="square" lIns="0" tIns="0" rIns="0" bIns="0" rtlCol="0" anchor="ctr"/>
+          <a:lstStyle/>
+          <a:p>
+            <a:pPr algn="l" indent="0" marL="0">
+              <a:buNone/>
+            </a:pPr>
+            <a:r>
+              <a:rPr lang="en-US" sz="1500" dirty="0">
+                <a:solidFill>
+                  <a:schemeClr val="accent6"/>
+                </a:solidFill>
+              </a:rPr>
               <a:t>设计已全部落地并可下载使用；有效性还需要真实任务上的对照实验来证明。</a:t>
             </a:r>
             <a:endParaRPr lang="en-US" sz="1500" dirty="0"/>
@@ -2555,7 +3287,7 @@
       </p:sp>
       <p:sp>
         <p:nvSpPr>
-          <p:cNvPr id="4" name="card-220"/>
+          <p:cNvPr id="4" name="card-254"/>
           <p:cNvSpPr/>
           <p:nvPr/>
         </p:nvSpPr>
@@ -2582,7 +3314,7 @@
       </p:sp>
       <p:sp>
         <p:nvSpPr>
-          <p:cNvPr id="5" name="badge-221"/>
+          <p:cNvPr id="5" name="badge-255"/>
           <p:cNvSpPr/>
           <p:nvPr/>
         </p:nvSpPr>
@@ -2624,7 +3356,7 @@
       </p:sp>
       <p:sp>
         <p:nvSpPr>
-          <p:cNvPr id="6" name="label-222"/>
+          <p:cNvPr id="6" name="label-256"/>
           <p:cNvSpPr txBox="1"/>
           <p:nvPr/>
         </p:nvSpPr>
@@ -2660,7 +3392,7 @@
       </p:sp>
       <p:sp>
         <p:nvSpPr>
-          <p:cNvPr id="7" name="bullets-223"/>
+          <p:cNvPr id="7" name="bullets-257"/>
           <p:cNvSpPr txBox="1"/>
           <p:nvPr/>
         </p:nvSpPr>
@@ -2754,7 +3486,7 @@
       </p:sp>
       <p:sp>
         <p:nvSpPr>
-          <p:cNvPr id="8" name="card-224"/>
+          <p:cNvPr id="8" name="card-258"/>
           <p:cNvSpPr/>
           <p:nvPr/>
         </p:nvSpPr>
@@ -2781,7 +3513,7 @@
       </p:sp>
       <p:sp>
         <p:nvSpPr>
-          <p:cNvPr id="9" name="badge-225"/>
+          <p:cNvPr id="9" name="badge-259"/>
           <p:cNvSpPr/>
           <p:nvPr/>
         </p:nvSpPr>
@@ -2823,7 +3555,7 @@
       </p:sp>
       <p:sp>
         <p:nvSpPr>
-          <p:cNvPr id="10" name="label-226"/>
+          <p:cNvPr id="10" name="label-260"/>
           <p:cNvSpPr txBox="1"/>
           <p:nvPr/>
         </p:nvSpPr>
@@ -2859,7 +3591,7 @@
       </p:sp>
       <p:sp>
         <p:nvSpPr>
-          <p:cNvPr id="11" name="bullets-227"/>
+          <p:cNvPr id="11" name="bullets-261"/>
           <p:cNvSpPr txBox="1"/>
           <p:nvPr/>
         </p:nvSpPr>
@@ -2935,7 +3667,7 @@
       </p:sp>
       <p:sp>
         <p:nvSpPr>
-          <p:cNvPr id="12" name="card-228"/>
+          <p:cNvPr id="12" name="card-262"/>
           <p:cNvSpPr/>
           <p:nvPr/>
         </p:nvSpPr>
@@ -2962,7 +3694,7 @@
       </p:sp>
       <p:sp>
         <p:nvSpPr>
-          <p:cNvPr id="13" name="badge-229"/>
+          <p:cNvPr id="13" name="badge-263"/>
           <p:cNvSpPr/>
           <p:nvPr/>
         </p:nvSpPr>
@@ -3004,7 +3736,7 @@
       </p:sp>
       <p:sp>
         <p:nvSpPr>
-          <p:cNvPr id="14" name="label-230"/>
+          <p:cNvPr id="14" name="label-264"/>
           <p:cNvSpPr txBox="1"/>
           <p:nvPr/>
         </p:nvSpPr>
@@ -3040,7 +3772,7 @@
       </p:sp>
       <p:sp>
         <p:nvSpPr>
-          <p:cNvPr id="15" name="bullets-231"/>
+          <p:cNvPr id="15" name="bullets-265"/>
           <p:cNvSpPr txBox="1"/>
           <p:nvPr/>
         </p:nvSpPr>
@@ -3116,7 +3848,7 @@
       </p:sp>
       <p:sp>
         <p:nvSpPr>
-          <p:cNvPr id="16" name="ask-232"/>
+          <p:cNvPr id="16" name="ask-266"/>
           <p:cNvSpPr/>
           <p:nvPr/>
         </p:nvSpPr>
@@ -3143,7 +3875,7 @@
       </p:sp>
       <p:sp>
         <p:nvSpPr>
-          <p:cNvPr id="17" name="label-233"/>
+          <p:cNvPr id="17" name="label-267"/>
           <p:cNvSpPr txBox="1"/>
           <p:nvPr/>
         </p:nvSpPr>
@@ -3216,7 +3948,7 @@
             <a:pPr algn="r"/>
             <a:fld id="{F7021451-1387-4CA6-816F-3879F97B5CBC}" type="slidenum">
               <a:rPr b="0" lang="en-US"/>
-              <a:t>10</a:t>
+              <a:t>11</a:t>
             </a:fld>
             <a:endParaRPr lang="en-US"/>
           </a:p>
@@ -8958,7 +9690,7 @@
                   <a:schemeClr val="accent6"/>
                 </a:solidFill>
               </a:rPr>
-              <a:t>例：2004 年罗非昔布（Vioxx）因 APPROVe 试验显示心血管风险升高而撤市 → “上市批准”证据被撤销 → “可用于关节炎长期镇痛”的结论自动降级。</a:t>
+              <a:t>例：2024 年伏塞洛托（Oxbryta）因上市后数据显示死亡增多而撤市 → “批准”证据被撤销 → “可用于治疗镰状细胞病”的结论自动降级。</a:t>
             </a:r>
             <a:endParaRPr lang="en-US" sz="1150" dirty="0"/>
           </a:p>
@@ -9791,7 +10523,7 @@
                   <a:schemeClr val="tx2"/>
                 </a:solidFill>
               </a:rPr>
-              <a:t>举例：罗非昔布（Vioxx）的两条结论</a:t>
+              <a:t>案例一：伏塞洛托（Oxbryta），镰状细胞病</a:t>
             </a:r>
             <a:endParaRPr lang="en-US" sz="1400" dirty="0"/>
           </a:p>
@@ -9856,10 +10588,10 @@
             <a:tbl>
               <a:tblPr/>
               <a:tblGrid>
-                <a:gridCol w="960120"/>
-                <a:gridCol w="2057400"/>
-                <a:gridCol w="1280160"/>
-                <a:gridCol w="1645920"/>
+                <a:gridCol w="685800"/>
+                <a:gridCol w="2148840"/>
+                <a:gridCol w="1554480"/>
+                <a:gridCol w="1554480"/>
               </a:tblGrid>
               <a:tr h="420624">
                 <a:tc>
@@ -10036,7 +10768,7 @@
                           <a:ea typeface="Microsoft YaHei" pitchFamily="34" charset="-122"/>
                           <a:cs typeface="Microsoft YaHei" pitchFamily="34" charset="-120"/>
                         </a:rPr>
-                        <a:t>关节炎长期镇痛</a:t>
+                        <a:t>可用于治疗该病</a:t>
                       </a:r>
                       <a:endParaRPr lang="en-US" sz="1050" dirty="0">
                         <a:latin typeface="Microsoft YaHei" charset="0"/>
@@ -10125,7 +10857,7 @@
                           <a:ea typeface="Microsoft YaHei" pitchFamily="34" charset="-122"/>
                           <a:cs typeface="Microsoft YaHei" pitchFamily="34" charset="-120"/>
                         </a:rPr>
-                        <a:t>胃肠道风险低于萘普生</a:t>
+                        <a:t>能提高血红蛋白</a:t>
                       </a:r>
                       <a:endParaRPr lang="en-US" sz="1050" dirty="0">
                         <a:latin typeface="Microsoft YaHei" charset="0"/>
@@ -10195,7 +10927,7 @@
                           <a:ea typeface="Microsoft YaHei" pitchFamily="34" charset="-122"/>
                           <a:cs typeface="Microsoft YaHei" pitchFamily="34" charset="-120"/>
                         </a:rPr>
-                        <a:t>1999–2000</a:t>
+                        <a:t>2019</a:t>
                       </a:r>
                       <a:endParaRPr lang="en-US" sz="1050" dirty="0">
                         <a:latin typeface="Microsoft YaHei" charset="0"/>
@@ -10263,7 +10995,7 @@
                           <a:ea typeface="Microsoft YaHei" pitchFamily="34" charset="-122"/>
                           <a:cs typeface="Microsoft YaHei" pitchFamily="34" charset="-120"/>
                         </a:rPr>
-                        <a:t>上市批准 + VIGOR 试验</a:t>
+                        <a:t>HOPE 试验 + 加速批准</a:t>
                       </a:r>
                       <a:endParaRPr lang="en-US" sz="1050" dirty="0">
                         <a:latin typeface="Microsoft YaHei" charset="0"/>
@@ -10469,7 +11201,7 @@
                           <a:ea typeface="Microsoft YaHei" pitchFamily="34" charset="-122"/>
                           <a:cs typeface="Microsoft YaHei" pitchFamily="34" charset="-120"/>
                         </a:rPr>
-                        <a:t>2004</a:t>
+                        <a:t>2024</a:t>
                       </a:r>
                       <a:endParaRPr lang="en-US" sz="1050" dirty="0">
                         <a:latin typeface="Microsoft YaHei" charset="0"/>
@@ -10537,7 +11269,7 @@
                           <a:ea typeface="Microsoft YaHei" pitchFamily="34" charset="-122"/>
                           <a:cs typeface="Microsoft YaHei" pitchFamily="34" charset="-120"/>
                         </a:rPr>
-                        <a:t>APPROVe 试验后撤市</a:t>
+                        <a:t>上市后死亡增多，撤市</a:t>
                       </a:r>
                       <a:endParaRPr lang="en-US" sz="1050" dirty="0">
                         <a:latin typeface="Microsoft YaHei" charset="0"/>
@@ -10665,7 +11397,7 @@
                         <a:buNone/>
                       </a:pPr>
                       <a:r>
-                        <a:rPr lang="en-US" sz="1050" dirty="0">
+                        <a:rPr lang="en-US" sz="1050" b="1" dirty="0">
                           <a:solidFill>
                             <a:srgbClr val="1B2533"/>
                           </a:solidFill>
@@ -10725,287 +11457,49 @@
                   </a:tcPr>
                 </a:tc>
               </a:tr>
-              <a:tr h="265176">
-                <a:tc>
-                  <a:txBody>
-                    <a:bodyPr/>
-                    <a:lstStyle/>
-                    <a:p>
-                      <a:pPr indent="0" marL="0">
-                        <a:buNone/>
-                      </a:pPr>
-                      <a:r>
-                        <a:rPr lang="en-US" sz="1050" dirty="0">
-                          <a:solidFill>
-                            <a:srgbClr val="1B2533"/>
-                          </a:solidFill>
-                          <a:latin typeface="Microsoft YaHei" pitchFamily="34" charset="0"/>
-                          <a:ea typeface="Microsoft YaHei" pitchFamily="34" charset="-122"/>
-                          <a:cs typeface="Microsoft YaHei" pitchFamily="34" charset="-120"/>
-                        </a:rPr>
-                        <a:t>2005</a:t>
-                      </a:r>
-                      <a:endParaRPr lang="en-US" sz="1050" dirty="0">
-                        <a:latin typeface="Microsoft YaHei" charset="0"/>
-                        <a:ea typeface="Microsoft YaHei" charset="0"/>
-                        <a:cs typeface="Microsoft YaHei" charset="0"/>
-                      </a:endParaRPr>
-                    </a:p>
-                  </a:txBody>
-                  <a:tcPr marL="54864" marR="54864" marT="18288" marB="18288" anchor="ctr">
-                    <a:lnL w="6350" cap="flat" cmpd="sng" algn="ctr">
-                      <a:solidFill>
-                        <a:srgbClr val="E6D3BC"/>
-                      </a:solidFill>
-                      <a:prstDash val="solid"/>
-                      <a:round/>
-                      <a:headEnd type="none" w="med" len="med"/>
-                      <a:tailEnd type="none" w="med" len="med"/>
-                    </a:lnL>
-                    <a:lnR w="6350" cap="flat" cmpd="sng" algn="ctr">
-                      <a:solidFill>
-                        <a:srgbClr val="E6D3BC"/>
-                      </a:solidFill>
-                      <a:prstDash val="solid"/>
-                      <a:round/>
-                      <a:headEnd type="none" w="med" len="med"/>
-                      <a:tailEnd type="none" w="med" len="med"/>
-                    </a:lnR>
-                    <a:lnT w="6350" cap="flat" cmpd="sng" algn="ctr">
-                      <a:solidFill>
-                        <a:srgbClr val="E6D3BC"/>
-                      </a:solidFill>
-                      <a:prstDash val="solid"/>
-                      <a:round/>
-                      <a:headEnd type="none" w="med" len="med"/>
-                      <a:tailEnd type="none" w="med" len="med"/>
-                    </a:lnT>
-                    <a:lnB w="6350" cap="flat" cmpd="sng" algn="ctr">
-                      <a:solidFill>
-                        <a:srgbClr val="E6D3BC"/>
-                      </a:solidFill>
-                      <a:prstDash val="solid"/>
-                      <a:round/>
-                      <a:headEnd type="none" w="med" len="med"/>
-                      <a:tailEnd type="none" w="med" len="med"/>
-                    </a:lnB>
-                    <a:solidFill>
-                      <a:srgbClr val="FFFFFF"/>
-                    </a:solidFill>
-                  </a:tcPr>
-                </a:tc>
-                <a:tc>
-                  <a:txBody>
-                    <a:bodyPr/>
-                    <a:lstStyle/>
-                    <a:p>
-                      <a:pPr indent="0" marL="0">
-                        <a:buNone/>
-                      </a:pPr>
-                      <a:r>
-                        <a:rPr lang="en-US" sz="1050" dirty="0">
-                          <a:solidFill>
-                            <a:srgbClr val="1B2533"/>
-                          </a:solidFill>
-                          <a:latin typeface="Microsoft YaHei" pitchFamily="34" charset="0"/>
-                          <a:ea typeface="Microsoft YaHei" pitchFamily="34" charset="-122"/>
-                          <a:cs typeface="Microsoft YaHei" pitchFamily="34" charset="-120"/>
-                        </a:rPr>
-                        <a:t>期刊对 VIGOR 发关注声明</a:t>
-                      </a:r>
-                      <a:endParaRPr lang="en-US" sz="1050" dirty="0">
-                        <a:latin typeface="Microsoft YaHei" charset="0"/>
-                        <a:ea typeface="Microsoft YaHei" charset="0"/>
-                        <a:cs typeface="Microsoft YaHei" charset="0"/>
-                      </a:endParaRPr>
-                    </a:p>
-                  </a:txBody>
-                  <a:tcPr marL="54864" marR="54864" marT="18288" marB="18288" anchor="ctr">
-                    <a:lnL w="6350" cap="flat" cmpd="sng" algn="ctr">
-                      <a:solidFill>
-                        <a:srgbClr val="E6D3BC"/>
-                      </a:solidFill>
-                      <a:prstDash val="solid"/>
-                      <a:round/>
-                      <a:headEnd type="none" w="med" len="med"/>
-                      <a:tailEnd type="none" w="med" len="med"/>
-                    </a:lnL>
-                    <a:lnR w="6350" cap="flat" cmpd="sng" algn="ctr">
-                      <a:solidFill>
-                        <a:srgbClr val="E6D3BC"/>
-                      </a:solidFill>
-                      <a:prstDash val="solid"/>
-                      <a:round/>
-                      <a:headEnd type="none" w="med" len="med"/>
-                      <a:tailEnd type="none" w="med" len="med"/>
-                    </a:lnR>
-                    <a:lnT w="6350" cap="flat" cmpd="sng" algn="ctr">
-                      <a:solidFill>
-                        <a:srgbClr val="E6D3BC"/>
-                      </a:solidFill>
-                      <a:prstDash val="solid"/>
-                      <a:round/>
-                      <a:headEnd type="none" w="med" len="med"/>
-                      <a:tailEnd type="none" w="med" len="med"/>
-                    </a:lnT>
-                    <a:lnB w="6350" cap="flat" cmpd="sng" algn="ctr">
-                      <a:solidFill>
-                        <a:srgbClr val="E6D3BC"/>
-                      </a:solidFill>
-                      <a:prstDash val="solid"/>
-                      <a:round/>
-                      <a:headEnd type="none" w="med" len="med"/>
-                      <a:tailEnd type="none" w="med" len="med"/>
-                    </a:lnB>
-                    <a:solidFill>
-                      <a:srgbClr val="FFFFFF"/>
-                    </a:solidFill>
-                  </a:tcPr>
-                </a:tc>
-                <a:tc>
-                  <a:txBody>
-                    <a:bodyPr/>
-                    <a:lstStyle/>
-                    <a:p>
-                      <a:pPr indent="0" marL="0">
-                        <a:buNone/>
-                      </a:pPr>
-                      <a:r>
-                        <a:rPr lang="en-US" sz="1050" dirty="0">
-                          <a:solidFill>
-                            <a:srgbClr val="C9792A"/>
-                          </a:solidFill>
-                          <a:latin typeface="Microsoft YaHei" pitchFamily="34" charset="0"/>
-                          <a:ea typeface="Microsoft YaHei" pitchFamily="34" charset="-122"/>
-                          <a:cs typeface="Microsoft YaHei" pitchFamily="34" charset="-120"/>
-                        </a:rPr>
-                        <a:t>有争议</a:t>
-                      </a:r>
-                      <a:endParaRPr lang="en-US" sz="1050" dirty="0">
-                        <a:latin typeface="Microsoft YaHei" charset="0"/>
-                        <a:ea typeface="Microsoft YaHei" charset="0"/>
-                        <a:cs typeface="Microsoft YaHei" charset="0"/>
-                      </a:endParaRPr>
-                    </a:p>
-                  </a:txBody>
-                  <a:tcPr marL="54864" marR="54864" marT="18288" marB="18288" anchor="ctr">
-                    <a:lnL w="6350" cap="flat" cmpd="sng" algn="ctr">
-                      <a:solidFill>
-                        <a:srgbClr val="E6D3BC"/>
-                      </a:solidFill>
-                      <a:prstDash val="solid"/>
-                      <a:round/>
-                      <a:headEnd type="none" w="med" len="med"/>
-                      <a:tailEnd type="none" w="med" len="med"/>
-                    </a:lnL>
-                    <a:lnR w="6350" cap="flat" cmpd="sng" algn="ctr">
-                      <a:solidFill>
-                        <a:srgbClr val="E6D3BC"/>
-                      </a:solidFill>
-                      <a:prstDash val="solid"/>
-                      <a:round/>
-                      <a:headEnd type="none" w="med" len="med"/>
-                      <a:tailEnd type="none" w="med" len="med"/>
-                    </a:lnR>
-                    <a:lnT w="6350" cap="flat" cmpd="sng" algn="ctr">
-                      <a:solidFill>
-                        <a:srgbClr val="E6D3BC"/>
-                      </a:solidFill>
-                      <a:prstDash val="solid"/>
-                      <a:round/>
-                      <a:headEnd type="none" w="med" len="med"/>
-                      <a:tailEnd type="none" w="med" len="med"/>
-                    </a:lnT>
-                    <a:lnB w="6350" cap="flat" cmpd="sng" algn="ctr">
-                      <a:solidFill>
-                        <a:srgbClr val="E6D3BC"/>
-                      </a:solidFill>
-                      <a:prstDash val="solid"/>
-                      <a:round/>
-                      <a:headEnd type="none" w="med" len="med"/>
-                      <a:tailEnd type="none" w="med" len="med"/>
-                    </a:lnB>
-                    <a:solidFill>
-                      <a:srgbClr val="FFFFFF"/>
-                    </a:solidFill>
-                  </a:tcPr>
-                </a:tc>
-                <a:tc>
-                  <a:txBody>
-                    <a:bodyPr/>
-                    <a:lstStyle/>
-                    <a:p>
-                      <a:pPr indent="0" marL="0">
-                        <a:buNone/>
-                      </a:pPr>
-                      <a:r>
-                        <a:rPr lang="en-US" sz="1050" b="1" dirty="0">
-                          <a:solidFill>
-                            <a:srgbClr val="C9792A"/>
-                          </a:solidFill>
-                          <a:latin typeface="Microsoft YaHei" pitchFamily="34" charset="0"/>
-                          <a:ea typeface="Microsoft YaHei" pitchFamily="34" charset="-122"/>
-                          <a:cs typeface="Microsoft YaHei" pitchFamily="34" charset="-120"/>
-                        </a:rPr>
-                        <a:t>→ 有争议（扫描）</a:t>
-                      </a:r>
-                      <a:endParaRPr lang="en-US" sz="1050" dirty="0">
-                        <a:latin typeface="Microsoft YaHei" charset="0"/>
-                        <a:ea typeface="Microsoft YaHei" charset="0"/>
-                        <a:cs typeface="Microsoft YaHei" charset="0"/>
-                      </a:endParaRPr>
-                    </a:p>
-                  </a:txBody>
-                  <a:tcPr marL="54864" marR="54864" marT="18288" marB="18288" anchor="ctr">
-                    <a:lnL w="6350" cap="flat" cmpd="sng" algn="ctr">
-                      <a:solidFill>
-                        <a:srgbClr val="E6D3BC"/>
-                      </a:solidFill>
-                      <a:prstDash val="solid"/>
-                      <a:round/>
-                      <a:headEnd type="none" w="med" len="med"/>
-                      <a:tailEnd type="none" w="med" len="med"/>
-                    </a:lnL>
-                    <a:lnR w="6350" cap="flat" cmpd="sng" algn="ctr">
-                      <a:solidFill>
-                        <a:srgbClr val="E6D3BC"/>
-                      </a:solidFill>
-                      <a:prstDash val="solid"/>
-                      <a:round/>
-                      <a:headEnd type="none" w="med" len="med"/>
-                      <a:tailEnd type="none" w="med" len="med"/>
-                    </a:lnR>
-                    <a:lnT w="6350" cap="flat" cmpd="sng" algn="ctr">
-                      <a:solidFill>
-                        <a:srgbClr val="E6D3BC"/>
-                      </a:solidFill>
-                      <a:prstDash val="solid"/>
-                      <a:round/>
-                      <a:headEnd type="none" w="med" len="med"/>
-                      <a:tailEnd type="none" w="med" len="med"/>
-                    </a:lnT>
-                    <a:lnB w="6350" cap="flat" cmpd="sng" algn="ctr">
-                      <a:solidFill>
-                        <a:srgbClr val="E6D3BC"/>
-                      </a:solidFill>
-                      <a:prstDash val="solid"/>
-                      <a:round/>
-                      <a:headEnd type="none" w="med" len="med"/>
-                      <a:tailEnd type="none" w="med" len="med"/>
-                    </a:lnB>
-                    <a:solidFill>
-                      <a:srgbClr val="FFFFFF"/>
-                    </a:solidFill>
-                  </a:tcPr>
-                </a:tc>
-              </a:tr>
             </a:tbl>
           </a:graphicData>
         </a:graphic>
       </p:graphicFrame>
       <p:sp>
         <p:nvSpPr>
-          <p:cNvPr id="26" name="badge-130"/>
+          <p:cNvPr id="26" name="label-130"/>
+          <p:cNvSpPr txBox="1"/>
+          <p:nvPr/>
+        </p:nvSpPr>
+        <p:spPr>
+          <a:xfrm>
+            <a:off x="777240" y="6053328"/>
+            <a:ext cx="5943600" cy="237744"/>
+          </a:xfrm>
+          <a:prstGeom prst="rect">
+            <a:avLst/>
+          </a:prstGeom>
+          <a:noFill/>
+          <a:ln/>
+        </p:spPr>
+        <p:txBody>
+          <a:bodyPr wrap="square" lIns="0" tIns="0" rIns="0" bIns="0" rtlCol="0" anchor="t"/>
+          <a:lstStyle/>
+          <a:p>
+            <a:pPr algn="l" indent="0" marL="0">
+              <a:buNone/>
+            </a:pPr>
+            <a:r>
+              <a:rPr lang="en-US" sz="1050" dirty="0">
+                <a:solidFill>
+                  <a:schemeClr val="tx1"/>
+                </a:solidFill>
+              </a:rPr>
+              <a:t>只降级依赖“批准”的结论：血红蛋白确实升高，但患者结局变差。</a:t>
+            </a:r>
+            <a:endParaRPr lang="en-US" sz="1050" dirty="0"/>
+          </a:p>
+        </p:txBody>
+      </p:sp>
+      <p:sp>
+        <p:nvSpPr>
+          <p:cNvPr id="27" name="badge-131"/>
           <p:cNvSpPr/>
           <p:nvPr/>
         </p:nvSpPr>
@@ -11047,7 +11541,7 @@
       </p:sp>
       <p:sp>
         <p:nvSpPr>
-          <p:cNvPr id="27" name="label-131"/>
+          <p:cNvPr id="28" name="label-132"/>
           <p:cNvSpPr txBox="1"/>
           <p:nvPr/>
         </p:nvSpPr>
@@ -11083,7 +11577,7 @@
       </p:sp>
       <p:sp>
         <p:nvSpPr>
-          <p:cNvPr id="28" name="label-132"/>
+          <p:cNvPr id="29" name="label-133"/>
           <p:cNvSpPr txBox="1"/>
           <p:nvPr/>
         </p:nvSpPr>
@@ -11111,7 +11605,7 @@
                   <a:schemeClr val="accent6"/>
                 </a:solidFill>
               </a:rPr>
-              <a:t>来源、时效、隐私、数值合理性、撤稿五项检查；不通过即隔离，原因可查。</a:t>
+              <a:t>来源可追溯、未过期、数值在合理范围、不含未授权患者数据、未被撤稿；任一不过即隔离，原因写入账本。不替代对研究质量的专业判断。</a:t>
             </a:r>
             <a:endParaRPr lang="en-US" sz="1400" dirty="0"/>
           </a:p>
@@ -11119,7 +11613,7 @@
       </p:sp>
       <p:sp>
         <p:nvSpPr>
-          <p:cNvPr id="29" name="badge-133"/>
+          <p:cNvPr id="30" name="badge-134"/>
           <p:cNvSpPr/>
           <p:nvPr/>
         </p:nvSpPr>
@@ -11161,7 +11655,7 @@
       </p:sp>
       <p:sp>
         <p:nvSpPr>
-          <p:cNvPr id="30" name="label-134"/>
+          <p:cNvPr id="31" name="label-135"/>
           <p:cNvSpPr txBox="1"/>
           <p:nvPr/>
         </p:nvSpPr>
@@ -11197,7 +11691,7 @@
       </p:sp>
       <p:sp>
         <p:nvSpPr>
-          <p:cNvPr id="31" name="label-135"/>
+          <p:cNvPr id="32" name="label-136"/>
           <p:cNvSpPr txBox="1"/>
           <p:nvPr/>
         </p:nvSpPr>
@@ -11233,7 +11727,7 @@
       </p:sp>
       <p:sp>
         <p:nvSpPr>
-          <p:cNvPr id="32" name="badge-136"/>
+          <p:cNvPr id="33" name="badge-137"/>
           <p:cNvSpPr/>
           <p:nvPr/>
         </p:nvSpPr>
@@ -11275,7 +11769,7 @@
       </p:sp>
       <p:sp>
         <p:nvSpPr>
-          <p:cNvPr id="33" name="label-137"/>
+          <p:cNvPr id="34" name="label-138"/>
           <p:cNvSpPr txBox="1"/>
           <p:nvPr/>
         </p:nvSpPr>
@@ -11311,7 +11805,7 @@
       </p:sp>
       <p:sp>
         <p:nvSpPr>
-          <p:cNvPr id="34" name="label-138"/>
+          <p:cNvPr id="35" name="label-139"/>
           <p:cNvSpPr txBox="1"/>
           <p:nvPr/>
         </p:nvSpPr>
@@ -11447,7 +11941,7 @@
                   <a:schemeClr val="tx2"/>
                 </a:solidFill>
               </a:rPr>
-              <a:t>设计点②③：分歧时先查什么，结论何时能下</a:t>
+              <a:t>案例二：Makena——确证性试验推翻早期结论</a:t>
             </a:r>
             <a:endParaRPr lang="en-US" sz="2800" dirty="0"/>
           </a:p>
@@ -11485,6 +11979,2039 @@
                   <a:schemeClr val="accent6"/>
                 </a:solidFill>
               </a:rPr>
+              <a:t>证据相互矛盾时，账本保留分歧、不替人裁决；新结论有据可查地取代旧结论。</a:t>
+            </a:r>
+            <a:endParaRPr lang="en-US" sz="1500" dirty="0"/>
+          </a:p>
+        </p:txBody>
+      </p:sp>
+      <p:sp>
+        <p:nvSpPr>
+          <p:cNvPr id="4" name="timeline-140"/>
+          <p:cNvSpPr/>
+          <p:nvPr/>
+        </p:nvSpPr>
+        <p:spPr>
+          <a:xfrm>
+            <a:off x="1371600" y="2148840"/>
+            <a:ext cx="9448495" cy="0"/>
+          </a:xfrm>
+          <a:prstGeom prst="line">
+            <a:avLst/>
+          </a:prstGeom>
+          <a:noFill/>
+          <a:ln w="25400">
+            <a:solidFill>
+              <a:srgbClr val="C3CCD6"/>
+            </a:solidFill>
+            <a:prstDash val="solid"/>
+          </a:ln>
+        </p:spPr>
+      </p:sp>
+      <p:sp>
+        <p:nvSpPr>
+          <p:cNvPr id="5" name="dot-141"/>
+          <p:cNvSpPr/>
+          <p:nvPr/>
+        </p:nvSpPr>
+        <p:spPr>
+          <a:xfrm>
+            <a:off x="1243584" y="2020824"/>
+            <a:ext cx="256032" cy="256032"/>
+          </a:xfrm>
+          <a:prstGeom prst="ellipse">
+            <a:avLst/>
+          </a:prstGeom>
+          <a:solidFill>
+            <a:schemeClr val="accent1"/>
+          </a:solidFill>
+          <a:ln w="25400">
+            <a:solidFill>
+              <a:srgbClr val="FFFFFF"/>
+            </a:solidFill>
+            <a:prstDash val="solid"/>
+          </a:ln>
+        </p:spPr>
+      </p:sp>
+      <p:sp>
+        <p:nvSpPr>
+          <p:cNvPr id="6" name="label-142"/>
+          <p:cNvSpPr txBox="1"/>
+          <p:nvPr/>
+        </p:nvSpPr>
+        <p:spPr>
+          <a:xfrm>
+            <a:off x="182880" y="1581912"/>
+            <a:ext cx="2377440" cy="329184"/>
+          </a:xfrm>
+          <a:prstGeom prst="rect">
+            <a:avLst/>
+          </a:prstGeom>
+          <a:noFill/>
+          <a:ln/>
+        </p:spPr>
+        <p:txBody>
+          <a:bodyPr wrap="square" lIns="0" tIns="0" rIns="0" bIns="0" rtlCol="0" anchor="t"/>
+          <a:lstStyle/>
+          <a:p>
+            <a:pPr algn="ctr" indent="0" marL="0">
+              <a:buNone/>
+            </a:pPr>
+            <a:r>
+              <a:rPr lang="en-US" sz="1500" b="1" dirty="0">
+                <a:solidFill>
+                  <a:schemeClr val="tx2"/>
+                </a:solidFill>
+              </a:rPr>
+              <a:t>2003</a:t>
+            </a:r>
+            <a:endParaRPr lang="en-US" sz="1500" dirty="0"/>
+          </a:p>
+        </p:txBody>
+      </p:sp>
+      <p:sp>
+        <p:nvSpPr>
+          <p:cNvPr id="7" name="label-143"/>
+          <p:cNvSpPr txBox="1"/>
+          <p:nvPr/>
+        </p:nvSpPr>
+        <p:spPr>
+          <a:xfrm>
+            <a:off x="91440" y="2377440"/>
+            <a:ext cx="2560320" cy="292608"/>
+          </a:xfrm>
+          <a:prstGeom prst="rect">
+            <a:avLst/>
+          </a:prstGeom>
+          <a:noFill/>
+          <a:ln/>
+        </p:spPr>
+        <p:txBody>
+          <a:bodyPr wrap="square" lIns="0" tIns="0" rIns="0" bIns="0" rtlCol="0" anchor="t"/>
+          <a:lstStyle/>
+          <a:p>
+            <a:pPr algn="ctr" indent="0" marL="0">
+              <a:buNone/>
+            </a:pPr>
+            <a:r>
+              <a:rPr lang="en-US" sz="1350" b="1" dirty="0">
+                <a:solidFill>
+                  <a:schemeClr val="tx1"/>
+                </a:solidFill>
+              </a:rPr>
+              <a:t>Meis 试验</a:t>
+            </a:r>
+            <a:endParaRPr lang="en-US" sz="1350" dirty="0"/>
+          </a:p>
+        </p:txBody>
+      </p:sp>
+      <p:sp>
+        <p:nvSpPr>
+          <p:cNvPr id="8" name="label-144"/>
+          <p:cNvSpPr txBox="1"/>
+          <p:nvPr/>
+        </p:nvSpPr>
+        <p:spPr>
+          <a:xfrm>
+            <a:off x="91440" y="2670048"/>
+            <a:ext cx="2560320" cy="274320"/>
+          </a:xfrm>
+          <a:prstGeom prst="rect">
+            <a:avLst/>
+          </a:prstGeom>
+          <a:noFill/>
+          <a:ln/>
+        </p:spPr>
+        <p:txBody>
+          <a:bodyPr wrap="square" lIns="0" tIns="0" rIns="0" bIns="0" rtlCol="0" anchor="t"/>
+          <a:lstStyle/>
+          <a:p>
+            <a:pPr algn="ctr" indent="0" marL="0">
+              <a:buNone/>
+            </a:pPr>
+            <a:r>
+              <a:rPr lang="en-US" sz="1150" dirty="0">
+                <a:solidFill>
+                  <a:schemeClr val="accent6"/>
+                </a:solidFill>
+              </a:rPr>
+              <a:t>早产风险下降</a:t>
+            </a:r>
+            <a:endParaRPr lang="en-US" sz="1150" dirty="0"/>
+          </a:p>
+        </p:txBody>
+      </p:sp>
+      <p:sp>
+        <p:nvSpPr>
+          <p:cNvPr id="9" name="dot-145"/>
+          <p:cNvSpPr/>
+          <p:nvPr/>
+        </p:nvSpPr>
+        <p:spPr>
+          <a:xfrm>
+            <a:off x="4393082" y="2020824"/>
+            <a:ext cx="256032" cy="256032"/>
+          </a:xfrm>
+          <a:prstGeom prst="ellipse">
+            <a:avLst/>
+          </a:prstGeom>
+          <a:solidFill>
+            <a:schemeClr val="accent1"/>
+          </a:solidFill>
+          <a:ln w="25400">
+            <a:solidFill>
+              <a:srgbClr val="FFFFFF"/>
+            </a:solidFill>
+            <a:prstDash val="solid"/>
+          </a:ln>
+        </p:spPr>
+      </p:sp>
+      <p:sp>
+        <p:nvSpPr>
+          <p:cNvPr id="10" name="label-146"/>
+          <p:cNvSpPr txBox="1"/>
+          <p:nvPr/>
+        </p:nvSpPr>
+        <p:spPr>
+          <a:xfrm>
+            <a:off x="3332378" y="1581912"/>
+            <a:ext cx="2377440" cy="329184"/>
+          </a:xfrm>
+          <a:prstGeom prst="rect">
+            <a:avLst/>
+          </a:prstGeom>
+          <a:noFill/>
+          <a:ln/>
+        </p:spPr>
+        <p:txBody>
+          <a:bodyPr wrap="square" lIns="0" tIns="0" rIns="0" bIns="0" rtlCol="0" anchor="t"/>
+          <a:lstStyle/>
+          <a:p>
+            <a:pPr algn="ctr" indent="0" marL="0">
+              <a:buNone/>
+            </a:pPr>
+            <a:r>
+              <a:rPr lang="en-US" sz="1500" b="1" dirty="0">
+                <a:solidFill>
+                  <a:schemeClr val="tx2"/>
+                </a:solidFill>
+              </a:rPr>
+              <a:t>2011</a:t>
+            </a:r>
+            <a:endParaRPr lang="en-US" sz="1500" dirty="0"/>
+          </a:p>
+        </p:txBody>
+      </p:sp>
+      <p:sp>
+        <p:nvSpPr>
+          <p:cNvPr id="11" name="label-147"/>
+          <p:cNvSpPr txBox="1"/>
+          <p:nvPr/>
+        </p:nvSpPr>
+        <p:spPr>
+          <a:xfrm>
+            <a:off x="3240938" y="2377440"/>
+            <a:ext cx="2560320" cy="292608"/>
+          </a:xfrm>
+          <a:prstGeom prst="rect">
+            <a:avLst/>
+          </a:prstGeom>
+          <a:noFill/>
+          <a:ln/>
+        </p:spPr>
+        <p:txBody>
+          <a:bodyPr wrap="square" lIns="0" tIns="0" rIns="0" bIns="0" rtlCol="0" anchor="t"/>
+          <a:lstStyle/>
+          <a:p>
+            <a:pPr algn="ctr" indent="0" marL="0">
+              <a:buNone/>
+            </a:pPr>
+            <a:r>
+              <a:rPr lang="en-US" sz="1350" b="1" dirty="0">
+                <a:solidFill>
+                  <a:schemeClr val="tx1"/>
+                </a:solidFill>
+              </a:rPr>
+              <a:t>获加速批准</a:t>
+            </a:r>
+            <a:endParaRPr lang="en-US" sz="1350" dirty="0"/>
+          </a:p>
+        </p:txBody>
+      </p:sp>
+      <p:sp>
+        <p:nvSpPr>
+          <p:cNvPr id="12" name="label-148"/>
+          <p:cNvSpPr txBox="1"/>
+          <p:nvPr/>
+        </p:nvSpPr>
+        <p:spPr>
+          <a:xfrm>
+            <a:off x="3240938" y="2670048"/>
+            <a:ext cx="2560320" cy="274320"/>
+          </a:xfrm>
+          <a:prstGeom prst="rect">
+            <a:avLst/>
+          </a:prstGeom>
+          <a:noFill/>
+          <a:ln/>
+        </p:spPr>
+        <p:txBody>
+          <a:bodyPr wrap="square" lIns="0" tIns="0" rIns="0" bIns="0" rtlCol="0" anchor="t"/>
+          <a:lstStyle/>
+          <a:p>
+            <a:pPr algn="ctr" indent="0" marL="0">
+              <a:buNone/>
+            </a:pPr>
+            <a:r>
+              <a:rPr lang="en-US" sz="1150" dirty="0">
+                <a:solidFill>
+                  <a:schemeClr val="accent6"/>
+                </a:solidFill>
+              </a:rPr>
+              <a:t>依据上述试验</a:t>
+            </a:r>
+            <a:endParaRPr lang="en-US" sz="1150" dirty="0"/>
+          </a:p>
+        </p:txBody>
+      </p:sp>
+      <p:sp>
+        <p:nvSpPr>
+          <p:cNvPr id="13" name="dot-149"/>
+          <p:cNvSpPr/>
+          <p:nvPr/>
+        </p:nvSpPr>
+        <p:spPr>
+          <a:xfrm>
+            <a:off x="7542581" y="2020824"/>
+            <a:ext cx="256032" cy="256032"/>
+          </a:xfrm>
+          <a:prstGeom prst="ellipse">
+            <a:avLst/>
+          </a:prstGeom>
+          <a:solidFill>
+            <a:schemeClr val="accent3"/>
+          </a:solidFill>
+          <a:ln w="25400">
+            <a:solidFill>
+              <a:srgbClr val="FFFFFF"/>
+            </a:solidFill>
+            <a:prstDash val="solid"/>
+          </a:ln>
+        </p:spPr>
+      </p:sp>
+      <p:sp>
+        <p:nvSpPr>
+          <p:cNvPr id="14" name="label-150"/>
+          <p:cNvSpPr txBox="1"/>
+          <p:nvPr/>
+        </p:nvSpPr>
+        <p:spPr>
+          <a:xfrm>
+            <a:off x="6481877" y="1581912"/>
+            <a:ext cx="2377440" cy="329184"/>
+          </a:xfrm>
+          <a:prstGeom prst="rect">
+            <a:avLst/>
+          </a:prstGeom>
+          <a:noFill/>
+          <a:ln/>
+        </p:spPr>
+        <p:txBody>
+          <a:bodyPr wrap="square" lIns="0" tIns="0" rIns="0" bIns="0" rtlCol="0" anchor="t"/>
+          <a:lstStyle/>
+          <a:p>
+            <a:pPr algn="ctr" indent="0" marL="0">
+              <a:buNone/>
+            </a:pPr>
+            <a:r>
+              <a:rPr lang="en-US" sz="1500" b="1" dirty="0">
+                <a:solidFill>
+                  <a:schemeClr val="tx2"/>
+                </a:solidFill>
+              </a:rPr>
+              <a:t>2019–20</a:t>
+            </a:r>
+            <a:endParaRPr lang="en-US" sz="1500" dirty="0"/>
+          </a:p>
+        </p:txBody>
+      </p:sp>
+      <p:sp>
+        <p:nvSpPr>
+          <p:cNvPr id="15" name="label-151"/>
+          <p:cNvSpPr txBox="1"/>
+          <p:nvPr/>
+        </p:nvSpPr>
+        <p:spPr>
+          <a:xfrm>
+            <a:off x="6390437" y="2377440"/>
+            <a:ext cx="2560320" cy="292608"/>
+          </a:xfrm>
+          <a:prstGeom prst="rect">
+            <a:avLst/>
+          </a:prstGeom>
+          <a:noFill/>
+          <a:ln/>
+        </p:spPr>
+        <p:txBody>
+          <a:bodyPr wrap="square" lIns="0" tIns="0" rIns="0" bIns="0" rtlCol="0" anchor="t"/>
+          <a:lstStyle/>
+          <a:p>
+            <a:pPr algn="ctr" indent="0" marL="0">
+              <a:buNone/>
+            </a:pPr>
+            <a:r>
+              <a:rPr lang="en-US" sz="1350" b="1" dirty="0">
+                <a:solidFill>
+                  <a:schemeClr val="tx1"/>
+                </a:solidFill>
+              </a:rPr>
+              <a:t>确证试验 PROLONG</a:t>
+            </a:r>
+            <a:endParaRPr lang="en-US" sz="1350" dirty="0"/>
+          </a:p>
+        </p:txBody>
+      </p:sp>
+      <p:sp>
+        <p:nvSpPr>
+          <p:cNvPr id="16" name="label-152"/>
+          <p:cNvSpPr txBox="1"/>
+          <p:nvPr/>
+        </p:nvSpPr>
+        <p:spPr>
+          <a:xfrm>
+            <a:off x="6390437" y="2670048"/>
+            <a:ext cx="2560320" cy="274320"/>
+          </a:xfrm>
+          <a:prstGeom prst="rect">
+            <a:avLst/>
+          </a:prstGeom>
+          <a:noFill/>
+          <a:ln/>
+        </p:spPr>
+        <p:txBody>
+          <a:bodyPr wrap="square" lIns="0" tIns="0" rIns="0" bIns="0" rtlCol="0" anchor="t"/>
+          <a:lstStyle/>
+          <a:p>
+            <a:pPr algn="ctr" indent="0" marL="0">
+              <a:buNone/>
+            </a:pPr>
+            <a:r>
+              <a:rPr lang="en-US" sz="1150" dirty="0">
+                <a:solidFill>
+                  <a:schemeClr val="accent6"/>
+                </a:solidFill>
+              </a:rPr>
+              <a:t>未见降低早产</a:t>
+            </a:r>
+            <a:endParaRPr lang="en-US" sz="1150" dirty="0"/>
+          </a:p>
+        </p:txBody>
+      </p:sp>
+      <p:sp>
+        <p:nvSpPr>
+          <p:cNvPr id="17" name="dot-153"/>
+          <p:cNvSpPr/>
+          <p:nvPr/>
+        </p:nvSpPr>
+        <p:spPr>
+          <a:xfrm>
+            <a:off x="10692079" y="2020824"/>
+            <a:ext cx="256032" cy="256032"/>
+          </a:xfrm>
+          <a:prstGeom prst="ellipse">
+            <a:avLst/>
+          </a:prstGeom>
+          <a:solidFill>
+            <a:srgbClr val="B4233A"/>
+          </a:solidFill>
+          <a:ln w="25400">
+            <a:solidFill>
+              <a:srgbClr val="FFFFFF"/>
+            </a:solidFill>
+            <a:prstDash val="solid"/>
+          </a:ln>
+        </p:spPr>
+      </p:sp>
+      <p:sp>
+        <p:nvSpPr>
+          <p:cNvPr id="18" name="label-154"/>
+          <p:cNvSpPr txBox="1"/>
+          <p:nvPr/>
+        </p:nvSpPr>
+        <p:spPr>
+          <a:xfrm>
+            <a:off x="9631375" y="1581912"/>
+            <a:ext cx="2377440" cy="329184"/>
+          </a:xfrm>
+          <a:prstGeom prst="rect">
+            <a:avLst/>
+          </a:prstGeom>
+          <a:noFill/>
+          <a:ln/>
+        </p:spPr>
+        <p:txBody>
+          <a:bodyPr wrap="square" lIns="0" tIns="0" rIns="0" bIns="0" rtlCol="0" anchor="t"/>
+          <a:lstStyle/>
+          <a:p>
+            <a:pPr algn="ctr" indent="0" marL="0">
+              <a:buNone/>
+            </a:pPr>
+            <a:r>
+              <a:rPr lang="en-US" sz="1500" b="1" dirty="0">
+                <a:solidFill>
+                  <a:schemeClr val="tx2"/>
+                </a:solidFill>
+              </a:rPr>
+              <a:t>2023</a:t>
+            </a:r>
+            <a:endParaRPr lang="en-US" sz="1500" dirty="0"/>
+          </a:p>
+        </p:txBody>
+      </p:sp>
+      <p:sp>
+        <p:nvSpPr>
+          <p:cNvPr id="19" name="label-155"/>
+          <p:cNvSpPr txBox="1"/>
+          <p:nvPr/>
+        </p:nvSpPr>
+        <p:spPr>
+          <a:xfrm>
+            <a:off x="9539935" y="2377440"/>
+            <a:ext cx="2560320" cy="292608"/>
+          </a:xfrm>
+          <a:prstGeom prst="rect">
+            <a:avLst/>
+          </a:prstGeom>
+          <a:noFill/>
+          <a:ln/>
+        </p:spPr>
+        <p:txBody>
+          <a:bodyPr wrap="square" lIns="0" tIns="0" rIns="0" bIns="0" rtlCol="0" anchor="t"/>
+          <a:lstStyle/>
+          <a:p>
+            <a:pPr algn="ctr" indent="0" marL="0">
+              <a:buNone/>
+            </a:pPr>
+            <a:r>
+              <a:rPr lang="en-US" sz="1350" b="1" dirty="0">
+                <a:solidFill>
+                  <a:schemeClr val="tx1"/>
+                </a:solidFill>
+              </a:rPr>
+              <a:t>FDA 撤销批准</a:t>
+            </a:r>
+            <a:endParaRPr lang="en-US" sz="1350" dirty="0"/>
+          </a:p>
+        </p:txBody>
+      </p:sp>
+      <p:sp>
+        <p:nvSpPr>
+          <p:cNvPr id="20" name="label-156"/>
+          <p:cNvSpPr txBox="1"/>
+          <p:nvPr/>
+        </p:nvSpPr>
+        <p:spPr>
+          <a:xfrm>
+            <a:off x="9539935" y="2670048"/>
+            <a:ext cx="2560320" cy="274320"/>
+          </a:xfrm>
+          <a:prstGeom prst="rect">
+            <a:avLst/>
+          </a:prstGeom>
+          <a:noFill/>
+          <a:ln/>
+        </p:spPr>
+        <p:txBody>
+          <a:bodyPr wrap="square" lIns="0" tIns="0" rIns="0" bIns="0" rtlCol="0" anchor="t"/>
+          <a:lstStyle/>
+          <a:p>
+            <a:pPr algn="ctr" indent="0" marL="0">
+              <a:buNone/>
+            </a:pPr>
+            <a:r>
+              <a:rPr lang="en-US" sz="1150" dirty="0">
+                <a:solidFill>
+                  <a:schemeClr val="accent6"/>
+                </a:solidFill>
+              </a:rPr>
+              <a:t>药品退出市场</a:t>
+            </a:r>
+            <a:endParaRPr lang="en-US" sz="1150" dirty="0"/>
+          </a:p>
+        </p:txBody>
+      </p:sp>
+      <p:sp>
+        <p:nvSpPr>
+          <p:cNvPr id="21" name="card-157"/>
+          <p:cNvSpPr/>
+          <p:nvPr/>
+        </p:nvSpPr>
+        <p:spPr>
+          <a:xfrm>
+            <a:off x="548640" y="3200400"/>
+            <a:ext cx="6949440" cy="2743200"/>
+          </a:xfrm>
+          <a:prstGeom prst="roundRect">
+            <a:avLst>
+              <a:gd name="adj" fmla="val 3333"/>
+            </a:avLst>
+          </a:prstGeom>
+          <a:solidFill>
+            <a:srgbClr val="FBF4EC"/>
+          </a:solidFill>
+          <a:ln w="12700">
+            <a:solidFill>
+              <a:srgbClr val="FBF4EC"/>
+            </a:solidFill>
+            <a:prstDash val="solid"/>
+          </a:ln>
+        </p:spPr>
+      </p:sp>
+      <p:sp>
+        <p:nvSpPr>
+          <p:cNvPr id="22" name="label-158"/>
+          <p:cNvSpPr txBox="1"/>
+          <p:nvPr/>
+        </p:nvSpPr>
+        <p:spPr>
+          <a:xfrm>
+            <a:off x="777240" y="3310128"/>
+            <a:ext cx="6492240" cy="310896"/>
+          </a:xfrm>
+          <a:prstGeom prst="rect">
+            <a:avLst/>
+          </a:prstGeom>
+          <a:noFill/>
+          <a:ln/>
+        </p:spPr>
+        <p:txBody>
+          <a:bodyPr wrap="square" lIns="0" tIns="0" rIns="0" bIns="0" rtlCol="0" anchor="ctr"/>
+          <a:lstStyle/>
+          <a:p>
+            <a:pPr algn="l" indent="0" marL="0">
+              <a:buNone/>
+            </a:pPr>
+            <a:r>
+              <a:rPr lang="en-US" sz="1400" b="1" dirty="0">
+                <a:solidFill>
+                  <a:schemeClr val="tx2"/>
+                </a:solidFill>
+              </a:rPr>
+              <a:t>账本里发生了什么（结论 A：“17-OHPC 可降低早产风险”）</a:t>
+            </a:r>
+            <a:endParaRPr lang="en-US" sz="1400" dirty="0"/>
+          </a:p>
+        </p:txBody>
+      </p:sp>
+      <p:graphicFrame>
+        <p:nvGraphicFramePr>
+          <p:cNvPr id="8" name="table-159"/>
+          <p:cNvGraphicFramePr>
+            <a:graphicFrameLocks noGrp="1"/>
+          </p:cNvGraphicFramePr>
+          <p:nvPr>
+            <p:extLst>
+              <p:ext uri="{D42A27DB-BD31-4B8C-83A1-F6EECF244321}">
+                <p14:modId xmlns:p14="http://schemas.microsoft.com/office/powerpoint/2010/main" val="1579011935"/>
+              </p:ext>
+            </p:extLst>
+          </p:nvPr>
+        </p:nvGraphicFramePr>
+        <p:xfrm>
+          <a:off x="777240" y="3730752"/>
+          <a:ext cx="6492240" cy="914400"/>
+        </p:xfrm>
+        <a:graphic>
+          <a:graphicData uri="http://schemas.openxmlformats.org/drawingml/2006/table">
+            <a:tbl>
+              <a:tblPr/>
+              <a:tblGrid>
+                <a:gridCol w="685800"/>
+                <a:gridCol w="3063240"/>
+                <a:gridCol w="2743200"/>
+              </a:tblGrid>
+              <a:tr h="329184">
+                <a:tc>
+                  <a:txBody>
+                    <a:bodyPr/>
+                    <a:lstStyle/>
+                    <a:p>
+                      <a:pPr indent="0" marL="0">
+                        <a:buNone/>
+                      </a:pPr>
+                      <a:r>
+                        <a:rPr lang="en-US" sz="1150" b="1" dirty="0">
+                          <a:solidFill>
+                            <a:srgbClr val="0F2A44"/>
+                          </a:solidFill>
+                          <a:latin typeface="Microsoft YaHei" pitchFamily="34" charset="0"/>
+                          <a:ea typeface="Microsoft YaHei" pitchFamily="34" charset="-122"/>
+                          <a:cs typeface="Microsoft YaHei" pitchFamily="34" charset="-120"/>
+                        </a:rPr>
+                        <a:t>时间</a:t>
+                      </a:r>
+                      <a:endParaRPr lang="en-US" sz="1150" dirty="0">
+                        <a:latin typeface="Microsoft YaHei" charset="0"/>
+                        <a:ea typeface="Microsoft YaHei" charset="0"/>
+                        <a:cs typeface="Microsoft YaHei" charset="0"/>
+                      </a:endParaRPr>
+                    </a:p>
+                  </a:txBody>
+                  <a:tcPr marL="73152" marR="73152" marT="27432" marB="27432" anchor="ctr">
+                    <a:lnL w="6350" cap="flat" cmpd="sng" algn="ctr">
+                      <a:solidFill>
+                        <a:srgbClr val="E6D3BC"/>
+                      </a:solidFill>
+                      <a:prstDash val="solid"/>
+                      <a:round/>
+                      <a:headEnd type="none" w="med" len="med"/>
+                      <a:tailEnd type="none" w="med" len="med"/>
+                    </a:lnL>
+                    <a:lnR w="6350" cap="flat" cmpd="sng" algn="ctr">
+                      <a:solidFill>
+                        <a:srgbClr val="E6D3BC"/>
+                      </a:solidFill>
+                      <a:prstDash val="solid"/>
+                      <a:round/>
+                      <a:headEnd type="none" w="med" len="med"/>
+                      <a:tailEnd type="none" w="med" len="med"/>
+                    </a:lnR>
+                    <a:lnT w="6350" cap="flat" cmpd="sng" algn="ctr">
+                      <a:solidFill>
+                        <a:srgbClr val="E6D3BC"/>
+                      </a:solidFill>
+                      <a:prstDash val="solid"/>
+                      <a:round/>
+                      <a:headEnd type="none" w="med" len="med"/>
+                      <a:tailEnd type="none" w="med" len="med"/>
+                    </a:lnT>
+                    <a:lnB w="6350" cap="flat" cmpd="sng" algn="ctr">
+                      <a:solidFill>
+                        <a:srgbClr val="E6D3BC"/>
+                      </a:solidFill>
+                      <a:prstDash val="solid"/>
+                      <a:round/>
+                      <a:headEnd type="none" w="med" len="med"/>
+                      <a:tailEnd type="none" w="med" len="med"/>
+                    </a:lnB>
+                    <a:solidFill>
+                      <a:srgbClr val="F3E3CF"/>
+                    </a:solidFill>
+                  </a:tcPr>
+                </a:tc>
+                <a:tc>
+                  <a:txBody>
+                    <a:bodyPr/>
+                    <a:lstStyle/>
+                    <a:p>
+                      <a:pPr indent="0" marL="0">
+                        <a:buNone/>
+                      </a:pPr>
+                      <a:r>
+                        <a:rPr lang="en-US" sz="1150" b="1" dirty="0">
+                          <a:solidFill>
+                            <a:srgbClr val="0F2A44"/>
+                          </a:solidFill>
+                          <a:latin typeface="Microsoft YaHei" pitchFamily="34" charset="0"/>
+                          <a:ea typeface="Microsoft YaHei" pitchFamily="34" charset="-122"/>
+                          <a:cs typeface="Microsoft YaHei" pitchFamily="34" charset="-120"/>
+                        </a:rPr>
+                        <a:t>账本动作</a:t>
+                      </a:r>
+                      <a:endParaRPr lang="en-US" sz="1150" dirty="0">
+                        <a:latin typeface="Microsoft YaHei" charset="0"/>
+                        <a:ea typeface="Microsoft YaHei" charset="0"/>
+                        <a:cs typeface="Microsoft YaHei" charset="0"/>
+                      </a:endParaRPr>
+                    </a:p>
+                  </a:txBody>
+                  <a:tcPr marL="73152" marR="73152" marT="27432" marB="27432" anchor="ctr">
+                    <a:lnL w="6350" cap="flat" cmpd="sng" algn="ctr">
+                      <a:solidFill>
+                        <a:srgbClr val="E6D3BC"/>
+                      </a:solidFill>
+                      <a:prstDash val="solid"/>
+                      <a:round/>
+                      <a:headEnd type="none" w="med" len="med"/>
+                      <a:tailEnd type="none" w="med" len="med"/>
+                    </a:lnL>
+                    <a:lnR w="6350" cap="flat" cmpd="sng" algn="ctr">
+                      <a:solidFill>
+                        <a:srgbClr val="E6D3BC"/>
+                      </a:solidFill>
+                      <a:prstDash val="solid"/>
+                      <a:round/>
+                      <a:headEnd type="none" w="med" len="med"/>
+                      <a:tailEnd type="none" w="med" len="med"/>
+                    </a:lnR>
+                    <a:lnT w="6350" cap="flat" cmpd="sng" algn="ctr">
+                      <a:solidFill>
+                        <a:srgbClr val="E6D3BC"/>
+                      </a:solidFill>
+                      <a:prstDash val="solid"/>
+                      <a:round/>
+                      <a:headEnd type="none" w="med" len="med"/>
+                      <a:tailEnd type="none" w="med" len="med"/>
+                    </a:lnT>
+                    <a:lnB w="6350" cap="flat" cmpd="sng" algn="ctr">
+                      <a:solidFill>
+                        <a:srgbClr val="E6D3BC"/>
+                      </a:solidFill>
+                      <a:prstDash val="solid"/>
+                      <a:round/>
+                      <a:headEnd type="none" w="med" len="med"/>
+                      <a:tailEnd type="none" w="med" len="med"/>
+                    </a:lnB>
+                    <a:solidFill>
+                      <a:srgbClr val="F3E3CF"/>
+                    </a:solidFill>
+                  </a:tcPr>
+                </a:tc>
+                <a:tc>
+                  <a:txBody>
+                    <a:bodyPr/>
+                    <a:lstStyle/>
+                    <a:p>
+                      <a:pPr indent="0" marL="0">
+                        <a:buNone/>
+                      </a:pPr>
+                      <a:r>
+                        <a:rPr lang="en-US" sz="1150" b="1" dirty="0">
+                          <a:solidFill>
+                            <a:srgbClr val="0F2A44"/>
+                          </a:solidFill>
+                          <a:latin typeface="Microsoft YaHei" pitchFamily="34" charset="0"/>
+                          <a:ea typeface="Microsoft YaHei" pitchFamily="34" charset="-122"/>
+                          <a:cs typeface="Microsoft YaHei" pitchFamily="34" charset="-120"/>
+                        </a:rPr>
+                        <a:t>结论 A 的状态</a:t>
+                      </a:r>
+                      <a:endParaRPr lang="en-US" sz="1150" dirty="0">
+                        <a:latin typeface="Microsoft YaHei" charset="0"/>
+                        <a:ea typeface="Microsoft YaHei" charset="0"/>
+                        <a:cs typeface="Microsoft YaHei" charset="0"/>
+                      </a:endParaRPr>
+                    </a:p>
+                  </a:txBody>
+                  <a:tcPr marL="73152" marR="73152" marT="27432" marB="27432" anchor="ctr">
+                    <a:lnL w="6350" cap="flat" cmpd="sng" algn="ctr">
+                      <a:solidFill>
+                        <a:srgbClr val="E6D3BC"/>
+                      </a:solidFill>
+                      <a:prstDash val="solid"/>
+                      <a:round/>
+                      <a:headEnd type="none" w="med" len="med"/>
+                      <a:tailEnd type="none" w="med" len="med"/>
+                    </a:lnL>
+                    <a:lnR w="6350" cap="flat" cmpd="sng" algn="ctr">
+                      <a:solidFill>
+                        <a:srgbClr val="E6D3BC"/>
+                      </a:solidFill>
+                      <a:prstDash val="solid"/>
+                      <a:round/>
+                      <a:headEnd type="none" w="med" len="med"/>
+                      <a:tailEnd type="none" w="med" len="med"/>
+                    </a:lnR>
+                    <a:lnT w="6350" cap="flat" cmpd="sng" algn="ctr">
+                      <a:solidFill>
+                        <a:srgbClr val="E6D3BC"/>
+                      </a:solidFill>
+                      <a:prstDash val="solid"/>
+                      <a:round/>
+                      <a:headEnd type="none" w="med" len="med"/>
+                      <a:tailEnd type="none" w="med" len="med"/>
+                    </a:lnT>
+                    <a:lnB w="6350" cap="flat" cmpd="sng" algn="ctr">
+                      <a:solidFill>
+                        <a:srgbClr val="E6D3BC"/>
+                      </a:solidFill>
+                      <a:prstDash val="solid"/>
+                      <a:round/>
+                      <a:headEnd type="none" w="med" len="med"/>
+                      <a:tailEnd type="none" w="med" len="med"/>
+                    </a:lnB>
+                    <a:solidFill>
+                      <a:srgbClr val="F3E3CF"/>
+                    </a:solidFill>
+                  </a:tcPr>
+                </a:tc>
+              </a:tr>
+              <a:tr h="457200">
+                <a:tc>
+                  <a:txBody>
+                    <a:bodyPr/>
+                    <a:lstStyle/>
+                    <a:p>
+                      <a:pPr indent="0" marL="0">
+                        <a:buNone/>
+                      </a:pPr>
+                      <a:r>
+                        <a:rPr lang="en-US" sz="1150" dirty="0">
+                          <a:solidFill>
+                            <a:srgbClr val="1B2533"/>
+                          </a:solidFill>
+                          <a:latin typeface="Microsoft YaHei" pitchFamily="34" charset="0"/>
+                          <a:ea typeface="Microsoft YaHei" pitchFamily="34" charset="-122"/>
+                          <a:cs typeface="Microsoft YaHei" pitchFamily="34" charset="-120"/>
+                        </a:rPr>
+                        <a:t>2011</a:t>
+                      </a:r>
+                      <a:endParaRPr lang="en-US" sz="1150" dirty="0">
+                        <a:latin typeface="Microsoft YaHei" charset="0"/>
+                        <a:ea typeface="Microsoft YaHei" charset="0"/>
+                        <a:cs typeface="Microsoft YaHei" charset="0"/>
+                      </a:endParaRPr>
+                    </a:p>
+                  </a:txBody>
+                  <a:tcPr marL="73152" marR="73152" marT="27432" marB="27432" anchor="ctr">
+                    <a:lnL w="6350" cap="flat" cmpd="sng" algn="ctr">
+                      <a:solidFill>
+                        <a:srgbClr val="E6D3BC"/>
+                      </a:solidFill>
+                      <a:prstDash val="solid"/>
+                      <a:round/>
+                      <a:headEnd type="none" w="med" len="med"/>
+                      <a:tailEnd type="none" w="med" len="med"/>
+                    </a:lnL>
+                    <a:lnR w="6350" cap="flat" cmpd="sng" algn="ctr">
+                      <a:solidFill>
+                        <a:srgbClr val="E6D3BC"/>
+                      </a:solidFill>
+                      <a:prstDash val="solid"/>
+                      <a:round/>
+                      <a:headEnd type="none" w="med" len="med"/>
+                      <a:tailEnd type="none" w="med" len="med"/>
+                    </a:lnR>
+                    <a:lnT w="6350" cap="flat" cmpd="sng" algn="ctr">
+                      <a:solidFill>
+                        <a:srgbClr val="E6D3BC"/>
+                      </a:solidFill>
+                      <a:prstDash val="solid"/>
+                      <a:round/>
+                      <a:headEnd type="none" w="med" len="med"/>
+                      <a:tailEnd type="none" w="med" len="med"/>
+                    </a:lnT>
+                    <a:lnB w="6350" cap="flat" cmpd="sng" algn="ctr">
+                      <a:solidFill>
+                        <a:srgbClr val="E6D3BC"/>
+                      </a:solidFill>
+                      <a:prstDash val="solid"/>
+                      <a:round/>
+                      <a:headEnd type="none" w="med" len="med"/>
+                      <a:tailEnd type="none" w="med" len="med"/>
+                    </a:lnB>
+                    <a:solidFill>
+                      <a:srgbClr val="FFFFFF"/>
+                    </a:solidFill>
+                  </a:tcPr>
+                </a:tc>
+                <a:tc>
+                  <a:txBody>
+                    <a:bodyPr/>
+                    <a:lstStyle/>
+                    <a:p>
+                      <a:pPr indent="0" marL="0">
+                        <a:buNone/>
+                      </a:pPr>
+                      <a:r>
+                        <a:rPr lang="en-US" sz="1150" dirty="0">
+                          <a:solidFill>
+                            <a:srgbClr val="1B2533"/>
+                          </a:solidFill>
+                          <a:latin typeface="Microsoft YaHei" pitchFamily="34" charset="0"/>
+                          <a:ea typeface="Microsoft YaHei" pitchFamily="34" charset="-122"/>
+                          <a:cs typeface="Microsoft YaHei" pitchFamily="34" charset="-120"/>
+                        </a:rPr>
+                        <a:t>Meis 试验、批准两条证据通过门禁</a:t>
+                      </a:r>
+                      <a:endParaRPr lang="en-US" sz="1150" dirty="0">
+                        <a:latin typeface="Microsoft YaHei" charset="0"/>
+                        <a:ea typeface="Microsoft YaHei" charset="0"/>
+                        <a:cs typeface="Microsoft YaHei" charset="0"/>
+                      </a:endParaRPr>
+                    </a:p>
+                  </a:txBody>
+                  <a:tcPr marL="73152" marR="73152" marT="27432" marB="27432" anchor="ctr">
+                    <a:lnL w="6350" cap="flat" cmpd="sng" algn="ctr">
+                      <a:solidFill>
+                        <a:srgbClr val="E6D3BC"/>
+                      </a:solidFill>
+                      <a:prstDash val="solid"/>
+                      <a:round/>
+                      <a:headEnd type="none" w="med" len="med"/>
+                      <a:tailEnd type="none" w="med" len="med"/>
+                    </a:lnL>
+                    <a:lnR w="6350" cap="flat" cmpd="sng" algn="ctr">
+                      <a:solidFill>
+                        <a:srgbClr val="E6D3BC"/>
+                      </a:solidFill>
+                      <a:prstDash val="solid"/>
+                      <a:round/>
+                      <a:headEnd type="none" w="med" len="med"/>
+                      <a:tailEnd type="none" w="med" len="med"/>
+                    </a:lnR>
+                    <a:lnT w="6350" cap="flat" cmpd="sng" algn="ctr">
+                      <a:solidFill>
+                        <a:srgbClr val="E6D3BC"/>
+                      </a:solidFill>
+                      <a:prstDash val="solid"/>
+                      <a:round/>
+                      <a:headEnd type="none" w="med" len="med"/>
+                      <a:tailEnd type="none" w="med" len="med"/>
+                    </a:lnT>
+                    <a:lnB w="6350" cap="flat" cmpd="sng" algn="ctr">
+                      <a:solidFill>
+                        <a:srgbClr val="E6D3BC"/>
+                      </a:solidFill>
+                      <a:prstDash val="solid"/>
+                      <a:round/>
+                      <a:headEnd type="none" w="med" len="med"/>
+                      <a:tailEnd type="none" w="med" len="med"/>
+                    </a:lnB>
+                    <a:solidFill>
+                      <a:srgbClr val="FFFFFF"/>
+                    </a:solidFill>
+                  </a:tcPr>
+                </a:tc>
+                <a:tc>
+                  <a:txBody>
+                    <a:bodyPr/>
+                    <a:lstStyle/>
+                    <a:p>
+                      <a:pPr indent="0" marL="0">
+                        <a:buNone/>
+                      </a:pPr>
+                      <a:r>
+                        <a:rPr lang="en-US" sz="1150" b="1" dirty="0">
+                          <a:solidFill>
+                            <a:srgbClr val="0E8A7E"/>
+                          </a:solidFill>
+                          <a:latin typeface="Microsoft YaHei" pitchFamily="34" charset="0"/>
+                          <a:ea typeface="Microsoft YaHei" pitchFamily="34" charset="-122"/>
+                          <a:cs typeface="Microsoft YaHei" pitchFamily="34" charset="-120"/>
+                        </a:rPr>
+                        <a:t>已验证</a:t>
+                      </a:r>
+                      <a:endParaRPr lang="en-US" sz="1150" dirty="0">
+                        <a:latin typeface="Microsoft YaHei" charset="0"/>
+                        <a:ea typeface="Microsoft YaHei" charset="0"/>
+                        <a:cs typeface="Microsoft YaHei" charset="0"/>
+                      </a:endParaRPr>
+                    </a:p>
+                  </a:txBody>
+                  <a:tcPr marL="73152" marR="73152" marT="27432" marB="27432" anchor="ctr">
+                    <a:lnL w="6350" cap="flat" cmpd="sng" algn="ctr">
+                      <a:solidFill>
+                        <a:srgbClr val="E6D3BC"/>
+                      </a:solidFill>
+                      <a:prstDash val="solid"/>
+                      <a:round/>
+                      <a:headEnd type="none" w="med" len="med"/>
+                      <a:tailEnd type="none" w="med" len="med"/>
+                    </a:lnL>
+                    <a:lnR w="6350" cap="flat" cmpd="sng" algn="ctr">
+                      <a:solidFill>
+                        <a:srgbClr val="E6D3BC"/>
+                      </a:solidFill>
+                      <a:prstDash val="solid"/>
+                      <a:round/>
+                      <a:headEnd type="none" w="med" len="med"/>
+                      <a:tailEnd type="none" w="med" len="med"/>
+                    </a:lnR>
+                    <a:lnT w="6350" cap="flat" cmpd="sng" algn="ctr">
+                      <a:solidFill>
+                        <a:srgbClr val="E6D3BC"/>
+                      </a:solidFill>
+                      <a:prstDash val="solid"/>
+                      <a:round/>
+                      <a:headEnd type="none" w="med" len="med"/>
+                      <a:tailEnd type="none" w="med" len="med"/>
+                    </a:lnT>
+                    <a:lnB w="6350" cap="flat" cmpd="sng" algn="ctr">
+                      <a:solidFill>
+                        <a:srgbClr val="E6D3BC"/>
+                      </a:solidFill>
+                      <a:prstDash val="solid"/>
+                      <a:round/>
+                      <a:headEnd type="none" w="med" len="med"/>
+                      <a:tailEnd type="none" w="med" len="med"/>
+                    </a:lnB>
+                    <a:solidFill>
+                      <a:srgbClr val="FFFFFF"/>
+                    </a:solidFill>
+                  </a:tcPr>
+                </a:tc>
+              </a:tr>
+              <a:tr h="566928">
+                <a:tc>
+                  <a:txBody>
+                    <a:bodyPr/>
+                    <a:lstStyle/>
+                    <a:p>
+                      <a:pPr indent="0" marL="0">
+                        <a:buNone/>
+                      </a:pPr>
+                      <a:r>
+                        <a:rPr lang="en-US" sz="1150" dirty="0">
+                          <a:solidFill>
+                            <a:srgbClr val="1B2533"/>
+                          </a:solidFill>
+                          <a:latin typeface="Microsoft YaHei" pitchFamily="34" charset="0"/>
+                          <a:ea typeface="Microsoft YaHei" pitchFamily="34" charset="-122"/>
+                          <a:cs typeface="Microsoft YaHei" pitchFamily="34" charset="-120"/>
+                        </a:rPr>
+                        <a:t>2020</a:t>
+                      </a:r>
+                      <a:endParaRPr lang="en-US" sz="1150" dirty="0">
+                        <a:latin typeface="Microsoft YaHei" charset="0"/>
+                        <a:ea typeface="Microsoft YaHei" charset="0"/>
+                        <a:cs typeface="Microsoft YaHei" charset="0"/>
+                      </a:endParaRPr>
+                    </a:p>
+                  </a:txBody>
+                  <a:tcPr marL="73152" marR="73152" marT="27432" marB="27432" anchor="ctr">
+                    <a:lnL w="6350" cap="flat" cmpd="sng" algn="ctr">
+                      <a:solidFill>
+                        <a:srgbClr val="E6D3BC"/>
+                      </a:solidFill>
+                      <a:prstDash val="solid"/>
+                      <a:round/>
+                      <a:headEnd type="none" w="med" len="med"/>
+                      <a:tailEnd type="none" w="med" len="med"/>
+                    </a:lnL>
+                    <a:lnR w="6350" cap="flat" cmpd="sng" algn="ctr">
+                      <a:solidFill>
+                        <a:srgbClr val="E6D3BC"/>
+                      </a:solidFill>
+                      <a:prstDash val="solid"/>
+                      <a:round/>
+                      <a:headEnd type="none" w="med" len="med"/>
+                      <a:tailEnd type="none" w="med" len="med"/>
+                    </a:lnR>
+                    <a:lnT w="6350" cap="flat" cmpd="sng" algn="ctr">
+                      <a:solidFill>
+                        <a:srgbClr val="E6D3BC"/>
+                      </a:solidFill>
+                      <a:prstDash val="solid"/>
+                      <a:round/>
+                      <a:headEnd type="none" w="med" len="med"/>
+                      <a:tailEnd type="none" w="med" len="med"/>
+                    </a:lnT>
+                    <a:lnB w="6350" cap="flat" cmpd="sng" algn="ctr">
+                      <a:solidFill>
+                        <a:srgbClr val="E6D3BC"/>
+                      </a:solidFill>
+                      <a:prstDash val="solid"/>
+                      <a:round/>
+                      <a:headEnd type="none" w="med" len="med"/>
+                      <a:tailEnd type="none" w="med" len="med"/>
+                    </a:lnB>
+                    <a:solidFill>
+                      <a:srgbClr val="FFFFFF"/>
+                    </a:solidFill>
+                  </a:tcPr>
+                </a:tc>
+                <a:tc>
+                  <a:txBody>
+                    <a:bodyPr/>
+                    <a:lstStyle/>
+                    <a:p>
+                      <a:pPr indent="0" marL="0">
+                        <a:buNone/>
+                      </a:pPr>
+                      <a:r>
+                        <a:rPr lang="en-US" sz="1150" dirty="0">
+                          <a:solidFill>
+                            <a:srgbClr val="1B2533"/>
+                          </a:solidFill>
+                          <a:latin typeface="Microsoft YaHei" pitchFamily="34" charset="0"/>
+                          <a:ea typeface="Microsoft YaHei" pitchFamily="34" charset="-122"/>
+                          <a:cs typeface="Microsoft YaHei" pitchFamily="34" charset="-120"/>
+                        </a:rPr>
+                        <a:t>PROLONG 作为反证录入</a:t>
+                      </a:r>
+                      <a:endParaRPr lang="en-US" sz="1150" dirty="0">
+                        <a:latin typeface="Microsoft YaHei" charset="0"/>
+                        <a:ea typeface="Microsoft YaHei" charset="0"/>
+                        <a:cs typeface="Microsoft YaHei" charset="0"/>
+                      </a:endParaRPr>
+                    </a:p>
+                  </a:txBody>
+                  <a:tcPr marL="73152" marR="73152" marT="27432" marB="27432" anchor="ctr">
+                    <a:lnL w="6350" cap="flat" cmpd="sng" algn="ctr">
+                      <a:solidFill>
+                        <a:srgbClr val="E6D3BC"/>
+                      </a:solidFill>
+                      <a:prstDash val="solid"/>
+                      <a:round/>
+                      <a:headEnd type="none" w="med" len="med"/>
+                      <a:tailEnd type="none" w="med" len="med"/>
+                    </a:lnL>
+                    <a:lnR w="6350" cap="flat" cmpd="sng" algn="ctr">
+                      <a:solidFill>
+                        <a:srgbClr val="E6D3BC"/>
+                      </a:solidFill>
+                      <a:prstDash val="solid"/>
+                      <a:round/>
+                      <a:headEnd type="none" w="med" len="med"/>
+                      <a:tailEnd type="none" w="med" len="med"/>
+                    </a:lnR>
+                    <a:lnT w="6350" cap="flat" cmpd="sng" algn="ctr">
+                      <a:solidFill>
+                        <a:srgbClr val="E6D3BC"/>
+                      </a:solidFill>
+                      <a:prstDash val="solid"/>
+                      <a:round/>
+                      <a:headEnd type="none" w="med" len="med"/>
+                      <a:tailEnd type="none" w="med" len="med"/>
+                    </a:lnT>
+                    <a:lnB w="6350" cap="flat" cmpd="sng" algn="ctr">
+                      <a:solidFill>
+                        <a:srgbClr val="E6D3BC"/>
+                      </a:solidFill>
+                      <a:prstDash val="solid"/>
+                      <a:round/>
+                      <a:headEnd type="none" w="med" len="med"/>
+                      <a:tailEnd type="none" w="med" len="med"/>
+                    </a:lnB>
+                    <a:solidFill>
+                      <a:srgbClr val="FFFFFF"/>
+                    </a:solidFill>
+                  </a:tcPr>
+                </a:tc>
+                <a:tc>
+                  <a:txBody>
+                    <a:bodyPr/>
+                    <a:lstStyle/>
+                    <a:p>
+                      <a:pPr indent="0" marL="0">
+                        <a:buNone/>
+                      </a:pPr>
+                      <a:r>
+                        <a:rPr lang="en-US" sz="1150" b="1" dirty="0">
+                          <a:solidFill>
+                            <a:srgbClr val="C9792A"/>
+                          </a:solidFill>
+                          <a:latin typeface="Microsoft YaHei" pitchFamily="34" charset="0"/>
+                          <a:ea typeface="Microsoft YaHei" pitchFamily="34" charset="-122"/>
+                          <a:cs typeface="Microsoft YaHei" pitchFamily="34" charset="-120"/>
+                        </a:rPr>
+                        <a:t>→ 有争议：两项试验结论相反，分歧被保留</a:t>
+                      </a:r>
+                      <a:endParaRPr lang="en-US" sz="1150" dirty="0">
+                        <a:latin typeface="Microsoft YaHei" charset="0"/>
+                        <a:ea typeface="Microsoft YaHei" charset="0"/>
+                        <a:cs typeface="Microsoft YaHei" charset="0"/>
+                      </a:endParaRPr>
+                    </a:p>
+                  </a:txBody>
+                  <a:tcPr marL="73152" marR="73152" marT="27432" marB="27432" anchor="ctr">
+                    <a:lnL w="6350" cap="flat" cmpd="sng" algn="ctr">
+                      <a:solidFill>
+                        <a:srgbClr val="E6D3BC"/>
+                      </a:solidFill>
+                      <a:prstDash val="solid"/>
+                      <a:round/>
+                      <a:headEnd type="none" w="med" len="med"/>
+                      <a:tailEnd type="none" w="med" len="med"/>
+                    </a:lnL>
+                    <a:lnR w="6350" cap="flat" cmpd="sng" algn="ctr">
+                      <a:solidFill>
+                        <a:srgbClr val="E6D3BC"/>
+                      </a:solidFill>
+                      <a:prstDash val="solid"/>
+                      <a:round/>
+                      <a:headEnd type="none" w="med" len="med"/>
+                      <a:tailEnd type="none" w="med" len="med"/>
+                    </a:lnR>
+                    <a:lnT w="6350" cap="flat" cmpd="sng" algn="ctr">
+                      <a:solidFill>
+                        <a:srgbClr val="E6D3BC"/>
+                      </a:solidFill>
+                      <a:prstDash val="solid"/>
+                      <a:round/>
+                      <a:headEnd type="none" w="med" len="med"/>
+                      <a:tailEnd type="none" w="med" len="med"/>
+                    </a:lnT>
+                    <a:lnB w="6350" cap="flat" cmpd="sng" algn="ctr">
+                      <a:solidFill>
+                        <a:srgbClr val="E6D3BC"/>
+                      </a:solidFill>
+                      <a:prstDash val="solid"/>
+                      <a:round/>
+                      <a:headEnd type="none" w="med" len="med"/>
+                      <a:tailEnd type="none" w="med" len="med"/>
+                    </a:lnB>
+                    <a:solidFill>
+                      <a:srgbClr val="FFFFFF"/>
+                    </a:solidFill>
+                  </a:tcPr>
+                </a:tc>
+              </a:tr>
+              <a:tr h="658368">
+                <a:tc>
+                  <a:txBody>
+                    <a:bodyPr/>
+                    <a:lstStyle/>
+                    <a:p>
+                      <a:pPr indent="0" marL="0">
+                        <a:buNone/>
+                      </a:pPr>
+                      <a:r>
+                        <a:rPr lang="en-US" sz="1150" dirty="0">
+                          <a:solidFill>
+                            <a:srgbClr val="1B2533"/>
+                          </a:solidFill>
+                          <a:latin typeface="Microsoft YaHei" pitchFamily="34" charset="0"/>
+                          <a:ea typeface="Microsoft YaHei" pitchFamily="34" charset="-122"/>
+                          <a:cs typeface="Microsoft YaHei" pitchFamily="34" charset="-120"/>
+                        </a:rPr>
+                        <a:t>2023</a:t>
+                      </a:r>
+                      <a:endParaRPr lang="en-US" sz="1150" dirty="0">
+                        <a:latin typeface="Microsoft YaHei" charset="0"/>
+                        <a:ea typeface="Microsoft YaHei" charset="0"/>
+                        <a:cs typeface="Microsoft YaHei" charset="0"/>
+                      </a:endParaRPr>
+                    </a:p>
+                  </a:txBody>
+                  <a:tcPr marL="73152" marR="73152" marT="27432" marB="27432" anchor="ctr">
+                    <a:lnL w="6350" cap="flat" cmpd="sng" algn="ctr">
+                      <a:solidFill>
+                        <a:srgbClr val="E6D3BC"/>
+                      </a:solidFill>
+                      <a:prstDash val="solid"/>
+                      <a:round/>
+                      <a:headEnd type="none" w="med" len="med"/>
+                      <a:tailEnd type="none" w="med" len="med"/>
+                    </a:lnL>
+                    <a:lnR w="6350" cap="flat" cmpd="sng" algn="ctr">
+                      <a:solidFill>
+                        <a:srgbClr val="E6D3BC"/>
+                      </a:solidFill>
+                      <a:prstDash val="solid"/>
+                      <a:round/>
+                      <a:headEnd type="none" w="med" len="med"/>
+                      <a:tailEnd type="none" w="med" len="med"/>
+                    </a:lnR>
+                    <a:lnT w="6350" cap="flat" cmpd="sng" algn="ctr">
+                      <a:solidFill>
+                        <a:srgbClr val="E6D3BC"/>
+                      </a:solidFill>
+                      <a:prstDash val="solid"/>
+                      <a:round/>
+                      <a:headEnd type="none" w="med" len="med"/>
+                      <a:tailEnd type="none" w="med" len="med"/>
+                    </a:lnT>
+                    <a:lnB w="6350" cap="flat" cmpd="sng" algn="ctr">
+                      <a:solidFill>
+                        <a:srgbClr val="E6D3BC"/>
+                      </a:solidFill>
+                      <a:prstDash val="solid"/>
+                      <a:round/>
+                      <a:headEnd type="none" w="med" len="med"/>
+                      <a:tailEnd type="none" w="med" len="med"/>
+                    </a:lnB>
+                    <a:solidFill>
+                      <a:srgbClr val="FFFFFF"/>
+                    </a:solidFill>
+                  </a:tcPr>
+                </a:tc>
+                <a:tc>
+                  <a:txBody>
+                    <a:bodyPr/>
+                    <a:lstStyle/>
+                    <a:p>
+                      <a:pPr indent="0" marL="0">
+                        <a:buNone/>
+                      </a:pPr>
+                      <a:r>
+                        <a:rPr lang="en-US" sz="1150" dirty="0">
+                          <a:solidFill>
+                            <a:srgbClr val="1B2533"/>
+                          </a:solidFill>
+                          <a:latin typeface="Microsoft YaHei" pitchFamily="34" charset="0"/>
+                          <a:ea typeface="Microsoft YaHei" pitchFamily="34" charset="-122"/>
+                          <a:cs typeface="Microsoft YaHei" pitchFamily="34" charset="-120"/>
+                        </a:rPr>
+                        <a:t>批准证据撤销；新结论 A′“确证试验未见效果”通过验证</a:t>
+                      </a:r>
+                      <a:endParaRPr lang="en-US" sz="1150" dirty="0">
+                        <a:latin typeface="Microsoft YaHei" charset="0"/>
+                        <a:ea typeface="Microsoft YaHei" charset="0"/>
+                        <a:cs typeface="Microsoft YaHei" charset="0"/>
+                      </a:endParaRPr>
+                    </a:p>
+                  </a:txBody>
+                  <a:tcPr marL="73152" marR="73152" marT="27432" marB="27432" anchor="ctr">
+                    <a:lnL w="6350" cap="flat" cmpd="sng" algn="ctr">
+                      <a:solidFill>
+                        <a:srgbClr val="E6D3BC"/>
+                      </a:solidFill>
+                      <a:prstDash val="solid"/>
+                      <a:round/>
+                      <a:headEnd type="none" w="med" len="med"/>
+                      <a:tailEnd type="none" w="med" len="med"/>
+                    </a:lnL>
+                    <a:lnR w="6350" cap="flat" cmpd="sng" algn="ctr">
+                      <a:solidFill>
+                        <a:srgbClr val="E6D3BC"/>
+                      </a:solidFill>
+                      <a:prstDash val="solid"/>
+                      <a:round/>
+                      <a:headEnd type="none" w="med" len="med"/>
+                      <a:tailEnd type="none" w="med" len="med"/>
+                    </a:lnR>
+                    <a:lnT w="6350" cap="flat" cmpd="sng" algn="ctr">
+                      <a:solidFill>
+                        <a:srgbClr val="E6D3BC"/>
+                      </a:solidFill>
+                      <a:prstDash val="solid"/>
+                      <a:round/>
+                      <a:headEnd type="none" w="med" len="med"/>
+                      <a:tailEnd type="none" w="med" len="med"/>
+                    </a:lnT>
+                    <a:lnB w="6350" cap="flat" cmpd="sng" algn="ctr">
+                      <a:solidFill>
+                        <a:srgbClr val="E6D3BC"/>
+                      </a:solidFill>
+                      <a:prstDash val="solid"/>
+                      <a:round/>
+                      <a:headEnd type="none" w="med" len="med"/>
+                      <a:tailEnd type="none" w="med" len="med"/>
+                    </a:lnB>
+                    <a:solidFill>
+                      <a:srgbClr val="FFFFFF"/>
+                    </a:solidFill>
+                  </a:tcPr>
+                </a:tc>
+                <a:tc>
+                  <a:txBody>
+                    <a:bodyPr/>
+                    <a:lstStyle/>
+                    <a:p>
+                      <a:pPr indent="0" marL="0">
+                        <a:buNone/>
+                      </a:pPr>
+                      <a:r>
+                        <a:rPr lang="en-US" sz="1150" b="1" dirty="0">
+                          <a:solidFill>
+                            <a:srgbClr val="1F5F99"/>
+                          </a:solidFill>
+                          <a:latin typeface="Microsoft YaHei" pitchFamily="34" charset="0"/>
+                          <a:ea typeface="Microsoft YaHei" pitchFamily="34" charset="-122"/>
+                          <a:cs typeface="Microsoft YaHei" pitchFamily="34" charset="-120"/>
+                        </a:rPr>
+                        <a:t>→ 已取代：由 A′ 取代，历史可查</a:t>
+                      </a:r>
+                      <a:endParaRPr lang="en-US" sz="1150" dirty="0">
+                        <a:latin typeface="Microsoft YaHei" charset="0"/>
+                        <a:ea typeface="Microsoft YaHei" charset="0"/>
+                        <a:cs typeface="Microsoft YaHei" charset="0"/>
+                      </a:endParaRPr>
+                    </a:p>
+                  </a:txBody>
+                  <a:tcPr marL="73152" marR="73152" marT="27432" marB="27432" anchor="ctr">
+                    <a:lnL w="6350" cap="flat" cmpd="sng" algn="ctr">
+                      <a:solidFill>
+                        <a:srgbClr val="E6D3BC"/>
+                      </a:solidFill>
+                      <a:prstDash val="solid"/>
+                      <a:round/>
+                      <a:headEnd type="none" w="med" len="med"/>
+                      <a:tailEnd type="none" w="med" len="med"/>
+                    </a:lnL>
+                    <a:lnR w="6350" cap="flat" cmpd="sng" algn="ctr">
+                      <a:solidFill>
+                        <a:srgbClr val="E6D3BC"/>
+                      </a:solidFill>
+                      <a:prstDash val="solid"/>
+                      <a:round/>
+                      <a:headEnd type="none" w="med" len="med"/>
+                      <a:tailEnd type="none" w="med" len="med"/>
+                    </a:lnR>
+                    <a:lnT w="6350" cap="flat" cmpd="sng" algn="ctr">
+                      <a:solidFill>
+                        <a:srgbClr val="E6D3BC"/>
+                      </a:solidFill>
+                      <a:prstDash val="solid"/>
+                      <a:round/>
+                      <a:headEnd type="none" w="med" len="med"/>
+                      <a:tailEnd type="none" w="med" len="med"/>
+                    </a:lnT>
+                    <a:lnB w="6350" cap="flat" cmpd="sng" algn="ctr">
+                      <a:solidFill>
+                        <a:srgbClr val="E6D3BC"/>
+                      </a:solidFill>
+                      <a:prstDash val="solid"/>
+                      <a:round/>
+                      <a:headEnd type="none" w="med" len="med"/>
+                      <a:tailEnd type="none" w="med" len="med"/>
+                    </a:lnB>
+                    <a:solidFill>
+                      <a:srgbClr val="FFFFFF"/>
+                    </a:solidFill>
+                  </a:tcPr>
+                </a:tc>
+              </a:tr>
+            </a:tbl>
+          </a:graphicData>
+        </a:graphic>
+      </p:graphicFrame>
+      <p:sp>
+        <p:nvSpPr>
+          <p:cNvPr id="24" name="label-160"/>
+          <p:cNvSpPr txBox="1"/>
+          <p:nvPr/>
+        </p:nvSpPr>
+        <p:spPr>
+          <a:xfrm>
+            <a:off x="7818120" y="3246120"/>
+            <a:ext cx="3824935" cy="365760"/>
+          </a:xfrm>
+          <a:prstGeom prst="rect">
+            <a:avLst/>
+          </a:prstGeom>
+          <a:noFill/>
+          <a:ln/>
+        </p:spPr>
+        <p:txBody>
+          <a:bodyPr wrap="square" lIns="0" tIns="0" rIns="0" bIns="0" rtlCol="0" anchor="ctr"/>
+          <a:lstStyle/>
+          <a:p>
+            <a:pPr algn="l" indent="0" marL="0">
+              <a:buNone/>
+            </a:pPr>
+            <a:r>
+              <a:rPr lang="en-US" sz="1600" b="1" dirty="0">
+                <a:solidFill>
+                  <a:schemeClr val="tx2"/>
+                </a:solidFill>
+              </a:rPr>
+              <a:t>这个案例说明</a:t>
+            </a:r>
+            <a:endParaRPr lang="en-US" sz="1600" dirty="0"/>
+          </a:p>
+        </p:txBody>
+      </p:sp>
+      <p:sp>
+        <p:nvSpPr>
+          <p:cNvPr id="25" name="badge-161"/>
+          <p:cNvSpPr/>
+          <p:nvPr/>
+        </p:nvSpPr>
+        <p:spPr>
+          <a:xfrm>
+            <a:off x="7818120" y="3767328"/>
+            <a:ext cx="310896" cy="310896"/>
+          </a:xfrm>
+          <a:prstGeom prst="ellipse">
+            <a:avLst/>
+          </a:prstGeom>
+          <a:solidFill>
+            <a:schemeClr val="accent1"/>
+          </a:solidFill>
+          <a:ln w="6350">
+            <a:solidFill>
+              <a:schemeClr val="accent1"/>
+            </a:solidFill>
+          </a:ln>
+        </p:spPr>
+        <p:txBody>
+          <a:bodyPr wrap="square" lIns="0" tIns="0" rIns="0" bIns="0" rtlCol="0" anchor="ctr"/>
+          <a:lstStyle/>
+          <a:p>
+            <a:pPr algn="ctr" indent="0" marL="0">
+              <a:buNone/>
+            </a:pPr>
+            <a:r>
+              <a:rPr lang="en-US" sz="1200" b="1" dirty="0">
+                <a:solidFill>
+                  <a:schemeClr val="bg1"/>
+                </a:solidFill>
+              </a:rPr>
+              <a:t>1</a:t>
+            </a:r>
+            <a:endParaRPr lang="en-US" sz="1200" dirty="0"/>
+          </a:p>
+        </p:txBody>
+      </p:sp>
+      <p:sp>
+        <p:nvSpPr>
+          <p:cNvPr id="26" name="label-162"/>
+          <p:cNvSpPr txBox="1"/>
+          <p:nvPr/>
+        </p:nvSpPr>
+        <p:spPr>
+          <a:xfrm>
+            <a:off x="8257032" y="3749040"/>
+            <a:ext cx="3386023" cy="274320"/>
+          </a:xfrm>
+          <a:prstGeom prst="rect">
+            <a:avLst/>
+          </a:prstGeom>
+          <a:noFill/>
+          <a:ln/>
+        </p:spPr>
+        <p:txBody>
+          <a:bodyPr wrap="square" lIns="0" tIns="0" rIns="0" bIns="0" rtlCol="0" anchor="t"/>
+          <a:lstStyle/>
+          <a:p>
+            <a:pPr algn="l" indent="0" marL="0">
+              <a:buNone/>
+            </a:pPr>
+            <a:r>
+              <a:rPr lang="en-US" sz="1300" b="1" dirty="0">
+                <a:solidFill>
+                  <a:schemeClr val="tx2"/>
+                </a:solidFill>
+              </a:rPr>
+              <a:t>新证据不覆盖旧证据</a:t>
+            </a:r>
+            <a:endParaRPr lang="en-US" sz="1300" dirty="0"/>
+          </a:p>
+        </p:txBody>
+      </p:sp>
+      <p:sp>
+        <p:nvSpPr>
+          <p:cNvPr id="27" name="label-163"/>
+          <p:cNvSpPr txBox="1"/>
+          <p:nvPr/>
+        </p:nvSpPr>
+        <p:spPr>
+          <a:xfrm>
+            <a:off x="8257032" y="4032504"/>
+            <a:ext cx="3386023" cy="411480"/>
+          </a:xfrm>
+          <a:prstGeom prst="rect">
+            <a:avLst/>
+          </a:prstGeom>
+          <a:noFill/>
+          <a:ln/>
+        </p:spPr>
+        <p:txBody>
+          <a:bodyPr wrap="square" lIns="0" tIns="0" rIns="0" bIns="0" rtlCol="0" anchor="t"/>
+          <a:lstStyle/>
+          <a:p>
+            <a:pPr algn="l" indent="0" marL="0">
+              <a:buNone/>
+            </a:pPr>
+            <a:r>
+              <a:rPr lang="en-US" sz="1150" dirty="0">
+                <a:solidFill>
+                  <a:schemeClr val="tx1"/>
+                </a:solidFill>
+              </a:rPr>
+              <a:t>Meis 试验仍在账本中，两项试验的分歧被如实记录。</a:t>
+            </a:r>
+            <a:endParaRPr lang="en-US" sz="1150" dirty="0"/>
+          </a:p>
+        </p:txBody>
+      </p:sp>
+      <p:sp>
+        <p:nvSpPr>
+          <p:cNvPr id="28" name="badge-164"/>
+          <p:cNvSpPr/>
+          <p:nvPr/>
+        </p:nvSpPr>
+        <p:spPr>
+          <a:xfrm>
+            <a:off x="7818120" y="4498848"/>
+            <a:ext cx="310896" cy="310896"/>
+          </a:xfrm>
+          <a:prstGeom prst="ellipse">
+            <a:avLst/>
+          </a:prstGeom>
+          <a:solidFill>
+            <a:schemeClr val="accent1"/>
+          </a:solidFill>
+          <a:ln w="6350">
+            <a:solidFill>
+              <a:schemeClr val="accent1"/>
+            </a:solidFill>
+          </a:ln>
+        </p:spPr>
+        <p:txBody>
+          <a:bodyPr wrap="square" lIns="0" tIns="0" rIns="0" bIns="0" rtlCol="0" anchor="ctr"/>
+          <a:lstStyle/>
+          <a:p>
+            <a:pPr algn="ctr" indent="0" marL="0">
+              <a:buNone/>
+            </a:pPr>
+            <a:r>
+              <a:rPr lang="en-US" sz="1200" b="1" dirty="0">
+                <a:solidFill>
+                  <a:schemeClr val="bg1"/>
+                </a:solidFill>
+              </a:rPr>
+              <a:t>2</a:t>
+            </a:r>
+            <a:endParaRPr lang="en-US" sz="1200" dirty="0"/>
+          </a:p>
+        </p:txBody>
+      </p:sp>
+      <p:sp>
+        <p:nvSpPr>
+          <p:cNvPr id="29" name="label-165"/>
+          <p:cNvSpPr txBox="1"/>
+          <p:nvPr/>
+        </p:nvSpPr>
+        <p:spPr>
+          <a:xfrm>
+            <a:off x="8257032" y="4480560"/>
+            <a:ext cx="3386023" cy="274320"/>
+          </a:xfrm>
+          <a:prstGeom prst="rect">
+            <a:avLst/>
+          </a:prstGeom>
+          <a:noFill/>
+          <a:ln/>
+        </p:spPr>
+        <p:txBody>
+          <a:bodyPr wrap="square" lIns="0" tIns="0" rIns="0" bIns="0" rtlCol="0" anchor="t"/>
+          <a:lstStyle/>
+          <a:p>
+            <a:pPr algn="l" indent="0" marL="0">
+              <a:buNone/>
+            </a:pPr>
+            <a:r>
+              <a:rPr lang="en-US" sz="1300" b="1" dirty="0">
+                <a:solidFill>
+                  <a:schemeClr val="tx2"/>
+                </a:solidFill>
+              </a:rPr>
+              <a:t>不替人裁决</a:t>
+            </a:r>
+            <a:endParaRPr lang="en-US" sz="1300" dirty="0"/>
+          </a:p>
+        </p:txBody>
+      </p:sp>
+      <p:sp>
+        <p:nvSpPr>
+          <p:cNvPr id="30" name="label-166"/>
+          <p:cNvSpPr txBox="1"/>
+          <p:nvPr/>
+        </p:nvSpPr>
+        <p:spPr>
+          <a:xfrm>
+            <a:off x="8257032" y="4764024"/>
+            <a:ext cx="3386023" cy="411480"/>
+          </a:xfrm>
+          <a:prstGeom prst="rect">
+            <a:avLst/>
+          </a:prstGeom>
+          <a:noFill/>
+          <a:ln/>
+        </p:spPr>
+        <p:txBody>
+          <a:bodyPr wrap="square" lIns="0" tIns="0" rIns="0" bIns="0" rtlCol="0" anchor="t"/>
+          <a:lstStyle/>
+          <a:p>
+            <a:pPr algn="l" indent="0" marL="0">
+              <a:buNone/>
+            </a:pPr>
+            <a:r>
+              <a:rPr lang="en-US" sz="1150" dirty="0">
+                <a:solidFill>
+                  <a:schemeClr val="tx1"/>
+                </a:solidFill>
+              </a:rPr>
+              <a:t>证据冲突时标为“有争议”，等待专家复核。</a:t>
+            </a:r>
+            <a:endParaRPr lang="en-US" sz="1150" dirty="0"/>
+          </a:p>
+        </p:txBody>
+      </p:sp>
+      <p:sp>
+        <p:nvSpPr>
+          <p:cNvPr id="31" name="badge-167"/>
+          <p:cNvSpPr/>
+          <p:nvPr/>
+        </p:nvSpPr>
+        <p:spPr>
+          <a:xfrm>
+            <a:off x="7818120" y="5230368"/>
+            <a:ext cx="310896" cy="310896"/>
+          </a:xfrm>
+          <a:prstGeom prst="ellipse">
+            <a:avLst/>
+          </a:prstGeom>
+          <a:solidFill>
+            <a:schemeClr val="accent1"/>
+          </a:solidFill>
+          <a:ln w="6350">
+            <a:solidFill>
+              <a:schemeClr val="accent1"/>
+            </a:solidFill>
+          </a:ln>
+        </p:spPr>
+        <p:txBody>
+          <a:bodyPr wrap="square" lIns="0" tIns="0" rIns="0" bIns="0" rtlCol="0" anchor="ctr"/>
+          <a:lstStyle/>
+          <a:p>
+            <a:pPr algn="ctr" indent="0" marL="0">
+              <a:buNone/>
+            </a:pPr>
+            <a:r>
+              <a:rPr lang="en-US" sz="1200" b="1" dirty="0">
+                <a:solidFill>
+                  <a:schemeClr val="bg1"/>
+                </a:solidFill>
+              </a:rPr>
+              <a:t>3</a:t>
+            </a:r>
+            <a:endParaRPr lang="en-US" sz="1200" dirty="0"/>
+          </a:p>
+        </p:txBody>
+      </p:sp>
+      <p:sp>
+        <p:nvSpPr>
+          <p:cNvPr id="32" name="label-168"/>
+          <p:cNvSpPr txBox="1"/>
+          <p:nvPr/>
+        </p:nvSpPr>
+        <p:spPr>
+          <a:xfrm>
+            <a:off x="8257032" y="5212080"/>
+            <a:ext cx="3386023" cy="274320"/>
+          </a:xfrm>
+          <a:prstGeom prst="rect">
+            <a:avLst/>
+          </a:prstGeom>
+          <a:noFill/>
+          <a:ln/>
+        </p:spPr>
+        <p:txBody>
+          <a:bodyPr wrap="square" lIns="0" tIns="0" rIns="0" bIns="0" rtlCol="0" anchor="t"/>
+          <a:lstStyle/>
+          <a:p>
+            <a:pPr algn="l" indent="0" marL="0">
+              <a:buNone/>
+            </a:pPr>
+            <a:r>
+              <a:rPr lang="en-US" sz="1300" b="1" dirty="0">
+                <a:solidFill>
+                  <a:schemeClr val="tx2"/>
+                </a:solidFill>
+              </a:rPr>
+              <a:t>结论有继承关系</a:t>
+            </a:r>
+            <a:endParaRPr lang="en-US" sz="1300" dirty="0"/>
+          </a:p>
+        </p:txBody>
+      </p:sp>
+      <p:sp>
+        <p:nvSpPr>
+          <p:cNvPr id="33" name="label-169"/>
+          <p:cNvSpPr txBox="1"/>
+          <p:nvPr/>
+        </p:nvSpPr>
+        <p:spPr>
+          <a:xfrm>
+            <a:off x="8257032" y="5495544"/>
+            <a:ext cx="3386023" cy="411480"/>
+          </a:xfrm>
+          <a:prstGeom prst="rect">
+            <a:avLst/>
+          </a:prstGeom>
+          <a:noFill/>
+          <a:ln/>
+        </p:spPr>
+        <p:txBody>
+          <a:bodyPr wrap="square" lIns="0" tIns="0" rIns="0" bIns="0" rtlCol="0" anchor="t"/>
+          <a:lstStyle/>
+          <a:p>
+            <a:pPr algn="l" indent="0" marL="0">
+              <a:buNone/>
+            </a:pPr>
+            <a:r>
+              <a:rPr lang="en-US" sz="1150" dirty="0">
+                <a:solidFill>
+                  <a:schemeClr val="tx1"/>
+                </a:solidFill>
+              </a:rPr>
+              <a:t>A′ 取代 A；A 从验证到被取代的每一步都可追溯。</a:t>
+            </a:r>
+            <a:endParaRPr lang="en-US" sz="1150" dirty="0"/>
+          </a:p>
+        </p:txBody>
+      </p:sp>
+      <p:sp>
+        <p:nvSpPr>
+          <p:cNvPr id="34" name="label-170"/>
+          <p:cNvSpPr txBox="1"/>
+          <p:nvPr/>
+        </p:nvSpPr>
+        <p:spPr>
+          <a:xfrm>
+            <a:off x="548640" y="6053328"/>
+            <a:ext cx="11094415" cy="274320"/>
+          </a:xfrm>
+          <a:prstGeom prst="rect">
+            <a:avLst/>
+          </a:prstGeom>
+          <a:noFill/>
+          <a:ln/>
+        </p:spPr>
+        <p:txBody>
+          <a:bodyPr wrap="square" lIns="0" tIns="0" rIns="0" bIns="0" rtlCol="0" anchor="t"/>
+          <a:lstStyle/>
+          <a:p>
+            <a:pPr algn="l" indent="0" marL="0">
+              <a:buNone/>
+            </a:pPr>
+            <a:r>
+              <a:rPr lang="en-US" sz="1000" dirty="0">
+                <a:solidFill>
+                  <a:schemeClr val="accent6"/>
+                </a:solidFill>
+              </a:rPr>
+              <a:t>文献：Meis 等，NEJM 2003（PMID 12802023）；PROLONG，Am J Perinatol 2020（PMID 31652479）。已写成自动化测试；“反证录入”和“结论取代”目前通过接口完成，界面入口待补。</a:t>
+            </a:r>
+            <a:endParaRPr lang="en-US" sz="1000" dirty="0"/>
+          </a:p>
+        </p:txBody>
+      </p:sp>
+      <p:sp>
+        <p:nvSpPr>
+          <p:cNvPr id="25" name="Slide Number Placeholder 0"/>
+          <p:cNvSpPr>
+            <a:spLocks noGrp="1"/>
+          </p:cNvSpPr>
+          <p:nvPr>
+            <p:ph type="sldNum" sz="quarter" idx="4294967295"/>
+          </p:nvPr>
+        </p:nvSpPr>
+        <p:spPr>
+          <a:xfrm>
+            <a:off x="11094415" y="6446520"/>
+            <a:ext cx="548640" cy="274320"/>
+          </a:xfrm>
+          <a:prstGeom prst="rect">
+            <a:avLst/>
+          </a:prstGeom>
+          <a:extLst>
+            <a:ext uri="{C572A759-6A51-4108-AA02-DFA0A04FC94B}">
+              <ma14:wrappingTextBoxFlag xmlns:ma14="http://schemas.microsoft.com/office/mac/drawingml/2011/main" val="0"/>
+            </a:ext>
+          </a:extLst>
+        </p:spPr>
+        <p:txBody>
+          <a:bodyPr/>
+          <a:lstStyle>
+            <a:lvl1pPr>
+              <a:defRPr sz="1000">
+                <a:solidFill>
+                  <a:schemeClr val="accent6"/>
+                </a:solidFill>
+              </a:defRPr>
+            </a:lvl1pPr>
+          </a:lstStyle>
+          <a:p>
+            <a:pPr algn="r"/>
+            <a:fld id="{F7021451-1387-4CA6-816F-3879F97B5CBC}" type="slidenum">
+              <a:rPr b="0" lang="en-US"/>
+              <a:t>7</a:t>
+            </a:fld>
+            <a:endParaRPr lang="en-US"/>
+          </a:p>
+        </p:txBody>
+      </p:sp>
+    </p:spTree>
+  </p:cSld>
+  <p:clrMapOvr>
+    <a:masterClrMapping/>
+  </p:clrMapOvr>
+</p:sld>
+</file>
+
+<file path=ppt/slides/slide8.xml><?xml version="1.0" encoding="utf-8"?>
+<p:sld xmlns:a="http://schemas.openxmlformats.org/drawingml/2006/main" xmlns:r="http://schemas.openxmlformats.org/officeDocument/2006/relationships" xmlns:p="http://schemas.openxmlformats.org/presentationml/2006/main">
+  <p:cSld name="Slide 8">
+    <p:spTree>
+      <p:nvGrpSpPr>
+        <p:cNvPr id="1" name=""/>
+        <p:cNvGrpSpPr/>
+        <p:nvPr/>
+      </p:nvGrpSpPr>
+      <p:grpSpPr>
+        <a:xfrm>
+          <a:off x="0" y="0"/>
+          <a:ext cx="0" cy="0"/>
+          <a:chOff x="0" y="0"/>
+          <a:chExt cx="0" cy="0"/>
+        </a:xfrm>
+      </p:grpSpPr>
+      <p:sp>
+        <p:nvSpPr>
+          <p:cNvPr id="2" name="Text 0"/>
+          <p:cNvSpPr/>
+          <p:nvPr>
+            <p:ph idx="100" type="title" hasCustomPrompt="1"/>
+          </p:nvPr>
+        </p:nvSpPr>
+        <p:spPr>
+          <a:xfrm>
+            <a:off x="548640" y="320040"/>
+            <a:ext cx="11094415" cy="640080"/>
+          </a:xfrm>
+          <a:prstGeom prst="rect">
+            <a:avLst/>
+          </a:prstGeom>
+          <a:noFill/>
+          <a:ln/>
+        </p:spPr>
+        <p:txBody>
+          <a:bodyPr wrap="square" lIns="0" tIns="0" rIns="0" bIns="0" rtlCol="0" anchor="ctr"/>
+          <a:lstStyle/>
+          <a:p>
+            <a:pPr algn="l" indent="0" marL="0">
+              <a:buNone/>
+            </a:pPr>
+            <a:r>
+              <a:rPr lang="en-US" sz="2800" b="1" dirty="0">
+                <a:solidFill>
+                  <a:schemeClr val="tx2"/>
+                </a:solidFill>
+              </a:rPr>
+              <a:t>设计点②③：分歧时先查什么，结论何时能下</a:t>
+            </a:r>
+            <a:endParaRPr lang="en-US" sz="2800" dirty="0"/>
+          </a:p>
+        </p:txBody>
+      </p:sp>
+      <p:sp>
+        <p:nvSpPr>
+          <p:cNvPr id="3" name="Text 0"/>
+          <p:cNvSpPr/>
+          <p:nvPr>
+            <p:ph idx="101" type="body" hasCustomPrompt="1"/>
+          </p:nvPr>
+        </p:nvSpPr>
+        <p:spPr>
+          <a:xfrm>
+            <a:off x="548640" y="960120"/>
+            <a:ext cx="11094415" cy="411480"/>
+          </a:xfrm>
+          <a:prstGeom prst="rect">
+            <a:avLst/>
+          </a:prstGeom>
+          <a:noFill/>
+          <a:ln/>
+        </p:spPr>
+        <p:txBody>
+          <a:bodyPr wrap="square" lIns="0" tIns="0" rIns="0" bIns="0" rtlCol="0" anchor="ctr"/>
+          <a:lstStyle/>
+          <a:p>
+            <a:pPr algn="l" indent="0" marL="0">
+              <a:buNone/>
+            </a:pPr>
+            <a:r>
+              <a:rPr lang="en-US" sz="1500" dirty="0">
+                <a:solidFill>
+                  <a:schemeClr val="accent6"/>
+                </a:solidFill>
+              </a:rPr>
               <a:t>A 类设计点 ② 与 ③：用信息论量化分歧、挑选查询；用统计校准决定能否下结论。</a:t>
             </a:r>
             <a:endParaRPr lang="en-US" sz="1500" dirty="0"/>
@@ -11493,7 +14020,7 @@
       </p:sp>
       <p:sp>
         <p:nvSpPr>
-          <p:cNvPr id="4" name="card-139"/>
+          <p:cNvPr id="4" name="card-171"/>
           <p:cNvSpPr/>
           <p:nvPr/>
         </p:nvSpPr>
@@ -11520,7 +14047,7 @@
       </p:sp>
       <p:sp>
         <p:nvSpPr>
-          <p:cNvPr id="5" name="badge-140"/>
+          <p:cNvPr id="5" name="badge-172"/>
           <p:cNvSpPr/>
           <p:nvPr/>
         </p:nvSpPr>
@@ -11562,7 +14089,7 @@
       </p:sp>
       <p:sp>
         <p:nvSpPr>
-          <p:cNvPr id="6" name="label-141"/>
+          <p:cNvPr id="6" name="label-173"/>
           <p:cNvSpPr txBox="1"/>
           <p:nvPr/>
         </p:nvSpPr>
@@ -11598,271 +14125,58 @@
       </p:sp>
       <p:sp>
         <p:nvSpPr>
-          <p:cNvPr id="7" name="label-142"/>
-          <p:cNvSpPr txBox="1"/>
-          <p:nvPr/>
-        </p:nvSpPr>
-        <p:spPr>
-          <a:xfrm>
-            <a:off x="822960" y="2286000"/>
-            <a:ext cx="3200400" cy="256032"/>
-          </a:xfrm>
-          <a:prstGeom prst="rect">
-            <a:avLst/>
-          </a:prstGeom>
-          <a:noFill/>
-          <a:ln/>
-        </p:spPr>
-        <p:txBody>
-          <a:bodyPr wrap="square" lIns="0" tIns="0" rIns="0" bIns="0" rtlCol="0" anchor="t"/>
-          <a:lstStyle/>
-          <a:p>
-            <a:pPr algn="l" indent="0" marL="0">
-              <a:buNone/>
-            </a:pPr>
-            <a:r>
-              <a:rPr lang="en-US" sz="1250" b="1" dirty="0">
-                <a:solidFill>
-                  <a:schemeClr val="accent1"/>
-                </a:solidFill>
-              </a:rPr>
-              <a:t>背景</a:t>
-            </a:r>
-            <a:endParaRPr lang="en-US" sz="1250" dirty="0"/>
-          </a:p>
-        </p:txBody>
-      </p:sp>
-      <p:sp>
-        <p:nvSpPr>
-          <p:cNvPr id="8" name="label-143"/>
-          <p:cNvSpPr txBox="1"/>
-          <p:nvPr/>
-        </p:nvSpPr>
-        <p:spPr>
-          <a:xfrm>
-            <a:off x="822960" y="2560320"/>
-            <a:ext cx="3200400" cy="594360"/>
-          </a:xfrm>
-          <a:prstGeom prst="rect">
-            <a:avLst/>
-          </a:prstGeom>
-          <a:noFill/>
-          <a:ln/>
-        </p:spPr>
-        <p:txBody>
-          <a:bodyPr wrap="square" lIns="0" tIns="0" rIns="0" bIns="0" rtlCol="0" anchor="t"/>
-          <a:lstStyle/>
-          <a:p>
-            <a:pPr algn="l" indent="0" marL="0">
-              <a:buNone/>
-            </a:pPr>
-            <a:r>
-              <a:rPr lang="en-US" sz="1150" dirty="0">
-                <a:solidFill>
-                  <a:schemeClr val="tx1"/>
-                </a:solidFill>
-              </a:rPr>
-              <a:t>专家意见不一时，多轮辩论既耗算力又容易互相附和。借鉴贝叶斯实验设计（Lindley, 1956）：先做“最能分出对错”的那次查询。</a:t>
-            </a:r>
-            <a:endParaRPr lang="en-US" sz="1150" dirty="0"/>
-          </a:p>
-        </p:txBody>
-      </p:sp>
-      <p:sp>
-        <p:nvSpPr>
-          <p:cNvPr id="9" name="label-144"/>
-          <p:cNvSpPr txBox="1"/>
-          <p:nvPr/>
-        </p:nvSpPr>
-        <p:spPr>
-          <a:xfrm>
-            <a:off x="822960" y="3264408"/>
-            <a:ext cx="3200400" cy="256032"/>
-          </a:xfrm>
-          <a:prstGeom prst="rect">
-            <a:avLst/>
-          </a:prstGeom>
-          <a:noFill/>
-          <a:ln/>
-        </p:spPr>
-        <p:txBody>
-          <a:bodyPr wrap="square" lIns="0" tIns="0" rIns="0" bIns="0" rtlCol="0" anchor="t"/>
-          <a:lstStyle/>
-          <a:p>
-            <a:pPr algn="l" indent="0" marL="0">
-              <a:buNone/>
-            </a:pPr>
-            <a:r>
-              <a:rPr lang="en-US" sz="1250" b="1" dirty="0">
-                <a:solidFill>
-                  <a:schemeClr val="accent1"/>
-                </a:solidFill>
-              </a:rPr>
-              <a:t>分歧度怎么算</a:t>
-            </a:r>
-            <a:endParaRPr lang="en-US" sz="1250" dirty="0"/>
-          </a:p>
-        </p:txBody>
-      </p:sp>
-      <p:sp>
-        <p:nvSpPr>
-          <p:cNvPr id="10" name="label-145"/>
-          <p:cNvSpPr txBox="1"/>
-          <p:nvPr/>
-        </p:nvSpPr>
-        <p:spPr>
-          <a:xfrm>
-            <a:off x="822960" y="3538728"/>
-            <a:ext cx="3200400" cy="594360"/>
-          </a:xfrm>
-          <a:prstGeom prst="rect">
-            <a:avLst/>
-          </a:prstGeom>
-          <a:noFill/>
-          <a:ln/>
-        </p:spPr>
-        <p:txBody>
-          <a:bodyPr wrap="square" lIns="0" tIns="0" rIns="0" bIns="0" rtlCol="0" anchor="t"/>
-          <a:lstStyle/>
-          <a:p>
-            <a:pPr algn="l" indent="0" marL="0">
-              <a:buNone/>
-            </a:pPr>
-            <a:r>
-              <a:rPr lang="en-US" sz="1150" dirty="0">
-                <a:solidFill>
-                  <a:schemeClr val="tx1"/>
-                </a:solidFill>
-              </a:rPr>
-              <a:t>把专家意见汇成对“支持 / 反驳”的概率判断 p；分歧度 = 熵 H(p) ÷ 最大熵。0 表示已有定论，1 表示五五开。</a:t>
-            </a:r>
-            <a:endParaRPr lang="en-US" sz="1150" dirty="0"/>
-          </a:p>
-        </p:txBody>
-      </p:sp>
-      <p:sp>
-        <p:nvSpPr>
-          <p:cNvPr id="11" name="label-146"/>
-          <p:cNvSpPr txBox="1"/>
-          <p:nvPr/>
-        </p:nvSpPr>
-        <p:spPr>
-          <a:xfrm>
-            <a:off x="822960" y="4242816"/>
-            <a:ext cx="3200400" cy="256032"/>
-          </a:xfrm>
-          <a:prstGeom prst="rect">
-            <a:avLst/>
-          </a:prstGeom>
-          <a:noFill/>
-          <a:ln/>
-        </p:spPr>
-        <p:txBody>
-          <a:bodyPr wrap="square" lIns="0" tIns="0" rIns="0" bIns="0" rtlCol="0" anchor="t"/>
-          <a:lstStyle/>
-          <a:p>
-            <a:pPr algn="l" indent="0" marL="0">
-              <a:buNone/>
-            </a:pPr>
-            <a:r>
-              <a:rPr lang="en-US" sz="1250" b="1" dirty="0">
-                <a:solidFill>
-                  <a:schemeClr val="accent1"/>
-                </a:solidFill>
-              </a:rPr>
-              <a:t>信息增益怎么得到</a:t>
-            </a:r>
-            <a:endParaRPr lang="en-US" sz="1250" dirty="0"/>
-          </a:p>
-        </p:txBody>
-      </p:sp>
-      <p:sp>
-        <p:nvSpPr>
-          <p:cNvPr id="12" name="label-147"/>
-          <p:cNvSpPr txBox="1"/>
-          <p:nvPr/>
-        </p:nvSpPr>
-        <p:spPr>
-          <a:xfrm>
-            <a:off x="822960" y="4517136"/>
-            <a:ext cx="3200400" cy="1325880"/>
-          </a:xfrm>
-          <a:prstGeom prst="rect">
-            <a:avLst/>
-          </a:prstGeom>
-          <a:noFill/>
-          <a:ln/>
-        </p:spPr>
-        <p:txBody>
-          <a:bodyPr wrap="square" lIns="0" tIns="0" rIns="0" bIns="0" rtlCol="0" anchor="t"/>
-          <a:lstStyle/>
-          <a:p>
-            <a:pPr algn="l" indent="0" marL="0">
-              <a:buNone/>
-            </a:pPr>
-            <a:r>
-              <a:rPr lang="en-US" sz="1150" dirty="0">
-                <a:solidFill>
-                  <a:schemeClr val="tx1"/>
-                </a:solidFill>
-              </a:rPr>
-              <a:t>每个查询有一张“结果概率表”。如 ChEMBL：假设成立时查到强活性（≤1 µM）的概率为 60%，不成立时仅 10%。</a:t>
-            </a:r>
-            <a:endParaRPr lang="en-US" sz="1150" dirty="0"/>
-          </a:p>
-          <a:p>
-            <a:pPr algn="l" indent="0" marL="0">
-              <a:buNone/>
-            </a:pPr>
-            <a:r>
-              <a:rPr lang="en-US" sz="1150" dirty="0">
-                <a:solidFill>
-                  <a:schemeClr val="tx1"/>
-                </a:solidFill>
-              </a:rPr>
-              <a:t>预期信息增益 = 查询前的不确定度 − 查询后平均剩余的不确定度（单位：比特），按“增益 ÷ 成本”排序。</a:t>
-            </a:r>
-            <a:endParaRPr lang="en-US" sz="1150" dirty="0"/>
-          </a:p>
-        </p:txBody>
-      </p:sp>
-      <p:sp>
-        <p:nvSpPr>
-          <p:cNvPr id="13" name="panel-148"/>
+          <p:cNvPr id="7" name="box-174"/>
           <p:cNvSpPr/>
           <p:nvPr/>
         </p:nvSpPr>
         <p:spPr>
           <a:xfrm>
-            <a:off x="4251960" y="2240280"/>
-            <a:ext cx="2971800" cy="3657600"/>
+            <a:off x="822960" y="2212848"/>
+            <a:ext cx="6355080" cy="713232"/>
           </a:xfrm>
           <a:prstGeom prst="roundRect">
             <a:avLst>
-              <a:gd name="adj" fmla="val 1846"/>
+              <a:gd name="adj" fmla="val 10256"/>
             </a:avLst>
           </a:prstGeom>
           <a:solidFill>
-            <a:srgbClr val="FFFFFF"/>
+            <a:schemeClr val="bg1"/>
           </a:solidFill>
-          <a:ln w="9525">
+          <a:ln w="12700">
             <a:solidFill>
               <a:srgbClr val="D5DCE4"/>
             </a:solidFill>
-            <a:prstDash val="solid"/>
           </a:ln>
         </p:spPr>
-      </p:sp>
-      <p:sp>
-        <p:nvSpPr>
-          <p:cNvPr id="14" name="label-149"/>
+        <p:txBody>
+          <a:bodyPr wrap="square" lIns="1270" tIns="1270" rIns="1270" bIns="1270" rtlCol="0" anchor="ctr"/>
+          <a:lstStyle/>
+          <a:p>
+            <a:pPr algn="l" indent="0" marL="0">
+              <a:buNone/>
+            </a:pPr>
+            <a:r>
+              <a:rPr lang="en-US" sz="1150" dirty="0">
+                <a:solidFill>
+                  <a:schemeClr val="tx1"/>
+                </a:solidFill>
+              </a:rPr>
+              <a:t>类比：医生分辨流感和感冒——量体温没用，两种病都发烧；流感抗原检测结果差别大，所以先做它。信息增益就是给“这项查询能把两种可能分开多少”打分。</a:t>
+            </a:r>
+            <a:endParaRPr lang="en-US" sz="1150" dirty="0"/>
+          </a:p>
+        </p:txBody>
+      </p:sp>
+      <p:sp>
+        <p:nvSpPr>
+          <p:cNvPr id="8" name="label-175"/>
           <p:cNvSpPr txBox="1"/>
           <p:nvPr/>
         </p:nvSpPr>
         <p:spPr>
           <a:xfrm>
-            <a:off x="4389120" y="2331720"/>
-            <a:ext cx="2697480" cy="457200"/>
+            <a:off x="822960" y="3017520"/>
+            <a:ext cx="6355080" cy="274320"/>
           </a:xfrm>
           <a:prstGeom prst="rect">
             <a:avLst/>
@@ -11878,79 +14192,924 @@
               <a:buNone/>
             </a:pPr>
             <a:r>
-              <a:rPr lang="en-US" sz="1150" b="1" dirty="0">
+              <a:rPr lang="en-US" sz="1200" b="1" dirty="0">
                 <a:solidFill>
                   <a:schemeClr val="tx2"/>
                 </a:solidFill>
               </a:rPr>
-              <a:t>例：假设“TYK2 抑制可用于治疗银屑病”，起点 50 / 50（分歧度 1.0）</a:t>
-            </a:r>
-            <a:endParaRPr lang="en-US" sz="1150" dirty="0"/>
-          </a:p>
-        </p:txBody>
-      </p:sp>
-      <p:sp>
-        <p:nvSpPr>
-          <p:cNvPr id="15" name="label-150"/>
-          <p:cNvSpPr txBox="1"/>
-          <p:nvPr/>
-        </p:nvSpPr>
-        <p:spPr>
-          <a:xfrm>
-            <a:off x="4389120" y="2807208"/>
-            <a:ext cx="2697480" cy="237744"/>
-          </a:xfrm>
-          <a:prstGeom prst="rect">
-            <a:avLst/>
-          </a:prstGeom>
-          <a:noFill/>
-          <a:ln/>
-        </p:spPr>
-        <p:txBody>
-          <a:bodyPr wrap="square" lIns="0" tIns="0" rIns="0" bIns="0" rtlCol="0" anchor="t"/>
-          <a:lstStyle/>
-          <a:p>
-            <a:pPr algn="l" indent="0" marL="0">
-              <a:buNone/>
-            </a:pPr>
-            <a:r>
-              <a:rPr lang="en-US" sz="1050" dirty="0">
-                <a:solidFill>
-                  <a:schemeClr val="accent6"/>
-                </a:solidFill>
-              </a:rPr>
-              <a:t>第一步，三种查询的预期信息增益（比特）</a:t>
-            </a:r>
-            <a:endParaRPr lang="en-US" sz="1050" dirty="0"/>
+              <a:t>例：假设“GLP-1 受体激动剂（如司美格鲁肽）可用于减重”，起点五五开</a:t>
+            </a:r>
+            <a:endParaRPr lang="en-US" sz="1200" dirty="0"/>
           </a:p>
         </p:txBody>
       </p:sp>
       <p:graphicFrame>
         <p:nvGraphicFramePr>
-          <p:cNvPr id="16" name="chart-151" descr=""/>
-          <p:cNvGraphicFramePr/>
-          <p:nvPr/>
+          <p:cNvPr id="9" name="table-176"/>
+          <p:cNvGraphicFramePr>
+            <a:graphicFrameLocks noGrp="1"/>
+          </p:cNvGraphicFramePr>
+          <p:nvPr>
+            <p:extLst>
+              <p:ext uri="{D42A27DB-BD31-4B8C-83A1-F6EECF244321}">
+                <p14:modId xmlns:p14="http://schemas.microsoft.com/office/powerpoint/2010/main" val="1579011935"/>
+              </p:ext>
+            </p:extLst>
+          </p:nvPr>
         </p:nvGraphicFramePr>
         <p:xfrm>
-          <a:off x="4270248" y="2999232"/>
-          <a:ext cx="2880360" cy="1188720"/>
+          <a:off x="822960" y="3337560"/>
+          <a:ext cx="3977640" cy="914400"/>
         </p:xfrm>
-        <a:graphic xmlns:a="http://schemas.openxmlformats.org/drawingml/2006/main">
-          <a:graphicData uri="http://schemas.openxmlformats.org/drawingml/2006/chart">
-            <c:chart xmlns:c="http://schemas.openxmlformats.org/drawingml/2006/chart" r:id="rId1"/>
+        <a:graphic>
+          <a:graphicData uri="http://schemas.openxmlformats.org/drawingml/2006/table">
+            <a:tbl>
+              <a:tblPr/>
+              <a:tblGrid>
+                <a:gridCol w="1965960"/>
+                <a:gridCol w="1005840"/>
+                <a:gridCol w="1005840"/>
+              </a:tblGrid>
+              <a:tr h="420624">
+                <a:tc>
+                  <a:txBody>
+                    <a:bodyPr/>
+                    <a:lstStyle/>
+                    <a:p>
+                      <a:pPr algn="ctr" indent="0" marL="0">
+                        <a:buNone/>
+                      </a:pPr>
+                      <a:r>
+                        <a:rPr lang="en-US" sz="1100" b="1" dirty="0">
+                          <a:solidFill>
+                            <a:srgbClr val="FFFFFF"/>
+                          </a:solidFill>
+                          <a:latin typeface="Microsoft YaHei" pitchFamily="34" charset="0"/>
+                          <a:ea typeface="Microsoft YaHei" pitchFamily="34" charset="-122"/>
+                          <a:cs typeface="Microsoft YaHei" pitchFamily="34" charset="-120"/>
+                        </a:rPr>
+                        <a:t>系统可做的查询</a:t>
+                      </a:r>
+                      <a:endParaRPr lang="en-US" sz="1100" dirty="0">
+                        <a:latin typeface="Microsoft YaHei" charset="0"/>
+                        <a:ea typeface="Microsoft YaHei" charset="0"/>
+                        <a:cs typeface="Microsoft YaHei" charset="0"/>
+                      </a:endParaRPr>
+                    </a:p>
+                  </a:txBody>
+                  <a:tcPr marL="64008" marR="64008" marT="27432" marB="27432" anchor="ctr">
+                    <a:lnL w="9525" cap="flat" cmpd="sng" algn="ctr">
+                      <a:solidFill>
+                        <a:srgbClr val="D5DCE4"/>
+                      </a:solidFill>
+                      <a:prstDash val="solid"/>
+                      <a:round/>
+                      <a:headEnd type="none" w="med" len="med"/>
+                      <a:tailEnd type="none" w="med" len="med"/>
+                    </a:lnL>
+                    <a:lnR w="9525" cap="flat" cmpd="sng" algn="ctr">
+                      <a:solidFill>
+                        <a:srgbClr val="D5DCE4"/>
+                      </a:solidFill>
+                      <a:prstDash val="solid"/>
+                      <a:round/>
+                      <a:headEnd type="none" w="med" len="med"/>
+                      <a:tailEnd type="none" w="med" len="med"/>
+                    </a:lnR>
+                    <a:lnT w="9525" cap="flat" cmpd="sng" algn="ctr">
+                      <a:solidFill>
+                        <a:srgbClr val="D5DCE4"/>
+                      </a:solidFill>
+                      <a:prstDash val="solid"/>
+                      <a:round/>
+                      <a:headEnd type="none" w="med" len="med"/>
+                      <a:tailEnd type="none" w="med" len="med"/>
+                    </a:lnT>
+                    <a:lnB w="9525" cap="flat" cmpd="sng" algn="ctr">
+                      <a:solidFill>
+                        <a:srgbClr val="D5DCE4"/>
+                      </a:solidFill>
+                      <a:prstDash val="solid"/>
+                      <a:round/>
+                      <a:headEnd type="none" w="med" len="med"/>
+                      <a:tailEnd type="none" w="med" len="med"/>
+                    </a:lnB>
+                    <a:solidFill>
+                      <a:srgbClr val="0F2A44"/>
+                    </a:solidFill>
+                  </a:tcPr>
+                </a:tc>
+                <a:tc>
+                  <a:txBody>
+                    <a:bodyPr/>
+                    <a:lstStyle/>
+                    <a:p>
+                      <a:pPr algn="ctr" indent="0" marL="0">
+                        <a:buNone/>
+                      </a:pPr>
+                      <a:r>
+                        <a:rPr lang="en-US" sz="1100" b="1" dirty="0">
+                          <a:solidFill>
+                            <a:srgbClr val="FFFFFF"/>
+                          </a:solidFill>
+                          <a:latin typeface="Microsoft YaHei" pitchFamily="34" charset="0"/>
+                          <a:ea typeface="Microsoft YaHei" pitchFamily="34" charset="-122"/>
+                          <a:cs typeface="Microsoft YaHei" pitchFamily="34" charset="-120"/>
+                        </a:rPr>
+                        <a:t>假设成立时</a:t>
+                      </a:r>
+                      <a:endParaRPr lang="en-US" sz="1100" dirty="0">
+                        <a:latin typeface="Microsoft YaHei" charset="0"/>
+                        <a:ea typeface="Microsoft YaHei" charset="0"/>
+                        <a:cs typeface="Microsoft YaHei" charset="0"/>
+                      </a:endParaRPr>
+                    </a:p>
+                    <a:p>
+                      <a:pPr algn="ctr" indent="0" marL="0">
+                        <a:buNone/>
+                      </a:pPr>
+                      <a:r>
+                        <a:rPr lang="en-US" sz="1100" b="1" dirty="0">
+                          <a:solidFill>
+                            <a:srgbClr val="FFFFFF"/>
+                          </a:solidFill>
+                          <a:latin typeface="Microsoft YaHei" pitchFamily="34" charset="0"/>
+                          <a:ea typeface="Microsoft YaHei" pitchFamily="34" charset="-122"/>
+                          <a:cs typeface="Microsoft YaHei" pitchFamily="34" charset="-120"/>
+                        </a:rPr>
+                        <a:t>查到的概率</a:t>
+                      </a:r>
+                      <a:endParaRPr lang="en-US" sz="1100" dirty="0">
+                        <a:latin typeface="Microsoft YaHei" charset="0"/>
+                        <a:ea typeface="Microsoft YaHei" charset="0"/>
+                        <a:cs typeface="Microsoft YaHei" charset="0"/>
+                      </a:endParaRPr>
+                    </a:p>
+                  </a:txBody>
+                  <a:tcPr marL="64008" marR="64008" marT="27432" marB="27432" anchor="ctr">
+                    <a:lnL w="9525" cap="flat" cmpd="sng" algn="ctr">
+                      <a:solidFill>
+                        <a:srgbClr val="D5DCE4"/>
+                      </a:solidFill>
+                      <a:prstDash val="solid"/>
+                      <a:round/>
+                      <a:headEnd type="none" w="med" len="med"/>
+                      <a:tailEnd type="none" w="med" len="med"/>
+                    </a:lnL>
+                    <a:lnR w="9525" cap="flat" cmpd="sng" algn="ctr">
+                      <a:solidFill>
+                        <a:srgbClr val="D5DCE4"/>
+                      </a:solidFill>
+                      <a:prstDash val="solid"/>
+                      <a:round/>
+                      <a:headEnd type="none" w="med" len="med"/>
+                      <a:tailEnd type="none" w="med" len="med"/>
+                    </a:lnR>
+                    <a:lnT w="9525" cap="flat" cmpd="sng" algn="ctr">
+                      <a:solidFill>
+                        <a:srgbClr val="D5DCE4"/>
+                      </a:solidFill>
+                      <a:prstDash val="solid"/>
+                      <a:round/>
+                      <a:headEnd type="none" w="med" len="med"/>
+                      <a:tailEnd type="none" w="med" len="med"/>
+                    </a:lnT>
+                    <a:lnB w="9525" cap="flat" cmpd="sng" algn="ctr">
+                      <a:solidFill>
+                        <a:srgbClr val="D5DCE4"/>
+                      </a:solidFill>
+                      <a:prstDash val="solid"/>
+                      <a:round/>
+                      <a:headEnd type="none" w="med" len="med"/>
+                      <a:tailEnd type="none" w="med" len="med"/>
+                    </a:lnB>
+                    <a:solidFill>
+                      <a:srgbClr val="0F2A44"/>
+                    </a:solidFill>
+                  </a:tcPr>
+                </a:tc>
+                <a:tc>
+                  <a:txBody>
+                    <a:bodyPr/>
+                    <a:lstStyle/>
+                    <a:p>
+                      <a:pPr algn="ctr" indent="0" marL="0">
+                        <a:buNone/>
+                      </a:pPr>
+                      <a:r>
+                        <a:rPr lang="en-US" sz="1100" b="1" dirty="0">
+                          <a:solidFill>
+                            <a:srgbClr val="FFFFFF"/>
+                          </a:solidFill>
+                          <a:latin typeface="Microsoft YaHei" pitchFamily="34" charset="0"/>
+                          <a:ea typeface="Microsoft YaHei" pitchFamily="34" charset="-122"/>
+                          <a:cs typeface="Microsoft YaHei" pitchFamily="34" charset="-120"/>
+                        </a:rPr>
+                        <a:t>不成立时</a:t>
+                      </a:r>
+                      <a:endParaRPr lang="en-US" sz="1100" dirty="0">
+                        <a:latin typeface="Microsoft YaHei" charset="0"/>
+                        <a:ea typeface="Microsoft YaHei" charset="0"/>
+                        <a:cs typeface="Microsoft YaHei" charset="0"/>
+                      </a:endParaRPr>
+                    </a:p>
+                    <a:p>
+                      <a:pPr algn="ctr" indent="0" marL="0">
+                        <a:buNone/>
+                      </a:pPr>
+                      <a:r>
+                        <a:rPr lang="en-US" sz="1100" b="1" dirty="0">
+                          <a:solidFill>
+                            <a:srgbClr val="FFFFFF"/>
+                          </a:solidFill>
+                          <a:latin typeface="Microsoft YaHei" pitchFamily="34" charset="0"/>
+                          <a:ea typeface="Microsoft YaHei" pitchFamily="34" charset="-122"/>
+                          <a:cs typeface="Microsoft YaHei" pitchFamily="34" charset="-120"/>
+                        </a:rPr>
+                        <a:t>查到的概率</a:t>
+                      </a:r>
+                      <a:endParaRPr lang="en-US" sz="1100" dirty="0">
+                        <a:latin typeface="Microsoft YaHei" charset="0"/>
+                        <a:ea typeface="Microsoft YaHei" charset="0"/>
+                        <a:cs typeface="Microsoft YaHei" charset="0"/>
+                      </a:endParaRPr>
+                    </a:p>
+                  </a:txBody>
+                  <a:tcPr marL="64008" marR="64008" marT="27432" marB="27432" anchor="ctr">
+                    <a:lnL w="9525" cap="flat" cmpd="sng" algn="ctr">
+                      <a:solidFill>
+                        <a:srgbClr val="D5DCE4"/>
+                      </a:solidFill>
+                      <a:prstDash val="solid"/>
+                      <a:round/>
+                      <a:headEnd type="none" w="med" len="med"/>
+                      <a:tailEnd type="none" w="med" len="med"/>
+                    </a:lnL>
+                    <a:lnR w="9525" cap="flat" cmpd="sng" algn="ctr">
+                      <a:solidFill>
+                        <a:srgbClr val="D5DCE4"/>
+                      </a:solidFill>
+                      <a:prstDash val="solid"/>
+                      <a:round/>
+                      <a:headEnd type="none" w="med" len="med"/>
+                      <a:tailEnd type="none" w="med" len="med"/>
+                    </a:lnR>
+                    <a:lnT w="9525" cap="flat" cmpd="sng" algn="ctr">
+                      <a:solidFill>
+                        <a:srgbClr val="D5DCE4"/>
+                      </a:solidFill>
+                      <a:prstDash val="solid"/>
+                      <a:round/>
+                      <a:headEnd type="none" w="med" len="med"/>
+                      <a:tailEnd type="none" w="med" len="med"/>
+                    </a:lnT>
+                    <a:lnB w="9525" cap="flat" cmpd="sng" algn="ctr">
+                      <a:solidFill>
+                        <a:srgbClr val="D5DCE4"/>
+                      </a:solidFill>
+                      <a:prstDash val="solid"/>
+                      <a:round/>
+                      <a:headEnd type="none" w="med" len="med"/>
+                      <a:tailEnd type="none" w="med" len="med"/>
+                    </a:lnB>
+                    <a:solidFill>
+                      <a:srgbClr val="0F2A44"/>
+                    </a:solidFill>
+                  </a:tcPr>
+                </a:tc>
+              </a:tr>
+              <a:tr h="347472">
+                <a:tc>
+                  <a:txBody>
+                    <a:bodyPr/>
+                    <a:lstStyle/>
+                    <a:p>
+                      <a:pPr algn="l" indent="0" marL="0">
+                        <a:buNone/>
+                      </a:pPr>
+                      <a:r>
+                        <a:rPr lang="en-US" sz="1100" dirty="0">
+                          <a:solidFill>
+                            <a:srgbClr val="1B2533"/>
+                          </a:solidFill>
+                          <a:latin typeface="Microsoft YaHei" pitchFamily="34" charset="0"/>
+                          <a:ea typeface="Microsoft YaHei" pitchFamily="34" charset="-122"/>
+                          <a:cs typeface="Microsoft YaHei" pitchFamily="34" charset="-120"/>
+                        </a:rPr>
+                        <a:t>查强活性药物（ChEMBL）</a:t>
+                      </a:r>
+                      <a:endParaRPr lang="en-US" sz="1100" dirty="0">
+                        <a:latin typeface="Microsoft YaHei" charset="0"/>
+                        <a:ea typeface="Microsoft YaHei" charset="0"/>
+                        <a:cs typeface="Microsoft YaHei" charset="0"/>
+                      </a:endParaRPr>
+                    </a:p>
+                  </a:txBody>
+                  <a:tcPr marL="64008" marR="64008" marT="27432" marB="27432" anchor="ctr">
+                    <a:lnL w="9525" cap="flat" cmpd="sng" algn="ctr">
+                      <a:solidFill>
+                        <a:srgbClr val="D5DCE4"/>
+                      </a:solidFill>
+                      <a:prstDash val="solid"/>
+                      <a:round/>
+                      <a:headEnd type="none" w="med" len="med"/>
+                      <a:tailEnd type="none" w="med" len="med"/>
+                    </a:lnL>
+                    <a:lnR w="9525" cap="flat" cmpd="sng" algn="ctr">
+                      <a:solidFill>
+                        <a:srgbClr val="D5DCE4"/>
+                      </a:solidFill>
+                      <a:prstDash val="solid"/>
+                      <a:round/>
+                      <a:headEnd type="none" w="med" len="med"/>
+                      <a:tailEnd type="none" w="med" len="med"/>
+                    </a:lnR>
+                    <a:lnT w="9525" cap="flat" cmpd="sng" algn="ctr">
+                      <a:solidFill>
+                        <a:srgbClr val="D5DCE4"/>
+                      </a:solidFill>
+                      <a:prstDash val="solid"/>
+                      <a:round/>
+                      <a:headEnd type="none" w="med" len="med"/>
+                      <a:tailEnd type="none" w="med" len="med"/>
+                    </a:lnT>
+                    <a:lnB w="9525" cap="flat" cmpd="sng" algn="ctr">
+                      <a:solidFill>
+                        <a:srgbClr val="D5DCE4"/>
+                      </a:solidFill>
+                      <a:prstDash val="solid"/>
+                      <a:round/>
+                      <a:headEnd type="none" w="med" len="med"/>
+                      <a:tailEnd type="none" w="med" len="med"/>
+                    </a:lnB>
+                    <a:solidFill>
+                      <a:srgbClr val="FFFFFF"/>
+                    </a:solidFill>
+                  </a:tcPr>
+                </a:tc>
+                <a:tc>
+                  <a:txBody>
+                    <a:bodyPr/>
+                    <a:lstStyle/>
+                    <a:p>
+                      <a:pPr algn="ctr" indent="0" marL="0">
+                        <a:buNone/>
+                      </a:pPr>
+                      <a:r>
+                        <a:rPr lang="en-US" sz="1100" b="1" dirty="0">
+                          <a:solidFill>
+                            <a:srgbClr val="1B2533"/>
+                          </a:solidFill>
+                          <a:latin typeface="Microsoft YaHei" pitchFamily="34" charset="0"/>
+                          <a:ea typeface="Microsoft YaHei" pitchFamily="34" charset="-122"/>
+                          <a:cs typeface="Microsoft YaHei" pitchFamily="34" charset="-120"/>
+                        </a:rPr>
+                        <a:t>60%</a:t>
+                      </a:r>
+                      <a:endParaRPr lang="en-US" sz="1100" dirty="0">
+                        <a:latin typeface="Microsoft YaHei" charset="0"/>
+                        <a:ea typeface="Microsoft YaHei" charset="0"/>
+                        <a:cs typeface="Microsoft YaHei" charset="0"/>
+                      </a:endParaRPr>
+                    </a:p>
+                  </a:txBody>
+                  <a:tcPr marL="64008" marR="64008" marT="27432" marB="27432" anchor="ctr">
+                    <a:lnL w="9525" cap="flat" cmpd="sng" algn="ctr">
+                      <a:solidFill>
+                        <a:srgbClr val="D5DCE4"/>
+                      </a:solidFill>
+                      <a:prstDash val="solid"/>
+                      <a:round/>
+                      <a:headEnd type="none" w="med" len="med"/>
+                      <a:tailEnd type="none" w="med" len="med"/>
+                    </a:lnL>
+                    <a:lnR w="9525" cap="flat" cmpd="sng" algn="ctr">
+                      <a:solidFill>
+                        <a:srgbClr val="D5DCE4"/>
+                      </a:solidFill>
+                      <a:prstDash val="solid"/>
+                      <a:round/>
+                      <a:headEnd type="none" w="med" len="med"/>
+                      <a:tailEnd type="none" w="med" len="med"/>
+                    </a:lnR>
+                    <a:lnT w="9525" cap="flat" cmpd="sng" algn="ctr">
+                      <a:solidFill>
+                        <a:srgbClr val="D5DCE4"/>
+                      </a:solidFill>
+                      <a:prstDash val="solid"/>
+                      <a:round/>
+                      <a:headEnd type="none" w="med" len="med"/>
+                      <a:tailEnd type="none" w="med" len="med"/>
+                    </a:lnT>
+                    <a:lnB w="9525" cap="flat" cmpd="sng" algn="ctr">
+                      <a:solidFill>
+                        <a:srgbClr val="D5DCE4"/>
+                      </a:solidFill>
+                      <a:prstDash val="solid"/>
+                      <a:round/>
+                      <a:headEnd type="none" w="med" len="med"/>
+                      <a:tailEnd type="none" w="med" len="med"/>
+                    </a:lnB>
+                    <a:solidFill>
+                      <a:srgbClr val="FFFFFF"/>
+                    </a:solidFill>
+                  </a:tcPr>
+                </a:tc>
+                <a:tc>
+                  <a:txBody>
+                    <a:bodyPr/>
+                    <a:lstStyle/>
+                    <a:p>
+                      <a:pPr algn="ctr" indent="0" marL="0">
+                        <a:buNone/>
+                      </a:pPr>
+                      <a:r>
+                        <a:rPr lang="en-US" sz="1100" b="1" dirty="0">
+                          <a:solidFill>
+                            <a:srgbClr val="1B2533"/>
+                          </a:solidFill>
+                          <a:latin typeface="Microsoft YaHei" pitchFamily="34" charset="0"/>
+                          <a:ea typeface="Microsoft YaHei" pitchFamily="34" charset="-122"/>
+                          <a:cs typeface="Microsoft YaHei" pitchFamily="34" charset="-120"/>
+                        </a:rPr>
+                        <a:t>10%</a:t>
+                      </a:r>
+                      <a:endParaRPr lang="en-US" sz="1100" dirty="0">
+                        <a:latin typeface="Microsoft YaHei" charset="0"/>
+                        <a:ea typeface="Microsoft YaHei" charset="0"/>
+                        <a:cs typeface="Microsoft YaHei" charset="0"/>
+                      </a:endParaRPr>
+                    </a:p>
+                  </a:txBody>
+                  <a:tcPr marL="64008" marR="64008" marT="27432" marB="27432" anchor="ctr">
+                    <a:lnL w="9525" cap="flat" cmpd="sng" algn="ctr">
+                      <a:solidFill>
+                        <a:srgbClr val="D5DCE4"/>
+                      </a:solidFill>
+                      <a:prstDash val="solid"/>
+                      <a:round/>
+                      <a:headEnd type="none" w="med" len="med"/>
+                      <a:tailEnd type="none" w="med" len="med"/>
+                    </a:lnL>
+                    <a:lnR w="9525" cap="flat" cmpd="sng" algn="ctr">
+                      <a:solidFill>
+                        <a:srgbClr val="D5DCE4"/>
+                      </a:solidFill>
+                      <a:prstDash val="solid"/>
+                      <a:round/>
+                      <a:headEnd type="none" w="med" len="med"/>
+                      <a:tailEnd type="none" w="med" len="med"/>
+                    </a:lnR>
+                    <a:lnT w="9525" cap="flat" cmpd="sng" algn="ctr">
+                      <a:solidFill>
+                        <a:srgbClr val="D5DCE4"/>
+                      </a:solidFill>
+                      <a:prstDash val="solid"/>
+                      <a:round/>
+                      <a:headEnd type="none" w="med" len="med"/>
+                      <a:tailEnd type="none" w="med" len="med"/>
+                    </a:lnT>
+                    <a:lnB w="9525" cap="flat" cmpd="sng" algn="ctr">
+                      <a:solidFill>
+                        <a:srgbClr val="D5DCE4"/>
+                      </a:solidFill>
+                      <a:prstDash val="solid"/>
+                      <a:round/>
+                      <a:headEnd type="none" w="med" len="med"/>
+                      <a:tailEnd type="none" w="med" len="med"/>
+                    </a:lnB>
+                    <a:solidFill>
+                      <a:srgbClr val="FFFFFF"/>
+                    </a:solidFill>
+                  </a:tcPr>
+                </a:tc>
+              </a:tr>
+              <a:tr h="347472">
+                <a:tc>
+                  <a:txBody>
+                    <a:bodyPr/>
+                    <a:lstStyle/>
+                    <a:p>
+                      <a:pPr algn="l" indent="0" marL="0">
+                        <a:buNone/>
+                      </a:pPr>
+                      <a:r>
+                        <a:rPr lang="en-US" sz="1100" dirty="0">
+                          <a:solidFill>
+                            <a:srgbClr val="1B2533"/>
+                          </a:solidFill>
+                          <a:latin typeface="Microsoft YaHei" pitchFamily="34" charset="0"/>
+                          <a:ea typeface="Microsoft YaHei" pitchFamily="34" charset="-122"/>
+                          <a:cs typeface="Microsoft YaHei" pitchFamily="34" charset="-120"/>
+                        </a:rPr>
+                        <a:t>查临床试验登记</a:t>
+                      </a:r>
+                      <a:endParaRPr lang="en-US" sz="1100" dirty="0">
+                        <a:latin typeface="Microsoft YaHei" charset="0"/>
+                        <a:ea typeface="Microsoft YaHei" charset="0"/>
+                        <a:cs typeface="Microsoft YaHei" charset="0"/>
+                      </a:endParaRPr>
+                    </a:p>
+                  </a:txBody>
+                  <a:tcPr marL="64008" marR="64008" marT="27432" marB="27432" anchor="ctr">
+                    <a:lnL w="9525" cap="flat" cmpd="sng" algn="ctr">
+                      <a:solidFill>
+                        <a:srgbClr val="D5DCE4"/>
+                      </a:solidFill>
+                      <a:prstDash val="solid"/>
+                      <a:round/>
+                      <a:headEnd type="none" w="med" len="med"/>
+                      <a:tailEnd type="none" w="med" len="med"/>
+                    </a:lnL>
+                    <a:lnR w="9525" cap="flat" cmpd="sng" algn="ctr">
+                      <a:solidFill>
+                        <a:srgbClr val="D5DCE4"/>
+                      </a:solidFill>
+                      <a:prstDash val="solid"/>
+                      <a:round/>
+                      <a:headEnd type="none" w="med" len="med"/>
+                      <a:tailEnd type="none" w="med" len="med"/>
+                    </a:lnR>
+                    <a:lnT w="9525" cap="flat" cmpd="sng" algn="ctr">
+                      <a:solidFill>
+                        <a:srgbClr val="D5DCE4"/>
+                      </a:solidFill>
+                      <a:prstDash val="solid"/>
+                      <a:round/>
+                      <a:headEnd type="none" w="med" len="med"/>
+                      <a:tailEnd type="none" w="med" len="med"/>
+                    </a:lnT>
+                    <a:lnB w="9525" cap="flat" cmpd="sng" algn="ctr">
+                      <a:solidFill>
+                        <a:srgbClr val="D5DCE4"/>
+                      </a:solidFill>
+                      <a:prstDash val="solid"/>
+                      <a:round/>
+                      <a:headEnd type="none" w="med" len="med"/>
+                      <a:tailEnd type="none" w="med" len="med"/>
+                    </a:lnB>
+                    <a:solidFill>
+                      <a:srgbClr val="FFFFFF"/>
+                    </a:solidFill>
+                  </a:tcPr>
+                </a:tc>
+                <a:tc>
+                  <a:txBody>
+                    <a:bodyPr/>
+                    <a:lstStyle/>
+                    <a:p>
+                      <a:pPr algn="ctr" indent="0" marL="0">
+                        <a:buNone/>
+                      </a:pPr>
+                      <a:r>
+                        <a:rPr lang="en-US" sz="1100" b="1" dirty="0">
+                          <a:solidFill>
+                            <a:srgbClr val="1B2533"/>
+                          </a:solidFill>
+                          <a:latin typeface="Microsoft YaHei" pitchFamily="34" charset="0"/>
+                          <a:ea typeface="Microsoft YaHei" pitchFamily="34" charset="-122"/>
+                          <a:cs typeface="Microsoft YaHei" pitchFamily="34" charset="-120"/>
+                        </a:rPr>
+                        <a:t>50%</a:t>
+                      </a:r>
+                      <a:endParaRPr lang="en-US" sz="1100" dirty="0">
+                        <a:latin typeface="Microsoft YaHei" charset="0"/>
+                        <a:ea typeface="Microsoft YaHei" charset="0"/>
+                        <a:cs typeface="Microsoft YaHei" charset="0"/>
+                      </a:endParaRPr>
+                    </a:p>
+                  </a:txBody>
+                  <a:tcPr marL="64008" marR="64008" marT="27432" marB="27432" anchor="ctr">
+                    <a:lnL w="9525" cap="flat" cmpd="sng" algn="ctr">
+                      <a:solidFill>
+                        <a:srgbClr val="D5DCE4"/>
+                      </a:solidFill>
+                      <a:prstDash val="solid"/>
+                      <a:round/>
+                      <a:headEnd type="none" w="med" len="med"/>
+                      <a:tailEnd type="none" w="med" len="med"/>
+                    </a:lnL>
+                    <a:lnR w="9525" cap="flat" cmpd="sng" algn="ctr">
+                      <a:solidFill>
+                        <a:srgbClr val="D5DCE4"/>
+                      </a:solidFill>
+                      <a:prstDash val="solid"/>
+                      <a:round/>
+                      <a:headEnd type="none" w="med" len="med"/>
+                      <a:tailEnd type="none" w="med" len="med"/>
+                    </a:lnR>
+                    <a:lnT w="9525" cap="flat" cmpd="sng" algn="ctr">
+                      <a:solidFill>
+                        <a:srgbClr val="D5DCE4"/>
+                      </a:solidFill>
+                      <a:prstDash val="solid"/>
+                      <a:round/>
+                      <a:headEnd type="none" w="med" len="med"/>
+                      <a:tailEnd type="none" w="med" len="med"/>
+                    </a:lnT>
+                    <a:lnB w="9525" cap="flat" cmpd="sng" algn="ctr">
+                      <a:solidFill>
+                        <a:srgbClr val="D5DCE4"/>
+                      </a:solidFill>
+                      <a:prstDash val="solid"/>
+                      <a:round/>
+                      <a:headEnd type="none" w="med" len="med"/>
+                      <a:tailEnd type="none" w="med" len="med"/>
+                    </a:lnB>
+                    <a:solidFill>
+                      <a:srgbClr val="FFFFFF"/>
+                    </a:solidFill>
+                  </a:tcPr>
+                </a:tc>
+                <a:tc>
+                  <a:txBody>
+                    <a:bodyPr/>
+                    <a:lstStyle/>
+                    <a:p>
+                      <a:pPr algn="ctr" indent="0" marL="0">
+                        <a:buNone/>
+                      </a:pPr>
+                      <a:r>
+                        <a:rPr lang="en-US" sz="1100" b="1" dirty="0">
+                          <a:solidFill>
+                            <a:srgbClr val="1B2533"/>
+                          </a:solidFill>
+                          <a:latin typeface="Microsoft YaHei" pitchFamily="34" charset="0"/>
+                          <a:ea typeface="Microsoft YaHei" pitchFamily="34" charset="-122"/>
+                          <a:cs typeface="Microsoft YaHei" pitchFamily="34" charset="-120"/>
+                        </a:rPr>
+                        <a:t>15%</a:t>
+                      </a:r>
+                      <a:endParaRPr lang="en-US" sz="1100" dirty="0">
+                        <a:latin typeface="Microsoft YaHei" charset="0"/>
+                        <a:ea typeface="Microsoft YaHei" charset="0"/>
+                        <a:cs typeface="Microsoft YaHei" charset="0"/>
+                      </a:endParaRPr>
+                    </a:p>
+                  </a:txBody>
+                  <a:tcPr marL="64008" marR="64008" marT="27432" marB="27432" anchor="ctr">
+                    <a:lnL w="9525" cap="flat" cmpd="sng" algn="ctr">
+                      <a:solidFill>
+                        <a:srgbClr val="D5DCE4"/>
+                      </a:solidFill>
+                      <a:prstDash val="solid"/>
+                      <a:round/>
+                      <a:headEnd type="none" w="med" len="med"/>
+                      <a:tailEnd type="none" w="med" len="med"/>
+                    </a:lnL>
+                    <a:lnR w="9525" cap="flat" cmpd="sng" algn="ctr">
+                      <a:solidFill>
+                        <a:srgbClr val="D5DCE4"/>
+                      </a:solidFill>
+                      <a:prstDash val="solid"/>
+                      <a:round/>
+                      <a:headEnd type="none" w="med" len="med"/>
+                      <a:tailEnd type="none" w="med" len="med"/>
+                    </a:lnR>
+                    <a:lnT w="9525" cap="flat" cmpd="sng" algn="ctr">
+                      <a:solidFill>
+                        <a:srgbClr val="D5DCE4"/>
+                      </a:solidFill>
+                      <a:prstDash val="solid"/>
+                      <a:round/>
+                      <a:headEnd type="none" w="med" len="med"/>
+                      <a:tailEnd type="none" w="med" len="med"/>
+                    </a:lnT>
+                    <a:lnB w="9525" cap="flat" cmpd="sng" algn="ctr">
+                      <a:solidFill>
+                        <a:srgbClr val="D5DCE4"/>
+                      </a:solidFill>
+                      <a:prstDash val="solid"/>
+                      <a:round/>
+                      <a:headEnd type="none" w="med" len="med"/>
+                      <a:tailEnd type="none" w="med" len="med"/>
+                    </a:lnB>
+                    <a:solidFill>
+                      <a:srgbClr val="FFFFFF"/>
+                    </a:solidFill>
+                  </a:tcPr>
+                </a:tc>
+              </a:tr>
+              <a:tr h="347472">
+                <a:tc>
+                  <a:txBody>
+                    <a:bodyPr/>
+                    <a:lstStyle/>
+                    <a:p>
+                      <a:pPr algn="l" indent="0" marL="0">
+                        <a:buNone/>
+                      </a:pPr>
+                      <a:r>
+                        <a:rPr lang="en-US" sz="1100" dirty="0">
+                          <a:solidFill>
+                            <a:srgbClr val="1B2533"/>
+                          </a:solidFill>
+                          <a:latin typeface="Microsoft YaHei" pitchFamily="34" charset="0"/>
+                          <a:ea typeface="Microsoft YaHei" pitchFamily="34" charset="-122"/>
+                          <a:cs typeface="Microsoft YaHei" pitchFamily="34" charset="-120"/>
+                        </a:rPr>
+                        <a:t>查靶点序列（UniProt）</a:t>
+                      </a:r>
+                      <a:endParaRPr lang="en-US" sz="1100" dirty="0">
+                        <a:latin typeface="Microsoft YaHei" charset="0"/>
+                        <a:ea typeface="Microsoft YaHei" charset="0"/>
+                        <a:cs typeface="Microsoft YaHei" charset="0"/>
+                      </a:endParaRPr>
+                    </a:p>
+                  </a:txBody>
+                  <a:tcPr marL="64008" marR="64008" marT="27432" marB="27432" anchor="ctr">
+                    <a:lnL w="9525" cap="flat" cmpd="sng" algn="ctr">
+                      <a:solidFill>
+                        <a:srgbClr val="D5DCE4"/>
+                      </a:solidFill>
+                      <a:prstDash val="solid"/>
+                      <a:round/>
+                      <a:headEnd type="none" w="med" len="med"/>
+                      <a:tailEnd type="none" w="med" len="med"/>
+                    </a:lnL>
+                    <a:lnR w="9525" cap="flat" cmpd="sng" algn="ctr">
+                      <a:solidFill>
+                        <a:srgbClr val="D5DCE4"/>
+                      </a:solidFill>
+                      <a:prstDash val="solid"/>
+                      <a:round/>
+                      <a:headEnd type="none" w="med" len="med"/>
+                      <a:tailEnd type="none" w="med" len="med"/>
+                    </a:lnR>
+                    <a:lnT w="9525" cap="flat" cmpd="sng" algn="ctr">
+                      <a:solidFill>
+                        <a:srgbClr val="D5DCE4"/>
+                      </a:solidFill>
+                      <a:prstDash val="solid"/>
+                      <a:round/>
+                      <a:headEnd type="none" w="med" len="med"/>
+                      <a:tailEnd type="none" w="med" len="med"/>
+                    </a:lnT>
+                    <a:lnB w="9525" cap="flat" cmpd="sng" algn="ctr">
+                      <a:solidFill>
+                        <a:srgbClr val="D5DCE4"/>
+                      </a:solidFill>
+                      <a:prstDash val="solid"/>
+                      <a:round/>
+                      <a:headEnd type="none" w="med" len="med"/>
+                      <a:tailEnd type="none" w="med" len="med"/>
+                    </a:lnB>
+                    <a:solidFill>
+                      <a:srgbClr val="FFFFFF"/>
+                    </a:solidFill>
+                  </a:tcPr>
+                </a:tc>
+                <a:tc>
+                  <a:txBody>
+                    <a:bodyPr/>
+                    <a:lstStyle/>
+                    <a:p>
+                      <a:pPr algn="ctr" indent="0" marL="0">
+                        <a:buNone/>
+                      </a:pPr>
+                      <a:r>
+                        <a:rPr lang="en-US" sz="1100" b="1" dirty="0">
+                          <a:solidFill>
+                            <a:srgbClr val="1B2533"/>
+                          </a:solidFill>
+                          <a:latin typeface="Microsoft YaHei" pitchFamily="34" charset="0"/>
+                          <a:ea typeface="Microsoft YaHei" pitchFamily="34" charset="-122"/>
+                          <a:cs typeface="Microsoft YaHei" pitchFamily="34" charset="-120"/>
+                        </a:rPr>
+                        <a:t>95%</a:t>
+                      </a:r>
+                      <a:endParaRPr lang="en-US" sz="1100" dirty="0">
+                        <a:latin typeface="Microsoft YaHei" charset="0"/>
+                        <a:ea typeface="Microsoft YaHei" charset="0"/>
+                        <a:cs typeface="Microsoft YaHei" charset="0"/>
+                      </a:endParaRPr>
+                    </a:p>
+                  </a:txBody>
+                  <a:tcPr marL="64008" marR="64008" marT="27432" marB="27432" anchor="ctr">
+                    <a:lnL w="9525" cap="flat" cmpd="sng" algn="ctr">
+                      <a:solidFill>
+                        <a:srgbClr val="D5DCE4"/>
+                      </a:solidFill>
+                      <a:prstDash val="solid"/>
+                      <a:round/>
+                      <a:headEnd type="none" w="med" len="med"/>
+                      <a:tailEnd type="none" w="med" len="med"/>
+                    </a:lnL>
+                    <a:lnR w="9525" cap="flat" cmpd="sng" algn="ctr">
+                      <a:solidFill>
+                        <a:srgbClr val="D5DCE4"/>
+                      </a:solidFill>
+                      <a:prstDash val="solid"/>
+                      <a:round/>
+                      <a:headEnd type="none" w="med" len="med"/>
+                      <a:tailEnd type="none" w="med" len="med"/>
+                    </a:lnR>
+                    <a:lnT w="9525" cap="flat" cmpd="sng" algn="ctr">
+                      <a:solidFill>
+                        <a:srgbClr val="D5DCE4"/>
+                      </a:solidFill>
+                      <a:prstDash val="solid"/>
+                      <a:round/>
+                      <a:headEnd type="none" w="med" len="med"/>
+                      <a:tailEnd type="none" w="med" len="med"/>
+                    </a:lnT>
+                    <a:lnB w="9525" cap="flat" cmpd="sng" algn="ctr">
+                      <a:solidFill>
+                        <a:srgbClr val="D5DCE4"/>
+                      </a:solidFill>
+                      <a:prstDash val="solid"/>
+                      <a:round/>
+                      <a:headEnd type="none" w="med" len="med"/>
+                      <a:tailEnd type="none" w="med" len="med"/>
+                    </a:lnB>
+                    <a:solidFill>
+                      <a:srgbClr val="FFFFFF"/>
+                    </a:solidFill>
+                  </a:tcPr>
+                </a:tc>
+                <a:tc>
+                  <a:txBody>
+                    <a:bodyPr/>
+                    <a:lstStyle/>
+                    <a:p>
+                      <a:pPr algn="ctr" indent="0" marL="0">
+                        <a:buNone/>
+                      </a:pPr>
+                      <a:r>
+                        <a:rPr lang="en-US" sz="1100" b="1" dirty="0">
+                          <a:solidFill>
+                            <a:srgbClr val="1B2533"/>
+                          </a:solidFill>
+                          <a:latin typeface="Microsoft YaHei" pitchFamily="34" charset="0"/>
+                          <a:ea typeface="Microsoft YaHei" pitchFamily="34" charset="-122"/>
+                          <a:cs typeface="Microsoft YaHei" pitchFamily="34" charset="-120"/>
+                        </a:rPr>
+                        <a:t>80%</a:t>
+                      </a:r>
+                      <a:endParaRPr lang="en-US" sz="1100" dirty="0">
+                        <a:latin typeface="Microsoft YaHei" charset="0"/>
+                        <a:ea typeface="Microsoft YaHei" charset="0"/>
+                        <a:cs typeface="Microsoft YaHei" charset="0"/>
+                      </a:endParaRPr>
+                    </a:p>
+                  </a:txBody>
+                  <a:tcPr marL="64008" marR="64008" marT="27432" marB="27432" anchor="ctr">
+                    <a:lnL w="9525" cap="flat" cmpd="sng" algn="ctr">
+                      <a:solidFill>
+                        <a:srgbClr val="D5DCE4"/>
+                      </a:solidFill>
+                      <a:prstDash val="solid"/>
+                      <a:round/>
+                      <a:headEnd type="none" w="med" len="med"/>
+                      <a:tailEnd type="none" w="med" len="med"/>
+                    </a:lnL>
+                    <a:lnR w="9525" cap="flat" cmpd="sng" algn="ctr">
+                      <a:solidFill>
+                        <a:srgbClr val="D5DCE4"/>
+                      </a:solidFill>
+                      <a:prstDash val="solid"/>
+                      <a:round/>
+                      <a:headEnd type="none" w="med" len="med"/>
+                      <a:tailEnd type="none" w="med" len="med"/>
+                    </a:lnR>
+                    <a:lnT w="9525" cap="flat" cmpd="sng" algn="ctr">
+                      <a:solidFill>
+                        <a:srgbClr val="D5DCE4"/>
+                      </a:solidFill>
+                      <a:prstDash val="solid"/>
+                      <a:round/>
+                      <a:headEnd type="none" w="med" len="med"/>
+                      <a:tailEnd type="none" w="med" len="med"/>
+                    </a:lnT>
+                    <a:lnB w="9525" cap="flat" cmpd="sng" algn="ctr">
+                      <a:solidFill>
+                        <a:srgbClr val="D5DCE4"/>
+                      </a:solidFill>
+                      <a:prstDash val="solid"/>
+                      <a:round/>
+                      <a:headEnd type="none" w="med" len="med"/>
+                      <a:tailEnd type="none" w="med" len="med"/>
+                    </a:lnB>
+                    <a:solidFill>
+                      <a:srgbClr val="FFFFFF"/>
+                    </a:solidFill>
+                  </a:tcPr>
+                </a:tc>
+              </a:tr>
+            </a:tbl>
           </a:graphicData>
         </a:graphic>
       </p:graphicFrame>
       <p:sp>
         <p:nvSpPr>
-          <p:cNvPr id="17" name="label-152"/>
+          <p:cNvPr id="10" name="label-177"/>
           <p:cNvSpPr txBox="1"/>
           <p:nvPr/>
         </p:nvSpPr>
         <p:spPr>
           <a:xfrm>
-            <a:off x="4389120" y="4206240"/>
-            <a:ext cx="2697480" cy="457200"/>
+            <a:off x="4937760" y="3337560"/>
+            <a:ext cx="2240280" cy="420624"/>
           </a:xfrm>
           <a:prstGeom prst="rect">
             <a:avLst/>
@@ -11959,6 +15118,311 @@
           <a:ln/>
         </p:spPr>
         <p:txBody>
+          <a:bodyPr wrap="square" lIns="0" tIns="0" rIns="0" bIns="0" rtlCol="0" anchor="ctr"/>
+          <a:lstStyle/>
+          <a:p>
+            <a:pPr algn="l" indent="0" marL="0">
+              <a:buNone/>
+            </a:pPr>
+            <a:r>
+              <a:rPr lang="en-US" sz="1100" b="1" dirty="0">
+                <a:solidFill>
+                  <a:schemeClr val="tx2"/>
+                </a:solidFill>
+              </a:rPr>
+              <a:t>能分开多少</a:t>
+            </a:r>
+            <a:endParaRPr lang="en-US" sz="1100" dirty="0"/>
+          </a:p>
+          <a:p>
+            <a:pPr algn="l" indent="0" marL="0">
+              <a:buNone/>
+            </a:pPr>
+            <a:r>
+              <a:rPr lang="en-US" sz="1100" b="1" dirty="0">
+                <a:solidFill>
+                  <a:schemeClr val="tx2"/>
+                </a:solidFill>
+              </a:rPr>
+              <a:t>（信息增益）</a:t>
+            </a:r>
+            <a:endParaRPr lang="en-US" sz="1100" dirty="0"/>
+          </a:p>
+        </p:txBody>
+      </p:sp>
+      <p:sp>
+        <p:nvSpPr>
+          <p:cNvPr id="11" name="bar-178"/>
+          <p:cNvSpPr/>
+          <p:nvPr/>
+        </p:nvSpPr>
+        <p:spPr>
+          <a:xfrm>
+            <a:off x="4937760" y="3831336"/>
+            <a:ext cx="1737360" cy="201168"/>
+          </a:xfrm>
+          <a:prstGeom prst="rect">
+            <a:avLst/>
+          </a:prstGeom>
+          <a:solidFill>
+            <a:srgbClr val="0E8A7E"/>
+          </a:solidFill>
+          <a:ln w="12700">
+            <a:solidFill>
+              <a:srgbClr val="0E8A7E"/>
+            </a:solidFill>
+            <a:prstDash val="solid"/>
+          </a:ln>
+        </p:spPr>
+      </p:sp>
+      <p:sp>
+        <p:nvSpPr>
+          <p:cNvPr id="12" name="label-179"/>
+          <p:cNvSpPr txBox="1"/>
+          <p:nvPr/>
+        </p:nvSpPr>
+        <p:spPr>
+          <a:xfrm>
+            <a:off x="6729984" y="3794760"/>
+            <a:ext cx="457200" cy="274320"/>
+          </a:xfrm>
+          <a:prstGeom prst="rect">
+            <a:avLst/>
+          </a:prstGeom>
+          <a:noFill/>
+          <a:ln/>
+        </p:spPr>
+        <p:txBody>
+          <a:bodyPr wrap="square" lIns="0" tIns="0" rIns="0" bIns="0" rtlCol="0" anchor="ctr"/>
+          <a:lstStyle/>
+          <a:p>
+            <a:pPr algn="l" indent="0" marL="0">
+              <a:buNone/>
+            </a:pPr>
+            <a:r>
+              <a:rPr lang="en-US" sz="1050" b="1" dirty="0">
+                <a:solidFill>
+                  <a:schemeClr val="tx1"/>
+                </a:solidFill>
+              </a:rPr>
+              <a:t>0.26</a:t>
+            </a:r>
+            <a:endParaRPr lang="en-US" sz="1050" dirty="0"/>
+          </a:p>
+        </p:txBody>
+      </p:sp>
+      <p:sp>
+        <p:nvSpPr>
+          <p:cNvPr id="13" name="label-180"/>
+          <p:cNvSpPr txBox="1"/>
+          <p:nvPr/>
+        </p:nvSpPr>
+        <p:spPr>
+          <a:xfrm>
+            <a:off x="5010912" y="3794760"/>
+            <a:ext cx="1627632" cy="274320"/>
+          </a:xfrm>
+          <a:prstGeom prst="rect">
+            <a:avLst/>
+          </a:prstGeom>
+          <a:noFill/>
+          <a:ln/>
+        </p:spPr>
+        <p:txBody>
+          <a:bodyPr wrap="square" lIns="0" tIns="0" rIns="0" bIns="0" rtlCol="0" anchor="ctr"/>
+          <a:lstStyle/>
+          <a:p>
+            <a:pPr algn="l" indent="0" marL="0">
+              <a:buNone/>
+            </a:pPr>
+            <a:r>
+              <a:rPr lang="en-US" sz="1000" b="1" dirty="0">
+                <a:solidFill>
+                  <a:schemeClr val="bg1"/>
+                </a:solidFill>
+              </a:rPr>
+              <a:t>差别最大，先查</a:t>
+            </a:r>
+            <a:endParaRPr lang="en-US" sz="1000" dirty="0"/>
+          </a:p>
+        </p:txBody>
+      </p:sp>
+      <p:sp>
+        <p:nvSpPr>
+          <p:cNvPr id="14" name="bar-181"/>
+          <p:cNvSpPr/>
+          <p:nvPr/>
+        </p:nvSpPr>
+        <p:spPr>
+          <a:xfrm>
+            <a:off x="4937760" y="4178808"/>
+            <a:ext cx="704335" cy="201168"/>
+          </a:xfrm>
+          <a:prstGeom prst="rect">
+            <a:avLst/>
+          </a:prstGeom>
+          <a:solidFill>
+            <a:srgbClr val="8FC9C2"/>
+          </a:solidFill>
+          <a:ln w="12700">
+            <a:solidFill>
+              <a:srgbClr val="8FC9C2"/>
+            </a:solidFill>
+            <a:prstDash val="solid"/>
+          </a:ln>
+        </p:spPr>
+      </p:sp>
+      <p:sp>
+        <p:nvSpPr>
+          <p:cNvPr id="15" name="label-182"/>
+          <p:cNvSpPr txBox="1"/>
+          <p:nvPr/>
+        </p:nvSpPr>
+        <p:spPr>
+          <a:xfrm>
+            <a:off x="5696959" y="4142232"/>
+            <a:ext cx="457200" cy="274320"/>
+          </a:xfrm>
+          <a:prstGeom prst="rect">
+            <a:avLst/>
+          </a:prstGeom>
+          <a:noFill/>
+          <a:ln/>
+        </p:spPr>
+        <p:txBody>
+          <a:bodyPr wrap="square" lIns="0" tIns="0" rIns="0" bIns="0" rtlCol="0" anchor="ctr"/>
+          <a:lstStyle/>
+          <a:p>
+            <a:pPr algn="l" indent="0" marL="0">
+              <a:buNone/>
+            </a:pPr>
+            <a:r>
+              <a:rPr lang="en-US" sz="1050" b="1" dirty="0">
+                <a:solidFill>
+                  <a:schemeClr val="tx1"/>
+                </a:solidFill>
+              </a:rPr>
+              <a:t>0.11</a:t>
+            </a:r>
+            <a:endParaRPr lang="en-US" sz="1050" dirty="0"/>
+          </a:p>
+        </p:txBody>
+      </p:sp>
+      <p:sp>
+        <p:nvSpPr>
+          <p:cNvPr id="16" name="bar-183"/>
+          <p:cNvSpPr/>
+          <p:nvPr/>
+        </p:nvSpPr>
+        <p:spPr>
+          <a:xfrm>
+            <a:off x="4937760" y="4526280"/>
+            <a:ext cx="261610" cy="201168"/>
+          </a:xfrm>
+          <a:prstGeom prst="rect">
+            <a:avLst/>
+          </a:prstGeom>
+          <a:solidFill>
+            <a:srgbClr val="8FC9C2"/>
+          </a:solidFill>
+          <a:ln w="12700">
+            <a:solidFill>
+              <a:srgbClr val="8FC9C2"/>
+            </a:solidFill>
+            <a:prstDash val="solid"/>
+          </a:ln>
+        </p:spPr>
+      </p:sp>
+      <p:sp>
+        <p:nvSpPr>
+          <p:cNvPr id="17" name="label-184"/>
+          <p:cNvSpPr txBox="1"/>
+          <p:nvPr/>
+        </p:nvSpPr>
+        <p:spPr>
+          <a:xfrm>
+            <a:off x="5254234" y="4489704"/>
+            <a:ext cx="457200" cy="274320"/>
+          </a:xfrm>
+          <a:prstGeom prst="rect">
+            <a:avLst/>
+          </a:prstGeom>
+          <a:noFill/>
+          <a:ln/>
+        </p:spPr>
+        <p:txBody>
+          <a:bodyPr wrap="square" lIns="0" tIns="0" rIns="0" bIns="0" rtlCol="0" anchor="ctr"/>
+          <a:lstStyle/>
+          <a:p>
+            <a:pPr algn="l" indent="0" marL="0">
+              <a:buNone/>
+            </a:pPr>
+            <a:r>
+              <a:rPr lang="en-US" sz="1050" b="1" dirty="0">
+                <a:solidFill>
+                  <a:schemeClr val="tx1"/>
+                </a:solidFill>
+              </a:rPr>
+              <a:t>0.04</a:t>
+            </a:r>
+            <a:endParaRPr lang="en-US" sz="1050" dirty="0"/>
+          </a:p>
+        </p:txBody>
+      </p:sp>
+      <p:sp>
+        <p:nvSpPr>
+          <p:cNvPr id="18" name="label-185"/>
+          <p:cNvSpPr txBox="1"/>
+          <p:nvPr/>
+        </p:nvSpPr>
+        <p:spPr>
+          <a:xfrm>
+            <a:off x="5656570" y="4489704"/>
+            <a:ext cx="1521470" cy="274320"/>
+          </a:xfrm>
+          <a:prstGeom prst="rect">
+            <a:avLst/>
+          </a:prstGeom>
+          <a:noFill/>
+          <a:ln/>
+        </p:spPr>
+        <p:txBody>
+          <a:bodyPr wrap="square" lIns="0" tIns="0" rIns="0" bIns="0" rtlCol="0" anchor="ctr"/>
+          <a:lstStyle/>
+          <a:p>
+            <a:pPr algn="l" indent="0" marL="0">
+              <a:buNone/>
+            </a:pPr>
+            <a:r>
+              <a:rPr lang="en-US" sz="1000" dirty="0">
+                <a:solidFill>
+                  <a:schemeClr val="accent6"/>
+                </a:solidFill>
+              </a:rPr>
+              <a:t>像“量体温”</a:t>
+            </a:r>
+            <a:endParaRPr lang="en-US" sz="1000" dirty="0"/>
+          </a:p>
+        </p:txBody>
+      </p:sp>
+      <p:sp>
+        <p:nvSpPr>
+          <p:cNvPr id="19" name="label-186"/>
+          <p:cNvSpPr txBox="1"/>
+          <p:nvPr/>
+        </p:nvSpPr>
+        <p:spPr>
+          <a:xfrm>
+            <a:off x="822960" y="4956048"/>
+            <a:ext cx="6355080" cy="256032"/>
+          </a:xfrm>
+          <a:prstGeom prst="rect">
+            <a:avLst/>
+          </a:prstGeom>
+          <a:noFill/>
+          <a:ln/>
+        </p:spPr>
+        <p:txBody>
           <a:bodyPr wrap="square" lIns="0" tIns="0" rIns="0" bIns="0" rtlCol="0" anchor="t"/>
           <a:lstStyle/>
           <a:p>
@@ -11966,27 +15430,27 @@
               <a:buNone/>
             </a:pPr>
             <a:r>
-              <a:rPr lang="en-US" sz="1050" dirty="0">
-                <a:solidFill>
-                  <a:schemeClr val="tx1"/>
-                </a:solidFill>
-              </a:rPr>
-              <a:t>UniProt 最低：无论假设对错，靶点几乎都能查到序列，查了也分不出对错。</a:t>
-            </a:r>
-            <a:endParaRPr lang="en-US" sz="1050" dirty="0"/>
-          </a:p>
-        </p:txBody>
-      </p:sp>
-      <p:sp>
-        <p:nvSpPr>
-          <p:cNvPr id="18" name="badge-153"/>
+              <a:rPr lang="en-US" sz="1150" b="1" dirty="0">
+                <a:solidFill>
+                  <a:schemeClr val="tx2"/>
+                </a:solidFill>
+              </a:rPr>
+              <a:t>实际过程（分歧度：0 = 已有定论，1 = 五五开）</a:t>
+            </a:r>
+            <a:endParaRPr lang="en-US" sz="1150" dirty="0"/>
+          </a:p>
+        </p:txBody>
+      </p:sp>
+      <p:sp>
+        <p:nvSpPr>
+          <p:cNvPr id="20" name="badge-187"/>
           <p:cNvSpPr/>
           <p:nvPr/>
         </p:nvSpPr>
         <p:spPr>
           <a:xfrm>
-            <a:off x="4389120" y="4791456"/>
-            <a:ext cx="292608" cy="292608"/>
+            <a:off x="822960" y="5276088"/>
+            <a:ext cx="274320" cy="274320"/>
           </a:xfrm>
           <a:prstGeom prst="ellipse">
             <a:avLst/>
@@ -12021,14 +15485,14 @@
       </p:sp>
       <p:sp>
         <p:nvSpPr>
-          <p:cNvPr id="19" name="label-154"/>
+          <p:cNvPr id="21" name="label-188"/>
           <p:cNvSpPr txBox="1"/>
           <p:nvPr/>
         </p:nvSpPr>
         <p:spPr>
           <a:xfrm>
-            <a:off x="4782312" y="4736592"/>
-            <a:ext cx="2331720" cy="237744"/>
+            <a:off x="1207008" y="5248656"/>
+            <a:ext cx="3611880" cy="329184"/>
           </a:xfrm>
           <a:prstGeom prst="rect">
             <a:avLst/>
@@ -12037,34 +15501,34 @@
           <a:ln/>
         </p:spPr>
         <p:txBody>
-          <a:bodyPr wrap="square" lIns="0" tIns="0" rIns="0" bIns="0" rtlCol="0" anchor="t"/>
+          <a:bodyPr wrap="square" lIns="0" tIns="0" rIns="0" bIns="0" rtlCol="0" anchor="ctr"/>
           <a:lstStyle/>
           <a:p>
             <a:pPr algn="l" indent="0" marL="0">
               <a:buNone/>
             </a:pPr>
             <a:r>
-              <a:rPr lang="en-US" sz="1100" b="1" dirty="0">
-                <a:solidFill>
-                  <a:schemeClr val="tx2"/>
-                </a:solidFill>
-              </a:rPr>
-              <a:t>ChEMBL 查到强活性</a:t>
-            </a:r>
-            <a:endParaRPr lang="en-US" sz="1100" dirty="0"/>
-          </a:p>
-        </p:txBody>
-      </p:sp>
-      <p:sp>
-        <p:nvSpPr>
-          <p:cNvPr id="20" name="label-155"/>
+              <a:rPr lang="en-US" sz="1050" dirty="0">
+                <a:solidFill>
+                  <a:schemeClr val="tx1"/>
+                </a:solidFill>
+              </a:rPr>
+              <a:t>查到强活性：司美格鲁肽对 GLP-1 受体亲和力 0.38 nM</a:t>
+            </a:r>
+            <a:endParaRPr lang="en-US" sz="1050" dirty="0"/>
+          </a:p>
+        </p:txBody>
+      </p:sp>
+      <p:sp>
+        <p:nvSpPr>
+          <p:cNvPr id="22" name="label-189"/>
           <p:cNvSpPr txBox="1"/>
           <p:nvPr/>
         </p:nvSpPr>
         <p:spPr>
           <a:xfrm>
-            <a:off x="4782312" y="4974336"/>
-            <a:ext cx="2331720" cy="237744"/>
+            <a:off x="4846320" y="5248656"/>
+            <a:ext cx="2331720" cy="329184"/>
           </a:xfrm>
           <a:prstGeom prst="rect">
             <a:avLst/>
@@ -12073,16 +15537,16 @@
           <a:ln/>
         </p:spPr>
         <p:txBody>
-          <a:bodyPr wrap="square" lIns="0" tIns="0" rIns="0" bIns="0" rtlCol="0" anchor="t"/>
+          <a:bodyPr wrap="square" lIns="0" tIns="0" rIns="0" bIns="0" rtlCol="0" anchor="ctr"/>
           <a:lstStyle/>
           <a:p>
             <a:pPr algn="l" indent="0" marL="0">
               <a:buNone/>
             </a:pPr>
             <a:r>
-              <a:rPr lang="en-US" sz="1050" dirty="0">
-                <a:solidFill>
-                  <a:schemeClr val="tx1"/>
+              <a:rPr lang="en-US" sz="1050" b="1" dirty="0">
+                <a:solidFill>
+                  <a:schemeClr val="accent1"/>
                 </a:solidFill>
               </a:rPr>
               <a:t>支持概率 0.50 → 0.86</a:t>
@@ -12093,14 +15557,14 @@
       </p:sp>
       <p:sp>
         <p:nvSpPr>
-          <p:cNvPr id="21" name="badge-156"/>
+          <p:cNvPr id="23" name="badge-190"/>
           <p:cNvSpPr/>
           <p:nvPr/>
         </p:nvSpPr>
         <p:spPr>
           <a:xfrm>
-            <a:off x="4389120" y="5340096"/>
-            <a:ext cx="292608" cy="292608"/>
+            <a:off x="822960" y="5660136"/>
+            <a:ext cx="274320" cy="274320"/>
           </a:xfrm>
           <a:prstGeom prst="ellipse">
             <a:avLst/>
@@ -12135,14 +15599,14 @@
       </p:sp>
       <p:sp>
         <p:nvSpPr>
-          <p:cNvPr id="22" name="label-157"/>
+          <p:cNvPr id="24" name="label-191"/>
           <p:cNvSpPr txBox="1"/>
           <p:nvPr/>
         </p:nvSpPr>
         <p:spPr>
           <a:xfrm>
-            <a:off x="4782312" y="5285232"/>
-            <a:ext cx="2331720" cy="237744"/>
+            <a:off x="1207008" y="5632704"/>
+            <a:ext cx="3611880" cy="329184"/>
           </a:xfrm>
           <a:prstGeom prst="rect">
             <a:avLst/>
@@ -12151,34 +15615,34 @@
           <a:ln/>
         </p:spPr>
         <p:txBody>
-          <a:bodyPr wrap="square" lIns="0" tIns="0" rIns="0" bIns="0" rtlCol="0" anchor="t"/>
+          <a:bodyPr wrap="square" lIns="0" tIns="0" rIns="0" bIns="0" rtlCol="0" anchor="ctr"/>
           <a:lstStyle/>
           <a:p>
             <a:pPr algn="l" indent="0" marL="0">
               <a:buNone/>
             </a:pPr>
             <a:r>
-              <a:rPr lang="en-US" sz="1100" b="1" dirty="0">
-                <a:solidFill>
-                  <a:schemeClr val="tx2"/>
-                </a:solidFill>
-              </a:rPr>
-              <a:t>再查临床试验：有登记</a:t>
-            </a:r>
-            <a:endParaRPr lang="en-US" sz="1100" dirty="0"/>
-          </a:p>
-        </p:txBody>
-      </p:sp>
-      <p:sp>
-        <p:nvSpPr>
-          <p:cNvPr id="23" name="label-158"/>
+              <a:rPr lang="en-US" sz="1050" dirty="0">
+                <a:solidFill>
+                  <a:schemeClr val="tx1"/>
+                </a:solidFill>
+              </a:rPr>
+              <a:t>再查到三期试验 STEP 1（NCT03548935）</a:t>
+            </a:r>
+            <a:endParaRPr lang="en-US" sz="1050" dirty="0"/>
+          </a:p>
+        </p:txBody>
+      </p:sp>
+      <p:sp>
+        <p:nvSpPr>
+          <p:cNvPr id="25" name="label-192"/>
           <p:cNvSpPr txBox="1"/>
           <p:nvPr/>
         </p:nvSpPr>
         <p:spPr>
           <a:xfrm>
-            <a:off x="4782312" y="5522976"/>
-            <a:ext cx="2331720" cy="237744"/>
+            <a:off x="4846320" y="5632704"/>
+            <a:ext cx="2331720" cy="329184"/>
           </a:xfrm>
           <a:prstGeom prst="rect">
             <a:avLst/>
@@ -12187,19 +15651,19 @@
           <a:ln/>
         </p:spPr>
         <p:txBody>
-          <a:bodyPr wrap="square" lIns="0" tIns="0" rIns="0" bIns="0" rtlCol="0" anchor="t"/>
+          <a:bodyPr wrap="square" lIns="0" tIns="0" rIns="0" bIns="0" rtlCol="0" anchor="ctr"/>
           <a:lstStyle/>
           <a:p>
             <a:pPr algn="l" indent="0" marL="0">
               <a:buNone/>
             </a:pPr>
             <a:r>
-              <a:rPr lang="en-US" sz="1050" dirty="0">
-                <a:solidFill>
-                  <a:schemeClr val="tx1"/>
-                </a:solidFill>
-              </a:rPr>
-              <a:t>0.86 → 0.95，分歧度降至 0.28</a:t>
+              <a:rPr lang="en-US" sz="1050" b="1" dirty="0">
+                <a:solidFill>
+                  <a:schemeClr val="accent1"/>
+                </a:solidFill>
+              </a:rPr>
+              <a:t>0.86 → 0.95，分歧度 1.0 → 0.28</a:t>
             </a:r>
             <a:endParaRPr lang="en-US" sz="1050" dirty="0"/>
           </a:p>
@@ -12207,7 +15671,7 @@
       </p:sp>
       <p:sp>
         <p:nvSpPr>
-          <p:cNvPr id="24" name="card-159"/>
+          <p:cNvPr id="26" name="card-193"/>
           <p:cNvSpPr/>
           <p:nvPr/>
         </p:nvSpPr>
@@ -12234,7 +15698,7 @@
       </p:sp>
       <p:sp>
         <p:nvSpPr>
-          <p:cNvPr id="25" name="badge-160"/>
+          <p:cNvPr id="27" name="badge-194"/>
           <p:cNvSpPr/>
           <p:nvPr/>
         </p:nvSpPr>
@@ -12276,7 +15740,7 @@
       </p:sp>
       <p:sp>
         <p:nvSpPr>
-          <p:cNvPr id="26" name="label-161"/>
+          <p:cNvPr id="28" name="label-195"/>
           <p:cNvSpPr txBox="1"/>
           <p:nvPr/>
         </p:nvSpPr>
@@ -12312,7 +15776,7 @@
       </p:sp>
       <p:sp>
         <p:nvSpPr>
-          <p:cNvPr id="27" name="label-162"/>
+          <p:cNvPr id="29" name="label-196"/>
           <p:cNvSpPr txBox="1"/>
           <p:nvPr/>
         </p:nvSpPr>
@@ -12348,7 +15812,7 @@
       </p:sp>
       <p:sp>
         <p:nvSpPr>
-          <p:cNvPr id="28" name="label-163"/>
+          <p:cNvPr id="30" name="label-197"/>
           <p:cNvSpPr txBox="1"/>
           <p:nvPr/>
         </p:nvSpPr>
@@ -12384,7 +15848,7 @@
       </p:sp>
       <p:graphicFrame>
         <p:nvGraphicFramePr>
-          <p:cNvPr id="8" name="table-164"/>
+          <p:cNvPr id="17" name="table-198"/>
           <p:cNvGraphicFramePr>
             <a:graphicFrameLocks noGrp="1"/>
           </p:cNvGraphicFramePr>
@@ -13445,7 +16909,7 @@
       </p:graphicFrame>
       <p:sp>
         <p:nvSpPr>
-          <p:cNvPr id="30" name="label-165"/>
+          <p:cNvPr id="32" name="label-199"/>
           <p:cNvSpPr txBox="1"/>
           <p:nvPr/>
         </p:nvSpPr>
@@ -13481,7 +16945,7 @@
       </p:sp>
       <p:sp>
         <p:nvSpPr>
-          <p:cNvPr id="31" name="label-166"/>
+          <p:cNvPr id="33" name="label-200"/>
           <p:cNvSpPr txBox="1"/>
           <p:nvPr/>
         </p:nvSpPr>
@@ -13512,1334 +16976,6 @@
               <a:t>说明：结果概率表目前为人工设定的先验，正式实验前需用标注数据估计（已提供估计函数）；专家意见作为起点的接口已实现，目前每个假设分支从 50 / 50 起步。</a:t>
             </a:r>
             <a:endParaRPr lang="en-US" sz="1000" dirty="0"/>
-          </a:p>
-        </p:txBody>
-      </p:sp>
-      <p:sp>
-        <p:nvSpPr>
-          <p:cNvPr id="25" name="Slide Number Placeholder 0"/>
-          <p:cNvSpPr>
-            <a:spLocks noGrp="1"/>
-          </p:cNvSpPr>
-          <p:nvPr>
-            <p:ph type="sldNum" sz="quarter" idx="4294967295"/>
-          </p:nvPr>
-        </p:nvSpPr>
-        <p:spPr>
-          <a:xfrm>
-            <a:off x="11094415" y="6446520"/>
-            <a:ext cx="548640" cy="274320"/>
-          </a:xfrm>
-          <a:prstGeom prst="rect">
-            <a:avLst/>
-          </a:prstGeom>
-          <a:extLst>
-            <a:ext uri="{C572A759-6A51-4108-AA02-DFA0A04FC94B}">
-              <ma14:wrappingTextBoxFlag xmlns:ma14="http://schemas.microsoft.com/office/mac/drawingml/2011/main" val="0"/>
-            </a:ext>
-          </a:extLst>
-        </p:spPr>
-        <p:txBody>
-          <a:bodyPr/>
-          <a:lstStyle>
-            <a:lvl1pPr>
-              <a:defRPr sz="1000">
-                <a:solidFill>
-                  <a:schemeClr val="accent6"/>
-                </a:solidFill>
-              </a:defRPr>
-            </a:lvl1pPr>
-          </a:lstStyle>
-          <a:p>
-            <a:pPr algn="r"/>
-            <a:fld id="{F7021451-1387-4CA6-816F-3879F97B5CBC}" type="slidenum">
-              <a:rPr b="0" lang="en-US"/>
-              <a:t>7</a:t>
-            </a:fld>
-            <a:endParaRPr lang="en-US"/>
-          </a:p>
-        </p:txBody>
-      </p:sp>
-    </p:spTree>
-  </p:cSld>
-  <p:clrMapOvr>
-    <a:masterClrMapping/>
-  </p:clrMapOvr>
-</p:sld>
-</file>
-
-<file path=ppt/slides/slide8.xml><?xml version="1.0" encoding="utf-8"?>
-<p:sld xmlns:a="http://schemas.openxmlformats.org/drawingml/2006/main" xmlns:r="http://schemas.openxmlformats.org/officeDocument/2006/relationships" xmlns:p="http://schemas.openxmlformats.org/presentationml/2006/main">
-  <p:cSld name="Slide 8">
-    <p:spTree>
-      <p:nvGrpSpPr>
-        <p:cNvPr id="1" name=""/>
-        <p:cNvGrpSpPr/>
-        <p:nvPr/>
-      </p:nvGrpSpPr>
-      <p:grpSpPr>
-        <a:xfrm>
-          <a:off x="0" y="0"/>
-          <a:ext cx="0" cy="0"/>
-          <a:chOff x="0" y="0"/>
-          <a:chExt cx="0" cy="0"/>
-        </a:xfrm>
-      </p:grpSpPr>
-      <p:sp>
-        <p:nvSpPr>
-          <p:cNvPr id="2" name="Text 0"/>
-          <p:cNvSpPr/>
-          <p:nvPr>
-            <p:ph idx="100" type="title" hasCustomPrompt="1"/>
-          </p:nvPr>
-        </p:nvSpPr>
-        <p:spPr>
-          <a:xfrm>
-            <a:off x="548640" y="320040"/>
-            <a:ext cx="11094415" cy="640080"/>
-          </a:xfrm>
-          <a:prstGeom prst="rect">
-            <a:avLst/>
-          </a:prstGeom>
-          <a:noFill/>
-          <a:ln/>
-        </p:spPr>
-        <p:txBody>
-          <a:bodyPr wrap="square" lIns="0" tIns="0" rIns="0" bIns="0" rtlCol="0" anchor="ctr"/>
-          <a:lstStyle/>
-          <a:p>
-            <a:pPr algn="l" indent="0" marL="0">
-              <a:buNone/>
-            </a:pPr>
-            <a:r>
-              <a:rPr lang="en-US" sz="2800" b="1" dirty="0">
-                <a:solidFill>
-                  <a:schemeClr val="tx2"/>
-                </a:solidFill>
-              </a:rPr>
-              <a:t>支撑设计：多智能体协作与本地运行时</a:t>
-            </a:r>
-            <a:endParaRPr lang="en-US" sz="2800" dirty="0"/>
-          </a:p>
-        </p:txBody>
-      </p:sp>
-      <p:sp>
-        <p:nvSpPr>
-          <p:cNvPr id="3" name="Text 0"/>
-          <p:cNvSpPr/>
-          <p:nvPr>
-            <p:ph idx="101" type="body" hasCustomPrompt="1"/>
-          </p:nvPr>
-        </p:nvSpPr>
-        <p:spPr>
-          <a:xfrm>
-            <a:off x="548640" y="960120"/>
-            <a:ext cx="11094415" cy="411480"/>
-          </a:xfrm>
-          <a:prstGeom prst="rect">
-            <a:avLst/>
-          </a:prstGeom>
-          <a:noFill/>
-          <a:ln/>
-        </p:spPr>
-        <p:txBody>
-          <a:bodyPr wrap="square" lIns="0" tIns="0" rIns="0" bIns="0" rtlCol="0" anchor="ctr"/>
-          <a:lstStyle/>
-          <a:p>
-            <a:pPr algn="l" indent="0" marL="0">
-              <a:buNone/>
-            </a:pPr>
-            <a:r>
-              <a:rPr lang="en-US" sz="1500" dirty="0">
-                <a:solidFill>
-                  <a:schemeClr val="accent6"/>
-                </a:solidFill>
-              </a:rPr>
-              <a:t>B 类管“谁来做、谁把关”，C 类管“在哪里跑、用谁的额度”；两者在 2.x 已具备，3.0 继续完善。</a:t>
-            </a:r>
-            <a:endParaRPr lang="en-US" sz="1500" dirty="0"/>
-          </a:p>
-        </p:txBody>
-      </p:sp>
-      <p:sp>
-        <p:nvSpPr>
-          <p:cNvPr id="4" name="card-167"/>
-          <p:cNvSpPr/>
-          <p:nvPr/>
-        </p:nvSpPr>
-        <p:spPr>
-          <a:xfrm>
-            <a:off x="548640" y="1600200"/>
-            <a:ext cx="5410048" cy="4572000"/>
-          </a:xfrm>
-          <a:prstGeom prst="roundRect">
-            <a:avLst>
-              <a:gd name="adj" fmla="val 2000"/>
-            </a:avLst>
-          </a:prstGeom>
-          <a:solidFill>
-            <a:schemeClr val="bg2"/>
-          </a:solidFill>
-          <a:ln w="12700">
-            <a:solidFill>
-              <a:schemeClr val="bg2"/>
-            </a:solidFill>
-            <a:prstDash val="solid"/>
-          </a:ln>
-        </p:spPr>
-      </p:sp>
-      <p:sp>
-        <p:nvSpPr>
-          <p:cNvPr id="5" name="tag-168"/>
-          <p:cNvSpPr/>
-          <p:nvPr/>
-        </p:nvSpPr>
-        <p:spPr>
-          <a:xfrm>
-            <a:off x="822960" y="1810512"/>
-            <a:ext cx="411480" cy="411480"/>
-          </a:xfrm>
-          <a:prstGeom prst="roundRect">
-            <a:avLst>
-              <a:gd name="adj" fmla="val 13333"/>
-            </a:avLst>
-          </a:prstGeom>
-          <a:solidFill>
-            <a:schemeClr val="accent2"/>
-          </a:solidFill>
-          <a:ln>
-            <a:solidFill>
-              <a:schemeClr val="accent2"/>
-            </a:solidFill>
-          </a:ln>
-        </p:spPr>
-        <p:txBody>
-          <a:bodyPr wrap="square" lIns="0" tIns="0" rIns="0" bIns="0" rtlCol="0" anchor="ctr"/>
-          <a:lstStyle/>
-          <a:p>
-            <a:pPr algn="ctr" indent="0" marL="0">
-              <a:buNone/>
-            </a:pPr>
-            <a:r>
-              <a:rPr lang="en-US" sz="1600" b="1" dirty="0">
-                <a:solidFill>
-                  <a:schemeClr val="bg1"/>
-                </a:solidFill>
-              </a:rPr>
-              <a:t>B</a:t>
-            </a:r>
-            <a:endParaRPr lang="en-US" sz="1600" dirty="0"/>
-          </a:p>
-        </p:txBody>
-      </p:sp>
-      <p:sp>
-        <p:nvSpPr>
-          <p:cNvPr id="6" name="label-169"/>
-          <p:cNvSpPr txBox="1"/>
-          <p:nvPr/>
-        </p:nvSpPr>
-        <p:spPr>
-          <a:xfrm>
-            <a:off x="1371600" y="1810512"/>
-            <a:ext cx="4312768" cy="411480"/>
-          </a:xfrm>
-          <a:prstGeom prst="rect">
-            <a:avLst/>
-          </a:prstGeom>
-          <a:noFill/>
-          <a:ln/>
-        </p:spPr>
-        <p:txBody>
-          <a:bodyPr wrap="square" lIns="0" tIns="0" rIns="0" bIns="0" rtlCol="0" anchor="ctr"/>
-          <a:lstStyle/>
-          <a:p>
-            <a:pPr algn="l" indent="0" marL="0">
-              <a:buNone/>
-            </a:pPr>
-            <a:r>
-              <a:rPr lang="en-US" sz="1700" b="1" dirty="0">
-                <a:solidFill>
-                  <a:schemeClr val="tx2"/>
-                </a:solidFill>
-              </a:rPr>
-              <a:t>多智能体协作：像课题组一样分工</a:t>
-            </a:r>
-            <a:endParaRPr lang="en-US" sz="1700" dirty="0"/>
-          </a:p>
-        </p:txBody>
-      </p:sp>
-      <p:sp>
-        <p:nvSpPr>
-          <p:cNvPr id="7" name="box-170"/>
-          <p:cNvSpPr/>
-          <p:nvPr/>
-        </p:nvSpPr>
-        <p:spPr>
-          <a:xfrm>
-            <a:off x="822960" y="2514600"/>
-            <a:ext cx="811347" cy="566928"/>
-          </a:xfrm>
-          <a:prstGeom prst="roundRect">
-            <a:avLst>
-              <a:gd name="adj" fmla="val 12903"/>
-            </a:avLst>
-          </a:prstGeom>
-          <a:solidFill>
-            <a:schemeClr val="bg1"/>
-          </a:solidFill>
-          <a:ln w="12700">
-            <a:solidFill>
-              <a:srgbClr val="D5DCE4"/>
-            </a:solidFill>
-          </a:ln>
-        </p:spPr>
-        <p:txBody>
-          <a:bodyPr wrap="square" lIns="762" tIns="762" rIns="762" bIns="762" rtlCol="0" anchor="ctr"/>
-          <a:lstStyle/>
-          <a:p>
-            <a:pPr algn="ctr" indent="0" marL="0">
-              <a:buNone/>
-            </a:pPr>
-            <a:r>
-              <a:rPr lang="en-US" sz="1250" b="1" dirty="0">
-                <a:solidFill>
-                  <a:schemeClr val="tx2"/>
-                </a:solidFill>
-              </a:rPr>
-              <a:t>研究课题</a:t>
-            </a:r>
-            <a:endParaRPr lang="en-US" sz="1250" dirty="0"/>
-          </a:p>
-        </p:txBody>
-      </p:sp>
-      <p:sp>
-        <p:nvSpPr>
-          <p:cNvPr id="8" name="arrow-171"/>
-          <p:cNvSpPr/>
-          <p:nvPr/>
-        </p:nvSpPr>
-        <p:spPr>
-          <a:xfrm>
-            <a:off x="1652595" y="2798064"/>
-            <a:ext cx="164592" cy="0"/>
-          </a:xfrm>
-          <a:prstGeom prst="line">
-            <a:avLst/>
-          </a:prstGeom>
-          <a:noFill/>
-          <a:ln w="15875">
-            <a:solidFill>
-              <a:schemeClr val="accent2"/>
-            </a:solidFill>
-            <a:prstDash val="solid"/>
-            <a:tailEnd type="triangle"/>
-          </a:ln>
-        </p:spPr>
-      </p:sp>
-      <p:sp>
-        <p:nvSpPr>
-          <p:cNvPr id="9" name="box-172"/>
-          <p:cNvSpPr/>
-          <p:nvPr/>
-        </p:nvSpPr>
-        <p:spPr>
-          <a:xfrm>
-            <a:off x="1835475" y="2514600"/>
-            <a:ext cx="811347" cy="566928"/>
-          </a:xfrm>
-          <a:prstGeom prst="roundRect">
-            <a:avLst>
-              <a:gd name="adj" fmla="val 12903"/>
-            </a:avLst>
-          </a:prstGeom>
-          <a:solidFill>
-            <a:schemeClr val="bg1"/>
-          </a:solidFill>
-          <a:ln w="12700">
-            <a:solidFill>
-              <a:srgbClr val="D5DCE4"/>
-            </a:solidFill>
-          </a:ln>
-        </p:spPr>
-        <p:txBody>
-          <a:bodyPr wrap="square" lIns="762" tIns="762" rIns="762" bIns="762" rtlCol="0" anchor="ctr"/>
-          <a:lstStyle/>
-          <a:p>
-            <a:pPr algn="ctr" indent="0" marL="0">
-              <a:buNone/>
-            </a:pPr>
-            <a:r>
-              <a:rPr lang="en-US" sz="1250" b="1" dirty="0">
-                <a:solidFill>
-                  <a:schemeClr val="tx2"/>
-                </a:solidFill>
-              </a:rPr>
-              <a:t>队长规划</a:t>
-            </a:r>
-            <a:endParaRPr lang="en-US" sz="1250" dirty="0"/>
-          </a:p>
-        </p:txBody>
-      </p:sp>
-      <p:sp>
-        <p:nvSpPr>
-          <p:cNvPr id="10" name="arrow-173"/>
-          <p:cNvSpPr/>
-          <p:nvPr/>
-        </p:nvSpPr>
-        <p:spPr>
-          <a:xfrm>
-            <a:off x="2665110" y="2798064"/>
-            <a:ext cx="164592" cy="0"/>
-          </a:xfrm>
-          <a:prstGeom prst="line">
-            <a:avLst/>
-          </a:prstGeom>
-          <a:noFill/>
-          <a:ln w="15875">
-            <a:solidFill>
-              <a:schemeClr val="accent2"/>
-            </a:solidFill>
-            <a:prstDash val="solid"/>
-            <a:tailEnd type="triangle"/>
-          </a:ln>
-        </p:spPr>
-      </p:sp>
-      <p:sp>
-        <p:nvSpPr>
-          <p:cNvPr id="11" name="box-174"/>
-          <p:cNvSpPr/>
-          <p:nvPr/>
-        </p:nvSpPr>
-        <p:spPr>
-          <a:xfrm>
-            <a:off x="2847990" y="2514600"/>
-            <a:ext cx="811347" cy="566928"/>
-          </a:xfrm>
-          <a:prstGeom prst="roundRect">
-            <a:avLst>
-              <a:gd name="adj" fmla="val 12903"/>
-            </a:avLst>
-          </a:prstGeom>
-          <a:solidFill>
-            <a:schemeClr val="bg1"/>
-          </a:solidFill>
-          <a:ln w="12700">
-            <a:solidFill>
-              <a:srgbClr val="D5DCE4"/>
-            </a:solidFill>
-          </a:ln>
-        </p:spPr>
-        <p:txBody>
-          <a:bodyPr wrap="square" lIns="762" tIns="762" rIns="762" bIns="762" rtlCol="0" anchor="ctr"/>
-          <a:lstStyle/>
-          <a:p>
-            <a:pPr algn="ctr" indent="0" marL="0">
-              <a:buNone/>
-            </a:pPr>
-            <a:r>
-              <a:rPr lang="en-US" sz="1250" b="1" dirty="0">
-                <a:solidFill>
-                  <a:schemeClr val="tx2"/>
-                </a:solidFill>
-              </a:rPr>
-              <a:t>成员并行</a:t>
-            </a:r>
-            <a:endParaRPr lang="en-US" sz="1250" dirty="0"/>
-          </a:p>
-        </p:txBody>
-      </p:sp>
-      <p:sp>
-        <p:nvSpPr>
-          <p:cNvPr id="12" name="arrow-175"/>
-          <p:cNvSpPr/>
-          <p:nvPr/>
-        </p:nvSpPr>
-        <p:spPr>
-          <a:xfrm>
-            <a:off x="3677625" y="2798064"/>
-            <a:ext cx="164592" cy="0"/>
-          </a:xfrm>
-          <a:prstGeom prst="line">
-            <a:avLst/>
-          </a:prstGeom>
-          <a:noFill/>
-          <a:ln w="15875">
-            <a:solidFill>
-              <a:schemeClr val="accent2"/>
-            </a:solidFill>
-            <a:prstDash val="solid"/>
-            <a:tailEnd type="triangle"/>
-          </a:ln>
-        </p:spPr>
-      </p:sp>
-      <p:sp>
-        <p:nvSpPr>
-          <p:cNvPr id="13" name="box-176"/>
-          <p:cNvSpPr/>
-          <p:nvPr/>
-        </p:nvSpPr>
-        <p:spPr>
-          <a:xfrm>
-            <a:off x="3860505" y="2514600"/>
-            <a:ext cx="811347" cy="566928"/>
-          </a:xfrm>
-          <a:prstGeom prst="roundRect">
-            <a:avLst>
-              <a:gd name="adj" fmla="val 12903"/>
-            </a:avLst>
-          </a:prstGeom>
-          <a:solidFill>
-            <a:srgbClr val="E3F3F1"/>
-          </a:solidFill>
-          <a:ln w="12700">
-            <a:solidFill>
-              <a:srgbClr val="0E8A7E"/>
-            </a:solidFill>
-          </a:ln>
-        </p:spPr>
-        <p:txBody>
-          <a:bodyPr wrap="square" lIns="762" tIns="762" rIns="762" bIns="762" rtlCol="0" anchor="ctr"/>
-          <a:lstStyle/>
-          <a:p>
-            <a:pPr algn="ctr" indent="0" marL="0">
-              <a:buNone/>
-            </a:pPr>
-            <a:r>
-              <a:rPr lang="en-US" sz="1250" b="1" dirty="0">
-                <a:solidFill>
-                  <a:schemeClr val="tx2"/>
-                </a:solidFill>
-              </a:rPr>
-              <a:t>质量门</a:t>
-            </a:r>
-            <a:endParaRPr lang="en-US" sz="1250" dirty="0"/>
-          </a:p>
-        </p:txBody>
-      </p:sp>
-      <p:sp>
-        <p:nvSpPr>
-          <p:cNvPr id="14" name="arrow-177"/>
-          <p:cNvSpPr/>
-          <p:nvPr/>
-        </p:nvSpPr>
-        <p:spPr>
-          <a:xfrm>
-            <a:off x="4690140" y="2798064"/>
-            <a:ext cx="164592" cy="0"/>
-          </a:xfrm>
-          <a:prstGeom prst="line">
-            <a:avLst/>
-          </a:prstGeom>
-          <a:noFill/>
-          <a:ln w="15875">
-            <a:solidFill>
-              <a:schemeClr val="accent2"/>
-            </a:solidFill>
-            <a:prstDash val="solid"/>
-            <a:tailEnd type="triangle"/>
-          </a:ln>
-        </p:spPr>
-      </p:sp>
-      <p:sp>
-        <p:nvSpPr>
-          <p:cNvPr id="15" name="box-178"/>
-          <p:cNvSpPr/>
-          <p:nvPr/>
-        </p:nvSpPr>
-        <p:spPr>
-          <a:xfrm>
-            <a:off x="4873020" y="2514600"/>
-            <a:ext cx="811347" cy="566928"/>
-          </a:xfrm>
-          <a:prstGeom prst="roundRect">
-            <a:avLst>
-              <a:gd name="adj" fmla="val 12903"/>
-            </a:avLst>
-          </a:prstGeom>
-          <a:solidFill>
-            <a:schemeClr val="bg1"/>
-          </a:solidFill>
-          <a:ln w="12700">
-            <a:solidFill>
-              <a:srgbClr val="D5DCE4"/>
-            </a:solidFill>
-          </a:ln>
-        </p:spPr>
-        <p:txBody>
-          <a:bodyPr wrap="square" lIns="762" tIns="762" rIns="762" bIns="762" rtlCol="0" anchor="ctr"/>
-          <a:lstStyle/>
-          <a:p>
-            <a:pPr algn="ctr" indent="0" marL="0">
-              <a:buNone/>
-            </a:pPr>
-            <a:r>
-              <a:rPr lang="en-US" sz="1250" b="1" dirty="0">
-                <a:solidFill>
-                  <a:schemeClr val="tx2"/>
-                </a:solidFill>
-              </a:rPr>
-              <a:t>综合报告</a:t>
-            </a:r>
-            <a:endParaRPr lang="en-US" sz="1250" dirty="0"/>
-          </a:p>
-        </p:txBody>
-      </p:sp>
-      <p:sp>
-        <p:nvSpPr>
-          <p:cNvPr id="16" name="bullets-179"/>
-          <p:cNvSpPr txBox="1"/>
-          <p:nvPr/>
-        </p:nvSpPr>
-        <p:spPr>
-          <a:xfrm>
-            <a:off x="822960" y="3337560"/>
-            <a:ext cx="4861408" cy="2011680"/>
-          </a:xfrm>
-          <a:prstGeom prst="rect">
-            <a:avLst/>
-          </a:prstGeom>
-          <a:noFill/>
-          <a:ln/>
-        </p:spPr>
-        <p:txBody>
-          <a:bodyPr wrap="square" lIns="0" tIns="0" rIns="0" bIns="0" rtlCol="0" anchor="t"/>
-          <a:lstStyle/>
-          <a:p>
-            <a:pPr marL="177800" indent="-177800">
-              <a:spcAft>
-                <a:spcPts val="800"/>
-              </a:spcAft>
-              <a:buSzPct val="100000"/>
-              <a:buChar char="•"/>
-            </a:pPr>
-            <a:r>
-              <a:rPr lang="en-US" sz="1300" dirty="0">
-                <a:solidFill>
-                  <a:schemeClr val="tx1"/>
-                </a:solidFill>
-              </a:rPr>
-              <a:t>队长（PI）把课题拆成有依赖的任务，可要求先审批计划</a:t>
-            </a:r>
-            <a:endParaRPr lang="en-US" sz="1300" dirty="0"/>
-          </a:p>
-          <a:p>
-            <a:pPr marL="177800" indent="-177800">
-              <a:spcAft>
-                <a:spcPts val="800"/>
-              </a:spcAft>
-              <a:buSzPct val="100000"/>
-              <a:buChar char="•"/>
-            </a:pPr>
-            <a:r>
-              <a:rPr lang="en-US" sz="1300" dirty="0">
-                <a:solidFill>
-                  <a:schemeClr val="tx1"/>
-                </a:solidFill>
-              </a:rPr>
-              <a:t>成员交接时，每条发现都必须附证据编号</a:t>
-            </a:r>
-            <a:endParaRPr lang="en-US" sz="1300" dirty="0"/>
-          </a:p>
-          <a:p>
-            <a:pPr marL="177800" indent="-177800">
-              <a:spcAft>
-                <a:spcPts val="800"/>
-              </a:spcAft>
-              <a:buSzPct val="100000"/>
-              <a:buChar char="•"/>
-            </a:pPr>
-            <a:r>
-              <a:rPr lang="en-US" sz="1300" dirty="0">
-                <a:solidFill>
-                  <a:schemeClr val="tx1"/>
-                </a:solidFill>
-              </a:rPr>
-              <a:t>质量门：规则检查 + 科研审查员；工具失败不算“阴性结果”</a:t>
-            </a:r>
-            <a:endParaRPr lang="en-US" sz="1300" dirty="0"/>
-          </a:p>
-        </p:txBody>
-      </p:sp>
-      <p:sp>
-        <p:nvSpPr>
-          <p:cNvPr id="17" name="label-180"/>
-          <p:cNvSpPr txBox="1"/>
-          <p:nvPr/>
-        </p:nvSpPr>
-        <p:spPr>
-          <a:xfrm>
-            <a:off x="822960" y="5349240"/>
-            <a:ext cx="1620469" cy="411480"/>
-          </a:xfrm>
-          <a:prstGeom prst="rect">
-            <a:avLst/>
-          </a:prstGeom>
-          <a:noFill/>
-          <a:ln/>
-        </p:spPr>
-        <p:txBody>
-          <a:bodyPr wrap="square" lIns="0" tIns="0" rIns="0" bIns="0" rtlCol="0" anchor="t"/>
-          <a:lstStyle/>
-          <a:p>
-            <a:pPr algn="ctr" indent="0" marL="0">
-              <a:buNone/>
-            </a:pPr>
-            <a:r>
-              <a:rPr lang="en-US" sz="2000" b="1" dirty="0">
-                <a:solidFill>
-                  <a:schemeClr val="accent2"/>
-                </a:solidFill>
-              </a:rPr>
-              <a:t>26 位</a:t>
-            </a:r>
-            <a:endParaRPr lang="en-US" sz="2000" dirty="0"/>
-          </a:p>
-        </p:txBody>
-      </p:sp>
-      <p:sp>
-        <p:nvSpPr>
-          <p:cNvPr id="18" name="label-181"/>
-          <p:cNvSpPr txBox="1"/>
-          <p:nvPr/>
-        </p:nvSpPr>
-        <p:spPr>
-          <a:xfrm>
-            <a:off x="822960" y="5742432"/>
-            <a:ext cx="1620469" cy="274320"/>
-          </a:xfrm>
-          <a:prstGeom prst="rect">
-            <a:avLst/>
-          </a:prstGeom>
-          <a:noFill/>
-          <a:ln/>
-        </p:spPr>
-        <p:txBody>
-          <a:bodyPr wrap="square" lIns="0" tIns="0" rIns="0" bIns="0" rtlCol="0" anchor="t"/>
-          <a:lstStyle/>
-          <a:p>
-            <a:pPr algn="ctr" indent="0" marL="0">
-              <a:buNone/>
-            </a:pPr>
-            <a:r>
-              <a:rPr lang="en-US" sz="1150" dirty="0">
-                <a:solidFill>
-                  <a:schemeClr val="accent6"/>
-                </a:solidFill>
-              </a:rPr>
-              <a:t>领域专家</a:t>
-            </a:r>
-            <a:endParaRPr lang="en-US" sz="1150" dirty="0"/>
-          </a:p>
-        </p:txBody>
-      </p:sp>
-      <p:sp>
-        <p:nvSpPr>
-          <p:cNvPr id="19" name="label-182"/>
-          <p:cNvSpPr txBox="1"/>
-          <p:nvPr/>
-        </p:nvSpPr>
-        <p:spPr>
-          <a:xfrm>
-            <a:off x="2443429" y="5349240"/>
-            <a:ext cx="1620469" cy="411480"/>
-          </a:xfrm>
-          <a:prstGeom prst="rect">
-            <a:avLst/>
-          </a:prstGeom>
-          <a:noFill/>
-          <a:ln/>
-        </p:spPr>
-        <p:txBody>
-          <a:bodyPr wrap="square" lIns="0" tIns="0" rIns="0" bIns="0" rtlCol="0" anchor="t"/>
-          <a:lstStyle/>
-          <a:p>
-            <a:pPr algn="ctr" indent="0" marL="0">
-              <a:buNone/>
-            </a:pPr>
-            <a:r>
-              <a:rPr lang="en-US" sz="2000" b="1" dirty="0">
-                <a:solidFill>
-                  <a:schemeClr val="accent2"/>
-                </a:solidFill>
-              </a:rPr>
-              <a:t>15 个</a:t>
-            </a:r>
-            <a:endParaRPr lang="en-US" sz="2000" dirty="0"/>
-          </a:p>
-        </p:txBody>
-      </p:sp>
-      <p:sp>
-        <p:nvSpPr>
-          <p:cNvPr id="20" name="label-183"/>
-          <p:cNvSpPr txBox="1"/>
-          <p:nvPr/>
-        </p:nvSpPr>
-        <p:spPr>
-          <a:xfrm>
-            <a:off x="2443429" y="5742432"/>
-            <a:ext cx="1620469" cy="274320"/>
-          </a:xfrm>
-          <a:prstGeom prst="rect">
-            <a:avLst/>
-          </a:prstGeom>
-          <a:noFill/>
-          <a:ln/>
-        </p:spPr>
-        <p:txBody>
-          <a:bodyPr wrap="square" lIns="0" tIns="0" rIns="0" bIns="0" rtlCol="0" anchor="t"/>
-          <a:lstStyle/>
-          <a:p>
-            <a:pPr algn="ctr" indent="0" marL="0">
-              <a:buNone/>
-            </a:pPr>
-            <a:r>
-              <a:rPr lang="en-US" sz="1150" dirty="0">
-                <a:solidFill>
-                  <a:schemeClr val="accent6"/>
-                </a:solidFill>
-              </a:rPr>
-              <a:t>团队模板</a:t>
-            </a:r>
-            <a:endParaRPr lang="en-US" sz="1150" dirty="0"/>
-          </a:p>
-        </p:txBody>
-      </p:sp>
-      <p:sp>
-        <p:nvSpPr>
-          <p:cNvPr id="21" name="label-184"/>
-          <p:cNvSpPr txBox="1"/>
-          <p:nvPr/>
-        </p:nvSpPr>
-        <p:spPr>
-          <a:xfrm>
-            <a:off x="4063898" y="5349240"/>
-            <a:ext cx="1620469" cy="411480"/>
-          </a:xfrm>
-          <a:prstGeom prst="rect">
-            <a:avLst/>
-          </a:prstGeom>
-          <a:noFill/>
-          <a:ln/>
-        </p:spPr>
-        <p:txBody>
-          <a:bodyPr wrap="square" lIns="0" tIns="0" rIns="0" bIns="0" rtlCol="0" anchor="t"/>
-          <a:lstStyle/>
-          <a:p>
-            <a:pPr algn="ctr" indent="0" marL="0">
-              <a:buNone/>
-            </a:pPr>
-            <a:r>
-              <a:rPr lang="en-US" sz="2000" b="1" dirty="0">
-                <a:solidFill>
-                  <a:schemeClr val="accent2"/>
-                </a:solidFill>
-              </a:rPr>
-              <a:t>@</a:t>
-            </a:r>
-            <a:endParaRPr lang="en-US" sz="2000" dirty="0"/>
-          </a:p>
-        </p:txBody>
-      </p:sp>
-      <p:sp>
-        <p:nvSpPr>
-          <p:cNvPr id="22" name="label-185"/>
-          <p:cNvSpPr txBox="1"/>
-          <p:nvPr/>
-        </p:nvSpPr>
-        <p:spPr>
-          <a:xfrm>
-            <a:off x="4063898" y="5742432"/>
-            <a:ext cx="1620469" cy="274320"/>
-          </a:xfrm>
-          <a:prstGeom prst="rect">
-            <a:avLst/>
-          </a:prstGeom>
-          <a:noFill/>
-          <a:ln/>
-        </p:spPr>
-        <p:txBody>
-          <a:bodyPr wrap="square" lIns="0" tIns="0" rIns="0" bIns="0" rtlCol="0" anchor="t"/>
-          <a:lstStyle/>
-          <a:p>
-            <a:pPr algn="ctr" indent="0" marL="0">
-              <a:buNone/>
-            </a:pPr>
-            <a:r>
-              <a:rPr lang="en-US" sz="1150" dirty="0">
-                <a:solidFill>
-                  <a:schemeClr val="accent6"/>
-                </a:solidFill>
-              </a:rPr>
-              <a:t>直接点名专家</a:t>
-            </a:r>
-            <a:endParaRPr lang="en-US" sz="1150" dirty="0"/>
-          </a:p>
-        </p:txBody>
-      </p:sp>
-      <p:sp>
-        <p:nvSpPr>
-          <p:cNvPr id="23" name="card-186"/>
-          <p:cNvSpPr/>
-          <p:nvPr/>
-        </p:nvSpPr>
-        <p:spPr>
-          <a:xfrm>
-            <a:off x="6233008" y="1600200"/>
-            <a:ext cx="5410048" cy="4572000"/>
-          </a:xfrm>
-          <a:prstGeom prst="roundRect">
-            <a:avLst>
-              <a:gd name="adj" fmla="val 2000"/>
-            </a:avLst>
-          </a:prstGeom>
-          <a:solidFill>
-            <a:schemeClr val="bg2"/>
-          </a:solidFill>
-          <a:ln w="12700">
-            <a:solidFill>
-              <a:schemeClr val="bg2"/>
-            </a:solidFill>
-            <a:prstDash val="solid"/>
-          </a:ln>
-        </p:spPr>
-      </p:sp>
-      <p:sp>
-        <p:nvSpPr>
-          <p:cNvPr id="24" name="tag-187"/>
-          <p:cNvSpPr/>
-          <p:nvPr/>
-        </p:nvSpPr>
-        <p:spPr>
-          <a:xfrm>
-            <a:off x="6507328" y="1810512"/>
-            <a:ext cx="411480" cy="411480"/>
-          </a:xfrm>
-          <a:prstGeom prst="roundRect">
-            <a:avLst>
-              <a:gd name="adj" fmla="val 13333"/>
-            </a:avLst>
-          </a:prstGeom>
-          <a:solidFill>
-            <a:schemeClr val="accent3"/>
-          </a:solidFill>
-          <a:ln>
-            <a:solidFill>
-              <a:schemeClr val="accent3"/>
-            </a:solidFill>
-          </a:ln>
-        </p:spPr>
-        <p:txBody>
-          <a:bodyPr wrap="square" lIns="0" tIns="0" rIns="0" bIns="0" rtlCol="0" anchor="ctr"/>
-          <a:lstStyle/>
-          <a:p>
-            <a:pPr algn="ctr" indent="0" marL="0">
-              <a:buNone/>
-            </a:pPr>
-            <a:r>
-              <a:rPr lang="en-US" sz="1600" b="1" dirty="0">
-                <a:solidFill>
-                  <a:schemeClr val="bg1"/>
-                </a:solidFill>
-              </a:rPr>
-              <a:t>C</a:t>
-            </a:r>
-            <a:endParaRPr lang="en-US" sz="1600" dirty="0"/>
-          </a:p>
-        </p:txBody>
-      </p:sp>
-      <p:sp>
-        <p:nvSpPr>
-          <p:cNvPr id="25" name="label-188"/>
-          <p:cNvSpPr txBox="1"/>
-          <p:nvPr/>
-        </p:nvSpPr>
-        <p:spPr>
-          <a:xfrm>
-            <a:off x="7055968" y="1810512"/>
-            <a:ext cx="4312768" cy="411480"/>
-          </a:xfrm>
-          <a:prstGeom prst="rect">
-            <a:avLst/>
-          </a:prstGeom>
-          <a:noFill/>
-          <a:ln/>
-        </p:spPr>
-        <p:txBody>
-          <a:bodyPr wrap="square" lIns="0" tIns="0" rIns="0" bIns="0" rtlCol="0" anchor="ctr"/>
-          <a:lstStyle/>
-          <a:p>
-            <a:pPr algn="l" indent="0" marL="0">
-              <a:buNone/>
-            </a:pPr>
-            <a:r>
-              <a:rPr lang="en-US" sz="1700" b="1" dirty="0">
-                <a:solidFill>
-                  <a:schemeClr val="tx2"/>
-                </a:solidFill>
-              </a:rPr>
-              <a:t>本地运行时：直接用已有 AI 订阅</a:t>
-            </a:r>
-            <a:endParaRPr lang="en-US" sz="1700" dirty="0"/>
-          </a:p>
-        </p:txBody>
-      </p:sp>
-      <p:sp>
-        <p:nvSpPr>
-          <p:cNvPr id="26" name="box-189"/>
-          <p:cNvSpPr/>
-          <p:nvPr/>
-        </p:nvSpPr>
-        <p:spPr>
-          <a:xfrm>
-            <a:off x="6507328" y="2697480"/>
-            <a:ext cx="1325880" cy="566928"/>
-          </a:xfrm>
-          <a:prstGeom prst="roundRect">
-            <a:avLst>
-              <a:gd name="adj" fmla="val 12903"/>
-            </a:avLst>
-          </a:prstGeom>
-          <a:solidFill>
-            <a:schemeClr val="tx2"/>
-          </a:solidFill>
-          <a:ln w="6350">
-            <a:solidFill>
-              <a:schemeClr val="tx2"/>
-            </a:solidFill>
-          </a:ln>
-        </p:spPr>
-        <p:txBody>
-          <a:bodyPr wrap="square" lIns="762" tIns="762" rIns="762" bIns="762" rtlCol="0" anchor="ctr"/>
-          <a:lstStyle/>
-          <a:p>
-            <a:pPr algn="ctr" indent="0" marL="0">
-              <a:buNone/>
-            </a:pPr>
-            <a:r>
-              <a:rPr lang="en-US" sz="1300" b="1" dirty="0">
-                <a:solidFill>
-                  <a:schemeClr val="bg1"/>
-                </a:solidFill>
-              </a:rPr>
-              <a:t>研究请求</a:t>
-            </a:r>
-            <a:endParaRPr lang="en-US" sz="1300" dirty="0"/>
-          </a:p>
-        </p:txBody>
-      </p:sp>
-      <p:sp>
-        <p:nvSpPr>
-          <p:cNvPr id="27" name="arrow-190"/>
-          <p:cNvSpPr/>
-          <p:nvPr/>
-        </p:nvSpPr>
-        <p:spPr>
-          <a:xfrm>
-            <a:off x="7833208" y="2980944"/>
-            <a:ext cx="274320" cy="0"/>
-          </a:xfrm>
-          <a:prstGeom prst="line">
-            <a:avLst/>
-          </a:prstGeom>
-          <a:noFill/>
-          <a:ln w="19050">
-            <a:solidFill>
-              <a:schemeClr val="accent6"/>
-            </a:solidFill>
-            <a:prstDash val="solid"/>
-            <a:tailEnd type="triangle"/>
-          </a:ln>
-        </p:spPr>
-      </p:sp>
-      <p:sp>
-        <p:nvSpPr>
-          <p:cNvPr id="28" name="box-191"/>
-          <p:cNvSpPr/>
-          <p:nvPr/>
-        </p:nvSpPr>
-        <p:spPr>
-          <a:xfrm>
-            <a:off x="8107528" y="2697480"/>
-            <a:ext cx="1143000" cy="566928"/>
-          </a:xfrm>
-          <a:prstGeom prst="roundRect">
-            <a:avLst>
-              <a:gd name="adj" fmla="val 12903"/>
-            </a:avLst>
-          </a:prstGeom>
-          <a:solidFill>
-            <a:schemeClr val="accent6"/>
-          </a:solidFill>
-          <a:ln w="6350">
-            <a:solidFill>
-              <a:schemeClr val="accent6"/>
-            </a:solidFill>
-          </a:ln>
-        </p:spPr>
-        <p:txBody>
-          <a:bodyPr wrap="square" lIns="762" tIns="762" rIns="762" bIns="762" rtlCol="0" anchor="ctr"/>
-          <a:lstStyle/>
-          <a:p>
-            <a:pPr algn="ctr" indent="0" marL="0">
-              <a:buNone/>
-            </a:pPr>
-            <a:r>
-              <a:rPr lang="en-US" sz="1300" b="1" dirty="0">
-                <a:solidFill>
-                  <a:schemeClr val="bg1"/>
-                </a:solidFill>
-              </a:rPr>
-              <a:t>执行路由</a:t>
-            </a:r>
-            <a:endParaRPr lang="en-US" sz="1300" dirty="0"/>
-          </a:p>
-        </p:txBody>
-      </p:sp>
-      <p:sp>
-        <p:nvSpPr>
-          <p:cNvPr id="29" name="arrow-192"/>
-          <p:cNvSpPr/>
-          <p:nvPr/>
-        </p:nvSpPr>
-        <p:spPr>
-          <a:xfrm flipV="1">
-            <a:off x="9250528" y="2587752"/>
-            <a:ext cx="320040" cy="292608"/>
-          </a:xfrm>
-          <a:prstGeom prst="line">
-            <a:avLst/>
-          </a:prstGeom>
-          <a:noFill/>
-          <a:ln w="19050">
-            <a:solidFill>
-              <a:schemeClr val="accent6"/>
-            </a:solidFill>
-            <a:prstDash val="solid"/>
-            <a:tailEnd type="triangle"/>
-          </a:ln>
-        </p:spPr>
-      </p:sp>
-      <p:sp>
-        <p:nvSpPr>
-          <p:cNvPr id="30" name="arrow-193"/>
-          <p:cNvSpPr/>
-          <p:nvPr/>
-        </p:nvSpPr>
-        <p:spPr>
-          <a:xfrm>
-            <a:off x="9250528" y="3081528"/>
-            <a:ext cx="320040" cy="301752"/>
-          </a:xfrm>
-          <a:prstGeom prst="line">
-            <a:avLst/>
-          </a:prstGeom>
-          <a:noFill/>
-          <a:ln w="19050">
-            <a:solidFill>
-              <a:schemeClr val="accent6"/>
-            </a:solidFill>
-            <a:prstDash val="solid"/>
-            <a:tailEnd type="triangle"/>
-          </a:ln>
-        </p:spPr>
-      </p:sp>
-      <p:sp>
-        <p:nvSpPr>
-          <p:cNvPr id="31" name="box-194"/>
-          <p:cNvSpPr/>
-          <p:nvPr/>
-        </p:nvSpPr>
-        <p:spPr>
-          <a:xfrm>
-            <a:off x="9570568" y="2377440"/>
-            <a:ext cx="1798168" cy="457200"/>
-          </a:xfrm>
-          <a:prstGeom prst="roundRect">
-            <a:avLst>
-              <a:gd name="adj" fmla="val 16000"/>
-            </a:avLst>
-          </a:prstGeom>
-          <a:solidFill>
-            <a:schemeClr val="bg1"/>
-          </a:solidFill>
-          <a:ln w="12700">
-            <a:solidFill>
-              <a:srgbClr val="D5DCE4"/>
-            </a:solidFill>
-          </a:ln>
-        </p:spPr>
-        <p:txBody>
-          <a:bodyPr wrap="square" lIns="762" tIns="762" rIns="762" bIns="762" rtlCol="0" anchor="ctr"/>
-          <a:lstStyle/>
-          <a:p>
-            <a:pPr algn="ctr" indent="0" marL="0">
-              <a:buNone/>
-            </a:pPr>
-            <a:r>
-              <a:rPr lang="en-US" sz="1200" dirty="0">
-                <a:solidFill>
-                  <a:schemeClr val="tx2"/>
-                </a:solidFill>
-              </a:rPr>
-              <a:t>模型 API · 按调用计费</a:t>
-            </a:r>
-            <a:endParaRPr lang="en-US" sz="1200" dirty="0"/>
-          </a:p>
-        </p:txBody>
-      </p:sp>
-      <p:sp>
-        <p:nvSpPr>
-          <p:cNvPr id="32" name="box-195"/>
-          <p:cNvSpPr/>
-          <p:nvPr/>
-        </p:nvSpPr>
-        <p:spPr>
-          <a:xfrm>
-            <a:off x="9570568" y="3154680"/>
-            <a:ext cx="1798168" cy="457200"/>
-          </a:xfrm>
-          <a:prstGeom prst="roundRect">
-            <a:avLst>
-              <a:gd name="adj" fmla="val 16000"/>
-            </a:avLst>
-          </a:prstGeom>
-          <a:solidFill>
-            <a:schemeClr val="accent3"/>
-          </a:solidFill>
-          <a:ln w="6350">
-            <a:solidFill>
-              <a:schemeClr val="accent3"/>
-            </a:solidFill>
-          </a:ln>
-        </p:spPr>
-        <p:txBody>
-          <a:bodyPr wrap="square" lIns="762" tIns="762" rIns="762" bIns="762" rtlCol="0" anchor="ctr"/>
-          <a:lstStyle/>
-          <a:p>
-            <a:pPr algn="ctr" indent="0" marL="0">
-              <a:buNone/>
-            </a:pPr>
-            <a:r>
-              <a:rPr lang="en-US" sz="1200" b="1" dirty="0">
-                <a:solidFill>
-                  <a:schemeClr val="bg1"/>
-                </a:solidFill>
-              </a:rPr>
-              <a:t>本地 CLI · 用已有订阅</a:t>
-            </a:r>
-            <a:endParaRPr lang="en-US" sz="1200" dirty="0"/>
-          </a:p>
-        </p:txBody>
-      </p:sp>
-      <p:sp>
-        <p:nvSpPr>
-          <p:cNvPr id="33" name="bullets-196"/>
-          <p:cNvSpPr txBox="1"/>
-          <p:nvPr/>
-        </p:nvSpPr>
-        <p:spPr>
-          <a:xfrm>
-            <a:off x="6507328" y="3886200"/>
-            <a:ext cx="4861408" cy="1828800"/>
-          </a:xfrm>
-          <a:prstGeom prst="rect">
-            <a:avLst/>
-          </a:prstGeom>
-          <a:noFill/>
-          <a:ln/>
-        </p:spPr>
-        <p:txBody>
-          <a:bodyPr wrap="square" lIns="0" tIns="0" rIns="0" bIns="0" rtlCol="0" anchor="t"/>
-          <a:lstStyle/>
-          <a:p>
-            <a:pPr marL="177800" indent="-177800">
-              <a:spcAft>
-                <a:spcPts val="800"/>
-              </a:spcAft>
-              <a:buSzPct val="100000"/>
-              <a:buChar char="•"/>
-            </a:pPr>
-            <a:r>
-              <a:rPr lang="en-US" sz="1300" dirty="0">
-                <a:solidFill>
-                  <a:schemeClr val="tx1"/>
-                </a:solidFill>
-              </a:rPr>
-              <a:t>自动检测本机已登录的 26 种 AI 命令行工具（如 Codex、Claude Code）</a:t>
-            </a:r>
-            <a:endParaRPr lang="en-US" sz="1300" dirty="0"/>
-          </a:p>
-          <a:p>
-            <a:pPr marL="177800" indent="-177800">
-              <a:spcAft>
-                <a:spcPts val="800"/>
-              </a:spcAft>
-              <a:buSzPct val="100000"/>
-              <a:buChar char="•"/>
-            </a:pPr>
-            <a:r>
-              <a:rPr lang="en-US" sz="1300" dirty="0">
-                <a:solidFill>
-                  <a:schemeClr val="tx1"/>
-                </a:solidFill>
-              </a:rPr>
-              <a:t>每个会话独立配置目录，不混入日常使用记录</a:t>
-            </a:r>
-            <a:endParaRPr lang="en-US" sz="1300" dirty="0"/>
-          </a:p>
-          <a:p>
-            <a:pPr marL="177800" indent="-177800">
-              <a:spcAft>
-                <a:spcPts val="800"/>
-              </a:spcAft>
-              <a:buSzPct val="100000"/>
-              <a:buChar char="•"/>
-            </a:pPr>
-            <a:r>
-              <a:rPr lang="en-US" sz="1300" dirty="0">
-                <a:solidFill>
-                  <a:schemeClr val="tx1"/>
-                </a:solidFill>
-              </a:rPr>
-              <a:t>执行命令前先征得同意（Codex 全流程支持）；数据留在本机</a:t>
-            </a:r>
-            <a:endParaRPr lang="en-US" sz="1300" dirty="0"/>
-          </a:p>
-        </p:txBody>
-      </p:sp>
-      <p:sp>
-        <p:nvSpPr>
-          <p:cNvPr id="34" name="label-197"/>
-          <p:cNvSpPr txBox="1"/>
-          <p:nvPr/>
-        </p:nvSpPr>
-        <p:spPr>
-          <a:xfrm>
-            <a:off x="6507328" y="5532120"/>
-            <a:ext cx="4861408" cy="548640"/>
-          </a:xfrm>
-          <a:prstGeom prst="rect">
-            <a:avLst/>
-          </a:prstGeom>
-          <a:noFill/>
-          <a:ln/>
-        </p:spPr>
-        <p:txBody>
-          <a:bodyPr wrap="square" lIns="0" tIns="0" rIns="0" bIns="0" rtlCol="0" anchor="t"/>
-          <a:lstStyle/>
-          <a:p>
-            <a:pPr algn="l" indent="0" marL="0">
-              <a:buNone/>
-            </a:pPr>
-            <a:r>
-              <a:rPr lang="en-US" sz="1050" dirty="0">
-                <a:solidFill>
-                  <a:schemeClr val="accent6"/>
-                </a:solidFill>
-              </a:rPr>
-              <a:t>说明：Codex 走完整协议并支持审批；Claude Code 已验证会话隔离；其余工具为通用接入。使用前请确认订阅条款允许此类用法。</a:t>
-            </a:r>
-            <a:endParaRPr lang="en-US" sz="1050" dirty="0"/>
           </a:p>
         </p:txBody>
       </p:sp>
@@ -14945,7 +17081,7 @@
                   <a:schemeClr val="tx2"/>
                 </a:solidFill>
               </a:rPr>
-              <a:t>使用说明：四步完成一次可追溯的研究</a:t>
+              <a:t>支撑设计：多智能体协作与本地运行时</a:t>
             </a:r>
             <a:endParaRPr lang="en-US" sz="2800" dirty="0"/>
           </a:p>
@@ -14983,7 +17119,7 @@
                   <a:schemeClr val="accent6"/>
                 </a:solidFill>
               </a:rPr>
-              <a:t>截图来自真实运行的 v3.0 应用。</a:t>
+              <a:t>B 类管“谁来做、谁把关”，C 类管“在哪里跑、用谁的额度”；两者在 2.x 已具备，3.0 继续完善。</a:t>
             </a:r>
             <a:endParaRPr lang="en-US" sz="1500" dirty="0"/>
           </a:p>
@@ -14991,58 +17127,51 @@
       </p:sp>
       <p:sp>
         <p:nvSpPr>
-          <p:cNvPr id="4" name="label-198"/>
-          <p:cNvSpPr txBox="1"/>
-          <p:nvPr/>
-        </p:nvSpPr>
-        <p:spPr>
-          <a:xfrm>
-            <a:off x="548640" y="1481328"/>
-            <a:ext cx="11094415" cy="292608"/>
-          </a:xfrm>
-          <a:prstGeom prst="rect">
-            <a:avLst/>
-          </a:prstGeom>
-          <a:noFill/>
-          <a:ln/>
-        </p:spPr>
-        <p:txBody>
-          <a:bodyPr wrap="square" lIns="0" tIns="0" rIns="0" bIns="0" rtlCol="0" anchor="t"/>
-          <a:lstStyle/>
-          <a:p>
-            <a:pPr algn="l" indent="0" marL="0">
-              <a:buNone/>
-            </a:pPr>
-            <a:r>
-              <a:rPr lang="en-US" sz="1300" dirty="0">
-                <a:solidFill>
-                  <a:schemeClr val="tx1"/>
-                </a:solidFill>
-              </a:rPr>
-              <a:t>① 安装：从 GitHub Releases 下载对应平台安装包；或在源码目录运行 npm run web，用浏览器打开。</a:t>
-            </a:r>
-            <a:endParaRPr lang="en-US" sz="1300" dirty="0"/>
-          </a:p>
-        </p:txBody>
-      </p:sp>
-      <p:sp>
-        <p:nvSpPr>
-          <p:cNvPr id="5" name="badge-199"/>
+          <p:cNvPr id="4" name="card-201"/>
           <p:cNvSpPr/>
           <p:nvPr/>
         </p:nvSpPr>
         <p:spPr>
           <a:xfrm>
-            <a:off x="548640" y="1901952"/>
-            <a:ext cx="347472" cy="347472"/>
-          </a:xfrm>
-          <a:prstGeom prst="ellipse">
-            <a:avLst/>
+            <a:off x="548640" y="1600200"/>
+            <a:ext cx="5410048" cy="4572000"/>
+          </a:xfrm>
+          <a:prstGeom prst="roundRect">
+            <a:avLst>
+              <a:gd name="adj" fmla="val 2000"/>
+            </a:avLst>
+          </a:prstGeom>
+          <a:solidFill>
+            <a:schemeClr val="bg2"/>
+          </a:solidFill>
+          <a:ln w="12700">
+            <a:solidFill>
+              <a:schemeClr val="bg2"/>
+            </a:solidFill>
+            <a:prstDash val="solid"/>
+          </a:ln>
+        </p:spPr>
+      </p:sp>
+      <p:sp>
+        <p:nvSpPr>
+          <p:cNvPr id="5" name="tag-202"/>
+          <p:cNvSpPr/>
+          <p:nvPr/>
+        </p:nvSpPr>
+        <p:spPr>
+          <a:xfrm>
+            <a:off x="822960" y="1810512"/>
+            <a:ext cx="411480" cy="411480"/>
+          </a:xfrm>
+          <a:prstGeom prst="roundRect">
+            <a:avLst>
+              <a:gd name="adj" fmla="val 13333"/>
+            </a:avLst>
           </a:prstGeom>
           <a:solidFill>
             <a:schemeClr val="accent2"/>
           </a:solidFill>
-          <a:ln w="6350">
+          <a:ln>
             <a:solidFill>
               <a:schemeClr val="accent2"/>
             </a:solidFill>
@@ -15056,27 +17185,27 @@
               <a:buNone/>
             </a:pPr>
             <a:r>
-              <a:rPr lang="en-US" sz="1200" b="1" dirty="0">
+              <a:rPr lang="en-US" sz="1600" b="1" dirty="0">
                 <a:solidFill>
                   <a:schemeClr val="bg1"/>
                 </a:solidFill>
               </a:rPr>
-              <a:t>2</a:t>
-            </a:r>
-            <a:endParaRPr lang="en-US" sz="1200" dirty="0"/>
-          </a:p>
-        </p:txBody>
-      </p:sp>
-      <p:sp>
-        <p:nvSpPr>
-          <p:cNvPr id="6" name="label-200"/>
+              <a:t>B</a:t>
+            </a:r>
+            <a:endParaRPr lang="en-US" sz="1600" dirty="0"/>
+          </a:p>
+        </p:txBody>
+      </p:sp>
+      <p:sp>
+        <p:nvSpPr>
+          <p:cNvPr id="6" name="label-203"/>
           <p:cNvSpPr txBox="1"/>
           <p:nvPr/>
         </p:nvSpPr>
         <p:spPr>
           <a:xfrm>
-            <a:off x="1005840" y="1883664"/>
-            <a:ext cx="3027578" cy="384048"/>
+            <a:off x="1371600" y="1810512"/>
+            <a:ext cx="4312768" cy="411480"/>
           </a:xfrm>
           <a:prstGeom prst="rect">
             <a:avLst/>
@@ -15092,27 +17221,343 @@
               <a:buNone/>
             </a:pPr>
             <a:r>
-              <a:rPr lang="en-US" sz="1600" b="1" dirty="0">
+              <a:rPr lang="en-US" sz="1700" b="1" dirty="0">
                 <a:solidFill>
                   <a:schemeClr val="tx2"/>
                 </a:solidFill>
               </a:rPr>
-              <a:t>配置运行时</a:t>
-            </a:r>
-            <a:endParaRPr lang="en-US" sz="1600" dirty="0"/>
-          </a:p>
-        </p:txBody>
-      </p:sp>
-      <p:sp>
-        <p:nvSpPr>
-          <p:cNvPr id="7" name="label-201"/>
+              <a:t>多智能体协作：像课题组一样分工</a:t>
+            </a:r>
+            <a:endParaRPr lang="en-US" sz="1700" dirty="0"/>
+          </a:p>
+        </p:txBody>
+      </p:sp>
+      <p:sp>
+        <p:nvSpPr>
+          <p:cNvPr id="7" name="box-204"/>
+          <p:cNvSpPr/>
+          <p:nvPr/>
+        </p:nvSpPr>
+        <p:spPr>
+          <a:xfrm>
+            <a:off x="822960" y="2514600"/>
+            <a:ext cx="811347" cy="566928"/>
+          </a:xfrm>
+          <a:prstGeom prst="roundRect">
+            <a:avLst>
+              <a:gd name="adj" fmla="val 12903"/>
+            </a:avLst>
+          </a:prstGeom>
+          <a:solidFill>
+            <a:schemeClr val="bg1"/>
+          </a:solidFill>
+          <a:ln w="12700">
+            <a:solidFill>
+              <a:srgbClr val="D5DCE4"/>
+            </a:solidFill>
+          </a:ln>
+        </p:spPr>
+        <p:txBody>
+          <a:bodyPr wrap="square" lIns="762" tIns="762" rIns="762" bIns="762" rtlCol="0" anchor="ctr"/>
+          <a:lstStyle/>
+          <a:p>
+            <a:pPr algn="ctr" indent="0" marL="0">
+              <a:buNone/>
+            </a:pPr>
+            <a:r>
+              <a:rPr lang="en-US" sz="1250" b="1" dirty="0">
+                <a:solidFill>
+                  <a:schemeClr val="tx2"/>
+                </a:solidFill>
+              </a:rPr>
+              <a:t>研究课题</a:t>
+            </a:r>
+            <a:endParaRPr lang="en-US" sz="1250" dirty="0"/>
+          </a:p>
+        </p:txBody>
+      </p:sp>
+      <p:sp>
+        <p:nvSpPr>
+          <p:cNvPr id="8" name="arrow-205"/>
+          <p:cNvSpPr/>
+          <p:nvPr/>
+        </p:nvSpPr>
+        <p:spPr>
+          <a:xfrm>
+            <a:off x="1652595" y="2798064"/>
+            <a:ext cx="164592" cy="0"/>
+          </a:xfrm>
+          <a:prstGeom prst="line">
+            <a:avLst/>
+          </a:prstGeom>
+          <a:noFill/>
+          <a:ln w="15875">
+            <a:solidFill>
+              <a:schemeClr val="accent2"/>
+            </a:solidFill>
+            <a:prstDash val="solid"/>
+            <a:tailEnd type="triangle"/>
+          </a:ln>
+        </p:spPr>
+      </p:sp>
+      <p:sp>
+        <p:nvSpPr>
+          <p:cNvPr id="9" name="box-206"/>
+          <p:cNvSpPr/>
+          <p:nvPr/>
+        </p:nvSpPr>
+        <p:spPr>
+          <a:xfrm>
+            <a:off x="1835475" y="2514600"/>
+            <a:ext cx="811347" cy="566928"/>
+          </a:xfrm>
+          <a:prstGeom prst="roundRect">
+            <a:avLst>
+              <a:gd name="adj" fmla="val 12903"/>
+            </a:avLst>
+          </a:prstGeom>
+          <a:solidFill>
+            <a:schemeClr val="bg1"/>
+          </a:solidFill>
+          <a:ln w="12700">
+            <a:solidFill>
+              <a:srgbClr val="D5DCE4"/>
+            </a:solidFill>
+          </a:ln>
+        </p:spPr>
+        <p:txBody>
+          <a:bodyPr wrap="square" lIns="762" tIns="762" rIns="762" bIns="762" rtlCol="0" anchor="ctr"/>
+          <a:lstStyle/>
+          <a:p>
+            <a:pPr algn="ctr" indent="0" marL="0">
+              <a:buNone/>
+            </a:pPr>
+            <a:r>
+              <a:rPr lang="en-US" sz="1250" b="1" dirty="0">
+                <a:solidFill>
+                  <a:schemeClr val="tx2"/>
+                </a:solidFill>
+              </a:rPr>
+              <a:t>队长规划</a:t>
+            </a:r>
+            <a:endParaRPr lang="en-US" sz="1250" dirty="0"/>
+          </a:p>
+        </p:txBody>
+      </p:sp>
+      <p:sp>
+        <p:nvSpPr>
+          <p:cNvPr id="10" name="arrow-207"/>
+          <p:cNvSpPr/>
+          <p:nvPr/>
+        </p:nvSpPr>
+        <p:spPr>
+          <a:xfrm>
+            <a:off x="2665110" y="2798064"/>
+            <a:ext cx="164592" cy="0"/>
+          </a:xfrm>
+          <a:prstGeom prst="line">
+            <a:avLst/>
+          </a:prstGeom>
+          <a:noFill/>
+          <a:ln w="15875">
+            <a:solidFill>
+              <a:schemeClr val="accent2"/>
+            </a:solidFill>
+            <a:prstDash val="solid"/>
+            <a:tailEnd type="triangle"/>
+          </a:ln>
+        </p:spPr>
+      </p:sp>
+      <p:sp>
+        <p:nvSpPr>
+          <p:cNvPr id="11" name="box-208"/>
+          <p:cNvSpPr/>
+          <p:nvPr/>
+        </p:nvSpPr>
+        <p:spPr>
+          <a:xfrm>
+            <a:off x="2847990" y="2514600"/>
+            <a:ext cx="811347" cy="566928"/>
+          </a:xfrm>
+          <a:prstGeom prst="roundRect">
+            <a:avLst>
+              <a:gd name="adj" fmla="val 12903"/>
+            </a:avLst>
+          </a:prstGeom>
+          <a:solidFill>
+            <a:schemeClr val="bg1"/>
+          </a:solidFill>
+          <a:ln w="12700">
+            <a:solidFill>
+              <a:srgbClr val="D5DCE4"/>
+            </a:solidFill>
+          </a:ln>
+        </p:spPr>
+        <p:txBody>
+          <a:bodyPr wrap="square" lIns="762" tIns="762" rIns="762" bIns="762" rtlCol="0" anchor="ctr"/>
+          <a:lstStyle/>
+          <a:p>
+            <a:pPr algn="ctr" indent="0" marL="0">
+              <a:buNone/>
+            </a:pPr>
+            <a:r>
+              <a:rPr lang="en-US" sz="1250" b="1" dirty="0">
+                <a:solidFill>
+                  <a:schemeClr val="tx2"/>
+                </a:solidFill>
+              </a:rPr>
+              <a:t>成员并行</a:t>
+            </a:r>
+            <a:endParaRPr lang="en-US" sz="1250" dirty="0"/>
+          </a:p>
+        </p:txBody>
+      </p:sp>
+      <p:sp>
+        <p:nvSpPr>
+          <p:cNvPr id="12" name="arrow-209"/>
+          <p:cNvSpPr/>
+          <p:nvPr/>
+        </p:nvSpPr>
+        <p:spPr>
+          <a:xfrm>
+            <a:off x="3677625" y="2798064"/>
+            <a:ext cx="164592" cy="0"/>
+          </a:xfrm>
+          <a:prstGeom prst="line">
+            <a:avLst/>
+          </a:prstGeom>
+          <a:noFill/>
+          <a:ln w="15875">
+            <a:solidFill>
+              <a:schemeClr val="accent2"/>
+            </a:solidFill>
+            <a:prstDash val="solid"/>
+            <a:tailEnd type="triangle"/>
+          </a:ln>
+        </p:spPr>
+      </p:sp>
+      <p:sp>
+        <p:nvSpPr>
+          <p:cNvPr id="13" name="box-210"/>
+          <p:cNvSpPr/>
+          <p:nvPr/>
+        </p:nvSpPr>
+        <p:spPr>
+          <a:xfrm>
+            <a:off x="3860505" y="2514600"/>
+            <a:ext cx="811347" cy="566928"/>
+          </a:xfrm>
+          <a:prstGeom prst="roundRect">
+            <a:avLst>
+              <a:gd name="adj" fmla="val 12903"/>
+            </a:avLst>
+          </a:prstGeom>
+          <a:solidFill>
+            <a:srgbClr val="E3F3F1"/>
+          </a:solidFill>
+          <a:ln w="12700">
+            <a:solidFill>
+              <a:srgbClr val="0E8A7E"/>
+            </a:solidFill>
+          </a:ln>
+        </p:spPr>
+        <p:txBody>
+          <a:bodyPr wrap="square" lIns="762" tIns="762" rIns="762" bIns="762" rtlCol="0" anchor="ctr"/>
+          <a:lstStyle/>
+          <a:p>
+            <a:pPr algn="ctr" indent="0" marL="0">
+              <a:buNone/>
+            </a:pPr>
+            <a:r>
+              <a:rPr lang="en-US" sz="1250" b="1" dirty="0">
+                <a:solidFill>
+                  <a:schemeClr val="tx2"/>
+                </a:solidFill>
+              </a:rPr>
+              <a:t>质量门</a:t>
+            </a:r>
+            <a:endParaRPr lang="en-US" sz="1250" dirty="0"/>
+          </a:p>
+        </p:txBody>
+      </p:sp>
+      <p:sp>
+        <p:nvSpPr>
+          <p:cNvPr id="14" name="arrow-211"/>
+          <p:cNvSpPr/>
+          <p:nvPr/>
+        </p:nvSpPr>
+        <p:spPr>
+          <a:xfrm>
+            <a:off x="4690140" y="2798064"/>
+            <a:ext cx="164592" cy="0"/>
+          </a:xfrm>
+          <a:prstGeom prst="line">
+            <a:avLst/>
+          </a:prstGeom>
+          <a:noFill/>
+          <a:ln w="15875">
+            <a:solidFill>
+              <a:schemeClr val="accent2"/>
+            </a:solidFill>
+            <a:prstDash val="solid"/>
+            <a:tailEnd type="triangle"/>
+          </a:ln>
+        </p:spPr>
+      </p:sp>
+      <p:sp>
+        <p:nvSpPr>
+          <p:cNvPr id="15" name="box-212"/>
+          <p:cNvSpPr/>
+          <p:nvPr/>
+        </p:nvSpPr>
+        <p:spPr>
+          <a:xfrm>
+            <a:off x="4873020" y="2514600"/>
+            <a:ext cx="811347" cy="566928"/>
+          </a:xfrm>
+          <a:prstGeom prst="roundRect">
+            <a:avLst>
+              <a:gd name="adj" fmla="val 12903"/>
+            </a:avLst>
+          </a:prstGeom>
+          <a:solidFill>
+            <a:schemeClr val="bg1"/>
+          </a:solidFill>
+          <a:ln w="12700">
+            <a:solidFill>
+              <a:srgbClr val="D5DCE4"/>
+            </a:solidFill>
+          </a:ln>
+        </p:spPr>
+        <p:txBody>
+          <a:bodyPr wrap="square" lIns="762" tIns="762" rIns="762" bIns="762" rtlCol="0" anchor="ctr"/>
+          <a:lstStyle/>
+          <a:p>
+            <a:pPr algn="ctr" indent="0" marL="0">
+              <a:buNone/>
+            </a:pPr>
+            <a:r>
+              <a:rPr lang="en-US" sz="1250" b="1" dirty="0">
+                <a:solidFill>
+                  <a:schemeClr val="tx2"/>
+                </a:solidFill>
+              </a:rPr>
+              <a:t>综合报告</a:t>
+            </a:r>
+            <a:endParaRPr lang="en-US" sz="1250" dirty="0"/>
+          </a:p>
+        </p:txBody>
+      </p:sp>
+      <p:sp>
+        <p:nvSpPr>
+          <p:cNvPr id="16" name="bullets-213"/>
           <p:cNvSpPr txBox="1"/>
           <p:nvPr/>
         </p:nvSpPr>
         <p:spPr>
           <a:xfrm>
-            <a:off x="548640" y="2304288"/>
-            <a:ext cx="3484778" cy="502920"/>
+            <a:off x="822960" y="3337560"/>
+            <a:ext cx="4861408" cy="2011680"/>
           </a:xfrm>
           <a:prstGeom prst="rect">
             <a:avLst/>
@@ -15124,310 +17569,642 @@
           <a:bodyPr wrap="square" lIns="0" tIns="0" rIns="0" bIns="0" rtlCol="0" anchor="t"/>
           <a:lstStyle/>
           <a:p>
+            <a:pPr marL="177800" indent="-177800">
+              <a:spcAft>
+                <a:spcPts val="800"/>
+              </a:spcAft>
+              <a:buSzPct val="100000"/>
+              <a:buChar char="•"/>
+            </a:pPr>
+            <a:r>
+              <a:rPr lang="en-US" sz="1300" dirty="0">
+                <a:solidFill>
+                  <a:schemeClr val="tx1"/>
+                </a:solidFill>
+              </a:rPr>
+              <a:t>队长（PI）把课题拆成有依赖的任务，可要求先审批计划</a:t>
+            </a:r>
+            <a:endParaRPr lang="en-US" sz="1300" dirty="0"/>
+          </a:p>
+          <a:p>
+            <a:pPr marL="177800" indent="-177800">
+              <a:spcAft>
+                <a:spcPts val="800"/>
+              </a:spcAft>
+              <a:buSzPct val="100000"/>
+              <a:buChar char="•"/>
+            </a:pPr>
+            <a:r>
+              <a:rPr lang="en-US" sz="1300" dirty="0">
+                <a:solidFill>
+                  <a:schemeClr val="tx1"/>
+                </a:solidFill>
+              </a:rPr>
+              <a:t>成员交接时，每条发现都必须附证据编号</a:t>
+            </a:r>
+            <a:endParaRPr lang="en-US" sz="1300" dirty="0"/>
+          </a:p>
+          <a:p>
+            <a:pPr marL="177800" indent="-177800">
+              <a:spcAft>
+                <a:spcPts val="800"/>
+              </a:spcAft>
+              <a:buSzPct val="100000"/>
+              <a:buChar char="•"/>
+            </a:pPr>
+            <a:r>
+              <a:rPr lang="en-US" sz="1300" dirty="0">
+                <a:solidFill>
+                  <a:schemeClr val="tx1"/>
+                </a:solidFill>
+              </a:rPr>
+              <a:t>质量门：规则检查 + 科研审查员；工具失败不算“阴性结果”</a:t>
+            </a:r>
+            <a:endParaRPr lang="en-US" sz="1300" dirty="0"/>
+          </a:p>
+        </p:txBody>
+      </p:sp>
+      <p:sp>
+        <p:nvSpPr>
+          <p:cNvPr id="17" name="label-214"/>
+          <p:cNvSpPr txBox="1"/>
+          <p:nvPr/>
+        </p:nvSpPr>
+        <p:spPr>
+          <a:xfrm>
+            <a:off x="822960" y="5349240"/>
+            <a:ext cx="1620469" cy="411480"/>
+          </a:xfrm>
+          <a:prstGeom prst="rect">
+            <a:avLst/>
+          </a:prstGeom>
+          <a:noFill/>
+          <a:ln/>
+        </p:spPr>
+        <p:txBody>
+          <a:bodyPr wrap="square" lIns="0" tIns="0" rIns="0" bIns="0" rtlCol="0" anchor="t"/>
+          <a:lstStyle/>
+          <a:p>
+            <a:pPr algn="ctr" indent="0" marL="0">
+              <a:buNone/>
+            </a:pPr>
+            <a:r>
+              <a:rPr lang="en-US" sz="2000" b="1" dirty="0">
+                <a:solidFill>
+                  <a:schemeClr val="accent2"/>
+                </a:solidFill>
+              </a:rPr>
+              <a:t>26 位</a:t>
+            </a:r>
+            <a:endParaRPr lang="en-US" sz="2000" dirty="0"/>
+          </a:p>
+        </p:txBody>
+      </p:sp>
+      <p:sp>
+        <p:nvSpPr>
+          <p:cNvPr id="18" name="label-215"/>
+          <p:cNvSpPr txBox="1"/>
+          <p:nvPr/>
+        </p:nvSpPr>
+        <p:spPr>
+          <a:xfrm>
+            <a:off x="822960" y="5742432"/>
+            <a:ext cx="1620469" cy="274320"/>
+          </a:xfrm>
+          <a:prstGeom prst="rect">
+            <a:avLst/>
+          </a:prstGeom>
+          <a:noFill/>
+          <a:ln/>
+        </p:spPr>
+        <p:txBody>
+          <a:bodyPr wrap="square" lIns="0" tIns="0" rIns="0" bIns="0" rtlCol="0" anchor="t"/>
+          <a:lstStyle/>
+          <a:p>
+            <a:pPr algn="ctr" indent="0" marL="0">
+              <a:buNone/>
+            </a:pPr>
+            <a:r>
+              <a:rPr lang="en-US" sz="1150" dirty="0">
+                <a:solidFill>
+                  <a:schemeClr val="accent6"/>
+                </a:solidFill>
+              </a:rPr>
+              <a:t>领域专家</a:t>
+            </a:r>
+            <a:endParaRPr lang="en-US" sz="1150" dirty="0"/>
+          </a:p>
+        </p:txBody>
+      </p:sp>
+      <p:sp>
+        <p:nvSpPr>
+          <p:cNvPr id="19" name="label-216"/>
+          <p:cNvSpPr txBox="1"/>
+          <p:nvPr/>
+        </p:nvSpPr>
+        <p:spPr>
+          <a:xfrm>
+            <a:off x="2443429" y="5349240"/>
+            <a:ext cx="1620469" cy="411480"/>
+          </a:xfrm>
+          <a:prstGeom prst="rect">
+            <a:avLst/>
+          </a:prstGeom>
+          <a:noFill/>
+          <a:ln/>
+        </p:spPr>
+        <p:txBody>
+          <a:bodyPr wrap="square" lIns="0" tIns="0" rIns="0" bIns="0" rtlCol="0" anchor="t"/>
+          <a:lstStyle/>
+          <a:p>
+            <a:pPr algn="ctr" indent="0" marL="0">
+              <a:buNone/>
+            </a:pPr>
+            <a:r>
+              <a:rPr lang="en-US" sz="2000" b="1" dirty="0">
+                <a:solidFill>
+                  <a:schemeClr val="accent2"/>
+                </a:solidFill>
+              </a:rPr>
+              <a:t>15 个</a:t>
+            </a:r>
+            <a:endParaRPr lang="en-US" sz="2000" dirty="0"/>
+          </a:p>
+        </p:txBody>
+      </p:sp>
+      <p:sp>
+        <p:nvSpPr>
+          <p:cNvPr id="20" name="label-217"/>
+          <p:cNvSpPr txBox="1"/>
+          <p:nvPr/>
+        </p:nvSpPr>
+        <p:spPr>
+          <a:xfrm>
+            <a:off x="2443429" y="5742432"/>
+            <a:ext cx="1620469" cy="274320"/>
+          </a:xfrm>
+          <a:prstGeom prst="rect">
+            <a:avLst/>
+          </a:prstGeom>
+          <a:noFill/>
+          <a:ln/>
+        </p:spPr>
+        <p:txBody>
+          <a:bodyPr wrap="square" lIns="0" tIns="0" rIns="0" bIns="0" rtlCol="0" anchor="t"/>
+          <a:lstStyle/>
+          <a:p>
+            <a:pPr algn="ctr" indent="0" marL="0">
+              <a:buNone/>
+            </a:pPr>
+            <a:r>
+              <a:rPr lang="en-US" sz="1150" dirty="0">
+                <a:solidFill>
+                  <a:schemeClr val="accent6"/>
+                </a:solidFill>
+              </a:rPr>
+              <a:t>团队模板</a:t>
+            </a:r>
+            <a:endParaRPr lang="en-US" sz="1150" dirty="0"/>
+          </a:p>
+        </p:txBody>
+      </p:sp>
+      <p:sp>
+        <p:nvSpPr>
+          <p:cNvPr id="21" name="label-218"/>
+          <p:cNvSpPr txBox="1"/>
+          <p:nvPr/>
+        </p:nvSpPr>
+        <p:spPr>
+          <a:xfrm>
+            <a:off x="4063898" y="5349240"/>
+            <a:ext cx="1620469" cy="411480"/>
+          </a:xfrm>
+          <a:prstGeom prst="rect">
+            <a:avLst/>
+          </a:prstGeom>
+          <a:noFill/>
+          <a:ln/>
+        </p:spPr>
+        <p:txBody>
+          <a:bodyPr wrap="square" lIns="0" tIns="0" rIns="0" bIns="0" rtlCol="0" anchor="t"/>
+          <a:lstStyle/>
+          <a:p>
+            <a:pPr algn="ctr" indent="0" marL="0">
+              <a:buNone/>
+            </a:pPr>
+            <a:r>
+              <a:rPr lang="en-US" sz="2000" b="1" dirty="0">
+                <a:solidFill>
+                  <a:schemeClr val="accent2"/>
+                </a:solidFill>
+              </a:rPr>
+              <a:t>@</a:t>
+            </a:r>
+            <a:endParaRPr lang="en-US" sz="2000" dirty="0"/>
+          </a:p>
+        </p:txBody>
+      </p:sp>
+      <p:sp>
+        <p:nvSpPr>
+          <p:cNvPr id="22" name="label-219"/>
+          <p:cNvSpPr txBox="1"/>
+          <p:nvPr/>
+        </p:nvSpPr>
+        <p:spPr>
+          <a:xfrm>
+            <a:off x="4063898" y="5742432"/>
+            <a:ext cx="1620469" cy="274320"/>
+          </a:xfrm>
+          <a:prstGeom prst="rect">
+            <a:avLst/>
+          </a:prstGeom>
+          <a:noFill/>
+          <a:ln/>
+        </p:spPr>
+        <p:txBody>
+          <a:bodyPr wrap="square" lIns="0" tIns="0" rIns="0" bIns="0" rtlCol="0" anchor="t"/>
+          <a:lstStyle/>
+          <a:p>
+            <a:pPr algn="ctr" indent="0" marL="0">
+              <a:buNone/>
+            </a:pPr>
+            <a:r>
+              <a:rPr lang="en-US" sz="1150" dirty="0">
+                <a:solidFill>
+                  <a:schemeClr val="accent6"/>
+                </a:solidFill>
+              </a:rPr>
+              <a:t>直接点名专家</a:t>
+            </a:r>
+            <a:endParaRPr lang="en-US" sz="1150" dirty="0"/>
+          </a:p>
+        </p:txBody>
+      </p:sp>
+      <p:sp>
+        <p:nvSpPr>
+          <p:cNvPr id="23" name="card-220"/>
+          <p:cNvSpPr/>
+          <p:nvPr/>
+        </p:nvSpPr>
+        <p:spPr>
+          <a:xfrm>
+            <a:off x="6233008" y="1600200"/>
+            <a:ext cx="5410048" cy="4572000"/>
+          </a:xfrm>
+          <a:prstGeom prst="roundRect">
+            <a:avLst>
+              <a:gd name="adj" fmla="val 2000"/>
+            </a:avLst>
+          </a:prstGeom>
+          <a:solidFill>
+            <a:schemeClr val="bg2"/>
+          </a:solidFill>
+          <a:ln w="12700">
+            <a:solidFill>
+              <a:schemeClr val="bg2"/>
+            </a:solidFill>
+            <a:prstDash val="solid"/>
+          </a:ln>
+        </p:spPr>
+      </p:sp>
+      <p:sp>
+        <p:nvSpPr>
+          <p:cNvPr id="24" name="tag-221"/>
+          <p:cNvSpPr/>
+          <p:nvPr/>
+        </p:nvSpPr>
+        <p:spPr>
+          <a:xfrm>
+            <a:off x="6507328" y="1810512"/>
+            <a:ext cx="411480" cy="411480"/>
+          </a:xfrm>
+          <a:prstGeom prst="roundRect">
+            <a:avLst>
+              <a:gd name="adj" fmla="val 13333"/>
+            </a:avLst>
+          </a:prstGeom>
+          <a:solidFill>
+            <a:schemeClr val="accent3"/>
+          </a:solidFill>
+          <a:ln>
+            <a:solidFill>
+              <a:schemeClr val="accent3"/>
+            </a:solidFill>
+          </a:ln>
+        </p:spPr>
+        <p:txBody>
+          <a:bodyPr wrap="square" lIns="0" tIns="0" rIns="0" bIns="0" rtlCol="0" anchor="ctr"/>
+          <a:lstStyle/>
+          <a:p>
+            <a:pPr algn="ctr" indent="0" marL="0">
+              <a:buNone/>
+            </a:pPr>
+            <a:r>
+              <a:rPr lang="en-US" sz="1600" b="1" dirty="0">
+                <a:solidFill>
+                  <a:schemeClr val="bg1"/>
+                </a:solidFill>
+              </a:rPr>
+              <a:t>C</a:t>
+            </a:r>
+            <a:endParaRPr lang="en-US" sz="1600" dirty="0"/>
+          </a:p>
+        </p:txBody>
+      </p:sp>
+      <p:sp>
+        <p:nvSpPr>
+          <p:cNvPr id="25" name="label-222"/>
+          <p:cNvSpPr txBox="1"/>
+          <p:nvPr/>
+        </p:nvSpPr>
+        <p:spPr>
+          <a:xfrm>
+            <a:off x="7055968" y="1810512"/>
+            <a:ext cx="4312768" cy="411480"/>
+          </a:xfrm>
+          <a:prstGeom prst="rect">
+            <a:avLst/>
+          </a:prstGeom>
+          <a:noFill/>
+          <a:ln/>
+        </p:spPr>
+        <p:txBody>
+          <a:bodyPr wrap="square" lIns="0" tIns="0" rIns="0" bIns="0" rtlCol="0" anchor="ctr"/>
+          <a:lstStyle/>
+          <a:p>
             <a:pPr algn="l" indent="0" marL="0">
               <a:buNone/>
             </a:pPr>
             <a:r>
-              <a:rPr lang="en-US" sz="1200" dirty="0">
-                <a:solidFill>
-                  <a:schemeClr val="tx1"/>
-                </a:solidFill>
-              </a:rPr>
-              <a:t>安装后打开“运行时（模型配置）”，绑定本机 AI 命令行工具或填写模型 API。</a:t>
-            </a:r>
-            <a:endParaRPr lang="en-US" sz="1200" dirty="0"/>
-          </a:p>
-        </p:txBody>
-      </p:sp>
-      <p:sp>
-        <p:nvSpPr>
-          <p:cNvPr id="8" name="badge-202"/>
+              <a:rPr lang="en-US" sz="1700" b="1" dirty="0">
+                <a:solidFill>
+                  <a:schemeClr val="tx2"/>
+                </a:solidFill>
+              </a:rPr>
+              <a:t>本地运行时：直接用已有 AI 订阅</a:t>
+            </a:r>
+            <a:endParaRPr lang="en-US" sz="1700" dirty="0"/>
+          </a:p>
+        </p:txBody>
+      </p:sp>
+      <p:sp>
+        <p:nvSpPr>
+          <p:cNvPr id="26" name="box-223"/>
           <p:cNvSpPr/>
           <p:nvPr/>
         </p:nvSpPr>
         <p:spPr>
           <a:xfrm>
-            <a:off x="4353458" y="1901952"/>
-            <a:ext cx="347472" cy="347472"/>
-          </a:xfrm>
-          <a:prstGeom prst="ellipse">
-            <a:avLst/>
+            <a:off x="6507328" y="2697480"/>
+            <a:ext cx="1325880" cy="566928"/>
+          </a:xfrm>
+          <a:prstGeom prst="roundRect">
+            <a:avLst>
+              <a:gd name="adj" fmla="val 12903"/>
+            </a:avLst>
           </a:prstGeom>
           <a:solidFill>
-            <a:schemeClr val="accent2"/>
+            <a:schemeClr val="tx2"/>
           </a:solidFill>
           <a:ln w="6350">
             <a:solidFill>
-              <a:schemeClr val="accent2"/>
+              <a:schemeClr val="tx2"/>
             </a:solidFill>
           </a:ln>
         </p:spPr>
         <p:txBody>
-          <a:bodyPr wrap="square" lIns="0" tIns="0" rIns="0" bIns="0" rtlCol="0" anchor="ctr"/>
+          <a:bodyPr wrap="square" lIns="762" tIns="762" rIns="762" bIns="762" rtlCol="0" anchor="ctr"/>
           <a:lstStyle/>
           <a:p>
             <a:pPr algn="ctr" indent="0" marL="0">
               <a:buNone/>
             </a:pPr>
             <a:r>
-              <a:rPr lang="en-US" sz="1200" b="1" dirty="0">
+              <a:rPr lang="en-US" sz="1300" b="1" dirty="0">
                 <a:solidFill>
                   <a:schemeClr val="bg1"/>
                 </a:solidFill>
               </a:rPr>
-              <a:t>3</a:t>
-            </a:r>
-            <a:endParaRPr lang="en-US" sz="1200" dirty="0"/>
-          </a:p>
-        </p:txBody>
-      </p:sp>
-      <p:sp>
-        <p:nvSpPr>
-          <p:cNvPr id="9" name="label-203"/>
-          <p:cNvSpPr txBox="1"/>
-          <p:nvPr/>
-        </p:nvSpPr>
-        <p:spPr>
-          <a:xfrm>
-            <a:off x="4810658" y="1883664"/>
-            <a:ext cx="3027578" cy="384048"/>
-          </a:xfrm>
-          <a:prstGeom prst="rect">
+              <a:t>研究请求</a:t>
+            </a:r>
+            <a:endParaRPr lang="en-US" sz="1300" dirty="0"/>
+          </a:p>
+        </p:txBody>
+      </p:sp>
+      <p:sp>
+        <p:nvSpPr>
+          <p:cNvPr id="27" name="arrow-224"/>
+          <p:cNvSpPr/>
+          <p:nvPr/>
+        </p:nvSpPr>
+        <p:spPr>
+          <a:xfrm>
+            <a:off x="7833208" y="2980944"/>
+            <a:ext cx="274320" cy="0"/>
+          </a:xfrm>
+          <a:prstGeom prst="line">
             <a:avLst/>
           </a:prstGeom>
           <a:noFill/>
-          <a:ln/>
-        </p:spPr>
-        <p:txBody>
-          <a:bodyPr wrap="square" lIns="0" tIns="0" rIns="0" bIns="0" rtlCol="0" anchor="ctr"/>
-          <a:lstStyle/>
-          <a:p>
-            <a:pPr algn="l" indent="0" marL="0">
-              <a:buNone/>
-            </a:pPr>
-            <a:r>
-              <a:rPr lang="en-US" sz="1600" b="1" dirty="0">
-                <a:solidFill>
-                  <a:schemeClr val="tx2"/>
-                </a:solidFill>
-              </a:rPr>
-              <a:t>提问</a:t>
-            </a:r>
-            <a:endParaRPr lang="en-US" sz="1600" dirty="0"/>
-          </a:p>
-        </p:txBody>
-      </p:sp>
-      <p:sp>
-        <p:nvSpPr>
-          <p:cNvPr id="10" name="label-204"/>
-          <p:cNvSpPr txBox="1"/>
-          <p:nvPr/>
-        </p:nvSpPr>
-        <p:spPr>
-          <a:xfrm>
-            <a:off x="4353458" y="2304288"/>
-            <a:ext cx="3484778" cy="502920"/>
-          </a:xfrm>
-          <a:prstGeom prst="rect">
-            <a:avLst/>
-          </a:prstGeom>
-          <a:noFill/>
-          <a:ln/>
-        </p:spPr>
-        <p:txBody>
-          <a:bodyPr wrap="square" lIns="0" tIns="0" rIns="0" bIns="0" rtlCol="0" anchor="t"/>
-          <a:lstStyle/>
-          <a:p>
-            <a:pPr algn="l" indent="0" marL="0">
-              <a:buNone/>
-            </a:pPr>
-            <a:r>
-              <a:rPr lang="en-US" sz="1200" dirty="0">
-                <a:solidFill>
-                  <a:schemeClr val="tx1"/>
-                </a:solidFill>
-              </a:rPr>
-              <a:t>直接提问；输入 @ 点名专家，或交给科研小队。</a:t>
-            </a:r>
-            <a:endParaRPr lang="en-US" sz="1200" dirty="0"/>
-          </a:p>
-        </p:txBody>
-      </p:sp>
-      <p:sp>
-        <p:nvSpPr>
-          <p:cNvPr id="11" name="badge-205"/>
+          <a:ln w="19050">
+            <a:solidFill>
+              <a:schemeClr val="accent6"/>
+            </a:solidFill>
+            <a:prstDash val="solid"/>
+            <a:tailEnd type="triangle"/>
+          </a:ln>
+        </p:spPr>
+      </p:sp>
+      <p:sp>
+        <p:nvSpPr>
+          <p:cNvPr id="28" name="box-225"/>
           <p:cNvSpPr/>
           <p:nvPr/>
         </p:nvSpPr>
         <p:spPr>
           <a:xfrm>
-            <a:off x="8158277" y="1901952"/>
-            <a:ext cx="347472" cy="347472"/>
-          </a:xfrm>
-          <a:prstGeom prst="ellipse">
-            <a:avLst/>
+            <a:off x="8107528" y="2697480"/>
+            <a:ext cx="1143000" cy="566928"/>
+          </a:xfrm>
+          <a:prstGeom prst="roundRect">
+            <a:avLst>
+              <a:gd name="adj" fmla="val 12903"/>
+            </a:avLst>
           </a:prstGeom>
           <a:solidFill>
-            <a:schemeClr val="accent2"/>
+            <a:schemeClr val="accent6"/>
           </a:solidFill>
           <a:ln w="6350">
             <a:solidFill>
-              <a:schemeClr val="accent2"/>
+              <a:schemeClr val="accent6"/>
             </a:solidFill>
           </a:ln>
         </p:spPr>
         <p:txBody>
-          <a:bodyPr wrap="square" lIns="0" tIns="0" rIns="0" bIns="0" rtlCol="0" anchor="ctr"/>
+          <a:bodyPr wrap="square" lIns="762" tIns="762" rIns="762" bIns="762" rtlCol="0" anchor="ctr"/>
           <a:lstStyle/>
           <a:p>
             <a:pPr algn="ctr" indent="0" marL="0">
               <a:buNone/>
             </a:pPr>
             <a:r>
-              <a:rPr lang="en-US" sz="1200" b="1" dirty="0">
+              <a:rPr lang="en-US" sz="1300" b="1" dirty="0">
                 <a:solidFill>
                   <a:schemeClr val="bg1"/>
                 </a:solidFill>
               </a:rPr>
-              <a:t>4</a:t>
-            </a:r>
-            <a:endParaRPr lang="en-US" sz="1200" dirty="0"/>
-          </a:p>
-        </p:txBody>
-      </p:sp>
-      <p:sp>
-        <p:nvSpPr>
-          <p:cNvPr id="12" name="label-206"/>
-          <p:cNvSpPr txBox="1"/>
-          <p:nvPr/>
-        </p:nvSpPr>
-        <p:spPr>
-          <a:xfrm>
-            <a:off x="8615477" y="1883664"/>
-            <a:ext cx="3027578" cy="384048"/>
-          </a:xfrm>
-          <a:prstGeom prst="rect">
+              <a:t>执行路由</a:t>
+            </a:r>
+            <a:endParaRPr lang="en-US" sz="1300" dirty="0"/>
+          </a:p>
+        </p:txBody>
+      </p:sp>
+      <p:sp>
+        <p:nvSpPr>
+          <p:cNvPr id="29" name="arrow-226"/>
+          <p:cNvSpPr/>
+          <p:nvPr/>
+        </p:nvSpPr>
+        <p:spPr>
+          <a:xfrm flipV="1">
+            <a:off x="9250528" y="2587752"/>
+            <a:ext cx="320040" cy="292608"/>
+          </a:xfrm>
+          <a:prstGeom prst="line">
             <a:avLst/>
           </a:prstGeom>
           <a:noFill/>
-          <a:ln/>
-        </p:spPr>
-        <p:txBody>
-          <a:bodyPr wrap="square" lIns="0" tIns="0" rIns="0" bIns="0" rtlCol="0" anchor="ctr"/>
-          <a:lstStyle/>
-          <a:p>
-            <a:pPr algn="l" indent="0" marL="0">
-              <a:buNone/>
-            </a:pPr>
-            <a:r>
-              <a:rPr lang="en-US" sz="1600" b="1" dirty="0">
-                <a:solidFill>
-                  <a:schemeClr val="tx2"/>
-                </a:solidFill>
-              </a:rPr>
-              <a:t>查看证据</a:t>
-            </a:r>
-            <a:endParaRPr lang="en-US" sz="1600" dirty="0"/>
-          </a:p>
-        </p:txBody>
-      </p:sp>
-      <p:sp>
-        <p:nvSpPr>
-          <p:cNvPr id="13" name="label-207"/>
-          <p:cNvSpPr txBox="1"/>
-          <p:nvPr/>
-        </p:nvSpPr>
-        <p:spPr>
-          <a:xfrm>
-            <a:off x="8158277" y="2304288"/>
-            <a:ext cx="3484778" cy="502920"/>
-          </a:xfrm>
-          <a:prstGeom prst="rect">
+          <a:ln w="19050">
+            <a:solidFill>
+              <a:schemeClr val="accent6"/>
+            </a:solidFill>
+            <a:prstDash val="solid"/>
+            <a:tailEnd type="triangle"/>
+          </a:ln>
+        </p:spPr>
+      </p:sp>
+      <p:sp>
+        <p:nvSpPr>
+          <p:cNvPr id="30" name="arrow-227"/>
+          <p:cNvSpPr/>
+          <p:nvPr/>
+        </p:nvSpPr>
+        <p:spPr>
+          <a:xfrm>
+            <a:off x="9250528" y="3081528"/>
+            <a:ext cx="320040" cy="301752"/>
+          </a:xfrm>
+          <a:prstGeom prst="line">
             <a:avLst/>
           </a:prstGeom>
           <a:noFill/>
-          <a:ln/>
-        </p:spPr>
-        <p:txBody>
-          <a:bodyPr wrap="square" lIns="0" tIns="0" rIns="0" bIns="0" rtlCol="0" anchor="t"/>
-          <a:lstStyle/>
-          <a:p>
-            <a:pPr algn="l" indent="0" marL="0">
-              <a:buNone/>
-            </a:pPr>
-            <a:r>
-              <a:rPr lang="en-US" sz="1200" dirty="0">
-                <a:solidFill>
-                  <a:schemeClr val="tx1"/>
-                </a:solidFill>
-              </a:rPr>
-              <a:t>在“证据账本”查看每条证据的状态、来源与历史。</a:t>
-            </a:r>
-            <a:endParaRPr lang="en-US" sz="1200" dirty="0"/>
-          </a:p>
-        </p:txBody>
-      </p:sp>
-      <p:pic>
-        <p:nvPicPr>
-          <p:cNvPr id="14" name="screenshot-208" descr="自动检测到本机的 Claude Code">    </p:cNvPr>
-          <p:cNvPicPr>
-            <a:picLocks noChangeAspect="1"/>
-          </p:cNvPicPr>
-          <p:nvPr/>
-        </p:nvPicPr>
-        <p:blipFill>
-          <a:blip r:embed="rId1"/>
-          <a:stretch>
-            <a:fillRect/>
-          </a:stretch>
-        </p:blipFill>
-        <p:spPr>
-          <a:xfrm>
-            <a:off x="927854" y="2880360"/>
-            <a:ext cx="2726350" cy="2834640"/>
-          </a:xfrm>
-          <a:prstGeom prst="rect">
-            <a:avLst/>
-          </a:prstGeom>
-        </p:spPr>
-      </p:pic>
-      <p:sp>
-        <p:nvSpPr>
-          <p:cNvPr id="15" name="frame-209"/>
+          <a:ln w="19050">
+            <a:solidFill>
+              <a:schemeClr val="accent6"/>
+            </a:solidFill>
+            <a:prstDash val="solid"/>
+            <a:tailEnd type="triangle"/>
+          </a:ln>
+        </p:spPr>
+      </p:sp>
+      <p:sp>
+        <p:nvSpPr>
+          <p:cNvPr id="31" name="box-228"/>
           <p:cNvSpPr/>
           <p:nvPr/>
         </p:nvSpPr>
         <p:spPr>
           <a:xfrm>
-            <a:off x="927854" y="2880360"/>
-            <a:ext cx="2726350" cy="2834640"/>
-          </a:xfrm>
-          <a:prstGeom prst="rect">
-            <a:avLst/>
+            <a:off x="9570568" y="2377440"/>
+            <a:ext cx="1798168" cy="457200"/>
+          </a:xfrm>
+          <a:prstGeom prst="roundRect">
+            <a:avLst>
+              <a:gd name="adj" fmla="val 16000"/>
+            </a:avLst>
           </a:prstGeom>
           <a:solidFill>
-            <a:srgbClr val="FFFFFF">
-              <a:alpha val="0"/>
-            </a:srgbClr>
+            <a:schemeClr val="bg1"/>
           </a:solidFill>
-          <a:ln w="9525">
+          <a:ln w="12700">
             <a:solidFill>
               <a:srgbClr val="D5DCE4"/>
             </a:solidFill>
-            <a:prstDash val="solid"/>
           </a:ln>
         </p:spPr>
-      </p:sp>
-      <p:sp>
-        <p:nvSpPr>
-          <p:cNvPr id="16" name="label-210"/>
+        <p:txBody>
+          <a:bodyPr wrap="square" lIns="762" tIns="762" rIns="762" bIns="762" rtlCol="0" anchor="ctr"/>
+          <a:lstStyle/>
+          <a:p>
+            <a:pPr algn="ctr" indent="0" marL="0">
+              <a:buNone/>
+            </a:pPr>
+            <a:r>
+              <a:rPr lang="en-US" sz="1200" dirty="0">
+                <a:solidFill>
+                  <a:schemeClr val="tx2"/>
+                </a:solidFill>
+              </a:rPr>
+              <a:t>模型 API · 按调用计费</a:t>
+            </a:r>
+            <a:endParaRPr lang="en-US" sz="1200" dirty="0"/>
+          </a:p>
+        </p:txBody>
+      </p:sp>
+      <p:sp>
+        <p:nvSpPr>
+          <p:cNvPr id="32" name="box-229"/>
+          <p:cNvSpPr/>
+          <p:nvPr/>
+        </p:nvSpPr>
+        <p:spPr>
+          <a:xfrm>
+            <a:off x="9570568" y="3154680"/>
+            <a:ext cx="1798168" cy="457200"/>
+          </a:xfrm>
+          <a:prstGeom prst="roundRect">
+            <a:avLst>
+              <a:gd name="adj" fmla="val 16000"/>
+            </a:avLst>
+          </a:prstGeom>
+          <a:solidFill>
+            <a:schemeClr val="accent3"/>
+          </a:solidFill>
+          <a:ln w="6350">
+            <a:solidFill>
+              <a:schemeClr val="accent3"/>
+            </a:solidFill>
+          </a:ln>
+        </p:spPr>
+        <p:txBody>
+          <a:bodyPr wrap="square" lIns="762" tIns="762" rIns="762" bIns="762" rtlCol="0" anchor="ctr"/>
+          <a:lstStyle/>
+          <a:p>
+            <a:pPr algn="ctr" indent="0" marL="0">
+              <a:buNone/>
+            </a:pPr>
+            <a:r>
+              <a:rPr lang="en-US" sz="1200" b="1" dirty="0">
+                <a:solidFill>
+                  <a:schemeClr val="bg1"/>
+                </a:solidFill>
+              </a:rPr>
+              <a:t>本地 CLI · 用已有订阅</a:t>
+            </a:r>
+            <a:endParaRPr lang="en-US" sz="1200" dirty="0"/>
+          </a:p>
+        </p:txBody>
+      </p:sp>
+      <p:sp>
+        <p:nvSpPr>
+          <p:cNvPr id="33" name="bullets-230"/>
           <p:cNvSpPr txBox="1"/>
           <p:nvPr/>
         </p:nvSpPr>
         <p:spPr>
           <a:xfrm>
-            <a:off x="927854" y="5788152"/>
-            <a:ext cx="2726350" cy="292608"/>
+            <a:off x="6507328" y="3886200"/>
+            <a:ext cx="4861408" cy="1828800"/>
           </a:xfrm>
           <a:prstGeom prst="rect">
             <a:avLst/>
@@ -15439,133 +18216,71 @@
           <a:bodyPr wrap="square" lIns="0" tIns="0" rIns="0" bIns="0" rtlCol="0" anchor="t"/>
           <a:lstStyle/>
           <a:p>
-            <a:pPr algn="ctr" indent="0" marL="0">
-              <a:buNone/>
-            </a:pPr>
-            <a:r>
-              <a:rPr lang="en-US" sz="1100" dirty="0">
-                <a:solidFill>
-                  <a:schemeClr val="accent6"/>
-                </a:solidFill>
-              </a:rPr>
-              <a:t>自动检测到本机的 Claude Code</a:t>
-            </a:r>
-            <a:endParaRPr lang="en-US" sz="1100" dirty="0"/>
-          </a:p>
-        </p:txBody>
-      </p:sp>
-      <p:pic>
-        <p:nvPicPr>
-          <p:cNvPr id="17" name="screenshot-211" descr="usage-ask-mention.jpg">    </p:cNvPr>
-          <p:cNvPicPr>
-            <a:picLocks noChangeAspect="1"/>
-          </p:cNvPicPr>
-          <p:nvPr/>
-        </p:nvPicPr>
-        <p:blipFill>
-          <a:blip r:embed="rId2"/>
-          <a:stretch>
-            <a:fillRect/>
-          </a:stretch>
-        </p:blipFill>
-        <p:spPr>
-          <a:xfrm>
-            <a:off x="4353458" y="2880360"/>
-            <a:ext cx="3484778" cy="867323"/>
-          </a:xfrm>
-          <a:prstGeom prst="rect">
-            <a:avLst/>
-          </a:prstGeom>
-        </p:spPr>
-      </p:pic>
-      <p:sp>
-        <p:nvSpPr>
-          <p:cNvPr id="18" name="frame-212"/>
-          <p:cNvSpPr/>
-          <p:nvPr/>
-        </p:nvSpPr>
-        <p:spPr>
-          <a:xfrm>
-            <a:off x="4353458" y="2880360"/>
-            <a:ext cx="3484778" cy="867323"/>
-          </a:xfrm>
-          <a:prstGeom prst="rect">
-            <a:avLst/>
-          </a:prstGeom>
-          <a:solidFill>
-            <a:srgbClr val="FFFFFF">
-              <a:alpha val="0"/>
-            </a:srgbClr>
-          </a:solidFill>
-          <a:ln w="9525">
-            <a:solidFill>
-              <a:srgbClr val="D5DCE4"/>
-            </a:solidFill>
-            <a:prstDash val="solid"/>
-          </a:ln>
-        </p:spPr>
-      </p:sp>
-      <p:pic>
-        <p:nvPicPr>
-          <p:cNvPr id="19" name="screenshot-213" descr="@ 点名专家；工具调用逐步可查">    </p:cNvPr>
-          <p:cNvPicPr>
-            <a:picLocks noChangeAspect="1"/>
-          </p:cNvPicPr>
-          <p:nvPr/>
-        </p:nvPicPr>
-        <p:blipFill>
-          <a:blip r:embed="rId3"/>
-          <a:stretch>
-            <a:fillRect/>
-          </a:stretch>
-        </p:blipFill>
-        <p:spPr>
-          <a:xfrm>
-            <a:off x="4353458" y="3931920"/>
-            <a:ext cx="3484778" cy="1184825"/>
-          </a:xfrm>
-          <a:prstGeom prst="rect">
-            <a:avLst/>
-          </a:prstGeom>
-        </p:spPr>
-      </p:pic>
-      <p:sp>
-        <p:nvSpPr>
-          <p:cNvPr id="20" name="frame-214"/>
-          <p:cNvSpPr/>
-          <p:nvPr/>
-        </p:nvSpPr>
-        <p:spPr>
-          <a:xfrm>
-            <a:off x="4353458" y="3931920"/>
-            <a:ext cx="3484778" cy="1184825"/>
-          </a:xfrm>
-          <a:prstGeom prst="rect">
-            <a:avLst/>
-          </a:prstGeom>
-          <a:solidFill>
-            <a:srgbClr val="FFFFFF">
-              <a:alpha val="0"/>
-            </a:srgbClr>
-          </a:solidFill>
-          <a:ln w="9525">
-            <a:solidFill>
-              <a:srgbClr val="D5DCE4"/>
-            </a:solidFill>
-            <a:prstDash val="solid"/>
-          </a:ln>
-        </p:spPr>
-      </p:sp>
-      <p:sp>
-        <p:nvSpPr>
-          <p:cNvPr id="21" name="label-215"/>
+            <a:pPr marL="177800" indent="-177800">
+              <a:spcAft>
+                <a:spcPts val="800"/>
+              </a:spcAft>
+              <a:buSzPct val="100000"/>
+              <a:buChar char="•"/>
+            </a:pPr>
+            <a:r>
+              <a:rPr lang="en-US" sz="1300" dirty="0">
+                <a:solidFill>
+                  <a:schemeClr val="tx1"/>
+                </a:solidFill>
+              </a:rPr>
+              <a:t>自动检测本机已登录的 26 种 AI 命令行工具（如 Codex、Claude Code）</a:t>
+            </a:r>
+            <a:endParaRPr lang="en-US" sz="1300" dirty="0"/>
+          </a:p>
+          <a:p>
+            <a:pPr marL="177800" indent="-177800">
+              <a:spcAft>
+                <a:spcPts val="800"/>
+              </a:spcAft>
+              <a:buSzPct val="100000"/>
+              <a:buChar char="•"/>
+            </a:pPr>
+            <a:r>
+              <a:rPr lang="en-US" sz="1300" dirty="0">
+                <a:solidFill>
+                  <a:schemeClr val="tx1"/>
+                </a:solidFill>
+              </a:rPr>
+              <a:t>每个会话独立配置目录，不混入日常使用记录</a:t>
+            </a:r>
+            <a:endParaRPr lang="en-US" sz="1300" dirty="0"/>
+          </a:p>
+          <a:p>
+            <a:pPr marL="177800" indent="-177800">
+              <a:spcAft>
+                <a:spcPts val="800"/>
+              </a:spcAft>
+              <a:buSzPct val="100000"/>
+              <a:buChar char="•"/>
+            </a:pPr>
+            <a:r>
+              <a:rPr lang="en-US" sz="1300" dirty="0">
+                <a:solidFill>
+                  <a:schemeClr val="tx1"/>
+                </a:solidFill>
+              </a:rPr>
+              <a:t>执行命令前先征得同意（Codex 全流程支持）；数据留在本机</a:t>
+            </a:r>
+            <a:endParaRPr lang="en-US" sz="1300" dirty="0"/>
+          </a:p>
+        </p:txBody>
+      </p:sp>
+      <p:sp>
+        <p:nvSpPr>
+          <p:cNvPr id="34" name="label-231"/>
           <p:cNvSpPr txBox="1"/>
           <p:nvPr/>
         </p:nvSpPr>
         <p:spPr>
           <a:xfrm>
-            <a:off x="4353458" y="5189897"/>
-            <a:ext cx="3484778" cy="292608"/>
+            <a:off x="6507328" y="5532120"/>
+            <a:ext cx="4861408" cy="548640"/>
           </a:xfrm>
           <a:prstGeom prst="rect">
             <a:avLst/>
@@ -15577,139 +18292,16 @@
           <a:bodyPr wrap="square" lIns="0" tIns="0" rIns="0" bIns="0" rtlCol="0" anchor="t"/>
           <a:lstStyle/>
           <a:p>
-            <a:pPr algn="ctr" indent="0" marL="0">
-              <a:buNone/>
-            </a:pPr>
-            <a:r>
-              <a:rPr lang="en-US" sz="1100" dirty="0">
+            <a:pPr algn="l" indent="0" marL="0">
+              <a:buNone/>
+            </a:pPr>
+            <a:r>
+              <a:rPr lang="en-US" sz="1050" dirty="0">
                 <a:solidFill>
                   <a:schemeClr val="accent6"/>
                 </a:solidFill>
               </a:rPr>
-              <a:t>@ 点名专家；工具调用逐步可查</a:t>
-            </a:r>
-            <a:endParaRPr lang="en-US" sz="1100" dirty="0"/>
-          </a:p>
-        </p:txBody>
-      </p:sp>
-      <p:pic>
-        <p:nvPicPr>
-          <p:cNvPr id="22" name="screenshot-216" descr="证据账本：状态、来源、完整历史">    </p:cNvPr>
-          <p:cNvPicPr>
-            <a:picLocks noChangeAspect="1"/>
-          </p:cNvPicPr>
-          <p:nvPr/>
-        </p:nvPicPr>
-        <p:blipFill>
-          <a:blip r:embed="rId4"/>
-          <a:stretch>
-            <a:fillRect/>
-          </a:stretch>
-        </p:blipFill>
-        <p:spPr>
-          <a:xfrm>
-            <a:off x="8158277" y="2880360"/>
-            <a:ext cx="3484778" cy="2462577"/>
-          </a:xfrm>
-          <a:prstGeom prst="rect">
-            <a:avLst/>
-          </a:prstGeom>
-        </p:spPr>
-      </p:pic>
-      <p:sp>
-        <p:nvSpPr>
-          <p:cNvPr id="23" name="frame-217"/>
-          <p:cNvSpPr/>
-          <p:nvPr/>
-        </p:nvSpPr>
-        <p:spPr>
-          <a:xfrm>
-            <a:off x="8158277" y="2880360"/>
-            <a:ext cx="3484778" cy="2462577"/>
-          </a:xfrm>
-          <a:prstGeom prst="rect">
-            <a:avLst/>
-          </a:prstGeom>
-          <a:solidFill>
-            <a:srgbClr val="FFFFFF">
-              <a:alpha val="0"/>
-            </a:srgbClr>
-          </a:solidFill>
-          <a:ln w="9525">
-            <a:solidFill>
-              <a:srgbClr val="D5DCE4"/>
-            </a:solidFill>
-            <a:prstDash val="solid"/>
-          </a:ln>
-        </p:spPr>
-      </p:sp>
-      <p:sp>
-        <p:nvSpPr>
-          <p:cNvPr id="24" name="label-218"/>
-          <p:cNvSpPr txBox="1"/>
-          <p:nvPr/>
-        </p:nvSpPr>
-        <p:spPr>
-          <a:xfrm>
-            <a:off x="8158277" y="5416089"/>
-            <a:ext cx="3484778" cy="292608"/>
-          </a:xfrm>
-          <a:prstGeom prst="rect">
-            <a:avLst/>
-          </a:prstGeom>
-          <a:noFill/>
-          <a:ln/>
-        </p:spPr>
-        <p:txBody>
-          <a:bodyPr wrap="square" lIns="0" tIns="0" rIns="0" bIns="0" rtlCol="0" anchor="t"/>
-          <a:lstStyle/>
-          <a:p>
-            <a:pPr algn="ctr" indent="0" marL="0">
-              <a:buNone/>
-            </a:pPr>
-            <a:r>
-              <a:rPr lang="en-US" sz="1100" dirty="0">
-                <a:solidFill>
-                  <a:schemeClr val="accent6"/>
-                </a:solidFill>
-              </a:rPr>
-              <a:t>证据账本：状态、来源、完整历史</a:t>
-            </a:r>
-            <a:endParaRPr lang="en-US" sz="1100" dirty="0"/>
-          </a:p>
-        </p:txBody>
-      </p:sp>
-      <p:sp>
-        <p:nvSpPr>
-          <p:cNvPr id="25" name="label-219"/>
-          <p:cNvSpPr txBox="1"/>
-          <p:nvPr/>
-        </p:nvSpPr>
-        <p:spPr>
-          <a:xfrm>
-            <a:off x="548640" y="6172200"/>
-            <a:ext cx="11094415" cy="256032"/>
-          </a:xfrm>
-          <a:prstGeom prst="rect">
-            <a:avLst/>
-          </a:prstGeom>
-          <a:noFill/>
-          <a:ln/>
-        </p:spPr>
-        <p:txBody>
-          <a:bodyPr wrap="square" lIns="0" tIns="0" rIns="0" bIns="0" rtlCol="0" anchor="t"/>
-          <a:lstStyle/>
-          <a:p>
-            <a:pPr algn="l" indent="0" marL="0">
-              <a:buNone/>
-            </a:pPr>
-            <a:r>
-              <a:rPr lang="en-US" sz="1050" dirty="0">
-                <a:solidFill>
-                  <a:schemeClr val="accent6"/>
-                </a:solidFill>
-              </a:rPr>
-              <a:t>演示环境使用离线示例模型生成文字；文献为 PubMed 实时检索结果。</a:t>
+              <a:t>说明：Codex 走完整协议并支持审批；Claude Code 已验证会话隔离；其余工具为通用接入。使用前请确认订阅条款允许此类用法。</a:t>
             </a:r>
             <a:endParaRPr lang="en-US" sz="1050" dirty="0"/>
           </a:p>

--- a/docs/presentation/MedScience-3.0-设计汇报.pptx
+++ b/docs/presentation/MedScience-3.0-设计汇报.pptx
@@ -117,18 +117,18 @@
   <p:extLst>
     <p:ext uri="{521415D9-36F7-43E2-AB2F-B90AF26B5E84}">
       <p14:sectionLst xmlns:p14="http://schemas.microsoft.com/office/powerpoint/2010/main">
-        <p14:section name="开篇" id="{acb74e37-9c4e-7c4f-c908-bac3683bfd3d}">
+        <p14:section name="开篇" id="{3344a67d-bd4a-7f3b-5340-2f0a79df02d5}">
           <p14:sldIdLst>
             <p14:sldId id="256"/>
           </p14:sldIdLst>
         </p14:section>
-        <p14:section name="为什么" id="{b1d40a9f-efc3-837c-6c94-e791f2897bfb}">
+        <p14:section name="为什么" id="{6e04994c-9219-a7e8-dfb3-f7ddfd875bfd}">
           <p14:sldIdLst>
             <p14:sldId id="257"/>
             <p14:sldId id="258"/>
           </p14:sldIdLst>
         </p14:section>
-        <p14:section name="怎么设计" id="{51d15244-e086-9867-c2ec-c2686594f1a6}">
+        <p14:section name="怎么设计" id="{2f1c2109-ddf4-2d16-c4b2-19ed87b4fb3b}">
           <p14:sldIdLst>
             <p14:sldId id="259"/>
             <p14:sldId id="260"/>
@@ -138,12 +138,12 @@
             <p14:sldId id="264"/>
           </p14:sldIdLst>
         </p14:section>
-        <p14:section name="怎么用" id="{028fb603-29a9-7cd6-c483-2ce86833ef5c}">
+        <p14:section name="怎么用" id="{8e09d48f-5af5-0287-e113-fcf3a9978b9a}">
           <p14:sldIdLst>
             <p14:sldId id="265"/>
           </p14:sldIdLst>
         </p14:section>
-        <p14:section name="下一步" id="{00ddf30f-863a-08a1-7a12-cb7de6a2ec62}">
+        <p14:section name="下一步" id="{10669b09-44b0-5cfd-4397-7738921c832d}">
           <p14:sldIdLst>
             <p14:sldId id="266"/>
           </p14:sldIdLst>
@@ -728,7 +728,7 @@
           <a:p>
             <a:r>
               <a:rPr lang="en-US" dirty="0"/>
-              <a:t>最后是进展和请求。设计已全部落地并发布，可以下载试用；尚待验证的是有效性。最需要的支持是领域专家标注一批真实假设，用于校准和评测，然后做同等预算的对照实验，结果稳定后发布正式版并整理论文。</a:t>
+              <a:t>最后是进展和请求。设计已全部落地并发布，可以下载试用；尚待验证的是有效性。最需要的支持是领域专家标注一批真实假设，用于校准和评测，然后做同等预算的对照实验；同时把查询改为按“靶点–疾病”进行，优先取遗传学和动物模型证据，这一点已有实测数据支持。结果稳定后发布正式版并整理论文。</a:t>
             </a:r>
             <a:endParaRPr lang="en-US" dirty="0"/>
           </a:p>
@@ -1344,7 +1344,7 @@
           <a:p>
             <a:r>
               <a:rPr lang="en-US" dirty="0"/>
-              <a:t>左边是信息增益取证。先用类比：医生分辨流感和感冒，量体温没用，因为两种病都发烧；流感抗原检测结果差别大，所以先做。信息增益就是给每项查询“能把两种可能分开多少”打分。例子是“GLP-1 受体激动剂可用于减重”，起点五五开。看表格：查靶点序列，假设成立时 95% 能查到，不成立时也有 80%，差别很小，相当于量体温；查强活性药物，成立时 60%、不成立时只有 10%，差别最大，所以先查。实际过程：查到司美格鲁肽对 GLP-1 受体亲和力 0.38 纳摩尔，支持概率从 0.50 升到 0.86；再查到三期试验 STEP 1，升到 0.95，分歧度从 1.0 降到 0.28。技术上，分歧度是当前判断的熵除以最大熵，信息增益是查询前的熵减去查询后平均剩余的熵，单位是比特；概率表目前是人工设定的先验，正式实验前要用标注数据估计，所以第一步的增益与具体药物无关。右边是共形三分判定：用一批已知结果的历史假设校准，结论以“可能成立的结果集合”给出，集合里只有一个答案才下结论；两个都可能就是证据不足。校准后错误率有统计保证，没校准时系统会明确说明。</a:t>
+              <a:t>左边是信息增益取证。先用类比：量体温分不开流感和感冒，抗原检测才分得开；信息增益就是给每项查询“能把有效和无效分开多少”打分。原来的概率表是人工设定的，我们用真实数据做了实测：一组是已有获批药物的靶点，一组是药物因疗效不足在二、三期试验中失败、至今没有获批药物的靶点。结果是，只看靶点本身的三种查询——查序列、查临床试验、查化合物活性——两组几乎一样，信息增益接近 0。原因不难理解：能走到二、三期的靶点本来就都有强效化合物，活性说明能不能成药，不说明有没有效。看靶点和这个疾病之间的关系就不一样了：有动物模型证据的比例是 38% 对 17%，有人类遗传学证据的是 35% 对 17%，这和 Nature 2024 的结论一致，有遗传学支持的药物机制成功率高 2.6 倍。所以改进方向是把查询从“按靶点”改成“按靶点和疾病”。需要说明两点：第一，样本还小，动物模型差异显著，遗传学接近显著；第二，系统目前还是按靶点查询，这项改进放在下一版。关于普适性：计算方法是通用的，但概率表和具体该查什么，随问题类型而定；换一类问题，比如生物标志物的诊断价值，需要用这一类已知答案的案例重新实测一次，流程和代码不变。右边是共形三分判定：用一批已知结果的历史假设校准，结论以“可能成立的结果集合”给出，集合里只有一个答案才下结论；两个都可能就是证据不足。校准后错误率有统计保证，没校准时系统会明确说明。</a:t>
             </a:r>
             <a:endParaRPr lang="en-US" dirty="0"/>
           </a:p>
@@ -2415,7 +2415,7 @@
       </p:sp>
       <p:sp>
         <p:nvSpPr>
-          <p:cNvPr id="4" name="label-232"/>
+          <p:cNvPr id="4" name="label-239"/>
           <p:cNvSpPr txBox="1"/>
           <p:nvPr/>
         </p:nvSpPr>
@@ -2451,7 +2451,7 @@
       </p:sp>
       <p:sp>
         <p:nvSpPr>
-          <p:cNvPr id="5" name="badge-233"/>
+          <p:cNvPr id="5" name="badge-240"/>
           <p:cNvSpPr/>
           <p:nvPr/>
         </p:nvSpPr>
@@ -2493,7 +2493,7 @@
       </p:sp>
       <p:sp>
         <p:nvSpPr>
-          <p:cNvPr id="6" name="label-234"/>
+          <p:cNvPr id="6" name="label-241"/>
           <p:cNvSpPr txBox="1"/>
           <p:nvPr/>
         </p:nvSpPr>
@@ -2529,7 +2529,7 @@
       </p:sp>
       <p:sp>
         <p:nvSpPr>
-          <p:cNvPr id="7" name="label-235"/>
+          <p:cNvPr id="7" name="label-242"/>
           <p:cNvSpPr txBox="1"/>
           <p:nvPr/>
         </p:nvSpPr>
@@ -2565,7 +2565,7 @@
       </p:sp>
       <p:sp>
         <p:nvSpPr>
-          <p:cNvPr id="8" name="badge-236"/>
+          <p:cNvPr id="8" name="badge-243"/>
           <p:cNvSpPr/>
           <p:nvPr/>
         </p:nvSpPr>
@@ -2607,7 +2607,7 @@
       </p:sp>
       <p:sp>
         <p:nvSpPr>
-          <p:cNvPr id="9" name="label-237"/>
+          <p:cNvPr id="9" name="label-244"/>
           <p:cNvSpPr txBox="1"/>
           <p:nvPr/>
         </p:nvSpPr>
@@ -2643,7 +2643,7 @@
       </p:sp>
       <p:sp>
         <p:nvSpPr>
-          <p:cNvPr id="10" name="label-238"/>
+          <p:cNvPr id="10" name="label-245"/>
           <p:cNvSpPr txBox="1"/>
           <p:nvPr/>
         </p:nvSpPr>
@@ -2679,7 +2679,7 @@
       </p:sp>
       <p:sp>
         <p:nvSpPr>
-          <p:cNvPr id="11" name="badge-239"/>
+          <p:cNvPr id="11" name="badge-246"/>
           <p:cNvSpPr/>
           <p:nvPr/>
         </p:nvSpPr>
@@ -2721,7 +2721,7 @@
       </p:sp>
       <p:sp>
         <p:nvSpPr>
-          <p:cNvPr id="12" name="label-240"/>
+          <p:cNvPr id="12" name="label-247"/>
           <p:cNvSpPr txBox="1"/>
           <p:nvPr/>
         </p:nvSpPr>
@@ -2757,7 +2757,7 @@
       </p:sp>
       <p:sp>
         <p:nvSpPr>
-          <p:cNvPr id="13" name="label-241"/>
+          <p:cNvPr id="13" name="label-248"/>
           <p:cNvSpPr txBox="1"/>
           <p:nvPr/>
         </p:nvSpPr>
@@ -2793,7 +2793,7 @@
       </p:sp>
       <p:pic>
         <p:nvPicPr>
-          <p:cNvPr id="14" name="screenshot-242" descr="自动检测到本机的 Claude Code">    </p:cNvPr>
+          <p:cNvPr id="14" name="screenshot-249" descr="自动检测到本机的 Claude Code">    </p:cNvPr>
           <p:cNvPicPr>
             <a:picLocks noChangeAspect="1"/>
           </p:cNvPicPr>
@@ -2817,7 +2817,7 @@
       </p:pic>
       <p:sp>
         <p:nvSpPr>
-          <p:cNvPr id="15" name="frame-243"/>
+          <p:cNvPr id="15" name="frame-250"/>
           <p:cNvSpPr/>
           <p:nvPr/>
         </p:nvSpPr>
@@ -2844,7 +2844,7 @@
       </p:sp>
       <p:sp>
         <p:nvSpPr>
-          <p:cNvPr id="16" name="label-244"/>
+          <p:cNvPr id="16" name="label-251"/>
           <p:cNvSpPr txBox="1"/>
           <p:nvPr/>
         </p:nvSpPr>
@@ -2880,7 +2880,7 @@
       </p:sp>
       <p:pic>
         <p:nvPicPr>
-          <p:cNvPr id="17" name="screenshot-245" descr="usage-ask-mention.jpg">    </p:cNvPr>
+          <p:cNvPr id="17" name="screenshot-252" descr="usage-ask-mention.jpg">    </p:cNvPr>
           <p:cNvPicPr>
             <a:picLocks noChangeAspect="1"/>
           </p:cNvPicPr>
@@ -2904,7 +2904,7 @@
       </p:pic>
       <p:sp>
         <p:nvSpPr>
-          <p:cNvPr id="18" name="frame-246"/>
+          <p:cNvPr id="18" name="frame-253"/>
           <p:cNvSpPr/>
           <p:nvPr/>
         </p:nvSpPr>
@@ -2931,7 +2931,7 @@
       </p:sp>
       <p:pic>
         <p:nvPicPr>
-          <p:cNvPr id="19" name="screenshot-247" descr="@ 点名专家；工具调用逐步可查">    </p:cNvPr>
+          <p:cNvPr id="19" name="screenshot-254" descr="@ 点名专家；工具调用逐步可查">    </p:cNvPr>
           <p:cNvPicPr>
             <a:picLocks noChangeAspect="1"/>
           </p:cNvPicPr>
@@ -2955,7 +2955,7 @@
       </p:pic>
       <p:sp>
         <p:nvSpPr>
-          <p:cNvPr id="20" name="frame-248"/>
+          <p:cNvPr id="20" name="frame-255"/>
           <p:cNvSpPr/>
           <p:nvPr/>
         </p:nvSpPr>
@@ -2982,7 +2982,7 @@
       </p:sp>
       <p:sp>
         <p:nvSpPr>
-          <p:cNvPr id="21" name="label-249"/>
+          <p:cNvPr id="21" name="label-256"/>
           <p:cNvSpPr txBox="1"/>
           <p:nvPr/>
         </p:nvSpPr>
@@ -3018,7 +3018,7 @@
       </p:sp>
       <p:pic>
         <p:nvPicPr>
-          <p:cNvPr id="22" name="screenshot-250" descr="证据账本：状态、来源、完整历史">    </p:cNvPr>
+          <p:cNvPr id="22" name="screenshot-257" descr="证据账本：状态、来源、完整历史">    </p:cNvPr>
           <p:cNvPicPr>
             <a:picLocks noChangeAspect="1"/>
           </p:cNvPicPr>
@@ -3042,7 +3042,7 @@
       </p:pic>
       <p:sp>
         <p:nvSpPr>
-          <p:cNvPr id="23" name="frame-251"/>
+          <p:cNvPr id="23" name="frame-258"/>
           <p:cNvSpPr/>
           <p:nvPr/>
         </p:nvSpPr>
@@ -3069,7 +3069,7 @@
       </p:sp>
       <p:sp>
         <p:nvSpPr>
-          <p:cNvPr id="24" name="label-252"/>
+          <p:cNvPr id="24" name="label-259"/>
           <p:cNvSpPr txBox="1"/>
           <p:nvPr/>
         </p:nvSpPr>
@@ -3105,7 +3105,7 @@
       </p:sp>
       <p:sp>
         <p:nvSpPr>
-          <p:cNvPr id="25" name="label-253"/>
+          <p:cNvPr id="25" name="label-260"/>
           <p:cNvSpPr txBox="1"/>
           <p:nvPr/>
         </p:nvSpPr>
@@ -3287,7 +3287,7 @@
       </p:sp>
       <p:sp>
         <p:nvSpPr>
-          <p:cNvPr id="4" name="card-254"/>
+          <p:cNvPr id="4" name="card-261"/>
           <p:cNvSpPr/>
           <p:nvPr/>
         </p:nvSpPr>
@@ -3314,7 +3314,7 @@
       </p:sp>
       <p:sp>
         <p:nvSpPr>
-          <p:cNvPr id="5" name="badge-255"/>
+          <p:cNvPr id="5" name="badge-262"/>
           <p:cNvSpPr/>
           <p:nvPr/>
         </p:nvSpPr>
@@ -3356,7 +3356,7 @@
       </p:sp>
       <p:sp>
         <p:nvSpPr>
-          <p:cNvPr id="6" name="label-256"/>
+          <p:cNvPr id="6" name="label-263"/>
           <p:cNvSpPr txBox="1"/>
           <p:nvPr/>
         </p:nvSpPr>
@@ -3392,14 +3392,14 @@
       </p:sp>
       <p:sp>
         <p:nvSpPr>
-          <p:cNvPr id="7" name="bullets-257"/>
+          <p:cNvPr id="7" name="bullets-264"/>
           <p:cNvSpPr txBox="1"/>
           <p:nvPr/>
         </p:nvSpPr>
         <p:spPr>
           <a:xfrm>
             <a:off x="822960" y="2514600"/>
-            <a:ext cx="3012338" cy="2926080"/>
+            <a:ext cx="3012338" cy="2971800"/>
           </a:xfrm>
           <a:prstGeom prst="rect">
             <a:avLst/>
@@ -3413,80 +3413,80 @@
           <a:p>
             <a:pPr marL="177800" indent="-177800">
               <a:spcAft>
-                <a:spcPts val="1200"/>
+                <a:spcPts val="900"/>
               </a:spcAft>
               <a:buSzPct val="100000"/>
               <a:buChar char="•"/>
             </a:pPr>
             <a:r>
-              <a:rPr lang="en-US" sz="1500" dirty="0">
+              <a:rPr lang="en-US" sz="1400" dirty="0">
                 <a:solidFill>
                   <a:schemeClr val="tx1"/>
                 </a:solidFill>
               </a:rPr>
               <a:t>v3.0.0 已发布：macOS、Windows、Linux 安装包和本地 Web 版</a:t>
             </a:r>
-            <a:endParaRPr lang="en-US" sz="1500" dirty="0"/>
+            <a:endParaRPr lang="en-US" sz="1400" dirty="0"/>
           </a:p>
           <a:p>
             <a:pPr marL="177800" indent="-177800">
               <a:spcAft>
-                <a:spcPts val="1200"/>
+                <a:spcPts val="900"/>
               </a:spcAft>
               <a:buSzPct val="100000"/>
               <a:buChar char="•"/>
             </a:pPr>
             <a:r>
-              <a:rPr lang="en-US" sz="1500" dirty="0">
+              <a:rPr lang="en-US" sz="1400" dirty="0">
                 <a:solidFill>
                   <a:schemeClr val="tx1"/>
                 </a:solidFill>
               </a:rPr>
               <a:t>三类设计全部落地，并接入桌面端界面</a:t>
             </a:r>
-            <a:endParaRPr lang="en-US" sz="1500" dirty="0"/>
+            <a:endParaRPr lang="en-US" sz="1400" dirty="0"/>
           </a:p>
           <a:p>
             <a:pPr marL="177800" indent="-177800">
               <a:spcAft>
-                <a:spcPts val="1200"/>
+                <a:spcPts val="900"/>
               </a:spcAft>
               <a:buSzPct val="100000"/>
               <a:buChar char="•"/>
             </a:pPr>
             <a:r>
-              <a:rPr lang="en-US" sz="1500" dirty="0">
+              <a:rPr lang="en-US" sz="1400" dirty="0">
                 <a:solidFill>
                   <a:schemeClr val="tx1"/>
                 </a:solidFill>
               </a:rPr>
               <a:t>自动化测试在三个平台持续通过</a:t>
             </a:r>
-            <a:endParaRPr lang="en-US" sz="1500" dirty="0"/>
+            <a:endParaRPr lang="en-US" sz="1400" dirty="0"/>
           </a:p>
           <a:p>
             <a:pPr marL="177800" indent="-177800">
               <a:spcAft>
-                <a:spcPts val="1200"/>
+                <a:spcPts val="900"/>
               </a:spcAft>
               <a:buSzPct val="100000"/>
               <a:buChar char="•"/>
             </a:pPr>
             <a:r>
-              <a:rPr lang="en-US" sz="1500" dirty="0">
+              <a:rPr lang="en-US" sz="1400" dirty="0">
                 <a:solidFill>
                   <a:schemeClr val="tx1"/>
                 </a:solidFill>
               </a:rPr>
               <a:t>评分只看证据，不再受靶点名称影响</a:t>
             </a:r>
-            <a:endParaRPr lang="en-US" sz="1500" dirty="0"/>
-          </a:p>
-        </p:txBody>
-      </p:sp>
-      <p:sp>
-        <p:nvSpPr>
-          <p:cNvPr id="8" name="card-258"/>
+            <a:endParaRPr lang="en-US" sz="1400" dirty="0"/>
+          </a:p>
+        </p:txBody>
+      </p:sp>
+      <p:sp>
+        <p:nvSpPr>
+          <p:cNvPr id="8" name="card-265"/>
           <p:cNvSpPr/>
           <p:nvPr/>
         </p:nvSpPr>
@@ -3513,7 +3513,7 @@
       </p:sp>
       <p:sp>
         <p:nvSpPr>
-          <p:cNvPr id="9" name="badge-259"/>
+          <p:cNvPr id="9" name="badge-266"/>
           <p:cNvSpPr/>
           <p:nvPr/>
         </p:nvSpPr>
@@ -3555,7 +3555,7 @@
       </p:sp>
       <p:sp>
         <p:nvSpPr>
-          <p:cNvPr id="10" name="label-260"/>
+          <p:cNvPr id="10" name="label-267"/>
           <p:cNvSpPr txBox="1"/>
           <p:nvPr/>
         </p:nvSpPr>
@@ -3591,14 +3591,14 @@
       </p:sp>
       <p:sp>
         <p:nvSpPr>
-          <p:cNvPr id="11" name="bullets-261"/>
+          <p:cNvPr id="11" name="bullets-268"/>
           <p:cNvSpPr txBox="1"/>
           <p:nvPr/>
         </p:nvSpPr>
         <p:spPr>
           <a:xfrm>
             <a:off x="4612538" y="2514600"/>
-            <a:ext cx="3012338" cy="2926080"/>
+            <a:ext cx="3012338" cy="2971800"/>
           </a:xfrm>
           <a:prstGeom prst="rect">
             <a:avLst/>
@@ -3612,62 +3612,62 @@
           <a:p>
             <a:pPr marL="177800" indent="-177800">
               <a:spcAft>
-                <a:spcPts val="1200"/>
+                <a:spcPts val="900"/>
               </a:spcAft>
               <a:buSzPct val="100000"/>
               <a:buChar char="•"/>
             </a:pPr>
             <a:r>
-              <a:rPr lang="en-US" sz="1500" dirty="0">
+              <a:rPr lang="en-US" sz="1400" dirty="0">
                 <a:solidFill>
                   <a:schemeClr val="tx1"/>
                 </a:solidFill>
               </a:rPr>
               <a:t>尚未在真实科研任务上做对照实验</a:t>
             </a:r>
-            <a:endParaRPr lang="en-US" sz="1500" dirty="0"/>
+            <a:endParaRPr lang="en-US" sz="1400" dirty="0"/>
           </a:p>
           <a:p>
             <a:pPr marL="177800" indent="-177800">
               <a:spcAft>
-                <a:spcPts val="1200"/>
+                <a:spcPts val="900"/>
               </a:spcAft>
               <a:buSzPct val="100000"/>
               <a:buChar char="•"/>
             </a:pPr>
             <a:r>
-              <a:rPr lang="en-US" sz="1500" dirty="0">
+              <a:rPr lang="en-US" sz="1400" dirty="0">
                 <a:solidFill>
                   <a:schemeClr val="tx1"/>
                 </a:solidFill>
               </a:rPr>
               <a:t>判定目前处于“未校准”状态，尚无覆盖率保证</a:t>
             </a:r>
-            <a:endParaRPr lang="en-US" sz="1500" dirty="0"/>
+            <a:endParaRPr lang="en-US" sz="1400" dirty="0"/>
           </a:p>
           <a:p>
             <a:pPr marL="177800" indent="-177800">
               <a:spcAft>
-                <a:spcPts val="1200"/>
+                <a:spcPts val="900"/>
               </a:spcAft>
               <a:buSzPct val="100000"/>
               <a:buChar char="•"/>
             </a:pPr>
             <a:r>
-              <a:rPr lang="en-US" sz="1500" dirty="0">
+              <a:rPr lang="en-US" sz="1400" dirty="0">
                 <a:solidFill>
                   <a:schemeClr val="tx1"/>
                 </a:solidFill>
               </a:rPr>
               <a:t>部分本地命令行工具仅为通用接入，待逐一验证</a:t>
             </a:r>
-            <a:endParaRPr lang="en-US" sz="1500" dirty="0"/>
-          </a:p>
-        </p:txBody>
-      </p:sp>
-      <p:sp>
-        <p:nvSpPr>
-          <p:cNvPr id="12" name="card-262"/>
+            <a:endParaRPr lang="en-US" sz="1400" dirty="0"/>
+          </a:p>
+        </p:txBody>
+      </p:sp>
+      <p:sp>
+        <p:nvSpPr>
+          <p:cNvPr id="12" name="card-269"/>
           <p:cNvSpPr/>
           <p:nvPr/>
         </p:nvSpPr>
@@ -3694,7 +3694,7 @@
       </p:sp>
       <p:sp>
         <p:nvSpPr>
-          <p:cNvPr id="13" name="badge-263"/>
+          <p:cNvPr id="13" name="badge-270"/>
           <p:cNvSpPr/>
           <p:nvPr/>
         </p:nvSpPr>
@@ -3736,7 +3736,7 @@
       </p:sp>
       <p:sp>
         <p:nvSpPr>
-          <p:cNvPr id="14" name="label-264"/>
+          <p:cNvPr id="14" name="label-271"/>
           <p:cNvSpPr txBox="1"/>
           <p:nvPr/>
         </p:nvSpPr>
@@ -3772,14 +3772,14 @@
       </p:sp>
       <p:sp>
         <p:nvSpPr>
-          <p:cNvPr id="15" name="bullets-265"/>
+          <p:cNvPr id="15" name="bullets-272"/>
           <p:cNvSpPr txBox="1"/>
           <p:nvPr/>
         </p:nvSpPr>
         <p:spPr>
           <a:xfrm>
             <a:off x="8402117" y="2514600"/>
-            <a:ext cx="3012338" cy="2926080"/>
+            <a:ext cx="3012338" cy="2971800"/>
           </a:xfrm>
           <a:prstGeom prst="rect">
             <a:avLst/>
@@ -3793,62 +3793,80 @@
           <a:p>
             <a:pPr marL="177800" indent="-177800">
               <a:spcAft>
-                <a:spcPts val="1200"/>
+                <a:spcPts val="900"/>
               </a:spcAft>
               <a:buSzPct val="100000"/>
               <a:buChar char="•"/>
             </a:pPr>
             <a:r>
-              <a:rPr lang="en-US" sz="1500" dirty="0">
+              <a:rPr lang="en-US" sz="1400" dirty="0">
                 <a:solidFill>
                   <a:schemeClr val="tx1"/>
                 </a:solidFill>
               </a:rPr>
               <a:t>组织领域专家标注一批真实假设（支持 / 反驳），用于校准与评测</a:t>
             </a:r>
-            <a:endParaRPr lang="en-US" sz="1500" dirty="0"/>
+            <a:endParaRPr lang="en-US" sz="1400" dirty="0"/>
           </a:p>
           <a:p>
             <a:pPr marL="177800" indent="-177800">
               <a:spcAft>
-                <a:spcPts val="1200"/>
+                <a:spcPts val="900"/>
               </a:spcAft>
               <a:buSzPct val="100000"/>
               <a:buChar char="•"/>
             </a:pPr>
             <a:r>
-              <a:rPr lang="en-US" sz="1500" dirty="0">
+              <a:rPr lang="en-US" sz="1400" dirty="0">
                 <a:solidFill>
                   <a:schemeClr val="tx1"/>
                 </a:solidFill>
               </a:rPr>
               <a:t>开展同等预算的对照实验：与扁平记忆、多智能体辩论比较</a:t>
             </a:r>
-            <a:endParaRPr lang="en-US" sz="1500" dirty="0"/>
+            <a:endParaRPr lang="en-US" sz="1400" dirty="0"/>
           </a:p>
           <a:p>
             <a:pPr marL="177800" indent="-177800">
               <a:spcAft>
-                <a:spcPts val="1200"/>
+                <a:spcPts val="900"/>
               </a:spcAft>
               <a:buSzPct val="100000"/>
               <a:buChar char="•"/>
             </a:pPr>
             <a:r>
-              <a:rPr lang="en-US" sz="1500" dirty="0">
+              <a:rPr lang="en-US" sz="1400" dirty="0">
                 <a:solidFill>
                   <a:schemeClr val="tx1"/>
                 </a:solidFill>
               </a:rPr>
+              <a:t>查询改为按“靶点–疾病”，优先遗传学与动物模型证据</a:t>
+            </a:r>
+            <a:endParaRPr lang="en-US" sz="1400" dirty="0"/>
+          </a:p>
+          <a:p>
+            <a:pPr marL="177800" indent="-177800">
+              <a:spcAft>
+                <a:spcPts val="900"/>
+              </a:spcAft>
+              <a:buSzPct val="100000"/>
+              <a:buChar char="•"/>
+            </a:pPr>
+            <a:r>
+              <a:rPr lang="en-US" sz="1400" dirty="0">
+                <a:solidFill>
+                  <a:schemeClr val="tx1"/>
+                </a:solidFill>
+              </a:rPr>
               <a:t>结果稳定后发布正式版，并整理成论文</a:t>
             </a:r>
-            <a:endParaRPr lang="en-US" sz="1500" dirty="0"/>
-          </a:p>
-        </p:txBody>
-      </p:sp>
-      <p:sp>
-        <p:nvSpPr>
-          <p:cNvPr id="16" name="ask-266"/>
+            <a:endParaRPr lang="en-US" sz="1400" dirty="0"/>
+          </a:p>
+        </p:txBody>
+      </p:sp>
+      <p:sp>
+        <p:nvSpPr>
+          <p:cNvPr id="16" name="ask-273"/>
           <p:cNvSpPr/>
           <p:nvPr/>
         </p:nvSpPr>
@@ -3875,7 +3893,7 @@
       </p:sp>
       <p:sp>
         <p:nvSpPr>
-          <p:cNvPr id="17" name="label-267"/>
+          <p:cNvPr id="17" name="label-274"/>
           <p:cNvSpPr txBox="1"/>
           <p:nvPr/>
         </p:nvSpPr>
@@ -14012,7 +14030,7 @@
                   <a:schemeClr val="accent6"/>
                 </a:solidFill>
               </a:rPr>
-              <a:t>A 类设计点 ② 与 ③：用信息论量化分歧、挑选查询；用统计校准决定能否下结论。</a:t>
+              <a:t>A 类设计点 ② 与 ③：用实测数据决定先查什么；用统计校准决定能否下结论。</a:t>
             </a:r>
             <a:endParaRPr lang="en-US" sz="1500" dirty="0"/>
           </a:p>
@@ -14096,7 +14114,7 @@
         <p:spPr>
           <a:xfrm>
             <a:off x="1325880" y="1709928"/>
-            <a:ext cx="3657600" cy="411480"/>
+            <a:ext cx="5897880" cy="411480"/>
           </a:xfrm>
           <a:prstGeom prst="rect">
             <a:avLst/>
@@ -14112,14 +14130,14 @@
               <a:buNone/>
             </a:pPr>
             <a:r>
-              <a:rPr lang="en-US" sz="1800" b="1" dirty="0">
+              <a:rPr lang="en-US" sz="1700" b="1" dirty="0">
                 <a:solidFill>
                   <a:schemeClr val="tx2"/>
                 </a:solidFill>
               </a:rPr>
-              <a:t>信息增益取证</a:t>
-            </a:r>
-            <a:endParaRPr lang="en-US" sz="1800" dirty="0"/>
+              <a:t>信息增益取证：用实测数据决定先查什么</a:t>
+            </a:r>
+            <a:endParaRPr lang="en-US" sz="1700" dirty="0"/>
           </a:p>
         </p:txBody>
       </p:sp>
@@ -14131,12 +14149,12 @@
         </p:nvSpPr>
         <p:spPr>
           <a:xfrm>
-            <a:off x="822960" y="2212848"/>
-            <a:ext cx="6355080" cy="713232"/>
+            <a:off x="822960" y="2194560"/>
+            <a:ext cx="6355080" cy="384048"/>
           </a:xfrm>
           <a:prstGeom prst="roundRect">
             <a:avLst>
-              <a:gd name="adj" fmla="val 10256"/>
+              <a:gd name="adj" fmla="val 19048"/>
             </a:avLst>
           </a:prstGeom>
           <a:solidFill>
@@ -14161,7 +14179,7 @@
                   <a:schemeClr val="tx1"/>
                 </a:solidFill>
               </a:rPr>
-              <a:t>类比：医生分辨流感和感冒——量体温没用，两种病都发烧；流感抗原检测结果差别大，所以先做它。信息增益就是给“这项查询能把两种可能分开多少”打分。</a:t>
+              <a:t>类比：量体温分不开流感和感冒，抗原检测才分得开。信息增益衡量的就是“能分开多少”。</a:t>
             </a:r>
             <a:endParaRPr lang="en-US" sz="1150" dirty="0"/>
           </a:p>
@@ -14175,7 +14193,7 @@
         </p:nvSpPr>
         <p:spPr>
           <a:xfrm>
-            <a:off x="822960" y="3017520"/>
+            <a:off x="822960" y="2651760"/>
             <a:ext cx="6355080" cy="274320"/>
           </a:xfrm>
           <a:prstGeom prst="rect">
@@ -14197,909 +14215,48 @@
                   <a:schemeClr val="tx2"/>
                 </a:solidFill>
               </a:rPr>
-              <a:t>例：假设“GLP-1 受体激动剂（如司美格鲁肽）可用于减重”，起点五五开</a:t>
+              <a:t>实测：真实靶点，已获批（成立）vs 因疗效不足而失败（不成立）</a:t>
             </a:r>
             <a:endParaRPr lang="en-US" sz="1200" dirty="0"/>
           </a:p>
         </p:txBody>
       </p:sp>
-      <p:graphicFrame>
-        <p:nvGraphicFramePr>
-          <p:cNvPr id="9" name="table-176"/>
-          <p:cNvGraphicFramePr>
-            <a:graphicFrameLocks noGrp="1"/>
-          </p:cNvGraphicFramePr>
-          <p:nvPr>
-            <p:extLst>
-              <p:ext uri="{D42A27DB-BD31-4B8C-83A1-F6EECF244321}">
-                <p14:modId xmlns:p14="http://schemas.microsoft.com/office/powerpoint/2010/main" val="1579011935"/>
-              </p:ext>
-            </p:extLst>
-          </p:nvPr>
-        </p:nvGraphicFramePr>
-        <p:xfrm>
-          <a:off x="822960" y="3337560"/>
-          <a:ext cx="3977640" cy="914400"/>
-        </p:xfrm>
-        <a:graphic>
-          <a:graphicData uri="http://schemas.openxmlformats.org/drawingml/2006/table">
-            <a:tbl>
-              <a:tblPr/>
-              <a:tblGrid>
-                <a:gridCol w="1965960"/>
-                <a:gridCol w="1005840"/>
-                <a:gridCol w="1005840"/>
-              </a:tblGrid>
-              <a:tr h="420624">
-                <a:tc>
-                  <a:txBody>
-                    <a:bodyPr/>
-                    <a:lstStyle/>
-                    <a:p>
-                      <a:pPr algn="ctr" indent="0" marL="0">
-                        <a:buNone/>
-                      </a:pPr>
-                      <a:r>
-                        <a:rPr lang="en-US" sz="1100" b="1" dirty="0">
-                          <a:solidFill>
-                            <a:srgbClr val="FFFFFF"/>
-                          </a:solidFill>
-                          <a:latin typeface="Microsoft YaHei" pitchFamily="34" charset="0"/>
-                          <a:ea typeface="Microsoft YaHei" pitchFamily="34" charset="-122"/>
-                          <a:cs typeface="Microsoft YaHei" pitchFamily="34" charset="-120"/>
-                        </a:rPr>
-                        <a:t>系统可做的查询</a:t>
-                      </a:r>
-                      <a:endParaRPr lang="en-US" sz="1100" dirty="0">
-                        <a:latin typeface="Microsoft YaHei" charset="0"/>
-                        <a:ea typeface="Microsoft YaHei" charset="0"/>
-                        <a:cs typeface="Microsoft YaHei" charset="0"/>
-                      </a:endParaRPr>
-                    </a:p>
-                  </a:txBody>
-                  <a:tcPr marL="64008" marR="64008" marT="27432" marB="27432" anchor="ctr">
-                    <a:lnL w="9525" cap="flat" cmpd="sng" algn="ctr">
-                      <a:solidFill>
-                        <a:srgbClr val="D5DCE4"/>
-                      </a:solidFill>
-                      <a:prstDash val="solid"/>
-                      <a:round/>
-                      <a:headEnd type="none" w="med" len="med"/>
-                      <a:tailEnd type="none" w="med" len="med"/>
-                    </a:lnL>
-                    <a:lnR w="9525" cap="flat" cmpd="sng" algn="ctr">
-                      <a:solidFill>
-                        <a:srgbClr val="D5DCE4"/>
-                      </a:solidFill>
-                      <a:prstDash val="solid"/>
-                      <a:round/>
-                      <a:headEnd type="none" w="med" len="med"/>
-                      <a:tailEnd type="none" w="med" len="med"/>
-                    </a:lnR>
-                    <a:lnT w="9525" cap="flat" cmpd="sng" algn="ctr">
-                      <a:solidFill>
-                        <a:srgbClr val="D5DCE4"/>
-                      </a:solidFill>
-                      <a:prstDash val="solid"/>
-                      <a:round/>
-                      <a:headEnd type="none" w="med" len="med"/>
-                      <a:tailEnd type="none" w="med" len="med"/>
-                    </a:lnT>
-                    <a:lnB w="9525" cap="flat" cmpd="sng" algn="ctr">
-                      <a:solidFill>
-                        <a:srgbClr val="D5DCE4"/>
-                      </a:solidFill>
-                      <a:prstDash val="solid"/>
-                      <a:round/>
-                      <a:headEnd type="none" w="med" len="med"/>
-                      <a:tailEnd type="none" w="med" len="med"/>
-                    </a:lnB>
-                    <a:solidFill>
-                      <a:srgbClr val="0F2A44"/>
-                    </a:solidFill>
-                  </a:tcPr>
-                </a:tc>
-                <a:tc>
-                  <a:txBody>
-                    <a:bodyPr/>
-                    <a:lstStyle/>
-                    <a:p>
-                      <a:pPr algn="ctr" indent="0" marL="0">
-                        <a:buNone/>
-                      </a:pPr>
-                      <a:r>
-                        <a:rPr lang="en-US" sz="1100" b="1" dirty="0">
-                          <a:solidFill>
-                            <a:srgbClr val="FFFFFF"/>
-                          </a:solidFill>
-                          <a:latin typeface="Microsoft YaHei" pitchFamily="34" charset="0"/>
-                          <a:ea typeface="Microsoft YaHei" pitchFamily="34" charset="-122"/>
-                          <a:cs typeface="Microsoft YaHei" pitchFamily="34" charset="-120"/>
-                        </a:rPr>
-                        <a:t>假设成立时</a:t>
-                      </a:r>
-                      <a:endParaRPr lang="en-US" sz="1100" dirty="0">
-                        <a:latin typeface="Microsoft YaHei" charset="0"/>
-                        <a:ea typeface="Microsoft YaHei" charset="0"/>
-                        <a:cs typeface="Microsoft YaHei" charset="0"/>
-                      </a:endParaRPr>
-                    </a:p>
-                    <a:p>
-                      <a:pPr algn="ctr" indent="0" marL="0">
-                        <a:buNone/>
-                      </a:pPr>
-                      <a:r>
-                        <a:rPr lang="en-US" sz="1100" b="1" dirty="0">
-                          <a:solidFill>
-                            <a:srgbClr val="FFFFFF"/>
-                          </a:solidFill>
-                          <a:latin typeface="Microsoft YaHei" pitchFamily="34" charset="0"/>
-                          <a:ea typeface="Microsoft YaHei" pitchFamily="34" charset="-122"/>
-                          <a:cs typeface="Microsoft YaHei" pitchFamily="34" charset="-120"/>
-                        </a:rPr>
-                        <a:t>查到的概率</a:t>
-                      </a:r>
-                      <a:endParaRPr lang="en-US" sz="1100" dirty="0">
-                        <a:latin typeface="Microsoft YaHei" charset="0"/>
-                        <a:ea typeface="Microsoft YaHei" charset="0"/>
-                        <a:cs typeface="Microsoft YaHei" charset="0"/>
-                      </a:endParaRPr>
-                    </a:p>
-                  </a:txBody>
-                  <a:tcPr marL="64008" marR="64008" marT="27432" marB="27432" anchor="ctr">
-                    <a:lnL w="9525" cap="flat" cmpd="sng" algn="ctr">
-                      <a:solidFill>
-                        <a:srgbClr val="D5DCE4"/>
-                      </a:solidFill>
-                      <a:prstDash val="solid"/>
-                      <a:round/>
-                      <a:headEnd type="none" w="med" len="med"/>
-                      <a:tailEnd type="none" w="med" len="med"/>
-                    </a:lnL>
-                    <a:lnR w="9525" cap="flat" cmpd="sng" algn="ctr">
-                      <a:solidFill>
-                        <a:srgbClr val="D5DCE4"/>
-                      </a:solidFill>
-                      <a:prstDash val="solid"/>
-                      <a:round/>
-                      <a:headEnd type="none" w="med" len="med"/>
-                      <a:tailEnd type="none" w="med" len="med"/>
-                    </a:lnR>
-                    <a:lnT w="9525" cap="flat" cmpd="sng" algn="ctr">
-                      <a:solidFill>
-                        <a:srgbClr val="D5DCE4"/>
-                      </a:solidFill>
-                      <a:prstDash val="solid"/>
-                      <a:round/>
-                      <a:headEnd type="none" w="med" len="med"/>
-                      <a:tailEnd type="none" w="med" len="med"/>
-                    </a:lnT>
-                    <a:lnB w="9525" cap="flat" cmpd="sng" algn="ctr">
-                      <a:solidFill>
-                        <a:srgbClr val="D5DCE4"/>
-                      </a:solidFill>
-                      <a:prstDash val="solid"/>
-                      <a:round/>
-                      <a:headEnd type="none" w="med" len="med"/>
-                      <a:tailEnd type="none" w="med" len="med"/>
-                    </a:lnB>
-                    <a:solidFill>
-                      <a:srgbClr val="0F2A44"/>
-                    </a:solidFill>
-                  </a:tcPr>
-                </a:tc>
-                <a:tc>
-                  <a:txBody>
-                    <a:bodyPr/>
-                    <a:lstStyle/>
-                    <a:p>
-                      <a:pPr algn="ctr" indent="0" marL="0">
-                        <a:buNone/>
-                      </a:pPr>
-                      <a:r>
-                        <a:rPr lang="en-US" sz="1100" b="1" dirty="0">
-                          <a:solidFill>
-                            <a:srgbClr val="FFFFFF"/>
-                          </a:solidFill>
-                          <a:latin typeface="Microsoft YaHei" pitchFamily="34" charset="0"/>
-                          <a:ea typeface="Microsoft YaHei" pitchFamily="34" charset="-122"/>
-                          <a:cs typeface="Microsoft YaHei" pitchFamily="34" charset="-120"/>
-                        </a:rPr>
-                        <a:t>不成立时</a:t>
-                      </a:r>
-                      <a:endParaRPr lang="en-US" sz="1100" dirty="0">
-                        <a:latin typeface="Microsoft YaHei" charset="0"/>
-                        <a:ea typeface="Microsoft YaHei" charset="0"/>
-                        <a:cs typeface="Microsoft YaHei" charset="0"/>
-                      </a:endParaRPr>
-                    </a:p>
-                    <a:p>
-                      <a:pPr algn="ctr" indent="0" marL="0">
-                        <a:buNone/>
-                      </a:pPr>
-                      <a:r>
-                        <a:rPr lang="en-US" sz="1100" b="1" dirty="0">
-                          <a:solidFill>
-                            <a:srgbClr val="FFFFFF"/>
-                          </a:solidFill>
-                          <a:latin typeface="Microsoft YaHei" pitchFamily="34" charset="0"/>
-                          <a:ea typeface="Microsoft YaHei" pitchFamily="34" charset="-122"/>
-                          <a:cs typeface="Microsoft YaHei" pitchFamily="34" charset="-120"/>
-                        </a:rPr>
-                        <a:t>查到的概率</a:t>
-                      </a:r>
-                      <a:endParaRPr lang="en-US" sz="1100" dirty="0">
-                        <a:latin typeface="Microsoft YaHei" charset="0"/>
-                        <a:ea typeface="Microsoft YaHei" charset="0"/>
-                        <a:cs typeface="Microsoft YaHei" charset="0"/>
-                      </a:endParaRPr>
-                    </a:p>
-                  </a:txBody>
-                  <a:tcPr marL="64008" marR="64008" marT="27432" marB="27432" anchor="ctr">
-                    <a:lnL w="9525" cap="flat" cmpd="sng" algn="ctr">
-                      <a:solidFill>
-                        <a:srgbClr val="D5DCE4"/>
-                      </a:solidFill>
-                      <a:prstDash val="solid"/>
-                      <a:round/>
-                      <a:headEnd type="none" w="med" len="med"/>
-                      <a:tailEnd type="none" w="med" len="med"/>
-                    </a:lnL>
-                    <a:lnR w="9525" cap="flat" cmpd="sng" algn="ctr">
-                      <a:solidFill>
-                        <a:srgbClr val="D5DCE4"/>
-                      </a:solidFill>
-                      <a:prstDash val="solid"/>
-                      <a:round/>
-                      <a:headEnd type="none" w="med" len="med"/>
-                      <a:tailEnd type="none" w="med" len="med"/>
-                    </a:lnR>
-                    <a:lnT w="9525" cap="flat" cmpd="sng" algn="ctr">
-                      <a:solidFill>
-                        <a:srgbClr val="D5DCE4"/>
-                      </a:solidFill>
-                      <a:prstDash val="solid"/>
-                      <a:round/>
-                      <a:headEnd type="none" w="med" len="med"/>
-                      <a:tailEnd type="none" w="med" len="med"/>
-                    </a:lnT>
-                    <a:lnB w="9525" cap="flat" cmpd="sng" algn="ctr">
-                      <a:solidFill>
-                        <a:srgbClr val="D5DCE4"/>
-                      </a:solidFill>
-                      <a:prstDash val="solid"/>
-                      <a:round/>
-                      <a:headEnd type="none" w="med" len="med"/>
-                      <a:tailEnd type="none" w="med" len="med"/>
-                    </a:lnB>
-                    <a:solidFill>
-                      <a:srgbClr val="0F2A44"/>
-                    </a:solidFill>
-                  </a:tcPr>
-                </a:tc>
-              </a:tr>
-              <a:tr h="347472">
-                <a:tc>
-                  <a:txBody>
-                    <a:bodyPr/>
-                    <a:lstStyle/>
-                    <a:p>
-                      <a:pPr algn="l" indent="0" marL="0">
-                        <a:buNone/>
-                      </a:pPr>
-                      <a:r>
-                        <a:rPr lang="en-US" sz="1100" dirty="0">
-                          <a:solidFill>
-                            <a:srgbClr val="1B2533"/>
-                          </a:solidFill>
-                          <a:latin typeface="Microsoft YaHei" pitchFamily="34" charset="0"/>
-                          <a:ea typeface="Microsoft YaHei" pitchFamily="34" charset="-122"/>
-                          <a:cs typeface="Microsoft YaHei" pitchFamily="34" charset="-120"/>
-                        </a:rPr>
-                        <a:t>查强活性药物（ChEMBL）</a:t>
-                      </a:r>
-                      <a:endParaRPr lang="en-US" sz="1100" dirty="0">
-                        <a:latin typeface="Microsoft YaHei" charset="0"/>
-                        <a:ea typeface="Microsoft YaHei" charset="0"/>
-                        <a:cs typeface="Microsoft YaHei" charset="0"/>
-                      </a:endParaRPr>
-                    </a:p>
-                  </a:txBody>
-                  <a:tcPr marL="64008" marR="64008" marT="27432" marB="27432" anchor="ctr">
-                    <a:lnL w="9525" cap="flat" cmpd="sng" algn="ctr">
-                      <a:solidFill>
-                        <a:srgbClr val="D5DCE4"/>
-                      </a:solidFill>
-                      <a:prstDash val="solid"/>
-                      <a:round/>
-                      <a:headEnd type="none" w="med" len="med"/>
-                      <a:tailEnd type="none" w="med" len="med"/>
-                    </a:lnL>
-                    <a:lnR w="9525" cap="flat" cmpd="sng" algn="ctr">
-                      <a:solidFill>
-                        <a:srgbClr val="D5DCE4"/>
-                      </a:solidFill>
-                      <a:prstDash val="solid"/>
-                      <a:round/>
-                      <a:headEnd type="none" w="med" len="med"/>
-                      <a:tailEnd type="none" w="med" len="med"/>
-                    </a:lnR>
-                    <a:lnT w="9525" cap="flat" cmpd="sng" algn="ctr">
-                      <a:solidFill>
-                        <a:srgbClr val="D5DCE4"/>
-                      </a:solidFill>
-                      <a:prstDash val="solid"/>
-                      <a:round/>
-                      <a:headEnd type="none" w="med" len="med"/>
-                      <a:tailEnd type="none" w="med" len="med"/>
-                    </a:lnT>
-                    <a:lnB w="9525" cap="flat" cmpd="sng" algn="ctr">
-                      <a:solidFill>
-                        <a:srgbClr val="D5DCE4"/>
-                      </a:solidFill>
-                      <a:prstDash val="solid"/>
-                      <a:round/>
-                      <a:headEnd type="none" w="med" len="med"/>
-                      <a:tailEnd type="none" w="med" len="med"/>
-                    </a:lnB>
-                    <a:solidFill>
-                      <a:srgbClr val="FFFFFF"/>
-                    </a:solidFill>
-                  </a:tcPr>
-                </a:tc>
-                <a:tc>
-                  <a:txBody>
-                    <a:bodyPr/>
-                    <a:lstStyle/>
-                    <a:p>
-                      <a:pPr algn="ctr" indent="0" marL="0">
-                        <a:buNone/>
-                      </a:pPr>
-                      <a:r>
-                        <a:rPr lang="en-US" sz="1100" b="1" dirty="0">
-                          <a:solidFill>
-                            <a:srgbClr val="1B2533"/>
-                          </a:solidFill>
-                          <a:latin typeface="Microsoft YaHei" pitchFamily="34" charset="0"/>
-                          <a:ea typeface="Microsoft YaHei" pitchFamily="34" charset="-122"/>
-                          <a:cs typeface="Microsoft YaHei" pitchFamily="34" charset="-120"/>
-                        </a:rPr>
-                        <a:t>60%</a:t>
-                      </a:r>
-                      <a:endParaRPr lang="en-US" sz="1100" dirty="0">
-                        <a:latin typeface="Microsoft YaHei" charset="0"/>
-                        <a:ea typeface="Microsoft YaHei" charset="0"/>
-                        <a:cs typeface="Microsoft YaHei" charset="0"/>
-                      </a:endParaRPr>
-                    </a:p>
-                  </a:txBody>
-                  <a:tcPr marL="64008" marR="64008" marT="27432" marB="27432" anchor="ctr">
-                    <a:lnL w="9525" cap="flat" cmpd="sng" algn="ctr">
-                      <a:solidFill>
-                        <a:srgbClr val="D5DCE4"/>
-                      </a:solidFill>
-                      <a:prstDash val="solid"/>
-                      <a:round/>
-                      <a:headEnd type="none" w="med" len="med"/>
-                      <a:tailEnd type="none" w="med" len="med"/>
-                    </a:lnL>
-                    <a:lnR w="9525" cap="flat" cmpd="sng" algn="ctr">
-                      <a:solidFill>
-                        <a:srgbClr val="D5DCE4"/>
-                      </a:solidFill>
-                      <a:prstDash val="solid"/>
-                      <a:round/>
-                      <a:headEnd type="none" w="med" len="med"/>
-                      <a:tailEnd type="none" w="med" len="med"/>
-                    </a:lnR>
-                    <a:lnT w="9525" cap="flat" cmpd="sng" algn="ctr">
-                      <a:solidFill>
-                        <a:srgbClr val="D5DCE4"/>
-                      </a:solidFill>
-                      <a:prstDash val="solid"/>
-                      <a:round/>
-                      <a:headEnd type="none" w="med" len="med"/>
-                      <a:tailEnd type="none" w="med" len="med"/>
-                    </a:lnT>
-                    <a:lnB w="9525" cap="flat" cmpd="sng" algn="ctr">
-                      <a:solidFill>
-                        <a:srgbClr val="D5DCE4"/>
-                      </a:solidFill>
-                      <a:prstDash val="solid"/>
-                      <a:round/>
-                      <a:headEnd type="none" w="med" len="med"/>
-                      <a:tailEnd type="none" w="med" len="med"/>
-                    </a:lnB>
-                    <a:solidFill>
-                      <a:srgbClr val="FFFFFF"/>
-                    </a:solidFill>
-                  </a:tcPr>
-                </a:tc>
-                <a:tc>
-                  <a:txBody>
-                    <a:bodyPr/>
-                    <a:lstStyle/>
-                    <a:p>
-                      <a:pPr algn="ctr" indent="0" marL="0">
-                        <a:buNone/>
-                      </a:pPr>
-                      <a:r>
-                        <a:rPr lang="en-US" sz="1100" b="1" dirty="0">
-                          <a:solidFill>
-                            <a:srgbClr val="1B2533"/>
-                          </a:solidFill>
-                          <a:latin typeface="Microsoft YaHei" pitchFamily="34" charset="0"/>
-                          <a:ea typeface="Microsoft YaHei" pitchFamily="34" charset="-122"/>
-                          <a:cs typeface="Microsoft YaHei" pitchFamily="34" charset="-120"/>
-                        </a:rPr>
-                        <a:t>10%</a:t>
-                      </a:r>
-                      <a:endParaRPr lang="en-US" sz="1100" dirty="0">
-                        <a:latin typeface="Microsoft YaHei" charset="0"/>
-                        <a:ea typeface="Microsoft YaHei" charset="0"/>
-                        <a:cs typeface="Microsoft YaHei" charset="0"/>
-                      </a:endParaRPr>
-                    </a:p>
-                  </a:txBody>
-                  <a:tcPr marL="64008" marR="64008" marT="27432" marB="27432" anchor="ctr">
-                    <a:lnL w="9525" cap="flat" cmpd="sng" algn="ctr">
-                      <a:solidFill>
-                        <a:srgbClr val="D5DCE4"/>
-                      </a:solidFill>
-                      <a:prstDash val="solid"/>
-                      <a:round/>
-                      <a:headEnd type="none" w="med" len="med"/>
-                      <a:tailEnd type="none" w="med" len="med"/>
-                    </a:lnL>
-                    <a:lnR w="9525" cap="flat" cmpd="sng" algn="ctr">
-                      <a:solidFill>
-                        <a:srgbClr val="D5DCE4"/>
-                      </a:solidFill>
-                      <a:prstDash val="solid"/>
-                      <a:round/>
-                      <a:headEnd type="none" w="med" len="med"/>
-                      <a:tailEnd type="none" w="med" len="med"/>
-                    </a:lnR>
-                    <a:lnT w="9525" cap="flat" cmpd="sng" algn="ctr">
-                      <a:solidFill>
-                        <a:srgbClr val="D5DCE4"/>
-                      </a:solidFill>
-                      <a:prstDash val="solid"/>
-                      <a:round/>
-                      <a:headEnd type="none" w="med" len="med"/>
-                      <a:tailEnd type="none" w="med" len="med"/>
-                    </a:lnT>
-                    <a:lnB w="9525" cap="flat" cmpd="sng" algn="ctr">
-                      <a:solidFill>
-                        <a:srgbClr val="D5DCE4"/>
-                      </a:solidFill>
-                      <a:prstDash val="solid"/>
-                      <a:round/>
-                      <a:headEnd type="none" w="med" len="med"/>
-                      <a:tailEnd type="none" w="med" len="med"/>
-                    </a:lnB>
-                    <a:solidFill>
-                      <a:srgbClr val="FFFFFF"/>
-                    </a:solidFill>
-                  </a:tcPr>
-                </a:tc>
-              </a:tr>
-              <a:tr h="347472">
-                <a:tc>
-                  <a:txBody>
-                    <a:bodyPr/>
-                    <a:lstStyle/>
-                    <a:p>
-                      <a:pPr algn="l" indent="0" marL="0">
-                        <a:buNone/>
-                      </a:pPr>
-                      <a:r>
-                        <a:rPr lang="en-US" sz="1100" dirty="0">
-                          <a:solidFill>
-                            <a:srgbClr val="1B2533"/>
-                          </a:solidFill>
-                          <a:latin typeface="Microsoft YaHei" pitchFamily="34" charset="0"/>
-                          <a:ea typeface="Microsoft YaHei" pitchFamily="34" charset="-122"/>
-                          <a:cs typeface="Microsoft YaHei" pitchFamily="34" charset="-120"/>
-                        </a:rPr>
-                        <a:t>查临床试验登记</a:t>
-                      </a:r>
-                      <a:endParaRPr lang="en-US" sz="1100" dirty="0">
-                        <a:latin typeface="Microsoft YaHei" charset="0"/>
-                        <a:ea typeface="Microsoft YaHei" charset="0"/>
-                        <a:cs typeface="Microsoft YaHei" charset="0"/>
-                      </a:endParaRPr>
-                    </a:p>
-                  </a:txBody>
-                  <a:tcPr marL="64008" marR="64008" marT="27432" marB="27432" anchor="ctr">
-                    <a:lnL w="9525" cap="flat" cmpd="sng" algn="ctr">
-                      <a:solidFill>
-                        <a:srgbClr val="D5DCE4"/>
-                      </a:solidFill>
-                      <a:prstDash val="solid"/>
-                      <a:round/>
-                      <a:headEnd type="none" w="med" len="med"/>
-                      <a:tailEnd type="none" w="med" len="med"/>
-                    </a:lnL>
-                    <a:lnR w="9525" cap="flat" cmpd="sng" algn="ctr">
-                      <a:solidFill>
-                        <a:srgbClr val="D5DCE4"/>
-                      </a:solidFill>
-                      <a:prstDash val="solid"/>
-                      <a:round/>
-                      <a:headEnd type="none" w="med" len="med"/>
-                      <a:tailEnd type="none" w="med" len="med"/>
-                    </a:lnR>
-                    <a:lnT w="9525" cap="flat" cmpd="sng" algn="ctr">
-                      <a:solidFill>
-                        <a:srgbClr val="D5DCE4"/>
-                      </a:solidFill>
-                      <a:prstDash val="solid"/>
-                      <a:round/>
-                      <a:headEnd type="none" w="med" len="med"/>
-                      <a:tailEnd type="none" w="med" len="med"/>
-                    </a:lnT>
-                    <a:lnB w="9525" cap="flat" cmpd="sng" algn="ctr">
-                      <a:solidFill>
-                        <a:srgbClr val="D5DCE4"/>
-                      </a:solidFill>
-                      <a:prstDash val="solid"/>
-                      <a:round/>
-                      <a:headEnd type="none" w="med" len="med"/>
-                      <a:tailEnd type="none" w="med" len="med"/>
-                    </a:lnB>
-                    <a:solidFill>
-                      <a:srgbClr val="FFFFFF"/>
-                    </a:solidFill>
-                  </a:tcPr>
-                </a:tc>
-                <a:tc>
-                  <a:txBody>
-                    <a:bodyPr/>
-                    <a:lstStyle/>
-                    <a:p>
-                      <a:pPr algn="ctr" indent="0" marL="0">
-                        <a:buNone/>
-                      </a:pPr>
-                      <a:r>
-                        <a:rPr lang="en-US" sz="1100" b="1" dirty="0">
-                          <a:solidFill>
-                            <a:srgbClr val="1B2533"/>
-                          </a:solidFill>
-                          <a:latin typeface="Microsoft YaHei" pitchFamily="34" charset="0"/>
-                          <a:ea typeface="Microsoft YaHei" pitchFamily="34" charset="-122"/>
-                          <a:cs typeface="Microsoft YaHei" pitchFamily="34" charset="-120"/>
-                        </a:rPr>
-                        <a:t>50%</a:t>
-                      </a:r>
-                      <a:endParaRPr lang="en-US" sz="1100" dirty="0">
-                        <a:latin typeface="Microsoft YaHei" charset="0"/>
-                        <a:ea typeface="Microsoft YaHei" charset="0"/>
-                        <a:cs typeface="Microsoft YaHei" charset="0"/>
-                      </a:endParaRPr>
-                    </a:p>
-                  </a:txBody>
-                  <a:tcPr marL="64008" marR="64008" marT="27432" marB="27432" anchor="ctr">
-                    <a:lnL w="9525" cap="flat" cmpd="sng" algn="ctr">
-                      <a:solidFill>
-                        <a:srgbClr val="D5DCE4"/>
-                      </a:solidFill>
-                      <a:prstDash val="solid"/>
-                      <a:round/>
-                      <a:headEnd type="none" w="med" len="med"/>
-                      <a:tailEnd type="none" w="med" len="med"/>
-                    </a:lnL>
-                    <a:lnR w="9525" cap="flat" cmpd="sng" algn="ctr">
-                      <a:solidFill>
-                        <a:srgbClr val="D5DCE4"/>
-                      </a:solidFill>
-                      <a:prstDash val="solid"/>
-                      <a:round/>
-                      <a:headEnd type="none" w="med" len="med"/>
-                      <a:tailEnd type="none" w="med" len="med"/>
-                    </a:lnR>
-                    <a:lnT w="9525" cap="flat" cmpd="sng" algn="ctr">
-                      <a:solidFill>
-                        <a:srgbClr val="D5DCE4"/>
-                      </a:solidFill>
-                      <a:prstDash val="solid"/>
-                      <a:round/>
-                      <a:headEnd type="none" w="med" len="med"/>
-                      <a:tailEnd type="none" w="med" len="med"/>
-                    </a:lnT>
-                    <a:lnB w="9525" cap="flat" cmpd="sng" algn="ctr">
-                      <a:solidFill>
-                        <a:srgbClr val="D5DCE4"/>
-                      </a:solidFill>
-                      <a:prstDash val="solid"/>
-                      <a:round/>
-                      <a:headEnd type="none" w="med" len="med"/>
-                      <a:tailEnd type="none" w="med" len="med"/>
-                    </a:lnB>
-                    <a:solidFill>
-                      <a:srgbClr val="FFFFFF"/>
-                    </a:solidFill>
-                  </a:tcPr>
-                </a:tc>
-                <a:tc>
-                  <a:txBody>
-                    <a:bodyPr/>
-                    <a:lstStyle/>
-                    <a:p>
-                      <a:pPr algn="ctr" indent="0" marL="0">
-                        <a:buNone/>
-                      </a:pPr>
-                      <a:r>
-                        <a:rPr lang="en-US" sz="1100" b="1" dirty="0">
-                          <a:solidFill>
-                            <a:srgbClr val="1B2533"/>
-                          </a:solidFill>
-                          <a:latin typeface="Microsoft YaHei" pitchFamily="34" charset="0"/>
-                          <a:ea typeface="Microsoft YaHei" pitchFamily="34" charset="-122"/>
-                          <a:cs typeface="Microsoft YaHei" pitchFamily="34" charset="-120"/>
-                        </a:rPr>
-                        <a:t>15%</a:t>
-                      </a:r>
-                      <a:endParaRPr lang="en-US" sz="1100" dirty="0">
-                        <a:latin typeface="Microsoft YaHei" charset="0"/>
-                        <a:ea typeface="Microsoft YaHei" charset="0"/>
-                        <a:cs typeface="Microsoft YaHei" charset="0"/>
-                      </a:endParaRPr>
-                    </a:p>
-                  </a:txBody>
-                  <a:tcPr marL="64008" marR="64008" marT="27432" marB="27432" anchor="ctr">
-                    <a:lnL w="9525" cap="flat" cmpd="sng" algn="ctr">
-                      <a:solidFill>
-                        <a:srgbClr val="D5DCE4"/>
-                      </a:solidFill>
-                      <a:prstDash val="solid"/>
-                      <a:round/>
-                      <a:headEnd type="none" w="med" len="med"/>
-                      <a:tailEnd type="none" w="med" len="med"/>
-                    </a:lnL>
-                    <a:lnR w="9525" cap="flat" cmpd="sng" algn="ctr">
-                      <a:solidFill>
-                        <a:srgbClr val="D5DCE4"/>
-                      </a:solidFill>
-                      <a:prstDash val="solid"/>
-                      <a:round/>
-                      <a:headEnd type="none" w="med" len="med"/>
-                      <a:tailEnd type="none" w="med" len="med"/>
-                    </a:lnR>
-                    <a:lnT w="9525" cap="flat" cmpd="sng" algn="ctr">
-                      <a:solidFill>
-                        <a:srgbClr val="D5DCE4"/>
-                      </a:solidFill>
-                      <a:prstDash val="solid"/>
-                      <a:round/>
-                      <a:headEnd type="none" w="med" len="med"/>
-                      <a:tailEnd type="none" w="med" len="med"/>
-                    </a:lnT>
-                    <a:lnB w="9525" cap="flat" cmpd="sng" algn="ctr">
-                      <a:solidFill>
-                        <a:srgbClr val="D5DCE4"/>
-                      </a:solidFill>
-                      <a:prstDash val="solid"/>
-                      <a:round/>
-                      <a:headEnd type="none" w="med" len="med"/>
-                      <a:tailEnd type="none" w="med" len="med"/>
-                    </a:lnB>
-                    <a:solidFill>
-                      <a:srgbClr val="FFFFFF"/>
-                    </a:solidFill>
-                  </a:tcPr>
-                </a:tc>
-              </a:tr>
-              <a:tr h="347472">
-                <a:tc>
-                  <a:txBody>
-                    <a:bodyPr/>
-                    <a:lstStyle/>
-                    <a:p>
-                      <a:pPr algn="l" indent="0" marL="0">
-                        <a:buNone/>
-                      </a:pPr>
-                      <a:r>
-                        <a:rPr lang="en-US" sz="1100" dirty="0">
-                          <a:solidFill>
-                            <a:srgbClr val="1B2533"/>
-                          </a:solidFill>
-                          <a:latin typeface="Microsoft YaHei" pitchFamily="34" charset="0"/>
-                          <a:ea typeface="Microsoft YaHei" pitchFamily="34" charset="-122"/>
-                          <a:cs typeface="Microsoft YaHei" pitchFamily="34" charset="-120"/>
-                        </a:rPr>
-                        <a:t>查靶点序列（UniProt）</a:t>
-                      </a:r>
-                      <a:endParaRPr lang="en-US" sz="1100" dirty="0">
-                        <a:latin typeface="Microsoft YaHei" charset="0"/>
-                        <a:ea typeface="Microsoft YaHei" charset="0"/>
-                        <a:cs typeface="Microsoft YaHei" charset="0"/>
-                      </a:endParaRPr>
-                    </a:p>
-                  </a:txBody>
-                  <a:tcPr marL="64008" marR="64008" marT="27432" marB="27432" anchor="ctr">
-                    <a:lnL w="9525" cap="flat" cmpd="sng" algn="ctr">
-                      <a:solidFill>
-                        <a:srgbClr val="D5DCE4"/>
-                      </a:solidFill>
-                      <a:prstDash val="solid"/>
-                      <a:round/>
-                      <a:headEnd type="none" w="med" len="med"/>
-                      <a:tailEnd type="none" w="med" len="med"/>
-                    </a:lnL>
-                    <a:lnR w="9525" cap="flat" cmpd="sng" algn="ctr">
-                      <a:solidFill>
-                        <a:srgbClr val="D5DCE4"/>
-                      </a:solidFill>
-                      <a:prstDash val="solid"/>
-                      <a:round/>
-                      <a:headEnd type="none" w="med" len="med"/>
-                      <a:tailEnd type="none" w="med" len="med"/>
-                    </a:lnR>
-                    <a:lnT w="9525" cap="flat" cmpd="sng" algn="ctr">
-                      <a:solidFill>
-                        <a:srgbClr val="D5DCE4"/>
-                      </a:solidFill>
-                      <a:prstDash val="solid"/>
-                      <a:round/>
-                      <a:headEnd type="none" w="med" len="med"/>
-                      <a:tailEnd type="none" w="med" len="med"/>
-                    </a:lnT>
-                    <a:lnB w="9525" cap="flat" cmpd="sng" algn="ctr">
-                      <a:solidFill>
-                        <a:srgbClr val="D5DCE4"/>
-                      </a:solidFill>
-                      <a:prstDash val="solid"/>
-                      <a:round/>
-                      <a:headEnd type="none" w="med" len="med"/>
-                      <a:tailEnd type="none" w="med" len="med"/>
-                    </a:lnB>
-                    <a:solidFill>
-                      <a:srgbClr val="FFFFFF"/>
-                    </a:solidFill>
-                  </a:tcPr>
-                </a:tc>
-                <a:tc>
-                  <a:txBody>
-                    <a:bodyPr/>
-                    <a:lstStyle/>
-                    <a:p>
-                      <a:pPr algn="ctr" indent="0" marL="0">
-                        <a:buNone/>
-                      </a:pPr>
-                      <a:r>
-                        <a:rPr lang="en-US" sz="1100" b="1" dirty="0">
-                          <a:solidFill>
-                            <a:srgbClr val="1B2533"/>
-                          </a:solidFill>
-                          <a:latin typeface="Microsoft YaHei" pitchFamily="34" charset="0"/>
-                          <a:ea typeface="Microsoft YaHei" pitchFamily="34" charset="-122"/>
-                          <a:cs typeface="Microsoft YaHei" pitchFamily="34" charset="-120"/>
-                        </a:rPr>
-                        <a:t>95%</a:t>
-                      </a:r>
-                      <a:endParaRPr lang="en-US" sz="1100" dirty="0">
-                        <a:latin typeface="Microsoft YaHei" charset="0"/>
-                        <a:ea typeface="Microsoft YaHei" charset="0"/>
-                        <a:cs typeface="Microsoft YaHei" charset="0"/>
-                      </a:endParaRPr>
-                    </a:p>
-                  </a:txBody>
-                  <a:tcPr marL="64008" marR="64008" marT="27432" marB="27432" anchor="ctr">
-                    <a:lnL w="9525" cap="flat" cmpd="sng" algn="ctr">
-                      <a:solidFill>
-                        <a:srgbClr val="D5DCE4"/>
-                      </a:solidFill>
-                      <a:prstDash val="solid"/>
-                      <a:round/>
-                      <a:headEnd type="none" w="med" len="med"/>
-                      <a:tailEnd type="none" w="med" len="med"/>
-                    </a:lnL>
-                    <a:lnR w="9525" cap="flat" cmpd="sng" algn="ctr">
-                      <a:solidFill>
-                        <a:srgbClr val="D5DCE4"/>
-                      </a:solidFill>
-                      <a:prstDash val="solid"/>
-                      <a:round/>
-                      <a:headEnd type="none" w="med" len="med"/>
-                      <a:tailEnd type="none" w="med" len="med"/>
-                    </a:lnR>
-                    <a:lnT w="9525" cap="flat" cmpd="sng" algn="ctr">
-                      <a:solidFill>
-                        <a:srgbClr val="D5DCE4"/>
-                      </a:solidFill>
-                      <a:prstDash val="solid"/>
-                      <a:round/>
-                      <a:headEnd type="none" w="med" len="med"/>
-                      <a:tailEnd type="none" w="med" len="med"/>
-                    </a:lnT>
-                    <a:lnB w="9525" cap="flat" cmpd="sng" algn="ctr">
-                      <a:solidFill>
-                        <a:srgbClr val="D5DCE4"/>
-                      </a:solidFill>
-                      <a:prstDash val="solid"/>
-                      <a:round/>
-                      <a:headEnd type="none" w="med" len="med"/>
-                      <a:tailEnd type="none" w="med" len="med"/>
-                    </a:lnB>
-                    <a:solidFill>
-                      <a:srgbClr val="FFFFFF"/>
-                    </a:solidFill>
-                  </a:tcPr>
-                </a:tc>
-                <a:tc>
-                  <a:txBody>
-                    <a:bodyPr/>
-                    <a:lstStyle/>
-                    <a:p>
-                      <a:pPr algn="ctr" indent="0" marL="0">
-                        <a:buNone/>
-                      </a:pPr>
-                      <a:r>
-                        <a:rPr lang="en-US" sz="1100" b="1" dirty="0">
-                          <a:solidFill>
-                            <a:srgbClr val="1B2533"/>
-                          </a:solidFill>
-                          <a:latin typeface="Microsoft YaHei" pitchFamily="34" charset="0"/>
-                          <a:ea typeface="Microsoft YaHei" pitchFamily="34" charset="-122"/>
-                          <a:cs typeface="Microsoft YaHei" pitchFamily="34" charset="-120"/>
-                        </a:rPr>
-                        <a:t>80%</a:t>
-                      </a:r>
-                      <a:endParaRPr lang="en-US" sz="1100" dirty="0">
-                        <a:latin typeface="Microsoft YaHei" charset="0"/>
-                        <a:ea typeface="Microsoft YaHei" charset="0"/>
-                        <a:cs typeface="Microsoft YaHei" charset="0"/>
-                      </a:endParaRPr>
-                    </a:p>
-                  </a:txBody>
-                  <a:tcPr marL="64008" marR="64008" marT="27432" marB="27432" anchor="ctr">
-                    <a:lnL w="9525" cap="flat" cmpd="sng" algn="ctr">
-                      <a:solidFill>
-                        <a:srgbClr val="D5DCE4"/>
-                      </a:solidFill>
-                      <a:prstDash val="solid"/>
-                      <a:round/>
-                      <a:headEnd type="none" w="med" len="med"/>
-                      <a:tailEnd type="none" w="med" len="med"/>
-                    </a:lnL>
-                    <a:lnR w="9525" cap="flat" cmpd="sng" algn="ctr">
-                      <a:solidFill>
-                        <a:srgbClr val="D5DCE4"/>
-                      </a:solidFill>
-                      <a:prstDash val="solid"/>
-                      <a:round/>
-                      <a:headEnd type="none" w="med" len="med"/>
-                      <a:tailEnd type="none" w="med" len="med"/>
-                    </a:lnR>
-                    <a:lnT w="9525" cap="flat" cmpd="sng" algn="ctr">
-                      <a:solidFill>
-                        <a:srgbClr val="D5DCE4"/>
-                      </a:solidFill>
-                      <a:prstDash val="solid"/>
-                      <a:round/>
-                      <a:headEnd type="none" w="med" len="med"/>
-                      <a:tailEnd type="none" w="med" len="med"/>
-                    </a:lnT>
-                    <a:lnB w="9525" cap="flat" cmpd="sng" algn="ctr">
-                      <a:solidFill>
-                        <a:srgbClr val="D5DCE4"/>
-                      </a:solidFill>
-                      <a:prstDash val="solid"/>
-                      <a:round/>
-                      <a:headEnd type="none" w="med" len="med"/>
-                      <a:tailEnd type="none" w="med" len="med"/>
-                    </a:lnB>
-                    <a:solidFill>
-                      <a:srgbClr val="FFFFFF"/>
-                    </a:solidFill>
-                  </a:tcPr>
-                </a:tc>
-              </a:tr>
-            </a:tbl>
-          </a:graphicData>
-        </a:graphic>
-      </p:graphicFrame>
+      <p:sp>
+        <p:nvSpPr>
+          <p:cNvPr id="9" name="label-176"/>
+          <p:cNvSpPr txBox="1"/>
+          <p:nvPr/>
+        </p:nvSpPr>
+        <p:spPr>
+          <a:xfrm>
+            <a:off x="2423160" y="2926080"/>
+            <a:ext cx="1325880" cy="237744"/>
+          </a:xfrm>
+          <a:prstGeom prst="rect">
+            <a:avLst/>
+          </a:prstGeom>
+          <a:noFill/>
+          <a:ln/>
+        </p:spPr>
+        <p:txBody>
+          <a:bodyPr wrap="square" lIns="0" tIns="0" rIns="0" bIns="0" rtlCol="0" anchor="t"/>
+          <a:lstStyle/>
+          <a:p>
+            <a:pPr algn="ctr" indent="0" marL="0">
+              <a:buNone/>
+            </a:pPr>
+            <a:r>
+              <a:rPr lang="en-US" sz="950" dirty="0">
+                <a:solidFill>
+                  <a:schemeClr val="accent6"/>
+                </a:solidFill>
+              </a:rPr>
+              <a:t>成立 vs 不成立</a:t>
+            </a:r>
+            <a:endParaRPr lang="en-US" sz="950" dirty="0"/>
+          </a:p>
+        </p:txBody>
+      </p:sp>
       <p:sp>
         <p:nvSpPr>
           <p:cNvPr id="10" name="label-177"/>
@@ -15108,8 +14265,8 @@
         </p:nvSpPr>
         <p:spPr>
           <a:xfrm>
-            <a:off x="4937760" y="3337560"/>
-            <a:ext cx="2240280" cy="420624"/>
+            <a:off x="3749040" y="2926080"/>
+            <a:ext cx="3429000" cy="237744"/>
           </a:xfrm>
           <a:prstGeom prst="rect">
             <a:avLst/>
@@ -15118,6 +14275,78 @@
           <a:ln/>
         </p:spPr>
         <p:txBody>
+          <a:bodyPr wrap="square" lIns="0" tIns="0" rIns="0" bIns="0" rtlCol="0" anchor="t"/>
+          <a:lstStyle/>
+          <a:p>
+            <a:pPr algn="l" indent="0" marL="0">
+              <a:buNone/>
+            </a:pPr>
+            <a:r>
+              <a:rPr lang="en-US" sz="950" dirty="0">
+                <a:solidFill>
+                  <a:schemeClr val="accent6"/>
+                </a:solidFill>
+              </a:rPr>
+              <a:t>信息增益（比特）</a:t>
+            </a:r>
+            <a:endParaRPr lang="en-US" sz="950" dirty="0"/>
+          </a:p>
+        </p:txBody>
+      </p:sp>
+      <p:sp>
+        <p:nvSpPr>
+          <p:cNvPr id="11" name="label-178"/>
+          <p:cNvSpPr txBox="1"/>
+          <p:nvPr/>
+        </p:nvSpPr>
+        <p:spPr>
+          <a:xfrm>
+            <a:off x="822960" y="3163824"/>
+            <a:ext cx="6355080" cy="237744"/>
+          </a:xfrm>
+          <a:prstGeom prst="rect">
+            <a:avLst/>
+          </a:prstGeom>
+          <a:noFill/>
+          <a:ln/>
+        </p:spPr>
+        <p:txBody>
+          <a:bodyPr wrap="square" lIns="0" tIns="0" rIns="0" bIns="0" rtlCol="0" anchor="t"/>
+          <a:lstStyle/>
+          <a:p>
+            <a:pPr algn="l" indent="0" marL="0">
+              <a:buNone/>
+            </a:pPr>
+            <a:r>
+              <a:rPr lang="en-US" sz="1100" b="1" dirty="0">
+                <a:solidFill>
+                  <a:schemeClr val="accent6"/>
+                </a:solidFill>
+              </a:rPr>
+              <a:t>只看靶点本身</a:t>
+            </a:r>
+            <a:endParaRPr lang="en-US" sz="1100" dirty="0"/>
+          </a:p>
+        </p:txBody>
+      </p:sp>
+      <p:sp>
+        <p:nvSpPr>
+          <p:cNvPr id="12" name="label-179"/>
+          <p:cNvSpPr txBox="1"/>
+          <p:nvPr/>
+        </p:nvSpPr>
+        <p:spPr>
+          <a:xfrm>
+            <a:off x="960120" y="3410712"/>
+            <a:ext cx="1463040" cy="246888"/>
+          </a:xfrm>
+          <a:prstGeom prst="rect">
+            <a:avLst/>
+          </a:prstGeom>
+          <a:noFill/>
+          <a:ln/>
+        </p:spPr>
+        <p:txBody>
           <a:bodyPr wrap="square" lIns="0" tIns="0" rIns="0" bIns="0" rtlCol="0" anchor="ctr"/>
           <a:lstStyle/>
           <a:p>
@@ -15125,26 +14354,397 @@
               <a:buNone/>
             </a:pPr>
             <a:r>
+              <a:rPr lang="en-US" sz="1100" dirty="0">
+                <a:solidFill>
+                  <a:schemeClr val="tx1"/>
+                </a:solidFill>
+              </a:rPr>
+              <a:t>查靶点序列</a:t>
+            </a:r>
+            <a:endParaRPr lang="en-US" sz="1100" dirty="0"/>
+          </a:p>
+        </p:txBody>
+      </p:sp>
+      <p:sp>
+        <p:nvSpPr>
+          <p:cNvPr id="13" name="label-180"/>
+          <p:cNvSpPr txBox="1"/>
+          <p:nvPr/>
+        </p:nvSpPr>
+        <p:spPr>
+          <a:xfrm>
+            <a:off x="2423160" y="3410712"/>
+            <a:ext cx="1325880" cy="246888"/>
+          </a:xfrm>
+          <a:prstGeom prst="rect">
+            <a:avLst/>
+          </a:prstGeom>
+          <a:noFill/>
+          <a:ln/>
+        </p:spPr>
+        <p:txBody>
+          <a:bodyPr wrap="square" lIns="0" tIns="0" rIns="0" bIns="0" rtlCol="0" anchor="ctr"/>
+          <a:lstStyle/>
+          <a:p>
+            <a:pPr algn="ctr" indent="0" marL="0">
+              <a:buNone/>
+            </a:pPr>
+            <a:r>
+              <a:rPr lang="en-US" sz="1100" dirty="0">
+                <a:solidFill>
+                  <a:schemeClr val="tx1"/>
+                </a:solidFill>
+              </a:rPr>
+              <a:t>100% vs 100%</a:t>
+            </a:r>
+            <a:endParaRPr lang="en-US" sz="1100" dirty="0"/>
+          </a:p>
+        </p:txBody>
+      </p:sp>
+      <p:sp>
+        <p:nvSpPr>
+          <p:cNvPr id="14" name="label-181"/>
+          <p:cNvSpPr txBox="1"/>
+          <p:nvPr/>
+        </p:nvSpPr>
+        <p:spPr>
+          <a:xfrm>
+            <a:off x="3803904" y="3410712"/>
+            <a:ext cx="548640" cy="246888"/>
+          </a:xfrm>
+          <a:prstGeom prst="rect">
+            <a:avLst/>
+          </a:prstGeom>
+          <a:noFill/>
+          <a:ln/>
+        </p:spPr>
+        <p:txBody>
+          <a:bodyPr wrap="square" lIns="0" tIns="0" rIns="0" bIns="0" rtlCol="0" anchor="ctr"/>
+          <a:lstStyle/>
+          <a:p>
+            <a:pPr algn="l" indent="0" marL="0">
+              <a:buNone/>
+            </a:pPr>
+            <a:r>
+              <a:rPr lang="en-US" sz="1050" b="1" dirty="0">
+                <a:solidFill>
+                  <a:schemeClr val="tx1"/>
+                </a:solidFill>
+              </a:rPr>
+              <a:t>0</a:t>
+            </a:r>
+            <a:endParaRPr lang="en-US" sz="1050" dirty="0"/>
+          </a:p>
+        </p:txBody>
+      </p:sp>
+      <p:sp>
+        <p:nvSpPr>
+          <p:cNvPr id="15" name="label-182"/>
+          <p:cNvSpPr txBox="1"/>
+          <p:nvPr/>
+        </p:nvSpPr>
+        <p:spPr>
+          <a:xfrm>
+            <a:off x="960120" y="3675888"/>
+            <a:ext cx="1463040" cy="246888"/>
+          </a:xfrm>
+          <a:prstGeom prst="rect">
+            <a:avLst/>
+          </a:prstGeom>
+          <a:noFill/>
+          <a:ln/>
+        </p:spPr>
+        <p:txBody>
+          <a:bodyPr wrap="square" lIns="0" tIns="0" rIns="0" bIns="0" rtlCol="0" anchor="ctr"/>
+          <a:lstStyle/>
+          <a:p>
+            <a:pPr algn="l" indent="0" marL="0">
+              <a:buNone/>
+            </a:pPr>
+            <a:r>
+              <a:rPr lang="en-US" sz="1100" dirty="0">
+                <a:solidFill>
+                  <a:schemeClr val="tx1"/>
+                </a:solidFill>
+              </a:rPr>
+              <a:t>查临床试验登记</a:t>
+            </a:r>
+            <a:endParaRPr lang="en-US" sz="1100" dirty="0"/>
+          </a:p>
+        </p:txBody>
+      </p:sp>
+      <p:sp>
+        <p:nvSpPr>
+          <p:cNvPr id="16" name="label-183"/>
+          <p:cNvSpPr txBox="1"/>
+          <p:nvPr/>
+        </p:nvSpPr>
+        <p:spPr>
+          <a:xfrm>
+            <a:off x="2423160" y="3675888"/>
+            <a:ext cx="1325880" cy="246888"/>
+          </a:xfrm>
+          <a:prstGeom prst="rect">
+            <a:avLst/>
+          </a:prstGeom>
+          <a:noFill/>
+          <a:ln/>
+        </p:spPr>
+        <p:txBody>
+          <a:bodyPr wrap="square" lIns="0" tIns="0" rIns="0" bIns="0" rtlCol="0" anchor="ctr"/>
+          <a:lstStyle/>
+          <a:p>
+            <a:pPr algn="ctr" indent="0" marL="0">
+              <a:buNone/>
+            </a:pPr>
+            <a:r>
+              <a:rPr lang="en-US" sz="1100" dirty="0">
+                <a:solidFill>
+                  <a:schemeClr val="tx1"/>
+                </a:solidFill>
+              </a:rPr>
+              <a:t>100% vs 100%</a:t>
+            </a:r>
+            <a:endParaRPr lang="en-US" sz="1100" dirty="0"/>
+          </a:p>
+        </p:txBody>
+      </p:sp>
+      <p:sp>
+        <p:nvSpPr>
+          <p:cNvPr id="17" name="label-184"/>
+          <p:cNvSpPr txBox="1"/>
+          <p:nvPr/>
+        </p:nvSpPr>
+        <p:spPr>
+          <a:xfrm>
+            <a:off x="3803904" y="3675888"/>
+            <a:ext cx="548640" cy="246888"/>
+          </a:xfrm>
+          <a:prstGeom prst="rect">
+            <a:avLst/>
+          </a:prstGeom>
+          <a:noFill/>
+          <a:ln/>
+        </p:spPr>
+        <p:txBody>
+          <a:bodyPr wrap="square" lIns="0" tIns="0" rIns="0" bIns="0" rtlCol="0" anchor="ctr"/>
+          <a:lstStyle/>
+          <a:p>
+            <a:pPr algn="l" indent="0" marL="0">
+              <a:buNone/>
+            </a:pPr>
+            <a:r>
+              <a:rPr lang="en-US" sz="1050" b="1" dirty="0">
+                <a:solidFill>
+                  <a:schemeClr val="tx1"/>
+                </a:solidFill>
+              </a:rPr>
+              <a:t>0</a:t>
+            </a:r>
+            <a:endParaRPr lang="en-US" sz="1050" dirty="0"/>
+          </a:p>
+        </p:txBody>
+      </p:sp>
+      <p:sp>
+        <p:nvSpPr>
+          <p:cNvPr id="18" name="label-185"/>
+          <p:cNvSpPr txBox="1"/>
+          <p:nvPr/>
+        </p:nvSpPr>
+        <p:spPr>
+          <a:xfrm>
+            <a:off x="960120" y="3941064"/>
+            <a:ext cx="1463040" cy="246888"/>
+          </a:xfrm>
+          <a:prstGeom prst="rect">
+            <a:avLst/>
+          </a:prstGeom>
+          <a:noFill/>
+          <a:ln/>
+        </p:spPr>
+        <p:txBody>
+          <a:bodyPr wrap="square" lIns="0" tIns="0" rIns="0" bIns="0" rtlCol="0" anchor="ctr"/>
+          <a:lstStyle/>
+          <a:p>
+            <a:pPr algn="l" indent="0" marL="0">
+              <a:buNone/>
+            </a:pPr>
+            <a:r>
+              <a:rPr lang="en-US" sz="1100" dirty="0">
+                <a:solidFill>
+                  <a:schemeClr val="tx1"/>
+                </a:solidFill>
+              </a:rPr>
+              <a:t>查强活性化合物</a:t>
+            </a:r>
+            <a:endParaRPr lang="en-US" sz="1100" dirty="0"/>
+          </a:p>
+        </p:txBody>
+      </p:sp>
+      <p:sp>
+        <p:nvSpPr>
+          <p:cNvPr id="19" name="label-186"/>
+          <p:cNvSpPr txBox="1"/>
+          <p:nvPr/>
+        </p:nvSpPr>
+        <p:spPr>
+          <a:xfrm>
+            <a:off x="2423160" y="3941064"/>
+            <a:ext cx="1325880" cy="246888"/>
+          </a:xfrm>
+          <a:prstGeom prst="rect">
+            <a:avLst/>
+          </a:prstGeom>
+          <a:noFill/>
+          <a:ln/>
+        </p:spPr>
+        <p:txBody>
+          <a:bodyPr wrap="square" lIns="0" tIns="0" rIns="0" bIns="0" rtlCol="0" anchor="ctr"/>
+          <a:lstStyle/>
+          <a:p>
+            <a:pPr algn="ctr" indent="0" marL="0">
+              <a:buNone/>
+            </a:pPr>
+            <a:r>
+              <a:rPr lang="en-US" sz="1100" dirty="0">
+                <a:solidFill>
+                  <a:schemeClr val="tx1"/>
+                </a:solidFill>
+              </a:rPr>
+              <a:t>88% vs 81%</a:t>
+            </a:r>
+            <a:endParaRPr lang="en-US" sz="1100" dirty="0"/>
+          </a:p>
+        </p:txBody>
+      </p:sp>
+      <p:sp>
+        <p:nvSpPr>
+          <p:cNvPr id="20" name="bar-187"/>
+          <p:cNvSpPr/>
+          <p:nvPr/>
+        </p:nvSpPr>
+        <p:spPr>
+          <a:xfrm>
+            <a:off x="3749040" y="3986784"/>
+            <a:ext cx="443132" cy="155448"/>
+          </a:xfrm>
+          <a:prstGeom prst="rect">
+            <a:avLst/>
+          </a:prstGeom>
+          <a:solidFill>
+            <a:srgbClr val="B4BFCC"/>
+          </a:solidFill>
+          <a:ln w="12700">
+            <a:solidFill>
+              <a:srgbClr val="B4BFCC"/>
+            </a:solidFill>
+            <a:prstDash val="solid"/>
+          </a:ln>
+        </p:spPr>
+      </p:sp>
+      <p:sp>
+        <p:nvSpPr>
+          <p:cNvPr id="21" name="label-188"/>
+          <p:cNvSpPr txBox="1"/>
+          <p:nvPr/>
+        </p:nvSpPr>
+        <p:spPr>
+          <a:xfrm>
+            <a:off x="4247036" y="3941064"/>
+            <a:ext cx="548640" cy="246888"/>
+          </a:xfrm>
+          <a:prstGeom prst="rect">
+            <a:avLst/>
+          </a:prstGeom>
+          <a:noFill/>
+          <a:ln/>
+        </p:spPr>
+        <p:txBody>
+          <a:bodyPr wrap="square" lIns="0" tIns="0" rIns="0" bIns="0" rtlCol="0" anchor="ctr"/>
+          <a:lstStyle/>
+          <a:p>
+            <a:pPr algn="l" indent="0" marL="0">
+              <a:buNone/>
+            </a:pPr>
+            <a:r>
+              <a:rPr lang="en-US" sz="1050" b="1" dirty="0">
+                <a:solidFill>
+                  <a:schemeClr val="tx1"/>
+                </a:solidFill>
+              </a:rPr>
+              <a:t>0.006</a:t>
+            </a:r>
+            <a:endParaRPr lang="en-US" sz="1050" dirty="0"/>
+          </a:p>
+        </p:txBody>
+      </p:sp>
+      <p:sp>
+        <p:nvSpPr>
+          <p:cNvPr id="22" name="label-189"/>
+          <p:cNvSpPr txBox="1"/>
+          <p:nvPr/>
+        </p:nvSpPr>
+        <p:spPr>
+          <a:xfrm>
+            <a:off x="822960" y="4242816"/>
+            <a:ext cx="6355080" cy="237744"/>
+          </a:xfrm>
+          <a:prstGeom prst="rect">
+            <a:avLst/>
+          </a:prstGeom>
+          <a:noFill/>
+          <a:ln/>
+        </p:spPr>
+        <p:txBody>
+          <a:bodyPr wrap="square" lIns="0" tIns="0" rIns="0" bIns="0" rtlCol="0" anchor="t"/>
+          <a:lstStyle/>
+          <a:p>
+            <a:pPr algn="l" indent="0" marL="0">
+              <a:buNone/>
+            </a:pPr>
+            <a:r>
               <a:rPr lang="en-US" sz="1100" b="1" dirty="0">
                 <a:solidFill>
-                  <a:schemeClr val="tx2"/>
-                </a:solidFill>
-              </a:rPr>
-              <a:t>能分开多少</a:t>
+                  <a:schemeClr val="accent1"/>
+                </a:solidFill>
+              </a:rPr>
+              <a:t>看靶点与疾病的关系</a:t>
             </a:r>
             <a:endParaRPr lang="en-US" sz="1100" dirty="0"/>
           </a:p>
+        </p:txBody>
+      </p:sp>
+      <p:sp>
+        <p:nvSpPr>
+          <p:cNvPr id="23" name="label-190"/>
+          <p:cNvSpPr txBox="1"/>
+          <p:nvPr/>
+        </p:nvSpPr>
+        <p:spPr>
+          <a:xfrm>
+            <a:off x="960120" y="4489704"/>
+            <a:ext cx="1463040" cy="246888"/>
+          </a:xfrm>
+          <a:prstGeom prst="rect">
+            <a:avLst/>
+          </a:prstGeom>
+          <a:noFill/>
+          <a:ln/>
+        </p:spPr>
+        <p:txBody>
+          <a:bodyPr wrap="square" lIns="0" tIns="0" rIns="0" bIns="0" rtlCol="0" anchor="ctr"/>
+          <a:lstStyle/>
           <a:p>
             <a:pPr algn="l" indent="0" marL="0">
               <a:buNone/>
             </a:pPr>
             <a:r>
-              <a:rPr lang="en-US" sz="1100" b="1" dirty="0">
-                <a:solidFill>
-                  <a:schemeClr val="tx2"/>
-                </a:solidFill>
-              </a:rPr>
-              <a:t>（信息增益）</a:t>
+              <a:rPr lang="en-US" sz="1100" dirty="0">
+                <a:solidFill>
+                  <a:schemeClr val="tx1"/>
+                </a:solidFill>
+              </a:rPr>
+              <a:t>动物模型证据</a:t>
             </a:r>
             <a:endParaRPr lang="en-US" sz="1100" dirty="0"/>
           </a:p>
@@ -15152,14 +14752,50 @@
       </p:sp>
       <p:sp>
         <p:nvSpPr>
-          <p:cNvPr id="11" name="bar-178"/>
+          <p:cNvPr id="24" name="label-191"/>
+          <p:cNvSpPr txBox="1"/>
+          <p:nvPr/>
+        </p:nvSpPr>
+        <p:spPr>
+          <a:xfrm>
+            <a:off x="2423160" y="4489704"/>
+            <a:ext cx="1325880" cy="246888"/>
+          </a:xfrm>
+          <a:prstGeom prst="rect">
+            <a:avLst/>
+          </a:prstGeom>
+          <a:noFill/>
+          <a:ln/>
+        </p:spPr>
+        <p:txBody>
+          <a:bodyPr wrap="square" lIns="0" tIns="0" rIns="0" bIns="0" rtlCol="0" anchor="ctr"/>
+          <a:lstStyle/>
+          <a:p>
+            <a:pPr algn="ctr" indent="0" marL="0">
+              <a:buNone/>
+            </a:pPr>
+            <a:r>
+              <a:rPr lang="en-US" sz="1100" dirty="0">
+                <a:solidFill>
+                  <a:schemeClr val="tx1"/>
+                </a:solidFill>
+              </a:rPr>
+              <a:t>38% vs 17%</a:t>
+            </a:r>
+            <a:endParaRPr lang="en-US" sz="1100" dirty="0"/>
+          </a:p>
+        </p:txBody>
+      </p:sp>
+      <p:sp>
+        <p:nvSpPr>
+          <p:cNvPr id="25" name="bar-192"/>
           <p:cNvSpPr/>
           <p:nvPr/>
         </p:nvSpPr>
         <p:spPr>
           <a:xfrm>
-            <a:off x="4937760" y="3831336"/>
-            <a:ext cx="1737360" cy="201168"/>
+            <a:off x="3749040" y="4535424"/>
+            <a:ext cx="2880360" cy="155448"/>
           </a:xfrm>
           <a:prstGeom prst="rect">
             <a:avLst/>
@@ -15177,14 +14813,14 @@
       </p:sp>
       <p:sp>
         <p:nvSpPr>
-          <p:cNvPr id="12" name="label-179"/>
+          <p:cNvPr id="26" name="label-193"/>
           <p:cNvSpPr txBox="1"/>
           <p:nvPr/>
         </p:nvSpPr>
         <p:spPr>
           <a:xfrm>
-            <a:off x="6729984" y="3794760"/>
-            <a:ext cx="457200" cy="274320"/>
+            <a:off x="6684264" y="4489704"/>
+            <a:ext cx="548640" cy="246888"/>
           </a:xfrm>
           <a:prstGeom prst="rect">
             <a:avLst/>
@@ -15205,7 +14841,7 @@
                   <a:schemeClr val="tx1"/>
                 </a:solidFill>
               </a:rPr>
-              <a:t>0.26</a:t>
+              <a:t>0.039</a:t>
             </a:r>
             <a:endParaRPr lang="en-US" sz="1050" dirty="0"/>
           </a:p>
@@ -15213,14 +14849,14 @@
       </p:sp>
       <p:sp>
         <p:nvSpPr>
-          <p:cNvPr id="13" name="label-180"/>
+          <p:cNvPr id="27" name="label-194"/>
           <p:cNvSpPr txBox="1"/>
           <p:nvPr/>
         </p:nvSpPr>
         <p:spPr>
           <a:xfrm>
-            <a:off x="5010912" y="3794760"/>
-            <a:ext cx="1627632" cy="274320"/>
+            <a:off x="960120" y="4754880"/>
+            <a:ext cx="1463040" cy="246888"/>
           </a:xfrm>
           <a:prstGeom prst="rect">
             <a:avLst/>
@@ -15236,37 +14872,73 @@
               <a:buNone/>
             </a:pPr>
             <a:r>
-              <a:rPr lang="en-US" sz="1000" b="1" dirty="0">
-                <a:solidFill>
-                  <a:schemeClr val="bg1"/>
-                </a:solidFill>
-              </a:rPr>
-              <a:t>差别最大，先查</a:t>
-            </a:r>
-            <a:endParaRPr lang="en-US" sz="1000" dirty="0"/>
-          </a:p>
-        </p:txBody>
-      </p:sp>
-      <p:sp>
-        <p:nvSpPr>
-          <p:cNvPr id="14" name="bar-181"/>
+              <a:rPr lang="en-US" sz="1100" dirty="0">
+                <a:solidFill>
+                  <a:schemeClr val="tx1"/>
+                </a:solidFill>
+              </a:rPr>
+              <a:t>人类遗传学证据</a:t>
+            </a:r>
+            <a:endParaRPr lang="en-US" sz="1100" dirty="0"/>
+          </a:p>
+        </p:txBody>
+      </p:sp>
+      <p:sp>
+        <p:nvSpPr>
+          <p:cNvPr id="28" name="label-195"/>
+          <p:cNvSpPr txBox="1"/>
+          <p:nvPr/>
+        </p:nvSpPr>
+        <p:spPr>
+          <a:xfrm>
+            <a:off x="2423160" y="4754880"/>
+            <a:ext cx="1325880" cy="246888"/>
+          </a:xfrm>
+          <a:prstGeom prst="rect">
+            <a:avLst/>
+          </a:prstGeom>
+          <a:noFill/>
+          <a:ln/>
+        </p:spPr>
+        <p:txBody>
+          <a:bodyPr wrap="square" lIns="0" tIns="0" rIns="0" bIns="0" rtlCol="0" anchor="ctr"/>
+          <a:lstStyle/>
+          <a:p>
+            <a:pPr algn="ctr" indent="0" marL="0">
+              <a:buNone/>
+            </a:pPr>
+            <a:r>
+              <a:rPr lang="en-US" sz="1100" dirty="0">
+                <a:solidFill>
+                  <a:schemeClr val="tx1"/>
+                </a:solidFill>
+              </a:rPr>
+              <a:t>35% vs 17%</a:t>
+            </a:r>
+            <a:endParaRPr lang="en-US" sz="1100" dirty="0"/>
+          </a:p>
+        </p:txBody>
+      </p:sp>
+      <p:sp>
+        <p:nvSpPr>
+          <p:cNvPr id="29" name="bar-196"/>
           <p:cNvSpPr/>
           <p:nvPr/>
         </p:nvSpPr>
         <p:spPr>
           <a:xfrm>
-            <a:off x="4937760" y="4178808"/>
-            <a:ext cx="704335" cy="201168"/>
+            <a:off x="3749040" y="4800600"/>
+            <a:ext cx="1994095" cy="155448"/>
           </a:xfrm>
           <a:prstGeom prst="rect">
             <a:avLst/>
           </a:prstGeom>
           <a:solidFill>
-            <a:srgbClr val="8FC9C2"/>
+            <a:srgbClr val="0E8A7E"/>
           </a:solidFill>
           <a:ln w="12700">
             <a:solidFill>
-              <a:srgbClr val="8FC9C2"/>
+              <a:srgbClr val="0E8A7E"/>
             </a:solidFill>
             <a:prstDash val="solid"/>
           </a:ln>
@@ -15274,14 +14946,14 @@
       </p:sp>
       <p:sp>
         <p:nvSpPr>
-          <p:cNvPr id="15" name="label-182"/>
+          <p:cNvPr id="30" name="label-197"/>
           <p:cNvSpPr txBox="1"/>
           <p:nvPr/>
         </p:nvSpPr>
         <p:spPr>
           <a:xfrm>
-            <a:off x="5696959" y="4142232"/>
-            <a:ext cx="457200" cy="274320"/>
+            <a:off x="5797999" y="4754880"/>
+            <a:ext cx="548640" cy="246888"/>
           </a:xfrm>
           <a:prstGeom prst="rect">
             <a:avLst/>
@@ -15302,7 +14974,7 @@
                   <a:schemeClr val="tx1"/>
                 </a:solidFill>
               </a:rPr>
-              <a:t>0.11</a:t>
+              <a:t>0.027</a:t>
             </a:r>
             <a:endParaRPr lang="en-US" sz="1050" dirty="0"/>
           </a:p>
@@ -15310,39 +14982,58 @@
       </p:sp>
       <p:sp>
         <p:nvSpPr>
-          <p:cNvPr id="16" name="bar-183"/>
+          <p:cNvPr id="31" name="box-198"/>
           <p:cNvSpPr/>
           <p:nvPr/>
         </p:nvSpPr>
         <p:spPr>
           <a:xfrm>
-            <a:off x="4937760" y="4526280"/>
-            <a:ext cx="261610" cy="201168"/>
-          </a:xfrm>
-          <a:prstGeom prst="rect">
-            <a:avLst/>
+            <a:off x="822960" y="5093208"/>
+            <a:ext cx="6355080" cy="530352"/>
+          </a:xfrm>
+          <a:prstGeom prst="roundRect">
+            <a:avLst>
+              <a:gd name="adj" fmla="val 13793"/>
+            </a:avLst>
           </a:prstGeom>
           <a:solidFill>
-            <a:srgbClr val="8FC9C2"/>
+            <a:srgbClr val="E3F3F1"/>
           </a:solidFill>
           <a:ln w="12700">
             <a:solidFill>
-              <a:srgbClr val="8FC9C2"/>
+              <a:srgbClr val="0E8A7E"/>
             </a:solidFill>
-            <a:prstDash val="solid"/>
           </a:ln>
         </p:spPr>
-      </p:sp>
-      <p:sp>
-        <p:nvSpPr>
-          <p:cNvPr id="17" name="label-184"/>
+        <p:txBody>
+          <a:bodyPr wrap="square" lIns="1270" tIns="1270" rIns="1270" bIns="1270" rtlCol="0" anchor="ctr"/>
+          <a:lstStyle/>
+          <a:p>
+            <a:pPr algn="l" indent="0" marL="0">
+              <a:buNone/>
+            </a:pPr>
+            <a:r>
+              <a:rPr lang="en-US" sz="1100" dirty="0">
+                <a:solidFill>
+                  <a:schemeClr val="tx2"/>
+                </a:solidFill>
+              </a:rPr>
+              <a:t>结论：只看靶点本身分不出有效与否；靶点与疾病之间的证据才有区分力——与 Nature 2024 一致（有遗传学支持的药物机制，成功率高 2.6 倍）。</a:t>
+            </a:r>
+            <a:endParaRPr lang="en-US" sz="1100" dirty="0"/>
+          </a:p>
+        </p:txBody>
+      </p:sp>
+      <p:sp>
+        <p:nvSpPr>
+          <p:cNvPr id="32" name="label-199"/>
           <p:cNvSpPr txBox="1"/>
           <p:nvPr/>
         </p:nvSpPr>
         <p:spPr>
           <a:xfrm>
-            <a:off x="5254234" y="4489704"/>
-            <a:ext cx="457200" cy="274320"/>
+            <a:off x="822960" y="5696712"/>
+            <a:ext cx="6355080" cy="274320"/>
           </a:xfrm>
           <a:prstGeom prst="rect">
             <a:avLst/>
@@ -15351,7 +15042,7 @@
           <a:ln/>
         </p:spPr>
         <p:txBody>
-          <a:bodyPr wrap="square" lIns="0" tIns="0" rIns="0" bIns="0" rtlCol="0" anchor="ctr"/>
+          <a:bodyPr wrap="square" lIns="0" tIns="0" rIns="0" bIns="0" rtlCol="0" anchor="t"/>
           <a:lstStyle/>
           <a:p>
             <a:pPr algn="l" indent="0" marL="0">
@@ -15360,10 +15051,10 @@
             <a:r>
               <a:rPr lang="en-US" sz="1050" b="1" dirty="0">
                 <a:solidFill>
-                  <a:schemeClr val="tx1"/>
-                </a:solidFill>
-              </a:rPr>
-              <a:t>0.04</a:t>
+                  <a:schemeClr val="accent6"/>
+                </a:solidFill>
+              </a:rPr>
+              <a:t>普适性：方法通用，数字随问题类型而定——换一类问题，用该类已知答案的案例重测一次。</a:t>
             </a:r>
             <a:endParaRPr lang="en-US" sz="1050" dirty="0"/>
           </a:p>
@@ -15371,307 +15062,7 @@
       </p:sp>
       <p:sp>
         <p:nvSpPr>
-          <p:cNvPr id="18" name="label-185"/>
-          <p:cNvSpPr txBox="1"/>
-          <p:nvPr/>
-        </p:nvSpPr>
-        <p:spPr>
-          <a:xfrm>
-            <a:off x="5656570" y="4489704"/>
-            <a:ext cx="1521470" cy="274320"/>
-          </a:xfrm>
-          <a:prstGeom prst="rect">
-            <a:avLst/>
-          </a:prstGeom>
-          <a:noFill/>
-          <a:ln/>
-        </p:spPr>
-        <p:txBody>
-          <a:bodyPr wrap="square" lIns="0" tIns="0" rIns="0" bIns="0" rtlCol="0" anchor="ctr"/>
-          <a:lstStyle/>
-          <a:p>
-            <a:pPr algn="l" indent="0" marL="0">
-              <a:buNone/>
-            </a:pPr>
-            <a:r>
-              <a:rPr lang="en-US" sz="1000" dirty="0">
-                <a:solidFill>
-                  <a:schemeClr val="accent6"/>
-                </a:solidFill>
-              </a:rPr>
-              <a:t>像“量体温”</a:t>
-            </a:r>
-            <a:endParaRPr lang="en-US" sz="1000" dirty="0"/>
-          </a:p>
-        </p:txBody>
-      </p:sp>
-      <p:sp>
-        <p:nvSpPr>
-          <p:cNvPr id="19" name="label-186"/>
-          <p:cNvSpPr txBox="1"/>
-          <p:nvPr/>
-        </p:nvSpPr>
-        <p:spPr>
-          <a:xfrm>
-            <a:off x="822960" y="4956048"/>
-            <a:ext cx="6355080" cy="256032"/>
-          </a:xfrm>
-          <a:prstGeom prst="rect">
-            <a:avLst/>
-          </a:prstGeom>
-          <a:noFill/>
-          <a:ln/>
-        </p:spPr>
-        <p:txBody>
-          <a:bodyPr wrap="square" lIns="0" tIns="0" rIns="0" bIns="0" rtlCol="0" anchor="t"/>
-          <a:lstStyle/>
-          <a:p>
-            <a:pPr algn="l" indent="0" marL="0">
-              <a:buNone/>
-            </a:pPr>
-            <a:r>
-              <a:rPr lang="en-US" sz="1150" b="1" dirty="0">
-                <a:solidFill>
-                  <a:schemeClr val="tx2"/>
-                </a:solidFill>
-              </a:rPr>
-              <a:t>实际过程（分歧度：0 = 已有定论，1 = 五五开）</a:t>
-            </a:r>
-            <a:endParaRPr lang="en-US" sz="1150" dirty="0"/>
-          </a:p>
-        </p:txBody>
-      </p:sp>
-      <p:sp>
-        <p:nvSpPr>
-          <p:cNvPr id="20" name="badge-187"/>
-          <p:cNvSpPr/>
-          <p:nvPr/>
-        </p:nvSpPr>
-        <p:spPr>
-          <a:xfrm>
-            <a:off x="822960" y="5276088"/>
-            <a:ext cx="274320" cy="274320"/>
-          </a:xfrm>
-          <a:prstGeom prst="ellipse">
-            <a:avLst/>
-          </a:prstGeom>
-          <a:solidFill>
-            <a:schemeClr val="accent2"/>
-          </a:solidFill>
-          <a:ln w="6350">
-            <a:solidFill>
-              <a:schemeClr val="accent2"/>
-            </a:solidFill>
-          </a:ln>
-        </p:spPr>
-        <p:txBody>
-          <a:bodyPr wrap="square" lIns="0" tIns="0" rIns="0" bIns="0" rtlCol="0" anchor="ctr"/>
-          <a:lstStyle/>
-          <a:p>
-            <a:pPr algn="ctr" indent="0" marL="0">
-              <a:buNone/>
-            </a:pPr>
-            <a:r>
-              <a:rPr lang="en-US" sz="1200" b="1" dirty="0">
-                <a:solidFill>
-                  <a:schemeClr val="bg1"/>
-                </a:solidFill>
-              </a:rPr>
-              <a:t>1</a:t>
-            </a:r>
-            <a:endParaRPr lang="en-US" sz="1200" dirty="0"/>
-          </a:p>
-        </p:txBody>
-      </p:sp>
-      <p:sp>
-        <p:nvSpPr>
-          <p:cNvPr id="21" name="label-188"/>
-          <p:cNvSpPr txBox="1"/>
-          <p:nvPr/>
-        </p:nvSpPr>
-        <p:spPr>
-          <a:xfrm>
-            <a:off x="1207008" y="5248656"/>
-            <a:ext cx="3611880" cy="329184"/>
-          </a:xfrm>
-          <a:prstGeom prst="rect">
-            <a:avLst/>
-          </a:prstGeom>
-          <a:noFill/>
-          <a:ln/>
-        </p:spPr>
-        <p:txBody>
-          <a:bodyPr wrap="square" lIns="0" tIns="0" rIns="0" bIns="0" rtlCol="0" anchor="ctr"/>
-          <a:lstStyle/>
-          <a:p>
-            <a:pPr algn="l" indent="0" marL="0">
-              <a:buNone/>
-            </a:pPr>
-            <a:r>
-              <a:rPr lang="en-US" sz="1050" dirty="0">
-                <a:solidFill>
-                  <a:schemeClr val="tx1"/>
-                </a:solidFill>
-              </a:rPr>
-              <a:t>查到强活性：司美格鲁肽对 GLP-1 受体亲和力 0.38 nM</a:t>
-            </a:r>
-            <a:endParaRPr lang="en-US" sz="1050" dirty="0"/>
-          </a:p>
-        </p:txBody>
-      </p:sp>
-      <p:sp>
-        <p:nvSpPr>
-          <p:cNvPr id="22" name="label-189"/>
-          <p:cNvSpPr txBox="1"/>
-          <p:nvPr/>
-        </p:nvSpPr>
-        <p:spPr>
-          <a:xfrm>
-            <a:off x="4846320" y="5248656"/>
-            <a:ext cx="2331720" cy="329184"/>
-          </a:xfrm>
-          <a:prstGeom prst="rect">
-            <a:avLst/>
-          </a:prstGeom>
-          <a:noFill/>
-          <a:ln/>
-        </p:spPr>
-        <p:txBody>
-          <a:bodyPr wrap="square" lIns="0" tIns="0" rIns="0" bIns="0" rtlCol="0" anchor="ctr"/>
-          <a:lstStyle/>
-          <a:p>
-            <a:pPr algn="l" indent="0" marL="0">
-              <a:buNone/>
-            </a:pPr>
-            <a:r>
-              <a:rPr lang="en-US" sz="1050" b="1" dirty="0">
-                <a:solidFill>
-                  <a:schemeClr val="accent1"/>
-                </a:solidFill>
-              </a:rPr>
-              <a:t>支持概率 0.50 → 0.86</a:t>
-            </a:r>
-            <a:endParaRPr lang="en-US" sz="1050" dirty="0"/>
-          </a:p>
-        </p:txBody>
-      </p:sp>
-      <p:sp>
-        <p:nvSpPr>
-          <p:cNvPr id="23" name="badge-190"/>
-          <p:cNvSpPr/>
-          <p:nvPr/>
-        </p:nvSpPr>
-        <p:spPr>
-          <a:xfrm>
-            <a:off x="822960" y="5660136"/>
-            <a:ext cx="274320" cy="274320"/>
-          </a:xfrm>
-          <a:prstGeom prst="ellipse">
-            <a:avLst/>
-          </a:prstGeom>
-          <a:solidFill>
-            <a:schemeClr val="accent2"/>
-          </a:solidFill>
-          <a:ln w="6350">
-            <a:solidFill>
-              <a:schemeClr val="accent2"/>
-            </a:solidFill>
-          </a:ln>
-        </p:spPr>
-        <p:txBody>
-          <a:bodyPr wrap="square" lIns="0" tIns="0" rIns="0" bIns="0" rtlCol="0" anchor="ctr"/>
-          <a:lstStyle/>
-          <a:p>
-            <a:pPr algn="ctr" indent="0" marL="0">
-              <a:buNone/>
-            </a:pPr>
-            <a:r>
-              <a:rPr lang="en-US" sz="1200" b="1" dirty="0">
-                <a:solidFill>
-                  <a:schemeClr val="bg1"/>
-                </a:solidFill>
-              </a:rPr>
-              <a:t>2</a:t>
-            </a:r>
-            <a:endParaRPr lang="en-US" sz="1200" dirty="0"/>
-          </a:p>
-        </p:txBody>
-      </p:sp>
-      <p:sp>
-        <p:nvSpPr>
-          <p:cNvPr id="24" name="label-191"/>
-          <p:cNvSpPr txBox="1"/>
-          <p:nvPr/>
-        </p:nvSpPr>
-        <p:spPr>
-          <a:xfrm>
-            <a:off x="1207008" y="5632704"/>
-            <a:ext cx="3611880" cy="329184"/>
-          </a:xfrm>
-          <a:prstGeom prst="rect">
-            <a:avLst/>
-          </a:prstGeom>
-          <a:noFill/>
-          <a:ln/>
-        </p:spPr>
-        <p:txBody>
-          <a:bodyPr wrap="square" lIns="0" tIns="0" rIns="0" bIns="0" rtlCol="0" anchor="ctr"/>
-          <a:lstStyle/>
-          <a:p>
-            <a:pPr algn="l" indent="0" marL="0">
-              <a:buNone/>
-            </a:pPr>
-            <a:r>
-              <a:rPr lang="en-US" sz="1050" dirty="0">
-                <a:solidFill>
-                  <a:schemeClr val="tx1"/>
-                </a:solidFill>
-              </a:rPr>
-              <a:t>再查到三期试验 STEP 1（NCT03548935）</a:t>
-            </a:r>
-            <a:endParaRPr lang="en-US" sz="1050" dirty="0"/>
-          </a:p>
-        </p:txBody>
-      </p:sp>
-      <p:sp>
-        <p:nvSpPr>
-          <p:cNvPr id="25" name="label-192"/>
-          <p:cNvSpPr txBox="1"/>
-          <p:nvPr/>
-        </p:nvSpPr>
-        <p:spPr>
-          <a:xfrm>
-            <a:off x="4846320" y="5632704"/>
-            <a:ext cx="2331720" cy="329184"/>
-          </a:xfrm>
-          <a:prstGeom prst="rect">
-            <a:avLst/>
-          </a:prstGeom>
-          <a:noFill/>
-          <a:ln/>
-        </p:spPr>
-        <p:txBody>
-          <a:bodyPr wrap="square" lIns="0" tIns="0" rIns="0" bIns="0" rtlCol="0" anchor="ctr"/>
-          <a:lstStyle/>
-          <a:p>
-            <a:pPr algn="l" indent="0" marL="0">
-              <a:buNone/>
-            </a:pPr>
-            <a:r>
-              <a:rPr lang="en-US" sz="1050" b="1" dirty="0">
-                <a:solidFill>
-                  <a:schemeClr val="accent1"/>
-                </a:solidFill>
-              </a:rPr>
-              <a:t>0.86 → 0.95，分歧度 1.0 → 0.28</a:t>
-            </a:r>
-            <a:endParaRPr lang="en-US" sz="1050" dirty="0"/>
-          </a:p>
-        </p:txBody>
-      </p:sp>
-      <p:sp>
-        <p:nvSpPr>
-          <p:cNvPr id="26" name="card-193"/>
+          <p:cNvPr id="33" name="card-200"/>
           <p:cNvSpPr/>
           <p:nvPr/>
         </p:nvSpPr>
@@ -15698,7 +15089,7 @@
       </p:sp>
       <p:sp>
         <p:nvSpPr>
-          <p:cNvPr id="27" name="badge-194"/>
+          <p:cNvPr id="34" name="badge-201"/>
           <p:cNvSpPr/>
           <p:nvPr/>
         </p:nvSpPr>
@@ -15740,7 +15131,7 @@
       </p:sp>
       <p:sp>
         <p:nvSpPr>
-          <p:cNvPr id="28" name="label-195"/>
+          <p:cNvPr id="35" name="label-202"/>
           <p:cNvSpPr txBox="1"/>
           <p:nvPr/>
         </p:nvSpPr>
@@ -15776,7 +15167,7 @@
       </p:sp>
       <p:sp>
         <p:nvSpPr>
-          <p:cNvPr id="29" name="label-196"/>
+          <p:cNvPr id="36" name="label-203"/>
           <p:cNvSpPr txBox="1"/>
           <p:nvPr/>
         </p:nvSpPr>
@@ -15812,7 +15203,7 @@
       </p:sp>
       <p:sp>
         <p:nvSpPr>
-          <p:cNvPr id="30" name="label-197"/>
+          <p:cNvPr id="37" name="label-204"/>
           <p:cNvSpPr txBox="1"/>
           <p:nvPr/>
         </p:nvSpPr>
@@ -15848,7 +15239,7 @@
       </p:sp>
       <p:graphicFrame>
         <p:nvGraphicFramePr>
-          <p:cNvPr id="17" name="table-198"/>
+          <p:cNvPr id="9" name="table-205"/>
           <p:cNvGraphicFramePr>
             <a:graphicFrameLocks noGrp="1"/>
           </p:cNvGraphicFramePr>
@@ -16909,7 +16300,7 @@
       </p:graphicFrame>
       <p:sp>
         <p:nvSpPr>
-          <p:cNvPr id="32" name="label-199"/>
+          <p:cNvPr id="39" name="label-206"/>
           <p:cNvSpPr txBox="1"/>
           <p:nvPr/>
         </p:nvSpPr>
@@ -16945,7 +16336,7 @@
       </p:sp>
       <p:sp>
         <p:nvSpPr>
-          <p:cNvPr id="33" name="label-200"/>
+          <p:cNvPr id="40" name="label-207"/>
           <p:cNvSpPr txBox="1"/>
           <p:nvPr/>
         </p:nvSpPr>
@@ -16973,7 +16364,7 @@
                   <a:schemeClr val="accent6"/>
                 </a:solidFill>
               </a:rPr>
-              <a:t>说明：结果概率表目前为人工设定的先验，正式实验前需用标注数据估计（已提供估计函数）；专家意见作为起点的接口已实现，目前每个假设分支从 50 / 50 起步。</a:t>
+              <a:t>说明：靶点本身 114 例、靶点–疾病 94 例；动物模型差异 p = 0.023，遗传学 p = 0.062。系统目前仍按靶点查询，按“靶点–疾病”查询将在下一版接入。数据与脚本已存档，可复现。</a:t>
             </a:r>
             <a:endParaRPr lang="en-US" sz="1000" dirty="0"/>
           </a:p>
@@ -17127,7 +16518,7 @@
       </p:sp>
       <p:sp>
         <p:nvSpPr>
-          <p:cNvPr id="4" name="card-201"/>
+          <p:cNvPr id="4" name="card-208"/>
           <p:cNvSpPr/>
           <p:nvPr/>
         </p:nvSpPr>
@@ -17154,7 +16545,7 @@
       </p:sp>
       <p:sp>
         <p:nvSpPr>
-          <p:cNvPr id="5" name="tag-202"/>
+          <p:cNvPr id="5" name="tag-209"/>
           <p:cNvSpPr/>
           <p:nvPr/>
         </p:nvSpPr>
@@ -17198,7 +16589,7 @@
       </p:sp>
       <p:sp>
         <p:nvSpPr>
-          <p:cNvPr id="6" name="label-203"/>
+          <p:cNvPr id="6" name="label-210"/>
           <p:cNvSpPr txBox="1"/>
           <p:nvPr/>
         </p:nvSpPr>
@@ -17234,7 +16625,7 @@
       </p:sp>
       <p:sp>
         <p:nvSpPr>
-          <p:cNvPr id="7" name="box-204"/>
+          <p:cNvPr id="7" name="box-211"/>
           <p:cNvSpPr/>
           <p:nvPr/>
         </p:nvSpPr>
@@ -17278,7 +16669,7 @@
       </p:sp>
       <p:sp>
         <p:nvSpPr>
-          <p:cNvPr id="8" name="arrow-205"/>
+          <p:cNvPr id="8" name="arrow-212"/>
           <p:cNvSpPr/>
           <p:nvPr/>
         </p:nvSpPr>
@@ -17302,7 +16693,7 @@
       </p:sp>
       <p:sp>
         <p:nvSpPr>
-          <p:cNvPr id="9" name="box-206"/>
+          <p:cNvPr id="9" name="box-213"/>
           <p:cNvSpPr/>
           <p:nvPr/>
         </p:nvSpPr>
@@ -17346,7 +16737,7 @@
       </p:sp>
       <p:sp>
         <p:nvSpPr>
-          <p:cNvPr id="10" name="arrow-207"/>
+          <p:cNvPr id="10" name="arrow-214"/>
           <p:cNvSpPr/>
           <p:nvPr/>
         </p:nvSpPr>
@@ -17370,7 +16761,7 @@
       </p:sp>
       <p:sp>
         <p:nvSpPr>
-          <p:cNvPr id="11" name="box-208"/>
+          <p:cNvPr id="11" name="box-215"/>
           <p:cNvSpPr/>
           <p:nvPr/>
         </p:nvSpPr>
@@ -17414,7 +16805,7 @@
       </p:sp>
       <p:sp>
         <p:nvSpPr>
-          <p:cNvPr id="12" name="arrow-209"/>
+          <p:cNvPr id="12" name="arrow-216"/>
           <p:cNvSpPr/>
           <p:nvPr/>
         </p:nvSpPr>
@@ -17438,7 +16829,7 @@
       </p:sp>
       <p:sp>
         <p:nvSpPr>
-          <p:cNvPr id="13" name="box-210"/>
+          <p:cNvPr id="13" name="box-217"/>
           <p:cNvSpPr/>
           <p:nvPr/>
         </p:nvSpPr>
@@ -17482,7 +16873,7 @@
       </p:sp>
       <p:sp>
         <p:nvSpPr>
-          <p:cNvPr id="14" name="arrow-211"/>
+          <p:cNvPr id="14" name="arrow-218"/>
           <p:cNvSpPr/>
           <p:nvPr/>
         </p:nvSpPr>
@@ -17506,7 +16897,7 @@
       </p:sp>
       <p:sp>
         <p:nvSpPr>
-          <p:cNvPr id="15" name="box-212"/>
+          <p:cNvPr id="15" name="box-219"/>
           <p:cNvSpPr/>
           <p:nvPr/>
         </p:nvSpPr>
@@ -17550,7 +16941,7 @@
       </p:sp>
       <p:sp>
         <p:nvSpPr>
-          <p:cNvPr id="16" name="bullets-213"/>
+          <p:cNvPr id="16" name="bullets-220"/>
           <p:cNvSpPr txBox="1"/>
           <p:nvPr/>
         </p:nvSpPr>
@@ -17626,7 +17017,7 @@
       </p:sp>
       <p:sp>
         <p:nvSpPr>
-          <p:cNvPr id="17" name="label-214"/>
+          <p:cNvPr id="17" name="label-221"/>
           <p:cNvSpPr txBox="1"/>
           <p:nvPr/>
         </p:nvSpPr>
@@ -17662,7 +17053,7 @@
       </p:sp>
       <p:sp>
         <p:nvSpPr>
-          <p:cNvPr id="18" name="label-215"/>
+          <p:cNvPr id="18" name="label-222"/>
           <p:cNvSpPr txBox="1"/>
           <p:nvPr/>
         </p:nvSpPr>
@@ -17698,7 +17089,7 @@
       </p:sp>
       <p:sp>
         <p:nvSpPr>
-          <p:cNvPr id="19" name="label-216"/>
+          <p:cNvPr id="19" name="label-223"/>
           <p:cNvSpPr txBox="1"/>
           <p:nvPr/>
         </p:nvSpPr>
@@ -17734,7 +17125,7 @@
       </p:sp>
       <p:sp>
         <p:nvSpPr>
-          <p:cNvPr id="20" name="label-217"/>
+          <p:cNvPr id="20" name="label-224"/>
           <p:cNvSpPr txBox="1"/>
           <p:nvPr/>
         </p:nvSpPr>
@@ -17770,7 +17161,7 @@
       </p:sp>
       <p:sp>
         <p:nvSpPr>
-          <p:cNvPr id="21" name="label-218"/>
+          <p:cNvPr id="21" name="label-225"/>
           <p:cNvSpPr txBox="1"/>
           <p:nvPr/>
         </p:nvSpPr>
@@ -17806,7 +17197,7 @@
       </p:sp>
       <p:sp>
         <p:nvSpPr>
-          <p:cNvPr id="22" name="label-219"/>
+          <p:cNvPr id="22" name="label-226"/>
           <p:cNvSpPr txBox="1"/>
           <p:nvPr/>
         </p:nvSpPr>
@@ -17842,7 +17233,7 @@
       </p:sp>
       <p:sp>
         <p:nvSpPr>
-          <p:cNvPr id="23" name="card-220"/>
+          <p:cNvPr id="23" name="card-227"/>
           <p:cNvSpPr/>
           <p:nvPr/>
         </p:nvSpPr>
@@ -17869,7 +17260,7 @@
       </p:sp>
       <p:sp>
         <p:nvSpPr>
-          <p:cNvPr id="24" name="tag-221"/>
+          <p:cNvPr id="24" name="tag-228"/>
           <p:cNvSpPr/>
           <p:nvPr/>
         </p:nvSpPr>
@@ -17913,7 +17304,7 @@
       </p:sp>
       <p:sp>
         <p:nvSpPr>
-          <p:cNvPr id="25" name="label-222"/>
+          <p:cNvPr id="25" name="label-229"/>
           <p:cNvSpPr txBox="1"/>
           <p:nvPr/>
         </p:nvSpPr>
@@ -17949,7 +17340,7 @@
       </p:sp>
       <p:sp>
         <p:nvSpPr>
-          <p:cNvPr id="26" name="box-223"/>
+          <p:cNvPr id="26" name="box-230"/>
           <p:cNvSpPr/>
           <p:nvPr/>
         </p:nvSpPr>
@@ -17993,7 +17384,7 @@
       </p:sp>
       <p:sp>
         <p:nvSpPr>
-          <p:cNvPr id="27" name="arrow-224"/>
+          <p:cNvPr id="27" name="arrow-231"/>
           <p:cNvSpPr/>
           <p:nvPr/>
         </p:nvSpPr>
@@ -18017,7 +17408,7 @@
       </p:sp>
       <p:sp>
         <p:nvSpPr>
-          <p:cNvPr id="28" name="box-225"/>
+          <p:cNvPr id="28" name="box-232"/>
           <p:cNvSpPr/>
           <p:nvPr/>
         </p:nvSpPr>
@@ -18061,7 +17452,7 @@
       </p:sp>
       <p:sp>
         <p:nvSpPr>
-          <p:cNvPr id="29" name="arrow-226"/>
+          <p:cNvPr id="29" name="arrow-233"/>
           <p:cNvSpPr/>
           <p:nvPr/>
         </p:nvSpPr>
@@ -18085,7 +17476,7 @@
       </p:sp>
       <p:sp>
         <p:nvSpPr>
-          <p:cNvPr id="30" name="arrow-227"/>
+          <p:cNvPr id="30" name="arrow-234"/>
           <p:cNvSpPr/>
           <p:nvPr/>
         </p:nvSpPr>
@@ -18109,7 +17500,7 @@
       </p:sp>
       <p:sp>
         <p:nvSpPr>
-          <p:cNvPr id="31" name="box-228"/>
+          <p:cNvPr id="31" name="box-235"/>
           <p:cNvSpPr/>
           <p:nvPr/>
         </p:nvSpPr>
@@ -18153,7 +17544,7 @@
       </p:sp>
       <p:sp>
         <p:nvSpPr>
-          <p:cNvPr id="32" name="box-229"/>
+          <p:cNvPr id="32" name="box-236"/>
           <p:cNvSpPr/>
           <p:nvPr/>
         </p:nvSpPr>
@@ -18197,7 +17588,7 @@
       </p:sp>
       <p:sp>
         <p:nvSpPr>
-          <p:cNvPr id="33" name="bullets-230"/>
+          <p:cNvPr id="33" name="bullets-237"/>
           <p:cNvSpPr txBox="1"/>
           <p:nvPr/>
         </p:nvSpPr>
@@ -18273,7 +17664,7 @@
       </p:sp>
       <p:sp>
         <p:nvSpPr>
-          <p:cNvPr id="34" name="label-231"/>
+          <p:cNvPr id="34" name="label-238"/>
           <p:cNvSpPr txBox="1"/>
           <p:nvPr/>
         </p:nvSpPr>

--- a/docs/presentation/MedScience-3.0-设计汇报.pptx
+++ b/docs/presentation/MedScience-3.0-设计汇报.pptx
@@ -117,18 +117,18 @@
   <p:extLst>
     <p:ext uri="{521415D9-36F7-43E2-AB2F-B90AF26B5E84}">
       <p14:sectionLst xmlns:p14="http://schemas.microsoft.com/office/powerpoint/2010/main">
-        <p14:section name="开篇" id="{3344a67d-bd4a-7f3b-5340-2f0a79df02d5}">
+        <p14:section name="开篇" id="{3a1ce3e7-30c6-bab5-3e73-5fba5bdad4bb}">
           <p14:sldIdLst>
             <p14:sldId id="256"/>
           </p14:sldIdLst>
         </p14:section>
-        <p14:section name="为什么" id="{6e04994c-9219-a7e8-dfb3-f7ddfd875bfd}">
+        <p14:section name="为什么" id="{afcbab15-403e-5c75-6ff7-0c8594232d29}">
           <p14:sldIdLst>
             <p14:sldId id="257"/>
             <p14:sldId id="258"/>
           </p14:sldIdLst>
         </p14:section>
-        <p14:section name="怎么设计" id="{2f1c2109-ddf4-2d16-c4b2-19ed87b4fb3b}">
+        <p14:section name="怎么设计" id="{01b774af-a6cd-6a9f-e931-1478d156a0e7}">
           <p14:sldIdLst>
             <p14:sldId id="259"/>
             <p14:sldId id="260"/>
@@ -138,12 +138,12 @@
             <p14:sldId id="264"/>
           </p14:sldIdLst>
         </p14:section>
-        <p14:section name="怎么用" id="{8e09d48f-5af5-0287-e113-fcf3a9978b9a}">
+        <p14:section name="怎么用" id="{60099f59-dd02-ae71-61b2-28792713299a}">
           <p14:sldIdLst>
             <p14:sldId id="265"/>
           </p14:sldIdLst>
         </p14:section>
-        <p14:section name="下一步" id="{10669b09-44b0-5cfd-4397-7738921c832d}">
+        <p14:section name="下一步" id="{0383e884-3dfc-e913-41ca-c2af000ecf4b}">
           <p14:sldIdLst>
             <p14:sldId id="266"/>
           </p14:sldIdLst>
@@ -640,7 +640,7 @@
           <a:p>
             <a:r>
               <a:rPr lang="en-US" dirty="0"/>
-              <a:t>四步即可：安装、配置运行时、提问、查看证据。左图是运行时自动检测到本机的 Claude Code；中间是用 @ 点名专家，以及智能体调用工具的记录；右图是证据账本，每条证据的状态、来源和完整历史都能查到。截图都来自真实运行的 3.0 应用。</a:t>
+              <a:t>四步即可：安装、配置运行时、提问、查看证据。左图是运行时自动检测到本机的 Claude Code；中间是用 @ 点名专家，以及智能体调用工具的记录；右图是 3.0 的证据页，每条证据的来源和状态都能查到。截图都来自真实运行的 3.0 应用。</a:t>
             </a:r>
             <a:endParaRPr lang="en-US" dirty="0"/>
           </a:p>
@@ -728,7 +728,7 @@
           <a:p>
             <a:r>
               <a:rPr lang="en-US" dirty="0"/>
-              <a:t>最后是进展和请求。设计已全部落地并发布，可以下载试用；尚待验证的是有效性。最需要的支持是领域专家标注一批真实假设，用于校准和评测，然后做同等预算的对照实验；同时把查询改为按“靶点–疾病”进行，优先取遗传学和动物模型证据，这一点已有实测数据支持。结果稳定后发布正式版并整理论文。</a:t>
+              <a:t>最后是进展和请求。B、C 两类设计已经落地并发布；A 类证据治理的新方案已完成小规模实测，证明同源证据被重复计数的问题普遍存在。下一步首先把即时溯源、独立证据线定级和实时状态核验接入系统；然后做回测实验：用公开的获批和失败结局作为标签，比较“按引用篇数”和“按独立证据线”哪个更能预测结局，整个过程不需要人工标注。结果稳定后发布正式版，并整理成论文。</a:t>
             </a:r>
             <a:endParaRPr lang="en-US" dirty="0"/>
           </a:p>
@@ -904,7 +904,7 @@
           <a:p>
             <a:r>
               <a:rPr lang="en-US" dirty="0"/>
-              <a:t>左列是四个痛点，中间是同类方案通常怎么做，右列是我们的回应。前三个对应 3.0 新增的证据治理设计，第四个对应本地运行时。同类方案只引用公开资料，不评价其未公开能力。</a:t>
+              <a:t>左列是四个痛点，中间是同类方案通常怎么做，右列是我们的回应。前三个对应证据治理设计，其中第二个“同源证据被重复计数”是我们的核心切入点；第四个对应本地运行时。同类方案只引用公开资料，不评价其未公开能力。</a:t>
             </a:r>
             <a:endParaRPr lang="en-US" dirty="0"/>
           </a:p>
@@ -992,7 +992,7 @@
           <a:p>
             <a:r>
               <a:rPr lang="en-US" dirty="0"/>
-              <a:t>这一页同时回答“有哪几类设计”和“它们在系统里的位置”。A 类证据治理是 3.0 新增的一层（绿色框），属于智能体的推理架构；B 类是协作层，即科研小队的组织方式；C 类是运行与部署，包括使用入口、执行层和本机数据层，在 2.x 已具备。右侧防护钩子贯穿每一次工具调用。需要强调：这些都是智能体系统层面的设计，没有训练或修改大模型本身。</a:t>
+              <a:t>这一页同时回答“有哪几类设计”和“它们在系统里的位置”。A 类证据治理是新的一层（绿色框）：即时溯源、同源合并、独立证据线定级、实时状态核验，已完成实测，待接入系统；B 类是协作层，即科研小队的组织方式；C 类是运行与部署，包括使用入口、执行层和本机数据层，在 2.x 已具备。右侧防护钩子贯穿每一次工具调用。需要强调：这些都是智能体系统层面的设计，没有训练或修改大模型本身。</a:t>
             </a:r>
             <a:endParaRPr lang="en-US" dirty="0"/>
           </a:p>
@@ -1080,7 +1080,7 @@
           <a:p>
             <a:r>
               <a:rPr lang="en-US" dirty="0"/>
-              <a:t>上排是一次科研提问的完整路径，每一步下面的小字是这一步产生的数据。绿色四步由 3.0 新增的证据治理层完成。下方是回路：科研结论的依据会被新研究推翻，比如药品因新的安全性试验撤市。证据在账本里被标记后，依赖它的结论在同一操作里自动转为“有争议”，原因写入哈希链，可以审计；恢复证据不会自动恢复结论，需要重新论证。后面两页用伏塞洛托和 Makena 两个真实案例说明。</a:t>
+              <a:t>上排是一次科研提问的完整路径，每一步下面的小字是这一步产生的数据。绿色三步是证据治理层：把每条证据追溯到上游的试验或数据集，同源的合并成一条独立证据线，再按支持、反证和证据类型给结论定级。下方是回路：每次回答时实时核验来源的当前状态，比如论文撤稿、试验因无效终止、药品撤市，一旦失效，依赖它的结论当场降级并提示复核。全部用公开数据库现查现算，不需要自建证据库。</a:t>
             </a:r>
             <a:endParaRPr lang="en-US" dirty="0"/>
           </a:p>
@@ -1168,7 +1168,7 @@
           <a:p>
             <a:r>
               <a:rPr lang="en-US" dirty="0"/>
-              <a:t>这是 3.0 的核心。证据和结论有六种状态，只能沿箭头迁移：新证据先是候选，通过准入门禁才算已验证，否则隔离。准入门禁检查的是来源能否追溯、是否过期、数值是否在物理范围内、是否含未授权的患者数据、是否已被撤稿，不评价研究质量本身。关键是依赖级联，用伏塞洛托举例：2019 年它凭 HOPE 试验中血红蛋白升高获得加速批准，账本里有两条已验证结论，A“可用于治疗镰状细胞病”依据批准和 HOPE 试验，B“能提高血红蛋白”只依据 HOPE。2024 年上市后数据显示血管闭塞危象和死亡增多，药品全球撤市，审查人把“批准”证据标为已撤销，A 自动转为有争议；B 不依赖批准，保持不变，因为血红蛋白确实升高了。这正是替代指标改善不等于临床获益的典型例子。这个例子已写成自动化测试，文献编号经 PubMed 核实。</a:t>
+              <a:t>这是 A 类的核心设计。现有科研智能体大多按“引用了几篇文献”来呈现证据，但很多论文其实来自同一个试验。看左边这个真实例子：问“阿贝西利能否用于乳腺癌”，系统检索到的前 20 篇论文里，有 6 篇都来自同一个三期试验 monarchE，是同一批受试者的主结果、亚组分析和随访，只能算 1 条证据。我们的做法分三步：第一，即时溯源，把每条证据追到它的上游试验、数据集或原始论文，用的都是公开数据库，每个问题现查现算，不需要自建证据库，也不需要人工标注；第二，同源合并；第三，按独立证据线定级，看遗传学、动物模型、临床试验这几类独立证据是否相互印证，下结论前先主动找反证。下面的定级规则是设计方案，具体阈值会用实测数据确定。</a:t>
             </a:r>
             <a:endParaRPr lang="en-US" dirty="0"/>
           </a:p>
@@ -1256,7 +1256,7 @@
           <a:p>
             <a:r>
               <a:rPr lang="en-US" dirty="0"/>
-              <a:t>第二个案例换一个角度：不是药品撤市，而是证据之间互相矛盾。17-羟孕酮己酸酯（Makena）在 2003 年的 Meis 试验中显示能降低复发性早产风险，2011 年据此获得加速批准。确证性试验 PROLONG 在 2019 到 2020 年发表，没有重复出这个效果，FDA 在 2023 年撤销批准。在账本里，PROLONG 作为反证录入后，结论 A 转为“有争议”，但 Meis 试验并没有被删除，两项试验的分歧被如实保留，系统不替人裁决。2023 年批准撤销，新结论 A′“确证试验未见效果”通过验证后取代 A，A 的完整历史仍可查。这个例子同样写成了自动化测试。需要说明：反证录入和结论取代目前通过接口完成，界面上的入口还没有做。</a:t>
+              <a:t>第二个设计点是实时状态核验。证据会被新研究推翻：论文撤稿、试验因无效终止、药品撤市。系统在回答时核验每个来源的当前状态，一旦失效，只降级真正依赖它的结论。左边伏塞洛托：2019 年凭 HOPE 试验中血红蛋白升高获批，2024 年因上市后死亡增多撤市。结论 A“可用于治疗该病”依赖批准，当场降级；结论 B“能提高血红蛋白”只依赖 HOPE 试验，保持不变——这正是替代指标改善不等于临床获益的典型例子。右边 Makena：2003 年 Meis 试验显示早产风险下降，2020 年确证试验 PROLONG 没有重复出效果，两项试验来自不同受试者，是两条方向相反的独立证据线，系统把双方都列出来、标为有争议，不替人裁决；2023 年 FDA 撤销批准后结论降级。这两个案例都在 3.0 原型中写成了自动化测试，文献编号已经 PubMed 核实。</a:t>
             </a:r>
             <a:endParaRPr lang="en-US" dirty="0"/>
           </a:p>
@@ -1344,7 +1344,7 @@
           <a:p>
             <a:r>
               <a:rPr lang="en-US" dirty="0"/>
-              <a:t>左边是信息增益取证。先用类比：量体温分不开流感和感冒，抗原检测才分得开；信息增益就是给每项查询“能把有效和无效分开多少”打分。原来的概率表是人工设定的，我们用真实数据做了实测：一组是已有获批药物的靶点，一组是药物因疗效不足在二、三期试验中失败、至今没有获批药物的靶点。结果是，只看靶点本身的三种查询——查序列、查临床试验、查化合物活性——两组几乎一样，信息增益接近 0。原因不难理解：能走到二、三期的靶点本来就都有强效化合物，活性说明能不能成药，不说明有没有效。看靶点和这个疾病之间的关系就不一样了：有动物模型证据的比例是 38% 对 17%，有人类遗传学证据的是 35% 对 17%，这和 Nature 2024 的结论一致，有遗传学支持的药物机制成功率高 2.6 倍。所以改进方向是把查询从“按靶点”改成“按靶点和疾病”。需要说明两点：第一，样本还小，动物模型差异显著，遗传学接近显著；第二，系统目前还是按靶点查询，这项改进放在下一版。关于普适性：计算方法是通用的，但概率表和具体该查什么，随问题类型而定；换一类问题，比如生物标志物的诊断价值，需要用这一类已知答案的案例重新实测一次，流程和代码不变。右边是共形三分判定：用一批已知结果的历史假设校准，结论以“可能成立的结果集合”给出，集合里只有一个答案才下结论；两个都可能就是证据不足。校准后错误率有统计保证，没校准时系统会明确说明。</a:t>
+              <a:t>这一页是支撑这个设计的两项实测，全部用公开数据，没有人工标注。左边：我们拿 94 个真实的药物–疾病问题，用系统自带的文献检索各取前 20 篇，一共 1649 篇，再按 PubMed 的试验关联追溯来源。结果是，有试验证据的问题里，40% 存在同源论文；试验类论文中 29% 是重复计数；最多的一个问题里，有 8 篇论文来自同一组试验。这还是下界，因为只识别了明确的试验编号。右边：哪类证据能区分“有效”和“无效”。只看靶点本身，比如有没有强活性化合物、有没有临床试验，两组几乎一样；看靶点和疾病之间的遗传学、动物模型证据，获批组的比例是失败组的两倍左右，和 Nature 2024 的研究结论一致。这告诉我们：定级时应该按独立证据线和证据类型来计，而不是按篇数。样本还小，动物模型差异显著，遗传学接近显著。</a:t>
             </a:r>
             <a:endParaRPr lang="en-US" dirty="0"/>
           </a:p>
@@ -2415,7 +2415,7 @@
       </p:sp>
       <p:sp>
         <p:nvSpPr>
-          <p:cNvPr id="4" name="label-239"/>
+          <p:cNvPr id="4" name="label-223"/>
           <p:cNvSpPr txBox="1"/>
           <p:nvPr/>
         </p:nvSpPr>
@@ -2451,7 +2451,7 @@
       </p:sp>
       <p:sp>
         <p:nvSpPr>
-          <p:cNvPr id="5" name="badge-240"/>
+          <p:cNvPr id="5" name="badge-224"/>
           <p:cNvSpPr/>
           <p:nvPr/>
         </p:nvSpPr>
@@ -2493,7 +2493,7 @@
       </p:sp>
       <p:sp>
         <p:nvSpPr>
-          <p:cNvPr id="6" name="label-241"/>
+          <p:cNvPr id="6" name="label-225"/>
           <p:cNvSpPr txBox="1"/>
           <p:nvPr/>
         </p:nvSpPr>
@@ -2529,7 +2529,7 @@
       </p:sp>
       <p:sp>
         <p:nvSpPr>
-          <p:cNvPr id="7" name="label-242"/>
+          <p:cNvPr id="7" name="label-226"/>
           <p:cNvSpPr txBox="1"/>
           <p:nvPr/>
         </p:nvSpPr>
@@ -2565,7 +2565,7 @@
       </p:sp>
       <p:sp>
         <p:nvSpPr>
-          <p:cNvPr id="8" name="badge-243"/>
+          <p:cNvPr id="8" name="badge-227"/>
           <p:cNvSpPr/>
           <p:nvPr/>
         </p:nvSpPr>
@@ -2607,7 +2607,7 @@
       </p:sp>
       <p:sp>
         <p:nvSpPr>
-          <p:cNvPr id="9" name="label-244"/>
+          <p:cNvPr id="9" name="label-228"/>
           <p:cNvSpPr txBox="1"/>
           <p:nvPr/>
         </p:nvSpPr>
@@ -2643,7 +2643,7 @@
       </p:sp>
       <p:sp>
         <p:nvSpPr>
-          <p:cNvPr id="10" name="label-245"/>
+          <p:cNvPr id="10" name="label-229"/>
           <p:cNvSpPr txBox="1"/>
           <p:nvPr/>
         </p:nvSpPr>
@@ -2679,7 +2679,7 @@
       </p:sp>
       <p:sp>
         <p:nvSpPr>
-          <p:cNvPr id="11" name="badge-246"/>
+          <p:cNvPr id="11" name="badge-230"/>
           <p:cNvSpPr/>
           <p:nvPr/>
         </p:nvSpPr>
@@ -2721,7 +2721,7 @@
       </p:sp>
       <p:sp>
         <p:nvSpPr>
-          <p:cNvPr id="12" name="label-247"/>
+          <p:cNvPr id="12" name="label-231"/>
           <p:cNvSpPr txBox="1"/>
           <p:nvPr/>
         </p:nvSpPr>
@@ -2757,7 +2757,7 @@
       </p:sp>
       <p:sp>
         <p:nvSpPr>
-          <p:cNvPr id="13" name="label-248"/>
+          <p:cNvPr id="13" name="label-232"/>
           <p:cNvSpPr txBox="1"/>
           <p:nvPr/>
         </p:nvSpPr>
@@ -2785,7 +2785,7 @@
                   <a:schemeClr val="tx1"/>
                 </a:solidFill>
               </a:rPr>
-              <a:t>在“证据账本”查看每条证据的状态、来源与历史。</a:t>
+              <a:t>查看每条证据的来源与状态（3.0 证据页）。</a:t>
             </a:r>
             <a:endParaRPr lang="en-US" sz="1200" dirty="0"/>
           </a:p>
@@ -2793,7 +2793,7 @@
       </p:sp>
       <p:pic>
         <p:nvPicPr>
-          <p:cNvPr id="14" name="screenshot-249" descr="自动检测到本机的 Claude Code">    </p:cNvPr>
+          <p:cNvPr id="14" name="screenshot-233" descr="自动检测到本机的 Claude Code">    </p:cNvPr>
           <p:cNvPicPr>
             <a:picLocks noChangeAspect="1"/>
           </p:cNvPicPr>
@@ -2817,7 +2817,7 @@
       </p:pic>
       <p:sp>
         <p:nvSpPr>
-          <p:cNvPr id="15" name="frame-250"/>
+          <p:cNvPr id="15" name="frame-234"/>
           <p:cNvSpPr/>
           <p:nvPr/>
         </p:nvSpPr>
@@ -2844,7 +2844,7 @@
       </p:sp>
       <p:sp>
         <p:nvSpPr>
-          <p:cNvPr id="16" name="label-251"/>
+          <p:cNvPr id="16" name="label-235"/>
           <p:cNvSpPr txBox="1"/>
           <p:nvPr/>
         </p:nvSpPr>
@@ -2880,7 +2880,7 @@
       </p:sp>
       <p:pic>
         <p:nvPicPr>
-          <p:cNvPr id="17" name="screenshot-252" descr="usage-ask-mention.jpg">    </p:cNvPr>
+          <p:cNvPr id="17" name="screenshot-236" descr="usage-ask-mention.jpg">    </p:cNvPr>
           <p:cNvPicPr>
             <a:picLocks noChangeAspect="1"/>
           </p:cNvPicPr>
@@ -2904,7 +2904,7 @@
       </p:pic>
       <p:sp>
         <p:nvSpPr>
-          <p:cNvPr id="18" name="frame-253"/>
+          <p:cNvPr id="18" name="frame-237"/>
           <p:cNvSpPr/>
           <p:nvPr/>
         </p:nvSpPr>
@@ -2931,7 +2931,7 @@
       </p:sp>
       <p:pic>
         <p:nvPicPr>
-          <p:cNvPr id="19" name="screenshot-254" descr="@ 点名专家；工具调用逐步可查">    </p:cNvPr>
+          <p:cNvPr id="19" name="screenshot-238" descr="@ 点名专家；工具调用逐步可查">    </p:cNvPr>
           <p:cNvPicPr>
             <a:picLocks noChangeAspect="1"/>
           </p:cNvPicPr>
@@ -2955,7 +2955,7 @@
       </p:pic>
       <p:sp>
         <p:nvSpPr>
-          <p:cNvPr id="20" name="frame-255"/>
+          <p:cNvPr id="20" name="frame-239"/>
           <p:cNvSpPr/>
           <p:nvPr/>
         </p:nvSpPr>
@@ -2982,7 +2982,7 @@
       </p:sp>
       <p:sp>
         <p:nvSpPr>
-          <p:cNvPr id="21" name="label-256"/>
+          <p:cNvPr id="21" name="label-240"/>
           <p:cNvSpPr txBox="1"/>
           <p:nvPr/>
         </p:nvSpPr>
@@ -3018,7 +3018,7 @@
       </p:sp>
       <p:pic>
         <p:nvPicPr>
-          <p:cNvPr id="22" name="screenshot-257" descr="证据账本：状态、来源、完整历史">    </p:cNvPr>
+          <p:cNvPr id="22" name="screenshot-241" descr="3.0 证据页：来源、状态、历史">    </p:cNvPr>
           <p:cNvPicPr>
             <a:picLocks noChangeAspect="1"/>
           </p:cNvPicPr>
@@ -3042,7 +3042,7 @@
       </p:pic>
       <p:sp>
         <p:nvSpPr>
-          <p:cNvPr id="23" name="frame-258"/>
+          <p:cNvPr id="23" name="frame-242"/>
           <p:cNvSpPr/>
           <p:nvPr/>
         </p:nvSpPr>
@@ -3069,7 +3069,7 @@
       </p:sp>
       <p:sp>
         <p:nvSpPr>
-          <p:cNvPr id="24" name="label-259"/>
+          <p:cNvPr id="24" name="label-243"/>
           <p:cNvSpPr txBox="1"/>
           <p:nvPr/>
         </p:nvSpPr>
@@ -3097,7 +3097,7 @@
                   <a:schemeClr val="accent6"/>
                 </a:solidFill>
               </a:rPr>
-              <a:t>证据账本：状态、来源、完整历史</a:t>
+              <a:t>3.0 证据页：来源、状态、历史</a:t>
             </a:r>
             <a:endParaRPr lang="en-US" sz="1100" dirty="0"/>
           </a:p>
@@ -3105,7 +3105,7 @@
       </p:sp>
       <p:sp>
         <p:nvSpPr>
-          <p:cNvPr id="25" name="label-260"/>
+          <p:cNvPr id="25" name="label-244"/>
           <p:cNvSpPr txBox="1"/>
           <p:nvPr/>
         </p:nvSpPr>
@@ -3279,7 +3279,7 @@
                   <a:schemeClr val="accent6"/>
                 </a:solidFill>
               </a:rPr>
-              <a:t>设计已全部落地并可下载使用；有效性还需要真实任务上的对照实验来证明。</a:t>
+              <a:t>B、C 两类设计已落地；A 类新方案已完成小规模实测，待接入系统。</a:t>
             </a:r>
             <a:endParaRPr lang="en-US" sz="1500" dirty="0"/>
           </a:p>
@@ -3287,7 +3287,7 @@
       </p:sp>
       <p:sp>
         <p:nvSpPr>
-          <p:cNvPr id="4" name="card-261"/>
+          <p:cNvPr id="4" name="card-245"/>
           <p:cNvSpPr/>
           <p:nvPr/>
         </p:nvSpPr>
@@ -3314,7 +3314,7 @@
       </p:sp>
       <p:sp>
         <p:nvSpPr>
-          <p:cNvPr id="5" name="badge-262"/>
+          <p:cNvPr id="5" name="badge-246"/>
           <p:cNvSpPr/>
           <p:nvPr/>
         </p:nvSpPr>
@@ -3356,7 +3356,7 @@
       </p:sp>
       <p:sp>
         <p:nvSpPr>
-          <p:cNvPr id="6" name="label-263"/>
+          <p:cNvPr id="6" name="label-247"/>
           <p:cNvSpPr txBox="1"/>
           <p:nvPr/>
         </p:nvSpPr>
@@ -3392,7 +3392,7 @@
       </p:sp>
       <p:sp>
         <p:nvSpPr>
-          <p:cNvPr id="7" name="bullets-264"/>
+          <p:cNvPr id="7" name="bullets-248"/>
           <p:cNvSpPr txBox="1"/>
           <p:nvPr/>
         </p:nvSpPr>
@@ -3424,7 +3424,7 @@
                   <a:schemeClr val="tx1"/>
                 </a:solidFill>
               </a:rPr>
-              <a:t>v3.0.0 已发布：macOS、Windows、Linux 安装包和本地 Web 版</a:t>
+              <a:t>v3.0.0 已发布：三平台安装包和本地 Web 版</a:t>
             </a:r>
             <a:endParaRPr lang="en-US" sz="1400" dirty="0"/>
           </a:p>
@@ -3442,7 +3442,7 @@
                   <a:schemeClr val="tx1"/>
                 </a:solidFill>
               </a:rPr>
-              <a:t>三类设计全部落地，并接入桌面端界面</a:t>
+              <a:t>多智能体协作、本地运行时已落地</a:t>
             </a:r>
             <a:endParaRPr lang="en-US" sz="1400" dirty="0"/>
           </a:p>
@@ -3460,7 +3460,7 @@
                   <a:schemeClr val="tx1"/>
                 </a:solidFill>
               </a:rPr>
-              <a:t>自动化测试在三个平台持续通过</a:t>
+              <a:t>实时状态核验原型已落地，两个真实案例写成自动化测试</a:t>
             </a:r>
             <a:endParaRPr lang="en-US" sz="1400" dirty="0"/>
           </a:p>
@@ -3478,7 +3478,7 @@
                   <a:schemeClr val="tx1"/>
                 </a:solidFill>
               </a:rPr>
-              <a:t>评分只看证据，不再受靶点名称影响</a:t>
+              <a:t>实测：40% 的问题存在同源证据</a:t>
             </a:r>
             <a:endParaRPr lang="en-US" sz="1400" dirty="0"/>
           </a:p>
@@ -3486,7 +3486,7 @@
       </p:sp>
       <p:sp>
         <p:nvSpPr>
-          <p:cNvPr id="8" name="card-265"/>
+          <p:cNvPr id="8" name="card-249"/>
           <p:cNvSpPr/>
           <p:nvPr/>
         </p:nvSpPr>
@@ -3513,7 +3513,7 @@
       </p:sp>
       <p:sp>
         <p:nvSpPr>
-          <p:cNvPr id="9" name="badge-266"/>
+          <p:cNvPr id="9" name="badge-250"/>
           <p:cNvSpPr/>
           <p:nvPr/>
         </p:nvSpPr>
@@ -3555,7 +3555,7 @@
       </p:sp>
       <p:sp>
         <p:nvSpPr>
-          <p:cNvPr id="10" name="label-267"/>
+          <p:cNvPr id="10" name="label-251"/>
           <p:cNvSpPr txBox="1"/>
           <p:nvPr/>
         </p:nvSpPr>
@@ -3583,7 +3583,7 @@
                   <a:schemeClr val="tx2"/>
                 </a:solidFill>
               </a:rPr>
-              <a:t>尚待验证</a:t>
+              <a:t>尚待完成</a:t>
             </a:r>
             <a:endParaRPr lang="en-US" sz="1800" dirty="0"/>
           </a:p>
@@ -3591,7 +3591,7 @@
       </p:sp>
       <p:sp>
         <p:nvSpPr>
-          <p:cNvPr id="11" name="bullets-268"/>
+          <p:cNvPr id="11" name="bullets-252"/>
           <p:cNvSpPr txBox="1"/>
           <p:nvPr/>
         </p:nvSpPr>
@@ -3623,7 +3623,7 @@
                   <a:schemeClr val="tx1"/>
                 </a:solidFill>
               </a:rPr>
-              <a:t>尚未在真实科研任务上做对照实验</a:t>
+              <a:t>即时溯源与独立证据线定级尚未接入系统</a:t>
             </a:r>
             <a:endParaRPr lang="en-US" sz="1400" dirty="0"/>
           </a:p>
@@ -3641,7 +3641,7 @@
                   <a:schemeClr val="tx1"/>
                 </a:solidFill>
               </a:rPr>
-              <a:t>判定目前处于“未校准”状态，尚无覆盖率保证</a:t>
+              <a:t>同源识别目前只覆盖试验编号，队列、数据集待扩展</a:t>
             </a:r>
             <a:endParaRPr lang="en-US" sz="1400" dirty="0"/>
           </a:p>
@@ -3667,7 +3667,7 @@
       </p:sp>
       <p:sp>
         <p:nvSpPr>
-          <p:cNvPr id="12" name="card-269"/>
+          <p:cNvPr id="12" name="card-253"/>
           <p:cNvSpPr/>
           <p:nvPr/>
         </p:nvSpPr>
@@ -3694,7 +3694,7 @@
       </p:sp>
       <p:sp>
         <p:nvSpPr>
-          <p:cNvPr id="13" name="badge-270"/>
+          <p:cNvPr id="13" name="badge-254"/>
           <p:cNvSpPr/>
           <p:nvPr/>
         </p:nvSpPr>
@@ -3736,7 +3736,7 @@
       </p:sp>
       <p:sp>
         <p:nvSpPr>
-          <p:cNvPr id="14" name="label-271"/>
+          <p:cNvPr id="14" name="label-255"/>
           <p:cNvSpPr txBox="1"/>
           <p:nvPr/>
         </p:nvSpPr>
@@ -3772,7 +3772,7 @@
       </p:sp>
       <p:sp>
         <p:nvSpPr>
-          <p:cNvPr id="15" name="bullets-272"/>
+          <p:cNvPr id="15" name="bullets-256"/>
           <p:cNvSpPr txBox="1"/>
           <p:nvPr/>
         </p:nvSpPr>
@@ -3804,7 +3804,7 @@
                   <a:schemeClr val="tx1"/>
                 </a:solidFill>
               </a:rPr>
-              <a:t>组织领域专家标注一批真实假设（支持 / 反驳），用于校准与评测</a:t>
+              <a:t>把即时溯源、独立证据线定级、实时状态核验接入系统</a:t>
             </a:r>
             <a:endParaRPr lang="en-US" sz="1400" dirty="0"/>
           </a:p>
@@ -3822,7 +3822,7 @@
                   <a:schemeClr val="tx1"/>
                 </a:solidFill>
               </a:rPr>
-              <a:t>开展同等预算的对照实验：与扁平记忆、多智能体辩论比较</a:t>
+              <a:t>无人工标注的回测：用公开结局比较“引用篇数”与“独立证据线”</a:t>
             </a:r>
             <a:endParaRPr lang="en-US" sz="1400" dirty="0"/>
           </a:p>
@@ -3840,7 +3840,7 @@
                   <a:schemeClr val="tx1"/>
                 </a:solidFill>
               </a:rPr>
-              <a:t>查询改为按“靶点–疾病”，优先遗传学与动物模型证据</a:t>
+              <a:t>扩展同源识别：队列、数据集、预印本、荟萃分析</a:t>
             </a:r>
             <a:endParaRPr lang="en-US" sz="1400" dirty="0"/>
           </a:p>
@@ -3866,7 +3866,7 @@
       </p:sp>
       <p:sp>
         <p:nvSpPr>
-          <p:cNvPr id="16" name="ask-273"/>
+          <p:cNvPr id="16" name="ask-257"/>
           <p:cNvSpPr/>
           <p:nvPr/>
         </p:nvSpPr>
@@ -3893,7 +3893,7 @@
       </p:sp>
       <p:sp>
         <p:nvSpPr>
-          <p:cNvPr id="17" name="label-274"/>
+          <p:cNvPr id="17" name="label-258"/>
           <p:cNvSpPr txBox="1"/>
           <p:nvPr/>
         </p:nvSpPr>
@@ -3921,7 +3921,7 @@
                   <a:schemeClr val="bg1"/>
                 </a:solidFill>
               </a:rPr>
-              <a:t>请审阅：是否支持开展专家标注与同等预算对照实验（下一步第 1、2 项）。</a:t>
+              <a:t>请审阅：是否支持将“独立证据线定级”接入系统并开展回测实验（下一步第 1、2 项）。</a:t>
             </a:r>
             <a:endParaRPr lang="en-US" sz="1500" dirty="0"/>
           </a:p>
@@ -4349,7 +4349,7 @@
                   <a:schemeClr val="tx1"/>
                 </a:solidFill>
               </a:rPr>
-              <a:t>三类设计：证据治理（结论必须挂靠已验证的文献与数据库证据）、多智能体协作（像课题组一样分工、审查把关）、本地运行（科研与临床数据留在本机）。</a:t>
+              <a:t>三类设计：证据治理（识别同源证据，按独立证据线定级）、多智能体协作（像课题组一样分工、审查把关）、本地运行（科研与临床数据留在本机）。</a:t>
             </a:r>
             <a:endParaRPr lang="en-US" sz="1500" dirty="0"/>
           </a:p>
@@ -4490,7 +4490,7 @@
                   <a:schemeClr val="tx1"/>
                 </a:solidFill>
               </a:rPr>
-              <a:t>v3.0.0 已发布：macOS、Windows、Linux 安装包和本地 Web 版，自动化测试在三个平台通过。真实任务上的对照实验尚待开展。</a:t>
+              <a:t>v3.0.0 已发布：三平台安装包和本地 Web 版。证据治理新方案已完成小规模实测（40% 的问题存在同源证据），待接入系统。</a:t>
             </a:r>
             <a:endParaRPr lang="en-US" sz="1500" dirty="0"/>
           </a:p>
@@ -5359,7 +5359,7 @@
                           <a:ea typeface="Microsoft YaHei" pitchFamily="34" charset="-122"/>
                           <a:cs typeface="Microsoft YaHei" pitchFamily="34" charset="-120"/>
                         </a:rPr>
-                        <a:t>证据账本：证据持久保存；依据失效，相关结论自动降级</a:t>
+                        <a:t>实时状态核验：依据被推翻，相关结论当场降级</a:t>
                       </a:r>
                       <a:endParaRPr lang="en-US" sz="1300" dirty="0">
                         <a:latin typeface="Microsoft YaHei" charset="0"/>
@@ -5429,7 +5429,7 @@
                           <a:ea typeface="Microsoft YaHei" pitchFamily="34" charset="-122"/>
                           <a:cs typeface="Microsoft YaHei" pitchFamily="34" charset="-120"/>
                         </a:rPr>
-                        <a:t>② 专家意见分歧时，下一步查什么</a:t>
+                        <a:t>② 证据看似很多，其实同源</a:t>
                       </a:r>
                       <a:endParaRPr lang="en-US" sz="1300" dirty="0">
                         <a:latin typeface="Microsoft YaHei" charset="0"/>
@@ -5450,7 +5450,7 @@
                           <a:ea typeface="Microsoft YaHei" pitchFamily="34" charset="-122"/>
                           <a:cs typeface="Microsoft YaHei" pitchFamily="34" charset="-120"/>
                         </a:rPr>
-                        <a:t>多轮辩论易互相附和，且耗算力</a:t>
+                        <a:t>同一试验衍生多篇论文，被重复计数</a:t>
                       </a:r>
                       <a:endParaRPr lang="en-US" sz="1300" dirty="0">
                         <a:latin typeface="Microsoft YaHei" charset="0"/>
@@ -5518,7 +5518,7 @@
                           <a:ea typeface="Microsoft YaHei" pitchFamily="34" charset="-122"/>
                           <a:cs typeface="Microsoft YaHei" pitchFamily="34" charset="-120"/>
                         </a:rPr>
-                        <a:t>多智能体生成、辩论、排序假设</a:t>
+                        <a:t>按篇列出引用</a:t>
                       </a:r>
                       <a:endParaRPr lang="en-US" sz="1300" dirty="0">
                         <a:latin typeface="Microsoft YaHei" charset="0"/>
@@ -5539,7 +5539,7 @@
                           <a:ea typeface="Microsoft YaHei" pitchFamily="34" charset="-122"/>
                           <a:cs typeface="Microsoft YaHei" pitchFamily="34" charset="-120"/>
                         </a:rPr>
-                        <a:t>（如 Google AI co-scientist）</a:t>
+                        <a:t>（公开资料未见同源识别）</a:t>
                       </a:r>
                       <a:endParaRPr lang="en-US" sz="1300" dirty="0">
                         <a:latin typeface="Microsoft YaHei" charset="0"/>
@@ -5607,7 +5607,7 @@
                           <a:ea typeface="Microsoft YaHei" pitchFamily="34" charset="-122"/>
                           <a:cs typeface="Microsoft YaHei" pitchFamily="34" charset="-120"/>
                         </a:rPr>
-                        <a:t>信息增益取证：把分歧变成“下一步最该查什么”</a:t>
+                        <a:t>独立证据线定级：同源合并，看有几条独立证据</a:t>
                       </a:r>
                       <a:endParaRPr lang="en-US" sz="1300" dirty="0">
                         <a:latin typeface="Microsoft YaHei" charset="0"/>
@@ -5855,7 +5855,7 @@
                           <a:ea typeface="Microsoft YaHei" pitchFamily="34" charset="-122"/>
                           <a:cs typeface="Microsoft YaHei" pitchFamily="34" charset="-120"/>
                         </a:rPr>
-                        <a:t>共形三分判定：支持 / 反驳 / 不确定，各有统计含义</a:t>
+                        <a:t>按证据类型定级：遗传学、动物模型、临床相互印证</a:t>
                       </a:r>
                       <a:endParaRPr lang="en-US" sz="1300" dirty="0">
                         <a:latin typeface="Microsoft YaHei" charset="0"/>
@@ -6430,7 +6430,7 @@
                   <a:schemeClr val="accent6"/>
                 </a:solidFill>
               </a:rPr>
-              <a:t>管“结论凭什么成立”（3.0 新增）</a:t>
+              <a:t>管“结论凭什么成立”（新方案，已实测）</a:t>
             </a:r>
             <a:endParaRPr lang="en-US" sz="1150" dirty="0"/>
           </a:p>
@@ -7183,7 +7183,7 @@
                   <a:schemeClr val="tx1"/>
                 </a:solidFill>
               </a:rPr>
-              <a:t>信息增益取证</a:t>
+              <a:t>即时来源溯源</a:t>
             </a:r>
             <a:endParaRPr lang="en-US" sz="1250" dirty="0"/>
           </a:p>
@@ -7227,7 +7227,7 @@
                   <a:schemeClr val="tx1"/>
                 </a:solidFill>
               </a:rPr>
-              <a:t>共形三分判定</a:t>
+              <a:t>同源合并</a:t>
             </a:r>
             <a:endParaRPr lang="en-US" sz="1250" dirty="0"/>
           </a:p>
@@ -7271,7 +7271,7 @@
                   <a:schemeClr val="tx1"/>
                 </a:solidFill>
               </a:rPr>
-              <a:t>准入门禁</a:t>
+              <a:t>独立证据线定级</a:t>
             </a:r>
             <a:endParaRPr lang="en-US" sz="1250" dirty="0"/>
           </a:p>
@@ -7315,7 +7315,7 @@
                   <a:schemeClr val="tx1"/>
                 </a:solidFill>
               </a:rPr>
-              <a:t>证据账本</a:t>
+              <a:t>实时状态核验</a:t>
             </a:r>
             <a:endParaRPr lang="en-US" sz="1250" dirty="0"/>
           </a:p>
@@ -7677,7 +7677,7 @@
                   <a:schemeClr val="tx1"/>
                 </a:solidFill>
               </a:rPr>
-              <a:t>本机 ~/.medscience：会话 · 证据账本 · 加密密钥库 · 配置</a:t>
+              <a:t>本机 ~/.medscience：会话 · 加密密钥库 · 配置 · 公开数据缓存</a:t>
             </a:r>
             <a:endParaRPr lang="en-US" sz="1250" dirty="0"/>
           </a:p>
@@ -8411,6 +8411,298 @@
             <a:avLst/>
           </a:prstGeom>
           <a:solidFill>
+            <a:schemeClr val="accent2"/>
+          </a:solidFill>
+          <a:ln w="6350">
+            <a:solidFill>
+              <a:schemeClr val="accent2"/>
+            </a:solidFill>
+          </a:ln>
+        </p:spPr>
+        <p:txBody>
+          <a:bodyPr wrap="square" lIns="0" tIns="0" rIns="0" bIns="0" rtlCol="0" anchor="ctr"/>
+          <a:lstStyle/>
+          <a:p>
+            <a:pPr algn="ctr" indent="0" marL="0">
+              <a:buNone/>
+            </a:pPr>
+            <a:r>
+              <a:rPr lang="en-US" sz="1200" b="1" dirty="0">
+                <a:solidFill>
+                  <a:schemeClr val="bg1"/>
+                </a:solidFill>
+              </a:rPr>
+              <a:t>3</a:t>
+            </a:r>
+            <a:endParaRPr lang="en-US" sz="1200" dirty="0"/>
+          </a:p>
+        </p:txBody>
+      </p:sp>
+      <p:sp>
+        <p:nvSpPr>
+          <p:cNvPr id="13" name="box-74"/>
+          <p:cNvSpPr/>
+          <p:nvPr/>
+        </p:nvSpPr>
+        <p:spPr>
+          <a:xfrm>
+            <a:off x="3367964" y="2057400"/>
+            <a:ext cx="1226782" cy="868680"/>
+          </a:xfrm>
+          <a:prstGeom prst="roundRect">
+            <a:avLst>
+              <a:gd name="adj" fmla="val 8421"/>
+            </a:avLst>
+          </a:prstGeom>
+          <a:solidFill>
+            <a:srgbClr val="F2F5F8"/>
+          </a:solidFill>
+          <a:ln w="6350">
+            <a:solidFill>
+              <a:srgbClr val="F2F5F8"/>
+            </a:solidFill>
+          </a:ln>
+        </p:spPr>
+        <p:txBody>
+          <a:bodyPr wrap="square" lIns="762" tIns="762" rIns="762" bIns="762" rtlCol="0" anchor="ctr"/>
+          <a:lstStyle/>
+          <a:p>
+            <a:pPr algn="ctr" indent="0" marL="0">
+              <a:buNone/>
+            </a:pPr>
+            <a:r>
+              <a:rPr lang="en-US" sz="1350" b="1" dirty="0">
+                <a:solidFill>
+                  <a:schemeClr val="tx2"/>
+                </a:solidFill>
+              </a:rPr>
+              <a:t>检索证据</a:t>
+            </a:r>
+            <a:endParaRPr lang="en-US" sz="1350" dirty="0"/>
+          </a:p>
+        </p:txBody>
+      </p:sp>
+      <p:sp>
+        <p:nvSpPr>
+          <p:cNvPr id="14" name="label-75"/>
+          <p:cNvSpPr txBox="1"/>
+          <p:nvPr/>
+        </p:nvSpPr>
+        <p:spPr>
+          <a:xfrm>
+            <a:off x="3322244" y="3017520"/>
+            <a:ext cx="1318222" cy="457200"/>
+          </a:xfrm>
+          <a:prstGeom prst="rect">
+            <a:avLst/>
+          </a:prstGeom>
+          <a:noFill/>
+          <a:ln/>
+        </p:spPr>
+        <p:txBody>
+          <a:bodyPr wrap="square" lIns="0" tIns="0" rIns="0" bIns="0" rtlCol="0" anchor="t"/>
+          <a:lstStyle/>
+          <a:p>
+            <a:pPr algn="ctr" indent="0" marL="0">
+              <a:buNone/>
+            </a:pPr>
+            <a:r>
+              <a:rPr lang="en-US" sz="1150" dirty="0">
+                <a:solidFill>
+                  <a:schemeClr val="accent6"/>
+                </a:solidFill>
+              </a:rPr>
+              <a:t>文献与数据库结果</a:t>
+            </a:r>
+            <a:endParaRPr lang="en-US" sz="1150" dirty="0"/>
+          </a:p>
+        </p:txBody>
+      </p:sp>
+      <p:sp>
+        <p:nvSpPr>
+          <p:cNvPr id="15" name="arrow-76"/>
+          <p:cNvSpPr/>
+          <p:nvPr/>
+        </p:nvSpPr>
+        <p:spPr>
+          <a:xfrm>
+            <a:off x="4613034" y="2491740"/>
+            <a:ext cx="146304" cy="0"/>
+          </a:xfrm>
+          <a:prstGeom prst="line">
+            <a:avLst/>
+          </a:prstGeom>
+          <a:noFill/>
+          <a:ln w="15875">
+            <a:solidFill>
+              <a:schemeClr val="accent6"/>
+            </a:solidFill>
+            <a:prstDash val="solid"/>
+            <a:tailEnd type="triangle"/>
+          </a:ln>
+        </p:spPr>
+      </p:sp>
+      <p:sp>
+        <p:nvSpPr>
+          <p:cNvPr id="16" name="badge-77"/>
+          <p:cNvSpPr/>
+          <p:nvPr/>
+        </p:nvSpPr>
+        <p:spPr>
+          <a:xfrm>
+            <a:off x="5217281" y="1600200"/>
+            <a:ext cx="347472" cy="347472"/>
+          </a:xfrm>
+          <a:prstGeom prst="ellipse">
+            <a:avLst/>
+          </a:prstGeom>
+          <a:solidFill>
+            <a:schemeClr val="accent2"/>
+          </a:solidFill>
+          <a:ln w="6350">
+            <a:solidFill>
+              <a:schemeClr val="accent2"/>
+            </a:solidFill>
+          </a:ln>
+        </p:spPr>
+        <p:txBody>
+          <a:bodyPr wrap="square" lIns="0" tIns="0" rIns="0" bIns="0" rtlCol="0" anchor="ctr"/>
+          <a:lstStyle/>
+          <a:p>
+            <a:pPr algn="ctr" indent="0" marL="0">
+              <a:buNone/>
+            </a:pPr>
+            <a:r>
+              <a:rPr lang="en-US" sz="1200" b="1" dirty="0">
+                <a:solidFill>
+                  <a:schemeClr val="bg1"/>
+                </a:solidFill>
+              </a:rPr>
+              <a:t>4</a:t>
+            </a:r>
+            <a:endParaRPr lang="en-US" sz="1200" dirty="0"/>
+          </a:p>
+        </p:txBody>
+      </p:sp>
+      <p:sp>
+        <p:nvSpPr>
+          <p:cNvPr id="17" name="box-78"/>
+          <p:cNvSpPr/>
+          <p:nvPr/>
+        </p:nvSpPr>
+        <p:spPr>
+          <a:xfrm>
+            <a:off x="4777626" y="2057400"/>
+            <a:ext cx="1226782" cy="868680"/>
+          </a:xfrm>
+          <a:prstGeom prst="roundRect">
+            <a:avLst>
+              <a:gd name="adj" fmla="val 8421"/>
+            </a:avLst>
+          </a:prstGeom>
+          <a:solidFill>
+            <a:srgbClr val="F2F5F8"/>
+          </a:solidFill>
+          <a:ln w="6350">
+            <a:solidFill>
+              <a:srgbClr val="F2F5F8"/>
+            </a:solidFill>
+          </a:ln>
+        </p:spPr>
+        <p:txBody>
+          <a:bodyPr wrap="square" lIns="762" tIns="762" rIns="762" bIns="762" rtlCol="0" anchor="ctr"/>
+          <a:lstStyle/>
+          <a:p>
+            <a:pPr algn="ctr" indent="0" marL="0">
+              <a:buNone/>
+            </a:pPr>
+            <a:r>
+              <a:rPr lang="en-US" sz="1350" b="1" dirty="0">
+                <a:solidFill>
+                  <a:schemeClr val="tx2"/>
+                </a:solidFill>
+              </a:rPr>
+              <a:t>数值核验</a:t>
+            </a:r>
+            <a:endParaRPr lang="en-US" sz="1350" dirty="0"/>
+          </a:p>
+        </p:txBody>
+      </p:sp>
+      <p:sp>
+        <p:nvSpPr>
+          <p:cNvPr id="18" name="label-79"/>
+          <p:cNvSpPr txBox="1"/>
+          <p:nvPr/>
+        </p:nvSpPr>
+        <p:spPr>
+          <a:xfrm>
+            <a:off x="4731906" y="3017520"/>
+            <a:ext cx="1318222" cy="457200"/>
+          </a:xfrm>
+          <a:prstGeom prst="rect">
+            <a:avLst/>
+          </a:prstGeom>
+          <a:noFill/>
+          <a:ln/>
+        </p:spPr>
+        <p:txBody>
+          <a:bodyPr wrap="square" lIns="0" tIns="0" rIns="0" bIns="0" rtlCol="0" anchor="t"/>
+          <a:lstStyle/>
+          <a:p>
+            <a:pPr algn="ctr" indent="0" marL="0">
+              <a:buNone/>
+            </a:pPr>
+            <a:r>
+              <a:rPr lang="en-US" sz="1150" dirty="0">
+                <a:solidFill>
+                  <a:schemeClr val="accent6"/>
+                </a:solidFill>
+              </a:rPr>
+              <a:t>会话证据 EV-n</a:t>
+            </a:r>
+            <a:endParaRPr lang="en-US" sz="1150" dirty="0"/>
+          </a:p>
+        </p:txBody>
+      </p:sp>
+      <p:sp>
+        <p:nvSpPr>
+          <p:cNvPr id="19" name="arrow-80"/>
+          <p:cNvSpPr/>
+          <p:nvPr/>
+        </p:nvSpPr>
+        <p:spPr>
+          <a:xfrm>
+            <a:off x="6022696" y="2491740"/>
+            <a:ext cx="146304" cy="0"/>
+          </a:xfrm>
+          <a:prstGeom prst="line">
+            <a:avLst/>
+          </a:prstGeom>
+          <a:noFill/>
+          <a:ln w="15875">
+            <a:solidFill>
+              <a:schemeClr val="accent6"/>
+            </a:solidFill>
+            <a:prstDash val="solid"/>
+            <a:tailEnd type="triangle"/>
+          </a:ln>
+        </p:spPr>
+      </p:sp>
+      <p:sp>
+        <p:nvSpPr>
+          <p:cNvPr id="20" name="badge-81"/>
+          <p:cNvSpPr/>
+          <p:nvPr/>
+        </p:nvSpPr>
+        <p:spPr>
+          <a:xfrm>
+            <a:off x="6626943" y="1600200"/>
+            <a:ext cx="347472" cy="347472"/>
+          </a:xfrm>
+          <a:prstGeom prst="ellipse">
+            <a:avLst/>
+          </a:prstGeom>
+          <a:solidFill>
             <a:schemeClr val="accent1"/>
           </a:solidFill>
           <a:ln w="6350">
@@ -8432,7 +8724,7 @@
                   <a:schemeClr val="bg1"/>
                 </a:solidFill>
               </a:rPr>
-              <a:t>3</a:t>
+              <a:t>5</a:t>
             </a:r>
             <a:endParaRPr lang="en-US" sz="1200" dirty="0"/>
           </a:p>
@@ -8440,13 +8732,13 @@
       </p:sp>
       <p:sp>
         <p:nvSpPr>
-          <p:cNvPr id="13" name="box-74"/>
-          <p:cNvSpPr/>
-          <p:nvPr/>
-        </p:nvSpPr>
-        <p:spPr>
-          <a:xfrm>
-            <a:off x="3367964" y="2057400"/>
+          <p:cNvPr id="21" name="box-82"/>
+          <p:cNvSpPr/>
+          <p:nvPr/>
+        </p:nvSpPr>
+        <p:spPr>
+          <a:xfrm>
+            <a:off x="6187288" y="2057400"/>
             <a:ext cx="1226782" cy="868680"/>
           </a:xfrm>
           <a:prstGeom prst="roundRect">
@@ -8476,7 +8768,7 @@
                   <a:schemeClr val="tx2"/>
                 </a:solidFill>
               </a:rPr>
-              <a:t>按收益取证</a:t>
+              <a:t>来源溯源</a:t>
             </a:r>
             <a:endParaRPr lang="en-US" sz="1350" dirty="0"/>
           </a:p>
@@ -8484,13 +8776,13 @@
       </p:sp>
       <p:sp>
         <p:nvSpPr>
-          <p:cNvPr id="14" name="label-75"/>
+          <p:cNvPr id="22" name="label-83"/>
           <p:cNvSpPr txBox="1"/>
           <p:nvPr/>
         </p:nvSpPr>
         <p:spPr>
           <a:xfrm>
-            <a:off x="3322244" y="3017520"/>
+            <a:off x="6141568" y="3017520"/>
             <a:ext cx="1318222" cy="457200"/>
           </a:xfrm>
           <a:prstGeom prst="rect">
@@ -8512,7 +8804,7 @@
                   <a:schemeClr val="accent6"/>
                 </a:solidFill>
               </a:rPr>
-              <a:t>工具结果</a:t>
+              <a:t>上游试验 / 数据集</a:t>
             </a:r>
             <a:endParaRPr lang="en-US" sz="1150" dirty="0"/>
           </a:p>
@@ -8520,13 +8812,13 @@
       </p:sp>
       <p:sp>
         <p:nvSpPr>
-          <p:cNvPr id="15" name="arrow-76"/>
-          <p:cNvSpPr/>
-          <p:nvPr/>
-        </p:nvSpPr>
-        <p:spPr>
-          <a:xfrm>
-            <a:off x="4613034" y="2491740"/>
+          <p:cNvPr id="23" name="arrow-84"/>
+          <p:cNvSpPr/>
+          <p:nvPr/>
+        </p:nvSpPr>
+        <p:spPr>
+          <a:xfrm>
+            <a:off x="7432357" y="2491740"/>
             <a:ext cx="146304" cy="0"/>
           </a:xfrm>
           <a:prstGeom prst="line">
@@ -8544,13 +8836,305 @@
       </p:sp>
       <p:sp>
         <p:nvSpPr>
-          <p:cNvPr id="16" name="badge-77"/>
-          <p:cNvSpPr/>
-          <p:nvPr/>
-        </p:nvSpPr>
-        <p:spPr>
-          <a:xfrm>
-            <a:off x="5217281" y="1600200"/>
+          <p:cNvPr id="24" name="badge-85"/>
+          <p:cNvSpPr/>
+          <p:nvPr/>
+        </p:nvSpPr>
+        <p:spPr>
+          <a:xfrm>
+            <a:off x="8036604" y="1600200"/>
+            <a:ext cx="347472" cy="347472"/>
+          </a:xfrm>
+          <a:prstGeom prst="ellipse">
+            <a:avLst/>
+          </a:prstGeom>
+          <a:solidFill>
+            <a:schemeClr val="accent1"/>
+          </a:solidFill>
+          <a:ln w="6350">
+            <a:solidFill>
+              <a:schemeClr val="accent1"/>
+            </a:solidFill>
+          </a:ln>
+        </p:spPr>
+        <p:txBody>
+          <a:bodyPr wrap="square" lIns="0" tIns="0" rIns="0" bIns="0" rtlCol="0" anchor="ctr"/>
+          <a:lstStyle/>
+          <a:p>
+            <a:pPr algn="ctr" indent="0" marL="0">
+              <a:buNone/>
+            </a:pPr>
+            <a:r>
+              <a:rPr lang="en-US" sz="1200" b="1" dirty="0">
+                <a:solidFill>
+                  <a:schemeClr val="bg1"/>
+                </a:solidFill>
+              </a:rPr>
+              <a:t>6</a:t>
+            </a:r>
+            <a:endParaRPr lang="en-US" sz="1200" dirty="0"/>
+          </a:p>
+        </p:txBody>
+      </p:sp>
+      <p:sp>
+        <p:nvSpPr>
+          <p:cNvPr id="25" name="box-86"/>
+          <p:cNvSpPr/>
+          <p:nvPr/>
+        </p:nvSpPr>
+        <p:spPr>
+          <a:xfrm>
+            <a:off x="7596950" y="2057400"/>
+            <a:ext cx="1226782" cy="868680"/>
+          </a:xfrm>
+          <a:prstGeom prst="roundRect">
+            <a:avLst>
+              <a:gd name="adj" fmla="val 8421"/>
+            </a:avLst>
+          </a:prstGeom>
+          <a:solidFill>
+            <a:srgbClr val="E3F3F1"/>
+          </a:solidFill>
+          <a:ln w="12700">
+            <a:solidFill>
+              <a:srgbClr val="0E8A7E"/>
+            </a:solidFill>
+          </a:ln>
+        </p:spPr>
+        <p:txBody>
+          <a:bodyPr wrap="square" lIns="762" tIns="762" rIns="762" bIns="762" rtlCol="0" anchor="ctr"/>
+          <a:lstStyle/>
+          <a:p>
+            <a:pPr algn="ctr" indent="0" marL="0">
+              <a:buNone/>
+            </a:pPr>
+            <a:r>
+              <a:rPr lang="en-US" sz="1350" b="1" dirty="0">
+                <a:solidFill>
+                  <a:schemeClr val="tx2"/>
+                </a:solidFill>
+              </a:rPr>
+              <a:t>同源合并</a:t>
+            </a:r>
+            <a:endParaRPr lang="en-US" sz="1350" dirty="0"/>
+          </a:p>
+        </p:txBody>
+      </p:sp>
+      <p:sp>
+        <p:nvSpPr>
+          <p:cNvPr id="26" name="label-87"/>
+          <p:cNvSpPr txBox="1"/>
+          <p:nvPr/>
+        </p:nvSpPr>
+        <p:spPr>
+          <a:xfrm>
+            <a:off x="7551230" y="3017520"/>
+            <a:ext cx="1318222" cy="457200"/>
+          </a:xfrm>
+          <a:prstGeom prst="rect">
+            <a:avLst/>
+          </a:prstGeom>
+          <a:noFill/>
+          <a:ln/>
+        </p:spPr>
+        <p:txBody>
+          <a:bodyPr wrap="square" lIns="0" tIns="0" rIns="0" bIns="0" rtlCol="0" anchor="t"/>
+          <a:lstStyle/>
+          <a:p>
+            <a:pPr algn="ctr" indent="0" marL="0">
+              <a:buNone/>
+            </a:pPr>
+            <a:r>
+              <a:rPr lang="en-US" sz="1150" dirty="0">
+                <a:solidFill>
+                  <a:schemeClr val="accent6"/>
+                </a:solidFill>
+              </a:rPr>
+              <a:t>独立证据线</a:t>
+            </a:r>
+            <a:endParaRPr lang="en-US" sz="1150" dirty="0"/>
+          </a:p>
+        </p:txBody>
+      </p:sp>
+      <p:sp>
+        <p:nvSpPr>
+          <p:cNvPr id="27" name="arrow-88"/>
+          <p:cNvSpPr/>
+          <p:nvPr/>
+        </p:nvSpPr>
+        <p:spPr>
+          <a:xfrm>
+            <a:off x="8842019" y="2491740"/>
+            <a:ext cx="146304" cy="0"/>
+          </a:xfrm>
+          <a:prstGeom prst="line">
+            <a:avLst/>
+          </a:prstGeom>
+          <a:noFill/>
+          <a:ln w="15875">
+            <a:solidFill>
+              <a:schemeClr val="accent6"/>
+            </a:solidFill>
+            <a:prstDash val="solid"/>
+            <a:tailEnd type="triangle"/>
+          </a:ln>
+        </p:spPr>
+      </p:sp>
+      <p:sp>
+        <p:nvSpPr>
+          <p:cNvPr id="28" name="badge-89"/>
+          <p:cNvSpPr/>
+          <p:nvPr/>
+        </p:nvSpPr>
+        <p:spPr>
+          <a:xfrm>
+            <a:off x="9446266" y="1600200"/>
+            <a:ext cx="347472" cy="347472"/>
+          </a:xfrm>
+          <a:prstGeom prst="ellipse">
+            <a:avLst/>
+          </a:prstGeom>
+          <a:solidFill>
+            <a:schemeClr val="accent1"/>
+          </a:solidFill>
+          <a:ln w="6350">
+            <a:solidFill>
+              <a:schemeClr val="accent1"/>
+            </a:solidFill>
+          </a:ln>
+        </p:spPr>
+        <p:txBody>
+          <a:bodyPr wrap="square" lIns="0" tIns="0" rIns="0" bIns="0" rtlCol="0" anchor="ctr"/>
+          <a:lstStyle/>
+          <a:p>
+            <a:pPr algn="ctr" indent="0" marL="0">
+              <a:buNone/>
+            </a:pPr>
+            <a:r>
+              <a:rPr lang="en-US" sz="1200" b="1" dirty="0">
+                <a:solidFill>
+                  <a:schemeClr val="bg1"/>
+                </a:solidFill>
+              </a:rPr>
+              <a:t>7</a:t>
+            </a:r>
+            <a:endParaRPr lang="en-US" sz="1200" dirty="0"/>
+          </a:p>
+        </p:txBody>
+      </p:sp>
+      <p:sp>
+        <p:nvSpPr>
+          <p:cNvPr id="29" name="box-90"/>
+          <p:cNvSpPr/>
+          <p:nvPr/>
+        </p:nvSpPr>
+        <p:spPr>
+          <a:xfrm>
+            <a:off x="9006611" y="2057400"/>
+            <a:ext cx="1226782" cy="868680"/>
+          </a:xfrm>
+          <a:prstGeom prst="roundRect">
+            <a:avLst>
+              <a:gd name="adj" fmla="val 8421"/>
+            </a:avLst>
+          </a:prstGeom>
+          <a:solidFill>
+            <a:srgbClr val="E3F3F1"/>
+          </a:solidFill>
+          <a:ln w="12700">
+            <a:solidFill>
+              <a:srgbClr val="0E8A7E"/>
+            </a:solidFill>
+          </a:ln>
+        </p:spPr>
+        <p:txBody>
+          <a:bodyPr wrap="square" lIns="762" tIns="762" rIns="762" bIns="762" rtlCol="0" anchor="ctr"/>
+          <a:lstStyle/>
+          <a:p>
+            <a:pPr algn="ctr" indent="0" marL="0">
+              <a:buNone/>
+            </a:pPr>
+            <a:r>
+              <a:rPr lang="en-US" sz="1350" b="1" dirty="0">
+                <a:solidFill>
+                  <a:schemeClr val="tx2"/>
+                </a:solidFill>
+              </a:rPr>
+              <a:t>定级</a:t>
+            </a:r>
+            <a:endParaRPr lang="en-US" sz="1350" dirty="0"/>
+          </a:p>
+        </p:txBody>
+      </p:sp>
+      <p:sp>
+        <p:nvSpPr>
+          <p:cNvPr id="30" name="label-91"/>
+          <p:cNvSpPr txBox="1"/>
+          <p:nvPr/>
+        </p:nvSpPr>
+        <p:spPr>
+          <a:xfrm>
+            <a:off x="8960891" y="3017520"/>
+            <a:ext cx="1318222" cy="457200"/>
+          </a:xfrm>
+          <a:prstGeom prst="rect">
+            <a:avLst/>
+          </a:prstGeom>
+          <a:noFill/>
+          <a:ln/>
+        </p:spPr>
+        <p:txBody>
+          <a:bodyPr wrap="square" lIns="0" tIns="0" rIns="0" bIns="0" rtlCol="0" anchor="t"/>
+          <a:lstStyle/>
+          <a:p>
+            <a:pPr algn="ctr" indent="0" marL="0">
+              <a:buNone/>
+            </a:pPr>
+            <a:r>
+              <a:rPr lang="en-US" sz="1150" dirty="0">
+                <a:solidFill>
+                  <a:schemeClr val="accent6"/>
+                </a:solidFill>
+              </a:rPr>
+              <a:t>支持 / 反证 / 类型</a:t>
+            </a:r>
+            <a:endParaRPr lang="en-US" sz="1150" dirty="0"/>
+          </a:p>
+        </p:txBody>
+      </p:sp>
+      <p:sp>
+        <p:nvSpPr>
+          <p:cNvPr id="31" name="arrow-92"/>
+          <p:cNvSpPr/>
+          <p:nvPr/>
+        </p:nvSpPr>
+        <p:spPr>
+          <a:xfrm>
+            <a:off x="10251681" y="2491740"/>
+            <a:ext cx="146304" cy="0"/>
+          </a:xfrm>
+          <a:prstGeom prst="line">
+            <a:avLst/>
+          </a:prstGeom>
+          <a:noFill/>
+          <a:ln w="15875">
+            <a:solidFill>
+              <a:schemeClr val="accent6"/>
+            </a:solidFill>
+            <a:prstDash val="solid"/>
+            <a:tailEnd type="triangle"/>
+          </a:ln>
+        </p:spPr>
+      </p:sp>
+      <p:sp>
+        <p:nvSpPr>
+          <p:cNvPr id="32" name="badge-93"/>
+          <p:cNvSpPr/>
+          <p:nvPr/>
+        </p:nvSpPr>
+        <p:spPr>
+          <a:xfrm>
+            <a:off x="10855928" y="1600200"/>
             <a:ext cx="347472" cy="347472"/>
           </a:xfrm>
           <a:prstGeom prst="ellipse">
@@ -8578,7 +9162,7 @@
                   <a:schemeClr val="bg1"/>
                 </a:solidFill>
               </a:rPr>
-              <a:t>4</a:t>
+              <a:t>8</a:t>
             </a:r>
             <a:endParaRPr lang="en-US" sz="1200" dirty="0"/>
           </a:p>
@@ -8586,13 +9170,13 @@
       </p:sp>
       <p:sp>
         <p:nvSpPr>
-          <p:cNvPr id="17" name="box-78"/>
-          <p:cNvSpPr/>
-          <p:nvPr/>
-        </p:nvSpPr>
-        <p:spPr>
-          <a:xfrm>
-            <a:off x="4777626" y="2057400"/>
+          <p:cNvPr id="33" name="box-94"/>
+          <p:cNvSpPr/>
+          <p:nvPr/>
+        </p:nvSpPr>
+        <p:spPr>
+          <a:xfrm>
+            <a:off x="10416273" y="2057400"/>
             <a:ext cx="1226782" cy="868680"/>
           </a:xfrm>
           <a:prstGeom prst="roundRect">
@@ -8622,7 +9206,7 @@
                   <a:schemeClr val="tx2"/>
                 </a:solidFill>
               </a:rPr>
-              <a:t>数值核验</a:t>
+              <a:t>输出结论</a:t>
             </a:r>
             <a:endParaRPr lang="en-US" sz="1350" dirty="0"/>
           </a:p>
@@ -8630,13 +9214,13 @@
       </p:sp>
       <p:sp>
         <p:nvSpPr>
-          <p:cNvPr id="18" name="label-79"/>
+          <p:cNvPr id="34" name="label-95"/>
           <p:cNvSpPr txBox="1"/>
           <p:nvPr/>
         </p:nvSpPr>
         <p:spPr>
           <a:xfrm>
-            <a:off x="4731906" y="3017520"/>
+            <a:off x="10370553" y="3017520"/>
             <a:ext cx="1318222" cy="457200"/>
           </a:xfrm>
           <a:prstGeom prst="rect">
@@ -8658,591 +9242,7 @@
                   <a:schemeClr val="accent6"/>
                 </a:solidFill>
               </a:rPr>
-              <a:t>会话证据 EV-n</a:t>
-            </a:r>
-            <a:endParaRPr lang="en-US" sz="1150" dirty="0"/>
-          </a:p>
-        </p:txBody>
-      </p:sp>
-      <p:sp>
-        <p:nvSpPr>
-          <p:cNvPr id="19" name="arrow-80"/>
-          <p:cNvSpPr/>
-          <p:nvPr/>
-        </p:nvSpPr>
-        <p:spPr>
-          <a:xfrm>
-            <a:off x="6022696" y="2491740"/>
-            <a:ext cx="146304" cy="0"/>
-          </a:xfrm>
-          <a:prstGeom prst="line">
-            <a:avLst/>
-          </a:prstGeom>
-          <a:noFill/>
-          <a:ln w="15875">
-            <a:solidFill>
-              <a:schemeClr val="accent6"/>
-            </a:solidFill>
-            <a:prstDash val="solid"/>
-            <a:tailEnd type="triangle"/>
-          </a:ln>
-        </p:spPr>
-      </p:sp>
-      <p:sp>
-        <p:nvSpPr>
-          <p:cNvPr id="20" name="badge-81"/>
-          <p:cNvSpPr/>
-          <p:nvPr/>
-        </p:nvSpPr>
-        <p:spPr>
-          <a:xfrm>
-            <a:off x="6626943" y="1600200"/>
-            <a:ext cx="347472" cy="347472"/>
-          </a:xfrm>
-          <a:prstGeom prst="ellipse">
-            <a:avLst/>
-          </a:prstGeom>
-          <a:solidFill>
-            <a:schemeClr val="accent1"/>
-          </a:solidFill>
-          <a:ln w="6350">
-            <a:solidFill>
-              <a:schemeClr val="accent1"/>
-            </a:solidFill>
-          </a:ln>
-        </p:spPr>
-        <p:txBody>
-          <a:bodyPr wrap="square" lIns="0" tIns="0" rIns="0" bIns="0" rtlCol="0" anchor="ctr"/>
-          <a:lstStyle/>
-          <a:p>
-            <a:pPr algn="ctr" indent="0" marL="0">
-              <a:buNone/>
-            </a:pPr>
-            <a:r>
-              <a:rPr lang="en-US" sz="1200" b="1" dirty="0">
-                <a:solidFill>
-                  <a:schemeClr val="bg1"/>
-                </a:solidFill>
-              </a:rPr>
-              <a:t>5</a:t>
-            </a:r>
-            <a:endParaRPr lang="en-US" sz="1200" dirty="0"/>
-          </a:p>
-        </p:txBody>
-      </p:sp>
-      <p:sp>
-        <p:nvSpPr>
-          <p:cNvPr id="21" name="box-82"/>
-          <p:cNvSpPr/>
-          <p:nvPr/>
-        </p:nvSpPr>
-        <p:spPr>
-          <a:xfrm>
-            <a:off x="6187288" y="2057400"/>
-            <a:ext cx="1226782" cy="868680"/>
-          </a:xfrm>
-          <a:prstGeom prst="roundRect">
-            <a:avLst>
-              <a:gd name="adj" fmla="val 8421"/>
-            </a:avLst>
-          </a:prstGeom>
-          <a:solidFill>
-            <a:srgbClr val="E3F3F1"/>
-          </a:solidFill>
-          <a:ln w="12700">
-            <a:solidFill>
-              <a:srgbClr val="0E8A7E"/>
-            </a:solidFill>
-          </a:ln>
-        </p:spPr>
-        <p:txBody>
-          <a:bodyPr wrap="square" lIns="762" tIns="762" rIns="762" bIns="762" rtlCol="0" anchor="ctr"/>
-          <a:lstStyle/>
-          <a:p>
-            <a:pPr algn="ctr" indent="0" marL="0">
-              <a:buNone/>
-            </a:pPr>
-            <a:r>
-              <a:rPr lang="en-US" sz="1350" b="1" dirty="0">
-                <a:solidFill>
-                  <a:schemeClr val="tx2"/>
-                </a:solidFill>
-              </a:rPr>
-              <a:t>准入门禁</a:t>
-            </a:r>
-            <a:endParaRPr lang="en-US" sz="1350" dirty="0"/>
-          </a:p>
-        </p:txBody>
-      </p:sp>
-      <p:sp>
-        <p:nvSpPr>
-          <p:cNvPr id="22" name="label-83"/>
-          <p:cNvSpPr txBox="1"/>
-          <p:nvPr/>
-        </p:nvSpPr>
-        <p:spPr>
-          <a:xfrm>
-            <a:off x="6141568" y="3017520"/>
-            <a:ext cx="1318222" cy="457200"/>
-          </a:xfrm>
-          <a:prstGeom prst="rect">
-            <a:avLst/>
-          </a:prstGeom>
-          <a:noFill/>
-          <a:ln/>
-        </p:spPr>
-        <p:txBody>
-          <a:bodyPr wrap="square" lIns="0" tIns="0" rIns="0" bIns="0" rtlCol="0" anchor="t"/>
-          <a:lstStyle/>
-          <a:p>
-            <a:pPr algn="ctr" indent="0" marL="0">
-              <a:buNone/>
-            </a:pPr>
-            <a:r>
-              <a:rPr lang="en-US" sz="1150" dirty="0">
-                <a:solidFill>
-                  <a:schemeClr val="accent6"/>
-                </a:solidFill>
-              </a:rPr>
-              <a:t>候选证据</a:t>
-            </a:r>
-            <a:endParaRPr lang="en-US" sz="1150" dirty="0"/>
-          </a:p>
-        </p:txBody>
-      </p:sp>
-      <p:sp>
-        <p:nvSpPr>
-          <p:cNvPr id="23" name="arrow-84"/>
-          <p:cNvSpPr/>
-          <p:nvPr/>
-        </p:nvSpPr>
-        <p:spPr>
-          <a:xfrm>
-            <a:off x="7432357" y="2491740"/>
-            <a:ext cx="146304" cy="0"/>
-          </a:xfrm>
-          <a:prstGeom prst="line">
-            <a:avLst/>
-          </a:prstGeom>
-          <a:noFill/>
-          <a:ln w="15875">
-            <a:solidFill>
-              <a:schemeClr val="accent6"/>
-            </a:solidFill>
-            <a:prstDash val="solid"/>
-            <a:tailEnd type="triangle"/>
-          </a:ln>
-        </p:spPr>
-      </p:sp>
-      <p:sp>
-        <p:nvSpPr>
-          <p:cNvPr id="24" name="badge-85"/>
-          <p:cNvSpPr/>
-          <p:nvPr/>
-        </p:nvSpPr>
-        <p:spPr>
-          <a:xfrm>
-            <a:off x="8036604" y="1600200"/>
-            <a:ext cx="347472" cy="347472"/>
-          </a:xfrm>
-          <a:prstGeom prst="ellipse">
-            <a:avLst/>
-          </a:prstGeom>
-          <a:solidFill>
-            <a:schemeClr val="accent1"/>
-          </a:solidFill>
-          <a:ln w="6350">
-            <a:solidFill>
-              <a:schemeClr val="accent1"/>
-            </a:solidFill>
-          </a:ln>
-        </p:spPr>
-        <p:txBody>
-          <a:bodyPr wrap="square" lIns="0" tIns="0" rIns="0" bIns="0" rtlCol="0" anchor="ctr"/>
-          <a:lstStyle/>
-          <a:p>
-            <a:pPr algn="ctr" indent="0" marL="0">
-              <a:buNone/>
-            </a:pPr>
-            <a:r>
-              <a:rPr lang="en-US" sz="1200" b="1" dirty="0">
-                <a:solidFill>
-                  <a:schemeClr val="bg1"/>
-                </a:solidFill>
-              </a:rPr>
-              <a:t>6</a:t>
-            </a:r>
-            <a:endParaRPr lang="en-US" sz="1200" dirty="0"/>
-          </a:p>
-        </p:txBody>
-      </p:sp>
-      <p:sp>
-        <p:nvSpPr>
-          <p:cNvPr id="25" name="box-86"/>
-          <p:cNvSpPr/>
-          <p:nvPr/>
-        </p:nvSpPr>
-        <p:spPr>
-          <a:xfrm>
-            <a:off x="7596950" y="2057400"/>
-            <a:ext cx="1226782" cy="868680"/>
-          </a:xfrm>
-          <a:prstGeom prst="roundRect">
-            <a:avLst>
-              <a:gd name="adj" fmla="val 8421"/>
-            </a:avLst>
-          </a:prstGeom>
-          <a:solidFill>
-            <a:srgbClr val="E3F3F1"/>
-          </a:solidFill>
-          <a:ln w="12700">
-            <a:solidFill>
-              <a:srgbClr val="0E8A7E"/>
-            </a:solidFill>
-          </a:ln>
-        </p:spPr>
-        <p:txBody>
-          <a:bodyPr wrap="square" lIns="762" tIns="762" rIns="762" bIns="762" rtlCol="0" anchor="ctr"/>
-          <a:lstStyle/>
-          <a:p>
-            <a:pPr algn="ctr" indent="0" marL="0">
-              <a:buNone/>
-            </a:pPr>
-            <a:r>
-              <a:rPr lang="en-US" sz="1350" b="1" dirty="0">
-                <a:solidFill>
-                  <a:schemeClr val="tx2"/>
-                </a:solidFill>
-              </a:rPr>
-              <a:t>证据账本</a:t>
-            </a:r>
-            <a:endParaRPr lang="en-US" sz="1350" dirty="0"/>
-          </a:p>
-        </p:txBody>
-      </p:sp>
-      <p:sp>
-        <p:nvSpPr>
-          <p:cNvPr id="26" name="label-87"/>
-          <p:cNvSpPr txBox="1"/>
-          <p:nvPr/>
-        </p:nvSpPr>
-        <p:spPr>
-          <a:xfrm>
-            <a:off x="7551230" y="3017520"/>
-            <a:ext cx="1318222" cy="457200"/>
-          </a:xfrm>
-          <a:prstGeom prst="rect">
-            <a:avLst/>
-          </a:prstGeom>
-          <a:noFill/>
-          <a:ln/>
-        </p:spPr>
-        <p:txBody>
-          <a:bodyPr wrap="square" lIns="0" tIns="0" rIns="0" bIns="0" rtlCol="0" anchor="t"/>
-          <a:lstStyle/>
-          <a:p>
-            <a:pPr algn="ctr" indent="0" marL="0">
-              <a:buNone/>
-            </a:pPr>
-            <a:r>
-              <a:rPr lang="en-US" sz="1150" dirty="0">
-                <a:solidFill>
-                  <a:schemeClr val="accent6"/>
-                </a:solidFill>
-              </a:rPr>
-              <a:t>已验证 / 已隔离</a:t>
-            </a:r>
-            <a:endParaRPr lang="en-US" sz="1150" dirty="0"/>
-          </a:p>
-        </p:txBody>
-      </p:sp>
-      <p:sp>
-        <p:nvSpPr>
-          <p:cNvPr id="27" name="arrow-88"/>
-          <p:cNvSpPr/>
-          <p:nvPr/>
-        </p:nvSpPr>
-        <p:spPr>
-          <a:xfrm>
-            <a:off x="8842019" y="2491740"/>
-            <a:ext cx="146304" cy="0"/>
-          </a:xfrm>
-          <a:prstGeom prst="line">
-            <a:avLst/>
-          </a:prstGeom>
-          <a:noFill/>
-          <a:ln w="15875">
-            <a:solidFill>
-              <a:schemeClr val="accent6"/>
-            </a:solidFill>
-            <a:prstDash val="solid"/>
-            <a:tailEnd type="triangle"/>
-          </a:ln>
-        </p:spPr>
-      </p:sp>
-      <p:sp>
-        <p:nvSpPr>
-          <p:cNvPr id="28" name="badge-89"/>
-          <p:cNvSpPr/>
-          <p:nvPr/>
-        </p:nvSpPr>
-        <p:spPr>
-          <a:xfrm>
-            <a:off x="9446266" y="1600200"/>
-            <a:ext cx="347472" cy="347472"/>
-          </a:xfrm>
-          <a:prstGeom prst="ellipse">
-            <a:avLst/>
-          </a:prstGeom>
-          <a:solidFill>
-            <a:schemeClr val="accent1"/>
-          </a:solidFill>
-          <a:ln w="6350">
-            <a:solidFill>
-              <a:schemeClr val="accent1"/>
-            </a:solidFill>
-          </a:ln>
-        </p:spPr>
-        <p:txBody>
-          <a:bodyPr wrap="square" lIns="0" tIns="0" rIns="0" bIns="0" rtlCol="0" anchor="ctr"/>
-          <a:lstStyle/>
-          <a:p>
-            <a:pPr algn="ctr" indent="0" marL="0">
-              <a:buNone/>
-            </a:pPr>
-            <a:r>
-              <a:rPr lang="en-US" sz="1200" b="1" dirty="0">
-                <a:solidFill>
-                  <a:schemeClr val="bg1"/>
-                </a:solidFill>
-              </a:rPr>
-              <a:t>7</a:t>
-            </a:r>
-            <a:endParaRPr lang="en-US" sz="1200" dirty="0"/>
-          </a:p>
-        </p:txBody>
-      </p:sp>
-      <p:sp>
-        <p:nvSpPr>
-          <p:cNvPr id="29" name="box-90"/>
-          <p:cNvSpPr/>
-          <p:nvPr/>
-        </p:nvSpPr>
-        <p:spPr>
-          <a:xfrm>
-            <a:off x="9006611" y="2057400"/>
-            <a:ext cx="1226782" cy="868680"/>
-          </a:xfrm>
-          <a:prstGeom prst="roundRect">
-            <a:avLst>
-              <a:gd name="adj" fmla="val 8421"/>
-            </a:avLst>
-          </a:prstGeom>
-          <a:solidFill>
-            <a:srgbClr val="E3F3F1"/>
-          </a:solidFill>
-          <a:ln w="12700">
-            <a:solidFill>
-              <a:srgbClr val="0E8A7E"/>
-            </a:solidFill>
-          </a:ln>
-        </p:spPr>
-        <p:txBody>
-          <a:bodyPr wrap="square" lIns="762" tIns="762" rIns="762" bIns="762" rtlCol="0" anchor="ctr"/>
-          <a:lstStyle/>
-          <a:p>
-            <a:pPr algn="ctr" indent="0" marL="0">
-              <a:buNone/>
-            </a:pPr>
-            <a:r>
-              <a:rPr lang="en-US" sz="1350" b="1" dirty="0">
-                <a:solidFill>
-                  <a:schemeClr val="tx2"/>
-                </a:solidFill>
-              </a:rPr>
-              <a:t>共形判定</a:t>
-            </a:r>
-            <a:endParaRPr lang="en-US" sz="1350" dirty="0"/>
-          </a:p>
-        </p:txBody>
-      </p:sp>
-      <p:sp>
-        <p:nvSpPr>
-          <p:cNvPr id="30" name="label-91"/>
-          <p:cNvSpPr txBox="1"/>
-          <p:nvPr/>
-        </p:nvSpPr>
-        <p:spPr>
-          <a:xfrm>
-            <a:off x="8960891" y="3017520"/>
-            <a:ext cx="1318222" cy="457200"/>
-          </a:xfrm>
-          <a:prstGeom prst="rect">
-            <a:avLst/>
-          </a:prstGeom>
-          <a:noFill/>
-          <a:ln/>
-        </p:spPr>
-        <p:txBody>
-          <a:bodyPr wrap="square" lIns="0" tIns="0" rIns="0" bIns="0" rtlCol="0" anchor="t"/>
-          <a:lstStyle/>
-          <a:p>
-            <a:pPr algn="ctr" indent="0" marL="0">
-              <a:buNone/>
-            </a:pPr>
-            <a:r>
-              <a:rPr lang="en-US" sz="1150" dirty="0">
-                <a:solidFill>
-                  <a:schemeClr val="accent6"/>
-                </a:solidFill>
-              </a:rPr>
-              <a:t>预测集</a:t>
-            </a:r>
-            <a:endParaRPr lang="en-US" sz="1150" dirty="0"/>
-          </a:p>
-        </p:txBody>
-      </p:sp>
-      <p:sp>
-        <p:nvSpPr>
-          <p:cNvPr id="31" name="arrow-92"/>
-          <p:cNvSpPr/>
-          <p:nvPr/>
-        </p:nvSpPr>
-        <p:spPr>
-          <a:xfrm>
-            <a:off x="10251681" y="2491740"/>
-            <a:ext cx="146304" cy="0"/>
-          </a:xfrm>
-          <a:prstGeom prst="line">
-            <a:avLst/>
-          </a:prstGeom>
-          <a:noFill/>
-          <a:ln w="15875">
-            <a:solidFill>
-              <a:schemeClr val="accent6"/>
-            </a:solidFill>
-            <a:prstDash val="solid"/>
-            <a:tailEnd type="triangle"/>
-          </a:ln>
-        </p:spPr>
-      </p:sp>
-      <p:sp>
-        <p:nvSpPr>
-          <p:cNvPr id="32" name="badge-93"/>
-          <p:cNvSpPr/>
-          <p:nvPr/>
-        </p:nvSpPr>
-        <p:spPr>
-          <a:xfrm>
-            <a:off x="10855928" y="1600200"/>
-            <a:ext cx="347472" cy="347472"/>
-          </a:xfrm>
-          <a:prstGeom prst="ellipse">
-            <a:avLst/>
-          </a:prstGeom>
-          <a:solidFill>
-            <a:schemeClr val="accent2"/>
-          </a:solidFill>
-          <a:ln w="6350">
-            <a:solidFill>
-              <a:schemeClr val="accent2"/>
-            </a:solidFill>
-          </a:ln>
-        </p:spPr>
-        <p:txBody>
-          <a:bodyPr wrap="square" lIns="0" tIns="0" rIns="0" bIns="0" rtlCol="0" anchor="ctr"/>
-          <a:lstStyle/>
-          <a:p>
-            <a:pPr algn="ctr" indent="0" marL="0">
-              <a:buNone/>
-            </a:pPr>
-            <a:r>
-              <a:rPr lang="en-US" sz="1200" b="1" dirty="0">
-                <a:solidFill>
-                  <a:schemeClr val="bg1"/>
-                </a:solidFill>
-              </a:rPr>
-              <a:t>8</a:t>
-            </a:r>
-            <a:endParaRPr lang="en-US" sz="1200" dirty="0"/>
-          </a:p>
-        </p:txBody>
-      </p:sp>
-      <p:sp>
-        <p:nvSpPr>
-          <p:cNvPr id="33" name="box-94"/>
-          <p:cNvSpPr/>
-          <p:nvPr/>
-        </p:nvSpPr>
-        <p:spPr>
-          <a:xfrm>
-            <a:off x="10416273" y="2057400"/>
-            <a:ext cx="1226782" cy="868680"/>
-          </a:xfrm>
-          <a:prstGeom prst="roundRect">
-            <a:avLst>
-              <a:gd name="adj" fmla="val 8421"/>
-            </a:avLst>
-          </a:prstGeom>
-          <a:solidFill>
-            <a:srgbClr val="F2F5F8"/>
-          </a:solidFill>
-          <a:ln w="6350">
-            <a:solidFill>
-              <a:srgbClr val="F2F5F8"/>
-            </a:solidFill>
-          </a:ln>
-        </p:spPr>
-        <p:txBody>
-          <a:bodyPr wrap="square" lIns="762" tIns="762" rIns="762" bIns="762" rtlCol="0" anchor="ctr"/>
-          <a:lstStyle/>
-          <a:p>
-            <a:pPr algn="ctr" indent="0" marL="0">
-              <a:buNone/>
-            </a:pPr>
-            <a:r>
-              <a:rPr lang="en-US" sz="1350" b="1" dirty="0">
-                <a:solidFill>
-                  <a:schemeClr val="tx2"/>
-                </a:solidFill>
-              </a:rPr>
-              <a:t>输出结论</a:t>
-            </a:r>
-            <a:endParaRPr lang="en-US" sz="1350" dirty="0"/>
-          </a:p>
-        </p:txBody>
-      </p:sp>
-      <p:sp>
-        <p:nvSpPr>
-          <p:cNvPr id="34" name="label-95"/>
-          <p:cNvSpPr txBox="1"/>
-          <p:nvPr/>
-        </p:nvSpPr>
-        <p:spPr>
-          <a:xfrm>
-            <a:off x="10370553" y="3017520"/>
-            <a:ext cx="1318222" cy="457200"/>
-          </a:xfrm>
-          <a:prstGeom prst="rect">
-            <a:avLst/>
-          </a:prstGeom>
-          <a:noFill/>
-          <a:ln/>
-        </p:spPr>
-        <p:txBody>
-          <a:bodyPr wrap="square" lIns="0" tIns="0" rIns="0" bIns="0" rtlCol="0" anchor="t"/>
-          <a:lstStyle/>
-          <a:p>
-            <a:pPr algn="ctr" indent="0" marL="0">
-              <a:buNone/>
-            </a:pPr>
-            <a:r>
-              <a:rPr lang="en-US" sz="1150" dirty="0">
-                <a:solidFill>
-                  <a:schemeClr val="accent6"/>
-                </a:solidFill>
-              </a:rPr>
-              <a:t>结论 + 证据编号</a:t>
+              <a:t>结论 + 证据线</a:t>
             </a:r>
             <a:endParaRPr lang="en-US" sz="1150" dirty="0"/>
           </a:p>
@@ -9305,7 +9305,7 @@
                   <a:schemeClr val="accent6"/>
                 </a:solidFill>
               </a:rPr>
-              <a:t>绿色：由证据治理层（A 类，3.0 新增）完成的步骤</a:t>
+              <a:t>绿色：由证据治理层（A 类）完成的步骤</a:t>
             </a:r>
             <a:endParaRPr lang="en-US" sz="1150" dirty="0"/>
           </a:p>
@@ -9412,7 +9412,7 @@
                   <a:schemeClr val="tx1"/>
                 </a:solidFill>
               </a:rPr>
-              <a:t>新研究推翻依据</a:t>
+              <a:t>回答时核验每个来源</a:t>
             </a:r>
             <a:endParaRPr lang="en-US" sz="1300" dirty="0"/>
           </a:p>
@@ -9426,7 +9426,7 @@
                   <a:schemeClr val="tx1"/>
                 </a:solidFill>
               </a:rPr>
-              <a:t>（如药品撤市、新试验结果）</a:t>
+              <a:t>（撤稿 / 试验终止 / 撤市）</a:t>
             </a:r>
             <a:endParaRPr lang="en-US" sz="1300" dirty="0"/>
           </a:p>
@@ -9494,21 +9494,7 @@
                   <a:schemeClr val="tx1"/>
                 </a:solidFill>
               </a:rPr>
-              <a:t>在账本中标记该证据</a:t>
-            </a:r>
-            <a:endParaRPr lang="en-US" sz="1300" dirty="0"/>
-          </a:p>
-          <a:p>
-            <a:pPr algn="ctr" indent="0" marL="0">
-              <a:buNone/>
-            </a:pPr>
-            <a:r>
-              <a:rPr lang="en-US" sz="1300" dirty="0">
-                <a:solidFill>
-                  <a:schemeClr val="tx1"/>
-                </a:solidFill>
-              </a:rPr>
-              <a:t>（审查人标注 / 自动扫描）</a:t>
+              <a:t>发现已失效的来源</a:t>
             </a:r>
             <a:endParaRPr lang="en-US" sz="1300" dirty="0"/>
           </a:p>
@@ -9590,7 +9576,7 @@
                   <a:schemeClr val="tx1"/>
                 </a:solidFill>
               </a:rPr>
-              <a:t>自动转为“有争议”</a:t>
+              <a:t>当场降级</a:t>
             </a:r>
             <a:endParaRPr lang="en-US" sz="1300" dirty="0"/>
           </a:p>
@@ -9658,7 +9644,7 @@
                   <a:schemeClr val="tx1"/>
                 </a:solidFill>
               </a:rPr>
-              <a:t>提示复核：重新论证，</a:t>
+              <a:t>提示复核：列出</a:t>
             </a:r>
             <a:endParaRPr lang="en-US" sz="1300" dirty="0"/>
           </a:p>
@@ -9672,7 +9658,7 @@
                   <a:schemeClr val="tx1"/>
                 </a:solidFill>
               </a:rPr>
-              <a:t>或以新结论取代</a:t>
+              <a:t>受影响的证据线</a:t>
             </a:r>
             <a:endParaRPr lang="en-US" sz="1300" dirty="0"/>
           </a:p>
@@ -9708,7 +9694,7 @@
                   <a:schemeClr val="accent6"/>
                 </a:solidFill>
               </a:rPr>
-              <a:t>例：2024 年伏塞洛托（Oxbryta）因上市后数据显示死亡增多而撤市 → “批准”证据被撤销 → “可用于治疗镰状细胞病”的结论自动降级。</a:t>
+              <a:t>例：2024 年伏塞洛托（Oxbryta）因上市后数据显示死亡增多而撤市 → 核验发现“批准”已失效 → “可用于治疗镰状细胞病”的结论当场降级。</a:t>
             </a:r>
             <a:endParaRPr lang="en-US" sz="1150" dirty="0"/>
           </a:p>
@@ -9816,7 +9802,7 @@
                   <a:schemeClr val="tx2"/>
                 </a:solidFill>
               </a:rPr>
-              <a:t>核心设计：证据账本——结论必须有据可查、可以撤回</a:t>
+              <a:t>核心设计：独立证据线定级——看有几条独立证据，而不是引用了几篇</a:t>
             </a:r>
             <a:endParaRPr lang="en-US" sz="2800" dirty="0"/>
           </a:p>
@@ -9854,7 +9840,7 @@
                   <a:schemeClr val="accent6"/>
                 </a:solidFill>
               </a:rPr>
-              <a:t>A 类设计点 ①：每条证据经准入门禁才算数；依据被推翻，结论自动降级。</a:t>
+              <a:t>A 类设计：即时追溯每条证据的来源，同源合并，按独立证据线给结论定级。</a:t>
             </a:r>
             <a:endParaRPr lang="en-US" sz="1500" dirty="0"/>
           </a:p>
@@ -9862,112 +9848,87 @@
       </p:sp>
       <p:sp>
         <p:nvSpPr>
-          <p:cNvPr id="4" name="box-108"/>
-          <p:cNvSpPr/>
-          <p:nvPr/>
-        </p:nvSpPr>
-        <p:spPr>
-          <a:xfrm>
-            <a:off x="548640" y="2331720"/>
-            <a:ext cx="1417320" cy="566928"/>
+          <p:cNvPr id="4" name="card-108"/>
+          <p:cNvSpPr/>
+          <p:nvPr/>
+        </p:nvSpPr>
+        <p:spPr>
+          <a:xfrm>
+            <a:off x="548640" y="1600200"/>
+            <a:ext cx="6675120" cy="4526280"/>
           </a:xfrm>
           <a:prstGeom prst="roundRect">
             <a:avLst>
-              <a:gd name="adj" fmla="val 12903"/>
+              <a:gd name="adj" fmla="val 2020"/>
             </a:avLst>
           </a:prstGeom>
           <a:solidFill>
-            <a:srgbClr val="5B6B7C"/>
+            <a:schemeClr val="bg2"/>
           </a:solidFill>
-          <a:ln w="6350">
+          <a:ln w="12700">
             <a:solidFill>
-              <a:srgbClr val="5B6B7C"/>
+              <a:schemeClr val="bg2"/>
             </a:solidFill>
+            <a:prstDash val="solid"/>
           </a:ln>
         </p:spPr>
-        <p:txBody>
-          <a:bodyPr wrap="square" lIns="762" tIns="762" rIns="762" bIns="762" rtlCol="0" anchor="ctr"/>
-          <a:lstStyle/>
-          <a:p>
-            <a:pPr algn="ctr" indent="0" marL="0">
-              <a:buNone/>
-            </a:pPr>
-            <a:r>
-              <a:rPr lang="en-US" sz="1500" b="1" dirty="0">
-                <a:solidFill>
-                  <a:schemeClr val="bg1"/>
-                </a:solidFill>
-              </a:rPr>
-              <a:t>候选</a:t>
-            </a:r>
-            <a:endParaRPr lang="en-US" sz="1500" dirty="0"/>
-          </a:p>
-        </p:txBody>
-      </p:sp>
-      <p:sp>
-        <p:nvSpPr>
-          <p:cNvPr id="5" name="box-109"/>
-          <p:cNvSpPr/>
-          <p:nvPr/>
-        </p:nvSpPr>
-        <p:spPr>
-          <a:xfrm>
-            <a:off x="2788920" y="2331720"/>
-            <a:ext cx="1417320" cy="566928"/>
+      </p:sp>
+      <p:sp>
+        <p:nvSpPr>
+          <p:cNvPr id="5" name="label-109"/>
+          <p:cNvSpPr txBox="1"/>
+          <p:nvPr/>
+        </p:nvSpPr>
+        <p:spPr>
+          <a:xfrm>
+            <a:off x="822960" y="1737360"/>
+            <a:ext cx="6126480" cy="329184"/>
+          </a:xfrm>
+          <a:prstGeom prst="rect">
+            <a:avLst/>
+          </a:prstGeom>
+          <a:noFill/>
+          <a:ln/>
+        </p:spPr>
+        <p:txBody>
+          <a:bodyPr wrap="square" lIns="0" tIns="0" rIns="0" bIns="0" rtlCol="0" anchor="t"/>
+          <a:lstStyle/>
+          <a:p>
+            <a:pPr algn="l" indent="0" marL="0">
+              <a:buNone/>
+            </a:pPr>
+            <a:r>
+              <a:rPr lang="en-US" sz="1350" b="1" dirty="0">
+                <a:solidFill>
+                  <a:schemeClr val="tx2"/>
+                </a:solidFill>
+              </a:rPr>
+              <a:t>真实例子：“阿贝西利能否用于乳腺癌”，系统检索到的前 20 篇论文</a:t>
+            </a:r>
+            <a:endParaRPr lang="en-US" sz="1350" dirty="0"/>
+          </a:p>
+        </p:txBody>
+      </p:sp>
+      <p:sp>
+        <p:nvSpPr>
+          <p:cNvPr id="6" name="box-110"/>
+          <p:cNvSpPr/>
+          <p:nvPr/>
+        </p:nvSpPr>
+        <p:spPr>
+          <a:xfrm>
+            <a:off x="822960" y="2240280"/>
+            <a:ext cx="1417320" cy="274320"/>
           </a:xfrm>
           <a:prstGeom prst="roundRect">
             <a:avLst>
-              <a:gd name="adj" fmla="val 12903"/>
+              <a:gd name="adj" fmla="val 26667"/>
             </a:avLst>
           </a:prstGeom>
           <a:solidFill>
-            <a:srgbClr val="0E8A7E"/>
+            <a:schemeClr val="bg1"/>
           </a:solidFill>
-          <a:ln w="6350">
-            <a:solidFill>
-              <a:srgbClr val="0E8A7E"/>
-            </a:solidFill>
-          </a:ln>
-        </p:spPr>
-        <p:txBody>
-          <a:bodyPr wrap="square" lIns="762" tIns="762" rIns="762" bIns="762" rtlCol="0" anchor="ctr"/>
-          <a:lstStyle/>
-          <a:p>
-            <a:pPr algn="ctr" indent="0" marL="0">
-              <a:buNone/>
-            </a:pPr>
-            <a:r>
-              <a:rPr lang="en-US" sz="1500" b="1" dirty="0">
-                <a:solidFill>
-                  <a:schemeClr val="bg1"/>
-                </a:solidFill>
-              </a:rPr>
-              <a:t>已验证</a:t>
-            </a:r>
-            <a:endParaRPr lang="en-US" sz="1500" dirty="0"/>
-          </a:p>
-        </p:txBody>
-      </p:sp>
-      <p:sp>
-        <p:nvSpPr>
-          <p:cNvPr id="6" name="box-110"/>
-          <p:cNvSpPr/>
-          <p:nvPr/>
-        </p:nvSpPr>
-        <p:spPr>
-          <a:xfrm>
-            <a:off x="4892040" y="1600200"/>
-            <a:ext cx="1417320" cy="566928"/>
-          </a:xfrm>
-          <a:prstGeom prst="roundRect">
-            <a:avLst>
-              <a:gd name="adj" fmla="val 12903"/>
-            </a:avLst>
-          </a:prstGeom>
-          <a:solidFill>
-            <a:srgbClr val="C9792A"/>
-          </a:solidFill>
-          <a:ln w="6350">
+          <a:ln w="12700">
             <a:solidFill>
               <a:srgbClr val="C9792A"/>
             </a:solidFill>
@@ -9981,27 +9942,449 @@
               <a:buNone/>
             </a:pPr>
             <a:r>
-              <a:rPr lang="en-US" sz="1500" b="1" dirty="0">
-                <a:solidFill>
-                  <a:schemeClr val="bg1"/>
-                </a:solidFill>
-              </a:rPr>
-              <a:t>有争议</a:t>
-            </a:r>
-            <a:endParaRPr lang="en-US" sz="1500" dirty="0"/>
-          </a:p>
-        </p:txBody>
-      </p:sp>
-      <p:sp>
-        <p:nvSpPr>
-          <p:cNvPr id="7" name="label-111"/>
+              <a:rPr lang="en-US" sz="1100" dirty="0">
+                <a:solidFill>
+                  <a:schemeClr val="tx1"/>
+                </a:solidFill>
+              </a:rPr>
+              <a:t>论文 1</a:t>
+            </a:r>
+            <a:endParaRPr lang="en-US" sz="1100" dirty="0"/>
+          </a:p>
+        </p:txBody>
+      </p:sp>
+      <p:sp>
+        <p:nvSpPr>
+          <p:cNvPr id="7" name="box-111"/>
+          <p:cNvSpPr/>
+          <p:nvPr/>
+        </p:nvSpPr>
+        <p:spPr>
+          <a:xfrm>
+            <a:off x="822960" y="2578608"/>
+            <a:ext cx="1417320" cy="274320"/>
+          </a:xfrm>
+          <a:prstGeom prst="roundRect">
+            <a:avLst>
+              <a:gd name="adj" fmla="val 26667"/>
+            </a:avLst>
+          </a:prstGeom>
+          <a:solidFill>
+            <a:schemeClr val="bg1"/>
+          </a:solidFill>
+          <a:ln w="12700">
+            <a:solidFill>
+              <a:srgbClr val="C9792A"/>
+            </a:solidFill>
+          </a:ln>
+        </p:spPr>
+        <p:txBody>
+          <a:bodyPr wrap="square" lIns="762" tIns="762" rIns="762" bIns="762" rtlCol="0" anchor="ctr"/>
+          <a:lstStyle/>
+          <a:p>
+            <a:pPr algn="ctr" indent="0" marL="0">
+              <a:buNone/>
+            </a:pPr>
+            <a:r>
+              <a:rPr lang="en-US" sz="1100" dirty="0">
+                <a:solidFill>
+                  <a:schemeClr val="tx1"/>
+                </a:solidFill>
+              </a:rPr>
+              <a:t>论文 2</a:t>
+            </a:r>
+            <a:endParaRPr lang="en-US" sz="1100" dirty="0"/>
+          </a:p>
+        </p:txBody>
+      </p:sp>
+      <p:sp>
+        <p:nvSpPr>
+          <p:cNvPr id="8" name="box-112"/>
+          <p:cNvSpPr/>
+          <p:nvPr/>
+        </p:nvSpPr>
+        <p:spPr>
+          <a:xfrm>
+            <a:off x="822960" y="2916936"/>
+            <a:ext cx="1417320" cy="274320"/>
+          </a:xfrm>
+          <a:prstGeom prst="roundRect">
+            <a:avLst>
+              <a:gd name="adj" fmla="val 26667"/>
+            </a:avLst>
+          </a:prstGeom>
+          <a:solidFill>
+            <a:schemeClr val="bg1"/>
+          </a:solidFill>
+          <a:ln w="12700">
+            <a:solidFill>
+              <a:srgbClr val="C9792A"/>
+            </a:solidFill>
+          </a:ln>
+        </p:spPr>
+        <p:txBody>
+          <a:bodyPr wrap="square" lIns="762" tIns="762" rIns="762" bIns="762" rtlCol="0" anchor="ctr"/>
+          <a:lstStyle/>
+          <a:p>
+            <a:pPr algn="ctr" indent="0" marL="0">
+              <a:buNone/>
+            </a:pPr>
+            <a:r>
+              <a:rPr lang="en-US" sz="1100" dirty="0">
+                <a:solidFill>
+                  <a:schemeClr val="tx1"/>
+                </a:solidFill>
+              </a:rPr>
+              <a:t>论文 3</a:t>
+            </a:r>
+            <a:endParaRPr lang="en-US" sz="1100" dirty="0"/>
+          </a:p>
+        </p:txBody>
+      </p:sp>
+      <p:sp>
+        <p:nvSpPr>
+          <p:cNvPr id="9" name="box-113"/>
+          <p:cNvSpPr/>
+          <p:nvPr/>
+        </p:nvSpPr>
+        <p:spPr>
+          <a:xfrm>
+            <a:off x="822960" y="3255264"/>
+            <a:ext cx="1417320" cy="274320"/>
+          </a:xfrm>
+          <a:prstGeom prst="roundRect">
+            <a:avLst>
+              <a:gd name="adj" fmla="val 26667"/>
+            </a:avLst>
+          </a:prstGeom>
+          <a:solidFill>
+            <a:schemeClr val="bg1"/>
+          </a:solidFill>
+          <a:ln w="12700">
+            <a:solidFill>
+              <a:srgbClr val="C9792A"/>
+            </a:solidFill>
+          </a:ln>
+        </p:spPr>
+        <p:txBody>
+          <a:bodyPr wrap="square" lIns="762" tIns="762" rIns="762" bIns="762" rtlCol="0" anchor="ctr"/>
+          <a:lstStyle/>
+          <a:p>
+            <a:pPr algn="ctr" indent="0" marL="0">
+              <a:buNone/>
+            </a:pPr>
+            <a:r>
+              <a:rPr lang="en-US" sz="1100" dirty="0">
+                <a:solidFill>
+                  <a:schemeClr val="tx1"/>
+                </a:solidFill>
+              </a:rPr>
+              <a:t>论文 4</a:t>
+            </a:r>
+            <a:endParaRPr lang="en-US" sz="1100" dirty="0"/>
+          </a:p>
+        </p:txBody>
+      </p:sp>
+      <p:sp>
+        <p:nvSpPr>
+          <p:cNvPr id="10" name="box-114"/>
+          <p:cNvSpPr/>
+          <p:nvPr/>
+        </p:nvSpPr>
+        <p:spPr>
+          <a:xfrm>
+            <a:off x="822960" y="3593592"/>
+            <a:ext cx="1417320" cy="274320"/>
+          </a:xfrm>
+          <a:prstGeom prst="roundRect">
+            <a:avLst>
+              <a:gd name="adj" fmla="val 26667"/>
+            </a:avLst>
+          </a:prstGeom>
+          <a:solidFill>
+            <a:schemeClr val="bg1"/>
+          </a:solidFill>
+          <a:ln w="12700">
+            <a:solidFill>
+              <a:srgbClr val="C9792A"/>
+            </a:solidFill>
+          </a:ln>
+        </p:spPr>
+        <p:txBody>
+          <a:bodyPr wrap="square" lIns="762" tIns="762" rIns="762" bIns="762" rtlCol="0" anchor="ctr"/>
+          <a:lstStyle/>
+          <a:p>
+            <a:pPr algn="ctr" indent="0" marL="0">
+              <a:buNone/>
+            </a:pPr>
+            <a:r>
+              <a:rPr lang="en-US" sz="1100" dirty="0">
+                <a:solidFill>
+                  <a:schemeClr val="tx1"/>
+                </a:solidFill>
+              </a:rPr>
+              <a:t>论文 5</a:t>
+            </a:r>
+            <a:endParaRPr lang="en-US" sz="1100" dirty="0"/>
+          </a:p>
+        </p:txBody>
+      </p:sp>
+      <p:sp>
+        <p:nvSpPr>
+          <p:cNvPr id="11" name="box-115"/>
+          <p:cNvSpPr/>
+          <p:nvPr/>
+        </p:nvSpPr>
+        <p:spPr>
+          <a:xfrm>
+            <a:off x="822960" y="3931920"/>
+            <a:ext cx="1417320" cy="274320"/>
+          </a:xfrm>
+          <a:prstGeom prst="roundRect">
+            <a:avLst>
+              <a:gd name="adj" fmla="val 26667"/>
+            </a:avLst>
+          </a:prstGeom>
+          <a:solidFill>
+            <a:schemeClr val="bg1"/>
+          </a:solidFill>
+          <a:ln w="12700">
+            <a:solidFill>
+              <a:srgbClr val="C9792A"/>
+            </a:solidFill>
+          </a:ln>
+        </p:spPr>
+        <p:txBody>
+          <a:bodyPr wrap="square" lIns="762" tIns="762" rIns="762" bIns="762" rtlCol="0" anchor="ctr"/>
+          <a:lstStyle/>
+          <a:p>
+            <a:pPr algn="ctr" indent="0" marL="0">
+              <a:buNone/>
+            </a:pPr>
+            <a:r>
+              <a:rPr lang="en-US" sz="1100" dirty="0">
+                <a:solidFill>
+                  <a:schemeClr val="tx1"/>
+                </a:solidFill>
+              </a:rPr>
+              <a:t>论文 6</a:t>
+            </a:r>
+            <a:endParaRPr lang="en-US" sz="1100" dirty="0"/>
+          </a:p>
+        </p:txBody>
+      </p:sp>
+      <p:sp>
+        <p:nvSpPr>
+          <p:cNvPr id="12" name="box-116"/>
+          <p:cNvSpPr/>
+          <p:nvPr/>
+        </p:nvSpPr>
+        <p:spPr>
+          <a:xfrm>
+            <a:off x="822960" y="4325112"/>
+            <a:ext cx="1417320" cy="457200"/>
+          </a:xfrm>
+          <a:prstGeom prst="roundRect">
+            <a:avLst>
+              <a:gd name="adj" fmla="val 16000"/>
+            </a:avLst>
+          </a:prstGeom>
+          <a:solidFill>
+            <a:schemeClr val="bg1"/>
+          </a:solidFill>
+          <a:ln w="12700">
+            <a:solidFill>
+              <a:srgbClr val="D5DCE4"/>
+            </a:solidFill>
+          </a:ln>
+        </p:spPr>
+        <p:txBody>
+          <a:bodyPr wrap="square" lIns="762" tIns="762" rIns="762" bIns="762" rtlCol="0" anchor="ctr"/>
+          <a:lstStyle/>
+          <a:p>
+            <a:pPr algn="ctr" indent="0" marL="0">
+              <a:buNone/>
+            </a:pPr>
+            <a:r>
+              <a:rPr lang="en-US" sz="950" dirty="0">
+                <a:solidFill>
+                  <a:schemeClr val="accent6"/>
+                </a:solidFill>
+              </a:rPr>
+              <a:t>其余 14 篇</a:t>
+            </a:r>
+            <a:endParaRPr lang="en-US" sz="950" dirty="0"/>
+          </a:p>
+          <a:p>
+            <a:pPr algn="ctr" indent="0" marL="0">
+              <a:buNone/>
+            </a:pPr>
+            <a:r>
+              <a:rPr lang="en-US" sz="950" dirty="0">
+                <a:solidFill>
+                  <a:schemeClr val="accent6"/>
+                </a:solidFill>
+              </a:rPr>
+              <a:t>（各自独立或无法追溯）</a:t>
+            </a:r>
+            <a:endParaRPr lang="en-US" sz="950" dirty="0"/>
+          </a:p>
+        </p:txBody>
+      </p:sp>
+      <p:sp>
+        <p:nvSpPr>
+          <p:cNvPr id="13" name="arrow-117"/>
+          <p:cNvSpPr/>
+          <p:nvPr/>
+        </p:nvSpPr>
+        <p:spPr>
+          <a:xfrm>
+            <a:off x="2267712" y="2377440"/>
+            <a:ext cx="1179576" cy="845820"/>
+          </a:xfrm>
+          <a:prstGeom prst="line">
+            <a:avLst/>
+          </a:prstGeom>
+          <a:noFill/>
+          <a:ln w="12700">
+            <a:solidFill>
+              <a:schemeClr val="accent3"/>
+            </a:solidFill>
+            <a:prstDash val="solid"/>
+            <a:tailEnd type="triangle"/>
+          </a:ln>
+        </p:spPr>
+      </p:sp>
+      <p:sp>
+        <p:nvSpPr>
+          <p:cNvPr id="14" name="arrow-118"/>
+          <p:cNvSpPr/>
+          <p:nvPr/>
+        </p:nvSpPr>
+        <p:spPr>
+          <a:xfrm>
+            <a:off x="2267712" y="2715768"/>
+            <a:ext cx="1179576" cy="507492"/>
+          </a:xfrm>
+          <a:prstGeom prst="line">
+            <a:avLst/>
+          </a:prstGeom>
+          <a:noFill/>
+          <a:ln w="12700">
+            <a:solidFill>
+              <a:schemeClr val="accent3"/>
+            </a:solidFill>
+            <a:prstDash val="solid"/>
+            <a:tailEnd type="triangle"/>
+          </a:ln>
+        </p:spPr>
+      </p:sp>
+      <p:sp>
+        <p:nvSpPr>
+          <p:cNvPr id="15" name="arrow-119"/>
+          <p:cNvSpPr/>
+          <p:nvPr/>
+        </p:nvSpPr>
+        <p:spPr>
+          <a:xfrm>
+            <a:off x="2267712" y="3054096"/>
+            <a:ext cx="1179576" cy="169164"/>
+          </a:xfrm>
+          <a:prstGeom prst="line">
+            <a:avLst/>
+          </a:prstGeom>
+          <a:noFill/>
+          <a:ln w="12700">
+            <a:solidFill>
+              <a:schemeClr val="accent3"/>
+            </a:solidFill>
+            <a:prstDash val="solid"/>
+            <a:tailEnd type="triangle"/>
+          </a:ln>
+        </p:spPr>
+      </p:sp>
+      <p:sp>
+        <p:nvSpPr>
+          <p:cNvPr id="16" name="arrow-120"/>
+          <p:cNvSpPr/>
+          <p:nvPr/>
+        </p:nvSpPr>
+        <p:spPr>
+          <a:xfrm flipV="1">
+            <a:off x="2267712" y="3223260"/>
+            <a:ext cx="1179576" cy="169164"/>
+          </a:xfrm>
+          <a:prstGeom prst="line">
+            <a:avLst/>
+          </a:prstGeom>
+          <a:noFill/>
+          <a:ln w="12700">
+            <a:solidFill>
+              <a:schemeClr val="accent3"/>
+            </a:solidFill>
+            <a:prstDash val="solid"/>
+            <a:tailEnd type="triangle"/>
+          </a:ln>
+        </p:spPr>
+      </p:sp>
+      <p:sp>
+        <p:nvSpPr>
+          <p:cNvPr id="17" name="arrow-121"/>
+          <p:cNvSpPr/>
+          <p:nvPr/>
+        </p:nvSpPr>
+        <p:spPr>
+          <a:xfrm flipV="1">
+            <a:off x="2267712" y="3223260"/>
+            <a:ext cx="1179576" cy="507492"/>
+          </a:xfrm>
+          <a:prstGeom prst="line">
+            <a:avLst/>
+          </a:prstGeom>
+          <a:noFill/>
+          <a:ln w="12700">
+            <a:solidFill>
+              <a:schemeClr val="accent3"/>
+            </a:solidFill>
+            <a:prstDash val="solid"/>
+            <a:tailEnd type="triangle"/>
+          </a:ln>
+        </p:spPr>
+      </p:sp>
+      <p:sp>
+        <p:nvSpPr>
+          <p:cNvPr id="18" name="arrow-122"/>
+          <p:cNvSpPr/>
+          <p:nvPr/>
+        </p:nvSpPr>
+        <p:spPr>
+          <a:xfrm flipV="1">
+            <a:off x="2267712" y="3223260"/>
+            <a:ext cx="1179576" cy="845820"/>
+          </a:xfrm>
+          <a:prstGeom prst="line">
+            <a:avLst/>
+          </a:prstGeom>
+          <a:noFill/>
+          <a:ln w="12700">
+            <a:solidFill>
+              <a:schemeClr val="accent3"/>
+            </a:solidFill>
+            <a:prstDash val="solid"/>
+            <a:tailEnd type="triangle"/>
+          </a:ln>
+        </p:spPr>
+      </p:sp>
+      <p:sp>
+        <p:nvSpPr>
+          <p:cNvPr id="19" name="label-123"/>
           <p:cNvSpPr txBox="1"/>
           <p:nvPr/>
         </p:nvSpPr>
         <p:spPr>
           <a:xfrm>
-            <a:off x="6400800" y="1600200"/>
-            <a:ext cx="868680" cy="566928"/>
+            <a:off x="2514600" y="2034540"/>
+            <a:ext cx="2011680" cy="457200"/>
           </a:xfrm>
           <a:prstGeom prst="rect">
             <a:avLst/>
@@ -10010,46 +10393,60 @@
           <a:ln/>
         </p:spPr>
         <p:txBody>
-          <a:bodyPr wrap="square" lIns="0" tIns="0" rIns="0" bIns="0" rtlCol="0" anchor="ctr"/>
-          <a:lstStyle/>
-          <a:p>
-            <a:pPr algn="l" indent="0" marL="0">
-              <a:buNone/>
-            </a:pPr>
-            <a:r>
-              <a:rPr lang="en-US" sz="1100" dirty="0">
-                <a:solidFill>
-                  <a:schemeClr val="accent6"/>
-                </a:solidFill>
-              </a:rPr>
-              <a:t>被反驳</a:t>
-            </a:r>
-            <a:endParaRPr lang="en-US" sz="1100" dirty="0"/>
-          </a:p>
-        </p:txBody>
-      </p:sp>
-      <p:sp>
-        <p:nvSpPr>
-          <p:cNvPr id="8" name="box-112"/>
-          <p:cNvSpPr/>
-          <p:nvPr/>
-        </p:nvSpPr>
-        <p:spPr>
-          <a:xfrm>
-            <a:off x="4892040" y="2331720"/>
-            <a:ext cx="1417320" cy="566928"/>
+          <a:bodyPr wrap="square" lIns="0" tIns="0" rIns="0" bIns="0" rtlCol="0" anchor="t"/>
+          <a:lstStyle/>
+          <a:p>
+            <a:pPr algn="ctr" indent="0" marL="0">
+              <a:buNone/>
+            </a:pPr>
+            <a:r>
+              <a:rPr lang="en-US" sz="1000" dirty="0">
+                <a:solidFill>
+                  <a:schemeClr val="accent3"/>
+                </a:solidFill>
+              </a:rPr>
+              <a:t>即时溯源</a:t>
+            </a:r>
+            <a:endParaRPr lang="en-US" sz="1000" dirty="0"/>
+          </a:p>
+          <a:p>
+            <a:pPr algn="ctr" indent="0" marL="0">
+              <a:buNone/>
+            </a:pPr>
+            <a:r>
+              <a:rPr lang="en-US" sz="1000" dirty="0">
+                <a:solidFill>
+                  <a:schemeClr val="accent3"/>
+                </a:solidFill>
+              </a:rPr>
+              <a:t>（PubMed 试验关联）</a:t>
+            </a:r>
+            <a:endParaRPr lang="en-US" sz="1000" dirty="0"/>
+          </a:p>
+        </p:txBody>
+      </p:sp>
+      <p:sp>
+        <p:nvSpPr>
+          <p:cNvPr id="20" name="box-124"/>
+          <p:cNvSpPr/>
+          <p:nvPr/>
+        </p:nvSpPr>
+        <p:spPr>
+          <a:xfrm>
+            <a:off x="3474720" y="2903220"/>
+            <a:ext cx="1828800" cy="640080"/>
           </a:xfrm>
           <a:prstGeom prst="roundRect">
             <a:avLst>
-              <a:gd name="adj" fmla="val 12903"/>
+              <a:gd name="adj" fmla="val 11429"/>
             </a:avLst>
           </a:prstGeom>
           <a:solidFill>
-            <a:srgbClr val="1F5F99"/>
+            <a:schemeClr val="accent3"/>
           </a:solidFill>
           <a:ln w="6350">
             <a:solidFill>
-              <a:srgbClr val="1F5F99"/>
+              <a:schemeClr val="accent3"/>
             </a:solidFill>
           </a:ln>
         </p:spPr>
@@ -10061,187 +10458,41 @@
               <a:buNone/>
             </a:pPr>
             <a:r>
-              <a:rPr lang="en-US" sz="1500" b="1" dirty="0">
+              <a:rPr lang="en-US" sz="1150" b="1" dirty="0">
                 <a:solidFill>
                   <a:schemeClr val="bg1"/>
                 </a:solidFill>
               </a:rPr>
-              <a:t>已取代</a:t>
-            </a:r>
-            <a:endParaRPr lang="en-US" sz="1500" dirty="0"/>
-          </a:p>
-        </p:txBody>
-      </p:sp>
-      <p:sp>
-        <p:nvSpPr>
-          <p:cNvPr id="9" name="label-113"/>
-          <p:cNvSpPr txBox="1"/>
-          <p:nvPr/>
-        </p:nvSpPr>
-        <p:spPr>
-          <a:xfrm>
-            <a:off x="6400800" y="2331720"/>
-            <a:ext cx="868680" cy="566928"/>
-          </a:xfrm>
-          <a:prstGeom prst="rect">
-            <a:avLst/>
-          </a:prstGeom>
-          <a:noFill/>
-          <a:ln/>
-        </p:spPr>
-        <p:txBody>
-          <a:bodyPr wrap="square" lIns="0" tIns="0" rIns="0" bIns="0" rtlCol="0" anchor="ctr"/>
-          <a:lstStyle/>
-          <a:p>
-            <a:pPr algn="l" indent="0" marL="0">
-              <a:buNone/>
-            </a:pPr>
-            <a:r>
-              <a:rPr lang="en-US" sz="1100" dirty="0">
-                <a:solidFill>
-                  <a:schemeClr val="accent6"/>
-                </a:solidFill>
-              </a:rPr>
-              <a:t>被取代</a:t>
-            </a:r>
-            <a:endParaRPr lang="en-US" sz="1100" dirty="0"/>
-          </a:p>
-        </p:txBody>
-      </p:sp>
-      <p:sp>
-        <p:nvSpPr>
-          <p:cNvPr id="10" name="box-114"/>
-          <p:cNvSpPr/>
-          <p:nvPr/>
-        </p:nvSpPr>
-        <p:spPr>
-          <a:xfrm>
-            <a:off x="4892040" y="3063240"/>
-            <a:ext cx="1417320" cy="566928"/>
-          </a:xfrm>
-          <a:prstGeom prst="roundRect">
-            <a:avLst>
-              <a:gd name="adj" fmla="val 12903"/>
-            </a:avLst>
-          </a:prstGeom>
-          <a:solidFill>
-            <a:srgbClr val="B4233A"/>
-          </a:solidFill>
-          <a:ln w="6350">
-            <a:solidFill>
-              <a:srgbClr val="B4233A"/>
-            </a:solidFill>
-          </a:ln>
-        </p:spPr>
-        <p:txBody>
-          <a:bodyPr wrap="square" lIns="762" tIns="762" rIns="762" bIns="762" rtlCol="0" anchor="ctr"/>
-          <a:lstStyle/>
+              <a:t>monarchE 三期试验</a:t>
+            </a:r>
+            <a:endParaRPr lang="en-US" sz="1150" dirty="0"/>
+          </a:p>
           <a:p>
             <a:pPr algn="ctr" indent="0" marL="0">
               <a:buNone/>
             </a:pPr>
             <a:r>
-              <a:rPr lang="en-US" sz="1500" b="1" dirty="0">
+              <a:rPr lang="en-US" sz="1150" b="1" dirty="0">
                 <a:solidFill>
                   <a:schemeClr val="bg1"/>
                 </a:solidFill>
               </a:rPr>
-              <a:t>已撤销</a:t>
-            </a:r>
-            <a:endParaRPr lang="en-US" sz="1500" dirty="0"/>
-          </a:p>
-        </p:txBody>
-      </p:sp>
-      <p:sp>
-        <p:nvSpPr>
-          <p:cNvPr id="11" name="label-115"/>
-          <p:cNvSpPr txBox="1"/>
-          <p:nvPr/>
-        </p:nvSpPr>
-        <p:spPr>
-          <a:xfrm>
-            <a:off x="6400800" y="3063240"/>
-            <a:ext cx="868680" cy="566928"/>
-          </a:xfrm>
-          <a:prstGeom prst="rect">
-            <a:avLst/>
-          </a:prstGeom>
-          <a:noFill/>
-          <a:ln/>
-        </p:spPr>
-        <p:txBody>
-          <a:bodyPr wrap="square" lIns="0" tIns="0" rIns="0" bIns="0" rtlCol="0" anchor="ctr"/>
-          <a:lstStyle/>
-          <a:p>
-            <a:pPr algn="l" indent="0" marL="0">
-              <a:buNone/>
-            </a:pPr>
-            <a:r>
-              <a:rPr lang="en-US" sz="1100" dirty="0">
-                <a:solidFill>
-                  <a:schemeClr val="accent6"/>
-                </a:solidFill>
-              </a:rPr>
-              <a:t>撤市 / 撤稿</a:t>
-            </a:r>
-            <a:endParaRPr lang="en-US" sz="1100" dirty="0"/>
-          </a:p>
-        </p:txBody>
-      </p:sp>
-      <p:sp>
-        <p:nvSpPr>
-          <p:cNvPr id="12" name="box-116"/>
-          <p:cNvSpPr/>
-          <p:nvPr/>
-        </p:nvSpPr>
-        <p:spPr>
-          <a:xfrm>
-            <a:off x="548640" y="3931920"/>
-            <a:ext cx="1417320" cy="566928"/>
-          </a:xfrm>
-          <a:prstGeom prst="roundRect">
-            <a:avLst>
-              <a:gd name="adj" fmla="val 12903"/>
-            </a:avLst>
-          </a:prstGeom>
-          <a:solidFill>
-            <a:srgbClr val="A0522D"/>
-          </a:solidFill>
-          <a:ln w="6350">
-            <a:solidFill>
-              <a:srgbClr val="A0522D"/>
-            </a:solidFill>
-          </a:ln>
-        </p:spPr>
-        <p:txBody>
-          <a:bodyPr wrap="square" lIns="762" tIns="762" rIns="762" bIns="762" rtlCol="0" anchor="ctr"/>
-          <a:lstStyle/>
-          <a:p>
-            <a:pPr algn="ctr" indent="0" marL="0">
-              <a:buNone/>
-            </a:pPr>
-            <a:r>
-              <a:rPr lang="en-US" sz="1500" b="1" dirty="0">
-                <a:solidFill>
-                  <a:schemeClr val="bg1"/>
-                </a:solidFill>
-              </a:rPr>
-              <a:t>已隔离</a:t>
-            </a:r>
-            <a:endParaRPr lang="en-US" sz="1500" dirty="0"/>
-          </a:p>
-        </p:txBody>
-      </p:sp>
-      <p:sp>
-        <p:nvSpPr>
-          <p:cNvPr id="13" name="arrow-117"/>
-          <p:cNvSpPr/>
-          <p:nvPr/>
-        </p:nvSpPr>
-        <p:spPr>
-          <a:xfrm>
-            <a:off x="1965960" y="2615184"/>
-            <a:ext cx="822960" cy="0"/>
+              <a:t>NCT03155997</a:t>
+            </a:r>
+            <a:endParaRPr lang="en-US" sz="1150" dirty="0"/>
+          </a:p>
+        </p:txBody>
+      </p:sp>
+      <p:sp>
+        <p:nvSpPr>
+          <p:cNvPr id="21" name="arrow-125"/>
+          <p:cNvSpPr/>
+          <p:nvPr/>
+        </p:nvSpPr>
+        <p:spPr>
+          <a:xfrm>
+            <a:off x="5330952" y="3223260"/>
+            <a:ext cx="429768" cy="0"/>
           </a:xfrm>
           <a:prstGeom prst="line">
             <a:avLst/>
@@ -10258,14 +10509,72 @@
       </p:sp>
       <p:sp>
         <p:nvSpPr>
-          <p:cNvPr id="14" name="label-118"/>
+          <p:cNvPr id="22" name="box-126"/>
+          <p:cNvSpPr/>
+          <p:nvPr/>
+        </p:nvSpPr>
+        <p:spPr>
+          <a:xfrm>
+            <a:off x="5788152" y="2857500"/>
+            <a:ext cx="1161288" cy="731520"/>
+          </a:xfrm>
+          <a:prstGeom prst="roundRect">
+            <a:avLst>
+              <a:gd name="adj" fmla="val 10000"/>
+            </a:avLst>
+          </a:prstGeom>
+          <a:solidFill>
+            <a:srgbClr val="E3F3F1"/>
+          </a:solidFill>
+          <a:ln w="12700">
+            <a:solidFill>
+              <a:srgbClr val="0E8A7E"/>
+            </a:solidFill>
+          </a:ln>
+        </p:spPr>
+        <p:txBody>
+          <a:bodyPr wrap="square" lIns="762" tIns="762" rIns="762" bIns="762" rtlCol="0" anchor="ctr"/>
+          <a:lstStyle/>
+          <a:p>
+            <a:pPr algn="ctr" indent="0" marL="0">
+              <a:buNone/>
+            </a:pPr>
+            <a:r>
+              <a:rPr lang="en-US" sz="1300" b="1" dirty="0">
+                <a:solidFill>
+                  <a:schemeClr val="tx2"/>
+                </a:solidFill>
+              </a:rPr>
+              <a:t>计为 1 条</a:t>
+            </a:r>
+            <a:endParaRPr lang="en-US" sz="1300" dirty="0"/>
+          </a:p>
+          <a:p>
+            <a:pPr algn="ctr" indent="0" marL="0">
+              <a:buNone/>
+            </a:pPr>
+            <a:r>
+              <a:rPr lang="en-US" sz="1300" b="1" dirty="0">
+                <a:solidFill>
+                  <a:schemeClr val="tx2"/>
+                </a:solidFill>
+              </a:rPr>
+              <a:t>独立证据</a:t>
+            </a:r>
+            <a:endParaRPr lang="en-US" sz="1300" dirty="0"/>
+          </a:p>
+        </p:txBody>
+      </p:sp>
+      <p:sp>
+        <p:nvSpPr>
+          <p:cNvPr id="23" name="label-127"/>
           <p:cNvSpPr txBox="1"/>
           <p:nvPr/>
         </p:nvSpPr>
         <p:spPr>
           <a:xfrm>
-            <a:off x="1965960" y="1965960"/>
-            <a:ext cx="822960" cy="365760"/>
+            <a:off x="3291840" y="3680460"/>
+            <a:ext cx="3657600" cy="685800"/>
           </a:xfrm>
           <a:prstGeom prst="rect">
             <a:avLst/>
@@ -10274,19 +10583,19 @@
           <a:ln/>
         </p:spPr>
         <p:txBody>
-          <a:bodyPr wrap="square" lIns="0" tIns="0" rIns="0" bIns="0" rtlCol="0" anchor="b"/>
-          <a:lstStyle/>
-          <a:p>
-            <a:pPr algn="ctr" indent="0" marL="0">
+          <a:bodyPr wrap="square" lIns="0" tIns="0" rIns="0" bIns="0" rtlCol="0" anchor="t"/>
+          <a:lstStyle/>
+          <a:p>
+            <a:pPr algn="l" indent="0" marL="0">
               <a:buNone/>
             </a:pPr>
             <a:r>
               <a:rPr lang="en-US" sz="1100" dirty="0">
                 <a:solidFill>
-                  <a:schemeClr val="accent6"/>
-                </a:solidFill>
-              </a:rPr>
-              <a:t>通过门禁</a:t>
+                  <a:schemeClr val="tx1"/>
+                </a:solidFill>
+              </a:rPr>
+              <a:t>同一批受试者的主结果、亚组分析、长期随访等 6 篇论文，只能算 1 条证据；按篇数计会被放大 6 倍。</a:t>
             </a:r>
             <a:endParaRPr lang="en-US" sz="1100" dirty="0"/>
           </a:p>
@@ -10294,110 +10603,14 @@
       </p:sp>
       <p:sp>
         <p:nvSpPr>
-          <p:cNvPr id="15" name="arrow-119"/>
-          <p:cNvSpPr/>
-          <p:nvPr/>
-        </p:nvSpPr>
-        <p:spPr>
-          <a:xfrm flipV="1">
-            <a:off x="4206240" y="1883664"/>
-            <a:ext cx="685800" cy="731520"/>
-          </a:xfrm>
-          <a:prstGeom prst="line">
-            <a:avLst/>
-          </a:prstGeom>
-          <a:noFill/>
-          <a:ln w="19050">
-            <a:solidFill>
-              <a:schemeClr val="tx2"/>
-            </a:solidFill>
-            <a:prstDash val="solid"/>
-            <a:tailEnd type="triangle"/>
-          </a:ln>
-        </p:spPr>
-      </p:sp>
-      <p:sp>
-        <p:nvSpPr>
-          <p:cNvPr id="16" name="arrow-120"/>
-          <p:cNvSpPr/>
-          <p:nvPr/>
-        </p:nvSpPr>
-        <p:spPr>
-          <a:xfrm>
-            <a:off x="4206240" y="2615184"/>
-            <a:ext cx="685800" cy="0"/>
-          </a:xfrm>
-          <a:prstGeom prst="line">
-            <a:avLst/>
-          </a:prstGeom>
-          <a:noFill/>
-          <a:ln w="19050">
-            <a:solidFill>
-              <a:schemeClr val="tx2"/>
-            </a:solidFill>
-            <a:prstDash val="solid"/>
-            <a:tailEnd type="triangle"/>
-          </a:ln>
-        </p:spPr>
-      </p:sp>
-      <p:sp>
-        <p:nvSpPr>
-          <p:cNvPr id="17" name="arrow-121"/>
-          <p:cNvSpPr/>
-          <p:nvPr/>
-        </p:nvSpPr>
-        <p:spPr>
-          <a:xfrm>
-            <a:off x="4206240" y="2615184"/>
-            <a:ext cx="685800" cy="731520"/>
-          </a:xfrm>
-          <a:prstGeom prst="line">
-            <a:avLst/>
-          </a:prstGeom>
-          <a:noFill/>
-          <a:ln w="19050">
-            <a:solidFill>
-              <a:schemeClr val="tx2"/>
-            </a:solidFill>
-            <a:prstDash val="solid"/>
-            <a:tailEnd type="triangle"/>
-          </a:ln>
-        </p:spPr>
-      </p:sp>
-      <p:sp>
-        <p:nvSpPr>
-          <p:cNvPr id="18" name="arrow-122"/>
-          <p:cNvSpPr/>
-          <p:nvPr/>
-        </p:nvSpPr>
-        <p:spPr>
-          <a:xfrm>
-            <a:off x="1257300" y="2898648"/>
-            <a:ext cx="0" cy="1033272"/>
-          </a:xfrm>
-          <a:prstGeom prst="line">
-            <a:avLst/>
-          </a:prstGeom>
-          <a:noFill/>
-          <a:ln w="19050">
-            <a:solidFill>
-              <a:schemeClr val="tx2"/>
-            </a:solidFill>
-            <a:prstDash val="solid"/>
-            <a:tailEnd type="triangle"/>
-          </a:ln>
-        </p:spPr>
-      </p:sp>
-      <p:sp>
-        <p:nvSpPr>
-          <p:cNvPr id="19" name="label-123"/>
+          <p:cNvPr id="24" name="label-128"/>
           <p:cNvSpPr txBox="1"/>
           <p:nvPr/>
         </p:nvSpPr>
         <p:spPr>
           <a:xfrm>
-            <a:off x="1348740" y="3200400"/>
-            <a:ext cx="1188720" cy="457200"/>
+            <a:off x="822960" y="4901184"/>
+            <a:ext cx="6126480" cy="274320"/>
           </a:xfrm>
           <a:prstGeom prst="rect">
             <a:avLst/>
@@ -10406,58 +10619,250 @@
           <a:ln/>
         </p:spPr>
         <p:txBody>
+          <a:bodyPr wrap="square" lIns="0" tIns="0" rIns="0" bIns="0" rtlCol="0" anchor="t"/>
+          <a:lstStyle/>
+          <a:p>
+            <a:pPr algn="l" indent="0" marL="0">
+              <a:buNone/>
+            </a:pPr>
+            <a:r>
+              <a:rPr lang="en-US" sz="1200" b="1" dirty="0">
+                <a:solidFill>
+                  <a:schemeClr val="tx2"/>
+                </a:solidFill>
+              </a:rPr>
+              <a:t>定级规则（设计）</a:t>
+            </a:r>
+            <a:endParaRPr lang="en-US" sz="1200" dirty="0"/>
+          </a:p>
+        </p:txBody>
+      </p:sp>
+      <p:sp>
+        <p:nvSpPr>
+          <p:cNvPr id="25" name="box-129"/>
+          <p:cNvSpPr/>
+          <p:nvPr/>
+        </p:nvSpPr>
+        <p:spPr>
+          <a:xfrm>
+            <a:off x="822960" y="5202936"/>
+            <a:ext cx="1950720" cy="658368"/>
+          </a:xfrm>
+          <a:prstGeom prst="roundRect">
+            <a:avLst>
+              <a:gd name="adj" fmla="val 11111"/>
+            </a:avLst>
+          </a:prstGeom>
+          <a:solidFill>
+            <a:schemeClr val="bg1"/>
+          </a:solidFill>
+          <a:ln w="12700">
+            <a:solidFill>
+              <a:schemeClr val="accent1"/>
+            </a:solidFill>
+          </a:ln>
+        </p:spPr>
+        <p:txBody>
+          <a:bodyPr wrap="square" lIns="762" tIns="762" rIns="762" bIns="762" rtlCol="0" anchor="ctr"/>
+          <a:lstStyle/>
+          <a:p>
+            <a:pPr algn="ctr" indent="0" marL="0">
+              <a:buNone/>
+            </a:pPr>
+            <a:r>
+              <a:rPr lang="en-US" sz="1100" dirty="0">
+                <a:solidFill>
+                  <a:schemeClr val="tx1"/>
+                </a:solidFill>
+              </a:rPr>
+              <a:t>≥ 2 类独立证据线相互印证</a:t>
+            </a:r>
+            <a:endParaRPr lang="en-US" sz="1100" dirty="0"/>
+          </a:p>
+          <a:p>
+            <a:pPr algn="ctr" indent="0" marL="0">
+              <a:buNone/>
+            </a:pPr>
+            <a:r>
+              <a:rPr lang="en-US" sz="1100" dirty="0">
+                <a:solidFill>
+                  <a:schemeClr val="tx1"/>
+                </a:solidFill>
+              </a:rPr>
+              <a:t>→ 较强</a:t>
+            </a:r>
+            <a:endParaRPr lang="en-US" sz="1100" dirty="0"/>
+          </a:p>
+        </p:txBody>
+      </p:sp>
+      <p:sp>
+        <p:nvSpPr>
+          <p:cNvPr id="26" name="box-130"/>
+          <p:cNvSpPr/>
+          <p:nvPr/>
+        </p:nvSpPr>
+        <p:spPr>
+          <a:xfrm>
+            <a:off x="2910840" y="5202936"/>
+            <a:ext cx="1950720" cy="658368"/>
+          </a:xfrm>
+          <a:prstGeom prst="roundRect">
+            <a:avLst>
+              <a:gd name="adj" fmla="val 11111"/>
+            </a:avLst>
+          </a:prstGeom>
+          <a:solidFill>
+            <a:schemeClr val="bg1"/>
+          </a:solidFill>
+          <a:ln w="12700">
+            <a:solidFill>
+              <a:schemeClr val="accent3"/>
+            </a:solidFill>
+          </a:ln>
+        </p:spPr>
+        <p:txBody>
+          <a:bodyPr wrap="square" lIns="762" tIns="762" rIns="762" bIns="762" rtlCol="0" anchor="ctr"/>
+          <a:lstStyle/>
+          <a:p>
+            <a:pPr algn="ctr" indent="0" marL="0">
+              <a:buNone/>
+            </a:pPr>
+            <a:r>
+              <a:rPr lang="en-US" sz="1100" dirty="0">
+                <a:solidFill>
+                  <a:schemeClr val="tx1"/>
+                </a:solidFill>
+              </a:rPr>
+              <a:t>仅 1 条独立证据线</a:t>
+            </a:r>
+            <a:endParaRPr lang="en-US" sz="1100" dirty="0"/>
+          </a:p>
+          <a:p>
+            <a:pPr algn="ctr" indent="0" marL="0">
+              <a:buNone/>
+            </a:pPr>
+            <a:r>
+              <a:rPr lang="en-US" sz="1100" dirty="0">
+                <a:solidFill>
+                  <a:schemeClr val="tx1"/>
+                </a:solidFill>
+              </a:rPr>
+              <a:t>→ 待印证</a:t>
+            </a:r>
+            <a:endParaRPr lang="en-US" sz="1100" dirty="0"/>
+          </a:p>
+        </p:txBody>
+      </p:sp>
+      <p:sp>
+        <p:nvSpPr>
+          <p:cNvPr id="27" name="box-131"/>
+          <p:cNvSpPr/>
+          <p:nvPr/>
+        </p:nvSpPr>
+        <p:spPr>
+          <a:xfrm>
+            <a:off x="4998720" y="5202936"/>
+            <a:ext cx="1950720" cy="658368"/>
+          </a:xfrm>
+          <a:prstGeom prst="roundRect">
+            <a:avLst>
+              <a:gd name="adj" fmla="val 11111"/>
+            </a:avLst>
+          </a:prstGeom>
+          <a:solidFill>
+            <a:schemeClr val="bg1"/>
+          </a:solidFill>
+          <a:ln w="12700">
+            <a:solidFill>
+              <a:srgbClr val="B4233A"/>
+            </a:solidFill>
+          </a:ln>
+        </p:spPr>
+        <p:txBody>
+          <a:bodyPr wrap="square" lIns="762" tIns="762" rIns="762" bIns="762" rtlCol="0" anchor="ctr"/>
+          <a:lstStyle/>
+          <a:p>
+            <a:pPr algn="ctr" indent="0" marL="0">
+              <a:buNone/>
+            </a:pPr>
+            <a:r>
+              <a:rPr lang="en-US" sz="1100" dirty="0">
+                <a:solidFill>
+                  <a:schemeClr val="tx1"/>
+                </a:solidFill>
+              </a:rPr>
+              <a:t>存在独立的反向证据线</a:t>
+            </a:r>
+            <a:endParaRPr lang="en-US" sz="1100" dirty="0"/>
+          </a:p>
+          <a:p>
+            <a:pPr algn="ctr" indent="0" marL="0">
+              <a:buNone/>
+            </a:pPr>
+            <a:r>
+              <a:rPr lang="en-US" sz="1100" dirty="0">
+                <a:solidFill>
+                  <a:schemeClr val="tx1"/>
+                </a:solidFill>
+              </a:rPr>
+              <a:t>→ 有争议</a:t>
+            </a:r>
+            <a:endParaRPr lang="en-US" sz="1100" dirty="0"/>
+          </a:p>
+        </p:txBody>
+      </p:sp>
+      <p:sp>
+        <p:nvSpPr>
+          <p:cNvPr id="28" name="badge-132"/>
+          <p:cNvSpPr/>
+          <p:nvPr/>
+        </p:nvSpPr>
+        <p:spPr>
+          <a:xfrm>
+            <a:off x="7543800" y="1691640"/>
+            <a:ext cx="384048" cy="384048"/>
+          </a:xfrm>
+          <a:prstGeom prst="ellipse">
+            <a:avLst/>
+          </a:prstGeom>
+          <a:solidFill>
+            <a:schemeClr val="accent1"/>
+          </a:solidFill>
+          <a:ln w="6350">
+            <a:solidFill>
+              <a:schemeClr val="accent1"/>
+            </a:solidFill>
+          </a:ln>
+        </p:spPr>
+        <p:txBody>
           <a:bodyPr wrap="square" lIns="0" tIns="0" rIns="0" bIns="0" rtlCol="0" anchor="ctr"/>
           <a:lstStyle/>
           <a:p>
-            <a:pPr algn="l" indent="0" marL="0">
-              <a:buNone/>
-            </a:pPr>
-            <a:r>
-              <a:rPr lang="en-US" sz="1100" dirty="0">
-                <a:solidFill>
-                  <a:schemeClr val="accent6"/>
-                </a:solidFill>
-              </a:rPr>
-              <a:t>未通过门禁</a:t>
-            </a:r>
-            <a:endParaRPr lang="en-US" sz="1100" dirty="0"/>
-          </a:p>
-        </p:txBody>
-      </p:sp>
-      <p:sp>
-        <p:nvSpPr>
-          <p:cNvPr id="20" name="arrow-124"/>
-          <p:cNvSpPr/>
-          <p:nvPr/>
-        </p:nvSpPr>
-        <p:spPr>
-          <a:xfrm flipV="1">
-            <a:off x="1965960" y="3630168"/>
-            <a:ext cx="2926080" cy="585216"/>
-          </a:xfrm>
-          <a:prstGeom prst="line">
-            <a:avLst/>
-          </a:prstGeom>
-          <a:noFill/>
-          <a:ln w="19050">
-            <a:solidFill>
-              <a:schemeClr val="tx2"/>
-            </a:solidFill>
-            <a:prstDash val="dash"/>
-            <a:tailEnd type="triangle"/>
-          </a:ln>
-        </p:spPr>
-      </p:sp>
-      <p:sp>
-        <p:nvSpPr>
-          <p:cNvPr id="21" name="label-125"/>
+            <a:pPr algn="ctr" indent="0" marL="0">
+              <a:buNone/>
+            </a:pPr>
+            <a:r>
+              <a:rPr lang="en-US" sz="1500" b="1" dirty="0">
+                <a:solidFill>
+                  <a:schemeClr val="bg1"/>
+                </a:solidFill>
+              </a:rPr>
+              <a:t>1</a:t>
+            </a:r>
+            <a:endParaRPr lang="en-US" sz="1500" dirty="0"/>
+          </a:p>
+        </p:txBody>
+      </p:sp>
+      <p:sp>
+        <p:nvSpPr>
+          <p:cNvPr id="29" name="label-133"/>
           <p:cNvSpPr txBox="1"/>
           <p:nvPr/>
         </p:nvSpPr>
         <p:spPr>
           <a:xfrm>
-            <a:off x="2606040" y="4069080"/>
-            <a:ext cx="2011680" cy="274320"/>
+            <a:off x="8074152" y="1673352"/>
+            <a:ext cx="3568903" cy="411480"/>
           </a:xfrm>
           <a:prstGeom prst="rect">
             <a:avLst/>
@@ -10466,38 +10871,448 @@
           <a:ln/>
         </p:spPr>
         <p:txBody>
+          <a:bodyPr wrap="square" lIns="0" tIns="0" rIns="0" bIns="0" rtlCol="0" anchor="ctr"/>
+          <a:lstStyle/>
+          <a:p>
+            <a:pPr algn="l" indent="0" marL="0">
+              <a:buNone/>
+            </a:pPr>
+            <a:r>
+              <a:rPr lang="en-US" sz="1600" b="1" dirty="0">
+                <a:solidFill>
+                  <a:schemeClr val="tx2"/>
+                </a:solidFill>
+              </a:rPr>
+              <a:t>即时溯源</a:t>
+            </a:r>
+            <a:endParaRPr lang="en-US" sz="1600" dirty="0"/>
+          </a:p>
+        </p:txBody>
+      </p:sp>
+      <p:sp>
+        <p:nvSpPr>
+          <p:cNvPr id="30" name="label-134"/>
+          <p:cNvSpPr txBox="1"/>
+          <p:nvPr/>
+        </p:nvSpPr>
+        <p:spPr>
+          <a:xfrm>
+            <a:off x="8074152" y="2103120"/>
+            <a:ext cx="3568903" cy="1005840"/>
+          </a:xfrm>
+          <a:prstGeom prst="rect">
+            <a:avLst/>
+          </a:prstGeom>
+          <a:noFill/>
+          <a:ln/>
+        </p:spPr>
+        <p:txBody>
           <a:bodyPr wrap="square" lIns="0" tIns="0" rIns="0" bIns="0" rtlCol="0" anchor="t"/>
           <a:lstStyle/>
           <a:p>
+            <a:pPr algn="l" indent="0" marL="0">
+              <a:buNone/>
+            </a:pPr>
+            <a:r>
+              <a:rPr lang="en-US" sz="1250" dirty="0">
+                <a:solidFill>
+                  <a:schemeClr val="accent6"/>
+                </a:solidFill>
+              </a:rPr>
+              <a:t>每条证据追到上游：哪个试验、数据集、GWAS 研究或原始论文。全部来自公开数据库，现查现算——无需自建证据库，无需人工标注。</a:t>
+            </a:r>
+            <a:endParaRPr lang="en-US" sz="1250" dirty="0"/>
+          </a:p>
+        </p:txBody>
+      </p:sp>
+      <p:sp>
+        <p:nvSpPr>
+          <p:cNvPr id="31" name="badge-135"/>
+          <p:cNvSpPr/>
+          <p:nvPr/>
+        </p:nvSpPr>
+        <p:spPr>
+          <a:xfrm>
+            <a:off x="7543800" y="3172968"/>
+            <a:ext cx="384048" cy="384048"/>
+          </a:xfrm>
+          <a:prstGeom prst="ellipse">
+            <a:avLst/>
+          </a:prstGeom>
+          <a:solidFill>
+            <a:schemeClr val="accent1"/>
+          </a:solidFill>
+          <a:ln w="6350">
+            <a:solidFill>
+              <a:schemeClr val="accent1"/>
+            </a:solidFill>
+          </a:ln>
+        </p:spPr>
+        <p:txBody>
+          <a:bodyPr wrap="square" lIns="0" tIns="0" rIns="0" bIns="0" rtlCol="0" anchor="ctr"/>
+          <a:lstStyle/>
+          <a:p>
             <a:pPr algn="ctr" indent="0" marL="0">
               <a:buNone/>
             </a:pPr>
             <a:r>
-              <a:rPr lang="en-US" sz="1050" dirty="0">
+              <a:rPr lang="en-US" sz="1500" b="1" dirty="0">
+                <a:solidFill>
+                  <a:schemeClr val="bg1"/>
+                </a:solidFill>
+              </a:rPr>
+              <a:t>2</a:t>
+            </a:r>
+            <a:endParaRPr lang="en-US" sz="1500" dirty="0"/>
+          </a:p>
+        </p:txBody>
+      </p:sp>
+      <p:sp>
+        <p:nvSpPr>
+          <p:cNvPr id="32" name="label-136"/>
+          <p:cNvSpPr txBox="1"/>
+          <p:nvPr/>
+        </p:nvSpPr>
+        <p:spPr>
+          <a:xfrm>
+            <a:off x="8074152" y="3154680"/>
+            <a:ext cx="3568903" cy="411480"/>
+          </a:xfrm>
+          <a:prstGeom prst="rect">
+            <a:avLst/>
+          </a:prstGeom>
+          <a:noFill/>
+          <a:ln/>
+        </p:spPr>
+        <p:txBody>
+          <a:bodyPr wrap="square" lIns="0" tIns="0" rIns="0" bIns="0" rtlCol="0" anchor="ctr"/>
+          <a:lstStyle/>
+          <a:p>
+            <a:pPr algn="l" indent="0" marL="0">
+              <a:buNone/>
+            </a:pPr>
+            <a:r>
+              <a:rPr lang="en-US" sz="1600" b="1" dirty="0">
+                <a:solidFill>
+                  <a:schemeClr val="tx2"/>
+                </a:solidFill>
+              </a:rPr>
+              <a:t>同源合并</a:t>
+            </a:r>
+            <a:endParaRPr lang="en-US" sz="1600" dirty="0"/>
+          </a:p>
+        </p:txBody>
+      </p:sp>
+      <p:sp>
+        <p:nvSpPr>
+          <p:cNvPr id="33" name="label-137"/>
+          <p:cNvSpPr txBox="1"/>
+          <p:nvPr/>
+        </p:nvSpPr>
+        <p:spPr>
+          <a:xfrm>
+            <a:off x="8074152" y="3584448"/>
+            <a:ext cx="3568903" cy="1005840"/>
+          </a:xfrm>
+          <a:prstGeom prst="rect">
+            <a:avLst/>
+          </a:prstGeom>
+          <a:noFill/>
+          <a:ln/>
+        </p:spPr>
+        <p:txBody>
+          <a:bodyPr wrap="square" lIns="0" tIns="0" rIns="0" bIns="0" rtlCol="0" anchor="t"/>
+          <a:lstStyle/>
+          <a:p>
+            <a:pPr algn="l" indent="0" marL="0">
+              <a:buNone/>
+            </a:pPr>
+            <a:r>
+              <a:rPr lang="en-US" sz="1250" dirty="0">
                 <a:solidFill>
                   <a:schemeClr val="accent6"/>
                 </a:solidFill>
               </a:rPr>
-              <a:t>确认无效</a:t>
-            </a:r>
-            <a:endParaRPr lang="en-US" sz="1050" dirty="0"/>
-          </a:p>
-        </p:txBody>
-      </p:sp>
-      <p:sp>
-        <p:nvSpPr>
-          <p:cNvPr id="22" name="card-126"/>
-          <p:cNvSpPr/>
-          <p:nvPr/>
-        </p:nvSpPr>
-        <p:spPr>
-          <a:xfrm>
-            <a:off x="548640" y="4590288"/>
-            <a:ext cx="6400800" cy="1737360"/>
+              <a:t>同一试验 / 数据集衍生的多篇论文只计 1 条；预印本与正式版、荟萃分析与其纳入研究同理。</a:t>
+            </a:r>
+            <a:endParaRPr lang="en-US" sz="1250" dirty="0"/>
+          </a:p>
+        </p:txBody>
+      </p:sp>
+      <p:sp>
+        <p:nvSpPr>
+          <p:cNvPr id="34" name="badge-138"/>
+          <p:cNvSpPr/>
+          <p:nvPr/>
+        </p:nvSpPr>
+        <p:spPr>
+          <a:xfrm>
+            <a:off x="7543800" y="4654296"/>
+            <a:ext cx="384048" cy="384048"/>
+          </a:xfrm>
+          <a:prstGeom prst="ellipse">
+            <a:avLst/>
+          </a:prstGeom>
+          <a:solidFill>
+            <a:schemeClr val="accent1"/>
+          </a:solidFill>
+          <a:ln w="6350">
+            <a:solidFill>
+              <a:schemeClr val="accent1"/>
+            </a:solidFill>
+          </a:ln>
+        </p:spPr>
+        <p:txBody>
+          <a:bodyPr wrap="square" lIns="0" tIns="0" rIns="0" bIns="0" rtlCol="0" anchor="ctr"/>
+          <a:lstStyle/>
+          <a:p>
+            <a:pPr algn="ctr" indent="0" marL="0">
+              <a:buNone/>
+            </a:pPr>
+            <a:r>
+              <a:rPr lang="en-US" sz="1500" b="1" dirty="0">
+                <a:solidFill>
+                  <a:schemeClr val="bg1"/>
+                </a:solidFill>
+              </a:rPr>
+              <a:t>3</a:t>
+            </a:r>
+            <a:endParaRPr lang="en-US" sz="1500" dirty="0"/>
+          </a:p>
+        </p:txBody>
+      </p:sp>
+      <p:sp>
+        <p:nvSpPr>
+          <p:cNvPr id="35" name="label-139"/>
+          <p:cNvSpPr txBox="1"/>
+          <p:nvPr/>
+        </p:nvSpPr>
+        <p:spPr>
+          <a:xfrm>
+            <a:off x="8074152" y="4636008"/>
+            <a:ext cx="3568903" cy="411480"/>
+          </a:xfrm>
+          <a:prstGeom prst="rect">
+            <a:avLst/>
+          </a:prstGeom>
+          <a:noFill/>
+          <a:ln/>
+        </p:spPr>
+        <p:txBody>
+          <a:bodyPr wrap="square" lIns="0" tIns="0" rIns="0" bIns="0" rtlCol="0" anchor="ctr"/>
+          <a:lstStyle/>
+          <a:p>
+            <a:pPr algn="l" indent="0" marL="0">
+              <a:buNone/>
+            </a:pPr>
+            <a:r>
+              <a:rPr lang="en-US" sz="1600" b="1" dirty="0">
+                <a:solidFill>
+                  <a:schemeClr val="tx2"/>
+                </a:solidFill>
+              </a:rPr>
+              <a:t>按独立证据线定级</a:t>
+            </a:r>
+            <a:endParaRPr lang="en-US" sz="1600" dirty="0"/>
+          </a:p>
+        </p:txBody>
+      </p:sp>
+      <p:sp>
+        <p:nvSpPr>
+          <p:cNvPr id="36" name="label-140"/>
+          <p:cNvSpPr txBox="1"/>
+          <p:nvPr/>
+        </p:nvSpPr>
+        <p:spPr>
+          <a:xfrm>
+            <a:off x="8074152" y="5065776"/>
+            <a:ext cx="3568903" cy="1005840"/>
+          </a:xfrm>
+          <a:prstGeom prst="rect">
+            <a:avLst/>
+          </a:prstGeom>
+          <a:noFill/>
+          <a:ln/>
+        </p:spPr>
+        <p:txBody>
+          <a:bodyPr wrap="square" lIns="0" tIns="0" rIns="0" bIns="0" rtlCol="0" anchor="t"/>
+          <a:lstStyle/>
+          <a:p>
+            <a:pPr algn="l" indent="0" marL="0">
+              <a:buNone/>
+            </a:pPr>
+            <a:r>
+              <a:rPr lang="en-US" sz="1250" dirty="0">
+                <a:solidFill>
+                  <a:schemeClr val="accent6"/>
+                </a:solidFill>
+              </a:rPr>
+              <a:t>看遗传学、动物模型、临床试验等几类独立证据是否相互印证；下结论前先找反证（失败试验、阴性结果）。</a:t>
+            </a:r>
+            <a:endParaRPr lang="en-US" sz="1250" dirty="0"/>
+          </a:p>
+        </p:txBody>
+      </p:sp>
+      <p:sp>
+        <p:nvSpPr>
+          <p:cNvPr id="25" name="Slide Number Placeholder 0"/>
+          <p:cNvSpPr>
+            <a:spLocks noGrp="1"/>
+          </p:cNvSpPr>
+          <p:nvPr>
+            <p:ph type="sldNum" sz="quarter" idx="4294967295"/>
+          </p:nvPr>
+        </p:nvSpPr>
+        <p:spPr>
+          <a:xfrm>
+            <a:off x="11094415" y="6446520"/>
+            <a:ext cx="548640" cy="274320"/>
+          </a:xfrm>
+          <a:prstGeom prst="rect">
+            <a:avLst/>
+          </a:prstGeom>
+          <a:extLst>
+            <a:ext uri="{C572A759-6A51-4108-AA02-DFA0A04FC94B}">
+              <ma14:wrappingTextBoxFlag xmlns:ma14="http://schemas.microsoft.com/office/mac/drawingml/2011/main" val="0"/>
+            </a:ext>
+          </a:extLst>
+        </p:spPr>
+        <p:txBody>
+          <a:bodyPr/>
+          <a:lstStyle>
+            <a:lvl1pPr>
+              <a:defRPr sz="1000">
+                <a:solidFill>
+                  <a:schemeClr val="accent6"/>
+                </a:solidFill>
+              </a:defRPr>
+            </a:lvl1pPr>
+          </a:lstStyle>
+          <a:p>
+            <a:pPr algn="r"/>
+            <a:fld id="{F7021451-1387-4CA6-816F-3879F97B5CBC}" type="slidenum">
+              <a:rPr b="0" lang="en-US"/>
+              <a:t>6</a:t>
+            </a:fld>
+            <a:endParaRPr lang="en-US"/>
+          </a:p>
+        </p:txBody>
+      </p:sp>
+    </p:spTree>
+  </p:cSld>
+  <p:clrMapOvr>
+    <a:masterClrMapping/>
+  </p:clrMapOvr>
+</p:sld>
+</file>
+
+<file path=ppt/slides/slide7.xml><?xml version="1.0" encoding="utf-8"?>
+<p:sld xmlns:a="http://schemas.openxmlformats.org/drawingml/2006/main" xmlns:r="http://schemas.openxmlformats.org/officeDocument/2006/relationships" xmlns:p="http://schemas.openxmlformats.org/presentationml/2006/main">
+  <p:cSld name="Slide 7">
+    <p:spTree>
+      <p:nvGrpSpPr>
+        <p:cNvPr id="1" name=""/>
+        <p:cNvGrpSpPr/>
+        <p:nvPr/>
+      </p:nvGrpSpPr>
+      <p:grpSpPr>
+        <a:xfrm>
+          <a:off x="0" y="0"/>
+          <a:ext cx="0" cy="0"/>
+          <a:chOff x="0" y="0"/>
+          <a:chExt cx="0" cy="0"/>
+        </a:xfrm>
+      </p:grpSpPr>
+      <p:sp>
+        <p:nvSpPr>
+          <p:cNvPr id="2" name="Text 0"/>
+          <p:cNvSpPr/>
+          <p:nvPr>
+            <p:ph idx="100" type="title" hasCustomPrompt="1"/>
+          </p:nvPr>
+        </p:nvSpPr>
+        <p:spPr>
+          <a:xfrm>
+            <a:off x="548640" y="320040"/>
+            <a:ext cx="11094415" cy="640080"/>
+          </a:xfrm>
+          <a:prstGeom prst="rect">
+            <a:avLst/>
+          </a:prstGeom>
+          <a:noFill/>
+          <a:ln/>
+        </p:spPr>
+        <p:txBody>
+          <a:bodyPr wrap="square" lIns="0" tIns="0" rIns="0" bIns="0" rtlCol="0" anchor="ctr"/>
+          <a:lstStyle/>
+          <a:p>
+            <a:pPr algn="l" indent="0" marL="0">
+              <a:buNone/>
+            </a:pPr>
+            <a:r>
+              <a:rPr lang="en-US" sz="2800" b="1" dirty="0">
+                <a:solidFill>
+                  <a:schemeClr val="tx2"/>
+                </a:solidFill>
+              </a:rPr>
+              <a:t>实时状态核验：依据被推翻，结论当场降级</a:t>
+            </a:r>
+            <a:endParaRPr lang="en-US" sz="2800" dirty="0"/>
+          </a:p>
+        </p:txBody>
+      </p:sp>
+      <p:sp>
+        <p:nvSpPr>
+          <p:cNvPr id="3" name="Text 0"/>
+          <p:cNvSpPr/>
+          <p:nvPr>
+            <p:ph idx="101" type="body" hasCustomPrompt="1"/>
+          </p:nvPr>
+        </p:nvSpPr>
+        <p:spPr>
+          <a:xfrm>
+            <a:off x="548640" y="960120"/>
+            <a:ext cx="11094415" cy="411480"/>
+          </a:xfrm>
+          <a:prstGeom prst="rect">
+            <a:avLst/>
+          </a:prstGeom>
+          <a:noFill/>
+          <a:ln/>
+        </p:spPr>
+        <p:txBody>
+          <a:bodyPr wrap="square" lIns="0" tIns="0" rIns="0" bIns="0" rtlCol="0" anchor="ctr"/>
+          <a:lstStyle/>
+          <a:p>
+            <a:pPr algn="l" indent="0" marL="0">
+              <a:buNone/>
+            </a:pPr>
+            <a:r>
+              <a:rPr lang="en-US" sz="1500" dirty="0">
+                <a:solidFill>
+                  <a:schemeClr val="accent6"/>
+                </a:solidFill>
+              </a:rPr>
+              <a:t>回答时核验每个来源的当前状态（撤稿、试验终止、药品撤市），只降级真正依赖它的结论。</a:t>
+            </a:r>
+            <a:endParaRPr lang="en-US" sz="1500" dirty="0"/>
+          </a:p>
+        </p:txBody>
+      </p:sp>
+      <p:sp>
+        <p:nvSpPr>
+          <p:cNvPr id="4" name="card-141"/>
+          <p:cNvSpPr/>
+          <p:nvPr/>
+        </p:nvSpPr>
+        <p:spPr>
+          <a:xfrm>
+            <a:off x="548640" y="1600200"/>
+            <a:ext cx="5410048" cy="4343400"/>
           </a:xfrm>
           <a:prstGeom prst="roundRect">
             <a:avLst>
-              <a:gd name="adj" fmla="val 5263"/>
+              <a:gd name="adj" fmla="val 2105"/>
             </a:avLst>
           </a:prstGeom>
           <a:solidFill>
@@ -10513,14 +11328,14 @@
       </p:sp>
       <p:sp>
         <p:nvSpPr>
-          <p:cNvPr id="23" name="label-127"/>
+          <p:cNvPr id="5" name="label-142"/>
           <p:cNvSpPr txBox="1"/>
           <p:nvPr/>
         </p:nvSpPr>
         <p:spPr>
           <a:xfrm>
-            <a:off x="777240" y="4681728"/>
-            <a:ext cx="4206240" cy="292608"/>
+            <a:off x="822960" y="1755648"/>
+            <a:ext cx="4861408" cy="329184"/>
           </a:xfrm>
           <a:prstGeom prst="rect">
             <a:avLst/>
@@ -10529,7 +11344,7 @@
           <a:ln/>
         </p:spPr>
         <p:txBody>
-          <a:bodyPr wrap="square" lIns="0" tIns="0" rIns="0" bIns="0" rtlCol="0" anchor="ctr"/>
+          <a:bodyPr wrap="square" lIns="0" tIns="0" rIns="0" bIns="0" rtlCol="0" anchor="t"/>
           <a:lstStyle/>
           <a:p>
             <a:pPr algn="l" indent="0" marL="0">
@@ -10549,14 +11364,14 @@
       </p:sp>
       <p:sp>
         <p:nvSpPr>
-          <p:cNvPr id="24" name="label-128"/>
+          <p:cNvPr id="6" name="label-143"/>
           <p:cNvSpPr txBox="1"/>
           <p:nvPr/>
         </p:nvSpPr>
         <p:spPr>
           <a:xfrm>
-            <a:off x="4754880" y="4681728"/>
-            <a:ext cx="1965960" cy="292608"/>
+            <a:off x="822960" y="2103120"/>
+            <a:ext cx="4861408" cy="274320"/>
           </a:xfrm>
           <a:prstGeom prst="rect">
             <a:avLst/>
@@ -10565,27 +11380,27 @@
           <a:ln/>
         </p:spPr>
         <p:txBody>
-          <a:bodyPr wrap="square" lIns="0" tIns="0" rIns="0" bIns="0" rtlCol="0" anchor="ctr"/>
-          <a:lstStyle/>
-          <a:p>
-            <a:pPr algn="r" indent="0" marL="0">
-              <a:buNone/>
-            </a:pPr>
-            <a:r>
-              <a:rPr lang="en-US" sz="1050" dirty="0">
-                <a:solidFill>
-                  <a:schemeClr val="accent6"/>
-                </a:solidFill>
-              </a:rPr>
-              <a:t>已写成自动化测试</a:t>
-            </a:r>
-            <a:endParaRPr lang="en-US" sz="1050" dirty="0"/>
+          <a:bodyPr wrap="square" lIns="0" tIns="0" rIns="0" bIns="0" rtlCol="0" anchor="t"/>
+          <a:lstStyle/>
+          <a:p>
+            <a:pPr algn="l" indent="0" marL="0">
+              <a:buNone/>
+            </a:pPr>
+            <a:r>
+              <a:rPr lang="en-US" sz="1150" b="1" dirty="0">
+                <a:solidFill>
+                  <a:schemeClr val="accent3"/>
+                </a:solidFill>
+              </a:rPr>
+              <a:t>看点：只降级依赖失效来源的结论</a:t>
+            </a:r>
+            <a:endParaRPr lang="en-US" sz="1150" dirty="0"/>
           </a:p>
         </p:txBody>
       </p:sp>
       <p:graphicFrame>
         <p:nvGraphicFramePr>
-          <p:cNvPr id="7" name="table-129"/>
+          <p:cNvPr id="8" name="table-144"/>
           <p:cNvGraphicFramePr>
             <a:graphicFrameLocks noGrp="1"/>
           </p:cNvGraphicFramePr>
@@ -10598,20 +11413,20 @@
           </p:nvPr>
         </p:nvGraphicFramePr>
         <p:xfrm>
-          <a:off x="777240" y="5029200"/>
-          <a:ext cx="5943600" cy="914400"/>
+          <a:off x="822960" y="2514600"/>
+          <a:ext cx="4861408" cy="914400"/>
         </p:xfrm>
         <a:graphic>
           <a:graphicData uri="http://schemas.openxmlformats.org/drawingml/2006/table">
             <a:tbl>
               <a:tblPr/>
               <a:tblGrid>
-                <a:gridCol w="685800"/>
-                <a:gridCol w="2148840"/>
-                <a:gridCol w="1554480"/>
-                <a:gridCol w="1554480"/>
+                <a:gridCol w="566928"/>
+                <a:gridCol w="1719072"/>
+                <a:gridCol w="1234440"/>
+                <a:gridCol w="1340968"/>
               </a:tblGrid>
-              <a:tr h="420624">
+              <a:tr h="457200">
                 <a:tc>
                   <a:txBody>
                     <a:bodyPr/>
@@ -10621,7 +11436,7 @@
                         <a:buNone/>
                       </a:pPr>
                       <a:r>
-                        <a:rPr lang="en-US" sz="1050" b="1" dirty="0">
+                        <a:rPr lang="en-US" sz="1100" b="1" dirty="0">
                           <a:solidFill>
                             <a:srgbClr val="0F2A44"/>
                           </a:solidFill>
@@ -10631,14 +11446,14 @@
                         </a:rPr>
                         <a:t>时间</a:t>
                       </a:r>
-                      <a:endParaRPr lang="en-US" sz="1050" dirty="0">
+                      <a:endParaRPr lang="en-US" sz="1100" dirty="0">
                         <a:latin typeface="Microsoft YaHei" charset="0"/>
                         <a:ea typeface="Microsoft YaHei" charset="0"/>
                         <a:cs typeface="Microsoft YaHei" charset="0"/>
                       </a:endParaRPr>
                     </a:p>
                   </a:txBody>
-                  <a:tcPr marL="54864" marR="54864" marT="18288" marB="18288" anchor="ctr">
+                  <a:tcPr marL="64008" marR="64008" marT="27432" marB="27432" anchor="ctr">
                     <a:lnL w="6350" cap="flat" cmpd="sng" algn="ctr">
                       <a:solidFill>
                         <a:srgbClr val="E6D3BC"/>
@@ -10689,7 +11504,7 @@
                         <a:buNone/>
                       </a:pPr>
                       <a:r>
-                        <a:rPr lang="en-US" sz="1050" b="1" dirty="0">
+                        <a:rPr lang="en-US" sz="1100" b="1" dirty="0">
                           <a:solidFill>
                             <a:srgbClr val="0F2A44"/>
                           </a:solidFill>
@@ -10699,14 +11514,14 @@
                         </a:rPr>
                         <a:t>事件</a:t>
                       </a:r>
-                      <a:endParaRPr lang="en-US" sz="1050" dirty="0">
+                      <a:endParaRPr lang="en-US" sz="1100" dirty="0">
                         <a:latin typeface="Microsoft YaHei" charset="0"/>
                         <a:ea typeface="Microsoft YaHei" charset="0"/>
                         <a:cs typeface="Microsoft YaHei" charset="0"/>
                       </a:endParaRPr>
                     </a:p>
                   </a:txBody>
-                  <a:tcPr marL="54864" marR="54864" marT="18288" marB="18288" anchor="ctr">
+                  <a:tcPr marL="64008" marR="64008" marT="27432" marB="27432" anchor="ctr">
                     <a:lnL w="6350" cap="flat" cmpd="sng" algn="ctr">
                       <a:solidFill>
                         <a:srgbClr val="E6D3BC"/>
@@ -10757,7 +11572,7 @@
                         <a:buNone/>
                       </a:pPr>
                       <a:r>
-                        <a:rPr lang="en-US" sz="1050" b="1" dirty="0">
+                        <a:rPr lang="en-US" sz="1100" b="1" dirty="0">
                           <a:solidFill>
                             <a:srgbClr val="0F2A44"/>
                           </a:solidFill>
@@ -10767,7 +11582,7 @@
                         </a:rPr>
                         <a:t>结论 A</a:t>
                       </a:r>
-                      <a:endParaRPr lang="en-US" sz="1050" dirty="0">
+                      <a:endParaRPr lang="en-US" sz="1100" dirty="0">
                         <a:latin typeface="Microsoft YaHei" charset="0"/>
                         <a:ea typeface="Microsoft YaHei" charset="0"/>
                         <a:cs typeface="Microsoft YaHei" charset="0"/>
@@ -10778,7 +11593,7 @@
                         <a:buNone/>
                       </a:pPr>
                       <a:r>
-                        <a:rPr lang="en-US" sz="1050" b="1" dirty="0">
+                        <a:rPr lang="en-US" sz="1100" b="1" dirty="0">
                           <a:solidFill>
                             <a:srgbClr val="0F2A44"/>
                           </a:solidFill>
@@ -10788,14 +11603,14 @@
                         </a:rPr>
                         <a:t>可用于治疗该病</a:t>
                       </a:r>
-                      <a:endParaRPr lang="en-US" sz="1050" dirty="0">
+                      <a:endParaRPr lang="en-US" sz="1100" dirty="0">
                         <a:latin typeface="Microsoft YaHei" charset="0"/>
                         <a:ea typeface="Microsoft YaHei" charset="0"/>
                         <a:cs typeface="Microsoft YaHei" charset="0"/>
                       </a:endParaRPr>
                     </a:p>
                   </a:txBody>
-                  <a:tcPr marL="54864" marR="54864" marT="18288" marB="18288" anchor="ctr">
+                  <a:tcPr marL="64008" marR="64008" marT="27432" marB="27432" anchor="ctr">
                     <a:lnL w="6350" cap="flat" cmpd="sng" algn="ctr">
                       <a:solidFill>
                         <a:srgbClr val="E6D3BC"/>
@@ -10846,7 +11661,7 @@
                         <a:buNone/>
                       </a:pPr>
                       <a:r>
-                        <a:rPr lang="en-US" sz="1050" b="1" dirty="0">
+                        <a:rPr lang="en-US" sz="1100" b="1" dirty="0">
                           <a:solidFill>
                             <a:srgbClr val="0F2A44"/>
                           </a:solidFill>
@@ -10856,7 +11671,7 @@
                         </a:rPr>
                         <a:t>结论 B</a:t>
                       </a:r>
-                      <a:endParaRPr lang="en-US" sz="1050" dirty="0">
+                      <a:endParaRPr lang="en-US" sz="1100" dirty="0">
                         <a:latin typeface="Microsoft YaHei" charset="0"/>
                         <a:ea typeface="Microsoft YaHei" charset="0"/>
                         <a:cs typeface="Microsoft YaHei" charset="0"/>
@@ -10867,7 +11682,7 @@
                         <a:buNone/>
                       </a:pPr>
                       <a:r>
-                        <a:rPr lang="en-US" sz="1050" b="1" dirty="0">
+                        <a:rPr lang="en-US" sz="1100" b="1" dirty="0">
                           <a:solidFill>
                             <a:srgbClr val="0F2A44"/>
                           </a:solidFill>
@@ -10877,14 +11692,14 @@
                         </a:rPr>
                         <a:t>能提高血红蛋白</a:t>
                       </a:r>
-                      <a:endParaRPr lang="en-US" sz="1050" dirty="0">
+                      <a:endParaRPr lang="en-US" sz="1100" dirty="0">
                         <a:latin typeface="Microsoft YaHei" charset="0"/>
                         <a:ea typeface="Microsoft YaHei" charset="0"/>
                         <a:cs typeface="Microsoft YaHei" charset="0"/>
                       </a:endParaRPr>
                     </a:p>
                   </a:txBody>
-                  <a:tcPr marL="54864" marR="54864" marT="18288" marB="18288" anchor="ctr">
+                  <a:tcPr marL="64008" marR="64008" marT="27432" marB="27432" anchor="ctr">
                     <a:lnL w="6350" cap="flat" cmpd="sng" algn="ctr">
                       <a:solidFill>
                         <a:srgbClr val="E6D3BC"/>
@@ -10927,7 +11742,7 @@
                   </a:tcPr>
                 </a:tc>
               </a:tr>
-              <a:tr h="265176">
+              <a:tr h="329184">
                 <a:tc>
                   <a:txBody>
                     <a:bodyPr/>
@@ -10937,7 +11752,7 @@
                         <a:buNone/>
                       </a:pPr>
                       <a:r>
-                        <a:rPr lang="en-US" sz="1050" dirty="0">
+                        <a:rPr lang="en-US" sz="1100" dirty="0">
                           <a:solidFill>
                             <a:srgbClr val="1B2533"/>
                           </a:solidFill>
@@ -10947,14 +11762,14 @@
                         </a:rPr>
                         <a:t>2019</a:t>
                       </a:r>
-                      <a:endParaRPr lang="en-US" sz="1050" dirty="0">
+                      <a:endParaRPr lang="en-US" sz="1100" dirty="0">
                         <a:latin typeface="Microsoft YaHei" charset="0"/>
                         <a:ea typeface="Microsoft YaHei" charset="0"/>
                         <a:cs typeface="Microsoft YaHei" charset="0"/>
                       </a:endParaRPr>
                     </a:p>
                   </a:txBody>
-                  <a:tcPr marL="54864" marR="54864" marT="18288" marB="18288" anchor="ctr">
+                  <a:tcPr marL="64008" marR="64008" marT="27432" marB="27432" anchor="ctr">
                     <a:lnL w="6350" cap="flat" cmpd="sng" algn="ctr">
                       <a:solidFill>
                         <a:srgbClr val="E6D3BC"/>
@@ -11005,7 +11820,7 @@
                         <a:buNone/>
                       </a:pPr>
                       <a:r>
-                        <a:rPr lang="en-US" sz="1050" dirty="0">
+                        <a:rPr lang="en-US" sz="1100" dirty="0">
                           <a:solidFill>
                             <a:srgbClr val="1B2533"/>
                           </a:solidFill>
@@ -11015,14 +11830,14 @@
                         </a:rPr>
                         <a:t>HOPE 试验 + 加速批准</a:t>
                       </a:r>
-                      <a:endParaRPr lang="en-US" sz="1050" dirty="0">
+                      <a:endParaRPr lang="en-US" sz="1100" dirty="0">
                         <a:latin typeface="Microsoft YaHei" charset="0"/>
                         <a:ea typeface="Microsoft YaHei" charset="0"/>
                         <a:cs typeface="Microsoft YaHei" charset="0"/>
                       </a:endParaRPr>
                     </a:p>
                   </a:txBody>
-                  <a:tcPr marL="54864" marR="54864" marT="18288" marB="18288" anchor="ctr">
+                  <a:tcPr marL="64008" marR="64008" marT="27432" marB="27432" anchor="ctr">
                     <a:lnL w="6350" cap="flat" cmpd="sng" algn="ctr">
                       <a:solidFill>
                         <a:srgbClr val="E6D3BC"/>
@@ -11073,7 +11888,7 @@
                         <a:buNone/>
                       </a:pPr>
                       <a:r>
-                        <a:rPr lang="en-US" sz="1050" b="1" dirty="0">
+                        <a:rPr lang="en-US" sz="1100" b="1" dirty="0">
                           <a:solidFill>
                             <a:srgbClr val="0E8A7E"/>
                           </a:solidFill>
@@ -11081,16 +11896,16 @@
                           <a:ea typeface="Microsoft YaHei" pitchFamily="34" charset="-122"/>
                           <a:cs typeface="Microsoft YaHei" pitchFamily="34" charset="-120"/>
                         </a:rPr>
-                        <a:t>已验证</a:t>
+                        <a:t>支持</a:t>
                       </a:r>
-                      <a:endParaRPr lang="en-US" sz="1050" dirty="0">
+                      <a:endParaRPr lang="en-US" sz="1100" dirty="0">
                         <a:latin typeface="Microsoft YaHei" charset="0"/>
                         <a:ea typeface="Microsoft YaHei" charset="0"/>
                         <a:cs typeface="Microsoft YaHei" charset="0"/>
                       </a:endParaRPr>
                     </a:p>
                   </a:txBody>
-                  <a:tcPr marL="54864" marR="54864" marT="18288" marB="18288" anchor="ctr">
+                  <a:tcPr marL="64008" marR="64008" marT="27432" marB="27432" anchor="ctr">
                     <a:lnL w="6350" cap="flat" cmpd="sng" algn="ctr">
                       <a:solidFill>
                         <a:srgbClr val="E6D3BC"/>
@@ -11141,7 +11956,7 @@
                         <a:buNone/>
                       </a:pPr>
                       <a:r>
-                        <a:rPr lang="en-US" sz="1050" b="1" dirty="0">
+                        <a:rPr lang="en-US" sz="1100" b="1" dirty="0">
                           <a:solidFill>
                             <a:srgbClr val="0E8A7E"/>
                           </a:solidFill>
@@ -11149,16 +11964,16 @@
                           <a:ea typeface="Microsoft YaHei" pitchFamily="34" charset="-122"/>
                           <a:cs typeface="Microsoft YaHei" pitchFamily="34" charset="-120"/>
                         </a:rPr>
-                        <a:t>已验证</a:t>
+                        <a:t>支持</a:t>
                       </a:r>
-                      <a:endParaRPr lang="en-US" sz="1050" dirty="0">
+                      <a:endParaRPr lang="en-US" sz="1100" dirty="0">
                         <a:latin typeface="Microsoft YaHei" charset="0"/>
                         <a:ea typeface="Microsoft YaHei" charset="0"/>
                         <a:cs typeface="Microsoft YaHei" charset="0"/>
                       </a:endParaRPr>
                     </a:p>
                   </a:txBody>
-                  <a:tcPr marL="54864" marR="54864" marT="18288" marB="18288" anchor="ctr">
+                  <a:tcPr marL="64008" marR="64008" marT="27432" marB="27432" anchor="ctr">
                     <a:lnL w="6350" cap="flat" cmpd="sng" algn="ctr">
                       <a:solidFill>
                         <a:srgbClr val="E6D3BC"/>
@@ -11201,7 +12016,7 @@
                   </a:tcPr>
                 </a:tc>
               </a:tr>
-              <a:tr h="265176">
+              <a:tr h="329184">
                 <a:tc>
                   <a:txBody>
                     <a:bodyPr/>
@@ -11211,7 +12026,7 @@
                         <a:buNone/>
                       </a:pPr>
                       <a:r>
-                        <a:rPr lang="en-US" sz="1050" dirty="0">
+                        <a:rPr lang="en-US" sz="1100" dirty="0">
                           <a:solidFill>
                             <a:srgbClr val="1B2533"/>
                           </a:solidFill>
@@ -11221,14 +12036,14 @@
                         </a:rPr>
                         <a:t>2024</a:t>
                       </a:r>
-                      <a:endParaRPr lang="en-US" sz="1050" dirty="0">
+                      <a:endParaRPr lang="en-US" sz="1100" dirty="0">
                         <a:latin typeface="Microsoft YaHei" charset="0"/>
                         <a:ea typeface="Microsoft YaHei" charset="0"/>
                         <a:cs typeface="Microsoft YaHei" charset="0"/>
                       </a:endParaRPr>
                     </a:p>
                   </a:txBody>
-                  <a:tcPr marL="54864" marR="54864" marT="18288" marB="18288" anchor="ctr">
+                  <a:tcPr marL="64008" marR="64008" marT="27432" marB="27432" anchor="ctr">
                     <a:lnL w="6350" cap="flat" cmpd="sng" algn="ctr">
                       <a:solidFill>
                         <a:srgbClr val="E6D3BC"/>
@@ -11279,7 +12094,7 @@
                         <a:buNone/>
                       </a:pPr>
                       <a:r>
-                        <a:rPr lang="en-US" sz="1050" dirty="0">
+                        <a:rPr lang="en-US" sz="1100" dirty="0">
                           <a:solidFill>
                             <a:srgbClr val="1B2533"/>
                           </a:solidFill>
@@ -11289,14 +12104,14 @@
                         </a:rPr>
                         <a:t>上市后死亡增多，撤市</a:t>
                       </a:r>
-                      <a:endParaRPr lang="en-US" sz="1050" dirty="0">
+                      <a:endParaRPr lang="en-US" sz="1100" dirty="0">
                         <a:latin typeface="Microsoft YaHei" charset="0"/>
                         <a:ea typeface="Microsoft YaHei" charset="0"/>
                         <a:cs typeface="Microsoft YaHei" charset="0"/>
                       </a:endParaRPr>
                     </a:p>
                   </a:txBody>
-                  <a:tcPr marL="54864" marR="54864" marT="18288" marB="18288" anchor="ctr">
+                  <a:tcPr marL="64008" marR="64008" marT="27432" marB="27432" anchor="ctr">
                     <a:lnL w="6350" cap="flat" cmpd="sng" algn="ctr">
                       <a:solidFill>
                         <a:srgbClr val="E6D3BC"/>
@@ -11347,7 +12162,7 @@
                         <a:buNone/>
                       </a:pPr>
                       <a:r>
-                        <a:rPr lang="en-US" sz="1050" b="1" dirty="0">
+                        <a:rPr lang="en-US" sz="1100" b="1" dirty="0">
                           <a:solidFill>
                             <a:srgbClr val="C9792A"/>
                           </a:solidFill>
@@ -11355,16 +12170,16 @@
                           <a:ea typeface="Microsoft YaHei" pitchFamily="34" charset="-122"/>
                           <a:cs typeface="Microsoft YaHei" pitchFamily="34" charset="-120"/>
                         </a:rPr>
-                        <a:t>→ 有争议</a:t>
+                        <a:t>→ 降级</a:t>
                       </a:r>
-                      <a:endParaRPr lang="en-US" sz="1050" dirty="0">
+                      <a:endParaRPr lang="en-US" sz="1100" dirty="0">
                         <a:latin typeface="Microsoft YaHei" charset="0"/>
                         <a:ea typeface="Microsoft YaHei" charset="0"/>
                         <a:cs typeface="Microsoft YaHei" charset="0"/>
                       </a:endParaRPr>
                     </a:p>
                   </a:txBody>
-                  <a:tcPr marL="54864" marR="54864" marT="18288" marB="18288" anchor="ctr">
+                  <a:tcPr marL="64008" marR="64008" marT="27432" marB="27432" anchor="ctr">
                     <a:lnL w="6350" cap="flat" cmpd="sng" algn="ctr">
                       <a:solidFill>
                         <a:srgbClr val="E6D3BC"/>
@@ -11415,7 +12230,7 @@
                         <a:buNone/>
                       </a:pPr>
                       <a:r>
-                        <a:rPr lang="en-US" sz="1050" b="1" dirty="0">
+                        <a:rPr lang="en-US" sz="1100" b="1" dirty="0">
                           <a:solidFill>
                             <a:srgbClr val="1B2533"/>
                           </a:solidFill>
@@ -11425,14 +12240,14 @@
                         </a:rPr>
                         <a:t>不受影响</a:t>
                       </a:r>
-                      <a:endParaRPr lang="en-US" sz="1050" dirty="0">
+                      <a:endParaRPr lang="en-US" sz="1100" dirty="0">
                         <a:latin typeface="Microsoft YaHei" charset="0"/>
                         <a:ea typeface="Microsoft YaHei" charset="0"/>
                         <a:cs typeface="Microsoft YaHei" charset="0"/>
                       </a:endParaRPr>
                     </a:p>
                   </a:txBody>
-                  <a:tcPr marL="54864" marR="54864" marT="18288" marB="18288" anchor="ctr">
+                  <a:tcPr marL="64008" marR="64008" marT="27432" marB="27432" anchor="ctr">
                     <a:lnL w="6350" cap="flat" cmpd="sng" algn="ctr">
                       <a:solidFill>
                         <a:srgbClr val="E6D3BC"/>
@@ -11481,14 +12296,14 @@
       </p:graphicFrame>
       <p:sp>
         <p:nvSpPr>
-          <p:cNvPr id="26" name="label-130"/>
+          <p:cNvPr id="8" name="label-145"/>
           <p:cNvSpPr txBox="1"/>
           <p:nvPr/>
         </p:nvSpPr>
         <p:spPr>
           <a:xfrm>
-            <a:off x="777240" y="6053328"/>
-            <a:ext cx="5943600" cy="237744"/>
+            <a:off x="822960" y="3794760"/>
+            <a:ext cx="4861408" cy="1188720"/>
           </a:xfrm>
           <a:prstGeom prst="rect">
             <a:avLst/>
@@ -11504,69 +12319,27 @@
               <a:buNone/>
             </a:pPr>
             <a:r>
-              <a:rPr lang="en-US" sz="1050" dirty="0">
+              <a:rPr lang="en-US" sz="1200" dirty="0">
                 <a:solidFill>
                   <a:schemeClr val="tx1"/>
                 </a:solidFill>
               </a:rPr>
-              <a:t>只降级依赖“批准”的结论：血红蛋白确实升高，但患者结局变差。</a:t>
-            </a:r>
-            <a:endParaRPr lang="en-US" sz="1050" dirty="0"/>
-          </a:p>
-        </p:txBody>
-      </p:sp>
-      <p:sp>
-        <p:nvSpPr>
-          <p:cNvPr id="27" name="badge-131"/>
-          <p:cNvSpPr/>
-          <p:nvPr/>
-        </p:nvSpPr>
-        <p:spPr>
-          <a:xfrm>
-            <a:off x="7498080" y="1645920"/>
-            <a:ext cx="384048" cy="384048"/>
-          </a:xfrm>
-          <a:prstGeom prst="ellipse">
-            <a:avLst/>
-          </a:prstGeom>
-          <a:solidFill>
-            <a:schemeClr val="accent1"/>
-          </a:solidFill>
-          <a:ln w="6350">
-            <a:solidFill>
-              <a:schemeClr val="accent1"/>
-            </a:solidFill>
-          </a:ln>
-        </p:spPr>
-        <p:txBody>
-          <a:bodyPr wrap="square" lIns="0" tIns="0" rIns="0" bIns="0" rtlCol="0" anchor="ctr"/>
-          <a:lstStyle/>
-          <a:p>
-            <a:pPr algn="ctr" indent="0" marL="0">
-              <a:buNone/>
-            </a:pPr>
-            <a:r>
-              <a:rPr lang="en-US" sz="1500" b="1" dirty="0">
-                <a:solidFill>
-                  <a:schemeClr val="bg1"/>
-                </a:solidFill>
-              </a:rPr>
-              <a:t>1</a:t>
-            </a:r>
-            <a:endParaRPr lang="en-US" sz="1500" dirty="0"/>
-          </a:p>
-        </p:txBody>
-      </p:sp>
-      <p:sp>
-        <p:nvSpPr>
-          <p:cNvPr id="28" name="label-132"/>
+              <a:t>结论 A 依赖“批准”与 HOPE 试验，核验发现批准已撤销，当场降级；结论 B 只依赖 HOPE 试验，血红蛋白确实升高，保持不变。替代指标改善不等于临床获益。</a:t>
+            </a:r>
+            <a:endParaRPr lang="en-US" sz="1200" dirty="0"/>
+          </a:p>
+        </p:txBody>
+      </p:sp>
+      <p:sp>
+        <p:nvSpPr>
+          <p:cNvPr id="9" name="label-146"/>
           <p:cNvSpPr txBox="1"/>
           <p:nvPr/>
         </p:nvSpPr>
         <p:spPr>
           <a:xfrm>
-            <a:off x="8046720" y="1627632"/>
-            <a:ext cx="3596335" cy="411480"/>
+            <a:off x="822960" y="5257800"/>
+            <a:ext cx="4861408" cy="457200"/>
           </a:xfrm>
           <a:prstGeom prst="rect">
             <a:avLst/>
@@ -11575,1003 +12348,38 @@
           <a:ln/>
         </p:spPr>
         <p:txBody>
-          <a:bodyPr wrap="square" lIns="0" tIns="0" rIns="0" bIns="0" rtlCol="0" anchor="ctr"/>
+          <a:bodyPr wrap="square" lIns="0" tIns="0" rIns="0" bIns="0" rtlCol="0" anchor="t"/>
           <a:lstStyle/>
           <a:p>
             <a:pPr algn="l" indent="0" marL="0">
               <a:buNone/>
             </a:pPr>
             <a:r>
-              <a:rPr lang="en-US" sz="1700" b="1" dirty="0">
-                <a:solidFill>
-                  <a:schemeClr val="tx2"/>
-                </a:solidFill>
-              </a:rPr>
-              <a:t>准入门禁</a:t>
-            </a:r>
-            <a:endParaRPr lang="en-US" sz="1700" dirty="0"/>
-          </a:p>
-        </p:txBody>
-      </p:sp>
-      <p:sp>
-        <p:nvSpPr>
-          <p:cNvPr id="29" name="label-133"/>
-          <p:cNvSpPr txBox="1"/>
-          <p:nvPr/>
-        </p:nvSpPr>
-        <p:spPr>
-          <a:xfrm>
-            <a:off x="8046720" y="2084832"/>
-            <a:ext cx="3596335" cy="868680"/>
-          </a:xfrm>
-          <a:prstGeom prst="rect">
-            <a:avLst/>
-          </a:prstGeom>
-          <a:noFill/>
-          <a:ln/>
-        </p:spPr>
-        <p:txBody>
-          <a:bodyPr wrap="square" lIns="0" tIns="0" rIns="0" bIns="0" rtlCol="0" anchor="t"/>
-          <a:lstStyle/>
-          <a:p>
-            <a:pPr algn="l" indent="0" marL="0">
-              <a:buNone/>
-            </a:pPr>
-            <a:r>
-              <a:rPr lang="en-US" sz="1400" dirty="0">
+              <a:rPr lang="en-US" sz="1000" dirty="0">
                 <a:solidFill>
                   <a:schemeClr val="accent6"/>
                 </a:solidFill>
               </a:rPr>
-              <a:t>来源可追溯、未过期、数值在合理范围、不含未授权患者数据、未被撤稿；任一不过即隔离，原因写入账本。不替代对研究质量的专业判断。</a:t>
-            </a:r>
-            <a:endParaRPr lang="en-US" sz="1400" dirty="0"/>
-          </a:p>
-        </p:txBody>
-      </p:sp>
-      <p:sp>
-        <p:nvSpPr>
-          <p:cNvPr id="30" name="badge-134"/>
-          <p:cNvSpPr/>
-          <p:nvPr/>
-        </p:nvSpPr>
-        <p:spPr>
-          <a:xfrm>
-            <a:off x="7498080" y="3108960"/>
-            <a:ext cx="384048" cy="384048"/>
-          </a:xfrm>
-          <a:prstGeom prst="ellipse">
-            <a:avLst/>
-          </a:prstGeom>
-          <a:solidFill>
-            <a:schemeClr val="accent1"/>
-          </a:solidFill>
-          <a:ln w="6350">
-            <a:solidFill>
-              <a:schemeClr val="accent1"/>
-            </a:solidFill>
-          </a:ln>
-        </p:spPr>
-        <p:txBody>
-          <a:bodyPr wrap="square" lIns="0" tIns="0" rIns="0" bIns="0" rtlCol="0" anchor="ctr"/>
-          <a:lstStyle/>
-          <a:p>
-            <a:pPr algn="ctr" indent="0" marL="0">
-              <a:buNone/>
-            </a:pPr>
-            <a:r>
-              <a:rPr lang="en-US" sz="1500" b="1" dirty="0">
-                <a:solidFill>
-                  <a:schemeClr val="bg1"/>
-                </a:solidFill>
-              </a:rPr>
-              <a:t>2</a:t>
-            </a:r>
-            <a:endParaRPr lang="en-US" sz="1500" dirty="0"/>
-          </a:p>
-        </p:txBody>
-      </p:sp>
-      <p:sp>
-        <p:nvSpPr>
-          <p:cNvPr id="31" name="label-135"/>
-          <p:cNvSpPr txBox="1"/>
-          <p:nvPr/>
-        </p:nvSpPr>
-        <p:spPr>
-          <a:xfrm>
-            <a:off x="8046720" y="3090672"/>
-            <a:ext cx="3596335" cy="411480"/>
-          </a:xfrm>
-          <a:prstGeom prst="rect">
-            <a:avLst/>
-          </a:prstGeom>
-          <a:noFill/>
-          <a:ln/>
-        </p:spPr>
-        <p:txBody>
-          <a:bodyPr wrap="square" lIns="0" tIns="0" rIns="0" bIns="0" rtlCol="0" anchor="ctr"/>
-          <a:lstStyle/>
-          <a:p>
-            <a:pPr algn="l" indent="0" marL="0">
-              <a:buNone/>
-            </a:pPr>
-            <a:r>
-              <a:rPr lang="en-US" sz="1700" b="1" dirty="0">
-                <a:solidFill>
-                  <a:schemeClr val="tx2"/>
-                </a:solidFill>
-              </a:rPr>
-              <a:t>依赖级联</a:t>
-            </a:r>
-            <a:endParaRPr lang="en-US" sz="1700" dirty="0"/>
-          </a:p>
-        </p:txBody>
-      </p:sp>
-      <p:sp>
-        <p:nvSpPr>
-          <p:cNvPr id="32" name="label-136"/>
-          <p:cNvSpPr txBox="1"/>
-          <p:nvPr/>
-        </p:nvSpPr>
-        <p:spPr>
-          <a:xfrm>
-            <a:off x="8046720" y="3547872"/>
-            <a:ext cx="3596335" cy="868680"/>
-          </a:xfrm>
-          <a:prstGeom prst="rect">
-            <a:avLst/>
-          </a:prstGeom>
-          <a:noFill/>
-          <a:ln/>
-        </p:spPr>
-        <p:txBody>
-          <a:bodyPr wrap="square" lIns="0" tIns="0" rIns="0" bIns="0" rtlCol="0" anchor="t"/>
-          <a:lstStyle/>
-          <a:p>
-            <a:pPr algn="l" indent="0" marL="0">
-              <a:buNone/>
-            </a:pPr>
-            <a:r>
-              <a:rPr lang="en-US" sz="1400" dirty="0">
-                <a:solidFill>
-                  <a:schemeClr val="accent6"/>
-                </a:solidFill>
-              </a:rPr>
-              <a:t>证据失效时，依赖它的结论自动降级；恢复证据不会自动恢复结论。</a:t>
-            </a:r>
-            <a:endParaRPr lang="en-US" sz="1400" dirty="0"/>
-          </a:p>
-        </p:txBody>
-      </p:sp>
-      <p:sp>
-        <p:nvSpPr>
-          <p:cNvPr id="33" name="badge-137"/>
-          <p:cNvSpPr/>
-          <p:nvPr/>
-        </p:nvSpPr>
-        <p:spPr>
-          <a:xfrm>
-            <a:off x="7498080" y="4572000"/>
-            <a:ext cx="384048" cy="384048"/>
-          </a:xfrm>
-          <a:prstGeom prst="ellipse">
-            <a:avLst/>
-          </a:prstGeom>
-          <a:solidFill>
-            <a:schemeClr val="accent1"/>
-          </a:solidFill>
-          <a:ln w="6350">
-            <a:solidFill>
-              <a:schemeClr val="accent1"/>
-            </a:solidFill>
-          </a:ln>
-        </p:spPr>
-        <p:txBody>
-          <a:bodyPr wrap="square" lIns="0" tIns="0" rIns="0" bIns="0" rtlCol="0" anchor="ctr"/>
-          <a:lstStyle/>
-          <a:p>
-            <a:pPr algn="ctr" indent="0" marL="0">
-              <a:buNone/>
-            </a:pPr>
-            <a:r>
-              <a:rPr lang="en-US" sz="1500" b="1" dirty="0">
-                <a:solidFill>
-                  <a:schemeClr val="bg1"/>
-                </a:solidFill>
-              </a:rPr>
-              <a:t>3</a:t>
-            </a:r>
-            <a:endParaRPr lang="en-US" sz="1500" dirty="0"/>
-          </a:p>
-        </p:txBody>
-      </p:sp>
-      <p:sp>
-        <p:nvSpPr>
-          <p:cNvPr id="34" name="label-138"/>
-          <p:cNvSpPr txBox="1"/>
-          <p:nvPr/>
-        </p:nvSpPr>
-        <p:spPr>
-          <a:xfrm>
-            <a:off x="8046720" y="4553712"/>
-            <a:ext cx="3596335" cy="411480"/>
-          </a:xfrm>
-          <a:prstGeom prst="rect">
-            <a:avLst/>
-          </a:prstGeom>
-          <a:noFill/>
-          <a:ln/>
-        </p:spPr>
-        <p:txBody>
-          <a:bodyPr wrap="square" lIns="0" tIns="0" rIns="0" bIns="0" rtlCol="0" anchor="ctr"/>
-          <a:lstStyle/>
-          <a:p>
-            <a:pPr algn="l" indent="0" marL="0">
-              <a:buNone/>
-            </a:pPr>
-            <a:r>
-              <a:rPr lang="en-US" sz="1700" b="1" dirty="0">
-                <a:solidFill>
-                  <a:schemeClr val="tx2"/>
-                </a:solidFill>
-              </a:rPr>
-              <a:t>防篡改</a:t>
-            </a:r>
-            <a:endParaRPr lang="en-US" sz="1700" dirty="0"/>
-          </a:p>
-        </p:txBody>
-      </p:sp>
-      <p:sp>
-        <p:nvSpPr>
-          <p:cNvPr id="35" name="label-139"/>
-          <p:cNvSpPr txBox="1"/>
-          <p:nvPr/>
-        </p:nvSpPr>
-        <p:spPr>
-          <a:xfrm>
-            <a:off x="8046720" y="5010912"/>
-            <a:ext cx="3596335" cy="868680"/>
-          </a:xfrm>
-          <a:prstGeom prst="rect">
-            <a:avLst/>
-          </a:prstGeom>
-          <a:noFill/>
-          <a:ln/>
-        </p:spPr>
-        <p:txBody>
-          <a:bodyPr wrap="square" lIns="0" tIns="0" rIns="0" bIns="0" rtlCol="0" anchor="t"/>
-          <a:lstStyle/>
-          <a:p>
-            <a:pPr algn="l" indent="0" marL="0">
-              <a:buNone/>
-            </a:pPr>
-            <a:r>
-              <a:rPr lang="en-US" sz="1400" dirty="0">
-                <a:solidFill>
-                  <a:schemeClr val="accent6"/>
-                </a:solidFill>
-              </a:rPr>
-              <a:t>每次变更追加写入哈希链；文件被改动会被发现，账本随即锁为只读。</a:t>
-            </a:r>
-            <a:endParaRPr lang="en-US" sz="1400" dirty="0"/>
-          </a:p>
-        </p:txBody>
-      </p:sp>
-      <p:sp>
-        <p:nvSpPr>
-          <p:cNvPr id="25" name="Slide Number Placeholder 0"/>
-          <p:cNvSpPr>
-            <a:spLocks noGrp="1"/>
-          </p:cNvSpPr>
-          <p:nvPr>
-            <p:ph type="sldNum" sz="quarter" idx="4294967295"/>
-          </p:nvPr>
-        </p:nvSpPr>
-        <p:spPr>
-          <a:xfrm>
-            <a:off x="11094415" y="6446520"/>
-            <a:ext cx="548640" cy="274320"/>
-          </a:xfrm>
-          <a:prstGeom prst="rect">
-            <a:avLst/>
-          </a:prstGeom>
-          <a:extLst>
-            <a:ext uri="{C572A759-6A51-4108-AA02-DFA0A04FC94B}">
-              <ma14:wrappingTextBoxFlag xmlns:ma14="http://schemas.microsoft.com/office/mac/drawingml/2011/main" val="0"/>
-            </a:ext>
-          </a:extLst>
-        </p:spPr>
-        <p:txBody>
-          <a:bodyPr/>
-          <a:lstStyle>
-            <a:lvl1pPr>
-              <a:defRPr sz="1000">
-                <a:solidFill>
-                  <a:schemeClr val="accent6"/>
-                </a:solidFill>
-              </a:defRPr>
-            </a:lvl1pPr>
-          </a:lstStyle>
-          <a:p>
-            <a:pPr algn="r"/>
-            <a:fld id="{F7021451-1387-4CA6-816F-3879F97B5CBC}" type="slidenum">
-              <a:rPr b="0" lang="en-US"/>
-              <a:t>6</a:t>
-            </a:fld>
-            <a:endParaRPr lang="en-US"/>
-          </a:p>
-        </p:txBody>
-      </p:sp>
-    </p:spTree>
-  </p:cSld>
-  <p:clrMapOvr>
-    <a:masterClrMapping/>
-  </p:clrMapOvr>
-</p:sld>
-</file>
-
-<file path=ppt/slides/slide7.xml><?xml version="1.0" encoding="utf-8"?>
-<p:sld xmlns:a="http://schemas.openxmlformats.org/drawingml/2006/main" xmlns:r="http://schemas.openxmlformats.org/officeDocument/2006/relationships" xmlns:p="http://schemas.openxmlformats.org/presentationml/2006/main">
-  <p:cSld name="Slide 7">
-    <p:spTree>
-      <p:nvGrpSpPr>
-        <p:cNvPr id="1" name=""/>
-        <p:cNvGrpSpPr/>
-        <p:nvPr/>
-      </p:nvGrpSpPr>
-      <p:grpSpPr>
-        <a:xfrm>
-          <a:off x="0" y="0"/>
-          <a:ext cx="0" cy="0"/>
-          <a:chOff x="0" y="0"/>
-          <a:chExt cx="0" cy="0"/>
-        </a:xfrm>
-      </p:grpSpPr>
-      <p:sp>
-        <p:nvSpPr>
-          <p:cNvPr id="2" name="Text 0"/>
-          <p:cNvSpPr/>
-          <p:nvPr>
-            <p:ph idx="100" type="title" hasCustomPrompt="1"/>
-          </p:nvPr>
-        </p:nvSpPr>
-        <p:spPr>
-          <a:xfrm>
-            <a:off x="548640" y="320040"/>
-            <a:ext cx="11094415" cy="640080"/>
-          </a:xfrm>
-          <a:prstGeom prst="rect">
-            <a:avLst/>
-          </a:prstGeom>
-          <a:noFill/>
-          <a:ln/>
-        </p:spPr>
-        <p:txBody>
-          <a:bodyPr wrap="square" lIns="0" tIns="0" rIns="0" bIns="0" rtlCol="0" anchor="ctr"/>
-          <a:lstStyle/>
-          <a:p>
-            <a:pPr algn="l" indent="0" marL="0">
-              <a:buNone/>
-            </a:pPr>
-            <a:r>
-              <a:rPr lang="en-US" sz="2800" b="1" dirty="0">
-                <a:solidFill>
-                  <a:schemeClr val="tx2"/>
-                </a:solidFill>
-              </a:rPr>
-              <a:t>案例二：Makena——确证性试验推翻早期结论</a:t>
-            </a:r>
-            <a:endParaRPr lang="en-US" sz="2800" dirty="0"/>
-          </a:p>
-        </p:txBody>
-      </p:sp>
-      <p:sp>
-        <p:nvSpPr>
-          <p:cNvPr id="3" name="Text 0"/>
-          <p:cNvSpPr/>
-          <p:nvPr>
-            <p:ph idx="101" type="body" hasCustomPrompt="1"/>
-          </p:nvPr>
-        </p:nvSpPr>
-        <p:spPr>
-          <a:xfrm>
-            <a:off x="548640" y="960120"/>
-            <a:ext cx="11094415" cy="411480"/>
-          </a:xfrm>
-          <a:prstGeom prst="rect">
-            <a:avLst/>
-          </a:prstGeom>
-          <a:noFill/>
-          <a:ln/>
-        </p:spPr>
-        <p:txBody>
-          <a:bodyPr wrap="square" lIns="0" tIns="0" rIns="0" bIns="0" rtlCol="0" anchor="ctr"/>
-          <a:lstStyle/>
-          <a:p>
-            <a:pPr algn="l" indent="0" marL="0">
-              <a:buNone/>
-            </a:pPr>
-            <a:r>
-              <a:rPr lang="en-US" sz="1500" dirty="0">
-                <a:solidFill>
-                  <a:schemeClr val="accent6"/>
-                </a:solidFill>
-              </a:rPr>
-              <a:t>证据相互矛盾时，账本保留分歧、不替人裁决；新结论有据可查地取代旧结论。</a:t>
-            </a:r>
-            <a:endParaRPr lang="en-US" sz="1500" dirty="0"/>
-          </a:p>
-        </p:txBody>
-      </p:sp>
-      <p:sp>
-        <p:nvSpPr>
-          <p:cNvPr id="4" name="timeline-140"/>
-          <p:cNvSpPr/>
-          <p:nvPr/>
-        </p:nvSpPr>
-        <p:spPr>
-          <a:xfrm>
-            <a:off x="1371600" y="2148840"/>
-            <a:ext cx="9448495" cy="0"/>
-          </a:xfrm>
-          <a:prstGeom prst="line">
-            <a:avLst/>
-          </a:prstGeom>
-          <a:noFill/>
-          <a:ln w="25400">
-            <a:solidFill>
-              <a:srgbClr val="C3CCD6"/>
-            </a:solidFill>
-            <a:prstDash val="solid"/>
-          </a:ln>
-        </p:spPr>
-      </p:sp>
-      <p:sp>
-        <p:nvSpPr>
-          <p:cNvPr id="5" name="dot-141"/>
-          <p:cNvSpPr/>
-          <p:nvPr/>
-        </p:nvSpPr>
-        <p:spPr>
-          <a:xfrm>
-            <a:off x="1243584" y="2020824"/>
-            <a:ext cx="256032" cy="256032"/>
-          </a:xfrm>
-          <a:prstGeom prst="ellipse">
-            <a:avLst/>
-          </a:prstGeom>
-          <a:solidFill>
-            <a:schemeClr val="accent1"/>
-          </a:solidFill>
-          <a:ln w="25400">
-            <a:solidFill>
-              <a:srgbClr val="FFFFFF"/>
-            </a:solidFill>
-            <a:prstDash val="solid"/>
-          </a:ln>
-        </p:spPr>
-      </p:sp>
-      <p:sp>
-        <p:nvSpPr>
-          <p:cNvPr id="6" name="label-142"/>
-          <p:cNvSpPr txBox="1"/>
-          <p:nvPr/>
-        </p:nvSpPr>
-        <p:spPr>
-          <a:xfrm>
-            <a:off x="182880" y="1581912"/>
-            <a:ext cx="2377440" cy="329184"/>
-          </a:xfrm>
-          <a:prstGeom prst="rect">
-            <a:avLst/>
-          </a:prstGeom>
-          <a:noFill/>
-          <a:ln/>
-        </p:spPr>
-        <p:txBody>
-          <a:bodyPr wrap="square" lIns="0" tIns="0" rIns="0" bIns="0" rtlCol="0" anchor="t"/>
-          <a:lstStyle/>
-          <a:p>
-            <a:pPr algn="ctr" indent="0" marL="0">
-              <a:buNone/>
-            </a:pPr>
-            <a:r>
-              <a:rPr lang="en-US" sz="1500" b="1" dirty="0">
-                <a:solidFill>
-                  <a:schemeClr val="tx2"/>
-                </a:solidFill>
-              </a:rPr>
-              <a:t>2003</a:t>
-            </a:r>
-            <a:endParaRPr lang="en-US" sz="1500" dirty="0"/>
-          </a:p>
-        </p:txBody>
-      </p:sp>
-      <p:sp>
-        <p:nvSpPr>
-          <p:cNvPr id="7" name="label-143"/>
-          <p:cNvSpPr txBox="1"/>
-          <p:nvPr/>
-        </p:nvSpPr>
-        <p:spPr>
-          <a:xfrm>
-            <a:off x="91440" y="2377440"/>
-            <a:ext cx="2560320" cy="292608"/>
-          </a:xfrm>
-          <a:prstGeom prst="rect">
-            <a:avLst/>
-          </a:prstGeom>
-          <a:noFill/>
-          <a:ln/>
-        </p:spPr>
-        <p:txBody>
-          <a:bodyPr wrap="square" lIns="0" tIns="0" rIns="0" bIns="0" rtlCol="0" anchor="t"/>
-          <a:lstStyle/>
-          <a:p>
-            <a:pPr algn="ctr" indent="0" marL="0">
-              <a:buNone/>
-            </a:pPr>
-            <a:r>
-              <a:rPr lang="en-US" sz="1350" b="1" dirty="0">
-                <a:solidFill>
-                  <a:schemeClr val="tx1"/>
-                </a:solidFill>
-              </a:rPr>
-              <a:t>Meis 试验</a:t>
-            </a:r>
-            <a:endParaRPr lang="en-US" sz="1350" dirty="0"/>
-          </a:p>
-        </p:txBody>
-      </p:sp>
-      <p:sp>
-        <p:nvSpPr>
-          <p:cNvPr id="8" name="label-144"/>
-          <p:cNvSpPr txBox="1"/>
-          <p:nvPr/>
-        </p:nvSpPr>
-        <p:spPr>
-          <a:xfrm>
-            <a:off x="91440" y="2670048"/>
-            <a:ext cx="2560320" cy="274320"/>
-          </a:xfrm>
-          <a:prstGeom prst="rect">
-            <a:avLst/>
-          </a:prstGeom>
-          <a:noFill/>
-          <a:ln/>
-        </p:spPr>
-        <p:txBody>
-          <a:bodyPr wrap="square" lIns="0" tIns="0" rIns="0" bIns="0" rtlCol="0" anchor="t"/>
-          <a:lstStyle/>
-          <a:p>
-            <a:pPr algn="ctr" indent="0" marL="0">
-              <a:buNone/>
-            </a:pPr>
-            <a:r>
-              <a:rPr lang="en-US" sz="1150" dirty="0">
-                <a:solidFill>
-                  <a:schemeClr val="accent6"/>
-                </a:solidFill>
-              </a:rPr>
-              <a:t>早产风险下降</a:t>
-            </a:r>
-            <a:endParaRPr lang="en-US" sz="1150" dirty="0"/>
-          </a:p>
-        </p:txBody>
-      </p:sp>
-      <p:sp>
-        <p:nvSpPr>
-          <p:cNvPr id="9" name="dot-145"/>
-          <p:cNvSpPr/>
-          <p:nvPr/>
-        </p:nvSpPr>
-        <p:spPr>
-          <a:xfrm>
-            <a:off x="4393082" y="2020824"/>
-            <a:ext cx="256032" cy="256032"/>
-          </a:xfrm>
-          <a:prstGeom prst="ellipse">
-            <a:avLst/>
-          </a:prstGeom>
-          <a:solidFill>
-            <a:schemeClr val="accent1"/>
-          </a:solidFill>
-          <a:ln w="25400">
-            <a:solidFill>
-              <a:srgbClr val="FFFFFF"/>
-            </a:solidFill>
-            <a:prstDash val="solid"/>
-          </a:ln>
-        </p:spPr>
-      </p:sp>
-      <p:sp>
-        <p:nvSpPr>
-          <p:cNvPr id="10" name="label-146"/>
-          <p:cNvSpPr txBox="1"/>
-          <p:nvPr/>
-        </p:nvSpPr>
-        <p:spPr>
-          <a:xfrm>
-            <a:off x="3332378" y="1581912"/>
-            <a:ext cx="2377440" cy="329184"/>
-          </a:xfrm>
-          <a:prstGeom prst="rect">
-            <a:avLst/>
-          </a:prstGeom>
-          <a:noFill/>
-          <a:ln/>
-        </p:spPr>
-        <p:txBody>
-          <a:bodyPr wrap="square" lIns="0" tIns="0" rIns="0" bIns="0" rtlCol="0" anchor="t"/>
-          <a:lstStyle/>
-          <a:p>
-            <a:pPr algn="ctr" indent="0" marL="0">
-              <a:buNone/>
-            </a:pPr>
-            <a:r>
-              <a:rPr lang="en-US" sz="1500" b="1" dirty="0">
-                <a:solidFill>
-                  <a:schemeClr val="tx2"/>
-                </a:solidFill>
-              </a:rPr>
-              <a:t>2011</a:t>
-            </a:r>
-            <a:endParaRPr lang="en-US" sz="1500" dirty="0"/>
-          </a:p>
-        </p:txBody>
-      </p:sp>
-      <p:sp>
-        <p:nvSpPr>
-          <p:cNvPr id="11" name="label-147"/>
-          <p:cNvSpPr txBox="1"/>
-          <p:nvPr/>
-        </p:nvSpPr>
-        <p:spPr>
-          <a:xfrm>
-            <a:off x="3240938" y="2377440"/>
-            <a:ext cx="2560320" cy="292608"/>
-          </a:xfrm>
-          <a:prstGeom prst="rect">
-            <a:avLst/>
-          </a:prstGeom>
-          <a:noFill/>
-          <a:ln/>
-        </p:spPr>
-        <p:txBody>
-          <a:bodyPr wrap="square" lIns="0" tIns="0" rIns="0" bIns="0" rtlCol="0" anchor="t"/>
-          <a:lstStyle/>
-          <a:p>
-            <a:pPr algn="ctr" indent="0" marL="0">
-              <a:buNone/>
-            </a:pPr>
-            <a:r>
-              <a:rPr lang="en-US" sz="1350" b="1" dirty="0">
-                <a:solidFill>
-                  <a:schemeClr val="tx1"/>
-                </a:solidFill>
-              </a:rPr>
-              <a:t>获加速批准</a:t>
-            </a:r>
-            <a:endParaRPr lang="en-US" sz="1350" dirty="0"/>
-          </a:p>
-        </p:txBody>
-      </p:sp>
-      <p:sp>
-        <p:nvSpPr>
-          <p:cNvPr id="12" name="label-148"/>
-          <p:cNvSpPr txBox="1"/>
-          <p:nvPr/>
-        </p:nvSpPr>
-        <p:spPr>
-          <a:xfrm>
-            <a:off x="3240938" y="2670048"/>
-            <a:ext cx="2560320" cy="274320"/>
-          </a:xfrm>
-          <a:prstGeom prst="rect">
-            <a:avLst/>
-          </a:prstGeom>
-          <a:noFill/>
-          <a:ln/>
-        </p:spPr>
-        <p:txBody>
-          <a:bodyPr wrap="square" lIns="0" tIns="0" rIns="0" bIns="0" rtlCol="0" anchor="t"/>
-          <a:lstStyle/>
-          <a:p>
-            <a:pPr algn="ctr" indent="0" marL="0">
-              <a:buNone/>
-            </a:pPr>
-            <a:r>
-              <a:rPr lang="en-US" sz="1150" dirty="0">
-                <a:solidFill>
-                  <a:schemeClr val="accent6"/>
-                </a:solidFill>
-              </a:rPr>
-              <a:t>依据上述试验</a:t>
-            </a:r>
-            <a:endParaRPr lang="en-US" sz="1150" dirty="0"/>
-          </a:p>
-        </p:txBody>
-      </p:sp>
-      <p:sp>
-        <p:nvSpPr>
-          <p:cNvPr id="13" name="dot-149"/>
-          <p:cNvSpPr/>
-          <p:nvPr/>
-        </p:nvSpPr>
-        <p:spPr>
-          <a:xfrm>
-            <a:off x="7542581" y="2020824"/>
-            <a:ext cx="256032" cy="256032"/>
-          </a:xfrm>
-          <a:prstGeom prst="ellipse">
-            <a:avLst/>
-          </a:prstGeom>
-          <a:solidFill>
-            <a:schemeClr val="accent3"/>
-          </a:solidFill>
-          <a:ln w="25400">
-            <a:solidFill>
-              <a:srgbClr val="FFFFFF"/>
-            </a:solidFill>
-            <a:prstDash val="solid"/>
-          </a:ln>
-        </p:spPr>
-      </p:sp>
-      <p:sp>
-        <p:nvSpPr>
-          <p:cNvPr id="14" name="label-150"/>
-          <p:cNvSpPr txBox="1"/>
-          <p:nvPr/>
-        </p:nvSpPr>
-        <p:spPr>
-          <a:xfrm>
-            <a:off x="6481877" y="1581912"/>
-            <a:ext cx="2377440" cy="329184"/>
-          </a:xfrm>
-          <a:prstGeom prst="rect">
-            <a:avLst/>
-          </a:prstGeom>
-          <a:noFill/>
-          <a:ln/>
-        </p:spPr>
-        <p:txBody>
-          <a:bodyPr wrap="square" lIns="0" tIns="0" rIns="0" bIns="0" rtlCol="0" anchor="t"/>
-          <a:lstStyle/>
-          <a:p>
-            <a:pPr algn="ctr" indent="0" marL="0">
-              <a:buNone/>
-            </a:pPr>
-            <a:r>
-              <a:rPr lang="en-US" sz="1500" b="1" dirty="0">
-                <a:solidFill>
-                  <a:schemeClr val="tx2"/>
-                </a:solidFill>
-              </a:rPr>
-              <a:t>2019–20</a:t>
-            </a:r>
-            <a:endParaRPr lang="en-US" sz="1500" dirty="0"/>
-          </a:p>
-        </p:txBody>
-      </p:sp>
-      <p:sp>
-        <p:nvSpPr>
-          <p:cNvPr id="15" name="label-151"/>
-          <p:cNvSpPr txBox="1"/>
-          <p:nvPr/>
-        </p:nvSpPr>
-        <p:spPr>
-          <a:xfrm>
-            <a:off x="6390437" y="2377440"/>
-            <a:ext cx="2560320" cy="292608"/>
-          </a:xfrm>
-          <a:prstGeom prst="rect">
-            <a:avLst/>
-          </a:prstGeom>
-          <a:noFill/>
-          <a:ln/>
-        </p:spPr>
-        <p:txBody>
-          <a:bodyPr wrap="square" lIns="0" tIns="0" rIns="0" bIns="0" rtlCol="0" anchor="t"/>
-          <a:lstStyle/>
-          <a:p>
-            <a:pPr algn="ctr" indent="0" marL="0">
-              <a:buNone/>
-            </a:pPr>
-            <a:r>
-              <a:rPr lang="en-US" sz="1350" b="1" dirty="0">
-                <a:solidFill>
-                  <a:schemeClr val="tx1"/>
-                </a:solidFill>
-              </a:rPr>
-              <a:t>确证试验 PROLONG</a:t>
-            </a:r>
-            <a:endParaRPr lang="en-US" sz="1350" dirty="0"/>
-          </a:p>
-        </p:txBody>
-      </p:sp>
-      <p:sp>
-        <p:nvSpPr>
-          <p:cNvPr id="16" name="label-152"/>
-          <p:cNvSpPr txBox="1"/>
-          <p:nvPr/>
-        </p:nvSpPr>
-        <p:spPr>
-          <a:xfrm>
-            <a:off x="6390437" y="2670048"/>
-            <a:ext cx="2560320" cy="274320"/>
-          </a:xfrm>
-          <a:prstGeom prst="rect">
-            <a:avLst/>
-          </a:prstGeom>
-          <a:noFill/>
-          <a:ln/>
-        </p:spPr>
-        <p:txBody>
-          <a:bodyPr wrap="square" lIns="0" tIns="0" rIns="0" bIns="0" rtlCol="0" anchor="t"/>
-          <a:lstStyle/>
-          <a:p>
-            <a:pPr algn="ctr" indent="0" marL="0">
-              <a:buNone/>
-            </a:pPr>
-            <a:r>
-              <a:rPr lang="en-US" sz="1150" dirty="0">
-                <a:solidFill>
-                  <a:schemeClr val="accent6"/>
-                </a:solidFill>
-              </a:rPr>
-              <a:t>未见降低早产</a:t>
-            </a:r>
-            <a:endParaRPr lang="en-US" sz="1150" dirty="0"/>
-          </a:p>
-        </p:txBody>
-      </p:sp>
-      <p:sp>
-        <p:nvSpPr>
-          <p:cNvPr id="17" name="dot-153"/>
-          <p:cNvSpPr/>
-          <p:nvPr/>
-        </p:nvSpPr>
-        <p:spPr>
-          <a:xfrm>
-            <a:off x="10692079" y="2020824"/>
-            <a:ext cx="256032" cy="256032"/>
-          </a:xfrm>
-          <a:prstGeom prst="ellipse">
-            <a:avLst/>
-          </a:prstGeom>
-          <a:solidFill>
-            <a:srgbClr val="B4233A"/>
-          </a:solidFill>
-          <a:ln w="25400">
-            <a:solidFill>
-              <a:srgbClr val="FFFFFF"/>
-            </a:solidFill>
-            <a:prstDash val="solid"/>
-          </a:ln>
-        </p:spPr>
-      </p:sp>
-      <p:sp>
-        <p:nvSpPr>
-          <p:cNvPr id="18" name="label-154"/>
-          <p:cNvSpPr txBox="1"/>
-          <p:nvPr/>
-        </p:nvSpPr>
-        <p:spPr>
-          <a:xfrm>
-            <a:off x="9631375" y="1581912"/>
-            <a:ext cx="2377440" cy="329184"/>
-          </a:xfrm>
-          <a:prstGeom prst="rect">
-            <a:avLst/>
-          </a:prstGeom>
-          <a:noFill/>
-          <a:ln/>
-        </p:spPr>
-        <p:txBody>
-          <a:bodyPr wrap="square" lIns="0" tIns="0" rIns="0" bIns="0" rtlCol="0" anchor="t"/>
-          <a:lstStyle/>
-          <a:p>
-            <a:pPr algn="ctr" indent="0" marL="0">
-              <a:buNone/>
-            </a:pPr>
-            <a:r>
-              <a:rPr lang="en-US" sz="1500" b="1" dirty="0">
-                <a:solidFill>
-                  <a:schemeClr val="tx2"/>
-                </a:solidFill>
-              </a:rPr>
-              <a:t>2023</a:t>
-            </a:r>
-            <a:endParaRPr lang="en-US" sz="1500" dirty="0"/>
-          </a:p>
-        </p:txBody>
-      </p:sp>
-      <p:sp>
-        <p:nvSpPr>
-          <p:cNvPr id="19" name="label-155"/>
-          <p:cNvSpPr txBox="1"/>
-          <p:nvPr/>
-        </p:nvSpPr>
-        <p:spPr>
-          <a:xfrm>
-            <a:off x="9539935" y="2377440"/>
-            <a:ext cx="2560320" cy="292608"/>
-          </a:xfrm>
-          <a:prstGeom prst="rect">
-            <a:avLst/>
-          </a:prstGeom>
-          <a:noFill/>
-          <a:ln/>
-        </p:spPr>
-        <p:txBody>
-          <a:bodyPr wrap="square" lIns="0" tIns="0" rIns="0" bIns="0" rtlCol="0" anchor="t"/>
-          <a:lstStyle/>
-          <a:p>
-            <a:pPr algn="ctr" indent="0" marL="0">
-              <a:buNone/>
-            </a:pPr>
-            <a:r>
-              <a:rPr lang="en-US" sz="1350" b="1" dirty="0">
-                <a:solidFill>
-                  <a:schemeClr val="tx1"/>
-                </a:solidFill>
-              </a:rPr>
-              <a:t>FDA 撤销批准</a:t>
-            </a:r>
-            <a:endParaRPr lang="en-US" sz="1350" dirty="0"/>
-          </a:p>
-        </p:txBody>
-      </p:sp>
-      <p:sp>
-        <p:nvSpPr>
-          <p:cNvPr id="20" name="label-156"/>
-          <p:cNvSpPr txBox="1"/>
-          <p:nvPr/>
-        </p:nvSpPr>
-        <p:spPr>
-          <a:xfrm>
-            <a:off x="9539935" y="2670048"/>
-            <a:ext cx="2560320" cy="274320"/>
-          </a:xfrm>
-          <a:prstGeom prst="rect">
-            <a:avLst/>
-          </a:prstGeom>
-          <a:noFill/>
-          <a:ln/>
-        </p:spPr>
-        <p:txBody>
-          <a:bodyPr wrap="square" lIns="0" tIns="0" rIns="0" bIns="0" rtlCol="0" anchor="t"/>
-          <a:lstStyle/>
-          <a:p>
-            <a:pPr algn="ctr" indent="0" marL="0">
-              <a:buNone/>
-            </a:pPr>
-            <a:r>
-              <a:rPr lang="en-US" sz="1150" dirty="0">
-                <a:solidFill>
-                  <a:schemeClr val="accent6"/>
-                </a:solidFill>
-              </a:rPr>
-              <a:t>药品退出市场</a:t>
-            </a:r>
-            <a:endParaRPr lang="en-US" sz="1150" dirty="0"/>
-          </a:p>
-        </p:txBody>
-      </p:sp>
-      <p:sp>
-        <p:nvSpPr>
-          <p:cNvPr id="21" name="card-157"/>
-          <p:cNvSpPr/>
-          <p:nvPr/>
-        </p:nvSpPr>
-        <p:spPr>
-          <a:xfrm>
-            <a:off x="548640" y="3200400"/>
-            <a:ext cx="6949440" cy="2743200"/>
+              <a:t>文献：HOPE 试验，NEJM 2019（PMID 31199090）</a:t>
+            </a:r>
+            <a:endParaRPr lang="en-US" sz="1000" dirty="0"/>
+          </a:p>
+        </p:txBody>
+      </p:sp>
+      <p:sp>
+        <p:nvSpPr>
+          <p:cNvPr id="10" name="card-147"/>
+          <p:cNvSpPr/>
+          <p:nvPr/>
+        </p:nvSpPr>
+        <p:spPr>
+          <a:xfrm>
+            <a:off x="6233008" y="1600200"/>
+            <a:ext cx="5410048" cy="4343400"/>
           </a:xfrm>
           <a:prstGeom prst="roundRect">
             <a:avLst>
-              <a:gd name="adj" fmla="val 3333"/>
+              <a:gd name="adj" fmla="val 2105"/>
             </a:avLst>
           </a:prstGeom>
           <a:solidFill>
@@ -12587,14 +12395,14 @@
       </p:sp>
       <p:sp>
         <p:nvSpPr>
-          <p:cNvPr id="22" name="label-158"/>
+          <p:cNvPr id="11" name="label-148"/>
           <p:cNvSpPr txBox="1"/>
           <p:nvPr/>
         </p:nvSpPr>
         <p:spPr>
           <a:xfrm>
-            <a:off x="777240" y="3310128"/>
-            <a:ext cx="6492240" cy="310896"/>
+            <a:off x="6507328" y="1755648"/>
+            <a:ext cx="4861408" cy="329184"/>
           </a:xfrm>
           <a:prstGeom prst="rect">
             <a:avLst/>
@@ -12603,7 +12411,7 @@
           <a:ln/>
         </p:spPr>
         <p:txBody>
-          <a:bodyPr wrap="square" lIns="0" tIns="0" rIns="0" bIns="0" rtlCol="0" anchor="ctr"/>
+          <a:bodyPr wrap="square" lIns="0" tIns="0" rIns="0" bIns="0" rtlCol="0" anchor="t"/>
           <a:lstStyle/>
           <a:p>
             <a:pPr algn="l" indent="0" marL="0">
@@ -12615,15 +12423,51 @@
                   <a:schemeClr val="tx2"/>
                 </a:solidFill>
               </a:rPr>
-              <a:t>账本里发生了什么（结论 A：“17-OHPC 可降低早产风险”）</a:t>
+              <a:t>案例二：Makena（17-OHPC），预防早产</a:t>
             </a:r>
             <a:endParaRPr lang="en-US" sz="1400" dirty="0"/>
+          </a:p>
+        </p:txBody>
+      </p:sp>
+      <p:sp>
+        <p:nvSpPr>
+          <p:cNvPr id="12" name="label-149"/>
+          <p:cNvSpPr txBox="1"/>
+          <p:nvPr/>
+        </p:nvSpPr>
+        <p:spPr>
+          <a:xfrm>
+            <a:off x="6507328" y="2103120"/>
+            <a:ext cx="4861408" cy="274320"/>
+          </a:xfrm>
+          <a:prstGeom prst="rect">
+            <a:avLst/>
+          </a:prstGeom>
+          <a:noFill/>
+          <a:ln/>
+        </p:spPr>
+        <p:txBody>
+          <a:bodyPr wrap="square" lIns="0" tIns="0" rIns="0" bIns="0" rtlCol="0" anchor="t"/>
+          <a:lstStyle/>
+          <a:p>
+            <a:pPr algn="l" indent="0" marL="0">
+              <a:buNone/>
+            </a:pPr>
+            <a:r>
+              <a:rPr lang="en-US" sz="1150" b="1" dirty="0">
+                <a:solidFill>
+                  <a:schemeClr val="accent3"/>
+                </a:solidFill>
+              </a:rPr>
+              <a:t>看点：独立证据线方向相反时，保留分歧、不替人裁决</a:t>
+            </a:r>
+            <a:endParaRPr lang="en-US" sz="1150" dirty="0"/>
           </a:p>
         </p:txBody>
       </p:sp>
       <p:graphicFrame>
         <p:nvGraphicFramePr>
-          <p:cNvPr id="8" name="table-159"/>
+          <p:cNvPr id="15" name="table-150"/>
           <p:cNvGraphicFramePr>
             <a:graphicFrameLocks noGrp="1"/>
           </p:cNvGraphicFramePr>
@@ -12636,19 +12480,19 @@
           </p:nvPr>
         </p:nvGraphicFramePr>
         <p:xfrm>
-          <a:off x="777240" y="3730752"/>
-          <a:ext cx="6492240" cy="914400"/>
+          <a:off x="6507328" y="2514600"/>
+          <a:ext cx="4861408" cy="914400"/>
         </p:xfrm>
         <a:graphic>
           <a:graphicData uri="http://schemas.openxmlformats.org/drawingml/2006/table">
             <a:tbl>
               <a:tblPr/>
               <a:tblGrid>
-                <a:gridCol w="685800"/>
-                <a:gridCol w="3063240"/>
-                <a:gridCol w="2743200"/>
+                <a:gridCol w="566928"/>
+                <a:gridCol w="2057400"/>
+                <a:gridCol w="2237080"/>
               </a:tblGrid>
-              <a:tr h="329184">
+              <a:tr h="365760">
                 <a:tc>
                   <a:txBody>
                     <a:bodyPr/>
@@ -12658,7 +12502,7 @@
                         <a:buNone/>
                       </a:pPr>
                       <a:r>
-                        <a:rPr lang="en-US" sz="1150" b="1" dirty="0">
+                        <a:rPr lang="en-US" sz="1100" b="1" dirty="0">
                           <a:solidFill>
                             <a:srgbClr val="0F2A44"/>
                           </a:solidFill>
@@ -12668,14 +12512,14 @@
                         </a:rPr>
                         <a:t>时间</a:t>
                       </a:r>
-                      <a:endParaRPr lang="en-US" sz="1150" dirty="0">
+                      <a:endParaRPr lang="en-US" sz="1100" dirty="0">
                         <a:latin typeface="Microsoft YaHei" charset="0"/>
                         <a:ea typeface="Microsoft YaHei" charset="0"/>
                         <a:cs typeface="Microsoft YaHei" charset="0"/>
                       </a:endParaRPr>
                     </a:p>
                   </a:txBody>
-                  <a:tcPr marL="73152" marR="73152" marT="27432" marB="27432" anchor="ctr">
+                  <a:tcPr marL="64008" marR="64008" marT="27432" marB="27432" anchor="ctr">
                     <a:lnL w="6350" cap="flat" cmpd="sng" algn="ctr">
                       <a:solidFill>
                         <a:srgbClr val="E6D3BC"/>
@@ -12726,7 +12570,7 @@
                         <a:buNone/>
                       </a:pPr>
                       <a:r>
-                        <a:rPr lang="en-US" sz="1150" b="1" dirty="0">
+                        <a:rPr lang="en-US" sz="1100" b="1" dirty="0">
                           <a:solidFill>
                             <a:srgbClr val="0F2A44"/>
                           </a:solidFill>
@@ -12734,16 +12578,16 @@
                           <a:ea typeface="Microsoft YaHei" pitchFamily="34" charset="-122"/>
                           <a:cs typeface="Microsoft YaHei" pitchFamily="34" charset="-120"/>
                         </a:rPr>
-                        <a:t>账本动作</a:t>
+                        <a:t>事件</a:t>
                       </a:r>
-                      <a:endParaRPr lang="en-US" sz="1150" dirty="0">
+                      <a:endParaRPr lang="en-US" sz="1100" dirty="0">
                         <a:latin typeface="Microsoft YaHei" charset="0"/>
                         <a:ea typeface="Microsoft YaHei" charset="0"/>
                         <a:cs typeface="Microsoft YaHei" charset="0"/>
                       </a:endParaRPr>
                     </a:p>
                   </a:txBody>
-                  <a:tcPr marL="73152" marR="73152" marT="27432" marB="27432" anchor="ctr">
+                  <a:tcPr marL="64008" marR="64008" marT="27432" marB="27432" anchor="ctr">
                     <a:lnL w="6350" cap="flat" cmpd="sng" algn="ctr">
                       <a:solidFill>
                         <a:srgbClr val="E6D3BC"/>
@@ -12794,7 +12638,7 @@
                         <a:buNone/>
                       </a:pPr>
                       <a:r>
-                        <a:rPr lang="en-US" sz="1150" b="1" dirty="0">
+                        <a:rPr lang="en-US" sz="1100" b="1" dirty="0">
                           <a:solidFill>
                             <a:srgbClr val="0F2A44"/>
                           </a:solidFill>
@@ -12802,16 +12646,16 @@
                           <a:ea typeface="Microsoft YaHei" pitchFamily="34" charset="-122"/>
                           <a:cs typeface="Microsoft YaHei" pitchFamily="34" charset="-120"/>
                         </a:rPr>
-                        <a:t>结论 A 的状态</a:t>
+                        <a:t>结论“可降低早产风险”</a:t>
                       </a:r>
-                      <a:endParaRPr lang="en-US" sz="1150" dirty="0">
+                      <a:endParaRPr lang="en-US" sz="1100" dirty="0">
                         <a:latin typeface="Microsoft YaHei" charset="0"/>
                         <a:ea typeface="Microsoft YaHei" charset="0"/>
                         <a:cs typeface="Microsoft YaHei" charset="0"/>
                       </a:endParaRPr>
                     </a:p>
                   </a:txBody>
-                  <a:tcPr marL="73152" marR="73152" marT="27432" marB="27432" anchor="ctr">
+                  <a:tcPr marL="64008" marR="64008" marT="27432" marB="27432" anchor="ctr">
                     <a:lnL w="6350" cap="flat" cmpd="sng" algn="ctr">
                       <a:solidFill>
                         <a:srgbClr val="E6D3BC"/>
@@ -12854,7 +12698,7 @@
                   </a:tcPr>
                 </a:tc>
               </a:tr>
-              <a:tr h="457200">
+              <a:tr h="384048">
                 <a:tc>
                   <a:txBody>
                     <a:bodyPr/>
@@ -12864,7 +12708,7 @@
                         <a:buNone/>
                       </a:pPr>
                       <a:r>
-                        <a:rPr lang="en-US" sz="1150" dirty="0">
+                        <a:rPr lang="en-US" sz="1100" dirty="0">
                           <a:solidFill>
                             <a:srgbClr val="1B2533"/>
                           </a:solidFill>
@@ -12872,16 +12716,16 @@
                           <a:ea typeface="Microsoft YaHei" pitchFamily="34" charset="-122"/>
                           <a:cs typeface="Microsoft YaHei" pitchFamily="34" charset="-120"/>
                         </a:rPr>
-                        <a:t>2011</a:t>
+                        <a:t>2003</a:t>
                       </a:r>
-                      <a:endParaRPr lang="en-US" sz="1150" dirty="0">
+                      <a:endParaRPr lang="en-US" sz="1100" dirty="0">
                         <a:latin typeface="Microsoft YaHei" charset="0"/>
                         <a:ea typeface="Microsoft YaHei" charset="0"/>
                         <a:cs typeface="Microsoft YaHei" charset="0"/>
                       </a:endParaRPr>
                     </a:p>
                   </a:txBody>
-                  <a:tcPr marL="73152" marR="73152" marT="27432" marB="27432" anchor="ctr">
+                  <a:tcPr marL="64008" marR="64008" marT="27432" marB="27432" anchor="ctr">
                     <a:lnL w="6350" cap="flat" cmpd="sng" algn="ctr">
                       <a:solidFill>
                         <a:srgbClr val="E6D3BC"/>
@@ -12932,7 +12776,7 @@
                         <a:buNone/>
                       </a:pPr>
                       <a:r>
-                        <a:rPr lang="en-US" sz="1150" dirty="0">
+                        <a:rPr lang="en-US" sz="1100" dirty="0">
                           <a:solidFill>
                             <a:srgbClr val="1B2533"/>
                           </a:solidFill>
@@ -12940,16 +12784,16 @@
                           <a:ea typeface="Microsoft YaHei" pitchFamily="34" charset="-122"/>
                           <a:cs typeface="Microsoft YaHei" pitchFamily="34" charset="-120"/>
                         </a:rPr>
-                        <a:t>Meis 试验、批准两条证据通过门禁</a:t>
+                        <a:t>Meis 试验：早产风险下降</a:t>
                       </a:r>
-                      <a:endParaRPr lang="en-US" sz="1150" dirty="0">
+                      <a:endParaRPr lang="en-US" sz="1100" dirty="0">
                         <a:latin typeface="Microsoft YaHei" charset="0"/>
                         <a:ea typeface="Microsoft YaHei" charset="0"/>
                         <a:cs typeface="Microsoft YaHei" charset="0"/>
                       </a:endParaRPr>
                     </a:p>
                   </a:txBody>
-                  <a:tcPr marL="73152" marR="73152" marT="27432" marB="27432" anchor="ctr">
+                  <a:tcPr marL="64008" marR="64008" marT="27432" marB="27432" anchor="ctr">
                     <a:lnL w="6350" cap="flat" cmpd="sng" algn="ctr">
                       <a:solidFill>
                         <a:srgbClr val="E6D3BC"/>
@@ -13000,7 +12844,7 @@
                         <a:buNone/>
                       </a:pPr>
                       <a:r>
-                        <a:rPr lang="en-US" sz="1150" b="1" dirty="0">
+                        <a:rPr lang="en-US" sz="1100" b="1" dirty="0">
                           <a:solidFill>
                             <a:srgbClr val="0E8A7E"/>
                           </a:solidFill>
@@ -13008,16 +12852,16 @@
                           <a:ea typeface="Microsoft YaHei" pitchFamily="34" charset="-122"/>
                           <a:cs typeface="Microsoft YaHei" pitchFamily="34" charset="-120"/>
                         </a:rPr>
-                        <a:t>已验证</a:t>
+                        <a:t>支持（1 条证据线）</a:t>
                       </a:r>
-                      <a:endParaRPr lang="en-US" sz="1150" dirty="0">
+                      <a:endParaRPr lang="en-US" sz="1100" dirty="0">
                         <a:latin typeface="Microsoft YaHei" charset="0"/>
                         <a:ea typeface="Microsoft YaHei" charset="0"/>
                         <a:cs typeface="Microsoft YaHei" charset="0"/>
                       </a:endParaRPr>
                     </a:p>
                   </a:txBody>
-                  <a:tcPr marL="73152" marR="73152" marT="27432" marB="27432" anchor="ctr">
+                  <a:tcPr marL="64008" marR="64008" marT="27432" marB="27432" anchor="ctr">
                     <a:lnL w="6350" cap="flat" cmpd="sng" algn="ctr">
                       <a:solidFill>
                         <a:srgbClr val="E6D3BC"/>
@@ -13060,7 +12904,7 @@
                   </a:tcPr>
                 </a:tc>
               </a:tr>
-              <a:tr h="566928">
+              <a:tr h="502920">
                 <a:tc>
                   <a:txBody>
                     <a:bodyPr/>
@@ -13070,7 +12914,7 @@
                         <a:buNone/>
                       </a:pPr>
                       <a:r>
-                        <a:rPr lang="en-US" sz="1150" dirty="0">
+                        <a:rPr lang="en-US" sz="1100" dirty="0">
                           <a:solidFill>
                             <a:srgbClr val="1B2533"/>
                           </a:solidFill>
@@ -13080,14 +12924,14 @@
                         </a:rPr>
                         <a:t>2020</a:t>
                       </a:r>
-                      <a:endParaRPr lang="en-US" sz="1150" dirty="0">
+                      <a:endParaRPr lang="en-US" sz="1100" dirty="0">
                         <a:latin typeface="Microsoft YaHei" charset="0"/>
                         <a:ea typeface="Microsoft YaHei" charset="0"/>
                         <a:cs typeface="Microsoft YaHei" charset="0"/>
                       </a:endParaRPr>
                     </a:p>
                   </a:txBody>
-                  <a:tcPr marL="73152" marR="73152" marT="27432" marB="27432" anchor="ctr">
+                  <a:tcPr marL="64008" marR="64008" marT="27432" marB="27432" anchor="ctr">
                     <a:lnL w="6350" cap="flat" cmpd="sng" algn="ctr">
                       <a:solidFill>
                         <a:srgbClr val="E6D3BC"/>
@@ -13138,7 +12982,7 @@
                         <a:buNone/>
                       </a:pPr>
                       <a:r>
-                        <a:rPr lang="en-US" sz="1150" dirty="0">
+                        <a:rPr lang="en-US" sz="1100" dirty="0">
                           <a:solidFill>
                             <a:srgbClr val="1B2533"/>
                           </a:solidFill>
@@ -13146,16 +12990,16 @@
                           <a:ea typeface="Microsoft YaHei" pitchFamily="34" charset="-122"/>
                           <a:cs typeface="Microsoft YaHei" pitchFamily="34" charset="-120"/>
                         </a:rPr>
-                        <a:t>PROLONG 作为反证录入</a:t>
+                        <a:t>确证试验 PROLONG：未见效果</a:t>
                       </a:r>
-                      <a:endParaRPr lang="en-US" sz="1150" dirty="0">
+                      <a:endParaRPr lang="en-US" sz="1100" dirty="0">
                         <a:latin typeface="Microsoft YaHei" charset="0"/>
                         <a:ea typeface="Microsoft YaHei" charset="0"/>
                         <a:cs typeface="Microsoft YaHei" charset="0"/>
                       </a:endParaRPr>
                     </a:p>
                   </a:txBody>
-                  <a:tcPr marL="73152" marR="73152" marT="27432" marB="27432" anchor="ctr">
+                  <a:tcPr marL="64008" marR="64008" marT="27432" marB="27432" anchor="ctr">
                     <a:lnL w="6350" cap="flat" cmpd="sng" algn="ctr">
                       <a:solidFill>
                         <a:srgbClr val="E6D3BC"/>
@@ -13206,7 +13050,7 @@
                         <a:buNone/>
                       </a:pPr>
                       <a:r>
-                        <a:rPr lang="en-US" sz="1150" b="1" dirty="0">
+                        <a:rPr lang="en-US" sz="1100" b="1" dirty="0">
                           <a:solidFill>
                             <a:srgbClr val="C9792A"/>
                           </a:solidFill>
@@ -13214,16 +13058,16 @@
                           <a:ea typeface="Microsoft YaHei" pitchFamily="34" charset="-122"/>
                           <a:cs typeface="Microsoft YaHei" pitchFamily="34" charset="-120"/>
                         </a:rPr>
-                        <a:t>→ 有争议：两项试验结论相反，分歧被保留</a:t>
+                        <a:t>→ 有争议：两条独立证据线相反</a:t>
                       </a:r>
-                      <a:endParaRPr lang="en-US" sz="1150" dirty="0">
+                      <a:endParaRPr lang="en-US" sz="1100" dirty="0">
                         <a:latin typeface="Microsoft YaHei" charset="0"/>
                         <a:ea typeface="Microsoft YaHei" charset="0"/>
                         <a:cs typeface="Microsoft YaHei" charset="0"/>
                       </a:endParaRPr>
                     </a:p>
                   </a:txBody>
-                  <a:tcPr marL="73152" marR="73152" marT="27432" marB="27432" anchor="ctr">
+                  <a:tcPr marL="64008" marR="64008" marT="27432" marB="27432" anchor="ctr">
                     <a:lnL w="6350" cap="flat" cmpd="sng" algn="ctr">
                       <a:solidFill>
                         <a:srgbClr val="E6D3BC"/>
@@ -13266,7 +13110,7 @@
                   </a:tcPr>
                 </a:tc>
               </a:tr>
-              <a:tr h="658368">
+              <a:tr h="384048">
                 <a:tc>
                   <a:txBody>
                     <a:bodyPr/>
@@ -13276,7 +13120,7 @@
                         <a:buNone/>
                       </a:pPr>
                       <a:r>
-                        <a:rPr lang="en-US" sz="1150" dirty="0">
+                        <a:rPr lang="en-US" sz="1100" dirty="0">
                           <a:solidFill>
                             <a:srgbClr val="1B2533"/>
                           </a:solidFill>
@@ -13286,14 +13130,14 @@
                         </a:rPr>
                         <a:t>2023</a:t>
                       </a:r>
-                      <a:endParaRPr lang="en-US" sz="1150" dirty="0">
+                      <a:endParaRPr lang="en-US" sz="1100" dirty="0">
                         <a:latin typeface="Microsoft YaHei" charset="0"/>
                         <a:ea typeface="Microsoft YaHei" charset="0"/>
                         <a:cs typeface="Microsoft YaHei" charset="0"/>
                       </a:endParaRPr>
                     </a:p>
                   </a:txBody>
-                  <a:tcPr marL="73152" marR="73152" marT="27432" marB="27432" anchor="ctr">
+                  <a:tcPr marL="64008" marR="64008" marT="27432" marB="27432" anchor="ctr">
                     <a:lnL w="6350" cap="flat" cmpd="sng" algn="ctr">
                       <a:solidFill>
                         <a:srgbClr val="E6D3BC"/>
@@ -13344,7 +13188,7 @@
                         <a:buNone/>
                       </a:pPr>
                       <a:r>
-                        <a:rPr lang="en-US" sz="1150" dirty="0">
+                        <a:rPr lang="en-US" sz="1100" dirty="0">
                           <a:solidFill>
                             <a:srgbClr val="1B2533"/>
                           </a:solidFill>
@@ -13352,16 +13196,16 @@
                           <a:ea typeface="Microsoft YaHei" pitchFamily="34" charset="-122"/>
                           <a:cs typeface="Microsoft YaHei" pitchFamily="34" charset="-120"/>
                         </a:rPr>
-                        <a:t>批准证据撤销；新结论 A′“确证试验未见效果”通过验证</a:t>
+                        <a:t>FDA 撤销批准</a:t>
                       </a:r>
-                      <a:endParaRPr lang="en-US" sz="1150" dirty="0">
+                      <a:endParaRPr lang="en-US" sz="1100" dirty="0">
                         <a:latin typeface="Microsoft YaHei" charset="0"/>
                         <a:ea typeface="Microsoft YaHei" charset="0"/>
                         <a:cs typeface="Microsoft YaHei" charset="0"/>
                       </a:endParaRPr>
                     </a:p>
                   </a:txBody>
-                  <a:tcPr marL="73152" marR="73152" marT="27432" marB="27432" anchor="ctr">
+                  <a:tcPr marL="64008" marR="64008" marT="27432" marB="27432" anchor="ctr">
                     <a:lnL w="6350" cap="flat" cmpd="sng" algn="ctr">
                       <a:solidFill>
                         <a:srgbClr val="E6D3BC"/>
@@ -13412,24 +13256,24 @@
                         <a:buNone/>
                       </a:pPr>
                       <a:r>
-                        <a:rPr lang="en-US" sz="1150" b="1" dirty="0">
+                        <a:rPr lang="en-US" sz="1100" b="1" dirty="0">
                           <a:solidFill>
-                            <a:srgbClr val="1F5F99"/>
+                            <a:srgbClr val="B4233A"/>
                           </a:solidFill>
                           <a:latin typeface="Microsoft YaHei" pitchFamily="34" charset="0"/>
                           <a:ea typeface="Microsoft YaHei" pitchFamily="34" charset="-122"/>
                           <a:cs typeface="Microsoft YaHei" pitchFamily="34" charset="-120"/>
                         </a:rPr>
-                        <a:t>→ 已取代：由 A′ 取代，历史可查</a:t>
+                        <a:t>→ 降级，并列出双方证据</a:t>
                       </a:r>
-                      <a:endParaRPr lang="en-US" sz="1150" dirty="0">
+                      <a:endParaRPr lang="en-US" sz="1100" dirty="0">
                         <a:latin typeface="Microsoft YaHei" charset="0"/>
                         <a:ea typeface="Microsoft YaHei" charset="0"/>
                         <a:cs typeface="Microsoft YaHei" charset="0"/>
                       </a:endParaRPr>
                     </a:p>
                   </a:txBody>
-                  <a:tcPr marL="73152" marR="73152" marT="27432" marB="27432" anchor="ctr">
+                  <a:tcPr marL="64008" marR="64008" marT="27432" marB="27432" anchor="ctr">
                     <a:lnL w="6350" cap="flat" cmpd="sng" algn="ctr">
                       <a:solidFill>
                         <a:srgbClr val="E6D3BC"/>
@@ -13478,14 +13322,14 @@
       </p:graphicFrame>
       <p:sp>
         <p:nvSpPr>
-          <p:cNvPr id="24" name="label-160"/>
+          <p:cNvPr id="14" name="label-151"/>
           <p:cNvSpPr txBox="1"/>
           <p:nvPr/>
         </p:nvSpPr>
         <p:spPr>
           <a:xfrm>
-            <a:off x="7818120" y="3246120"/>
-            <a:ext cx="3824935" cy="365760"/>
+            <a:off x="6507328" y="4251960"/>
+            <a:ext cx="4861408" cy="914400"/>
           </a:xfrm>
           <a:prstGeom prst="rect">
             <a:avLst/>
@@ -13494,61 +13338,19 @@
           <a:ln/>
         </p:spPr>
         <p:txBody>
-          <a:bodyPr wrap="square" lIns="0" tIns="0" rIns="0" bIns="0" rtlCol="0" anchor="ctr"/>
+          <a:bodyPr wrap="square" lIns="0" tIns="0" rIns="0" bIns="0" rtlCol="0" anchor="t"/>
           <a:lstStyle/>
           <a:p>
             <a:pPr algn="l" indent="0" marL="0">
               <a:buNone/>
             </a:pPr>
             <a:r>
-              <a:rPr lang="en-US" sz="1600" b="1" dirty="0">
-                <a:solidFill>
-                  <a:schemeClr val="tx2"/>
-                </a:solidFill>
-              </a:rPr>
-              <a:t>这个案例说明</a:t>
-            </a:r>
-            <a:endParaRPr lang="en-US" sz="1600" dirty="0"/>
-          </a:p>
-        </p:txBody>
-      </p:sp>
-      <p:sp>
-        <p:nvSpPr>
-          <p:cNvPr id="25" name="badge-161"/>
-          <p:cNvSpPr/>
-          <p:nvPr/>
-        </p:nvSpPr>
-        <p:spPr>
-          <a:xfrm>
-            <a:off x="7818120" y="3767328"/>
-            <a:ext cx="310896" cy="310896"/>
-          </a:xfrm>
-          <a:prstGeom prst="ellipse">
-            <a:avLst/>
-          </a:prstGeom>
-          <a:solidFill>
-            <a:schemeClr val="accent1"/>
-          </a:solidFill>
-          <a:ln w="6350">
-            <a:solidFill>
-              <a:schemeClr val="accent1"/>
-            </a:solidFill>
-          </a:ln>
-        </p:spPr>
-        <p:txBody>
-          <a:bodyPr wrap="square" lIns="0" tIns="0" rIns="0" bIns="0" rtlCol="0" anchor="ctr"/>
-          <a:lstStyle/>
-          <a:p>
-            <a:pPr algn="ctr" indent="0" marL="0">
-              <a:buNone/>
-            </a:pPr>
-            <a:r>
-              <a:rPr lang="en-US" sz="1200" b="1" dirty="0">
-                <a:solidFill>
-                  <a:schemeClr val="bg1"/>
-                </a:solidFill>
-              </a:rPr>
-              <a:t>1</a:t>
+              <a:rPr lang="en-US" sz="1200" dirty="0">
+                <a:solidFill>
+                  <a:schemeClr val="tx1"/>
+                </a:solidFill>
+              </a:rPr>
+              <a:t>两项试验来自不同受试者，是两条独立证据线；系统把双方都摆出来，标为“有争议”，由专家判断。</a:t>
             </a:r>
             <a:endParaRPr lang="en-US" sz="1200" dirty="0"/>
           </a:p>
@@ -13556,14 +13358,14 @@
       </p:sp>
       <p:sp>
         <p:nvSpPr>
-          <p:cNvPr id="26" name="label-162"/>
+          <p:cNvPr id="15" name="label-152"/>
           <p:cNvSpPr txBox="1"/>
           <p:nvPr/>
         </p:nvSpPr>
         <p:spPr>
           <a:xfrm>
-            <a:off x="8257032" y="3749040"/>
-            <a:ext cx="3386023" cy="274320"/>
+            <a:off x="6507328" y="5257800"/>
+            <a:ext cx="4861408" cy="457200"/>
           </a:xfrm>
           <a:prstGeom prst="rect">
             <a:avLst/>
@@ -13579,27 +13381,27 @@
               <a:buNone/>
             </a:pPr>
             <a:r>
-              <a:rPr lang="en-US" sz="1300" b="1" dirty="0">
-                <a:solidFill>
-                  <a:schemeClr val="tx2"/>
-                </a:solidFill>
-              </a:rPr>
-              <a:t>新证据不覆盖旧证据</a:t>
-            </a:r>
-            <a:endParaRPr lang="en-US" sz="1300" dirty="0"/>
-          </a:p>
-        </p:txBody>
-      </p:sp>
-      <p:sp>
-        <p:nvSpPr>
-          <p:cNvPr id="27" name="label-163"/>
+              <a:rPr lang="en-US" sz="1000" dirty="0">
+                <a:solidFill>
+                  <a:schemeClr val="accent6"/>
+                </a:solidFill>
+              </a:rPr>
+              <a:t>文献：Meis 等，NEJM 2003（PMID 12802023）；PROLONG，Am J Perinatol 2020（PMID 31652479）</a:t>
+            </a:r>
+            <a:endParaRPr lang="en-US" sz="1000" dirty="0"/>
+          </a:p>
+        </p:txBody>
+      </p:sp>
+      <p:sp>
+        <p:nvSpPr>
+          <p:cNvPr id="16" name="label-153"/>
           <p:cNvSpPr txBox="1"/>
           <p:nvPr/>
         </p:nvSpPr>
         <p:spPr>
           <a:xfrm>
-            <a:off x="8257032" y="4032504"/>
-            <a:ext cx="3386023" cy="411480"/>
+            <a:off x="548640" y="6053328"/>
+            <a:ext cx="11094415" cy="274320"/>
           </a:xfrm>
           <a:prstGeom prst="rect">
             <a:avLst/>
@@ -13615,276 +13417,12 @@
               <a:buNone/>
             </a:pPr>
             <a:r>
-              <a:rPr lang="en-US" sz="1150" dirty="0">
-                <a:solidFill>
-                  <a:schemeClr val="tx1"/>
-                </a:solidFill>
-              </a:rPr>
-              <a:t>Meis 试验仍在账本中，两项试验的分歧被如实记录。</a:t>
-            </a:r>
-            <a:endParaRPr lang="en-US" sz="1150" dirty="0"/>
-          </a:p>
-        </p:txBody>
-      </p:sp>
-      <p:sp>
-        <p:nvSpPr>
-          <p:cNvPr id="28" name="badge-164"/>
-          <p:cNvSpPr/>
-          <p:nvPr/>
-        </p:nvSpPr>
-        <p:spPr>
-          <a:xfrm>
-            <a:off x="7818120" y="4498848"/>
-            <a:ext cx="310896" cy="310896"/>
-          </a:xfrm>
-          <a:prstGeom prst="ellipse">
-            <a:avLst/>
-          </a:prstGeom>
-          <a:solidFill>
-            <a:schemeClr val="accent1"/>
-          </a:solidFill>
-          <a:ln w="6350">
-            <a:solidFill>
-              <a:schemeClr val="accent1"/>
-            </a:solidFill>
-          </a:ln>
-        </p:spPr>
-        <p:txBody>
-          <a:bodyPr wrap="square" lIns="0" tIns="0" rIns="0" bIns="0" rtlCol="0" anchor="ctr"/>
-          <a:lstStyle/>
-          <a:p>
-            <a:pPr algn="ctr" indent="0" marL="0">
-              <a:buNone/>
-            </a:pPr>
-            <a:r>
-              <a:rPr lang="en-US" sz="1200" b="1" dirty="0">
-                <a:solidFill>
-                  <a:schemeClr val="bg1"/>
-                </a:solidFill>
-              </a:rPr>
-              <a:t>2</a:t>
-            </a:r>
-            <a:endParaRPr lang="en-US" sz="1200" dirty="0"/>
-          </a:p>
-        </p:txBody>
-      </p:sp>
-      <p:sp>
-        <p:nvSpPr>
-          <p:cNvPr id="29" name="label-165"/>
-          <p:cNvSpPr txBox="1"/>
-          <p:nvPr/>
-        </p:nvSpPr>
-        <p:spPr>
-          <a:xfrm>
-            <a:off x="8257032" y="4480560"/>
-            <a:ext cx="3386023" cy="274320"/>
-          </a:xfrm>
-          <a:prstGeom prst="rect">
-            <a:avLst/>
-          </a:prstGeom>
-          <a:noFill/>
-          <a:ln/>
-        </p:spPr>
-        <p:txBody>
-          <a:bodyPr wrap="square" lIns="0" tIns="0" rIns="0" bIns="0" rtlCol="0" anchor="t"/>
-          <a:lstStyle/>
-          <a:p>
-            <a:pPr algn="l" indent="0" marL="0">
-              <a:buNone/>
-            </a:pPr>
-            <a:r>
-              <a:rPr lang="en-US" sz="1300" b="1" dirty="0">
-                <a:solidFill>
-                  <a:schemeClr val="tx2"/>
-                </a:solidFill>
-              </a:rPr>
-              <a:t>不替人裁决</a:t>
-            </a:r>
-            <a:endParaRPr lang="en-US" sz="1300" dirty="0"/>
-          </a:p>
-        </p:txBody>
-      </p:sp>
-      <p:sp>
-        <p:nvSpPr>
-          <p:cNvPr id="30" name="label-166"/>
-          <p:cNvSpPr txBox="1"/>
-          <p:nvPr/>
-        </p:nvSpPr>
-        <p:spPr>
-          <a:xfrm>
-            <a:off x="8257032" y="4764024"/>
-            <a:ext cx="3386023" cy="411480"/>
-          </a:xfrm>
-          <a:prstGeom prst="rect">
-            <a:avLst/>
-          </a:prstGeom>
-          <a:noFill/>
-          <a:ln/>
-        </p:spPr>
-        <p:txBody>
-          <a:bodyPr wrap="square" lIns="0" tIns="0" rIns="0" bIns="0" rtlCol="0" anchor="t"/>
-          <a:lstStyle/>
-          <a:p>
-            <a:pPr algn="l" indent="0" marL="0">
-              <a:buNone/>
-            </a:pPr>
-            <a:r>
-              <a:rPr lang="en-US" sz="1150" dirty="0">
-                <a:solidFill>
-                  <a:schemeClr val="tx1"/>
-                </a:solidFill>
-              </a:rPr>
-              <a:t>证据冲突时标为“有争议”，等待专家复核。</a:t>
-            </a:r>
-            <a:endParaRPr lang="en-US" sz="1150" dirty="0"/>
-          </a:p>
-        </p:txBody>
-      </p:sp>
-      <p:sp>
-        <p:nvSpPr>
-          <p:cNvPr id="31" name="badge-167"/>
-          <p:cNvSpPr/>
-          <p:nvPr/>
-        </p:nvSpPr>
-        <p:spPr>
-          <a:xfrm>
-            <a:off x="7818120" y="5230368"/>
-            <a:ext cx="310896" cy="310896"/>
-          </a:xfrm>
-          <a:prstGeom prst="ellipse">
-            <a:avLst/>
-          </a:prstGeom>
-          <a:solidFill>
-            <a:schemeClr val="accent1"/>
-          </a:solidFill>
-          <a:ln w="6350">
-            <a:solidFill>
-              <a:schemeClr val="accent1"/>
-            </a:solidFill>
-          </a:ln>
-        </p:spPr>
-        <p:txBody>
-          <a:bodyPr wrap="square" lIns="0" tIns="0" rIns="0" bIns="0" rtlCol="0" anchor="ctr"/>
-          <a:lstStyle/>
-          <a:p>
-            <a:pPr algn="ctr" indent="0" marL="0">
-              <a:buNone/>
-            </a:pPr>
-            <a:r>
-              <a:rPr lang="en-US" sz="1200" b="1" dirty="0">
-                <a:solidFill>
-                  <a:schemeClr val="bg1"/>
-                </a:solidFill>
-              </a:rPr>
-              <a:t>3</a:t>
-            </a:r>
-            <a:endParaRPr lang="en-US" sz="1200" dirty="0"/>
-          </a:p>
-        </p:txBody>
-      </p:sp>
-      <p:sp>
-        <p:nvSpPr>
-          <p:cNvPr id="32" name="label-168"/>
-          <p:cNvSpPr txBox="1"/>
-          <p:nvPr/>
-        </p:nvSpPr>
-        <p:spPr>
-          <a:xfrm>
-            <a:off x="8257032" y="5212080"/>
-            <a:ext cx="3386023" cy="274320"/>
-          </a:xfrm>
-          <a:prstGeom prst="rect">
-            <a:avLst/>
-          </a:prstGeom>
-          <a:noFill/>
-          <a:ln/>
-        </p:spPr>
-        <p:txBody>
-          <a:bodyPr wrap="square" lIns="0" tIns="0" rIns="0" bIns="0" rtlCol="0" anchor="t"/>
-          <a:lstStyle/>
-          <a:p>
-            <a:pPr algn="l" indent="0" marL="0">
-              <a:buNone/>
-            </a:pPr>
-            <a:r>
-              <a:rPr lang="en-US" sz="1300" b="1" dirty="0">
-                <a:solidFill>
-                  <a:schemeClr val="tx2"/>
-                </a:solidFill>
-              </a:rPr>
-              <a:t>结论有继承关系</a:t>
-            </a:r>
-            <a:endParaRPr lang="en-US" sz="1300" dirty="0"/>
-          </a:p>
-        </p:txBody>
-      </p:sp>
-      <p:sp>
-        <p:nvSpPr>
-          <p:cNvPr id="33" name="label-169"/>
-          <p:cNvSpPr txBox="1"/>
-          <p:nvPr/>
-        </p:nvSpPr>
-        <p:spPr>
-          <a:xfrm>
-            <a:off x="8257032" y="5495544"/>
-            <a:ext cx="3386023" cy="411480"/>
-          </a:xfrm>
-          <a:prstGeom prst="rect">
-            <a:avLst/>
-          </a:prstGeom>
-          <a:noFill/>
-          <a:ln/>
-        </p:spPr>
-        <p:txBody>
-          <a:bodyPr wrap="square" lIns="0" tIns="0" rIns="0" bIns="0" rtlCol="0" anchor="t"/>
-          <a:lstStyle/>
-          <a:p>
-            <a:pPr algn="l" indent="0" marL="0">
-              <a:buNone/>
-            </a:pPr>
-            <a:r>
-              <a:rPr lang="en-US" sz="1150" dirty="0">
-                <a:solidFill>
-                  <a:schemeClr val="tx1"/>
-                </a:solidFill>
-              </a:rPr>
-              <a:t>A′ 取代 A；A 从验证到被取代的每一步都可追溯。</a:t>
-            </a:r>
-            <a:endParaRPr lang="en-US" sz="1150" dirty="0"/>
-          </a:p>
-        </p:txBody>
-      </p:sp>
-      <p:sp>
-        <p:nvSpPr>
-          <p:cNvPr id="34" name="label-170"/>
-          <p:cNvSpPr txBox="1"/>
-          <p:nvPr/>
-        </p:nvSpPr>
-        <p:spPr>
-          <a:xfrm>
-            <a:off x="548640" y="6053328"/>
-            <a:ext cx="11094415" cy="274320"/>
-          </a:xfrm>
-          <a:prstGeom prst="rect">
-            <a:avLst/>
-          </a:prstGeom>
-          <a:noFill/>
-          <a:ln/>
-        </p:spPr>
-        <p:txBody>
-          <a:bodyPr wrap="square" lIns="0" tIns="0" rIns="0" bIns="0" rtlCol="0" anchor="t"/>
-          <a:lstStyle/>
-          <a:p>
-            <a:pPr algn="l" indent="0" marL="0">
-              <a:buNone/>
-            </a:pPr>
-            <a:r>
               <a:rPr lang="en-US" sz="1000" dirty="0">
                 <a:solidFill>
                   <a:schemeClr val="accent6"/>
                 </a:solidFill>
               </a:rPr>
-              <a:t>文献：Meis 等，NEJM 2003（PMID 12802023）；PROLONG，Am J Perinatol 2020（PMID 31652479）。已写成自动化测试；“反证录入”和“结论取代”目前通过接口完成，界面入口待补。</a:t>
+              <a:t>两个案例已在 3.0 原型中写成自动化测试；实时核验的数据来源：撤稿库、ClinicalTrials.gov 试验状态、FDA 药品信息。</a:t>
             </a:r>
             <a:endParaRPr lang="en-US" sz="1000" dirty="0"/>
           </a:p>
@@ -13992,7 +13530,7 @@
                   <a:schemeClr val="tx2"/>
                 </a:solidFill>
               </a:rPr>
-              <a:t>设计点②③：分歧时先查什么，结论何时能下</a:t>
+              <a:t>实测：同源证据普遍存在，证据类型决定区分力</a:t>
             </a:r>
             <a:endParaRPr lang="en-US" sz="2800" dirty="0"/>
           </a:p>
@@ -14030,7 +13568,7 @@
                   <a:schemeClr val="accent6"/>
                 </a:solidFill>
               </a:rPr>
-              <a:t>A 类设计点 ② 与 ③：用实测数据决定先查什么；用统计校准决定能否下结论。</a:t>
+              <a:t>两项小规模实测，标签全部来自公开结局（获批 / 因疗效不足失败），无人工标注。</a:t>
             </a:r>
             <a:endParaRPr lang="en-US" sz="1500" dirty="0"/>
           </a:p>
@@ -14038,18 +13576,18 @@
       </p:sp>
       <p:sp>
         <p:nvSpPr>
-          <p:cNvPr id="4" name="card-171"/>
-          <p:cNvSpPr/>
-          <p:nvPr/>
-        </p:nvSpPr>
-        <p:spPr>
-          <a:xfrm>
-            <a:off x="548640" y="1554480"/>
-            <a:ext cx="6903720" cy="4526280"/>
+          <p:cNvPr id="4" name="card-154"/>
+          <p:cNvSpPr/>
+          <p:nvPr/>
+        </p:nvSpPr>
+        <p:spPr>
+          <a:xfrm>
+            <a:off x="548640" y="1600200"/>
+            <a:ext cx="5410048" cy="4434840"/>
           </a:xfrm>
           <a:prstGeom prst="roundRect">
             <a:avLst>
-              <a:gd name="adj" fmla="val 2020"/>
+              <a:gd name="adj" fmla="val 2062"/>
             </a:avLst>
           </a:prstGeom>
           <a:solidFill>
@@ -14065,13 +13603,13 @@
       </p:sp>
       <p:sp>
         <p:nvSpPr>
-          <p:cNvPr id="5" name="badge-172"/>
-          <p:cNvSpPr/>
-          <p:nvPr/>
-        </p:nvSpPr>
-        <p:spPr>
-          <a:xfrm>
-            <a:off x="822960" y="1737360"/>
+          <p:cNvPr id="5" name="badge-155"/>
+          <p:cNvSpPr/>
+          <p:nvPr/>
+        </p:nvSpPr>
+        <p:spPr>
+          <a:xfrm>
+            <a:off x="822960" y="1783080"/>
             <a:ext cx="384048" cy="384048"/>
           </a:xfrm>
           <a:prstGeom prst="ellipse">
@@ -14099,7 +13637,7 @@
                   <a:schemeClr val="bg1"/>
                 </a:solidFill>
               </a:rPr>
-              <a:t>2</a:t>
+              <a:t>1</a:t>
             </a:r>
             <a:endParaRPr lang="en-US" sz="1500" dirty="0"/>
           </a:p>
@@ -14107,14 +13645,14 @@
       </p:sp>
       <p:sp>
         <p:nvSpPr>
-          <p:cNvPr id="6" name="label-173"/>
+          <p:cNvPr id="6" name="label-156"/>
           <p:cNvSpPr txBox="1"/>
           <p:nvPr/>
         </p:nvSpPr>
         <p:spPr>
           <a:xfrm>
-            <a:off x="1325880" y="1709928"/>
-            <a:ext cx="5897880" cy="411480"/>
+            <a:off x="1325880" y="1755648"/>
+            <a:ext cx="4404208" cy="411480"/>
           </a:xfrm>
           <a:prstGeom prst="rect">
             <a:avLst/>
@@ -14130,71 +13668,426 @@
               <a:buNone/>
             </a:pPr>
             <a:r>
-              <a:rPr lang="en-US" sz="1700" b="1" dirty="0">
+              <a:rPr lang="en-US" sz="1600" b="1" dirty="0">
                 <a:solidFill>
                   <a:schemeClr val="tx2"/>
                 </a:solidFill>
               </a:rPr>
-              <a:t>信息增益取证：用实测数据决定先查什么</a:t>
-            </a:r>
-            <a:endParaRPr lang="en-US" sz="1700" dirty="0"/>
-          </a:p>
-        </p:txBody>
-      </p:sp>
-      <p:sp>
-        <p:nvSpPr>
-          <p:cNvPr id="7" name="box-174"/>
-          <p:cNvSpPr/>
-          <p:nvPr/>
-        </p:nvSpPr>
-        <p:spPr>
-          <a:xfrm>
-            <a:off x="822960" y="2194560"/>
-            <a:ext cx="6355080" cy="384048"/>
+              <a:t>检索到的证据有多少是同源的</a:t>
+            </a:r>
+            <a:endParaRPr lang="en-US" sz="1600" dirty="0"/>
+          </a:p>
+        </p:txBody>
+      </p:sp>
+      <p:sp>
+        <p:nvSpPr>
+          <p:cNvPr id="7" name="label-157"/>
+          <p:cNvSpPr txBox="1"/>
+          <p:nvPr/>
+        </p:nvSpPr>
+        <p:spPr>
+          <a:xfrm>
+            <a:off x="822960" y="2240280"/>
+            <a:ext cx="4861408" cy="457200"/>
+          </a:xfrm>
+          <a:prstGeom prst="rect">
+            <a:avLst/>
+          </a:prstGeom>
+          <a:noFill/>
+          <a:ln/>
+        </p:spPr>
+        <p:txBody>
+          <a:bodyPr wrap="square" lIns="0" tIns="0" rIns="0" bIns="0" rtlCol="0" anchor="t"/>
+          <a:lstStyle/>
+          <a:p>
+            <a:pPr algn="l" indent="0" marL="0">
+              <a:buNone/>
+            </a:pPr>
+            <a:r>
+              <a:rPr lang="en-US" sz="1100" dirty="0">
+                <a:solidFill>
+                  <a:schemeClr val="tx1"/>
+                </a:solidFill>
+              </a:rPr>
+              <a:t>94 个真实“药物–疾病”问题，系统自带文献检索取前 20 篇，共 1649 篇；按 PubMed 试验关联溯源。</a:t>
+            </a:r>
+            <a:endParaRPr lang="en-US" sz="1100" dirty="0"/>
+          </a:p>
+        </p:txBody>
+      </p:sp>
+      <p:sp>
+        <p:nvSpPr>
+          <p:cNvPr id="8" name="label-158"/>
+          <p:cNvSpPr txBox="1"/>
+          <p:nvPr/>
+        </p:nvSpPr>
+        <p:spPr>
+          <a:xfrm>
+            <a:off x="822960" y="2834640"/>
+            <a:ext cx="1417320" cy="640080"/>
+          </a:xfrm>
+          <a:prstGeom prst="rect">
+            <a:avLst/>
+          </a:prstGeom>
+          <a:noFill/>
+          <a:ln/>
+        </p:spPr>
+        <p:txBody>
+          <a:bodyPr wrap="square" lIns="0" tIns="0" rIns="0" bIns="0" rtlCol="0" anchor="ctr"/>
+          <a:lstStyle/>
+          <a:p>
+            <a:pPr algn="ctr" indent="0" marL="0">
+              <a:buNone/>
+            </a:pPr>
+            <a:r>
+              <a:rPr lang="en-US" sz="3000" b="1" dirty="0">
+                <a:solidFill>
+                  <a:schemeClr val="accent3"/>
+                </a:solidFill>
+              </a:rPr>
+              <a:t>40%</a:t>
+            </a:r>
+            <a:endParaRPr lang="en-US" sz="3000" dirty="0"/>
+          </a:p>
+        </p:txBody>
+      </p:sp>
+      <p:sp>
+        <p:nvSpPr>
+          <p:cNvPr id="9" name="label-159"/>
+          <p:cNvSpPr txBox="1"/>
+          <p:nvPr/>
+        </p:nvSpPr>
+        <p:spPr>
+          <a:xfrm>
+            <a:off x="2331720" y="2880360"/>
+            <a:ext cx="3352648" cy="594360"/>
+          </a:xfrm>
+          <a:prstGeom prst="rect">
+            <a:avLst/>
+          </a:prstGeom>
+          <a:noFill/>
+          <a:ln/>
+        </p:spPr>
+        <p:txBody>
+          <a:bodyPr wrap="square" lIns="0" tIns="0" rIns="0" bIns="0" rtlCol="0" anchor="ctr"/>
+          <a:lstStyle/>
+          <a:p>
+            <a:pPr algn="l" indent="0" marL="0">
+              <a:buNone/>
+            </a:pPr>
+            <a:r>
+              <a:rPr lang="en-US" sz="1150" dirty="0">
+                <a:solidFill>
+                  <a:schemeClr val="tx1"/>
+                </a:solidFill>
+              </a:rPr>
+              <a:t>含试验证据的问题中，</a:t>
+            </a:r>
+            <a:endParaRPr lang="en-US" sz="1150" dirty="0"/>
+          </a:p>
+          <a:p>
+            <a:pPr algn="l" indent="0" marL="0">
+              <a:buNone/>
+            </a:pPr>
+            <a:r>
+              <a:rPr lang="en-US" sz="1150" dirty="0">
+                <a:solidFill>
+                  <a:schemeClr val="tx1"/>
+                </a:solidFill>
+              </a:rPr>
+              <a:t>存在同源论文的比例（25 / 62）</a:t>
+            </a:r>
+            <a:endParaRPr lang="en-US" sz="1150" dirty="0"/>
+          </a:p>
+        </p:txBody>
+      </p:sp>
+      <p:sp>
+        <p:nvSpPr>
+          <p:cNvPr id="10" name="label-160"/>
+          <p:cNvSpPr txBox="1"/>
+          <p:nvPr/>
+        </p:nvSpPr>
+        <p:spPr>
+          <a:xfrm>
+            <a:off x="822960" y="3703320"/>
+            <a:ext cx="1417320" cy="640080"/>
+          </a:xfrm>
+          <a:prstGeom prst="rect">
+            <a:avLst/>
+          </a:prstGeom>
+          <a:noFill/>
+          <a:ln/>
+        </p:spPr>
+        <p:txBody>
+          <a:bodyPr wrap="square" lIns="0" tIns="0" rIns="0" bIns="0" rtlCol="0" anchor="ctr"/>
+          <a:lstStyle/>
+          <a:p>
+            <a:pPr algn="ctr" indent="0" marL="0">
+              <a:buNone/>
+            </a:pPr>
+            <a:r>
+              <a:rPr lang="en-US" sz="3000" b="1" dirty="0">
+                <a:solidFill>
+                  <a:schemeClr val="accent3"/>
+                </a:solidFill>
+              </a:rPr>
+              <a:t>29%</a:t>
+            </a:r>
+            <a:endParaRPr lang="en-US" sz="3000" dirty="0"/>
+          </a:p>
+        </p:txBody>
+      </p:sp>
+      <p:sp>
+        <p:nvSpPr>
+          <p:cNvPr id="11" name="label-161"/>
+          <p:cNvSpPr txBox="1"/>
+          <p:nvPr/>
+        </p:nvSpPr>
+        <p:spPr>
+          <a:xfrm>
+            <a:off x="2331720" y="3749040"/>
+            <a:ext cx="3352648" cy="594360"/>
+          </a:xfrm>
+          <a:prstGeom prst="rect">
+            <a:avLst/>
+          </a:prstGeom>
+          <a:noFill/>
+          <a:ln/>
+        </p:spPr>
+        <p:txBody>
+          <a:bodyPr wrap="square" lIns="0" tIns="0" rIns="0" bIns="0" rtlCol="0" anchor="ctr"/>
+          <a:lstStyle/>
+          <a:p>
+            <a:pPr algn="l" indent="0" marL="0">
+              <a:buNone/>
+            </a:pPr>
+            <a:r>
+              <a:rPr lang="en-US" sz="1150" dirty="0">
+                <a:solidFill>
+                  <a:schemeClr val="tx1"/>
+                </a:solidFill>
+              </a:rPr>
+              <a:t>试验类论文中，</a:t>
+            </a:r>
+            <a:endParaRPr lang="en-US" sz="1150" dirty="0"/>
+          </a:p>
+          <a:p>
+            <a:pPr algn="l" indent="0" marL="0">
+              <a:buNone/>
+            </a:pPr>
+            <a:r>
+              <a:rPr lang="en-US" sz="1150" dirty="0">
+                <a:solidFill>
+                  <a:schemeClr val="tx1"/>
+                </a:solidFill>
+              </a:rPr>
+              <a:t>属于重复计数的比例（60 / 207）</a:t>
+            </a:r>
+            <a:endParaRPr lang="en-US" sz="1150" dirty="0"/>
+          </a:p>
+        </p:txBody>
+      </p:sp>
+      <p:sp>
+        <p:nvSpPr>
+          <p:cNvPr id="12" name="label-162"/>
+          <p:cNvSpPr txBox="1"/>
+          <p:nvPr/>
+        </p:nvSpPr>
+        <p:spPr>
+          <a:xfrm>
+            <a:off x="822960" y="4572000"/>
+            <a:ext cx="1417320" cy="640080"/>
+          </a:xfrm>
+          <a:prstGeom prst="rect">
+            <a:avLst/>
+          </a:prstGeom>
+          <a:noFill/>
+          <a:ln/>
+        </p:spPr>
+        <p:txBody>
+          <a:bodyPr wrap="square" lIns="0" tIns="0" rIns="0" bIns="0" rtlCol="0" anchor="ctr"/>
+          <a:lstStyle/>
+          <a:p>
+            <a:pPr algn="ctr" indent="0" marL="0">
+              <a:buNone/>
+            </a:pPr>
+            <a:r>
+              <a:rPr lang="en-US" sz="3000" b="1" dirty="0">
+                <a:solidFill>
+                  <a:schemeClr val="accent3"/>
+                </a:solidFill>
+              </a:rPr>
+              <a:t>8 篇</a:t>
+            </a:r>
+            <a:endParaRPr lang="en-US" sz="3000" dirty="0"/>
+          </a:p>
+        </p:txBody>
+      </p:sp>
+      <p:sp>
+        <p:nvSpPr>
+          <p:cNvPr id="13" name="label-163"/>
+          <p:cNvSpPr txBox="1"/>
+          <p:nvPr/>
+        </p:nvSpPr>
+        <p:spPr>
+          <a:xfrm>
+            <a:off x="2331720" y="4617720"/>
+            <a:ext cx="3352648" cy="594360"/>
+          </a:xfrm>
+          <a:prstGeom prst="rect">
+            <a:avLst/>
+          </a:prstGeom>
+          <a:noFill/>
+          <a:ln/>
+        </p:spPr>
+        <p:txBody>
+          <a:bodyPr wrap="square" lIns="0" tIns="0" rIns="0" bIns="0" rtlCol="0" anchor="ctr"/>
+          <a:lstStyle/>
+          <a:p>
+            <a:pPr algn="l" indent="0" marL="0">
+              <a:buNone/>
+            </a:pPr>
+            <a:r>
+              <a:rPr lang="en-US" sz="1150" dirty="0">
+                <a:solidFill>
+                  <a:schemeClr val="tx1"/>
+                </a:solidFill>
+              </a:rPr>
+              <a:t>单个问题中，</a:t>
+            </a:r>
+            <a:endParaRPr lang="en-US" sz="1150" dirty="0"/>
+          </a:p>
+          <a:p>
+            <a:pPr algn="l" indent="0" marL="0">
+              <a:buNone/>
+            </a:pPr>
+            <a:r>
+              <a:rPr lang="en-US" sz="1150" dirty="0">
+                <a:solidFill>
+                  <a:schemeClr val="tx1"/>
+                </a:solidFill>
+              </a:rPr>
+              <a:t>来自同一个试验的最多篇数</a:t>
+            </a:r>
+            <a:endParaRPr lang="en-US" sz="1150" dirty="0"/>
+          </a:p>
+        </p:txBody>
+      </p:sp>
+      <p:sp>
+        <p:nvSpPr>
+          <p:cNvPr id="14" name="label-164"/>
+          <p:cNvSpPr txBox="1"/>
+          <p:nvPr/>
+        </p:nvSpPr>
+        <p:spPr>
+          <a:xfrm>
+            <a:off x="822960" y="5440680"/>
+            <a:ext cx="4861408" cy="502920"/>
+          </a:xfrm>
+          <a:prstGeom prst="rect">
+            <a:avLst/>
+          </a:prstGeom>
+          <a:noFill/>
+          <a:ln/>
+        </p:spPr>
+        <p:txBody>
+          <a:bodyPr wrap="square" lIns="0" tIns="0" rIns="0" bIns="0" rtlCol="0" anchor="t"/>
+          <a:lstStyle/>
+          <a:p>
+            <a:pPr algn="l" indent="0" marL="0">
+              <a:buNone/>
+            </a:pPr>
+            <a:r>
+              <a:rPr lang="en-US" sz="1050" dirty="0">
+                <a:solidFill>
+                  <a:schemeClr val="accent6"/>
+                </a:solidFill>
+              </a:rPr>
+              <a:t>只识别了明确的试验编号；共享队列、数据集、预印本等尚未计入，真实比例只会更高。</a:t>
+            </a:r>
+            <a:endParaRPr lang="en-US" sz="1050" dirty="0"/>
+          </a:p>
+        </p:txBody>
+      </p:sp>
+      <p:sp>
+        <p:nvSpPr>
+          <p:cNvPr id="15" name="card-165"/>
+          <p:cNvSpPr/>
+          <p:nvPr/>
+        </p:nvSpPr>
+        <p:spPr>
+          <a:xfrm>
+            <a:off x="6233008" y="1600200"/>
+            <a:ext cx="5410048" cy="4434840"/>
           </a:xfrm>
           <a:prstGeom prst="roundRect">
             <a:avLst>
-              <a:gd name="adj" fmla="val 19048"/>
+              <a:gd name="adj" fmla="val 2062"/>
             </a:avLst>
           </a:prstGeom>
           <a:solidFill>
-            <a:schemeClr val="bg1"/>
+            <a:schemeClr val="bg2"/>
           </a:solidFill>
           <a:ln w="12700">
             <a:solidFill>
-              <a:srgbClr val="D5DCE4"/>
+              <a:schemeClr val="bg2"/>
+            </a:solidFill>
+            <a:prstDash val="solid"/>
+          </a:ln>
+        </p:spPr>
+      </p:sp>
+      <p:sp>
+        <p:nvSpPr>
+          <p:cNvPr id="16" name="badge-166"/>
+          <p:cNvSpPr/>
+          <p:nvPr/>
+        </p:nvSpPr>
+        <p:spPr>
+          <a:xfrm>
+            <a:off x="6507328" y="1783080"/>
+            <a:ext cx="384048" cy="384048"/>
+          </a:xfrm>
+          <a:prstGeom prst="ellipse">
+            <a:avLst/>
+          </a:prstGeom>
+          <a:solidFill>
+            <a:schemeClr val="accent1"/>
+          </a:solidFill>
+          <a:ln w="6350">
+            <a:solidFill>
+              <a:schemeClr val="accent1"/>
             </a:solidFill>
           </a:ln>
         </p:spPr>
         <p:txBody>
-          <a:bodyPr wrap="square" lIns="1270" tIns="1270" rIns="1270" bIns="1270" rtlCol="0" anchor="ctr"/>
-          <a:lstStyle/>
-          <a:p>
-            <a:pPr algn="l" indent="0" marL="0">
-              <a:buNone/>
-            </a:pPr>
-            <a:r>
-              <a:rPr lang="en-US" sz="1150" dirty="0">
-                <a:solidFill>
-                  <a:schemeClr val="tx1"/>
-                </a:solidFill>
-              </a:rPr>
-              <a:t>类比：量体温分不开流感和感冒，抗原检测才分得开。信息增益衡量的就是“能分开多少”。</a:t>
-            </a:r>
-            <a:endParaRPr lang="en-US" sz="1150" dirty="0"/>
-          </a:p>
-        </p:txBody>
-      </p:sp>
-      <p:sp>
-        <p:nvSpPr>
-          <p:cNvPr id="8" name="label-175"/>
+          <a:bodyPr wrap="square" lIns="0" tIns="0" rIns="0" bIns="0" rtlCol="0" anchor="ctr"/>
+          <a:lstStyle/>
+          <a:p>
+            <a:pPr algn="ctr" indent="0" marL="0">
+              <a:buNone/>
+            </a:pPr>
+            <a:r>
+              <a:rPr lang="en-US" sz="1500" b="1" dirty="0">
+                <a:solidFill>
+                  <a:schemeClr val="bg1"/>
+                </a:solidFill>
+              </a:rPr>
+              <a:t>2</a:t>
+            </a:r>
+            <a:endParaRPr lang="en-US" sz="1500" dirty="0"/>
+          </a:p>
+        </p:txBody>
+      </p:sp>
+      <p:sp>
+        <p:nvSpPr>
+          <p:cNvPr id="17" name="label-167"/>
           <p:cNvSpPr txBox="1"/>
           <p:nvPr/>
         </p:nvSpPr>
         <p:spPr>
           <a:xfrm>
-            <a:off x="822960" y="2651760"/>
-            <a:ext cx="6355080" cy="274320"/>
+            <a:off x="7010248" y="1755648"/>
+            <a:ext cx="4404208" cy="411480"/>
           </a:xfrm>
           <a:prstGeom prst="rect">
             <a:avLst/>
@@ -14203,34 +14096,34 @@
           <a:ln/>
         </p:spPr>
         <p:txBody>
-          <a:bodyPr wrap="square" lIns="0" tIns="0" rIns="0" bIns="0" rtlCol="0" anchor="t"/>
+          <a:bodyPr wrap="square" lIns="0" tIns="0" rIns="0" bIns="0" rtlCol="0" anchor="ctr"/>
           <a:lstStyle/>
           <a:p>
             <a:pPr algn="l" indent="0" marL="0">
               <a:buNone/>
             </a:pPr>
             <a:r>
-              <a:rPr lang="en-US" sz="1200" b="1" dirty="0">
+              <a:rPr lang="en-US" sz="1600" b="1" dirty="0">
                 <a:solidFill>
                   <a:schemeClr val="tx2"/>
                 </a:solidFill>
               </a:rPr>
-              <a:t>实测：真实靶点，已获批（成立）vs 因疗效不足而失败（不成立）</a:t>
-            </a:r>
-            <a:endParaRPr lang="en-US" sz="1200" dirty="0"/>
-          </a:p>
-        </p:txBody>
-      </p:sp>
-      <p:sp>
-        <p:nvSpPr>
-          <p:cNvPr id="9" name="label-176"/>
+              <a:t>哪类证据能区分“有效 / 无效”</a:t>
+            </a:r>
+            <a:endParaRPr lang="en-US" sz="1600" dirty="0"/>
+          </a:p>
+        </p:txBody>
+      </p:sp>
+      <p:sp>
+        <p:nvSpPr>
+          <p:cNvPr id="18" name="label-168"/>
           <p:cNvSpPr txBox="1"/>
           <p:nvPr/>
         </p:nvSpPr>
         <p:spPr>
           <a:xfrm>
-            <a:off x="2423160" y="2926080"/>
-            <a:ext cx="1325880" cy="237744"/>
+            <a:off x="6507328" y="2240280"/>
+            <a:ext cx="4861408" cy="457200"/>
           </a:xfrm>
           <a:prstGeom prst="rect">
             <a:avLst/>
@@ -14242,31 +14135,31 @@
           <a:bodyPr wrap="square" lIns="0" tIns="0" rIns="0" bIns="0" rtlCol="0" anchor="t"/>
           <a:lstStyle/>
           <a:p>
-            <a:pPr algn="ctr" indent="0" marL="0">
-              <a:buNone/>
-            </a:pPr>
-            <a:r>
-              <a:rPr lang="en-US" sz="950" dirty="0">
-                <a:solidFill>
-                  <a:schemeClr val="accent6"/>
-                </a:solidFill>
-              </a:rPr>
-              <a:t>成立 vs 不成立</a:t>
-            </a:r>
-            <a:endParaRPr lang="en-US" sz="950" dirty="0"/>
-          </a:p>
-        </p:txBody>
-      </p:sp>
-      <p:sp>
-        <p:nvSpPr>
-          <p:cNvPr id="10" name="label-177"/>
+            <a:pPr algn="l" indent="0" marL="0">
+              <a:buNone/>
+            </a:pPr>
+            <a:r>
+              <a:rPr lang="en-US" sz="1100" dirty="0">
+                <a:solidFill>
+                  <a:schemeClr val="tx1"/>
+                </a:solidFill>
+              </a:rPr>
+              <a:t>已获批靶点 vs 因疗效不足失败的靶点：各类证据出现的比例（114 个靶点 / 94 对靶点–疾病）。</a:t>
+            </a:r>
+            <a:endParaRPr lang="en-US" sz="1100" dirty="0"/>
+          </a:p>
+        </p:txBody>
+      </p:sp>
+      <p:sp>
+        <p:nvSpPr>
+          <p:cNvPr id="19" name="label-169"/>
           <p:cNvSpPr txBox="1"/>
           <p:nvPr/>
         </p:nvSpPr>
         <p:spPr>
           <a:xfrm>
-            <a:off x="3749040" y="2926080"/>
-            <a:ext cx="3429000" cy="237744"/>
+            <a:off x="8839048" y="2743200"/>
+            <a:ext cx="2483968" cy="237744"/>
           </a:xfrm>
           <a:prstGeom prst="rect">
             <a:avLst/>
@@ -14287,7 +14180,7 @@
                   <a:schemeClr val="accent6"/>
                 </a:solidFill>
               </a:rPr>
-              <a:t>信息增益（比特）</a:t>
+              <a:t>上条：获批组　下条（浅色）：失败组</a:t>
             </a:r>
             <a:endParaRPr lang="en-US" sz="950" dirty="0"/>
           </a:p>
@@ -14295,14 +14188,14 @@
       </p:sp>
       <p:sp>
         <p:nvSpPr>
-          <p:cNvPr id="11" name="label-178"/>
+          <p:cNvPr id="20" name="label-170"/>
           <p:cNvSpPr txBox="1"/>
           <p:nvPr/>
         </p:nvSpPr>
         <p:spPr>
           <a:xfrm>
-            <a:off x="822960" y="3163824"/>
-            <a:ext cx="6355080" cy="237744"/>
+            <a:off x="6507328" y="3035808"/>
+            <a:ext cx="2286000" cy="457200"/>
           </a:xfrm>
           <a:prstGeom prst="rect">
             <a:avLst/>
@@ -14311,127 +14204,19 @@
           <a:ln/>
         </p:spPr>
         <p:txBody>
-          <a:bodyPr wrap="square" lIns="0" tIns="0" rIns="0" bIns="0" rtlCol="0" anchor="t"/>
+          <a:bodyPr wrap="square" lIns="0" tIns="0" rIns="0" bIns="0" rtlCol="0" anchor="ctr"/>
           <a:lstStyle/>
           <a:p>
             <a:pPr algn="l" indent="0" marL="0">
               <a:buNone/>
             </a:pPr>
             <a:r>
-              <a:rPr lang="en-US" sz="1100" b="1" dirty="0">
-                <a:solidFill>
-                  <a:schemeClr val="accent6"/>
-                </a:solidFill>
-              </a:rPr>
-              <a:t>只看靶点本身</a:t>
-            </a:r>
-            <a:endParaRPr lang="en-US" sz="1100" dirty="0"/>
-          </a:p>
-        </p:txBody>
-      </p:sp>
-      <p:sp>
-        <p:nvSpPr>
-          <p:cNvPr id="12" name="label-179"/>
-          <p:cNvSpPr txBox="1"/>
-          <p:nvPr/>
-        </p:nvSpPr>
-        <p:spPr>
-          <a:xfrm>
-            <a:off x="960120" y="3410712"/>
-            <a:ext cx="1463040" cy="246888"/>
-          </a:xfrm>
-          <a:prstGeom prst="rect">
-            <a:avLst/>
-          </a:prstGeom>
-          <a:noFill/>
-          <a:ln/>
-        </p:spPr>
-        <p:txBody>
-          <a:bodyPr wrap="square" lIns="0" tIns="0" rIns="0" bIns="0" rtlCol="0" anchor="ctr"/>
-          <a:lstStyle/>
-          <a:p>
-            <a:pPr algn="l" indent="0" marL="0">
-              <a:buNone/>
-            </a:pPr>
-            <a:r>
-              <a:rPr lang="en-US" sz="1100" dirty="0">
+              <a:rPr lang="en-US" sz="1050" dirty="0">
                 <a:solidFill>
                   <a:schemeClr val="tx1"/>
                 </a:solidFill>
               </a:rPr>
-              <a:t>查靶点序列</a:t>
-            </a:r>
-            <a:endParaRPr lang="en-US" sz="1100" dirty="0"/>
-          </a:p>
-        </p:txBody>
-      </p:sp>
-      <p:sp>
-        <p:nvSpPr>
-          <p:cNvPr id="13" name="label-180"/>
-          <p:cNvSpPr txBox="1"/>
-          <p:nvPr/>
-        </p:nvSpPr>
-        <p:spPr>
-          <a:xfrm>
-            <a:off x="2423160" y="3410712"/>
-            <a:ext cx="1325880" cy="246888"/>
-          </a:xfrm>
-          <a:prstGeom prst="rect">
-            <a:avLst/>
-          </a:prstGeom>
-          <a:noFill/>
-          <a:ln/>
-        </p:spPr>
-        <p:txBody>
-          <a:bodyPr wrap="square" lIns="0" tIns="0" rIns="0" bIns="0" rtlCol="0" anchor="ctr"/>
-          <a:lstStyle/>
-          <a:p>
-            <a:pPr algn="ctr" indent="0" marL="0">
-              <a:buNone/>
-            </a:pPr>
-            <a:r>
-              <a:rPr lang="en-US" sz="1100" dirty="0">
-                <a:solidFill>
-                  <a:schemeClr val="tx1"/>
-                </a:solidFill>
-              </a:rPr>
-              <a:t>100% vs 100%</a:t>
-            </a:r>
-            <a:endParaRPr lang="en-US" sz="1100" dirty="0"/>
-          </a:p>
-        </p:txBody>
-      </p:sp>
-      <p:sp>
-        <p:nvSpPr>
-          <p:cNvPr id="14" name="label-181"/>
-          <p:cNvSpPr txBox="1"/>
-          <p:nvPr/>
-        </p:nvSpPr>
-        <p:spPr>
-          <a:xfrm>
-            <a:off x="3803904" y="3410712"/>
-            <a:ext cx="548640" cy="246888"/>
-          </a:xfrm>
-          <a:prstGeom prst="rect">
-            <a:avLst/>
-          </a:prstGeom>
-          <a:noFill/>
-          <a:ln/>
-        </p:spPr>
-        <p:txBody>
-          <a:bodyPr wrap="square" lIns="0" tIns="0" rIns="0" bIns="0" rtlCol="0" anchor="ctr"/>
-          <a:lstStyle/>
-          <a:p>
-            <a:pPr algn="l" indent="0" marL="0">
-              <a:buNone/>
-            </a:pPr>
-            <a:r>
-              <a:rPr lang="en-US" sz="1050" b="1" dirty="0">
-                <a:solidFill>
-                  <a:schemeClr val="tx1"/>
-                </a:solidFill>
-              </a:rPr>
-              <a:t>0</a:t>
+              <a:t>只看靶点：有强活性化合物</a:t>
             </a:r>
             <a:endParaRPr lang="en-US" sz="1050" dirty="0"/>
           </a:p>
@@ -14439,194 +14224,14 @@
       </p:sp>
       <p:sp>
         <p:nvSpPr>
-          <p:cNvPr id="15" name="label-182"/>
-          <p:cNvSpPr txBox="1"/>
-          <p:nvPr/>
-        </p:nvSpPr>
-        <p:spPr>
-          <a:xfrm>
-            <a:off x="960120" y="3675888"/>
-            <a:ext cx="1463040" cy="246888"/>
-          </a:xfrm>
-          <a:prstGeom prst="rect">
-            <a:avLst/>
-          </a:prstGeom>
-          <a:noFill/>
-          <a:ln/>
-        </p:spPr>
-        <p:txBody>
-          <a:bodyPr wrap="square" lIns="0" tIns="0" rIns="0" bIns="0" rtlCol="0" anchor="ctr"/>
-          <a:lstStyle/>
-          <a:p>
-            <a:pPr algn="l" indent="0" marL="0">
-              <a:buNone/>
-            </a:pPr>
-            <a:r>
-              <a:rPr lang="en-US" sz="1100" dirty="0">
-                <a:solidFill>
-                  <a:schemeClr val="tx1"/>
-                </a:solidFill>
-              </a:rPr>
-              <a:t>查临床试验登记</a:t>
-            </a:r>
-            <a:endParaRPr lang="en-US" sz="1100" dirty="0"/>
-          </a:p>
-        </p:txBody>
-      </p:sp>
-      <p:sp>
-        <p:nvSpPr>
-          <p:cNvPr id="16" name="label-183"/>
-          <p:cNvSpPr txBox="1"/>
-          <p:nvPr/>
-        </p:nvSpPr>
-        <p:spPr>
-          <a:xfrm>
-            <a:off x="2423160" y="3675888"/>
-            <a:ext cx="1325880" cy="246888"/>
-          </a:xfrm>
-          <a:prstGeom prst="rect">
-            <a:avLst/>
-          </a:prstGeom>
-          <a:noFill/>
-          <a:ln/>
-        </p:spPr>
-        <p:txBody>
-          <a:bodyPr wrap="square" lIns="0" tIns="0" rIns="0" bIns="0" rtlCol="0" anchor="ctr"/>
-          <a:lstStyle/>
-          <a:p>
-            <a:pPr algn="ctr" indent="0" marL="0">
-              <a:buNone/>
-            </a:pPr>
-            <a:r>
-              <a:rPr lang="en-US" sz="1100" dirty="0">
-                <a:solidFill>
-                  <a:schemeClr val="tx1"/>
-                </a:solidFill>
-              </a:rPr>
-              <a:t>100% vs 100%</a:t>
-            </a:r>
-            <a:endParaRPr lang="en-US" sz="1100" dirty="0"/>
-          </a:p>
-        </p:txBody>
-      </p:sp>
-      <p:sp>
-        <p:nvSpPr>
-          <p:cNvPr id="17" name="label-184"/>
-          <p:cNvSpPr txBox="1"/>
-          <p:nvPr/>
-        </p:nvSpPr>
-        <p:spPr>
-          <a:xfrm>
-            <a:off x="3803904" y="3675888"/>
-            <a:ext cx="548640" cy="246888"/>
-          </a:xfrm>
-          <a:prstGeom prst="rect">
-            <a:avLst/>
-          </a:prstGeom>
-          <a:noFill/>
-          <a:ln/>
-        </p:spPr>
-        <p:txBody>
-          <a:bodyPr wrap="square" lIns="0" tIns="0" rIns="0" bIns="0" rtlCol="0" anchor="ctr"/>
-          <a:lstStyle/>
-          <a:p>
-            <a:pPr algn="l" indent="0" marL="0">
-              <a:buNone/>
-            </a:pPr>
-            <a:r>
-              <a:rPr lang="en-US" sz="1050" b="1" dirty="0">
-                <a:solidFill>
-                  <a:schemeClr val="tx1"/>
-                </a:solidFill>
-              </a:rPr>
-              <a:t>0</a:t>
-            </a:r>
-            <a:endParaRPr lang="en-US" sz="1050" dirty="0"/>
-          </a:p>
-        </p:txBody>
-      </p:sp>
-      <p:sp>
-        <p:nvSpPr>
-          <p:cNvPr id="18" name="label-185"/>
-          <p:cNvSpPr txBox="1"/>
-          <p:nvPr/>
-        </p:nvSpPr>
-        <p:spPr>
-          <a:xfrm>
-            <a:off x="960120" y="3941064"/>
-            <a:ext cx="1463040" cy="246888"/>
-          </a:xfrm>
-          <a:prstGeom prst="rect">
-            <a:avLst/>
-          </a:prstGeom>
-          <a:noFill/>
-          <a:ln/>
-        </p:spPr>
-        <p:txBody>
-          <a:bodyPr wrap="square" lIns="0" tIns="0" rIns="0" bIns="0" rtlCol="0" anchor="ctr"/>
-          <a:lstStyle/>
-          <a:p>
-            <a:pPr algn="l" indent="0" marL="0">
-              <a:buNone/>
-            </a:pPr>
-            <a:r>
-              <a:rPr lang="en-US" sz="1100" dirty="0">
-                <a:solidFill>
-                  <a:schemeClr val="tx1"/>
-                </a:solidFill>
-              </a:rPr>
-              <a:t>查强活性化合物</a:t>
-            </a:r>
-            <a:endParaRPr lang="en-US" sz="1100" dirty="0"/>
-          </a:p>
-        </p:txBody>
-      </p:sp>
-      <p:sp>
-        <p:nvSpPr>
-          <p:cNvPr id="19" name="label-186"/>
-          <p:cNvSpPr txBox="1"/>
-          <p:nvPr/>
-        </p:nvSpPr>
-        <p:spPr>
-          <a:xfrm>
-            <a:off x="2423160" y="3941064"/>
-            <a:ext cx="1325880" cy="246888"/>
-          </a:xfrm>
-          <a:prstGeom prst="rect">
-            <a:avLst/>
-          </a:prstGeom>
-          <a:noFill/>
-          <a:ln/>
-        </p:spPr>
-        <p:txBody>
-          <a:bodyPr wrap="square" lIns="0" tIns="0" rIns="0" bIns="0" rtlCol="0" anchor="ctr"/>
-          <a:lstStyle/>
-          <a:p>
-            <a:pPr algn="ctr" indent="0" marL="0">
-              <a:buNone/>
-            </a:pPr>
-            <a:r>
-              <a:rPr lang="en-US" sz="1100" dirty="0">
-                <a:solidFill>
-                  <a:schemeClr val="tx1"/>
-                </a:solidFill>
-              </a:rPr>
-              <a:t>88% vs 81%</a:t>
-            </a:r>
-            <a:endParaRPr lang="en-US" sz="1100" dirty="0"/>
-          </a:p>
-        </p:txBody>
-      </p:sp>
-      <p:sp>
-        <p:nvSpPr>
-          <p:cNvPr id="20" name="bar-187"/>
-          <p:cNvSpPr/>
-          <p:nvPr/>
-        </p:nvSpPr>
-        <p:spPr>
-          <a:xfrm>
-            <a:off x="3749040" y="3986784"/>
-            <a:ext cx="443132" cy="155448"/>
+          <p:cNvPr id="21" name="bar-171"/>
+          <p:cNvSpPr/>
+          <p:nvPr/>
+        </p:nvSpPr>
+        <p:spPr>
+          <a:xfrm>
+            <a:off x="8839048" y="3072384"/>
+            <a:ext cx="1783555" cy="164592"/>
           </a:xfrm>
           <a:prstGeom prst="rect">
             <a:avLst/>
@@ -14644,14 +14249,14 @@
       </p:sp>
       <p:sp>
         <p:nvSpPr>
-          <p:cNvPr id="21" name="label-188"/>
+          <p:cNvPr id="22" name="label-172"/>
           <p:cNvSpPr txBox="1"/>
           <p:nvPr/>
         </p:nvSpPr>
         <p:spPr>
           <a:xfrm>
-            <a:off x="4247036" y="3941064"/>
-            <a:ext cx="548640" cy="246888"/>
+            <a:off x="10668323" y="3017520"/>
+            <a:ext cx="457200" cy="237744"/>
           </a:xfrm>
           <a:prstGeom prst="rect">
             <a:avLst/>
@@ -14667,27 +14272,56 @@
               <a:buNone/>
             </a:pPr>
             <a:r>
-              <a:rPr lang="en-US" sz="1050" b="1" dirty="0">
+              <a:rPr lang="en-US" sz="950" b="1" dirty="0">
                 <a:solidFill>
                   <a:schemeClr val="tx1"/>
                 </a:solidFill>
               </a:rPr>
-              <a:t>0.006</a:t>
-            </a:r>
-            <a:endParaRPr lang="en-US" sz="1050" dirty="0"/>
-          </a:p>
-        </p:txBody>
-      </p:sp>
-      <p:sp>
-        <p:nvSpPr>
-          <p:cNvPr id="22" name="label-189"/>
+              <a:t>88%</a:t>
+            </a:r>
+            <a:endParaRPr lang="en-US" sz="950" dirty="0"/>
+          </a:p>
+        </p:txBody>
+      </p:sp>
+      <p:sp>
+        <p:nvSpPr>
+          <p:cNvPr id="23" name="bar-173"/>
+          <p:cNvSpPr/>
+          <p:nvPr/>
+        </p:nvSpPr>
+        <p:spPr>
+          <a:xfrm>
+            <a:off x="8839048" y="3282696"/>
+            <a:ext cx="1641682" cy="164592"/>
+          </a:xfrm>
+          <a:prstGeom prst="rect">
+            <a:avLst/>
+          </a:prstGeom>
+          <a:solidFill>
+            <a:srgbClr val="B4BFCC">
+              <a:alpha val="45000"/>
+            </a:srgbClr>
+          </a:solidFill>
+          <a:ln w="12700">
+            <a:solidFill>
+              <a:srgbClr val="B4BFCC">
+                <a:alpha val="45000"/>
+              </a:srgbClr>
+            </a:solidFill>
+            <a:prstDash val="solid"/>
+          </a:ln>
+        </p:spPr>
+      </p:sp>
+      <p:sp>
+        <p:nvSpPr>
+          <p:cNvPr id="24" name="label-174"/>
           <p:cNvSpPr txBox="1"/>
           <p:nvPr/>
         </p:nvSpPr>
         <p:spPr>
           <a:xfrm>
-            <a:off x="822960" y="4242816"/>
-            <a:ext cx="6355080" cy="237744"/>
+            <a:off x="10526449" y="3236976"/>
+            <a:ext cx="457200" cy="237744"/>
           </a:xfrm>
           <a:prstGeom prst="rect">
             <a:avLst/>
@@ -14696,34 +14330,34 @@
           <a:ln/>
         </p:spPr>
         <p:txBody>
-          <a:bodyPr wrap="square" lIns="0" tIns="0" rIns="0" bIns="0" rtlCol="0" anchor="t"/>
+          <a:bodyPr wrap="square" lIns="0" tIns="0" rIns="0" bIns="0" rtlCol="0" anchor="ctr"/>
           <a:lstStyle/>
           <a:p>
             <a:pPr algn="l" indent="0" marL="0">
               <a:buNone/>
             </a:pPr>
             <a:r>
-              <a:rPr lang="en-US" sz="1100" b="1" dirty="0">
-                <a:solidFill>
-                  <a:schemeClr val="accent1"/>
-                </a:solidFill>
-              </a:rPr>
-              <a:t>看靶点与疾病的关系</a:t>
-            </a:r>
-            <a:endParaRPr lang="en-US" sz="1100" dirty="0"/>
-          </a:p>
-        </p:txBody>
-      </p:sp>
-      <p:sp>
-        <p:nvSpPr>
-          <p:cNvPr id="23" name="label-190"/>
+              <a:rPr lang="en-US" sz="950" dirty="0">
+                <a:solidFill>
+                  <a:schemeClr val="tx1"/>
+                </a:solidFill>
+              </a:rPr>
+              <a:t>81%</a:t>
+            </a:r>
+            <a:endParaRPr lang="en-US" sz="950" dirty="0"/>
+          </a:p>
+        </p:txBody>
+      </p:sp>
+      <p:sp>
+        <p:nvSpPr>
+          <p:cNvPr id="25" name="label-175"/>
           <p:cNvSpPr txBox="1"/>
           <p:nvPr/>
         </p:nvSpPr>
         <p:spPr>
           <a:xfrm>
-            <a:off x="960120" y="4489704"/>
-            <a:ext cx="1463040" cy="246888"/>
+            <a:off x="6507328" y="3584448"/>
+            <a:ext cx="2286000" cy="457200"/>
           </a:xfrm>
           <a:prstGeom prst="rect">
             <a:avLst/>
@@ -14739,27 +14373,52 @@
               <a:buNone/>
             </a:pPr>
             <a:r>
-              <a:rPr lang="en-US" sz="1100" dirty="0">
+              <a:rPr lang="en-US" sz="1050" dirty="0">
                 <a:solidFill>
                   <a:schemeClr val="tx1"/>
                 </a:solidFill>
               </a:rPr>
-              <a:t>动物模型证据</a:t>
-            </a:r>
-            <a:endParaRPr lang="en-US" sz="1100" dirty="0"/>
-          </a:p>
-        </p:txBody>
-      </p:sp>
-      <p:sp>
-        <p:nvSpPr>
-          <p:cNvPr id="24" name="label-191"/>
+              <a:t>只看靶点：有临床试验登记</a:t>
+            </a:r>
+            <a:endParaRPr lang="en-US" sz="1050" dirty="0"/>
+          </a:p>
+        </p:txBody>
+      </p:sp>
+      <p:sp>
+        <p:nvSpPr>
+          <p:cNvPr id="26" name="bar-176"/>
+          <p:cNvSpPr/>
+          <p:nvPr/>
+        </p:nvSpPr>
+        <p:spPr>
+          <a:xfrm>
+            <a:off x="8839048" y="3621024"/>
+            <a:ext cx="2026768" cy="164592"/>
+          </a:xfrm>
+          <a:prstGeom prst="rect">
+            <a:avLst/>
+          </a:prstGeom>
+          <a:solidFill>
+            <a:srgbClr val="B4BFCC"/>
+          </a:solidFill>
+          <a:ln w="12700">
+            <a:solidFill>
+              <a:srgbClr val="B4BFCC"/>
+            </a:solidFill>
+            <a:prstDash val="solid"/>
+          </a:ln>
+        </p:spPr>
+      </p:sp>
+      <p:sp>
+        <p:nvSpPr>
+          <p:cNvPr id="27" name="label-177"/>
           <p:cNvSpPr txBox="1"/>
           <p:nvPr/>
         </p:nvSpPr>
         <p:spPr>
           <a:xfrm>
-            <a:off x="2423160" y="4489704"/>
-            <a:ext cx="1325880" cy="246888"/>
+            <a:off x="10911535" y="3566160"/>
+            <a:ext cx="457200" cy="237744"/>
           </a:xfrm>
           <a:prstGeom prst="rect">
             <a:avLst/>
@@ -14771,31 +14430,132 @@
           <a:bodyPr wrap="square" lIns="0" tIns="0" rIns="0" bIns="0" rtlCol="0" anchor="ctr"/>
           <a:lstStyle/>
           <a:p>
-            <a:pPr algn="ctr" indent="0" marL="0">
-              <a:buNone/>
-            </a:pPr>
-            <a:r>
-              <a:rPr lang="en-US" sz="1100" dirty="0">
+            <a:pPr algn="l" indent="0" marL="0">
+              <a:buNone/>
+            </a:pPr>
+            <a:r>
+              <a:rPr lang="en-US" sz="950" b="1" dirty="0">
                 <a:solidFill>
                   <a:schemeClr val="tx1"/>
                 </a:solidFill>
               </a:rPr>
-              <a:t>38% vs 17%</a:t>
-            </a:r>
-            <a:endParaRPr lang="en-US" sz="1100" dirty="0"/>
-          </a:p>
-        </p:txBody>
-      </p:sp>
-      <p:sp>
-        <p:nvSpPr>
-          <p:cNvPr id="25" name="bar-192"/>
-          <p:cNvSpPr/>
-          <p:nvPr/>
-        </p:nvSpPr>
-        <p:spPr>
-          <a:xfrm>
-            <a:off x="3749040" y="4535424"/>
-            <a:ext cx="2880360" cy="155448"/>
+              <a:t>100%</a:t>
+            </a:r>
+            <a:endParaRPr lang="en-US" sz="950" dirty="0"/>
+          </a:p>
+        </p:txBody>
+      </p:sp>
+      <p:sp>
+        <p:nvSpPr>
+          <p:cNvPr id="28" name="bar-178"/>
+          <p:cNvSpPr/>
+          <p:nvPr/>
+        </p:nvSpPr>
+        <p:spPr>
+          <a:xfrm>
+            <a:off x="8839048" y="3831336"/>
+            <a:ext cx="2026768" cy="164592"/>
+          </a:xfrm>
+          <a:prstGeom prst="rect">
+            <a:avLst/>
+          </a:prstGeom>
+          <a:solidFill>
+            <a:srgbClr val="B4BFCC">
+              <a:alpha val="45000"/>
+            </a:srgbClr>
+          </a:solidFill>
+          <a:ln w="12700">
+            <a:solidFill>
+              <a:srgbClr val="B4BFCC">
+                <a:alpha val="45000"/>
+              </a:srgbClr>
+            </a:solidFill>
+            <a:prstDash val="solid"/>
+          </a:ln>
+        </p:spPr>
+      </p:sp>
+      <p:sp>
+        <p:nvSpPr>
+          <p:cNvPr id="29" name="label-179"/>
+          <p:cNvSpPr txBox="1"/>
+          <p:nvPr/>
+        </p:nvSpPr>
+        <p:spPr>
+          <a:xfrm>
+            <a:off x="10911535" y="3785616"/>
+            <a:ext cx="457200" cy="237744"/>
+          </a:xfrm>
+          <a:prstGeom prst="rect">
+            <a:avLst/>
+          </a:prstGeom>
+          <a:noFill/>
+          <a:ln/>
+        </p:spPr>
+        <p:txBody>
+          <a:bodyPr wrap="square" lIns="0" tIns="0" rIns="0" bIns="0" rtlCol="0" anchor="ctr"/>
+          <a:lstStyle/>
+          <a:p>
+            <a:pPr algn="l" indent="0" marL="0">
+              <a:buNone/>
+            </a:pPr>
+            <a:r>
+              <a:rPr lang="en-US" sz="950" dirty="0">
+                <a:solidFill>
+                  <a:schemeClr val="tx1"/>
+                </a:solidFill>
+              </a:rPr>
+              <a:t>100%</a:t>
+            </a:r>
+            <a:endParaRPr lang="en-US" sz="950" dirty="0"/>
+          </a:p>
+        </p:txBody>
+      </p:sp>
+      <p:sp>
+        <p:nvSpPr>
+          <p:cNvPr id="30" name="label-180"/>
+          <p:cNvSpPr txBox="1"/>
+          <p:nvPr/>
+        </p:nvSpPr>
+        <p:spPr>
+          <a:xfrm>
+            <a:off x="6507328" y="4133088"/>
+            <a:ext cx="2286000" cy="457200"/>
+          </a:xfrm>
+          <a:prstGeom prst="rect">
+            <a:avLst/>
+          </a:prstGeom>
+          <a:noFill/>
+          <a:ln/>
+        </p:spPr>
+        <p:txBody>
+          <a:bodyPr wrap="square" lIns="0" tIns="0" rIns="0" bIns="0" rtlCol="0" anchor="ctr"/>
+          <a:lstStyle/>
+          <a:p>
+            <a:pPr algn="l" indent="0" marL="0">
+              <a:buNone/>
+            </a:pPr>
+            <a:r>
+              <a:rPr lang="en-US" sz="1050" dirty="0">
+                <a:solidFill>
+                  <a:schemeClr val="tx1"/>
+                </a:solidFill>
+              </a:rPr>
+              <a:t>靶点–疾病：动物模型证据</a:t>
+            </a:r>
+            <a:endParaRPr lang="en-US" sz="1050" dirty="0"/>
+          </a:p>
+        </p:txBody>
+      </p:sp>
+      <p:sp>
+        <p:nvSpPr>
+          <p:cNvPr id="31" name="bar-181"/>
+          <p:cNvSpPr/>
+          <p:nvPr/>
+        </p:nvSpPr>
+        <p:spPr>
+          <a:xfrm>
+            <a:off x="8839048" y="4169664"/>
+            <a:ext cx="770172" cy="164592"/>
           </a:xfrm>
           <a:prstGeom prst="rect">
             <a:avLst/>
@@ -14813,14 +14573,14 @@
       </p:sp>
       <p:sp>
         <p:nvSpPr>
-          <p:cNvPr id="26" name="label-193"/>
+          <p:cNvPr id="32" name="label-182"/>
           <p:cNvSpPr txBox="1"/>
           <p:nvPr/>
         </p:nvSpPr>
         <p:spPr>
           <a:xfrm>
-            <a:off x="6684264" y="4489704"/>
-            <a:ext cx="548640" cy="246888"/>
+            <a:off x="9654939" y="4114800"/>
+            <a:ext cx="457200" cy="237744"/>
           </a:xfrm>
           <a:prstGeom prst="rect">
             <a:avLst/>
@@ -14836,27 +14596,56 @@
               <a:buNone/>
             </a:pPr>
             <a:r>
-              <a:rPr lang="en-US" sz="1050" b="1" dirty="0">
+              <a:rPr lang="en-US" sz="950" b="1" dirty="0">
                 <a:solidFill>
                   <a:schemeClr val="tx1"/>
                 </a:solidFill>
               </a:rPr>
-              <a:t>0.039</a:t>
-            </a:r>
-            <a:endParaRPr lang="en-US" sz="1050" dirty="0"/>
-          </a:p>
-        </p:txBody>
-      </p:sp>
-      <p:sp>
-        <p:nvSpPr>
-          <p:cNvPr id="27" name="label-194"/>
+              <a:t>38%</a:t>
+            </a:r>
+            <a:endParaRPr lang="en-US" sz="950" dirty="0"/>
+          </a:p>
+        </p:txBody>
+      </p:sp>
+      <p:sp>
+        <p:nvSpPr>
+          <p:cNvPr id="33" name="bar-183"/>
+          <p:cNvSpPr/>
+          <p:nvPr/>
+        </p:nvSpPr>
+        <p:spPr>
+          <a:xfrm>
+            <a:off x="8839048" y="4379976"/>
+            <a:ext cx="344550" cy="164592"/>
+          </a:xfrm>
+          <a:prstGeom prst="rect">
+            <a:avLst/>
+          </a:prstGeom>
+          <a:solidFill>
+            <a:srgbClr val="0E8A7E">
+              <a:alpha val="45000"/>
+            </a:srgbClr>
+          </a:solidFill>
+          <a:ln w="12700">
+            <a:solidFill>
+              <a:srgbClr val="0E8A7E">
+                <a:alpha val="45000"/>
+              </a:srgbClr>
+            </a:solidFill>
+            <a:prstDash val="solid"/>
+          </a:ln>
+        </p:spPr>
+      </p:sp>
+      <p:sp>
+        <p:nvSpPr>
+          <p:cNvPr id="34" name="label-184"/>
           <p:cNvSpPr txBox="1"/>
           <p:nvPr/>
         </p:nvSpPr>
         <p:spPr>
           <a:xfrm>
-            <a:off x="960120" y="4754880"/>
-            <a:ext cx="1463040" cy="246888"/>
+            <a:off x="9229318" y="4334256"/>
+            <a:ext cx="457200" cy="237744"/>
           </a:xfrm>
           <a:prstGeom prst="rect">
             <a:avLst/>
@@ -14872,27 +14661,27 @@
               <a:buNone/>
             </a:pPr>
             <a:r>
-              <a:rPr lang="en-US" sz="1100" dirty="0">
+              <a:rPr lang="en-US" sz="950" dirty="0">
                 <a:solidFill>
                   <a:schemeClr val="tx1"/>
                 </a:solidFill>
               </a:rPr>
-              <a:t>人类遗传学证据</a:t>
-            </a:r>
-            <a:endParaRPr lang="en-US" sz="1100" dirty="0"/>
-          </a:p>
-        </p:txBody>
-      </p:sp>
-      <p:sp>
-        <p:nvSpPr>
-          <p:cNvPr id="28" name="label-195"/>
+              <a:t>17%</a:t>
+            </a:r>
+            <a:endParaRPr lang="en-US" sz="950" dirty="0"/>
+          </a:p>
+        </p:txBody>
+      </p:sp>
+      <p:sp>
+        <p:nvSpPr>
+          <p:cNvPr id="35" name="label-185"/>
           <p:cNvSpPr txBox="1"/>
           <p:nvPr/>
         </p:nvSpPr>
         <p:spPr>
           <a:xfrm>
-            <a:off x="2423160" y="4754880"/>
-            <a:ext cx="1325880" cy="246888"/>
+            <a:off x="6507328" y="4681728"/>
+            <a:ext cx="2286000" cy="457200"/>
           </a:xfrm>
           <a:prstGeom prst="rect">
             <a:avLst/>
@@ -14904,31 +14693,31 @@
           <a:bodyPr wrap="square" lIns="0" tIns="0" rIns="0" bIns="0" rtlCol="0" anchor="ctr"/>
           <a:lstStyle/>
           <a:p>
-            <a:pPr algn="ctr" indent="0" marL="0">
-              <a:buNone/>
-            </a:pPr>
-            <a:r>
-              <a:rPr lang="en-US" sz="1100" dirty="0">
+            <a:pPr algn="l" indent="0" marL="0">
+              <a:buNone/>
+            </a:pPr>
+            <a:r>
+              <a:rPr lang="en-US" sz="1050" dirty="0">
                 <a:solidFill>
                   <a:schemeClr val="tx1"/>
                 </a:solidFill>
               </a:rPr>
-              <a:t>35% vs 17%</a:t>
-            </a:r>
-            <a:endParaRPr lang="en-US" sz="1100" dirty="0"/>
-          </a:p>
-        </p:txBody>
-      </p:sp>
-      <p:sp>
-        <p:nvSpPr>
-          <p:cNvPr id="29" name="bar-196"/>
-          <p:cNvSpPr/>
-          <p:nvPr/>
-        </p:nvSpPr>
-        <p:spPr>
-          <a:xfrm>
-            <a:off x="3749040" y="4800600"/>
-            <a:ext cx="1994095" cy="155448"/>
+              <a:t>靶点–疾病：人类遗传学证据</a:t>
+            </a:r>
+            <a:endParaRPr lang="en-US" sz="1050" dirty="0"/>
+          </a:p>
+        </p:txBody>
+      </p:sp>
+      <p:sp>
+        <p:nvSpPr>
+          <p:cNvPr id="36" name="bar-186"/>
+          <p:cNvSpPr/>
+          <p:nvPr/>
+        </p:nvSpPr>
+        <p:spPr>
+          <a:xfrm>
+            <a:off x="8839048" y="4718304"/>
+            <a:ext cx="709369" cy="164592"/>
           </a:xfrm>
           <a:prstGeom prst="rect">
             <a:avLst/>
@@ -14946,14 +14735,14 @@
       </p:sp>
       <p:sp>
         <p:nvSpPr>
-          <p:cNvPr id="30" name="label-197"/>
+          <p:cNvPr id="37" name="label-187"/>
           <p:cNvSpPr txBox="1"/>
           <p:nvPr/>
         </p:nvSpPr>
         <p:spPr>
           <a:xfrm>
-            <a:off x="5797999" y="4754880"/>
-            <a:ext cx="548640" cy="246888"/>
+            <a:off x="9594136" y="4663440"/>
+            <a:ext cx="457200" cy="237744"/>
           </a:xfrm>
           <a:prstGeom prst="rect">
             <a:avLst/>
@@ -14969,31 +14758,96 @@
               <a:buNone/>
             </a:pPr>
             <a:r>
-              <a:rPr lang="en-US" sz="1050" b="1" dirty="0">
+              <a:rPr lang="en-US" sz="950" b="1" dirty="0">
                 <a:solidFill>
                   <a:schemeClr val="tx1"/>
                 </a:solidFill>
               </a:rPr>
-              <a:t>0.027</a:t>
-            </a:r>
-            <a:endParaRPr lang="en-US" sz="1050" dirty="0"/>
-          </a:p>
-        </p:txBody>
-      </p:sp>
-      <p:sp>
-        <p:nvSpPr>
-          <p:cNvPr id="31" name="box-198"/>
-          <p:cNvSpPr/>
-          <p:nvPr/>
-        </p:nvSpPr>
-        <p:spPr>
-          <a:xfrm>
-            <a:off x="822960" y="5093208"/>
-            <a:ext cx="6355080" cy="530352"/>
+              <a:t>35%</a:t>
+            </a:r>
+            <a:endParaRPr lang="en-US" sz="950" dirty="0"/>
+          </a:p>
+        </p:txBody>
+      </p:sp>
+      <p:sp>
+        <p:nvSpPr>
+          <p:cNvPr id="38" name="bar-188"/>
+          <p:cNvSpPr/>
+          <p:nvPr/>
+        </p:nvSpPr>
+        <p:spPr>
+          <a:xfrm>
+            <a:off x="8839048" y="4928616"/>
+            <a:ext cx="344550" cy="164592"/>
+          </a:xfrm>
+          <a:prstGeom prst="rect">
+            <a:avLst/>
+          </a:prstGeom>
+          <a:solidFill>
+            <a:srgbClr val="0E8A7E">
+              <a:alpha val="45000"/>
+            </a:srgbClr>
+          </a:solidFill>
+          <a:ln w="12700">
+            <a:solidFill>
+              <a:srgbClr val="0E8A7E">
+                <a:alpha val="45000"/>
+              </a:srgbClr>
+            </a:solidFill>
+            <a:prstDash val="solid"/>
+          </a:ln>
+        </p:spPr>
+      </p:sp>
+      <p:sp>
+        <p:nvSpPr>
+          <p:cNvPr id="39" name="label-189"/>
+          <p:cNvSpPr txBox="1"/>
+          <p:nvPr/>
+        </p:nvSpPr>
+        <p:spPr>
+          <a:xfrm>
+            <a:off x="9229318" y="4882896"/>
+            <a:ext cx="457200" cy="237744"/>
+          </a:xfrm>
+          <a:prstGeom prst="rect">
+            <a:avLst/>
+          </a:prstGeom>
+          <a:noFill/>
+          <a:ln/>
+        </p:spPr>
+        <p:txBody>
+          <a:bodyPr wrap="square" lIns="0" tIns="0" rIns="0" bIns="0" rtlCol="0" anchor="ctr"/>
+          <a:lstStyle/>
+          <a:p>
+            <a:pPr algn="l" indent="0" marL="0">
+              <a:buNone/>
+            </a:pPr>
+            <a:r>
+              <a:rPr lang="en-US" sz="950" dirty="0">
+                <a:solidFill>
+                  <a:schemeClr val="tx1"/>
+                </a:solidFill>
+              </a:rPr>
+              <a:t>17%</a:t>
+            </a:r>
+            <a:endParaRPr lang="en-US" sz="950" dirty="0"/>
+          </a:p>
+        </p:txBody>
+      </p:sp>
+      <p:sp>
+        <p:nvSpPr>
+          <p:cNvPr id="40" name="box-190"/>
+          <p:cNvSpPr/>
+          <p:nvPr/>
+        </p:nvSpPr>
+        <p:spPr>
+          <a:xfrm>
+            <a:off x="6507328" y="5257800"/>
+            <a:ext cx="4861408" cy="658368"/>
           </a:xfrm>
           <a:prstGeom prst="roundRect">
             <a:avLst>
-              <a:gd name="adj" fmla="val 13793"/>
+              <a:gd name="adj" fmla="val 11111"/>
             </a:avLst>
           </a:prstGeom>
           <a:solidFill>
@@ -15006,34 +14860,34 @@
           </a:ln>
         </p:spPr>
         <p:txBody>
-          <a:bodyPr wrap="square" lIns="1270" tIns="1270" rIns="1270" bIns="1270" rtlCol="0" anchor="ctr"/>
+          <a:bodyPr wrap="square" lIns="1016" tIns="1016" rIns="1016" bIns="1016" rtlCol="0" anchor="ctr"/>
           <a:lstStyle/>
           <a:p>
             <a:pPr algn="l" indent="0" marL="0">
               <a:buNone/>
             </a:pPr>
             <a:r>
-              <a:rPr lang="en-US" sz="1100" dirty="0">
+              <a:rPr lang="en-US" sz="1050" dirty="0">
                 <a:solidFill>
                   <a:schemeClr val="tx2"/>
                 </a:solidFill>
               </a:rPr>
-              <a:t>结论：只看靶点本身分不出有效与否；靶点与疾病之间的证据才有区分力——与 Nature 2024 一致（有遗传学支持的药物机制，成功率高 2.6 倍）。</a:t>
-            </a:r>
-            <a:endParaRPr lang="en-US" sz="1100" dirty="0"/>
-          </a:p>
-        </p:txBody>
-      </p:sp>
-      <p:sp>
-        <p:nvSpPr>
-          <p:cNvPr id="32" name="label-199"/>
+              <a:t>只看靶点本身分不出有效与否；遗传学与动物模型证据才有区分力，与 Nature 2024 一致（有遗传学支持的药物机制成功率高 2.6 倍）。</a:t>
+            </a:r>
+            <a:endParaRPr lang="en-US" sz="1050" dirty="0"/>
+          </a:p>
+        </p:txBody>
+      </p:sp>
+      <p:sp>
+        <p:nvSpPr>
+          <p:cNvPr id="41" name="label-191"/>
           <p:cNvSpPr txBox="1"/>
           <p:nvPr/>
         </p:nvSpPr>
         <p:spPr>
           <a:xfrm>
-            <a:off x="822960" y="5696712"/>
-            <a:ext cx="6355080" cy="274320"/>
+            <a:off x="548640" y="6108192"/>
+            <a:ext cx="11094415" cy="274320"/>
           </a:xfrm>
           <a:prstGeom prst="rect">
             <a:avLst/>
@@ -15049,1322 +14903,12 @@
               <a:buNone/>
             </a:pPr>
             <a:r>
-              <a:rPr lang="en-US" sz="1050" b="1" dirty="0">
+              <a:rPr lang="en-US" sz="1000" dirty="0">
                 <a:solidFill>
                   <a:schemeClr val="accent6"/>
                 </a:solidFill>
               </a:rPr>
-              <a:t>普适性：方法通用，数字随问题类型而定——换一类问题，用该类已知答案的案例重测一次。</a:t>
-            </a:r>
-            <a:endParaRPr lang="en-US" sz="1050" dirty="0"/>
-          </a:p>
-        </p:txBody>
-      </p:sp>
-      <p:sp>
-        <p:nvSpPr>
-          <p:cNvPr id="33" name="card-200"/>
-          <p:cNvSpPr/>
-          <p:nvPr/>
-        </p:nvSpPr>
-        <p:spPr>
-          <a:xfrm>
-            <a:off x="7726680" y="1554480"/>
-            <a:ext cx="3916375" cy="4526280"/>
-          </a:xfrm>
-          <a:prstGeom prst="roundRect">
-            <a:avLst>
-              <a:gd name="adj" fmla="val 2335"/>
-            </a:avLst>
-          </a:prstGeom>
-          <a:solidFill>
-            <a:schemeClr val="bg2"/>
-          </a:solidFill>
-          <a:ln w="12700">
-            <a:solidFill>
-              <a:schemeClr val="bg2"/>
-            </a:solidFill>
-            <a:prstDash val="solid"/>
-          </a:ln>
-        </p:spPr>
-      </p:sp>
-      <p:sp>
-        <p:nvSpPr>
-          <p:cNvPr id="34" name="badge-201"/>
-          <p:cNvSpPr/>
-          <p:nvPr/>
-        </p:nvSpPr>
-        <p:spPr>
-          <a:xfrm>
-            <a:off x="8001000" y="1737360"/>
-            <a:ext cx="384048" cy="384048"/>
-          </a:xfrm>
-          <a:prstGeom prst="ellipse">
-            <a:avLst/>
-          </a:prstGeom>
-          <a:solidFill>
-            <a:schemeClr val="accent1"/>
-          </a:solidFill>
-          <a:ln w="6350">
-            <a:solidFill>
-              <a:schemeClr val="accent1"/>
-            </a:solidFill>
-          </a:ln>
-        </p:spPr>
-        <p:txBody>
-          <a:bodyPr wrap="square" lIns="0" tIns="0" rIns="0" bIns="0" rtlCol="0" anchor="ctr"/>
-          <a:lstStyle/>
-          <a:p>
-            <a:pPr algn="ctr" indent="0" marL="0">
-              <a:buNone/>
-            </a:pPr>
-            <a:r>
-              <a:rPr lang="en-US" sz="1500" b="1" dirty="0">
-                <a:solidFill>
-                  <a:schemeClr val="bg1"/>
-                </a:solidFill>
-              </a:rPr>
-              <a:t>3</a:t>
-            </a:r>
-            <a:endParaRPr lang="en-US" sz="1500" dirty="0"/>
-          </a:p>
-        </p:txBody>
-      </p:sp>
-      <p:sp>
-        <p:nvSpPr>
-          <p:cNvPr id="35" name="label-202"/>
-          <p:cNvSpPr txBox="1"/>
-          <p:nvPr/>
-        </p:nvSpPr>
-        <p:spPr>
-          <a:xfrm>
-            <a:off x="8503920" y="1709928"/>
-            <a:ext cx="2910535" cy="411480"/>
-          </a:xfrm>
-          <a:prstGeom prst="rect">
-            <a:avLst/>
-          </a:prstGeom>
-          <a:noFill/>
-          <a:ln/>
-        </p:spPr>
-        <p:txBody>
-          <a:bodyPr wrap="square" lIns="0" tIns="0" rIns="0" bIns="0" rtlCol="0" anchor="ctr"/>
-          <a:lstStyle/>
-          <a:p>
-            <a:pPr algn="l" indent="0" marL="0">
-              <a:buNone/>
-            </a:pPr>
-            <a:r>
-              <a:rPr lang="en-US" sz="1800" b="1" dirty="0">
-                <a:solidFill>
-                  <a:schemeClr val="tx2"/>
-                </a:solidFill>
-              </a:rPr>
-              <a:t>共形三分判定</a:t>
-            </a:r>
-            <a:endParaRPr lang="en-US" sz="1800" dirty="0"/>
-          </a:p>
-        </p:txBody>
-      </p:sp>
-      <p:sp>
-        <p:nvSpPr>
-          <p:cNvPr id="36" name="label-203"/>
-          <p:cNvSpPr txBox="1"/>
-          <p:nvPr/>
-        </p:nvSpPr>
-        <p:spPr>
-          <a:xfrm>
-            <a:off x="8001000" y="2286000"/>
-            <a:ext cx="3367735" cy="256032"/>
-          </a:xfrm>
-          <a:prstGeom prst="rect">
-            <a:avLst/>
-          </a:prstGeom>
-          <a:noFill/>
-          <a:ln/>
-        </p:spPr>
-        <p:txBody>
-          <a:bodyPr wrap="square" lIns="0" tIns="0" rIns="0" bIns="0" rtlCol="0" anchor="t"/>
-          <a:lstStyle/>
-          <a:p>
-            <a:pPr algn="l" indent="0" marL="0">
-              <a:buNone/>
-            </a:pPr>
-            <a:r>
-              <a:rPr lang="en-US" sz="1250" b="1" dirty="0">
-                <a:solidFill>
-                  <a:schemeClr val="accent1"/>
-                </a:solidFill>
-              </a:rPr>
-              <a:t>背景</a:t>
-            </a:r>
-            <a:endParaRPr lang="en-US" sz="1250" dirty="0"/>
-          </a:p>
-        </p:txBody>
-      </p:sp>
-      <p:sp>
-        <p:nvSpPr>
-          <p:cNvPr id="37" name="label-204"/>
-          <p:cNvSpPr txBox="1"/>
-          <p:nvPr/>
-        </p:nvSpPr>
-        <p:spPr>
-          <a:xfrm>
-            <a:off x="8001000" y="2560320"/>
-            <a:ext cx="3367735" cy="868680"/>
-          </a:xfrm>
-          <a:prstGeom prst="rect">
-            <a:avLst/>
-          </a:prstGeom>
-          <a:noFill/>
-          <a:ln/>
-        </p:spPr>
-        <p:txBody>
-          <a:bodyPr wrap="square" lIns="0" tIns="0" rIns="0" bIns="0" rtlCol="0" anchor="t"/>
-          <a:lstStyle/>
-          <a:p>
-            <a:pPr algn="l" indent="0" marL="0">
-              <a:buNone/>
-            </a:pPr>
-            <a:r>
-              <a:rPr lang="en-US" sz="1150" dirty="0">
-                <a:solidFill>
-                  <a:schemeClr val="tx1"/>
-                </a:solidFill>
-              </a:rPr>
-              <a:t>共形预测（Vovk 等）是一种统计方法：用一批已标注结果的历史假设做校准，保证“出错率不超过 α”。它不给分数，而是给出可能成立的结果集合：</a:t>
-            </a:r>
-            <a:endParaRPr lang="en-US" sz="1150" dirty="0"/>
-          </a:p>
-        </p:txBody>
-      </p:sp>
-      <p:graphicFrame>
-        <p:nvGraphicFramePr>
-          <p:cNvPr id="9" name="table-205"/>
-          <p:cNvGraphicFramePr>
-            <a:graphicFrameLocks noGrp="1"/>
-          </p:cNvGraphicFramePr>
-          <p:nvPr>
-            <p:extLst>
-              <p:ext uri="{D42A27DB-BD31-4B8C-83A1-F6EECF244321}">
-                <p14:modId xmlns:p14="http://schemas.microsoft.com/office/powerpoint/2010/main" val="1579011935"/>
-              </p:ext>
-            </p:extLst>
-          </p:nvPr>
-        </p:nvGraphicFramePr>
-        <p:xfrm>
-          <a:off x="8001000" y="3474720"/>
-          <a:ext cx="3367735" cy="914400"/>
-        </p:xfrm>
-        <a:graphic>
-          <a:graphicData uri="http://schemas.openxmlformats.org/drawingml/2006/table">
-            <a:tbl>
-              <a:tblPr/>
-              <a:tblGrid>
-                <a:gridCol w="1298448"/>
-                <a:gridCol w="658368"/>
-                <a:gridCol w="1410919"/>
-              </a:tblGrid>
-              <a:tr h="329184">
-                <a:tc>
-                  <a:txBody>
-                    <a:bodyPr/>
-                    <a:lstStyle/>
-                    <a:p>
-                      <a:pPr indent="0" marL="0">
-                        <a:buNone/>
-                      </a:pPr>
-                      <a:r>
-                        <a:rPr lang="en-US" sz="1100" b="1" dirty="0">
-                          <a:solidFill>
-                            <a:srgbClr val="FFFFFF"/>
-                          </a:solidFill>
-                          <a:latin typeface="Microsoft YaHei" pitchFamily="34" charset="0"/>
-                          <a:ea typeface="Microsoft YaHei" pitchFamily="34" charset="-122"/>
-                          <a:cs typeface="Microsoft YaHei" pitchFamily="34" charset="-120"/>
-                        </a:rPr>
-                        <a:t>结果集合</a:t>
-                      </a:r>
-                      <a:endParaRPr lang="en-US" sz="1100" dirty="0">
-                        <a:latin typeface="Microsoft YaHei" charset="0"/>
-                        <a:ea typeface="Microsoft YaHei" charset="0"/>
-                        <a:cs typeface="Microsoft YaHei" charset="0"/>
-                      </a:endParaRPr>
-                    </a:p>
-                  </a:txBody>
-                  <a:tcPr marL="64008" marR="64008" marT="27432" marB="27432" anchor="ctr">
-                    <a:lnL w="9525" cap="flat" cmpd="sng" algn="ctr">
-                      <a:solidFill>
-                        <a:srgbClr val="D5DCE4"/>
-                      </a:solidFill>
-                      <a:prstDash val="solid"/>
-                      <a:round/>
-                      <a:headEnd type="none" w="med" len="med"/>
-                      <a:tailEnd type="none" w="med" len="med"/>
-                    </a:lnL>
-                    <a:lnR w="9525" cap="flat" cmpd="sng" algn="ctr">
-                      <a:solidFill>
-                        <a:srgbClr val="D5DCE4"/>
-                      </a:solidFill>
-                      <a:prstDash val="solid"/>
-                      <a:round/>
-                      <a:headEnd type="none" w="med" len="med"/>
-                      <a:tailEnd type="none" w="med" len="med"/>
-                    </a:lnR>
-                    <a:lnT w="9525" cap="flat" cmpd="sng" algn="ctr">
-                      <a:solidFill>
-                        <a:srgbClr val="D5DCE4"/>
-                      </a:solidFill>
-                      <a:prstDash val="solid"/>
-                      <a:round/>
-                      <a:headEnd type="none" w="med" len="med"/>
-                      <a:tailEnd type="none" w="med" len="med"/>
-                    </a:lnT>
-                    <a:lnB w="9525" cap="flat" cmpd="sng" algn="ctr">
-                      <a:solidFill>
-                        <a:srgbClr val="D5DCE4"/>
-                      </a:solidFill>
-                      <a:prstDash val="solid"/>
-                      <a:round/>
-                      <a:headEnd type="none" w="med" len="med"/>
-                      <a:tailEnd type="none" w="med" len="med"/>
-                    </a:lnB>
-                    <a:solidFill>
-                      <a:srgbClr val="0F2A44"/>
-                    </a:solidFill>
-                  </a:tcPr>
-                </a:tc>
-                <a:tc>
-                  <a:txBody>
-                    <a:bodyPr/>
-                    <a:lstStyle/>
-                    <a:p>
-                      <a:pPr indent="0" marL="0">
-                        <a:buNone/>
-                      </a:pPr>
-                      <a:r>
-                        <a:rPr lang="en-US" sz="1100" b="1" dirty="0">
-                          <a:solidFill>
-                            <a:srgbClr val="FFFFFF"/>
-                          </a:solidFill>
-                          <a:latin typeface="Microsoft YaHei" pitchFamily="34" charset="0"/>
-                          <a:ea typeface="Microsoft YaHei" pitchFamily="34" charset="-122"/>
-                          <a:cs typeface="Microsoft YaHei" pitchFamily="34" charset="-120"/>
-                        </a:rPr>
-                        <a:t>判定</a:t>
-                      </a:r>
-                      <a:endParaRPr lang="en-US" sz="1100" dirty="0">
-                        <a:latin typeface="Microsoft YaHei" charset="0"/>
-                        <a:ea typeface="Microsoft YaHei" charset="0"/>
-                        <a:cs typeface="Microsoft YaHei" charset="0"/>
-                      </a:endParaRPr>
-                    </a:p>
-                  </a:txBody>
-                  <a:tcPr marL="64008" marR="64008" marT="27432" marB="27432" anchor="ctr">
-                    <a:lnL w="9525" cap="flat" cmpd="sng" algn="ctr">
-                      <a:solidFill>
-                        <a:srgbClr val="D5DCE4"/>
-                      </a:solidFill>
-                      <a:prstDash val="solid"/>
-                      <a:round/>
-                      <a:headEnd type="none" w="med" len="med"/>
-                      <a:tailEnd type="none" w="med" len="med"/>
-                    </a:lnL>
-                    <a:lnR w="9525" cap="flat" cmpd="sng" algn="ctr">
-                      <a:solidFill>
-                        <a:srgbClr val="D5DCE4"/>
-                      </a:solidFill>
-                      <a:prstDash val="solid"/>
-                      <a:round/>
-                      <a:headEnd type="none" w="med" len="med"/>
-                      <a:tailEnd type="none" w="med" len="med"/>
-                    </a:lnR>
-                    <a:lnT w="9525" cap="flat" cmpd="sng" algn="ctr">
-                      <a:solidFill>
-                        <a:srgbClr val="D5DCE4"/>
-                      </a:solidFill>
-                      <a:prstDash val="solid"/>
-                      <a:round/>
-                      <a:headEnd type="none" w="med" len="med"/>
-                      <a:tailEnd type="none" w="med" len="med"/>
-                    </a:lnT>
-                    <a:lnB w="9525" cap="flat" cmpd="sng" algn="ctr">
-                      <a:solidFill>
-                        <a:srgbClr val="D5DCE4"/>
-                      </a:solidFill>
-                      <a:prstDash val="solid"/>
-                      <a:round/>
-                      <a:headEnd type="none" w="med" len="med"/>
-                      <a:tailEnd type="none" w="med" len="med"/>
-                    </a:lnB>
-                    <a:solidFill>
-                      <a:srgbClr val="0F2A44"/>
-                    </a:solidFill>
-                  </a:tcPr>
-                </a:tc>
-                <a:tc>
-                  <a:txBody>
-                    <a:bodyPr/>
-                    <a:lstStyle/>
-                    <a:p>
-                      <a:pPr indent="0" marL="0">
-                        <a:buNone/>
-                      </a:pPr>
-                      <a:r>
-                        <a:rPr lang="en-US" sz="1100" b="1" dirty="0">
-                          <a:solidFill>
-                            <a:srgbClr val="FFFFFF"/>
-                          </a:solidFill>
-                          <a:latin typeface="Microsoft YaHei" pitchFamily="34" charset="0"/>
-                          <a:ea typeface="Microsoft YaHei" pitchFamily="34" charset="-122"/>
-                          <a:cs typeface="Microsoft YaHei" pitchFamily="34" charset="-120"/>
-                        </a:rPr>
-                        <a:t>含义</a:t>
-                      </a:r>
-                      <a:endParaRPr lang="en-US" sz="1100" dirty="0">
-                        <a:latin typeface="Microsoft YaHei" charset="0"/>
-                        <a:ea typeface="Microsoft YaHei" charset="0"/>
-                        <a:cs typeface="Microsoft YaHei" charset="0"/>
-                      </a:endParaRPr>
-                    </a:p>
-                  </a:txBody>
-                  <a:tcPr marL="64008" marR="64008" marT="27432" marB="27432" anchor="ctr">
-                    <a:lnL w="9525" cap="flat" cmpd="sng" algn="ctr">
-                      <a:solidFill>
-                        <a:srgbClr val="D5DCE4"/>
-                      </a:solidFill>
-                      <a:prstDash val="solid"/>
-                      <a:round/>
-                      <a:headEnd type="none" w="med" len="med"/>
-                      <a:tailEnd type="none" w="med" len="med"/>
-                    </a:lnL>
-                    <a:lnR w="9525" cap="flat" cmpd="sng" algn="ctr">
-                      <a:solidFill>
-                        <a:srgbClr val="D5DCE4"/>
-                      </a:solidFill>
-                      <a:prstDash val="solid"/>
-                      <a:round/>
-                      <a:headEnd type="none" w="med" len="med"/>
-                      <a:tailEnd type="none" w="med" len="med"/>
-                    </a:lnR>
-                    <a:lnT w="9525" cap="flat" cmpd="sng" algn="ctr">
-                      <a:solidFill>
-                        <a:srgbClr val="D5DCE4"/>
-                      </a:solidFill>
-                      <a:prstDash val="solid"/>
-                      <a:round/>
-                      <a:headEnd type="none" w="med" len="med"/>
-                      <a:tailEnd type="none" w="med" len="med"/>
-                    </a:lnT>
-                    <a:lnB w="9525" cap="flat" cmpd="sng" algn="ctr">
-                      <a:solidFill>
-                        <a:srgbClr val="D5DCE4"/>
-                      </a:solidFill>
-                      <a:prstDash val="solid"/>
-                      <a:round/>
-                      <a:headEnd type="none" w="med" len="med"/>
-                      <a:tailEnd type="none" w="med" len="med"/>
-                    </a:lnB>
-                    <a:solidFill>
-                      <a:srgbClr val="0F2A44"/>
-                    </a:solidFill>
-                  </a:tcPr>
-                </a:tc>
-              </a:tr>
-              <a:tr h="329184">
-                <a:tc>
-                  <a:txBody>
-                    <a:bodyPr/>
-                    <a:lstStyle/>
-                    <a:p>
-                      <a:pPr indent="0" marL="0">
-                        <a:buNone/>
-                      </a:pPr>
-                      <a:r>
-                        <a:rPr lang="en-US" sz="1100" b="1" dirty="0">
-                          <a:solidFill>
-                            <a:srgbClr val="1B2533"/>
-                          </a:solidFill>
-                          <a:latin typeface="Microsoft YaHei" pitchFamily="34" charset="0"/>
-                          <a:ea typeface="Microsoft YaHei" pitchFamily="34" charset="-122"/>
-                          <a:cs typeface="Microsoft YaHei" pitchFamily="34" charset="-120"/>
-                        </a:rPr>
-                        <a:t>{ 支持 }</a:t>
-                      </a:r>
-                      <a:endParaRPr lang="en-US" sz="1100" dirty="0">
-                        <a:latin typeface="Microsoft YaHei" charset="0"/>
-                        <a:ea typeface="Microsoft YaHei" charset="0"/>
-                        <a:cs typeface="Microsoft YaHei" charset="0"/>
-                      </a:endParaRPr>
-                    </a:p>
-                  </a:txBody>
-                  <a:tcPr marL="64008" marR="64008" marT="27432" marB="27432" anchor="ctr">
-                    <a:lnL w="9525" cap="flat" cmpd="sng" algn="ctr">
-                      <a:solidFill>
-                        <a:srgbClr val="D5DCE4"/>
-                      </a:solidFill>
-                      <a:prstDash val="solid"/>
-                      <a:round/>
-                      <a:headEnd type="none" w="med" len="med"/>
-                      <a:tailEnd type="none" w="med" len="med"/>
-                    </a:lnL>
-                    <a:lnR w="9525" cap="flat" cmpd="sng" algn="ctr">
-                      <a:solidFill>
-                        <a:srgbClr val="D5DCE4"/>
-                      </a:solidFill>
-                      <a:prstDash val="solid"/>
-                      <a:round/>
-                      <a:headEnd type="none" w="med" len="med"/>
-                      <a:tailEnd type="none" w="med" len="med"/>
-                    </a:lnR>
-                    <a:lnT w="9525" cap="flat" cmpd="sng" algn="ctr">
-                      <a:solidFill>
-                        <a:srgbClr val="D5DCE4"/>
-                      </a:solidFill>
-                      <a:prstDash val="solid"/>
-                      <a:round/>
-                      <a:headEnd type="none" w="med" len="med"/>
-                      <a:tailEnd type="none" w="med" len="med"/>
-                    </a:lnT>
-                    <a:lnB w="9525" cap="flat" cmpd="sng" algn="ctr">
-                      <a:solidFill>
-                        <a:srgbClr val="D5DCE4"/>
-                      </a:solidFill>
-                      <a:prstDash val="solid"/>
-                      <a:round/>
-                      <a:headEnd type="none" w="med" len="med"/>
-                      <a:tailEnd type="none" w="med" len="med"/>
-                    </a:lnB>
-                    <a:solidFill>
-                      <a:srgbClr val="FFFFFF"/>
-                    </a:solidFill>
-                  </a:tcPr>
-                </a:tc>
-                <a:tc>
-                  <a:txBody>
-                    <a:bodyPr/>
-                    <a:lstStyle/>
-                    <a:p>
-                      <a:pPr indent="0" marL="0">
-                        <a:buNone/>
-                      </a:pPr>
-                      <a:r>
-                        <a:rPr lang="en-US" sz="1100" b="1" dirty="0">
-                          <a:solidFill>
-                            <a:srgbClr val="0E8A7E"/>
-                          </a:solidFill>
-                          <a:latin typeface="Microsoft YaHei" pitchFamily="34" charset="0"/>
-                          <a:ea typeface="Microsoft YaHei" pitchFamily="34" charset="-122"/>
-                          <a:cs typeface="Microsoft YaHei" pitchFamily="34" charset="-120"/>
-                        </a:rPr>
-                        <a:t>支持</a:t>
-                      </a:r>
-                      <a:endParaRPr lang="en-US" sz="1100" dirty="0">
-                        <a:latin typeface="Microsoft YaHei" charset="0"/>
-                        <a:ea typeface="Microsoft YaHei" charset="0"/>
-                        <a:cs typeface="Microsoft YaHei" charset="0"/>
-                      </a:endParaRPr>
-                    </a:p>
-                  </a:txBody>
-                  <a:tcPr marL="64008" marR="64008" marT="27432" marB="27432" anchor="ctr">
-                    <a:lnL w="9525" cap="flat" cmpd="sng" algn="ctr">
-                      <a:solidFill>
-                        <a:srgbClr val="D5DCE4"/>
-                      </a:solidFill>
-                      <a:prstDash val="solid"/>
-                      <a:round/>
-                      <a:headEnd type="none" w="med" len="med"/>
-                      <a:tailEnd type="none" w="med" len="med"/>
-                    </a:lnL>
-                    <a:lnR w="9525" cap="flat" cmpd="sng" algn="ctr">
-                      <a:solidFill>
-                        <a:srgbClr val="D5DCE4"/>
-                      </a:solidFill>
-                      <a:prstDash val="solid"/>
-                      <a:round/>
-                      <a:headEnd type="none" w="med" len="med"/>
-                      <a:tailEnd type="none" w="med" len="med"/>
-                    </a:lnR>
-                    <a:lnT w="9525" cap="flat" cmpd="sng" algn="ctr">
-                      <a:solidFill>
-                        <a:srgbClr val="D5DCE4"/>
-                      </a:solidFill>
-                      <a:prstDash val="solid"/>
-                      <a:round/>
-                      <a:headEnd type="none" w="med" len="med"/>
-                      <a:tailEnd type="none" w="med" len="med"/>
-                    </a:lnT>
-                    <a:lnB w="9525" cap="flat" cmpd="sng" algn="ctr">
-                      <a:solidFill>
-                        <a:srgbClr val="D5DCE4"/>
-                      </a:solidFill>
-                      <a:prstDash val="solid"/>
-                      <a:round/>
-                      <a:headEnd type="none" w="med" len="med"/>
-                      <a:tailEnd type="none" w="med" len="med"/>
-                    </a:lnB>
-                    <a:solidFill>
-                      <a:srgbClr val="FFFFFF"/>
-                    </a:solidFill>
-                  </a:tcPr>
-                </a:tc>
-                <a:tc>
-                  <a:txBody>
-                    <a:bodyPr/>
-                    <a:lstStyle/>
-                    <a:p>
-                      <a:pPr indent="0" marL="0">
-                        <a:buNone/>
-                      </a:pPr>
-                      <a:r>
-                        <a:rPr lang="en-US" sz="1100" dirty="0">
-                          <a:solidFill>
-                            <a:srgbClr val="1B2533"/>
-                          </a:solidFill>
-                          <a:latin typeface="Microsoft YaHei" pitchFamily="34" charset="0"/>
-                          <a:ea typeface="Microsoft YaHei" pitchFamily="34" charset="-122"/>
-                          <a:cs typeface="Microsoft YaHei" pitchFamily="34" charset="-120"/>
-                        </a:rPr>
-                        <a:t>只有“支持”说得通</a:t>
-                      </a:r>
-                      <a:endParaRPr lang="en-US" sz="1100" dirty="0">
-                        <a:latin typeface="Microsoft YaHei" charset="0"/>
-                        <a:ea typeface="Microsoft YaHei" charset="0"/>
-                        <a:cs typeface="Microsoft YaHei" charset="0"/>
-                      </a:endParaRPr>
-                    </a:p>
-                  </a:txBody>
-                  <a:tcPr marL="64008" marR="64008" marT="27432" marB="27432" anchor="ctr">
-                    <a:lnL w="9525" cap="flat" cmpd="sng" algn="ctr">
-                      <a:solidFill>
-                        <a:srgbClr val="D5DCE4"/>
-                      </a:solidFill>
-                      <a:prstDash val="solid"/>
-                      <a:round/>
-                      <a:headEnd type="none" w="med" len="med"/>
-                      <a:tailEnd type="none" w="med" len="med"/>
-                    </a:lnL>
-                    <a:lnR w="9525" cap="flat" cmpd="sng" algn="ctr">
-                      <a:solidFill>
-                        <a:srgbClr val="D5DCE4"/>
-                      </a:solidFill>
-                      <a:prstDash val="solid"/>
-                      <a:round/>
-                      <a:headEnd type="none" w="med" len="med"/>
-                      <a:tailEnd type="none" w="med" len="med"/>
-                    </a:lnR>
-                    <a:lnT w="9525" cap="flat" cmpd="sng" algn="ctr">
-                      <a:solidFill>
-                        <a:srgbClr val="D5DCE4"/>
-                      </a:solidFill>
-                      <a:prstDash val="solid"/>
-                      <a:round/>
-                      <a:headEnd type="none" w="med" len="med"/>
-                      <a:tailEnd type="none" w="med" len="med"/>
-                    </a:lnT>
-                    <a:lnB w="9525" cap="flat" cmpd="sng" algn="ctr">
-                      <a:solidFill>
-                        <a:srgbClr val="D5DCE4"/>
-                      </a:solidFill>
-                      <a:prstDash val="solid"/>
-                      <a:round/>
-                      <a:headEnd type="none" w="med" len="med"/>
-                      <a:tailEnd type="none" w="med" len="med"/>
-                    </a:lnB>
-                    <a:solidFill>
-                      <a:srgbClr val="FFFFFF"/>
-                    </a:solidFill>
-                  </a:tcPr>
-                </a:tc>
-              </a:tr>
-              <a:tr h="329184">
-                <a:tc>
-                  <a:txBody>
-                    <a:bodyPr/>
-                    <a:lstStyle/>
-                    <a:p>
-                      <a:pPr indent="0" marL="0">
-                        <a:buNone/>
-                      </a:pPr>
-                      <a:r>
-                        <a:rPr lang="en-US" sz="1100" b="1" dirty="0">
-                          <a:solidFill>
-                            <a:srgbClr val="1B2533"/>
-                          </a:solidFill>
-                          <a:latin typeface="Microsoft YaHei" pitchFamily="34" charset="0"/>
-                          <a:ea typeface="Microsoft YaHei" pitchFamily="34" charset="-122"/>
-                          <a:cs typeface="Microsoft YaHei" pitchFamily="34" charset="-120"/>
-                        </a:rPr>
-                        <a:t>{ 反驳 }</a:t>
-                      </a:r>
-                      <a:endParaRPr lang="en-US" sz="1100" dirty="0">
-                        <a:latin typeface="Microsoft YaHei" charset="0"/>
-                        <a:ea typeface="Microsoft YaHei" charset="0"/>
-                        <a:cs typeface="Microsoft YaHei" charset="0"/>
-                      </a:endParaRPr>
-                    </a:p>
-                  </a:txBody>
-                  <a:tcPr marL="64008" marR="64008" marT="27432" marB="27432" anchor="ctr">
-                    <a:lnL w="9525" cap="flat" cmpd="sng" algn="ctr">
-                      <a:solidFill>
-                        <a:srgbClr val="D5DCE4"/>
-                      </a:solidFill>
-                      <a:prstDash val="solid"/>
-                      <a:round/>
-                      <a:headEnd type="none" w="med" len="med"/>
-                      <a:tailEnd type="none" w="med" len="med"/>
-                    </a:lnL>
-                    <a:lnR w="9525" cap="flat" cmpd="sng" algn="ctr">
-                      <a:solidFill>
-                        <a:srgbClr val="D5DCE4"/>
-                      </a:solidFill>
-                      <a:prstDash val="solid"/>
-                      <a:round/>
-                      <a:headEnd type="none" w="med" len="med"/>
-                      <a:tailEnd type="none" w="med" len="med"/>
-                    </a:lnR>
-                    <a:lnT w="9525" cap="flat" cmpd="sng" algn="ctr">
-                      <a:solidFill>
-                        <a:srgbClr val="D5DCE4"/>
-                      </a:solidFill>
-                      <a:prstDash val="solid"/>
-                      <a:round/>
-                      <a:headEnd type="none" w="med" len="med"/>
-                      <a:tailEnd type="none" w="med" len="med"/>
-                    </a:lnT>
-                    <a:lnB w="9525" cap="flat" cmpd="sng" algn="ctr">
-                      <a:solidFill>
-                        <a:srgbClr val="D5DCE4"/>
-                      </a:solidFill>
-                      <a:prstDash val="solid"/>
-                      <a:round/>
-                      <a:headEnd type="none" w="med" len="med"/>
-                      <a:tailEnd type="none" w="med" len="med"/>
-                    </a:lnB>
-                    <a:solidFill>
-                      <a:srgbClr val="FFFFFF"/>
-                    </a:solidFill>
-                  </a:tcPr>
-                </a:tc>
-                <a:tc>
-                  <a:txBody>
-                    <a:bodyPr/>
-                    <a:lstStyle/>
-                    <a:p>
-                      <a:pPr indent="0" marL="0">
-                        <a:buNone/>
-                      </a:pPr>
-                      <a:r>
-                        <a:rPr lang="en-US" sz="1100" b="1" dirty="0">
-                          <a:solidFill>
-                            <a:srgbClr val="B4233A"/>
-                          </a:solidFill>
-                          <a:latin typeface="Microsoft YaHei" pitchFamily="34" charset="0"/>
-                          <a:ea typeface="Microsoft YaHei" pitchFamily="34" charset="-122"/>
-                          <a:cs typeface="Microsoft YaHei" pitchFamily="34" charset="-120"/>
-                        </a:rPr>
-                        <a:t>反驳</a:t>
-                      </a:r>
-                      <a:endParaRPr lang="en-US" sz="1100" dirty="0">
-                        <a:latin typeface="Microsoft YaHei" charset="0"/>
-                        <a:ea typeface="Microsoft YaHei" charset="0"/>
-                        <a:cs typeface="Microsoft YaHei" charset="0"/>
-                      </a:endParaRPr>
-                    </a:p>
-                  </a:txBody>
-                  <a:tcPr marL="64008" marR="64008" marT="27432" marB="27432" anchor="ctr">
-                    <a:lnL w="9525" cap="flat" cmpd="sng" algn="ctr">
-                      <a:solidFill>
-                        <a:srgbClr val="D5DCE4"/>
-                      </a:solidFill>
-                      <a:prstDash val="solid"/>
-                      <a:round/>
-                      <a:headEnd type="none" w="med" len="med"/>
-                      <a:tailEnd type="none" w="med" len="med"/>
-                    </a:lnL>
-                    <a:lnR w="9525" cap="flat" cmpd="sng" algn="ctr">
-                      <a:solidFill>
-                        <a:srgbClr val="D5DCE4"/>
-                      </a:solidFill>
-                      <a:prstDash val="solid"/>
-                      <a:round/>
-                      <a:headEnd type="none" w="med" len="med"/>
-                      <a:tailEnd type="none" w="med" len="med"/>
-                    </a:lnR>
-                    <a:lnT w="9525" cap="flat" cmpd="sng" algn="ctr">
-                      <a:solidFill>
-                        <a:srgbClr val="D5DCE4"/>
-                      </a:solidFill>
-                      <a:prstDash val="solid"/>
-                      <a:round/>
-                      <a:headEnd type="none" w="med" len="med"/>
-                      <a:tailEnd type="none" w="med" len="med"/>
-                    </a:lnT>
-                    <a:lnB w="9525" cap="flat" cmpd="sng" algn="ctr">
-                      <a:solidFill>
-                        <a:srgbClr val="D5DCE4"/>
-                      </a:solidFill>
-                      <a:prstDash val="solid"/>
-                      <a:round/>
-                      <a:headEnd type="none" w="med" len="med"/>
-                      <a:tailEnd type="none" w="med" len="med"/>
-                    </a:lnB>
-                    <a:solidFill>
-                      <a:srgbClr val="FFFFFF"/>
-                    </a:solidFill>
-                  </a:tcPr>
-                </a:tc>
-                <a:tc>
-                  <a:txBody>
-                    <a:bodyPr/>
-                    <a:lstStyle/>
-                    <a:p>
-                      <a:pPr indent="0" marL="0">
-                        <a:buNone/>
-                      </a:pPr>
-                      <a:r>
-                        <a:rPr lang="en-US" sz="1100" dirty="0">
-                          <a:solidFill>
-                            <a:srgbClr val="1B2533"/>
-                          </a:solidFill>
-                          <a:latin typeface="Microsoft YaHei" pitchFamily="34" charset="0"/>
-                          <a:ea typeface="Microsoft YaHei" pitchFamily="34" charset="-122"/>
-                          <a:cs typeface="Microsoft YaHei" pitchFamily="34" charset="-120"/>
-                        </a:rPr>
-                        <a:t>只有“反驳”说得通</a:t>
-                      </a:r>
-                      <a:endParaRPr lang="en-US" sz="1100" dirty="0">
-                        <a:latin typeface="Microsoft YaHei" charset="0"/>
-                        <a:ea typeface="Microsoft YaHei" charset="0"/>
-                        <a:cs typeface="Microsoft YaHei" charset="0"/>
-                      </a:endParaRPr>
-                    </a:p>
-                  </a:txBody>
-                  <a:tcPr marL="64008" marR="64008" marT="27432" marB="27432" anchor="ctr">
-                    <a:lnL w="9525" cap="flat" cmpd="sng" algn="ctr">
-                      <a:solidFill>
-                        <a:srgbClr val="D5DCE4"/>
-                      </a:solidFill>
-                      <a:prstDash val="solid"/>
-                      <a:round/>
-                      <a:headEnd type="none" w="med" len="med"/>
-                      <a:tailEnd type="none" w="med" len="med"/>
-                    </a:lnL>
-                    <a:lnR w="9525" cap="flat" cmpd="sng" algn="ctr">
-                      <a:solidFill>
-                        <a:srgbClr val="D5DCE4"/>
-                      </a:solidFill>
-                      <a:prstDash val="solid"/>
-                      <a:round/>
-                      <a:headEnd type="none" w="med" len="med"/>
-                      <a:tailEnd type="none" w="med" len="med"/>
-                    </a:lnR>
-                    <a:lnT w="9525" cap="flat" cmpd="sng" algn="ctr">
-                      <a:solidFill>
-                        <a:srgbClr val="D5DCE4"/>
-                      </a:solidFill>
-                      <a:prstDash val="solid"/>
-                      <a:round/>
-                      <a:headEnd type="none" w="med" len="med"/>
-                      <a:tailEnd type="none" w="med" len="med"/>
-                    </a:lnT>
-                    <a:lnB w="9525" cap="flat" cmpd="sng" algn="ctr">
-                      <a:solidFill>
-                        <a:srgbClr val="D5DCE4"/>
-                      </a:solidFill>
-                      <a:prstDash val="solid"/>
-                      <a:round/>
-                      <a:headEnd type="none" w="med" len="med"/>
-                      <a:tailEnd type="none" w="med" len="med"/>
-                    </a:lnB>
-                    <a:solidFill>
-                      <a:srgbClr val="FFFFFF"/>
-                    </a:solidFill>
-                  </a:tcPr>
-                </a:tc>
-              </a:tr>
-              <a:tr h="329184">
-                <a:tc>
-                  <a:txBody>
-                    <a:bodyPr/>
-                    <a:lstStyle/>
-                    <a:p>
-                      <a:pPr indent="0" marL="0">
-                        <a:buNone/>
-                      </a:pPr>
-                      <a:r>
-                        <a:rPr lang="en-US" sz="1100" b="1" dirty="0">
-                          <a:solidFill>
-                            <a:srgbClr val="1B2533"/>
-                          </a:solidFill>
-                          <a:latin typeface="Microsoft YaHei" pitchFamily="34" charset="0"/>
-                          <a:ea typeface="Microsoft YaHei" pitchFamily="34" charset="-122"/>
-                          <a:cs typeface="Microsoft YaHei" pitchFamily="34" charset="-120"/>
-                        </a:rPr>
-                        <a:t>{ 支持，反驳 }</a:t>
-                      </a:r>
-                      <a:endParaRPr lang="en-US" sz="1100" dirty="0">
-                        <a:latin typeface="Microsoft YaHei" charset="0"/>
-                        <a:ea typeface="Microsoft YaHei" charset="0"/>
-                        <a:cs typeface="Microsoft YaHei" charset="0"/>
-                      </a:endParaRPr>
-                    </a:p>
-                  </a:txBody>
-                  <a:tcPr marL="64008" marR="64008" marT="27432" marB="27432" anchor="ctr">
-                    <a:lnL w="9525" cap="flat" cmpd="sng" algn="ctr">
-                      <a:solidFill>
-                        <a:srgbClr val="D5DCE4"/>
-                      </a:solidFill>
-                      <a:prstDash val="solid"/>
-                      <a:round/>
-                      <a:headEnd type="none" w="med" len="med"/>
-                      <a:tailEnd type="none" w="med" len="med"/>
-                    </a:lnL>
-                    <a:lnR w="9525" cap="flat" cmpd="sng" algn="ctr">
-                      <a:solidFill>
-                        <a:srgbClr val="D5DCE4"/>
-                      </a:solidFill>
-                      <a:prstDash val="solid"/>
-                      <a:round/>
-                      <a:headEnd type="none" w="med" len="med"/>
-                      <a:tailEnd type="none" w="med" len="med"/>
-                    </a:lnR>
-                    <a:lnT w="9525" cap="flat" cmpd="sng" algn="ctr">
-                      <a:solidFill>
-                        <a:srgbClr val="D5DCE4"/>
-                      </a:solidFill>
-                      <a:prstDash val="solid"/>
-                      <a:round/>
-                      <a:headEnd type="none" w="med" len="med"/>
-                      <a:tailEnd type="none" w="med" len="med"/>
-                    </a:lnT>
-                    <a:lnB w="9525" cap="flat" cmpd="sng" algn="ctr">
-                      <a:solidFill>
-                        <a:srgbClr val="D5DCE4"/>
-                      </a:solidFill>
-                      <a:prstDash val="solid"/>
-                      <a:round/>
-                      <a:headEnd type="none" w="med" len="med"/>
-                      <a:tailEnd type="none" w="med" len="med"/>
-                    </a:lnB>
-                    <a:solidFill>
-                      <a:srgbClr val="FFFFFF"/>
-                    </a:solidFill>
-                  </a:tcPr>
-                </a:tc>
-                <a:tc>
-                  <a:txBody>
-                    <a:bodyPr/>
-                    <a:lstStyle/>
-                    <a:p>
-                      <a:pPr indent="0" marL="0">
-                        <a:buNone/>
-                      </a:pPr>
-                      <a:r>
-                        <a:rPr lang="en-US" sz="1100" b="1" dirty="0">
-                          <a:solidFill>
-                            <a:srgbClr val="C9792A"/>
-                          </a:solidFill>
-                          <a:latin typeface="Microsoft YaHei" pitchFamily="34" charset="0"/>
-                          <a:ea typeface="Microsoft YaHei" pitchFamily="34" charset="-122"/>
-                          <a:cs typeface="Microsoft YaHei" pitchFamily="34" charset="-120"/>
-                        </a:rPr>
-                        <a:t>不确定</a:t>
-                      </a:r>
-                      <a:endParaRPr lang="en-US" sz="1100" dirty="0">
-                        <a:latin typeface="Microsoft YaHei" charset="0"/>
-                        <a:ea typeface="Microsoft YaHei" charset="0"/>
-                        <a:cs typeface="Microsoft YaHei" charset="0"/>
-                      </a:endParaRPr>
-                    </a:p>
-                  </a:txBody>
-                  <a:tcPr marL="64008" marR="64008" marT="27432" marB="27432" anchor="ctr">
-                    <a:lnL w="9525" cap="flat" cmpd="sng" algn="ctr">
-                      <a:solidFill>
-                        <a:srgbClr val="D5DCE4"/>
-                      </a:solidFill>
-                      <a:prstDash val="solid"/>
-                      <a:round/>
-                      <a:headEnd type="none" w="med" len="med"/>
-                      <a:tailEnd type="none" w="med" len="med"/>
-                    </a:lnL>
-                    <a:lnR w="9525" cap="flat" cmpd="sng" algn="ctr">
-                      <a:solidFill>
-                        <a:srgbClr val="D5DCE4"/>
-                      </a:solidFill>
-                      <a:prstDash val="solid"/>
-                      <a:round/>
-                      <a:headEnd type="none" w="med" len="med"/>
-                      <a:tailEnd type="none" w="med" len="med"/>
-                    </a:lnR>
-                    <a:lnT w="9525" cap="flat" cmpd="sng" algn="ctr">
-                      <a:solidFill>
-                        <a:srgbClr val="D5DCE4"/>
-                      </a:solidFill>
-                      <a:prstDash val="solid"/>
-                      <a:round/>
-                      <a:headEnd type="none" w="med" len="med"/>
-                      <a:tailEnd type="none" w="med" len="med"/>
-                    </a:lnT>
-                    <a:lnB w="9525" cap="flat" cmpd="sng" algn="ctr">
-                      <a:solidFill>
-                        <a:srgbClr val="D5DCE4"/>
-                      </a:solidFill>
-                      <a:prstDash val="solid"/>
-                      <a:round/>
-                      <a:headEnd type="none" w="med" len="med"/>
-                      <a:tailEnd type="none" w="med" len="med"/>
-                    </a:lnB>
-                    <a:solidFill>
-                      <a:srgbClr val="FFFFFF"/>
-                    </a:solidFill>
-                  </a:tcPr>
-                </a:tc>
-                <a:tc>
-                  <a:txBody>
-                    <a:bodyPr/>
-                    <a:lstStyle/>
-                    <a:p>
-                      <a:pPr indent="0" marL="0">
-                        <a:buNone/>
-                      </a:pPr>
-                      <a:r>
-                        <a:rPr lang="en-US" sz="1100" dirty="0">
-                          <a:solidFill>
-                            <a:srgbClr val="1B2533"/>
-                          </a:solidFill>
-                          <a:latin typeface="Microsoft YaHei" pitchFamily="34" charset="0"/>
-                          <a:ea typeface="Microsoft YaHei" pitchFamily="34" charset="-122"/>
-                          <a:cs typeface="Microsoft YaHei" pitchFamily="34" charset="-120"/>
-                        </a:rPr>
-                        <a:t>证据分不出</a:t>
-                      </a:r>
-                      <a:endParaRPr lang="en-US" sz="1100" dirty="0">
-                        <a:latin typeface="Microsoft YaHei" charset="0"/>
-                        <a:ea typeface="Microsoft YaHei" charset="0"/>
-                        <a:cs typeface="Microsoft YaHei" charset="0"/>
-                      </a:endParaRPr>
-                    </a:p>
-                  </a:txBody>
-                  <a:tcPr marL="64008" marR="64008" marT="27432" marB="27432" anchor="ctr">
-                    <a:lnL w="9525" cap="flat" cmpd="sng" algn="ctr">
-                      <a:solidFill>
-                        <a:srgbClr val="D5DCE4"/>
-                      </a:solidFill>
-                      <a:prstDash val="solid"/>
-                      <a:round/>
-                      <a:headEnd type="none" w="med" len="med"/>
-                      <a:tailEnd type="none" w="med" len="med"/>
-                    </a:lnL>
-                    <a:lnR w="9525" cap="flat" cmpd="sng" algn="ctr">
-                      <a:solidFill>
-                        <a:srgbClr val="D5DCE4"/>
-                      </a:solidFill>
-                      <a:prstDash val="solid"/>
-                      <a:round/>
-                      <a:headEnd type="none" w="med" len="med"/>
-                      <a:tailEnd type="none" w="med" len="med"/>
-                    </a:lnR>
-                    <a:lnT w="9525" cap="flat" cmpd="sng" algn="ctr">
-                      <a:solidFill>
-                        <a:srgbClr val="D5DCE4"/>
-                      </a:solidFill>
-                      <a:prstDash val="solid"/>
-                      <a:round/>
-                      <a:headEnd type="none" w="med" len="med"/>
-                      <a:tailEnd type="none" w="med" len="med"/>
-                    </a:lnT>
-                    <a:lnB w="9525" cap="flat" cmpd="sng" algn="ctr">
-                      <a:solidFill>
-                        <a:srgbClr val="D5DCE4"/>
-                      </a:solidFill>
-                      <a:prstDash val="solid"/>
-                      <a:round/>
-                      <a:headEnd type="none" w="med" len="med"/>
-                      <a:tailEnd type="none" w="med" len="med"/>
-                    </a:lnB>
-                    <a:solidFill>
-                      <a:srgbClr val="FFFFFF"/>
-                    </a:solidFill>
-                  </a:tcPr>
-                </a:tc>
-              </a:tr>
-              <a:tr h="329184">
-                <a:tc>
-                  <a:txBody>
-                    <a:bodyPr/>
-                    <a:lstStyle/>
-                    <a:p>
-                      <a:pPr indent="0" marL="0">
-                        <a:buNone/>
-                      </a:pPr>
-                      <a:r>
-                        <a:rPr lang="en-US" sz="1100" b="1" dirty="0">
-                          <a:solidFill>
-                            <a:srgbClr val="1B2533"/>
-                          </a:solidFill>
-                          <a:latin typeface="Microsoft YaHei" pitchFamily="34" charset="0"/>
-                          <a:ea typeface="Microsoft YaHei" pitchFamily="34" charset="-122"/>
-                          <a:cs typeface="Microsoft YaHei" pitchFamily="34" charset="-120"/>
-                        </a:rPr>
-                        <a:t>{ }（空）</a:t>
-                      </a:r>
-                      <a:endParaRPr lang="en-US" sz="1100" dirty="0">
-                        <a:latin typeface="Microsoft YaHei" charset="0"/>
-                        <a:ea typeface="Microsoft YaHei" charset="0"/>
-                        <a:cs typeface="Microsoft YaHei" charset="0"/>
-                      </a:endParaRPr>
-                    </a:p>
-                  </a:txBody>
-                  <a:tcPr marL="64008" marR="64008" marT="27432" marB="27432" anchor="ctr">
-                    <a:lnL w="9525" cap="flat" cmpd="sng" algn="ctr">
-                      <a:solidFill>
-                        <a:srgbClr val="D5DCE4"/>
-                      </a:solidFill>
-                      <a:prstDash val="solid"/>
-                      <a:round/>
-                      <a:headEnd type="none" w="med" len="med"/>
-                      <a:tailEnd type="none" w="med" len="med"/>
-                    </a:lnL>
-                    <a:lnR w="9525" cap="flat" cmpd="sng" algn="ctr">
-                      <a:solidFill>
-                        <a:srgbClr val="D5DCE4"/>
-                      </a:solidFill>
-                      <a:prstDash val="solid"/>
-                      <a:round/>
-                      <a:headEnd type="none" w="med" len="med"/>
-                      <a:tailEnd type="none" w="med" len="med"/>
-                    </a:lnR>
-                    <a:lnT w="9525" cap="flat" cmpd="sng" algn="ctr">
-                      <a:solidFill>
-                        <a:srgbClr val="D5DCE4"/>
-                      </a:solidFill>
-                      <a:prstDash val="solid"/>
-                      <a:round/>
-                      <a:headEnd type="none" w="med" len="med"/>
-                      <a:tailEnd type="none" w="med" len="med"/>
-                    </a:lnT>
-                    <a:lnB w="9525" cap="flat" cmpd="sng" algn="ctr">
-                      <a:solidFill>
-                        <a:srgbClr val="D5DCE4"/>
-                      </a:solidFill>
-                      <a:prstDash val="solid"/>
-                      <a:round/>
-                      <a:headEnd type="none" w="med" len="med"/>
-                      <a:tailEnd type="none" w="med" len="med"/>
-                    </a:lnB>
-                    <a:solidFill>
-                      <a:srgbClr val="FFFFFF"/>
-                    </a:solidFill>
-                  </a:tcPr>
-                </a:tc>
-                <a:tc>
-                  <a:txBody>
-                    <a:bodyPr/>
-                    <a:lstStyle/>
-                    <a:p>
-                      <a:pPr indent="0" marL="0">
-                        <a:buNone/>
-                      </a:pPr>
-                      <a:r>
-                        <a:rPr lang="en-US" sz="1100" b="1" dirty="0">
-                          <a:solidFill>
-                            <a:srgbClr val="C9792A"/>
-                          </a:solidFill>
-                          <a:latin typeface="Microsoft YaHei" pitchFamily="34" charset="0"/>
-                          <a:ea typeface="Microsoft YaHei" pitchFamily="34" charset="-122"/>
-                          <a:cs typeface="Microsoft YaHei" pitchFamily="34" charset="-120"/>
-                        </a:rPr>
-                        <a:t>不确定</a:t>
-                      </a:r>
-                      <a:endParaRPr lang="en-US" sz="1100" dirty="0">
-                        <a:latin typeface="Microsoft YaHei" charset="0"/>
-                        <a:ea typeface="Microsoft YaHei" charset="0"/>
-                        <a:cs typeface="Microsoft YaHei" charset="0"/>
-                      </a:endParaRPr>
-                    </a:p>
-                  </a:txBody>
-                  <a:tcPr marL="64008" marR="64008" marT="27432" marB="27432" anchor="ctr">
-                    <a:lnL w="9525" cap="flat" cmpd="sng" algn="ctr">
-                      <a:solidFill>
-                        <a:srgbClr val="D5DCE4"/>
-                      </a:solidFill>
-                      <a:prstDash val="solid"/>
-                      <a:round/>
-                      <a:headEnd type="none" w="med" len="med"/>
-                      <a:tailEnd type="none" w="med" len="med"/>
-                    </a:lnL>
-                    <a:lnR w="9525" cap="flat" cmpd="sng" algn="ctr">
-                      <a:solidFill>
-                        <a:srgbClr val="D5DCE4"/>
-                      </a:solidFill>
-                      <a:prstDash val="solid"/>
-                      <a:round/>
-                      <a:headEnd type="none" w="med" len="med"/>
-                      <a:tailEnd type="none" w="med" len="med"/>
-                    </a:lnR>
-                    <a:lnT w="9525" cap="flat" cmpd="sng" algn="ctr">
-                      <a:solidFill>
-                        <a:srgbClr val="D5DCE4"/>
-                      </a:solidFill>
-                      <a:prstDash val="solid"/>
-                      <a:round/>
-                      <a:headEnd type="none" w="med" len="med"/>
-                      <a:tailEnd type="none" w="med" len="med"/>
-                    </a:lnT>
-                    <a:lnB w="9525" cap="flat" cmpd="sng" algn="ctr">
-                      <a:solidFill>
-                        <a:srgbClr val="D5DCE4"/>
-                      </a:solidFill>
-                      <a:prstDash val="solid"/>
-                      <a:round/>
-                      <a:headEnd type="none" w="med" len="med"/>
-                      <a:tailEnd type="none" w="med" len="med"/>
-                    </a:lnB>
-                    <a:solidFill>
-                      <a:srgbClr val="FFFFFF"/>
-                    </a:solidFill>
-                  </a:tcPr>
-                </a:tc>
-                <a:tc>
-                  <a:txBody>
-                    <a:bodyPr/>
-                    <a:lstStyle/>
-                    <a:p>
-                      <a:pPr indent="0" marL="0">
-                        <a:buNone/>
-                      </a:pPr>
-                      <a:r>
-                        <a:rPr lang="en-US" sz="1100" dirty="0">
-                          <a:solidFill>
-                            <a:srgbClr val="1B2533"/>
-                          </a:solidFill>
-                          <a:latin typeface="Microsoft YaHei" pitchFamily="34" charset="0"/>
-                          <a:ea typeface="Microsoft YaHei" pitchFamily="34" charset="-122"/>
-                          <a:cs typeface="Microsoft YaHei" pitchFamily="34" charset="-120"/>
-                        </a:rPr>
-                        <a:t>罕见，需人工复核</a:t>
-                      </a:r>
-                      <a:endParaRPr lang="en-US" sz="1100" dirty="0">
-                        <a:latin typeface="Microsoft YaHei" charset="0"/>
-                        <a:ea typeface="Microsoft YaHei" charset="0"/>
-                        <a:cs typeface="Microsoft YaHei" charset="0"/>
-                      </a:endParaRPr>
-                    </a:p>
-                  </a:txBody>
-                  <a:tcPr marL="64008" marR="64008" marT="27432" marB="27432" anchor="ctr">
-                    <a:lnL w="9525" cap="flat" cmpd="sng" algn="ctr">
-                      <a:solidFill>
-                        <a:srgbClr val="D5DCE4"/>
-                      </a:solidFill>
-                      <a:prstDash val="solid"/>
-                      <a:round/>
-                      <a:headEnd type="none" w="med" len="med"/>
-                      <a:tailEnd type="none" w="med" len="med"/>
-                    </a:lnL>
-                    <a:lnR w="9525" cap="flat" cmpd="sng" algn="ctr">
-                      <a:solidFill>
-                        <a:srgbClr val="D5DCE4"/>
-                      </a:solidFill>
-                      <a:prstDash val="solid"/>
-                      <a:round/>
-                      <a:headEnd type="none" w="med" len="med"/>
-                      <a:tailEnd type="none" w="med" len="med"/>
-                    </a:lnR>
-                    <a:lnT w="9525" cap="flat" cmpd="sng" algn="ctr">
-                      <a:solidFill>
-                        <a:srgbClr val="D5DCE4"/>
-                      </a:solidFill>
-                      <a:prstDash val="solid"/>
-                      <a:round/>
-                      <a:headEnd type="none" w="med" len="med"/>
-                      <a:tailEnd type="none" w="med" len="med"/>
-                    </a:lnT>
-                    <a:lnB w="9525" cap="flat" cmpd="sng" algn="ctr">
-                      <a:solidFill>
-                        <a:srgbClr val="D5DCE4"/>
-                      </a:solidFill>
-                      <a:prstDash val="solid"/>
-                      <a:round/>
-                      <a:headEnd type="none" w="med" len="med"/>
-                      <a:tailEnd type="none" w="med" len="med"/>
-                    </a:lnB>
-                    <a:solidFill>
-                      <a:srgbClr val="FFFFFF"/>
-                    </a:solidFill>
-                  </a:tcPr>
-                </a:tc>
-              </a:tr>
-            </a:tbl>
-          </a:graphicData>
-        </a:graphic>
-      </p:graphicFrame>
-      <p:sp>
-        <p:nvSpPr>
-          <p:cNvPr id="39" name="label-206"/>
-          <p:cNvSpPr txBox="1"/>
-          <p:nvPr/>
-        </p:nvSpPr>
-        <p:spPr>
-          <a:xfrm>
-            <a:off x="8001000" y="5257800"/>
-            <a:ext cx="3367735" cy="731520"/>
-          </a:xfrm>
-          <a:prstGeom prst="rect">
-            <a:avLst/>
-          </a:prstGeom>
-          <a:noFill/>
-          <a:ln/>
-        </p:spPr>
-        <p:txBody>
-          <a:bodyPr wrap="square" lIns="0" tIns="0" rIns="0" bIns="0" rtlCol="0" anchor="t"/>
-          <a:lstStyle/>
-          <a:p>
-            <a:pPr algn="l" indent="0" marL="0">
-              <a:buNone/>
-            </a:pPr>
-            <a:r>
-              <a:rPr lang="en-US" sz="1100" dirty="0">
-                <a:solidFill>
-                  <a:schemeClr val="tx1"/>
-                </a:solidFill>
-              </a:rPr>
-              <a:t>校准后每类出错率不超过 α（如 10%）；未校准时界面明确显示“未校准”。评分只看证据，与靶点名称无关。</a:t>
-            </a:r>
-            <a:endParaRPr lang="en-US" sz="1100" dirty="0"/>
-          </a:p>
-        </p:txBody>
-      </p:sp>
-      <p:sp>
-        <p:nvSpPr>
-          <p:cNvPr id="40" name="label-207"/>
-          <p:cNvSpPr txBox="1"/>
-          <p:nvPr/>
-        </p:nvSpPr>
-        <p:spPr>
-          <a:xfrm>
-            <a:off x="548640" y="6153912"/>
-            <a:ext cx="11094415" cy="274320"/>
-          </a:xfrm>
-          <a:prstGeom prst="rect">
-            <a:avLst/>
-          </a:prstGeom>
-          <a:noFill/>
-          <a:ln/>
-        </p:spPr>
-        <p:txBody>
-          <a:bodyPr wrap="square" lIns="0" tIns="0" rIns="0" bIns="0" rtlCol="0" anchor="t"/>
-          <a:lstStyle/>
-          <a:p>
-            <a:pPr algn="l" indent="0" marL="0">
-              <a:buNone/>
-            </a:pPr>
-            <a:r>
-              <a:rPr lang="en-US" sz="1000" dirty="0">
-                <a:solidFill>
-                  <a:schemeClr val="accent6"/>
-                </a:solidFill>
-              </a:rPr>
-              <a:t>说明：靶点本身 114 例、靶点–疾病 94 例；动物模型差异 p = 0.023，遗传学 p = 0.062。系统目前仍按靶点查询，按“靶点–疾病”查询将在下一版接入。数据与脚本已存档，可复现。</a:t>
+              <a:t>样本量小：动物模型差异 p = 0.023，遗传学 p = 0.062。数据与脚本已存档，可复现（packages/core/evaluation）。</a:t>
             </a:r>
             <a:endParaRPr lang="en-US" sz="1000" dirty="0"/>
           </a:p>
@@ -16518,7 +15062,7 @@
       </p:sp>
       <p:sp>
         <p:nvSpPr>
-          <p:cNvPr id="4" name="card-208"/>
+          <p:cNvPr id="4" name="card-192"/>
           <p:cNvSpPr/>
           <p:nvPr/>
         </p:nvSpPr>
@@ -16545,7 +15089,7 @@
       </p:sp>
       <p:sp>
         <p:nvSpPr>
-          <p:cNvPr id="5" name="tag-209"/>
+          <p:cNvPr id="5" name="tag-193"/>
           <p:cNvSpPr/>
           <p:nvPr/>
         </p:nvSpPr>
@@ -16589,7 +15133,7 @@
       </p:sp>
       <p:sp>
         <p:nvSpPr>
-          <p:cNvPr id="6" name="label-210"/>
+          <p:cNvPr id="6" name="label-194"/>
           <p:cNvSpPr txBox="1"/>
           <p:nvPr/>
         </p:nvSpPr>
@@ -16625,7 +15169,7 @@
       </p:sp>
       <p:sp>
         <p:nvSpPr>
-          <p:cNvPr id="7" name="box-211"/>
+          <p:cNvPr id="7" name="box-195"/>
           <p:cNvSpPr/>
           <p:nvPr/>
         </p:nvSpPr>
@@ -16669,7 +15213,7 @@
       </p:sp>
       <p:sp>
         <p:nvSpPr>
-          <p:cNvPr id="8" name="arrow-212"/>
+          <p:cNvPr id="8" name="arrow-196"/>
           <p:cNvSpPr/>
           <p:nvPr/>
         </p:nvSpPr>
@@ -16693,7 +15237,7 @@
       </p:sp>
       <p:sp>
         <p:nvSpPr>
-          <p:cNvPr id="9" name="box-213"/>
+          <p:cNvPr id="9" name="box-197"/>
           <p:cNvSpPr/>
           <p:nvPr/>
         </p:nvSpPr>
@@ -16737,7 +15281,7 @@
       </p:sp>
       <p:sp>
         <p:nvSpPr>
-          <p:cNvPr id="10" name="arrow-214"/>
+          <p:cNvPr id="10" name="arrow-198"/>
           <p:cNvSpPr/>
           <p:nvPr/>
         </p:nvSpPr>
@@ -16761,7 +15305,7 @@
       </p:sp>
       <p:sp>
         <p:nvSpPr>
-          <p:cNvPr id="11" name="box-215"/>
+          <p:cNvPr id="11" name="box-199"/>
           <p:cNvSpPr/>
           <p:nvPr/>
         </p:nvSpPr>
@@ -16805,7 +15349,7 @@
       </p:sp>
       <p:sp>
         <p:nvSpPr>
-          <p:cNvPr id="12" name="arrow-216"/>
+          <p:cNvPr id="12" name="arrow-200"/>
           <p:cNvSpPr/>
           <p:nvPr/>
         </p:nvSpPr>
@@ -16829,7 +15373,7 @@
       </p:sp>
       <p:sp>
         <p:nvSpPr>
-          <p:cNvPr id="13" name="box-217"/>
+          <p:cNvPr id="13" name="box-201"/>
           <p:cNvSpPr/>
           <p:nvPr/>
         </p:nvSpPr>
@@ -16873,7 +15417,7 @@
       </p:sp>
       <p:sp>
         <p:nvSpPr>
-          <p:cNvPr id="14" name="arrow-218"/>
+          <p:cNvPr id="14" name="arrow-202"/>
           <p:cNvSpPr/>
           <p:nvPr/>
         </p:nvSpPr>
@@ -16897,7 +15441,7 @@
       </p:sp>
       <p:sp>
         <p:nvSpPr>
-          <p:cNvPr id="15" name="box-219"/>
+          <p:cNvPr id="15" name="box-203"/>
           <p:cNvSpPr/>
           <p:nvPr/>
         </p:nvSpPr>
@@ -16941,7 +15485,7 @@
       </p:sp>
       <p:sp>
         <p:nvSpPr>
-          <p:cNvPr id="16" name="bullets-220"/>
+          <p:cNvPr id="16" name="bullets-204"/>
           <p:cNvSpPr txBox="1"/>
           <p:nvPr/>
         </p:nvSpPr>
@@ -17017,7 +15561,7 @@
       </p:sp>
       <p:sp>
         <p:nvSpPr>
-          <p:cNvPr id="17" name="label-221"/>
+          <p:cNvPr id="17" name="label-205"/>
           <p:cNvSpPr txBox="1"/>
           <p:nvPr/>
         </p:nvSpPr>
@@ -17053,7 +15597,7 @@
       </p:sp>
       <p:sp>
         <p:nvSpPr>
-          <p:cNvPr id="18" name="label-222"/>
+          <p:cNvPr id="18" name="label-206"/>
           <p:cNvSpPr txBox="1"/>
           <p:nvPr/>
         </p:nvSpPr>
@@ -17089,7 +15633,7 @@
       </p:sp>
       <p:sp>
         <p:nvSpPr>
-          <p:cNvPr id="19" name="label-223"/>
+          <p:cNvPr id="19" name="label-207"/>
           <p:cNvSpPr txBox="1"/>
           <p:nvPr/>
         </p:nvSpPr>
@@ -17125,7 +15669,7 @@
       </p:sp>
       <p:sp>
         <p:nvSpPr>
-          <p:cNvPr id="20" name="label-224"/>
+          <p:cNvPr id="20" name="label-208"/>
           <p:cNvSpPr txBox="1"/>
           <p:nvPr/>
         </p:nvSpPr>
@@ -17161,7 +15705,7 @@
       </p:sp>
       <p:sp>
         <p:nvSpPr>
-          <p:cNvPr id="21" name="label-225"/>
+          <p:cNvPr id="21" name="label-209"/>
           <p:cNvSpPr txBox="1"/>
           <p:nvPr/>
         </p:nvSpPr>
@@ -17197,7 +15741,7 @@
       </p:sp>
       <p:sp>
         <p:nvSpPr>
-          <p:cNvPr id="22" name="label-226"/>
+          <p:cNvPr id="22" name="label-210"/>
           <p:cNvSpPr txBox="1"/>
           <p:nvPr/>
         </p:nvSpPr>
@@ -17233,7 +15777,7 @@
       </p:sp>
       <p:sp>
         <p:nvSpPr>
-          <p:cNvPr id="23" name="card-227"/>
+          <p:cNvPr id="23" name="card-211"/>
           <p:cNvSpPr/>
           <p:nvPr/>
         </p:nvSpPr>
@@ -17260,7 +15804,7 @@
       </p:sp>
       <p:sp>
         <p:nvSpPr>
-          <p:cNvPr id="24" name="tag-228"/>
+          <p:cNvPr id="24" name="tag-212"/>
           <p:cNvSpPr/>
           <p:nvPr/>
         </p:nvSpPr>
@@ -17304,7 +15848,7 @@
       </p:sp>
       <p:sp>
         <p:nvSpPr>
-          <p:cNvPr id="25" name="label-229"/>
+          <p:cNvPr id="25" name="label-213"/>
           <p:cNvSpPr txBox="1"/>
           <p:nvPr/>
         </p:nvSpPr>
@@ -17340,7 +15884,7 @@
       </p:sp>
       <p:sp>
         <p:nvSpPr>
-          <p:cNvPr id="26" name="box-230"/>
+          <p:cNvPr id="26" name="box-214"/>
           <p:cNvSpPr/>
           <p:nvPr/>
         </p:nvSpPr>
@@ -17384,7 +15928,7 @@
       </p:sp>
       <p:sp>
         <p:nvSpPr>
-          <p:cNvPr id="27" name="arrow-231"/>
+          <p:cNvPr id="27" name="arrow-215"/>
           <p:cNvSpPr/>
           <p:nvPr/>
         </p:nvSpPr>
@@ -17408,7 +15952,7 @@
       </p:sp>
       <p:sp>
         <p:nvSpPr>
-          <p:cNvPr id="28" name="box-232"/>
+          <p:cNvPr id="28" name="box-216"/>
           <p:cNvSpPr/>
           <p:nvPr/>
         </p:nvSpPr>
@@ -17452,7 +15996,7 @@
       </p:sp>
       <p:sp>
         <p:nvSpPr>
-          <p:cNvPr id="29" name="arrow-233"/>
+          <p:cNvPr id="29" name="arrow-217"/>
           <p:cNvSpPr/>
           <p:nvPr/>
         </p:nvSpPr>
@@ -17476,7 +16020,7 @@
       </p:sp>
       <p:sp>
         <p:nvSpPr>
-          <p:cNvPr id="30" name="arrow-234"/>
+          <p:cNvPr id="30" name="arrow-218"/>
           <p:cNvSpPr/>
           <p:nvPr/>
         </p:nvSpPr>
@@ -17500,7 +16044,7 @@
       </p:sp>
       <p:sp>
         <p:nvSpPr>
-          <p:cNvPr id="31" name="box-235"/>
+          <p:cNvPr id="31" name="box-219"/>
           <p:cNvSpPr/>
           <p:nvPr/>
         </p:nvSpPr>
@@ -17544,7 +16088,7 @@
       </p:sp>
       <p:sp>
         <p:nvSpPr>
-          <p:cNvPr id="32" name="box-236"/>
+          <p:cNvPr id="32" name="box-220"/>
           <p:cNvSpPr/>
           <p:nvPr/>
         </p:nvSpPr>
@@ -17588,7 +16132,7 @@
       </p:sp>
       <p:sp>
         <p:nvSpPr>
-          <p:cNvPr id="33" name="bullets-237"/>
+          <p:cNvPr id="33" name="bullets-221"/>
           <p:cNvSpPr txBox="1"/>
           <p:nvPr/>
         </p:nvSpPr>
@@ -17664,7 +16208,7 @@
       </p:sp>
       <p:sp>
         <p:nvSpPr>
-          <p:cNvPr id="34" name="label-238"/>
+          <p:cNvPr id="34" name="label-222"/>
           <p:cNvSpPr txBox="1"/>
           <p:nvPr/>
         </p:nvSpPr>

--- a/docs/presentation/MedScience-3.0-设计汇报.pptx
+++ b/docs/presentation/MedScience-3.0-设计汇报.pptx
@@ -117,18 +117,18 @@
   <p:extLst>
     <p:ext uri="{521415D9-36F7-43E2-AB2F-B90AF26B5E84}">
       <p14:sectionLst xmlns:p14="http://schemas.microsoft.com/office/powerpoint/2010/main">
-        <p14:section name="开篇" id="{3a1ce3e7-30c6-bab5-3e73-5fba5bdad4bb}">
+        <p14:section name="开篇" id="{ee0c7886-e5fb-17bd-067c-e9b76fbb8070}">
           <p14:sldIdLst>
             <p14:sldId id="256"/>
           </p14:sldIdLst>
         </p14:section>
-        <p14:section name="为什么" id="{afcbab15-403e-5c75-6ff7-0c8594232d29}">
+        <p14:section name="为什么" id="{d1dbf61d-734f-5cb6-c0e5-a9239dc6af1e}">
           <p14:sldIdLst>
             <p14:sldId id="257"/>
             <p14:sldId id="258"/>
           </p14:sldIdLst>
         </p14:section>
-        <p14:section name="怎么设计" id="{01b774af-a6cd-6a9f-e931-1478d156a0e7}">
+        <p14:section name="怎么设计" id="{a031d981-04ad-afd4-f40f-c860484ad26b}">
           <p14:sldIdLst>
             <p14:sldId id="259"/>
             <p14:sldId id="260"/>
@@ -138,12 +138,12 @@
             <p14:sldId id="264"/>
           </p14:sldIdLst>
         </p14:section>
-        <p14:section name="怎么用" id="{60099f59-dd02-ae71-61b2-28792713299a}">
+        <p14:section name="怎么用" id="{2a8d6963-29e3-8203-fa4a-b4d96fb66268}">
           <p14:sldIdLst>
             <p14:sldId id="265"/>
           </p14:sldIdLst>
         </p14:section>
-        <p14:section name="下一步" id="{0383e884-3dfc-e913-41ca-c2af000ecf4b}">
+        <p14:section name="下一步" id="{8345fd1b-160f-cb1b-5936-289c7fece2d0}">
           <p14:sldIdLst>
             <p14:sldId id="266"/>
           </p14:sldIdLst>
@@ -728,7 +728,7 @@
           <a:p>
             <a:r>
               <a:rPr lang="en-US" dirty="0"/>
-              <a:t>最后是进展和请求。B、C 两类设计已经落地并发布；A 类证据治理的新方案已完成小规模实测，证明同源证据被重复计数的问题普遍存在。下一步首先把即时溯源、独立证据线定级和实时状态核验接入系统；然后做回测实验：用公开的获批和失败结局作为标签，比较“按引用篇数”和“按独立证据线”哪个更能预测结局，整个过程不需要人工标注。结果稳定后发布正式版，并整理成论文。</a:t>
+              <a:t>最后是进展和请求。B、C 两类设计已经落地并发布；A 类中，实时状态核验已有原型，并用两个真实案例写成了自动化测试；同源证据的现象已经实测，但它会不会真的影响大模型的结论，还需要实验来回答。下一步先运行这个对照实验，脚本和数据都已备好，不需要人工标注；然后按结果决定来源标注是接入系统还是放弃；同时把实时状态核验接入正式流程。结果稳定后发布正式版，并整理成论文。</a:t>
             </a:r>
             <a:endParaRPr lang="en-US" dirty="0"/>
           </a:p>
@@ -904,7 +904,7 @@
           <a:p>
             <a:r>
               <a:rPr lang="en-US" dirty="0"/>
-              <a:t>左列是四个痛点，中间是同类方案通常怎么做，右列是我们的回应。前三个对应证据治理设计，其中第二个“同源证据被重复计数”是我们的核心切入点；第四个对应本地运行时。同类方案只引用公开资料，不评价其未公开能力。</a:t>
+              <a:t>左列是四个痛点，中间是同类方案通常怎么做，右列是我们的回应。前三个对应证据治理设计，核心是第一个：大模型自己无法知道训练之后发生的撤稿、撤市；第二个是低成本的来源标注，其影响待实验验证；第四个对应本地运行时。同类方案只引用公开资料，不评价其未公开能力。</a:t>
             </a:r>
             <a:endParaRPr lang="en-US" dirty="0"/>
           </a:p>
@@ -992,7 +992,7 @@
           <a:p>
             <a:r>
               <a:rPr lang="en-US" dirty="0"/>
-              <a:t>这一页同时回答“有哪几类设计”和“它们在系统里的位置”。A 类证据治理是新的一层（绿色框）：即时溯源、同源合并、独立证据线定级、实时状态核验，已完成实测，待接入系统；B 类是协作层，即科研小队的组织方式；C 类是运行与部署，包括使用入口、执行层和本机数据层，在 2.x 已具备。右侧防护钩子贯穿每一次工具调用。需要强调：这些都是智能体系统层面的设计，没有训练或修改大模型本身。</a:t>
+              <a:t>这一页同时回答“有哪几类设计”和“它们在系统里的位置”。A 类证据治理是绿色这一层：实时状态核验（核心，已有原型）、来源可见（已实测现象，待验证影响）、可核查引用（已落地）；B 类是协作层，即科研小队的组织方式；C 类是运行与部署，包括使用入口、执行层和本机数据层，在 2.x 已具备。右侧防护钩子贯穿每一次工具调用。需要强调：这些都是智能体系统层面的设计，没有训练或修改大模型本身。</a:t>
             </a:r>
             <a:endParaRPr lang="en-US" dirty="0"/>
           </a:p>
@@ -1080,7 +1080,7 @@
           <a:p>
             <a:r>
               <a:rPr lang="en-US" dirty="0"/>
-              <a:t>上排是一次科研提问的完整路径，每一步下面的小字是这一步产生的数据。绿色三步是证据治理层：把每条证据追溯到上游的试验或数据集，同源的合并成一条独立证据线，再按支持、反证和证据类型给结论定级。下方是回路：每次回答时实时核验来源的当前状态，比如论文撤稿、试验因无效终止、药品撤市，一旦失效，依赖它的结论当场降级并提示复核。全部用公开数据库现查现算，不需要自建证据库。</a:t>
+              <a:t>上排是一次科研提问的完整路径，每一步下面的小字是这一步产生的数据。绿色三步是证据治理层：标注每篇论文的上游试验，实时核验每个来源的当前状态，再检查每条结论引用的证据编号都确实来自工具返回的结果。下方是状态核验的回路：发现论文撤稿、试验因无效终止或药品撤市，依赖它的结论当场降级并提示复核。全部用公开数据库现查现算，不需要自建证据库。</a:t>
             </a:r>
             <a:endParaRPr lang="en-US" dirty="0"/>
           </a:p>
@@ -1168,7 +1168,7 @@
           <a:p>
             <a:r>
               <a:rPr lang="en-US" dirty="0"/>
-              <a:t>这是 A 类的核心设计。现有科研智能体大多按“引用了几篇文献”来呈现证据，但很多论文其实来自同一个试验。看左边这个真实例子：问“阿贝西利能否用于乳腺癌”，系统检索到的前 20 篇论文里，有 6 篇都来自同一个三期试验 monarchE，是同一批受试者的主结果、亚组分析和随访，只能算 1 条证据。我们的做法分三步：第一，即时溯源，把每条证据追到它的上游试验、数据集或原始论文，用的都是公开数据库，每个问题现查现算，不需要自建证据库，也不需要人工标注；第二，同源合并；第三，按独立证据线定级，看遗传学、动物模型、临床试验这几类独立证据是否相互印证，下结论前先主动找反证。下面的定级规则是设计方案，具体阈值会用实测数据确定。</a:t>
+              <a:t>这是 A 类的核心设计：实时状态核验。为什么必须由系统来做？因为大模型的知识停在训练截止日，它不知道之后发生的撤稿、试验终止和药品撤市。证据会被新研究推翻：论文撤稿、试验因无效终止、药品撤市。系统在回答时核验每个来源的当前状态，一旦失效，只降级真正依赖它的结论。左边伏塞洛托：2019 年凭 HOPE 试验中血红蛋白升高获批，2024 年因上市后死亡增多撤市。结论 A“可用于治疗该病”依赖批准，当场降级；结论 B“能提高血红蛋白”只依赖 HOPE 试验，保持不变——这正是替代指标改善不等于临床获益的典型例子。右边 Makena：2003 年 Meis 试验显示早产风险下降，2020 年确证试验 PROLONG 没有重复出效果，两项试验来自不同受试者，是两项方向相反的独立试验，系统把双方都列出来、标为有争议，不替人裁决；2023 年 FDA 撤销批准后结论降级。这两个案例都在 3.0 原型中写成了自动化测试，文献编号已经 PubMed 核实。</a:t>
             </a:r>
             <a:endParaRPr lang="en-US" dirty="0"/>
           </a:p>
@@ -1256,7 +1256,7 @@
           <a:p>
             <a:r>
               <a:rPr lang="en-US" dirty="0"/>
-              <a:t>第二个设计点是实时状态核验。证据会被新研究推翻：论文撤稿、试验因无效终止、药品撤市。系统在回答时核验每个来源的当前状态，一旦失效，只降级真正依赖它的结论。左边伏塞洛托：2019 年凭 HOPE 试验中血红蛋白升高获批，2024 年因上市后死亡增多撤市。结论 A“可用于治疗该病”依赖批准，当场降级；结论 B“能提高血红蛋白”只依赖 HOPE 试验，保持不变——这正是替代指标改善不等于临床获益的典型例子。右边 Makena：2003 年 Meis 试验显示早产风险下降，2020 年确证试验 PROLONG 没有重复出效果，两项试验来自不同受试者，是两条方向相反的独立证据线，系统把双方都列出来、标为有争议，不替人裁决；2023 年 FDA 撤销批准后结论降级。这两个案例都在 3.0 原型中写成了自动化测试，文献编号已经 PubMed 核实。</a:t>
+              <a:t>第二点是来源可见。检索结果里经常有多篇论文来自同一个试验，比如左边这个真实例子，问阿贝西利能否用于乳腺癌，前 20 篇里有 6 篇来自同一个三期试验 monarchE。我们的做法很简单：把每篇论文的上游试验编号查出来，随证据一起交给模型和用户，标明“这几篇来自同一试验”。为什么需要系统来做？因为系统目前只给模型标题，仅凭标题，大约只有 15% 的同源论文能被看出来。这一步只做标注、不打分，证据强弱仍由专家判断；它本身是一个低成本的小功能，不作为创新点。它是否真的会改变模型的结论，需要下一页的实验来回答。</a:t>
             </a:r>
             <a:endParaRPr lang="en-US" dirty="0"/>
           </a:p>
@@ -1344,7 +1344,7 @@
           <a:p>
             <a:r>
               <a:rPr lang="en-US" dirty="0"/>
-              <a:t>这一页是支撑这个设计的两项实测，全部用公开数据，没有人工标注。左边：我们拿 94 个真实的药物–疾病问题，用系统自带的文献检索各取前 20 篇，一共 1649 篇，再按 PubMed 的试验关联追溯来源。结果是，有试验证据的问题里，40% 存在同源论文；试验类论文中 29% 是重复计数；最多的一个问题里，有 8 篇论文来自同一组试验。这还是下界，因为只识别了明确的试验编号。右边：哪类证据能区分“有效”和“无效”。只看靶点本身，比如有没有强活性化合物、有没有临床试验，两组几乎一样；看靶点和疾病之间的遗传学、动物模型证据，获批组的比例是失败组的两倍左右，和 Nature 2024 的研究结论一致。这告诉我们：定级时应该按独立证据线和证据类型来计，而不是按篇数。样本还小，动物模型差异显著，遗传学接近显著。</a:t>
+              <a:t>这一页分清“已知”和“未知”。左边是已实测的现象：94 个真实问题、1649 篇论文，有试验证据的问题中 40% 存在同源论文，试验类论文中 29% 是重复计数，最多一个问题里有 8 篇来自同一个试验。这是下界。还有一个值得注意的点：已获批药物的同源比例更高，因为获批后会出现大量二次分析，所以“论文多”在一定程度上是成功的结果，而不是证据。右边是未知的部分：这些重复会不会让大模型产生“虚假共识”。我们设计了一个对照实验：同一个问题、同一个模型，只改变证据包——原样、标注来源、去重、再额外加入同一试验的论文——看模型给出的有效概率是否随重复篇数上升。结果决定这个方向的去留：效应存在，就把来源标注接入系统，并作为论文发现；不存在，就放弃。实验用真实论文和公开结局，不需要人工标注，在本机用已订阅的模型工具运行，目前尚未运行。</a:t>
             </a:r>
             <a:endParaRPr lang="en-US" dirty="0"/>
           </a:p>
@@ -2415,7 +2415,7 @@
       </p:sp>
       <p:sp>
         <p:nvSpPr>
-          <p:cNvPr id="4" name="label-223"/>
+          <p:cNvPr id="4" name="label-199"/>
           <p:cNvSpPr txBox="1"/>
           <p:nvPr/>
         </p:nvSpPr>
@@ -2451,7 +2451,7 @@
       </p:sp>
       <p:sp>
         <p:nvSpPr>
-          <p:cNvPr id="5" name="badge-224"/>
+          <p:cNvPr id="5" name="badge-200"/>
           <p:cNvSpPr/>
           <p:nvPr/>
         </p:nvSpPr>
@@ -2493,7 +2493,7 @@
       </p:sp>
       <p:sp>
         <p:nvSpPr>
-          <p:cNvPr id="6" name="label-225"/>
+          <p:cNvPr id="6" name="label-201"/>
           <p:cNvSpPr txBox="1"/>
           <p:nvPr/>
         </p:nvSpPr>
@@ -2529,7 +2529,7 @@
       </p:sp>
       <p:sp>
         <p:nvSpPr>
-          <p:cNvPr id="7" name="label-226"/>
+          <p:cNvPr id="7" name="label-202"/>
           <p:cNvSpPr txBox="1"/>
           <p:nvPr/>
         </p:nvSpPr>
@@ -2565,7 +2565,7 @@
       </p:sp>
       <p:sp>
         <p:nvSpPr>
-          <p:cNvPr id="8" name="badge-227"/>
+          <p:cNvPr id="8" name="badge-203"/>
           <p:cNvSpPr/>
           <p:nvPr/>
         </p:nvSpPr>
@@ -2607,7 +2607,7 @@
       </p:sp>
       <p:sp>
         <p:nvSpPr>
-          <p:cNvPr id="9" name="label-228"/>
+          <p:cNvPr id="9" name="label-204"/>
           <p:cNvSpPr txBox="1"/>
           <p:nvPr/>
         </p:nvSpPr>
@@ -2643,7 +2643,7 @@
       </p:sp>
       <p:sp>
         <p:nvSpPr>
-          <p:cNvPr id="10" name="label-229"/>
+          <p:cNvPr id="10" name="label-205"/>
           <p:cNvSpPr txBox="1"/>
           <p:nvPr/>
         </p:nvSpPr>
@@ -2679,7 +2679,7 @@
       </p:sp>
       <p:sp>
         <p:nvSpPr>
-          <p:cNvPr id="11" name="badge-230"/>
+          <p:cNvPr id="11" name="badge-206"/>
           <p:cNvSpPr/>
           <p:nvPr/>
         </p:nvSpPr>
@@ -2721,7 +2721,7 @@
       </p:sp>
       <p:sp>
         <p:nvSpPr>
-          <p:cNvPr id="12" name="label-231"/>
+          <p:cNvPr id="12" name="label-207"/>
           <p:cNvSpPr txBox="1"/>
           <p:nvPr/>
         </p:nvSpPr>
@@ -2757,7 +2757,7 @@
       </p:sp>
       <p:sp>
         <p:nvSpPr>
-          <p:cNvPr id="13" name="label-232"/>
+          <p:cNvPr id="13" name="label-208"/>
           <p:cNvSpPr txBox="1"/>
           <p:nvPr/>
         </p:nvSpPr>
@@ -2793,7 +2793,7 @@
       </p:sp>
       <p:pic>
         <p:nvPicPr>
-          <p:cNvPr id="14" name="screenshot-233" descr="自动检测到本机的 Claude Code">    </p:cNvPr>
+          <p:cNvPr id="14" name="screenshot-209" descr="自动检测到本机的 Claude Code">    </p:cNvPr>
           <p:cNvPicPr>
             <a:picLocks noChangeAspect="1"/>
           </p:cNvPicPr>
@@ -2817,7 +2817,7 @@
       </p:pic>
       <p:sp>
         <p:nvSpPr>
-          <p:cNvPr id="15" name="frame-234"/>
+          <p:cNvPr id="15" name="frame-210"/>
           <p:cNvSpPr/>
           <p:nvPr/>
         </p:nvSpPr>
@@ -2844,7 +2844,7 @@
       </p:sp>
       <p:sp>
         <p:nvSpPr>
-          <p:cNvPr id="16" name="label-235"/>
+          <p:cNvPr id="16" name="label-211"/>
           <p:cNvSpPr txBox="1"/>
           <p:nvPr/>
         </p:nvSpPr>
@@ -2880,7 +2880,7 @@
       </p:sp>
       <p:pic>
         <p:nvPicPr>
-          <p:cNvPr id="17" name="screenshot-236" descr="usage-ask-mention.jpg">    </p:cNvPr>
+          <p:cNvPr id="17" name="screenshot-212" descr="usage-ask-mention.jpg">    </p:cNvPr>
           <p:cNvPicPr>
             <a:picLocks noChangeAspect="1"/>
           </p:cNvPicPr>
@@ -2904,7 +2904,7 @@
       </p:pic>
       <p:sp>
         <p:nvSpPr>
-          <p:cNvPr id="18" name="frame-237"/>
+          <p:cNvPr id="18" name="frame-213"/>
           <p:cNvSpPr/>
           <p:nvPr/>
         </p:nvSpPr>
@@ -2931,7 +2931,7 @@
       </p:sp>
       <p:pic>
         <p:nvPicPr>
-          <p:cNvPr id="19" name="screenshot-238" descr="@ 点名专家；工具调用逐步可查">    </p:cNvPr>
+          <p:cNvPr id="19" name="screenshot-214" descr="@ 点名专家；工具调用逐步可查">    </p:cNvPr>
           <p:cNvPicPr>
             <a:picLocks noChangeAspect="1"/>
           </p:cNvPicPr>
@@ -2955,7 +2955,7 @@
       </p:pic>
       <p:sp>
         <p:nvSpPr>
-          <p:cNvPr id="20" name="frame-239"/>
+          <p:cNvPr id="20" name="frame-215"/>
           <p:cNvSpPr/>
           <p:nvPr/>
         </p:nvSpPr>
@@ -2982,7 +2982,7 @@
       </p:sp>
       <p:sp>
         <p:nvSpPr>
-          <p:cNvPr id="21" name="label-240"/>
+          <p:cNvPr id="21" name="label-216"/>
           <p:cNvSpPr txBox="1"/>
           <p:nvPr/>
         </p:nvSpPr>
@@ -3018,7 +3018,7 @@
       </p:sp>
       <p:pic>
         <p:nvPicPr>
-          <p:cNvPr id="22" name="screenshot-241" descr="3.0 证据页：来源、状态、历史">    </p:cNvPr>
+          <p:cNvPr id="22" name="screenshot-217" descr="3.0 证据页：来源、状态、历史">    </p:cNvPr>
           <p:cNvPicPr>
             <a:picLocks noChangeAspect="1"/>
           </p:cNvPicPr>
@@ -3042,7 +3042,7 @@
       </p:pic>
       <p:sp>
         <p:nvSpPr>
-          <p:cNvPr id="23" name="frame-242"/>
+          <p:cNvPr id="23" name="frame-218"/>
           <p:cNvSpPr/>
           <p:nvPr/>
         </p:nvSpPr>
@@ -3069,7 +3069,7 @@
       </p:sp>
       <p:sp>
         <p:nvSpPr>
-          <p:cNvPr id="24" name="label-243"/>
+          <p:cNvPr id="24" name="label-219"/>
           <p:cNvSpPr txBox="1"/>
           <p:nvPr/>
         </p:nvSpPr>
@@ -3105,7 +3105,7 @@
       </p:sp>
       <p:sp>
         <p:nvSpPr>
-          <p:cNvPr id="25" name="label-244"/>
+          <p:cNvPr id="25" name="label-220"/>
           <p:cNvSpPr txBox="1"/>
           <p:nvPr/>
         </p:nvSpPr>
@@ -3279,7 +3279,7 @@
                   <a:schemeClr val="accent6"/>
                 </a:solidFill>
               </a:rPr>
-              <a:t>B、C 两类设计已落地；A 类新方案已完成小规模实测，待接入系统。</a:t>
+              <a:t>B、C 已落地；A 类实时核验已有原型，同源现象已实测，其影响待实验验证。</a:t>
             </a:r>
             <a:endParaRPr lang="en-US" sz="1500" dirty="0"/>
           </a:p>
@@ -3287,7 +3287,7 @@
       </p:sp>
       <p:sp>
         <p:nvSpPr>
-          <p:cNvPr id="4" name="card-245"/>
+          <p:cNvPr id="4" name="card-221"/>
           <p:cNvSpPr/>
           <p:nvPr/>
         </p:nvSpPr>
@@ -3314,7 +3314,7 @@
       </p:sp>
       <p:sp>
         <p:nvSpPr>
-          <p:cNvPr id="5" name="badge-246"/>
+          <p:cNvPr id="5" name="badge-222"/>
           <p:cNvSpPr/>
           <p:nvPr/>
         </p:nvSpPr>
@@ -3356,7 +3356,7 @@
       </p:sp>
       <p:sp>
         <p:nvSpPr>
-          <p:cNvPr id="6" name="label-247"/>
+          <p:cNvPr id="6" name="label-223"/>
           <p:cNvSpPr txBox="1"/>
           <p:nvPr/>
         </p:nvSpPr>
@@ -3392,7 +3392,7 @@
       </p:sp>
       <p:sp>
         <p:nvSpPr>
-          <p:cNvPr id="7" name="bullets-248"/>
+          <p:cNvPr id="7" name="bullets-224"/>
           <p:cNvSpPr txBox="1"/>
           <p:nvPr/>
         </p:nvSpPr>
@@ -3442,7 +3442,7 @@
                   <a:schemeClr val="tx1"/>
                 </a:solidFill>
               </a:rPr>
-              <a:t>多智能体协作、本地运行时已落地</a:t>
+              <a:t>多智能体协作、本地运行时、可核查引用已落地</a:t>
             </a:r>
             <a:endParaRPr lang="en-US" sz="1400" dirty="0"/>
           </a:p>
@@ -3486,7 +3486,7 @@
       </p:sp>
       <p:sp>
         <p:nvSpPr>
-          <p:cNvPr id="8" name="card-249"/>
+          <p:cNvPr id="8" name="card-225"/>
           <p:cNvSpPr/>
           <p:nvPr/>
         </p:nvSpPr>
@@ -3513,7 +3513,7 @@
       </p:sp>
       <p:sp>
         <p:nvSpPr>
-          <p:cNvPr id="9" name="badge-250"/>
+          <p:cNvPr id="9" name="badge-226"/>
           <p:cNvSpPr/>
           <p:nvPr/>
         </p:nvSpPr>
@@ -3555,7 +3555,7 @@
       </p:sp>
       <p:sp>
         <p:nvSpPr>
-          <p:cNvPr id="10" name="label-251"/>
+          <p:cNvPr id="10" name="label-227"/>
           <p:cNvSpPr txBox="1"/>
           <p:nvPr/>
         </p:nvSpPr>
@@ -3591,7 +3591,7 @@
       </p:sp>
       <p:sp>
         <p:nvSpPr>
-          <p:cNvPr id="11" name="bullets-252"/>
+          <p:cNvPr id="11" name="bullets-228"/>
           <p:cNvSpPr txBox="1"/>
           <p:nvPr/>
         </p:nvSpPr>
@@ -3623,7 +3623,7 @@
                   <a:schemeClr val="tx1"/>
                 </a:solidFill>
               </a:rPr>
-              <a:t>即时溯源与独立证据线定级尚未接入系统</a:t>
+              <a:t>同源是否改变模型结论尚未验证</a:t>
             </a:r>
             <a:endParaRPr lang="en-US" sz="1400" dirty="0"/>
           </a:p>
@@ -3641,7 +3641,7 @@
                   <a:schemeClr val="tx1"/>
                 </a:solidFill>
               </a:rPr>
-              <a:t>同源识别目前只覆盖试验编号，队列、数据集待扩展</a:t>
+              <a:t>实时核验尚未覆盖全部数据源（撤稿库、试验、药品）</a:t>
             </a:r>
             <a:endParaRPr lang="en-US" sz="1400" dirty="0"/>
           </a:p>
@@ -3667,7 +3667,7 @@
       </p:sp>
       <p:sp>
         <p:nvSpPr>
-          <p:cNvPr id="12" name="card-253"/>
+          <p:cNvPr id="12" name="card-229"/>
           <p:cNvSpPr/>
           <p:nvPr/>
         </p:nvSpPr>
@@ -3694,7 +3694,7 @@
       </p:sp>
       <p:sp>
         <p:nvSpPr>
-          <p:cNvPr id="13" name="badge-254"/>
+          <p:cNvPr id="13" name="badge-230"/>
           <p:cNvSpPr/>
           <p:nvPr/>
         </p:nvSpPr>
@@ -3736,7 +3736,7 @@
       </p:sp>
       <p:sp>
         <p:nvSpPr>
-          <p:cNvPr id="14" name="label-255"/>
+          <p:cNvPr id="14" name="label-231"/>
           <p:cNvSpPr txBox="1"/>
           <p:nvPr/>
         </p:nvSpPr>
@@ -3772,7 +3772,7 @@
       </p:sp>
       <p:sp>
         <p:nvSpPr>
-          <p:cNvPr id="15" name="bullets-256"/>
+          <p:cNvPr id="15" name="bullets-232"/>
           <p:cNvSpPr txBox="1"/>
           <p:nvPr/>
         </p:nvSpPr>
@@ -3804,7 +3804,7 @@
                   <a:schemeClr val="tx1"/>
                 </a:solidFill>
               </a:rPr>
-              <a:t>把即时溯源、独立证据线定级、实时状态核验接入系统</a:t>
+              <a:t>运行“虚假共识”对照实验（脚本与数据已备好，无需人工标注）</a:t>
             </a:r>
             <a:endParaRPr lang="en-US" sz="1400" dirty="0"/>
           </a:p>
@@ -3822,7 +3822,7 @@
                   <a:schemeClr val="tx1"/>
                 </a:solidFill>
               </a:rPr>
-              <a:t>无人工标注的回测：用公开结局比较“引用篇数”与“独立证据线”</a:t>
+              <a:t>按结果决定：来源标注接入系统，或放弃该方向</a:t>
             </a:r>
             <a:endParaRPr lang="en-US" sz="1400" dirty="0"/>
           </a:p>
@@ -3840,7 +3840,7 @@
                   <a:schemeClr val="tx1"/>
                 </a:solidFill>
               </a:rPr>
-              <a:t>扩展同源识别：队列、数据集、预印本、荟萃分析</a:t>
+              <a:t>实时状态核验接入正式流程，覆盖撤稿、试验、药品三类来源</a:t>
             </a:r>
             <a:endParaRPr lang="en-US" sz="1400" dirty="0"/>
           </a:p>
@@ -3866,7 +3866,7 @@
       </p:sp>
       <p:sp>
         <p:nvSpPr>
-          <p:cNvPr id="16" name="ask-257"/>
+          <p:cNvPr id="16" name="ask-233"/>
           <p:cNvSpPr/>
           <p:nvPr/>
         </p:nvSpPr>
@@ -3893,7 +3893,7 @@
       </p:sp>
       <p:sp>
         <p:nvSpPr>
-          <p:cNvPr id="17" name="label-258"/>
+          <p:cNvPr id="17" name="label-234"/>
           <p:cNvSpPr txBox="1"/>
           <p:nvPr/>
         </p:nvSpPr>
@@ -3921,7 +3921,7 @@
                   <a:schemeClr val="bg1"/>
                 </a:solidFill>
               </a:rPr>
-              <a:t>请审阅：是否支持将“独立证据线定级”接入系统并开展回测实验（下一步第 1、2 项）。</a:t>
+              <a:t>请审阅：是否支持开展“虚假共识”对照实验，并按结果决定来源标注的去留（下一步第 1、2 项）。</a:t>
             </a:r>
             <a:endParaRPr lang="en-US" sz="1500" dirty="0"/>
           </a:p>
@@ -4349,7 +4349,7 @@
                   <a:schemeClr val="tx1"/>
                 </a:solidFill>
               </a:rPr>
-              <a:t>三类设计：证据治理（识别同源证据，按独立证据线定级）、多智能体协作（像课题组一样分工、审查把关）、本地运行（科研与临床数据留在本机）。</a:t>
+              <a:t>三类设计：证据治理（实时核验依据是否已被推翻，标明同源证据）、多智能体协作（像课题组一样分工、审查把关）、本地运行（科研与临床数据留在本机）。</a:t>
             </a:r>
             <a:endParaRPr lang="en-US" sz="1500" dirty="0"/>
           </a:p>
@@ -4490,7 +4490,7 @@
                   <a:schemeClr val="tx1"/>
                 </a:solidFill>
               </a:rPr>
-              <a:t>v3.0.0 已发布：三平台安装包和本地 Web 版。证据治理新方案已完成小规模实测（40% 的问题存在同源证据），待接入系统。</a:t>
+              <a:t>v3.0.0 已发布：三平台安装包和本地 Web 版。实时核验已有原型；同源证据现象已实测，其影响待实验验证。</a:t>
             </a:r>
             <a:endParaRPr lang="en-US" sz="1500" dirty="0"/>
           </a:p>
@@ -5181,7 +5181,7 @@
                           <a:ea typeface="Microsoft YaHei" pitchFamily="34" charset="-122"/>
                           <a:cs typeface="Microsoft YaHei" pitchFamily="34" charset="-120"/>
                         </a:rPr>
-                        <a:t>① 结论难追溯，错误会固化</a:t>
+                        <a:t>① 依据已被推翻，模型却不知道</a:t>
                       </a:r>
                       <a:endParaRPr lang="en-US" sz="1300" dirty="0">
                         <a:latin typeface="Microsoft YaHei" charset="0"/>
@@ -5202,7 +5202,7 @@
                           <a:ea typeface="Microsoft YaHei" pitchFamily="34" charset="-122"/>
                           <a:cs typeface="Microsoft YaHei" pitchFamily="34" charset="-120"/>
                         </a:rPr>
-                        <a:t>依据的试验或数据被新研究推翻，结论仍被反复引用</a:t>
+                        <a:t>撤稿、试验终止、撤市发生在模型训练之后</a:t>
                       </a:r>
                       <a:endParaRPr lang="en-US" sz="1300" dirty="0">
                         <a:latin typeface="Microsoft YaHei" charset="0"/>
@@ -5359,7 +5359,7 @@
                           <a:ea typeface="Microsoft YaHei" pitchFamily="34" charset="-122"/>
                           <a:cs typeface="Microsoft YaHei" pitchFamily="34" charset="-120"/>
                         </a:rPr>
-                        <a:t>实时状态核验：依据被推翻，相关结论当场降级</a:t>
+                        <a:t>实时状态核验：回答时查询依据的当前状态，失效即降级</a:t>
                       </a:r>
                       <a:endParaRPr lang="en-US" sz="1300" dirty="0">
                         <a:latin typeface="Microsoft YaHei" charset="0"/>
@@ -5607,7 +5607,7 @@
                           <a:ea typeface="Microsoft YaHei" pitchFamily="34" charset="-122"/>
                           <a:cs typeface="Microsoft YaHei" pitchFamily="34" charset="-120"/>
                         </a:rPr>
-                        <a:t>独立证据线定级：同源合并，看有几条独立证据</a:t>
+                        <a:t>来源可见：标明哪些论文来自同一试验</a:t>
                       </a:r>
                       <a:endParaRPr lang="en-US" sz="1300" dirty="0">
                         <a:latin typeface="Microsoft YaHei" charset="0"/>
@@ -5677,7 +5677,7 @@
                           <a:ea typeface="Microsoft YaHei" pitchFamily="34" charset="-122"/>
                           <a:cs typeface="Microsoft YaHei" pitchFamily="34" charset="-120"/>
                         </a:rPr>
-                        <a:t>③ 假设成立与否，可信度说不清</a:t>
+                        <a:t>③ 引用难以核查</a:t>
                       </a:r>
                       <a:endParaRPr lang="en-US" sz="1300" dirty="0">
                         <a:latin typeface="Microsoft YaHei" charset="0"/>
@@ -5698,7 +5698,7 @@
                           <a:ea typeface="Microsoft YaHei" pitchFamily="34" charset="-122"/>
                           <a:cs typeface="Microsoft YaHei" pitchFamily="34" charset="-120"/>
                         </a:rPr>
-                        <a:t>“80% 可信”从何而来，无法核验</a:t>
+                        <a:t>编号可能不存在，或与内容张冠李戴</a:t>
                       </a:r>
                       <a:endParaRPr lang="en-US" sz="1300" dirty="0">
                         <a:latin typeface="Microsoft YaHei" charset="0"/>
@@ -5766,7 +5766,7 @@
                           <a:ea typeface="Microsoft YaHei" pitchFamily="34" charset="-122"/>
                           <a:cs typeface="Microsoft YaHei" pitchFamily="34" charset="-120"/>
                         </a:rPr>
-                        <a:t>自动打分或排名</a:t>
+                        <a:t>附参考文献列表</a:t>
                       </a:r>
                       <a:endParaRPr lang="en-US" sz="1300" dirty="0">
                         <a:latin typeface="Microsoft YaHei" charset="0"/>
@@ -5787,7 +5787,7 @@
                           <a:ea typeface="Microsoft YaHei" pitchFamily="34" charset="-122"/>
                           <a:cs typeface="Microsoft YaHei" pitchFamily="34" charset="-120"/>
                         </a:rPr>
-                        <a:t>（分数本身缺少统计口径）</a:t>
+                        <a:t>（由用户自行核对）</a:t>
                       </a:r>
                       <a:endParaRPr lang="en-US" sz="1300" dirty="0">
                         <a:latin typeface="Microsoft YaHei" charset="0"/>
@@ -5855,7 +5855,7 @@
                           <a:ea typeface="Microsoft YaHei" pitchFamily="34" charset="-122"/>
                           <a:cs typeface="Microsoft YaHei" pitchFamily="34" charset="-120"/>
                         </a:rPr>
-                        <a:t>按证据类型定级：遗传学、动物模型、临床相互印证</a:t>
+                        <a:t>可核查引用：结论只能引用工具实际返回的证据，并自动检查</a:t>
                       </a:r>
                       <a:endParaRPr lang="en-US" sz="1300" dirty="0">
                         <a:latin typeface="Microsoft YaHei" charset="0"/>
@@ -6430,7 +6430,7 @@
                   <a:schemeClr val="accent6"/>
                 </a:solidFill>
               </a:rPr>
-              <a:t>管“结论凭什么成立”（新方案，已实测）</a:t>
+              <a:t>管“结论凭什么成立”</a:t>
             </a:r>
             <a:endParaRPr lang="en-US" sz="1150" dirty="0"/>
           </a:p>
@@ -7154,7 +7154,7 @@
         <p:spPr>
           <a:xfrm>
             <a:off x="2423160" y="3904488"/>
-            <a:ext cx="1737360" cy="438912"/>
+            <a:ext cx="2362200" cy="438912"/>
           </a:xfrm>
           <a:prstGeom prst="roundRect">
             <a:avLst>
@@ -7183,7 +7183,7 @@
                   <a:schemeClr val="tx1"/>
                 </a:solidFill>
               </a:rPr>
-              <a:t>即时来源溯源</a:t>
+              <a:t>实时状态核验</a:t>
             </a:r>
             <a:endParaRPr lang="en-US" sz="1250" dirty="0"/>
           </a:p>
@@ -7197,8 +7197,8 @@
         </p:nvSpPr>
         <p:spPr>
           <a:xfrm>
-            <a:off x="4297680" y="3904488"/>
-            <a:ext cx="1737360" cy="438912"/>
+            <a:off x="4922520" y="3904488"/>
+            <a:ext cx="2362200" cy="438912"/>
           </a:xfrm>
           <a:prstGeom prst="roundRect">
             <a:avLst>
@@ -7227,7 +7227,7 @@
                   <a:schemeClr val="tx1"/>
                 </a:solidFill>
               </a:rPr>
-              <a:t>同源合并</a:t>
+              <a:t>来源可见</a:t>
             </a:r>
             <a:endParaRPr lang="en-US" sz="1250" dirty="0"/>
           </a:p>
@@ -7241,8 +7241,8 @@
         </p:nvSpPr>
         <p:spPr>
           <a:xfrm>
-            <a:off x="6172200" y="3904488"/>
-            <a:ext cx="1737360" cy="438912"/>
+            <a:off x="7421880" y="3904488"/>
+            <a:ext cx="2362200" cy="438912"/>
           </a:xfrm>
           <a:prstGeom prst="roundRect">
             <a:avLst>
@@ -7271,7 +7271,7 @@
                   <a:schemeClr val="tx1"/>
                 </a:solidFill>
               </a:rPr>
-              <a:t>独立证据线定级</a:t>
+              <a:t>可核查引用</a:t>
             </a:r>
             <a:endParaRPr lang="en-US" sz="1250" dirty="0"/>
           </a:p>
@@ -7280,50 +7280,6 @@
       <p:sp>
         <p:nvSpPr>
           <p:cNvPr id="28" name="box-48"/>
-          <p:cNvSpPr/>
-          <p:nvPr/>
-        </p:nvSpPr>
-        <p:spPr>
-          <a:xfrm>
-            <a:off x="8046720" y="3904488"/>
-            <a:ext cx="1737360" cy="438912"/>
-          </a:xfrm>
-          <a:prstGeom prst="roundRect">
-            <a:avLst>
-              <a:gd name="adj" fmla="val 16667"/>
-            </a:avLst>
-          </a:prstGeom>
-          <a:solidFill>
-            <a:schemeClr val="bg1"/>
-          </a:solidFill>
-          <a:ln w="12700">
-            <a:solidFill>
-              <a:srgbClr val="D5DCE4"/>
-            </a:solidFill>
-          </a:ln>
-        </p:spPr>
-        <p:txBody>
-          <a:bodyPr wrap="square" lIns="762" tIns="762" rIns="762" bIns="762" rtlCol="0" anchor="ctr"/>
-          <a:lstStyle/>
-          <a:p>
-            <a:pPr algn="ctr" indent="0" marL="0">
-              <a:buNone/>
-            </a:pPr>
-            <a:r>
-              <a:rPr lang="en-US" sz="1250" dirty="0">
-                <a:solidFill>
-                  <a:schemeClr val="tx1"/>
-                </a:solidFill>
-              </a:rPr>
-              <a:t>实时状态核验</a:t>
-            </a:r>
-            <a:endParaRPr lang="en-US" sz="1250" dirty="0"/>
-          </a:p>
-        </p:txBody>
-      </p:sp>
-      <p:sp>
-        <p:nvSpPr>
-          <p:cNvPr id="29" name="box-49"/>
           <p:cNvSpPr/>
           <p:nvPr/>
         </p:nvSpPr>
@@ -7367,7 +7323,7 @@
       </p:sp>
       <p:sp>
         <p:nvSpPr>
-          <p:cNvPr id="30" name="layer-50"/>
+          <p:cNvPr id="29" name="layer-49"/>
           <p:cNvSpPr/>
           <p:nvPr/>
         </p:nvSpPr>
@@ -7394,7 +7350,7 @@
       </p:sp>
       <p:sp>
         <p:nvSpPr>
-          <p:cNvPr id="31" name="box-51"/>
+          <p:cNvPr id="30" name="box-50"/>
           <p:cNvSpPr/>
           <p:nvPr/>
         </p:nvSpPr>
@@ -7438,7 +7394,7 @@
       </p:sp>
       <p:sp>
         <p:nvSpPr>
-          <p:cNvPr id="32" name="box-52"/>
+          <p:cNvPr id="31" name="box-51"/>
           <p:cNvSpPr/>
           <p:nvPr/>
         </p:nvSpPr>
@@ -7482,7 +7438,7 @@
       </p:sp>
       <p:sp>
         <p:nvSpPr>
-          <p:cNvPr id="33" name="box-53"/>
+          <p:cNvPr id="32" name="box-52"/>
           <p:cNvSpPr/>
           <p:nvPr/>
         </p:nvSpPr>
@@ -7526,7 +7482,7 @@
       </p:sp>
       <p:sp>
         <p:nvSpPr>
-          <p:cNvPr id="34" name="box-54"/>
+          <p:cNvPr id="33" name="box-53"/>
           <p:cNvSpPr/>
           <p:nvPr/>
         </p:nvSpPr>
@@ -7570,7 +7526,7 @@
       </p:sp>
       <p:sp>
         <p:nvSpPr>
-          <p:cNvPr id="35" name="box-55"/>
+          <p:cNvPr id="34" name="box-54"/>
           <p:cNvSpPr/>
           <p:nvPr/>
         </p:nvSpPr>
@@ -7614,7 +7570,7 @@
       </p:sp>
       <p:sp>
         <p:nvSpPr>
-          <p:cNvPr id="36" name="layer-56"/>
+          <p:cNvPr id="35" name="layer-55"/>
           <p:cNvSpPr/>
           <p:nvPr/>
         </p:nvSpPr>
@@ -7641,7 +7597,7 @@
       </p:sp>
       <p:sp>
         <p:nvSpPr>
-          <p:cNvPr id="37" name="box-57"/>
+          <p:cNvPr id="36" name="box-56"/>
           <p:cNvSpPr/>
           <p:nvPr/>
         </p:nvSpPr>
@@ -7685,7 +7641,7 @@
       </p:sp>
       <p:sp>
         <p:nvSpPr>
-          <p:cNvPr id="38" name="hooks-58"/>
+          <p:cNvPr id="37" name="hooks-57"/>
           <p:cNvSpPr/>
           <p:nvPr/>
         </p:nvSpPr>
@@ -7712,14 +7668,50 @@
       </p:sp>
       <p:sp>
         <p:nvSpPr>
+          <p:cNvPr id="38" name="label-58"/>
+          <p:cNvSpPr txBox="1"/>
+          <p:nvPr/>
+        </p:nvSpPr>
+        <p:spPr>
+          <a:xfrm>
+            <a:off x="10195560" y="2377440"/>
+            <a:ext cx="1356055" cy="365760"/>
+          </a:xfrm>
+          <a:prstGeom prst="rect">
+            <a:avLst/>
+          </a:prstGeom>
+          <a:noFill/>
+          <a:ln/>
+        </p:spPr>
+        <p:txBody>
+          <a:bodyPr wrap="square" lIns="0" tIns="0" rIns="0" bIns="0" rtlCol="0" anchor="t"/>
+          <a:lstStyle/>
+          <a:p>
+            <a:pPr algn="ctr" indent="0" marL="0">
+              <a:buNone/>
+            </a:pPr>
+            <a:r>
+              <a:rPr lang="en-US" sz="1500" b="1" dirty="0">
+                <a:solidFill>
+                  <a:schemeClr val="bg1"/>
+                </a:solidFill>
+              </a:rPr>
+              <a:t>防护钩子</a:t>
+            </a:r>
+            <a:endParaRPr lang="en-US" sz="1500" dirty="0"/>
+          </a:p>
+        </p:txBody>
+      </p:sp>
+      <p:sp>
+        <p:nvSpPr>
           <p:cNvPr id="39" name="label-59"/>
           <p:cNvSpPr txBox="1"/>
           <p:nvPr/>
         </p:nvSpPr>
         <p:spPr>
           <a:xfrm>
-            <a:off x="10195560" y="2377440"/>
-            <a:ext cx="1356055" cy="365760"/>
+            <a:off x="10195560" y="2715768"/>
+            <a:ext cx="1356055" cy="274320"/>
           </a:xfrm>
           <a:prstGeom prst="rect">
             <a:avLst/>
@@ -7735,42 +7727,6 @@
               <a:buNone/>
             </a:pPr>
             <a:r>
-              <a:rPr lang="en-US" sz="1500" b="1" dirty="0">
-                <a:solidFill>
-                  <a:schemeClr val="bg1"/>
-                </a:solidFill>
-              </a:rPr>
-              <a:t>防护钩子</a:t>
-            </a:r>
-            <a:endParaRPr lang="en-US" sz="1500" dirty="0"/>
-          </a:p>
-        </p:txBody>
-      </p:sp>
-      <p:sp>
-        <p:nvSpPr>
-          <p:cNvPr id="40" name="label-60"/>
-          <p:cNvSpPr txBox="1"/>
-          <p:nvPr/>
-        </p:nvSpPr>
-        <p:spPr>
-          <a:xfrm>
-            <a:off x="10195560" y="2715768"/>
-            <a:ext cx="1356055" cy="274320"/>
-          </a:xfrm>
-          <a:prstGeom prst="rect">
-            <a:avLst/>
-          </a:prstGeom>
-          <a:noFill/>
-          <a:ln/>
-        </p:spPr>
-        <p:txBody>
-          <a:bodyPr wrap="square" lIns="0" tIns="0" rIns="0" bIns="0" rtlCol="0" anchor="t"/>
-          <a:lstStyle/>
-          <a:p>
-            <a:pPr algn="ctr" indent="0" marL="0">
-              <a:buNone/>
-            </a:pPr>
-            <a:r>
               <a:rPr lang="en-US" sz="1050" dirty="0">
                 <a:solidFill>
                   <a:srgbClr val="B9C7D6"/>
@@ -7784,7 +7740,7 @@
       </p:sp>
       <p:sp>
         <p:nvSpPr>
-          <p:cNvPr id="41" name="box-61"/>
+          <p:cNvPr id="40" name="box-60"/>
           <p:cNvSpPr/>
           <p:nvPr/>
         </p:nvSpPr>
@@ -7828,7 +7784,7 @@
       </p:sp>
       <p:sp>
         <p:nvSpPr>
-          <p:cNvPr id="42" name="box-62"/>
+          <p:cNvPr id="41" name="box-61"/>
           <p:cNvSpPr/>
           <p:nvPr/>
         </p:nvSpPr>
@@ -7872,7 +7828,7 @@
       </p:sp>
       <p:sp>
         <p:nvSpPr>
-          <p:cNvPr id="43" name="box-63"/>
+          <p:cNvPr id="42" name="box-62"/>
           <p:cNvSpPr/>
           <p:nvPr/>
         </p:nvSpPr>
@@ -7916,7 +7872,7 @@
       </p:sp>
       <p:sp>
         <p:nvSpPr>
-          <p:cNvPr id="44" name="box-64"/>
+          <p:cNvPr id="43" name="box-63"/>
           <p:cNvSpPr/>
           <p:nvPr/>
         </p:nvSpPr>
@@ -8106,7 +8062,7 @@
       </p:sp>
       <p:sp>
         <p:nvSpPr>
-          <p:cNvPr id="4" name="badge-65"/>
+          <p:cNvPr id="4" name="badge-64"/>
           <p:cNvSpPr/>
           <p:nvPr/>
         </p:nvSpPr>
@@ -8148,7 +8104,7 @@
       </p:sp>
       <p:sp>
         <p:nvSpPr>
-          <p:cNvPr id="5" name="box-66"/>
+          <p:cNvPr id="5" name="box-65"/>
           <p:cNvSpPr/>
           <p:nvPr/>
         </p:nvSpPr>
@@ -8192,7 +8148,7 @@
       </p:sp>
       <p:sp>
         <p:nvSpPr>
-          <p:cNvPr id="6" name="label-67"/>
+          <p:cNvPr id="6" name="label-66"/>
           <p:cNvSpPr txBox="1"/>
           <p:nvPr/>
         </p:nvSpPr>
@@ -8228,7 +8184,7 @@
       </p:sp>
       <p:sp>
         <p:nvSpPr>
-          <p:cNvPr id="7" name="arrow-68"/>
+          <p:cNvPr id="7" name="arrow-67"/>
           <p:cNvSpPr/>
           <p:nvPr/>
         </p:nvSpPr>
@@ -8252,7 +8208,7 @@
       </p:sp>
       <p:sp>
         <p:nvSpPr>
-          <p:cNvPr id="8" name="badge-69"/>
+          <p:cNvPr id="8" name="badge-68"/>
           <p:cNvSpPr/>
           <p:nvPr/>
         </p:nvSpPr>
@@ -8294,7 +8250,7 @@
       </p:sp>
       <p:sp>
         <p:nvSpPr>
-          <p:cNvPr id="9" name="box-70"/>
+          <p:cNvPr id="9" name="box-69"/>
           <p:cNvSpPr/>
           <p:nvPr/>
         </p:nvSpPr>
@@ -8338,7 +8294,7 @@
       </p:sp>
       <p:sp>
         <p:nvSpPr>
-          <p:cNvPr id="10" name="label-71"/>
+          <p:cNvPr id="10" name="label-70"/>
           <p:cNvSpPr txBox="1"/>
           <p:nvPr/>
         </p:nvSpPr>
@@ -8374,7 +8330,7 @@
       </p:sp>
       <p:sp>
         <p:nvSpPr>
-          <p:cNvPr id="11" name="arrow-72"/>
+          <p:cNvPr id="11" name="arrow-71"/>
           <p:cNvSpPr/>
           <p:nvPr/>
         </p:nvSpPr>
@@ -8398,7 +8354,7 @@
       </p:sp>
       <p:sp>
         <p:nvSpPr>
-          <p:cNvPr id="12" name="badge-73"/>
+          <p:cNvPr id="12" name="badge-72"/>
           <p:cNvSpPr/>
           <p:nvPr/>
         </p:nvSpPr>
@@ -8440,7 +8396,7 @@
       </p:sp>
       <p:sp>
         <p:nvSpPr>
-          <p:cNvPr id="13" name="box-74"/>
+          <p:cNvPr id="13" name="box-73"/>
           <p:cNvSpPr/>
           <p:nvPr/>
         </p:nvSpPr>
@@ -8484,7 +8440,7 @@
       </p:sp>
       <p:sp>
         <p:nvSpPr>
-          <p:cNvPr id="14" name="label-75"/>
+          <p:cNvPr id="14" name="label-74"/>
           <p:cNvSpPr txBox="1"/>
           <p:nvPr/>
         </p:nvSpPr>
@@ -8520,7 +8476,7 @@
       </p:sp>
       <p:sp>
         <p:nvSpPr>
-          <p:cNvPr id="15" name="arrow-76"/>
+          <p:cNvPr id="15" name="arrow-75"/>
           <p:cNvSpPr/>
           <p:nvPr/>
         </p:nvSpPr>
@@ -8544,7 +8500,7 @@
       </p:sp>
       <p:sp>
         <p:nvSpPr>
-          <p:cNvPr id="16" name="badge-77"/>
+          <p:cNvPr id="16" name="badge-76"/>
           <p:cNvSpPr/>
           <p:nvPr/>
         </p:nvSpPr>
@@ -8586,7 +8542,7 @@
       </p:sp>
       <p:sp>
         <p:nvSpPr>
-          <p:cNvPr id="17" name="box-78"/>
+          <p:cNvPr id="17" name="box-77"/>
           <p:cNvSpPr/>
           <p:nvPr/>
         </p:nvSpPr>
@@ -8630,7 +8586,7 @@
       </p:sp>
       <p:sp>
         <p:nvSpPr>
-          <p:cNvPr id="18" name="label-79"/>
+          <p:cNvPr id="18" name="label-78"/>
           <p:cNvSpPr txBox="1"/>
           <p:nvPr/>
         </p:nvSpPr>
@@ -8666,7 +8622,7 @@
       </p:sp>
       <p:sp>
         <p:nvSpPr>
-          <p:cNvPr id="19" name="arrow-80"/>
+          <p:cNvPr id="19" name="arrow-79"/>
           <p:cNvSpPr/>
           <p:nvPr/>
         </p:nvSpPr>
@@ -8690,7 +8646,7 @@
       </p:sp>
       <p:sp>
         <p:nvSpPr>
-          <p:cNvPr id="20" name="badge-81"/>
+          <p:cNvPr id="20" name="badge-80"/>
           <p:cNvSpPr/>
           <p:nvPr/>
         </p:nvSpPr>
@@ -8732,7 +8688,7 @@
       </p:sp>
       <p:sp>
         <p:nvSpPr>
-          <p:cNvPr id="21" name="box-82"/>
+          <p:cNvPr id="21" name="box-81"/>
           <p:cNvSpPr/>
           <p:nvPr/>
         </p:nvSpPr>
@@ -8768,7 +8724,7 @@
                   <a:schemeClr val="tx2"/>
                 </a:solidFill>
               </a:rPr>
-              <a:t>来源溯源</a:t>
+              <a:t>来源标注</a:t>
             </a:r>
             <a:endParaRPr lang="en-US" sz="1350" dirty="0"/>
           </a:p>
@@ -8776,7 +8732,7 @@
       </p:sp>
       <p:sp>
         <p:nvSpPr>
-          <p:cNvPr id="22" name="label-83"/>
+          <p:cNvPr id="22" name="label-82"/>
           <p:cNvSpPr txBox="1"/>
           <p:nvPr/>
         </p:nvSpPr>
@@ -8804,7 +8760,7 @@
                   <a:schemeClr val="accent6"/>
                 </a:solidFill>
               </a:rPr>
-              <a:t>上游试验 / 数据集</a:t>
+              <a:t>同源关系</a:t>
             </a:r>
             <a:endParaRPr lang="en-US" sz="1150" dirty="0"/>
           </a:p>
@@ -8812,7 +8768,7 @@
       </p:sp>
       <p:sp>
         <p:nvSpPr>
-          <p:cNvPr id="23" name="arrow-84"/>
+          <p:cNvPr id="23" name="arrow-83"/>
           <p:cNvSpPr/>
           <p:nvPr/>
         </p:nvSpPr>
@@ -8836,7 +8792,7 @@
       </p:sp>
       <p:sp>
         <p:nvSpPr>
-          <p:cNvPr id="24" name="badge-85"/>
+          <p:cNvPr id="24" name="badge-84"/>
           <p:cNvSpPr/>
           <p:nvPr/>
         </p:nvSpPr>
@@ -8878,7 +8834,7 @@
       </p:sp>
       <p:sp>
         <p:nvSpPr>
-          <p:cNvPr id="25" name="box-86"/>
+          <p:cNvPr id="25" name="box-85"/>
           <p:cNvSpPr/>
           <p:nvPr/>
         </p:nvSpPr>
@@ -8914,7 +8870,7 @@
                   <a:schemeClr val="tx2"/>
                 </a:solidFill>
               </a:rPr>
-              <a:t>同源合并</a:t>
+              <a:t>状态核验</a:t>
             </a:r>
             <a:endParaRPr lang="en-US" sz="1350" dirty="0"/>
           </a:p>
@@ -8922,7 +8878,7 @@
       </p:sp>
       <p:sp>
         <p:nvSpPr>
-          <p:cNvPr id="26" name="label-87"/>
+          <p:cNvPr id="26" name="label-86"/>
           <p:cNvSpPr txBox="1"/>
           <p:nvPr/>
         </p:nvSpPr>
@@ -8950,7 +8906,7 @@
                   <a:schemeClr val="accent6"/>
                 </a:solidFill>
               </a:rPr>
-              <a:t>独立证据线</a:t>
+              <a:t>撤稿 / 终止 / 撤市</a:t>
             </a:r>
             <a:endParaRPr lang="en-US" sz="1150" dirty="0"/>
           </a:p>
@@ -8958,7 +8914,7 @@
       </p:sp>
       <p:sp>
         <p:nvSpPr>
-          <p:cNvPr id="27" name="arrow-88"/>
+          <p:cNvPr id="27" name="arrow-87"/>
           <p:cNvSpPr/>
           <p:nvPr/>
         </p:nvSpPr>
@@ -8982,7 +8938,7 @@
       </p:sp>
       <p:sp>
         <p:nvSpPr>
-          <p:cNvPr id="28" name="badge-89"/>
+          <p:cNvPr id="28" name="badge-88"/>
           <p:cNvSpPr/>
           <p:nvPr/>
         </p:nvSpPr>
@@ -9024,7 +8980,7 @@
       </p:sp>
       <p:sp>
         <p:nvSpPr>
-          <p:cNvPr id="29" name="box-90"/>
+          <p:cNvPr id="29" name="box-89"/>
           <p:cNvSpPr/>
           <p:nvPr/>
         </p:nvSpPr>
@@ -9060,7 +9016,7 @@
                   <a:schemeClr val="tx2"/>
                 </a:solidFill>
               </a:rPr>
-              <a:t>定级</a:t>
+              <a:t>引用检查</a:t>
             </a:r>
             <a:endParaRPr lang="en-US" sz="1350" dirty="0"/>
           </a:p>
@@ -9068,7 +9024,7 @@
       </p:sp>
       <p:sp>
         <p:nvSpPr>
-          <p:cNvPr id="30" name="label-91"/>
+          <p:cNvPr id="30" name="label-90"/>
           <p:cNvSpPr txBox="1"/>
           <p:nvPr/>
         </p:nvSpPr>
@@ -9096,7 +9052,7 @@
                   <a:schemeClr val="accent6"/>
                 </a:solidFill>
               </a:rPr>
-              <a:t>支持 / 反证 / 类型</a:t>
+              <a:t>证据编号存在</a:t>
             </a:r>
             <a:endParaRPr lang="en-US" sz="1150" dirty="0"/>
           </a:p>
@@ -9104,7 +9060,7 @@
       </p:sp>
       <p:sp>
         <p:nvSpPr>
-          <p:cNvPr id="31" name="arrow-92"/>
+          <p:cNvPr id="31" name="arrow-91"/>
           <p:cNvSpPr/>
           <p:nvPr/>
         </p:nvSpPr>
@@ -9128,7 +9084,7 @@
       </p:sp>
       <p:sp>
         <p:nvSpPr>
-          <p:cNvPr id="32" name="badge-93"/>
+          <p:cNvPr id="32" name="badge-92"/>
           <p:cNvSpPr/>
           <p:nvPr/>
         </p:nvSpPr>
@@ -9170,7 +9126,7 @@
       </p:sp>
       <p:sp>
         <p:nvSpPr>
-          <p:cNvPr id="33" name="box-94"/>
+          <p:cNvPr id="33" name="box-93"/>
           <p:cNvSpPr/>
           <p:nvPr/>
         </p:nvSpPr>
@@ -9214,7 +9170,7 @@
       </p:sp>
       <p:sp>
         <p:nvSpPr>
-          <p:cNvPr id="34" name="label-95"/>
+          <p:cNvPr id="34" name="label-94"/>
           <p:cNvSpPr txBox="1"/>
           <p:nvPr/>
         </p:nvSpPr>
@@ -9242,7 +9198,7 @@
                   <a:schemeClr val="accent6"/>
                 </a:solidFill>
               </a:rPr>
-              <a:t>结论 + 证据线</a:t>
+              <a:t>结论 + 证据编号</a:t>
             </a:r>
             <a:endParaRPr lang="en-US" sz="1150" dirty="0"/>
           </a:p>
@@ -9250,7 +9206,7 @@
       </p:sp>
       <p:sp>
         <p:nvSpPr>
-          <p:cNvPr id="35" name="legend-96"/>
+          <p:cNvPr id="35" name="legend-95"/>
           <p:cNvSpPr/>
           <p:nvPr/>
         </p:nvSpPr>
@@ -9277,7 +9233,7 @@
       </p:sp>
       <p:sp>
         <p:nvSpPr>
-          <p:cNvPr id="36" name="label-97"/>
+          <p:cNvPr id="36" name="label-96"/>
           <p:cNvSpPr txBox="1"/>
           <p:nvPr/>
         </p:nvSpPr>
@@ -9313,7 +9269,7 @@
       </p:sp>
       <p:sp>
         <p:nvSpPr>
-          <p:cNvPr id="37" name="card-98"/>
+          <p:cNvPr id="37" name="card-97"/>
           <p:cNvSpPr/>
           <p:nvPr/>
         </p:nvSpPr>
@@ -9340,7 +9296,7 @@
       </p:sp>
       <p:sp>
         <p:nvSpPr>
-          <p:cNvPr id="38" name="label-99"/>
+          <p:cNvPr id="38" name="label-98"/>
           <p:cNvSpPr txBox="1"/>
           <p:nvPr/>
         </p:nvSpPr>
@@ -9376,7 +9332,7 @@
       </p:sp>
       <p:sp>
         <p:nvSpPr>
-          <p:cNvPr id="39" name="box-100"/>
+          <p:cNvPr id="39" name="box-99"/>
           <p:cNvSpPr/>
           <p:nvPr/>
         </p:nvSpPr>
@@ -9434,7 +9390,7 @@
       </p:sp>
       <p:sp>
         <p:nvSpPr>
-          <p:cNvPr id="40" name="arrow-101"/>
+          <p:cNvPr id="40" name="arrow-100"/>
           <p:cNvSpPr/>
           <p:nvPr/>
         </p:nvSpPr>
@@ -9458,7 +9414,7 @@
       </p:sp>
       <p:sp>
         <p:nvSpPr>
-          <p:cNvPr id="41" name="box-102"/>
+          <p:cNvPr id="41" name="box-101"/>
           <p:cNvSpPr/>
           <p:nvPr/>
         </p:nvSpPr>
@@ -9502,7 +9458,7 @@
       </p:sp>
       <p:sp>
         <p:nvSpPr>
-          <p:cNvPr id="42" name="arrow-103"/>
+          <p:cNvPr id="42" name="arrow-102"/>
           <p:cNvSpPr/>
           <p:nvPr/>
         </p:nvSpPr>
@@ -9526,7 +9482,7 @@
       </p:sp>
       <p:sp>
         <p:nvSpPr>
-          <p:cNvPr id="43" name="box-104"/>
+          <p:cNvPr id="43" name="box-103"/>
           <p:cNvSpPr/>
           <p:nvPr/>
         </p:nvSpPr>
@@ -9584,7 +9540,7 @@
       </p:sp>
       <p:sp>
         <p:nvSpPr>
-          <p:cNvPr id="44" name="arrow-105"/>
+          <p:cNvPr id="44" name="arrow-104"/>
           <p:cNvSpPr/>
           <p:nvPr/>
         </p:nvSpPr>
@@ -9608,7 +9564,7 @@
       </p:sp>
       <p:sp>
         <p:nvSpPr>
-          <p:cNvPr id="45" name="box-106"/>
+          <p:cNvPr id="45" name="box-105"/>
           <p:cNvSpPr/>
           <p:nvPr/>
         </p:nvSpPr>
@@ -9666,7 +9622,7 @@
       </p:sp>
       <p:sp>
         <p:nvSpPr>
-          <p:cNvPr id="46" name="label-107"/>
+          <p:cNvPr id="46" name="label-106"/>
           <p:cNvSpPr txBox="1"/>
           <p:nvPr/>
         </p:nvSpPr>
@@ -9802,7 +9758,7 @@
                   <a:schemeClr val="tx2"/>
                 </a:solidFill>
               </a:rPr>
-              <a:t>核心设计：独立证据线定级——看有几条独立证据，而不是引用了几篇</a:t>
+              <a:t>核心设计：实时状态核验——依据被推翻，结论当场降级</a:t>
             </a:r>
             <a:endParaRPr lang="en-US" sz="2800" dirty="0"/>
           </a:p>
@@ -9840,7 +9796,7 @@
                   <a:schemeClr val="accent6"/>
                 </a:solidFill>
               </a:rPr>
-              <a:t>A 类设计：即时追溯每条证据的来源，同源合并，按独立证据线给结论定级。</a:t>
+              <a:t>大模型的知识停在训练截止日；回答时实时查询撤稿、试验终止、药品撤市，只降级真正依赖失效来源的结论。</a:t>
             </a:r>
             <a:endParaRPr lang="en-US" sz="1500" dirty="0"/>
           </a:p>
@@ -9848,1460 +9804,7 @@
       </p:sp>
       <p:sp>
         <p:nvSpPr>
-          <p:cNvPr id="4" name="card-108"/>
-          <p:cNvSpPr/>
-          <p:nvPr/>
-        </p:nvSpPr>
-        <p:spPr>
-          <a:xfrm>
-            <a:off x="548640" y="1600200"/>
-            <a:ext cx="6675120" cy="4526280"/>
-          </a:xfrm>
-          <a:prstGeom prst="roundRect">
-            <a:avLst>
-              <a:gd name="adj" fmla="val 2020"/>
-            </a:avLst>
-          </a:prstGeom>
-          <a:solidFill>
-            <a:schemeClr val="bg2"/>
-          </a:solidFill>
-          <a:ln w="12700">
-            <a:solidFill>
-              <a:schemeClr val="bg2"/>
-            </a:solidFill>
-            <a:prstDash val="solid"/>
-          </a:ln>
-        </p:spPr>
-      </p:sp>
-      <p:sp>
-        <p:nvSpPr>
-          <p:cNvPr id="5" name="label-109"/>
-          <p:cNvSpPr txBox="1"/>
-          <p:nvPr/>
-        </p:nvSpPr>
-        <p:spPr>
-          <a:xfrm>
-            <a:off x="822960" y="1737360"/>
-            <a:ext cx="6126480" cy="329184"/>
-          </a:xfrm>
-          <a:prstGeom prst="rect">
-            <a:avLst/>
-          </a:prstGeom>
-          <a:noFill/>
-          <a:ln/>
-        </p:spPr>
-        <p:txBody>
-          <a:bodyPr wrap="square" lIns="0" tIns="0" rIns="0" bIns="0" rtlCol="0" anchor="t"/>
-          <a:lstStyle/>
-          <a:p>
-            <a:pPr algn="l" indent="0" marL="0">
-              <a:buNone/>
-            </a:pPr>
-            <a:r>
-              <a:rPr lang="en-US" sz="1350" b="1" dirty="0">
-                <a:solidFill>
-                  <a:schemeClr val="tx2"/>
-                </a:solidFill>
-              </a:rPr>
-              <a:t>真实例子：“阿贝西利能否用于乳腺癌”，系统检索到的前 20 篇论文</a:t>
-            </a:r>
-            <a:endParaRPr lang="en-US" sz="1350" dirty="0"/>
-          </a:p>
-        </p:txBody>
-      </p:sp>
-      <p:sp>
-        <p:nvSpPr>
-          <p:cNvPr id="6" name="box-110"/>
-          <p:cNvSpPr/>
-          <p:nvPr/>
-        </p:nvSpPr>
-        <p:spPr>
-          <a:xfrm>
-            <a:off x="822960" y="2240280"/>
-            <a:ext cx="1417320" cy="274320"/>
-          </a:xfrm>
-          <a:prstGeom prst="roundRect">
-            <a:avLst>
-              <a:gd name="adj" fmla="val 26667"/>
-            </a:avLst>
-          </a:prstGeom>
-          <a:solidFill>
-            <a:schemeClr val="bg1"/>
-          </a:solidFill>
-          <a:ln w="12700">
-            <a:solidFill>
-              <a:srgbClr val="C9792A"/>
-            </a:solidFill>
-          </a:ln>
-        </p:spPr>
-        <p:txBody>
-          <a:bodyPr wrap="square" lIns="762" tIns="762" rIns="762" bIns="762" rtlCol="0" anchor="ctr"/>
-          <a:lstStyle/>
-          <a:p>
-            <a:pPr algn="ctr" indent="0" marL="0">
-              <a:buNone/>
-            </a:pPr>
-            <a:r>
-              <a:rPr lang="en-US" sz="1100" dirty="0">
-                <a:solidFill>
-                  <a:schemeClr val="tx1"/>
-                </a:solidFill>
-              </a:rPr>
-              <a:t>论文 1</a:t>
-            </a:r>
-            <a:endParaRPr lang="en-US" sz="1100" dirty="0"/>
-          </a:p>
-        </p:txBody>
-      </p:sp>
-      <p:sp>
-        <p:nvSpPr>
-          <p:cNvPr id="7" name="box-111"/>
-          <p:cNvSpPr/>
-          <p:nvPr/>
-        </p:nvSpPr>
-        <p:spPr>
-          <a:xfrm>
-            <a:off x="822960" y="2578608"/>
-            <a:ext cx="1417320" cy="274320"/>
-          </a:xfrm>
-          <a:prstGeom prst="roundRect">
-            <a:avLst>
-              <a:gd name="adj" fmla="val 26667"/>
-            </a:avLst>
-          </a:prstGeom>
-          <a:solidFill>
-            <a:schemeClr val="bg1"/>
-          </a:solidFill>
-          <a:ln w="12700">
-            <a:solidFill>
-              <a:srgbClr val="C9792A"/>
-            </a:solidFill>
-          </a:ln>
-        </p:spPr>
-        <p:txBody>
-          <a:bodyPr wrap="square" lIns="762" tIns="762" rIns="762" bIns="762" rtlCol="0" anchor="ctr"/>
-          <a:lstStyle/>
-          <a:p>
-            <a:pPr algn="ctr" indent="0" marL="0">
-              <a:buNone/>
-            </a:pPr>
-            <a:r>
-              <a:rPr lang="en-US" sz="1100" dirty="0">
-                <a:solidFill>
-                  <a:schemeClr val="tx1"/>
-                </a:solidFill>
-              </a:rPr>
-              <a:t>论文 2</a:t>
-            </a:r>
-            <a:endParaRPr lang="en-US" sz="1100" dirty="0"/>
-          </a:p>
-        </p:txBody>
-      </p:sp>
-      <p:sp>
-        <p:nvSpPr>
-          <p:cNvPr id="8" name="box-112"/>
-          <p:cNvSpPr/>
-          <p:nvPr/>
-        </p:nvSpPr>
-        <p:spPr>
-          <a:xfrm>
-            <a:off x="822960" y="2916936"/>
-            <a:ext cx="1417320" cy="274320"/>
-          </a:xfrm>
-          <a:prstGeom prst="roundRect">
-            <a:avLst>
-              <a:gd name="adj" fmla="val 26667"/>
-            </a:avLst>
-          </a:prstGeom>
-          <a:solidFill>
-            <a:schemeClr val="bg1"/>
-          </a:solidFill>
-          <a:ln w="12700">
-            <a:solidFill>
-              <a:srgbClr val="C9792A"/>
-            </a:solidFill>
-          </a:ln>
-        </p:spPr>
-        <p:txBody>
-          <a:bodyPr wrap="square" lIns="762" tIns="762" rIns="762" bIns="762" rtlCol="0" anchor="ctr"/>
-          <a:lstStyle/>
-          <a:p>
-            <a:pPr algn="ctr" indent="0" marL="0">
-              <a:buNone/>
-            </a:pPr>
-            <a:r>
-              <a:rPr lang="en-US" sz="1100" dirty="0">
-                <a:solidFill>
-                  <a:schemeClr val="tx1"/>
-                </a:solidFill>
-              </a:rPr>
-              <a:t>论文 3</a:t>
-            </a:r>
-            <a:endParaRPr lang="en-US" sz="1100" dirty="0"/>
-          </a:p>
-        </p:txBody>
-      </p:sp>
-      <p:sp>
-        <p:nvSpPr>
-          <p:cNvPr id="9" name="box-113"/>
-          <p:cNvSpPr/>
-          <p:nvPr/>
-        </p:nvSpPr>
-        <p:spPr>
-          <a:xfrm>
-            <a:off x="822960" y="3255264"/>
-            <a:ext cx="1417320" cy="274320"/>
-          </a:xfrm>
-          <a:prstGeom prst="roundRect">
-            <a:avLst>
-              <a:gd name="adj" fmla="val 26667"/>
-            </a:avLst>
-          </a:prstGeom>
-          <a:solidFill>
-            <a:schemeClr val="bg1"/>
-          </a:solidFill>
-          <a:ln w="12700">
-            <a:solidFill>
-              <a:srgbClr val="C9792A"/>
-            </a:solidFill>
-          </a:ln>
-        </p:spPr>
-        <p:txBody>
-          <a:bodyPr wrap="square" lIns="762" tIns="762" rIns="762" bIns="762" rtlCol="0" anchor="ctr"/>
-          <a:lstStyle/>
-          <a:p>
-            <a:pPr algn="ctr" indent="0" marL="0">
-              <a:buNone/>
-            </a:pPr>
-            <a:r>
-              <a:rPr lang="en-US" sz="1100" dirty="0">
-                <a:solidFill>
-                  <a:schemeClr val="tx1"/>
-                </a:solidFill>
-              </a:rPr>
-              <a:t>论文 4</a:t>
-            </a:r>
-            <a:endParaRPr lang="en-US" sz="1100" dirty="0"/>
-          </a:p>
-        </p:txBody>
-      </p:sp>
-      <p:sp>
-        <p:nvSpPr>
-          <p:cNvPr id="10" name="box-114"/>
-          <p:cNvSpPr/>
-          <p:nvPr/>
-        </p:nvSpPr>
-        <p:spPr>
-          <a:xfrm>
-            <a:off x="822960" y="3593592"/>
-            <a:ext cx="1417320" cy="274320"/>
-          </a:xfrm>
-          <a:prstGeom prst="roundRect">
-            <a:avLst>
-              <a:gd name="adj" fmla="val 26667"/>
-            </a:avLst>
-          </a:prstGeom>
-          <a:solidFill>
-            <a:schemeClr val="bg1"/>
-          </a:solidFill>
-          <a:ln w="12700">
-            <a:solidFill>
-              <a:srgbClr val="C9792A"/>
-            </a:solidFill>
-          </a:ln>
-        </p:spPr>
-        <p:txBody>
-          <a:bodyPr wrap="square" lIns="762" tIns="762" rIns="762" bIns="762" rtlCol="0" anchor="ctr"/>
-          <a:lstStyle/>
-          <a:p>
-            <a:pPr algn="ctr" indent="0" marL="0">
-              <a:buNone/>
-            </a:pPr>
-            <a:r>
-              <a:rPr lang="en-US" sz="1100" dirty="0">
-                <a:solidFill>
-                  <a:schemeClr val="tx1"/>
-                </a:solidFill>
-              </a:rPr>
-              <a:t>论文 5</a:t>
-            </a:r>
-            <a:endParaRPr lang="en-US" sz="1100" dirty="0"/>
-          </a:p>
-        </p:txBody>
-      </p:sp>
-      <p:sp>
-        <p:nvSpPr>
-          <p:cNvPr id="11" name="box-115"/>
-          <p:cNvSpPr/>
-          <p:nvPr/>
-        </p:nvSpPr>
-        <p:spPr>
-          <a:xfrm>
-            <a:off x="822960" y="3931920"/>
-            <a:ext cx="1417320" cy="274320"/>
-          </a:xfrm>
-          <a:prstGeom prst="roundRect">
-            <a:avLst>
-              <a:gd name="adj" fmla="val 26667"/>
-            </a:avLst>
-          </a:prstGeom>
-          <a:solidFill>
-            <a:schemeClr val="bg1"/>
-          </a:solidFill>
-          <a:ln w="12700">
-            <a:solidFill>
-              <a:srgbClr val="C9792A"/>
-            </a:solidFill>
-          </a:ln>
-        </p:spPr>
-        <p:txBody>
-          <a:bodyPr wrap="square" lIns="762" tIns="762" rIns="762" bIns="762" rtlCol="0" anchor="ctr"/>
-          <a:lstStyle/>
-          <a:p>
-            <a:pPr algn="ctr" indent="0" marL="0">
-              <a:buNone/>
-            </a:pPr>
-            <a:r>
-              <a:rPr lang="en-US" sz="1100" dirty="0">
-                <a:solidFill>
-                  <a:schemeClr val="tx1"/>
-                </a:solidFill>
-              </a:rPr>
-              <a:t>论文 6</a:t>
-            </a:r>
-            <a:endParaRPr lang="en-US" sz="1100" dirty="0"/>
-          </a:p>
-        </p:txBody>
-      </p:sp>
-      <p:sp>
-        <p:nvSpPr>
-          <p:cNvPr id="12" name="box-116"/>
-          <p:cNvSpPr/>
-          <p:nvPr/>
-        </p:nvSpPr>
-        <p:spPr>
-          <a:xfrm>
-            <a:off x="822960" y="4325112"/>
-            <a:ext cx="1417320" cy="457200"/>
-          </a:xfrm>
-          <a:prstGeom prst="roundRect">
-            <a:avLst>
-              <a:gd name="adj" fmla="val 16000"/>
-            </a:avLst>
-          </a:prstGeom>
-          <a:solidFill>
-            <a:schemeClr val="bg1"/>
-          </a:solidFill>
-          <a:ln w="12700">
-            <a:solidFill>
-              <a:srgbClr val="D5DCE4"/>
-            </a:solidFill>
-          </a:ln>
-        </p:spPr>
-        <p:txBody>
-          <a:bodyPr wrap="square" lIns="762" tIns="762" rIns="762" bIns="762" rtlCol="0" anchor="ctr"/>
-          <a:lstStyle/>
-          <a:p>
-            <a:pPr algn="ctr" indent="0" marL="0">
-              <a:buNone/>
-            </a:pPr>
-            <a:r>
-              <a:rPr lang="en-US" sz="950" dirty="0">
-                <a:solidFill>
-                  <a:schemeClr val="accent6"/>
-                </a:solidFill>
-              </a:rPr>
-              <a:t>其余 14 篇</a:t>
-            </a:r>
-            <a:endParaRPr lang="en-US" sz="950" dirty="0"/>
-          </a:p>
-          <a:p>
-            <a:pPr algn="ctr" indent="0" marL="0">
-              <a:buNone/>
-            </a:pPr>
-            <a:r>
-              <a:rPr lang="en-US" sz="950" dirty="0">
-                <a:solidFill>
-                  <a:schemeClr val="accent6"/>
-                </a:solidFill>
-              </a:rPr>
-              <a:t>（各自独立或无法追溯）</a:t>
-            </a:r>
-            <a:endParaRPr lang="en-US" sz="950" dirty="0"/>
-          </a:p>
-        </p:txBody>
-      </p:sp>
-      <p:sp>
-        <p:nvSpPr>
-          <p:cNvPr id="13" name="arrow-117"/>
-          <p:cNvSpPr/>
-          <p:nvPr/>
-        </p:nvSpPr>
-        <p:spPr>
-          <a:xfrm>
-            <a:off x="2267712" y="2377440"/>
-            <a:ext cx="1179576" cy="845820"/>
-          </a:xfrm>
-          <a:prstGeom prst="line">
-            <a:avLst/>
-          </a:prstGeom>
-          <a:noFill/>
-          <a:ln w="12700">
-            <a:solidFill>
-              <a:schemeClr val="accent3"/>
-            </a:solidFill>
-            <a:prstDash val="solid"/>
-            <a:tailEnd type="triangle"/>
-          </a:ln>
-        </p:spPr>
-      </p:sp>
-      <p:sp>
-        <p:nvSpPr>
-          <p:cNvPr id="14" name="arrow-118"/>
-          <p:cNvSpPr/>
-          <p:nvPr/>
-        </p:nvSpPr>
-        <p:spPr>
-          <a:xfrm>
-            <a:off x="2267712" y="2715768"/>
-            <a:ext cx="1179576" cy="507492"/>
-          </a:xfrm>
-          <a:prstGeom prst="line">
-            <a:avLst/>
-          </a:prstGeom>
-          <a:noFill/>
-          <a:ln w="12700">
-            <a:solidFill>
-              <a:schemeClr val="accent3"/>
-            </a:solidFill>
-            <a:prstDash val="solid"/>
-            <a:tailEnd type="triangle"/>
-          </a:ln>
-        </p:spPr>
-      </p:sp>
-      <p:sp>
-        <p:nvSpPr>
-          <p:cNvPr id="15" name="arrow-119"/>
-          <p:cNvSpPr/>
-          <p:nvPr/>
-        </p:nvSpPr>
-        <p:spPr>
-          <a:xfrm>
-            <a:off x="2267712" y="3054096"/>
-            <a:ext cx="1179576" cy="169164"/>
-          </a:xfrm>
-          <a:prstGeom prst="line">
-            <a:avLst/>
-          </a:prstGeom>
-          <a:noFill/>
-          <a:ln w="12700">
-            <a:solidFill>
-              <a:schemeClr val="accent3"/>
-            </a:solidFill>
-            <a:prstDash val="solid"/>
-            <a:tailEnd type="triangle"/>
-          </a:ln>
-        </p:spPr>
-      </p:sp>
-      <p:sp>
-        <p:nvSpPr>
-          <p:cNvPr id="16" name="arrow-120"/>
-          <p:cNvSpPr/>
-          <p:nvPr/>
-        </p:nvSpPr>
-        <p:spPr>
-          <a:xfrm flipV="1">
-            <a:off x="2267712" y="3223260"/>
-            <a:ext cx="1179576" cy="169164"/>
-          </a:xfrm>
-          <a:prstGeom prst="line">
-            <a:avLst/>
-          </a:prstGeom>
-          <a:noFill/>
-          <a:ln w="12700">
-            <a:solidFill>
-              <a:schemeClr val="accent3"/>
-            </a:solidFill>
-            <a:prstDash val="solid"/>
-            <a:tailEnd type="triangle"/>
-          </a:ln>
-        </p:spPr>
-      </p:sp>
-      <p:sp>
-        <p:nvSpPr>
-          <p:cNvPr id="17" name="arrow-121"/>
-          <p:cNvSpPr/>
-          <p:nvPr/>
-        </p:nvSpPr>
-        <p:spPr>
-          <a:xfrm flipV="1">
-            <a:off x="2267712" y="3223260"/>
-            <a:ext cx="1179576" cy="507492"/>
-          </a:xfrm>
-          <a:prstGeom prst="line">
-            <a:avLst/>
-          </a:prstGeom>
-          <a:noFill/>
-          <a:ln w="12700">
-            <a:solidFill>
-              <a:schemeClr val="accent3"/>
-            </a:solidFill>
-            <a:prstDash val="solid"/>
-            <a:tailEnd type="triangle"/>
-          </a:ln>
-        </p:spPr>
-      </p:sp>
-      <p:sp>
-        <p:nvSpPr>
-          <p:cNvPr id="18" name="arrow-122"/>
-          <p:cNvSpPr/>
-          <p:nvPr/>
-        </p:nvSpPr>
-        <p:spPr>
-          <a:xfrm flipV="1">
-            <a:off x="2267712" y="3223260"/>
-            <a:ext cx="1179576" cy="845820"/>
-          </a:xfrm>
-          <a:prstGeom prst="line">
-            <a:avLst/>
-          </a:prstGeom>
-          <a:noFill/>
-          <a:ln w="12700">
-            <a:solidFill>
-              <a:schemeClr val="accent3"/>
-            </a:solidFill>
-            <a:prstDash val="solid"/>
-            <a:tailEnd type="triangle"/>
-          </a:ln>
-        </p:spPr>
-      </p:sp>
-      <p:sp>
-        <p:nvSpPr>
-          <p:cNvPr id="19" name="label-123"/>
-          <p:cNvSpPr txBox="1"/>
-          <p:nvPr/>
-        </p:nvSpPr>
-        <p:spPr>
-          <a:xfrm>
-            <a:off x="2514600" y="2034540"/>
-            <a:ext cx="2011680" cy="457200"/>
-          </a:xfrm>
-          <a:prstGeom prst="rect">
-            <a:avLst/>
-          </a:prstGeom>
-          <a:noFill/>
-          <a:ln/>
-        </p:spPr>
-        <p:txBody>
-          <a:bodyPr wrap="square" lIns="0" tIns="0" rIns="0" bIns="0" rtlCol="0" anchor="t"/>
-          <a:lstStyle/>
-          <a:p>
-            <a:pPr algn="ctr" indent="0" marL="0">
-              <a:buNone/>
-            </a:pPr>
-            <a:r>
-              <a:rPr lang="en-US" sz="1000" dirty="0">
-                <a:solidFill>
-                  <a:schemeClr val="accent3"/>
-                </a:solidFill>
-              </a:rPr>
-              <a:t>即时溯源</a:t>
-            </a:r>
-            <a:endParaRPr lang="en-US" sz="1000" dirty="0"/>
-          </a:p>
-          <a:p>
-            <a:pPr algn="ctr" indent="0" marL="0">
-              <a:buNone/>
-            </a:pPr>
-            <a:r>
-              <a:rPr lang="en-US" sz="1000" dirty="0">
-                <a:solidFill>
-                  <a:schemeClr val="accent3"/>
-                </a:solidFill>
-              </a:rPr>
-              <a:t>（PubMed 试验关联）</a:t>
-            </a:r>
-            <a:endParaRPr lang="en-US" sz="1000" dirty="0"/>
-          </a:p>
-        </p:txBody>
-      </p:sp>
-      <p:sp>
-        <p:nvSpPr>
-          <p:cNvPr id="20" name="box-124"/>
-          <p:cNvSpPr/>
-          <p:nvPr/>
-        </p:nvSpPr>
-        <p:spPr>
-          <a:xfrm>
-            <a:off x="3474720" y="2903220"/>
-            <a:ext cx="1828800" cy="640080"/>
-          </a:xfrm>
-          <a:prstGeom prst="roundRect">
-            <a:avLst>
-              <a:gd name="adj" fmla="val 11429"/>
-            </a:avLst>
-          </a:prstGeom>
-          <a:solidFill>
-            <a:schemeClr val="accent3"/>
-          </a:solidFill>
-          <a:ln w="6350">
-            <a:solidFill>
-              <a:schemeClr val="accent3"/>
-            </a:solidFill>
-          </a:ln>
-        </p:spPr>
-        <p:txBody>
-          <a:bodyPr wrap="square" lIns="762" tIns="762" rIns="762" bIns="762" rtlCol="0" anchor="ctr"/>
-          <a:lstStyle/>
-          <a:p>
-            <a:pPr algn="ctr" indent="0" marL="0">
-              <a:buNone/>
-            </a:pPr>
-            <a:r>
-              <a:rPr lang="en-US" sz="1150" b="1" dirty="0">
-                <a:solidFill>
-                  <a:schemeClr val="bg1"/>
-                </a:solidFill>
-              </a:rPr>
-              <a:t>monarchE 三期试验</a:t>
-            </a:r>
-            <a:endParaRPr lang="en-US" sz="1150" dirty="0"/>
-          </a:p>
-          <a:p>
-            <a:pPr algn="ctr" indent="0" marL="0">
-              <a:buNone/>
-            </a:pPr>
-            <a:r>
-              <a:rPr lang="en-US" sz="1150" b="1" dirty="0">
-                <a:solidFill>
-                  <a:schemeClr val="bg1"/>
-                </a:solidFill>
-              </a:rPr>
-              <a:t>NCT03155997</a:t>
-            </a:r>
-            <a:endParaRPr lang="en-US" sz="1150" dirty="0"/>
-          </a:p>
-        </p:txBody>
-      </p:sp>
-      <p:sp>
-        <p:nvSpPr>
-          <p:cNvPr id="21" name="arrow-125"/>
-          <p:cNvSpPr/>
-          <p:nvPr/>
-        </p:nvSpPr>
-        <p:spPr>
-          <a:xfrm>
-            <a:off x="5330952" y="3223260"/>
-            <a:ext cx="429768" cy="0"/>
-          </a:xfrm>
-          <a:prstGeom prst="line">
-            <a:avLst/>
-          </a:prstGeom>
-          <a:noFill/>
-          <a:ln w="19050">
-            <a:solidFill>
-              <a:schemeClr val="tx2"/>
-            </a:solidFill>
-            <a:prstDash val="solid"/>
-            <a:tailEnd type="triangle"/>
-          </a:ln>
-        </p:spPr>
-      </p:sp>
-      <p:sp>
-        <p:nvSpPr>
-          <p:cNvPr id="22" name="box-126"/>
-          <p:cNvSpPr/>
-          <p:nvPr/>
-        </p:nvSpPr>
-        <p:spPr>
-          <a:xfrm>
-            <a:off x="5788152" y="2857500"/>
-            <a:ext cx="1161288" cy="731520"/>
-          </a:xfrm>
-          <a:prstGeom prst="roundRect">
-            <a:avLst>
-              <a:gd name="adj" fmla="val 10000"/>
-            </a:avLst>
-          </a:prstGeom>
-          <a:solidFill>
-            <a:srgbClr val="E3F3F1"/>
-          </a:solidFill>
-          <a:ln w="12700">
-            <a:solidFill>
-              <a:srgbClr val="0E8A7E"/>
-            </a:solidFill>
-          </a:ln>
-        </p:spPr>
-        <p:txBody>
-          <a:bodyPr wrap="square" lIns="762" tIns="762" rIns="762" bIns="762" rtlCol="0" anchor="ctr"/>
-          <a:lstStyle/>
-          <a:p>
-            <a:pPr algn="ctr" indent="0" marL="0">
-              <a:buNone/>
-            </a:pPr>
-            <a:r>
-              <a:rPr lang="en-US" sz="1300" b="1" dirty="0">
-                <a:solidFill>
-                  <a:schemeClr val="tx2"/>
-                </a:solidFill>
-              </a:rPr>
-              <a:t>计为 1 条</a:t>
-            </a:r>
-            <a:endParaRPr lang="en-US" sz="1300" dirty="0"/>
-          </a:p>
-          <a:p>
-            <a:pPr algn="ctr" indent="0" marL="0">
-              <a:buNone/>
-            </a:pPr>
-            <a:r>
-              <a:rPr lang="en-US" sz="1300" b="1" dirty="0">
-                <a:solidFill>
-                  <a:schemeClr val="tx2"/>
-                </a:solidFill>
-              </a:rPr>
-              <a:t>独立证据</a:t>
-            </a:r>
-            <a:endParaRPr lang="en-US" sz="1300" dirty="0"/>
-          </a:p>
-        </p:txBody>
-      </p:sp>
-      <p:sp>
-        <p:nvSpPr>
-          <p:cNvPr id="23" name="label-127"/>
-          <p:cNvSpPr txBox="1"/>
-          <p:nvPr/>
-        </p:nvSpPr>
-        <p:spPr>
-          <a:xfrm>
-            <a:off x="3291840" y="3680460"/>
-            <a:ext cx="3657600" cy="685800"/>
-          </a:xfrm>
-          <a:prstGeom prst="rect">
-            <a:avLst/>
-          </a:prstGeom>
-          <a:noFill/>
-          <a:ln/>
-        </p:spPr>
-        <p:txBody>
-          <a:bodyPr wrap="square" lIns="0" tIns="0" rIns="0" bIns="0" rtlCol="0" anchor="t"/>
-          <a:lstStyle/>
-          <a:p>
-            <a:pPr algn="l" indent="0" marL="0">
-              <a:buNone/>
-            </a:pPr>
-            <a:r>
-              <a:rPr lang="en-US" sz="1100" dirty="0">
-                <a:solidFill>
-                  <a:schemeClr val="tx1"/>
-                </a:solidFill>
-              </a:rPr>
-              <a:t>同一批受试者的主结果、亚组分析、长期随访等 6 篇论文，只能算 1 条证据；按篇数计会被放大 6 倍。</a:t>
-            </a:r>
-            <a:endParaRPr lang="en-US" sz="1100" dirty="0"/>
-          </a:p>
-        </p:txBody>
-      </p:sp>
-      <p:sp>
-        <p:nvSpPr>
-          <p:cNvPr id="24" name="label-128"/>
-          <p:cNvSpPr txBox="1"/>
-          <p:nvPr/>
-        </p:nvSpPr>
-        <p:spPr>
-          <a:xfrm>
-            <a:off x="822960" y="4901184"/>
-            <a:ext cx="6126480" cy="274320"/>
-          </a:xfrm>
-          <a:prstGeom prst="rect">
-            <a:avLst/>
-          </a:prstGeom>
-          <a:noFill/>
-          <a:ln/>
-        </p:spPr>
-        <p:txBody>
-          <a:bodyPr wrap="square" lIns="0" tIns="0" rIns="0" bIns="0" rtlCol="0" anchor="t"/>
-          <a:lstStyle/>
-          <a:p>
-            <a:pPr algn="l" indent="0" marL="0">
-              <a:buNone/>
-            </a:pPr>
-            <a:r>
-              <a:rPr lang="en-US" sz="1200" b="1" dirty="0">
-                <a:solidFill>
-                  <a:schemeClr val="tx2"/>
-                </a:solidFill>
-              </a:rPr>
-              <a:t>定级规则（设计）</a:t>
-            </a:r>
-            <a:endParaRPr lang="en-US" sz="1200" dirty="0"/>
-          </a:p>
-        </p:txBody>
-      </p:sp>
-      <p:sp>
-        <p:nvSpPr>
-          <p:cNvPr id="25" name="box-129"/>
-          <p:cNvSpPr/>
-          <p:nvPr/>
-        </p:nvSpPr>
-        <p:spPr>
-          <a:xfrm>
-            <a:off x="822960" y="5202936"/>
-            <a:ext cx="1950720" cy="658368"/>
-          </a:xfrm>
-          <a:prstGeom prst="roundRect">
-            <a:avLst>
-              <a:gd name="adj" fmla="val 11111"/>
-            </a:avLst>
-          </a:prstGeom>
-          <a:solidFill>
-            <a:schemeClr val="bg1"/>
-          </a:solidFill>
-          <a:ln w="12700">
-            <a:solidFill>
-              <a:schemeClr val="accent1"/>
-            </a:solidFill>
-          </a:ln>
-        </p:spPr>
-        <p:txBody>
-          <a:bodyPr wrap="square" lIns="762" tIns="762" rIns="762" bIns="762" rtlCol="0" anchor="ctr"/>
-          <a:lstStyle/>
-          <a:p>
-            <a:pPr algn="ctr" indent="0" marL="0">
-              <a:buNone/>
-            </a:pPr>
-            <a:r>
-              <a:rPr lang="en-US" sz="1100" dirty="0">
-                <a:solidFill>
-                  <a:schemeClr val="tx1"/>
-                </a:solidFill>
-              </a:rPr>
-              <a:t>≥ 2 类独立证据线相互印证</a:t>
-            </a:r>
-            <a:endParaRPr lang="en-US" sz="1100" dirty="0"/>
-          </a:p>
-          <a:p>
-            <a:pPr algn="ctr" indent="0" marL="0">
-              <a:buNone/>
-            </a:pPr>
-            <a:r>
-              <a:rPr lang="en-US" sz="1100" dirty="0">
-                <a:solidFill>
-                  <a:schemeClr val="tx1"/>
-                </a:solidFill>
-              </a:rPr>
-              <a:t>→ 较强</a:t>
-            </a:r>
-            <a:endParaRPr lang="en-US" sz="1100" dirty="0"/>
-          </a:p>
-        </p:txBody>
-      </p:sp>
-      <p:sp>
-        <p:nvSpPr>
-          <p:cNvPr id="26" name="box-130"/>
-          <p:cNvSpPr/>
-          <p:nvPr/>
-        </p:nvSpPr>
-        <p:spPr>
-          <a:xfrm>
-            <a:off x="2910840" y="5202936"/>
-            <a:ext cx="1950720" cy="658368"/>
-          </a:xfrm>
-          <a:prstGeom prst="roundRect">
-            <a:avLst>
-              <a:gd name="adj" fmla="val 11111"/>
-            </a:avLst>
-          </a:prstGeom>
-          <a:solidFill>
-            <a:schemeClr val="bg1"/>
-          </a:solidFill>
-          <a:ln w="12700">
-            <a:solidFill>
-              <a:schemeClr val="accent3"/>
-            </a:solidFill>
-          </a:ln>
-        </p:spPr>
-        <p:txBody>
-          <a:bodyPr wrap="square" lIns="762" tIns="762" rIns="762" bIns="762" rtlCol="0" anchor="ctr"/>
-          <a:lstStyle/>
-          <a:p>
-            <a:pPr algn="ctr" indent="0" marL="0">
-              <a:buNone/>
-            </a:pPr>
-            <a:r>
-              <a:rPr lang="en-US" sz="1100" dirty="0">
-                <a:solidFill>
-                  <a:schemeClr val="tx1"/>
-                </a:solidFill>
-              </a:rPr>
-              <a:t>仅 1 条独立证据线</a:t>
-            </a:r>
-            <a:endParaRPr lang="en-US" sz="1100" dirty="0"/>
-          </a:p>
-          <a:p>
-            <a:pPr algn="ctr" indent="0" marL="0">
-              <a:buNone/>
-            </a:pPr>
-            <a:r>
-              <a:rPr lang="en-US" sz="1100" dirty="0">
-                <a:solidFill>
-                  <a:schemeClr val="tx1"/>
-                </a:solidFill>
-              </a:rPr>
-              <a:t>→ 待印证</a:t>
-            </a:r>
-            <a:endParaRPr lang="en-US" sz="1100" dirty="0"/>
-          </a:p>
-        </p:txBody>
-      </p:sp>
-      <p:sp>
-        <p:nvSpPr>
-          <p:cNvPr id="27" name="box-131"/>
-          <p:cNvSpPr/>
-          <p:nvPr/>
-        </p:nvSpPr>
-        <p:spPr>
-          <a:xfrm>
-            <a:off x="4998720" y="5202936"/>
-            <a:ext cx="1950720" cy="658368"/>
-          </a:xfrm>
-          <a:prstGeom prst="roundRect">
-            <a:avLst>
-              <a:gd name="adj" fmla="val 11111"/>
-            </a:avLst>
-          </a:prstGeom>
-          <a:solidFill>
-            <a:schemeClr val="bg1"/>
-          </a:solidFill>
-          <a:ln w="12700">
-            <a:solidFill>
-              <a:srgbClr val="B4233A"/>
-            </a:solidFill>
-          </a:ln>
-        </p:spPr>
-        <p:txBody>
-          <a:bodyPr wrap="square" lIns="762" tIns="762" rIns="762" bIns="762" rtlCol="0" anchor="ctr"/>
-          <a:lstStyle/>
-          <a:p>
-            <a:pPr algn="ctr" indent="0" marL="0">
-              <a:buNone/>
-            </a:pPr>
-            <a:r>
-              <a:rPr lang="en-US" sz="1100" dirty="0">
-                <a:solidFill>
-                  <a:schemeClr val="tx1"/>
-                </a:solidFill>
-              </a:rPr>
-              <a:t>存在独立的反向证据线</a:t>
-            </a:r>
-            <a:endParaRPr lang="en-US" sz="1100" dirty="0"/>
-          </a:p>
-          <a:p>
-            <a:pPr algn="ctr" indent="0" marL="0">
-              <a:buNone/>
-            </a:pPr>
-            <a:r>
-              <a:rPr lang="en-US" sz="1100" dirty="0">
-                <a:solidFill>
-                  <a:schemeClr val="tx1"/>
-                </a:solidFill>
-              </a:rPr>
-              <a:t>→ 有争议</a:t>
-            </a:r>
-            <a:endParaRPr lang="en-US" sz="1100" dirty="0"/>
-          </a:p>
-        </p:txBody>
-      </p:sp>
-      <p:sp>
-        <p:nvSpPr>
-          <p:cNvPr id="28" name="badge-132"/>
-          <p:cNvSpPr/>
-          <p:nvPr/>
-        </p:nvSpPr>
-        <p:spPr>
-          <a:xfrm>
-            <a:off x="7543800" y="1691640"/>
-            <a:ext cx="384048" cy="384048"/>
-          </a:xfrm>
-          <a:prstGeom prst="ellipse">
-            <a:avLst/>
-          </a:prstGeom>
-          <a:solidFill>
-            <a:schemeClr val="accent1"/>
-          </a:solidFill>
-          <a:ln w="6350">
-            <a:solidFill>
-              <a:schemeClr val="accent1"/>
-            </a:solidFill>
-          </a:ln>
-        </p:spPr>
-        <p:txBody>
-          <a:bodyPr wrap="square" lIns="0" tIns="0" rIns="0" bIns="0" rtlCol="0" anchor="ctr"/>
-          <a:lstStyle/>
-          <a:p>
-            <a:pPr algn="ctr" indent="0" marL="0">
-              <a:buNone/>
-            </a:pPr>
-            <a:r>
-              <a:rPr lang="en-US" sz="1500" b="1" dirty="0">
-                <a:solidFill>
-                  <a:schemeClr val="bg1"/>
-                </a:solidFill>
-              </a:rPr>
-              <a:t>1</a:t>
-            </a:r>
-            <a:endParaRPr lang="en-US" sz="1500" dirty="0"/>
-          </a:p>
-        </p:txBody>
-      </p:sp>
-      <p:sp>
-        <p:nvSpPr>
-          <p:cNvPr id="29" name="label-133"/>
-          <p:cNvSpPr txBox="1"/>
-          <p:nvPr/>
-        </p:nvSpPr>
-        <p:spPr>
-          <a:xfrm>
-            <a:off x="8074152" y="1673352"/>
-            <a:ext cx="3568903" cy="411480"/>
-          </a:xfrm>
-          <a:prstGeom prst="rect">
-            <a:avLst/>
-          </a:prstGeom>
-          <a:noFill/>
-          <a:ln/>
-        </p:spPr>
-        <p:txBody>
-          <a:bodyPr wrap="square" lIns="0" tIns="0" rIns="0" bIns="0" rtlCol="0" anchor="ctr"/>
-          <a:lstStyle/>
-          <a:p>
-            <a:pPr algn="l" indent="0" marL="0">
-              <a:buNone/>
-            </a:pPr>
-            <a:r>
-              <a:rPr lang="en-US" sz="1600" b="1" dirty="0">
-                <a:solidFill>
-                  <a:schemeClr val="tx2"/>
-                </a:solidFill>
-              </a:rPr>
-              <a:t>即时溯源</a:t>
-            </a:r>
-            <a:endParaRPr lang="en-US" sz="1600" dirty="0"/>
-          </a:p>
-        </p:txBody>
-      </p:sp>
-      <p:sp>
-        <p:nvSpPr>
-          <p:cNvPr id="30" name="label-134"/>
-          <p:cNvSpPr txBox="1"/>
-          <p:nvPr/>
-        </p:nvSpPr>
-        <p:spPr>
-          <a:xfrm>
-            <a:off x="8074152" y="2103120"/>
-            <a:ext cx="3568903" cy="1005840"/>
-          </a:xfrm>
-          <a:prstGeom prst="rect">
-            <a:avLst/>
-          </a:prstGeom>
-          <a:noFill/>
-          <a:ln/>
-        </p:spPr>
-        <p:txBody>
-          <a:bodyPr wrap="square" lIns="0" tIns="0" rIns="0" bIns="0" rtlCol="0" anchor="t"/>
-          <a:lstStyle/>
-          <a:p>
-            <a:pPr algn="l" indent="0" marL="0">
-              <a:buNone/>
-            </a:pPr>
-            <a:r>
-              <a:rPr lang="en-US" sz="1250" dirty="0">
-                <a:solidFill>
-                  <a:schemeClr val="accent6"/>
-                </a:solidFill>
-              </a:rPr>
-              <a:t>每条证据追到上游：哪个试验、数据集、GWAS 研究或原始论文。全部来自公开数据库，现查现算——无需自建证据库，无需人工标注。</a:t>
-            </a:r>
-            <a:endParaRPr lang="en-US" sz="1250" dirty="0"/>
-          </a:p>
-        </p:txBody>
-      </p:sp>
-      <p:sp>
-        <p:nvSpPr>
-          <p:cNvPr id="31" name="badge-135"/>
-          <p:cNvSpPr/>
-          <p:nvPr/>
-        </p:nvSpPr>
-        <p:spPr>
-          <a:xfrm>
-            <a:off x="7543800" y="3172968"/>
-            <a:ext cx="384048" cy="384048"/>
-          </a:xfrm>
-          <a:prstGeom prst="ellipse">
-            <a:avLst/>
-          </a:prstGeom>
-          <a:solidFill>
-            <a:schemeClr val="accent1"/>
-          </a:solidFill>
-          <a:ln w="6350">
-            <a:solidFill>
-              <a:schemeClr val="accent1"/>
-            </a:solidFill>
-          </a:ln>
-        </p:spPr>
-        <p:txBody>
-          <a:bodyPr wrap="square" lIns="0" tIns="0" rIns="0" bIns="0" rtlCol="0" anchor="ctr"/>
-          <a:lstStyle/>
-          <a:p>
-            <a:pPr algn="ctr" indent="0" marL="0">
-              <a:buNone/>
-            </a:pPr>
-            <a:r>
-              <a:rPr lang="en-US" sz="1500" b="1" dirty="0">
-                <a:solidFill>
-                  <a:schemeClr val="bg1"/>
-                </a:solidFill>
-              </a:rPr>
-              <a:t>2</a:t>
-            </a:r>
-            <a:endParaRPr lang="en-US" sz="1500" dirty="0"/>
-          </a:p>
-        </p:txBody>
-      </p:sp>
-      <p:sp>
-        <p:nvSpPr>
-          <p:cNvPr id="32" name="label-136"/>
-          <p:cNvSpPr txBox="1"/>
-          <p:nvPr/>
-        </p:nvSpPr>
-        <p:spPr>
-          <a:xfrm>
-            <a:off x="8074152" y="3154680"/>
-            <a:ext cx="3568903" cy="411480"/>
-          </a:xfrm>
-          <a:prstGeom prst="rect">
-            <a:avLst/>
-          </a:prstGeom>
-          <a:noFill/>
-          <a:ln/>
-        </p:spPr>
-        <p:txBody>
-          <a:bodyPr wrap="square" lIns="0" tIns="0" rIns="0" bIns="0" rtlCol="0" anchor="ctr"/>
-          <a:lstStyle/>
-          <a:p>
-            <a:pPr algn="l" indent="0" marL="0">
-              <a:buNone/>
-            </a:pPr>
-            <a:r>
-              <a:rPr lang="en-US" sz="1600" b="1" dirty="0">
-                <a:solidFill>
-                  <a:schemeClr val="tx2"/>
-                </a:solidFill>
-              </a:rPr>
-              <a:t>同源合并</a:t>
-            </a:r>
-            <a:endParaRPr lang="en-US" sz="1600" dirty="0"/>
-          </a:p>
-        </p:txBody>
-      </p:sp>
-      <p:sp>
-        <p:nvSpPr>
-          <p:cNvPr id="33" name="label-137"/>
-          <p:cNvSpPr txBox="1"/>
-          <p:nvPr/>
-        </p:nvSpPr>
-        <p:spPr>
-          <a:xfrm>
-            <a:off x="8074152" y="3584448"/>
-            <a:ext cx="3568903" cy="1005840"/>
-          </a:xfrm>
-          <a:prstGeom prst="rect">
-            <a:avLst/>
-          </a:prstGeom>
-          <a:noFill/>
-          <a:ln/>
-        </p:spPr>
-        <p:txBody>
-          <a:bodyPr wrap="square" lIns="0" tIns="0" rIns="0" bIns="0" rtlCol="0" anchor="t"/>
-          <a:lstStyle/>
-          <a:p>
-            <a:pPr algn="l" indent="0" marL="0">
-              <a:buNone/>
-            </a:pPr>
-            <a:r>
-              <a:rPr lang="en-US" sz="1250" dirty="0">
-                <a:solidFill>
-                  <a:schemeClr val="accent6"/>
-                </a:solidFill>
-              </a:rPr>
-              <a:t>同一试验 / 数据集衍生的多篇论文只计 1 条；预印本与正式版、荟萃分析与其纳入研究同理。</a:t>
-            </a:r>
-            <a:endParaRPr lang="en-US" sz="1250" dirty="0"/>
-          </a:p>
-        </p:txBody>
-      </p:sp>
-      <p:sp>
-        <p:nvSpPr>
-          <p:cNvPr id="34" name="badge-138"/>
-          <p:cNvSpPr/>
-          <p:nvPr/>
-        </p:nvSpPr>
-        <p:spPr>
-          <a:xfrm>
-            <a:off x="7543800" y="4654296"/>
-            <a:ext cx="384048" cy="384048"/>
-          </a:xfrm>
-          <a:prstGeom prst="ellipse">
-            <a:avLst/>
-          </a:prstGeom>
-          <a:solidFill>
-            <a:schemeClr val="accent1"/>
-          </a:solidFill>
-          <a:ln w="6350">
-            <a:solidFill>
-              <a:schemeClr val="accent1"/>
-            </a:solidFill>
-          </a:ln>
-        </p:spPr>
-        <p:txBody>
-          <a:bodyPr wrap="square" lIns="0" tIns="0" rIns="0" bIns="0" rtlCol="0" anchor="ctr"/>
-          <a:lstStyle/>
-          <a:p>
-            <a:pPr algn="ctr" indent="0" marL="0">
-              <a:buNone/>
-            </a:pPr>
-            <a:r>
-              <a:rPr lang="en-US" sz="1500" b="1" dirty="0">
-                <a:solidFill>
-                  <a:schemeClr val="bg1"/>
-                </a:solidFill>
-              </a:rPr>
-              <a:t>3</a:t>
-            </a:r>
-            <a:endParaRPr lang="en-US" sz="1500" dirty="0"/>
-          </a:p>
-        </p:txBody>
-      </p:sp>
-      <p:sp>
-        <p:nvSpPr>
-          <p:cNvPr id="35" name="label-139"/>
-          <p:cNvSpPr txBox="1"/>
-          <p:nvPr/>
-        </p:nvSpPr>
-        <p:spPr>
-          <a:xfrm>
-            <a:off x="8074152" y="4636008"/>
-            <a:ext cx="3568903" cy="411480"/>
-          </a:xfrm>
-          <a:prstGeom prst="rect">
-            <a:avLst/>
-          </a:prstGeom>
-          <a:noFill/>
-          <a:ln/>
-        </p:spPr>
-        <p:txBody>
-          <a:bodyPr wrap="square" lIns="0" tIns="0" rIns="0" bIns="0" rtlCol="0" anchor="ctr"/>
-          <a:lstStyle/>
-          <a:p>
-            <a:pPr algn="l" indent="0" marL="0">
-              <a:buNone/>
-            </a:pPr>
-            <a:r>
-              <a:rPr lang="en-US" sz="1600" b="1" dirty="0">
-                <a:solidFill>
-                  <a:schemeClr val="tx2"/>
-                </a:solidFill>
-              </a:rPr>
-              <a:t>按独立证据线定级</a:t>
-            </a:r>
-            <a:endParaRPr lang="en-US" sz="1600" dirty="0"/>
-          </a:p>
-        </p:txBody>
-      </p:sp>
-      <p:sp>
-        <p:nvSpPr>
-          <p:cNvPr id="36" name="label-140"/>
-          <p:cNvSpPr txBox="1"/>
-          <p:nvPr/>
-        </p:nvSpPr>
-        <p:spPr>
-          <a:xfrm>
-            <a:off x="8074152" y="5065776"/>
-            <a:ext cx="3568903" cy="1005840"/>
-          </a:xfrm>
-          <a:prstGeom prst="rect">
-            <a:avLst/>
-          </a:prstGeom>
-          <a:noFill/>
-          <a:ln/>
-        </p:spPr>
-        <p:txBody>
-          <a:bodyPr wrap="square" lIns="0" tIns="0" rIns="0" bIns="0" rtlCol="0" anchor="t"/>
-          <a:lstStyle/>
-          <a:p>
-            <a:pPr algn="l" indent="0" marL="0">
-              <a:buNone/>
-            </a:pPr>
-            <a:r>
-              <a:rPr lang="en-US" sz="1250" dirty="0">
-                <a:solidFill>
-                  <a:schemeClr val="accent6"/>
-                </a:solidFill>
-              </a:rPr>
-              <a:t>看遗传学、动物模型、临床试验等几类独立证据是否相互印证；下结论前先找反证（失败试验、阴性结果）。</a:t>
-            </a:r>
-            <a:endParaRPr lang="en-US" sz="1250" dirty="0"/>
-          </a:p>
-        </p:txBody>
-      </p:sp>
-      <p:sp>
-        <p:nvSpPr>
-          <p:cNvPr id="25" name="Slide Number Placeholder 0"/>
-          <p:cNvSpPr>
-            <a:spLocks noGrp="1"/>
-          </p:cNvSpPr>
-          <p:nvPr>
-            <p:ph type="sldNum" sz="quarter" idx="4294967295"/>
-          </p:nvPr>
-        </p:nvSpPr>
-        <p:spPr>
-          <a:xfrm>
-            <a:off x="11094415" y="6446520"/>
-            <a:ext cx="548640" cy="274320"/>
-          </a:xfrm>
-          <a:prstGeom prst="rect">
-            <a:avLst/>
-          </a:prstGeom>
-          <a:extLst>
-            <a:ext uri="{C572A759-6A51-4108-AA02-DFA0A04FC94B}">
-              <ma14:wrappingTextBoxFlag xmlns:ma14="http://schemas.microsoft.com/office/mac/drawingml/2011/main" val="0"/>
-            </a:ext>
-          </a:extLst>
-        </p:spPr>
-        <p:txBody>
-          <a:bodyPr/>
-          <a:lstStyle>
-            <a:lvl1pPr>
-              <a:defRPr sz="1000">
-                <a:solidFill>
-                  <a:schemeClr val="accent6"/>
-                </a:solidFill>
-              </a:defRPr>
-            </a:lvl1pPr>
-          </a:lstStyle>
-          <a:p>
-            <a:pPr algn="r"/>
-            <a:fld id="{F7021451-1387-4CA6-816F-3879F97B5CBC}" type="slidenum">
-              <a:rPr b="0" lang="en-US"/>
-              <a:t>6</a:t>
-            </a:fld>
-            <a:endParaRPr lang="en-US"/>
-          </a:p>
-        </p:txBody>
-      </p:sp>
-    </p:spTree>
-  </p:cSld>
-  <p:clrMapOvr>
-    <a:masterClrMapping/>
-  </p:clrMapOvr>
-</p:sld>
-</file>
-
-<file path=ppt/slides/slide7.xml><?xml version="1.0" encoding="utf-8"?>
-<p:sld xmlns:a="http://schemas.openxmlformats.org/drawingml/2006/main" xmlns:r="http://schemas.openxmlformats.org/officeDocument/2006/relationships" xmlns:p="http://schemas.openxmlformats.org/presentationml/2006/main">
-  <p:cSld name="Slide 7">
-    <p:spTree>
-      <p:nvGrpSpPr>
-        <p:cNvPr id="1" name=""/>
-        <p:cNvGrpSpPr/>
-        <p:nvPr/>
-      </p:nvGrpSpPr>
-      <p:grpSpPr>
-        <a:xfrm>
-          <a:off x="0" y="0"/>
-          <a:ext cx="0" cy="0"/>
-          <a:chOff x="0" y="0"/>
-          <a:chExt cx="0" cy="0"/>
-        </a:xfrm>
-      </p:grpSpPr>
-      <p:sp>
-        <p:nvSpPr>
-          <p:cNvPr id="2" name="Text 0"/>
-          <p:cNvSpPr/>
-          <p:nvPr>
-            <p:ph idx="100" type="title" hasCustomPrompt="1"/>
-          </p:nvPr>
-        </p:nvSpPr>
-        <p:spPr>
-          <a:xfrm>
-            <a:off x="548640" y="320040"/>
-            <a:ext cx="11094415" cy="640080"/>
-          </a:xfrm>
-          <a:prstGeom prst="rect">
-            <a:avLst/>
-          </a:prstGeom>
-          <a:noFill/>
-          <a:ln/>
-        </p:spPr>
-        <p:txBody>
-          <a:bodyPr wrap="square" lIns="0" tIns="0" rIns="0" bIns="0" rtlCol="0" anchor="ctr"/>
-          <a:lstStyle/>
-          <a:p>
-            <a:pPr algn="l" indent="0" marL="0">
-              <a:buNone/>
-            </a:pPr>
-            <a:r>
-              <a:rPr lang="en-US" sz="2800" b="1" dirty="0">
-                <a:solidFill>
-                  <a:schemeClr val="tx2"/>
-                </a:solidFill>
-              </a:rPr>
-              <a:t>实时状态核验：依据被推翻，结论当场降级</a:t>
-            </a:r>
-            <a:endParaRPr lang="en-US" sz="2800" dirty="0"/>
-          </a:p>
-        </p:txBody>
-      </p:sp>
-      <p:sp>
-        <p:nvSpPr>
-          <p:cNvPr id="3" name="Text 0"/>
-          <p:cNvSpPr/>
-          <p:nvPr>
-            <p:ph idx="101" type="body" hasCustomPrompt="1"/>
-          </p:nvPr>
-        </p:nvSpPr>
-        <p:spPr>
-          <a:xfrm>
-            <a:off x="548640" y="960120"/>
-            <a:ext cx="11094415" cy="411480"/>
-          </a:xfrm>
-          <a:prstGeom prst="rect">
-            <a:avLst/>
-          </a:prstGeom>
-          <a:noFill/>
-          <a:ln/>
-        </p:spPr>
-        <p:txBody>
-          <a:bodyPr wrap="square" lIns="0" tIns="0" rIns="0" bIns="0" rtlCol="0" anchor="ctr"/>
-          <a:lstStyle/>
-          <a:p>
-            <a:pPr algn="l" indent="0" marL="0">
-              <a:buNone/>
-            </a:pPr>
-            <a:r>
-              <a:rPr lang="en-US" sz="1500" dirty="0">
-                <a:solidFill>
-                  <a:schemeClr val="accent6"/>
-                </a:solidFill>
-              </a:rPr>
-              <a:t>回答时核验每个来源的当前状态（撤稿、试验终止、药品撤市），只降级真正依赖它的结论。</a:t>
-            </a:r>
-            <a:endParaRPr lang="en-US" sz="1500" dirty="0"/>
-          </a:p>
-        </p:txBody>
-      </p:sp>
-      <p:sp>
-        <p:nvSpPr>
-          <p:cNvPr id="4" name="card-141"/>
+          <p:cNvPr id="4" name="card-107"/>
           <p:cNvSpPr/>
           <p:nvPr/>
         </p:nvSpPr>
@@ -11328,7 +9831,7 @@
       </p:sp>
       <p:sp>
         <p:nvSpPr>
-          <p:cNvPr id="5" name="label-142"/>
+          <p:cNvPr id="5" name="label-108"/>
           <p:cNvSpPr txBox="1"/>
           <p:nvPr/>
         </p:nvSpPr>
@@ -11364,7 +9867,7 @@
       </p:sp>
       <p:sp>
         <p:nvSpPr>
-          <p:cNvPr id="6" name="label-143"/>
+          <p:cNvPr id="6" name="label-109"/>
           <p:cNvSpPr txBox="1"/>
           <p:nvPr/>
         </p:nvSpPr>
@@ -11400,7 +9903,7 @@
       </p:sp>
       <p:graphicFrame>
         <p:nvGraphicFramePr>
-          <p:cNvPr id="8" name="table-144"/>
+          <p:cNvPr id="7" name="table-110"/>
           <p:cNvGraphicFramePr>
             <a:graphicFrameLocks noGrp="1"/>
           </p:cNvGraphicFramePr>
@@ -12296,7 +10799,7 @@
       </p:graphicFrame>
       <p:sp>
         <p:nvSpPr>
-          <p:cNvPr id="8" name="label-145"/>
+          <p:cNvPr id="8" name="label-111"/>
           <p:cNvSpPr txBox="1"/>
           <p:nvPr/>
         </p:nvSpPr>
@@ -12332,7 +10835,7 @@
       </p:sp>
       <p:sp>
         <p:nvSpPr>
-          <p:cNvPr id="9" name="label-146"/>
+          <p:cNvPr id="9" name="label-112"/>
           <p:cNvSpPr txBox="1"/>
           <p:nvPr/>
         </p:nvSpPr>
@@ -12368,7 +10871,7 @@
       </p:sp>
       <p:sp>
         <p:nvSpPr>
-          <p:cNvPr id="10" name="card-147"/>
+          <p:cNvPr id="10" name="card-113"/>
           <p:cNvSpPr/>
           <p:nvPr/>
         </p:nvSpPr>
@@ -12395,7 +10898,7 @@
       </p:sp>
       <p:sp>
         <p:nvSpPr>
-          <p:cNvPr id="11" name="label-148"/>
+          <p:cNvPr id="11" name="label-114"/>
           <p:cNvSpPr txBox="1"/>
           <p:nvPr/>
         </p:nvSpPr>
@@ -12431,7 +10934,7 @@
       </p:sp>
       <p:sp>
         <p:nvSpPr>
-          <p:cNvPr id="12" name="label-149"/>
+          <p:cNvPr id="12" name="label-115"/>
           <p:cNvSpPr txBox="1"/>
           <p:nvPr/>
         </p:nvSpPr>
@@ -12459,7 +10962,7 @@
                   <a:schemeClr val="accent3"/>
                 </a:solidFill>
               </a:rPr>
-              <a:t>看点：独立证据线方向相反时，保留分歧、不替人裁决</a:t>
+              <a:t>看点：独立证据方向相反时，保留分歧、不替人裁决</a:t>
             </a:r>
             <a:endParaRPr lang="en-US" sz="1150" dirty="0"/>
           </a:p>
@@ -12467,7 +10970,7 @@
       </p:sp>
       <p:graphicFrame>
         <p:nvGraphicFramePr>
-          <p:cNvPr id="15" name="table-150"/>
+          <p:cNvPr id="13" name="table-116"/>
           <p:cNvGraphicFramePr>
             <a:graphicFrameLocks noGrp="1"/>
           </p:cNvGraphicFramePr>
@@ -12852,7 +11355,7 @@
                           <a:ea typeface="Microsoft YaHei" pitchFamily="34" charset="-122"/>
                           <a:cs typeface="Microsoft YaHei" pitchFamily="34" charset="-120"/>
                         </a:rPr>
-                        <a:t>支持（1 条证据线）</a:t>
+                        <a:t>支持</a:t>
                       </a:r>
                       <a:endParaRPr lang="en-US" sz="1100" dirty="0">
                         <a:latin typeface="Microsoft YaHei" charset="0"/>
@@ -13058,7 +11561,7 @@
                           <a:ea typeface="Microsoft YaHei" pitchFamily="34" charset="-122"/>
                           <a:cs typeface="Microsoft YaHei" pitchFamily="34" charset="-120"/>
                         </a:rPr>
-                        <a:t>→ 有争议：两条独立证据线相反</a:t>
+                        <a:t>→ 有争议：两项独立试验结论相反</a:t>
                       </a:r>
                       <a:endParaRPr lang="en-US" sz="1100" dirty="0">
                         <a:latin typeface="Microsoft YaHei" charset="0"/>
@@ -13322,7 +11825,7 @@
       </p:graphicFrame>
       <p:sp>
         <p:nvSpPr>
-          <p:cNvPr id="14" name="label-151"/>
+          <p:cNvPr id="14" name="label-117"/>
           <p:cNvSpPr txBox="1"/>
           <p:nvPr/>
         </p:nvSpPr>
@@ -13350,7 +11853,7 @@
                   <a:schemeClr val="tx1"/>
                 </a:solidFill>
               </a:rPr>
-              <a:t>两项试验来自不同受试者，是两条独立证据线；系统把双方都摆出来，标为“有争议”，由专家判断。</a:t>
+              <a:t>两项试验来自不同受试者，是两条独立证据；系统把双方都摆出来，标为“有争议”，由专家判断。</a:t>
             </a:r>
             <a:endParaRPr lang="en-US" sz="1200" dirty="0"/>
           </a:p>
@@ -13358,7 +11861,7 @@
       </p:sp>
       <p:sp>
         <p:nvSpPr>
-          <p:cNvPr id="15" name="label-152"/>
+          <p:cNvPr id="15" name="label-118"/>
           <p:cNvSpPr txBox="1"/>
           <p:nvPr/>
         </p:nvSpPr>
@@ -13394,7 +11897,7 @@
       </p:sp>
       <p:sp>
         <p:nvSpPr>
-          <p:cNvPr id="16" name="label-153"/>
+          <p:cNvPr id="16" name="label-119"/>
           <p:cNvSpPr txBox="1"/>
           <p:nvPr/>
         </p:nvSpPr>
@@ -13425,6 +11928,1285 @@
               <a:t>两个案例已在 3.0 原型中写成自动化测试；实时核验的数据来源：撤稿库、ClinicalTrials.gov 试验状态、FDA 药品信息。</a:t>
             </a:r>
             <a:endParaRPr lang="en-US" sz="1000" dirty="0"/>
+          </a:p>
+        </p:txBody>
+      </p:sp>
+      <p:sp>
+        <p:nvSpPr>
+          <p:cNvPr id="25" name="Slide Number Placeholder 0"/>
+          <p:cNvSpPr>
+            <a:spLocks noGrp="1"/>
+          </p:cNvSpPr>
+          <p:nvPr>
+            <p:ph type="sldNum" sz="quarter" idx="4294967295"/>
+          </p:nvPr>
+        </p:nvSpPr>
+        <p:spPr>
+          <a:xfrm>
+            <a:off x="11094415" y="6446520"/>
+            <a:ext cx="548640" cy="274320"/>
+          </a:xfrm>
+          <a:prstGeom prst="rect">
+            <a:avLst/>
+          </a:prstGeom>
+          <a:extLst>
+            <a:ext uri="{C572A759-6A51-4108-AA02-DFA0A04FC94B}">
+              <ma14:wrappingTextBoxFlag xmlns:ma14="http://schemas.microsoft.com/office/mac/drawingml/2011/main" val="0"/>
+            </a:ext>
+          </a:extLst>
+        </p:spPr>
+        <p:txBody>
+          <a:bodyPr/>
+          <a:lstStyle>
+            <a:lvl1pPr>
+              <a:defRPr sz="1000">
+                <a:solidFill>
+                  <a:schemeClr val="accent6"/>
+                </a:solidFill>
+              </a:defRPr>
+            </a:lvl1pPr>
+          </a:lstStyle>
+          <a:p>
+            <a:pPr algn="r"/>
+            <a:fld id="{F7021451-1387-4CA6-816F-3879F97B5CBC}" type="slidenum">
+              <a:rPr b="0" lang="en-US"/>
+              <a:t>6</a:t>
+            </a:fld>
+            <a:endParaRPr lang="en-US"/>
+          </a:p>
+        </p:txBody>
+      </p:sp>
+    </p:spTree>
+  </p:cSld>
+  <p:clrMapOvr>
+    <a:masterClrMapping/>
+  </p:clrMapOvr>
+</p:sld>
+</file>
+
+<file path=ppt/slides/slide7.xml><?xml version="1.0" encoding="utf-8"?>
+<p:sld xmlns:a="http://schemas.openxmlformats.org/drawingml/2006/main" xmlns:r="http://schemas.openxmlformats.org/officeDocument/2006/relationships" xmlns:p="http://schemas.openxmlformats.org/presentationml/2006/main">
+  <p:cSld name="Slide 7">
+    <p:spTree>
+      <p:nvGrpSpPr>
+        <p:cNvPr id="1" name=""/>
+        <p:cNvGrpSpPr/>
+        <p:nvPr/>
+      </p:nvGrpSpPr>
+      <p:grpSpPr>
+        <a:xfrm>
+          <a:off x="0" y="0"/>
+          <a:ext cx="0" cy="0"/>
+          <a:chOff x="0" y="0"/>
+          <a:chExt cx="0" cy="0"/>
+        </a:xfrm>
+      </p:grpSpPr>
+      <p:sp>
+        <p:nvSpPr>
+          <p:cNvPr id="2" name="Text 0"/>
+          <p:cNvSpPr/>
+          <p:nvPr>
+            <p:ph idx="100" type="title" hasCustomPrompt="1"/>
+          </p:nvPr>
+        </p:nvSpPr>
+        <p:spPr>
+          <a:xfrm>
+            <a:off x="548640" y="320040"/>
+            <a:ext cx="11094415" cy="640080"/>
+          </a:xfrm>
+          <a:prstGeom prst="rect">
+            <a:avLst/>
+          </a:prstGeom>
+          <a:noFill/>
+          <a:ln/>
+        </p:spPr>
+        <p:txBody>
+          <a:bodyPr wrap="square" lIns="0" tIns="0" rIns="0" bIns="0" rtlCol="0" anchor="ctr"/>
+          <a:lstStyle/>
+          <a:p>
+            <a:pPr algn="l" indent="0" marL="0">
+              <a:buNone/>
+            </a:pPr>
+            <a:r>
+              <a:rPr lang="en-US" sz="2800" b="1" dirty="0">
+                <a:solidFill>
+                  <a:schemeClr val="tx2"/>
+                </a:solidFill>
+              </a:rPr>
+              <a:t>来源可见：标明哪些论文来自同一个试验</a:t>
+            </a:r>
+            <a:endParaRPr lang="en-US" sz="2800" dirty="0"/>
+          </a:p>
+        </p:txBody>
+      </p:sp>
+      <p:sp>
+        <p:nvSpPr>
+          <p:cNvPr id="3" name="Text 0"/>
+          <p:cNvSpPr/>
+          <p:nvPr>
+            <p:ph idx="101" type="body" hasCustomPrompt="1"/>
+          </p:nvPr>
+        </p:nvSpPr>
+        <p:spPr>
+          <a:xfrm>
+            <a:off x="548640" y="960120"/>
+            <a:ext cx="11094415" cy="411480"/>
+          </a:xfrm>
+          <a:prstGeom prst="rect">
+            <a:avLst/>
+          </a:prstGeom>
+          <a:noFill/>
+          <a:ln/>
+        </p:spPr>
+        <p:txBody>
+          <a:bodyPr wrap="square" lIns="0" tIns="0" rIns="0" bIns="0" rtlCol="0" anchor="ctr"/>
+          <a:lstStyle/>
+          <a:p>
+            <a:pPr algn="l" indent="0" marL="0">
+              <a:buNone/>
+            </a:pPr>
+            <a:r>
+              <a:rPr lang="en-US" sz="1500" dirty="0">
+                <a:solidFill>
+                  <a:schemeClr val="accent6"/>
+                </a:solidFill>
+              </a:rPr>
+              <a:t>把每篇论文的上游试验编号随证据一起交给模型和用户；只标注，不定级，判断留给专家。</a:t>
+            </a:r>
+            <a:endParaRPr lang="en-US" sz="1500" dirty="0"/>
+          </a:p>
+        </p:txBody>
+      </p:sp>
+      <p:sp>
+        <p:nvSpPr>
+          <p:cNvPr id="4" name="card-120"/>
+          <p:cNvSpPr/>
+          <p:nvPr/>
+        </p:nvSpPr>
+        <p:spPr>
+          <a:xfrm>
+            <a:off x="548640" y="1600200"/>
+            <a:ext cx="6675120" cy="4526280"/>
+          </a:xfrm>
+          <a:prstGeom prst="roundRect">
+            <a:avLst>
+              <a:gd name="adj" fmla="val 2020"/>
+            </a:avLst>
+          </a:prstGeom>
+          <a:solidFill>
+            <a:schemeClr val="bg2"/>
+          </a:solidFill>
+          <a:ln w="12700">
+            <a:solidFill>
+              <a:schemeClr val="bg2"/>
+            </a:solidFill>
+            <a:prstDash val="solid"/>
+          </a:ln>
+        </p:spPr>
+      </p:sp>
+      <p:sp>
+        <p:nvSpPr>
+          <p:cNvPr id="5" name="label-121"/>
+          <p:cNvSpPr txBox="1"/>
+          <p:nvPr/>
+        </p:nvSpPr>
+        <p:spPr>
+          <a:xfrm>
+            <a:off x="822960" y="1737360"/>
+            <a:ext cx="6126480" cy="329184"/>
+          </a:xfrm>
+          <a:prstGeom prst="rect">
+            <a:avLst/>
+          </a:prstGeom>
+          <a:noFill/>
+          <a:ln/>
+        </p:spPr>
+        <p:txBody>
+          <a:bodyPr wrap="square" lIns="0" tIns="0" rIns="0" bIns="0" rtlCol="0" anchor="t"/>
+          <a:lstStyle/>
+          <a:p>
+            <a:pPr algn="l" indent="0" marL="0">
+              <a:buNone/>
+            </a:pPr>
+            <a:r>
+              <a:rPr lang="en-US" sz="1350" b="1" dirty="0">
+                <a:solidFill>
+                  <a:schemeClr val="tx2"/>
+                </a:solidFill>
+              </a:rPr>
+              <a:t>真实例子：“阿贝西利能否用于乳腺癌”，系统检索到的前 20 篇论文</a:t>
+            </a:r>
+            <a:endParaRPr lang="en-US" sz="1350" dirty="0"/>
+          </a:p>
+        </p:txBody>
+      </p:sp>
+      <p:sp>
+        <p:nvSpPr>
+          <p:cNvPr id="6" name="box-122"/>
+          <p:cNvSpPr/>
+          <p:nvPr/>
+        </p:nvSpPr>
+        <p:spPr>
+          <a:xfrm>
+            <a:off x="822960" y="2240280"/>
+            <a:ext cx="1417320" cy="274320"/>
+          </a:xfrm>
+          <a:prstGeom prst="roundRect">
+            <a:avLst>
+              <a:gd name="adj" fmla="val 26667"/>
+            </a:avLst>
+          </a:prstGeom>
+          <a:solidFill>
+            <a:schemeClr val="bg1"/>
+          </a:solidFill>
+          <a:ln w="12700">
+            <a:solidFill>
+              <a:srgbClr val="C9792A"/>
+            </a:solidFill>
+          </a:ln>
+        </p:spPr>
+        <p:txBody>
+          <a:bodyPr wrap="square" lIns="762" tIns="762" rIns="762" bIns="762" rtlCol="0" anchor="ctr"/>
+          <a:lstStyle/>
+          <a:p>
+            <a:pPr algn="ctr" indent="0" marL="0">
+              <a:buNone/>
+            </a:pPr>
+            <a:r>
+              <a:rPr lang="en-US" sz="1100" dirty="0">
+                <a:solidFill>
+                  <a:schemeClr val="tx1"/>
+                </a:solidFill>
+              </a:rPr>
+              <a:t>论文 1</a:t>
+            </a:r>
+            <a:endParaRPr lang="en-US" sz="1100" dirty="0"/>
+          </a:p>
+        </p:txBody>
+      </p:sp>
+      <p:sp>
+        <p:nvSpPr>
+          <p:cNvPr id="7" name="box-123"/>
+          <p:cNvSpPr/>
+          <p:nvPr/>
+        </p:nvSpPr>
+        <p:spPr>
+          <a:xfrm>
+            <a:off x="822960" y="2578608"/>
+            <a:ext cx="1417320" cy="274320"/>
+          </a:xfrm>
+          <a:prstGeom prst="roundRect">
+            <a:avLst>
+              <a:gd name="adj" fmla="val 26667"/>
+            </a:avLst>
+          </a:prstGeom>
+          <a:solidFill>
+            <a:schemeClr val="bg1"/>
+          </a:solidFill>
+          <a:ln w="12700">
+            <a:solidFill>
+              <a:srgbClr val="C9792A"/>
+            </a:solidFill>
+          </a:ln>
+        </p:spPr>
+        <p:txBody>
+          <a:bodyPr wrap="square" lIns="762" tIns="762" rIns="762" bIns="762" rtlCol="0" anchor="ctr"/>
+          <a:lstStyle/>
+          <a:p>
+            <a:pPr algn="ctr" indent="0" marL="0">
+              <a:buNone/>
+            </a:pPr>
+            <a:r>
+              <a:rPr lang="en-US" sz="1100" dirty="0">
+                <a:solidFill>
+                  <a:schemeClr val="tx1"/>
+                </a:solidFill>
+              </a:rPr>
+              <a:t>论文 2</a:t>
+            </a:r>
+            <a:endParaRPr lang="en-US" sz="1100" dirty="0"/>
+          </a:p>
+        </p:txBody>
+      </p:sp>
+      <p:sp>
+        <p:nvSpPr>
+          <p:cNvPr id="8" name="box-124"/>
+          <p:cNvSpPr/>
+          <p:nvPr/>
+        </p:nvSpPr>
+        <p:spPr>
+          <a:xfrm>
+            <a:off x="822960" y="2916936"/>
+            <a:ext cx="1417320" cy="274320"/>
+          </a:xfrm>
+          <a:prstGeom prst="roundRect">
+            <a:avLst>
+              <a:gd name="adj" fmla="val 26667"/>
+            </a:avLst>
+          </a:prstGeom>
+          <a:solidFill>
+            <a:schemeClr val="bg1"/>
+          </a:solidFill>
+          <a:ln w="12700">
+            <a:solidFill>
+              <a:srgbClr val="C9792A"/>
+            </a:solidFill>
+          </a:ln>
+        </p:spPr>
+        <p:txBody>
+          <a:bodyPr wrap="square" lIns="762" tIns="762" rIns="762" bIns="762" rtlCol="0" anchor="ctr"/>
+          <a:lstStyle/>
+          <a:p>
+            <a:pPr algn="ctr" indent="0" marL="0">
+              <a:buNone/>
+            </a:pPr>
+            <a:r>
+              <a:rPr lang="en-US" sz="1100" dirty="0">
+                <a:solidFill>
+                  <a:schemeClr val="tx1"/>
+                </a:solidFill>
+              </a:rPr>
+              <a:t>论文 3</a:t>
+            </a:r>
+            <a:endParaRPr lang="en-US" sz="1100" dirty="0"/>
+          </a:p>
+        </p:txBody>
+      </p:sp>
+      <p:sp>
+        <p:nvSpPr>
+          <p:cNvPr id="9" name="box-125"/>
+          <p:cNvSpPr/>
+          <p:nvPr/>
+        </p:nvSpPr>
+        <p:spPr>
+          <a:xfrm>
+            <a:off x="822960" y="3255264"/>
+            <a:ext cx="1417320" cy="274320"/>
+          </a:xfrm>
+          <a:prstGeom prst="roundRect">
+            <a:avLst>
+              <a:gd name="adj" fmla="val 26667"/>
+            </a:avLst>
+          </a:prstGeom>
+          <a:solidFill>
+            <a:schemeClr val="bg1"/>
+          </a:solidFill>
+          <a:ln w="12700">
+            <a:solidFill>
+              <a:srgbClr val="C9792A"/>
+            </a:solidFill>
+          </a:ln>
+        </p:spPr>
+        <p:txBody>
+          <a:bodyPr wrap="square" lIns="762" tIns="762" rIns="762" bIns="762" rtlCol="0" anchor="ctr"/>
+          <a:lstStyle/>
+          <a:p>
+            <a:pPr algn="ctr" indent="0" marL="0">
+              <a:buNone/>
+            </a:pPr>
+            <a:r>
+              <a:rPr lang="en-US" sz="1100" dirty="0">
+                <a:solidFill>
+                  <a:schemeClr val="tx1"/>
+                </a:solidFill>
+              </a:rPr>
+              <a:t>论文 4</a:t>
+            </a:r>
+            <a:endParaRPr lang="en-US" sz="1100" dirty="0"/>
+          </a:p>
+        </p:txBody>
+      </p:sp>
+      <p:sp>
+        <p:nvSpPr>
+          <p:cNvPr id="10" name="box-126"/>
+          <p:cNvSpPr/>
+          <p:nvPr/>
+        </p:nvSpPr>
+        <p:spPr>
+          <a:xfrm>
+            <a:off x="822960" y="3593592"/>
+            <a:ext cx="1417320" cy="274320"/>
+          </a:xfrm>
+          <a:prstGeom prst="roundRect">
+            <a:avLst>
+              <a:gd name="adj" fmla="val 26667"/>
+            </a:avLst>
+          </a:prstGeom>
+          <a:solidFill>
+            <a:schemeClr val="bg1"/>
+          </a:solidFill>
+          <a:ln w="12700">
+            <a:solidFill>
+              <a:srgbClr val="C9792A"/>
+            </a:solidFill>
+          </a:ln>
+        </p:spPr>
+        <p:txBody>
+          <a:bodyPr wrap="square" lIns="762" tIns="762" rIns="762" bIns="762" rtlCol="0" anchor="ctr"/>
+          <a:lstStyle/>
+          <a:p>
+            <a:pPr algn="ctr" indent="0" marL="0">
+              <a:buNone/>
+            </a:pPr>
+            <a:r>
+              <a:rPr lang="en-US" sz="1100" dirty="0">
+                <a:solidFill>
+                  <a:schemeClr val="tx1"/>
+                </a:solidFill>
+              </a:rPr>
+              <a:t>论文 5</a:t>
+            </a:r>
+            <a:endParaRPr lang="en-US" sz="1100" dirty="0"/>
+          </a:p>
+        </p:txBody>
+      </p:sp>
+      <p:sp>
+        <p:nvSpPr>
+          <p:cNvPr id="11" name="box-127"/>
+          <p:cNvSpPr/>
+          <p:nvPr/>
+        </p:nvSpPr>
+        <p:spPr>
+          <a:xfrm>
+            <a:off x="822960" y="3931920"/>
+            <a:ext cx="1417320" cy="274320"/>
+          </a:xfrm>
+          <a:prstGeom prst="roundRect">
+            <a:avLst>
+              <a:gd name="adj" fmla="val 26667"/>
+            </a:avLst>
+          </a:prstGeom>
+          <a:solidFill>
+            <a:schemeClr val="bg1"/>
+          </a:solidFill>
+          <a:ln w="12700">
+            <a:solidFill>
+              <a:srgbClr val="C9792A"/>
+            </a:solidFill>
+          </a:ln>
+        </p:spPr>
+        <p:txBody>
+          <a:bodyPr wrap="square" lIns="762" tIns="762" rIns="762" bIns="762" rtlCol="0" anchor="ctr"/>
+          <a:lstStyle/>
+          <a:p>
+            <a:pPr algn="ctr" indent="0" marL="0">
+              <a:buNone/>
+            </a:pPr>
+            <a:r>
+              <a:rPr lang="en-US" sz="1100" dirty="0">
+                <a:solidFill>
+                  <a:schemeClr val="tx1"/>
+                </a:solidFill>
+              </a:rPr>
+              <a:t>论文 6</a:t>
+            </a:r>
+            <a:endParaRPr lang="en-US" sz="1100" dirty="0"/>
+          </a:p>
+        </p:txBody>
+      </p:sp>
+      <p:sp>
+        <p:nvSpPr>
+          <p:cNvPr id="12" name="box-128"/>
+          <p:cNvSpPr/>
+          <p:nvPr/>
+        </p:nvSpPr>
+        <p:spPr>
+          <a:xfrm>
+            <a:off x="822960" y="4325112"/>
+            <a:ext cx="1417320" cy="457200"/>
+          </a:xfrm>
+          <a:prstGeom prst="roundRect">
+            <a:avLst>
+              <a:gd name="adj" fmla="val 16000"/>
+            </a:avLst>
+          </a:prstGeom>
+          <a:solidFill>
+            <a:schemeClr val="bg1"/>
+          </a:solidFill>
+          <a:ln w="12700">
+            <a:solidFill>
+              <a:srgbClr val="D5DCE4"/>
+            </a:solidFill>
+          </a:ln>
+        </p:spPr>
+        <p:txBody>
+          <a:bodyPr wrap="square" lIns="762" tIns="762" rIns="762" bIns="762" rtlCol="0" anchor="ctr"/>
+          <a:lstStyle/>
+          <a:p>
+            <a:pPr algn="ctr" indent="0" marL="0">
+              <a:buNone/>
+            </a:pPr>
+            <a:r>
+              <a:rPr lang="en-US" sz="950" dirty="0">
+                <a:solidFill>
+                  <a:schemeClr val="accent6"/>
+                </a:solidFill>
+              </a:rPr>
+              <a:t>其余 14 篇</a:t>
+            </a:r>
+            <a:endParaRPr lang="en-US" sz="950" dirty="0"/>
+          </a:p>
+          <a:p>
+            <a:pPr algn="ctr" indent="0" marL="0">
+              <a:buNone/>
+            </a:pPr>
+            <a:r>
+              <a:rPr lang="en-US" sz="950" dirty="0">
+                <a:solidFill>
+                  <a:schemeClr val="accent6"/>
+                </a:solidFill>
+              </a:rPr>
+              <a:t>（各自独立或无法追溯）</a:t>
+            </a:r>
+            <a:endParaRPr lang="en-US" sz="950" dirty="0"/>
+          </a:p>
+        </p:txBody>
+      </p:sp>
+      <p:sp>
+        <p:nvSpPr>
+          <p:cNvPr id="13" name="arrow-129"/>
+          <p:cNvSpPr/>
+          <p:nvPr/>
+        </p:nvSpPr>
+        <p:spPr>
+          <a:xfrm>
+            <a:off x="2267712" y="2377440"/>
+            <a:ext cx="1179576" cy="845820"/>
+          </a:xfrm>
+          <a:prstGeom prst="line">
+            <a:avLst/>
+          </a:prstGeom>
+          <a:noFill/>
+          <a:ln w="12700">
+            <a:solidFill>
+              <a:schemeClr val="accent3"/>
+            </a:solidFill>
+            <a:prstDash val="solid"/>
+            <a:tailEnd type="triangle"/>
+          </a:ln>
+        </p:spPr>
+      </p:sp>
+      <p:sp>
+        <p:nvSpPr>
+          <p:cNvPr id="14" name="arrow-130"/>
+          <p:cNvSpPr/>
+          <p:nvPr/>
+        </p:nvSpPr>
+        <p:spPr>
+          <a:xfrm>
+            <a:off x="2267712" y="2715768"/>
+            <a:ext cx="1179576" cy="507492"/>
+          </a:xfrm>
+          <a:prstGeom prst="line">
+            <a:avLst/>
+          </a:prstGeom>
+          <a:noFill/>
+          <a:ln w="12700">
+            <a:solidFill>
+              <a:schemeClr val="accent3"/>
+            </a:solidFill>
+            <a:prstDash val="solid"/>
+            <a:tailEnd type="triangle"/>
+          </a:ln>
+        </p:spPr>
+      </p:sp>
+      <p:sp>
+        <p:nvSpPr>
+          <p:cNvPr id="15" name="arrow-131"/>
+          <p:cNvSpPr/>
+          <p:nvPr/>
+        </p:nvSpPr>
+        <p:spPr>
+          <a:xfrm>
+            <a:off x="2267712" y="3054096"/>
+            <a:ext cx="1179576" cy="169164"/>
+          </a:xfrm>
+          <a:prstGeom prst="line">
+            <a:avLst/>
+          </a:prstGeom>
+          <a:noFill/>
+          <a:ln w="12700">
+            <a:solidFill>
+              <a:schemeClr val="accent3"/>
+            </a:solidFill>
+            <a:prstDash val="solid"/>
+            <a:tailEnd type="triangle"/>
+          </a:ln>
+        </p:spPr>
+      </p:sp>
+      <p:sp>
+        <p:nvSpPr>
+          <p:cNvPr id="16" name="arrow-132"/>
+          <p:cNvSpPr/>
+          <p:nvPr/>
+        </p:nvSpPr>
+        <p:spPr>
+          <a:xfrm flipV="1">
+            <a:off x="2267712" y="3223260"/>
+            <a:ext cx="1179576" cy="169164"/>
+          </a:xfrm>
+          <a:prstGeom prst="line">
+            <a:avLst/>
+          </a:prstGeom>
+          <a:noFill/>
+          <a:ln w="12700">
+            <a:solidFill>
+              <a:schemeClr val="accent3"/>
+            </a:solidFill>
+            <a:prstDash val="solid"/>
+            <a:tailEnd type="triangle"/>
+          </a:ln>
+        </p:spPr>
+      </p:sp>
+      <p:sp>
+        <p:nvSpPr>
+          <p:cNvPr id="17" name="arrow-133"/>
+          <p:cNvSpPr/>
+          <p:nvPr/>
+        </p:nvSpPr>
+        <p:spPr>
+          <a:xfrm flipV="1">
+            <a:off x="2267712" y="3223260"/>
+            <a:ext cx="1179576" cy="507492"/>
+          </a:xfrm>
+          <a:prstGeom prst="line">
+            <a:avLst/>
+          </a:prstGeom>
+          <a:noFill/>
+          <a:ln w="12700">
+            <a:solidFill>
+              <a:schemeClr val="accent3"/>
+            </a:solidFill>
+            <a:prstDash val="solid"/>
+            <a:tailEnd type="triangle"/>
+          </a:ln>
+        </p:spPr>
+      </p:sp>
+      <p:sp>
+        <p:nvSpPr>
+          <p:cNvPr id="18" name="arrow-134"/>
+          <p:cNvSpPr/>
+          <p:nvPr/>
+        </p:nvSpPr>
+        <p:spPr>
+          <a:xfrm flipV="1">
+            <a:off x="2267712" y="3223260"/>
+            <a:ext cx="1179576" cy="845820"/>
+          </a:xfrm>
+          <a:prstGeom prst="line">
+            <a:avLst/>
+          </a:prstGeom>
+          <a:noFill/>
+          <a:ln w="12700">
+            <a:solidFill>
+              <a:schemeClr val="accent3"/>
+            </a:solidFill>
+            <a:prstDash val="solid"/>
+            <a:tailEnd type="triangle"/>
+          </a:ln>
+        </p:spPr>
+      </p:sp>
+      <p:sp>
+        <p:nvSpPr>
+          <p:cNvPr id="19" name="label-135"/>
+          <p:cNvSpPr txBox="1"/>
+          <p:nvPr/>
+        </p:nvSpPr>
+        <p:spPr>
+          <a:xfrm>
+            <a:off x="2514600" y="2034540"/>
+            <a:ext cx="2011680" cy="457200"/>
+          </a:xfrm>
+          <a:prstGeom prst="rect">
+            <a:avLst/>
+          </a:prstGeom>
+          <a:noFill/>
+          <a:ln/>
+        </p:spPr>
+        <p:txBody>
+          <a:bodyPr wrap="square" lIns="0" tIns="0" rIns="0" bIns="0" rtlCol="0" anchor="t"/>
+          <a:lstStyle/>
+          <a:p>
+            <a:pPr algn="ctr" indent="0" marL="0">
+              <a:buNone/>
+            </a:pPr>
+            <a:r>
+              <a:rPr lang="en-US" sz="1000" dirty="0">
+                <a:solidFill>
+                  <a:schemeClr val="accent3"/>
+                </a:solidFill>
+              </a:rPr>
+              <a:t>来源标注</a:t>
+            </a:r>
+            <a:endParaRPr lang="en-US" sz="1000" dirty="0"/>
+          </a:p>
+          <a:p>
+            <a:pPr algn="ctr" indent="0" marL="0">
+              <a:buNone/>
+            </a:pPr>
+            <a:r>
+              <a:rPr lang="en-US" sz="1000" dirty="0">
+                <a:solidFill>
+                  <a:schemeClr val="accent3"/>
+                </a:solidFill>
+              </a:rPr>
+              <a:t>（PubMed 试验关联）</a:t>
+            </a:r>
+            <a:endParaRPr lang="en-US" sz="1000" dirty="0"/>
+          </a:p>
+        </p:txBody>
+      </p:sp>
+      <p:sp>
+        <p:nvSpPr>
+          <p:cNvPr id="20" name="box-136"/>
+          <p:cNvSpPr/>
+          <p:nvPr/>
+        </p:nvSpPr>
+        <p:spPr>
+          <a:xfrm>
+            <a:off x="3474720" y="2903220"/>
+            <a:ext cx="1828800" cy="640080"/>
+          </a:xfrm>
+          <a:prstGeom prst="roundRect">
+            <a:avLst>
+              <a:gd name="adj" fmla="val 11429"/>
+            </a:avLst>
+          </a:prstGeom>
+          <a:solidFill>
+            <a:schemeClr val="accent3"/>
+          </a:solidFill>
+          <a:ln w="6350">
+            <a:solidFill>
+              <a:schemeClr val="accent3"/>
+            </a:solidFill>
+          </a:ln>
+        </p:spPr>
+        <p:txBody>
+          <a:bodyPr wrap="square" lIns="762" tIns="762" rIns="762" bIns="762" rtlCol="0" anchor="ctr"/>
+          <a:lstStyle/>
+          <a:p>
+            <a:pPr algn="ctr" indent="0" marL="0">
+              <a:buNone/>
+            </a:pPr>
+            <a:r>
+              <a:rPr lang="en-US" sz="1150" b="1" dirty="0">
+                <a:solidFill>
+                  <a:schemeClr val="bg1"/>
+                </a:solidFill>
+              </a:rPr>
+              <a:t>monarchE 三期试验</a:t>
+            </a:r>
+            <a:endParaRPr lang="en-US" sz="1150" dirty="0"/>
+          </a:p>
+          <a:p>
+            <a:pPr algn="ctr" indent="0" marL="0">
+              <a:buNone/>
+            </a:pPr>
+            <a:r>
+              <a:rPr lang="en-US" sz="1150" b="1" dirty="0">
+                <a:solidFill>
+                  <a:schemeClr val="bg1"/>
+                </a:solidFill>
+              </a:rPr>
+              <a:t>NCT03155997</a:t>
+            </a:r>
+            <a:endParaRPr lang="en-US" sz="1150" dirty="0"/>
+          </a:p>
+        </p:txBody>
+      </p:sp>
+      <p:sp>
+        <p:nvSpPr>
+          <p:cNvPr id="21" name="arrow-137"/>
+          <p:cNvSpPr/>
+          <p:nvPr/>
+        </p:nvSpPr>
+        <p:spPr>
+          <a:xfrm>
+            <a:off x="5330952" y="3223260"/>
+            <a:ext cx="429768" cy="0"/>
+          </a:xfrm>
+          <a:prstGeom prst="line">
+            <a:avLst/>
+          </a:prstGeom>
+          <a:noFill/>
+          <a:ln w="19050">
+            <a:solidFill>
+              <a:schemeClr val="tx2"/>
+            </a:solidFill>
+            <a:prstDash val="solid"/>
+            <a:tailEnd type="triangle"/>
+          </a:ln>
+        </p:spPr>
+      </p:sp>
+      <p:sp>
+        <p:nvSpPr>
+          <p:cNvPr id="22" name="box-138"/>
+          <p:cNvSpPr/>
+          <p:nvPr/>
+        </p:nvSpPr>
+        <p:spPr>
+          <a:xfrm>
+            <a:off x="5788152" y="2857500"/>
+            <a:ext cx="1161288" cy="731520"/>
+          </a:xfrm>
+          <a:prstGeom prst="roundRect">
+            <a:avLst>
+              <a:gd name="adj" fmla="val 10000"/>
+            </a:avLst>
+          </a:prstGeom>
+          <a:solidFill>
+            <a:srgbClr val="E3F3F1"/>
+          </a:solidFill>
+          <a:ln w="12700">
+            <a:solidFill>
+              <a:srgbClr val="0E8A7E"/>
+            </a:solidFill>
+          </a:ln>
+        </p:spPr>
+        <p:txBody>
+          <a:bodyPr wrap="square" lIns="762" tIns="762" rIns="762" bIns="762" rtlCol="0" anchor="ctr"/>
+          <a:lstStyle/>
+          <a:p>
+            <a:pPr algn="ctr" indent="0" marL="0">
+              <a:buNone/>
+            </a:pPr>
+            <a:r>
+              <a:rPr lang="en-US" sz="1300" b="1" dirty="0">
+                <a:solidFill>
+                  <a:schemeClr val="tx2"/>
+                </a:solidFill>
+              </a:rPr>
+              <a:t>计为 1 条</a:t>
+            </a:r>
+            <a:endParaRPr lang="en-US" sz="1300" dirty="0"/>
+          </a:p>
+          <a:p>
+            <a:pPr algn="ctr" indent="0" marL="0">
+              <a:buNone/>
+            </a:pPr>
+            <a:r>
+              <a:rPr lang="en-US" sz="1300" b="1" dirty="0">
+                <a:solidFill>
+                  <a:schemeClr val="tx2"/>
+                </a:solidFill>
+              </a:rPr>
+              <a:t>独立证据</a:t>
+            </a:r>
+            <a:endParaRPr lang="en-US" sz="1300" dirty="0"/>
+          </a:p>
+        </p:txBody>
+      </p:sp>
+      <p:sp>
+        <p:nvSpPr>
+          <p:cNvPr id="23" name="label-139"/>
+          <p:cNvSpPr txBox="1"/>
+          <p:nvPr/>
+        </p:nvSpPr>
+        <p:spPr>
+          <a:xfrm>
+            <a:off x="3291840" y="3680460"/>
+            <a:ext cx="3657600" cy="685800"/>
+          </a:xfrm>
+          <a:prstGeom prst="rect">
+            <a:avLst/>
+          </a:prstGeom>
+          <a:noFill/>
+          <a:ln/>
+        </p:spPr>
+        <p:txBody>
+          <a:bodyPr wrap="square" lIns="0" tIns="0" rIns="0" bIns="0" rtlCol="0" anchor="t"/>
+          <a:lstStyle/>
+          <a:p>
+            <a:pPr algn="l" indent="0" marL="0">
+              <a:buNone/>
+            </a:pPr>
+            <a:r>
+              <a:rPr lang="en-US" sz="1100" dirty="0">
+                <a:solidFill>
+                  <a:schemeClr val="tx1"/>
+                </a:solidFill>
+              </a:rPr>
+              <a:t>同一批受试者的主结果、亚组分析、长期随访等 6 篇论文，只能算 1 条证据；按篇数计会被放大 6 倍。</a:t>
+            </a:r>
+            <a:endParaRPr lang="en-US" sz="1100" dirty="0"/>
+          </a:p>
+        </p:txBody>
+      </p:sp>
+      <p:sp>
+        <p:nvSpPr>
+          <p:cNvPr id="24" name="label-140"/>
+          <p:cNvSpPr txBox="1"/>
+          <p:nvPr/>
+        </p:nvSpPr>
+        <p:spPr>
+          <a:xfrm>
+            <a:off x="822960" y="4983480"/>
+            <a:ext cx="6126480" cy="1005840"/>
+          </a:xfrm>
+          <a:prstGeom prst="rect">
+            <a:avLst/>
+          </a:prstGeom>
+          <a:noFill/>
+          <a:ln/>
+        </p:spPr>
+        <p:txBody>
+          <a:bodyPr wrap="square" lIns="0" tIns="0" rIns="0" bIns="0" rtlCol="0" anchor="t"/>
+          <a:lstStyle/>
+          <a:p>
+            <a:pPr algn="l" indent="0" marL="0">
+              <a:buNone/>
+            </a:pPr>
+            <a:r>
+              <a:rPr lang="en-US" sz="1200" b="1" dirty="0">
+                <a:solidFill>
+                  <a:schemeClr val="tx2"/>
+                </a:solidFill>
+              </a:rPr>
+              <a:t>系统只做标注：“以下 6 篇来自同一试验 NCT03155997”。证据强弱不由系统打分，由专家判断。</a:t>
+            </a:r>
+            <a:endParaRPr lang="en-US" sz="1200" dirty="0"/>
+          </a:p>
+        </p:txBody>
+      </p:sp>
+      <p:sp>
+        <p:nvSpPr>
+          <p:cNvPr id="25" name="badge-141"/>
+          <p:cNvSpPr/>
+          <p:nvPr/>
+        </p:nvSpPr>
+        <p:spPr>
+          <a:xfrm>
+            <a:off x="7543800" y="1691640"/>
+            <a:ext cx="384048" cy="384048"/>
+          </a:xfrm>
+          <a:prstGeom prst="ellipse">
+            <a:avLst/>
+          </a:prstGeom>
+          <a:solidFill>
+            <a:schemeClr val="accent1"/>
+          </a:solidFill>
+          <a:ln w="6350">
+            <a:solidFill>
+              <a:schemeClr val="accent1"/>
+            </a:solidFill>
+          </a:ln>
+        </p:spPr>
+        <p:txBody>
+          <a:bodyPr wrap="square" lIns="0" tIns="0" rIns="0" bIns="0" rtlCol="0" anchor="ctr"/>
+          <a:lstStyle/>
+          <a:p>
+            <a:pPr algn="ctr" indent="0" marL="0">
+              <a:buNone/>
+            </a:pPr>
+            <a:r>
+              <a:rPr lang="en-US" sz="1500" b="1" dirty="0">
+                <a:solidFill>
+                  <a:schemeClr val="bg1"/>
+                </a:solidFill>
+              </a:rPr>
+              <a:t>1</a:t>
+            </a:r>
+            <a:endParaRPr lang="en-US" sz="1500" dirty="0"/>
+          </a:p>
+        </p:txBody>
+      </p:sp>
+      <p:sp>
+        <p:nvSpPr>
+          <p:cNvPr id="26" name="label-142"/>
+          <p:cNvSpPr txBox="1"/>
+          <p:nvPr/>
+        </p:nvSpPr>
+        <p:spPr>
+          <a:xfrm>
+            <a:off x="8074152" y="1673352"/>
+            <a:ext cx="3568903" cy="411480"/>
+          </a:xfrm>
+          <a:prstGeom prst="rect">
+            <a:avLst/>
+          </a:prstGeom>
+          <a:noFill/>
+          <a:ln/>
+        </p:spPr>
+        <p:txBody>
+          <a:bodyPr wrap="square" lIns="0" tIns="0" rIns="0" bIns="0" rtlCol="0" anchor="ctr"/>
+          <a:lstStyle/>
+          <a:p>
+            <a:pPr algn="l" indent="0" marL="0">
+              <a:buNone/>
+            </a:pPr>
+            <a:r>
+              <a:rPr lang="en-US" sz="1600" b="1" dirty="0">
+                <a:solidFill>
+                  <a:schemeClr val="tx2"/>
+                </a:solidFill>
+              </a:rPr>
+              <a:t>为什么要做</a:t>
+            </a:r>
+            <a:endParaRPr lang="en-US" sz="1600" dirty="0"/>
+          </a:p>
+        </p:txBody>
+      </p:sp>
+      <p:sp>
+        <p:nvSpPr>
+          <p:cNvPr id="27" name="label-143"/>
+          <p:cNvSpPr txBox="1"/>
+          <p:nvPr/>
+        </p:nvSpPr>
+        <p:spPr>
+          <a:xfrm>
+            <a:off x="8074152" y="2103120"/>
+            <a:ext cx="3568903" cy="1005840"/>
+          </a:xfrm>
+          <a:prstGeom prst="rect">
+            <a:avLst/>
+          </a:prstGeom>
+          <a:noFill/>
+          <a:ln/>
+        </p:spPr>
+        <p:txBody>
+          <a:bodyPr wrap="square" lIns="0" tIns="0" rIns="0" bIns="0" rtlCol="0" anchor="t"/>
+          <a:lstStyle/>
+          <a:p>
+            <a:pPr algn="l" indent="0" marL="0">
+              <a:buNone/>
+            </a:pPr>
+            <a:r>
+              <a:rPr lang="en-US" sz="1250" dirty="0">
+                <a:solidFill>
+                  <a:schemeClr val="accent6"/>
+                </a:solidFill>
+              </a:rPr>
+              <a:t>系统现在只把标题交给模型；仅凭标题，粗略估计只有约 15% 的同源论文对能被看出来。</a:t>
+            </a:r>
+            <a:endParaRPr lang="en-US" sz="1250" dirty="0"/>
+          </a:p>
+        </p:txBody>
+      </p:sp>
+      <p:sp>
+        <p:nvSpPr>
+          <p:cNvPr id="28" name="badge-144"/>
+          <p:cNvSpPr/>
+          <p:nvPr/>
+        </p:nvSpPr>
+        <p:spPr>
+          <a:xfrm>
+            <a:off x="7543800" y="3172968"/>
+            <a:ext cx="384048" cy="384048"/>
+          </a:xfrm>
+          <a:prstGeom prst="ellipse">
+            <a:avLst/>
+          </a:prstGeom>
+          <a:solidFill>
+            <a:schemeClr val="accent1"/>
+          </a:solidFill>
+          <a:ln w="6350">
+            <a:solidFill>
+              <a:schemeClr val="accent1"/>
+            </a:solidFill>
+          </a:ln>
+        </p:spPr>
+        <p:txBody>
+          <a:bodyPr wrap="square" lIns="0" tIns="0" rIns="0" bIns="0" rtlCol="0" anchor="ctr"/>
+          <a:lstStyle/>
+          <a:p>
+            <a:pPr algn="ctr" indent="0" marL="0">
+              <a:buNone/>
+            </a:pPr>
+            <a:r>
+              <a:rPr lang="en-US" sz="1500" b="1" dirty="0">
+                <a:solidFill>
+                  <a:schemeClr val="bg1"/>
+                </a:solidFill>
+              </a:rPr>
+              <a:t>2</a:t>
+            </a:r>
+            <a:endParaRPr lang="en-US" sz="1500" dirty="0"/>
+          </a:p>
+        </p:txBody>
+      </p:sp>
+      <p:sp>
+        <p:nvSpPr>
+          <p:cNvPr id="29" name="label-145"/>
+          <p:cNvSpPr txBox="1"/>
+          <p:nvPr/>
+        </p:nvSpPr>
+        <p:spPr>
+          <a:xfrm>
+            <a:off x="8074152" y="3154680"/>
+            <a:ext cx="3568903" cy="411480"/>
+          </a:xfrm>
+          <a:prstGeom prst="rect">
+            <a:avLst/>
+          </a:prstGeom>
+          <a:noFill/>
+          <a:ln/>
+        </p:spPr>
+        <p:txBody>
+          <a:bodyPr wrap="square" lIns="0" tIns="0" rIns="0" bIns="0" rtlCol="0" anchor="ctr"/>
+          <a:lstStyle/>
+          <a:p>
+            <a:pPr algn="l" indent="0" marL="0">
+              <a:buNone/>
+            </a:pPr>
+            <a:r>
+              <a:rPr lang="en-US" sz="1600" b="1" dirty="0">
+                <a:solidFill>
+                  <a:schemeClr val="tx2"/>
+                </a:solidFill>
+              </a:rPr>
+              <a:t>怎么做</a:t>
+            </a:r>
+            <a:endParaRPr lang="en-US" sz="1600" dirty="0"/>
+          </a:p>
+        </p:txBody>
+      </p:sp>
+      <p:sp>
+        <p:nvSpPr>
+          <p:cNvPr id="30" name="label-146"/>
+          <p:cNvSpPr txBox="1"/>
+          <p:nvPr/>
+        </p:nvSpPr>
+        <p:spPr>
+          <a:xfrm>
+            <a:off x="8074152" y="3584448"/>
+            <a:ext cx="3568903" cy="1005840"/>
+          </a:xfrm>
+          <a:prstGeom prst="rect">
+            <a:avLst/>
+          </a:prstGeom>
+          <a:noFill/>
+          <a:ln/>
+        </p:spPr>
+        <p:txBody>
+          <a:bodyPr wrap="square" lIns="0" tIns="0" rIns="0" bIns="0" rtlCol="0" anchor="t"/>
+          <a:lstStyle/>
+          <a:p>
+            <a:pPr algn="l" indent="0" marL="0">
+              <a:buNone/>
+            </a:pPr>
+            <a:r>
+              <a:rPr lang="en-US" sz="1250" dirty="0">
+                <a:solidFill>
+                  <a:schemeClr val="accent6"/>
+                </a:solidFill>
+              </a:rPr>
+              <a:t>用 PubMed 的试验关联和摘要中的试验编号标注来源，现查现算；合并只是按编号分组，不需要模型推理。</a:t>
+            </a:r>
+            <a:endParaRPr lang="en-US" sz="1250" dirty="0"/>
+          </a:p>
+        </p:txBody>
+      </p:sp>
+      <p:sp>
+        <p:nvSpPr>
+          <p:cNvPr id="31" name="badge-147"/>
+          <p:cNvSpPr/>
+          <p:nvPr/>
+        </p:nvSpPr>
+        <p:spPr>
+          <a:xfrm>
+            <a:off x="7543800" y="4654296"/>
+            <a:ext cx="384048" cy="384048"/>
+          </a:xfrm>
+          <a:prstGeom prst="ellipse">
+            <a:avLst/>
+          </a:prstGeom>
+          <a:solidFill>
+            <a:schemeClr val="accent1"/>
+          </a:solidFill>
+          <a:ln w="6350">
+            <a:solidFill>
+              <a:schemeClr val="accent1"/>
+            </a:solidFill>
+          </a:ln>
+        </p:spPr>
+        <p:txBody>
+          <a:bodyPr wrap="square" lIns="0" tIns="0" rIns="0" bIns="0" rtlCol="0" anchor="ctr"/>
+          <a:lstStyle/>
+          <a:p>
+            <a:pPr algn="ctr" indent="0" marL="0">
+              <a:buNone/>
+            </a:pPr>
+            <a:r>
+              <a:rPr lang="en-US" sz="1500" b="1" dirty="0">
+                <a:solidFill>
+                  <a:schemeClr val="bg1"/>
+                </a:solidFill>
+              </a:rPr>
+              <a:t>3</a:t>
+            </a:r>
+            <a:endParaRPr lang="en-US" sz="1500" dirty="0"/>
+          </a:p>
+        </p:txBody>
+      </p:sp>
+      <p:sp>
+        <p:nvSpPr>
+          <p:cNvPr id="32" name="label-148"/>
+          <p:cNvSpPr txBox="1"/>
+          <p:nvPr/>
+        </p:nvSpPr>
+        <p:spPr>
+          <a:xfrm>
+            <a:off x="8074152" y="4636008"/>
+            <a:ext cx="3568903" cy="411480"/>
+          </a:xfrm>
+          <a:prstGeom prst="rect">
+            <a:avLst/>
+          </a:prstGeom>
+          <a:noFill/>
+          <a:ln/>
+        </p:spPr>
+        <p:txBody>
+          <a:bodyPr wrap="square" lIns="0" tIns="0" rIns="0" bIns="0" rtlCol="0" anchor="ctr"/>
+          <a:lstStyle/>
+          <a:p>
+            <a:pPr algn="l" indent="0" marL="0">
+              <a:buNone/>
+            </a:pPr>
+            <a:r>
+              <a:rPr lang="en-US" sz="1600" b="1" dirty="0">
+                <a:solidFill>
+                  <a:schemeClr val="tx2"/>
+                </a:solidFill>
+              </a:rPr>
+              <a:t>定位</a:t>
+            </a:r>
+            <a:endParaRPr lang="en-US" sz="1600" dirty="0"/>
+          </a:p>
+        </p:txBody>
+      </p:sp>
+      <p:sp>
+        <p:nvSpPr>
+          <p:cNvPr id="33" name="label-149"/>
+          <p:cNvSpPr txBox="1"/>
+          <p:nvPr/>
+        </p:nvSpPr>
+        <p:spPr>
+          <a:xfrm>
+            <a:off x="8074152" y="5065776"/>
+            <a:ext cx="3568903" cy="1005840"/>
+          </a:xfrm>
+          <a:prstGeom prst="rect">
+            <a:avLst/>
+          </a:prstGeom>
+          <a:noFill/>
+          <a:ln/>
+        </p:spPr>
+        <p:txBody>
+          <a:bodyPr wrap="square" lIns="0" tIns="0" rIns="0" bIns="0" rtlCol="0" anchor="t"/>
+          <a:lstStyle/>
+          <a:p>
+            <a:pPr algn="l" indent="0" marL="0">
+              <a:buNone/>
+            </a:pPr>
+            <a:r>
+              <a:rPr lang="en-US" sz="1250" dirty="0">
+                <a:solidFill>
+                  <a:schemeClr val="accent6"/>
+                </a:solidFill>
+              </a:rPr>
+              <a:t>一个低成本的小功能，不作为创新点；它是否真的改变模型结论，由下一页的实验来回答。</a:t>
+            </a:r>
+            <a:endParaRPr lang="en-US" sz="1250" dirty="0"/>
           </a:p>
         </p:txBody>
       </p:sp>
@@ -13530,7 +13312,7 @@
                   <a:schemeClr val="tx2"/>
                 </a:solidFill>
               </a:rPr>
-              <a:t>实测：同源证据普遍存在，证据类型决定区分力</a:t>
+              <a:t>实测现象与待验证假设：同源证据会不会造成“虚假共识”</a:t>
             </a:r>
             <a:endParaRPr lang="en-US" sz="2800" dirty="0"/>
           </a:p>
@@ -13568,7 +13350,7 @@
                   <a:schemeClr val="accent6"/>
                 </a:solidFill>
               </a:rPr>
-              <a:t>两项小规模实测，标签全部来自公开结局（获批 / 因疗效不足失败），无人工标注。</a:t>
+              <a:t>现象已实测；它是否真的影响大模型的结论，用一个无需人工标注的对照实验来回答。</a:t>
             </a:r>
             <a:endParaRPr lang="en-US" sz="1500" dirty="0"/>
           </a:p>
@@ -13576,7 +13358,7 @@
       </p:sp>
       <p:sp>
         <p:nvSpPr>
-          <p:cNvPr id="4" name="card-154"/>
+          <p:cNvPr id="4" name="card-150"/>
           <p:cNvSpPr/>
           <p:nvPr/>
         </p:nvSpPr>
@@ -13603,7 +13385,7 @@
       </p:sp>
       <p:sp>
         <p:nvSpPr>
-          <p:cNvPr id="5" name="badge-155"/>
+          <p:cNvPr id="5" name="badge-151"/>
           <p:cNvSpPr/>
           <p:nvPr/>
         </p:nvSpPr>
@@ -13645,7 +13427,7 @@
       </p:sp>
       <p:sp>
         <p:nvSpPr>
-          <p:cNvPr id="6" name="label-156"/>
+          <p:cNvPr id="6" name="label-152"/>
           <p:cNvSpPr txBox="1"/>
           <p:nvPr/>
         </p:nvSpPr>
@@ -13668,20 +13450,20 @@
               <a:buNone/>
             </a:pPr>
             <a:r>
-              <a:rPr lang="en-US" sz="1600" b="1" dirty="0">
+              <a:rPr lang="en-US" sz="1550" b="1" dirty="0">
                 <a:solidFill>
                   <a:schemeClr val="tx2"/>
                 </a:solidFill>
               </a:rPr>
-              <a:t>检索到的证据有多少是同源的</a:t>
-            </a:r>
-            <a:endParaRPr lang="en-US" sz="1600" dirty="0"/>
-          </a:p>
-        </p:txBody>
-      </p:sp>
-      <p:sp>
-        <p:nvSpPr>
-          <p:cNvPr id="7" name="label-157"/>
+              <a:t>现象（已实测）：同源证据普遍存在</a:t>
+            </a:r>
+            <a:endParaRPr lang="en-US" sz="1550" dirty="0"/>
+          </a:p>
+        </p:txBody>
+      </p:sp>
+      <p:sp>
+        <p:nvSpPr>
+          <p:cNvPr id="7" name="label-153"/>
           <p:cNvSpPr txBox="1"/>
           <p:nvPr/>
         </p:nvSpPr>
@@ -13717,7 +13499,7 @@
       </p:sp>
       <p:sp>
         <p:nvSpPr>
-          <p:cNvPr id="8" name="label-158"/>
+          <p:cNvPr id="8" name="label-154"/>
           <p:cNvSpPr txBox="1"/>
           <p:nvPr/>
         </p:nvSpPr>
@@ -13753,7 +13535,7 @@
       </p:sp>
       <p:sp>
         <p:nvSpPr>
-          <p:cNvPr id="9" name="label-159"/>
+          <p:cNvPr id="9" name="label-155"/>
           <p:cNvSpPr txBox="1"/>
           <p:nvPr/>
         </p:nvSpPr>
@@ -13803,7 +13585,7 @@
       </p:sp>
       <p:sp>
         <p:nvSpPr>
-          <p:cNvPr id="10" name="label-160"/>
+          <p:cNvPr id="10" name="label-156"/>
           <p:cNvSpPr txBox="1"/>
           <p:nvPr/>
         </p:nvSpPr>
@@ -13839,7 +13621,7 @@
       </p:sp>
       <p:sp>
         <p:nvSpPr>
-          <p:cNvPr id="11" name="label-161"/>
+          <p:cNvPr id="11" name="label-157"/>
           <p:cNvSpPr txBox="1"/>
           <p:nvPr/>
         </p:nvSpPr>
@@ -13889,7 +13671,7 @@
       </p:sp>
       <p:sp>
         <p:nvSpPr>
-          <p:cNvPr id="12" name="label-162"/>
+          <p:cNvPr id="12" name="label-158"/>
           <p:cNvSpPr txBox="1"/>
           <p:nvPr/>
         </p:nvSpPr>
@@ -13925,7 +13707,7 @@
       </p:sp>
       <p:sp>
         <p:nvSpPr>
-          <p:cNvPr id="13" name="label-163"/>
+          <p:cNvPr id="13" name="label-159"/>
           <p:cNvSpPr txBox="1"/>
           <p:nvPr/>
         </p:nvSpPr>
@@ -13975,7 +13757,7 @@
       </p:sp>
       <p:sp>
         <p:nvSpPr>
-          <p:cNvPr id="14" name="label-164"/>
+          <p:cNvPr id="14" name="label-160"/>
           <p:cNvSpPr txBox="1"/>
           <p:nvPr/>
         </p:nvSpPr>
@@ -13998,20 +13780,20 @@
               <a:buNone/>
             </a:pPr>
             <a:r>
-              <a:rPr lang="en-US" sz="1050" dirty="0">
+              <a:rPr lang="en-US" sz="1000" dirty="0">
                 <a:solidFill>
                   <a:schemeClr val="accent6"/>
                 </a:solidFill>
               </a:rPr>
-              <a:t>只识别了明确的试验编号；共享队列、数据集、预印本等尚未计入，真实比例只会更高。</a:t>
-            </a:r>
-            <a:endParaRPr lang="en-US" sz="1050" dirty="0"/>
-          </a:p>
-        </p:txBody>
-      </p:sp>
-      <p:sp>
-        <p:nvSpPr>
-          <p:cNvPr id="15" name="card-165"/>
+              <a:t>只识别了明确的试验编号，是下界。已获批药物的同源比例更高（49% vs 28%）：获批后二次分析论文增多，“论文多”部分是成功的结果。</a:t>
+            </a:r>
+            <a:endParaRPr lang="en-US" sz="1000" dirty="0"/>
+          </a:p>
+        </p:txBody>
+      </p:sp>
+      <p:sp>
+        <p:nvSpPr>
+          <p:cNvPr id="15" name="card-161"/>
           <p:cNvSpPr/>
           <p:nvPr/>
         </p:nvSpPr>
@@ -14038,7 +13820,7 @@
       </p:sp>
       <p:sp>
         <p:nvSpPr>
-          <p:cNvPr id="16" name="badge-166"/>
+          <p:cNvPr id="16" name="badge-162"/>
           <p:cNvSpPr/>
           <p:nvPr/>
         </p:nvSpPr>
@@ -14051,11 +13833,11 @@
             <a:avLst/>
           </a:prstGeom>
           <a:solidFill>
-            <a:schemeClr val="accent1"/>
+            <a:schemeClr val="accent2"/>
           </a:solidFill>
           <a:ln w="6350">
             <a:solidFill>
-              <a:schemeClr val="accent1"/>
+              <a:schemeClr val="accent2"/>
             </a:solidFill>
           </a:ln>
         </p:spPr>
@@ -14080,7 +13862,7 @@
       </p:sp>
       <p:sp>
         <p:nvSpPr>
-          <p:cNvPr id="17" name="label-167"/>
+          <p:cNvPr id="17" name="label-163"/>
           <p:cNvSpPr txBox="1"/>
           <p:nvPr/>
         </p:nvSpPr>
@@ -14103,20 +13885,20 @@
               <a:buNone/>
             </a:pPr>
             <a:r>
-              <a:rPr lang="en-US" sz="1600" b="1" dirty="0">
+              <a:rPr lang="en-US" sz="1550" b="1" dirty="0">
                 <a:solidFill>
                   <a:schemeClr val="tx2"/>
                 </a:solidFill>
               </a:rPr>
-              <a:t>哪类证据能区分“有效 / 无效”</a:t>
-            </a:r>
-            <a:endParaRPr lang="en-US" sz="1600" dirty="0"/>
-          </a:p>
-        </p:txBody>
-      </p:sp>
-      <p:sp>
-        <p:nvSpPr>
-          <p:cNvPr id="18" name="label-168"/>
+              <a:t>待验证：重复证据会不会改变模型结论</a:t>
+            </a:r>
+            <a:endParaRPr lang="en-US" sz="1550" dirty="0"/>
+          </a:p>
+        </p:txBody>
+      </p:sp>
+      <p:sp>
+        <p:nvSpPr>
+          <p:cNvPr id="18" name="label-164"/>
           <p:cNvSpPr txBox="1"/>
           <p:nvPr/>
         </p:nvSpPr>
@@ -14144,710 +13926,1087 @@
                   <a:schemeClr val="tx1"/>
                 </a:solidFill>
               </a:rPr>
-              <a:t>已获批靶点 vs 因疗效不足失败的靶点：各类证据出现的比例（114 个靶点 / 94 对靶点–疾病）。</a:t>
+              <a:t>同一个问题、同一个模型，只改变证据包，比较模型给出的“有效概率”和“独立研究数”：</a:t>
             </a:r>
             <a:endParaRPr lang="en-US" sz="1100" dirty="0"/>
           </a:p>
         </p:txBody>
       </p:sp>
-      <p:sp>
-        <p:nvSpPr>
-          <p:cNvPr id="19" name="label-169"/>
-          <p:cNvSpPr txBox="1"/>
-          <p:nvPr/>
-        </p:nvSpPr>
-        <p:spPr>
-          <a:xfrm>
-            <a:off x="8839048" y="2743200"/>
-            <a:ext cx="2483968" cy="237744"/>
-          </a:xfrm>
-          <a:prstGeom prst="rect">
-            <a:avLst/>
-          </a:prstGeom>
-          <a:noFill/>
-          <a:ln/>
-        </p:spPr>
-        <p:txBody>
-          <a:bodyPr wrap="square" lIns="0" tIns="0" rIns="0" bIns="0" rtlCol="0" anchor="t"/>
-          <a:lstStyle/>
-          <a:p>
-            <a:pPr algn="l" indent="0" marL="0">
-              <a:buNone/>
-            </a:pPr>
-            <a:r>
-              <a:rPr lang="en-US" sz="950" dirty="0">
-                <a:solidFill>
-                  <a:schemeClr val="accent6"/>
-                </a:solidFill>
-              </a:rPr>
-              <a:t>上条：获批组　下条（浅色）：失败组</a:t>
-            </a:r>
-            <a:endParaRPr lang="en-US" sz="950" dirty="0"/>
-          </a:p>
-        </p:txBody>
-      </p:sp>
-      <p:sp>
-        <p:nvSpPr>
-          <p:cNvPr id="20" name="label-170"/>
-          <p:cNvSpPr txBox="1"/>
-          <p:nvPr/>
-        </p:nvSpPr>
-        <p:spPr>
-          <a:xfrm>
-            <a:off x="6507328" y="3035808"/>
-            <a:ext cx="2286000" cy="457200"/>
-          </a:xfrm>
-          <a:prstGeom prst="rect">
-            <a:avLst/>
-          </a:prstGeom>
-          <a:noFill/>
-          <a:ln/>
-        </p:spPr>
-        <p:txBody>
-          <a:bodyPr wrap="square" lIns="0" tIns="0" rIns="0" bIns="0" rtlCol="0" anchor="ctr"/>
-          <a:lstStyle/>
-          <a:p>
-            <a:pPr algn="l" indent="0" marL="0">
-              <a:buNone/>
-            </a:pPr>
-            <a:r>
-              <a:rPr lang="en-US" sz="1050" dirty="0">
-                <a:solidFill>
-                  <a:schemeClr val="tx1"/>
-                </a:solidFill>
-              </a:rPr>
-              <a:t>只看靶点：有强活性化合物</a:t>
-            </a:r>
-            <a:endParaRPr lang="en-US" sz="1050" dirty="0"/>
-          </a:p>
-        </p:txBody>
-      </p:sp>
-      <p:sp>
-        <p:nvSpPr>
-          <p:cNvPr id="21" name="bar-171"/>
+      <p:graphicFrame>
+        <p:nvGraphicFramePr>
+          <p:cNvPr id="9" name="table-165"/>
+          <p:cNvGraphicFramePr>
+            <a:graphicFrameLocks noGrp="1"/>
+          </p:cNvGraphicFramePr>
+          <p:nvPr>
+            <p:extLst>
+              <p:ext uri="{D42A27DB-BD31-4B8C-83A1-F6EECF244321}">
+                <p14:modId xmlns:p14="http://schemas.microsoft.com/office/powerpoint/2010/main" val="1579011935"/>
+              </p:ext>
+            </p:extLst>
+          </p:nvPr>
+        </p:nvGraphicFramePr>
+        <p:xfrm>
+          <a:off x="6507328" y="2743200"/>
+          <a:ext cx="4861408" cy="914400"/>
+        </p:xfrm>
+        <a:graphic>
+          <a:graphicData uri="http://schemas.openxmlformats.org/drawingml/2006/table">
+            <a:tbl>
+              <a:tblPr/>
+              <a:tblGrid>
+                <a:gridCol w="960120"/>
+                <a:gridCol w="2514600"/>
+                <a:gridCol w="1386688"/>
+              </a:tblGrid>
+              <a:tr h="329184">
+                <a:tc>
+                  <a:txBody>
+                    <a:bodyPr/>
+                    <a:lstStyle/>
+                    <a:p>
+                      <a:pPr indent="0" marL="0">
+                        <a:buNone/>
+                      </a:pPr>
+                      <a:r>
+                        <a:rPr lang="en-US" sz="1050" b="1" dirty="0">
+                          <a:solidFill>
+                            <a:srgbClr val="FFFFFF"/>
+                          </a:solidFill>
+                          <a:latin typeface="Microsoft YaHei" pitchFamily="34" charset="0"/>
+                          <a:ea typeface="Microsoft YaHei" pitchFamily="34" charset="-122"/>
+                          <a:cs typeface="Microsoft YaHei" pitchFamily="34" charset="-120"/>
+                        </a:rPr>
+                        <a:t>证据包</a:t>
+                      </a:r>
+                      <a:endParaRPr lang="en-US" sz="1050" dirty="0">
+                        <a:latin typeface="Microsoft YaHei" charset="0"/>
+                        <a:ea typeface="Microsoft YaHei" charset="0"/>
+                        <a:cs typeface="Microsoft YaHei" charset="0"/>
+                      </a:endParaRPr>
+                    </a:p>
+                  </a:txBody>
+                  <a:tcPr marL="73152" marR="73152" marT="27432" marB="27432" anchor="ctr">
+                    <a:lnL w="9525" cap="flat" cmpd="sng" algn="ctr">
+                      <a:solidFill>
+                        <a:srgbClr val="D5DCE4"/>
+                      </a:solidFill>
+                      <a:prstDash val="solid"/>
+                      <a:round/>
+                      <a:headEnd type="none" w="med" len="med"/>
+                      <a:tailEnd type="none" w="med" len="med"/>
+                    </a:lnL>
+                    <a:lnR w="9525" cap="flat" cmpd="sng" algn="ctr">
+                      <a:solidFill>
+                        <a:srgbClr val="D5DCE4"/>
+                      </a:solidFill>
+                      <a:prstDash val="solid"/>
+                      <a:round/>
+                      <a:headEnd type="none" w="med" len="med"/>
+                      <a:tailEnd type="none" w="med" len="med"/>
+                    </a:lnR>
+                    <a:lnT w="9525" cap="flat" cmpd="sng" algn="ctr">
+                      <a:solidFill>
+                        <a:srgbClr val="D5DCE4"/>
+                      </a:solidFill>
+                      <a:prstDash val="solid"/>
+                      <a:round/>
+                      <a:headEnd type="none" w="med" len="med"/>
+                      <a:tailEnd type="none" w="med" len="med"/>
+                    </a:lnT>
+                    <a:lnB w="9525" cap="flat" cmpd="sng" algn="ctr">
+                      <a:solidFill>
+                        <a:srgbClr val="D5DCE4"/>
+                      </a:solidFill>
+                      <a:prstDash val="solid"/>
+                      <a:round/>
+                      <a:headEnd type="none" w="med" len="med"/>
+                      <a:tailEnd type="none" w="med" len="med"/>
+                    </a:lnB>
+                    <a:solidFill>
+                      <a:srgbClr val="0F2A44"/>
+                    </a:solidFill>
+                  </a:tcPr>
+                </a:tc>
+                <a:tc>
+                  <a:txBody>
+                    <a:bodyPr/>
+                    <a:lstStyle/>
+                    <a:p>
+                      <a:pPr indent="0" marL="0">
+                        <a:buNone/>
+                      </a:pPr>
+                      <a:r>
+                        <a:rPr lang="en-US" sz="1050" b="1" dirty="0">
+                          <a:solidFill>
+                            <a:srgbClr val="FFFFFF"/>
+                          </a:solidFill>
+                          <a:latin typeface="Microsoft YaHei" pitchFamily="34" charset="0"/>
+                          <a:ea typeface="Microsoft YaHei" pitchFamily="34" charset="-122"/>
+                          <a:cs typeface="Microsoft YaHei" pitchFamily="34" charset="-120"/>
+                        </a:rPr>
+                        <a:t>内容</a:t>
+                      </a:r>
+                      <a:endParaRPr lang="en-US" sz="1050" dirty="0">
+                        <a:latin typeface="Microsoft YaHei" charset="0"/>
+                        <a:ea typeface="Microsoft YaHei" charset="0"/>
+                        <a:cs typeface="Microsoft YaHei" charset="0"/>
+                      </a:endParaRPr>
+                    </a:p>
+                  </a:txBody>
+                  <a:tcPr marL="73152" marR="73152" marT="27432" marB="27432" anchor="ctr">
+                    <a:lnL w="9525" cap="flat" cmpd="sng" algn="ctr">
+                      <a:solidFill>
+                        <a:srgbClr val="D5DCE4"/>
+                      </a:solidFill>
+                      <a:prstDash val="solid"/>
+                      <a:round/>
+                      <a:headEnd type="none" w="med" len="med"/>
+                      <a:tailEnd type="none" w="med" len="med"/>
+                    </a:lnL>
+                    <a:lnR w="9525" cap="flat" cmpd="sng" algn="ctr">
+                      <a:solidFill>
+                        <a:srgbClr val="D5DCE4"/>
+                      </a:solidFill>
+                      <a:prstDash val="solid"/>
+                      <a:round/>
+                      <a:headEnd type="none" w="med" len="med"/>
+                      <a:tailEnd type="none" w="med" len="med"/>
+                    </a:lnR>
+                    <a:lnT w="9525" cap="flat" cmpd="sng" algn="ctr">
+                      <a:solidFill>
+                        <a:srgbClr val="D5DCE4"/>
+                      </a:solidFill>
+                      <a:prstDash val="solid"/>
+                      <a:round/>
+                      <a:headEnd type="none" w="med" len="med"/>
+                      <a:tailEnd type="none" w="med" len="med"/>
+                    </a:lnT>
+                    <a:lnB w="9525" cap="flat" cmpd="sng" algn="ctr">
+                      <a:solidFill>
+                        <a:srgbClr val="D5DCE4"/>
+                      </a:solidFill>
+                      <a:prstDash val="solid"/>
+                      <a:round/>
+                      <a:headEnd type="none" w="med" len="med"/>
+                      <a:tailEnd type="none" w="med" len="med"/>
+                    </a:lnB>
+                    <a:solidFill>
+                      <a:srgbClr val="0F2A44"/>
+                    </a:solidFill>
+                  </a:tcPr>
+                </a:tc>
+                <a:tc>
+                  <a:txBody>
+                    <a:bodyPr/>
+                    <a:lstStyle/>
+                    <a:p>
+                      <a:pPr indent="0" marL="0">
+                        <a:buNone/>
+                      </a:pPr>
+                      <a:r>
+                        <a:rPr lang="en-US" sz="1050" b="1" dirty="0">
+                          <a:solidFill>
+                            <a:srgbClr val="FFFFFF"/>
+                          </a:solidFill>
+                          <a:latin typeface="Microsoft YaHei" pitchFamily="34" charset="0"/>
+                          <a:ea typeface="Microsoft YaHei" pitchFamily="34" charset="-122"/>
+                          <a:cs typeface="Microsoft YaHei" pitchFamily="34" charset="-120"/>
+                        </a:rPr>
+                        <a:t>若存在“虚假共识”</a:t>
+                      </a:r>
+                      <a:endParaRPr lang="en-US" sz="1050" dirty="0">
+                        <a:latin typeface="Microsoft YaHei" charset="0"/>
+                        <a:ea typeface="Microsoft YaHei" charset="0"/>
+                        <a:cs typeface="Microsoft YaHei" charset="0"/>
+                      </a:endParaRPr>
+                    </a:p>
+                  </a:txBody>
+                  <a:tcPr marL="73152" marR="73152" marT="27432" marB="27432" anchor="ctr">
+                    <a:lnL w="9525" cap="flat" cmpd="sng" algn="ctr">
+                      <a:solidFill>
+                        <a:srgbClr val="D5DCE4"/>
+                      </a:solidFill>
+                      <a:prstDash val="solid"/>
+                      <a:round/>
+                      <a:headEnd type="none" w="med" len="med"/>
+                      <a:tailEnd type="none" w="med" len="med"/>
+                    </a:lnL>
+                    <a:lnR w="9525" cap="flat" cmpd="sng" algn="ctr">
+                      <a:solidFill>
+                        <a:srgbClr val="D5DCE4"/>
+                      </a:solidFill>
+                      <a:prstDash val="solid"/>
+                      <a:round/>
+                      <a:headEnd type="none" w="med" len="med"/>
+                      <a:tailEnd type="none" w="med" len="med"/>
+                    </a:lnR>
+                    <a:lnT w="9525" cap="flat" cmpd="sng" algn="ctr">
+                      <a:solidFill>
+                        <a:srgbClr val="D5DCE4"/>
+                      </a:solidFill>
+                      <a:prstDash val="solid"/>
+                      <a:round/>
+                      <a:headEnd type="none" w="med" len="med"/>
+                      <a:tailEnd type="none" w="med" len="med"/>
+                    </a:lnT>
+                    <a:lnB w="9525" cap="flat" cmpd="sng" algn="ctr">
+                      <a:solidFill>
+                        <a:srgbClr val="D5DCE4"/>
+                      </a:solidFill>
+                      <a:prstDash val="solid"/>
+                      <a:round/>
+                      <a:headEnd type="none" w="med" len="med"/>
+                      <a:tailEnd type="none" w="med" len="med"/>
+                    </a:lnB>
+                    <a:solidFill>
+                      <a:srgbClr val="0F2A44"/>
+                    </a:solidFill>
+                  </a:tcPr>
+                </a:tc>
+              </a:tr>
+              <a:tr h="347472">
+                <a:tc>
+                  <a:txBody>
+                    <a:bodyPr/>
+                    <a:lstStyle/>
+                    <a:p>
+                      <a:pPr indent="0" marL="0">
+                        <a:buNone/>
+                      </a:pPr>
+                      <a:r>
+                        <a:rPr lang="en-US" sz="1050" b="1" dirty="0">
+                          <a:solidFill>
+                            <a:srgbClr val="1B2533"/>
+                          </a:solidFill>
+                          <a:latin typeface="Microsoft YaHei" pitchFamily="34" charset="0"/>
+                          <a:ea typeface="Microsoft YaHei" pitchFamily="34" charset="-122"/>
+                          <a:cs typeface="Microsoft YaHei" pitchFamily="34" charset="-120"/>
+                        </a:rPr>
+                        <a:t>原始</a:t>
+                      </a:r>
+                      <a:endParaRPr lang="en-US" sz="1050" dirty="0">
+                        <a:latin typeface="Microsoft YaHei" charset="0"/>
+                        <a:ea typeface="Microsoft YaHei" charset="0"/>
+                        <a:cs typeface="Microsoft YaHei" charset="0"/>
+                      </a:endParaRPr>
+                    </a:p>
+                  </a:txBody>
+                  <a:tcPr marL="73152" marR="73152" marT="27432" marB="27432" anchor="ctr">
+                    <a:lnL w="9525" cap="flat" cmpd="sng" algn="ctr">
+                      <a:solidFill>
+                        <a:srgbClr val="D5DCE4"/>
+                      </a:solidFill>
+                      <a:prstDash val="solid"/>
+                      <a:round/>
+                      <a:headEnd type="none" w="med" len="med"/>
+                      <a:tailEnd type="none" w="med" len="med"/>
+                    </a:lnL>
+                    <a:lnR w="9525" cap="flat" cmpd="sng" algn="ctr">
+                      <a:solidFill>
+                        <a:srgbClr val="D5DCE4"/>
+                      </a:solidFill>
+                      <a:prstDash val="solid"/>
+                      <a:round/>
+                      <a:headEnd type="none" w="med" len="med"/>
+                      <a:tailEnd type="none" w="med" len="med"/>
+                    </a:lnR>
+                    <a:lnT w="9525" cap="flat" cmpd="sng" algn="ctr">
+                      <a:solidFill>
+                        <a:srgbClr val="D5DCE4"/>
+                      </a:solidFill>
+                      <a:prstDash val="solid"/>
+                      <a:round/>
+                      <a:headEnd type="none" w="med" len="med"/>
+                      <a:tailEnd type="none" w="med" len="med"/>
+                    </a:lnT>
+                    <a:lnB w="9525" cap="flat" cmpd="sng" algn="ctr">
+                      <a:solidFill>
+                        <a:srgbClr val="D5DCE4"/>
+                      </a:solidFill>
+                      <a:prstDash val="solid"/>
+                      <a:round/>
+                      <a:headEnd type="none" w="med" len="med"/>
+                      <a:tailEnd type="none" w="med" len="med"/>
+                    </a:lnB>
+                    <a:solidFill>
+                      <a:srgbClr val="FFFFFF"/>
+                    </a:solidFill>
+                  </a:tcPr>
+                </a:tc>
+                <a:tc>
+                  <a:txBody>
+                    <a:bodyPr/>
+                    <a:lstStyle/>
+                    <a:p>
+                      <a:pPr indent="0" marL="0">
+                        <a:buNone/>
+                      </a:pPr>
+                      <a:r>
+                        <a:rPr lang="en-US" sz="1050" dirty="0">
+                          <a:solidFill>
+                            <a:srgbClr val="1B2533"/>
+                          </a:solidFill>
+                          <a:latin typeface="Microsoft YaHei" pitchFamily="34" charset="0"/>
+                          <a:ea typeface="Microsoft YaHei" pitchFamily="34" charset="-122"/>
+                          <a:cs typeface="Microsoft YaHei" pitchFamily="34" charset="-120"/>
+                        </a:rPr>
+                        <a:t>检索结果原样</a:t>
+                      </a:r>
+                      <a:endParaRPr lang="en-US" sz="1050" dirty="0">
+                        <a:latin typeface="Microsoft YaHei" charset="0"/>
+                        <a:ea typeface="Microsoft YaHei" charset="0"/>
+                        <a:cs typeface="Microsoft YaHei" charset="0"/>
+                      </a:endParaRPr>
+                    </a:p>
+                  </a:txBody>
+                  <a:tcPr marL="73152" marR="73152" marT="27432" marB="27432" anchor="ctr">
+                    <a:lnL w="9525" cap="flat" cmpd="sng" algn="ctr">
+                      <a:solidFill>
+                        <a:srgbClr val="D5DCE4"/>
+                      </a:solidFill>
+                      <a:prstDash val="solid"/>
+                      <a:round/>
+                      <a:headEnd type="none" w="med" len="med"/>
+                      <a:tailEnd type="none" w="med" len="med"/>
+                    </a:lnL>
+                    <a:lnR w="9525" cap="flat" cmpd="sng" algn="ctr">
+                      <a:solidFill>
+                        <a:srgbClr val="D5DCE4"/>
+                      </a:solidFill>
+                      <a:prstDash val="solid"/>
+                      <a:round/>
+                      <a:headEnd type="none" w="med" len="med"/>
+                      <a:tailEnd type="none" w="med" len="med"/>
+                    </a:lnR>
+                    <a:lnT w="9525" cap="flat" cmpd="sng" algn="ctr">
+                      <a:solidFill>
+                        <a:srgbClr val="D5DCE4"/>
+                      </a:solidFill>
+                      <a:prstDash val="solid"/>
+                      <a:round/>
+                      <a:headEnd type="none" w="med" len="med"/>
+                      <a:tailEnd type="none" w="med" len="med"/>
+                    </a:lnT>
+                    <a:lnB w="9525" cap="flat" cmpd="sng" algn="ctr">
+                      <a:solidFill>
+                        <a:srgbClr val="D5DCE4"/>
+                      </a:solidFill>
+                      <a:prstDash val="solid"/>
+                      <a:round/>
+                      <a:headEnd type="none" w="med" len="med"/>
+                      <a:tailEnd type="none" w="med" len="med"/>
+                    </a:lnB>
+                    <a:solidFill>
+                      <a:srgbClr val="FFFFFF"/>
+                    </a:solidFill>
+                  </a:tcPr>
+                </a:tc>
+                <a:tc>
+                  <a:txBody>
+                    <a:bodyPr/>
+                    <a:lstStyle/>
+                    <a:p>
+                      <a:pPr indent="0" marL="0">
+                        <a:buNone/>
+                      </a:pPr>
+                      <a:r>
+                        <a:rPr lang="en-US" sz="1050" dirty="0">
+                          <a:solidFill>
+                            <a:srgbClr val="1B2533"/>
+                          </a:solidFill>
+                          <a:latin typeface="Microsoft YaHei" pitchFamily="34" charset="0"/>
+                          <a:ea typeface="Microsoft YaHei" pitchFamily="34" charset="-122"/>
+                          <a:cs typeface="Microsoft YaHei" pitchFamily="34" charset="-120"/>
+                        </a:rPr>
+                        <a:t>基准</a:t>
+                      </a:r>
+                      <a:endParaRPr lang="en-US" sz="1050" dirty="0">
+                        <a:latin typeface="Microsoft YaHei" charset="0"/>
+                        <a:ea typeface="Microsoft YaHei" charset="0"/>
+                        <a:cs typeface="Microsoft YaHei" charset="0"/>
+                      </a:endParaRPr>
+                    </a:p>
+                  </a:txBody>
+                  <a:tcPr marL="73152" marR="73152" marT="27432" marB="27432" anchor="ctr">
+                    <a:lnL w="9525" cap="flat" cmpd="sng" algn="ctr">
+                      <a:solidFill>
+                        <a:srgbClr val="D5DCE4"/>
+                      </a:solidFill>
+                      <a:prstDash val="solid"/>
+                      <a:round/>
+                      <a:headEnd type="none" w="med" len="med"/>
+                      <a:tailEnd type="none" w="med" len="med"/>
+                    </a:lnL>
+                    <a:lnR w="9525" cap="flat" cmpd="sng" algn="ctr">
+                      <a:solidFill>
+                        <a:srgbClr val="D5DCE4"/>
+                      </a:solidFill>
+                      <a:prstDash val="solid"/>
+                      <a:round/>
+                      <a:headEnd type="none" w="med" len="med"/>
+                      <a:tailEnd type="none" w="med" len="med"/>
+                    </a:lnR>
+                    <a:lnT w="9525" cap="flat" cmpd="sng" algn="ctr">
+                      <a:solidFill>
+                        <a:srgbClr val="D5DCE4"/>
+                      </a:solidFill>
+                      <a:prstDash val="solid"/>
+                      <a:round/>
+                      <a:headEnd type="none" w="med" len="med"/>
+                      <a:tailEnd type="none" w="med" len="med"/>
+                    </a:lnT>
+                    <a:lnB w="9525" cap="flat" cmpd="sng" algn="ctr">
+                      <a:solidFill>
+                        <a:srgbClr val="D5DCE4"/>
+                      </a:solidFill>
+                      <a:prstDash val="solid"/>
+                      <a:round/>
+                      <a:headEnd type="none" w="med" len="med"/>
+                      <a:tailEnd type="none" w="med" len="med"/>
+                    </a:lnB>
+                    <a:solidFill>
+                      <a:srgbClr val="FFFFFF"/>
+                    </a:solidFill>
+                  </a:tcPr>
+                </a:tc>
+              </a:tr>
+              <a:tr h="347472">
+                <a:tc>
+                  <a:txBody>
+                    <a:bodyPr/>
+                    <a:lstStyle/>
+                    <a:p>
+                      <a:pPr indent="0" marL="0">
+                        <a:buNone/>
+                      </a:pPr>
+                      <a:r>
+                        <a:rPr lang="en-US" sz="1050" b="1" dirty="0">
+                          <a:solidFill>
+                            <a:srgbClr val="1B2533"/>
+                          </a:solidFill>
+                          <a:latin typeface="Microsoft YaHei" pitchFamily="34" charset="0"/>
+                          <a:ea typeface="Microsoft YaHei" pitchFamily="34" charset="-122"/>
+                          <a:cs typeface="Microsoft YaHei" pitchFamily="34" charset="-120"/>
+                        </a:rPr>
+                        <a:t>标注来源</a:t>
+                      </a:r>
+                      <a:endParaRPr lang="en-US" sz="1050" dirty="0">
+                        <a:latin typeface="Microsoft YaHei" charset="0"/>
+                        <a:ea typeface="Microsoft YaHei" charset="0"/>
+                        <a:cs typeface="Microsoft YaHei" charset="0"/>
+                      </a:endParaRPr>
+                    </a:p>
+                  </a:txBody>
+                  <a:tcPr marL="73152" marR="73152" marT="27432" marB="27432" anchor="ctr">
+                    <a:lnL w="9525" cap="flat" cmpd="sng" algn="ctr">
+                      <a:solidFill>
+                        <a:srgbClr val="D5DCE4"/>
+                      </a:solidFill>
+                      <a:prstDash val="solid"/>
+                      <a:round/>
+                      <a:headEnd type="none" w="med" len="med"/>
+                      <a:tailEnd type="none" w="med" len="med"/>
+                    </a:lnL>
+                    <a:lnR w="9525" cap="flat" cmpd="sng" algn="ctr">
+                      <a:solidFill>
+                        <a:srgbClr val="D5DCE4"/>
+                      </a:solidFill>
+                      <a:prstDash val="solid"/>
+                      <a:round/>
+                      <a:headEnd type="none" w="med" len="med"/>
+                      <a:tailEnd type="none" w="med" len="med"/>
+                    </a:lnR>
+                    <a:lnT w="9525" cap="flat" cmpd="sng" algn="ctr">
+                      <a:solidFill>
+                        <a:srgbClr val="D5DCE4"/>
+                      </a:solidFill>
+                      <a:prstDash val="solid"/>
+                      <a:round/>
+                      <a:headEnd type="none" w="med" len="med"/>
+                      <a:tailEnd type="none" w="med" len="med"/>
+                    </a:lnT>
+                    <a:lnB w="9525" cap="flat" cmpd="sng" algn="ctr">
+                      <a:solidFill>
+                        <a:srgbClr val="D5DCE4"/>
+                      </a:solidFill>
+                      <a:prstDash val="solid"/>
+                      <a:round/>
+                      <a:headEnd type="none" w="med" len="med"/>
+                      <a:tailEnd type="none" w="med" len="med"/>
+                    </a:lnB>
+                    <a:solidFill>
+                      <a:srgbClr val="FFFFFF"/>
+                    </a:solidFill>
+                  </a:tcPr>
+                </a:tc>
+                <a:tc>
+                  <a:txBody>
+                    <a:bodyPr/>
+                    <a:lstStyle/>
+                    <a:p>
+                      <a:pPr indent="0" marL="0">
+                        <a:buNone/>
+                      </a:pPr>
+                      <a:r>
+                        <a:rPr lang="en-US" sz="1050" dirty="0">
+                          <a:solidFill>
+                            <a:srgbClr val="1B2533"/>
+                          </a:solidFill>
+                          <a:latin typeface="Microsoft YaHei" pitchFamily="34" charset="0"/>
+                          <a:ea typeface="Microsoft YaHei" pitchFamily="34" charset="-122"/>
+                          <a:cs typeface="Microsoft YaHei" pitchFamily="34" charset="-120"/>
+                        </a:rPr>
+                        <a:t>同上，标明同源论文</a:t>
+                      </a:r>
+                      <a:endParaRPr lang="en-US" sz="1050" dirty="0">
+                        <a:latin typeface="Microsoft YaHei" charset="0"/>
+                        <a:ea typeface="Microsoft YaHei" charset="0"/>
+                        <a:cs typeface="Microsoft YaHei" charset="0"/>
+                      </a:endParaRPr>
+                    </a:p>
+                  </a:txBody>
+                  <a:tcPr marL="73152" marR="73152" marT="27432" marB="27432" anchor="ctr">
+                    <a:lnL w="9525" cap="flat" cmpd="sng" algn="ctr">
+                      <a:solidFill>
+                        <a:srgbClr val="D5DCE4"/>
+                      </a:solidFill>
+                      <a:prstDash val="solid"/>
+                      <a:round/>
+                      <a:headEnd type="none" w="med" len="med"/>
+                      <a:tailEnd type="none" w="med" len="med"/>
+                    </a:lnL>
+                    <a:lnR w="9525" cap="flat" cmpd="sng" algn="ctr">
+                      <a:solidFill>
+                        <a:srgbClr val="D5DCE4"/>
+                      </a:solidFill>
+                      <a:prstDash val="solid"/>
+                      <a:round/>
+                      <a:headEnd type="none" w="med" len="med"/>
+                      <a:tailEnd type="none" w="med" len="med"/>
+                    </a:lnR>
+                    <a:lnT w="9525" cap="flat" cmpd="sng" algn="ctr">
+                      <a:solidFill>
+                        <a:srgbClr val="D5DCE4"/>
+                      </a:solidFill>
+                      <a:prstDash val="solid"/>
+                      <a:round/>
+                      <a:headEnd type="none" w="med" len="med"/>
+                      <a:tailEnd type="none" w="med" len="med"/>
+                    </a:lnT>
+                    <a:lnB w="9525" cap="flat" cmpd="sng" algn="ctr">
+                      <a:solidFill>
+                        <a:srgbClr val="D5DCE4"/>
+                      </a:solidFill>
+                      <a:prstDash val="solid"/>
+                      <a:round/>
+                      <a:headEnd type="none" w="med" len="med"/>
+                      <a:tailEnd type="none" w="med" len="med"/>
+                    </a:lnB>
+                    <a:solidFill>
+                      <a:srgbClr val="FFFFFF"/>
+                    </a:solidFill>
+                  </a:tcPr>
+                </a:tc>
+                <a:tc>
+                  <a:txBody>
+                    <a:bodyPr/>
+                    <a:lstStyle/>
+                    <a:p>
+                      <a:pPr indent="0" marL="0">
+                        <a:buNone/>
+                      </a:pPr>
+                      <a:r>
+                        <a:rPr lang="en-US" sz="1050" dirty="0">
+                          <a:solidFill>
+                            <a:srgbClr val="1B2533"/>
+                          </a:solidFill>
+                          <a:latin typeface="Microsoft YaHei" pitchFamily="34" charset="0"/>
+                          <a:ea typeface="Microsoft YaHei" pitchFamily="34" charset="-122"/>
+                          <a:cs typeface="Microsoft YaHei" pitchFamily="34" charset="-120"/>
+                        </a:rPr>
+                        <a:t>概率回落</a:t>
+                      </a:r>
+                      <a:endParaRPr lang="en-US" sz="1050" dirty="0">
+                        <a:latin typeface="Microsoft YaHei" charset="0"/>
+                        <a:ea typeface="Microsoft YaHei" charset="0"/>
+                        <a:cs typeface="Microsoft YaHei" charset="0"/>
+                      </a:endParaRPr>
+                    </a:p>
+                  </a:txBody>
+                  <a:tcPr marL="73152" marR="73152" marT="27432" marB="27432" anchor="ctr">
+                    <a:lnL w="9525" cap="flat" cmpd="sng" algn="ctr">
+                      <a:solidFill>
+                        <a:srgbClr val="D5DCE4"/>
+                      </a:solidFill>
+                      <a:prstDash val="solid"/>
+                      <a:round/>
+                      <a:headEnd type="none" w="med" len="med"/>
+                      <a:tailEnd type="none" w="med" len="med"/>
+                    </a:lnL>
+                    <a:lnR w="9525" cap="flat" cmpd="sng" algn="ctr">
+                      <a:solidFill>
+                        <a:srgbClr val="D5DCE4"/>
+                      </a:solidFill>
+                      <a:prstDash val="solid"/>
+                      <a:round/>
+                      <a:headEnd type="none" w="med" len="med"/>
+                      <a:tailEnd type="none" w="med" len="med"/>
+                    </a:lnR>
+                    <a:lnT w="9525" cap="flat" cmpd="sng" algn="ctr">
+                      <a:solidFill>
+                        <a:srgbClr val="D5DCE4"/>
+                      </a:solidFill>
+                      <a:prstDash val="solid"/>
+                      <a:round/>
+                      <a:headEnd type="none" w="med" len="med"/>
+                      <a:tailEnd type="none" w="med" len="med"/>
+                    </a:lnT>
+                    <a:lnB w="9525" cap="flat" cmpd="sng" algn="ctr">
+                      <a:solidFill>
+                        <a:srgbClr val="D5DCE4"/>
+                      </a:solidFill>
+                      <a:prstDash val="solid"/>
+                      <a:round/>
+                      <a:headEnd type="none" w="med" len="med"/>
+                      <a:tailEnd type="none" w="med" len="med"/>
+                    </a:lnB>
+                    <a:solidFill>
+                      <a:srgbClr val="FFFFFF"/>
+                    </a:solidFill>
+                  </a:tcPr>
+                </a:tc>
+              </a:tr>
+              <a:tr h="347472">
+                <a:tc>
+                  <a:txBody>
+                    <a:bodyPr/>
+                    <a:lstStyle/>
+                    <a:p>
+                      <a:pPr indent="0" marL="0">
+                        <a:buNone/>
+                      </a:pPr>
+                      <a:r>
+                        <a:rPr lang="en-US" sz="1050" b="1" dirty="0">
+                          <a:solidFill>
+                            <a:srgbClr val="1B2533"/>
+                          </a:solidFill>
+                          <a:latin typeface="Microsoft YaHei" pitchFamily="34" charset="0"/>
+                          <a:ea typeface="Microsoft YaHei" pitchFamily="34" charset="-122"/>
+                          <a:cs typeface="Microsoft YaHei" pitchFamily="34" charset="-120"/>
+                        </a:rPr>
+                        <a:t>去重</a:t>
+                      </a:r>
+                      <a:endParaRPr lang="en-US" sz="1050" dirty="0">
+                        <a:latin typeface="Microsoft YaHei" charset="0"/>
+                        <a:ea typeface="Microsoft YaHei" charset="0"/>
+                        <a:cs typeface="Microsoft YaHei" charset="0"/>
+                      </a:endParaRPr>
+                    </a:p>
+                  </a:txBody>
+                  <a:tcPr marL="73152" marR="73152" marT="27432" marB="27432" anchor="ctr">
+                    <a:lnL w="9525" cap="flat" cmpd="sng" algn="ctr">
+                      <a:solidFill>
+                        <a:srgbClr val="D5DCE4"/>
+                      </a:solidFill>
+                      <a:prstDash val="solid"/>
+                      <a:round/>
+                      <a:headEnd type="none" w="med" len="med"/>
+                      <a:tailEnd type="none" w="med" len="med"/>
+                    </a:lnL>
+                    <a:lnR w="9525" cap="flat" cmpd="sng" algn="ctr">
+                      <a:solidFill>
+                        <a:srgbClr val="D5DCE4"/>
+                      </a:solidFill>
+                      <a:prstDash val="solid"/>
+                      <a:round/>
+                      <a:headEnd type="none" w="med" len="med"/>
+                      <a:tailEnd type="none" w="med" len="med"/>
+                    </a:lnR>
+                    <a:lnT w="9525" cap="flat" cmpd="sng" algn="ctr">
+                      <a:solidFill>
+                        <a:srgbClr val="D5DCE4"/>
+                      </a:solidFill>
+                      <a:prstDash val="solid"/>
+                      <a:round/>
+                      <a:headEnd type="none" w="med" len="med"/>
+                      <a:tailEnd type="none" w="med" len="med"/>
+                    </a:lnT>
+                    <a:lnB w="9525" cap="flat" cmpd="sng" algn="ctr">
+                      <a:solidFill>
+                        <a:srgbClr val="D5DCE4"/>
+                      </a:solidFill>
+                      <a:prstDash val="solid"/>
+                      <a:round/>
+                      <a:headEnd type="none" w="med" len="med"/>
+                      <a:tailEnd type="none" w="med" len="med"/>
+                    </a:lnB>
+                    <a:solidFill>
+                      <a:srgbClr val="FFFFFF"/>
+                    </a:solidFill>
+                  </a:tcPr>
+                </a:tc>
+                <a:tc>
+                  <a:txBody>
+                    <a:bodyPr/>
+                    <a:lstStyle/>
+                    <a:p>
+                      <a:pPr indent="0" marL="0">
+                        <a:buNone/>
+                      </a:pPr>
+                      <a:r>
+                        <a:rPr lang="en-US" sz="1050" dirty="0">
+                          <a:solidFill>
+                            <a:srgbClr val="1B2533"/>
+                          </a:solidFill>
+                          <a:latin typeface="Microsoft YaHei" pitchFamily="34" charset="0"/>
+                          <a:ea typeface="Microsoft YaHei" pitchFamily="34" charset="-122"/>
+                          <a:cs typeface="Microsoft YaHei" pitchFamily="34" charset="-120"/>
+                        </a:rPr>
+                        <a:t>每个试验只留 1 篇</a:t>
+                      </a:r>
+                      <a:endParaRPr lang="en-US" sz="1050" dirty="0">
+                        <a:latin typeface="Microsoft YaHei" charset="0"/>
+                        <a:ea typeface="Microsoft YaHei" charset="0"/>
+                        <a:cs typeface="Microsoft YaHei" charset="0"/>
+                      </a:endParaRPr>
+                    </a:p>
+                  </a:txBody>
+                  <a:tcPr marL="73152" marR="73152" marT="27432" marB="27432" anchor="ctr">
+                    <a:lnL w="9525" cap="flat" cmpd="sng" algn="ctr">
+                      <a:solidFill>
+                        <a:srgbClr val="D5DCE4"/>
+                      </a:solidFill>
+                      <a:prstDash val="solid"/>
+                      <a:round/>
+                      <a:headEnd type="none" w="med" len="med"/>
+                      <a:tailEnd type="none" w="med" len="med"/>
+                    </a:lnL>
+                    <a:lnR w="9525" cap="flat" cmpd="sng" algn="ctr">
+                      <a:solidFill>
+                        <a:srgbClr val="D5DCE4"/>
+                      </a:solidFill>
+                      <a:prstDash val="solid"/>
+                      <a:round/>
+                      <a:headEnd type="none" w="med" len="med"/>
+                      <a:tailEnd type="none" w="med" len="med"/>
+                    </a:lnR>
+                    <a:lnT w="9525" cap="flat" cmpd="sng" algn="ctr">
+                      <a:solidFill>
+                        <a:srgbClr val="D5DCE4"/>
+                      </a:solidFill>
+                      <a:prstDash val="solid"/>
+                      <a:round/>
+                      <a:headEnd type="none" w="med" len="med"/>
+                      <a:tailEnd type="none" w="med" len="med"/>
+                    </a:lnT>
+                    <a:lnB w="9525" cap="flat" cmpd="sng" algn="ctr">
+                      <a:solidFill>
+                        <a:srgbClr val="D5DCE4"/>
+                      </a:solidFill>
+                      <a:prstDash val="solid"/>
+                      <a:round/>
+                      <a:headEnd type="none" w="med" len="med"/>
+                      <a:tailEnd type="none" w="med" len="med"/>
+                    </a:lnB>
+                    <a:solidFill>
+                      <a:srgbClr val="FFFFFF"/>
+                    </a:solidFill>
+                  </a:tcPr>
+                </a:tc>
+                <a:tc>
+                  <a:txBody>
+                    <a:bodyPr/>
+                    <a:lstStyle/>
+                    <a:p>
+                      <a:pPr indent="0" marL="0">
+                        <a:buNone/>
+                      </a:pPr>
+                      <a:r>
+                        <a:rPr lang="en-US" sz="1050" dirty="0">
+                          <a:solidFill>
+                            <a:srgbClr val="1B2533"/>
+                          </a:solidFill>
+                          <a:latin typeface="Microsoft YaHei" pitchFamily="34" charset="0"/>
+                          <a:ea typeface="Microsoft YaHei" pitchFamily="34" charset="-122"/>
+                          <a:cs typeface="Microsoft YaHei" pitchFamily="34" charset="-120"/>
+                        </a:rPr>
+                        <a:t>概率回落</a:t>
+                      </a:r>
+                      <a:endParaRPr lang="en-US" sz="1050" dirty="0">
+                        <a:latin typeface="Microsoft YaHei" charset="0"/>
+                        <a:ea typeface="Microsoft YaHei" charset="0"/>
+                        <a:cs typeface="Microsoft YaHei" charset="0"/>
+                      </a:endParaRPr>
+                    </a:p>
+                  </a:txBody>
+                  <a:tcPr marL="73152" marR="73152" marT="27432" marB="27432" anchor="ctr">
+                    <a:lnL w="9525" cap="flat" cmpd="sng" algn="ctr">
+                      <a:solidFill>
+                        <a:srgbClr val="D5DCE4"/>
+                      </a:solidFill>
+                      <a:prstDash val="solid"/>
+                      <a:round/>
+                      <a:headEnd type="none" w="med" len="med"/>
+                      <a:tailEnd type="none" w="med" len="med"/>
+                    </a:lnL>
+                    <a:lnR w="9525" cap="flat" cmpd="sng" algn="ctr">
+                      <a:solidFill>
+                        <a:srgbClr val="D5DCE4"/>
+                      </a:solidFill>
+                      <a:prstDash val="solid"/>
+                      <a:round/>
+                      <a:headEnd type="none" w="med" len="med"/>
+                      <a:tailEnd type="none" w="med" len="med"/>
+                    </a:lnR>
+                    <a:lnT w="9525" cap="flat" cmpd="sng" algn="ctr">
+                      <a:solidFill>
+                        <a:srgbClr val="D5DCE4"/>
+                      </a:solidFill>
+                      <a:prstDash val="solid"/>
+                      <a:round/>
+                      <a:headEnd type="none" w="med" len="med"/>
+                      <a:tailEnd type="none" w="med" len="med"/>
+                    </a:lnT>
+                    <a:lnB w="9525" cap="flat" cmpd="sng" algn="ctr">
+                      <a:solidFill>
+                        <a:srgbClr val="D5DCE4"/>
+                      </a:solidFill>
+                      <a:prstDash val="solid"/>
+                      <a:round/>
+                      <a:headEnd type="none" w="med" len="med"/>
+                      <a:tailEnd type="none" w="med" len="med"/>
+                    </a:lnB>
+                    <a:solidFill>
+                      <a:srgbClr val="FFFFFF"/>
+                    </a:solidFill>
+                  </a:tcPr>
+                </a:tc>
+              </a:tr>
+              <a:tr h="411480">
+                <a:tc>
+                  <a:txBody>
+                    <a:bodyPr/>
+                    <a:lstStyle/>
+                    <a:p>
+                      <a:pPr indent="0" marL="0">
+                        <a:buNone/>
+                      </a:pPr>
+                      <a:r>
+                        <a:rPr lang="en-US" sz="1050" b="1" dirty="0">
+                          <a:solidFill>
+                            <a:srgbClr val="1B2533"/>
+                          </a:solidFill>
+                          <a:latin typeface="Microsoft YaHei" pitchFamily="34" charset="0"/>
+                          <a:ea typeface="Microsoft YaHei" pitchFamily="34" charset="-122"/>
+                          <a:cs typeface="Microsoft YaHei" pitchFamily="34" charset="-120"/>
+                        </a:rPr>
+                        <a:t>加量</a:t>
+                      </a:r>
+                      <a:endParaRPr lang="en-US" sz="1050" dirty="0">
+                        <a:latin typeface="Microsoft YaHei" charset="0"/>
+                        <a:ea typeface="Microsoft YaHei" charset="0"/>
+                        <a:cs typeface="Microsoft YaHei" charset="0"/>
+                      </a:endParaRPr>
+                    </a:p>
+                  </a:txBody>
+                  <a:tcPr marL="73152" marR="73152" marT="27432" marB="27432" anchor="ctr">
+                    <a:lnL w="9525" cap="flat" cmpd="sng" algn="ctr">
+                      <a:solidFill>
+                        <a:srgbClr val="D5DCE4"/>
+                      </a:solidFill>
+                      <a:prstDash val="solid"/>
+                      <a:round/>
+                      <a:headEnd type="none" w="med" len="med"/>
+                      <a:tailEnd type="none" w="med" len="med"/>
+                    </a:lnL>
+                    <a:lnR w="9525" cap="flat" cmpd="sng" algn="ctr">
+                      <a:solidFill>
+                        <a:srgbClr val="D5DCE4"/>
+                      </a:solidFill>
+                      <a:prstDash val="solid"/>
+                      <a:round/>
+                      <a:headEnd type="none" w="med" len="med"/>
+                      <a:tailEnd type="none" w="med" len="med"/>
+                    </a:lnR>
+                    <a:lnT w="9525" cap="flat" cmpd="sng" algn="ctr">
+                      <a:solidFill>
+                        <a:srgbClr val="D5DCE4"/>
+                      </a:solidFill>
+                      <a:prstDash val="solid"/>
+                      <a:round/>
+                      <a:headEnd type="none" w="med" len="med"/>
+                      <a:tailEnd type="none" w="med" len="med"/>
+                    </a:lnT>
+                    <a:lnB w="9525" cap="flat" cmpd="sng" algn="ctr">
+                      <a:solidFill>
+                        <a:srgbClr val="D5DCE4"/>
+                      </a:solidFill>
+                      <a:prstDash val="solid"/>
+                      <a:round/>
+                      <a:headEnd type="none" w="med" len="med"/>
+                      <a:tailEnd type="none" w="med" len="med"/>
+                    </a:lnB>
+                    <a:solidFill>
+                      <a:srgbClr val="FFFFFF"/>
+                    </a:solidFill>
+                  </a:tcPr>
+                </a:tc>
+                <a:tc>
+                  <a:txBody>
+                    <a:bodyPr/>
+                    <a:lstStyle/>
+                    <a:p>
+                      <a:pPr indent="0" marL="0">
+                        <a:buNone/>
+                      </a:pPr>
+                      <a:r>
+                        <a:rPr lang="en-US" sz="1050" dirty="0">
+                          <a:solidFill>
+                            <a:srgbClr val="1B2533"/>
+                          </a:solidFill>
+                          <a:latin typeface="Microsoft YaHei" pitchFamily="34" charset="0"/>
+                          <a:ea typeface="Microsoft YaHei" pitchFamily="34" charset="-122"/>
+                          <a:cs typeface="Microsoft YaHei" pitchFamily="34" charset="-120"/>
+                        </a:rPr>
+                        <a:t>去重后再加 3 / 6 篇同一试验论文</a:t>
+                      </a:r>
+                      <a:endParaRPr lang="en-US" sz="1050" dirty="0">
+                        <a:latin typeface="Microsoft YaHei" charset="0"/>
+                        <a:ea typeface="Microsoft YaHei" charset="0"/>
+                        <a:cs typeface="Microsoft YaHei" charset="0"/>
+                      </a:endParaRPr>
+                    </a:p>
+                  </a:txBody>
+                  <a:tcPr marL="73152" marR="73152" marT="27432" marB="27432" anchor="ctr">
+                    <a:lnL w="9525" cap="flat" cmpd="sng" algn="ctr">
+                      <a:solidFill>
+                        <a:srgbClr val="D5DCE4"/>
+                      </a:solidFill>
+                      <a:prstDash val="solid"/>
+                      <a:round/>
+                      <a:headEnd type="none" w="med" len="med"/>
+                      <a:tailEnd type="none" w="med" len="med"/>
+                    </a:lnL>
+                    <a:lnR w="9525" cap="flat" cmpd="sng" algn="ctr">
+                      <a:solidFill>
+                        <a:srgbClr val="D5DCE4"/>
+                      </a:solidFill>
+                      <a:prstDash val="solid"/>
+                      <a:round/>
+                      <a:headEnd type="none" w="med" len="med"/>
+                      <a:tailEnd type="none" w="med" len="med"/>
+                    </a:lnR>
+                    <a:lnT w="9525" cap="flat" cmpd="sng" algn="ctr">
+                      <a:solidFill>
+                        <a:srgbClr val="D5DCE4"/>
+                      </a:solidFill>
+                      <a:prstDash val="solid"/>
+                      <a:round/>
+                      <a:headEnd type="none" w="med" len="med"/>
+                      <a:tailEnd type="none" w="med" len="med"/>
+                    </a:lnT>
+                    <a:lnB w="9525" cap="flat" cmpd="sng" algn="ctr">
+                      <a:solidFill>
+                        <a:srgbClr val="D5DCE4"/>
+                      </a:solidFill>
+                      <a:prstDash val="solid"/>
+                      <a:round/>
+                      <a:headEnd type="none" w="med" len="med"/>
+                      <a:tailEnd type="none" w="med" len="med"/>
+                    </a:lnB>
+                    <a:solidFill>
+                      <a:srgbClr val="FFFFFF"/>
+                    </a:solidFill>
+                  </a:tcPr>
+                </a:tc>
+                <a:tc>
+                  <a:txBody>
+                    <a:bodyPr/>
+                    <a:lstStyle/>
+                    <a:p>
+                      <a:pPr indent="0" marL="0">
+                        <a:buNone/>
+                      </a:pPr>
+                      <a:r>
+                        <a:rPr lang="en-US" sz="1050" dirty="0">
+                          <a:solidFill>
+                            <a:srgbClr val="1B2533"/>
+                          </a:solidFill>
+                          <a:latin typeface="Microsoft YaHei" pitchFamily="34" charset="0"/>
+                          <a:ea typeface="Microsoft YaHei" pitchFamily="34" charset="-122"/>
+                          <a:cs typeface="Microsoft YaHei" pitchFamily="34" charset="-120"/>
+                        </a:rPr>
+                        <a:t>篇数越多，概率越高</a:t>
+                      </a:r>
+                      <a:endParaRPr lang="en-US" sz="1050" dirty="0">
+                        <a:latin typeface="Microsoft YaHei" charset="0"/>
+                        <a:ea typeface="Microsoft YaHei" charset="0"/>
+                        <a:cs typeface="Microsoft YaHei" charset="0"/>
+                      </a:endParaRPr>
+                    </a:p>
+                  </a:txBody>
+                  <a:tcPr marL="73152" marR="73152" marT="27432" marB="27432" anchor="ctr">
+                    <a:lnL w="9525" cap="flat" cmpd="sng" algn="ctr">
+                      <a:solidFill>
+                        <a:srgbClr val="D5DCE4"/>
+                      </a:solidFill>
+                      <a:prstDash val="solid"/>
+                      <a:round/>
+                      <a:headEnd type="none" w="med" len="med"/>
+                      <a:tailEnd type="none" w="med" len="med"/>
+                    </a:lnL>
+                    <a:lnR w="9525" cap="flat" cmpd="sng" algn="ctr">
+                      <a:solidFill>
+                        <a:srgbClr val="D5DCE4"/>
+                      </a:solidFill>
+                      <a:prstDash val="solid"/>
+                      <a:round/>
+                      <a:headEnd type="none" w="med" len="med"/>
+                      <a:tailEnd type="none" w="med" len="med"/>
+                    </a:lnR>
+                    <a:lnT w="9525" cap="flat" cmpd="sng" algn="ctr">
+                      <a:solidFill>
+                        <a:srgbClr val="D5DCE4"/>
+                      </a:solidFill>
+                      <a:prstDash val="solid"/>
+                      <a:round/>
+                      <a:headEnd type="none" w="med" len="med"/>
+                      <a:tailEnd type="none" w="med" len="med"/>
+                    </a:lnT>
+                    <a:lnB w="9525" cap="flat" cmpd="sng" algn="ctr">
+                      <a:solidFill>
+                        <a:srgbClr val="D5DCE4"/>
+                      </a:solidFill>
+                      <a:prstDash val="solid"/>
+                      <a:round/>
+                      <a:headEnd type="none" w="med" len="med"/>
+                      <a:tailEnd type="none" w="med" len="med"/>
+                    </a:lnB>
+                    <a:solidFill>
+                      <a:srgbClr val="FFFFFF"/>
+                    </a:solidFill>
+                  </a:tcPr>
+                </a:tc>
+              </a:tr>
+            </a:tbl>
+          </a:graphicData>
+        </a:graphic>
+      </p:graphicFrame>
+      <p:sp>
+        <p:nvSpPr>
+          <p:cNvPr id="20" name="box-166"/>
           <p:cNvSpPr/>
           <p:nvPr/>
         </p:nvSpPr>
         <p:spPr>
           <a:xfrm>
-            <a:off x="8839048" y="3072384"/>
-            <a:ext cx="1783555" cy="164592"/>
-          </a:xfrm>
-          <a:prstGeom prst="rect">
-            <a:avLst/>
-          </a:prstGeom>
-          <a:solidFill>
-            <a:srgbClr val="B4BFCC"/>
-          </a:solidFill>
-          <a:ln w="12700">
-            <a:solidFill>
-              <a:srgbClr val="B4BFCC"/>
-            </a:solidFill>
-            <a:prstDash val="solid"/>
-          </a:ln>
-        </p:spPr>
-      </p:sp>
-      <p:sp>
-        <p:nvSpPr>
-          <p:cNvPr id="22" name="label-172"/>
-          <p:cNvSpPr txBox="1"/>
-          <p:nvPr/>
-        </p:nvSpPr>
-        <p:spPr>
-          <a:xfrm>
-            <a:off x="10668323" y="3017520"/>
-            <a:ext cx="457200" cy="237744"/>
-          </a:xfrm>
-          <a:prstGeom prst="rect">
-            <a:avLst/>
-          </a:prstGeom>
-          <a:noFill/>
-          <a:ln/>
-        </p:spPr>
-        <p:txBody>
-          <a:bodyPr wrap="square" lIns="0" tIns="0" rIns="0" bIns="0" rtlCol="0" anchor="ctr"/>
-          <a:lstStyle/>
-          <a:p>
-            <a:pPr algn="l" indent="0" marL="0">
-              <a:buNone/>
-            </a:pPr>
-            <a:r>
-              <a:rPr lang="en-US" sz="950" b="1" dirty="0">
-                <a:solidFill>
-                  <a:schemeClr val="tx1"/>
-                </a:solidFill>
-              </a:rPr>
-              <a:t>88%</a:t>
-            </a:r>
-            <a:endParaRPr lang="en-US" sz="950" dirty="0"/>
-          </a:p>
-        </p:txBody>
-      </p:sp>
-      <p:sp>
-        <p:nvSpPr>
-          <p:cNvPr id="23" name="bar-173"/>
-          <p:cNvSpPr/>
-          <p:nvPr/>
-        </p:nvSpPr>
-        <p:spPr>
-          <a:xfrm>
-            <a:off x="8839048" y="3282696"/>
-            <a:ext cx="1641682" cy="164592"/>
-          </a:xfrm>
-          <a:prstGeom prst="rect">
-            <a:avLst/>
-          </a:prstGeom>
-          <a:solidFill>
-            <a:srgbClr val="B4BFCC">
-              <a:alpha val="45000"/>
-            </a:srgbClr>
-          </a:solidFill>
-          <a:ln w="12700">
-            <a:solidFill>
-              <a:srgbClr val="B4BFCC">
-                <a:alpha val="45000"/>
-              </a:srgbClr>
-            </a:solidFill>
-            <a:prstDash val="solid"/>
-          </a:ln>
-        </p:spPr>
-      </p:sp>
-      <p:sp>
-        <p:nvSpPr>
-          <p:cNvPr id="24" name="label-174"/>
-          <p:cNvSpPr txBox="1"/>
-          <p:nvPr/>
-        </p:nvSpPr>
-        <p:spPr>
-          <a:xfrm>
-            <a:off x="10526449" y="3236976"/>
-            <a:ext cx="457200" cy="237744"/>
-          </a:xfrm>
-          <a:prstGeom prst="rect">
-            <a:avLst/>
-          </a:prstGeom>
-          <a:noFill/>
-          <a:ln/>
-        </p:spPr>
-        <p:txBody>
-          <a:bodyPr wrap="square" lIns="0" tIns="0" rIns="0" bIns="0" rtlCol="0" anchor="ctr"/>
-          <a:lstStyle/>
-          <a:p>
-            <a:pPr algn="l" indent="0" marL="0">
-              <a:buNone/>
-            </a:pPr>
-            <a:r>
-              <a:rPr lang="en-US" sz="950" dirty="0">
-                <a:solidFill>
-                  <a:schemeClr val="tx1"/>
-                </a:solidFill>
-              </a:rPr>
-              <a:t>81%</a:t>
-            </a:r>
-            <a:endParaRPr lang="en-US" sz="950" dirty="0"/>
-          </a:p>
-        </p:txBody>
-      </p:sp>
-      <p:sp>
-        <p:nvSpPr>
-          <p:cNvPr id="25" name="label-175"/>
-          <p:cNvSpPr txBox="1"/>
-          <p:nvPr/>
-        </p:nvSpPr>
-        <p:spPr>
-          <a:xfrm>
-            <a:off x="6507328" y="3584448"/>
-            <a:ext cx="2286000" cy="457200"/>
-          </a:xfrm>
-          <a:prstGeom prst="rect">
-            <a:avLst/>
-          </a:prstGeom>
-          <a:noFill/>
-          <a:ln/>
-        </p:spPr>
-        <p:txBody>
-          <a:bodyPr wrap="square" lIns="0" tIns="0" rIns="0" bIns="0" rtlCol="0" anchor="ctr"/>
-          <a:lstStyle/>
-          <a:p>
-            <a:pPr algn="l" indent="0" marL="0">
-              <a:buNone/>
-            </a:pPr>
-            <a:r>
-              <a:rPr lang="en-US" sz="1050" dirty="0">
-                <a:solidFill>
-                  <a:schemeClr val="tx1"/>
-                </a:solidFill>
-              </a:rPr>
-              <a:t>只看靶点：有临床试验登记</a:t>
-            </a:r>
-            <a:endParaRPr lang="en-US" sz="1050" dirty="0"/>
-          </a:p>
-        </p:txBody>
-      </p:sp>
-      <p:sp>
-        <p:nvSpPr>
-          <p:cNvPr id="26" name="bar-176"/>
-          <p:cNvSpPr/>
-          <p:nvPr/>
-        </p:nvSpPr>
-        <p:spPr>
-          <a:xfrm>
-            <a:off x="8839048" y="3621024"/>
-            <a:ext cx="2026768" cy="164592"/>
-          </a:xfrm>
-          <a:prstGeom prst="rect">
-            <a:avLst/>
-          </a:prstGeom>
-          <a:solidFill>
-            <a:srgbClr val="B4BFCC"/>
-          </a:solidFill>
-          <a:ln w="12700">
-            <a:solidFill>
-              <a:srgbClr val="B4BFCC"/>
-            </a:solidFill>
-            <a:prstDash val="solid"/>
-          </a:ln>
-        </p:spPr>
-      </p:sp>
-      <p:sp>
-        <p:nvSpPr>
-          <p:cNvPr id="27" name="label-177"/>
-          <p:cNvSpPr txBox="1"/>
-          <p:nvPr/>
-        </p:nvSpPr>
-        <p:spPr>
-          <a:xfrm>
-            <a:off x="10911535" y="3566160"/>
-            <a:ext cx="457200" cy="237744"/>
-          </a:xfrm>
-          <a:prstGeom prst="rect">
-            <a:avLst/>
-          </a:prstGeom>
-          <a:noFill/>
-          <a:ln/>
-        </p:spPr>
-        <p:txBody>
-          <a:bodyPr wrap="square" lIns="0" tIns="0" rIns="0" bIns="0" rtlCol="0" anchor="ctr"/>
-          <a:lstStyle/>
-          <a:p>
-            <a:pPr algn="l" indent="0" marL="0">
-              <a:buNone/>
-            </a:pPr>
-            <a:r>
-              <a:rPr lang="en-US" sz="950" b="1" dirty="0">
-                <a:solidFill>
-                  <a:schemeClr val="tx1"/>
-                </a:solidFill>
-              </a:rPr>
-              <a:t>100%</a:t>
-            </a:r>
-            <a:endParaRPr lang="en-US" sz="950" dirty="0"/>
-          </a:p>
-        </p:txBody>
-      </p:sp>
-      <p:sp>
-        <p:nvSpPr>
-          <p:cNvPr id="28" name="bar-178"/>
-          <p:cNvSpPr/>
-          <p:nvPr/>
-        </p:nvSpPr>
-        <p:spPr>
-          <a:xfrm>
-            <a:off x="8839048" y="3831336"/>
-            <a:ext cx="2026768" cy="164592"/>
-          </a:xfrm>
-          <a:prstGeom prst="rect">
-            <a:avLst/>
-          </a:prstGeom>
-          <a:solidFill>
-            <a:srgbClr val="B4BFCC">
-              <a:alpha val="45000"/>
-            </a:srgbClr>
-          </a:solidFill>
-          <a:ln w="12700">
-            <a:solidFill>
-              <a:srgbClr val="B4BFCC">
-                <a:alpha val="45000"/>
-              </a:srgbClr>
-            </a:solidFill>
-            <a:prstDash val="solid"/>
-          </a:ln>
-        </p:spPr>
-      </p:sp>
-      <p:sp>
-        <p:nvSpPr>
-          <p:cNvPr id="29" name="label-179"/>
-          <p:cNvSpPr txBox="1"/>
-          <p:nvPr/>
-        </p:nvSpPr>
-        <p:spPr>
-          <a:xfrm>
-            <a:off x="10911535" y="3785616"/>
-            <a:ext cx="457200" cy="237744"/>
-          </a:xfrm>
-          <a:prstGeom prst="rect">
-            <a:avLst/>
-          </a:prstGeom>
-          <a:noFill/>
-          <a:ln/>
-        </p:spPr>
-        <p:txBody>
-          <a:bodyPr wrap="square" lIns="0" tIns="0" rIns="0" bIns="0" rtlCol="0" anchor="ctr"/>
-          <a:lstStyle/>
-          <a:p>
-            <a:pPr algn="l" indent="0" marL="0">
-              <a:buNone/>
-            </a:pPr>
-            <a:r>
-              <a:rPr lang="en-US" sz="950" dirty="0">
-                <a:solidFill>
-                  <a:schemeClr val="tx1"/>
-                </a:solidFill>
-              </a:rPr>
-              <a:t>100%</a:t>
-            </a:r>
-            <a:endParaRPr lang="en-US" sz="950" dirty="0"/>
-          </a:p>
-        </p:txBody>
-      </p:sp>
-      <p:sp>
-        <p:nvSpPr>
-          <p:cNvPr id="30" name="label-180"/>
-          <p:cNvSpPr txBox="1"/>
-          <p:nvPr/>
-        </p:nvSpPr>
-        <p:spPr>
-          <a:xfrm>
-            <a:off x="6507328" y="4133088"/>
-            <a:ext cx="2286000" cy="457200"/>
-          </a:xfrm>
-          <a:prstGeom prst="rect">
-            <a:avLst/>
-          </a:prstGeom>
-          <a:noFill/>
-          <a:ln/>
-        </p:spPr>
-        <p:txBody>
-          <a:bodyPr wrap="square" lIns="0" tIns="0" rIns="0" bIns="0" rtlCol="0" anchor="ctr"/>
-          <a:lstStyle/>
-          <a:p>
-            <a:pPr algn="l" indent="0" marL="0">
-              <a:buNone/>
-            </a:pPr>
-            <a:r>
-              <a:rPr lang="en-US" sz="1050" dirty="0">
-                <a:solidFill>
-                  <a:schemeClr val="tx1"/>
-                </a:solidFill>
-              </a:rPr>
-              <a:t>靶点–疾病：动物模型证据</a:t>
-            </a:r>
-            <a:endParaRPr lang="en-US" sz="1050" dirty="0"/>
-          </a:p>
-        </p:txBody>
-      </p:sp>
-      <p:sp>
-        <p:nvSpPr>
-          <p:cNvPr id="31" name="bar-181"/>
-          <p:cNvSpPr/>
-          <p:nvPr/>
-        </p:nvSpPr>
-        <p:spPr>
-          <a:xfrm>
-            <a:off x="8839048" y="4169664"/>
-            <a:ext cx="770172" cy="164592"/>
-          </a:xfrm>
-          <a:prstGeom prst="rect">
-            <a:avLst/>
-          </a:prstGeom>
-          <a:solidFill>
-            <a:srgbClr val="0E8A7E"/>
-          </a:solidFill>
-          <a:ln w="12700">
-            <a:solidFill>
-              <a:srgbClr val="0E8A7E"/>
-            </a:solidFill>
-            <a:prstDash val="solid"/>
-          </a:ln>
-        </p:spPr>
-      </p:sp>
-      <p:sp>
-        <p:nvSpPr>
-          <p:cNvPr id="32" name="label-182"/>
-          <p:cNvSpPr txBox="1"/>
-          <p:nvPr/>
-        </p:nvSpPr>
-        <p:spPr>
-          <a:xfrm>
-            <a:off x="9654939" y="4114800"/>
-            <a:ext cx="457200" cy="237744"/>
-          </a:xfrm>
-          <a:prstGeom prst="rect">
-            <a:avLst/>
-          </a:prstGeom>
-          <a:noFill/>
-          <a:ln/>
-        </p:spPr>
-        <p:txBody>
-          <a:bodyPr wrap="square" lIns="0" tIns="0" rIns="0" bIns="0" rtlCol="0" anchor="ctr"/>
-          <a:lstStyle/>
-          <a:p>
-            <a:pPr algn="l" indent="0" marL="0">
-              <a:buNone/>
-            </a:pPr>
-            <a:r>
-              <a:rPr lang="en-US" sz="950" b="1" dirty="0">
-                <a:solidFill>
-                  <a:schemeClr val="tx1"/>
-                </a:solidFill>
-              </a:rPr>
-              <a:t>38%</a:t>
-            </a:r>
-            <a:endParaRPr lang="en-US" sz="950" dirty="0"/>
-          </a:p>
-        </p:txBody>
-      </p:sp>
-      <p:sp>
-        <p:nvSpPr>
-          <p:cNvPr id="33" name="bar-183"/>
-          <p:cNvSpPr/>
-          <p:nvPr/>
-        </p:nvSpPr>
-        <p:spPr>
-          <a:xfrm>
-            <a:off x="8839048" y="4379976"/>
-            <a:ext cx="344550" cy="164592"/>
-          </a:xfrm>
-          <a:prstGeom prst="rect">
-            <a:avLst/>
-          </a:prstGeom>
-          <a:solidFill>
-            <a:srgbClr val="0E8A7E">
-              <a:alpha val="45000"/>
-            </a:srgbClr>
-          </a:solidFill>
-          <a:ln w="12700">
-            <a:solidFill>
-              <a:srgbClr val="0E8A7E">
-                <a:alpha val="45000"/>
-              </a:srgbClr>
-            </a:solidFill>
-            <a:prstDash val="solid"/>
-          </a:ln>
-        </p:spPr>
-      </p:sp>
-      <p:sp>
-        <p:nvSpPr>
-          <p:cNvPr id="34" name="label-184"/>
-          <p:cNvSpPr txBox="1"/>
-          <p:nvPr/>
-        </p:nvSpPr>
-        <p:spPr>
-          <a:xfrm>
-            <a:off x="9229318" y="4334256"/>
-            <a:ext cx="457200" cy="237744"/>
-          </a:xfrm>
-          <a:prstGeom prst="rect">
-            <a:avLst/>
-          </a:prstGeom>
-          <a:noFill/>
-          <a:ln/>
-        </p:spPr>
-        <p:txBody>
-          <a:bodyPr wrap="square" lIns="0" tIns="0" rIns="0" bIns="0" rtlCol="0" anchor="ctr"/>
-          <a:lstStyle/>
-          <a:p>
-            <a:pPr algn="l" indent="0" marL="0">
-              <a:buNone/>
-            </a:pPr>
-            <a:r>
-              <a:rPr lang="en-US" sz="950" dirty="0">
-                <a:solidFill>
-                  <a:schemeClr val="tx1"/>
-                </a:solidFill>
-              </a:rPr>
-              <a:t>17%</a:t>
-            </a:r>
-            <a:endParaRPr lang="en-US" sz="950" dirty="0"/>
-          </a:p>
-        </p:txBody>
-      </p:sp>
-      <p:sp>
-        <p:nvSpPr>
-          <p:cNvPr id="35" name="label-185"/>
-          <p:cNvSpPr txBox="1"/>
-          <p:nvPr/>
-        </p:nvSpPr>
-        <p:spPr>
-          <a:xfrm>
-            <a:off x="6507328" y="4681728"/>
-            <a:ext cx="2286000" cy="457200"/>
-          </a:xfrm>
-          <a:prstGeom prst="rect">
-            <a:avLst/>
-          </a:prstGeom>
-          <a:noFill/>
-          <a:ln/>
-        </p:spPr>
-        <p:txBody>
-          <a:bodyPr wrap="square" lIns="0" tIns="0" rIns="0" bIns="0" rtlCol="0" anchor="ctr"/>
-          <a:lstStyle/>
-          <a:p>
-            <a:pPr algn="l" indent="0" marL="0">
-              <a:buNone/>
-            </a:pPr>
-            <a:r>
-              <a:rPr lang="en-US" sz="1050" dirty="0">
-                <a:solidFill>
-                  <a:schemeClr val="tx1"/>
-                </a:solidFill>
-              </a:rPr>
-              <a:t>靶点–疾病：人类遗传学证据</a:t>
-            </a:r>
-            <a:endParaRPr lang="en-US" sz="1050" dirty="0"/>
-          </a:p>
-        </p:txBody>
-      </p:sp>
-      <p:sp>
-        <p:nvSpPr>
-          <p:cNvPr id="36" name="bar-186"/>
-          <p:cNvSpPr/>
-          <p:nvPr/>
-        </p:nvSpPr>
-        <p:spPr>
-          <a:xfrm>
-            <a:off x="8839048" y="4718304"/>
-            <a:ext cx="709369" cy="164592"/>
-          </a:xfrm>
-          <a:prstGeom prst="rect">
-            <a:avLst/>
-          </a:prstGeom>
-          <a:solidFill>
-            <a:srgbClr val="0E8A7E"/>
-          </a:solidFill>
-          <a:ln w="12700">
-            <a:solidFill>
-              <a:srgbClr val="0E8A7E"/>
-            </a:solidFill>
-            <a:prstDash val="solid"/>
-          </a:ln>
-        </p:spPr>
-      </p:sp>
-      <p:sp>
-        <p:nvSpPr>
-          <p:cNvPr id="37" name="label-187"/>
-          <p:cNvSpPr txBox="1"/>
-          <p:nvPr/>
-        </p:nvSpPr>
-        <p:spPr>
-          <a:xfrm>
-            <a:off x="9594136" y="4663440"/>
-            <a:ext cx="457200" cy="237744"/>
-          </a:xfrm>
-          <a:prstGeom prst="rect">
-            <a:avLst/>
-          </a:prstGeom>
-          <a:noFill/>
-          <a:ln/>
-        </p:spPr>
-        <p:txBody>
-          <a:bodyPr wrap="square" lIns="0" tIns="0" rIns="0" bIns="0" rtlCol="0" anchor="ctr"/>
-          <a:lstStyle/>
-          <a:p>
-            <a:pPr algn="l" indent="0" marL="0">
-              <a:buNone/>
-            </a:pPr>
-            <a:r>
-              <a:rPr lang="en-US" sz="950" b="1" dirty="0">
-                <a:solidFill>
-                  <a:schemeClr val="tx1"/>
-                </a:solidFill>
-              </a:rPr>
-              <a:t>35%</a:t>
-            </a:r>
-            <a:endParaRPr lang="en-US" sz="950" dirty="0"/>
-          </a:p>
-        </p:txBody>
-      </p:sp>
-      <p:sp>
-        <p:nvSpPr>
-          <p:cNvPr id="38" name="bar-188"/>
-          <p:cNvSpPr/>
-          <p:nvPr/>
-        </p:nvSpPr>
-        <p:spPr>
-          <a:xfrm>
-            <a:off x="8839048" y="4928616"/>
-            <a:ext cx="344550" cy="164592"/>
-          </a:xfrm>
-          <a:prstGeom prst="rect">
-            <a:avLst/>
-          </a:prstGeom>
-          <a:solidFill>
-            <a:srgbClr val="0E8A7E">
-              <a:alpha val="45000"/>
-            </a:srgbClr>
-          </a:solidFill>
-          <a:ln w="12700">
-            <a:solidFill>
-              <a:srgbClr val="0E8A7E">
-                <a:alpha val="45000"/>
-              </a:srgbClr>
-            </a:solidFill>
-            <a:prstDash val="solid"/>
-          </a:ln>
-        </p:spPr>
-      </p:sp>
-      <p:sp>
-        <p:nvSpPr>
-          <p:cNvPr id="39" name="label-189"/>
-          <p:cNvSpPr txBox="1"/>
-          <p:nvPr/>
-        </p:nvSpPr>
-        <p:spPr>
-          <a:xfrm>
-            <a:off x="9229318" y="4882896"/>
-            <a:ext cx="457200" cy="237744"/>
-          </a:xfrm>
-          <a:prstGeom prst="rect">
-            <a:avLst/>
-          </a:prstGeom>
-          <a:noFill/>
-          <a:ln/>
-        </p:spPr>
-        <p:txBody>
-          <a:bodyPr wrap="square" lIns="0" tIns="0" rIns="0" bIns="0" rtlCol="0" anchor="ctr"/>
-          <a:lstStyle/>
-          <a:p>
-            <a:pPr algn="l" indent="0" marL="0">
-              <a:buNone/>
-            </a:pPr>
-            <a:r>
-              <a:rPr lang="en-US" sz="950" dirty="0">
-                <a:solidFill>
-                  <a:schemeClr val="tx1"/>
-                </a:solidFill>
-              </a:rPr>
-              <a:t>17%</a:t>
-            </a:r>
-            <a:endParaRPr lang="en-US" sz="950" dirty="0"/>
-          </a:p>
-        </p:txBody>
-      </p:sp>
-      <p:sp>
-        <p:nvSpPr>
-          <p:cNvPr id="40" name="box-190"/>
-          <p:cNvSpPr/>
-          <p:nvPr/>
-        </p:nvSpPr>
-        <p:spPr>
-          <a:xfrm>
-            <a:off x="6507328" y="5257800"/>
-            <a:ext cx="4861408" cy="658368"/>
+            <a:off x="6507328" y="4754880"/>
+            <a:ext cx="4861408" cy="1143000"/>
           </a:xfrm>
           <a:prstGeom prst="roundRect">
             <a:avLst>
-              <a:gd name="adj" fmla="val 11111"/>
+              <a:gd name="adj" fmla="val 6400"/>
             </a:avLst>
           </a:prstGeom>
           <a:solidFill>
@@ -14860,7 +15019,7 @@
           </a:ln>
         </p:spPr>
         <p:txBody>
-          <a:bodyPr wrap="square" lIns="1016" tIns="1016" rIns="1016" bIns="1016" rtlCol="0" anchor="ctr"/>
+          <a:bodyPr wrap="square" lIns="1270" tIns="1270" rIns="1270" bIns="1270" rtlCol="0" anchor="ctr"/>
           <a:lstStyle/>
           <a:p>
             <a:pPr algn="l" indent="0" marL="0">
@@ -14872,7 +15031,7 @@
                   <a:schemeClr val="tx2"/>
                 </a:solidFill>
               </a:rPr>
-              <a:t>只看靶点本身分不出有效与否；遗传学与动物模型证据才有区分力，与 Nature 2024 一致（有遗传学支持的药物机制成功率高 2.6 倍）。</a:t>
+              <a:t>结果决定去留：效应存在 → 来源标注接入系统，并可作为论文发现；效应不存在 → 放弃这一方向。所用论文全部真实，标签来自公开结局，无需人工标注；用本机已订阅的模型命令行工具运行。</a:t>
             </a:r>
             <a:endParaRPr lang="en-US" sz="1050" dirty="0"/>
           </a:p>
@@ -14880,7 +15039,7 @@
       </p:sp>
       <p:sp>
         <p:nvSpPr>
-          <p:cNvPr id="41" name="label-191"/>
+          <p:cNvPr id="21" name="label-167"/>
           <p:cNvSpPr txBox="1"/>
           <p:nvPr/>
         </p:nvSpPr>
@@ -14908,7 +15067,7 @@
                   <a:schemeClr val="accent6"/>
                 </a:solidFill>
               </a:rPr>
-              <a:t>样本量小：动物模型差异 p = 0.023，遗传学 p = 0.062。数据与脚本已存档，可复现（packages/core/evaluation）。</a:t>
+              <a:t>实验脚本与证据包已存档（packages/core/evaluation/illusory-corroboration）；尚未运行，结果待补。</a:t>
             </a:r>
             <a:endParaRPr lang="en-US" sz="1000" dirty="0"/>
           </a:p>
@@ -15062,7 +15221,7 @@
       </p:sp>
       <p:sp>
         <p:nvSpPr>
-          <p:cNvPr id="4" name="card-192"/>
+          <p:cNvPr id="4" name="card-168"/>
           <p:cNvSpPr/>
           <p:nvPr/>
         </p:nvSpPr>
@@ -15089,7 +15248,7 @@
       </p:sp>
       <p:sp>
         <p:nvSpPr>
-          <p:cNvPr id="5" name="tag-193"/>
+          <p:cNvPr id="5" name="tag-169"/>
           <p:cNvSpPr/>
           <p:nvPr/>
         </p:nvSpPr>
@@ -15133,7 +15292,7 @@
       </p:sp>
       <p:sp>
         <p:nvSpPr>
-          <p:cNvPr id="6" name="label-194"/>
+          <p:cNvPr id="6" name="label-170"/>
           <p:cNvSpPr txBox="1"/>
           <p:nvPr/>
         </p:nvSpPr>
@@ -15169,7 +15328,7 @@
       </p:sp>
       <p:sp>
         <p:nvSpPr>
-          <p:cNvPr id="7" name="box-195"/>
+          <p:cNvPr id="7" name="box-171"/>
           <p:cNvSpPr/>
           <p:nvPr/>
         </p:nvSpPr>
@@ -15213,7 +15372,7 @@
       </p:sp>
       <p:sp>
         <p:nvSpPr>
-          <p:cNvPr id="8" name="arrow-196"/>
+          <p:cNvPr id="8" name="arrow-172"/>
           <p:cNvSpPr/>
           <p:nvPr/>
         </p:nvSpPr>
@@ -15237,7 +15396,7 @@
       </p:sp>
       <p:sp>
         <p:nvSpPr>
-          <p:cNvPr id="9" name="box-197"/>
+          <p:cNvPr id="9" name="box-173"/>
           <p:cNvSpPr/>
           <p:nvPr/>
         </p:nvSpPr>
@@ -15281,7 +15440,7 @@
       </p:sp>
       <p:sp>
         <p:nvSpPr>
-          <p:cNvPr id="10" name="arrow-198"/>
+          <p:cNvPr id="10" name="arrow-174"/>
           <p:cNvSpPr/>
           <p:nvPr/>
         </p:nvSpPr>
@@ -15305,7 +15464,7 @@
       </p:sp>
       <p:sp>
         <p:nvSpPr>
-          <p:cNvPr id="11" name="box-199"/>
+          <p:cNvPr id="11" name="box-175"/>
           <p:cNvSpPr/>
           <p:nvPr/>
         </p:nvSpPr>
@@ -15349,7 +15508,7 @@
       </p:sp>
       <p:sp>
         <p:nvSpPr>
-          <p:cNvPr id="12" name="arrow-200"/>
+          <p:cNvPr id="12" name="arrow-176"/>
           <p:cNvSpPr/>
           <p:nvPr/>
         </p:nvSpPr>
@@ -15373,7 +15532,7 @@
       </p:sp>
       <p:sp>
         <p:nvSpPr>
-          <p:cNvPr id="13" name="box-201"/>
+          <p:cNvPr id="13" name="box-177"/>
           <p:cNvSpPr/>
           <p:nvPr/>
         </p:nvSpPr>
@@ -15417,7 +15576,7 @@
       </p:sp>
       <p:sp>
         <p:nvSpPr>
-          <p:cNvPr id="14" name="arrow-202"/>
+          <p:cNvPr id="14" name="arrow-178"/>
           <p:cNvSpPr/>
           <p:nvPr/>
         </p:nvSpPr>
@@ -15441,7 +15600,7 @@
       </p:sp>
       <p:sp>
         <p:nvSpPr>
-          <p:cNvPr id="15" name="box-203"/>
+          <p:cNvPr id="15" name="box-179"/>
           <p:cNvSpPr/>
           <p:nvPr/>
         </p:nvSpPr>
@@ -15485,7 +15644,7 @@
       </p:sp>
       <p:sp>
         <p:nvSpPr>
-          <p:cNvPr id="16" name="bullets-204"/>
+          <p:cNvPr id="16" name="bullets-180"/>
           <p:cNvSpPr txBox="1"/>
           <p:nvPr/>
         </p:nvSpPr>
@@ -15561,7 +15720,7 @@
       </p:sp>
       <p:sp>
         <p:nvSpPr>
-          <p:cNvPr id="17" name="label-205"/>
+          <p:cNvPr id="17" name="label-181"/>
           <p:cNvSpPr txBox="1"/>
           <p:nvPr/>
         </p:nvSpPr>
@@ -15597,7 +15756,7 @@
       </p:sp>
       <p:sp>
         <p:nvSpPr>
-          <p:cNvPr id="18" name="label-206"/>
+          <p:cNvPr id="18" name="label-182"/>
           <p:cNvSpPr txBox="1"/>
           <p:nvPr/>
         </p:nvSpPr>
@@ -15633,7 +15792,7 @@
       </p:sp>
       <p:sp>
         <p:nvSpPr>
-          <p:cNvPr id="19" name="label-207"/>
+          <p:cNvPr id="19" name="label-183"/>
           <p:cNvSpPr txBox="1"/>
           <p:nvPr/>
         </p:nvSpPr>
@@ -15669,7 +15828,7 @@
       </p:sp>
       <p:sp>
         <p:nvSpPr>
-          <p:cNvPr id="20" name="label-208"/>
+          <p:cNvPr id="20" name="label-184"/>
           <p:cNvSpPr txBox="1"/>
           <p:nvPr/>
         </p:nvSpPr>
@@ -15705,7 +15864,7 @@
       </p:sp>
       <p:sp>
         <p:nvSpPr>
-          <p:cNvPr id="21" name="label-209"/>
+          <p:cNvPr id="21" name="label-185"/>
           <p:cNvSpPr txBox="1"/>
           <p:nvPr/>
         </p:nvSpPr>
@@ -15741,7 +15900,7 @@
       </p:sp>
       <p:sp>
         <p:nvSpPr>
-          <p:cNvPr id="22" name="label-210"/>
+          <p:cNvPr id="22" name="label-186"/>
           <p:cNvSpPr txBox="1"/>
           <p:nvPr/>
         </p:nvSpPr>
@@ -15777,7 +15936,7 @@
       </p:sp>
       <p:sp>
         <p:nvSpPr>
-          <p:cNvPr id="23" name="card-211"/>
+          <p:cNvPr id="23" name="card-187"/>
           <p:cNvSpPr/>
           <p:nvPr/>
         </p:nvSpPr>
@@ -15804,7 +15963,7 @@
       </p:sp>
       <p:sp>
         <p:nvSpPr>
-          <p:cNvPr id="24" name="tag-212"/>
+          <p:cNvPr id="24" name="tag-188"/>
           <p:cNvSpPr/>
           <p:nvPr/>
         </p:nvSpPr>
@@ -15848,7 +16007,7 @@
       </p:sp>
       <p:sp>
         <p:nvSpPr>
-          <p:cNvPr id="25" name="label-213"/>
+          <p:cNvPr id="25" name="label-189"/>
           <p:cNvSpPr txBox="1"/>
           <p:nvPr/>
         </p:nvSpPr>
@@ -15884,7 +16043,7 @@
       </p:sp>
       <p:sp>
         <p:nvSpPr>
-          <p:cNvPr id="26" name="box-214"/>
+          <p:cNvPr id="26" name="box-190"/>
           <p:cNvSpPr/>
           <p:nvPr/>
         </p:nvSpPr>
@@ -15928,7 +16087,7 @@
       </p:sp>
       <p:sp>
         <p:nvSpPr>
-          <p:cNvPr id="27" name="arrow-215"/>
+          <p:cNvPr id="27" name="arrow-191"/>
           <p:cNvSpPr/>
           <p:nvPr/>
         </p:nvSpPr>
@@ -15952,7 +16111,7 @@
       </p:sp>
       <p:sp>
         <p:nvSpPr>
-          <p:cNvPr id="28" name="box-216"/>
+          <p:cNvPr id="28" name="box-192"/>
           <p:cNvSpPr/>
           <p:nvPr/>
         </p:nvSpPr>
@@ -15996,7 +16155,7 @@
       </p:sp>
       <p:sp>
         <p:nvSpPr>
-          <p:cNvPr id="29" name="arrow-217"/>
+          <p:cNvPr id="29" name="arrow-193"/>
           <p:cNvSpPr/>
           <p:nvPr/>
         </p:nvSpPr>
@@ -16020,7 +16179,7 @@
       </p:sp>
       <p:sp>
         <p:nvSpPr>
-          <p:cNvPr id="30" name="arrow-218"/>
+          <p:cNvPr id="30" name="arrow-194"/>
           <p:cNvSpPr/>
           <p:nvPr/>
         </p:nvSpPr>
@@ -16044,7 +16203,7 @@
       </p:sp>
       <p:sp>
         <p:nvSpPr>
-          <p:cNvPr id="31" name="box-219"/>
+          <p:cNvPr id="31" name="box-195"/>
           <p:cNvSpPr/>
           <p:nvPr/>
         </p:nvSpPr>
@@ -16088,7 +16247,7 @@
       </p:sp>
       <p:sp>
         <p:nvSpPr>
-          <p:cNvPr id="32" name="box-220"/>
+          <p:cNvPr id="32" name="box-196"/>
           <p:cNvSpPr/>
           <p:nvPr/>
         </p:nvSpPr>
@@ -16132,7 +16291,7 @@
       </p:sp>
       <p:sp>
         <p:nvSpPr>
-          <p:cNvPr id="33" name="bullets-221"/>
+          <p:cNvPr id="33" name="bullets-197"/>
           <p:cNvSpPr txBox="1"/>
           <p:nvPr/>
         </p:nvSpPr>
@@ -16208,7 +16367,7 @@
       </p:sp>
       <p:sp>
         <p:nvSpPr>
-          <p:cNvPr id="34" name="label-222"/>
+          <p:cNvPr id="34" name="label-198"/>
           <p:cNvSpPr txBox="1"/>
           <p:nvPr/>
         </p:nvSpPr>

--- a/docs/presentation/MedScience-3.0-设计汇报.pptx
+++ b/docs/presentation/MedScience-3.0-设计汇报.pptx
@@ -15,10 +15,9 @@
     <p:sldId id="263" r:id="rId9"/>
     <p:sldId id="264" r:id="rId10"/>
     <p:sldId id="265" r:id="rId11"/>
-    <p:sldId id="266" r:id="rId12"/>
   </p:sldIdLst>
   <p:notesMasterIdLst>
-    <p:notesMasterId r:id="rId13"/>
+    <p:notesMasterId r:id="rId12"/>
   </p:notesMasterIdLst>
   <p:sldSz cx="12192000" cy="6858000"/>
   <p:notesSz cx="6858000" cy="12192000"/>
@@ -117,35 +116,34 @@
   <p:extLst>
     <p:ext uri="{521415D9-36F7-43E2-AB2F-B90AF26B5E84}">
       <p14:sectionLst xmlns:p14="http://schemas.microsoft.com/office/powerpoint/2010/main">
-        <p14:section name="开篇" id="{ee0c7886-e5fb-17bd-067c-e9b76fbb8070}">
+        <p14:section name="开篇" id="{663dae41-2649-7c8f-63a8-931c5b9d246a}">
           <p14:sldIdLst>
             <p14:sldId id="256"/>
           </p14:sldIdLst>
         </p14:section>
-        <p14:section name="为什么" id="{d1dbf61d-734f-5cb6-c0e5-a9239dc6af1e}">
+        <p14:section name="为什么" id="{b1e2bc18-3fb1-4ac4-21bf-ab92a7ab7596}">
           <p14:sldIdLst>
             <p14:sldId id="257"/>
             <p14:sldId id="258"/>
           </p14:sldIdLst>
         </p14:section>
-        <p14:section name="怎么设计" id="{a031d981-04ad-afd4-f40f-c860484ad26b}">
+        <p14:section name="怎么设计" id="{d575d69f-4ea4-9f0d-aa04-88cc3271aa9a}">
           <p14:sldIdLst>
             <p14:sldId id="259"/>
             <p14:sldId id="260"/>
             <p14:sldId id="261"/>
             <p14:sldId id="262"/>
             <p14:sldId id="263"/>
+          </p14:sldIdLst>
+        </p14:section>
+        <p14:section name="怎么用" id="{84d260bf-e31d-4c49-a185-c8526c253e70}">
+          <p14:sldIdLst>
             <p14:sldId id="264"/>
           </p14:sldIdLst>
         </p14:section>
-        <p14:section name="怎么用" id="{2a8d6963-29e3-8203-fa4a-b4d96fb66268}">
+        <p14:section name="下一步" id="{d78825fc-47f5-f468-af42-e4cfb9ece630}">
           <p14:sldIdLst>
             <p14:sldId id="265"/>
-          </p14:sldIdLst>
-        </p14:section>
-        <p14:section name="下一步" id="{8345fd1b-160f-cb1b-5936-289c7fece2d0}">
-          <p14:sldIdLst>
-            <p14:sldId id="266"/>
           </p14:sldIdLst>
         </p14:section>
       </p14:sectionLst>
@@ -640,7 +638,7 @@
           <a:p>
             <a:r>
               <a:rPr lang="en-US" dirty="0"/>
-              <a:t>四步即可：安装、配置运行时、提问、查看证据。左图是运行时自动检测到本机的 Claude Code；中间是用 @ 点名专家，以及智能体调用工具的记录；右图是 3.0 的证据页，每条证据的来源和状态都能查到。截图都来自真实运行的 3.0 应用。</a:t>
+              <a:t>最后是进展和请求。B、C 两类设计已经落地并发布；A 类中，实时状态核验已有原型，并用两个真实案例写成了自动化测试。同源证据这一项，我们没有直接做功能，而是先做了对照实验，结果影响很小，所以不再单列，只需让文献检索附上摘要。下一步最重要的是把实时状态核验接入正式流程，覆盖撤稿、试验和药品三类来源；另外在结论尚不确定的问题上复核一次同源影响。结果稳定后发布正式版，并整理成论文。</a:t>
             </a:r>
             <a:endParaRPr lang="en-US" dirty="0"/>
           </a:p>
@@ -664,94 +662,6 @@
             <a:fld id="{F7021451-1387-4CA6-816F-3879F97B5CBC}" type="slidenum">
               <a:rPr lang="en-US"/>
               <a:t>10</a:t>
-            </a:fld>
-            <a:endParaRPr lang="en-US"/>
-          </a:p>
-        </p:txBody>
-      </p:sp>
-    </p:spTree>
-    <p:extLst>
-      <p:ext uri="{BB962C8B-B14F-4D97-AF65-F5344CB8AC3E}">
-        <p14:creationId xmlns:p14="http://schemas.microsoft.com/office/powerpoint/2010/main" val="1024086991"/>
-      </p:ext>
-    </p:extLst>
-  </p:cSld>
-  <p:clrMapOvr>
-    <a:masterClrMapping/>
-  </p:clrMapOvr>
-</p:notes>
-</file>
-
-<file path=ppt/notesSlides/notesSlide11.xml><?xml version="1.0" encoding="utf-8"?>
-<p:notes xmlns:a="http://schemas.openxmlformats.org/drawingml/2006/main" xmlns:r="http://schemas.openxmlformats.org/officeDocument/2006/relationships" xmlns:p="http://schemas.openxmlformats.org/presentationml/2006/main">
-  <p:cSld>
-    <p:spTree>
-      <p:nvGrpSpPr>
-        <p:cNvPr id="1" name=""/>
-        <p:cNvGrpSpPr/>
-        <p:nvPr/>
-      </p:nvGrpSpPr>
-      <p:grpSpPr>
-        <a:xfrm>
-          <a:off x="0" y="0"/>
-          <a:ext cx="0" cy="0"/>
-          <a:chOff x="0" y="0"/>
-          <a:chExt cx="0" cy="0"/>
-        </a:xfrm>
-      </p:grpSpPr>
-      <p:sp>
-        <p:nvSpPr>
-          <p:cNvPr id="2" name="Slide Image Placeholder 1"/>
-          <p:cNvSpPr>
-            <a:spLocks noGrp="1" noRot="1" noChangeAspect="1"/>
-          </p:cNvSpPr>
-          <p:nvPr>
-            <p:ph type="sldImg"/>
-          </p:nvPr>
-        </p:nvSpPr>
-        <p:spPr/>
-      </p:sp>
-      <p:sp>
-        <p:nvSpPr>
-          <p:cNvPr id="3" name="Notes Placeholder 2"/>
-          <p:cNvSpPr>
-            <a:spLocks noGrp="1"/>
-          </p:cNvSpPr>
-          <p:nvPr>
-            <p:ph type="body" idx="1"/>
-          </p:nvPr>
-        </p:nvSpPr>
-        <p:spPr/>
-        <p:txBody>
-          <a:bodyPr/>
-          <a:lstStyle/>
-          <a:p>
-            <a:r>
-              <a:rPr lang="en-US" dirty="0"/>
-              <a:t>最后是进展和请求。B、C 两类设计已经落地并发布；A 类中，实时状态核验已有原型，并用两个真实案例写成了自动化测试；同源证据的现象已经实测，但它会不会真的影响大模型的结论，还需要实验来回答。下一步先运行这个对照实验，脚本和数据都已备好，不需要人工标注；然后按结果决定来源标注是接入系统还是放弃；同时把实时状态核验接入正式流程。结果稳定后发布正式版，并整理成论文。</a:t>
-            </a:r>
-            <a:endParaRPr lang="en-US" dirty="0"/>
-          </a:p>
-        </p:txBody>
-      </p:sp>
-      <p:sp>
-        <p:nvSpPr>
-          <p:cNvPr id="4" name="Slide Number Placeholder 3"/>
-          <p:cNvSpPr>
-            <a:spLocks noGrp="1"/>
-          </p:cNvSpPr>
-          <p:nvPr>
-            <p:ph type="sldNum" sz="quarter" idx="10"/>
-          </p:nvPr>
-        </p:nvSpPr>
-        <p:spPr/>
-        <p:txBody>
-          <a:bodyPr/>
-          <a:lstStyle/>
-          <a:p>
-            <a:fld id="{F7021451-1387-4CA6-816F-3879F97B5CBC}" type="slidenum">
-              <a:rPr lang="en-US"/>
-              <a:t>11</a:t>
             </a:fld>
             <a:endParaRPr lang="en-US"/>
           </a:p>
@@ -816,7 +726,7 @@
           <a:p>
             <a:r>
               <a:rPr lang="en-US" dirty="0"/>
-              <a:t>这一页给出全貌：问题是什么、我们怎么做、做到哪一步。后面按“为什么、怎么设计、怎么用、下一步”的顺序展开，共 11 页。</a:t>
+              <a:t>这一页给出全貌：问题是什么、我们怎么做、做到哪一步。后面按“为什么、怎么设计、怎么用、下一步”的顺序展开，共 10 页。</a:t>
             </a:r>
             <a:endParaRPr lang="en-US" dirty="0"/>
           </a:p>
@@ -904,7 +814,7 @@
           <a:p>
             <a:r>
               <a:rPr lang="en-US" dirty="0"/>
-              <a:t>左列是四个痛点，中间是同类方案通常怎么做，右列是我们的回应。前三个对应证据治理设计，核心是第一个：大模型自己无法知道训练之后发生的撤稿、撤市；第二个是低成本的来源标注，其影响待实验验证；第四个对应本地运行时。同类方案只引用公开资料，不评价其未公开能力。</a:t>
+              <a:t>左列是四个痛点，中间是同类方案通常怎么做，右列是我们的回应。前三个对应证据治理设计，核心是第一个：大模型自己无法知道训练之后发生的撤稿、撤市；第二个我们没有直接做功能，而是先做了对照实验，结论是只需附上摘要；第四个对应本地运行时。同类方案只引用公开资料，不评价其未公开能力。</a:t>
             </a:r>
             <a:endParaRPr lang="en-US" dirty="0"/>
           </a:p>
@@ -992,7 +902,7 @@
           <a:p>
             <a:r>
               <a:rPr lang="en-US" dirty="0"/>
-              <a:t>这一页同时回答“有哪几类设计”和“它们在系统里的位置”。A 类证据治理是绿色这一层：实时状态核验（核心，已有原型）、来源可见（已实测现象，待验证影响）、可核查引用（已落地）；B 类是协作层，即科研小队的组织方式；C 类是运行与部署，包括使用入口、执行层和本机数据层，在 2.x 已具备。右侧防护钩子贯穿每一次工具调用。需要强调：这些都是智能体系统层面的设计，没有训练或修改大模型本身。</a:t>
+              <a:t>这一页同时回答“有哪几类设计”和“它们在系统里的位置”。A 类证据治理是绿色这一层：实时状态核验（核心，已有原型）和可核查引用（已落地）；B 类是协作层，即科研小队的组织方式；C 类是运行与部署，包括使用入口、执行层和本机数据层，在 2.x 已具备。右侧防护钩子贯穿每一次工具调用。需要强调：这些都是智能体系统层面的设计，没有训练或修改大模型本身。</a:t>
             </a:r>
             <a:endParaRPr lang="en-US" dirty="0"/>
           </a:p>
@@ -1080,7 +990,7 @@
           <a:p>
             <a:r>
               <a:rPr lang="en-US" dirty="0"/>
-              <a:t>上排是一次科研提问的完整路径，每一步下面的小字是这一步产生的数据。绿色三步是证据治理层：标注每篇论文的上游试验，实时核验每个来源的当前状态，再检查每条结论引用的证据编号都确实来自工具返回的结果。下方是状态核验的回路：发现论文撤稿、试验因无效终止或药品撤市，依赖它的结论当场降级并提示复核。全部用公开数据库现查现算，不需要自建证据库。</a:t>
+              <a:t>上排是一次科研提问的完整路径，每一步下面的小字是这一步产生的数据。绿色两步是证据治理层：实时核验每个来源的当前状态，再检查每条结论引用的证据编号都确实来自工具返回的结果。检索结果会附上摘要，因为实验显示模型读到摘要就能自行识别同源论文。下方是状态核验的回路：发现论文撤稿、试验因无效终止或药品撤市，依赖它的结论当场降级并提示复核。全部用公开数据库现查现算，不需要自建证据库。</a:t>
             </a:r>
             <a:endParaRPr lang="en-US" dirty="0"/>
           </a:p>
@@ -1256,7 +1166,7 @@
           <a:p>
             <a:r>
               <a:rPr lang="en-US" dirty="0"/>
-              <a:t>第二点是来源可见。检索结果里经常有多篇论文来自同一个试验，比如左边这个真实例子，问阿贝西利能否用于乳腺癌，前 20 篇里有 6 篇来自同一个三期试验 monarchE。我们的做法很简单：把每篇论文的上游试验编号查出来，随证据一起交给模型和用户，标明“这几篇来自同一试验”。为什么需要系统来做？因为系统目前只给模型标题，仅凭标题，大约只有 15% 的同源论文能被看出来。这一步只做标注、不打分，证据强弱仍由专家判断；它本身是一个低成本的小功能，不作为创新点。它是否真的会改变模型的结论，需要下一页的实验来回答。</a:t>
+              <a:t>这一页讲我们怎么用数据做取舍。左边是实测的现象：94 个真实问题、1649 篇论文，有试验证据的问题中 40% 存在同源论文，试验类论文中 29% 是重复计数；比如问阿贝西利能否用于乳腺癌，前 20 篇里有 6 篇来自同一个试验。现象确实存在，但它会不会让大模型产生“虚假共识”？我们事先写好假设和取舍规则，做了对照实验：24 个问题、98 次调用，同一个模型只改变证据包。结果是，原始检索结果和去重之后没有差别；额外加入 3 篇同一试验的论文，模型给出的有效概率只升高约 1 分，满分 100，加到 6 篇也不再上升；标注来源也没有显著影响。原因是模型读到摘要时会自己识别同源，25 份回答中有 10 份主动指出“这几篇来自同一试验，只计一次”。所以按事先定的规则，这一项不再作为设计点，实际只需要让检索结果附上摘要。需要说明局限：多数问题的答案已有定论，模型很确定，留给变化的空间小；对结论尚不确定的问题还没有检验，而且只用了一个模型、跑了一次。</a:t>
             </a:r>
             <a:endParaRPr lang="en-US" dirty="0"/>
           </a:p>
@@ -1344,7 +1254,7 @@
           <a:p>
             <a:r>
               <a:rPr lang="en-US" dirty="0"/>
-              <a:t>这一页分清“已知”和“未知”。左边是已实测的现象：94 个真实问题、1649 篇论文，有试验证据的问题中 40% 存在同源论文，试验类论文中 29% 是重复计数，最多一个问题里有 8 篇来自同一个试验。这是下界。还有一个值得注意的点：已获批药物的同源比例更高，因为获批后会出现大量二次分析，所以“论文多”在一定程度上是成功的结果，而不是证据。右边是未知的部分：这些重复会不会让大模型产生“虚假共识”。我们设计了一个对照实验：同一个问题、同一个模型，只改变证据包——原样、标注来源、去重、再额外加入同一试验的论文——看模型给出的有效概率是否随重复篇数上升。结果决定这个方向的去留：效应存在，就把来源标注接入系统，并作为论文发现；不存在，就放弃。实验用真实论文和公开结局，不需要人工标注，在本机用已订阅的模型工具运行，目前尚未运行。</a:t>
+              <a:t>左边是多智能体协作：队长拆解任务，成员并行，交接时每条发现都要附证据编号，再过质量门，最后成文。内置 26 位专家、15 个团队模板。右边是本地运行时：很多团队已经买了 ChatGPT（Codex）或 Claude 的订阅，MedScience 可以直接调用本机已登录的命令行工具，沿用现有额度，不需要 API 密钥。注意除 Codex 和 Claude Code 外其他工具是通用接入，并请确认订阅条款允许这样使用。</a:t>
             </a:r>
             <a:endParaRPr lang="en-US" dirty="0"/>
           </a:p>
@@ -1432,7 +1342,7 @@
           <a:p>
             <a:r>
               <a:rPr lang="en-US" dirty="0"/>
-              <a:t>左边是多智能体协作：队长拆解任务，成员并行，交接时每条发现都要附证据编号，再过质量门，最后成文。内置 26 位专家、15 个团队模板。右边是本地运行时：很多团队已经买了 ChatGPT（Codex）或 Claude 的订阅，MedScience 可以直接调用本机已登录的命令行工具，沿用现有额度，不需要 API 密钥。注意除 Codex 和 Claude Code 外其他工具是通用接入，并请确认订阅条款允许这样使用。</a:t>
+              <a:t>四步即可：安装、配置运行时、提问、查看证据。左图是运行时自动检测到本机的 Claude Code；中间是用 @ 点名专家，以及智能体调用工具的记录；右图是 3.0 的证据页，每条证据的来源和状态都能查到。截图都来自真实运行的 3.0 应用。</a:t>
             </a:r>
             <a:endParaRPr lang="en-US" dirty="0"/>
           </a:p>
@@ -2369,7 +2279,7 @@
                   <a:schemeClr val="tx2"/>
                 </a:solidFill>
               </a:rPr>
-              <a:t>使用说明：四步完成一次可追溯的研究</a:t>
+              <a:t>当前进展与下一步</a:t>
             </a:r>
             <a:endParaRPr lang="en-US" sz="2800" dirty="0"/>
           </a:p>
@@ -2407,7 +2317,7 @@
                   <a:schemeClr val="accent6"/>
                 </a:solidFill>
               </a:rPr>
-              <a:t>截图来自真实运行的 v3.0 应用。</a:t>
+              <a:t>B、C 已落地；A 类实时核验已有原型；同源证据经实验检验，不再单列。</a:t>
             </a:r>
             <a:endParaRPr lang="en-US" sz="1500" dirty="0"/>
           </a:p>
@@ -2415,879 +2325,7 @@
       </p:sp>
       <p:sp>
         <p:nvSpPr>
-          <p:cNvPr id="4" name="label-199"/>
-          <p:cNvSpPr txBox="1"/>
-          <p:nvPr/>
-        </p:nvSpPr>
-        <p:spPr>
-          <a:xfrm>
-            <a:off x="548640" y="1481328"/>
-            <a:ext cx="11094415" cy="292608"/>
-          </a:xfrm>
-          <a:prstGeom prst="rect">
-            <a:avLst/>
-          </a:prstGeom>
-          <a:noFill/>
-          <a:ln/>
-        </p:spPr>
-        <p:txBody>
-          <a:bodyPr wrap="square" lIns="0" tIns="0" rIns="0" bIns="0" rtlCol="0" anchor="t"/>
-          <a:lstStyle/>
-          <a:p>
-            <a:pPr algn="l" indent="0" marL="0">
-              <a:buNone/>
-            </a:pPr>
-            <a:r>
-              <a:rPr lang="en-US" sz="1300" dirty="0">
-                <a:solidFill>
-                  <a:schemeClr val="tx1"/>
-                </a:solidFill>
-              </a:rPr>
-              <a:t>① 安装：从 GitHub Releases 下载对应平台安装包；或在源码目录运行 npm run web，用浏览器打开。</a:t>
-            </a:r>
-            <a:endParaRPr lang="en-US" sz="1300" dirty="0"/>
-          </a:p>
-        </p:txBody>
-      </p:sp>
-      <p:sp>
-        <p:nvSpPr>
-          <p:cNvPr id="5" name="badge-200"/>
-          <p:cNvSpPr/>
-          <p:nvPr/>
-        </p:nvSpPr>
-        <p:spPr>
-          <a:xfrm>
-            <a:off x="548640" y="1901952"/>
-            <a:ext cx="347472" cy="347472"/>
-          </a:xfrm>
-          <a:prstGeom prst="ellipse">
-            <a:avLst/>
-          </a:prstGeom>
-          <a:solidFill>
-            <a:schemeClr val="accent2"/>
-          </a:solidFill>
-          <a:ln w="6350">
-            <a:solidFill>
-              <a:schemeClr val="accent2"/>
-            </a:solidFill>
-          </a:ln>
-        </p:spPr>
-        <p:txBody>
-          <a:bodyPr wrap="square" lIns="0" tIns="0" rIns="0" bIns="0" rtlCol="0" anchor="ctr"/>
-          <a:lstStyle/>
-          <a:p>
-            <a:pPr algn="ctr" indent="0" marL="0">
-              <a:buNone/>
-            </a:pPr>
-            <a:r>
-              <a:rPr lang="en-US" sz="1200" b="1" dirty="0">
-                <a:solidFill>
-                  <a:schemeClr val="bg1"/>
-                </a:solidFill>
-              </a:rPr>
-              <a:t>2</a:t>
-            </a:r>
-            <a:endParaRPr lang="en-US" sz="1200" dirty="0"/>
-          </a:p>
-        </p:txBody>
-      </p:sp>
-      <p:sp>
-        <p:nvSpPr>
-          <p:cNvPr id="6" name="label-201"/>
-          <p:cNvSpPr txBox="1"/>
-          <p:nvPr/>
-        </p:nvSpPr>
-        <p:spPr>
-          <a:xfrm>
-            <a:off x="1005840" y="1883664"/>
-            <a:ext cx="3027578" cy="384048"/>
-          </a:xfrm>
-          <a:prstGeom prst="rect">
-            <a:avLst/>
-          </a:prstGeom>
-          <a:noFill/>
-          <a:ln/>
-        </p:spPr>
-        <p:txBody>
-          <a:bodyPr wrap="square" lIns="0" tIns="0" rIns="0" bIns="0" rtlCol="0" anchor="ctr"/>
-          <a:lstStyle/>
-          <a:p>
-            <a:pPr algn="l" indent="0" marL="0">
-              <a:buNone/>
-            </a:pPr>
-            <a:r>
-              <a:rPr lang="en-US" sz="1600" b="1" dirty="0">
-                <a:solidFill>
-                  <a:schemeClr val="tx2"/>
-                </a:solidFill>
-              </a:rPr>
-              <a:t>配置运行时</a:t>
-            </a:r>
-            <a:endParaRPr lang="en-US" sz="1600" dirty="0"/>
-          </a:p>
-        </p:txBody>
-      </p:sp>
-      <p:sp>
-        <p:nvSpPr>
-          <p:cNvPr id="7" name="label-202"/>
-          <p:cNvSpPr txBox="1"/>
-          <p:nvPr/>
-        </p:nvSpPr>
-        <p:spPr>
-          <a:xfrm>
-            <a:off x="548640" y="2304288"/>
-            <a:ext cx="3484778" cy="502920"/>
-          </a:xfrm>
-          <a:prstGeom prst="rect">
-            <a:avLst/>
-          </a:prstGeom>
-          <a:noFill/>
-          <a:ln/>
-        </p:spPr>
-        <p:txBody>
-          <a:bodyPr wrap="square" lIns="0" tIns="0" rIns="0" bIns="0" rtlCol="0" anchor="t"/>
-          <a:lstStyle/>
-          <a:p>
-            <a:pPr algn="l" indent="0" marL="0">
-              <a:buNone/>
-            </a:pPr>
-            <a:r>
-              <a:rPr lang="en-US" sz="1200" dirty="0">
-                <a:solidFill>
-                  <a:schemeClr val="tx1"/>
-                </a:solidFill>
-              </a:rPr>
-              <a:t>安装后打开“运行时（模型配置）”，绑定本机 AI 命令行工具或填写模型 API。</a:t>
-            </a:r>
-            <a:endParaRPr lang="en-US" sz="1200" dirty="0"/>
-          </a:p>
-        </p:txBody>
-      </p:sp>
-      <p:sp>
-        <p:nvSpPr>
-          <p:cNvPr id="8" name="badge-203"/>
-          <p:cNvSpPr/>
-          <p:nvPr/>
-        </p:nvSpPr>
-        <p:spPr>
-          <a:xfrm>
-            <a:off x="4353458" y="1901952"/>
-            <a:ext cx="347472" cy="347472"/>
-          </a:xfrm>
-          <a:prstGeom prst="ellipse">
-            <a:avLst/>
-          </a:prstGeom>
-          <a:solidFill>
-            <a:schemeClr val="accent2"/>
-          </a:solidFill>
-          <a:ln w="6350">
-            <a:solidFill>
-              <a:schemeClr val="accent2"/>
-            </a:solidFill>
-          </a:ln>
-        </p:spPr>
-        <p:txBody>
-          <a:bodyPr wrap="square" lIns="0" tIns="0" rIns="0" bIns="0" rtlCol="0" anchor="ctr"/>
-          <a:lstStyle/>
-          <a:p>
-            <a:pPr algn="ctr" indent="0" marL="0">
-              <a:buNone/>
-            </a:pPr>
-            <a:r>
-              <a:rPr lang="en-US" sz="1200" b="1" dirty="0">
-                <a:solidFill>
-                  <a:schemeClr val="bg1"/>
-                </a:solidFill>
-              </a:rPr>
-              <a:t>3</a:t>
-            </a:r>
-            <a:endParaRPr lang="en-US" sz="1200" dirty="0"/>
-          </a:p>
-        </p:txBody>
-      </p:sp>
-      <p:sp>
-        <p:nvSpPr>
-          <p:cNvPr id="9" name="label-204"/>
-          <p:cNvSpPr txBox="1"/>
-          <p:nvPr/>
-        </p:nvSpPr>
-        <p:spPr>
-          <a:xfrm>
-            <a:off x="4810658" y="1883664"/>
-            <a:ext cx="3027578" cy="384048"/>
-          </a:xfrm>
-          <a:prstGeom prst="rect">
-            <a:avLst/>
-          </a:prstGeom>
-          <a:noFill/>
-          <a:ln/>
-        </p:spPr>
-        <p:txBody>
-          <a:bodyPr wrap="square" lIns="0" tIns="0" rIns="0" bIns="0" rtlCol="0" anchor="ctr"/>
-          <a:lstStyle/>
-          <a:p>
-            <a:pPr algn="l" indent="0" marL="0">
-              <a:buNone/>
-            </a:pPr>
-            <a:r>
-              <a:rPr lang="en-US" sz="1600" b="1" dirty="0">
-                <a:solidFill>
-                  <a:schemeClr val="tx2"/>
-                </a:solidFill>
-              </a:rPr>
-              <a:t>提问</a:t>
-            </a:r>
-            <a:endParaRPr lang="en-US" sz="1600" dirty="0"/>
-          </a:p>
-        </p:txBody>
-      </p:sp>
-      <p:sp>
-        <p:nvSpPr>
-          <p:cNvPr id="10" name="label-205"/>
-          <p:cNvSpPr txBox="1"/>
-          <p:nvPr/>
-        </p:nvSpPr>
-        <p:spPr>
-          <a:xfrm>
-            <a:off x="4353458" y="2304288"/>
-            <a:ext cx="3484778" cy="502920"/>
-          </a:xfrm>
-          <a:prstGeom prst="rect">
-            <a:avLst/>
-          </a:prstGeom>
-          <a:noFill/>
-          <a:ln/>
-        </p:spPr>
-        <p:txBody>
-          <a:bodyPr wrap="square" lIns="0" tIns="0" rIns="0" bIns="0" rtlCol="0" anchor="t"/>
-          <a:lstStyle/>
-          <a:p>
-            <a:pPr algn="l" indent="0" marL="0">
-              <a:buNone/>
-            </a:pPr>
-            <a:r>
-              <a:rPr lang="en-US" sz="1200" dirty="0">
-                <a:solidFill>
-                  <a:schemeClr val="tx1"/>
-                </a:solidFill>
-              </a:rPr>
-              <a:t>直接提问；输入 @ 点名专家，或交给科研小队。</a:t>
-            </a:r>
-            <a:endParaRPr lang="en-US" sz="1200" dirty="0"/>
-          </a:p>
-        </p:txBody>
-      </p:sp>
-      <p:sp>
-        <p:nvSpPr>
-          <p:cNvPr id="11" name="badge-206"/>
-          <p:cNvSpPr/>
-          <p:nvPr/>
-        </p:nvSpPr>
-        <p:spPr>
-          <a:xfrm>
-            <a:off x="8158277" y="1901952"/>
-            <a:ext cx="347472" cy="347472"/>
-          </a:xfrm>
-          <a:prstGeom prst="ellipse">
-            <a:avLst/>
-          </a:prstGeom>
-          <a:solidFill>
-            <a:schemeClr val="accent2"/>
-          </a:solidFill>
-          <a:ln w="6350">
-            <a:solidFill>
-              <a:schemeClr val="accent2"/>
-            </a:solidFill>
-          </a:ln>
-        </p:spPr>
-        <p:txBody>
-          <a:bodyPr wrap="square" lIns="0" tIns="0" rIns="0" bIns="0" rtlCol="0" anchor="ctr"/>
-          <a:lstStyle/>
-          <a:p>
-            <a:pPr algn="ctr" indent="0" marL="0">
-              <a:buNone/>
-            </a:pPr>
-            <a:r>
-              <a:rPr lang="en-US" sz="1200" b="1" dirty="0">
-                <a:solidFill>
-                  <a:schemeClr val="bg1"/>
-                </a:solidFill>
-              </a:rPr>
-              <a:t>4</a:t>
-            </a:r>
-            <a:endParaRPr lang="en-US" sz="1200" dirty="0"/>
-          </a:p>
-        </p:txBody>
-      </p:sp>
-      <p:sp>
-        <p:nvSpPr>
-          <p:cNvPr id="12" name="label-207"/>
-          <p:cNvSpPr txBox="1"/>
-          <p:nvPr/>
-        </p:nvSpPr>
-        <p:spPr>
-          <a:xfrm>
-            <a:off x="8615477" y="1883664"/>
-            <a:ext cx="3027578" cy="384048"/>
-          </a:xfrm>
-          <a:prstGeom prst="rect">
-            <a:avLst/>
-          </a:prstGeom>
-          <a:noFill/>
-          <a:ln/>
-        </p:spPr>
-        <p:txBody>
-          <a:bodyPr wrap="square" lIns="0" tIns="0" rIns="0" bIns="0" rtlCol="0" anchor="ctr"/>
-          <a:lstStyle/>
-          <a:p>
-            <a:pPr algn="l" indent="0" marL="0">
-              <a:buNone/>
-            </a:pPr>
-            <a:r>
-              <a:rPr lang="en-US" sz="1600" b="1" dirty="0">
-                <a:solidFill>
-                  <a:schemeClr val="tx2"/>
-                </a:solidFill>
-              </a:rPr>
-              <a:t>查看证据</a:t>
-            </a:r>
-            <a:endParaRPr lang="en-US" sz="1600" dirty="0"/>
-          </a:p>
-        </p:txBody>
-      </p:sp>
-      <p:sp>
-        <p:nvSpPr>
-          <p:cNvPr id="13" name="label-208"/>
-          <p:cNvSpPr txBox="1"/>
-          <p:nvPr/>
-        </p:nvSpPr>
-        <p:spPr>
-          <a:xfrm>
-            <a:off x="8158277" y="2304288"/>
-            <a:ext cx="3484778" cy="502920"/>
-          </a:xfrm>
-          <a:prstGeom prst="rect">
-            <a:avLst/>
-          </a:prstGeom>
-          <a:noFill/>
-          <a:ln/>
-        </p:spPr>
-        <p:txBody>
-          <a:bodyPr wrap="square" lIns="0" tIns="0" rIns="0" bIns="0" rtlCol="0" anchor="t"/>
-          <a:lstStyle/>
-          <a:p>
-            <a:pPr algn="l" indent="0" marL="0">
-              <a:buNone/>
-            </a:pPr>
-            <a:r>
-              <a:rPr lang="en-US" sz="1200" dirty="0">
-                <a:solidFill>
-                  <a:schemeClr val="tx1"/>
-                </a:solidFill>
-              </a:rPr>
-              <a:t>查看每条证据的来源与状态（3.0 证据页）。</a:t>
-            </a:r>
-            <a:endParaRPr lang="en-US" sz="1200" dirty="0"/>
-          </a:p>
-        </p:txBody>
-      </p:sp>
-      <p:pic>
-        <p:nvPicPr>
-          <p:cNvPr id="14" name="screenshot-209" descr="自动检测到本机的 Claude Code">    </p:cNvPr>
-          <p:cNvPicPr>
-            <a:picLocks noChangeAspect="1"/>
-          </p:cNvPicPr>
-          <p:nvPr/>
-        </p:nvPicPr>
-        <p:blipFill>
-          <a:blip r:embed="rId1"/>
-          <a:stretch>
-            <a:fillRect/>
-          </a:stretch>
-        </p:blipFill>
-        <p:spPr>
-          <a:xfrm>
-            <a:off x="927854" y="2880360"/>
-            <a:ext cx="2726350" cy="2834640"/>
-          </a:xfrm>
-          <a:prstGeom prst="rect">
-            <a:avLst/>
-          </a:prstGeom>
-        </p:spPr>
-      </p:pic>
-      <p:sp>
-        <p:nvSpPr>
-          <p:cNvPr id="15" name="frame-210"/>
-          <p:cNvSpPr/>
-          <p:nvPr/>
-        </p:nvSpPr>
-        <p:spPr>
-          <a:xfrm>
-            <a:off x="927854" y="2880360"/>
-            <a:ext cx="2726350" cy="2834640"/>
-          </a:xfrm>
-          <a:prstGeom prst="rect">
-            <a:avLst/>
-          </a:prstGeom>
-          <a:solidFill>
-            <a:srgbClr val="FFFFFF">
-              <a:alpha val="0"/>
-            </a:srgbClr>
-          </a:solidFill>
-          <a:ln w="9525">
-            <a:solidFill>
-              <a:srgbClr val="D5DCE4"/>
-            </a:solidFill>
-            <a:prstDash val="solid"/>
-          </a:ln>
-        </p:spPr>
-      </p:sp>
-      <p:sp>
-        <p:nvSpPr>
-          <p:cNvPr id="16" name="label-211"/>
-          <p:cNvSpPr txBox="1"/>
-          <p:nvPr/>
-        </p:nvSpPr>
-        <p:spPr>
-          <a:xfrm>
-            <a:off x="927854" y="5788152"/>
-            <a:ext cx="2726350" cy="292608"/>
-          </a:xfrm>
-          <a:prstGeom prst="rect">
-            <a:avLst/>
-          </a:prstGeom>
-          <a:noFill/>
-          <a:ln/>
-        </p:spPr>
-        <p:txBody>
-          <a:bodyPr wrap="square" lIns="0" tIns="0" rIns="0" bIns="0" rtlCol="0" anchor="t"/>
-          <a:lstStyle/>
-          <a:p>
-            <a:pPr algn="ctr" indent="0" marL="0">
-              <a:buNone/>
-            </a:pPr>
-            <a:r>
-              <a:rPr lang="en-US" sz="1100" dirty="0">
-                <a:solidFill>
-                  <a:schemeClr val="accent6"/>
-                </a:solidFill>
-              </a:rPr>
-              <a:t>自动检测到本机的 Claude Code</a:t>
-            </a:r>
-            <a:endParaRPr lang="en-US" sz="1100" dirty="0"/>
-          </a:p>
-        </p:txBody>
-      </p:sp>
-      <p:pic>
-        <p:nvPicPr>
-          <p:cNvPr id="17" name="screenshot-212" descr="usage-ask-mention.jpg">    </p:cNvPr>
-          <p:cNvPicPr>
-            <a:picLocks noChangeAspect="1"/>
-          </p:cNvPicPr>
-          <p:nvPr/>
-        </p:nvPicPr>
-        <p:blipFill>
-          <a:blip r:embed="rId2"/>
-          <a:stretch>
-            <a:fillRect/>
-          </a:stretch>
-        </p:blipFill>
-        <p:spPr>
-          <a:xfrm>
-            <a:off x="4353458" y="2880360"/>
-            <a:ext cx="3484778" cy="867323"/>
-          </a:xfrm>
-          <a:prstGeom prst="rect">
-            <a:avLst/>
-          </a:prstGeom>
-        </p:spPr>
-      </p:pic>
-      <p:sp>
-        <p:nvSpPr>
-          <p:cNvPr id="18" name="frame-213"/>
-          <p:cNvSpPr/>
-          <p:nvPr/>
-        </p:nvSpPr>
-        <p:spPr>
-          <a:xfrm>
-            <a:off x="4353458" y="2880360"/>
-            <a:ext cx="3484778" cy="867323"/>
-          </a:xfrm>
-          <a:prstGeom prst="rect">
-            <a:avLst/>
-          </a:prstGeom>
-          <a:solidFill>
-            <a:srgbClr val="FFFFFF">
-              <a:alpha val="0"/>
-            </a:srgbClr>
-          </a:solidFill>
-          <a:ln w="9525">
-            <a:solidFill>
-              <a:srgbClr val="D5DCE4"/>
-            </a:solidFill>
-            <a:prstDash val="solid"/>
-          </a:ln>
-        </p:spPr>
-      </p:sp>
-      <p:pic>
-        <p:nvPicPr>
-          <p:cNvPr id="19" name="screenshot-214" descr="@ 点名专家；工具调用逐步可查">    </p:cNvPr>
-          <p:cNvPicPr>
-            <a:picLocks noChangeAspect="1"/>
-          </p:cNvPicPr>
-          <p:nvPr/>
-        </p:nvPicPr>
-        <p:blipFill>
-          <a:blip r:embed="rId3"/>
-          <a:stretch>
-            <a:fillRect/>
-          </a:stretch>
-        </p:blipFill>
-        <p:spPr>
-          <a:xfrm>
-            <a:off x="4353458" y="3931920"/>
-            <a:ext cx="3484778" cy="1184825"/>
-          </a:xfrm>
-          <a:prstGeom prst="rect">
-            <a:avLst/>
-          </a:prstGeom>
-        </p:spPr>
-      </p:pic>
-      <p:sp>
-        <p:nvSpPr>
-          <p:cNvPr id="20" name="frame-215"/>
-          <p:cNvSpPr/>
-          <p:nvPr/>
-        </p:nvSpPr>
-        <p:spPr>
-          <a:xfrm>
-            <a:off x="4353458" y="3931920"/>
-            <a:ext cx="3484778" cy="1184825"/>
-          </a:xfrm>
-          <a:prstGeom prst="rect">
-            <a:avLst/>
-          </a:prstGeom>
-          <a:solidFill>
-            <a:srgbClr val="FFFFFF">
-              <a:alpha val="0"/>
-            </a:srgbClr>
-          </a:solidFill>
-          <a:ln w="9525">
-            <a:solidFill>
-              <a:srgbClr val="D5DCE4"/>
-            </a:solidFill>
-            <a:prstDash val="solid"/>
-          </a:ln>
-        </p:spPr>
-      </p:sp>
-      <p:sp>
-        <p:nvSpPr>
-          <p:cNvPr id="21" name="label-216"/>
-          <p:cNvSpPr txBox="1"/>
-          <p:nvPr/>
-        </p:nvSpPr>
-        <p:spPr>
-          <a:xfrm>
-            <a:off x="4353458" y="5189897"/>
-            <a:ext cx="3484778" cy="292608"/>
-          </a:xfrm>
-          <a:prstGeom prst="rect">
-            <a:avLst/>
-          </a:prstGeom>
-          <a:noFill/>
-          <a:ln/>
-        </p:spPr>
-        <p:txBody>
-          <a:bodyPr wrap="square" lIns="0" tIns="0" rIns="0" bIns="0" rtlCol="0" anchor="t"/>
-          <a:lstStyle/>
-          <a:p>
-            <a:pPr algn="ctr" indent="0" marL="0">
-              <a:buNone/>
-            </a:pPr>
-            <a:r>
-              <a:rPr lang="en-US" sz="1100" dirty="0">
-                <a:solidFill>
-                  <a:schemeClr val="accent6"/>
-                </a:solidFill>
-              </a:rPr>
-              <a:t>@ 点名专家；工具调用逐步可查</a:t>
-            </a:r>
-            <a:endParaRPr lang="en-US" sz="1100" dirty="0"/>
-          </a:p>
-        </p:txBody>
-      </p:sp>
-      <p:pic>
-        <p:nvPicPr>
-          <p:cNvPr id="22" name="screenshot-217" descr="3.0 证据页：来源、状态、历史">    </p:cNvPr>
-          <p:cNvPicPr>
-            <a:picLocks noChangeAspect="1"/>
-          </p:cNvPicPr>
-          <p:nvPr/>
-        </p:nvPicPr>
-        <p:blipFill>
-          <a:blip r:embed="rId4"/>
-          <a:stretch>
-            <a:fillRect/>
-          </a:stretch>
-        </p:blipFill>
-        <p:spPr>
-          <a:xfrm>
-            <a:off x="8158277" y="2880360"/>
-            <a:ext cx="3484778" cy="2462577"/>
-          </a:xfrm>
-          <a:prstGeom prst="rect">
-            <a:avLst/>
-          </a:prstGeom>
-        </p:spPr>
-      </p:pic>
-      <p:sp>
-        <p:nvSpPr>
-          <p:cNvPr id="23" name="frame-218"/>
-          <p:cNvSpPr/>
-          <p:nvPr/>
-        </p:nvSpPr>
-        <p:spPr>
-          <a:xfrm>
-            <a:off x="8158277" y="2880360"/>
-            <a:ext cx="3484778" cy="2462577"/>
-          </a:xfrm>
-          <a:prstGeom prst="rect">
-            <a:avLst/>
-          </a:prstGeom>
-          <a:solidFill>
-            <a:srgbClr val="FFFFFF">
-              <a:alpha val="0"/>
-            </a:srgbClr>
-          </a:solidFill>
-          <a:ln w="9525">
-            <a:solidFill>
-              <a:srgbClr val="D5DCE4"/>
-            </a:solidFill>
-            <a:prstDash val="solid"/>
-          </a:ln>
-        </p:spPr>
-      </p:sp>
-      <p:sp>
-        <p:nvSpPr>
-          <p:cNvPr id="24" name="label-219"/>
-          <p:cNvSpPr txBox="1"/>
-          <p:nvPr/>
-        </p:nvSpPr>
-        <p:spPr>
-          <a:xfrm>
-            <a:off x="8158277" y="5416089"/>
-            <a:ext cx="3484778" cy="292608"/>
-          </a:xfrm>
-          <a:prstGeom prst="rect">
-            <a:avLst/>
-          </a:prstGeom>
-          <a:noFill/>
-          <a:ln/>
-        </p:spPr>
-        <p:txBody>
-          <a:bodyPr wrap="square" lIns="0" tIns="0" rIns="0" bIns="0" rtlCol="0" anchor="t"/>
-          <a:lstStyle/>
-          <a:p>
-            <a:pPr algn="ctr" indent="0" marL="0">
-              <a:buNone/>
-            </a:pPr>
-            <a:r>
-              <a:rPr lang="en-US" sz="1100" dirty="0">
-                <a:solidFill>
-                  <a:schemeClr val="accent6"/>
-                </a:solidFill>
-              </a:rPr>
-              <a:t>3.0 证据页：来源、状态、历史</a:t>
-            </a:r>
-            <a:endParaRPr lang="en-US" sz="1100" dirty="0"/>
-          </a:p>
-        </p:txBody>
-      </p:sp>
-      <p:sp>
-        <p:nvSpPr>
-          <p:cNvPr id="25" name="label-220"/>
-          <p:cNvSpPr txBox="1"/>
-          <p:nvPr/>
-        </p:nvSpPr>
-        <p:spPr>
-          <a:xfrm>
-            <a:off x="548640" y="6172200"/>
-            <a:ext cx="11094415" cy="256032"/>
-          </a:xfrm>
-          <a:prstGeom prst="rect">
-            <a:avLst/>
-          </a:prstGeom>
-          <a:noFill/>
-          <a:ln/>
-        </p:spPr>
-        <p:txBody>
-          <a:bodyPr wrap="square" lIns="0" tIns="0" rIns="0" bIns="0" rtlCol="0" anchor="t"/>
-          <a:lstStyle/>
-          <a:p>
-            <a:pPr algn="l" indent="0" marL="0">
-              <a:buNone/>
-            </a:pPr>
-            <a:r>
-              <a:rPr lang="en-US" sz="1050" dirty="0">
-                <a:solidFill>
-                  <a:schemeClr val="accent6"/>
-                </a:solidFill>
-              </a:rPr>
-              <a:t>演示环境使用离线示例模型生成文字；文献为 PubMed 实时检索结果。</a:t>
-            </a:r>
-            <a:endParaRPr lang="en-US" sz="1050" dirty="0"/>
-          </a:p>
-        </p:txBody>
-      </p:sp>
-      <p:sp>
-        <p:nvSpPr>
-          <p:cNvPr id="25" name="Slide Number Placeholder 0"/>
-          <p:cNvSpPr>
-            <a:spLocks noGrp="1"/>
-          </p:cNvSpPr>
-          <p:nvPr>
-            <p:ph type="sldNum" sz="quarter" idx="4294967295"/>
-          </p:nvPr>
-        </p:nvSpPr>
-        <p:spPr>
-          <a:xfrm>
-            <a:off x="11094415" y="6446520"/>
-            <a:ext cx="548640" cy="274320"/>
-          </a:xfrm>
-          <a:prstGeom prst="rect">
-            <a:avLst/>
-          </a:prstGeom>
-          <a:extLst>
-            <a:ext uri="{C572A759-6A51-4108-AA02-DFA0A04FC94B}">
-              <ma14:wrappingTextBoxFlag xmlns:ma14="http://schemas.microsoft.com/office/mac/drawingml/2011/main" val="0"/>
-            </a:ext>
-          </a:extLst>
-        </p:spPr>
-        <p:txBody>
-          <a:bodyPr/>
-          <a:lstStyle>
-            <a:lvl1pPr>
-              <a:defRPr sz="1000">
-                <a:solidFill>
-                  <a:schemeClr val="accent6"/>
-                </a:solidFill>
-              </a:defRPr>
-            </a:lvl1pPr>
-          </a:lstStyle>
-          <a:p>
-            <a:pPr algn="r"/>
-            <a:fld id="{F7021451-1387-4CA6-816F-3879F97B5CBC}" type="slidenum">
-              <a:rPr b="0" lang="en-US"/>
-              <a:t>10</a:t>
-            </a:fld>
-            <a:endParaRPr lang="en-US"/>
-          </a:p>
-        </p:txBody>
-      </p:sp>
-    </p:spTree>
-  </p:cSld>
-  <p:clrMapOvr>
-    <a:masterClrMapping/>
-  </p:clrMapOvr>
-</p:sld>
-</file>
-
-<file path=ppt/slides/slide11.xml><?xml version="1.0" encoding="utf-8"?>
-<p:sld xmlns:a="http://schemas.openxmlformats.org/drawingml/2006/main" xmlns:r="http://schemas.openxmlformats.org/officeDocument/2006/relationships" xmlns:p="http://schemas.openxmlformats.org/presentationml/2006/main">
-  <p:cSld name="Slide 11">
-    <p:spTree>
-      <p:nvGrpSpPr>
-        <p:cNvPr id="1" name=""/>
-        <p:cNvGrpSpPr/>
-        <p:nvPr/>
-      </p:nvGrpSpPr>
-      <p:grpSpPr>
-        <a:xfrm>
-          <a:off x="0" y="0"/>
-          <a:ext cx="0" cy="0"/>
-          <a:chOff x="0" y="0"/>
-          <a:chExt cx="0" cy="0"/>
-        </a:xfrm>
-      </p:grpSpPr>
-      <p:sp>
-        <p:nvSpPr>
-          <p:cNvPr id="2" name="Text 0"/>
-          <p:cNvSpPr/>
-          <p:nvPr>
-            <p:ph idx="100" type="title" hasCustomPrompt="1"/>
-          </p:nvPr>
-        </p:nvSpPr>
-        <p:spPr>
-          <a:xfrm>
-            <a:off x="548640" y="320040"/>
-            <a:ext cx="11094415" cy="640080"/>
-          </a:xfrm>
-          <a:prstGeom prst="rect">
-            <a:avLst/>
-          </a:prstGeom>
-          <a:noFill/>
-          <a:ln/>
-        </p:spPr>
-        <p:txBody>
-          <a:bodyPr wrap="square" lIns="0" tIns="0" rIns="0" bIns="0" rtlCol="0" anchor="ctr"/>
-          <a:lstStyle/>
-          <a:p>
-            <a:pPr algn="l" indent="0" marL="0">
-              <a:buNone/>
-            </a:pPr>
-            <a:r>
-              <a:rPr lang="en-US" sz="2800" b="1" dirty="0">
-                <a:solidFill>
-                  <a:schemeClr val="tx2"/>
-                </a:solidFill>
-              </a:rPr>
-              <a:t>当前进展与下一步</a:t>
-            </a:r>
-            <a:endParaRPr lang="en-US" sz="2800" dirty="0"/>
-          </a:p>
-        </p:txBody>
-      </p:sp>
-      <p:sp>
-        <p:nvSpPr>
-          <p:cNvPr id="3" name="Text 0"/>
-          <p:cNvSpPr/>
-          <p:nvPr>
-            <p:ph idx="101" type="body" hasCustomPrompt="1"/>
-          </p:nvPr>
-        </p:nvSpPr>
-        <p:spPr>
-          <a:xfrm>
-            <a:off x="548640" y="960120"/>
-            <a:ext cx="11094415" cy="411480"/>
-          </a:xfrm>
-          <a:prstGeom prst="rect">
-            <a:avLst/>
-          </a:prstGeom>
-          <a:noFill/>
-          <a:ln/>
-        </p:spPr>
-        <p:txBody>
-          <a:bodyPr wrap="square" lIns="0" tIns="0" rIns="0" bIns="0" rtlCol="0" anchor="ctr"/>
-          <a:lstStyle/>
-          <a:p>
-            <a:pPr algn="l" indent="0" marL="0">
-              <a:buNone/>
-            </a:pPr>
-            <a:r>
-              <a:rPr lang="en-US" sz="1500" dirty="0">
-                <a:solidFill>
-                  <a:schemeClr val="accent6"/>
-                </a:solidFill>
-              </a:rPr>
-              <a:t>B、C 已落地；A 类实时核验已有原型，同源现象已实测，其影响待实验验证。</a:t>
-            </a:r>
-            <a:endParaRPr lang="en-US" sz="1500" dirty="0"/>
-          </a:p>
-        </p:txBody>
-      </p:sp>
-      <p:sp>
-        <p:nvSpPr>
-          <p:cNvPr id="4" name="card-221"/>
+          <p:cNvPr id="4" name="card-190"/>
           <p:cNvSpPr/>
           <p:nvPr/>
         </p:nvSpPr>
@@ -3314,7 +2352,7 @@
       </p:sp>
       <p:sp>
         <p:nvSpPr>
-          <p:cNvPr id="5" name="badge-222"/>
+          <p:cNvPr id="5" name="badge-191"/>
           <p:cNvSpPr/>
           <p:nvPr/>
         </p:nvSpPr>
@@ -3356,7 +2394,7 @@
       </p:sp>
       <p:sp>
         <p:nvSpPr>
-          <p:cNvPr id="6" name="label-223"/>
+          <p:cNvPr id="6" name="label-192"/>
           <p:cNvSpPr txBox="1"/>
           <p:nvPr/>
         </p:nvSpPr>
@@ -3392,7 +2430,7 @@
       </p:sp>
       <p:sp>
         <p:nvSpPr>
-          <p:cNvPr id="7" name="bullets-224"/>
+          <p:cNvPr id="7" name="bullets-193"/>
           <p:cNvSpPr txBox="1"/>
           <p:nvPr/>
         </p:nvSpPr>
@@ -3478,7 +2516,7 @@
                   <a:schemeClr val="tx1"/>
                 </a:solidFill>
               </a:rPr>
-              <a:t>实测：40% 的问题存在同源证据</a:t>
+              <a:t>对照实验：同源证据对模型结论影响约 1 分，不单列设计</a:t>
             </a:r>
             <a:endParaRPr lang="en-US" sz="1400" dirty="0"/>
           </a:p>
@@ -3486,7 +2524,7 @@
       </p:sp>
       <p:sp>
         <p:nvSpPr>
-          <p:cNvPr id="8" name="card-225"/>
+          <p:cNvPr id="8" name="card-194"/>
           <p:cNvSpPr/>
           <p:nvPr/>
         </p:nvSpPr>
@@ -3513,7 +2551,7 @@
       </p:sp>
       <p:sp>
         <p:nvSpPr>
-          <p:cNvPr id="9" name="badge-226"/>
+          <p:cNvPr id="9" name="badge-195"/>
           <p:cNvSpPr/>
           <p:nvPr/>
         </p:nvSpPr>
@@ -3555,7 +2593,7 @@
       </p:sp>
       <p:sp>
         <p:nvSpPr>
-          <p:cNvPr id="10" name="label-227"/>
+          <p:cNvPr id="10" name="label-196"/>
           <p:cNvSpPr txBox="1"/>
           <p:nvPr/>
         </p:nvSpPr>
@@ -3591,7 +2629,7 @@
       </p:sp>
       <p:sp>
         <p:nvSpPr>
-          <p:cNvPr id="11" name="bullets-228"/>
+          <p:cNvPr id="11" name="bullets-197"/>
           <p:cNvSpPr txBox="1"/>
           <p:nvPr/>
         </p:nvSpPr>
@@ -3623,7 +2661,7 @@
                   <a:schemeClr val="tx1"/>
                 </a:solidFill>
               </a:rPr>
-              <a:t>同源是否改变模型结论尚未验证</a:t>
+              <a:t>实时核验尚未覆盖全部数据源（撤稿库、试验、药品）</a:t>
             </a:r>
             <a:endParaRPr lang="en-US" sz="1400" dirty="0"/>
           </a:p>
@@ -3641,7 +2679,7 @@
                   <a:schemeClr val="tx1"/>
                 </a:solidFill>
               </a:rPr>
-              <a:t>实时核验尚未覆盖全部数据源（撤稿库、试验、药品）</a:t>
+              <a:t>文献检索目前只返回标题，需附上摘要</a:t>
             </a:r>
             <a:endParaRPr lang="en-US" sz="1400" dirty="0"/>
           </a:p>
@@ -3667,7 +2705,7 @@
       </p:sp>
       <p:sp>
         <p:nvSpPr>
-          <p:cNvPr id="12" name="card-229"/>
+          <p:cNvPr id="12" name="card-198"/>
           <p:cNvSpPr/>
           <p:nvPr/>
         </p:nvSpPr>
@@ -3694,7 +2732,7 @@
       </p:sp>
       <p:sp>
         <p:nvSpPr>
-          <p:cNvPr id="13" name="badge-230"/>
+          <p:cNvPr id="13" name="badge-199"/>
           <p:cNvSpPr/>
           <p:nvPr/>
         </p:nvSpPr>
@@ -3736,7 +2774,7 @@
       </p:sp>
       <p:sp>
         <p:nvSpPr>
-          <p:cNvPr id="14" name="label-231"/>
+          <p:cNvPr id="14" name="label-200"/>
           <p:cNvSpPr txBox="1"/>
           <p:nvPr/>
         </p:nvSpPr>
@@ -3772,7 +2810,7 @@
       </p:sp>
       <p:sp>
         <p:nvSpPr>
-          <p:cNvPr id="15" name="bullets-232"/>
+          <p:cNvPr id="15" name="bullets-201"/>
           <p:cNvSpPr txBox="1"/>
           <p:nvPr/>
         </p:nvSpPr>
@@ -3804,7 +2842,7 @@
                   <a:schemeClr val="tx1"/>
                 </a:solidFill>
               </a:rPr>
-              <a:t>运行“虚假共识”对照实验（脚本与数据已备好，无需人工标注）</a:t>
+              <a:t>实时状态核验接入正式流程，覆盖撤稿、试验、药品三类来源</a:t>
             </a:r>
             <a:endParaRPr lang="en-US" sz="1400" dirty="0"/>
           </a:p>
@@ -3822,7 +2860,7 @@
                   <a:schemeClr val="tx1"/>
                 </a:solidFill>
               </a:rPr>
-              <a:t>按结果决定：来源标注接入系统，或放弃该方向</a:t>
+              <a:t>文献检索附上摘要（小改动）</a:t>
             </a:r>
             <a:endParaRPr lang="en-US" sz="1400" dirty="0"/>
           </a:p>
@@ -3840,7 +2878,7 @@
                   <a:schemeClr val="tx1"/>
                 </a:solidFill>
               </a:rPr>
-              <a:t>实时状态核验接入正式流程，覆盖撤稿、试验、药品三类来源</a:t>
+              <a:t>在结论不确定、药名脱敏的问题上复核同源影响</a:t>
             </a:r>
             <a:endParaRPr lang="en-US" sz="1400" dirty="0"/>
           </a:p>
@@ -3866,7 +2904,7 @@
       </p:sp>
       <p:sp>
         <p:nvSpPr>
-          <p:cNvPr id="16" name="ask-233"/>
+          <p:cNvPr id="16" name="ask-202"/>
           <p:cNvSpPr/>
           <p:nvPr/>
         </p:nvSpPr>
@@ -3893,7 +2931,7 @@
       </p:sp>
       <p:sp>
         <p:nvSpPr>
-          <p:cNvPr id="17" name="label-234"/>
+          <p:cNvPr id="17" name="label-203"/>
           <p:cNvSpPr txBox="1"/>
           <p:nvPr/>
         </p:nvSpPr>
@@ -3921,7 +2959,7 @@
                   <a:schemeClr val="bg1"/>
                 </a:solidFill>
               </a:rPr>
-              <a:t>请审阅：是否支持开展“虚假共识”对照实验，并按结果决定来源标注的去留（下一步第 1、2 项）。</a:t>
+              <a:t>请审阅：是否支持将实时状态核验接入正式流程（下一步第 1 项）。</a:t>
             </a:r>
             <a:endParaRPr lang="en-US" sz="1500" dirty="0"/>
           </a:p>
@@ -3966,7 +3004,7 @@
             <a:pPr algn="r"/>
             <a:fld id="{F7021451-1387-4CA6-816F-3879F97B5CBC}" type="slidenum">
               <a:rPr b="0" lang="en-US"/>
-              <a:t>11</a:t>
+              <a:t>10</a:t>
             </a:fld>
             <a:endParaRPr lang="en-US"/>
           </a:p>
@@ -4349,7 +3387,7 @@
                   <a:schemeClr val="tx1"/>
                 </a:solidFill>
               </a:rPr>
-              <a:t>三类设计：证据治理（实时核验依据是否已被推翻，标明同源证据）、多智能体协作（像课题组一样分工、审查把关）、本地运行（科研与临床数据留在本机）。</a:t>
+              <a:t>三类设计：证据治理（实时核验依据是否已被推翻，引用可核查）、多智能体协作（像课题组一样分工、审查把关）、本地运行（科研与临床数据留在本机）。</a:t>
             </a:r>
             <a:endParaRPr lang="en-US" sz="1500" dirty="0"/>
           </a:p>
@@ -4490,7 +3528,7 @@
                   <a:schemeClr val="tx1"/>
                 </a:solidFill>
               </a:rPr>
-              <a:t>v3.0.0 已发布：三平台安装包和本地 Web 版。实时核验已有原型；同源证据现象已实测，其影响待实验验证。</a:t>
+              <a:t>v3.0.0 已发布：三平台安装包和本地 Web 版。实时核验已有原型；“同源证据”经对照实验检验，影响很小，不再单列。</a:t>
             </a:r>
             <a:endParaRPr lang="en-US" sz="1500" dirty="0"/>
           </a:p>
@@ -5607,7 +4645,7 @@
                           <a:ea typeface="Microsoft YaHei" pitchFamily="34" charset="-122"/>
                           <a:cs typeface="Microsoft YaHei" pitchFamily="34" charset="-120"/>
                         </a:rPr>
-                        <a:t>来源可见：标明哪些论文来自同一试验</a:t>
+                        <a:t>先做实验：模型读到摘要能自行识别，系统只需附上摘要</a:t>
                       </a:r>
                       <a:endParaRPr lang="en-US" sz="1300" dirty="0">
                         <a:latin typeface="Microsoft YaHei" charset="0"/>
@@ -7154,7 +6192,7 @@
         <p:spPr>
           <a:xfrm>
             <a:off x="2423160" y="3904488"/>
-            <a:ext cx="2362200" cy="438912"/>
+            <a:ext cx="3611880" cy="438912"/>
           </a:xfrm>
           <a:prstGeom prst="roundRect">
             <a:avLst>
@@ -7197,8 +6235,8 @@
         </p:nvSpPr>
         <p:spPr>
           <a:xfrm>
-            <a:off x="4922520" y="3904488"/>
-            <a:ext cx="2362200" cy="438912"/>
+            <a:off x="6172200" y="3904488"/>
+            <a:ext cx="3611880" cy="438912"/>
           </a:xfrm>
           <a:prstGeom prst="roundRect">
             <a:avLst>
@@ -7227,7 +6265,7 @@
                   <a:schemeClr val="tx1"/>
                 </a:solidFill>
               </a:rPr>
-              <a:t>来源可见</a:t>
+              <a:t>可核查引用</a:t>
             </a:r>
             <a:endParaRPr lang="en-US" sz="1250" dirty="0"/>
           </a:p>
@@ -7236,50 +6274,6 @@
       <p:sp>
         <p:nvSpPr>
           <p:cNvPr id="27" name="box-47"/>
-          <p:cNvSpPr/>
-          <p:nvPr/>
-        </p:nvSpPr>
-        <p:spPr>
-          <a:xfrm>
-            <a:off x="7421880" y="3904488"/>
-            <a:ext cx="2362200" cy="438912"/>
-          </a:xfrm>
-          <a:prstGeom prst="roundRect">
-            <a:avLst>
-              <a:gd name="adj" fmla="val 16667"/>
-            </a:avLst>
-          </a:prstGeom>
-          <a:solidFill>
-            <a:schemeClr val="bg1"/>
-          </a:solidFill>
-          <a:ln w="12700">
-            <a:solidFill>
-              <a:srgbClr val="D5DCE4"/>
-            </a:solidFill>
-          </a:ln>
-        </p:spPr>
-        <p:txBody>
-          <a:bodyPr wrap="square" lIns="762" tIns="762" rIns="762" bIns="762" rtlCol="0" anchor="ctr"/>
-          <a:lstStyle/>
-          <a:p>
-            <a:pPr algn="ctr" indent="0" marL="0">
-              <a:buNone/>
-            </a:pPr>
-            <a:r>
-              <a:rPr lang="en-US" sz="1250" dirty="0">
-                <a:solidFill>
-                  <a:schemeClr val="tx1"/>
-                </a:solidFill>
-              </a:rPr>
-              <a:t>可核查引用</a:t>
-            </a:r>
-            <a:endParaRPr lang="en-US" sz="1250" dirty="0"/>
-          </a:p>
-        </p:txBody>
-      </p:sp>
-      <p:sp>
-        <p:nvSpPr>
-          <p:cNvPr id="28" name="box-48"/>
           <p:cNvSpPr/>
           <p:nvPr/>
         </p:nvSpPr>
@@ -7323,7 +6317,7 @@
       </p:sp>
       <p:sp>
         <p:nvSpPr>
-          <p:cNvPr id="29" name="layer-49"/>
+          <p:cNvPr id="28" name="layer-48"/>
           <p:cNvSpPr/>
           <p:nvPr/>
         </p:nvSpPr>
@@ -7350,7 +6344,7 @@
       </p:sp>
       <p:sp>
         <p:nvSpPr>
-          <p:cNvPr id="30" name="box-50"/>
+          <p:cNvPr id="29" name="box-49"/>
           <p:cNvSpPr/>
           <p:nvPr/>
         </p:nvSpPr>
@@ -7394,7 +6388,7 @@
       </p:sp>
       <p:sp>
         <p:nvSpPr>
-          <p:cNvPr id="31" name="box-51"/>
+          <p:cNvPr id="30" name="box-50"/>
           <p:cNvSpPr/>
           <p:nvPr/>
         </p:nvSpPr>
@@ -7438,7 +6432,7 @@
       </p:sp>
       <p:sp>
         <p:nvSpPr>
-          <p:cNvPr id="32" name="box-52"/>
+          <p:cNvPr id="31" name="box-51"/>
           <p:cNvSpPr/>
           <p:nvPr/>
         </p:nvSpPr>
@@ -7482,7 +6476,7 @@
       </p:sp>
       <p:sp>
         <p:nvSpPr>
-          <p:cNvPr id="33" name="box-53"/>
+          <p:cNvPr id="32" name="box-52"/>
           <p:cNvSpPr/>
           <p:nvPr/>
         </p:nvSpPr>
@@ -7526,7 +6520,7 @@
       </p:sp>
       <p:sp>
         <p:nvSpPr>
-          <p:cNvPr id="34" name="box-54"/>
+          <p:cNvPr id="33" name="box-53"/>
           <p:cNvSpPr/>
           <p:nvPr/>
         </p:nvSpPr>
@@ -7570,7 +6564,7 @@
       </p:sp>
       <p:sp>
         <p:nvSpPr>
-          <p:cNvPr id="35" name="layer-55"/>
+          <p:cNvPr id="34" name="layer-54"/>
           <p:cNvSpPr/>
           <p:nvPr/>
         </p:nvSpPr>
@@ -7597,7 +6591,7 @@
       </p:sp>
       <p:sp>
         <p:nvSpPr>
-          <p:cNvPr id="36" name="box-56"/>
+          <p:cNvPr id="35" name="box-55"/>
           <p:cNvSpPr/>
           <p:nvPr/>
         </p:nvSpPr>
@@ -7641,7 +6635,7 @@
       </p:sp>
       <p:sp>
         <p:nvSpPr>
-          <p:cNvPr id="37" name="hooks-57"/>
+          <p:cNvPr id="36" name="hooks-56"/>
           <p:cNvSpPr/>
           <p:nvPr/>
         </p:nvSpPr>
@@ -7668,14 +6662,50 @@
       </p:sp>
       <p:sp>
         <p:nvSpPr>
+          <p:cNvPr id="37" name="label-57"/>
+          <p:cNvSpPr txBox="1"/>
+          <p:nvPr/>
+        </p:nvSpPr>
+        <p:spPr>
+          <a:xfrm>
+            <a:off x="10195560" y="2377440"/>
+            <a:ext cx="1356055" cy="365760"/>
+          </a:xfrm>
+          <a:prstGeom prst="rect">
+            <a:avLst/>
+          </a:prstGeom>
+          <a:noFill/>
+          <a:ln/>
+        </p:spPr>
+        <p:txBody>
+          <a:bodyPr wrap="square" lIns="0" tIns="0" rIns="0" bIns="0" rtlCol="0" anchor="t"/>
+          <a:lstStyle/>
+          <a:p>
+            <a:pPr algn="ctr" indent="0" marL="0">
+              <a:buNone/>
+            </a:pPr>
+            <a:r>
+              <a:rPr lang="en-US" sz="1500" b="1" dirty="0">
+                <a:solidFill>
+                  <a:schemeClr val="bg1"/>
+                </a:solidFill>
+              </a:rPr>
+              <a:t>防护钩子</a:t>
+            </a:r>
+            <a:endParaRPr lang="en-US" sz="1500" dirty="0"/>
+          </a:p>
+        </p:txBody>
+      </p:sp>
+      <p:sp>
+        <p:nvSpPr>
           <p:cNvPr id="38" name="label-58"/>
           <p:cNvSpPr txBox="1"/>
           <p:nvPr/>
         </p:nvSpPr>
         <p:spPr>
           <a:xfrm>
-            <a:off x="10195560" y="2377440"/>
-            <a:ext cx="1356055" cy="365760"/>
+            <a:off x="10195560" y="2715768"/>
+            <a:ext cx="1356055" cy="274320"/>
           </a:xfrm>
           <a:prstGeom prst="rect">
             <a:avLst/>
@@ -7691,42 +6721,6 @@
               <a:buNone/>
             </a:pPr>
             <a:r>
-              <a:rPr lang="en-US" sz="1500" b="1" dirty="0">
-                <a:solidFill>
-                  <a:schemeClr val="bg1"/>
-                </a:solidFill>
-              </a:rPr>
-              <a:t>防护钩子</a:t>
-            </a:r>
-            <a:endParaRPr lang="en-US" sz="1500" dirty="0"/>
-          </a:p>
-        </p:txBody>
-      </p:sp>
-      <p:sp>
-        <p:nvSpPr>
-          <p:cNvPr id="39" name="label-59"/>
-          <p:cNvSpPr txBox="1"/>
-          <p:nvPr/>
-        </p:nvSpPr>
-        <p:spPr>
-          <a:xfrm>
-            <a:off x="10195560" y="2715768"/>
-            <a:ext cx="1356055" cy="274320"/>
-          </a:xfrm>
-          <a:prstGeom prst="rect">
-            <a:avLst/>
-          </a:prstGeom>
-          <a:noFill/>
-          <a:ln/>
-        </p:spPr>
-        <p:txBody>
-          <a:bodyPr wrap="square" lIns="0" tIns="0" rIns="0" bIns="0" rtlCol="0" anchor="t"/>
-          <a:lstStyle/>
-          <a:p>
-            <a:pPr algn="ctr" indent="0" marL="0">
-              <a:buNone/>
-            </a:pPr>
-            <a:r>
               <a:rPr lang="en-US" sz="1050" dirty="0">
                 <a:solidFill>
                   <a:srgbClr val="B9C7D6"/>
@@ -7740,7 +6734,7 @@
       </p:sp>
       <p:sp>
         <p:nvSpPr>
-          <p:cNvPr id="40" name="box-60"/>
+          <p:cNvPr id="39" name="box-59"/>
           <p:cNvSpPr/>
           <p:nvPr/>
         </p:nvSpPr>
@@ -7784,7 +6778,7 @@
       </p:sp>
       <p:sp>
         <p:nvSpPr>
-          <p:cNvPr id="41" name="box-61"/>
+          <p:cNvPr id="40" name="box-60"/>
           <p:cNvSpPr/>
           <p:nvPr/>
         </p:nvSpPr>
@@ -7828,7 +6822,7 @@
       </p:sp>
       <p:sp>
         <p:nvSpPr>
-          <p:cNvPr id="42" name="box-62"/>
+          <p:cNvPr id="41" name="box-61"/>
           <p:cNvSpPr/>
           <p:nvPr/>
         </p:nvSpPr>
@@ -7872,7 +6866,7 @@
       </p:sp>
       <p:sp>
         <p:nvSpPr>
-          <p:cNvPr id="43" name="box-63"/>
+          <p:cNvPr id="42" name="box-62"/>
           <p:cNvSpPr/>
           <p:nvPr/>
         </p:nvSpPr>
@@ -8062,7 +7056,7 @@
       </p:sp>
       <p:sp>
         <p:nvSpPr>
-          <p:cNvPr id="4" name="badge-64"/>
+          <p:cNvPr id="4" name="badge-63"/>
           <p:cNvSpPr/>
           <p:nvPr/>
         </p:nvSpPr>
@@ -8104,7 +7098,7 @@
       </p:sp>
       <p:sp>
         <p:nvSpPr>
-          <p:cNvPr id="5" name="box-65"/>
+          <p:cNvPr id="5" name="box-64"/>
           <p:cNvSpPr/>
           <p:nvPr/>
         </p:nvSpPr>
@@ -8148,7 +7142,7 @@
       </p:sp>
       <p:sp>
         <p:nvSpPr>
-          <p:cNvPr id="6" name="label-66"/>
+          <p:cNvPr id="6" name="label-65"/>
           <p:cNvSpPr txBox="1"/>
           <p:nvPr/>
         </p:nvSpPr>
@@ -8184,7 +7178,7 @@
       </p:sp>
       <p:sp>
         <p:nvSpPr>
-          <p:cNvPr id="7" name="arrow-67"/>
+          <p:cNvPr id="7" name="arrow-66"/>
           <p:cNvSpPr/>
           <p:nvPr/>
         </p:nvSpPr>
@@ -8208,7 +7202,7 @@
       </p:sp>
       <p:sp>
         <p:nvSpPr>
-          <p:cNvPr id="8" name="badge-68"/>
+          <p:cNvPr id="8" name="badge-67"/>
           <p:cNvSpPr/>
           <p:nvPr/>
         </p:nvSpPr>
@@ -8250,7 +7244,7 @@
       </p:sp>
       <p:sp>
         <p:nvSpPr>
-          <p:cNvPr id="9" name="box-69"/>
+          <p:cNvPr id="9" name="box-68"/>
           <p:cNvSpPr/>
           <p:nvPr/>
         </p:nvSpPr>
@@ -8294,7 +7288,7 @@
       </p:sp>
       <p:sp>
         <p:nvSpPr>
-          <p:cNvPr id="10" name="label-70"/>
+          <p:cNvPr id="10" name="label-69"/>
           <p:cNvSpPr txBox="1"/>
           <p:nvPr/>
         </p:nvSpPr>
@@ -8330,7 +7324,7 @@
       </p:sp>
       <p:sp>
         <p:nvSpPr>
-          <p:cNvPr id="11" name="arrow-71"/>
+          <p:cNvPr id="11" name="arrow-70"/>
           <p:cNvSpPr/>
           <p:nvPr/>
         </p:nvSpPr>
@@ -8354,7 +7348,7 @@
       </p:sp>
       <p:sp>
         <p:nvSpPr>
-          <p:cNvPr id="12" name="badge-72"/>
+          <p:cNvPr id="12" name="badge-71"/>
           <p:cNvSpPr/>
           <p:nvPr/>
         </p:nvSpPr>
@@ -8396,7 +7390,7 @@
       </p:sp>
       <p:sp>
         <p:nvSpPr>
-          <p:cNvPr id="13" name="box-73"/>
+          <p:cNvPr id="13" name="box-72"/>
           <p:cNvSpPr/>
           <p:nvPr/>
         </p:nvSpPr>
@@ -8440,7 +7434,7 @@
       </p:sp>
       <p:sp>
         <p:nvSpPr>
-          <p:cNvPr id="14" name="label-74"/>
+          <p:cNvPr id="14" name="label-73"/>
           <p:cNvSpPr txBox="1"/>
           <p:nvPr/>
         </p:nvSpPr>
@@ -8468,7 +7462,7 @@
                   <a:schemeClr val="accent6"/>
                 </a:solidFill>
               </a:rPr>
-              <a:t>文献与数据库结果</a:t>
+              <a:t>标题 + 摘要</a:t>
             </a:r>
             <a:endParaRPr lang="en-US" sz="1150" dirty="0"/>
           </a:p>
@@ -8476,7 +7470,7 @@
       </p:sp>
       <p:sp>
         <p:nvSpPr>
-          <p:cNvPr id="15" name="arrow-75"/>
+          <p:cNvPr id="15" name="arrow-74"/>
           <p:cNvSpPr/>
           <p:nvPr/>
         </p:nvSpPr>
@@ -8500,7 +7494,7 @@
       </p:sp>
       <p:sp>
         <p:nvSpPr>
-          <p:cNvPr id="16" name="badge-76"/>
+          <p:cNvPr id="16" name="badge-75"/>
           <p:cNvSpPr/>
           <p:nvPr/>
         </p:nvSpPr>
@@ -8542,7 +7536,7 @@
       </p:sp>
       <p:sp>
         <p:nvSpPr>
-          <p:cNvPr id="17" name="box-77"/>
+          <p:cNvPr id="17" name="box-76"/>
           <p:cNvSpPr/>
           <p:nvPr/>
         </p:nvSpPr>
@@ -8586,7 +7580,7 @@
       </p:sp>
       <p:sp>
         <p:nvSpPr>
-          <p:cNvPr id="18" name="label-78"/>
+          <p:cNvPr id="18" name="label-77"/>
           <p:cNvSpPr txBox="1"/>
           <p:nvPr/>
         </p:nvSpPr>
@@ -8622,7 +7616,7 @@
       </p:sp>
       <p:sp>
         <p:nvSpPr>
-          <p:cNvPr id="19" name="arrow-79"/>
+          <p:cNvPr id="19" name="arrow-78"/>
           <p:cNvSpPr/>
           <p:nvPr/>
         </p:nvSpPr>
@@ -8646,7 +7640,7 @@
       </p:sp>
       <p:sp>
         <p:nvSpPr>
-          <p:cNvPr id="20" name="badge-80"/>
+          <p:cNvPr id="20" name="badge-79"/>
           <p:cNvSpPr/>
           <p:nvPr/>
         </p:nvSpPr>
@@ -8688,7 +7682,7 @@
       </p:sp>
       <p:sp>
         <p:nvSpPr>
-          <p:cNvPr id="21" name="box-81"/>
+          <p:cNvPr id="21" name="box-80"/>
           <p:cNvSpPr/>
           <p:nvPr/>
         </p:nvSpPr>
@@ -8724,7 +7718,7 @@
                   <a:schemeClr val="tx2"/>
                 </a:solidFill>
               </a:rPr>
-              <a:t>来源标注</a:t>
+              <a:t>状态核验</a:t>
             </a:r>
             <a:endParaRPr lang="en-US" sz="1350" dirty="0"/>
           </a:p>
@@ -8732,7 +7726,7 @@
       </p:sp>
       <p:sp>
         <p:nvSpPr>
-          <p:cNvPr id="22" name="label-82"/>
+          <p:cNvPr id="22" name="label-81"/>
           <p:cNvSpPr txBox="1"/>
           <p:nvPr/>
         </p:nvSpPr>
@@ -8760,7 +7754,7 @@
                   <a:schemeClr val="accent6"/>
                 </a:solidFill>
               </a:rPr>
-              <a:t>同源关系</a:t>
+              <a:t>撤稿 / 终止 / 撤市</a:t>
             </a:r>
             <a:endParaRPr lang="en-US" sz="1150" dirty="0"/>
           </a:p>
@@ -8768,7 +7762,7 @@
       </p:sp>
       <p:sp>
         <p:nvSpPr>
-          <p:cNvPr id="23" name="arrow-83"/>
+          <p:cNvPr id="23" name="arrow-82"/>
           <p:cNvSpPr/>
           <p:nvPr/>
         </p:nvSpPr>
@@ -8792,7 +7786,7 @@
       </p:sp>
       <p:sp>
         <p:nvSpPr>
-          <p:cNvPr id="24" name="badge-84"/>
+          <p:cNvPr id="24" name="badge-83"/>
           <p:cNvSpPr/>
           <p:nvPr/>
         </p:nvSpPr>
@@ -8834,7 +7828,7 @@
       </p:sp>
       <p:sp>
         <p:nvSpPr>
-          <p:cNvPr id="25" name="box-85"/>
+          <p:cNvPr id="25" name="box-84"/>
           <p:cNvSpPr/>
           <p:nvPr/>
         </p:nvSpPr>
@@ -8870,7 +7864,7 @@
                   <a:schemeClr val="tx2"/>
                 </a:solidFill>
               </a:rPr>
-              <a:t>状态核验</a:t>
+              <a:t>引用检查</a:t>
             </a:r>
             <a:endParaRPr lang="en-US" sz="1350" dirty="0"/>
           </a:p>
@@ -8878,7 +7872,7 @@
       </p:sp>
       <p:sp>
         <p:nvSpPr>
-          <p:cNvPr id="26" name="label-86"/>
+          <p:cNvPr id="26" name="label-85"/>
           <p:cNvSpPr txBox="1"/>
           <p:nvPr/>
         </p:nvSpPr>
@@ -8906,7 +7900,7 @@
                   <a:schemeClr val="accent6"/>
                 </a:solidFill>
               </a:rPr>
-              <a:t>撤稿 / 终止 / 撤市</a:t>
+              <a:t>证据编号存在</a:t>
             </a:r>
             <a:endParaRPr lang="en-US" sz="1150" dirty="0"/>
           </a:p>
@@ -8914,7 +7908,7 @@
       </p:sp>
       <p:sp>
         <p:nvSpPr>
-          <p:cNvPr id="27" name="arrow-87"/>
+          <p:cNvPr id="27" name="arrow-86"/>
           <p:cNvSpPr/>
           <p:nvPr/>
         </p:nvSpPr>
@@ -8938,7 +7932,7 @@
       </p:sp>
       <p:sp>
         <p:nvSpPr>
-          <p:cNvPr id="28" name="badge-88"/>
+          <p:cNvPr id="28" name="badge-87"/>
           <p:cNvSpPr/>
           <p:nvPr/>
         </p:nvSpPr>
@@ -8951,11 +7945,11 @@
             <a:avLst/>
           </a:prstGeom>
           <a:solidFill>
-            <a:schemeClr val="accent1"/>
+            <a:schemeClr val="accent2"/>
           </a:solidFill>
           <a:ln w="6350">
             <a:solidFill>
-              <a:schemeClr val="accent1"/>
+              <a:schemeClr val="accent2"/>
             </a:solidFill>
           </a:ln>
         </p:spPr>
@@ -8980,7 +7974,7 @@
       </p:sp>
       <p:sp>
         <p:nvSpPr>
-          <p:cNvPr id="29" name="box-89"/>
+          <p:cNvPr id="29" name="box-88"/>
           <p:cNvSpPr/>
           <p:nvPr/>
         </p:nvSpPr>
@@ -8995,11 +7989,11 @@
             </a:avLst>
           </a:prstGeom>
           <a:solidFill>
-            <a:srgbClr val="E3F3F1"/>
+            <a:srgbClr val="F2F5F8"/>
           </a:solidFill>
-          <a:ln w="12700">
+          <a:ln w="6350">
             <a:solidFill>
-              <a:srgbClr val="0E8A7E"/>
+              <a:srgbClr val="F2F5F8"/>
             </a:solidFill>
           </a:ln>
         </p:spPr>
@@ -9016,7 +8010,7 @@
                   <a:schemeClr val="tx2"/>
                 </a:solidFill>
               </a:rPr>
-              <a:t>引用检查</a:t>
+              <a:t>综合判断</a:t>
             </a:r>
             <a:endParaRPr lang="en-US" sz="1350" dirty="0"/>
           </a:p>
@@ -9024,7 +8018,7 @@
       </p:sp>
       <p:sp>
         <p:nvSpPr>
-          <p:cNvPr id="30" name="label-90"/>
+          <p:cNvPr id="30" name="label-89"/>
           <p:cNvSpPr txBox="1"/>
           <p:nvPr/>
         </p:nvSpPr>
@@ -9052,7 +8046,7 @@
                   <a:schemeClr val="accent6"/>
                 </a:solidFill>
               </a:rPr>
-              <a:t>证据编号存在</a:t>
+              <a:t>审查员把关</a:t>
             </a:r>
             <a:endParaRPr lang="en-US" sz="1150" dirty="0"/>
           </a:p>
@@ -9060,7 +8054,7 @@
       </p:sp>
       <p:sp>
         <p:nvSpPr>
-          <p:cNvPr id="31" name="arrow-91"/>
+          <p:cNvPr id="31" name="arrow-90"/>
           <p:cNvSpPr/>
           <p:nvPr/>
         </p:nvSpPr>
@@ -9084,7 +8078,7 @@
       </p:sp>
       <p:sp>
         <p:nvSpPr>
-          <p:cNvPr id="32" name="badge-92"/>
+          <p:cNvPr id="32" name="badge-91"/>
           <p:cNvSpPr/>
           <p:nvPr/>
         </p:nvSpPr>
@@ -9126,7 +8120,7 @@
       </p:sp>
       <p:sp>
         <p:nvSpPr>
-          <p:cNvPr id="33" name="box-93"/>
+          <p:cNvPr id="33" name="box-92"/>
           <p:cNvSpPr/>
           <p:nvPr/>
         </p:nvSpPr>
@@ -9170,7 +8164,7 @@
       </p:sp>
       <p:sp>
         <p:nvSpPr>
-          <p:cNvPr id="34" name="label-94"/>
+          <p:cNvPr id="34" name="label-93"/>
           <p:cNvSpPr txBox="1"/>
           <p:nvPr/>
         </p:nvSpPr>
@@ -9206,7 +8200,7 @@
       </p:sp>
       <p:sp>
         <p:nvSpPr>
-          <p:cNvPr id="35" name="legend-95"/>
+          <p:cNvPr id="35" name="legend-94"/>
           <p:cNvSpPr/>
           <p:nvPr/>
         </p:nvSpPr>
@@ -9233,7 +8227,7 @@
       </p:sp>
       <p:sp>
         <p:nvSpPr>
-          <p:cNvPr id="36" name="label-96"/>
+          <p:cNvPr id="36" name="label-95"/>
           <p:cNvSpPr txBox="1"/>
           <p:nvPr/>
         </p:nvSpPr>
@@ -9269,7 +8263,7 @@
       </p:sp>
       <p:sp>
         <p:nvSpPr>
-          <p:cNvPr id="37" name="card-97"/>
+          <p:cNvPr id="37" name="card-96"/>
           <p:cNvSpPr/>
           <p:nvPr/>
         </p:nvSpPr>
@@ -9296,7 +8290,7 @@
       </p:sp>
       <p:sp>
         <p:nvSpPr>
-          <p:cNvPr id="38" name="label-98"/>
+          <p:cNvPr id="38" name="label-97"/>
           <p:cNvSpPr txBox="1"/>
           <p:nvPr/>
         </p:nvSpPr>
@@ -9332,7 +8326,7 @@
       </p:sp>
       <p:sp>
         <p:nvSpPr>
-          <p:cNvPr id="39" name="box-99"/>
+          <p:cNvPr id="39" name="box-98"/>
           <p:cNvSpPr/>
           <p:nvPr/>
         </p:nvSpPr>
@@ -9390,7 +8384,7 @@
       </p:sp>
       <p:sp>
         <p:nvSpPr>
-          <p:cNvPr id="40" name="arrow-100"/>
+          <p:cNvPr id="40" name="arrow-99"/>
           <p:cNvSpPr/>
           <p:nvPr/>
         </p:nvSpPr>
@@ -9414,7 +8408,7 @@
       </p:sp>
       <p:sp>
         <p:nvSpPr>
-          <p:cNvPr id="41" name="box-101"/>
+          <p:cNvPr id="41" name="box-100"/>
           <p:cNvSpPr/>
           <p:nvPr/>
         </p:nvSpPr>
@@ -9458,7 +8452,7 @@
       </p:sp>
       <p:sp>
         <p:nvSpPr>
-          <p:cNvPr id="42" name="arrow-102"/>
+          <p:cNvPr id="42" name="arrow-101"/>
           <p:cNvSpPr/>
           <p:nvPr/>
         </p:nvSpPr>
@@ -9482,7 +8476,7 @@
       </p:sp>
       <p:sp>
         <p:nvSpPr>
-          <p:cNvPr id="43" name="box-103"/>
+          <p:cNvPr id="43" name="box-102"/>
           <p:cNvSpPr/>
           <p:nvPr/>
         </p:nvSpPr>
@@ -9540,7 +8534,7 @@
       </p:sp>
       <p:sp>
         <p:nvSpPr>
-          <p:cNvPr id="44" name="arrow-104"/>
+          <p:cNvPr id="44" name="arrow-103"/>
           <p:cNvSpPr/>
           <p:nvPr/>
         </p:nvSpPr>
@@ -9564,7 +8558,7 @@
       </p:sp>
       <p:sp>
         <p:nvSpPr>
-          <p:cNvPr id="45" name="box-105"/>
+          <p:cNvPr id="45" name="box-104"/>
           <p:cNvSpPr/>
           <p:nvPr/>
         </p:nvSpPr>
@@ -9622,7 +8616,7 @@
       </p:sp>
       <p:sp>
         <p:nvSpPr>
-          <p:cNvPr id="46" name="label-106"/>
+          <p:cNvPr id="46" name="label-105"/>
           <p:cNvSpPr txBox="1"/>
           <p:nvPr/>
         </p:nvSpPr>
@@ -9804,7 +8798,7 @@
       </p:sp>
       <p:sp>
         <p:nvSpPr>
-          <p:cNvPr id="4" name="card-107"/>
+          <p:cNvPr id="4" name="card-106"/>
           <p:cNvSpPr/>
           <p:nvPr/>
         </p:nvSpPr>
@@ -9831,7 +8825,7 @@
       </p:sp>
       <p:sp>
         <p:nvSpPr>
-          <p:cNvPr id="5" name="label-108"/>
+          <p:cNvPr id="5" name="label-107"/>
           <p:cNvSpPr txBox="1"/>
           <p:nvPr/>
         </p:nvSpPr>
@@ -9867,7 +8861,7 @@
       </p:sp>
       <p:sp>
         <p:nvSpPr>
-          <p:cNvPr id="6" name="label-109"/>
+          <p:cNvPr id="6" name="label-108"/>
           <p:cNvSpPr txBox="1"/>
           <p:nvPr/>
         </p:nvSpPr>
@@ -9903,7 +8897,7 @@
       </p:sp>
       <p:graphicFrame>
         <p:nvGraphicFramePr>
-          <p:cNvPr id="7" name="table-110"/>
+          <p:cNvPr id="7" name="table-109"/>
           <p:cNvGraphicFramePr>
             <a:graphicFrameLocks noGrp="1"/>
           </p:cNvGraphicFramePr>
@@ -10799,7 +9793,7 @@
       </p:graphicFrame>
       <p:sp>
         <p:nvSpPr>
-          <p:cNvPr id="8" name="label-111"/>
+          <p:cNvPr id="8" name="label-110"/>
           <p:cNvSpPr txBox="1"/>
           <p:nvPr/>
         </p:nvSpPr>
@@ -10835,7 +9829,7 @@
       </p:sp>
       <p:sp>
         <p:nvSpPr>
-          <p:cNvPr id="9" name="label-112"/>
+          <p:cNvPr id="9" name="label-111"/>
           <p:cNvSpPr txBox="1"/>
           <p:nvPr/>
         </p:nvSpPr>
@@ -10871,7 +9865,7 @@
       </p:sp>
       <p:sp>
         <p:nvSpPr>
-          <p:cNvPr id="10" name="card-113"/>
+          <p:cNvPr id="10" name="card-112"/>
           <p:cNvSpPr/>
           <p:nvPr/>
         </p:nvSpPr>
@@ -10898,7 +9892,7 @@
       </p:sp>
       <p:sp>
         <p:nvSpPr>
-          <p:cNvPr id="11" name="label-114"/>
+          <p:cNvPr id="11" name="label-113"/>
           <p:cNvSpPr txBox="1"/>
           <p:nvPr/>
         </p:nvSpPr>
@@ -10934,7 +9928,7 @@
       </p:sp>
       <p:sp>
         <p:nvSpPr>
-          <p:cNvPr id="12" name="label-115"/>
+          <p:cNvPr id="12" name="label-114"/>
           <p:cNvSpPr txBox="1"/>
           <p:nvPr/>
         </p:nvSpPr>
@@ -10970,7 +9964,7 @@
       </p:sp>
       <p:graphicFrame>
         <p:nvGraphicFramePr>
-          <p:cNvPr id="13" name="table-116"/>
+          <p:cNvPr id="13" name="table-115"/>
           <p:cNvGraphicFramePr>
             <a:graphicFrameLocks noGrp="1"/>
           </p:cNvGraphicFramePr>
@@ -11825,7 +10819,7 @@
       </p:graphicFrame>
       <p:sp>
         <p:nvSpPr>
-          <p:cNvPr id="14" name="label-117"/>
+          <p:cNvPr id="14" name="label-116"/>
           <p:cNvSpPr txBox="1"/>
           <p:nvPr/>
         </p:nvSpPr>
@@ -11861,7 +10855,7 @@
       </p:sp>
       <p:sp>
         <p:nvSpPr>
-          <p:cNvPr id="15" name="label-118"/>
+          <p:cNvPr id="15" name="label-117"/>
           <p:cNvSpPr txBox="1"/>
           <p:nvPr/>
         </p:nvSpPr>
@@ -11897,7 +10891,7 @@
       </p:sp>
       <p:sp>
         <p:nvSpPr>
-          <p:cNvPr id="16" name="label-119"/>
+          <p:cNvPr id="16" name="label-118"/>
           <p:cNvSpPr txBox="1"/>
           <p:nvPr/>
         </p:nvSpPr>
@@ -12033,7 +11027,7 @@
                   <a:schemeClr val="tx2"/>
                 </a:solidFill>
               </a:rPr>
-              <a:t>来源可见：标明哪些论文来自同一个试验</a:t>
+              <a:t>实验结论：同源证据普遍存在，但模型读到摘要时能自行识别</a:t>
             </a:r>
             <a:endParaRPr lang="en-US" sz="2800" dirty="0"/>
           </a:p>
@@ -12071,7 +11065,7 @@
                   <a:schemeClr val="accent6"/>
                 </a:solidFill>
               </a:rPr>
-              <a:t>把每篇论文的上游试验编号随证据一起交给模型和用户；只标注，不定级，判断留给专家。</a:t>
+              <a:t>先实测现象，再用对照实验检验它是否改变模型结论；按事先定好的规则决定去留。</a:t>
             </a:r>
             <a:endParaRPr lang="en-US" sz="1500" dirty="0"/>
           </a:p>
@@ -12079,18 +11073,18 @@
       </p:sp>
       <p:sp>
         <p:nvSpPr>
-          <p:cNvPr id="4" name="card-120"/>
+          <p:cNvPr id="4" name="card-119"/>
           <p:cNvSpPr/>
           <p:nvPr/>
         </p:nvSpPr>
         <p:spPr>
           <a:xfrm>
             <a:off x="548640" y="1600200"/>
-            <a:ext cx="6675120" cy="4526280"/>
+            <a:ext cx="4206240" cy="3886200"/>
           </a:xfrm>
           <a:prstGeom prst="roundRect">
             <a:avLst>
-              <a:gd name="adj" fmla="val 2020"/>
+              <a:gd name="adj" fmla="val 2353"/>
             </a:avLst>
           </a:prstGeom>
           <a:solidFill>
@@ -12106,571 +11100,17 @@
       </p:sp>
       <p:sp>
         <p:nvSpPr>
-          <p:cNvPr id="5" name="label-121"/>
-          <p:cNvSpPr txBox="1"/>
-          <p:nvPr/>
-        </p:nvSpPr>
-        <p:spPr>
-          <a:xfrm>
-            <a:off x="822960" y="1737360"/>
-            <a:ext cx="6126480" cy="329184"/>
-          </a:xfrm>
-          <a:prstGeom prst="rect">
-            <a:avLst/>
-          </a:prstGeom>
-          <a:noFill/>
-          <a:ln/>
-        </p:spPr>
-        <p:txBody>
-          <a:bodyPr wrap="square" lIns="0" tIns="0" rIns="0" bIns="0" rtlCol="0" anchor="t"/>
-          <a:lstStyle/>
-          <a:p>
-            <a:pPr algn="l" indent="0" marL="0">
-              <a:buNone/>
-            </a:pPr>
-            <a:r>
-              <a:rPr lang="en-US" sz="1350" b="1" dirty="0">
-                <a:solidFill>
-                  <a:schemeClr val="tx2"/>
-                </a:solidFill>
-              </a:rPr>
-              <a:t>真实例子：“阿贝西利能否用于乳腺癌”，系统检索到的前 20 篇论文</a:t>
-            </a:r>
-            <a:endParaRPr lang="en-US" sz="1350" dirty="0"/>
-          </a:p>
-        </p:txBody>
-      </p:sp>
-      <p:sp>
-        <p:nvSpPr>
-          <p:cNvPr id="6" name="box-122"/>
+          <p:cNvPr id="5" name="badge-120"/>
           <p:cNvSpPr/>
           <p:nvPr/>
         </p:nvSpPr>
         <p:spPr>
           <a:xfrm>
-            <a:off x="822960" y="2240280"/>
-            <a:ext cx="1417320" cy="274320"/>
-          </a:xfrm>
-          <a:prstGeom prst="roundRect">
-            <a:avLst>
-              <a:gd name="adj" fmla="val 26667"/>
-            </a:avLst>
-          </a:prstGeom>
-          <a:solidFill>
-            <a:schemeClr val="bg1"/>
-          </a:solidFill>
-          <a:ln w="12700">
-            <a:solidFill>
-              <a:srgbClr val="C9792A"/>
-            </a:solidFill>
-          </a:ln>
-        </p:spPr>
-        <p:txBody>
-          <a:bodyPr wrap="square" lIns="762" tIns="762" rIns="762" bIns="762" rtlCol="0" anchor="ctr"/>
-          <a:lstStyle/>
-          <a:p>
-            <a:pPr algn="ctr" indent="0" marL="0">
-              <a:buNone/>
-            </a:pPr>
-            <a:r>
-              <a:rPr lang="en-US" sz="1100" dirty="0">
-                <a:solidFill>
-                  <a:schemeClr val="tx1"/>
-                </a:solidFill>
-              </a:rPr>
-              <a:t>论文 1</a:t>
-            </a:r>
-            <a:endParaRPr lang="en-US" sz="1100" dirty="0"/>
-          </a:p>
-        </p:txBody>
-      </p:sp>
-      <p:sp>
-        <p:nvSpPr>
-          <p:cNvPr id="7" name="box-123"/>
-          <p:cNvSpPr/>
-          <p:nvPr/>
-        </p:nvSpPr>
-        <p:spPr>
-          <a:xfrm>
-            <a:off x="822960" y="2578608"/>
-            <a:ext cx="1417320" cy="274320"/>
-          </a:xfrm>
-          <a:prstGeom prst="roundRect">
-            <a:avLst>
-              <a:gd name="adj" fmla="val 26667"/>
-            </a:avLst>
-          </a:prstGeom>
-          <a:solidFill>
-            <a:schemeClr val="bg1"/>
-          </a:solidFill>
-          <a:ln w="12700">
-            <a:solidFill>
-              <a:srgbClr val="C9792A"/>
-            </a:solidFill>
-          </a:ln>
-        </p:spPr>
-        <p:txBody>
-          <a:bodyPr wrap="square" lIns="762" tIns="762" rIns="762" bIns="762" rtlCol="0" anchor="ctr"/>
-          <a:lstStyle/>
-          <a:p>
-            <a:pPr algn="ctr" indent="0" marL="0">
-              <a:buNone/>
-            </a:pPr>
-            <a:r>
-              <a:rPr lang="en-US" sz="1100" dirty="0">
-                <a:solidFill>
-                  <a:schemeClr val="tx1"/>
-                </a:solidFill>
-              </a:rPr>
-              <a:t>论文 2</a:t>
-            </a:r>
-            <a:endParaRPr lang="en-US" sz="1100" dirty="0"/>
-          </a:p>
-        </p:txBody>
-      </p:sp>
-      <p:sp>
-        <p:nvSpPr>
-          <p:cNvPr id="8" name="box-124"/>
-          <p:cNvSpPr/>
-          <p:nvPr/>
-        </p:nvSpPr>
-        <p:spPr>
-          <a:xfrm>
-            <a:off x="822960" y="2916936"/>
-            <a:ext cx="1417320" cy="274320"/>
-          </a:xfrm>
-          <a:prstGeom prst="roundRect">
-            <a:avLst>
-              <a:gd name="adj" fmla="val 26667"/>
-            </a:avLst>
-          </a:prstGeom>
-          <a:solidFill>
-            <a:schemeClr val="bg1"/>
-          </a:solidFill>
-          <a:ln w="12700">
-            <a:solidFill>
-              <a:srgbClr val="C9792A"/>
-            </a:solidFill>
-          </a:ln>
-        </p:spPr>
-        <p:txBody>
-          <a:bodyPr wrap="square" lIns="762" tIns="762" rIns="762" bIns="762" rtlCol="0" anchor="ctr"/>
-          <a:lstStyle/>
-          <a:p>
-            <a:pPr algn="ctr" indent="0" marL="0">
-              <a:buNone/>
-            </a:pPr>
-            <a:r>
-              <a:rPr lang="en-US" sz="1100" dirty="0">
-                <a:solidFill>
-                  <a:schemeClr val="tx1"/>
-                </a:solidFill>
-              </a:rPr>
-              <a:t>论文 3</a:t>
-            </a:r>
-            <a:endParaRPr lang="en-US" sz="1100" dirty="0"/>
-          </a:p>
-        </p:txBody>
-      </p:sp>
-      <p:sp>
-        <p:nvSpPr>
-          <p:cNvPr id="9" name="box-125"/>
-          <p:cNvSpPr/>
-          <p:nvPr/>
-        </p:nvSpPr>
-        <p:spPr>
-          <a:xfrm>
-            <a:off x="822960" y="3255264"/>
-            <a:ext cx="1417320" cy="274320"/>
-          </a:xfrm>
-          <a:prstGeom prst="roundRect">
-            <a:avLst>
-              <a:gd name="adj" fmla="val 26667"/>
-            </a:avLst>
-          </a:prstGeom>
-          <a:solidFill>
-            <a:schemeClr val="bg1"/>
-          </a:solidFill>
-          <a:ln w="12700">
-            <a:solidFill>
-              <a:srgbClr val="C9792A"/>
-            </a:solidFill>
-          </a:ln>
-        </p:spPr>
-        <p:txBody>
-          <a:bodyPr wrap="square" lIns="762" tIns="762" rIns="762" bIns="762" rtlCol="0" anchor="ctr"/>
-          <a:lstStyle/>
-          <a:p>
-            <a:pPr algn="ctr" indent="0" marL="0">
-              <a:buNone/>
-            </a:pPr>
-            <a:r>
-              <a:rPr lang="en-US" sz="1100" dirty="0">
-                <a:solidFill>
-                  <a:schemeClr val="tx1"/>
-                </a:solidFill>
-              </a:rPr>
-              <a:t>论文 4</a:t>
-            </a:r>
-            <a:endParaRPr lang="en-US" sz="1100" dirty="0"/>
-          </a:p>
-        </p:txBody>
-      </p:sp>
-      <p:sp>
-        <p:nvSpPr>
-          <p:cNvPr id="10" name="box-126"/>
-          <p:cNvSpPr/>
-          <p:nvPr/>
-        </p:nvSpPr>
-        <p:spPr>
-          <a:xfrm>
-            <a:off x="822960" y="3593592"/>
-            <a:ext cx="1417320" cy="274320"/>
-          </a:xfrm>
-          <a:prstGeom prst="roundRect">
-            <a:avLst>
-              <a:gd name="adj" fmla="val 26667"/>
-            </a:avLst>
-          </a:prstGeom>
-          <a:solidFill>
-            <a:schemeClr val="bg1"/>
-          </a:solidFill>
-          <a:ln w="12700">
-            <a:solidFill>
-              <a:srgbClr val="C9792A"/>
-            </a:solidFill>
-          </a:ln>
-        </p:spPr>
-        <p:txBody>
-          <a:bodyPr wrap="square" lIns="762" tIns="762" rIns="762" bIns="762" rtlCol="0" anchor="ctr"/>
-          <a:lstStyle/>
-          <a:p>
-            <a:pPr algn="ctr" indent="0" marL="0">
-              <a:buNone/>
-            </a:pPr>
-            <a:r>
-              <a:rPr lang="en-US" sz="1100" dirty="0">
-                <a:solidFill>
-                  <a:schemeClr val="tx1"/>
-                </a:solidFill>
-              </a:rPr>
-              <a:t>论文 5</a:t>
-            </a:r>
-            <a:endParaRPr lang="en-US" sz="1100" dirty="0"/>
-          </a:p>
-        </p:txBody>
-      </p:sp>
-      <p:sp>
-        <p:nvSpPr>
-          <p:cNvPr id="11" name="box-127"/>
-          <p:cNvSpPr/>
-          <p:nvPr/>
-        </p:nvSpPr>
-        <p:spPr>
-          <a:xfrm>
-            <a:off x="822960" y="3931920"/>
-            <a:ext cx="1417320" cy="274320"/>
-          </a:xfrm>
-          <a:prstGeom prst="roundRect">
-            <a:avLst>
-              <a:gd name="adj" fmla="val 26667"/>
-            </a:avLst>
-          </a:prstGeom>
-          <a:solidFill>
-            <a:schemeClr val="bg1"/>
-          </a:solidFill>
-          <a:ln w="12700">
-            <a:solidFill>
-              <a:srgbClr val="C9792A"/>
-            </a:solidFill>
-          </a:ln>
-        </p:spPr>
-        <p:txBody>
-          <a:bodyPr wrap="square" lIns="762" tIns="762" rIns="762" bIns="762" rtlCol="0" anchor="ctr"/>
-          <a:lstStyle/>
-          <a:p>
-            <a:pPr algn="ctr" indent="0" marL="0">
-              <a:buNone/>
-            </a:pPr>
-            <a:r>
-              <a:rPr lang="en-US" sz="1100" dirty="0">
-                <a:solidFill>
-                  <a:schemeClr val="tx1"/>
-                </a:solidFill>
-              </a:rPr>
-              <a:t>论文 6</a:t>
-            </a:r>
-            <a:endParaRPr lang="en-US" sz="1100" dirty="0"/>
-          </a:p>
-        </p:txBody>
-      </p:sp>
-      <p:sp>
-        <p:nvSpPr>
-          <p:cNvPr id="12" name="box-128"/>
-          <p:cNvSpPr/>
-          <p:nvPr/>
-        </p:nvSpPr>
-        <p:spPr>
-          <a:xfrm>
-            <a:off x="822960" y="4325112"/>
-            <a:ext cx="1417320" cy="457200"/>
-          </a:xfrm>
-          <a:prstGeom prst="roundRect">
-            <a:avLst>
-              <a:gd name="adj" fmla="val 16000"/>
-            </a:avLst>
-          </a:prstGeom>
-          <a:solidFill>
-            <a:schemeClr val="bg1"/>
-          </a:solidFill>
-          <a:ln w="12700">
-            <a:solidFill>
-              <a:srgbClr val="D5DCE4"/>
-            </a:solidFill>
-          </a:ln>
-        </p:spPr>
-        <p:txBody>
-          <a:bodyPr wrap="square" lIns="762" tIns="762" rIns="762" bIns="762" rtlCol="0" anchor="ctr"/>
-          <a:lstStyle/>
-          <a:p>
-            <a:pPr algn="ctr" indent="0" marL="0">
-              <a:buNone/>
-            </a:pPr>
-            <a:r>
-              <a:rPr lang="en-US" sz="950" dirty="0">
-                <a:solidFill>
-                  <a:schemeClr val="accent6"/>
-                </a:solidFill>
-              </a:rPr>
-              <a:t>其余 14 篇</a:t>
-            </a:r>
-            <a:endParaRPr lang="en-US" sz="950" dirty="0"/>
-          </a:p>
-          <a:p>
-            <a:pPr algn="ctr" indent="0" marL="0">
-              <a:buNone/>
-            </a:pPr>
-            <a:r>
-              <a:rPr lang="en-US" sz="950" dirty="0">
-                <a:solidFill>
-                  <a:schemeClr val="accent6"/>
-                </a:solidFill>
-              </a:rPr>
-              <a:t>（各自独立或无法追溯）</a:t>
-            </a:r>
-            <a:endParaRPr lang="en-US" sz="950" dirty="0"/>
-          </a:p>
-        </p:txBody>
-      </p:sp>
-      <p:sp>
-        <p:nvSpPr>
-          <p:cNvPr id="13" name="arrow-129"/>
-          <p:cNvSpPr/>
-          <p:nvPr/>
-        </p:nvSpPr>
-        <p:spPr>
-          <a:xfrm>
-            <a:off x="2267712" y="2377440"/>
-            <a:ext cx="1179576" cy="845820"/>
-          </a:xfrm>
-          <a:prstGeom prst="line">
-            <a:avLst/>
-          </a:prstGeom>
-          <a:noFill/>
-          <a:ln w="12700">
-            <a:solidFill>
-              <a:schemeClr val="accent3"/>
-            </a:solidFill>
-            <a:prstDash val="solid"/>
-            <a:tailEnd type="triangle"/>
-          </a:ln>
-        </p:spPr>
-      </p:sp>
-      <p:sp>
-        <p:nvSpPr>
-          <p:cNvPr id="14" name="arrow-130"/>
-          <p:cNvSpPr/>
-          <p:nvPr/>
-        </p:nvSpPr>
-        <p:spPr>
-          <a:xfrm>
-            <a:off x="2267712" y="2715768"/>
-            <a:ext cx="1179576" cy="507492"/>
-          </a:xfrm>
-          <a:prstGeom prst="line">
-            <a:avLst/>
-          </a:prstGeom>
-          <a:noFill/>
-          <a:ln w="12700">
-            <a:solidFill>
-              <a:schemeClr val="accent3"/>
-            </a:solidFill>
-            <a:prstDash val="solid"/>
-            <a:tailEnd type="triangle"/>
-          </a:ln>
-        </p:spPr>
-      </p:sp>
-      <p:sp>
-        <p:nvSpPr>
-          <p:cNvPr id="15" name="arrow-131"/>
-          <p:cNvSpPr/>
-          <p:nvPr/>
-        </p:nvSpPr>
-        <p:spPr>
-          <a:xfrm>
-            <a:off x="2267712" y="3054096"/>
-            <a:ext cx="1179576" cy="169164"/>
-          </a:xfrm>
-          <a:prstGeom prst="line">
-            <a:avLst/>
-          </a:prstGeom>
-          <a:noFill/>
-          <a:ln w="12700">
-            <a:solidFill>
-              <a:schemeClr val="accent3"/>
-            </a:solidFill>
-            <a:prstDash val="solid"/>
-            <a:tailEnd type="triangle"/>
-          </a:ln>
-        </p:spPr>
-      </p:sp>
-      <p:sp>
-        <p:nvSpPr>
-          <p:cNvPr id="16" name="arrow-132"/>
-          <p:cNvSpPr/>
-          <p:nvPr/>
-        </p:nvSpPr>
-        <p:spPr>
-          <a:xfrm flipV="1">
-            <a:off x="2267712" y="3223260"/>
-            <a:ext cx="1179576" cy="169164"/>
-          </a:xfrm>
-          <a:prstGeom prst="line">
-            <a:avLst/>
-          </a:prstGeom>
-          <a:noFill/>
-          <a:ln w="12700">
-            <a:solidFill>
-              <a:schemeClr val="accent3"/>
-            </a:solidFill>
-            <a:prstDash val="solid"/>
-            <a:tailEnd type="triangle"/>
-          </a:ln>
-        </p:spPr>
-      </p:sp>
-      <p:sp>
-        <p:nvSpPr>
-          <p:cNvPr id="17" name="arrow-133"/>
-          <p:cNvSpPr/>
-          <p:nvPr/>
-        </p:nvSpPr>
-        <p:spPr>
-          <a:xfrm flipV="1">
-            <a:off x="2267712" y="3223260"/>
-            <a:ext cx="1179576" cy="507492"/>
-          </a:xfrm>
-          <a:prstGeom prst="line">
-            <a:avLst/>
-          </a:prstGeom>
-          <a:noFill/>
-          <a:ln w="12700">
-            <a:solidFill>
-              <a:schemeClr val="accent3"/>
-            </a:solidFill>
-            <a:prstDash val="solid"/>
-            <a:tailEnd type="triangle"/>
-          </a:ln>
-        </p:spPr>
-      </p:sp>
-      <p:sp>
-        <p:nvSpPr>
-          <p:cNvPr id="18" name="arrow-134"/>
-          <p:cNvSpPr/>
-          <p:nvPr/>
-        </p:nvSpPr>
-        <p:spPr>
-          <a:xfrm flipV="1">
-            <a:off x="2267712" y="3223260"/>
-            <a:ext cx="1179576" cy="845820"/>
-          </a:xfrm>
-          <a:prstGeom prst="line">
-            <a:avLst/>
-          </a:prstGeom>
-          <a:noFill/>
-          <a:ln w="12700">
-            <a:solidFill>
-              <a:schemeClr val="accent3"/>
-            </a:solidFill>
-            <a:prstDash val="solid"/>
-            <a:tailEnd type="triangle"/>
-          </a:ln>
-        </p:spPr>
-      </p:sp>
-      <p:sp>
-        <p:nvSpPr>
-          <p:cNvPr id="19" name="label-135"/>
-          <p:cNvSpPr txBox="1"/>
-          <p:nvPr/>
-        </p:nvSpPr>
-        <p:spPr>
-          <a:xfrm>
-            <a:off x="2514600" y="2034540"/>
-            <a:ext cx="2011680" cy="457200"/>
-          </a:xfrm>
-          <a:prstGeom prst="rect">
-            <a:avLst/>
-          </a:prstGeom>
-          <a:noFill/>
-          <a:ln/>
-        </p:spPr>
-        <p:txBody>
-          <a:bodyPr wrap="square" lIns="0" tIns="0" rIns="0" bIns="0" rtlCol="0" anchor="t"/>
-          <a:lstStyle/>
-          <a:p>
-            <a:pPr algn="ctr" indent="0" marL="0">
-              <a:buNone/>
-            </a:pPr>
-            <a:r>
-              <a:rPr lang="en-US" sz="1000" dirty="0">
-                <a:solidFill>
-                  <a:schemeClr val="accent3"/>
-                </a:solidFill>
-              </a:rPr>
-              <a:t>来源标注</a:t>
-            </a:r>
-            <a:endParaRPr lang="en-US" sz="1000" dirty="0"/>
-          </a:p>
-          <a:p>
-            <a:pPr algn="ctr" indent="0" marL="0">
-              <a:buNone/>
-            </a:pPr>
-            <a:r>
-              <a:rPr lang="en-US" sz="1000" dirty="0">
-                <a:solidFill>
-                  <a:schemeClr val="accent3"/>
-                </a:solidFill>
-              </a:rPr>
-              <a:t>（PubMed 试验关联）</a:t>
-            </a:r>
-            <a:endParaRPr lang="en-US" sz="1000" dirty="0"/>
-          </a:p>
-        </p:txBody>
-      </p:sp>
-      <p:sp>
-        <p:nvSpPr>
-          <p:cNvPr id="20" name="box-136"/>
-          <p:cNvSpPr/>
-          <p:nvPr/>
-        </p:nvSpPr>
-        <p:spPr>
-          <a:xfrm>
-            <a:off x="3474720" y="2903220"/>
-            <a:ext cx="1828800" cy="640080"/>
-          </a:xfrm>
-          <a:prstGeom prst="roundRect">
-            <a:avLst>
-              <a:gd name="adj" fmla="val 11429"/>
-            </a:avLst>
+            <a:off x="822960" y="1783080"/>
+            <a:ext cx="384048" cy="384048"/>
+          </a:xfrm>
+          <a:prstGeom prst="ellipse">
+            <a:avLst/>
           </a:prstGeom>
           <a:solidFill>
             <a:schemeClr val="accent3"/>
@@ -12682,76 +11122,1905 @@
           </a:ln>
         </p:spPr>
         <p:txBody>
-          <a:bodyPr wrap="square" lIns="762" tIns="762" rIns="762" bIns="762" rtlCol="0" anchor="ctr"/>
+          <a:bodyPr wrap="square" lIns="0" tIns="0" rIns="0" bIns="0" rtlCol="0" anchor="ctr"/>
           <a:lstStyle/>
           <a:p>
             <a:pPr algn="ctr" indent="0" marL="0">
               <a:buNone/>
             </a:pPr>
             <a:r>
-              <a:rPr lang="en-US" sz="1150" b="1" dirty="0">
+              <a:rPr lang="en-US" sz="1500" b="1" dirty="0">
                 <a:solidFill>
                   <a:schemeClr val="bg1"/>
                 </a:solidFill>
               </a:rPr>
-              <a:t>monarchE 三期试验</a:t>
-            </a:r>
-            <a:endParaRPr lang="en-US" sz="1150" dirty="0"/>
-          </a:p>
+              <a:t>1</a:t>
+            </a:r>
+            <a:endParaRPr lang="en-US" sz="1500" dirty="0"/>
+          </a:p>
+        </p:txBody>
+      </p:sp>
+      <p:sp>
+        <p:nvSpPr>
+          <p:cNvPr id="6" name="label-121"/>
+          <p:cNvSpPr txBox="1"/>
+          <p:nvPr/>
+        </p:nvSpPr>
+        <p:spPr>
+          <a:xfrm>
+            <a:off x="1325880" y="1755648"/>
+            <a:ext cx="3200400" cy="411480"/>
+          </a:xfrm>
+          <a:prstGeom prst="rect">
+            <a:avLst/>
+          </a:prstGeom>
+          <a:noFill/>
+          <a:ln/>
+        </p:spPr>
+        <p:txBody>
+          <a:bodyPr wrap="square" lIns="0" tIns="0" rIns="0" bIns="0" rtlCol="0" anchor="ctr"/>
+          <a:lstStyle/>
+          <a:p>
+            <a:pPr algn="l" indent="0" marL="0">
+              <a:buNone/>
+            </a:pPr>
+            <a:r>
+              <a:rPr lang="en-US" sz="1500" b="1" dirty="0">
+                <a:solidFill>
+                  <a:schemeClr val="tx2"/>
+                </a:solidFill>
+              </a:rPr>
+              <a:t>现象：同源证据普遍存在</a:t>
+            </a:r>
+            <a:endParaRPr lang="en-US" sz="1500" dirty="0"/>
+          </a:p>
+        </p:txBody>
+      </p:sp>
+      <p:sp>
+        <p:nvSpPr>
+          <p:cNvPr id="7" name="label-122"/>
+          <p:cNvSpPr txBox="1"/>
+          <p:nvPr/>
+        </p:nvSpPr>
+        <p:spPr>
+          <a:xfrm>
+            <a:off x="822960" y="2240280"/>
+            <a:ext cx="3657600" cy="548640"/>
+          </a:xfrm>
+          <a:prstGeom prst="rect">
+            <a:avLst/>
+          </a:prstGeom>
+          <a:noFill/>
+          <a:ln/>
+        </p:spPr>
+        <p:txBody>
+          <a:bodyPr wrap="square" lIns="0" tIns="0" rIns="0" bIns="0" rtlCol="0" anchor="t"/>
+          <a:lstStyle/>
+          <a:p>
+            <a:pPr algn="l" indent="0" marL="0">
+              <a:buNone/>
+            </a:pPr>
+            <a:r>
+              <a:rPr lang="en-US" sz="1050" dirty="0">
+                <a:solidFill>
+                  <a:schemeClr val="tx1"/>
+                </a:solidFill>
+              </a:rPr>
+              <a:t>94 个真实问题，系统检索前 20 篇，共 1649 篇，按 PubMed 试验关联溯源。</a:t>
+            </a:r>
+            <a:endParaRPr lang="en-US" sz="1050" dirty="0"/>
+          </a:p>
+        </p:txBody>
+      </p:sp>
+      <p:sp>
+        <p:nvSpPr>
+          <p:cNvPr id="8" name="label-123"/>
+          <p:cNvSpPr txBox="1"/>
+          <p:nvPr/>
+        </p:nvSpPr>
+        <p:spPr>
+          <a:xfrm>
+            <a:off x="822960" y="2880360"/>
+            <a:ext cx="1143000" cy="594360"/>
+          </a:xfrm>
+          <a:prstGeom prst="rect">
+            <a:avLst/>
+          </a:prstGeom>
+          <a:noFill/>
+          <a:ln/>
+        </p:spPr>
+        <p:txBody>
+          <a:bodyPr wrap="square" lIns="0" tIns="0" rIns="0" bIns="0" rtlCol="0" anchor="ctr"/>
+          <a:lstStyle/>
           <a:p>
             <a:pPr algn="ctr" indent="0" marL="0">
               <a:buNone/>
             </a:pPr>
             <a:r>
-              <a:rPr lang="en-US" sz="1150" b="1" dirty="0">
-                <a:solidFill>
-                  <a:schemeClr val="bg1"/>
-                </a:solidFill>
-              </a:rPr>
-              <a:t>NCT03155997</a:t>
-            </a:r>
-            <a:endParaRPr lang="en-US" sz="1150" dirty="0"/>
-          </a:p>
-        </p:txBody>
-      </p:sp>
-      <p:sp>
-        <p:nvSpPr>
-          <p:cNvPr id="21" name="arrow-137"/>
+              <a:rPr lang="en-US" sz="2400" b="1" dirty="0">
+                <a:solidFill>
+                  <a:schemeClr val="accent3"/>
+                </a:solidFill>
+              </a:rPr>
+              <a:t>40%</a:t>
+            </a:r>
+            <a:endParaRPr lang="en-US" sz="2400" dirty="0"/>
+          </a:p>
+        </p:txBody>
+      </p:sp>
+      <p:sp>
+        <p:nvSpPr>
+          <p:cNvPr id="9" name="label-124"/>
+          <p:cNvSpPr txBox="1"/>
+          <p:nvPr/>
+        </p:nvSpPr>
+        <p:spPr>
+          <a:xfrm>
+            <a:off x="2057400" y="2907792"/>
+            <a:ext cx="2423160" cy="548640"/>
+          </a:xfrm>
+          <a:prstGeom prst="rect">
+            <a:avLst/>
+          </a:prstGeom>
+          <a:noFill/>
+          <a:ln/>
+        </p:spPr>
+        <p:txBody>
+          <a:bodyPr wrap="square" lIns="0" tIns="0" rIns="0" bIns="0" rtlCol="0" anchor="ctr"/>
+          <a:lstStyle/>
+          <a:p>
+            <a:pPr algn="l" indent="0" marL="0">
+              <a:buNone/>
+            </a:pPr>
+            <a:r>
+              <a:rPr lang="en-US" sz="1100" dirty="0">
+                <a:solidFill>
+                  <a:schemeClr val="tx1"/>
+                </a:solidFill>
+              </a:rPr>
+              <a:t>含试验证据的问题中，存在同源论文</a:t>
+            </a:r>
+            <a:endParaRPr lang="en-US" sz="1100" dirty="0"/>
+          </a:p>
+        </p:txBody>
+      </p:sp>
+      <p:sp>
+        <p:nvSpPr>
+          <p:cNvPr id="10" name="label-125"/>
+          <p:cNvSpPr txBox="1"/>
+          <p:nvPr/>
+        </p:nvSpPr>
+        <p:spPr>
+          <a:xfrm>
+            <a:off x="822960" y="3703320"/>
+            <a:ext cx="1143000" cy="594360"/>
+          </a:xfrm>
+          <a:prstGeom prst="rect">
+            <a:avLst/>
+          </a:prstGeom>
+          <a:noFill/>
+          <a:ln/>
+        </p:spPr>
+        <p:txBody>
+          <a:bodyPr wrap="square" lIns="0" tIns="0" rIns="0" bIns="0" rtlCol="0" anchor="ctr"/>
+          <a:lstStyle/>
+          <a:p>
+            <a:pPr algn="ctr" indent="0" marL="0">
+              <a:buNone/>
+            </a:pPr>
+            <a:r>
+              <a:rPr lang="en-US" sz="2400" b="1" dirty="0">
+                <a:solidFill>
+                  <a:schemeClr val="accent3"/>
+                </a:solidFill>
+              </a:rPr>
+              <a:t>29%</a:t>
+            </a:r>
+            <a:endParaRPr lang="en-US" sz="2400" dirty="0"/>
+          </a:p>
+        </p:txBody>
+      </p:sp>
+      <p:sp>
+        <p:nvSpPr>
+          <p:cNvPr id="11" name="label-126"/>
+          <p:cNvSpPr txBox="1"/>
+          <p:nvPr/>
+        </p:nvSpPr>
+        <p:spPr>
+          <a:xfrm>
+            <a:off x="2057400" y="3730752"/>
+            <a:ext cx="2423160" cy="548640"/>
+          </a:xfrm>
+          <a:prstGeom prst="rect">
+            <a:avLst/>
+          </a:prstGeom>
+          <a:noFill/>
+          <a:ln/>
+        </p:spPr>
+        <p:txBody>
+          <a:bodyPr wrap="square" lIns="0" tIns="0" rIns="0" bIns="0" rtlCol="0" anchor="ctr"/>
+          <a:lstStyle/>
+          <a:p>
+            <a:pPr algn="l" indent="0" marL="0">
+              <a:buNone/>
+            </a:pPr>
+            <a:r>
+              <a:rPr lang="en-US" sz="1100" dirty="0">
+                <a:solidFill>
+                  <a:schemeClr val="tx1"/>
+                </a:solidFill>
+              </a:rPr>
+              <a:t>试验类论文属于重复计数</a:t>
+            </a:r>
+            <a:endParaRPr lang="en-US" sz="1100" dirty="0"/>
+          </a:p>
+        </p:txBody>
+      </p:sp>
+      <p:sp>
+        <p:nvSpPr>
+          <p:cNvPr id="12" name="label-127"/>
+          <p:cNvSpPr txBox="1"/>
+          <p:nvPr/>
+        </p:nvSpPr>
+        <p:spPr>
+          <a:xfrm>
+            <a:off x="822960" y="4526280"/>
+            <a:ext cx="1143000" cy="594360"/>
+          </a:xfrm>
+          <a:prstGeom prst="rect">
+            <a:avLst/>
+          </a:prstGeom>
+          <a:noFill/>
+          <a:ln/>
+        </p:spPr>
+        <p:txBody>
+          <a:bodyPr wrap="square" lIns="0" tIns="0" rIns="0" bIns="0" rtlCol="0" anchor="ctr"/>
+          <a:lstStyle/>
+          <a:p>
+            <a:pPr algn="ctr" indent="0" marL="0">
+              <a:buNone/>
+            </a:pPr>
+            <a:r>
+              <a:rPr lang="en-US" sz="2400" b="1" dirty="0">
+                <a:solidFill>
+                  <a:schemeClr val="accent3"/>
+                </a:solidFill>
+              </a:rPr>
+              <a:t>6 篇</a:t>
+            </a:r>
+            <a:endParaRPr lang="en-US" sz="2400" dirty="0"/>
+          </a:p>
+        </p:txBody>
+      </p:sp>
+      <p:sp>
+        <p:nvSpPr>
+          <p:cNvPr id="13" name="label-128"/>
+          <p:cNvSpPr txBox="1"/>
+          <p:nvPr/>
+        </p:nvSpPr>
+        <p:spPr>
+          <a:xfrm>
+            <a:off x="2057400" y="4553712"/>
+            <a:ext cx="2423160" cy="548640"/>
+          </a:xfrm>
+          <a:prstGeom prst="rect">
+            <a:avLst/>
+          </a:prstGeom>
+          <a:noFill/>
+          <a:ln/>
+        </p:spPr>
+        <p:txBody>
+          <a:bodyPr wrap="square" lIns="0" tIns="0" rIns="0" bIns="0" rtlCol="0" anchor="ctr"/>
+          <a:lstStyle/>
+          <a:p>
+            <a:pPr algn="l" indent="0" marL="0">
+              <a:buNone/>
+            </a:pPr>
+            <a:r>
+              <a:rPr lang="en-US" sz="1100" dirty="0">
+                <a:solidFill>
+                  <a:schemeClr val="tx1"/>
+                </a:solidFill>
+              </a:rPr>
+              <a:t>例：阿贝西利前 20 篇中，来自同一试验 monarchE</a:t>
+            </a:r>
+            <a:endParaRPr lang="en-US" sz="1100" dirty="0"/>
+          </a:p>
+        </p:txBody>
+      </p:sp>
+      <p:sp>
+        <p:nvSpPr>
+          <p:cNvPr id="14" name="card-129"/>
           <p:cNvSpPr/>
           <p:nvPr/>
         </p:nvSpPr>
         <p:spPr>
           <a:xfrm>
-            <a:off x="5330952" y="3223260"/>
-            <a:ext cx="429768" cy="0"/>
-          </a:xfrm>
-          <a:prstGeom prst="line">
-            <a:avLst/>
-          </a:prstGeom>
-          <a:noFill/>
-          <a:ln w="19050">
+            <a:off x="5029200" y="1600200"/>
+            <a:ext cx="6613855" cy="3886200"/>
+          </a:xfrm>
+          <a:prstGeom prst="roundRect">
+            <a:avLst>
+              <a:gd name="adj" fmla="val 2353"/>
+            </a:avLst>
+          </a:prstGeom>
+          <a:solidFill>
+            <a:schemeClr val="bg2"/>
+          </a:solidFill>
+          <a:ln w="12700">
             <a:solidFill>
-              <a:schemeClr val="tx2"/>
+              <a:schemeClr val="bg2"/>
             </a:solidFill>
             <a:prstDash val="solid"/>
-            <a:tailEnd type="triangle"/>
           </a:ln>
         </p:spPr>
       </p:sp>
       <p:sp>
         <p:nvSpPr>
-          <p:cNvPr id="22" name="box-138"/>
+          <p:cNvPr id="15" name="badge-130"/>
           <p:cNvSpPr/>
           <p:nvPr/>
         </p:nvSpPr>
         <p:spPr>
           <a:xfrm>
-            <a:off x="5788152" y="2857500"/>
-            <a:ext cx="1161288" cy="731520"/>
+            <a:off x="5303520" y="1783080"/>
+            <a:ext cx="384048" cy="384048"/>
+          </a:xfrm>
+          <a:prstGeom prst="ellipse">
+            <a:avLst/>
+          </a:prstGeom>
+          <a:solidFill>
+            <a:schemeClr val="accent2"/>
+          </a:solidFill>
+          <a:ln w="6350">
+            <a:solidFill>
+              <a:schemeClr val="accent2"/>
+            </a:solidFill>
+          </a:ln>
+        </p:spPr>
+        <p:txBody>
+          <a:bodyPr wrap="square" lIns="0" tIns="0" rIns="0" bIns="0" rtlCol="0" anchor="ctr"/>
+          <a:lstStyle/>
+          <a:p>
+            <a:pPr algn="ctr" indent="0" marL="0">
+              <a:buNone/>
+            </a:pPr>
+            <a:r>
+              <a:rPr lang="en-US" sz="1500" b="1" dirty="0">
+                <a:solidFill>
+                  <a:schemeClr val="bg1"/>
+                </a:solidFill>
+              </a:rPr>
+              <a:t>2</a:t>
+            </a:r>
+            <a:endParaRPr lang="en-US" sz="1500" dirty="0"/>
+          </a:p>
+        </p:txBody>
+      </p:sp>
+      <p:sp>
+        <p:nvSpPr>
+          <p:cNvPr id="16" name="label-131"/>
+          <p:cNvSpPr txBox="1"/>
+          <p:nvPr/>
+        </p:nvSpPr>
+        <p:spPr>
+          <a:xfrm>
+            <a:off x="5806440" y="1755648"/>
+            <a:ext cx="5608015" cy="411480"/>
+          </a:xfrm>
+          <a:prstGeom prst="rect">
+            <a:avLst/>
+          </a:prstGeom>
+          <a:noFill/>
+          <a:ln/>
+        </p:spPr>
+        <p:txBody>
+          <a:bodyPr wrap="square" lIns="0" tIns="0" rIns="0" bIns="0" rtlCol="0" anchor="ctr"/>
+          <a:lstStyle/>
+          <a:p>
+            <a:pPr algn="l" indent="0" marL="0">
+              <a:buNone/>
+            </a:pPr>
+            <a:r>
+              <a:rPr lang="en-US" sz="1500" b="1" dirty="0">
+                <a:solidFill>
+                  <a:schemeClr val="tx2"/>
+                </a:solidFill>
+              </a:rPr>
+              <a:t>对照实验：会不会让模型产生“虚假共识”</a:t>
+            </a:r>
+            <a:endParaRPr lang="en-US" sz="1500" dirty="0"/>
+          </a:p>
+        </p:txBody>
+      </p:sp>
+      <p:sp>
+        <p:nvSpPr>
+          <p:cNvPr id="17" name="label-132"/>
+          <p:cNvSpPr txBox="1"/>
+          <p:nvPr/>
+        </p:nvSpPr>
+        <p:spPr>
+          <a:xfrm>
+            <a:off x="5303520" y="2240280"/>
+            <a:ext cx="6065215" cy="457200"/>
+          </a:xfrm>
+          <a:prstGeom prst="rect">
+            <a:avLst/>
+          </a:prstGeom>
+          <a:noFill/>
+          <a:ln/>
+        </p:spPr>
+        <p:txBody>
+          <a:bodyPr wrap="square" lIns="0" tIns="0" rIns="0" bIns="0" rtlCol="0" anchor="t"/>
+          <a:lstStyle/>
+          <a:p>
+            <a:pPr algn="l" indent="0" marL="0">
+              <a:buNone/>
+            </a:pPr>
+            <a:r>
+              <a:rPr lang="en-US" sz="1050" dirty="0">
+                <a:solidFill>
+                  <a:schemeClr val="tx1"/>
+                </a:solidFill>
+              </a:rPr>
+              <a:t>24 个问题、98 次调用；同一模型，只改变证据包，比较模型给出的“有效概率”（0–100）。</a:t>
+            </a:r>
+            <a:endParaRPr lang="en-US" sz="1050" dirty="0"/>
+          </a:p>
+        </p:txBody>
+      </p:sp>
+      <p:graphicFrame>
+        <p:nvGraphicFramePr>
+          <p:cNvPr id="8" name="table-133"/>
+          <p:cNvGraphicFramePr>
+            <a:graphicFrameLocks noGrp="1"/>
+          </p:cNvGraphicFramePr>
+          <p:nvPr>
+            <p:extLst>
+              <p:ext uri="{D42A27DB-BD31-4B8C-83A1-F6EECF244321}">
+                <p14:modId xmlns:p14="http://schemas.microsoft.com/office/powerpoint/2010/main" val="1579011935"/>
+              </p:ext>
+            </p:extLst>
+          </p:nvPr>
+        </p:nvGraphicFramePr>
+        <p:xfrm>
+          <a:off x="5303520" y="2743200"/>
+          <a:ext cx="6065215" cy="914400"/>
+        </p:xfrm>
+        <a:graphic>
+          <a:graphicData uri="http://schemas.openxmlformats.org/drawingml/2006/table">
+            <a:tbl>
+              <a:tblPr/>
+              <a:tblGrid>
+                <a:gridCol w="2103120"/>
+                <a:gridCol w="1234440"/>
+                <a:gridCol w="1325880"/>
+                <a:gridCol w="1401775"/>
+              </a:tblGrid>
+              <a:tr h="329184">
+                <a:tc>
+                  <a:txBody>
+                    <a:bodyPr/>
+                    <a:lstStyle/>
+                    <a:p>
+                      <a:pPr indent="0" marL="0">
+                        <a:buNone/>
+                      </a:pPr>
+                      <a:r>
+                        <a:rPr lang="en-US" sz="1050" b="1" dirty="0">
+                          <a:solidFill>
+                            <a:srgbClr val="FFFFFF"/>
+                          </a:solidFill>
+                          <a:latin typeface="Microsoft YaHei" pitchFamily="34" charset="0"/>
+                          <a:ea typeface="Microsoft YaHei" pitchFamily="34" charset="-122"/>
+                          <a:cs typeface="Microsoft YaHei" pitchFamily="34" charset="-120"/>
+                        </a:rPr>
+                        <a:t>证据包变化</a:t>
+                      </a:r>
+                      <a:endParaRPr lang="en-US" sz="1050" dirty="0">
+                        <a:latin typeface="Microsoft YaHei" charset="0"/>
+                        <a:ea typeface="Microsoft YaHei" charset="0"/>
+                        <a:cs typeface="Microsoft YaHei" charset="0"/>
+                      </a:endParaRPr>
+                    </a:p>
+                  </a:txBody>
+                  <a:tcPr marL="73152" marR="73152" marT="27432" marB="27432" anchor="ctr">
+                    <a:lnL w="9525" cap="flat" cmpd="sng" algn="ctr">
+                      <a:solidFill>
+                        <a:srgbClr val="D5DCE4"/>
+                      </a:solidFill>
+                      <a:prstDash val="solid"/>
+                      <a:round/>
+                      <a:headEnd type="none" w="med" len="med"/>
+                      <a:tailEnd type="none" w="med" len="med"/>
+                    </a:lnL>
+                    <a:lnR w="9525" cap="flat" cmpd="sng" algn="ctr">
+                      <a:solidFill>
+                        <a:srgbClr val="D5DCE4"/>
+                      </a:solidFill>
+                      <a:prstDash val="solid"/>
+                      <a:round/>
+                      <a:headEnd type="none" w="med" len="med"/>
+                      <a:tailEnd type="none" w="med" len="med"/>
+                    </a:lnR>
+                    <a:lnT w="9525" cap="flat" cmpd="sng" algn="ctr">
+                      <a:solidFill>
+                        <a:srgbClr val="D5DCE4"/>
+                      </a:solidFill>
+                      <a:prstDash val="solid"/>
+                      <a:round/>
+                      <a:headEnd type="none" w="med" len="med"/>
+                      <a:tailEnd type="none" w="med" len="med"/>
+                    </a:lnT>
+                    <a:lnB w="9525" cap="flat" cmpd="sng" algn="ctr">
+                      <a:solidFill>
+                        <a:srgbClr val="D5DCE4"/>
+                      </a:solidFill>
+                      <a:prstDash val="solid"/>
+                      <a:round/>
+                      <a:headEnd type="none" w="med" len="med"/>
+                      <a:tailEnd type="none" w="med" len="med"/>
+                    </a:lnB>
+                    <a:solidFill>
+                      <a:srgbClr val="0F2A44"/>
+                    </a:solidFill>
+                  </a:tcPr>
+                </a:tc>
+                <a:tc>
+                  <a:txBody>
+                    <a:bodyPr/>
+                    <a:lstStyle/>
+                    <a:p>
+                      <a:pPr indent="0" marL="0">
+                        <a:buNone/>
+                      </a:pPr>
+                      <a:r>
+                        <a:rPr lang="en-US" sz="1050" b="1" dirty="0">
+                          <a:solidFill>
+                            <a:srgbClr val="FFFFFF"/>
+                          </a:solidFill>
+                          <a:latin typeface="Microsoft YaHei" pitchFamily="34" charset="0"/>
+                          <a:ea typeface="Microsoft YaHei" pitchFamily="34" charset="-122"/>
+                          <a:cs typeface="Microsoft YaHei" pitchFamily="34" charset="-120"/>
+                        </a:rPr>
+                        <a:t>有效概率变化</a:t>
+                      </a:r>
+                      <a:endParaRPr lang="en-US" sz="1050" dirty="0">
+                        <a:latin typeface="Microsoft YaHei" charset="0"/>
+                        <a:ea typeface="Microsoft YaHei" charset="0"/>
+                        <a:cs typeface="Microsoft YaHei" charset="0"/>
+                      </a:endParaRPr>
+                    </a:p>
+                  </a:txBody>
+                  <a:tcPr marL="73152" marR="73152" marT="27432" marB="27432" anchor="ctr">
+                    <a:lnL w="9525" cap="flat" cmpd="sng" algn="ctr">
+                      <a:solidFill>
+                        <a:srgbClr val="D5DCE4"/>
+                      </a:solidFill>
+                      <a:prstDash val="solid"/>
+                      <a:round/>
+                      <a:headEnd type="none" w="med" len="med"/>
+                      <a:tailEnd type="none" w="med" len="med"/>
+                    </a:lnL>
+                    <a:lnR w="9525" cap="flat" cmpd="sng" algn="ctr">
+                      <a:solidFill>
+                        <a:srgbClr val="D5DCE4"/>
+                      </a:solidFill>
+                      <a:prstDash val="solid"/>
+                      <a:round/>
+                      <a:headEnd type="none" w="med" len="med"/>
+                      <a:tailEnd type="none" w="med" len="med"/>
+                    </a:lnR>
+                    <a:lnT w="9525" cap="flat" cmpd="sng" algn="ctr">
+                      <a:solidFill>
+                        <a:srgbClr val="D5DCE4"/>
+                      </a:solidFill>
+                      <a:prstDash val="solid"/>
+                      <a:round/>
+                      <a:headEnd type="none" w="med" len="med"/>
+                      <a:tailEnd type="none" w="med" len="med"/>
+                    </a:lnT>
+                    <a:lnB w="9525" cap="flat" cmpd="sng" algn="ctr">
+                      <a:solidFill>
+                        <a:srgbClr val="D5DCE4"/>
+                      </a:solidFill>
+                      <a:prstDash val="solid"/>
+                      <a:round/>
+                      <a:headEnd type="none" w="med" len="med"/>
+                      <a:tailEnd type="none" w="med" len="med"/>
+                    </a:lnB>
+                    <a:solidFill>
+                      <a:srgbClr val="0F2A44"/>
+                    </a:solidFill>
+                  </a:tcPr>
+                </a:tc>
+                <a:tc>
+                  <a:txBody>
+                    <a:bodyPr/>
+                    <a:lstStyle/>
+                    <a:p>
+                      <a:pPr indent="0" marL="0">
+                        <a:buNone/>
+                      </a:pPr>
+                      <a:r>
+                        <a:rPr lang="en-US" sz="1050" b="1" dirty="0">
+                          <a:solidFill>
+                            <a:srgbClr val="FFFFFF"/>
+                          </a:solidFill>
+                          <a:latin typeface="Microsoft YaHei" pitchFamily="34" charset="0"/>
+                          <a:ea typeface="Microsoft YaHei" pitchFamily="34" charset="-122"/>
+                          <a:cs typeface="Microsoft YaHei" pitchFamily="34" charset="-120"/>
+                        </a:rPr>
+                        <a:t>95% 置信区间</a:t>
+                      </a:r>
+                      <a:endParaRPr lang="en-US" sz="1050" dirty="0">
+                        <a:latin typeface="Microsoft YaHei" charset="0"/>
+                        <a:ea typeface="Microsoft YaHei" charset="0"/>
+                        <a:cs typeface="Microsoft YaHei" charset="0"/>
+                      </a:endParaRPr>
+                    </a:p>
+                  </a:txBody>
+                  <a:tcPr marL="73152" marR="73152" marT="27432" marB="27432" anchor="ctr">
+                    <a:lnL w="9525" cap="flat" cmpd="sng" algn="ctr">
+                      <a:solidFill>
+                        <a:srgbClr val="D5DCE4"/>
+                      </a:solidFill>
+                      <a:prstDash val="solid"/>
+                      <a:round/>
+                      <a:headEnd type="none" w="med" len="med"/>
+                      <a:tailEnd type="none" w="med" len="med"/>
+                    </a:lnL>
+                    <a:lnR w="9525" cap="flat" cmpd="sng" algn="ctr">
+                      <a:solidFill>
+                        <a:srgbClr val="D5DCE4"/>
+                      </a:solidFill>
+                      <a:prstDash val="solid"/>
+                      <a:round/>
+                      <a:headEnd type="none" w="med" len="med"/>
+                      <a:tailEnd type="none" w="med" len="med"/>
+                    </a:lnR>
+                    <a:lnT w="9525" cap="flat" cmpd="sng" algn="ctr">
+                      <a:solidFill>
+                        <a:srgbClr val="D5DCE4"/>
+                      </a:solidFill>
+                      <a:prstDash val="solid"/>
+                      <a:round/>
+                      <a:headEnd type="none" w="med" len="med"/>
+                      <a:tailEnd type="none" w="med" len="med"/>
+                    </a:lnT>
+                    <a:lnB w="9525" cap="flat" cmpd="sng" algn="ctr">
+                      <a:solidFill>
+                        <a:srgbClr val="D5DCE4"/>
+                      </a:solidFill>
+                      <a:prstDash val="solid"/>
+                      <a:round/>
+                      <a:headEnd type="none" w="med" len="med"/>
+                      <a:tailEnd type="none" w="med" len="med"/>
+                    </a:lnB>
+                    <a:solidFill>
+                      <a:srgbClr val="0F2A44"/>
+                    </a:solidFill>
+                  </a:tcPr>
+                </a:tc>
+                <a:tc>
+                  <a:txBody>
+                    <a:bodyPr/>
+                    <a:lstStyle/>
+                    <a:p>
+                      <a:pPr indent="0" marL="0">
+                        <a:buNone/>
+                      </a:pPr>
+                      <a:r>
+                        <a:rPr lang="en-US" sz="1050" b="1" dirty="0">
+                          <a:solidFill>
+                            <a:srgbClr val="FFFFFF"/>
+                          </a:solidFill>
+                          <a:latin typeface="Microsoft YaHei" pitchFamily="34" charset="0"/>
+                          <a:ea typeface="Microsoft YaHei" pitchFamily="34" charset="-122"/>
+                          <a:cs typeface="Microsoft YaHei" pitchFamily="34" charset="-120"/>
+                        </a:rPr>
+                        <a:t>判断</a:t>
+                      </a:r>
+                      <a:endParaRPr lang="en-US" sz="1050" dirty="0">
+                        <a:latin typeface="Microsoft YaHei" charset="0"/>
+                        <a:ea typeface="Microsoft YaHei" charset="0"/>
+                        <a:cs typeface="Microsoft YaHei" charset="0"/>
+                      </a:endParaRPr>
+                    </a:p>
+                  </a:txBody>
+                  <a:tcPr marL="73152" marR="73152" marT="27432" marB="27432" anchor="ctr">
+                    <a:lnL w="9525" cap="flat" cmpd="sng" algn="ctr">
+                      <a:solidFill>
+                        <a:srgbClr val="D5DCE4"/>
+                      </a:solidFill>
+                      <a:prstDash val="solid"/>
+                      <a:round/>
+                      <a:headEnd type="none" w="med" len="med"/>
+                      <a:tailEnd type="none" w="med" len="med"/>
+                    </a:lnL>
+                    <a:lnR w="9525" cap="flat" cmpd="sng" algn="ctr">
+                      <a:solidFill>
+                        <a:srgbClr val="D5DCE4"/>
+                      </a:solidFill>
+                      <a:prstDash val="solid"/>
+                      <a:round/>
+                      <a:headEnd type="none" w="med" len="med"/>
+                      <a:tailEnd type="none" w="med" len="med"/>
+                    </a:lnR>
+                    <a:lnT w="9525" cap="flat" cmpd="sng" algn="ctr">
+                      <a:solidFill>
+                        <a:srgbClr val="D5DCE4"/>
+                      </a:solidFill>
+                      <a:prstDash val="solid"/>
+                      <a:round/>
+                      <a:headEnd type="none" w="med" len="med"/>
+                      <a:tailEnd type="none" w="med" len="med"/>
+                    </a:lnT>
+                    <a:lnB w="9525" cap="flat" cmpd="sng" algn="ctr">
+                      <a:solidFill>
+                        <a:srgbClr val="D5DCE4"/>
+                      </a:solidFill>
+                      <a:prstDash val="solid"/>
+                      <a:round/>
+                      <a:headEnd type="none" w="med" len="med"/>
+                      <a:tailEnd type="none" w="med" len="med"/>
+                    </a:lnB>
+                    <a:solidFill>
+                      <a:srgbClr val="0F2A44"/>
+                    </a:solidFill>
+                  </a:tcPr>
+                </a:tc>
+              </a:tr>
+              <a:tr h="347472">
+                <a:tc>
+                  <a:txBody>
+                    <a:bodyPr/>
+                    <a:lstStyle/>
+                    <a:p>
+                      <a:pPr indent="0" marL="0">
+                        <a:buNone/>
+                      </a:pPr>
+                      <a:r>
+                        <a:rPr lang="en-US" sz="1050" dirty="0">
+                          <a:solidFill>
+                            <a:srgbClr val="1B2533"/>
+                          </a:solidFill>
+                          <a:latin typeface="Microsoft YaHei" pitchFamily="34" charset="0"/>
+                          <a:ea typeface="Microsoft YaHei" pitchFamily="34" charset="-122"/>
+                          <a:cs typeface="Microsoft YaHei" pitchFamily="34" charset="-120"/>
+                        </a:rPr>
+                        <a:t>原始检索结果 vs 去重</a:t>
+                      </a:r>
+                      <a:endParaRPr lang="en-US" sz="1050" dirty="0">
+                        <a:latin typeface="Microsoft YaHei" charset="0"/>
+                        <a:ea typeface="Microsoft YaHei" charset="0"/>
+                        <a:cs typeface="Microsoft YaHei" charset="0"/>
+                      </a:endParaRPr>
+                    </a:p>
+                  </a:txBody>
+                  <a:tcPr marL="73152" marR="73152" marT="27432" marB="27432" anchor="ctr">
+                    <a:lnL w="9525" cap="flat" cmpd="sng" algn="ctr">
+                      <a:solidFill>
+                        <a:srgbClr val="D5DCE4"/>
+                      </a:solidFill>
+                      <a:prstDash val="solid"/>
+                      <a:round/>
+                      <a:headEnd type="none" w="med" len="med"/>
+                      <a:tailEnd type="none" w="med" len="med"/>
+                    </a:lnL>
+                    <a:lnR w="9525" cap="flat" cmpd="sng" algn="ctr">
+                      <a:solidFill>
+                        <a:srgbClr val="D5DCE4"/>
+                      </a:solidFill>
+                      <a:prstDash val="solid"/>
+                      <a:round/>
+                      <a:headEnd type="none" w="med" len="med"/>
+                      <a:tailEnd type="none" w="med" len="med"/>
+                    </a:lnR>
+                    <a:lnT w="9525" cap="flat" cmpd="sng" algn="ctr">
+                      <a:solidFill>
+                        <a:srgbClr val="D5DCE4"/>
+                      </a:solidFill>
+                      <a:prstDash val="solid"/>
+                      <a:round/>
+                      <a:headEnd type="none" w="med" len="med"/>
+                      <a:tailEnd type="none" w="med" len="med"/>
+                    </a:lnT>
+                    <a:lnB w="9525" cap="flat" cmpd="sng" algn="ctr">
+                      <a:solidFill>
+                        <a:srgbClr val="D5DCE4"/>
+                      </a:solidFill>
+                      <a:prstDash val="solid"/>
+                      <a:round/>
+                      <a:headEnd type="none" w="med" len="med"/>
+                      <a:tailEnd type="none" w="med" len="med"/>
+                    </a:lnB>
+                    <a:solidFill>
+                      <a:srgbClr val="FFFFFF"/>
+                    </a:solidFill>
+                  </a:tcPr>
+                </a:tc>
+                <a:tc>
+                  <a:txBody>
+                    <a:bodyPr/>
+                    <a:lstStyle/>
+                    <a:p>
+                      <a:pPr indent="0" marL="0">
+                        <a:buNone/>
+                      </a:pPr>
+                      <a:r>
+                        <a:rPr lang="en-US" sz="1050" b="1" dirty="0">
+                          <a:solidFill>
+                            <a:srgbClr val="1B2533"/>
+                          </a:solidFill>
+                          <a:latin typeface="Microsoft YaHei" pitchFamily="34" charset="0"/>
+                          <a:ea typeface="Microsoft YaHei" pitchFamily="34" charset="-122"/>
+                          <a:cs typeface="Microsoft YaHei" pitchFamily="34" charset="-120"/>
+                        </a:rPr>
+                        <a:t>+0.0 分</a:t>
+                      </a:r>
+                      <a:endParaRPr lang="en-US" sz="1050" dirty="0">
+                        <a:latin typeface="Microsoft YaHei" charset="0"/>
+                        <a:ea typeface="Microsoft YaHei" charset="0"/>
+                        <a:cs typeface="Microsoft YaHei" charset="0"/>
+                      </a:endParaRPr>
+                    </a:p>
+                  </a:txBody>
+                  <a:tcPr marL="73152" marR="73152" marT="27432" marB="27432" anchor="ctr">
+                    <a:lnL w="9525" cap="flat" cmpd="sng" algn="ctr">
+                      <a:solidFill>
+                        <a:srgbClr val="D5DCE4"/>
+                      </a:solidFill>
+                      <a:prstDash val="solid"/>
+                      <a:round/>
+                      <a:headEnd type="none" w="med" len="med"/>
+                      <a:tailEnd type="none" w="med" len="med"/>
+                    </a:lnL>
+                    <a:lnR w="9525" cap="flat" cmpd="sng" algn="ctr">
+                      <a:solidFill>
+                        <a:srgbClr val="D5DCE4"/>
+                      </a:solidFill>
+                      <a:prstDash val="solid"/>
+                      <a:round/>
+                      <a:headEnd type="none" w="med" len="med"/>
+                      <a:tailEnd type="none" w="med" len="med"/>
+                    </a:lnR>
+                    <a:lnT w="9525" cap="flat" cmpd="sng" algn="ctr">
+                      <a:solidFill>
+                        <a:srgbClr val="D5DCE4"/>
+                      </a:solidFill>
+                      <a:prstDash val="solid"/>
+                      <a:round/>
+                      <a:headEnd type="none" w="med" len="med"/>
+                      <a:tailEnd type="none" w="med" len="med"/>
+                    </a:lnT>
+                    <a:lnB w="9525" cap="flat" cmpd="sng" algn="ctr">
+                      <a:solidFill>
+                        <a:srgbClr val="D5DCE4"/>
+                      </a:solidFill>
+                      <a:prstDash val="solid"/>
+                      <a:round/>
+                      <a:headEnd type="none" w="med" len="med"/>
+                      <a:tailEnd type="none" w="med" len="med"/>
+                    </a:lnB>
+                    <a:solidFill>
+                      <a:srgbClr val="FFFFFF"/>
+                    </a:solidFill>
+                  </a:tcPr>
+                </a:tc>
+                <a:tc>
+                  <a:txBody>
+                    <a:bodyPr/>
+                    <a:lstStyle/>
+                    <a:p>
+                      <a:pPr indent="0" marL="0">
+                        <a:buNone/>
+                      </a:pPr>
+                      <a:r>
+                        <a:rPr lang="en-US" sz="1050" dirty="0">
+                          <a:solidFill>
+                            <a:srgbClr val="1B2533"/>
+                          </a:solidFill>
+                          <a:latin typeface="Microsoft YaHei" pitchFamily="34" charset="0"/>
+                          <a:ea typeface="Microsoft YaHei" pitchFamily="34" charset="-122"/>
+                          <a:cs typeface="Microsoft YaHei" pitchFamily="34" charset="-120"/>
+                        </a:rPr>
+                        <a:t>−1.8 ~ +1.7</a:t>
+                      </a:r>
+                      <a:endParaRPr lang="en-US" sz="1050" dirty="0">
+                        <a:latin typeface="Microsoft YaHei" charset="0"/>
+                        <a:ea typeface="Microsoft YaHei" charset="0"/>
+                        <a:cs typeface="Microsoft YaHei" charset="0"/>
+                      </a:endParaRPr>
+                    </a:p>
+                  </a:txBody>
+                  <a:tcPr marL="73152" marR="73152" marT="27432" marB="27432" anchor="ctr">
+                    <a:lnL w="9525" cap="flat" cmpd="sng" algn="ctr">
+                      <a:solidFill>
+                        <a:srgbClr val="D5DCE4"/>
+                      </a:solidFill>
+                      <a:prstDash val="solid"/>
+                      <a:round/>
+                      <a:headEnd type="none" w="med" len="med"/>
+                      <a:tailEnd type="none" w="med" len="med"/>
+                    </a:lnL>
+                    <a:lnR w="9525" cap="flat" cmpd="sng" algn="ctr">
+                      <a:solidFill>
+                        <a:srgbClr val="D5DCE4"/>
+                      </a:solidFill>
+                      <a:prstDash val="solid"/>
+                      <a:round/>
+                      <a:headEnd type="none" w="med" len="med"/>
+                      <a:tailEnd type="none" w="med" len="med"/>
+                    </a:lnR>
+                    <a:lnT w="9525" cap="flat" cmpd="sng" algn="ctr">
+                      <a:solidFill>
+                        <a:srgbClr val="D5DCE4"/>
+                      </a:solidFill>
+                      <a:prstDash val="solid"/>
+                      <a:round/>
+                      <a:headEnd type="none" w="med" len="med"/>
+                      <a:tailEnd type="none" w="med" len="med"/>
+                    </a:lnT>
+                    <a:lnB w="9525" cap="flat" cmpd="sng" algn="ctr">
+                      <a:solidFill>
+                        <a:srgbClr val="D5DCE4"/>
+                      </a:solidFill>
+                      <a:prstDash val="solid"/>
+                      <a:round/>
+                      <a:headEnd type="none" w="med" len="med"/>
+                      <a:tailEnd type="none" w="med" len="med"/>
+                    </a:lnB>
+                    <a:solidFill>
+                      <a:srgbClr val="FFFFFF"/>
+                    </a:solidFill>
+                  </a:tcPr>
+                </a:tc>
+                <a:tc>
+                  <a:txBody>
+                    <a:bodyPr/>
+                    <a:lstStyle/>
+                    <a:p>
+                      <a:pPr indent="0" marL="0">
+                        <a:buNone/>
+                      </a:pPr>
+                      <a:r>
+                        <a:rPr lang="en-US" sz="1050" dirty="0">
+                          <a:solidFill>
+                            <a:srgbClr val="1B2533"/>
+                          </a:solidFill>
+                          <a:latin typeface="Microsoft YaHei" pitchFamily="34" charset="0"/>
+                          <a:ea typeface="Microsoft YaHei" pitchFamily="34" charset="-122"/>
+                          <a:cs typeface="Microsoft YaHei" pitchFamily="34" charset="-120"/>
+                        </a:rPr>
+                        <a:t>无影响</a:t>
+                      </a:r>
+                      <a:endParaRPr lang="en-US" sz="1050" dirty="0">
+                        <a:latin typeface="Microsoft YaHei" charset="0"/>
+                        <a:ea typeface="Microsoft YaHei" charset="0"/>
+                        <a:cs typeface="Microsoft YaHei" charset="0"/>
+                      </a:endParaRPr>
+                    </a:p>
+                  </a:txBody>
+                  <a:tcPr marL="73152" marR="73152" marT="27432" marB="27432" anchor="ctr">
+                    <a:lnL w="9525" cap="flat" cmpd="sng" algn="ctr">
+                      <a:solidFill>
+                        <a:srgbClr val="D5DCE4"/>
+                      </a:solidFill>
+                      <a:prstDash val="solid"/>
+                      <a:round/>
+                      <a:headEnd type="none" w="med" len="med"/>
+                      <a:tailEnd type="none" w="med" len="med"/>
+                    </a:lnL>
+                    <a:lnR w="9525" cap="flat" cmpd="sng" algn="ctr">
+                      <a:solidFill>
+                        <a:srgbClr val="D5DCE4"/>
+                      </a:solidFill>
+                      <a:prstDash val="solid"/>
+                      <a:round/>
+                      <a:headEnd type="none" w="med" len="med"/>
+                      <a:tailEnd type="none" w="med" len="med"/>
+                    </a:lnR>
+                    <a:lnT w="9525" cap="flat" cmpd="sng" algn="ctr">
+                      <a:solidFill>
+                        <a:srgbClr val="D5DCE4"/>
+                      </a:solidFill>
+                      <a:prstDash val="solid"/>
+                      <a:round/>
+                      <a:headEnd type="none" w="med" len="med"/>
+                      <a:tailEnd type="none" w="med" len="med"/>
+                    </a:lnT>
+                    <a:lnB w="9525" cap="flat" cmpd="sng" algn="ctr">
+                      <a:solidFill>
+                        <a:srgbClr val="D5DCE4"/>
+                      </a:solidFill>
+                      <a:prstDash val="solid"/>
+                      <a:round/>
+                      <a:headEnd type="none" w="med" len="med"/>
+                      <a:tailEnd type="none" w="med" len="med"/>
+                    </a:lnB>
+                    <a:solidFill>
+                      <a:srgbClr val="FFFFFF"/>
+                    </a:solidFill>
+                  </a:tcPr>
+                </a:tc>
+              </a:tr>
+              <a:tr h="347472">
+                <a:tc>
+                  <a:txBody>
+                    <a:bodyPr/>
+                    <a:lstStyle/>
+                    <a:p>
+                      <a:pPr indent="0" marL="0">
+                        <a:buNone/>
+                      </a:pPr>
+                      <a:r>
+                        <a:rPr lang="en-US" sz="1050" dirty="0">
+                          <a:solidFill>
+                            <a:srgbClr val="1B2533"/>
+                          </a:solidFill>
+                          <a:latin typeface="Microsoft YaHei" pitchFamily="34" charset="0"/>
+                          <a:ea typeface="Microsoft YaHei" pitchFamily="34" charset="-122"/>
+                          <a:cs typeface="Microsoft YaHei" pitchFamily="34" charset="-120"/>
+                        </a:rPr>
+                        <a:t>再加 3 篇同一试验论文</a:t>
+                      </a:r>
+                      <a:endParaRPr lang="en-US" sz="1050" dirty="0">
+                        <a:latin typeface="Microsoft YaHei" charset="0"/>
+                        <a:ea typeface="Microsoft YaHei" charset="0"/>
+                        <a:cs typeface="Microsoft YaHei" charset="0"/>
+                      </a:endParaRPr>
+                    </a:p>
+                  </a:txBody>
+                  <a:tcPr marL="73152" marR="73152" marT="27432" marB="27432" anchor="ctr">
+                    <a:lnL w="9525" cap="flat" cmpd="sng" algn="ctr">
+                      <a:solidFill>
+                        <a:srgbClr val="D5DCE4"/>
+                      </a:solidFill>
+                      <a:prstDash val="solid"/>
+                      <a:round/>
+                      <a:headEnd type="none" w="med" len="med"/>
+                      <a:tailEnd type="none" w="med" len="med"/>
+                    </a:lnL>
+                    <a:lnR w="9525" cap="flat" cmpd="sng" algn="ctr">
+                      <a:solidFill>
+                        <a:srgbClr val="D5DCE4"/>
+                      </a:solidFill>
+                      <a:prstDash val="solid"/>
+                      <a:round/>
+                      <a:headEnd type="none" w="med" len="med"/>
+                      <a:tailEnd type="none" w="med" len="med"/>
+                    </a:lnR>
+                    <a:lnT w="9525" cap="flat" cmpd="sng" algn="ctr">
+                      <a:solidFill>
+                        <a:srgbClr val="D5DCE4"/>
+                      </a:solidFill>
+                      <a:prstDash val="solid"/>
+                      <a:round/>
+                      <a:headEnd type="none" w="med" len="med"/>
+                      <a:tailEnd type="none" w="med" len="med"/>
+                    </a:lnT>
+                    <a:lnB w="9525" cap="flat" cmpd="sng" algn="ctr">
+                      <a:solidFill>
+                        <a:srgbClr val="D5DCE4"/>
+                      </a:solidFill>
+                      <a:prstDash val="solid"/>
+                      <a:round/>
+                      <a:headEnd type="none" w="med" len="med"/>
+                      <a:tailEnd type="none" w="med" len="med"/>
+                    </a:lnB>
+                    <a:solidFill>
+                      <a:srgbClr val="FFFFFF"/>
+                    </a:solidFill>
+                  </a:tcPr>
+                </a:tc>
+                <a:tc>
+                  <a:txBody>
+                    <a:bodyPr/>
+                    <a:lstStyle/>
+                    <a:p>
+                      <a:pPr indent="0" marL="0">
+                        <a:buNone/>
+                      </a:pPr>
+                      <a:r>
+                        <a:rPr lang="en-US" sz="1050" b="1" dirty="0">
+                          <a:solidFill>
+                            <a:srgbClr val="1B2533"/>
+                          </a:solidFill>
+                          <a:latin typeface="Microsoft YaHei" pitchFamily="34" charset="0"/>
+                          <a:ea typeface="Microsoft YaHei" pitchFamily="34" charset="-122"/>
+                          <a:cs typeface="Microsoft YaHei" pitchFamily="34" charset="-120"/>
+                        </a:rPr>
+                        <a:t>+1.2 分</a:t>
+                      </a:r>
+                      <a:endParaRPr lang="en-US" sz="1050" dirty="0">
+                        <a:latin typeface="Microsoft YaHei" charset="0"/>
+                        <a:ea typeface="Microsoft YaHei" charset="0"/>
+                        <a:cs typeface="Microsoft YaHei" charset="0"/>
+                      </a:endParaRPr>
+                    </a:p>
+                  </a:txBody>
+                  <a:tcPr marL="73152" marR="73152" marT="27432" marB="27432" anchor="ctr">
+                    <a:lnL w="9525" cap="flat" cmpd="sng" algn="ctr">
+                      <a:solidFill>
+                        <a:srgbClr val="D5DCE4"/>
+                      </a:solidFill>
+                      <a:prstDash val="solid"/>
+                      <a:round/>
+                      <a:headEnd type="none" w="med" len="med"/>
+                      <a:tailEnd type="none" w="med" len="med"/>
+                    </a:lnL>
+                    <a:lnR w="9525" cap="flat" cmpd="sng" algn="ctr">
+                      <a:solidFill>
+                        <a:srgbClr val="D5DCE4"/>
+                      </a:solidFill>
+                      <a:prstDash val="solid"/>
+                      <a:round/>
+                      <a:headEnd type="none" w="med" len="med"/>
+                      <a:tailEnd type="none" w="med" len="med"/>
+                    </a:lnR>
+                    <a:lnT w="9525" cap="flat" cmpd="sng" algn="ctr">
+                      <a:solidFill>
+                        <a:srgbClr val="D5DCE4"/>
+                      </a:solidFill>
+                      <a:prstDash val="solid"/>
+                      <a:round/>
+                      <a:headEnd type="none" w="med" len="med"/>
+                      <a:tailEnd type="none" w="med" len="med"/>
+                    </a:lnT>
+                    <a:lnB w="9525" cap="flat" cmpd="sng" algn="ctr">
+                      <a:solidFill>
+                        <a:srgbClr val="D5DCE4"/>
+                      </a:solidFill>
+                      <a:prstDash val="solid"/>
+                      <a:round/>
+                      <a:headEnd type="none" w="med" len="med"/>
+                      <a:tailEnd type="none" w="med" len="med"/>
+                    </a:lnB>
+                    <a:solidFill>
+                      <a:srgbClr val="FFFFFF"/>
+                    </a:solidFill>
+                  </a:tcPr>
+                </a:tc>
+                <a:tc>
+                  <a:txBody>
+                    <a:bodyPr/>
+                    <a:lstStyle/>
+                    <a:p>
+                      <a:pPr indent="0" marL="0">
+                        <a:buNone/>
+                      </a:pPr>
+                      <a:r>
+                        <a:rPr lang="en-US" sz="1050" dirty="0">
+                          <a:solidFill>
+                            <a:srgbClr val="1B2533"/>
+                          </a:solidFill>
+                          <a:latin typeface="Microsoft YaHei" pitchFamily="34" charset="0"/>
+                          <a:ea typeface="Microsoft YaHei" pitchFamily="34" charset="-122"/>
+                          <a:cs typeface="Microsoft YaHei" pitchFamily="34" charset="-120"/>
+                        </a:rPr>
+                        <a:t>+0.5 ~ +2.0</a:t>
+                      </a:r>
+                      <a:endParaRPr lang="en-US" sz="1050" dirty="0">
+                        <a:latin typeface="Microsoft YaHei" charset="0"/>
+                        <a:ea typeface="Microsoft YaHei" charset="0"/>
+                        <a:cs typeface="Microsoft YaHei" charset="0"/>
+                      </a:endParaRPr>
+                    </a:p>
+                  </a:txBody>
+                  <a:tcPr marL="73152" marR="73152" marT="27432" marB="27432" anchor="ctr">
+                    <a:lnL w="9525" cap="flat" cmpd="sng" algn="ctr">
+                      <a:solidFill>
+                        <a:srgbClr val="D5DCE4"/>
+                      </a:solidFill>
+                      <a:prstDash val="solid"/>
+                      <a:round/>
+                      <a:headEnd type="none" w="med" len="med"/>
+                      <a:tailEnd type="none" w="med" len="med"/>
+                    </a:lnL>
+                    <a:lnR w="9525" cap="flat" cmpd="sng" algn="ctr">
+                      <a:solidFill>
+                        <a:srgbClr val="D5DCE4"/>
+                      </a:solidFill>
+                      <a:prstDash val="solid"/>
+                      <a:round/>
+                      <a:headEnd type="none" w="med" len="med"/>
+                      <a:tailEnd type="none" w="med" len="med"/>
+                    </a:lnR>
+                    <a:lnT w="9525" cap="flat" cmpd="sng" algn="ctr">
+                      <a:solidFill>
+                        <a:srgbClr val="D5DCE4"/>
+                      </a:solidFill>
+                      <a:prstDash val="solid"/>
+                      <a:round/>
+                      <a:headEnd type="none" w="med" len="med"/>
+                      <a:tailEnd type="none" w="med" len="med"/>
+                    </a:lnT>
+                    <a:lnB w="9525" cap="flat" cmpd="sng" algn="ctr">
+                      <a:solidFill>
+                        <a:srgbClr val="D5DCE4"/>
+                      </a:solidFill>
+                      <a:prstDash val="solid"/>
+                      <a:round/>
+                      <a:headEnd type="none" w="med" len="med"/>
+                      <a:tailEnd type="none" w="med" len="med"/>
+                    </a:lnB>
+                    <a:solidFill>
+                      <a:srgbClr val="FFFFFF"/>
+                    </a:solidFill>
+                  </a:tcPr>
+                </a:tc>
+                <a:tc>
+                  <a:txBody>
+                    <a:bodyPr/>
+                    <a:lstStyle/>
+                    <a:p>
+                      <a:pPr indent="0" marL="0">
+                        <a:buNone/>
+                      </a:pPr>
+                      <a:r>
+                        <a:rPr lang="en-US" sz="1050" b="1" dirty="0">
+                          <a:solidFill>
+                            <a:srgbClr val="C9792A"/>
+                          </a:solidFill>
+                          <a:latin typeface="Microsoft YaHei" pitchFamily="34" charset="0"/>
+                          <a:ea typeface="Microsoft YaHei" pitchFamily="34" charset="-122"/>
+                          <a:cs typeface="Microsoft YaHei" pitchFamily="34" charset="-120"/>
+                        </a:rPr>
+                        <a:t>可测出，但极小</a:t>
+                      </a:r>
+                      <a:endParaRPr lang="en-US" sz="1050" dirty="0">
+                        <a:latin typeface="Microsoft YaHei" charset="0"/>
+                        <a:ea typeface="Microsoft YaHei" charset="0"/>
+                        <a:cs typeface="Microsoft YaHei" charset="0"/>
+                      </a:endParaRPr>
+                    </a:p>
+                  </a:txBody>
+                  <a:tcPr marL="73152" marR="73152" marT="27432" marB="27432" anchor="ctr">
+                    <a:lnL w="9525" cap="flat" cmpd="sng" algn="ctr">
+                      <a:solidFill>
+                        <a:srgbClr val="D5DCE4"/>
+                      </a:solidFill>
+                      <a:prstDash val="solid"/>
+                      <a:round/>
+                      <a:headEnd type="none" w="med" len="med"/>
+                      <a:tailEnd type="none" w="med" len="med"/>
+                    </a:lnL>
+                    <a:lnR w="9525" cap="flat" cmpd="sng" algn="ctr">
+                      <a:solidFill>
+                        <a:srgbClr val="D5DCE4"/>
+                      </a:solidFill>
+                      <a:prstDash val="solid"/>
+                      <a:round/>
+                      <a:headEnd type="none" w="med" len="med"/>
+                      <a:tailEnd type="none" w="med" len="med"/>
+                    </a:lnR>
+                    <a:lnT w="9525" cap="flat" cmpd="sng" algn="ctr">
+                      <a:solidFill>
+                        <a:srgbClr val="D5DCE4"/>
+                      </a:solidFill>
+                      <a:prstDash val="solid"/>
+                      <a:round/>
+                      <a:headEnd type="none" w="med" len="med"/>
+                      <a:tailEnd type="none" w="med" len="med"/>
+                    </a:lnT>
+                    <a:lnB w="9525" cap="flat" cmpd="sng" algn="ctr">
+                      <a:solidFill>
+                        <a:srgbClr val="D5DCE4"/>
+                      </a:solidFill>
+                      <a:prstDash val="solid"/>
+                      <a:round/>
+                      <a:headEnd type="none" w="med" len="med"/>
+                      <a:tailEnd type="none" w="med" len="med"/>
+                    </a:lnB>
+                    <a:solidFill>
+                      <a:srgbClr val="FFFFFF"/>
+                    </a:solidFill>
+                  </a:tcPr>
+                </a:tc>
+              </a:tr>
+              <a:tr h="347472">
+                <a:tc>
+                  <a:txBody>
+                    <a:bodyPr/>
+                    <a:lstStyle/>
+                    <a:p>
+                      <a:pPr indent="0" marL="0">
+                        <a:buNone/>
+                      </a:pPr>
+                      <a:r>
+                        <a:rPr lang="en-US" sz="1050" dirty="0">
+                          <a:solidFill>
+                            <a:srgbClr val="1B2533"/>
+                          </a:solidFill>
+                          <a:latin typeface="Microsoft YaHei" pitchFamily="34" charset="0"/>
+                          <a:ea typeface="Microsoft YaHei" pitchFamily="34" charset="-122"/>
+                          <a:cs typeface="Microsoft YaHei" pitchFamily="34" charset="-120"/>
+                        </a:rPr>
+                        <a:t>再加 6 篇同一试验论文</a:t>
+                      </a:r>
+                      <a:endParaRPr lang="en-US" sz="1050" dirty="0">
+                        <a:latin typeface="Microsoft YaHei" charset="0"/>
+                        <a:ea typeface="Microsoft YaHei" charset="0"/>
+                        <a:cs typeface="Microsoft YaHei" charset="0"/>
+                      </a:endParaRPr>
+                    </a:p>
+                  </a:txBody>
+                  <a:tcPr marL="73152" marR="73152" marT="27432" marB="27432" anchor="ctr">
+                    <a:lnL w="9525" cap="flat" cmpd="sng" algn="ctr">
+                      <a:solidFill>
+                        <a:srgbClr val="D5DCE4"/>
+                      </a:solidFill>
+                      <a:prstDash val="solid"/>
+                      <a:round/>
+                      <a:headEnd type="none" w="med" len="med"/>
+                      <a:tailEnd type="none" w="med" len="med"/>
+                    </a:lnL>
+                    <a:lnR w="9525" cap="flat" cmpd="sng" algn="ctr">
+                      <a:solidFill>
+                        <a:srgbClr val="D5DCE4"/>
+                      </a:solidFill>
+                      <a:prstDash val="solid"/>
+                      <a:round/>
+                      <a:headEnd type="none" w="med" len="med"/>
+                      <a:tailEnd type="none" w="med" len="med"/>
+                    </a:lnR>
+                    <a:lnT w="9525" cap="flat" cmpd="sng" algn="ctr">
+                      <a:solidFill>
+                        <a:srgbClr val="D5DCE4"/>
+                      </a:solidFill>
+                      <a:prstDash val="solid"/>
+                      <a:round/>
+                      <a:headEnd type="none" w="med" len="med"/>
+                      <a:tailEnd type="none" w="med" len="med"/>
+                    </a:lnT>
+                    <a:lnB w="9525" cap="flat" cmpd="sng" algn="ctr">
+                      <a:solidFill>
+                        <a:srgbClr val="D5DCE4"/>
+                      </a:solidFill>
+                      <a:prstDash val="solid"/>
+                      <a:round/>
+                      <a:headEnd type="none" w="med" len="med"/>
+                      <a:tailEnd type="none" w="med" len="med"/>
+                    </a:lnB>
+                    <a:solidFill>
+                      <a:srgbClr val="FFFFFF"/>
+                    </a:solidFill>
+                  </a:tcPr>
+                </a:tc>
+                <a:tc>
+                  <a:txBody>
+                    <a:bodyPr/>
+                    <a:lstStyle/>
+                    <a:p>
+                      <a:pPr indent="0" marL="0">
+                        <a:buNone/>
+                      </a:pPr>
+                      <a:r>
+                        <a:rPr lang="en-US" sz="1050" b="1" dirty="0">
+                          <a:solidFill>
+                            <a:srgbClr val="1B2533"/>
+                          </a:solidFill>
+                          <a:latin typeface="Microsoft YaHei" pitchFamily="34" charset="0"/>
+                          <a:ea typeface="Microsoft YaHei" pitchFamily="34" charset="-122"/>
+                          <a:cs typeface="Microsoft YaHei" pitchFamily="34" charset="-120"/>
+                        </a:rPr>
+                        <a:t>+1.0 分</a:t>
+                      </a:r>
+                      <a:endParaRPr lang="en-US" sz="1050" dirty="0">
+                        <a:latin typeface="Microsoft YaHei" charset="0"/>
+                        <a:ea typeface="Microsoft YaHei" charset="0"/>
+                        <a:cs typeface="Microsoft YaHei" charset="0"/>
+                      </a:endParaRPr>
+                    </a:p>
+                  </a:txBody>
+                  <a:tcPr marL="73152" marR="73152" marT="27432" marB="27432" anchor="ctr">
+                    <a:lnL w="9525" cap="flat" cmpd="sng" algn="ctr">
+                      <a:solidFill>
+                        <a:srgbClr val="D5DCE4"/>
+                      </a:solidFill>
+                      <a:prstDash val="solid"/>
+                      <a:round/>
+                      <a:headEnd type="none" w="med" len="med"/>
+                      <a:tailEnd type="none" w="med" len="med"/>
+                    </a:lnL>
+                    <a:lnR w="9525" cap="flat" cmpd="sng" algn="ctr">
+                      <a:solidFill>
+                        <a:srgbClr val="D5DCE4"/>
+                      </a:solidFill>
+                      <a:prstDash val="solid"/>
+                      <a:round/>
+                      <a:headEnd type="none" w="med" len="med"/>
+                      <a:tailEnd type="none" w="med" len="med"/>
+                    </a:lnR>
+                    <a:lnT w="9525" cap="flat" cmpd="sng" algn="ctr">
+                      <a:solidFill>
+                        <a:srgbClr val="D5DCE4"/>
+                      </a:solidFill>
+                      <a:prstDash val="solid"/>
+                      <a:round/>
+                      <a:headEnd type="none" w="med" len="med"/>
+                      <a:tailEnd type="none" w="med" len="med"/>
+                    </a:lnT>
+                    <a:lnB w="9525" cap="flat" cmpd="sng" algn="ctr">
+                      <a:solidFill>
+                        <a:srgbClr val="D5DCE4"/>
+                      </a:solidFill>
+                      <a:prstDash val="solid"/>
+                      <a:round/>
+                      <a:headEnd type="none" w="med" len="med"/>
+                      <a:tailEnd type="none" w="med" len="med"/>
+                    </a:lnB>
+                    <a:solidFill>
+                      <a:srgbClr val="FFFFFF"/>
+                    </a:solidFill>
+                  </a:tcPr>
+                </a:tc>
+                <a:tc>
+                  <a:txBody>
+                    <a:bodyPr/>
+                    <a:lstStyle/>
+                    <a:p>
+                      <a:pPr indent="0" marL="0">
+                        <a:buNone/>
+                      </a:pPr>
+                      <a:r>
+                        <a:rPr lang="en-US" sz="1050" dirty="0">
+                          <a:solidFill>
+                            <a:srgbClr val="1B2533"/>
+                          </a:solidFill>
+                          <a:latin typeface="Microsoft YaHei" pitchFamily="34" charset="0"/>
+                          <a:ea typeface="Microsoft YaHei" pitchFamily="34" charset="-122"/>
+                          <a:cs typeface="Microsoft YaHei" pitchFamily="34" charset="-120"/>
+                        </a:rPr>
+                        <a:t>+0.3 ~ +1.9</a:t>
+                      </a:r>
+                      <a:endParaRPr lang="en-US" sz="1050" dirty="0">
+                        <a:latin typeface="Microsoft YaHei" charset="0"/>
+                        <a:ea typeface="Microsoft YaHei" charset="0"/>
+                        <a:cs typeface="Microsoft YaHei" charset="0"/>
+                      </a:endParaRPr>
+                    </a:p>
+                  </a:txBody>
+                  <a:tcPr marL="73152" marR="73152" marT="27432" marB="27432" anchor="ctr">
+                    <a:lnL w="9525" cap="flat" cmpd="sng" algn="ctr">
+                      <a:solidFill>
+                        <a:srgbClr val="D5DCE4"/>
+                      </a:solidFill>
+                      <a:prstDash val="solid"/>
+                      <a:round/>
+                      <a:headEnd type="none" w="med" len="med"/>
+                      <a:tailEnd type="none" w="med" len="med"/>
+                    </a:lnL>
+                    <a:lnR w="9525" cap="flat" cmpd="sng" algn="ctr">
+                      <a:solidFill>
+                        <a:srgbClr val="D5DCE4"/>
+                      </a:solidFill>
+                      <a:prstDash val="solid"/>
+                      <a:round/>
+                      <a:headEnd type="none" w="med" len="med"/>
+                      <a:tailEnd type="none" w="med" len="med"/>
+                    </a:lnR>
+                    <a:lnT w="9525" cap="flat" cmpd="sng" algn="ctr">
+                      <a:solidFill>
+                        <a:srgbClr val="D5DCE4"/>
+                      </a:solidFill>
+                      <a:prstDash val="solid"/>
+                      <a:round/>
+                      <a:headEnd type="none" w="med" len="med"/>
+                      <a:tailEnd type="none" w="med" len="med"/>
+                    </a:lnT>
+                    <a:lnB w="9525" cap="flat" cmpd="sng" algn="ctr">
+                      <a:solidFill>
+                        <a:srgbClr val="D5DCE4"/>
+                      </a:solidFill>
+                      <a:prstDash val="solid"/>
+                      <a:round/>
+                      <a:headEnd type="none" w="med" len="med"/>
+                      <a:tailEnd type="none" w="med" len="med"/>
+                    </a:lnB>
+                    <a:solidFill>
+                      <a:srgbClr val="FFFFFF"/>
+                    </a:solidFill>
+                  </a:tcPr>
+                </a:tc>
+                <a:tc>
+                  <a:txBody>
+                    <a:bodyPr/>
+                    <a:lstStyle/>
+                    <a:p>
+                      <a:pPr indent="0" marL="0">
+                        <a:buNone/>
+                      </a:pPr>
+                      <a:r>
+                        <a:rPr lang="en-US" sz="1050" dirty="0">
+                          <a:solidFill>
+                            <a:srgbClr val="1B2533"/>
+                          </a:solidFill>
+                          <a:latin typeface="Microsoft YaHei" pitchFamily="34" charset="0"/>
+                          <a:ea typeface="Microsoft YaHei" pitchFamily="34" charset="-122"/>
+                          <a:cs typeface="Microsoft YaHei" pitchFamily="34" charset="-120"/>
+                        </a:rPr>
+                        <a:t>不随篇数增加</a:t>
+                      </a:r>
+                      <a:endParaRPr lang="en-US" sz="1050" dirty="0">
+                        <a:latin typeface="Microsoft YaHei" charset="0"/>
+                        <a:ea typeface="Microsoft YaHei" charset="0"/>
+                        <a:cs typeface="Microsoft YaHei" charset="0"/>
+                      </a:endParaRPr>
+                    </a:p>
+                  </a:txBody>
+                  <a:tcPr marL="73152" marR="73152" marT="27432" marB="27432" anchor="ctr">
+                    <a:lnL w="9525" cap="flat" cmpd="sng" algn="ctr">
+                      <a:solidFill>
+                        <a:srgbClr val="D5DCE4"/>
+                      </a:solidFill>
+                      <a:prstDash val="solid"/>
+                      <a:round/>
+                      <a:headEnd type="none" w="med" len="med"/>
+                      <a:tailEnd type="none" w="med" len="med"/>
+                    </a:lnL>
+                    <a:lnR w="9525" cap="flat" cmpd="sng" algn="ctr">
+                      <a:solidFill>
+                        <a:srgbClr val="D5DCE4"/>
+                      </a:solidFill>
+                      <a:prstDash val="solid"/>
+                      <a:round/>
+                      <a:headEnd type="none" w="med" len="med"/>
+                      <a:tailEnd type="none" w="med" len="med"/>
+                    </a:lnR>
+                    <a:lnT w="9525" cap="flat" cmpd="sng" algn="ctr">
+                      <a:solidFill>
+                        <a:srgbClr val="D5DCE4"/>
+                      </a:solidFill>
+                      <a:prstDash val="solid"/>
+                      <a:round/>
+                      <a:headEnd type="none" w="med" len="med"/>
+                      <a:tailEnd type="none" w="med" len="med"/>
+                    </a:lnT>
+                    <a:lnB w="9525" cap="flat" cmpd="sng" algn="ctr">
+                      <a:solidFill>
+                        <a:srgbClr val="D5DCE4"/>
+                      </a:solidFill>
+                      <a:prstDash val="solid"/>
+                      <a:round/>
+                      <a:headEnd type="none" w="med" len="med"/>
+                      <a:tailEnd type="none" w="med" len="med"/>
+                    </a:lnB>
+                    <a:solidFill>
+                      <a:srgbClr val="FFFFFF"/>
+                    </a:solidFill>
+                  </a:tcPr>
+                </a:tc>
+              </a:tr>
+              <a:tr h="347472">
+                <a:tc>
+                  <a:txBody>
+                    <a:bodyPr/>
+                    <a:lstStyle/>
+                    <a:p>
+                      <a:pPr indent="0" marL="0">
+                        <a:buNone/>
+                      </a:pPr>
+                      <a:r>
+                        <a:rPr lang="en-US" sz="1050" dirty="0">
+                          <a:solidFill>
+                            <a:srgbClr val="1B2533"/>
+                          </a:solidFill>
+                          <a:latin typeface="Microsoft YaHei" pitchFamily="34" charset="0"/>
+                          <a:ea typeface="Microsoft YaHei" pitchFamily="34" charset="-122"/>
+                          <a:cs typeface="Microsoft YaHei" pitchFamily="34" charset="-120"/>
+                        </a:rPr>
+                        <a:t>标注来源 vs 原始</a:t>
+                      </a:r>
+                      <a:endParaRPr lang="en-US" sz="1050" dirty="0">
+                        <a:latin typeface="Microsoft YaHei" charset="0"/>
+                        <a:ea typeface="Microsoft YaHei" charset="0"/>
+                        <a:cs typeface="Microsoft YaHei" charset="0"/>
+                      </a:endParaRPr>
+                    </a:p>
+                  </a:txBody>
+                  <a:tcPr marL="73152" marR="73152" marT="27432" marB="27432" anchor="ctr">
+                    <a:lnL w="9525" cap="flat" cmpd="sng" algn="ctr">
+                      <a:solidFill>
+                        <a:srgbClr val="D5DCE4"/>
+                      </a:solidFill>
+                      <a:prstDash val="solid"/>
+                      <a:round/>
+                      <a:headEnd type="none" w="med" len="med"/>
+                      <a:tailEnd type="none" w="med" len="med"/>
+                    </a:lnL>
+                    <a:lnR w="9525" cap="flat" cmpd="sng" algn="ctr">
+                      <a:solidFill>
+                        <a:srgbClr val="D5DCE4"/>
+                      </a:solidFill>
+                      <a:prstDash val="solid"/>
+                      <a:round/>
+                      <a:headEnd type="none" w="med" len="med"/>
+                      <a:tailEnd type="none" w="med" len="med"/>
+                    </a:lnR>
+                    <a:lnT w="9525" cap="flat" cmpd="sng" algn="ctr">
+                      <a:solidFill>
+                        <a:srgbClr val="D5DCE4"/>
+                      </a:solidFill>
+                      <a:prstDash val="solid"/>
+                      <a:round/>
+                      <a:headEnd type="none" w="med" len="med"/>
+                      <a:tailEnd type="none" w="med" len="med"/>
+                    </a:lnT>
+                    <a:lnB w="9525" cap="flat" cmpd="sng" algn="ctr">
+                      <a:solidFill>
+                        <a:srgbClr val="D5DCE4"/>
+                      </a:solidFill>
+                      <a:prstDash val="solid"/>
+                      <a:round/>
+                      <a:headEnd type="none" w="med" len="med"/>
+                      <a:tailEnd type="none" w="med" len="med"/>
+                    </a:lnB>
+                    <a:solidFill>
+                      <a:srgbClr val="FFFFFF"/>
+                    </a:solidFill>
+                  </a:tcPr>
+                </a:tc>
+                <a:tc>
+                  <a:txBody>
+                    <a:bodyPr/>
+                    <a:lstStyle/>
+                    <a:p>
+                      <a:pPr indent="0" marL="0">
+                        <a:buNone/>
+                      </a:pPr>
+                      <a:r>
+                        <a:rPr lang="en-US" sz="1050" b="1" dirty="0">
+                          <a:solidFill>
+                            <a:srgbClr val="1B2533"/>
+                          </a:solidFill>
+                          <a:latin typeface="Microsoft YaHei" pitchFamily="34" charset="0"/>
+                          <a:ea typeface="Microsoft YaHei" pitchFamily="34" charset="-122"/>
+                          <a:cs typeface="Microsoft YaHei" pitchFamily="34" charset="-120"/>
+                        </a:rPr>
+                        <a:t>−1.4 分</a:t>
+                      </a:r>
+                      <a:endParaRPr lang="en-US" sz="1050" dirty="0">
+                        <a:latin typeface="Microsoft YaHei" charset="0"/>
+                        <a:ea typeface="Microsoft YaHei" charset="0"/>
+                        <a:cs typeface="Microsoft YaHei" charset="0"/>
+                      </a:endParaRPr>
+                    </a:p>
+                  </a:txBody>
+                  <a:tcPr marL="73152" marR="73152" marT="27432" marB="27432" anchor="ctr">
+                    <a:lnL w="9525" cap="flat" cmpd="sng" algn="ctr">
+                      <a:solidFill>
+                        <a:srgbClr val="D5DCE4"/>
+                      </a:solidFill>
+                      <a:prstDash val="solid"/>
+                      <a:round/>
+                      <a:headEnd type="none" w="med" len="med"/>
+                      <a:tailEnd type="none" w="med" len="med"/>
+                    </a:lnL>
+                    <a:lnR w="9525" cap="flat" cmpd="sng" algn="ctr">
+                      <a:solidFill>
+                        <a:srgbClr val="D5DCE4"/>
+                      </a:solidFill>
+                      <a:prstDash val="solid"/>
+                      <a:round/>
+                      <a:headEnd type="none" w="med" len="med"/>
+                      <a:tailEnd type="none" w="med" len="med"/>
+                    </a:lnR>
+                    <a:lnT w="9525" cap="flat" cmpd="sng" algn="ctr">
+                      <a:solidFill>
+                        <a:srgbClr val="D5DCE4"/>
+                      </a:solidFill>
+                      <a:prstDash val="solid"/>
+                      <a:round/>
+                      <a:headEnd type="none" w="med" len="med"/>
+                      <a:tailEnd type="none" w="med" len="med"/>
+                    </a:lnT>
+                    <a:lnB w="9525" cap="flat" cmpd="sng" algn="ctr">
+                      <a:solidFill>
+                        <a:srgbClr val="D5DCE4"/>
+                      </a:solidFill>
+                      <a:prstDash val="solid"/>
+                      <a:round/>
+                      <a:headEnd type="none" w="med" len="med"/>
+                      <a:tailEnd type="none" w="med" len="med"/>
+                    </a:lnB>
+                    <a:solidFill>
+                      <a:srgbClr val="FFFFFF"/>
+                    </a:solidFill>
+                  </a:tcPr>
+                </a:tc>
+                <a:tc>
+                  <a:txBody>
+                    <a:bodyPr/>
+                    <a:lstStyle/>
+                    <a:p>
+                      <a:pPr indent="0" marL="0">
+                        <a:buNone/>
+                      </a:pPr>
+                      <a:r>
+                        <a:rPr lang="en-US" sz="1050" dirty="0">
+                          <a:solidFill>
+                            <a:srgbClr val="1B2533"/>
+                          </a:solidFill>
+                          <a:latin typeface="Microsoft YaHei" pitchFamily="34" charset="0"/>
+                          <a:ea typeface="Microsoft YaHei" pitchFamily="34" charset="-122"/>
+                          <a:cs typeface="Microsoft YaHei" pitchFamily="34" charset="-120"/>
+                        </a:rPr>
+                        <a:t>−3.5 ~ +0.2</a:t>
+                      </a:r>
+                      <a:endParaRPr lang="en-US" sz="1050" dirty="0">
+                        <a:latin typeface="Microsoft YaHei" charset="0"/>
+                        <a:ea typeface="Microsoft YaHei" charset="0"/>
+                        <a:cs typeface="Microsoft YaHei" charset="0"/>
+                      </a:endParaRPr>
+                    </a:p>
+                  </a:txBody>
+                  <a:tcPr marL="73152" marR="73152" marT="27432" marB="27432" anchor="ctr">
+                    <a:lnL w="9525" cap="flat" cmpd="sng" algn="ctr">
+                      <a:solidFill>
+                        <a:srgbClr val="D5DCE4"/>
+                      </a:solidFill>
+                      <a:prstDash val="solid"/>
+                      <a:round/>
+                      <a:headEnd type="none" w="med" len="med"/>
+                      <a:tailEnd type="none" w="med" len="med"/>
+                    </a:lnL>
+                    <a:lnR w="9525" cap="flat" cmpd="sng" algn="ctr">
+                      <a:solidFill>
+                        <a:srgbClr val="D5DCE4"/>
+                      </a:solidFill>
+                      <a:prstDash val="solid"/>
+                      <a:round/>
+                      <a:headEnd type="none" w="med" len="med"/>
+                      <a:tailEnd type="none" w="med" len="med"/>
+                    </a:lnR>
+                    <a:lnT w="9525" cap="flat" cmpd="sng" algn="ctr">
+                      <a:solidFill>
+                        <a:srgbClr val="D5DCE4"/>
+                      </a:solidFill>
+                      <a:prstDash val="solid"/>
+                      <a:round/>
+                      <a:headEnd type="none" w="med" len="med"/>
+                      <a:tailEnd type="none" w="med" len="med"/>
+                    </a:lnT>
+                    <a:lnB w="9525" cap="flat" cmpd="sng" algn="ctr">
+                      <a:solidFill>
+                        <a:srgbClr val="D5DCE4"/>
+                      </a:solidFill>
+                      <a:prstDash val="solid"/>
+                      <a:round/>
+                      <a:headEnd type="none" w="med" len="med"/>
+                      <a:tailEnd type="none" w="med" len="med"/>
+                    </a:lnB>
+                    <a:solidFill>
+                      <a:srgbClr val="FFFFFF"/>
+                    </a:solidFill>
+                  </a:tcPr>
+                </a:tc>
+                <a:tc>
+                  <a:txBody>
+                    <a:bodyPr/>
+                    <a:lstStyle/>
+                    <a:p>
+                      <a:pPr indent="0" marL="0">
+                        <a:buNone/>
+                      </a:pPr>
+                      <a:r>
+                        <a:rPr lang="en-US" sz="1050" dirty="0">
+                          <a:solidFill>
+                            <a:srgbClr val="1B2533"/>
+                          </a:solidFill>
+                          <a:latin typeface="Microsoft YaHei" pitchFamily="34" charset="0"/>
+                          <a:ea typeface="Microsoft YaHei" pitchFamily="34" charset="-122"/>
+                          <a:cs typeface="Microsoft YaHei" pitchFamily="34" charset="-120"/>
+                        </a:rPr>
+                        <a:t>不显著</a:t>
+                      </a:r>
+                      <a:endParaRPr lang="en-US" sz="1050" dirty="0">
+                        <a:latin typeface="Microsoft YaHei" charset="0"/>
+                        <a:ea typeface="Microsoft YaHei" charset="0"/>
+                        <a:cs typeface="Microsoft YaHei" charset="0"/>
+                      </a:endParaRPr>
+                    </a:p>
+                  </a:txBody>
+                  <a:tcPr marL="73152" marR="73152" marT="27432" marB="27432" anchor="ctr">
+                    <a:lnL w="9525" cap="flat" cmpd="sng" algn="ctr">
+                      <a:solidFill>
+                        <a:srgbClr val="D5DCE4"/>
+                      </a:solidFill>
+                      <a:prstDash val="solid"/>
+                      <a:round/>
+                      <a:headEnd type="none" w="med" len="med"/>
+                      <a:tailEnd type="none" w="med" len="med"/>
+                    </a:lnL>
+                    <a:lnR w="9525" cap="flat" cmpd="sng" algn="ctr">
+                      <a:solidFill>
+                        <a:srgbClr val="D5DCE4"/>
+                      </a:solidFill>
+                      <a:prstDash val="solid"/>
+                      <a:round/>
+                      <a:headEnd type="none" w="med" len="med"/>
+                      <a:tailEnd type="none" w="med" len="med"/>
+                    </a:lnR>
+                    <a:lnT w="9525" cap="flat" cmpd="sng" algn="ctr">
+                      <a:solidFill>
+                        <a:srgbClr val="D5DCE4"/>
+                      </a:solidFill>
+                      <a:prstDash val="solid"/>
+                      <a:round/>
+                      <a:headEnd type="none" w="med" len="med"/>
+                      <a:tailEnd type="none" w="med" len="med"/>
+                    </a:lnT>
+                    <a:lnB w="9525" cap="flat" cmpd="sng" algn="ctr">
+                      <a:solidFill>
+                        <a:srgbClr val="D5DCE4"/>
+                      </a:solidFill>
+                      <a:prstDash val="solid"/>
+                      <a:round/>
+                      <a:headEnd type="none" w="med" len="med"/>
+                      <a:tailEnd type="none" w="med" len="med"/>
+                    </a:lnB>
+                    <a:solidFill>
+                      <a:srgbClr val="FFFFFF"/>
+                    </a:solidFill>
+                  </a:tcPr>
+                </a:tc>
+              </a:tr>
+            </a:tbl>
+          </a:graphicData>
+        </a:graphic>
+      </p:graphicFrame>
+      <p:sp>
+        <p:nvSpPr>
+          <p:cNvPr id="19" name="label-134"/>
+          <p:cNvSpPr txBox="1"/>
+          <p:nvPr/>
+        </p:nvSpPr>
+        <p:spPr>
+          <a:xfrm>
+            <a:off x="5303520" y="4617720"/>
+            <a:ext cx="6065215" cy="731520"/>
+          </a:xfrm>
+          <a:prstGeom prst="rect">
+            <a:avLst/>
+          </a:prstGeom>
+          <a:noFill/>
+          <a:ln/>
+        </p:spPr>
+        <p:txBody>
+          <a:bodyPr wrap="square" lIns="0" tIns="0" rIns="0" bIns="0" rtlCol="0" anchor="t"/>
+          <a:lstStyle/>
+          <a:p>
+            <a:pPr algn="l" indent="0" marL="0">
+              <a:buNone/>
+            </a:pPr>
+            <a:r>
+              <a:rPr lang="en-US" sz="1100" dirty="0">
+                <a:solidFill>
+                  <a:schemeClr val="tx1"/>
+                </a:solidFill>
+              </a:rPr>
+              <a:t>原因：模型读到摘要时会自行识别同源——25 份原始条件的回答中，有 10 份主动指出“多篇来自同一试验，只计一次”。</a:t>
+            </a:r>
+            <a:endParaRPr lang="en-US" sz="1100" dirty="0"/>
+          </a:p>
+        </p:txBody>
+      </p:sp>
+      <p:sp>
+        <p:nvSpPr>
+          <p:cNvPr id="20" name="box-135"/>
+          <p:cNvSpPr/>
+          <p:nvPr/>
+        </p:nvSpPr>
+        <p:spPr>
+          <a:xfrm>
+            <a:off x="548640" y="5596128"/>
+            <a:ext cx="11094415" cy="457200"/>
           </a:xfrm>
           <a:prstGeom prst="roundRect">
             <a:avLst>
-              <a:gd name="adj" fmla="val 10000"/>
+              <a:gd name="adj" fmla="val 16000"/>
             </a:avLst>
           </a:prstGeom>
           <a:solidFill>
@@ -12764,48 +13033,34 @@
           </a:ln>
         </p:spPr>
         <p:txBody>
-          <a:bodyPr wrap="square" lIns="762" tIns="762" rIns="762" bIns="762" rtlCol="0" anchor="ctr"/>
-          <a:lstStyle/>
-          <a:p>
-            <a:pPr algn="ctr" indent="0" marL="0">
-              <a:buNone/>
-            </a:pPr>
-            <a:r>
-              <a:rPr lang="en-US" sz="1300" b="1" dirty="0">
+          <a:bodyPr wrap="square" lIns="1524" tIns="1524" rIns="1524" bIns="1524" rtlCol="0" anchor="ctr"/>
+          <a:lstStyle/>
+          <a:p>
+            <a:pPr algn="l" indent="0" marL="0">
+              <a:buNone/>
+            </a:pPr>
+            <a:r>
+              <a:rPr lang="en-US" sz="1250" b="1" dirty="0">
                 <a:solidFill>
                   <a:schemeClr val="tx2"/>
                 </a:solidFill>
               </a:rPr>
-              <a:t>计为 1 条</a:t>
-            </a:r>
-            <a:endParaRPr lang="en-US" sz="1300" dirty="0"/>
-          </a:p>
-          <a:p>
-            <a:pPr algn="ctr" indent="0" marL="0">
-              <a:buNone/>
-            </a:pPr>
-            <a:r>
-              <a:rPr lang="en-US" sz="1300" b="1" dirty="0">
-                <a:solidFill>
-                  <a:schemeClr val="tx2"/>
-                </a:solidFill>
-              </a:rPr>
-              <a:t>独立证据</a:t>
-            </a:r>
-            <a:endParaRPr lang="en-US" sz="1300" dirty="0"/>
-          </a:p>
-        </p:txBody>
-      </p:sp>
-      <p:sp>
-        <p:nvSpPr>
-          <p:cNvPr id="23" name="label-139"/>
+              <a:t>结论：影响约 1 分（满分 100），不再单列为设计。实际要做的只有一件小事：检索结果附上摘要（目前只给标题）。</a:t>
+            </a:r>
+            <a:endParaRPr lang="en-US" sz="1250" dirty="0"/>
+          </a:p>
+        </p:txBody>
+      </p:sp>
+      <p:sp>
+        <p:nvSpPr>
+          <p:cNvPr id="21" name="label-136"/>
           <p:cNvSpPr txBox="1"/>
           <p:nvPr/>
         </p:nvSpPr>
         <p:spPr>
           <a:xfrm>
-            <a:off x="3291840" y="3680460"/>
-            <a:ext cx="3657600" cy="685800"/>
+            <a:off x="548640" y="6108192"/>
+            <a:ext cx="11094415" cy="274320"/>
           </a:xfrm>
           <a:prstGeom prst="rect">
             <a:avLst/>
@@ -12821,392 +13076,14 @@
               <a:buNone/>
             </a:pPr>
             <a:r>
-              <a:rPr lang="en-US" sz="1100" dirty="0">
-                <a:solidFill>
-                  <a:schemeClr val="tx1"/>
-                </a:solidFill>
-              </a:rPr>
-              <a:t>同一批受试者的主结果、亚组分析、长期随访等 6 篇论文，只能算 1 条证据；按篇数计会被放大 6 倍。</a:t>
-            </a:r>
-            <a:endParaRPr lang="en-US" sz="1100" dirty="0"/>
-          </a:p>
-        </p:txBody>
-      </p:sp>
-      <p:sp>
-        <p:nvSpPr>
-          <p:cNvPr id="24" name="label-140"/>
-          <p:cNvSpPr txBox="1"/>
-          <p:nvPr/>
-        </p:nvSpPr>
-        <p:spPr>
-          <a:xfrm>
-            <a:off x="822960" y="4983480"/>
-            <a:ext cx="6126480" cy="1005840"/>
-          </a:xfrm>
-          <a:prstGeom prst="rect">
-            <a:avLst/>
-          </a:prstGeom>
-          <a:noFill/>
-          <a:ln/>
-        </p:spPr>
-        <p:txBody>
-          <a:bodyPr wrap="square" lIns="0" tIns="0" rIns="0" bIns="0" rtlCol="0" anchor="t"/>
-          <a:lstStyle/>
-          <a:p>
-            <a:pPr algn="l" indent="0" marL="0">
-              <a:buNone/>
-            </a:pPr>
-            <a:r>
-              <a:rPr lang="en-US" sz="1200" b="1" dirty="0">
-                <a:solidFill>
-                  <a:schemeClr val="tx2"/>
-                </a:solidFill>
-              </a:rPr>
-              <a:t>系统只做标注：“以下 6 篇来自同一试验 NCT03155997”。证据强弱不由系统打分，由专家判断。</a:t>
-            </a:r>
-            <a:endParaRPr lang="en-US" sz="1200" dirty="0"/>
-          </a:p>
-        </p:txBody>
-      </p:sp>
-      <p:sp>
-        <p:nvSpPr>
-          <p:cNvPr id="25" name="badge-141"/>
-          <p:cNvSpPr/>
-          <p:nvPr/>
-        </p:nvSpPr>
-        <p:spPr>
-          <a:xfrm>
-            <a:off x="7543800" y="1691640"/>
-            <a:ext cx="384048" cy="384048"/>
-          </a:xfrm>
-          <a:prstGeom prst="ellipse">
-            <a:avLst/>
-          </a:prstGeom>
-          <a:solidFill>
-            <a:schemeClr val="accent1"/>
-          </a:solidFill>
-          <a:ln w="6350">
-            <a:solidFill>
-              <a:schemeClr val="accent1"/>
-            </a:solidFill>
-          </a:ln>
-        </p:spPr>
-        <p:txBody>
-          <a:bodyPr wrap="square" lIns="0" tIns="0" rIns="0" bIns="0" rtlCol="0" anchor="ctr"/>
-          <a:lstStyle/>
-          <a:p>
-            <a:pPr algn="ctr" indent="0" marL="0">
-              <a:buNone/>
-            </a:pPr>
-            <a:r>
-              <a:rPr lang="en-US" sz="1500" b="1" dirty="0">
-                <a:solidFill>
-                  <a:schemeClr val="bg1"/>
-                </a:solidFill>
-              </a:rPr>
-              <a:t>1</a:t>
-            </a:r>
-            <a:endParaRPr lang="en-US" sz="1500" dirty="0"/>
-          </a:p>
-        </p:txBody>
-      </p:sp>
-      <p:sp>
-        <p:nvSpPr>
-          <p:cNvPr id="26" name="label-142"/>
-          <p:cNvSpPr txBox="1"/>
-          <p:nvPr/>
-        </p:nvSpPr>
-        <p:spPr>
-          <a:xfrm>
-            <a:off x="8074152" y="1673352"/>
-            <a:ext cx="3568903" cy="411480"/>
-          </a:xfrm>
-          <a:prstGeom prst="rect">
-            <a:avLst/>
-          </a:prstGeom>
-          <a:noFill/>
-          <a:ln/>
-        </p:spPr>
-        <p:txBody>
-          <a:bodyPr wrap="square" lIns="0" tIns="0" rIns="0" bIns="0" rtlCol="0" anchor="ctr"/>
-          <a:lstStyle/>
-          <a:p>
-            <a:pPr algn="l" indent="0" marL="0">
-              <a:buNone/>
-            </a:pPr>
-            <a:r>
-              <a:rPr lang="en-US" sz="1600" b="1" dirty="0">
-                <a:solidFill>
-                  <a:schemeClr val="tx2"/>
-                </a:solidFill>
-              </a:rPr>
-              <a:t>为什么要做</a:t>
-            </a:r>
-            <a:endParaRPr lang="en-US" sz="1600" dirty="0"/>
-          </a:p>
-        </p:txBody>
-      </p:sp>
-      <p:sp>
-        <p:nvSpPr>
-          <p:cNvPr id="27" name="label-143"/>
-          <p:cNvSpPr txBox="1"/>
-          <p:nvPr/>
-        </p:nvSpPr>
-        <p:spPr>
-          <a:xfrm>
-            <a:off x="8074152" y="2103120"/>
-            <a:ext cx="3568903" cy="1005840"/>
-          </a:xfrm>
-          <a:prstGeom prst="rect">
-            <a:avLst/>
-          </a:prstGeom>
-          <a:noFill/>
-          <a:ln/>
-        </p:spPr>
-        <p:txBody>
-          <a:bodyPr wrap="square" lIns="0" tIns="0" rIns="0" bIns="0" rtlCol="0" anchor="t"/>
-          <a:lstStyle/>
-          <a:p>
-            <a:pPr algn="l" indent="0" marL="0">
-              <a:buNone/>
-            </a:pPr>
-            <a:r>
-              <a:rPr lang="en-US" sz="1250" dirty="0">
+              <a:rPr lang="en-US" sz="1000" dirty="0">
                 <a:solidFill>
                   <a:schemeClr val="accent6"/>
                 </a:solidFill>
               </a:rPr>
-              <a:t>系统现在只把标题交给模型；仅凭标题，粗略估计只有约 15% 的同源论文对能被看出来。</a:t>
-            </a:r>
-            <a:endParaRPr lang="en-US" sz="1250" dirty="0"/>
-          </a:p>
-        </p:txBody>
-      </p:sp>
-      <p:sp>
-        <p:nvSpPr>
-          <p:cNvPr id="28" name="badge-144"/>
-          <p:cNvSpPr/>
-          <p:nvPr/>
-        </p:nvSpPr>
-        <p:spPr>
-          <a:xfrm>
-            <a:off x="7543800" y="3172968"/>
-            <a:ext cx="384048" cy="384048"/>
-          </a:xfrm>
-          <a:prstGeom prst="ellipse">
-            <a:avLst/>
-          </a:prstGeom>
-          <a:solidFill>
-            <a:schemeClr val="accent1"/>
-          </a:solidFill>
-          <a:ln w="6350">
-            <a:solidFill>
-              <a:schemeClr val="accent1"/>
-            </a:solidFill>
-          </a:ln>
-        </p:spPr>
-        <p:txBody>
-          <a:bodyPr wrap="square" lIns="0" tIns="0" rIns="0" bIns="0" rtlCol="0" anchor="ctr"/>
-          <a:lstStyle/>
-          <a:p>
-            <a:pPr algn="ctr" indent="0" marL="0">
-              <a:buNone/>
-            </a:pPr>
-            <a:r>
-              <a:rPr lang="en-US" sz="1500" b="1" dirty="0">
-                <a:solidFill>
-                  <a:schemeClr val="bg1"/>
-                </a:solidFill>
-              </a:rPr>
-              <a:t>2</a:t>
-            </a:r>
-            <a:endParaRPr lang="en-US" sz="1500" dirty="0"/>
-          </a:p>
-        </p:txBody>
-      </p:sp>
-      <p:sp>
-        <p:nvSpPr>
-          <p:cNvPr id="29" name="label-145"/>
-          <p:cNvSpPr txBox="1"/>
-          <p:nvPr/>
-        </p:nvSpPr>
-        <p:spPr>
-          <a:xfrm>
-            <a:off x="8074152" y="3154680"/>
-            <a:ext cx="3568903" cy="411480"/>
-          </a:xfrm>
-          <a:prstGeom prst="rect">
-            <a:avLst/>
-          </a:prstGeom>
-          <a:noFill/>
-          <a:ln/>
-        </p:spPr>
-        <p:txBody>
-          <a:bodyPr wrap="square" lIns="0" tIns="0" rIns="0" bIns="0" rtlCol="0" anchor="ctr"/>
-          <a:lstStyle/>
-          <a:p>
-            <a:pPr algn="l" indent="0" marL="0">
-              <a:buNone/>
-            </a:pPr>
-            <a:r>
-              <a:rPr lang="en-US" sz="1600" b="1" dirty="0">
-                <a:solidFill>
-                  <a:schemeClr val="tx2"/>
-                </a:solidFill>
-              </a:rPr>
-              <a:t>怎么做</a:t>
-            </a:r>
-            <a:endParaRPr lang="en-US" sz="1600" dirty="0"/>
-          </a:p>
-        </p:txBody>
-      </p:sp>
-      <p:sp>
-        <p:nvSpPr>
-          <p:cNvPr id="30" name="label-146"/>
-          <p:cNvSpPr txBox="1"/>
-          <p:nvPr/>
-        </p:nvSpPr>
-        <p:spPr>
-          <a:xfrm>
-            <a:off x="8074152" y="3584448"/>
-            <a:ext cx="3568903" cy="1005840"/>
-          </a:xfrm>
-          <a:prstGeom prst="rect">
-            <a:avLst/>
-          </a:prstGeom>
-          <a:noFill/>
-          <a:ln/>
-        </p:spPr>
-        <p:txBody>
-          <a:bodyPr wrap="square" lIns="0" tIns="0" rIns="0" bIns="0" rtlCol="0" anchor="t"/>
-          <a:lstStyle/>
-          <a:p>
-            <a:pPr algn="l" indent="0" marL="0">
-              <a:buNone/>
-            </a:pPr>
-            <a:r>
-              <a:rPr lang="en-US" sz="1250" dirty="0">
-                <a:solidFill>
-                  <a:schemeClr val="accent6"/>
-                </a:solidFill>
-              </a:rPr>
-              <a:t>用 PubMed 的试验关联和摘要中的试验编号标注来源，现查现算；合并只是按编号分组，不需要模型推理。</a:t>
-            </a:r>
-            <a:endParaRPr lang="en-US" sz="1250" dirty="0"/>
-          </a:p>
-        </p:txBody>
-      </p:sp>
-      <p:sp>
-        <p:nvSpPr>
-          <p:cNvPr id="31" name="badge-147"/>
-          <p:cNvSpPr/>
-          <p:nvPr/>
-        </p:nvSpPr>
-        <p:spPr>
-          <a:xfrm>
-            <a:off x="7543800" y="4654296"/>
-            <a:ext cx="384048" cy="384048"/>
-          </a:xfrm>
-          <a:prstGeom prst="ellipse">
-            <a:avLst/>
-          </a:prstGeom>
-          <a:solidFill>
-            <a:schemeClr val="accent1"/>
-          </a:solidFill>
-          <a:ln w="6350">
-            <a:solidFill>
-              <a:schemeClr val="accent1"/>
-            </a:solidFill>
-          </a:ln>
-        </p:spPr>
-        <p:txBody>
-          <a:bodyPr wrap="square" lIns="0" tIns="0" rIns="0" bIns="0" rtlCol="0" anchor="ctr"/>
-          <a:lstStyle/>
-          <a:p>
-            <a:pPr algn="ctr" indent="0" marL="0">
-              <a:buNone/>
-            </a:pPr>
-            <a:r>
-              <a:rPr lang="en-US" sz="1500" b="1" dirty="0">
-                <a:solidFill>
-                  <a:schemeClr val="bg1"/>
-                </a:solidFill>
-              </a:rPr>
-              <a:t>3</a:t>
-            </a:r>
-            <a:endParaRPr lang="en-US" sz="1500" dirty="0"/>
-          </a:p>
-        </p:txBody>
-      </p:sp>
-      <p:sp>
-        <p:nvSpPr>
-          <p:cNvPr id="32" name="label-148"/>
-          <p:cNvSpPr txBox="1"/>
-          <p:nvPr/>
-        </p:nvSpPr>
-        <p:spPr>
-          <a:xfrm>
-            <a:off x="8074152" y="4636008"/>
-            <a:ext cx="3568903" cy="411480"/>
-          </a:xfrm>
-          <a:prstGeom prst="rect">
-            <a:avLst/>
-          </a:prstGeom>
-          <a:noFill/>
-          <a:ln/>
-        </p:spPr>
-        <p:txBody>
-          <a:bodyPr wrap="square" lIns="0" tIns="0" rIns="0" bIns="0" rtlCol="0" anchor="ctr"/>
-          <a:lstStyle/>
-          <a:p>
-            <a:pPr algn="l" indent="0" marL="0">
-              <a:buNone/>
-            </a:pPr>
-            <a:r>
-              <a:rPr lang="en-US" sz="1600" b="1" dirty="0">
-                <a:solidFill>
-                  <a:schemeClr val="tx2"/>
-                </a:solidFill>
-              </a:rPr>
-              <a:t>定位</a:t>
-            </a:r>
-            <a:endParaRPr lang="en-US" sz="1600" dirty="0"/>
-          </a:p>
-        </p:txBody>
-      </p:sp>
-      <p:sp>
-        <p:nvSpPr>
-          <p:cNvPr id="33" name="label-149"/>
-          <p:cNvSpPr txBox="1"/>
-          <p:nvPr/>
-        </p:nvSpPr>
-        <p:spPr>
-          <a:xfrm>
-            <a:off x="8074152" y="5065776"/>
-            <a:ext cx="3568903" cy="1005840"/>
-          </a:xfrm>
-          <a:prstGeom prst="rect">
-            <a:avLst/>
-          </a:prstGeom>
-          <a:noFill/>
-          <a:ln/>
-        </p:spPr>
-        <p:txBody>
-          <a:bodyPr wrap="square" lIns="0" tIns="0" rIns="0" bIns="0" rtlCol="0" anchor="t"/>
-          <a:lstStyle/>
-          <a:p>
-            <a:pPr algn="l" indent="0" marL="0">
-              <a:buNone/>
-            </a:pPr>
-            <a:r>
-              <a:rPr lang="en-US" sz="1250" dirty="0">
-                <a:solidFill>
-                  <a:schemeClr val="accent6"/>
-                </a:solidFill>
-              </a:rPr>
-              <a:t>一个低成本的小功能，不作为创新点；它是否真的改变模型结论，由下一页的实验来回答。</a:t>
-            </a:r>
-            <a:endParaRPr lang="en-US" sz="1250" dirty="0"/>
+              <a:t>局限：多数问题已有定论（84% 的回答 ≥ 90 或 ≤ 10），对结论尚不确定的问题未检验；单一模型、单次运行。数据与脚本已存档，可复现。</a:t>
+            </a:r>
+            <a:endParaRPr lang="en-US" sz="1000" dirty="0"/>
           </a:p>
         </p:txBody>
       </p:sp>
@@ -13312,7 +13189,7 @@
                   <a:schemeClr val="tx2"/>
                 </a:solidFill>
               </a:rPr>
-              <a:t>实测现象与待验证假设：同源证据会不会造成“虚假共识”</a:t>
+              <a:t>支撑设计：多智能体协作与本地运行时</a:t>
             </a:r>
             <a:endParaRPr lang="en-US" sz="2800" dirty="0"/>
           </a:p>
@@ -13350,7 +13227,7 @@
                   <a:schemeClr val="accent6"/>
                 </a:solidFill>
               </a:rPr>
-              <a:t>现象已实测；它是否真的影响大模型的结论，用一个无需人工标注的对照实验来回答。</a:t>
+              <a:t>B 类管“谁来做、谁把关”，C 类管“在哪里跑、用谁的额度”；两者在 2.x 已具备，3.0 继续完善。</a:t>
             </a:r>
             <a:endParaRPr lang="en-US" sz="1500" dirty="0"/>
           </a:p>
@@ -13358,18 +13235,18 @@
       </p:sp>
       <p:sp>
         <p:nvSpPr>
-          <p:cNvPr id="4" name="card-150"/>
+          <p:cNvPr id="4" name="card-137"/>
           <p:cNvSpPr/>
           <p:nvPr/>
         </p:nvSpPr>
         <p:spPr>
           <a:xfrm>
             <a:off x="548640" y="1600200"/>
-            <a:ext cx="5410048" cy="4434840"/>
+            <a:ext cx="5410048" cy="4572000"/>
           </a:xfrm>
           <a:prstGeom prst="roundRect">
             <a:avLst>
-              <a:gd name="adj" fmla="val 2062"/>
+              <a:gd name="adj" fmla="val 2000"/>
             </a:avLst>
           </a:prstGeom>
           <a:solidFill>
@@ -13385,24 +13262,26 @@
       </p:sp>
       <p:sp>
         <p:nvSpPr>
-          <p:cNvPr id="5" name="badge-151"/>
+          <p:cNvPr id="5" name="tag-138"/>
           <p:cNvSpPr/>
           <p:nvPr/>
         </p:nvSpPr>
         <p:spPr>
           <a:xfrm>
-            <a:off x="822960" y="1783080"/>
-            <a:ext cx="384048" cy="384048"/>
-          </a:xfrm>
-          <a:prstGeom prst="ellipse">
-            <a:avLst/>
+            <a:off x="822960" y="1810512"/>
+            <a:ext cx="411480" cy="411480"/>
+          </a:xfrm>
+          <a:prstGeom prst="roundRect">
+            <a:avLst>
+              <a:gd name="adj" fmla="val 13333"/>
+            </a:avLst>
           </a:prstGeom>
           <a:solidFill>
-            <a:schemeClr val="accent1"/>
+            <a:schemeClr val="accent2"/>
           </a:solidFill>
-          <a:ln w="6350">
+          <a:ln>
             <a:solidFill>
-              <a:schemeClr val="accent1"/>
+              <a:schemeClr val="accent2"/>
             </a:solidFill>
           </a:ln>
         </p:spPr>
@@ -13414,27 +13293,27 @@
               <a:buNone/>
             </a:pPr>
             <a:r>
-              <a:rPr lang="en-US" sz="1500" b="1" dirty="0">
+              <a:rPr lang="en-US" sz="1600" b="1" dirty="0">
                 <a:solidFill>
                   <a:schemeClr val="bg1"/>
                 </a:solidFill>
               </a:rPr>
-              <a:t>1</a:t>
-            </a:r>
-            <a:endParaRPr lang="en-US" sz="1500" dirty="0"/>
-          </a:p>
-        </p:txBody>
-      </p:sp>
-      <p:sp>
-        <p:nvSpPr>
-          <p:cNvPr id="6" name="label-152"/>
+              <a:t>B</a:t>
+            </a:r>
+            <a:endParaRPr lang="en-US" sz="1600" dirty="0"/>
+          </a:p>
+        </p:txBody>
+      </p:sp>
+      <p:sp>
+        <p:nvSpPr>
+          <p:cNvPr id="6" name="label-139"/>
           <p:cNvSpPr txBox="1"/>
           <p:nvPr/>
         </p:nvSpPr>
         <p:spPr>
           <a:xfrm>
-            <a:off x="1325880" y="1755648"/>
-            <a:ext cx="4404208" cy="411480"/>
+            <a:off x="1371600" y="1810512"/>
+            <a:ext cx="4312768" cy="411480"/>
           </a:xfrm>
           <a:prstGeom prst="rect">
             <a:avLst/>
@@ -13450,27 +13329,343 @@
               <a:buNone/>
             </a:pPr>
             <a:r>
-              <a:rPr lang="en-US" sz="1550" b="1" dirty="0">
+              <a:rPr lang="en-US" sz="1700" b="1" dirty="0">
                 <a:solidFill>
                   <a:schemeClr val="tx2"/>
                 </a:solidFill>
               </a:rPr>
-              <a:t>现象（已实测）：同源证据普遍存在</a:t>
-            </a:r>
-            <a:endParaRPr lang="en-US" sz="1550" dirty="0"/>
-          </a:p>
-        </p:txBody>
-      </p:sp>
-      <p:sp>
-        <p:nvSpPr>
-          <p:cNvPr id="7" name="label-153"/>
+              <a:t>多智能体协作：像课题组一样分工</a:t>
+            </a:r>
+            <a:endParaRPr lang="en-US" sz="1700" dirty="0"/>
+          </a:p>
+        </p:txBody>
+      </p:sp>
+      <p:sp>
+        <p:nvSpPr>
+          <p:cNvPr id="7" name="box-140"/>
+          <p:cNvSpPr/>
+          <p:nvPr/>
+        </p:nvSpPr>
+        <p:spPr>
+          <a:xfrm>
+            <a:off x="822960" y="2514600"/>
+            <a:ext cx="811347" cy="566928"/>
+          </a:xfrm>
+          <a:prstGeom prst="roundRect">
+            <a:avLst>
+              <a:gd name="adj" fmla="val 12903"/>
+            </a:avLst>
+          </a:prstGeom>
+          <a:solidFill>
+            <a:schemeClr val="bg1"/>
+          </a:solidFill>
+          <a:ln w="12700">
+            <a:solidFill>
+              <a:srgbClr val="D5DCE4"/>
+            </a:solidFill>
+          </a:ln>
+        </p:spPr>
+        <p:txBody>
+          <a:bodyPr wrap="square" lIns="762" tIns="762" rIns="762" bIns="762" rtlCol="0" anchor="ctr"/>
+          <a:lstStyle/>
+          <a:p>
+            <a:pPr algn="ctr" indent="0" marL="0">
+              <a:buNone/>
+            </a:pPr>
+            <a:r>
+              <a:rPr lang="en-US" sz="1250" b="1" dirty="0">
+                <a:solidFill>
+                  <a:schemeClr val="tx2"/>
+                </a:solidFill>
+              </a:rPr>
+              <a:t>研究课题</a:t>
+            </a:r>
+            <a:endParaRPr lang="en-US" sz="1250" dirty="0"/>
+          </a:p>
+        </p:txBody>
+      </p:sp>
+      <p:sp>
+        <p:nvSpPr>
+          <p:cNvPr id="8" name="arrow-141"/>
+          <p:cNvSpPr/>
+          <p:nvPr/>
+        </p:nvSpPr>
+        <p:spPr>
+          <a:xfrm>
+            <a:off x="1652595" y="2798064"/>
+            <a:ext cx="164592" cy="0"/>
+          </a:xfrm>
+          <a:prstGeom prst="line">
+            <a:avLst/>
+          </a:prstGeom>
+          <a:noFill/>
+          <a:ln w="15875">
+            <a:solidFill>
+              <a:schemeClr val="accent2"/>
+            </a:solidFill>
+            <a:prstDash val="solid"/>
+            <a:tailEnd type="triangle"/>
+          </a:ln>
+        </p:spPr>
+      </p:sp>
+      <p:sp>
+        <p:nvSpPr>
+          <p:cNvPr id="9" name="box-142"/>
+          <p:cNvSpPr/>
+          <p:nvPr/>
+        </p:nvSpPr>
+        <p:spPr>
+          <a:xfrm>
+            <a:off x="1835475" y="2514600"/>
+            <a:ext cx="811347" cy="566928"/>
+          </a:xfrm>
+          <a:prstGeom prst="roundRect">
+            <a:avLst>
+              <a:gd name="adj" fmla="val 12903"/>
+            </a:avLst>
+          </a:prstGeom>
+          <a:solidFill>
+            <a:schemeClr val="bg1"/>
+          </a:solidFill>
+          <a:ln w="12700">
+            <a:solidFill>
+              <a:srgbClr val="D5DCE4"/>
+            </a:solidFill>
+          </a:ln>
+        </p:spPr>
+        <p:txBody>
+          <a:bodyPr wrap="square" lIns="762" tIns="762" rIns="762" bIns="762" rtlCol="0" anchor="ctr"/>
+          <a:lstStyle/>
+          <a:p>
+            <a:pPr algn="ctr" indent="0" marL="0">
+              <a:buNone/>
+            </a:pPr>
+            <a:r>
+              <a:rPr lang="en-US" sz="1250" b="1" dirty="0">
+                <a:solidFill>
+                  <a:schemeClr val="tx2"/>
+                </a:solidFill>
+              </a:rPr>
+              <a:t>队长规划</a:t>
+            </a:r>
+            <a:endParaRPr lang="en-US" sz="1250" dirty="0"/>
+          </a:p>
+        </p:txBody>
+      </p:sp>
+      <p:sp>
+        <p:nvSpPr>
+          <p:cNvPr id="10" name="arrow-143"/>
+          <p:cNvSpPr/>
+          <p:nvPr/>
+        </p:nvSpPr>
+        <p:spPr>
+          <a:xfrm>
+            <a:off x="2665110" y="2798064"/>
+            <a:ext cx="164592" cy="0"/>
+          </a:xfrm>
+          <a:prstGeom prst="line">
+            <a:avLst/>
+          </a:prstGeom>
+          <a:noFill/>
+          <a:ln w="15875">
+            <a:solidFill>
+              <a:schemeClr val="accent2"/>
+            </a:solidFill>
+            <a:prstDash val="solid"/>
+            <a:tailEnd type="triangle"/>
+          </a:ln>
+        </p:spPr>
+      </p:sp>
+      <p:sp>
+        <p:nvSpPr>
+          <p:cNvPr id="11" name="box-144"/>
+          <p:cNvSpPr/>
+          <p:nvPr/>
+        </p:nvSpPr>
+        <p:spPr>
+          <a:xfrm>
+            <a:off x="2847990" y="2514600"/>
+            <a:ext cx="811347" cy="566928"/>
+          </a:xfrm>
+          <a:prstGeom prst="roundRect">
+            <a:avLst>
+              <a:gd name="adj" fmla="val 12903"/>
+            </a:avLst>
+          </a:prstGeom>
+          <a:solidFill>
+            <a:schemeClr val="bg1"/>
+          </a:solidFill>
+          <a:ln w="12700">
+            <a:solidFill>
+              <a:srgbClr val="D5DCE4"/>
+            </a:solidFill>
+          </a:ln>
+        </p:spPr>
+        <p:txBody>
+          <a:bodyPr wrap="square" lIns="762" tIns="762" rIns="762" bIns="762" rtlCol="0" anchor="ctr"/>
+          <a:lstStyle/>
+          <a:p>
+            <a:pPr algn="ctr" indent="0" marL="0">
+              <a:buNone/>
+            </a:pPr>
+            <a:r>
+              <a:rPr lang="en-US" sz="1250" b="1" dirty="0">
+                <a:solidFill>
+                  <a:schemeClr val="tx2"/>
+                </a:solidFill>
+              </a:rPr>
+              <a:t>成员并行</a:t>
+            </a:r>
+            <a:endParaRPr lang="en-US" sz="1250" dirty="0"/>
+          </a:p>
+        </p:txBody>
+      </p:sp>
+      <p:sp>
+        <p:nvSpPr>
+          <p:cNvPr id="12" name="arrow-145"/>
+          <p:cNvSpPr/>
+          <p:nvPr/>
+        </p:nvSpPr>
+        <p:spPr>
+          <a:xfrm>
+            <a:off x="3677625" y="2798064"/>
+            <a:ext cx="164592" cy="0"/>
+          </a:xfrm>
+          <a:prstGeom prst="line">
+            <a:avLst/>
+          </a:prstGeom>
+          <a:noFill/>
+          <a:ln w="15875">
+            <a:solidFill>
+              <a:schemeClr val="accent2"/>
+            </a:solidFill>
+            <a:prstDash val="solid"/>
+            <a:tailEnd type="triangle"/>
+          </a:ln>
+        </p:spPr>
+      </p:sp>
+      <p:sp>
+        <p:nvSpPr>
+          <p:cNvPr id="13" name="box-146"/>
+          <p:cNvSpPr/>
+          <p:nvPr/>
+        </p:nvSpPr>
+        <p:spPr>
+          <a:xfrm>
+            <a:off x="3860505" y="2514600"/>
+            <a:ext cx="811347" cy="566928"/>
+          </a:xfrm>
+          <a:prstGeom prst="roundRect">
+            <a:avLst>
+              <a:gd name="adj" fmla="val 12903"/>
+            </a:avLst>
+          </a:prstGeom>
+          <a:solidFill>
+            <a:srgbClr val="E3F3F1"/>
+          </a:solidFill>
+          <a:ln w="12700">
+            <a:solidFill>
+              <a:srgbClr val="0E8A7E"/>
+            </a:solidFill>
+          </a:ln>
+        </p:spPr>
+        <p:txBody>
+          <a:bodyPr wrap="square" lIns="762" tIns="762" rIns="762" bIns="762" rtlCol="0" anchor="ctr"/>
+          <a:lstStyle/>
+          <a:p>
+            <a:pPr algn="ctr" indent="0" marL="0">
+              <a:buNone/>
+            </a:pPr>
+            <a:r>
+              <a:rPr lang="en-US" sz="1250" b="1" dirty="0">
+                <a:solidFill>
+                  <a:schemeClr val="tx2"/>
+                </a:solidFill>
+              </a:rPr>
+              <a:t>质量门</a:t>
+            </a:r>
+            <a:endParaRPr lang="en-US" sz="1250" dirty="0"/>
+          </a:p>
+        </p:txBody>
+      </p:sp>
+      <p:sp>
+        <p:nvSpPr>
+          <p:cNvPr id="14" name="arrow-147"/>
+          <p:cNvSpPr/>
+          <p:nvPr/>
+        </p:nvSpPr>
+        <p:spPr>
+          <a:xfrm>
+            <a:off x="4690140" y="2798064"/>
+            <a:ext cx="164592" cy="0"/>
+          </a:xfrm>
+          <a:prstGeom prst="line">
+            <a:avLst/>
+          </a:prstGeom>
+          <a:noFill/>
+          <a:ln w="15875">
+            <a:solidFill>
+              <a:schemeClr val="accent2"/>
+            </a:solidFill>
+            <a:prstDash val="solid"/>
+            <a:tailEnd type="triangle"/>
+          </a:ln>
+        </p:spPr>
+      </p:sp>
+      <p:sp>
+        <p:nvSpPr>
+          <p:cNvPr id="15" name="box-148"/>
+          <p:cNvSpPr/>
+          <p:nvPr/>
+        </p:nvSpPr>
+        <p:spPr>
+          <a:xfrm>
+            <a:off x="4873020" y="2514600"/>
+            <a:ext cx="811347" cy="566928"/>
+          </a:xfrm>
+          <a:prstGeom prst="roundRect">
+            <a:avLst>
+              <a:gd name="adj" fmla="val 12903"/>
+            </a:avLst>
+          </a:prstGeom>
+          <a:solidFill>
+            <a:schemeClr val="bg1"/>
+          </a:solidFill>
+          <a:ln w="12700">
+            <a:solidFill>
+              <a:srgbClr val="D5DCE4"/>
+            </a:solidFill>
+          </a:ln>
+        </p:spPr>
+        <p:txBody>
+          <a:bodyPr wrap="square" lIns="762" tIns="762" rIns="762" bIns="762" rtlCol="0" anchor="ctr"/>
+          <a:lstStyle/>
+          <a:p>
+            <a:pPr algn="ctr" indent="0" marL="0">
+              <a:buNone/>
+            </a:pPr>
+            <a:r>
+              <a:rPr lang="en-US" sz="1250" b="1" dirty="0">
+                <a:solidFill>
+                  <a:schemeClr val="tx2"/>
+                </a:solidFill>
+              </a:rPr>
+              <a:t>综合报告</a:t>
+            </a:r>
+            <a:endParaRPr lang="en-US" sz="1250" dirty="0"/>
+          </a:p>
+        </p:txBody>
+      </p:sp>
+      <p:sp>
+        <p:nvSpPr>
+          <p:cNvPr id="16" name="bullets-149"/>
           <p:cNvSpPr txBox="1"/>
           <p:nvPr/>
         </p:nvSpPr>
         <p:spPr>
           <a:xfrm>
-            <a:off x="822960" y="2240280"/>
-            <a:ext cx="4861408" cy="457200"/>
+            <a:off x="822960" y="3337560"/>
+            <a:ext cx="4861408" cy="2011680"/>
           </a:xfrm>
           <a:prstGeom prst="rect">
             <a:avLst/>
@@ -13482,31 +13677,71 @@
           <a:bodyPr wrap="square" lIns="0" tIns="0" rIns="0" bIns="0" rtlCol="0" anchor="t"/>
           <a:lstStyle/>
           <a:p>
-            <a:pPr algn="l" indent="0" marL="0">
-              <a:buNone/>
-            </a:pPr>
-            <a:r>
-              <a:rPr lang="en-US" sz="1100" dirty="0">
+            <a:pPr marL="177800" indent="-177800">
+              <a:spcAft>
+                <a:spcPts val="800"/>
+              </a:spcAft>
+              <a:buSzPct val="100000"/>
+              <a:buChar char="•"/>
+            </a:pPr>
+            <a:r>
+              <a:rPr lang="en-US" sz="1300" dirty="0">
                 <a:solidFill>
                   <a:schemeClr val="tx1"/>
                 </a:solidFill>
               </a:rPr>
-              <a:t>94 个真实“药物–疾病”问题，系统自带文献检索取前 20 篇，共 1649 篇；按 PubMed 试验关联溯源。</a:t>
-            </a:r>
-            <a:endParaRPr lang="en-US" sz="1100" dirty="0"/>
-          </a:p>
-        </p:txBody>
-      </p:sp>
-      <p:sp>
-        <p:nvSpPr>
-          <p:cNvPr id="8" name="label-154"/>
+              <a:t>队长（PI）把课题拆成有依赖的任务，可要求先审批计划</a:t>
+            </a:r>
+            <a:endParaRPr lang="en-US" sz="1300" dirty="0"/>
+          </a:p>
+          <a:p>
+            <a:pPr marL="177800" indent="-177800">
+              <a:spcAft>
+                <a:spcPts val="800"/>
+              </a:spcAft>
+              <a:buSzPct val="100000"/>
+              <a:buChar char="•"/>
+            </a:pPr>
+            <a:r>
+              <a:rPr lang="en-US" sz="1300" dirty="0">
+                <a:solidFill>
+                  <a:schemeClr val="tx1"/>
+                </a:solidFill>
+              </a:rPr>
+              <a:t>成员交接时，每条发现都必须附证据编号</a:t>
+            </a:r>
+            <a:endParaRPr lang="en-US" sz="1300" dirty="0"/>
+          </a:p>
+          <a:p>
+            <a:pPr marL="177800" indent="-177800">
+              <a:spcAft>
+                <a:spcPts val="800"/>
+              </a:spcAft>
+              <a:buSzPct val="100000"/>
+              <a:buChar char="•"/>
+            </a:pPr>
+            <a:r>
+              <a:rPr lang="en-US" sz="1300" dirty="0">
+                <a:solidFill>
+                  <a:schemeClr val="tx1"/>
+                </a:solidFill>
+              </a:rPr>
+              <a:t>质量门：规则检查 + 科研审查员；工具失败不算“阴性结果”</a:t>
+            </a:r>
+            <a:endParaRPr lang="en-US" sz="1300" dirty="0"/>
+          </a:p>
+        </p:txBody>
+      </p:sp>
+      <p:sp>
+        <p:nvSpPr>
+          <p:cNvPr id="17" name="label-150"/>
           <p:cNvSpPr txBox="1"/>
           <p:nvPr/>
         </p:nvSpPr>
         <p:spPr>
           <a:xfrm>
-            <a:off x="822960" y="2834640"/>
-            <a:ext cx="1417320" cy="640080"/>
+            <a:off x="822960" y="5349240"/>
+            <a:ext cx="1620469" cy="411480"/>
           </a:xfrm>
           <a:prstGeom prst="rect">
             <a:avLst/>
@@ -13515,34 +13750,34 @@
           <a:ln/>
         </p:spPr>
         <p:txBody>
-          <a:bodyPr wrap="square" lIns="0" tIns="0" rIns="0" bIns="0" rtlCol="0" anchor="ctr"/>
+          <a:bodyPr wrap="square" lIns="0" tIns="0" rIns="0" bIns="0" rtlCol="0" anchor="t"/>
           <a:lstStyle/>
           <a:p>
             <a:pPr algn="ctr" indent="0" marL="0">
               <a:buNone/>
             </a:pPr>
             <a:r>
-              <a:rPr lang="en-US" sz="3000" b="1" dirty="0">
-                <a:solidFill>
-                  <a:schemeClr val="accent3"/>
-                </a:solidFill>
-              </a:rPr>
-              <a:t>40%</a:t>
-            </a:r>
-            <a:endParaRPr lang="en-US" sz="3000" dirty="0"/>
-          </a:p>
-        </p:txBody>
-      </p:sp>
-      <p:sp>
-        <p:nvSpPr>
-          <p:cNvPr id="9" name="label-155"/>
+              <a:rPr lang="en-US" sz="2000" b="1" dirty="0">
+                <a:solidFill>
+                  <a:schemeClr val="accent2"/>
+                </a:solidFill>
+              </a:rPr>
+              <a:t>26 位</a:t>
+            </a:r>
+            <a:endParaRPr lang="en-US" sz="2000" dirty="0"/>
+          </a:p>
+        </p:txBody>
+      </p:sp>
+      <p:sp>
+        <p:nvSpPr>
+          <p:cNvPr id="18" name="label-151"/>
           <p:cNvSpPr txBox="1"/>
           <p:nvPr/>
         </p:nvSpPr>
         <p:spPr>
           <a:xfrm>
-            <a:off x="2331720" y="2880360"/>
-            <a:ext cx="3352648" cy="594360"/>
+            <a:off x="822960" y="5742432"/>
+            <a:ext cx="1620469" cy="274320"/>
           </a:xfrm>
           <a:prstGeom prst="rect">
             <a:avLst/>
@@ -13551,48 +13786,34 @@
           <a:ln/>
         </p:spPr>
         <p:txBody>
-          <a:bodyPr wrap="square" lIns="0" tIns="0" rIns="0" bIns="0" rtlCol="0" anchor="ctr"/>
-          <a:lstStyle/>
-          <a:p>
-            <a:pPr algn="l" indent="0" marL="0">
+          <a:bodyPr wrap="square" lIns="0" tIns="0" rIns="0" bIns="0" rtlCol="0" anchor="t"/>
+          <a:lstStyle/>
+          <a:p>
+            <a:pPr algn="ctr" indent="0" marL="0">
               <a:buNone/>
             </a:pPr>
             <a:r>
               <a:rPr lang="en-US" sz="1150" dirty="0">
                 <a:solidFill>
-                  <a:schemeClr val="tx1"/>
-                </a:solidFill>
-              </a:rPr>
-              <a:t>含试验证据的问题中，</a:t>
+                  <a:schemeClr val="accent6"/>
+                </a:solidFill>
+              </a:rPr>
+              <a:t>领域专家</a:t>
             </a:r>
             <a:endParaRPr lang="en-US" sz="1150" dirty="0"/>
           </a:p>
-          <a:p>
-            <a:pPr algn="l" indent="0" marL="0">
-              <a:buNone/>
-            </a:pPr>
-            <a:r>
-              <a:rPr lang="en-US" sz="1150" dirty="0">
-                <a:solidFill>
-                  <a:schemeClr val="tx1"/>
-                </a:solidFill>
-              </a:rPr>
-              <a:t>存在同源论文的比例（25 / 62）</a:t>
-            </a:r>
-            <a:endParaRPr lang="en-US" sz="1150" dirty="0"/>
-          </a:p>
-        </p:txBody>
-      </p:sp>
-      <p:sp>
-        <p:nvSpPr>
-          <p:cNvPr id="10" name="label-156"/>
+        </p:txBody>
+      </p:sp>
+      <p:sp>
+        <p:nvSpPr>
+          <p:cNvPr id="19" name="label-152"/>
           <p:cNvSpPr txBox="1"/>
           <p:nvPr/>
         </p:nvSpPr>
         <p:spPr>
           <a:xfrm>
-            <a:off x="822960" y="3703320"/>
-            <a:ext cx="1417320" cy="640080"/>
+            <a:off x="2443429" y="5349240"/>
+            <a:ext cx="1620469" cy="411480"/>
           </a:xfrm>
           <a:prstGeom prst="rect">
             <a:avLst/>
@@ -13601,34 +13822,34 @@
           <a:ln/>
         </p:spPr>
         <p:txBody>
-          <a:bodyPr wrap="square" lIns="0" tIns="0" rIns="0" bIns="0" rtlCol="0" anchor="ctr"/>
+          <a:bodyPr wrap="square" lIns="0" tIns="0" rIns="0" bIns="0" rtlCol="0" anchor="t"/>
           <a:lstStyle/>
           <a:p>
             <a:pPr algn="ctr" indent="0" marL="0">
               <a:buNone/>
             </a:pPr>
             <a:r>
-              <a:rPr lang="en-US" sz="3000" b="1" dirty="0">
-                <a:solidFill>
-                  <a:schemeClr val="accent3"/>
-                </a:solidFill>
-              </a:rPr>
-              <a:t>29%</a:t>
-            </a:r>
-            <a:endParaRPr lang="en-US" sz="3000" dirty="0"/>
-          </a:p>
-        </p:txBody>
-      </p:sp>
-      <p:sp>
-        <p:nvSpPr>
-          <p:cNvPr id="11" name="label-157"/>
+              <a:rPr lang="en-US" sz="2000" b="1" dirty="0">
+                <a:solidFill>
+                  <a:schemeClr val="accent2"/>
+                </a:solidFill>
+              </a:rPr>
+              <a:t>15 个</a:t>
+            </a:r>
+            <a:endParaRPr lang="en-US" sz="2000" dirty="0"/>
+          </a:p>
+        </p:txBody>
+      </p:sp>
+      <p:sp>
+        <p:nvSpPr>
+          <p:cNvPr id="20" name="label-153"/>
           <p:cNvSpPr txBox="1"/>
           <p:nvPr/>
         </p:nvSpPr>
         <p:spPr>
           <a:xfrm>
-            <a:off x="2331720" y="3749040"/>
-            <a:ext cx="3352648" cy="594360"/>
+            <a:off x="2443429" y="5742432"/>
+            <a:ext cx="1620469" cy="274320"/>
           </a:xfrm>
           <a:prstGeom prst="rect">
             <a:avLst/>
@@ -13637,48 +13858,34 @@
           <a:ln/>
         </p:spPr>
         <p:txBody>
-          <a:bodyPr wrap="square" lIns="0" tIns="0" rIns="0" bIns="0" rtlCol="0" anchor="ctr"/>
-          <a:lstStyle/>
-          <a:p>
-            <a:pPr algn="l" indent="0" marL="0">
+          <a:bodyPr wrap="square" lIns="0" tIns="0" rIns="0" bIns="0" rtlCol="0" anchor="t"/>
+          <a:lstStyle/>
+          <a:p>
+            <a:pPr algn="ctr" indent="0" marL="0">
               <a:buNone/>
             </a:pPr>
             <a:r>
               <a:rPr lang="en-US" sz="1150" dirty="0">
                 <a:solidFill>
-                  <a:schemeClr val="tx1"/>
-                </a:solidFill>
-              </a:rPr>
-              <a:t>试验类论文中，</a:t>
+                  <a:schemeClr val="accent6"/>
+                </a:solidFill>
+              </a:rPr>
+              <a:t>团队模板</a:t>
             </a:r>
             <a:endParaRPr lang="en-US" sz="1150" dirty="0"/>
           </a:p>
-          <a:p>
-            <a:pPr algn="l" indent="0" marL="0">
-              <a:buNone/>
-            </a:pPr>
-            <a:r>
-              <a:rPr lang="en-US" sz="1150" dirty="0">
-                <a:solidFill>
-                  <a:schemeClr val="tx1"/>
-                </a:solidFill>
-              </a:rPr>
-              <a:t>属于重复计数的比例（60 / 207）</a:t>
-            </a:r>
-            <a:endParaRPr lang="en-US" sz="1150" dirty="0"/>
-          </a:p>
-        </p:txBody>
-      </p:sp>
-      <p:sp>
-        <p:nvSpPr>
-          <p:cNvPr id="12" name="label-158"/>
+        </p:txBody>
+      </p:sp>
+      <p:sp>
+        <p:nvSpPr>
+          <p:cNvPr id="21" name="label-154"/>
           <p:cNvSpPr txBox="1"/>
           <p:nvPr/>
         </p:nvSpPr>
         <p:spPr>
           <a:xfrm>
-            <a:off x="822960" y="4572000"/>
-            <a:ext cx="1417320" cy="640080"/>
+            <a:off x="4063898" y="5349240"/>
+            <a:ext cx="1620469" cy="411480"/>
           </a:xfrm>
           <a:prstGeom prst="rect">
             <a:avLst/>
@@ -13687,34 +13894,34 @@
           <a:ln/>
         </p:spPr>
         <p:txBody>
-          <a:bodyPr wrap="square" lIns="0" tIns="0" rIns="0" bIns="0" rtlCol="0" anchor="ctr"/>
+          <a:bodyPr wrap="square" lIns="0" tIns="0" rIns="0" bIns="0" rtlCol="0" anchor="t"/>
           <a:lstStyle/>
           <a:p>
             <a:pPr algn="ctr" indent="0" marL="0">
               <a:buNone/>
             </a:pPr>
             <a:r>
-              <a:rPr lang="en-US" sz="3000" b="1" dirty="0">
-                <a:solidFill>
-                  <a:schemeClr val="accent3"/>
-                </a:solidFill>
-              </a:rPr>
-              <a:t>8 篇</a:t>
-            </a:r>
-            <a:endParaRPr lang="en-US" sz="3000" dirty="0"/>
-          </a:p>
-        </p:txBody>
-      </p:sp>
-      <p:sp>
-        <p:nvSpPr>
-          <p:cNvPr id="13" name="label-159"/>
+              <a:rPr lang="en-US" sz="2000" b="1" dirty="0">
+                <a:solidFill>
+                  <a:schemeClr val="accent2"/>
+                </a:solidFill>
+              </a:rPr>
+              <a:t>@</a:t>
+            </a:r>
+            <a:endParaRPr lang="en-US" sz="2000" dirty="0"/>
+          </a:p>
+        </p:txBody>
+      </p:sp>
+      <p:sp>
+        <p:nvSpPr>
+          <p:cNvPr id="22" name="label-155"/>
           <p:cNvSpPr txBox="1"/>
           <p:nvPr/>
         </p:nvSpPr>
         <p:spPr>
           <a:xfrm>
-            <a:off x="2331720" y="4617720"/>
-            <a:ext cx="3352648" cy="594360"/>
+            <a:off x="4063898" y="5742432"/>
+            <a:ext cx="1620469" cy="274320"/>
           </a:xfrm>
           <a:prstGeom prst="rect">
             <a:avLst/>
@@ -13723,88 +13930,38 @@
           <a:ln/>
         </p:spPr>
         <p:txBody>
-          <a:bodyPr wrap="square" lIns="0" tIns="0" rIns="0" bIns="0" rtlCol="0" anchor="ctr"/>
-          <a:lstStyle/>
-          <a:p>
-            <a:pPr algn="l" indent="0" marL="0">
+          <a:bodyPr wrap="square" lIns="0" tIns="0" rIns="0" bIns="0" rtlCol="0" anchor="t"/>
+          <a:lstStyle/>
+          <a:p>
+            <a:pPr algn="ctr" indent="0" marL="0">
               <a:buNone/>
             </a:pPr>
             <a:r>
               <a:rPr lang="en-US" sz="1150" dirty="0">
                 <a:solidFill>
-                  <a:schemeClr val="tx1"/>
-                </a:solidFill>
-              </a:rPr>
-              <a:t>单个问题中，</a:t>
+                  <a:schemeClr val="accent6"/>
+                </a:solidFill>
+              </a:rPr>
+              <a:t>直接点名专家</a:t>
             </a:r>
             <a:endParaRPr lang="en-US" sz="1150" dirty="0"/>
           </a:p>
-          <a:p>
-            <a:pPr algn="l" indent="0" marL="0">
-              <a:buNone/>
-            </a:pPr>
-            <a:r>
-              <a:rPr lang="en-US" sz="1150" dirty="0">
-                <a:solidFill>
-                  <a:schemeClr val="tx1"/>
-                </a:solidFill>
-              </a:rPr>
-              <a:t>来自同一个试验的最多篇数</a:t>
-            </a:r>
-            <a:endParaRPr lang="en-US" sz="1150" dirty="0"/>
-          </a:p>
-        </p:txBody>
-      </p:sp>
-      <p:sp>
-        <p:nvSpPr>
-          <p:cNvPr id="14" name="label-160"/>
-          <p:cNvSpPr txBox="1"/>
-          <p:nvPr/>
-        </p:nvSpPr>
-        <p:spPr>
-          <a:xfrm>
-            <a:off x="822960" y="5440680"/>
-            <a:ext cx="4861408" cy="502920"/>
-          </a:xfrm>
-          <a:prstGeom prst="rect">
-            <a:avLst/>
-          </a:prstGeom>
-          <a:noFill/>
-          <a:ln/>
-        </p:spPr>
-        <p:txBody>
-          <a:bodyPr wrap="square" lIns="0" tIns="0" rIns="0" bIns="0" rtlCol="0" anchor="t"/>
-          <a:lstStyle/>
-          <a:p>
-            <a:pPr algn="l" indent="0" marL="0">
-              <a:buNone/>
-            </a:pPr>
-            <a:r>
-              <a:rPr lang="en-US" sz="1000" dirty="0">
-                <a:solidFill>
-                  <a:schemeClr val="accent6"/>
-                </a:solidFill>
-              </a:rPr>
-              <a:t>只识别了明确的试验编号，是下界。已获批药物的同源比例更高（49% vs 28%）：获批后二次分析论文增多，“论文多”部分是成功的结果。</a:t>
-            </a:r>
-            <a:endParaRPr lang="en-US" sz="1000" dirty="0"/>
-          </a:p>
-        </p:txBody>
-      </p:sp>
-      <p:sp>
-        <p:nvSpPr>
-          <p:cNvPr id="15" name="card-161"/>
+        </p:txBody>
+      </p:sp>
+      <p:sp>
+        <p:nvSpPr>
+          <p:cNvPr id="23" name="card-156"/>
           <p:cNvSpPr/>
           <p:nvPr/>
         </p:nvSpPr>
         <p:spPr>
           <a:xfrm>
             <a:off x="6233008" y="1600200"/>
-            <a:ext cx="5410048" cy="4434840"/>
+            <a:ext cx="5410048" cy="4572000"/>
           </a:xfrm>
           <a:prstGeom prst="roundRect">
             <a:avLst>
-              <a:gd name="adj" fmla="val 2062"/>
+              <a:gd name="adj" fmla="val 2000"/>
             </a:avLst>
           </a:prstGeom>
           <a:solidFill>
@@ -13820,1233 +13977,342 @@
       </p:sp>
       <p:sp>
         <p:nvSpPr>
-          <p:cNvPr id="16" name="badge-162"/>
+          <p:cNvPr id="24" name="tag-157"/>
           <p:cNvSpPr/>
           <p:nvPr/>
         </p:nvSpPr>
         <p:spPr>
           <a:xfrm>
-            <a:off x="6507328" y="1783080"/>
-            <a:ext cx="384048" cy="384048"/>
-          </a:xfrm>
-          <a:prstGeom prst="ellipse">
-            <a:avLst/>
+            <a:off x="6507328" y="1810512"/>
+            <a:ext cx="411480" cy="411480"/>
+          </a:xfrm>
+          <a:prstGeom prst="roundRect">
+            <a:avLst>
+              <a:gd name="adj" fmla="val 13333"/>
+            </a:avLst>
           </a:prstGeom>
           <a:solidFill>
-            <a:schemeClr val="accent2"/>
+            <a:schemeClr val="accent3"/>
+          </a:solidFill>
+          <a:ln>
+            <a:solidFill>
+              <a:schemeClr val="accent3"/>
+            </a:solidFill>
+          </a:ln>
+        </p:spPr>
+        <p:txBody>
+          <a:bodyPr wrap="square" lIns="0" tIns="0" rIns="0" bIns="0" rtlCol="0" anchor="ctr"/>
+          <a:lstStyle/>
+          <a:p>
+            <a:pPr algn="ctr" indent="0" marL="0">
+              <a:buNone/>
+            </a:pPr>
+            <a:r>
+              <a:rPr lang="en-US" sz="1600" b="1" dirty="0">
+                <a:solidFill>
+                  <a:schemeClr val="bg1"/>
+                </a:solidFill>
+              </a:rPr>
+              <a:t>C</a:t>
+            </a:r>
+            <a:endParaRPr lang="en-US" sz="1600" dirty="0"/>
+          </a:p>
+        </p:txBody>
+      </p:sp>
+      <p:sp>
+        <p:nvSpPr>
+          <p:cNvPr id="25" name="label-158"/>
+          <p:cNvSpPr txBox="1"/>
+          <p:nvPr/>
+        </p:nvSpPr>
+        <p:spPr>
+          <a:xfrm>
+            <a:off x="7055968" y="1810512"/>
+            <a:ext cx="4312768" cy="411480"/>
+          </a:xfrm>
+          <a:prstGeom prst="rect">
+            <a:avLst/>
+          </a:prstGeom>
+          <a:noFill/>
+          <a:ln/>
+        </p:spPr>
+        <p:txBody>
+          <a:bodyPr wrap="square" lIns="0" tIns="0" rIns="0" bIns="0" rtlCol="0" anchor="ctr"/>
+          <a:lstStyle/>
+          <a:p>
+            <a:pPr algn="l" indent="0" marL="0">
+              <a:buNone/>
+            </a:pPr>
+            <a:r>
+              <a:rPr lang="en-US" sz="1700" b="1" dirty="0">
+                <a:solidFill>
+                  <a:schemeClr val="tx2"/>
+                </a:solidFill>
+              </a:rPr>
+              <a:t>本地运行时：直接用已有 AI 订阅</a:t>
+            </a:r>
+            <a:endParaRPr lang="en-US" sz="1700" dirty="0"/>
+          </a:p>
+        </p:txBody>
+      </p:sp>
+      <p:sp>
+        <p:nvSpPr>
+          <p:cNvPr id="26" name="box-159"/>
+          <p:cNvSpPr/>
+          <p:nvPr/>
+        </p:nvSpPr>
+        <p:spPr>
+          <a:xfrm>
+            <a:off x="6507328" y="2697480"/>
+            <a:ext cx="1325880" cy="566928"/>
+          </a:xfrm>
+          <a:prstGeom prst="roundRect">
+            <a:avLst>
+              <a:gd name="adj" fmla="val 12903"/>
+            </a:avLst>
+          </a:prstGeom>
+          <a:solidFill>
+            <a:schemeClr val="tx2"/>
           </a:solidFill>
           <a:ln w="6350">
             <a:solidFill>
-              <a:schemeClr val="accent2"/>
+              <a:schemeClr val="tx2"/>
             </a:solidFill>
           </a:ln>
         </p:spPr>
         <p:txBody>
-          <a:bodyPr wrap="square" lIns="0" tIns="0" rIns="0" bIns="0" rtlCol="0" anchor="ctr"/>
+          <a:bodyPr wrap="square" lIns="762" tIns="762" rIns="762" bIns="762" rtlCol="0" anchor="ctr"/>
           <a:lstStyle/>
           <a:p>
             <a:pPr algn="ctr" indent="0" marL="0">
               <a:buNone/>
             </a:pPr>
             <a:r>
-              <a:rPr lang="en-US" sz="1500" b="1" dirty="0">
+              <a:rPr lang="en-US" sz="1300" b="1" dirty="0">
                 <a:solidFill>
                   <a:schemeClr val="bg1"/>
                 </a:solidFill>
               </a:rPr>
-              <a:t>2</a:t>
-            </a:r>
-            <a:endParaRPr lang="en-US" sz="1500" dirty="0"/>
-          </a:p>
-        </p:txBody>
-      </p:sp>
-      <p:sp>
-        <p:nvSpPr>
-          <p:cNvPr id="17" name="label-163"/>
-          <p:cNvSpPr txBox="1"/>
-          <p:nvPr/>
-        </p:nvSpPr>
-        <p:spPr>
-          <a:xfrm>
-            <a:off x="7010248" y="1755648"/>
-            <a:ext cx="4404208" cy="411480"/>
-          </a:xfrm>
-          <a:prstGeom prst="rect">
+              <a:t>研究请求</a:t>
+            </a:r>
+            <a:endParaRPr lang="en-US" sz="1300" dirty="0"/>
+          </a:p>
+        </p:txBody>
+      </p:sp>
+      <p:sp>
+        <p:nvSpPr>
+          <p:cNvPr id="27" name="arrow-160"/>
+          <p:cNvSpPr/>
+          <p:nvPr/>
+        </p:nvSpPr>
+        <p:spPr>
+          <a:xfrm>
+            <a:off x="7833208" y="2980944"/>
+            <a:ext cx="274320" cy="0"/>
+          </a:xfrm>
+          <a:prstGeom prst="line">
             <a:avLst/>
           </a:prstGeom>
           <a:noFill/>
-          <a:ln/>
-        </p:spPr>
-        <p:txBody>
-          <a:bodyPr wrap="square" lIns="0" tIns="0" rIns="0" bIns="0" rtlCol="0" anchor="ctr"/>
-          <a:lstStyle/>
-          <a:p>
-            <a:pPr algn="l" indent="0" marL="0">
-              <a:buNone/>
-            </a:pPr>
-            <a:r>
-              <a:rPr lang="en-US" sz="1550" b="1" dirty="0">
-                <a:solidFill>
-                  <a:schemeClr val="tx2"/>
-                </a:solidFill>
-              </a:rPr>
-              <a:t>待验证：重复证据会不会改变模型结论</a:t>
-            </a:r>
-            <a:endParaRPr lang="en-US" sz="1550" dirty="0"/>
-          </a:p>
-        </p:txBody>
-      </p:sp>
-      <p:sp>
-        <p:nvSpPr>
-          <p:cNvPr id="18" name="label-164"/>
-          <p:cNvSpPr txBox="1"/>
-          <p:nvPr/>
-        </p:nvSpPr>
-        <p:spPr>
-          <a:xfrm>
-            <a:off x="6507328" y="2240280"/>
-            <a:ext cx="4861408" cy="457200"/>
-          </a:xfrm>
-          <a:prstGeom prst="rect">
-            <a:avLst/>
-          </a:prstGeom>
-          <a:noFill/>
-          <a:ln/>
-        </p:spPr>
-        <p:txBody>
-          <a:bodyPr wrap="square" lIns="0" tIns="0" rIns="0" bIns="0" rtlCol="0" anchor="t"/>
-          <a:lstStyle/>
-          <a:p>
-            <a:pPr algn="l" indent="0" marL="0">
-              <a:buNone/>
-            </a:pPr>
-            <a:r>
-              <a:rPr lang="en-US" sz="1100" dirty="0">
-                <a:solidFill>
-                  <a:schemeClr val="tx1"/>
-                </a:solidFill>
-              </a:rPr>
-              <a:t>同一个问题、同一个模型，只改变证据包，比较模型给出的“有效概率”和“独立研究数”：</a:t>
-            </a:r>
-            <a:endParaRPr lang="en-US" sz="1100" dirty="0"/>
-          </a:p>
-        </p:txBody>
-      </p:sp>
-      <p:graphicFrame>
-        <p:nvGraphicFramePr>
-          <p:cNvPr id="9" name="table-165"/>
-          <p:cNvGraphicFramePr>
-            <a:graphicFrameLocks noGrp="1"/>
-          </p:cNvGraphicFramePr>
-          <p:nvPr>
-            <p:extLst>
-              <p:ext uri="{D42A27DB-BD31-4B8C-83A1-F6EECF244321}">
-                <p14:modId xmlns:p14="http://schemas.microsoft.com/office/powerpoint/2010/main" val="1579011935"/>
-              </p:ext>
-            </p:extLst>
-          </p:nvPr>
-        </p:nvGraphicFramePr>
-        <p:xfrm>
-          <a:off x="6507328" y="2743200"/>
-          <a:ext cx="4861408" cy="914400"/>
-        </p:xfrm>
-        <a:graphic>
-          <a:graphicData uri="http://schemas.openxmlformats.org/drawingml/2006/table">
-            <a:tbl>
-              <a:tblPr/>
-              <a:tblGrid>
-                <a:gridCol w="960120"/>
-                <a:gridCol w="2514600"/>
-                <a:gridCol w="1386688"/>
-              </a:tblGrid>
-              <a:tr h="329184">
-                <a:tc>
-                  <a:txBody>
-                    <a:bodyPr/>
-                    <a:lstStyle/>
-                    <a:p>
-                      <a:pPr indent="0" marL="0">
-                        <a:buNone/>
-                      </a:pPr>
-                      <a:r>
-                        <a:rPr lang="en-US" sz="1050" b="1" dirty="0">
-                          <a:solidFill>
-                            <a:srgbClr val="FFFFFF"/>
-                          </a:solidFill>
-                          <a:latin typeface="Microsoft YaHei" pitchFamily="34" charset="0"/>
-                          <a:ea typeface="Microsoft YaHei" pitchFamily="34" charset="-122"/>
-                          <a:cs typeface="Microsoft YaHei" pitchFamily="34" charset="-120"/>
-                        </a:rPr>
-                        <a:t>证据包</a:t>
-                      </a:r>
-                      <a:endParaRPr lang="en-US" sz="1050" dirty="0">
-                        <a:latin typeface="Microsoft YaHei" charset="0"/>
-                        <a:ea typeface="Microsoft YaHei" charset="0"/>
-                        <a:cs typeface="Microsoft YaHei" charset="0"/>
-                      </a:endParaRPr>
-                    </a:p>
-                  </a:txBody>
-                  <a:tcPr marL="73152" marR="73152" marT="27432" marB="27432" anchor="ctr">
-                    <a:lnL w="9525" cap="flat" cmpd="sng" algn="ctr">
-                      <a:solidFill>
-                        <a:srgbClr val="D5DCE4"/>
-                      </a:solidFill>
-                      <a:prstDash val="solid"/>
-                      <a:round/>
-                      <a:headEnd type="none" w="med" len="med"/>
-                      <a:tailEnd type="none" w="med" len="med"/>
-                    </a:lnL>
-                    <a:lnR w="9525" cap="flat" cmpd="sng" algn="ctr">
-                      <a:solidFill>
-                        <a:srgbClr val="D5DCE4"/>
-                      </a:solidFill>
-                      <a:prstDash val="solid"/>
-                      <a:round/>
-                      <a:headEnd type="none" w="med" len="med"/>
-                      <a:tailEnd type="none" w="med" len="med"/>
-                    </a:lnR>
-                    <a:lnT w="9525" cap="flat" cmpd="sng" algn="ctr">
-                      <a:solidFill>
-                        <a:srgbClr val="D5DCE4"/>
-                      </a:solidFill>
-                      <a:prstDash val="solid"/>
-                      <a:round/>
-                      <a:headEnd type="none" w="med" len="med"/>
-                      <a:tailEnd type="none" w="med" len="med"/>
-                    </a:lnT>
-                    <a:lnB w="9525" cap="flat" cmpd="sng" algn="ctr">
-                      <a:solidFill>
-                        <a:srgbClr val="D5DCE4"/>
-                      </a:solidFill>
-                      <a:prstDash val="solid"/>
-                      <a:round/>
-                      <a:headEnd type="none" w="med" len="med"/>
-                      <a:tailEnd type="none" w="med" len="med"/>
-                    </a:lnB>
-                    <a:solidFill>
-                      <a:srgbClr val="0F2A44"/>
-                    </a:solidFill>
-                  </a:tcPr>
-                </a:tc>
-                <a:tc>
-                  <a:txBody>
-                    <a:bodyPr/>
-                    <a:lstStyle/>
-                    <a:p>
-                      <a:pPr indent="0" marL="0">
-                        <a:buNone/>
-                      </a:pPr>
-                      <a:r>
-                        <a:rPr lang="en-US" sz="1050" b="1" dirty="0">
-                          <a:solidFill>
-                            <a:srgbClr val="FFFFFF"/>
-                          </a:solidFill>
-                          <a:latin typeface="Microsoft YaHei" pitchFamily="34" charset="0"/>
-                          <a:ea typeface="Microsoft YaHei" pitchFamily="34" charset="-122"/>
-                          <a:cs typeface="Microsoft YaHei" pitchFamily="34" charset="-120"/>
-                        </a:rPr>
-                        <a:t>内容</a:t>
-                      </a:r>
-                      <a:endParaRPr lang="en-US" sz="1050" dirty="0">
-                        <a:latin typeface="Microsoft YaHei" charset="0"/>
-                        <a:ea typeface="Microsoft YaHei" charset="0"/>
-                        <a:cs typeface="Microsoft YaHei" charset="0"/>
-                      </a:endParaRPr>
-                    </a:p>
-                  </a:txBody>
-                  <a:tcPr marL="73152" marR="73152" marT="27432" marB="27432" anchor="ctr">
-                    <a:lnL w="9525" cap="flat" cmpd="sng" algn="ctr">
-                      <a:solidFill>
-                        <a:srgbClr val="D5DCE4"/>
-                      </a:solidFill>
-                      <a:prstDash val="solid"/>
-                      <a:round/>
-                      <a:headEnd type="none" w="med" len="med"/>
-                      <a:tailEnd type="none" w="med" len="med"/>
-                    </a:lnL>
-                    <a:lnR w="9525" cap="flat" cmpd="sng" algn="ctr">
-                      <a:solidFill>
-                        <a:srgbClr val="D5DCE4"/>
-                      </a:solidFill>
-                      <a:prstDash val="solid"/>
-                      <a:round/>
-                      <a:headEnd type="none" w="med" len="med"/>
-                      <a:tailEnd type="none" w="med" len="med"/>
-                    </a:lnR>
-                    <a:lnT w="9525" cap="flat" cmpd="sng" algn="ctr">
-                      <a:solidFill>
-                        <a:srgbClr val="D5DCE4"/>
-                      </a:solidFill>
-                      <a:prstDash val="solid"/>
-                      <a:round/>
-                      <a:headEnd type="none" w="med" len="med"/>
-                      <a:tailEnd type="none" w="med" len="med"/>
-                    </a:lnT>
-                    <a:lnB w="9525" cap="flat" cmpd="sng" algn="ctr">
-                      <a:solidFill>
-                        <a:srgbClr val="D5DCE4"/>
-                      </a:solidFill>
-                      <a:prstDash val="solid"/>
-                      <a:round/>
-                      <a:headEnd type="none" w="med" len="med"/>
-                      <a:tailEnd type="none" w="med" len="med"/>
-                    </a:lnB>
-                    <a:solidFill>
-                      <a:srgbClr val="0F2A44"/>
-                    </a:solidFill>
-                  </a:tcPr>
-                </a:tc>
-                <a:tc>
-                  <a:txBody>
-                    <a:bodyPr/>
-                    <a:lstStyle/>
-                    <a:p>
-                      <a:pPr indent="0" marL="0">
-                        <a:buNone/>
-                      </a:pPr>
-                      <a:r>
-                        <a:rPr lang="en-US" sz="1050" b="1" dirty="0">
-                          <a:solidFill>
-                            <a:srgbClr val="FFFFFF"/>
-                          </a:solidFill>
-                          <a:latin typeface="Microsoft YaHei" pitchFamily="34" charset="0"/>
-                          <a:ea typeface="Microsoft YaHei" pitchFamily="34" charset="-122"/>
-                          <a:cs typeface="Microsoft YaHei" pitchFamily="34" charset="-120"/>
-                        </a:rPr>
-                        <a:t>若存在“虚假共识”</a:t>
-                      </a:r>
-                      <a:endParaRPr lang="en-US" sz="1050" dirty="0">
-                        <a:latin typeface="Microsoft YaHei" charset="0"/>
-                        <a:ea typeface="Microsoft YaHei" charset="0"/>
-                        <a:cs typeface="Microsoft YaHei" charset="0"/>
-                      </a:endParaRPr>
-                    </a:p>
-                  </a:txBody>
-                  <a:tcPr marL="73152" marR="73152" marT="27432" marB="27432" anchor="ctr">
-                    <a:lnL w="9525" cap="flat" cmpd="sng" algn="ctr">
-                      <a:solidFill>
-                        <a:srgbClr val="D5DCE4"/>
-                      </a:solidFill>
-                      <a:prstDash val="solid"/>
-                      <a:round/>
-                      <a:headEnd type="none" w="med" len="med"/>
-                      <a:tailEnd type="none" w="med" len="med"/>
-                    </a:lnL>
-                    <a:lnR w="9525" cap="flat" cmpd="sng" algn="ctr">
-                      <a:solidFill>
-                        <a:srgbClr val="D5DCE4"/>
-                      </a:solidFill>
-                      <a:prstDash val="solid"/>
-                      <a:round/>
-                      <a:headEnd type="none" w="med" len="med"/>
-                      <a:tailEnd type="none" w="med" len="med"/>
-                    </a:lnR>
-                    <a:lnT w="9525" cap="flat" cmpd="sng" algn="ctr">
-                      <a:solidFill>
-                        <a:srgbClr val="D5DCE4"/>
-                      </a:solidFill>
-                      <a:prstDash val="solid"/>
-                      <a:round/>
-                      <a:headEnd type="none" w="med" len="med"/>
-                      <a:tailEnd type="none" w="med" len="med"/>
-                    </a:lnT>
-                    <a:lnB w="9525" cap="flat" cmpd="sng" algn="ctr">
-                      <a:solidFill>
-                        <a:srgbClr val="D5DCE4"/>
-                      </a:solidFill>
-                      <a:prstDash val="solid"/>
-                      <a:round/>
-                      <a:headEnd type="none" w="med" len="med"/>
-                      <a:tailEnd type="none" w="med" len="med"/>
-                    </a:lnB>
-                    <a:solidFill>
-                      <a:srgbClr val="0F2A44"/>
-                    </a:solidFill>
-                  </a:tcPr>
-                </a:tc>
-              </a:tr>
-              <a:tr h="347472">
-                <a:tc>
-                  <a:txBody>
-                    <a:bodyPr/>
-                    <a:lstStyle/>
-                    <a:p>
-                      <a:pPr indent="0" marL="0">
-                        <a:buNone/>
-                      </a:pPr>
-                      <a:r>
-                        <a:rPr lang="en-US" sz="1050" b="1" dirty="0">
-                          <a:solidFill>
-                            <a:srgbClr val="1B2533"/>
-                          </a:solidFill>
-                          <a:latin typeface="Microsoft YaHei" pitchFamily="34" charset="0"/>
-                          <a:ea typeface="Microsoft YaHei" pitchFamily="34" charset="-122"/>
-                          <a:cs typeface="Microsoft YaHei" pitchFamily="34" charset="-120"/>
-                        </a:rPr>
-                        <a:t>原始</a:t>
-                      </a:r>
-                      <a:endParaRPr lang="en-US" sz="1050" dirty="0">
-                        <a:latin typeface="Microsoft YaHei" charset="0"/>
-                        <a:ea typeface="Microsoft YaHei" charset="0"/>
-                        <a:cs typeface="Microsoft YaHei" charset="0"/>
-                      </a:endParaRPr>
-                    </a:p>
-                  </a:txBody>
-                  <a:tcPr marL="73152" marR="73152" marT="27432" marB="27432" anchor="ctr">
-                    <a:lnL w="9525" cap="flat" cmpd="sng" algn="ctr">
-                      <a:solidFill>
-                        <a:srgbClr val="D5DCE4"/>
-                      </a:solidFill>
-                      <a:prstDash val="solid"/>
-                      <a:round/>
-                      <a:headEnd type="none" w="med" len="med"/>
-                      <a:tailEnd type="none" w="med" len="med"/>
-                    </a:lnL>
-                    <a:lnR w="9525" cap="flat" cmpd="sng" algn="ctr">
-                      <a:solidFill>
-                        <a:srgbClr val="D5DCE4"/>
-                      </a:solidFill>
-                      <a:prstDash val="solid"/>
-                      <a:round/>
-                      <a:headEnd type="none" w="med" len="med"/>
-                      <a:tailEnd type="none" w="med" len="med"/>
-                    </a:lnR>
-                    <a:lnT w="9525" cap="flat" cmpd="sng" algn="ctr">
-                      <a:solidFill>
-                        <a:srgbClr val="D5DCE4"/>
-                      </a:solidFill>
-                      <a:prstDash val="solid"/>
-                      <a:round/>
-                      <a:headEnd type="none" w="med" len="med"/>
-                      <a:tailEnd type="none" w="med" len="med"/>
-                    </a:lnT>
-                    <a:lnB w="9525" cap="flat" cmpd="sng" algn="ctr">
-                      <a:solidFill>
-                        <a:srgbClr val="D5DCE4"/>
-                      </a:solidFill>
-                      <a:prstDash val="solid"/>
-                      <a:round/>
-                      <a:headEnd type="none" w="med" len="med"/>
-                      <a:tailEnd type="none" w="med" len="med"/>
-                    </a:lnB>
-                    <a:solidFill>
-                      <a:srgbClr val="FFFFFF"/>
-                    </a:solidFill>
-                  </a:tcPr>
-                </a:tc>
-                <a:tc>
-                  <a:txBody>
-                    <a:bodyPr/>
-                    <a:lstStyle/>
-                    <a:p>
-                      <a:pPr indent="0" marL="0">
-                        <a:buNone/>
-                      </a:pPr>
-                      <a:r>
-                        <a:rPr lang="en-US" sz="1050" dirty="0">
-                          <a:solidFill>
-                            <a:srgbClr val="1B2533"/>
-                          </a:solidFill>
-                          <a:latin typeface="Microsoft YaHei" pitchFamily="34" charset="0"/>
-                          <a:ea typeface="Microsoft YaHei" pitchFamily="34" charset="-122"/>
-                          <a:cs typeface="Microsoft YaHei" pitchFamily="34" charset="-120"/>
-                        </a:rPr>
-                        <a:t>检索结果原样</a:t>
-                      </a:r>
-                      <a:endParaRPr lang="en-US" sz="1050" dirty="0">
-                        <a:latin typeface="Microsoft YaHei" charset="0"/>
-                        <a:ea typeface="Microsoft YaHei" charset="0"/>
-                        <a:cs typeface="Microsoft YaHei" charset="0"/>
-                      </a:endParaRPr>
-                    </a:p>
-                  </a:txBody>
-                  <a:tcPr marL="73152" marR="73152" marT="27432" marB="27432" anchor="ctr">
-                    <a:lnL w="9525" cap="flat" cmpd="sng" algn="ctr">
-                      <a:solidFill>
-                        <a:srgbClr val="D5DCE4"/>
-                      </a:solidFill>
-                      <a:prstDash val="solid"/>
-                      <a:round/>
-                      <a:headEnd type="none" w="med" len="med"/>
-                      <a:tailEnd type="none" w="med" len="med"/>
-                    </a:lnL>
-                    <a:lnR w="9525" cap="flat" cmpd="sng" algn="ctr">
-                      <a:solidFill>
-                        <a:srgbClr val="D5DCE4"/>
-                      </a:solidFill>
-                      <a:prstDash val="solid"/>
-                      <a:round/>
-                      <a:headEnd type="none" w="med" len="med"/>
-                      <a:tailEnd type="none" w="med" len="med"/>
-                    </a:lnR>
-                    <a:lnT w="9525" cap="flat" cmpd="sng" algn="ctr">
-                      <a:solidFill>
-                        <a:srgbClr val="D5DCE4"/>
-                      </a:solidFill>
-                      <a:prstDash val="solid"/>
-                      <a:round/>
-                      <a:headEnd type="none" w="med" len="med"/>
-                      <a:tailEnd type="none" w="med" len="med"/>
-                    </a:lnT>
-                    <a:lnB w="9525" cap="flat" cmpd="sng" algn="ctr">
-                      <a:solidFill>
-                        <a:srgbClr val="D5DCE4"/>
-                      </a:solidFill>
-                      <a:prstDash val="solid"/>
-                      <a:round/>
-                      <a:headEnd type="none" w="med" len="med"/>
-                      <a:tailEnd type="none" w="med" len="med"/>
-                    </a:lnB>
-                    <a:solidFill>
-                      <a:srgbClr val="FFFFFF"/>
-                    </a:solidFill>
-                  </a:tcPr>
-                </a:tc>
-                <a:tc>
-                  <a:txBody>
-                    <a:bodyPr/>
-                    <a:lstStyle/>
-                    <a:p>
-                      <a:pPr indent="0" marL="0">
-                        <a:buNone/>
-                      </a:pPr>
-                      <a:r>
-                        <a:rPr lang="en-US" sz="1050" dirty="0">
-                          <a:solidFill>
-                            <a:srgbClr val="1B2533"/>
-                          </a:solidFill>
-                          <a:latin typeface="Microsoft YaHei" pitchFamily="34" charset="0"/>
-                          <a:ea typeface="Microsoft YaHei" pitchFamily="34" charset="-122"/>
-                          <a:cs typeface="Microsoft YaHei" pitchFamily="34" charset="-120"/>
-                        </a:rPr>
-                        <a:t>基准</a:t>
-                      </a:r>
-                      <a:endParaRPr lang="en-US" sz="1050" dirty="0">
-                        <a:latin typeface="Microsoft YaHei" charset="0"/>
-                        <a:ea typeface="Microsoft YaHei" charset="0"/>
-                        <a:cs typeface="Microsoft YaHei" charset="0"/>
-                      </a:endParaRPr>
-                    </a:p>
-                  </a:txBody>
-                  <a:tcPr marL="73152" marR="73152" marT="27432" marB="27432" anchor="ctr">
-                    <a:lnL w="9525" cap="flat" cmpd="sng" algn="ctr">
-                      <a:solidFill>
-                        <a:srgbClr val="D5DCE4"/>
-                      </a:solidFill>
-                      <a:prstDash val="solid"/>
-                      <a:round/>
-                      <a:headEnd type="none" w="med" len="med"/>
-                      <a:tailEnd type="none" w="med" len="med"/>
-                    </a:lnL>
-                    <a:lnR w="9525" cap="flat" cmpd="sng" algn="ctr">
-                      <a:solidFill>
-                        <a:srgbClr val="D5DCE4"/>
-                      </a:solidFill>
-                      <a:prstDash val="solid"/>
-                      <a:round/>
-                      <a:headEnd type="none" w="med" len="med"/>
-                      <a:tailEnd type="none" w="med" len="med"/>
-                    </a:lnR>
-                    <a:lnT w="9525" cap="flat" cmpd="sng" algn="ctr">
-                      <a:solidFill>
-                        <a:srgbClr val="D5DCE4"/>
-                      </a:solidFill>
-                      <a:prstDash val="solid"/>
-                      <a:round/>
-                      <a:headEnd type="none" w="med" len="med"/>
-                      <a:tailEnd type="none" w="med" len="med"/>
-                    </a:lnT>
-                    <a:lnB w="9525" cap="flat" cmpd="sng" algn="ctr">
-                      <a:solidFill>
-                        <a:srgbClr val="D5DCE4"/>
-                      </a:solidFill>
-                      <a:prstDash val="solid"/>
-                      <a:round/>
-                      <a:headEnd type="none" w="med" len="med"/>
-                      <a:tailEnd type="none" w="med" len="med"/>
-                    </a:lnB>
-                    <a:solidFill>
-                      <a:srgbClr val="FFFFFF"/>
-                    </a:solidFill>
-                  </a:tcPr>
-                </a:tc>
-              </a:tr>
-              <a:tr h="347472">
-                <a:tc>
-                  <a:txBody>
-                    <a:bodyPr/>
-                    <a:lstStyle/>
-                    <a:p>
-                      <a:pPr indent="0" marL="0">
-                        <a:buNone/>
-                      </a:pPr>
-                      <a:r>
-                        <a:rPr lang="en-US" sz="1050" b="1" dirty="0">
-                          <a:solidFill>
-                            <a:srgbClr val="1B2533"/>
-                          </a:solidFill>
-                          <a:latin typeface="Microsoft YaHei" pitchFamily="34" charset="0"/>
-                          <a:ea typeface="Microsoft YaHei" pitchFamily="34" charset="-122"/>
-                          <a:cs typeface="Microsoft YaHei" pitchFamily="34" charset="-120"/>
-                        </a:rPr>
-                        <a:t>标注来源</a:t>
-                      </a:r>
-                      <a:endParaRPr lang="en-US" sz="1050" dirty="0">
-                        <a:latin typeface="Microsoft YaHei" charset="0"/>
-                        <a:ea typeface="Microsoft YaHei" charset="0"/>
-                        <a:cs typeface="Microsoft YaHei" charset="0"/>
-                      </a:endParaRPr>
-                    </a:p>
-                  </a:txBody>
-                  <a:tcPr marL="73152" marR="73152" marT="27432" marB="27432" anchor="ctr">
-                    <a:lnL w="9525" cap="flat" cmpd="sng" algn="ctr">
-                      <a:solidFill>
-                        <a:srgbClr val="D5DCE4"/>
-                      </a:solidFill>
-                      <a:prstDash val="solid"/>
-                      <a:round/>
-                      <a:headEnd type="none" w="med" len="med"/>
-                      <a:tailEnd type="none" w="med" len="med"/>
-                    </a:lnL>
-                    <a:lnR w="9525" cap="flat" cmpd="sng" algn="ctr">
-                      <a:solidFill>
-                        <a:srgbClr val="D5DCE4"/>
-                      </a:solidFill>
-                      <a:prstDash val="solid"/>
-                      <a:round/>
-                      <a:headEnd type="none" w="med" len="med"/>
-                      <a:tailEnd type="none" w="med" len="med"/>
-                    </a:lnR>
-                    <a:lnT w="9525" cap="flat" cmpd="sng" algn="ctr">
-                      <a:solidFill>
-                        <a:srgbClr val="D5DCE4"/>
-                      </a:solidFill>
-                      <a:prstDash val="solid"/>
-                      <a:round/>
-                      <a:headEnd type="none" w="med" len="med"/>
-                      <a:tailEnd type="none" w="med" len="med"/>
-                    </a:lnT>
-                    <a:lnB w="9525" cap="flat" cmpd="sng" algn="ctr">
-                      <a:solidFill>
-                        <a:srgbClr val="D5DCE4"/>
-                      </a:solidFill>
-                      <a:prstDash val="solid"/>
-                      <a:round/>
-                      <a:headEnd type="none" w="med" len="med"/>
-                      <a:tailEnd type="none" w="med" len="med"/>
-                    </a:lnB>
-                    <a:solidFill>
-                      <a:srgbClr val="FFFFFF"/>
-                    </a:solidFill>
-                  </a:tcPr>
-                </a:tc>
-                <a:tc>
-                  <a:txBody>
-                    <a:bodyPr/>
-                    <a:lstStyle/>
-                    <a:p>
-                      <a:pPr indent="0" marL="0">
-                        <a:buNone/>
-                      </a:pPr>
-                      <a:r>
-                        <a:rPr lang="en-US" sz="1050" dirty="0">
-                          <a:solidFill>
-                            <a:srgbClr val="1B2533"/>
-                          </a:solidFill>
-                          <a:latin typeface="Microsoft YaHei" pitchFamily="34" charset="0"/>
-                          <a:ea typeface="Microsoft YaHei" pitchFamily="34" charset="-122"/>
-                          <a:cs typeface="Microsoft YaHei" pitchFamily="34" charset="-120"/>
-                        </a:rPr>
-                        <a:t>同上，标明同源论文</a:t>
-                      </a:r>
-                      <a:endParaRPr lang="en-US" sz="1050" dirty="0">
-                        <a:latin typeface="Microsoft YaHei" charset="0"/>
-                        <a:ea typeface="Microsoft YaHei" charset="0"/>
-                        <a:cs typeface="Microsoft YaHei" charset="0"/>
-                      </a:endParaRPr>
-                    </a:p>
-                  </a:txBody>
-                  <a:tcPr marL="73152" marR="73152" marT="27432" marB="27432" anchor="ctr">
-                    <a:lnL w="9525" cap="flat" cmpd="sng" algn="ctr">
-                      <a:solidFill>
-                        <a:srgbClr val="D5DCE4"/>
-                      </a:solidFill>
-                      <a:prstDash val="solid"/>
-                      <a:round/>
-                      <a:headEnd type="none" w="med" len="med"/>
-                      <a:tailEnd type="none" w="med" len="med"/>
-                    </a:lnL>
-                    <a:lnR w="9525" cap="flat" cmpd="sng" algn="ctr">
-                      <a:solidFill>
-                        <a:srgbClr val="D5DCE4"/>
-                      </a:solidFill>
-                      <a:prstDash val="solid"/>
-                      <a:round/>
-                      <a:headEnd type="none" w="med" len="med"/>
-                      <a:tailEnd type="none" w="med" len="med"/>
-                    </a:lnR>
-                    <a:lnT w="9525" cap="flat" cmpd="sng" algn="ctr">
-                      <a:solidFill>
-                        <a:srgbClr val="D5DCE4"/>
-                      </a:solidFill>
-                      <a:prstDash val="solid"/>
-                      <a:round/>
-                      <a:headEnd type="none" w="med" len="med"/>
-                      <a:tailEnd type="none" w="med" len="med"/>
-                    </a:lnT>
-                    <a:lnB w="9525" cap="flat" cmpd="sng" algn="ctr">
-                      <a:solidFill>
-                        <a:srgbClr val="D5DCE4"/>
-                      </a:solidFill>
-                      <a:prstDash val="solid"/>
-                      <a:round/>
-                      <a:headEnd type="none" w="med" len="med"/>
-                      <a:tailEnd type="none" w="med" len="med"/>
-                    </a:lnB>
-                    <a:solidFill>
-                      <a:srgbClr val="FFFFFF"/>
-                    </a:solidFill>
-                  </a:tcPr>
-                </a:tc>
-                <a:tc>
-                  <a:txBody>
-                    <a:bodyPr/>
-                    <a:lstStyle/>
-                    <a:p>
-                      <a:pPr indent="0" marL="0">
-                        <a:buNone/>
-                      </a:pPr>
-                      <a:r>
-                        <a:rPr lang="en-US" sz="1050" dirty="0">
-                          <a:solidFill>
-                            <a:srgbClr val="1B2533"/>
-                          </a:solidFill>
-                          <a:latin typeface="Microsoft YaHei" pitchFamily="34" charset="0"/>
-                          <a:ea typeface="Microsoft YaHei" pitchFamily="34" charset="-122"/>
-                          <a:cs typeface="Microsoft YaHei" pitchFamily="34" charset="-120"/>
-                        </a:rPr>
-                        <a:t>概率回落</a:t>
-                      </a:r>
-                      <a:endParaRPr lang="en-US" sz="1050" dirty="0">
-                        <a:latin typeface="Microsoft YaHei" charset="0"/>
-                        <a:ea typeface="Microsoft YaHei" charset="0"/>
-                        <a:cs typeface="Microsoft YaHei" charset="0"/>
-                      </a:endParaRPr>
-                    </a:p>
-                  </a:txBody>
-                  <a:tcPr marL="73152" marR="73152" marT="27432" marB="27432" anchor="ctr">
-                    <a:lnL w="9525" cap="flat" cmpd="sng" algn="ctr">
-                      <a:solidFill>
-                        <a:srgbClr val="D5DCE4"/>
-                      </a:solidFill>
-                      <a:prstDash val="solid"/>
-                      <a:round/>
-                      <a:headEnd type="none" w="med" len="med"/>
-                      <a:tailEnd type="none" w="med" len="med"/>
-                    </a:lnL>
-                    <a:lnR w="9525" cap="flat" cmpd="sng" algn="ctr">
-                      <a:solidFill>
-                        <a:srgbClr val="D5DCE4"/>
-                      </a:solidFill>
-                      <a:prstDash val="solid"/>
-                      <a:round/>
-                      <a:headEnd type="none" w="med" len="med"/>
-                      <a:tailEnd type="none" w="med" len="med"/>
-                    </a:lnR>
-                    <a:lnT w="9525" cap="flat" cmpd="sng" algn="ctr">
-                      <a:solidFill>
-                        <a:srgbClr val="D5DCE4"/>
-                      </a:solidFill>
-                      <a:prstDash val="solid"/>
-                      <a:round/>
-                      <a:headEnd type="none" w="med" len="med"/>
-                      <a:tailEnd type="none" w="med" len="med"/>
-                    </a:lnT>
-                    <a:lnB w="9525" cap="flat" cmpd="sng" algn="ctr">
-                      <a:solidFill>
-                        <a:srgbClr val="D5DCE4"/>
-                      </a:solidFill>
-                      <a:prstDash val="solid"/>
-                      <a:round/>
-                      <a:headEnd type="none" w="med" len="med"/>
-                      <a:tailEnd type="none" w="med" len="med"/>
-                    </a:lnB>
-                    <a:solidFill>
-                      <a:srgbClr val="FFFFFF"/>
-                    </a:solidFill>
-                  </a:tcPr>
-                </a:tc>
-              </a:tr>
-              <a:tr h="347472">
-                <a:tc>
-                  <a:txBody>
-                    <a:bodyPr/>
-                    <a:lstStyle/>
-                    <a:p>
-                      <a:pPr indent="0" marL="0">
-                        <a:buNone/>
-                      </a:pPr>
-                      <a:r>
-                        <a:rPr lang="en-US" sz="1050" b="1" dirty="0">
-                          <a:solidFill>
-                            <a:srgbClr val="1B2533"/>
-                          </a:solidFill>
-                          <a:latin typeface="Microsoft YaHei" pitchFamily="34" charset="0"/>
-                          <a:ea typeface="Microsoft YaHei" pitchFamily="34" charset="-122"/>
-                          <a:cs typeface="Microsoft YaHei" pitchFamily="34" charset="-120"/>
-                        </a:rPr>
-                        <a:t>去重</a:t>
-                      </a:r>
-                      <a:endParaRPr lang="en-US" sz="1050" dirty="0">
-                        <a:latin typeface="Microsoft YaHei" charset="0"/>
-                        <a:ea typeface="Microsoft YaHei" charset="0"/>
-                        <a:cs typeface="Microsoft YaHei" charset="0"/>
-                      </a:endParaRPr>
-                    </a:p>
-                  </a:txBody>
-                  <a:tcPr marL="73152" marR="73152" marT="27432" marB="27432" anchor="ctr">
-                    <a:lnL w="9525" cap="flat" cmpd="sng" algn="ctr">
-                      <a:solidFill>
-                        <a:srgbClr val="D5DCE4"/>
-                      </a:solidFill>
-                      <a:prstDash val="solid"/>
-                      <a:round/>
-                      <a:headEnd type="none" w="med" len="med"/>
-                      <a:tailEnd type="none" w="med" len="med"/>
-                    </a:lnL>
-                    <a:lnR w="9525" cap="flat" cmpd="sng" algn="ctr">
-                      <a:solidFill>
-                        <a:srgbClr val="D5DCE4"/>
-                      </a:solidFill>
-                      <a:prstDash val="solid"/>
-                      <a:round/>
-                      <a:headEnd type="none" w="med" len="med"/>
-                      <a:tailEnd type="none" w="med" len="med"/>
-                    </a:lnR>
-                    <a:lnT w="9525" cap="flat" cmpd="sng" algn="ctr">
-                      <a:solidFill>
-                        <a:srgbClr val="D5DCE4"/>
-                      </a:solidFill>
-                      <a:prstDash val="solid"/>
-                      <a:round/>
-                      <a:headEnd type="none" w="med" len="med"/>
-                      <a:tailEnd type="none" w="med" len="med"/>
-                    </a:lnT>
-                    <a:lnB w="9525" cap="flat" cmpd="sng" algn="ctr">
-                      <a:solidFill>
-                        <a:srgbClr val="D5DCE4"/>
-                      </a:solidFill>
-                      <a:prstDash val="solid"/>
-                      <a:round/>
-                      <a:headEnd type="none" w="med" len="med"/>
-                      <a:tailEnd type="none" w="med" len="med"/>
-                    </a:lnB>
-                    <a:solidFill>
-                      <a:srgbClr val="FFFFFF"/>
-                    </a:solidFill>
-                  </a:tcPr>
-                </a:tc>
-                <a:tc>
-                  <a:txBody>
-                    <a:bodyPr/>
-                    <a:lstStyle/>
-                    <a:p>
-                      <a:pPr indent="0" marL="0">
-                        <a:buNone/>
-                      </a:pPr>
-                      <a:r>
-                        <a:rPr lang="en-US" sz="1050" dirty="0">
-                          <a:solidFill>
-                            <a:srgbClr val="1B2533"/>
-                          </a:solidFill>
-                          <a:latin typeface="Microsoft YaHei" pitchFamily="34" charset="0"/>
-                          <a:ea typeface="Microsoft YaHei" pitchFamily="34" charset="-122"/>
-                          <a:cs typeface="Microsoft YaHei" pitchFamily="34" charset="-120"/>
-                        </a:rPr>
-                        <a:t>每个试验只留 1 篇</a:t>
-                      </a:r>
-                      <a:endParaRPr lang="en-US" sz="1050" dirty="0">
-                        <a:latin typeface="Microsoft YaHei" charset="0"/>
-                        <a:ea typeface="Microsoft YaHei" charset="0"/>
-                        <a:cs typeface="Microsoft YaHei" charset="0"/>
-                      </a:endParaRPr>
-                    </a:p>
-                  </a:txBody>
-                  <a:tcPr marL="73152" marR="73152" marT="27432" marB="27432" anchor="ctr">
-                    <a:lnL w="9525" cap="flat" cmpd="sng" algn="ctr">
-                      <a:solidFill>
-                        <a:srgbClr val="D5DCE4"/>
-                      </a:solidFill>
-                      <a:prstDash val="solid"/>
-                      <a:round/>
-                      <a:headEnd type="none" w="med" len="med"/>
-                      <a:tailEnd type="none" w="med" len="med"/>
-                    </a:lnL>
-                    <a:lnR w="9525" cap="flat" cmpd="sng" algn="ctr">
-                      <a:solidFill>
-                        <a:srgbClr val="D5DCE4"/>
-                      </a:solidFill>
-                      <a:prstDash val="solid"/>
-                      <a:round/>
-                      <a:headEnd type="none" w="med" len="med"/>
-                      <a:tailEnd type="none" w="med" len="med"/>
-                    </a:lnR>
-                    <a:lnT w="9525" cap="flat" cmpd="sng" algn="ctr">
-                      <a:solidFill>
-                        <a:srgbClr val="D5DCE4"/>
-                      </a:solidFill>
-                      <a:prstDash val="solid"/>
-                      <a:round/>
-                      <a:headEnd type="none" w="med" len="med"/>
-                      <a:tailEnd type="none" w="med" len="med"/>
-                    </a:lnT>
-                    <a:lnB w="9525" cap="flat" cmpd="sng" algn="ctr">
-                      <a:solidFill>
-                        <a:srgbClr val="D5DCE4"/>
-                      </a:solidFill>
-                      <a:prstDash val="solid"/>
-                      <a:round/>
-                      <a:headEnd type="none" w="med" len="med"/>
-                      <a:tailEnd type="none" w="med" len="med"/>
-                    </a:lnB>
-                    <a:solidFill>
-                      <a:srgbClr val="FFFFFF"/>
-                    </a:solidFill>
-                  </a:tcPr>
-                </a:tc>
-                <a:tc>
-                  <a:txBody>
-                    <a:bodyPr/>
-                    <a:lstStyle/>
-                    <a:p>
-                      <a:pPr indent="0" marL="0">
-                        <a:buNone/>
-                      </a:pPr>
-                      <a:r>
-                        <a:rPr lang="en-US" sz="1050" dirty="0">
-                          <a:solidFill>
-                            <a:srgbClr val="1B2533"/>
-                          </a:solidFill>
-                          <a:latin typeface="Microsoft YaHei" pitchFamily="34" charset="0"/>
-                          <a:ea typeface="Microsoft YaHei" pitchFamily="34" charset="-122"/>
-                          <a:cs typeface="Microsoft YaHei" pitchFamily="34" charset="-120"/>
-                        </a:rPr>
-                        <a:t>概率回落</a:t>
-                      </a:r>
-                      <a:endParaRPr lang="en-US" sz="1050" dirty="0">
-                        <a:latin typeface="Microsoft YaHei" charset="0"/>
-                        <a:ea typeface="Microsoft YaHei" charset="0"/>
-                        <a:cs typeface="Microsoft YaHei" charset="0"/>
-                      </a:endParaRPr>
-                    </a:p>
-                  </a:txBody>
-                  <a:tcPr marL="73152" marR="73152" marT="27432" marB="27432" anchor="ctr">
-                    <a:lnL w="9525" cap="flat" cmpd="sng" algn="ctr">
-                      <a:solidFill>
-                        <a:srgbClr val="D5DCE4"/>
-                      </a:solidFill>
-                      <a:prstDash val="solid"/>
-                      <a:round/>
-                      <a:headEnd type="none" w="med" len="med"/>
-                      <a:tailEnd type="none" w="med" len="med"/>
-                    </a:lnL>
-                    <a:lnR w="9525" cap="flat" cmpd="sng" algn="ctr">
-                      <a:solidFill>
-                        <a:srgbClr val="D5DCE4"/>
-                      </a:solidFill>
-                      <a:prstDash val="solid"/>
-                      <a:round/>
-                      <a:headEnd type="none" w="med" len="med"/>
-                      <a:tailEnd type="none" w="med" len="med"/>
-                    </a:lnR>
-                    <a:lnT w="9525" cap="flat" cmpd="sng" algn="ctr">
-                      <a:solidFill>
-                        <a:srgbClr val="D5DCE4"/>
-                      </a:solidFill>
-                      <a:prstDash val="solid"/>
-                      <a:round/>
-                      <a:headEnd type="none" w="med" len="med"/>
-                      <a:tailEnd type="none" w="med" len="med"/>
-                    </a:lnT>
-                    <a:lnB w="9525" cap="flat" cmpd="sng" algn="ctr">
-                      <a:solidFill>
-                        <a:srgbClr val="D5DCE4"/>
-                      </a:solidFill>
-                      <a:prstDash val="solid"/>
-                      <a:round/>
-                      <a:headEnd type="none" w="med" len="med"/>
-                      <a:tailEnd type="none" w="med" len="med"/>
-                    </a:lnB>
-                    <a:solidFill>
-                      <a:srgbClr val="FFFFFF"/>
-                    </a:solidFill>
-                  </a:tcPr>
-                </a:tc>
-              </a:tr>
-              <a:tr h="411480">
-                <a:tc>
-                  <a:txBody>
-                    <a:bodyPr/>
-                    <a:lstStyle/>
-                    <a:p>
-                      <a:pPr indent="0" marL="0">
-                        <a:buNone/>
-                      </a:pPr>
-                      <a:r>
-                        <a:rPr lang="en-US" sz="1050" b="1" dirty="0">
-                          <a:solidFill>
-                            <a:srgbClr val="1B2533"/>
-                          </a:solidFill>
-                          <a:latin typeface="Microsoft YaHei" pitchFamily="34" charset="0"/>
-                          <a:ea typeface="Microsoft YaHei" pitchFamily="34" charset="-122"/>
-                          <a:cs typeface="Microsoft YaHei" pitchFamily="34" charset="-120"/>
-                        </a:rPr>
-                        <a:t>加量</a:t>
-                      </a:r>
-                      <a:endParaRPr lang="en-US" sz="1050" dirty="0">
-                        <a:latin typeface="Microsoft YaHei" charset="0"/>
-                        <a:ea typeface="Microsoft YaHei" charset="0"/>
-                        <a:cs typeface="Microsoft YaHei" charset="0"/>
-                      </a:endParaRPr>
-                    </a:p>
-                  </a:txBody>
-                  <a:tcPr marL="73152" marR="73152" marT="27432" marB="27432" anchor="ctr">
-                    <a:lnL w="9525" cap="flat" cmpd="sng" algn="ctr">
-                      <a:solidFill>
-                        <a:srgbClr val="D5DCE4"/>
-                      </a:solidFill>
-                      <a:prstDash val="solid"/>
-                      <a:round/>
-                      <a:headEnd type="none" w="med" len="med"/>
-                      <a:tailEnd type="none" w="med" len="med"/>
-                    </a:lnL>
-                    <a:lnR w="9525" cap="flat" cmpd="sng" algn="ctr">
-                      <a:solidFill>
-                        <a:srgbClr val="D5DCE4"/>
-                      </a:solidFill>
-                      <a:prstDash val="solid"/>
-                      <a:round/>
-                      <a:headEnd type="none" w="med" len="med"/>
-                      <a:tailEnd type="none" w="med" len="med"/>
-                    </a:lnR>
-                    <a:lnT w="9525" cap="flat" cmpd="sng" algn="ctr">
-                      <a:solidFill>
-                        <a:srgbClr val="D5DCE4"/>
-                      </a:solidFill>
-                      <a:prstDash val="solid"/>
-                      <a:round/>
-                      <a:headEnd type="none" w="med" len="med"/>
-                      <a:tailEnd type="none" w="med" len="med"/>
-                    </a:lnT>
-                    <a:lnB w="9525" cap="flat" cmpd="sng" algn="ctr">
-                      <a:solidFill>
-                        <a:srgbClr val="D5DCE4"/>
-                      </a:solidFill>
-                      <a:prstDash val="solid"/>
-                      <a:round/>
-                      <a:headEnd type="none" w="med" len="med"/>
-                      <a:tailEnd type="none" w="med" len="med"/>
-                    </a:lnB>
-                    <a:solidFill>
-                      <a:srgbClr val="FFFFFF"/>
-                    </a:solidFill>
-                  </a:tcPr>
-                </a:tc>
-                <a:tc>
-                  <a:txBody>
-                    <a:bodyPr/>
-                    <a:lstStyle/>
-                    <a:p>
-                      <a:pPr indent="0" marL="0">
-                        <a:buNone/>
-                      </a:pPr>
-                      <a:r>
-                        <a:rPr lang="en-US" sz="1050" dirty="0">
-                          <a:solidFill>
-                            <a:srgbClr val="1B2533"/>
-                          </a:solidFill>
-                          <a:latin typeface="Microsoft YaHei" pitchFamily="34" charset="0"/>
-                          <a:ea typeface="Microsoft YaHei" pitchFamily="34" charset="-122"/>
-                          <a:cs typeface="Microsoft YaHei" pitchFamily="34" charset="-120"/>
-                        </a:rPr>
-                        <a:t>去重后再加 3 / 6 篇同一试验论文</a:t>
-                      </a:r>
-                      <a:endParaRPr lang="en-US" sz="1050" dirty="0">
-                        <a:latin typeface="Microsoft YaHei" charset="0"/>
-                        <a:ea typeface="Microsoft YaHei" charset="0"/>
-                        <a:cs typeface="Microsoft YaHei" charset="0"/>
-                      </a:endParaRPr>
-                    </a:p>
-                  </a:txBody>
-                  <a:tcPr marL="73152" marR="73152" marT="27432" marB="27432" anchor="ctr">
-                    <a:lnL w="9525" cap="flat" cmpd="sng" algn="ctr">
-                      <a:solidFill>
-                        <a:srgbClr val="D5DCE4"/>
-                      </a:solidFill>
-                      <a:prstDash val="solid"/>
-                      <a:round/>
-                      <a:headEnd type="none" w="med" len="med"/>
-                      <a:tailEnd type="none" w="med" len="med"/>
-                    </a:lnL>
-                    <a:lnR w="9525" cap="flat" cmpd="sng" algn="ctr">
-                      <a:solidFill>
-                        <a:srgbClr val="D5DCE4"/>
-                      </a:solidFill>
-                      <a:prstDash val="solid"/>
-                      <a:round/>
-                      <a:headEnd type="none" w="med" len="med"/>
-                      <a:tailEnd type="none" w="med" len="med"/>
-                    </a:lnR>
-                    <a:lnT w="9525" cap="flat" cmpd="sng" algn="ctr">
-                      <a:solidFill>
-                        <a:srgbClr val="D5DCE4"/>
-                      </a:solidFill>
-                      <a:prstDash val="solid"/>
-                      <a:round/>
-                      <a:headEnd type="none" w="med" len="med"/>
-                      <a:tailEnd type="none" w="med" len="med"/>
-                    </a:lnT>
-                    <a:lnB w="9525" cap="flat" cmpd="sng" algn="ctr">
-                      <a:solidFill>
-                        <a:srgbClr val="D5DCE4"/>
-                      </a:solidFill>
-                      <a:prstDash val="solid"/>
-                      <a:round/>
-                      <a:headEnd type="none" w="med" len="med"/>
-                      <a:tailEnd type="none" w="med" len="med"/>
-                    </a:lnB>
-                    <a:solidFill>
-                      <a:srgbClr val="FFFFFF"/>
-                    </a:solidFill>
-                  </a:tcPr>
-                </a:tc>
-                <a:tc>
-                  <a:txBody>
-                    <a:bodyPr/>
-                    <a:lstStyle/>
-                    <a:p>
-                      <a:pPr indent="0" marL="0">
-                        <a:buNone/>
-                      </a:pPr>
-                      <a:r>
-                        <a:rPr lang="en-US" sz="1050" dirty="0">
-                          <a:solidFill>
-                            <a:srgbClr val="1B2533"/>
-                          </a:solidFill>
-                          <a:latin typeface="Microsoft YaHei" pitchFamily="34" charset="0"/>
-                          <a:ea typeface="Microsoft YaHei" pitchFamily="34" charset="-122"/>
-                          <a:cs typeface="Microsoft YaHei" pitchFamily="34" charset="-120"/>
-                        </a:rPr>
-                        <a:t>篇数越多，概率越高</a:t>
-                      </a:r>
-                      <a:endParaRPr lang="en-US" sz="1050" dirty="0">
-                        <a:latin typeface="Microsoft YaHei" charset="0"/>
-                        <a:ea typeface="Microsoft YaHei" charset="0"/>
-                        <a:cs typeface="Microsoft YaHei" charset="0"/>
-                      </a:endParaRPr>
-                    </a:p>
-                  </a:txBody>
-                  <a:tcPr marL="73152" marR="73152" marT="27432" marB="27432" anchor="ctr">
-                    <a:lnL w="9525" cap="flat" cmpd="sng" algn="ctr">
-                      <a:solidFill>
-                        <a:srgbClr val="D5DCE4"/>
-                      </a:solidFill>
-                      <a:prstDash val="solid"/>
-                      <a:round/>
-                      <a:headEnd type="none" w="med" len="med"/>
-                      <a:tailEnd type="none" w="med" len="med"/>
-                    </a:lnL>
-                    <a:lnR w="9525" cap="flat" cmpd="sng" algn="ctr">
-                      <a:solidFill>
-                        <a:srgbClr val="D5DCE4"/>
-                      </a:solidFill>
-                      <a:prstDash val="solid"/>
-                      <a:round/>
-                      <a:headEnd type="none" w="med" len="med"/>
-                      <a:tailEnd type="none" w="med" len="med"/>
-                    </a:lnR>
-                    <a:lnT w="9525" cap="flat" cmpd="sng" algn="ctr">
-                      <a:solidFill>
-                        <a:srgbClr val="D5DCE4"/>
-                      </a:solidFill>
-                      <a:prstDash val="solid"/>
-                      <a:round/>
-                      <a:headEnd type="none" w="med" len="med"/>
-                      <a:tailEnd type="none" w="med" len="med"/>
-                    </a:lnT>
-                    <a:lnB w="9525" cap="flat" cmpd="sng" algn="ctr">
-                      <a:solidFill>
-                        <a:srgbClr val="D5DCE4"/>
-                      </a:solidFill>
-                      <a:prstDash val="solid"/>
-                      <a:round/>
-                      <a:headEnd type="none" w="med" len="med"/>
-                      <a:tailEnd type="none" w="med" len="med"/>
-                    </a:lnB>
-                    <a:solidFill>
-                      <a:srgbClr val="FFFFFF"/>
-                    </a:solidFill>
-                  </a:tcPr>
-                </a:tc>
-              </a:tr>
-            </a:tbl>
-          </a:graphicData>
-        </a:graphic>
-      </p:graphicFrame>
-      <p:sp>
-        <p:nvSpPr>
-          <p:cNvPr id="20" name="box-166"/>
+          <a:ln w="19050">
+            <a:solidFill>
+              <a:schemeClr val="accent6"/>
+            </a:solidFill>
+            <a:prstDash val="solid"/>
+            <a:tailEnd type="triangle"/>
+          </a:ln>
+        </p:spPr>
+      </p:sp>
+      <p:sp>
+        <p:nvSpPr>
+          <p:cNvPr id="28" name="box-161"/>
           <p:cNvSpPr/>
           <p:nvPr/>
         </p:nvSpPr>
         <p:spPr>
           <a:xfrm>
-            <a:off x="6507328" y="4754880"/>
-            <a:ext cx="4861408" cy="1143000"/>
+            <a:off x="8107528" y="2697480"/>
+            <a:ext cx="1143000" cy="566928"/>
           </a:xfrm>
           <a:prstGeom prst="roundRect">
             <a:avLst>
-              <a:gd name="adj" fmla="val 6400"/>
+              <a:gd name="adj" fmla="val 12903"/>
             </a:avLst>
           </a:prstGeom>
           <a:solidFill>
-            <a:srgbClr val="E3F3F1"/>
+            <a:schemeClr val="accent6"/>
+          </a:solidFill>
+          <a:ln w="6350">
+            <a:solidFill>
+              <a:schemeClr val="accent6"/>
+            </a:solidFill>
+          </a:ln>
+        </p:spPr>
+        <p:txBody>
+          <a:bodyPr wrap="square" lIns="762" tIns="762" rIns="762" bIns="762" rtlCol="0" anchor="ctr"/>
+          <a:lstStyle/>
+          <a:p>
+            <a:pPr algn="ctr" indent="0" marL="0">
+              <a:buNone/>
+            </a:pPr>
+            <a:r>
+              <a:rPr lang="en-US" sz="1300" b="1" dirty="0">
+                <a:solidFill>
+                  <a:schemeClr val="bg1"/>
+                </a:solidFill>
+              </a:rPr>
+              <a:t>执行路由</a:t>
+            </a:r>
+            <a:endParaRPr lang="en-US" sz="1300" dirty="0"/>
+          </a:p>
+        </p:txBody>
+      </p:sp>
+      <p:sp>
+        <p:nvSpPr>
+          <p:cNvPr id="29" name="arrow-162"/>
+          <p:cNvSpPr/>
+          <p:nvPr/>
+        </p:nvSpPr>
+        <p:spPr>
+          <a:xfrm flipV="1">
+            <a:off x="9250528" y="2587752"/>
+            <a:ext cx="320040" cy="292608"/>
+          </a:xfrm>
+          <a:prstGeom prst="line">
+            <a:avLst/>
+          </a:prstGeom>
+          <a:noFill/>
+          <a:ln w="19050">
+            <a:solidFill>
+              <a:schemeClr val="accent6"/>
+            </a:solidFill>
+            <a:prstDash val="solid"/>
+            <a:tailEnd type="triangle"/>
+          </a:ln>
+        </p:spPr>
+      </p:sp>
+      <p:sp>
+        <p:nvSpPr>
+          <p:cNvPr id="30" name="arrow-163"/>
+          <p:cNvSpPr/>
+          <p:nvPr/>
+        </p:nvSpPr>
+        <p:spPr>
+          <a:xfrm>
+            <a:off x="9250528" y="3081528"/>
+            <a:ext cx="320040" cy="301752"/>
+          </a:xfrm>
+          <a:prstGeom prst="line">
+            <a:avLst/>
+          </a:prstGeom>
+          <a:noFill/>
+          <a:ln w="19050">
+            <a:solidFill>
+              <a:schemeClr val="accent6"/>
+            </a:solidFill>
+            <a:prstDash val="solid"/>
+            <a:tailEnd type="triangle"/>
+          </a:ln>
+        </p:spPr>
+      </p:sp>
+      <p:sp>
+        <p:nvSpPr>
+          <p:cNvPr id="31" name="box-164"/>
+          <p:cNvSpPr/>
+          <p:nvPr/>
+        </p:nvSpPr>
+        <p:spPr>
+          <a:xfrm>
+            <a:off x="9570568" y="2377440"/>
+            <a:ext cx="1798168" cy="457200"/>
+          </a:xfrm>
+          <a:prstGeom prst="roundRect">
+            <a:avLst>
+              <a:gd name="adj" fmla="val 16000"/>
+            </a:avLst>
+          </a:prstGeom>
+          <a:solidFill>
+            <a:schemeClr val="bg1"/>
           </a:solidFill>
           <a:ln w="12700">
             <a:solidFill>
-              <a:srgbClr val="0E8A7E"/>
+              <a:srgbClr val="D5DCE4"/>
             </a:solidFill>
           </a:ln>
         </p:spPr>
         <p:txBody>
-          <a:bodyPr wrap="square" lIns="1270" tIns="1270" rIns="1270" bIns="1270" rtlCol="0" anchor="ctr"/>
-          <a:lstStyle/>
-          <a:p>
-            <a:pPr algn="l" indent="0" marL="0">
-              <a:buNone/>
-            </a:pPr>
-            <a:r>
-              <a:rPr lang="en-US" sz="1050" dirty="0">
+          <a:bodyPr wrap="square" lIns="762" tIns="762" rIns="762" bIns="762" rtlCol="0" anchor="ctr"/>
+          <a:lstStyle/>
+          <a:p>
+            <a:pPr algn="ctr" indent="0" marL="0">
+              <a:buNone/>
+            </a:pPr>
+            <a:r>
+              <a:rPr lang="en-US" sz="1200" dirty="0">
                 <a:solidFill>
                   <a:schemeClr val="tx2"/>
                 </a:solidFill>
               </a:rPr>
-              <a:t>结果决定去留：效应存在 → 来源标注接入系统，并可作为论文发现；效应不存在 → 放弃这一方向。所用论文全部真实，标签来自公开结局，无需人工标注；用本机已订阅的模型命令行工具运行。</a:t>
-            </a:r>
-            <a:endParaRPr lang="en-US" sz="1050" dirty="0"/>
-          </a:p>
-        </p:txBody>
-      </p:sp>
-      <p:sp>
-        <p:nvSpPr>
-          <p:cNvPr id="21" name="label-167"/>
+              <a:t>模型 API · 按调用计费</a:t>
+            </a:r>
+            <a:endParaRPr lang="en-US" sz="1200" dirty="0"/>
+          </a:p>
+        </p:txBody>
+      </p:sp>
+      <p:sp>
+        <p:nvSpPr>
+          <p:cNvPr id="32" name="box-165"/>
+          <p:cNvSpPr/>
+          <p:nvPr/>
+        </p:nvSpPr>
+        <p:spPr>
+          <a:xfrm>
+            <a:off x="9570568" y="3154680"/>
+            <a:ext cx="1798168" cy="457200"/>
+          </a:xfrm>
+          <a:prstGeom prst="roundRect">
+            <a:avLst>
+              <a:gd name="adj" fmla="val 16000"/>
+            </a:avLst>
+          </a:prstGeom>
+          <a:solidFill>
+            <a:schemeClr val="accent3"/>
+          </a:solidFill>
+          <a:ln w="6350">
+            <a:solidFill>
+              <a:schemeClr val="accent3"/>
+            </a:solidFill>
+          </a:ln>
+        </p:spPr>
+        <p:txBody>
+          <a:bodyPr wrap="square" lIns="762" tIns="762" rIns="762" bIns="762" rtlCol="0" anchor="ctr"/>
+          <a:lstStyle/>
+          <a:p>
+            <a:pPr algn="ctr" indent="0" marL="0">
+              <a:buNone/>
+            </a:pPr>
+            <a:r>
+              <a:rPr lang="en-US" sz="1200" b="1" dirty="0">
+                <a:solidFill>
+                  <a:schemeClr val="bg1"/>
+                </a:solidFill>
+              </a:rPr>
+              <a:t>本地 CLI · 用已有订阅</a:t>
+            </a:r>
+            <a:endParaRPr lang="en-US" sz="1200" dirty="0"/>
+          </a:p>
+        </p:txBody>
+      </p:sp>
+      <p:sp>
+        <p:nvSpPr>
+          <p:cNvPr id="33" name="bullets-166"/>
           <p:cNvSpPr txBox="1"/>
           <p:nvPr/>
         </p:nvSpPr>
         <p:spPr>
           <a:xfrm>
-            <a:off x="548640" y="6108192"/>
-            <a:ext cx="11094415" cy="274320"/>
+            <a:off x="6507328" y="3886200"/>
+            <a:ext cx="4861408" cy="1828800"/>
           </a:xfrm>
           <a:prstGeom prst="rect">
             <a:avLst/>
@@ -15058,18 +14324,94 @@
           <a:bodyPr wrap="square" lIns="0" tIns="0" rIns="0" bIns="0" rtlCol="0" anchor="t"/>
           <a:lstStyle/>
           <a:p>
+            <a:pPr marL="177800" indent="-177800">
+              <a:spcAft>
+                <a:spcPts val="800"/>
+              </a:spcAft>
+              <a:buSzPct val="100000"/>
+              <a:buChar char="•"/>
+            </a:pPr>
+            <a:r>
+              <a:rPr lang="en-US" sz="1300" dirty="0">
+                <a:solidFill>
+                  <a:schemeClr val="tx1"/>
+                </a:solidFill>
+              </a:rPr>
+              <a:t>自动检测本机已登录的 26 种 AI 命令行工具（如 Codex、Claude Code）</a:t>
+            </a:r>
+            <a:endParaRPr lang="en-US" sz="1300" dirty="0"/>
+          </a:p>
+          <a:p>
+            <a:pPr marL="177800" indent="-177800">
+              <a:spcAft>
+                <a:spcPts val="800"/>
+              </a:spcAft>
+              <a:buSzPct val="100000"/>
+              <a:buChar char="•"/>
+            </a:pPr>
+            <a:r>
+              <a:rPr lang="en-US" sz="1300" dirty="0">
+                <a:solidFill>
+                  <a:schemeClr val="tx1"/>
+                </a:solidFill>
+              </a:rPr>
+              <a:t>每个会话独立配置目录，不混入日常使用记录</a:t>
+            </a:r>
+            <a:endParaRPr lang="en-US" sz="1300" dirty="0"/>
+          </a:p>
+          <a:p>
+            <a:pPr marL="177800" indent="-177800">
+              <a:spcAft>
+                <a:spcPts val="800"/>
+              </a:spcAft>
+              <a:buSzPct val="100000"/>
+              <a:buChar char="•"/>
+            </a:pPr>
+            <a:r>
+              <a:rPr lang="en-US" sz="1300" dirty="0">
+                <a:solidFill>
+                  <a:schemeClr val="tx1"/>
+                </a:solidFill>
+              </a:rPr>
+              <a:t>执行命令前先征得同意（Codex 全流程支持）；数据留在本机</a:t>
+            </a:r>
+            <a:endParaRPr lang="en-US" sz="1300" dirty="0"/>
+          </a:p>
+        </p:txBody>
+      </p:sp>
+      <p:sp>
+        <p:nvSpPr>
+          <p:cNvPr id="34" name="label-167"/>
+          <p:cNvSpPr txBox="1"/>
+          <p:nvPr/>
+        </p:nvSpPr>
+        <p:spPr>
+          <a:xfrm>
+            <a:off x="6507328" y="5532120"/>
+            <a:ext cx="4861408" cy="548640"/>
+          </a:xfrm>
+          <a:prstGeom prst="rect">
+            <a:avLst/>
+          </a:prstGeom>
+          <a:noFill/>
+          <a:ln/>
+        </p:spPr>
+        <p:txBody>
+          <a:bodyPr wrap="square" lIns="0" tIns="0" rIns="0" bIns="0" rtlCol="0" anchor="t"/>
+          <a:lstStyle/>
+          <a:p>
             <a:pPr algn="l" indent="0" marL="0">
               <a:buNone/>
             </a:pPr>
             <a:r>
-              <a:rPr lang="en-US" sz="1000" dirty="0">
+              <a:rPr lang="en-US" sz="1050" dirty="0">
                 <a:solidFill>
                   <a:schemeClr val="accent6"/>
                 </a:solidFill>
               </a:rPr>
-              <a:t>实验脚本与证据包已存档（packages/core/evaluation/illusory-corroboration）；尚未运行，结果待补。</a:t>
-            </a:r>
-            <a:endParaRPr lang="en-US" sz="1000" dirty="0"/>
+              <a:t>说明：Codex 走完整协议并支持审批；Claude Code 已验证会话隔离；其余工具为通用接入。使用前请确认订阅条款允许此类用法。</a:t>
+            </a:r>
+            <a:endParaRPr lang="en-US" sz="1050" dirty="0"/>
           </a:p>
         </p:txBody>
       </p:sp>
@@ -15175,7 +14517,7 @@
                   <a:schemeClr val="tx2"/>
                 </a:solidFill>
               </a:rPr>
-              <a:t>支撑设计：多智能体协作与本地运行时</a:t>
+              <a:t>使用说明：四步完成一次可追溯的研究</a:t>
             </a:r>
             <a:endParaRPr lang="en-US" sz="2800" dirty="0"/>
           </a:p>
@@ -15213,7 +14555,7 @@
                   <a:schemeClr val="accent6"/>
                 </a:solidFill>
               </a:rPr>
-              <a:t>B 类管“谁来做、谁把关”，C 类管“在哪里跑、用谁的额度”；两者在 2.x 已具备，3.0 继续完善。</a:t>
+              <a:t>截图来自真实运行的 v3.0 应用。</a:t>
             </a:r>
             <a:endParaRPr lang="en-US" sz="1500" dirty="0"/>
           </a:p>
@@ -15221,51 +14563,58 @@
       </p:sp>
       <p:sp>
         <p:nvSpPr>
-          <p:cNvPr id="4" name="card-168"/>
+          <p:cNvPr id="4" name="label-168"/>
+          <p:cNvSpPr txBox="1"/>
+          <p:nvPr/>
+        </p:nvSpPr>
+        <p:spPr>
+          <a:xfrm>
+            <a:off x="548640" y="1481328"/>
+            <a:ext cx="11094415" cy="292608"/>
+          </a:xfrm>
+          <a:prstGeom prst="rect">
+            <a:avLst/>
+          </a:prstGeom>
+          <a:noFill/>
+          <a:ln/>
+        </p:spPr>
+        <p:txBody>
+          <a:bodyPr wrap="square" lIns="0" tIns="0" rIns="0" bIns="0" rtlCol="0" anchor="t"/>
+          <a:lstStyle/>
+          <a:p>
+            <a:pPr algn="l" indent="0" marL="0">
+              <a:buNone/>
+            </a:pPr>
+            <a:r>
+              <a:rPr lang="en-US" sz="1300" dirty="0">
+                <a:solidFill>
+                  <a:schemeClr val="tx1"/>
+                </a:solidFill>
+              </a:rPr>
+              <a:t>① 安装：从 GitHub Releases 下载对应平台安装包；或在源码目录运行 npm run web，用浏览器打开。</a:t>
+            </a:r>
+            <a:endParaRPr lang="en-US" sz="1300" dirty="0"/>
+          </a:p>
+        </p:txBody>
+      </p:sp>
+      <p:sp>
+        <p:nvSpPr>
+          <p:cNvPr id="5" name="badge-169"/>
           <p:cNvSpPr/>
           <p:nvPr/>
         </p:nvSpPr>
         <p:spPr>
           <a:xfrm>
-            <a:off x="548640" y="1600200"/>
-            <a:ext cx="5410048" cy="4572000"/>
-          </a:xfrm>
-          <a:prstGeom prst="roundRect">
-            <a:avLst>
-              <a:gd name="adj" fmla="val 2000"/>
-            </a:avLst>
-          </a:prstGeom>
-          <a:solidFill>
-            <a:schemeClr val="bg2"/>
-          </a:solidFill>
-          <a:ln w="12700">
-            <a:solidFill>
-              <a:schemeClr val="bg2"/>
-            </a:solidFill>
-            <a:prstDash val="solid"/>
-          </a:ln>
-        </p:spPr>
-      </p:sp>
-      <p:sp>
-        <p:nvSpPr>
-          <p:cNvPr id="5" name="tag-169"/>
-          <p:cNvSpPr/>
-          <p:nvPr/>
-        </p:nvSpPr>
-        <p:spPr>
-          <a:xfrm>
-            <a:off x="822960" y="1810512"/>
-            <a:ext cx="411480" cy="411480"/>
-          </a:xfrm>
-          <a:prstGeom prst="roundRect">
-            <a:avLst>
-              <a:gd name="adj" fmla="val 13333"/>
-            </a:avLst>
+            <a:off x="548640" y="1901952"/>
+            <a:ext cx="347472" cy="347472"/>
+          </a:xfrm>
+          <a:prstGeom prst="ellipse">
+            <a:avLst/>
           </a:prstGeom>
           <a:solidFill>
             <a:schemeClr val="accent2"/>
           </a:solidFill>
-          <a:ln>
+          <a:ln w="6350">
             <a:solidFill>
               <a:schemeClr val="accent2"/>
             </a:solidFill>
@@ -15279,14 +14628,14 @@
               <a:buNone/>
             </a:pPr>
             <a:r>
-              <a:rPr lang="en-US" sz="1600" b="1" dirty="0">
+              <a:rPr lang="en-US" sz="1200" b="1" dirty="0">
                 <a:solidFill>
                   <a:schemeClr val="bg1"/>
                 </a:solidFill>
               </a:rPr>
-              <a:t>B</a:t>
-            </a:r>
-            <a:endParaRPr lang="en-US" sz="1600" dirty="0"/>
+              <a:t>2</a:t>
+            </a:r>
+            <a:endParaRPr lang="en-US" sz="1200" dirty="0"/>
           </a:p>
         </p:txBody>
       </p:sp>
@@ -15298,8 +14647,8 @@
         </p:nvSpPr>
         <p:spPr>
           <a:xfrm>
-            <a:off x="1371600" y="1810512"/>
-            <a:ext cx="4312768" cy="411480"/>
+            <a:off x="1005840" y="1883664"/>
+            <a:ext cx="3027578" cy="384048"/>
           </a:xfrm>
           <a:prstGeom prst="rect">
             <a:avLst/>
@@ -15315,343 +14664,567 @@
               <a:buNone/>
             </a:pPr>
             <a:r>
-              <a:rPr lang="en-US" sz="1700" b="1" dirty="0">
+              <a:rPr lang="en-US" sz="1600" b="1" dirty="0">
                 <a:solidFill>
                   <a:schemeClr val="tx2"/>
                 </a:solidFill>
               </a:rPr>
-              <a:t>多智能体协作：像课题组一样分工</a:t>
-            </a:r>
-            <a:endParaRPr lang="en-US" sz="1700" dirty="0"/>
-          </a:p>
-        </p:txBody>
-      </p:sp>
-      <p:sp>
-        <p:nvSpPr>
-          <p:cNvPr id="7" name="box-171"/>
+              <a:t>配置运行时</a:t>
+            </a:r>
+            <a:endParaRPr lang="en-US" sz="1600" dirty="0"/>
+          </a:p>
+        </p:txBody>
+      </p:sp>
+      <p:sp>
+        <p:nvSpPr>
+          <p:cNvPr id="7" name="label-171"/>
+          <p:cNvSpPr txBox="1"/>
+          <p:nvPr/>
+        </p:nvSpPr>
+        <p:spPr>
+          <a:xfrm>
+            <a:off x="548640" y="2304288"/>
+            <a:ext cx="3484778" cy="502920"/>
+          </a:xfrm>
+          <a:prstGeom prst="rect">
+            <a:avLst/>
+          </a:prstGeom>
+          <a:noFill/>
+          <a:ln/>
+        </p:spPr>
+        <p:txBody>
+          <a:bodyPr wrap="square" lIns="0" tIns="0" rIns="0" bIns="0" rtlCol="0" anchor="t"/>
+          <a:lstStyle/>
+          <a:p>
+            <a:pPr algn="l" indent="0" marL="0">
+              <a:buNone/>
+            </a:pPr>
+            <a:r>
+              <a:rPr lang="en-US" sz="1200" dirty="0">
+                <a:solidFill>
+                  <a:schemeClr val="tx1"/>
+                </a:solidFill>
+              </a:rPr>
+              <a:t>安装后打开“运行时（模型配置）”，绑定本机 AI 命令行工具或填写模型 API。</a:t>
+            </a:r>
+            <a:endParaRPr lang="en-US" sz="1200" dirty="0"/>
+          </a:p>
+        </p:txBody>
+      </p:sp>
+      <p:sp>
+        <p:nvSpPr>
+          <p:cNvPr id="8" name="badge-172"/>
           <p:cNvSpPr/>
           <p:nvPr/>
         </p:nvSpPr>
         <p:spPr>
           <a:xfrm>
-            <a:off x="822960" y="2514600"/>
-            <a:ext cx="811347" cy="566928"/>
-          </a:xfrm>
-          <a:prstGeom prst="roundRect">
-            <a:avLst>
-              <a:gd name="adj" fmla="val 12903"/>
-            </a:avLst>
+            <a:off x="4353458" y="1901952"/>
+            <a:ext cx="347472" cy="347472"/>
+          </a:xfrm>
+          <a:prstGeom prst="ellipse">
+            <a:avLst/>
           </a:prstGeom>
           <a:solidFill>
-            <a:schemeClr val="bg1"/>
+            <a:schemeClr val="accent2"/>
           </a:solidFill>
-          <a:ln w="12700">
+          <a:ln w="6350">
+            <a:solidFill>
+              <a:schemeClr val="accent2"/>
+            </a:solidFill>
+          </a:ln>
+        </p:spPr>
+        <p:txBody>
+          <a:bodyPr wrap="square" lIns="0" tIns="0" rIns="0" bIns="0" rtlCol="0" anchor="ctr"/>
+          <a:lstStyle/>
+          <a:p>
+            <a:pPr algn="ctr" indent="0" marL="0">
+              <a:buNone/>
+            </a:pPr>
+            <a:r>
+              <a:rPr lang="en-US" sz="1200" b="1" dirty="0">
+                <a:solidFill>
+                  <a:schemeClr val="bg1"/>
+                </a:solidFill>
+              </a:rPr>
+              <a:t>3</a:t>
+            </a:r>
+            <a:endParaRPr lang="en-US" sz="1200" dirty="0"/>
+          </a:p>
+        </p:txBody>
+      </p:sp>
+      <p:sp>
+        <p:nvSpPr>
+          <p:cNvPr id="9" name="label-173"/>
+          <p:cNvSpPr txBox="1"/>
+          <p:nvPr/>
+        </p:nvSpPr>
+        <p:spPr>
+          <a:xfrm>
+            <a:off x="4810658" y="1883664"/>
+            <a:ext cx="3027578" cy="384048"/>
+          </a:xfrm>
+          <a:prstGeom prst="rect">
+            <a:avLst/>
+          </a:prstGeom>
+          <a:noFill/>
+          <a:ln/>
+        </p:spPr>
+        <p:txBody>
+          <a:bodyPr wrap="square" lIns="0" tIns="0" rIns="0" bIns="0" rtlCol="0" anchor="ctr"/>
+          <a:lstStyle/>
+          <a:p>
+            <a:pPr algn="l" indent="0" marL="0">
+              <a:buNone/>
+            </a:pPr>
+            <a:r>
+              <a:rPr lang="en-US" sz="1600" b="1" dirty="0">
+                <a:solidFill>
+                  <a:schemeClr val="tx2"/>
+                </a:solidFill>
+              </a:rPr>
+              <a:t>提问</a:t>
+            </a:r>
+            <a:endParaRPr lang="en-US" sz="1600" dirty="0"/>
+          </a:p>
+        </p:txBody>
+      </p:sp>
+      <p:sp>
+        <p:nvSpPr>
+          <p:cNvPr id="10" name="label-174"/>
+          <p:cNvSpPr txBox="1"/>
+          <p:nvPr/>
+        </p:nvSpPr>
+        <p:spPr>
+          <a:xfrm>
+            <a:off x="4353458" y="2304288"/>
+            <a:ext cx="3484778" cy="502920"/>
+          </a:xfrm>
+          <a:prstGeom prst="rect">
+            <a:avLst/>
+          </a:prstGeom>
+          <a:noFill/>
+          <a:ln/>
+        </p:spPr>
+        <p:txBody>
+          <a:bodyPr wrap="square" lIns="0" tIns="0" rIns="0" bIns="0" rtlCol="0" anchor="t"/>
+          <a:lstStyle/>
+          <a:p>
+            <a:pPr algn="l" indent="0" marL="0">
+              <a:buNone/>
+            </a:pPr>
+            <a:r>
+              <a:rPr lang="en-US" sz="1200" dirty="0">
+                <a:solidFill>
+                  <a:schemeClr val="tx1"/>
+                </a:solidFill>
+              </a:rPr>
+              <a:t>直接提问；输入 @ 点名专家，或交给科研小队。</a:t>
+            </a:r>
+            <a:endParaRPr lang="en-US" sz="1200" dirty="0"/>
+          </a:p>
+        </p:txBody>
+      </p:sp>
+      <p:sp>
+        <p:nvSpPr>
+          <p:cNvPr id="11" name="badge-175"/>
+          <p:cNvSpPr/>
+          <p:nvPr/>
+        </p:nvSpPr>
+        <p:spPr>
+          <a:xfrm>
+            <a:off x="8158277" y="1901952"/>
+            <a:ext cx="347472" cy="347472"/>
+          </a:xfrm>
+          <a:prstGeom prst="ellipse">
+            <a:avLst/>
+          </a:prstGeom>
+          <a:solidFill>
+            <a:schemeClr val="accent2"/>
+          </a:solidFill>
+          <a:ln w="6350">
+            <a:solidFill>
+              <a:schemeClr val="accent2"/>
+            </a:solidFill>
+          </a:ln>
+        </p:spPr>
+        <p:txBody>
+          <a:bodyPr wrap="square" lIns="0" tIns="0" rIns="0" bIns="0" rtlCol="0" anchor="ctr"/>
+          <a:lstStyle/>
+          <a:p>
+            <a:pPr algn="ctr" indent="0" marL="0">
+              <a:buNone/>
+            </a:pPr>
+            <a:r>
+              <a:rPr lang="en-US" sz="1200" b="1" dirty="0">
+                <a:solidFill>
+                  <a:schemeClr val="bg1"/>
+                </a:solidFill>
+              </a:rPr>
+              <a:t>4</a:t>
+            </a:r>
+            <a:endParaRPr lang="en-US" sz="1200" dirty="0"/>
+          </a:p>
+        </p:txBody>
+      </p:sp>
+      <p:sp>
+        <p:nvSpPr>
+          <p:cNvPr id="12" name="label-176"/>
+          <p:cNvSpPr txBox="1"/>
+          <p:nvPr/>
+        </p:nvSpPr>
+        <p:spPr>
+          <a:xfrm>
+            <a:off x="8615477" y="1883664"/>
+            <a:ext cx="3027578" cy="384048"/>
+          </a:xfrm>
+          <a:prstGeom prst="rect">
+            <a:avLst/>
+          </a:prstGeom>
+          <a:noFill/>
+          <a:ln/>
+        </p:spPr>
+        <p:txBody>
+          <a:bodyPr wrap="square" lIns="0" tIns="0" rIns="0" bIns="0" rtlCol="0" anchor="ctr"/>
+          <a:lstStyle/>
+          <a:p>
+            <a:pPr algn="l" indent="0" marL="0">
+              <a:buNone/>
+            </a:pPr>
+            <a:r>
+              <a:rPr lang="en-US" sz="1600" b="1" dirty="0">
+                <a:solidFill>
+                  <a:schemeClr val="tx2"/>
+                </a:solidFill>
+              </a:rPr>
+              <a:t>查看证据</a:t>
+            </a:r>
+            <a:endParaRPr lang="en-US" sz="1600" dirty="0"/>
+          </a:p>
+        </p:txBody>
+      </p:sp>
+      <p:sp>
+        <p:nvSpPr>
+          <p:cNvPr id="13" name="label-177"/>
+          <p:cNvSpPr txBox="1"/>
+          <p:nvPr/>
+        </p:nvSpPr>
+        <p:spPr>
+          <a:xfrm>
+            <a:off x="8158277" y="2304288"/>
+            <a:ext cx="3484778" cy="502920"/>
+          </a:xfrm>
+          <a:prstGeom prst="rect">
+            <a:avLst/>
+          </a:prstGeom>
+          <a:noFill/>
+          <a:ln/>
+        </p:spPr>
+        <p:txBody>
+          <a:bodyPr wrap="square" lIns="0" tIns="0" rIns="0" bIns="0" rtlCol="0" anchor="t"/>
+          <a:lstStyle/>
+          <a:p>
+            <a:pPr algn="l" indent="0" marL="0">
+              <a:buNone/>
+            </a:pPr>
+            <a:r>
+              <a:rPr lang="en-US" sz="1200" dirty="0">
+                <a:solidFill>
+                  <a:schemeClr val="tx1"/>
+                </a:solidFill>
+              </a:rPr>
+              <a:t>查看每条证据的来源与状态（3.0 证据页）。</a:t>
+            </a:r>
+            <a:endParaRPr lang="en-US" sz="1200" dirty="0"/>
+          </a:p>
+        </p:txBody>
+      </p:sp>
+      <p:pic>
+        <p:nvPicPr>
+          <p:cNvPr id="14" name="screenshot-178" descr="自动检测到本机的 Claude Code">    </p:cNvPr>
+          <p:cNvPicPr>
+            <a:picLocks noChangeAspect="1"/>
+          </p:cNvPicPr>
+          <p:nvPr/>
+        </p:nvPicPr>
+        <p:blipFill>
+          <a:blip r:embed="rId1"/>
+          <a:stretch>
+            <a:fillRect/>
+          </a:stretch>
+        </p:blipFill>
+        <p:spPr>
+          <a:xfrm>
+            <a:off x="927854" y="2880360"/>
+            <a:ext cx="2726350" cy="2834640"/>
+          </a:xfrm>
+          <a:prstGeom prst="rect">
+            <a:avLst/>
+          </a:prstGeom>
+        </p:spPr>
+      </p:pic>
+      <p:sp>
+        <p:nvSpPr>
+          <p:cNvPr id="15" name="frame-179"/>
+          <p:cNvSpPr/>
+          <p:nvPr/>
+        </p:nvSpPr>
+        <p:spPr>
+          <a:xfrm>
+            <a:off x="927854" y="2880360"/>
+            <a:ext cx="2726350" cy="2834640"/>
+          </a:xfrm>
+          <a:prstGeom prst="rect">
+            <a:avLst/>
+          </a:prstGeom>
+          <a:solidFill>
+            <a:srgbClr val="FFFFFF">
+              <a:alpha val="0"/>
+            </a:srgbClr>
+          </a:solidFill>
+          <a:ln w="9525">
             <a:solidFill>
               <a:srgbClr val="D5DCE4"/>
             </a:solidFill>
+            <a:prstDash val="solid"/>
           </a:ln>
         </p:spPr>
-        <p:txBody>
-          <a:bodyPr wrap="square" lIns="762" tIns="762" rIns="762" bIns="762" rtlCol="0" anchor="ctr"/>
+      </p:sp>
+      <p:sp>
+        <p:nvSpPr>
+          <p:cNvPr id="16" name="label-180"/>
+          <p:cNvSpPr txBox="1"/>
+          <p:nvPr/>
+        </p:nvSpPr>
+        <p:spPr>
+          <a:xfrm>
+            <a:off x="927854" y="5788152"/>
+            <a:ext cx="2726350" cy="292608"/>
+          </a:xfrm>
+          <a:prstGeom prst="rect">
+            <a:avLst/>
+          </a:prstGeom>
+          <a:noFill/>
+          <a:ln/>
+        </p:spPr>
+        <p:txBody>
+          <a:bodyPr wrap="square" lIns="0" tIns="0" rIns="0" bIns="0" rtlCol="0" anchor="t"/>
           <a:lstStyle/>
           <a:p>
             <a:pPr algn="ctr" indent="0" marL="0">
               <a:buNone/>
             </a:pPr>
             <a:r>
-              <a:rPr lang="en-US" sz="1250" b="1" dirty="0">
-                <a:solidFill>
-                  <a:schemeClr val="tx2"/>
-                </a:solidFill>
-              </a:rPr>
-              <a:t>研究课题</a:t>
-            </a:r>
-            <a:endParaRPr lang="en-US" sz="1250" dirty="0"/>
-          </a:p>
-        </p:txBody>
-      </p:sp>
-      <p:sp>
-        <p:nvSpPr>
-          <p:cNvPr id="8" name="arrow-172"/>
+              <a:rPr lang="en-US" sz="1100" dirty="0">
+                <a:solidFill>
+                  <a:schemeClr val="accent6"/>
+                </a:solidFill>
+              </a:rPr>
+              <a:t>自动检测到本机的 Claude Code</a:t>
+            </a:r>
+            <a:endParaRPr lang="en-US" sz="1100" dirty="0"/>
+          </a:p>
+        </p:txBody>
+      </p:sp>
+      <p:pic>
+        <p:nvPicPr>
+          <p:cNvPr id="17" name="screenshot-181" descr="usage-ask-mention.jpg">    </p:cNvPr>
+          <p:cNvPicPr>
+            <a:picLocks noChangeAspect="1"/>
+          </p:cNvPicPr>
+          <p:nvPr/>
+        </p:nvPicPr>
+        <p:blipFill>
+          <a:blip r:embed="rId2"/>
+          <a:stretch>
+            <a:fillRect/>
+          </a:stretch>
+        </p:blipFill>
+        <p:spPr>
+          <a:xfrm>
+            <a:off x="4353458" y="2880360"/>
+            <a:ext cx="3484778" cy="867323"/>
+          </a:xfrm>
+          <a:prstGeom prst="rect">
+            <a:avLst/>
+          </a:prstGeom>
+        </p:spPr>
+      </p:pic>
+      <p:sp>
+        <p:nvSpPr>
+          <p:cNvPr id="18" name="frame-182"/>
           <p:cNvSpPr/>
           <p:nvPr/>
         </p:nvSpPr>
         <p:spPr>
           <a:xfrm>
-            <a:off x="1652595" y="2798064"/>
-            <a:ext cx="164592" cy="0"/>
-          </a:xfrm>
-          <a:prstGeom prst="line">
-            <a:avLst/>
-          </a:prstGeom>
-          <a:noFill/>
-          <a:ln w="15875">
-            <a:solidFill>
-              <a:schemeClr val="accent2"/>
-            </a:solidFill>
-            <a:prstDash val="solid"/>
-            <a:tailEnd type="triangle"/>
-          </a:ln>
-        </p:spPr>
-      </p:sp>
-      <p:sp>
-        <p:nvSpPr>
-          <p:cNvPr id="9" name="box-173"/>
-          <p:cNvSpPr/>
-          <p:nvPr/>
-        </p:nvSpPr>
-        <p:spPr>
-          <a:xfrm>
-            <a:off x="1835475" y="2514600"/>
-            <a:ext cx="811347" cy="566928"/>
-          </a:xfrm>
-          <a:prstGeom prst="roundRect">
-            <a:avLst>
-              <a:gd name="adj" fmla="val 12903"/>
-            </a:avLst>
+            <a:off x="4353458" y="2880360"/>
+            <a:ext cx="3484778" cy="867323"/>
+          </a:xfrm>
+          <a:prstGeom prst="rect">
+            <a:avLst/>
           </a:prstGeom>
           <a:solidFill>
-            <a:schemeClr val="bg1"/>
+            <a:srgbClr val="FFFFFF">
+              <a:alpha val="0"/>
+            </a:srgbClr>
           </a:solidFill>
-          <a:ln w="12700">
+          <a:ln w="9525">
             <a:solidFill>
               <a:srgbClr val="D5DCE4"/>
             </a:solidFill>
+            <a:prstDash val="solid"/>
           </a:ln>
         </p:spPr>
-        <p:txBody>
-          <a:bodyPr wrap="square" lIns="762" tIns="762" rIns="762" bIns="762" rtlCol="0" anchor="ctr"/>
-          <a:lstStyle/>
-          <a:p>
-            <a:pPr algn="ctr" indent="0" marL="0">
-              <a:buNone/>
-            </a:pPr>
-            <a:r>
-              <a:rPr lang="en-US" sz="1250" b="1" dirty="0">
-                <a:solidFill>
-                  <a:schemeClr val="tx2"/>
-                </a:solidFill>
-              </a:rPr>
-              <a:t>队长规划</a:t>
-            </a:r>
-            <a:endParaRPr lang="en-US" sz="1250" dirty="0"/>
-          </a:p>
-        </p:txBody>
-      </p:sp>
-      <p:sp>
-        <p:nvSpPr>
-          <p:cNvPr id="10" name="arrow-174"/>
+      </p:sp>
+      <p:pic>
+        <p:nvPicPr>
+          <p:cNvPr id="19" name="screenshot-183" descr="@ 点名专家；工具调用逐步可查">    </p:cNvPr>
+          <p:cNvPicPr>
+            <a:picLocks noChangeAspect="1"/>
+          </p:cNvPicPr>
+          <p:nvPr/>
+        </p:nvPicPr>
+        <p:blipFill>
+          <a:blip r:embed="rId3"/>
+          <a:stretch>
+            <a:fillRect/>
+          </a:stretch>
+        </p:blipFill>
+        <p:spPr>
+          <a:xfrm>
+            <a:off x="4353458" y="3931920"/>
+            <a:ext cx="3484778" cy="1184825"/>
+          </a:xfrm>
+          <a:prstGeom prst="rect">
+            <a:avLst/>
+          </a:prstGeom>
+        </p:spPr>
+      </p:pic>
+      <p:sp>
+        <p:nvSpPr>
+          <p:cNvPr id="20" name="frame-184"/>
           <p:cNvSpPr/>
           <p:nvPr/>
         </p:nvSpPr>
         <p:spPr>
           <a:xfrm>
-            <a:off x="2665110" y="2798064"/>
-            <a:ext cx="164592" cy="0"/>
-          </a:xfrm>
-          <a:prstGeom prst="line">
-            <a:avLst/>
-          </a:prstGeom>
-          <a:noFill/>
-          <a:ln w="15875">
-            <a:solidFill>
-              <a:schemeClr val="accent2"/>
-            </a:solidFill>
-            <a:prstDash val="solid"/>
-            <a:tailEnd type="triangle"/>
-          </a:ln>
-        </p:spPr>
-      </p:sp>
-      <p:sp>
-        <p:nvSpPr>
-          <p:cNvPr id="11" name="box-175"/>
-          <p:cNvSpPr/>
-          <p:nvPr/>
-        </p:nvSpPr>
-        <p:spPr>
-          <a:xfrm>
-            <a:off x="2847990" y="2514600"/>
-            <a:ext cx="811347" cy="566928"/>
-          </a:xfrm>
-          <a:prstGeom prst="roundRect">
-            <a:avLst>
-              <a:gd name="adj" fmla="val 12903"/>
-            </a:avLst>
+            <a:off x="4353458" y="3931920"/>
+            <a:ext cx="3484778" cy="1184825"/>
+          </a:xfrm>
+          <a:prstGeom prst="rect">
+            <a:avLst/>
           </a:prstGeom>
           <a:solidFill>
-            <a:schemeClr val="bg1"/>
+            <a:srgbClr val="FFFFFF">
+              <a:alpha val="0"/>
+            </a:srgbClr>
           </a:solidFill>
-          <a:ln w="12700">
+          <a:ln w="9525">
             <a:solidFill>
               <a:srgbClr val="D5DCE4"/>
             </a:solidFill>
+            <a:prstDash val="solid"/>
           </a:ln>
         </p:spPr>
-        <p:txBody>
-          <a:bodyPr wrap="square" lIns="762" tIns="762" rIns="762" bIns="762" rtlCol="0" anchor="ctr"/>
+      </p:sp>
+      <p:sp>
+        <p:nvSpPr>
+          <p:cNvPr id="21" name="label-185"/>
+          <p:cNvSpPr txBox="1"/>
+          <p:nvPr/>
+        </p:nvSpPr>
+        <p:spPr>
+          <a:xfrm>
+            <a:off x="4353458" y="5189897"/>
+            <a:ext cx="3484778" cy="292608"/>
+          </a:xfrm>
+          <a:prstGeom prst="rect">
+            <a:avLst/>
+          </a:prstGeom>
+          <a:noFill/>
+          <a:ln/>
+        </p:spPr>
+        <p:txBody>
+          <a:bodyPr wrap="square" lIns="0" tIns="0" rIns="0" bIns="0" rtlCol="0" anchor="t"/>
           <a:lstStyle/>
           <a:p>
             <a:pPr algn="ctr" indent="0" marL="0">
               <a:buNone/>
             </a:pPr>
             <a:r>
-              <a:rPr lang="en-US" sz="1250" b="1" dirty="0">
-                <a:solidFill>
-                  <a:schemeClr val="tx2"/>
-                </a:solidFill>
-              </a:rPr>
-              <a:t>成员并行</a:t>
-            </a:r>
-            <a:endParaRPr lang="en-US" sz="1250" dirty="0"/>
-          </a:p>
-        </p:txBody>
-      </p:sp>
-      <p:sp>
-        <p:nvSpPr>
-          <p:cNvPr id="12" name="arrow-176"/>
+              <a:rPr lang="en-US" sz="1100" dirty="0">
+                <a:solidFill>
+                  <a:schemeClr val="accent6"/>
+                </a:solidFill>
+              </a:rPr>
+              <a:t>@ 点名专家；工具调用逐步可查</a:t>
+            </a:r>
+            <a:endParaRPr lang="en-US" sz="1100" dirty="0"/>
+          </a:p>
+        </p:txBody>
+      </p:sp>
+      <p:pic>
+        <p:nvPicPr>
+          <p:cNvPr id="22" name="screenshot-186" descr="3.0 证据页：来源、状态、历史">    </p:cNvPr>
+          <p:cNvPicPr>
+            <a:picLocks noChangeAspect="1"/>
+          </p:cNvPicPr>
+          <p:nvPr/>
+        </p:nvPicPr>
+        <p:blipFill>
+          <a:blip r:embed="rId4"/>
+          <a:stretch>
+            <a:fillRect/>
+          </a:stretch>
+        </p:blipFill>
+        <p:spPr>
+          <a:xfrm>
+            <a:off x="8158277" y="2880360"/>
+            <a:ext cx="3484778" cy="2462577"/>
+          </a:xfrm>
+          <a:prstGeom prst="rect">
+            <a:avLst/>
+          </a:prstGeom>
+        </p:spPr>
+      </p:pic>
+      <p:sp>
+        <p:nvSpPr>
+          <p:cNvPr id="23" name="frame-187"/>
           <p:cNvSpPr/>
           <p:nvPr/>
         </p:nvSpPr>
         <p:spPr>
           <a:xfrm>
-            <a:off x="3677625" y="2798064"/>
-            <a:ext cx="164592" cy="0"/>
-          </a:xfrm>
-          <a:prstGeom prst="line">
-            <a:avLst/>
-          </a:prstGeom>
-          <a:noFill/>
-          <a:ln w="15875">
-            <a:solidFill>
-              <a:schemeClr val="accent2"/>
-            </a:solidFill>
-            <a:prstDash val="solid"/>
-            <a:tailEnd type="triangle"/>
-          </a:ln>
-        </p:spPr>
-      </p:sp>
-      <p:sp>
-        <p:nvSpPr>
-          <p:cNvPr id="13" name="box-177"/>
-          <p:cNvSpPr/>
-          <p:nvPr/>
-        </p:nvSpPr>
-        <p:spPr>
-          <a:xfrm>
-            <a:off x="3860505" y="2514600"/>
-            <a:ext cx="811347" cy="566928"/>
-          </a:xfrm>
-          <a:prstGeom prst="roundRect">
-            <a:avLst>
-              <a:gd name="adj" fmla="val 12903"/>
-            </a:avLst>
+            <a:off x="8158277" y="2880360"/>
+            <a:ext cx="3484778" cy="2462577"/>
+          </a:xfrm>
+          <a:prstGeom prst="rect">
+            <a:avLst/>
           </a:prstGeom>
           <a:solidFill>
-            <a:srgbClr val="E3F3F1"/>
+            <a:srgbClr val="FFFFFF">
+              <a:alpha val="0"/>
+            </a:srgbClr>
           </a:solidFill>
-          <a:ln w="12700">
-            <a:solidFill>
-              <a:srgbClr val="0E8A7E"/>
-            </a:solidFill>
-          </a:ln>
-        </p:spPr>
-        <p:txBody>
-          <a:bodyPr wrap="square" lIns="762" tIns="762" rIns="762" bIns="762" rtlCol="0" anchor="ctr"/>
-          <a:lstStyle/>
-          <a:p>
-            <a:pPr algn="ctr" indent="0" marL="0">
-              <a:buNone/>
-            </a:pPr>
-            <a:r>
-              <a:rPr lang="en-US" sz="1250" b="1" dirty="0">
-                <a:solidFill>
-                  <a:schemeClr val="tx2"/>
-                </a:solidFill>
-              </a:rPr>
-              <a:t>质量门</a:t>
-            </a:r>
-            <a:endParaRPr lang="en-US" sz="1250" dirty="0"/>
-          </a:p>
-        </p:txBody>
-      </p:sp>
-      <p:sp>
-        <p:nvSpPr>
-          <p:cNvPr id="14" name="arrow-178"/>
-          <p:cNvSpPr/>
-          <p:nvPr/>
-        </p:nvSpPr>
-        <p:spPr>
-          <a:xfrm>
-            <a:off x="4690140" y="2798064"/>
-            <a:ext cx="164592" cy="0"/>
-          </a:xfrm>
-          <a:prstGeom prst="line">
-            <a:avLst/>
-          </a:prstGeom>
-          <a:noFill/>
-          <a:ln w="15875">
-            <a:solidFill>
-              <a:schemeClr val="accent2"/>
-            </a:solidFill>
-            <a:prstDash val="solid"/>
-            <a:tailEnd type="triangle"/>
-          </a:ln>
-        </p:spPr>
-      </p:sp>
-      <p:sp>
-        <p:nvSpPr>
-          <p:cNvPr id="15" name="box-179"/>
-          <p:cNvSpPr/>
-          <p:nvPr/>
-        </p:nvSpPr>
-        <p:spPr>
-          <a:xfrm>
-            <a:off x="4873020" y="2514600"/>
-            <a:ext cx="811347" cy="566928"/>
-          </a:xfrm>
-          <a:prstGeom prst="roundRect">
-            <a:avLst>
-              <a:gd name="adj" fmla="val 12903"/>
-            </a:avLst>
-          </a:prstGeom>
-          <a:solidFill>
-            <a:schemeClr val="bg1"/>
-          </a:solidFill>
-          <a:ln w="12700">
+          <a:ln w="9525">
             <a:solidFill>
               <a:srgbClr val="D5DCE4"/>
             </a:solidFill>
+            <a:prstDash val="solid"/>
           </a:ln>
         </p:spPr>
-        <p:txBody>
-          <a:bodyPr wrap="square" lIns="762" tIns="762" rIns="762" bIns="762" rtlCol="0" anchor="ctr"/>
-          <a:lstStyle/>
-          <a:p>
-            <a:pPr algn="ctr" indent="0" marL="0">
-              <a:buNone/>
-            </a:pPr>
-            <a:r>
-              <a:rPr lang="en-US" sz="1250" b="1" dirty="0">
-                <a:solidFill>
-                  <a:schemeClr val="tx2"/>
-                </a:solidFill>
-              </a:rPr>
-              <a:t>综合报告</a:t>
-            </a:r>
-            <a:endParaRPr lang="en-US" sz="1250" dirty="0"/>
-          </a:p>
-        </p:txBody>
-      </p:sp>
-      <p:sp>
-        <p:nvSpPr>
-          <p:cNvPr id="16" name="bullets-180"/>
+      </p:sp>
+      <p:sp>
+        <p:nvSpPr>
+          <p:cNvPr id="24" name="label-188"/>
           <p:cNvSpPr txBox="1"/>
           <p:nvPr/>
         </p:nvSpPr>
         <p:spPr>
           <a:xfrm>
-            <a:off x="822960" y="3337560"/>
-            <a:ext cx="4861408" cy="2011680"/>
+            <a:off x="8158277" y="5416089"/>
+            <a:ext cx="3484778" cy="292608"/>
           </a:xfrm>
           <a:prstGeom prst="rect">
             <a:avLst/>
@@ -15663,71 +15236,31 @@
           <a:bodyPr wrap="square" lIns="0" tIns="0" rIns="0" bIns="0" rtlCol="0" anchor="t"/>
           <a:lstStyle/>
           <a:p>
-            <a:pPr marL="177800" indent="-177800">
-              <a:spcAft>
-                <a:spcPts val="800"/>
-              </a:spcAft>
-              <a:buSzPct val="100000"/>
-              <a:buChar char="•"/>
-            </a:pPr>
-            <a:r>
-              <a:rPr lang="en-US" sz="1300" dirty="0">
-                <a:solidFill>
-                  <a:schemeClr val="tx1"/>
-                </a:solidFill>
-              </a:rPr>
-              <a:t>队长（PI）把课题拆成有依赖的任务，可要求先审批计划</a:t>
-            </a:r>
-            <a:endParaRPr lang="en-US" sz="1300" dirty="0"/>
-          </a:p>
-          <a:p>
-            <a:pPr marL="177800" indent="-177800">
-              <a:spcAft>
-                <a:spcPts val="800"/>
-              </a:spcAft>
-              <a:buSzPct val="100000"/>
-              <a:buChar char="•"/>
-            </a:pPr>
-            <a:r>
-              <a:rPr lang="en-US" sz="1300" dirty="0">
-                <a:solidFill>
-                  <a:schemeClr val="tx1"/>
-                </a:solidFill>
-              </a:rPr>
-              <a:t>成员交接时，每条发现都必须附证据编号</a:t>
-            </a:r>
-            <a:endParaRPr lang="en-US" sz="1300" dirty="0"/>
-          </a:p>
-          <a:p>
-            <a:pPr marL="177800" indent="-177800">
-              <a:spcAft>
-                <a:spcPts val="800"/>
-              </a:spcAft>
-              <a:buSzPct val="100000"/>
-              <a:buChar char="•"/>
-            </a:pPr>
-            <a:r>
-              <a:rPr lang="en-US" sz="1300" dirty="0">
-                <a:solidFill>
-                  <a:schemeClr val="tx1"/>
-                </a:solidFill>
-              </a:rPr>
-              <a:t>质量门：规则检查 + 科研审查员；工具失败不算“阴性结果”</a:t>
-            </a:r>
-            <a:endParaRPr lang="en-US" sz="1300" dirty="0"/>
-          </a:p>
-        </p:txBody>
-      </p:sp>
-      <p:sp>
-        <p:nvSpPr>
-          <p:cNvPr id="17" name="label-181"/>
+            <a:pPr algn="ctr" indent="0" marL="0">
+              <a:buNone/>
+            </a:pPr>
+            <a:r>
+              <a:rPr lang="en-US" sz="1100" dirty="0">
+                <a:solidFill>
+                  <a:schemeClr val="accent6"/>
+                </a:solidFill>
+              </a:rPr>
+              <a:t>3.0 证据页：来源、状态、历史</a:t>
+            </a:r>
+            <a:endParaRPr lang="en-US" sz="1100" dirty="0"/>
+          </a:p>
+        </p:txBody>
+      </p:sp>
+      <p:sp>
+        <p:nvSpPr>
+          <p:cNvPr id="25" name="label-189"/>
           <p:cNvSpPr txBox="1"/>
           <p:nvPr/>
         </p:nvSpPr>
         <p:spPr>
           <a:xfrm>
-            <a:off x="822960" y="5349240"/>
-            <a:ext cx="1620469" cy="411480"/>
+            <a:off x="548640" y="6172200"/>
+            <a:ext cx="11094415" cy="256032"/>
           </a:xfrm>
           <a:prstGeom prst="rect">
             <a:avLst/>
@@ -15739,663 +15272,16 @@
           <a:bodyPr wrap="square" lIns="0" tIns="0" rIns="0" bIns="0" rtlCol="0" anchor="t"/>
           <a:lstStyle/>
           <a:p>
-            <a:pPr algn="ctr" indent="0" marL="0">
-              <a:buNone/>
-            </a:pPr>
-            <a:r>
-              <a:rPr lang="en-US" sz="2000" b="1" dirty="0">
-                <a:solidFill>
-                  <a:schemeClr val="accent2"/>
-                </a:solidFill>
-              </a:rPr>
-              <a:t>26 位</a:t>
-            </a:r>
-            <a:endParaRPr lang="en-US" sz="2000" dirty="0"/>
-          </a:p>
-        </p:txBody>
-      </p:sp>
-      <p:sp>
-        <p:nvSpPr>
-          <p:cNvPr id="18" name="label-182"/>
-          <p:cNvSpPr txBox="1"/>
-          <p:nvPr/>
-        </p:nvSpPr>
-        <p:spPr>
-          <a:xfrm>
-            <a:off x="822960" y="5742432"/>
-            <a:ext cx="1620469" cy="274320"/>
-          </a:xfrm>
-          <a:prstGeom prst="rect">
-            <a:avLst/>
-          </a:prstGeom>
-          <a:noFill/>
-          <a:ln/>
-        </p:spPr>
-        <p:txBody>
-          <a:bodyPr wrap="square" lIns="0" tIns="0" rIns="0" bIns="0" rtlCol="0" anchor="t"/>
-          <a:lstStyle/>
-          <a:p>
-            <a:pPr algn="ctr" indent="0" marL="0">
-              <a:buNone/>
-            </a:pPr>
-            <a:r>
-              <a:rPr lang="en-US" sz="1150" dirty="0">
+            <a:pPr algn="l" indent="0" marL="0">
+              <a:buNone/>
+            </a:pPr>
+            <a:r>
+              <a:rPr lang="en-US" sz="1050" dirty="0">
                 <a:solidFill>
                   <a:schemeClr val="accent6"/>
                 </a:solidFill>
               </a:rPr>
-              <a:t>领域专家</a:t>
-            </a:r>
-            <a:endParaRPr lang="en-US" sz="1150" dirty="0"/>
-          </a:p>
-        </p:txBody>
-      </p:sp>
-      <p:sp>
-        <p:nvSpPr>
-          <p:cNvPr id="19" name="label-183"/>
-          <p:cNvSpPr txBox="1"/>
-          <p:nvPr/>
-        </p:nvSpPr>
-        <p:spPr>
-          <a:xfrm>
-            <a:off x="2443429" y="5349240"/>
-            <a:ext cx="1620469" cy="411480"/>
-          </a:xfrm>
-          <a:prstGeom prst="rect">
-            <a:avLst/>
-          </a:prstGeom>
-          <a:noFill/>
-          <a:ln/>
-        </p:spPr>
-        <p:txBody>
-          <a:bodyPr wrap="square" lIns="0" tIns="0" rIns="0" bIns="0" rtlCol="0" anchor="t"/>
-          <a:lstStyle/>
-          <a:p>
-            <a:pPr algn="ctr" indent="0" marL="0">
-              <a:buNone/>
-            </a:pPr>
-            <a:r>
-              <a:rPr lang="en-US" sz="2000" b="1" dirty="0">
-                <a:solidFill>
-                  <a:schemeClr val="accent2"/>
-                </a:solidFill>
-              </a:rPr>
-              <a:t>15 个</a:t>
-            </a:r>
-            <a:endParaRPr lang="en-US" sz="2000" dirty="0"/>
-          </a:p>
-        </p:txBody>
-      </p:sp>
-      <p:sp>
-        <p:nvSpPr>
-          <p:cNvPr id="20" name="label-184"/>
-          <p:cNvSpPr txBox="1"/>
-          <p:nvPr/>
-        </p:nvSpPr>
-        <p:spPr>
-          <a:xfrm>
-            <a:off x="2443429" y="5742432"/>
-            <a:ext cx="1620469" cy="274320"/>
-          </a:xfrm>
-          <a:prstGeom prst="rect">
-            <a:avLst/>
-          </a:prstGeom>
-          <a:noFill/>
-          <a:ln/>
-        </p:spPr>
-        <p:txBody>
-          <a:bodyPr wrap="square" lIns="0" tIns="0" rIns="0" bIns="0" rtlCol="0" anchor="t"/>
-          <a:lstStyle/>
-          <a:p>
-            <a:pPr algn="ctr" indent="0" marL="0">
-              <a:buNone/>
-            </a:pPr>
-            <a:r>
-              <a:rPr lang="en-US" sz="1150" dirty="0">
-                <a:solidFill>
-                  <a:schemeClr val="accent6"/>
-                </a:solidFill>
-              </a:rPr>
-              <a:t>团队模板</a:t>
-            </a:r>
-            <a:endParaRPr lang="en-US" sz="1150" dirty="0"/>
-          </a:p>
-        </p:txBody>
-      </p:sp>
-      <p:sp>
-        <p:nvSpPr>
-          <p:cNvPr id="21" name="label-185"/>
-          <p:cNvSpPr txBox="1"/>
-          <p:nvPr/>
-        </p:nvSpPr>
-        <p:spPr>
-          <a:xfrm>
-            <a:off x="4063898" y="5349240"/>
-            <a:ext cx="1620469" cy="411480"/>
-          </a:xfrm>
-          <a:prstGeom prst="rect">
-            <a:avLst/>
-          </a:prstGeom>
-          <a:noFill/>
-          <a:ln/>
-        </p:spPr>
-        <p:txBody>
-          <a:bodyPr wrap="square" lIns="0" tIns="0" rIns="0" bIns="0" rtlCol="0" anchor="t"/>
-          <a:lstStyle/>
-          <a:p>
-            <a:pPr algn="ctr" indent="0" marL="0">
-              <a:buNone/>
-            </a:pPr>
-            <a:r>
-              <a:rPr lang="en-US" sz="2000" b="1" dirty="0">
-                <a:solidFill>
-                  <a:schemeClr val="accent2"/>
-                </a:solidFill>
-              </a:rPr>
-              <a:t>@</a:t>
-            </a:r>
-            <a:endParaRPr lang="en-US" sz="2000" dirty="0"/>
-          </a:p>
-        </p:txBody>
-      </p:sp>
-      <p:sp>
-        <p:nvSpPr>
-          <p:cNvPr id="22" name="label-186"/>
-          <p:cNvSpPr txBox="1"/>
-          <p:nvPr/>
-        </p:nvSpPr>
-        <p:spPr>
-          <a:xfrm>
-            <a:off x="4063898" y="5742432"/>
-            <a:ext cx="1620469" cy="274320"/>
-          </a:xfrm>
-          <a:prstGeom prst="rect">
-            <a:avLst/>
-          </a:prstGeom>
-          <a:noFill/>
-          <a:ln/>
-        </p:spPr>
-        <p:txBody>
-          <a:bodyPr wrap="square" lIns="0" tIns="0" rIns="0" bIns="0" rtlCol="0" anchor="t"/>
-          <a:lstStyle/>
-          <a:p>
-            <a:pPr algn="ctr" indent="0" marL="0">
-              <a:buNone/>
-            </a:pPr>
-            <a:r>
-              <a:rPr lang="en-US" sz="1150" dirty="0">
-                <a:solidFill>
-                  <a:schemeClr val="accent6"/>
-                </a:solidFill>
-              </a:rPr>
-              <a:t>直接点名专家</a:t>
-            </a:r>
-            <a:endParaRPr lang="en-US" sz="1150" dirty="0"/>
-          </a:p>
-        </p:txBody>
-      </p:sp>
-      <p:sp>
-        <p:nvSpPr>
-          <p:cNvPr id="23" name="card-187"/>
-          <p:cNvSpPr/>
-          <p:nvPr/>
-        </p:nvSpPr>
-        <p:spPr>
-          <a:xfrm>
-            <a:off x="6233008" y="1600200"/>
-            <a:ext cx="5410048" cy="4572000"/>
-          </a:xfrm>
-          <a:prstGeom prst="roundRect">
-            <a:avLst>
-              <a:gd name="adj" fmla="val 2000"/>
-            </a:avLst>
-          </a:prstGeom>
-          <a:solidFill>
-            <a:schemeClr val="bg2"/>
-          </a:solidFill>
-          <a:ln w="12700">
-            <a:solidFill>
-              <a:schemeClr val="bg2"/>
-            </a:solidFill>
-            <a:prstDash val="solid"/>
-          </a:ln>
-        </p:spPr>
-      </p:sp>
-      <p:sp>
-        <p:nvSpPr>
-          <p:cNvPr id="24" name="tag-188"/>
-          <p:cNvSpPr/>
-          <p:nvPr/>
-        </p:nvSpPr>
-        <p:spPr>
-          <a:xfrm>
-            <a:off x="6507328" y="1810512"/>
-            <a:ext cx="411480" cy="411480"/>
-          </a:xfrm>
-          <a:prstGeom prst="roundRect">
-            <a:avLst>
-              <a:gd name="adj" fmla="val 13333"/>
-            </a:avLst>
-          </a:prstGeom>
-          <a:solidFill>
-            <a:schemeClr val="accent3"/>
-          </a:solidFill>
-          <a:ln>
-            <a:solidFill>
-              <a:schemeClr val="accent3"/>
-            </a:solidFill>
-          </a:ln>
-        </p:spPr>
-        <p:txBody>
-          <a:bodyPr wrap="square" lIns="0" tIns="0" rIns="0" bIns="0" rtlCol="0" anchor="ctr"/>
-          <a:lstStyle/>
-          <a:p>
-            <a:pPr algn="ctr" indent="0" marL="0">
-              <a:buNone/>
-            </a:pPr>
-            <a:r>
-              <a:rPr lang="en-US" sz="1600" b="1" dirty="0">
-                <a:solidFill>
-                  <a:schemeClr val="bg1"/>
-                </a:solidFill>
-              </a:rPr>
-              <a:t>C</a:t>
-            </a:r>
-            <a:endParaRPr lang="en-US" sz="1600" dirty="0"/>
-          </a:p>
-        </p:txBody>
-      </p:sp>
-      <p:sp>
-        <p:nvSpPr>
-          <p:cNvPr id="25" name="label-189"/>
-          <p:cNvSpPr txBox="1"/>
-          <p:nvPr/>
-        </p:nvSpPr>
-        <p:spPr>
-          <a:xfrm>
-            <a:off x="7055968" y="1810512"/>
-            <a:ext cx="4312768" cy="411480"/>
-          </a:xfrm>
-          <a:prstGeom prst="rect">
-            <a:avLst/>
-          </a:prstGeom>
-          <a:noFill/>
-          <a:ln/>
-        </p:spPr>
-        <p:txBody>
-          <a:bodyPr wrap="square" lIns="0" tIns="0" rIns="0" bIns="0" rtlCol="0" anchor="ctr"/>
-          <a:lstStyle/>
-          <a:p>
-            <a:pPr algn="l" indent="0" marL="0">
-              <a:buNone/>
-            </a:pPr>
-            <a:r>
-              <a:rPr lang="en-US" sz="1700" b="1" dirty="0">
-                <a:solidFill>
-                  <a:schemeClr val="tx2"/>
-                </a:solidFill>
-              </a:rPr>
-              <a:t>本地运行时：直接用已有 AI 订阅</a:t>
-            </a:r>
-            <a:endParaRPr lang="en-US" sz="1700" dirty="0"/>
-          </a:p>
-        </p:txBody>
-      </p:sp>
-      <p:sp>
-        <p:nvSpPr>
-          <p:cNvPr id="26" name="box-190"/>
-          <p:cNvSpPr/>
-          <p:nvPr/>
-        </p:nvSpPr>
-        <p:spPr>
-          <a:xfrm>
-            <a:off x="6507328" y="2697480"/>
-            <a:ext cx="1325880" cy="566928"/>
-          </a:xfrm>
-          <a:prstGeom prst="roundRect">
-            <a:avLst>
-              <a:gd name="adj" fmla="val 12903"/>
-            </a:avLst>
-          </a:prstGeom>
-          <a:solidFill>
-            <a:schemeClr val="tx2"/>
-          </a:solidFill>
-          <a:ln w="6350">
-            <a:solidFill>
-              <a:schemeClr val="tx2"/>
-            </a:solidFill>
-          </a:ln>
-        </p:spPr>
-        <p:txBody>
-          <a:bodyPr wrap="square" lIns="762" tIns="762" rIns="762" bIns="762" rtlCol="0" anchor="ctr"/>
-          <a:lstStyle/>
-          <a:p>
-            <a:pPr algn="ctr" indent="0" marL="0">
-              <a:buNone/>
-            </a:pPr>
-            <a:r>
-              <a:rPr lang="en-US" sz="1300" b="1" dirty="0">
-                <a:solidFill>
-                  <a:schemeClr val="bg1"/>
-                </a:solidFill>
-              </a:rPr>
-              <a:t>研究请求</a:t>
-            </a:r>
-            <a:endParaRPr lang="en-US" sz="1300" dirty="0"/>
-          </a:p>
-        </p:txBody>
-      </p:sp>
-      <p:sp>
-        <p:nvSpPr>
-          <p:cNvPr id="27" name="arrow-191"/>
-          <p:cNvSpPr/>
-          <p:nvPr/>
-        </p:nvSpPr>
-        <p:spPr>
-          <a:xfrm>
-            <a:off x="7833208" y="2980944"/>
-            <a:ext cx="274320" cy="0"/>
-          </a:xfrm>
-          <a:prstGeom prst="line">
-            <a:avLst/>
-          </a:prstGeom>
-          <a:noFill/>
-          <a:ln w="19050">
-            <a:solidFill>
-              <a:schemeClr val="accent6"/>
-            </a:solidFill>
-            <a:prstDash val="solid"/>
-            <a:tailEnd type="triangle"/>
-          </a:ln>
-        </p:spPr>
-      </p:sp>
-      <p:sp>
-        <p:nvSpPr>
-          <p:cNvPr id="28" name="box-192"/>
-          <p:cNvSpPr/>
-          <p:nvPr/>
-        </p:nvSpPr>
-        <p:spPr>
-          <a:xfrm>
-            <a:off x="8107528" y="2697480"/>
-            <a:ext cx="1143000" cy="566928"/>
-          </a:xfrm>
-          <a:prstGeom prst="roundRect">
-            <a:avLst>
-              <a:gd name="adj" fmla="val 12903"/>
-            </a:avLst>
-          </a:prstGeom>
-          <a:solidFill>
-            <a:schemeClr val="accent6"/>
-          </a:solidFill>
-          <a:ln w="6350">
-            <a:solidFill>
-              <a:schemeClr val="accent6"/>
-            </a:solidFill>
-          </a:ln>
-        </p:spPr>
-        <p:txBody>
-          <a:bodyPr wrap="square" lIns="762" tIns="762" rIns="762" bIns="762" rtlCol="0" anchor="ctr"/>
-          <a:lstStyle/>
-          <a:p>
-            <a:pPr algn="ctr" indent="0" marL="0">
-              <a:buNone/>
-            </a:pPr>
-            <a:r>
-              <a:rPr lang="en-US" sz="1300" b="1" dirty="0">
-                <a:solidFill>
-                  <a:schemeClr val="bg1"/>
-                </a:solidFill>
-              </a:rPr>
-              <a:t>执行路由</a:t>
-            </a:r>
-            <a:endParaRPr lang="en-US" sz="1300" dirty="0"/>
-          </a:p>
-        </p:txBody>
-      </p:sp>
-      <p:sp>
-        <p:nvSpPr>
-          <p:cNvPr id="29" name="arrow-193"/>
-          <p:cNvSpPr/>
-          <p:nvPr/>
-        </p:nvSpPr>
-        <p:spPr>
-          <a:xfrm flipV="1">
-            <a:off x="9250528" y="2587752"/>
-            <a:ext cx="320040" cy="292608"/>
-          </a:xfrm>
-          <a:prstGeom prst="line">
-            <a:avLst/>
-          </a:prstGeom>
-          <a:noFill/>
-          <a:ln w="19050">
-            <a:solidFill>
-              <a:schemeClr val="accent6"/>
-            </a:solidFill>
-            <a:prstDash val="solid"/>
-            <a:tailEnd type="triangle"/>
-          </a:ln>
-        </p:spPr>
-      </p:sp>
-      <p:sp>
-        <p:nvSpPr>
-          <p:cNvPr id="30" name="arrow-194"/>
-          <p:cNvSpPr/>
-          <p:nvPr/>
-        </p:nvSpPr>
-        <p:spPr>
-          <a:xfrm>
-            <a:off x="9250528" y="3081528"/>
-            <a:ext cx="320040" cy="301752"/>
-          </a:xfrm>
-          <a:prstGeom prst="line">
-            <a:avLst/>
-          </a:prstGeom>
-          <a:noFill/>
-          <a:ln w="19050">
-            <a:solidFill>
-              <a:schemeClr val="accent6"/>
-            </a:solidFill>
-            <a:prstDash val="solid"/>
-            <a:tailEnd type="triangle"/>
-          </a:ln>
-        </p:spPr>
-      </p:sp>
-      <p:sp>
-        <p:nvSpPr>
-          <p:cNvPr id="31" name="box-195"/>
-          <p:cNvSpPr/>
-          <p:nvPr/>
-        </p:nvSpPr>
-        <p:spPr>
-          <a:xfrm>
-            <a:off x="9570568" y="2377440"/>
-            <a:ext cx="1798168" cy="457200"/>
-          </a:xfrm>
-          <a:prstGeom prst="roundRect">
-            <a:avLst>
-              <a:gd name="adj" fmla="val 16000"/>
-            </a:avLst>
-          </a:prstGeom>
-          <a:solidFill>
-            <a:schemeClr val="bg1"/>
-          </a:solidFill>
-          <a:ln w="12700">
-            <a:solidFill>
-              <a:srgbClr val="D5DCE4"/>
-            </a:solidFill>
-          </a:ln>
-        </p:spPr>
-        <p:txBody>
-          <a:bodyPr wrap="square" lIns="762" tIns="762" rIns="762" bIns="762" rtlCol="0" anchor="ctr"/>
-          <a:lstStyle/>
-          <a:p>
-            <a:pPr algn="ctr" indent="0" marL="0">
-              <a:buNone/>
-            </a:pPr>
-            <a:r>
-              <a:rPr lang="en-US" sz="1200" dirty="0">
-                <a:solidFill>
-                  <a:schemeClr val="tx2"/>
-                </a:solidFill>
-              </a:rPr>
-              <a:t>模型 API · 按调用计费</a:t>
-            </a:r>
-            <a:endParaRPr lang="en-US" sz="1200" dirty="0"/>
-          </a:p>
-        </p:txBody>
-      </p:sp>
-      <p:sp>
-        <p:nvSpPr>
-          <p:cNvPr id="32" name="box-196"/>
-          <p:cNvSpPr/>
-          <p:nvPr/>
-        </p:nvSpPr>
-        <p:spPr>
-          <a:xfrm>
-            <a:off x="9570568" y="3154680"/>
-            <a:ext cx="1798168" cy="457200"/>
-          </a:xfrm>
-          <a:prstGeom prst="roundRect">
-            <a:avLst>
-              <a:gd name="adj" fmla="val 16000"/>
-            </a:avLst>
-          </a:prstGeom>
-          <a:solidFill>
-            <a:schemeClr val="accent3"/>
-          </a:solidFill>
-          <a:ln w="6350">
-            <a:solidFill>
-              <a:schemeClr val="accent3"/>
-            </a:solidFill>
-          </a:ln>
-        </p:spPr>
-        <p:txBody>
-          <a:bodyPr wrap="square" lIns="762" tIns="762" rIns="762" bIns="762" rtlCol="0" anchor="ctr"/>
-          <a:lstStyle/>
-          <a:p>
-            <a:pPr algn="ctr" indent="0" marL="0">
-              <a:buNone/>
-            </a:pPr>
-            <a:r>
-              <a:rPr lang="en-US" sz="1200" b="1" dirty="0">
-                <a:solidFill>
-                  <a:schemeClr val="bg1"/>
-                </a:solidFill>
-              </a:rPr>
-              <a:t>本地 CLI · 用已有订阅</a:t>
-            </a:r>
-            <a:endParaRPr lang="en-US" sz="1200" dirty="0"/>
-          </a:p>
-        </p:txBody>
-      </p:sp>
-      <p:sp>
-        <p:nvSpPr>
-          <p:cNvPr id="33" name="bullets-197"/>
-          <p:cNvSpPr txBox="1"/>
-          <p:nvPr/>
-        </p:nvSpPr>
-        <p:spPr>
-          <a:xfrm>
-            <a:off x="6507328" y="3886200"/>
-            <a:ext cx="4861408" cy="1828800"/>
-          </a:xfrm>
-          <a:prstGeom prst="rect">
-            <a:avLst/>
-          </a:prstGeom>
-          <a:noFill/>
-          <a:ln/>
-        </p:spPr>
-        <p:txBody>
-          <a:bodyPr wrap="square" lIns="0" tIns="0" rIns="0" bIns="0" rtlCol="0" anchor="t"/>
-          <a:lstStyle/>
-          <a:p>
-            <a:pPr marL="177800" indent="-177800">
-              <a:spcAft>
-                <a:spcPts val="800"/>
-              </a:spcAft>
-              <a:buSzPct val="100000"/>
-              <a:buChar char="•"/>
-            </a:pPr>
-            <a:r>
-              <a:rPr lang="en-US" sz="1300" dirty="0">
-                <a:solidFill>
-                  <a:schemeClr val="tx1"/>
-                </a:solidFill>
-              </a:rPr>
-              <a:t>自动检测本机已登录的 26 种 AI 命令行工具（如 Codex、Claude Code）</a:t>
-            </a:r>
-            <a:endParaRPr lang="en-US" sz="1300" dirty="0"/>
-          </a:p>
-          <a:p>
-            <a:pPr marL="177800" indent="-177800">
-              <a:spcAft>
-                <a:spcPts val="800"/>
-              </a:spcAft>
-              <a:buSzPct val="100000"/>
-              <a:buChar char="•"/>
-            </a:pPr>
-            <a:r>
-              <a:rPr lang="en-US" sz="1300" dirty="0">
-                <a:solidFill>
-                  <a:schemeClr val="tx1"/>
-                </a:solidFill>
-              </a:rPr>
-              <a:t>每个会话独立配置目录，不混入日常使用记录</a:t>
-            </a:r>
-            <a:endParaRPr lang="en-US" sz="1300" dirty="0"/>
-          </a:p>
-          <a:p>
-            <a:pPr marL="177800" indent="-177800">
-              <a:spcAft>
-                <a:spcPts val="800"/>
-              </a:spcAft>
-              <a:buSzPct val="100000"/>
-              <a:buChar char="•"/>
-            </a:pPr>
-            <a:r>
-              <a:rPr lang="en-US" sz="1300" dirty="0">
-                <a:solidFill>
-                  <a:schemeClr val="tx1"/>
-                </a:solidFill>
-              </a:rPr>
-              <a:t>执行命令前先征得同意（Codex 全流程支持）；数据留在本机</a:t>
-            </a:r>
-            <a:endParaRPr lang="en-US" sz="1300" dirty="0"/>
-          </a:p>
-        </p:txBody>
-      </p:sp>
-      <p:sp>
-        <p:nvSpPr>
-          <p:cNvPr id="34" name="label-198"/>
-          <p:cNvSpPr txBox="1"/>
-          <p:nvPr/>
-        </p:nvSpPr>
-        <p:spPr>
-          <a:xfrm>
-            <a:off x="6507328" y="5532120"/>
-            <a:ext cx="4861408" cy="548640"/>
-          </a:xfrm>
-          <a:prstGeom prst="rect">
-            <a:avLst/>
-          </a:prstGeom>
-          <a:noFill/>
-          <a:ln/>
-        </p:spPr>
-        <p:txBody>
-          <a:bodyPr wrap="square" lIns="0" tIns="0" rIns="0" bIns="0" rtlCol="0" anchor="t"/>
-          <a:lstStyle/>
-          <a:p>
-            <a:pPr algn="l" indent="0" marL="0">
-              <a:buNone/>
-            </a:pPr>
-            <a:r>
-              <a:rPr lang="en-US" sz="1050" dirty="0">
-                <a:solidFill>
-                  <a:schemeClr val="accent6"/>
-                </a:solidFill>
-              </a:rPr>
-              <a:t>说明：Codex 走完整协议并支持审批；Claude Code 已验证会话隔离；其余工具为通用接入。使用前请确认订阅条款允许此类用法。</a:t>
+              <a:t>演示环境使用离线示例模型生成文字；文献为 PubMed 实时检索结果。</a:t>
             </a:r>
             <a:endParaRPr lang="en-US" sz="1050" dirty="0"/>
           </a:p>

--- a/docs/presentation/MedScience-3.0-设计汇报.pptx
+++ b/docs/presentation/MedScience-3.0-设计汇报.pptx
@@ -17,9 +17,10 @@
     <p:sldId id="265" r:id="rId11"/>
     <p:sldId id="266" r:id="rId12"/>
     <p:sldId id="267" r:id="rId13"/>
+    <p:sldId id="268" r:id="rId14"/>
   </p:sldIdLst>
   <p:notesMasterIdLst>
-    <p:notesMasterId r:id="rId14"/>
+    <p:notesMasterId r:id="rId15"/>
   </p:notesMasterIdLst>
   <p:sldSz cx="12192000" cy="6858000"/>
   <p:notesSz cx="6858000" cy="12192000"/>
@@ -118,18 +119,18 @@
   <p:extLst>
     <p:ext uri="{521415D9-36F7-43E2-AB2F-B90AF26B5E84}">
       <p14:sectionLst xmlns:p14="http://schemas.microsoft.com/office/powerpoint/2010/main">
-        <p14:section name="开篇" id="{7a0da286-fe3e-abcc-0e54-62a8f506efbc}">
+        <p14:section name="开篇" id="{ebc0d3f6-ec91-f90c-0e57-804fe9925a7b}">
           <p14:sldIdLst>
             <p14:sldId id="256"/>
           </p14:sldIdLst>
         </p14:section>
-        <p14:section name="为什么" id="{aae21bbf-86e6-8599-0fa2-e4c0dce84a70}">
+        <p14:section name="为什么" id="{2d036f6a-b4b4-4971-0396-274a0f775817}">
           <p14:sldIdLst>
             <p14:sldId id="257"/>
             <p14:sldId id="258"/>
           </p14:sldIdLst>
         </p14:section>
-        <p14:section name="怎么设计" id="{f94ac63b-b776-d9e5-5a8d-221ef88adb61}">
+        <p14:section name="怎么设计" id="{fd78fabd-657e-e495-6bd8-1e340af607fe}">
           <p14:sldIdLst>
             <p14:sldId id="259"/>
             <p14:sldId id="260"/>
@@ -138,16 +139,17 @@
             <p14:sldId id="263"/>
             <p14:sldId id="264"/>
             <p14:sldId id="265"/>
-          </p14:sldIdLst>
-        </p14:section>
-        <p14:section name="怎么用" id="{5b6584fd-1a9d-760c-7faf-e047fbd92c56}">
-          <p14:sldIdLst>
             <p14:sldId id="266"/>
           </p14:sldIdLst>
         </p14:section>
-        <p14:section name="下一步" id="{061760e7-e659-c7a0-d4b7-9cbcb178bac4}">
+        <p14:section name="怎么用" id="{ac40c178-c40f-489b-6f45-411acd977429}">
           <p14:sldIdLst>
             <p14:sldId id="267"/>
+          </p14:sldIdLst>
+        </p14:section>
+        <p14:section name="下一步" id="{2811433b-60de-5174-253e-1536469f4748}">
+          <p14:sldIdLst>
+            <p14:sldId id="268"/>
           </p14:sldIdLst>
         </p14:section>
       </p14:sectionLst>
@@ -642,7 +644,7 @@
           <a:p>
             <a:r>
               <a:rPr lang="en-US" dirty="0"/>
-              <a:t>C 类设计是本地运行时，直接用已有 AI 订阅。很多团队已经买了 ChatGPT（Codex）或 Claude 的订阅，MedScience 可以直接调用本机已登录的命令行工具，沿用现有额度，不需要另付 API 费用；同时科研与临床数据留在本机，原始病历与影像在本机沙盒内处理，外发需要授权。右边是真实截图：运行时页面自动检测到了本机的 Claude Code。需要说明：除 Codex 和 Claude Code 外，其余工具是通用接入，并请确认订阅条款允许这样使用。</a:t>
+              <a:t>B 类设计是多智能体协作，像课题组一样分工。队长（PI）把课题拆成有依赖的任务，可以要求先审批计划；领域专家成员并行执行，交接时每条发现都必须附证据编号；质量门由规则检查和科研审查员组成，工具失败不算“阴性结果”；最后由写作专家综合成文。系统内置 26 位领域专家角色、15 个团队模板，也可以用 @ 直接点名某位专家。这部分在 2.x 已经具备，3.0 继续完善。</a:t>
             </a:r>
             <a:endParaRPr lang="en-US" dirty="0"/>
           </a:p>
@@ -730,7 +732,7 @@
           <a:p>
             <a:r>
               <a:rPr lang="en-US" dirty="0"/>
-              <a:t>四步即可：安装、配置运行时、提问、查看证据。左图是运行时自动检测到本机的 Claude Code；中间是用 @ 点名专家，以及智能体调用工具的记录；右图是 3.0 的证据页，每条证据的来源和状态都能查到。截图都来自真实运行的 3.0 应用。</a:t>
+              <a:t>C 类设计是本地运行时，直接用已有 AI 订阅。很多团队已经买了 ChatGPT（Codex）或 Claude 的订阅，MedScience 可以直接调用本机已登录的命令行工具，沿用现有额度，不需要另付 API 费用；同时科研与临床数据留在本机，原始病历与影像在本机沙盒内处理，外发需要授权。右边是真实截图：运行时页面自动检测到了本机的 Claude Code。需要说明：除 Codex 和 Claude Code 外，其余工具是通用接入，并请确认订阅条款允许这样使用。</a:t>
             </a:r>
             <a:endParaRPr lang="en-US" dirty="0"/>
           </a:p>
@@ -818,7 +820,7 @@
           <a:p>
             <a:r>
               <a:rPr lang="en-US" dirty="0"/>
-              <a:t>最后是进展和请求。B、C 两类设计已经落地并发布。A 类三个设计中，时间证据状态机已有原型：3.0 的证据账本实现了依赖级联和撤稿扫描，并用真实案例写成了自动化测试，下一步要把状态对齐为 supported、contested、refuted、expired 四种，并接入试验终止、安全信号等事件源；临床试验等价类聚合和矛盾优先主动验证还在设计中。下一步是实现这三个设计，并用公开结局做无人工标注的评测；同时在结论不确定的问题上复核同源影响。结果稳定后发布正式版，并整理成论文。</a:t>
+              <a:t>四步即可：安装、配置运行时、提问、查看证据。左图是运行时自动检测到本机的 Claude Code；中间是用 @ 点名专家，以及智能体调用工具的记录；右图是 3.0 的证据页，每条证据的来源和状态都能查到。截图都来自真实运行的 3.0 应用。</a:t>
             </a:r>
             <a:endParaRPr lang="en-US" dirty="0"/>
           </a:p>
@@ -842,6 +844,94 @@
             <a:fld id="{F7021451-1387-4CA6-816F-3879F97B5CBC}" type="slidenum">
               <a:rPr lang="en-US"/>
               <a:t>12</a:t>
+            </a:fld>
+            <a:endParaRPr lang="en-US"/>
+          </a:p>
+        </p:txBody>
+      </p:sp>
+    </p:spTree>
+    <p:extLst>
+      <p:ext uri="{BB962C8B-B14F-4D97-AF65-F5344CB8AC3E}">
+        <p14:creationId xmlns:p14="http://schemas.microsoft.com/office/powerpoint/2010/main" val="1024086991"/>
+      </p:ext>
+    </p:extLst>
+  </p:cSld>
+  <p:clrMapOvr>
+    <a:masterClrMapping/>
+  </p:clrMapOvr>
+</p:notes>
+</file>
+
+<file path=ppt/notesSlides/notesSlide13.xml><?xml version="1.0" encoding="utf-8"?>
+<p:notes xmlns:a="http://schemas.openxmlformats.org/drawingml/2006/main" xmlns:r="http://schemas.openxmlformats.org/officeDocument/2006/relationships" xmlns:p="http://schemas.openxmlformats.org/presentationml/2006/main">
+  <p:cSld>
+    <p:spTree>
+      <p:nvGrpSpPr>
+        <p:cNvPr id="1" name=""/>
+        <p:cNvGrpSpPr/>
+        <p:nvPr/>
+      </p:nvGrpSpPr>
+      <p:grpSpPr>
+        <a:xfrm>
+          <a:off x="0" y="0"/>
+          <a:ext cx="0" cy="0"/>
+          <a:chOff x="0" y="0"/>
+          <a:chExt cx="0" cy="0"/>
+        </a:xfrm>
+      </p:grpSpPr>
+      <p:sp>
+        <p:nvSpPr>
+          <p:cNvPr id="2" name="Slide Image Placeholder 1"/>
+          <p:cNvSpPr>
+            <a:spLocks noGrp="1" noRot="1" noChangeAspect="1"/>
+          </p:cNvSpPr>
+          <p:nvPr>
+            <p:ph type="sldImg"/>
+          </p:nvPr>
+        </p:nvSpPr>
+        <p:spPr/>
+      </p:sp>
+      <p:sp>
+        <p:nvSpPr>
+          <p:cNvPr id="3" name="Notes Placeholder 2"/>
+          <p:cNvSpPr>
+            <a:spLocks noGrp="1"/>
+          </p:cNvSpPr>
+          <p:nvPr>
+            <p:ph type="body" idx="1"/>
+          </p:nvPr>
+        </p:nvSpPr>
+        <p:spPr/>
+        <p:txBody>
+          <a:bodyPr/>
+          <a:lstStyle/>
+          <a:p>
+            <a:r>
+              <a:rPr lang="en-US" dirty="0"/>
+              <a:t>最后是进展和请求。B、C 两类设计已经落地并发布。A 类三个设计中，时间证据状态机已有原型：3.0 的证据账本实现了依赖级联和撤稿扫描，并用真实案例写成了自动化测试，下一步要把状态对齐为 supported、contested、refuted、expired 四种，并接入试验终止、安全信号等事件源；临床试验等价类聚合和矛盾优先主动验证还在设计中。下一步是实现这三个设计，并用公开结局做无人工标注的评测；同时在结论不确定的问题上复核同源影响。结果稳定后发布正式版，并整理成论文。</a:t>
+            </a:r>
+            <a:endParaRPr lang="en-US" dirty="0"/>
+          </a:p>
+        </p:txBody>
+      </p:sp>
+      <p:sp>
+        <p:nvSpPr>
+          <p:cNvPr id="4" name="Slide Number Placeholder 3"/>
+          <p:cNvSpPr>
+            <a:spLocks noGrp="1"/>
+          </p:cNvSpPr>
+          <p:nvPr>
+            <p:ph type="sldNum" sz="quarter" idx="10"/>
+          </p:nvPr>
+        </p:nvSpPr>
+        <p:spPr/>
+        <p:txBody>
+          <a:bodyPr/>
+          <a:lstStyle/>
+          <a:p>
+            <a:fld id="{F7021451-1387-4CA6-816F-3879F97B5CBC}" type="slidenum">
+              <a:rPr lang="en-US"/>
+              <a:t>13</a:t>
             </a:fld>
             <a:endParaRPr lang="en-US"/>
           </a:p>
@@ -906,7 +996,7 @@
           <a:p>
             <a:r>
               <a:rPr lang="en-US" dirty="0"/>
-              <a:t>这一页给出全貌：问题是什么、我们怎么做、做到哪一步。后面按“为什么、怎么设计、怎么用、下一步”的顺序展开，共 12 页。</a:t>
+              <a:t>这一页给出全貌：问题是什么、我们怎么做、做到哪一步。后面按“为什么、怎么设计、怎么用、下一步”的顺序展开，共 13 页。</a:t>
             </a:r>
             <a:endParaRPr lang="en-US" dirty="0"/>
           </a:p>
@@ -1434,7 +1524,7 @@
           <a:p>
             <a:r>
               <a:rPr lang="en-US" dirty="0"/>
-              <a:t>第三个设计是矛盾优先主动验证。痛点是：普通检索智能体倾向于继续寻找支持性文献，很少主动寻找反证、失败复现或独立来源，容易形成确认偏差。设计上，在固定证据预算下，优先选择最可能改变当前结论的证据、与现有结论矛盾的证据、与已有来源最不依赖的证据，以及预期信息增益最高的证据。它不是简单选择“相关性最高”的论文，而是主动寻找最有可能改变决策的证据。以 Makena 为例：已有 Meis 试验支持，矛盾优先会主动去找最可能推翻它的确证试验 PROLONG。实现上，3.0 已有按预期信息增益排序的规划器原型，“矛盾优先”和“来源独立性”两个排序因素是新增的设计。</a:t>
+              <a:t>第三个设计是矛盾优先主动验证。痛点是：普通检索智能体倾向于继续寻找支持性文献，很少主动寻找反证、失败复现或独立来源，容易形成确认偏差。设计上，在固定证据预算下，优先选择最可能改变当前结论的证据、与现有结论矛盾的证据、与已有来源最不依赖的证据，以及预期信息增益最高的证据。它不是简单选择“相关性最高”的论文，而是主动寻找最有可能改变决策的证据。下一页用 CETP 抑制剂的真实例子说明。实现上，3.0 已有按预期信息增益排序的规划器原型，“矛盾优先”和“来源独立性”两个排序因素是新增的设计。</a:t>
             </a:r>
             <a:endParaRPr lang="en-US" dirty="0"/>
           </a:p>
@@ -1522,7 +1612,7 @@
           <a:p>
             <a:r>
               <a:rPr lang="en-US" dirty="0"/>
-              <a:t>B 类设计是多智能体协作，像课题组一样分工。队长（PI）把课题拆成有依赖的任务，可以要求先审批计划；领域专家成员并行执行，交接时每条发现都必须附证据编号；质量门由规则检查和科研审查员组成，工具失败不算“阴性结果”；最后由写作专家综合成文。系统内置 26 位领域专家角色、15 个团队模板，也可以用 @ 直接点名某位专家。这部分在 2.x 已经具备，3.0 继续完善。</a:t>
+              <a:t>这一页用一个真实例子说明矛盾优先主动验证。结论是：用 CETP 抑制剂升高“好胆固醇” HDL，可以降低心血管风险。只按相关性检索，看到的是大量 HDL 越高、风险越低的观察性研究，以及 CETP 抑制剂能大幅升高 HDL 的研究，看起来全都支持。按矛盾优先，会先去找四类证据：与结论矛盾的，是托彻普的 ILLUMINATE 试验，心血管事件和死亡反而增加；与已有来源最不依赖的，是孟德尔随机化研究，用基因数据检验，基因决定的 HDL 升高并不降低心肌梗死风险，这是独立于观察性研究的另一类证据；最可能改变结论的，是以临床硬终点为结局的大型随机试验；预期信息增益最高的，就是基因证据和硬终点试验，而不是再多一篇观察性研究。后来，一万两千多人的 ACCELERATE 试验因疗效不足终止，同类药物的 dal-OUTCOMES 试验也没有显示获益。要讲的一句话是：在 ACCELERATE 开始入组之前，这些反向证据都已经发表；只按相关性检索，它们会被淹没，矛盾优先会把它们放到决策者面前。注意，我们不说“用了系统就能避免这个试验”，那是无法证明的反事实。</a:t>
             </a:r>
             <a:endParaRPr lang="en-US" dirty="0"/>
           </a:p>
@@ -2459,7 +2549,7 @@
                   <a:schemeClr val="tx2"/>
                 </a:solidFill>
               </a:rPr>
-              <a:t>C 类设计：本地运行时：直接用已有 AI 订阅</a:t>
+              <a:t>B 类设计：多智能体协作：像课题组一样分工</a:t>
             </a:r>
             <a:endParaRPr lang="en-US" sz="2800" dirty="0"/>
           </a:p>
@@ -2497,7 +2587,7 @@
                   <a:schemeClr val="accent6"/>
                 </a:solidFill>
               </a:rPr>
-              <a:t>C 类管“在哪里跑、用谁的额度”：科研与临床数据留在本机，复用已订阅的 AI 命令行工具。</a:t>
+              <a:t>B 类管“谁来做、谁把关”：像课题组一样，有人规划、有人执行、有人审查、有人成文。</a:t>
             </a:r>
             <a:endParaRPr lang="en-US" sz="1500" dirty="0"/>
           </a:p>
@@ -2505,18 +2595,514 @@
       </p:sp>
       <p:sp>
         <p:nvSpPr>
-          <p:cNvPr id="4" name="card-214"/>
-          <p:cNvSpPr/>
-          <p:nvPr/>
-        </p:nvSpPr>
-        <p:spPr>
-          <a:xfrm>
-            <a:off x="548640" y="1600200"/>
-            <a:ext cx="6035040" cy="4480560"/>
+          <p:cNvPr id="4" name="box-185"/>
+          <p:cNvSpPr/>
+          <p:nvPr/>
+        </p:nvSpPr>
+        <p:spPr>
+          <a:xfrm>
+            <a:off x="548640" y="1691640"/>
+            <a:ext cx="1962851" cy="685800"/>
           </a:xfrm>
           <a:prstGeom prst="roundRect">
             <a:avLst>
-              <a:gd name="adj" fmla="val 2041"/>
+              <a:gd name="adj" fmla="val 10667"/>
+            </a:avLst>
+          </a:prstGeom>
+          <a:solidFill>
+            <a:srgbClr val="F2F5F8"/>
+          </a:solidFill>
+          <a:ln w="6350">
+            <a:solidFill>
+              <a:srgbClr val="F2F5F8"/>
+            </a:solidFill>
+          </a:ln>
+        </p:spPr>
+        <p:txBody>
+          <a:bodyPr wrap="square" lIns="762" tIns="762" rIns="762" bIns="762" rtlCol="0" anchor="ctr"/>
+          <a:lstStyle/>
+          <a:p>
+            <a:pPr algn="ctr" indent="0" marL="0">
+              <a:buNone/>
+            </a:pPr>
+            <a:r>
+              <a:rPr lang="en-US" sz="1500" b="1" dirty="0">
+                <a:solidFill>
+                  <a:schemeClr val="tx2"/>
+                </a:solidFill>
+              </a:rPr>
+              <a:t>研究课题</a:t>
+            </a:r>
+            <a:endParaRPr lang="en-US" sz="1500" dirty="0"/>
+          </a:p>
+        </p:txBody>
+      </p:sp>
+      <p:sp>
+        <p:nvSpPr>
+          <p:cNvPr id="5" name="label-186"/>
+          <p:cNvSpPr txBox="1"/>
+          <p:nvPr/>
+        </p:nvSpPr>
+        <p:spPr>
+          <a:xfrm>
+            <a:off x="548640" y="2450592"/>
+            <a:ext cx="1962851" cy="274320"/>
+          </a:xfrm>
+          <a:prstGeom prst="rect">
+            <a:avLst/>
+          </a:prstGeom>
+          <a:noFill/>
+          <a:ln/>
+        </p:spPr>
+        <p:txBody>
+          <a:bodyPr wrap="square" lIns="0" tIns="0" rIns="0" bIns="0" rtlCol="0" anchor="t"/>
+          <a:lstStyle/>
+          <a:p>
+            <a:pPr algn="ctr" indent="0" marL="0">
+              <a:buNone/>
+            </a:pPr>
+            <a:r>
+              <a:rPr lang="en-US" sz="1150" dirty="0">
+                <a:solidFill>
+                  <a:schemeClr val="accent6"/>
+                </a:solidFill>
+              </a:rPr>
+              <a:t>用户提出</a:t>
+            </a:r>
+            <a:endParaRPr lang="en-US" sz="1150" dirty="0"/>
+          </a:p>
+        </p:txBody>
+      </p:sp>
+      <p:sp>
+        <p:nvSpPr>
+          <p:cNvPr id="6" name="arrow-187"/>
+          <p:cNvSpPr/>
+          <p:nvPr/>
+        </p:nvSpPr>
+        <p:spPr>
+          <a:xfrm>
+            <a:off x="2538923" y="2029968"/>
+            <a:ext cx="265176" cy="0"/>
+          </a:xfrm>
+          <a:prstGeom prst="line">
+            <a:avLst/>
+          </a:prstGeom>
+          <a:noFill/>
+          <a:ln w="19050">
+            <a:solidFill>
+              <a:schemeClr val="accent2"/>
+            </a:solidFill>
+            <a:prstDash val="solid"/>
+            <a:tailEnd type="triangle"/>
+          </a:ln>
+        </p:spPr>
+      </p:sp>
+      <p:sp>
+        <p:nvSpPr>
+          <p:cNvPr id="7" name="box-188"/>
+          <p:cNvSpPr/>
+          <p:nvPr/>
+        </p:nvSpPr>
+        <p:spPr>
+          <a:xfrm>
+            <a:off x="2831531" y="1691640"/>
+            <a:ext cx="1962851" cy="685800"/>
+          </a:xfrm>
+          <a:prstGeom prst="roundRect">
+            <a:avLst>
+              <a:gd name="adj" fmla="val 10667"/>
+            </a:avLst>
+          </a:prstGeom>
+          <a:solidFill>
+            <a:srgbClr val="F2F5F8"/>
+          </a:solidFill>
+          <a:ln w="6350">
+            <a:solidFill>
+              <a:srgbClr val="F2F5F8"/>
+            </a:solidFill>
+          </a:ln>
+        </p:spPr>
+        <p:txBody>
+          <a:bodyPr wrap="square" lIns="762" tIns="762" rIns="762" bIns="762" rtlCol="0" anchor="ctr"/>
+          <a:lstStyle/>
+          <a:p>
+            <a:pPr algn="ctr" indent="0" marL="0">
+              <a:buNone/>
+            </a:pPr>
+            <a:r>
+              <a:rPr lang="en-US" sz="1500" b="1" dirty="0">
+                <a:solidFill>
+                  <a:schemeClr val="tx2"/>
+                </a:solidFill>
+              </a:rPr>
+              <a:t>队长规划</a:t>
+            </a:r>
+            <a:endParaRPr lang="en-US" sz="1500" dirty="0"/>
+          </a:p>
+        </p:txBody>
+      </p:sp>
+      <p:sp>
+        <p:nvSpPr>
+          <p:cNvPr id="8" name="label-189"/>
+          <p:cNvSpPr txBox="1"/>
+          <p:nvPr/>
+        </p:nvSpPr>
+        <p:spPr>
+          <a:xfrm>
+            <a:off x="2831531" y="2450592"/>
+            <a:ext cx="1962851" cy="274320"/>
+          </a:xfrm>
+          <a:prstGeom prst="rect">
+            <a:avLst/>
+          </a:prstGeom>
+          <a:noFill/>
+          <a:ln/>
+        </p:spPr>
+        <p:txBody>
+          <a:bodyPr wrap="square" lIns="0" tIns="0" rIns="0" bIns="0" rtlCol="0" anchor="t"/>
+          <a:lstStyle/>
+          <a:p>
+            <a:pPr algn="ctr" indent="0" marL="0">
+              <a:buNone/>
+            </a:pPr>
+            <a:r>
+              <a:rPr lang="en-US" sz="1150" dirty="0">
+                <a:solidFill>
+                  <a:schemeClr val="accent6"/>
+                </a:solidFill>
+              </a:rPr>
+              <a:t>PI 拆解任务</a:t>
+            </a:r>
+            <a:endParaRPr lang="en-US" sz="1150" dirty="0"/>
+          </a:p>
+        </p:txBody>
+      </p:sp>
+      <p:sp>
+        <p:nvSpPr>
+          <p:cNvPr id="9" name="arrow-190"/>
+          <p:cNvSpPr/>
+          <p:nvPr/>
+        </p:nvSpPr>
+        <p:spPr>
+          <a:xfrm>
+            <a:off x="4821814" y="2029968"/>
+            <a:ext cx="265176" cy="0"/>
+          </a:xfrm>
+          <a:prstGeom prst="line">
+            <a:avLst/>
+          </a:prstGeom>
+          <a:noFill/>
+          <a:ln w="19050">
+            <a:solidFill>
+              <a:schemeClr val="accent2"/>
+            </a:solidFill>
+            <a:prstDash val="solid"/>
+            <a:tailEnd type="triangle"/>
+          </a:ln>
+        </p:spPr>
+      </p:sp>
+      <p:sp>
+        <p:nvSpPr>
+          <p:cNvPr id="10" name="box-191"/>
+          <p:cNvSpPr/>
+          <p:nvPr/>
+        </p:nvSpPr>
+        <p:spPr>
+          <a:xfrm>
+            <a:off x="5114422" y="1691640"/>
+            <a:ext cx="1962851" cy="685800"/>
+          </a:xfrm>
+          <a:prstGeom prst="roundRect">
+            <a:avLst>
+              <a:gd name="adj" fmla="val 10667"/>
+            </a:avLst>
+          </a:prstGeom>
+          <a:solidFill>
+            <a:srgbClr val="F2F5F8"/>
+          </a:solidFill>
+          <a:ln w="6350">
+            <a:solidFill>
+              <a:srgbClr val="F2F5F8"/>
+            </a:solidFill>
+          </a:ln>
+        </p:spPr>
+        <p:txBody>
+          <a:bodyPr wrap="square" lIns="762" tIns="762" rIns="762" bIns="762" rtlCol="0" anchor="ctr"/>
+          <a:lstStyle/>
+          <a:p>
+            <a:pPr algn="ctr" indent="0" marL="0">
+              <a:buNone/>
+            </a:pPr>
+            <a:r>
+              <a:rPr lang="en-US" sz="1500" b="1" dirty="0">
+                <a:solidFill>
+                  <a:schemeClr val="tx2"/>
+                </a:solidFill>
+              </a:rPr>
+              <a:t>成员并行</a:t>
+            </a:r>
+            <a:endParaRPr lang="en-US" sz="1500" dirty="0"/>
+          </a:p>
+        </p:txBody>
+      </p:sp>
+      <p:sp>
+        <p:nvSpPr>
+          <p:cNvPr id="11" name="label-192"/>
+          <p:cNvSpPr txBox="1"/>
+          <p:nvPr/>
+        </p:nvSpPr>
+        <p:spPr>
+          <a:xfrm>
+            <a:off x="5114422" y="2450592"/>
+            <a:ext cx="1962851" cy="274320"/>
+          </a:xfrm>
+          <a:prstGeom prst="rect">
+            <a:avLst/>
+          </a:prstGeom>
+          <a:noFill/>
+          <a:ln/>
+        </p:spPr>
+        <p:txBody>
+          <a:bodyPr wrap="square" lIns="0" tIns="0" rIns="0" bIns="0" rtlCol="0" anchor="t"/>
+          <a:lstStyle/>
+          <a:p>
+            <a:pPr algn="ctr" indent="0" marL="0">
+              <a:buNone/>
+            </a:pPr>
+            <a:r>
+              <a:rPr lang="en-US" sz="1150" dirty="0">
+                <a:solidFill>
+                  <a:schemeClr val="accent6"/>
+                </a:solidFill>
+              </a:rPr>
+              <a:t>领域专家执行</a:t>
+            </a:r>
+            <a:endParaRPr lang="en-US" sz="1150" dirty="0"/>
+          </a:p>
+        </p:txBody>
+      </p:sp>
+      <p:sp>
+        <p:nvSpPr>
+          <p:cNvPr id="12" name="arrow-193"/>
+          <p:cNvSpPr/>
+          <p:nvPr/>
+        </p:nvSpPr>
+        <p:spPr>
+          <a:xfrm>
+            <a:off x="7104705" y="2029968"/>
+            <a:ext cx="265176" cy="0"/>
+          </a:xfrm>
+          <a:prstGeom prst="line">
+            <a:avLst/>
+          </a:prstGeom>
+          <a:noFill/>
+          <a:ln w="19050">
+            <a:solidFill>
+              <a:schemeClr val="accent2"/>
+            </a:solidFill>
+            <a:prstDash val="solid"/>
+            <a:tailEnd type="triangle"/>
+          </a:ln>
+        </p:spPr>
+      </p:sp>
+      <p:sp>
+        <p:nvSpPr>
+          <p:cNvPr id="13" name="box-194"/>
+          <p:cNvSpPr/>
+          <p:nvPr/>
+        </p:nvSpPr>
+        <p:spPr>
+          <a:xfrm>
+            <a:off x="7397313" y="1691640"/>
+            <a:ext cx="1962851" cy="685800"/>
+          </a:xfrm>
+          <a:prstGeom prst="roundRect">
+            <a:avLst>
+              <a:gd name="adj" fmla="val 10667"/>
+            </a:avLst>
+          </a:prstGeom>
+          <a:solidFill>
+            <a:srgbClr val="E3F3F1"/>
+          </a:solidFill>
+          <a:ln w="12700">
+            <a:solidFill>
+              <a:srgbClr val="0E8A7E"/>
+            </a:solidFill>
+          </a:ln>
+        </p:spPr>
+        <p:txBody>
+          <a:bodyPr wrap="square" lIns="762" tIns="762" rIns="762" bIns="762" rtlCol="0" anchor="ctr"/>
+          <a:lstStyle/>
+          <a:p>
+            <a:pPr algn="ctr" indent="0" marL="0">
+              <a:buNone/>
+            </a:pPr>
+            <a:r>
+              <a:rPr lang="en-US" sz="1500" b="1" dirty="0">
+                <a:solidFill>
+                  <a:schemeClr val="tx2"/>
+                </a:solidFill>
+              </a:rPr>
+              <a:t>质量门</a:t>
+            </a:r>
+            <a:endParaRPr lang="en-US" sz="1500" dirty="0"/>
+          </a:p>
+        </p:txBody>
+      </p:sp>
+      <p:sp>
+        <p:nvSpPr>
+          <p:cNvPr id="14" name="label-195"/>
+          <p:cNvSpPr txBox="1"/>
+          <p:nvPr/>
+        </p:nvSpPr>
+        <p:spPr>
+          <a:xfrm>
+            <a:off x="7397313" y="2450592"/>
+            <a:ext cx="1962851" cy="274320"/>
+          </a:xfrm>
+          <a:prstGeom prst="rect">
+            <a:avLst/>
+          </a:prstGeom>
+          <a:noFill/>
+          <a:ln/>
+        </p:spPr>
+        <p:txBody>
+          <a:bodyPr wrap="square" lIns="0" tIns="0" rIns="0" bIns="0" rtlCol="0" anchor="t"/>
+          <a:lstStyle/>
+          <a:p>
+            <a:pPr algn="ctr" indent="0" marL="0">
+              <a:buNone/>
+            </a:pPr>
+            <a:r>
+              <a:rPr lang="en-US" sz="1150" dirty="0">
+                <a:solidFill>
+                  <a:schemeClr val="accent6"/>
+                </a:solidFill>
+              </a:rPr>
+              <a:t>规则 + 审查员</a:t>
+            </a:r>
+            <a:endParaRPr lang="en-US" sz="1150" dirty="0"/>
+          </a:p>
+        </p:txBody>
+      </p:sp>
+      <p:sp>
+        <p:nvSpPr>
+          <p:cNvPr id="15" name="arrow-196"/>
+          <p:cNvSpPr/>
+          <p:nvPr/>
+        </p:nvSpPr>
+        <p:spPr>
+          <a:xfrm>
+            <a:off x="9387596" y="2029968"/>
+            <a:ext cx="265176" cy="0"/>
+          </a:xfrm>
+          <a:prstGeom prst="line">
+            <a:avLst/>
+          </a:prstGeom>
+          <a:noFill/>
+          <a:ln w="19050">
+            <a:solidFill>
+              <a:schemeClr val="accent2"/>
+            </a:solidFill>
+            <a:prstDash val="solid"/>
+            <a:tailEnd type="triangle"/>
+          </a:ln>
+        </p:spPr>
+      </p:sp>
+      <p:sp>
+        <p:nvSpPr>
+          <p:cNvPr id="16" name="box-197"/>
+          <p:cNvSpPr/>
+          <p:nvPr/>
+        </p:nvSpPr>
+        <p:spPr>
+          <a:xfrm>
+            <a:off x="9680204" y="1691640"/>
+            <a:ext cx="1962851" cy="685800"/>
+          </a:xfrm>
+          <a:prstGeom prst="roundRect">
+            <a:avLst>
+              <a:gd name="adj" fmla="val 10667"/>
+            </a:avLst>
+          </a:prstGeom>
+          <a:solidFill>
+            <a:srgbClr val="F2F5F8"/>
+          </a:solidFill>
+          <a:ln w="6350">
+            <a:solidFill>
+              <a:srgbClr val="F2F5F8"/>
+            </a:solidFill>
+          </a:ln>
+        </p:spPr>
+        <p:txBody>
+          <a:bodyPr wrap="square" lIns="762" tIns="762" rIns="762" bIns="762" rtlCol="0" anchor="ctr"/>
+          <a:lstStyle/>
+          <a:p>
+            <a:pPr algn="ctr" indent="0" marL="0">
+              <a:buNone/>
+            </a:pPr>
+            <a:r>
+              <a:rPr lang="en-US" sz="1500" b="1" dirty="0">
+                <a:solidFill>
+                  <a:schemeClr val="tx2"/>
+                </a:solidFill>
+              </a:rPr>
+              <a:t>综合报告</a:t>
+            </a:r>
+            <a:endParaRPr lang="en-US" sz="1500" dirty="0"/>
+          </a:p>
+        </p:txBody>
+      </p:sp>
+      <p:sp>
+        <p:nvSpPr>
+          <p:cNvPr id="17" name="label-198"/>
+          <p:cNvSpPr txBox="1"/>
+          <p:nvPr/>
+        </p:nvSpPr>
+        <p:spPr>
+          <a:xfrm>
+            <a:off x="9680204" y="2450592"/>
+            <a:ext cx="1962851" cy="274320"/>
+          </a:xfrm>
+          <a:prstGeom prst="rect">
+            <a:avLst/>
+          </a:prstGeom>
+          <a:noFill/>
+          <a:ln/>
+        </p:spPr>
+        <p:txBody>
+          <a:bodyPr wrap="square" lIns="0" tIns="0" rIns="0" bIns="0" rtlCol="0" anchor="t"/>
+          <a:lstStyle/>
+          <a:p>
+            <a:pPr algn="ctr" indent="0" marL="0">
+              <a:buNone/>
+            </a:pPr>
+            <a:r>
+              <a:rPr lang="en-US" sz="1150" dirty="0">
+                <a:solidFill>
+                  <a:schemeClr val="accent6"/>
+                </a:solidFill>
+              </a:rPr>
+              <a:t>写作专家成文</a:t>
+            </a:r>
+            <a:endParaRPr lang="en-US" sz="1150" dirty="0"/>
+          </a:p>
+        </p:txBody>
+      </p:sp>
+      <p:sp>
+        <p:nvSpPr>
+          <p:cNvPr id="18" name="card-199"/>
+          <p:cNvSpPr/>
+          <p:nvPr/>
+        </p:nvSpPr>
+        <p:spPr>
+          <a:xfrm>
+            <a:off x="548640" y="2971800"/>
+            <a:ext cx="2602154" cy="1965960"/>
+          </a:xfrm>
+          <a:prstGeom prst="roundRect">
+            <a:avLst>
+              <a:gd name="adj" fmla="val 4651"/>
             </a:avLst>
           </a:prstGeom>
           <a:solidFill>
@@ -2532,428 +3118,140 @@
       </p:sp>
       <p:sp>
         <p:nvSpPr>
-          <p:cNvPr id="5" name="box-215"/>
-          <p:cNvSpPr/>
-          <p:nvPr/>
-        </p:nvSpPr>
-        <p:spPr>
-          <a:xfrm>
-            <a:off x="822960" y="2148840"/>
-            <a:ext cx="1463040" cy="640080"/>
+          <p:cNvPr id="19" name="badge-200"/>
+          <p:cNvSpPr/>
+          <p:nvPr/>
+        </p:nvSpPr>
+        <p:spPr>
+          <a:xfrm>
+            <a:off x="777240" y="3154680"/>
+            <a:ext cx="365760" cy="365760"/>
+          </a:xfrm>
+          <a:prstGeom prst="ellipse">
+            <a:avLst/>
+          </a:prstGeom>
+          <a:solidFill>
+            <a:schemeClr val="accent2"/>
+          </a:solidFill>
+          <a:ln>
+            <a:solidFill>
+              <a:schemeClr val="accent2"/>
+            </a:solidFill>
+          </a:ln>
+        </p:spPr>
+        <p:txBody>
+          <a:bodyPr wrap="square" lIns="0" tIns="0" rIns="0" bIns="0" rtlCol="0" anchor="ctr"/>
+          <a:lstStyle/>
+          <a:p>
+            <a:pPr algn="ctr" indent="0" marL="0">
+              <a:buNone/>
+            </a:pPr>
+            <a:r>
+              <a:rPr lang="en-US" sz="1400" b="1" dirty="0">
+                <a:solidFill>
+                  <a:schemeClr val="bg1"/>
+                </a:solidFill>
+              </a:rPr>
+              <a:t>1</a:t>
+            </a:r>
+            <a:endParaRPr lang="en-US" sz="1400" dirty="0"/>
+          </a:p>
+        </p:txBody>
+      </p:sp>
+      <p:sp>
+        <p:nvSpPr>
+          <p:cNvPr id="20" name="label-201"/>
+          <p:cNvSpPr txBox="1"/>
+          <p:nvPr/>
+        </p:nvSpPr>
+        <p:spPr>
+          <a:xfrm>
+            <a:off x="1234440" y="3136392"/>
+            <a:ext cx="1779194" cy="411480"/>
+          </a:xfrm>
+          <a:prstGeom prst="rect">
+            <a:avLst/>
+          </a:prstGeom>
+          <a:noFill/>
+          <a:ln/>
+        </p:spPr>
+        <p:txBody>
+          <a:bodyPr wrap="square" lIns="0" tIns="0" rIns="0" bIns="0" rtlCol="0" anchor="ctr"/>
+          <a:lstStyle/>
+          <a:p>
+            <a:pPr algn="l" indent="0" marL="0">
+              <a:buNone/>
+            </a:pPr>
+            <a:r>
+              <a:rPr lang="en-US" sz="1500" b="1" dirty="0">
+                <a:solidFill>
+                  <a:schemeClr val="tx2"/>
+                </a:solidFill>
+              </a:rPr>
+              <a:t>队长（PI）</a:t>
+            </a:r>
+            <a:endParaRPr lang="en-US" sz="1500" dirty="0"/>
+          </a:p>
+        </p:txBody>
+      </p:sp>
+      <p:sp>
+        <p:nvSpPr>
+          <p:cNvPr id="21" name="label-202"/>
+          <p:cNvSpPr txBox="1"/>
+          <p:nvPr/>
+        </p:nvSpPr>
+        <p:spPr>
+          <a:xfrm>
+            <a:off x="777240" y="3657600"/>
+            <a:ext cx="2190674" cy="1188720"/>
+          </a:xfrm>
+          <a:prstGeom prst="rect">
+            <a:avLst/>
+          </a:prstGeom>
+          <a:noFill/>
+          <a:ln/>
+        </p:spPr>
+        <p:txBody>
+          <a:bodyPr wrap="square" lIns="0" tIns="0" rIns="0" bIns="0" rtlCol="0" anchor="t"/>
+          <a:lstStyle/>
+          <a:p>
+            <a:pPr algn="l" indent="0" marL="0">
+              <a:buNone/>
+            </a:pPr>
+            <a:r>
+              <a:rPr lang="en-US" sz="1250" dirty="0">
+                <a:solidFill>
+                  <a:schemeClr val="tx1"/>
+                </a:solidFill>
+              </a:rPr>
+              <a:t>把课题拆成有依赖的任务；可要求先审批计划，再开始执行。</a:t>
+            </a:r>
+            <a:endParaRPr lang="en-US" sz="1250" dirty="0"/>
+          </a:p>
+        </p:txBody>
+      </p:sp>
+      <p:sp>
+        <p:nvSpPr>
+          <p:cNvPr id="22" name="card-203"/>
+          <p:cNvSpPr/>
+          <p:nvPr/>
+        </p:nvSpPr>
+        <p:spPr>
+          <a:xfrm>
+            <a:off x="3379394" y="2971800"/>
+            <a:ext cx="2602154" cy="1965960"/>
           </a:xfrm>
           <a:prstGeom prst="roundRect">
             <a:avLst>
-              <a:gd name="adj" fmla="val 11429"/>
+              <a:gd name="adj" fmla="val 4651"/>
             </a:avLst>
           </a:prstGeom>
           <a:solidFill>
-            <a:schemeClr val="tx2"/>
-          </a:solidFill>
-          <a:ln w="6350">
-            <a:solidFill>
-              <a:schemeClr val="tx2"/>
-            </a:solidFill>
-          </a:ln>
-        </p:spPr>
-        <p:txBody>
-          <a:bodyPr wrap="square" lIns="762" tIns="762" rIns="762" bIns="762" rtlCol="0" anchor="ctr"/>
-          <a:lstStyle/>
-          <a:p>
-            <a:pPr algn="ctr" indent="0" marL="0">
-              <a:buNone/>
-            </a:pPr>
-            <a:r>
-              <a:rPr lang="en-US" sz="1400" b="1" dirty="0">
-                <a:solidFill>
-                  <a:schemeClr val="bg1"/>
-                </a:solidFill>
-              </a:rPr>
-              <a:t>研究请求</a:t>
-            </a:r>
-            <a:endParaRPr lang="en-US" sz="1400" dirty="0"/>
-          </a:p>
-        </p:txBody>
-      </p:sp>
-      <p:sp>
-        <p:nvSpPr>
-          <p:cNvPr id="6" name="arrow-216"/>
-          <p:cNvSpPr/>
-          <p:nvPr/>
-        </p:nvSpPr>
-        <p:spPr>
-          <a:xfrm>
-            <a:off x="2304288" y="2468880"/>
-            <a:ext cx="347472" cy="0"/>
-          </a:xfrm>
-          <a:prstGeom prst="line">
-            <a:avLst/>
-          </a:prstGeom>
-          <a:noFill/>
-          <a:ln w="19050">
-            <a:solidFill>
-              <a:schemeClr val="accent6"/>
-            </a:solidFill>
-            <a:prstDash val="solid"/>
-            <a:tailEnd type="triangle"/>
-          </a:ln>
-        </p:spPr>
-      </p:sp>
-      <p:sp>
-        <p:nvSpPr>
-          <p:cNvPr id="7" name="box-217"/>
-          <p:cNvSpPr/>
-          <p:nvPr/>
-        </p:nvSpPr>
-        <p:spPr>
-          <a:xfrm>
-            <a:off x="2651760" y="2148840"/>
-            <a:ext cx="1371600" cy="640080"/>
-          </a:xfrm>
-          <a:prstGeom prst="roundRect">
-            <a:avLst>
-              <a:gd name="adj" fmla="val 11429"/>
-            </a:avLst>
-          </a:prstGeom>
-          <a:solidFill>
-            <a:schemeClr val="accent6"/>
-          </a:solidFill>
-          <a:ln w="6350">
-            <a:solidFill>
-              <a:schemeClr val="accent6"/>
-            </a:solidFill>
-          </a:ln>
-        </p:spPr>
-        <p:txBody>
-          <a:bodyPr wrap="square" lIns="762" tIns="762" rIns="762" bIns="762" rtlCol="0" anchor="ctr"/>
-          <a:lstStyle/>
-          <a:p>
-            <a:pPr algn="ctr" indent="0" marL="0">
-              <a:buNone/>
-            </a:pPr>
-            <a:r>
-              <a:rPr lang="en-US" sz="1400" b="1" dirty="0">
-                <a:solidFill>
-                  <a:schemeClr val="bg1"/>
-                </a:solidFill>
-              </a:rPr>
-              <a:t>执行路由</a:t>
-            </a:r>
-            <a:endParaRPr lang="en-US" sz="1400" dirty="0"/>
-          </a:p>
-        </p:txBody>
-      </p:sp>
-      <p:sp>
-        <p:nvSpPr>
-          <p:cNvPr id="8" name="arrow-218"/>
-          <p:cNvSpPr/>
-          <p:nvPr/>
-        </p:nvSpPr>
-        <p:spPr>
-          <a:xfrm flipV="1">
-            <a:off x="4041648" y="1947672"/>
-            <a:ext cx="393192" cy="384048"/>
-          </a:xfrm>
-          <a:prstGeom prst="line">
-            <a:avLst/>
-          </a:prstGeom>
-          <a:noFill/>
-          <a:ln w="19050">
-            <a:solidFill>
-              <a:schemeClr val="accent6"/>
-            </a:solidFill>
-            <a:prstDash val="solid"/>
-            <a:tailEnd type="triangle"/>
-          </a:ln>
-        </p:spPr>
-      </p:sp>
-      <p:sp>
-        <p:nvSpPr>
-          <p:cNvPr id="9" name="arrow-219"/>
-          <p:cNvSpPr/>
-          <p:nvPr/>
-        </p:nvSpPr>
-        <p:spPr>
-          <a:xfrm>
-            <a:off x="4041648" y="2606040"/>
-            <a:ext cx="393192" cy="384048"/>
-          </a:xfrm>
-          <a:prstGeom prst="line">
-            <a:avLst/>
-          </a:prstGeom>
-          <a:noFill/>
-          <a:ln w="19050">
-            <a:solidFill>
-              <a:schemeClr val="accent6"/>
-            </a:solidFill>
-            <a:prstDash val="solid"/>
-            <a:tailEnd type="triangle"/>
-          </a:ln>
-        </p:spPr>
-      </p:sp>
-      <p:sp>
-        <p:nvSpPr>
-          <p:cNvPr id="10" name="box-220"/>
-          <p:cNvSpPr/>
-          <p:nvPr/>
-        </p:nvSpPr>
-        <p:spPr>
-          <a:xfrm>
-            <a:off x="4434840" y="1737360"/>
-            <a:ext cx="1874520" cy="457200"/>
-          </a:xfrm>
-          <a:prstGeom prst="roundRect">
-            <a:avLst>
-              <a:gd name="adj" fmla="val 16000"/>
-            </a:avLst>
-          </a:prstGeom>
-          <a:solidFill>
-            <a:schemeClr val="bg1"/>
+            <a:schemeClr val="bg2"/>
           </a:solidFill>
           <a:ln w="12700">
             <a:solidFill>
-              <a:srgbClr val="D5DCE4"/>
-            </a:solidFill>
-          </a:ln>
-        </p:spPr>
-        <p:txBody>
-          <a:bodyPr wrap="square" lIns="762" tIns="762" rIns="762" bIns="762" rtlCol="0" anchor="ctr"/>
-          <a:lstStyle/>
-          <a:p>
-            <a:pPr algn="ctr" indent="0" marL="0">
-              <a:buNone/>
-            </a:pPr>
-            <a:r>
-              <a:rPr lang="en-US" sz="1200" dirty="0">
-                <a:solidFill>
-                  <a:schemeClr val="tx2"/>
-                </a:solidFill>
-              </a:rPr>
-              <a:t>模型 API · 按调用计费</a:t>
-            </a:r>
-            <a:endParaRPr lang="en-US" sz="1200" dirty="0"/>
-          </a:p>
-        </p:txBody>
-      </p:sp>
-      <p:sp>
-        <p:nvSpPr>
-          <p:cNvPr id="11" name="box-221"/>
-          <p:cNvSpPr/>
-          <p:nvPr/>
-        </p:nvSpPr>
-        <p:spPr>
-          <a:xfrm>
-            <a:off x="4434840" y="2761488"/>
-            <a:ext cx="1874520" cy="457200"/>
-          </a:xfrm>
-          <a:prstGeom prst="roundRect">
-            <a:avLst>
-              <a:gd name="adj" fmla="val 16000"/>
-            </a:avLst>
-          </a:prstGeom>
-          <a:solidFill>
-            <a:schemeClr val="accent3"/>
-          </a:solidFill>
-          <a:ln w="6350">
-            <a:solidFill>
-              <a:schemeClr val="accent3"/>
-            </a:solidFill>
-          </a:ln>
-        </p:spPr>
-        <p:txBody>
-          <a:bodyPr wrap="square" lIns="762" tIns="762" rIns="762" bIns="762" rtlCol="0" anchor="ctr"/>
-          <a:lstStyle/>
-          <a:p>
-            <a:pPr algn="ctr" indent="0" marL="0">
-              <a:buNone/>
-            </a:pPr>
-            <a:r>
-              <a:rPr lang="en-US" sz="1200" b="1" dirty="0">
-                <a:solidFill>
-                  <a:schemeClr val="bg1"/>
-                </a:solidFill>
-              </a:rPr>
-              <a:t>本地 CLI · 用已有订阅</a:t>
-            </a:r>
-            <a:endParaRPr lang="en-US" sz="1200" dirty="0"/>
-          </a:p>
-        </p:txBody>
-      </p:sp>
-      <p:sp>
-        <p:nvSpPr>
-          <p:cNvPr id="12" name="bullets-222"/>
-          <p:cNvSpPr txBox="1"/>
-          <p:nvPr/>
-        </p:nvSpPr>
-        <p:spPr>
-          <a:xfrm>
-            <a:off x="822960" y="3520440"/>
-            <a:ext cx="5486400" cy="1828800"/>
-          </a:xfrm>
-          <a:prstGeom prst="rect">
-            <a:avLst/>
-          </a:prstGeom>
-          <a:noFill/>
-          <a:ln/>
-        </p:spPr>
-        <p:txBody>
-          <a:bodyPr wrap="square" lIns="0" tIns="0" rIns="0" bIns="0" rtlCol="0" anchor="t"/>
-          <a:lstStyle/>
-          <a:p>
-            <a:pPr marL="177800" indent="-177800">
-              <a:spcAft>
-                <a:spcPts val="800"/>
-              </a:spcAft>
-              <a:buSzPct val="100000"/>
-              <a:buChar char="•"/>
-            </a:pPr>
-            <a:r>
-              <a:rPr lang="en-US" sz="1300" dirty="0">
-                <a:solidFill>
-                  <a:schemeClr val="tx1"/>
-                </a:solidFill>
-              </a:rPr>
-              <a:t>自动检测本机已登录的 26 种 AI 命令行工具（如 Codex、Claude Code）</a:t>
-            </a:r>
-            <a:endParaRPr lang="en-US" sz="1300" dirty="0"/>
-          </a:p>
-          <a:p>
-            <a:pPr marL="177800" indent="-177800">
-              <a:spcAft>
-                <a:spcPts val="800"/>
-              </a:spcAft>
-              <a:buSzPct val="100000"/>
-              <a:buChar char="•"/>
-            </a:pPr>
-            <a:r>
-              <a:rPr lang="en-US" sz="1300" dirty="0">
-                <a:solidFill>
-                  <a:schemeClr val="tx1"/>
-                </a:solidFill>
-              </a:rPr>
-              <a:t>每个会话独立配置目录，不混入日常使用记录</a:t>
-            </a:r>
-            <a:endParaRPr lang="en-US" sz="1300" dirty="0"/>
-          </a:p>
-          <a:p>
-            <a:pPr marL="177800" indent="-177800">
-              <a:spcAft>
-                <a:spcPts val="800"/>
-              </a:spcAft>
-              <a:buSzPct val="100000"/>
-              <a:buChar char="•"/>
-            </a:pPr>
-            <a:r>
-              <a:rPr lang="en-US" sz="1300" dirty="0">
-                <a:solidFill>
-                  <a:schemeClr val="tx1"/>
-                </a:solidFill>
-              </a:rPr>
-              <a:t>执行命令前先征得同意（Codex 全流程支持）；数据留在本机</a:t>
-            </a:r>
-            <a:endParaRPr lang="en-US" sz="1300" dirty="0"/>
-          </a:p>
-          <a:p>
-            <a:pPr marL="177800" indent="-177800">
-              <a:spcAft>
-                <a:spcPts val="800"/>
-              </a:spcAft>
-              <a:buSzPct val="100000"/>
-              <a:buChar char="•"/>
-            </a:pPr>
-            <a:r>
-              <a:rPr lang="en-US" sz="1300" dirty="0">
-                <a:solidFill>
-                  <a:schemeClr val="tx1"/>
-                </a:solidFill>
-              </a:rPr>
-              <a:t>临床数据门：原始病历与影像在本机沙盒内处理，外发需授权</a:t>
-            </a:r>
-            <a:endParaRPr lang="en-US" sz="1300" dirty="0"/>
-          </a:p>
-        </p:txBody>
-      </p:sp>
-      <p:sp>
-        <p:nvSpPr>
-          <p:cNvPr id="13" name="label-223"/>
-          <p:cNvSpPr txBox="1"/>
-          <p:nvPr/>
-        </p:nvSpPr>
-        <p:spPr>
-          <a:xfrm>
-            <a:off x="822960" y="5440680"/>
-            <a:ext cx="5486400" cy="548640"/>
-          </a:xfrm>
-          <a:prstGeom prst="rect">
-            <a:avLst/>
-          </a:prstGeom>
-          <a:noFill/>
-          <a:ln/>
-        </p:spPr>
-        <p:txBody>
-          <a:bodyPr wrap="square" lIns="0" tIns="0" rIns="0" bIns="0" rtlCol="0" anchor="t"/>
-          <a:lstStyle/>
-          <a:p>
-            <a:pPr algn="l" indent="0" marL="0">
-              <a:buNone/>
-            </a:pPr>
-            <a:r>
-              <a:rPr lang="en-US" sz="1050" dirty="0">
-                <a:solidFill>
-                  <a:schemeClr val="accent6"/>
-                </a:solidFill>
-              </a:rPr>
-              <a:t>说明：Codex 走完整协议并支持审批；Claude Code 已验证会话隔离；其余工具为通用接入。使用前请确认订阅条款允许此类用法。</a:t>
-            </a:r>
-            <a:endParaRPr lang="en-US" sz="1050" dirty="0"/>
-          </a:p>
-        </p:txBody>
-      </p:sp>
-      <p:pic>
-        <p:nvPicPr>
-          <p:cNvPr id="14" name="screenshot-224" descr="运行时页面：自动检测到本机的 Claude Code">    </p:cNvPr>
-          <p:cNvPicPr>
-            <a:picLocks noChangeAspect="1"/>
-          </p:cNvPicPr>
-          <p:nvPr/>
-        </p:nvPicPr>
-        <p:blipFill>
-          <a:blip r:embed="rId1"/>
-          <a:stretch>
-            <a:fillRect/>
-          </a:stretch>
-        </p:blipFill>
-        <p:spPr>
-          <a:xfrm>
-            <a:off x="7249738" y="1600200"/>
-            <a:ext cx="4001579" cy="4160520"/>
-          </a:xfrm>
-          <a:prstGeom prst="rect">
-            <a:avLst/>
-          </a:prstGeom>
-        </p:spPr>
-      </p:pic>
-      <p:sp>
-        <p:nvSpPr>
-          <p:cNvPr id="15" name="frame-225"/>
-          <p:cNvSpPr/>
-          <p:nvPr/>
-        </p:nvSpPr>
-        <p:spPr>
-          <a:xfrm>
-            <a:off x="7249738" y="1600200"/>
-            <a:ext cx="4001579" cy="4160520"/>
-          </a:xfrm>
-          <a:prstGeom prst="rect">
-            <a:avLst/>
-          </a:prstGeom>
-          <a:solidFill>
-            <a:srgbClr val="FFFFFF">
-              <a:alpha val="0"/>
-            </a:srgbClr>
-          </a:solidFill>
-          <a:ln w="9525">
-            <a:solidFill>
-              <a:srgbClr val="D5DCE4"/>
+              <a:schemeClr val="bg2"/>
             </a:solidFill>
             <a:prstDash val="solid"/>
           </a:ln>
@@ -2961,14 +3259,56 @@
       </p:sp>
       <p:sp>
         <p:nvSpPr>
-          <p:cNvPr id="16" name="label-226"/>
+          <p:cNvPr id="23" name="badge-204"/>
+          <p:cNvSpPr/>
+          <p:nvPr/>
+        </p:nvSpPr>
+        <p:spPr>
+          <a:xfrm>
+            <a:off x="3607994" y="3154680"/>
+            <a:ext cx="365760" cy="365760"/>
+          </a:xfrm>
+          <a:prstGeom prst="ellipse">
+            <a:avLst/>
+          </a:prstGeom>
+          <a:solidFill>
+            <a:schemeClr val="accent2"/>
+          </a:solidFill>
+          <a:ln>
+            <a:solidFill>
+              <a:schemeClr val="accent2"/>
+            </a:solidFill>
+          </a:ln>
+        </p:spPr>
+        <p:txBody>
+          <a:bodyPr wrap="square" lIns="0" tIns="0" rIns="0" bIns="0" rtlCol="0" anchor="ctr"/>
+          <a:lstStyle/>
+          <a:p>
+            <a:pPr algn="ctr" indent="0" marL="0">
+              <a:buNone/>
+            </a:pPr>
+            <a:r>
+              <a:rPr lang="en-US" sz="1400" b="1" dirty="0">
+                <a:solidFill>
+                  <a:schemeClr val="bg1"/>
+                </a:solidFill>
+              </a:rPr>
+              <a:t>2</a:t>
+            </a:r>
+            <a:endParaRPr lang="en-US" sz="1400" dirty="0"/>
+          </a:p>
+        </p:txBody>
+      </p:sp>
+      <p:sp>
+        <p:nvSpPr>
+          <p:cNvPr id="24" name="label-205"/>
           <p:cNvSpPr txBox="1"/>
           <p:nvPr/>
         </p:nvSpPr>
         <p:spPr>
           <a:xfrm>
-            <a:off x="7249738" y="5833872"/>
-            <a:ext cx="4001579" cy="292608"/>
+            <a:off x="4065194" y="3136392"/>
+            <a:ext cx="1779194" cy="411480"/>
           </a:xfrm>
           <a:prstGeom prst="rect">
             <a:avLst/>
@@ -2977,27 +3317,561 @@
           <a:ln/>
         </p:spPr>
         <p:txBody>
+          <a:bodyPr wrap="square" lIns="0" tIns="0" rIns="0" bIns="0" rtlCol="0" anchor="ctr"/>
+          <a:lstStyle/>
+          <a:p>
+            <a:pPr algn="l" indent="0" marL="0">
+              <a:buNone/>
+            </a:pPr>
+            <a:r>
+              <a:rPr lang="en-US" sz="1500" b="1" dirty="0">
+                <a:solidFill>
+                  <a:schemeClr val="tx2"/>
+                </a:solidFill>
+              </a:rPr>
+              <a:t>领域专家成员</a:t>
+            </a:r>
+            <a:endParaRPr lang="en-US" sz="1500" dirty="0"/>
+          </a:p>
+        </p:txBody>
+      </p:sp>
+      <p:sp>
+        <p:nvSpPr>
+          <p:cNvPr id="25" name="label-206"/>
+          <p:cNvSpPr txBox="1"/>
+          <p:nvPr/>
+        </p:nvSpPr>
+        <p:spPr>
+          <a:xfrm>
+            <a:off x="3607994" y="3657600"/>
+            <a:ext cx="2190674" cy="1188720"/>
+          </a:xfrm>
+          <a:prstGeom prst="rect">
+            <a:avLst/>
+          </a:prstGeom>
+          <a:noFill/>
+          <a:ln/>
+        </p:spPr>
+        <p:txBody>
           <a:bodyPr wrap="square" lIns="0" tIns="0" rIns="0" bIns="0" rtlCol="0" anchor="t"/>
           <a:lstStyle/>
           <a:p>
+            <a:pPr algn="l" indent="0" marL="0">
+              <a:buNone/>
+            </a:pPr>
+            <a:r>
+              <a:rPr lang="en-US" sz="1250" dirty="0">
+                <a:solidFill>
+                  <a:schemeClr val="tx1"/>
+                </a:solidFill>
+              </a:rPr>
+              <a:t>26 位领域专家角色并行工作；交接时每条发现都必须附证据编号。</a:t>
+            </a:r>
+            <a:endParaRPr lang="en-US" sz="1250" dirty="0"/>
+          </a:p>
+        </p:txBody>
+      </p:sp>
+      <p:sp>
+        <p:nvSpPr>
+          <p:cNvPr id="26" name="card-207"/>
+          <p:cNvSpPr/>
+          <p:nvPr/>
+        </p:nvSpPr>
+        <p:spPr>
+          <a:xfrm>
+            <a:off x="6210148" y="2971800"/>
+            <a:ext cx="2602154" cy="1965960"/>
+          </a:xfrm>
+          <a:prstGeom prst="roundRect">
+            <a:avLst>
+              <a:gd name="adj" fmla="val 4651"/>
+            </a:avLst>
+          </a:prstGeom>
+          <a:solidFill>
+            <a:schemeClr val="bg2"/>
+          </a:solidFill>
+          <a:ln w="12700">
+            <a:solidFill>
+              <a:schemeClr val="bg2"/>
+            </a:solidFill>
+            <a:prstDash val="solid"/>
+          </a:ln>
+        </p:spPr>
+      </p:sp>
+      <p:sp>
+        <p:nvSpPr>
+          <p:cNvPr id="27" name="badge-208"/>
+          <p:cNvSpPr/>
+          <p:nvPr/>
+        </p:nvSpPr>
+        <p:spPr>
+          <a:xfrm>
+            <a:off x="6438748" y="3154680"/>
+            <a:ext cx="365760" cy="365760"/>
+          </a:xfrm>
+          <a:prstGeom prst="ellipse">
+            <a:avLst/>
+          </a:prstGeom>
+          <a:solidFill>
+            <a:schemeClr val="accent2"/>
+          </a:solidFill>
+          <a:ln>
+            <a:solidFill>
+              <a:schemeClr val="accent2"/>
+            </a:solidFill>
+          </a:ln>
+        </p:spPr>
+        <p:txBody>
+          <a:bodyPr wrap="square" lIns="0" tIns="0" rIns="0" bIns="0" rtlCol="0" anchor="ctr"/>
+          <a:lstStyle/>
+          <a:p>
             <a:pPr algn="ctr" indent="0" marL="0">
               <a:buNone/>
             </a:pPr>
             <a:r>
-              <a:rPr lang="en-US" sz="1100" dirty="0">
+              <a:rPr lang="en-US" sz="1400" b="1" dirty="0">
+                <a:solidFill>
+                  <a:schemeClr val="bg1"/>
+                </a:solidFill>
+              </a:rPr>
+              <a:t>3</a:t>
+            </a:r>
+            <a:endParaRPr lang="en-US" sz="1400" dirty="0"/>
+          </a:p>
+        </p:txBody>
+      </p:sp>
+      <p:sp>
+        <p:nvSpPr>
+          <p:cNvPr id="28" name="label-209"/>
+          <p:cNvSpPr txBox="1"/>
+          <p:nvPr/>
+        </p:nvSpPr>
+        <p:spPr>
+          <a:xfrm>
+            <a:off x="6895948" y="3136392"/>
+            <a:ext cx="1779194" cy="411480"/>
+          </a:xfrm>
+          <a:prstGeom prst="rect">
+            <a:avLst/>
+          </a:prstGeom>
+          <a:noFill/>
+          <a:ln/>
+        </p:spPr>
+        <p:txBody>
+          <a:bodyPr wrap="square" lIns="0" tIns="0" rIns="0" bIns="0" rtlCol="0" anchor="ctr"/>
+          <a:lstStyle/>
+          <a:p>
+            <a:pPr algn="l" indent="0" marL="0">
+              <a:buNone/>
+            </a:pPr>
+            <a:r>
+              <a:rPr lang="en-US" sz="1500" b="1" dirty="0">
+                <a:solidFill>
+                  <a:schemeClr val="tx2"/>
+                </a:solidFill>
+              </a:rPr>
+              <a:t>质量门</a:t>
+            </a:r>
+            <a:endParaRPr lang="en-US" sz="1500" dirty="0"/>
+          </a:p>
+        </p:txBody>
+      </p:sp>
+      <p:sp>
+        <p:nvSpPr>
+          <p:cNvPr id="29" name="label-210"/>
+          <p:cNvSpPr txBox="1"/>
+          <p:nvPr/>
+        </p:nvSpPr>
+        <p:spPr>
+          <a:xfrm>
+            <a:off x="6438748" y="3657600"/>
+            <a:ext cx="2190674" cy="1188720"/>
+          </a:xfrm>
+          <a:prstGeom prst="rect">
+            <a:avLst/>
+          </a:prstGeom>
+          <a:noFill/>
+          <a:ln/>
+        </p:spPr>
+        <p:txBody>
+          <a:bodyPr wrap="square" lIns="0" tIns="0" rIns="0" bIns="0" rtlCol="0" anchor="t"/>
+          <a:lstStyle/>
+          <a:p>
+            <a:pPr algn="l" indent="0" marL="0">
+              <a:buNone/>
+            </a:pPr>
+            <a:r>
+              <a:rPr lang="en-US" sz="1250" dirty="0">
+                <a:solidFill>
+                  <a:schemeClr val="tx1"/>
+                </a:solidFill>
+              </a:rPr>
+              <a:t>规则检查 + 科研审查员；工具失败不算“阴性结果”。</a:t>
+            </a:r>
+            <a:endParaRPr lang="en-US" sz="1250" dirty="0"/>
+          </a:p>
+        </p:txBody>
+      </p:sp>
+      <p:sp>
+        <p:nvSpPr>
+          <p:cNvPr id="30" name="card-211"/>
+          <p:cNvSpPr/>
+          <p:nvPr/>
+        </p:nvSpPr>
+        <p:spPr>
+          <a:xfrm>
+            <a:off x="9040901" y="2971800"/>
+            <a:ext cx="2602154" cy="1965960"/>
+          </a:xfrm>
+          <a:prstGeom prst="roundRect">
+            <a:avLst>
+              <a:gd name="adj" fmla="val 4651"/>
+            </a:avLst>
+          </a:prstGeom>
+          <a:solidFill>
+            <a:schemeClr val="bg2"/>
+          </a:solidFill>
+          <a:ln w="12700">
+            <a:solidFill>
+              <a:schemeClr val="bg2"/>
+            </a:solidFill>
+            <a:prstDash val="solid"/>
+          </a:ln>
+        </p:spPr>
+      </p:sp>
+      <p:sp>
+        <p:nvSpPr>
+          <p:cNvPr id="31" name="badge-212"/>
+          <p:cNvSpPr/>
+          <p:nvPr/>
+        </p:nvSpPr>
+        <p:spPr>
+          <a:xfrm>
+            <a:off x="9269501" y="3154680"/>
+            <a:ext cx="365760" cy="365760"/>
+          </a:xfrm>
+          <a:prstGeom prst="ellipse">
+            <a:avLst/>
+          </a:prstGeom>
+          <a:solidFill>
+            <a:schemeClr val="accent2"/>
+          </a:solidFill>
+          <a:ln>
+            <a:solidFill>
+              <a:schemeClr val="accent2"/>
+            </a:solidFill>
+          </a:ln>
+        </p:spPr>
+        <p:txBody>
+          <a:bodyPr wrap="square" lIns="0" tIns="0" rIns="0" bIns="0" rtlCol="0" anchor="ctr"/>
+          <a:lstStyle/>
+          <a:p>
+            <a:pPr algn="ctr" indent="0" marL="0">
+              <a:buNone/>
+            </a:pPr>
+            <a:r>
+              <a:rPr lang="en-US" sz="1400" b="1" dirty="0">
+                <a:solidFill>
+                  <a:schemeClr val="bg1"/>
+                </a:solidFill>
+              </a:rPr>
+              <a:t>4</a:t>
+            </a:r>
+            <a:endParaRPr lang="en-US" sz="1400" dirty="0"/>
+          </a:p>
+        </p:txBody>
+      </p:sp>
+      <p:sp>
+        <p:nvSpPr>
+          <p:cNvPr id="32" name="label-213"/>
+          <p:cNvSpPr txBox="1"/>
+          <p:nvPr/>
+        </p:nvSpPr>
+        <p:spPr>
+          <a:xfrm>
+            <a:off x="9726701" y="3136392"/>
+            <a:ext cx="1779194" cy="411480"/>
+          </a:xfrm>
+          <a:prstGeom prst="rect">
+            <a:avLst/>
+          </a:prstGeom>
+          <a:noFill/>
+          <a:ln/>
+        </p:spPr>
+        <p:txBody>
+          <a:bodyPr wrap="square" lIns="0" tIns="0" rIns="0" bIns="0" rtlCol="0" anchor="ctr"/>
+          <a:lstStyle/>
+          <a:p>
+            <a:pPr algn="l" indent="0" marL="0">
+              <a:buNone/>
+            </a:pPr>
+            <a:r>
+              <a:rPr lang="en-US" sz="1500" b="1" dirty="0">
+                <a:solidFill>
+                  <a:schemeClr val="tx2"/>
+                </a:solidFill>
+              </a:rPr>
+              <a:t>写作专家</a:t>
+            </a:r>
+            <a:endParaRPr lang="en-US" sz="1500" dirty="0"/>
+          </a:p>
+        </p:txBody>
+      </p:sp>
+      <p:sp>
+        <p:nvSpPr>
+          <p:cNvPr id="33" name="label-214"/>
+          <p:cNvSpPr txBox="1"/>
+          <p:nvPr/>
+        </p:nvSpPr>
+        <p:spPr>
+          <a:xfrm>
+            <a:off x="9269501" y="3657600"/>
+            <a:ext cx="2190674" cy="1188720"/>
+          </a:xfrm>
+          <a:prstGeom prst="rect">
+            <a:avLst/>
+          </a:prstGeom>
+          <a:noFill/>
+          <a:ln/>
+        </p:spPr>
+        <p:txBody>
+          <a:bodyPr wrap="square" lIns="0" tIns="0" rIns="0" bIns="0" rtlCol="0" anchor="t"/>
+          <a:lstStyle/>
+          <a:p>
+            <a:pPr algn="l" indent="0" marL="0">
+              <a:buNone/>
+            </a:pPr>
+            <a:r>
+              <a:rPr lang="en-US" sz="1250" dirty="0">
+                <a:solidFill>
+                  <a:schemeClr val="tx1"/>
+                </a:solidFill>
+              </a:rPr>
+              <a:t>把通过质量门的发现综合成报告，结论附证据编号。</a:t>
+            </a:r>
+            <a:endParaRPr lang="en-US" sz="1250" dirty="0"/>
+          </a:p>
+        </p:txBody>
+      </p:sp>
+      <p:sp>
+        <p:nvSpPr>
+          <p:cNvPr id="34" name="label-215"/>
+          <p:cNvSpPr txBox="1"/>
+          <p:nvPr/>
+        </p:nvSpPr>
+        <p:spPr>
+          <a:xfrm>
+            <a:off x="548640" y="5120640"/>
+            <a:ext cx="3698138" cy="548640"/>
+          </a:xfrm>
+          <a:prstGeom prst="rect">
+            <a:avLst/>
+          </a:prstGeom>
+          <a:noFill/>
+          <a:ln/>
+        </p:spPr>
+        <p:txBody>
+          <a:bodyPr wrap="square" lIns="0" tIns="0" rIns="0" bIns="0" rtlCol="0" anchor="t"/>
+          <a:lstStyle/>
+          <a:p>
+            <a:pPr algn="ctr" indent="0" marL="0">
+              <a:buNone/>
+            </a:pPr>
+            <a:r>
+              <a:rPr lang="en-US" sz="2800" b="1" dirty="0">
+                <a:solidFill>
+                  <a:schemeClr val="accent2"/>
+                </a:solidFill>
+              </a:rPr>
+              <a:t>26 位</a:t>
+            </a:r>
+            <a:endParaRPr lang="en-US" sz="2800" dirty="0"/>
+          </a:p>
+        </p:txBody>
+      </p:sp>
+      <p:sp>
+        <p:nvSpPr>
+          <p:cNvPr id="35" name="label-216"/>
+          <p:cNvSpPr txBox="1"/>
+          <p:nvPr/>
+        </p:nvSpPr>
+        <p:spPr>
+          <a:xfrm>
+            <a:off x="548640" y="5669280"/>
+            <a:ext cx="3698138" cy="274320"/>
+          </a:xfrm>
+          <a:prstGeom prst="rect">
+            <a:avLst/>
+          </a:prstGeom>
+          <a:noFill/>
+          <a:ln/>
+        </p:spPr>
+        <p:txBody>
+          <a:bodyPr wrap="square" lIns="0" tIns="0" rIns="0" bIns="0" rtlCol="0" anchor="t"/>
+          <a:lstStyle/>
+          <a:p>
+            <a:pPr algn="ctr" indent="0" marL="0">
+              <a:buNone/>
+            </a:pPr>
+            <a:r>
+              <a:rPr lang="en-US" sz="1200" dirty="0">
                 <a:solidFill>
                   <a:schemeClr val="accent6"/>
                 </a:solidFill>
               </a:rPr>
-              <a:t>运行时页面：自动检测到本机的 Claude Code</a:t>
-            </a:r>
-            <a:endParaRPr lang="en-US" sz="1100" dirty="0"/>
-          </a:p>
-        </p:txBody>
-      </p:sp>
-      <p:sp>
-        <p:nvSpPr>
-          <p:cNvPr id="17" name="label-227"/>
+              <a:t>领域专家角色</a:t>
+            </a:r>
+            <a:endParaRPr lang="en-US" sz="1200" dirty="0"/>
+          </a:p>
+        </p:txBody>
+      </p:sp>
+      <p:sp>
+        <p:nvSpPr>
+          <p:cNvPr id="36" name="label-217"/>
+          <p:cNvSpPr txBox="1"/>
+          <p:nvPr/>
+        </p:nvSpPr>
+        <p:spPr>
+          <a:xfrm>
+            <a:off x="4246778" y="5120640"/>
+            <a:ext cx="3698138" cy="548640"/>
+          </a:xfrm>
+          <a:prstGeom prst="rect">
+            <a:avLst/>
+          </a:prstGeom>
+          <a:noFill/>
+          <a:ln/>
+        </p:spPr>
+        <p:txBody>
+          <a:bodyPr wrap="square" lIns="0" tIns="0" rIns="0" bIns="0" rtlCol="0" anchor="t"/>
+          <a:lstStyle/>
+          <a:p>
+            <a:pPr algn="ctr" indent="0" marL="0">
+              <a:buNone/>
+            </a:pPr>
+            <a:r>
+              <a:rPr lang="en-US" sz="2800" b="1" dirty="0">
+                <a:solidFill>
+                  <a:schemeClr val="accent2"/>
+                </a:solidFill>
+              </a:rPr>
+              <a:t>15 个</a:t>
+            </a:r>
+            <a:endParaRPr lang="en-US" sz="2800" dirty="0"/>
+          </a:p>
+        </p:txBody>
+      </p:sp>
+      <p:sp>
+        <p:nvSpPr>
+          <p:cNvPr id="37" name="label-218"/>
+          <p:cNvSpPr txBox="1"/>
+          <p:nvPr/>
+        </p:nvSpPr>
+        <p:spPr>
+          <a:xfrm>
+            <a:off x="4246778" y="5669280"/>
+            <a:ext cx="3698138" cy="274320"/>
+          </a:xfrm>
+          <a:prstGeom prst="rect">
+            <a:avLst/>
+          </a:prstGeom>
+          <a:noFill/>
+          <a:ln/>
+        </p:spPr>
+        <p:txBody>
+          <a:bodyPr wrap="square" lIns="0" tIns="0" rIns="0" bIns="0" rtlCol="0" anchor="t"/>
+          <a:lstStyle/>
+          <a:p>
+            <a:pPr algn="ctr" indent="0" marL="0">
+              <a:buNone/>
+            </a:pPr>
+            <a:r>
+              <a:rPr lang="en-US" sz="1200" dirty="0">
+                <a:solidFill>
+                  <a:schemeClr val="accent6"/>
+                </a:solidFill>
+              </a:rPr>
+              <a:t>团队模板</a:t>
+            </a:r>
+            <a:endParaRPr lang="en-US" sz="1200" dirty="0"/>
+          </a:p>
+        </p:txBody>
+      </p:sp>
+      <p:sp>
+        <p:nvSpPr>
+          <p:cNvPr id="38" name="label-219"/>
+          <p:cNvSpPr txBox="1"/>
+          <p:nvPr/>
+        </p:nvSpPr>
+        <p:spPr>
+          <a:xfrm>
+            <a:off x="7944917" y="5120640"/>
+            <a:ext cx="3698138" cy="548640"/>
+          </a:xfrm>
+          <a:prstGeom prst="rect">
+            <a:avLst/>
+          </a:prstGeom>
+          <a:noFill/>
+          <a:ln/>
+        </p:spPr>
+        <p:txBody>
+          <a:bodyPr wrap="square" lIns="0" tIns="0" rIns="0" bIns="0" rtlCol="0" anchor="t"/>
+          <a:lstStyle/>
+          <a:p>
+            <a:pPr algn="ctr" indent="0" marL="0">
+              <a:buNone/>
+            </a:pPr>
+            <a:r>
+              <a:rPr lang="en-US" sz="2800" b="1" dirty="0">
+                <a:solidFill>
+                  <a:schemeClr val="accent2"/>
+                </a:solidFill>
+              </a:rPr>
+              <a:t>@</a:t>
+            </a:r>
+            <a:endParaRPr lang="en-US" sz="2800" dirty="0"/>
+          </a:p>
+        </p:txBody>
+      </p:sp>
+      <p:sp>
+        <p:nvSpPr>
+          <p:cNvPr id="39" name="label-220"/>
+          <p:cNvSpPr txBox="1"/>
+          <p:nvPr/>
+        </p:nvSpPr>
+        <p:spPr>
+          <a:xfrm>
+            <a:off x="7944917" y="5669280"/>
+            <a:ext cx="3698138" cy="274320"/>
+          </a:xfrm>
+          <a:prstGeom prst="rect">
+            <a:avLst/>
+          </a:prstGeom>
+          <a:noFill/>
+          <a:ln/>
+        </p:spPr>
+        <p:txBody>
+          <a:bodyPr wrap="square" lIns="0" tIns="0" rIns="0" bIns="0" rtlCol="0" anchor="t"/>
+          <a:lstStyle/>
+          <a:p>
+            <a:pPr algn="ctr" indent="0" marL="0">
+              <a:buNone/>
+            </a:pPr>
+            <a:r>
+              <a:rPr lang="en-US" sz="1200" dirty="0">
+                <a:solidFill>
+                  <a:schemeClr val="accent6"/>
+                </a:solidFill>
+              </a:rPr>
+              <a:t>直接点名专家</a:t>
+            </a:r>
+            <a:endParaRPr lang="en-US" sz="1200" dirty="0"/>
+          </a:p>
+        </p:txBody>
+      </p:sp>
+      <p:sp>
+        <p:nvSpPr>
+          <p:cNvPr id="40" name="label-221"/>
           <p:cNvSpPr txBox="1"/>
           <p:nvPr/>
         </p:nvSpPr>
@@ -3133,7 +4007,7 @@
                   <a:schemeClr val="tx2"/>
                 </a:solidFill>
               </a:rPr>
-              <a:t>使用说明：四步完成一次可追溯的研究</a:t>
+              <a:t>C 类设计：本地运行时：直接用已有 AI 订阅</a:t>
             </a:r>
             <a:endParaRPr lang="en-US" sz="2800" dirty="0"/>
           </a:p>
@@ -3171,7 +4045,7 @@
                   <a:schemeClr val="accent6"/>
                 </a:solidFill>
               </a:rPr>
-              <a:t>截图来自真实运行的 v3.0 应用。</a:t>
+              <a:t>C 类管“在哪里跑、用谁的额度”：科研与临床数据留在本机，复用已订阅的 AI 命令行工具。</a:t>
             </a:r>
             <a:endParaRPr lang="en-US" sz="1500" dirty="0"/>
           </a:p>
@@ -3179,191 +4053,230 @@
       </p:sp>
       <p:sp>
         <p:nvSpPr>
-          <p:cNvPr id="4" name="label-228"/>
-          <p:cNvSpPr txBox="1"/>
-          <p:nvPr/>
-        </p:nvSpPr>
-        <p:spPr>
-          <a:xfrm>
-            <a:off x="548640" y="1481328"/>
-            <a:ext cx="11094415" cy="292608"/>
-          </a:xfrm>
-          <a:prstGeom prst="rect">
-            <a:avLst/>
-          </a:prstGeom>
-          <a:noFill/>
-          <a:ln/>
-        </p:spPr>
-        <p:txBody>
-          <a:bodyPr wrap="square" lIns="0" tIns="0" rIns="0" bIns="0" rtlCol="0" anchor="t"/>
-          <a:lstStyle/>
-          <a:p>
-            <a:pPr algn="l" indent="0" marL="0">
-              <a:buNone/>
-            </a:pPr>
-            <a:r>
-              <a:rPr lang="en-US" sz="1300" dirty="0">
-                <a:solidFill>
-                  <a:schemeClr val="tx1"/>
-                </a:solidFill>
-              </a:rPr>
-              <a:t>① 安装：从 GitHub Releases 下载对应平台安装包；或在源码目录运行 npm run web，用浏览器打开。</a:t>
-            </a:r>
-            <a:endParaRPr lang="en-US" sz="1300" dirty="0"/>
-          </a:p>
-        </p:txBody>
-      </p:sp>
-      <p:sp>
-        <p:nvSpPr>
-          <p:cNvPr id="5" name="badge-229"/>
-          <p:cNvSpPr/>
-          <p:nvPr/>
-        </p:nvSpPr>
-        <p:spPr>
-          <a:xfrm>
-            <a:off x="548640" y="1901952"/>
-            <a:ext cx="347472" cy="347472"/>
-          </a:xfrm>
-          <a:prstGeom prst="ellipse">
-            <a:avLst/>
+          <p:cNvPr id="4" name="card-222"/>
+          <p:cNvSpPr/>
+          <p:nvPr/>
+        </p:nvSpPr>
+        <p:spPr>
+          <a:xfrm>
+            <a:off x="548640" y="1600200"/>
+            <a:ext cx="6035040" cy="4480560"/>
+          </a:xfrm>
+          <a:prstGeom prst="roundRect">
+            <a:avLst>
+              <a:gd name="adj" fmla="val 2041"/>
+            </a:avLst>
           </a:prstGeom>
           <a:solidFill>
-            <a:schemeClr val="accent2"/>
+            <a:schemeClr val="bg2"/>
+          </a:solidFill>
+          <a:ln w="12700">
+            <a:solidFill>
+              <a:schemeClr val="bg2"/>
+            </a:solidFill>
+            <a:prstDash val="solid"/>
+          </a:ln>
+        </p:spPr>
+      </p:sp>
+      <p:sp>
+        <p:nvSpPr>
+          <p:cNvPr id="5" name="box-223"/>
+          <p:cNvSpPr/>
+          <p:nvPr/>
+        </p:nvSpPr>
+        <p:spPr>
+          <a:xfrm>
+            <a:off x="822960" y="2148840"/>
+            <a:ext cx="1463040" cy="640080"/>
+          </a:xfrm>
+          <a:prstGeom prst="roundRect">
+            <a:avLst>
+              <a:gd name="adj" fmla="val 11429"/>
+            </a:avLst>
+          </a:prstGeom>
+          <a:solidFill>
+            <a:schemeClr val="tx2"/>
           </a:solidFill>
           <a:ln w="6350">
             <a:solidFill>
-              <a:schemeClr val="accent2"/>
+              <a:schemeClr val="tx2"/>
             </a:solidFill>
           </a:ln>
         </p:spPr>
         <p:txBody>
-          <a:bodyPr wrap="square" lIns="0" tIns="0" rIns="0" bIns="0" rtlCol="0" anchor="ctr"/>
+          <a:bodyPr wrap="square" lIns="762" tIns="762" rIns="762" bIns="762" rtlCol="0" anchor="ctr"/>
           <a:lstStyle/>
           <a:p>
             <a:pPr algn="ctr" indent="0" marL="0">
               <a:buNone/>
             </a:pPr>
             <a:r>
-              <a:rPr lang="en-US" sz="1200" b="1" dirty="0">
+              <a:rPr lang="en-US" sz="1400" b="1" dirty="0">
                 <a:solidFill>
                   <a:schemeClr val="bg1"/>
                 </a:solidFill>
               </a:rPr>
-              <a:t>2</a:t>
-            </a:r>
-            <a:endParaRPr lang="en-US" sz="1200" dirty="0"/>
-          </a:p>
-        </p:txBody>
-      </p:sp>
-      <p:sp>
-        <p:nvSpPr>
-          <p:cNvPr id="6" name="label-230"/>
-          <p:cNvSpPr txBox="1"/>
-          <p:nvPr/>
-        </p:nvSpPr>
-        <p:spPr>
-          <a:xfrm>
-            <a:off x="1005840" y="1883664"/>
-            <a:ext cx="3027578" cy="384048"/>
-          </a:xfrm>
-          <a:prstGeom prst="rect">
+              <a:t>研究请求</a:t>
+            </a:r>
+            <a:endParaRPr lang="en-US" sz="1400" dirty="0"/>
+          </a:p>
+        </p:txBody>
+      </p:sp>
+      <p:sp>
+        <p:nvSpPr>
+          <p:cNvPr id="6" name="arrow-224"/>
+          <p:cNvSpPr/>
+          <p:nvPr/>
+        </p:nvSpPr>
+        <p:spPr>
+          <a:xfrm>
+            <a:off x="2304288" y="2468880"/>
+            <a:ext cx="347472" cy="0"/>
+          </a:xfrm>
+          <a:prstGeom prst="line">
             <a:avLst/>
           </a:prstGeom>
           <a:noFill/>
-          <a:ln/>
-        </p:spPr>
-        <p:txBody>
-          <a:bodyPr wrap="square" lIns="0" tIns="0" rIns="0" bIns="0" rtlCol="0" anchor="ctr"/>
-          <a:lstStyle/>
-          <a:p>
-            <a:pPr algn="l" indent="0" marL="0">
-              <a:buNone/>
-            </a:pPr>
-            <a:r>
-              <a:rPr lang="en-US" sz="1600" b="1" dirty="0">
-                <a:solidFill>
-                  <a:schemeClr val="tx2"/>
-                </a:solidFill>
-              </a:rPr>
-              <a:t>配置运行时</a:t>
-            </a:r>
-            <a:endParaRPr lang="en-US" sz="1600" dirty="0"/>
-          </a:p>
-        </p:txBody>
-      </p:sp>
-      <p:sp>
-        <p:nvSpPr>
-          <p:cNvPr id="7" name="label-231"/>
-          <p:cNvSpPr txBox="1"/>
-          <p:nvPr/>
-        </p:nvSpPr>
-        <p:spPr>
-          <a:xfrm>
-            <a:off x="548640" y="2304288"/>
-            <a:ext cx="3484778" cy="502920"/>
-          </a:xfrm>
-          <a:prstGeom prst="rect">
-            <a:avLst/>
-          </a:prstGeom>
-          <a:noFill/>
-          <a:ln/>
-        </p:spPr>
-        <p:txBody>
-          <a:bodyPr wrap="square" lIns="0" tIns="0" rIns="0" bIns="0" rtlCol="0" anchor="t"/>
-          <a:lstStyle/>
-          <a:p>
-            <a:pPr algn="l" indent="0" marL="0">
-              <a:buNone/>
-            </a:pPr>
-            <a:r>
-              <a:rPr lang="en-US" sz="1200" dirty="0">
-                <a:solidFill>
-                  <a:schemeClr val="tx1"/>
-                </a:solidFill>
-              </a:rPr>
-              <a:t>安装后打开“运行时（模型配置）”，绑定本机 AI 命令行工具或填写模型 API。</a:t>
-            </a:r>
-            <a:endParaRPr lang="en-US" sz="1200" dirty="0"/>
-          </a:p>
-        </p:txBody>
-      </p:sp>
-      <p:sp>
-        <p:nvSpPr>
-          <p:cNvPr id="8" name="badge-232"/>
-          <p:cNvSpPr/>
-          <p:nvPr/>
-        </p:nvSpPr>
-        <p:spPr>
-          <a:xfrm>
-            <a:off x="4353458" y="1901952"/>
-            <a:ext cx="347472" cy="347472"/>
-          </a:xfrm>
-          <a:prstGeom prst="ellipse">
-            <a:avLst/>
+          <a:ln w="19050">
+            <a:solidFill>
+              <a:schemeClr val="accent6"/>
+            </a:solidFill>
+            <a:prstDash val="solid"/>
+            <a:tailEnd type="triangle"/>
+          </a:ln>
+        </p:spPr>
+      </p:sp>
+      <p:sp>
+        <p:nvSpPr>
+          <p:cNvPr id="7" name="box-225"/>
+          <p:cNvSpPr/>
+          <p:nvPr/>
+        </p:nvSpPr>
+        <p:spPr>
+          <a:xfrm>
+            <a:off x="2651760" y="2148840"/>
+            <a:ext cx="1371600" cy="640080"/>
+          </a:xfrm>
+          <a:prstGeom prst="roundRect">
+            <a:avLst>
+              <a:gd name="adj" fmla="val 11429"/>
+            </a:avLst>
           </a:prstGeom>
           <a:solidFill>
-            <a:schemeClr val="accent2"/>
+            <a:schemeClr val="accent6"/>
           </a:solidFill>
           <a:ln w="6350">
             <a:solidFill>
-              <a:schemeClr val="accent2"/>
+              <a:schemeClr val="accent6"/>
             </a:solidFill>
           </a:ln>
         </p:spPr>
         <p:txBody>
-          <a:bodyPr wrap="square" lIns="0" tIns="0" rIns="0" bIns="0" rtlCol="0" anchor="ctr"/>
+          <a:bodyPr wrap="square" lIns="762" tIns="762" rIns="762" bIns="762" rtlCol="0" anchor="ctr"/>
           <a:lstStyle/>
           <a:p>
             <a:pPr algn="ctr" indent="0" marL="0">
               <a:buNone/>
             </a:pPr>
             <a:r>
-              <a:rPr lang="en-US" sz="1200" b="1" dirty="0">
+              <a:rPr lang="en-US" sz="1400" b="1" dirty="0">
                 <a:solidFill>
                   <a:schemeClr val="bg1"/>
                 </a:solidFill>
               </a:rPr>
-              <a:t>3</a:t>
+              <a:t>执行路由</a:t>
+            </a:r>
+            <a:endParaRPr lang="en-US" sz="1400" dirty="0"/>
+          </a:p>
+        </p:txBody>
+      </p:sp>
+      <p:sp>
+        <p:nvSpPr>
+          <p:cNvPr id="8" name="arrow-226"/>
+          <p:cNvSpPr/>
+          <p:nvPr/>
+        </p:nvSpPr>
+        <p:spPr>
+          <a:xfrm flipV="1">
+            <a:off x="4041648" y="1947672"/>
+            <a:ext cx="393192" cy="384048"/>
+          </a:xfrm>
+          <a:prstGeom prst="line">
+            <a:avLst/>
+          </a:prstGeom>
+          <a:noFill/>
+          <a:ln w="19050">
+            <a:solidFill>
+              <a:schemeClr val="accent6"/>
+            </a:solidFill>
+            <a:prstDash val="solid"/>
+            <a:tailEnd type="triangle"/>
+          </a:ln>
+        </p:spPr>
+      </p:sp>
+      <p:sp>
+        <p:nvSpPr>
+          <p:cNvPr id="9" name="arrow-227"/>
+          <p:cNvSpPr/>
+          <p:nvPr/>
+        </p:nvSpPr>
+        <p:spPr>
+          <a:xfrm>
+            <a:off x="4041648" y="2606040"/>
+            <a:ext cx="393192" cy="384048"/>
+          </a:xfrm>
+          <a:prstGeom prst="line">
+            <a:avLst/>
+          </a:prstGeom>
+          <a:noFill/>
+          <a:ln w="19050">
+            <a:solidFill>
+              <a:schemeClr val="accent6"/>
+            </a:solidFill>
+            <a:prstDash val="solid"/>
+            <a:tailEnd type="triangle"/>
+          </a:ln>
+        </p:spPr>
+      </p:sp>
+      <p:sp>
+        <p:nvSpPr>
+          <p:cNvPr id="10" name="box-228"/>
+          <p:cNvSpPr/>
+          <p:nvPr/>
+        </p:nvSpPr>
+        <p:spPr>
+          <a:xfrm>
+            <a:off x="4434840" y="1737360"/>
+            <a:ext cx="1874520" cy="457200"/>
+          </a:xfrm>
+          <a:prstGeom prst="roundRect">
+            <a:avLst>
+              <a:gd name="adj" fmla="val 16000"/>
+            </a:avLst>
+          </a:prstGeom>
+          <a:solidFill>
+            <a:schemeClr val="bg1"/>
+          </a:solidFill>
+          <a:ln w="12700">
+            <a:solidFill>
+              <a:srgbClr val="D5DCE4"/>
+            </a:solidFill>
+          </a:ln>
+        </p:spPr>
+        <p:txBody>
+          <a:bodyPr wrap="square" lIns="762" tIns="762" rIns="762" bIns="762" rtlCol="0" anchor="ctr"/>
+          <a:lstStyle/>
+          <a:p>
+            <a:pPr algn="ctr" indent="0" marL="0">
+              <a:buNone/>
+            </a:pPr>
+            <a:r>
+              <a:rPr lang="en-US" sz="1200" dirty="0">
+                <a:solidFill>
+                  <a:schemeClr val="tx2"/>
+                </a:solidFill>
+              </a:rPr>
+              <a:t>模型 API · 按调用计费</a:t>
             </a:r>
             <a:endParaRPr lang="en-US" sz="1200" dirty="0"/>
           </a:p>
@@ -3371,101 +4284,31 @@
       </p:sp>
       <p:sp>
         <p:nvSpPr>
-          <p:cNvPr id="9" name="label-233"/>
-          <p:cNvSpPr txBox="1"/>
-          <p:nvPr/>
-        </p:nvSpPr>
-        <p:spPr>
-          <a:xfrm>
-            <a:off x="4810658" y="1883664"/>
-            <a:ext cx="3027578" cy="384048"/>
-          </a:xfrm>
-          <a:prstGeom prst="rect">
-            <a:avLst/>
-          </a:prstGeom>
-          <a:noFill/>
-          <a:ln/>
-        </p:spPr>
-        <p:txBody>
-          <a:bodyPr wrap="square" lIns="0" tIns="0" rIns="0" bIns="0" rtlCol="0" anchor="ctr"/>
-          <a:lstStyle/>
-          <a:p>
-            <a:pPr algn="l" indent="0" marL="0">
-              <a:buNone/>
-            </a:pPr>
-            <a:r>
-              <a:rPr lang="en-US" sz="1600" b="1" dirty="0">
-                <a:solidFill>
-                  <a:schemeClr val="tx2"/>
-                </a:solidFill>
-              </a:rPr>
-              <a:t>提问</a:t>
-            </a:r>
-            <a:endParaRPr lang="en-US" sz="1600" dirty="0"/>
-          </a:p>
-        </p:txBody>
-      </p:sp>
-      <p:sp>
-        <p:nvSpPr>
-          <p:cNvPr id="10" name="label-234"/>
-          <p:cNvSpPr txBox="1"/>
-          <p:nvPr/>
-        </p:nvSpPr>
-        <p:spPr>
-          <a:xfrm>
-            <a:off x="4353458" y="2304288"/>
-            <a:ext cx="3484778" cy="502920"/>
-          </a:xfrm>
-          <a:prstGeom prst="rect">
-            <a:avLst/>
-          </a:prstGeom>
-          <a:noFill/>
-          <a:ln/>
-        </p:spPr>
-        <p:txBody>
-          <a:bodyPr wrap="square" lIns="0" tIns="0" rIns="0" bIns="0" rtlCol="0" anchor="t"/>
-          <a:lstStyle/>
-          <a:p>
-            <a:pPr algn="l" indent="0" marL="0">
-              <a:buNone/>
-            </a:pPr>
-            <a:r>
-              <a:rPr lang="en-US" sz="1200" dirty="0">
-                <a:solidFill>
-                  <a:schemeClr val="tx1"/>
-                </a:solidFill>
-              </a:rPr>
-              <a:t>直接提问；输入 @ 点名专家，或交给科研小队。</a:t>
-            </a:r>
-            <a:endParaRPr lang="en-US" sz="1200" dirty="0"/>
-          </a:p>
-        </p:txBody>
-      </p:sp>
-      <p:sp>
-        <p:nvSpPr>
-          <p:cNvPr id="11" name="badge-235"/>
-          <p:cNvSpPr/>
-          <p:nvPr/>
-        </p:nvSpPr>
-        <p:spPr>
-          <a:xfrm>
-            <a:off x="8158277" y="1901952"/>
-            <a:ext cx="347472" cy="347472"/>
-          </a:xfrm>
-          <a:prstGeom prst="ellipse">
-            <a:avLst/>
+          <p:cNvPr id="11" name="box-229"/>
+          <p:cNvSpPr/>
+          <p:nvPr/>
+        </p:nvSpPr>
+        <p:spPr>
+          <a:xfrm>
+            <a:off x="4434840" y="2761488"/>
+            <a:ext cx="1874520" cy="457200"/>
+          </a:xfrm>
+          <a:prstGeom prst="roundRect">
+            <a:avLst>
+              <a:gd name="adj" fmla="val 16000"/>
+            </a:avLst>
           </a:prstGeom>
           <a:solidFill>
-            <a:schemeClr val="accent2"/>
+            <a:schemeClr val="accent3"/>
           </a:solidFill>
           <a:ln w="6350">
             <a:solidFill>
-              <a:schemeClr val="accent2"/>
+              <a:schemeClr val="accent3"/>
             </a:solidFill>
           </a:ln>
         </p:spPr>
         <p:txBody>
-          <a:bodyPr wrap="square" lIns="0" tIns="0" rIns="0" bIns="0" rtlCol="0" anchor="ctr"/>
+          <a:bodyPr wrap="square" lIns="762" tIns="762" rIns="762" bIns="762" rtlCol="0" anchor="ctr"/>
           <a:lstStyle/>
           <a:p>
             <a:pPr algn="ctr" indent="0" marL="0">
@@ -3477,7 +4320,7 @@
                   <a:schemeClr val="bg1"/>
                 </a:solidFill>
               </a:rPr>
-              <a:t>4</a:t>
+              <a:t>本地 CLI · 用已有订阅</a:t>
             </a:r>
             <a:endParaRPr lang="en-US" sz="1200" dirty="0"/>
           </a:p>
@@ -3485,14 +4328,14 @@
       </p:sp>
       <p:sp>
         <p:nvSpPr>
-          <p:cNvPr id="12" name="label-236"/>
+          <p:cNvPr id="12" name="bullets-230"/>
           <p:cNvSpPr txBox="1"/>
           <p:nvPr/>
         </p:nvSpPr>
         <p:spPr>
           <a:xfrm>
-            <a:off x="8615477" y="1883664"/>
-            <a:ext cx="3027578" cy="384048"/>
+            <a:off x="822960" y="3520440"/>
+            <a:ext cx="5486400" cy="1828800"/>
           </a:xfrm>
           <a:prstGeom prst="rect">
             <a:avLst/>
@@ -3501,34 +4344,92 @@
           <a:ln/>
         </p:spPr>
         <p:txBody>
-          <a:bodyPr wrap="square" lIns="0" tIns="0" rIns="0" bIns="0" rtlCol="0" anchor="ctr"/>
-          <a:lstStyle/>
-          <a:p>
-            <a:pPr algn="l" indent="0" marL="0">
-              <a:buNone/>
-            </a:pPr>
-            <a:r>
-              <a:rPr lang="en-US" sz="1600" b="1" dirty="0">
-                <a:solidFill>
-                  <a:schemeClr val="tx2"/>
-                </a:solidFill>
-              </a:rPr>
-              <a:t>查看证据</a:t>
-            </a:r>
-            <a:endParaRPr lang="en-US" sz="1600" dirty="0"/>
-          </a:p>
-        </p:txBody>
-      </p:sp>
-      <p:sp>
-        <p:nvSpPr>
-          <p:cNvPr id="13" name="label-237"/>
+          <a:bodyPr wrap="square" lIns="0" tIns="0" rIns="0" bIns="0" rtlCol="0" anchor="t"/>
+          <a:lstStyle/>
+          <a:p>
+            <a:pPr marL="177800" indent="-177800">
+              <a:spcAft>
+                <a:spcPts val="800"/>
+              </a:spcAft>
+              <a:buSzPct val="100000"/>
+              <a:buChar char="•"/>
+            </a:pPr>
+            <a:r>
+              <a:rPr lang="en-US" sz="1300" dirty="0">
+                <a:solidFill>
+                  <a:schemeClr val="tx1"/>
+                </a:solidFill>
+              </a:rPr>
+              <a:t>自动检测本机已登录的 26 种 AI 命令行工具（如 Codex、Claude Code）</a:t>
+            </a:r>
+            <a:endParaRPr lang="en-US" sz="1300" dirty="0"/>
+          </a:p>
+          <a:p>
+            <a:pPr marL="177800" indent="-177800">
+              <a:spcAft>
+                <a:spcPts val="800"/>
+              </a:spcAft>
+              <a:buSzPct val="100000"/>
+              <a:buChar char="•"/>
+            </a:pPr>
+            <a:r>
+              <a:rPr lang="en-US" sz="1300" dirty="0">
+                <a:solidFill>
+                  <a:schemeClr val="tx1"/>
+                </a:solidFill>
+              </a:rPr>
+              <a:t>每个会话独立配置目录，不混入日常使用记录</a:t>
+            </a:r>
+            <a:endParaRPr lang="en-US" sz="1300" dirty="0"/>
+          </a:p>
+          <a:p>
+            <a:pPr marL="177800" indent="-177800">
+              <a:spcAft>
+                <a:spcPts val="800"/>
+              </a:spcAft>
+              <a:buSzPct val="100000"/>
+              <a:buChar char="•"/>
+            </a:pPr>
+            <a:r>
+              <a:rPr lang="en-US" sz="1300" dirty="0">
+                <a:solidFill>
+                  <a:schemeClr val="tx1"/>
+                </a:solidFill>
+              </a:rPr>
+              <a:t>执行命令前先征得同意（Codex 全流程支持）；数据留在本机</a:t>
+            </a:r>
+            <a:endParaRPr lang="en-US" sz="1300" dirty="0"/>
+          </a:p>
+          <a:p>
+            <a:pPr marL="177800" indent="-177800">
+              <a:spcAft>
+                <a:spcPts val="800"/>
+              </a:spcAft>
+              <a:buSzPct val="100000"/>
+              <a:buChar char="•"/>
+            </a:pPr>
+            <a:r>
+              <a:rPr lang="en-US" sz="1300" dirty="0">
+                <a:solidFill>
+                  <a:schemeClr val="tx1"/>
+                </a:solidFill>
+              </a:rPr>
+              <a:t>临床数据门：原始病历与影像在本机沙盒内处理，外发需授权</a:t>
+            </a:r>
+            <a:endParaRPr lang="en-US" sz="1300" dirty="0"/>
+          </a:p>
+        </p:txBody>
+      </p:sp>
+      <p:sp>
+        <p:nvSpPr>
+          <p:cNvPr id="13" name="label-231"/>
           <p:cNvSpPr txBox="1"/>
           <p:nvPr/>
         </p:nvSpPr>
         <p:spPr>
           <a:xfrm>
-            <a:off x="8158277" y="2304288"/>
-            <a:ext cx="3484778" cy="502920"/>
+            <a:off x="822960" y="5440680"/>
+            <a:ext cx="5486400" cy="548640"/>
           </a:xfrm>
           <a:prstGeom prst="rect">
             <a:avLst/>
@@ -3544,20 +4445,20 @@
               <a:buNone/>
             </a:pPr>
             <a:r>
-              <a:rPr lang="en-US" sz="1200" dirty="0">
-                <a:solidFill>
-                  <a:schemeClr val="tx1"/>
-                </a:solidFill>
-              </a:rPr>
-              <a:t>查看每条证据的来源与状态（3.0 证据页）。</a:t>
-            </a:r>
-            <a:endParaRPr lang="en-US" sz="1200" dirty="0"/>
+              <a:rPr lang="en-US" sz="1050" dirty="0">
+                <a:solidFill>
+                  <a:schemeClr val="accent6"/>
+                </a:solidFill>
+              </a:rPr>
+              <a:t>说明：Codex 走完整协议并支持审批；Claude Code 已验证会话隔离；其余工具为通用接入。使用前请确认订阅条款允许此类用法。</a:t>
+            </a:r>
+            <a:endParaRPr lang="en-US" sz="1050" dirty="0"/>
           </a:p>
         </p:txBody>
       </p:sp>
       <p:pic>
         <p:nvPicPr>
-          <p:cNvPr id="14" name="screenshot-238" descr="自动检测到本机的 Claude Code">    </p:cNvPr>
+          <p:cNvPr id="14" name="screenshot-232" descr="运行时页面：自动检测到本机的 Claude Code">    </p:cNvPr>
           <p:cNvPicPr>
             <a:picLocks noChangeAspect="1"/>
           </p:cNvPicPr>
@@ -3571,8 +4472,8 @@
         </p:blipFill>
         <p:spPr>
           <a:xfrm>
-            <a:off x="927854" y="2880360"/>
-            <a:ext cx="2726350" cy="2834640"/>
+            <a:off x="7249738" y="1600200"/>
+            <a:ext cx="4001579" cy="4160520"/>
           </a:xfrm>
           <a:prstGeom prst="rect">
             <a:avLst/>
@@ -3581,14 +4482,14 @@
       </p:pic>
       <p:sp>
         <p:nvSpPr>
-          <p:cNvPr id="15" name="frame-239"/>
-          <p:cNvSpPr/>
-          <p:nvPr/>
-        </p:nvSpPr>
-        <p:spPr>
-          <a:xfrm>
-            <a:off x="927854" y="2880360"/>
-            <a:ext cx="2726350" cy="2834640"/>
+          <p:cNvPr id="15" name="frame-233"/>
+          <p:cNvSpPr/>
+          <p:nvPr/>
+        </p:nvSpPr>
+        <p:spPr>
+          <a:xfrm>
+            <a:off x="7249738" y="1600200"/>
+            <a:ext cx="4001579" cy="4160520"/>
           </a:xfrm>
           <a:prstGeom prst="rect">
             <a:avLst/>
@@ -3608,14 +4509,14 @@
       </p:sp>
       <p:sp>
         <p:nvSpPr>
-          <p:cNvPr id="16" name="label-240"/>
+          <p:cNvPr id="16" name="label-234"/>
           <p:cNvSpPr txBox="1"/>
           <p:nvPr/>
         </p:nvSpPr>
         <p:spPr>
           <a:xfrm>
-            <a:off x="927854" y="5788152"/>
-            <a:ext cx="2726350" cy="292608"/>
+            <a:off x="7249738" y="5833872"/>
+            <a:ext cx="4001579" cy="292608"/>
           </a:xfrm>
           <a:prstGeom prst="rect">
             <a:avLst/>
@@ -3636,124 +4537,22 @@
                   <a:schemeClr val="accent6"/>
                 </a:solidFill>
               </a:rPr>
-              <a:t>自动检测到本机的 Claude Code</a:t>
+              <a:t>运行时页面：自动检测到本机的 Claude Code</a:t>
             </a:r>
             <a:endParaRPr lang="en-US" sz="1100" dirty="0"/>
           </a:p>
         </p:txBody>
       </p:sp>
-      <p:pic>
-        <p:nvPicPr>
-          <p:cNvPr id="17" name="screenshot-241" descr="usage-ask-mention.jpg">    </p:cNvPr>
-          <p:cNvPicPr>
-            <a:picLocks noChangeAspect="1"/>
-          </p:cNvPicPr>
-          <p:nvPr/>
-        </p:nvPicPr>
-        <p:blipFill>
-          <a:blip r:embed="rId2"/>
-          <a:stretch>
-            <a:fillRect/>
-          </a:stretch>
-        </p:blipFill>
-        <p:spPr>
-          <a:xfrm>
-            <a:off x="4353458" y="2880360"/>
-            <a:ext cx="3484778" cy="867323"/>
-          </a:xfrm>
-          <a:prstGeom prst="rect">
-            <a:avLst/>
-          </a:prstGeom>
-        </p:spPr>
-      </p:pic>
-      <p:sp>
-        <p:nvSpPr>
-          <p:cNvPr id="18" name="frame-242"/>
-          <p:cNvSpPr/>
-          <p:nvPr/>
-        </p:nvSpPr>
-        <p:spPr>
-          <a:xfrm>
-            <a:off x="4353458" y="2880360"/>
-            <a:ext cx="3484778" cy="867323"/>
-          </a:xfrm>
-          <a:prstGeom prst="rect">
-            <a:avLst/>
-          </a:prstGeom>
-          <a:solidFill>
-            <a:srgbClr val="FFFFFF">
-              <a:alpha val="0"/>
-            </a:srgbClr>
-          </a:solidFill>
-          <a:ln w="9525">
-            <a:solidFill>
-              <a:srgbClr val="D5DCE4"/>
-            </a:solidFill>
-            <a:prstDash val="solid"/>
-          </a:ln>
-        </p:spPr>
-      </p:sp>
-      <p:pic>
-        <p:nvPicPr>
-          <p:cNvPr id="19" name="screenshot-243" descr="@ 点名专家；工具调用逐步可查">    </p:cNvPr>
-          <p:cNvPicPr>
-            <a:picLocks noChangeAspect="1"/>
-          </p:cNvPicPr>
-          <p:nvPr/>
-        </p:nvPicPr>
-        <p:blipFill>
-          <a:blip r:embed="rId3"/>
-          <a:stretch>
-            <a:fillRect/>
-          </a:stretch>
-        </p:blipFill>
-        <p:spPr>
-          <a:xfrm>
-            <a:off x="4353458" y="3931920"/>
-            <a:ext cx="3484778" cy="1184825"/>
-          </a:xfrm>
-          <a:prstGeom prst="rect">
-            <a:avLst/>
-          </a:prstGeom>
-        </p:spPr>
-      </p:pic>
-      <p:sp>
-        <p:nvSpPr>
-          <p:cNvPr id="20" name="frame-244"/>
-          <p:cNvSpPr/>
-          <p:nvPr/>
-        </p:nvSpPr>
-        <p:spPr>
-          <a:xfrm>
-            <a:off x="4353458" y="3931920"/>
-            <a:ext cx="3484778" cy="1184825"/>
-          </a:xfrm>
-          <a:prstGeom prst="rect">
-            <a:avLst/>
-          </a:prstGeom>
-          <a:solidFill>
-            <a:srgbClr val="FFFFFF">
-              <a:alpha val="0"/>
-            </a:srgbClr>
-          </a:solidFill>
-          <a:ln w="9525">
-            <a:solidFill>
-              <a:srgbClr val="D5DCE4"/>
-            </a:solidFill>
-            <a:prstDash val="solid"/>
-          </a:ln>
-        </p:spPr>
-      </p:sp>
-      <p:sp>
-        <p:nvSpPr>
-          <p:cNvPr id="21" name="label-245"/>
+      <p:sp>
+        <p:nvSpPr>
+          <p:cNvPr id="17" name="label-235"/>
           <p:cNvSpPr txBox="1"/>
           <p:nvPr/>
         </p:nvSpPr>
         <p:spPr>
           <a:xfrm>
-            <a:off x="4353458" y="5189897"/>
-            <a:ext cx="3484778" cy="292608"/>
+            <a:off x="548640" y="6144768"/>
+            <a:ext cx="11094415" cy="256032"/>
           </a:xfrm>
           <a:prstGeom prst="rect">
             <a:avLst/>
@@ -3765,141 +4564,18 @@
           <a:bodyPr wrap="square" lIns="0" tIns="0" rIns="0" bIns="0" rtlCol="0" anchor="t"/>
           <a:lstStyle/>
           <a:p>
-            <a:pPr algn="ctr" indent="0" marL="0">
-              <a:buNone/>
-            </a:pPr>
-            <a:r>
-              <a:rPr lang="en-US" sz="1100" dirty="0">
+            <a:pPr algn="l" indent="0" marL="0">
+              <a:buNone/>
+            </a:pPr>
+            <a:r>
+              <a:rPr lang="en-US" sz="1000" dirty="0">
                 <a:solidFill>
                   <a:schemeClr val="accent6"/>
                 </a:solidFill>
               </a:rPr>
-              <a:t>@ 点名专家；工具调用逐步可查</a:t>
-            </a:r>
-            <a:endParaRPr lang="en-US" sz="1100" dirty="0"/>
-          </a:p>
-        </p:txBody>
-      </p:sp>
-      <p:pic>
-        <p:nvPicPr>
-          <p:cNvPr id="22" name="screenshot-246" descr="3.0 证据页：来源、状态、历史">    </p:cNvPr>
-          <p:cNvPicPr>
-            <a:picLocks noChangeAspect="1"/>
-          </p:cNvPicPr>
-          <p:nvPr/>
-        </p:nvPicPr>
-        <p:blipFill>
-          <a:blip r:embed="rId4"/>
-          <a:stretch>
-            <a:fillRect/>
-          </a:stretch>
-        </p:blipFill>
-        <p:spPr>
-          <a:xfrm>
-            <a:off x="8158277" y="2880360"/>
-            <a:ext cx="3484778" cy="2462577"/>
-          </a:xfrm>
-          <a:prstGeom prst="rect">
-            <a:avLst/>
-          </a:prstGeom>
-        </p:spPr>
-      </p:pic>
-      <p:sp>
-        <p:nvSpPr>
-          <p:cNvPr id="23" name="frame-247"/>
-          <p:cNvSpPr/>
-          <p:nvPr/>
-        </p:nvSpPr>
-        <p:spPr>
-          <a:xfrm>
-            <a:off x="8158277" y="2880360"/>
-            <a:ext cx="3484778" cy="2462577"/>
-          </a:xfrm>
-          <a:prstGeom prst="rect">
-            <a:avLst/>
-          </a:prstGeom>
-          <a:solidFill>
-            <a:srgbClr val="FFFFFF">
-              <a:alpha val="0"/>
-            </a:srgbClr>
-          </a:solidFill>
-          <a:ln w="9525">
-            <a:solidFill>
-              <a:srgbClr val="D5DCE4"/>
-            </a:solidFill>
-            <a:prstDash val="solid"/>
-          </a:ln>
-        </p:spPr>
-      </p:sp>
-      <p:sp>
-        <p:nvSpPr>
-          <p:cNvPr id="24" name="label-248"/>
-          <p:cNvSpPr txBox="1"/>
-          <p:nvPr/>
-        </p:nvSpPr>
-        <p:spPr>
-          <a:xfrm>
-            <a:off x="8158277" y="5416089"/>
-            <a:ext cx="3484778" cy="292608"/>
-          </a:xfrm>
-          <a:prstGeom prst="rect">
-            <a:avLst/>
-          </a:prstGeom>
-          <a:noFill/>
-          <a:ln/>
-        </p:spPr>
-        <p:txBody>
-          <a:bodyPr wrap="square" lIns="0" tIns="0" rIns="0" bIns="0" rtlCol="0" anchor="t"/>
-          <a:lstStyle/>
-          <a:p>
-            <a:pPr algn="ctr" indent="0" marL="0">
-              <a:buNone/>
-            </a:pPr>
-            <a:r>
-              <a:rPr lang="en-US" sz="1100" dirty="0">
-                <a:solidFill>
-                  <a:schemeClr val="accent6"/>
-                </a:solidFill>
-              </a:rPr>
-              <a:t>3.0 证据页：来源、状态、历史</a:t>
-            </a:r>
-            <a:endParaRPr lang="en-US" sz="1100" dirty="0"/>
-          </a:p>
-        </p:txBody>
-      </p:sp>
-      <p:sp>
-        <p:nvSpPr>
-          <p:cNvPr id="25" name="label-249"/>
-          <p:cNvSpPr txBox="1"/>
-          <p:nvPr/>
-        </p:nvSpPr>
-        <p:spPr>
-          <a:xfrm>
-            <a:off x="548640" y="6172200"/>
-            <a:ext cx="11094415" cy="256032"/>
-          </a:xfrm>
-          <a:prstGeom prst="rect">
-            <a:avLst/>
-          </a:prstGeom>
-          <a:noFill/>
-          <a:ln/>
-        </p:spPr>
-        <p:txBody>
-          <a:bodyPr wrap="square" lIns="0" tIns="0" rIns="0" bIns="0" rtlCol="0" anchor="t"/>
-          <a:lstStyle/>
-          <a:p>
-            <a:pPr algn="l" indent="0" marL="0">
-              <a:buNone/>
-            </a:pPr>
-            <a:r>
-              <a:rPr lang="en-US" sz="1050" dirty="0">
-                <a:solidFill>
-                  <a:schemeClr val="accent6"/>
-                </a:solidFill>
-              </a:rPr>
-              <a:t>演示环境使用离线示例模型生成文字；文献为 PubMed 实时检索结果。</a:t>
-            </a:r>
-            <a:endParaRPr lang="en-US" sz="1050" dirty="0"/>
+              <a:t>实现状态：2.x 已具备，3.0 继续完善。</a:t>
+            </a:r>
+            <a:endParaRPr lang="en-US" sz="1000" dirty="0"/>
           </a:p>
         </p:txBody>
       </p:sp>
@@ -4005,7 +4681,7 @@
                   <a:schemeClr val="tx2"/>
                 </a:solidFill>
               </a:rPr>
-              <a:t>当前进展与下一步</a:t>
+              <a:t>使用说明：四步完成一次可追溯的研究</a:t>
             </a:r>
             <a:endParaRPr lang="en-US" sz="2800" dirty="0"/>
           </a:p>
@@ -4043,6 +4719,878 @@
                   <a:schemeClr val="accent6"/>
                 </a:solidFill>
               </a:rPr>
+              <a:t>截图来自真实运行的 v3.0 应用。</a:t>
+            </a:r>
+            <a:endParaRPr lang="en-US" sz="1500" dirty="0"/>
+          </a:p>
+        </p:txBody>
+      </p:sp>
+      <p:sp>
+        <p:nvSpPr>
+          <p:cNvPr id="4" name="label-236"/>
+          <p:cNvSpPr txBox="1"/>
+          <p:nvPr/>
+        </p:nvSpPr>
+        <p:spPr>
+          <a:xfrm>
+            <a:off x="548640" y="1481328"/>
+            <a:ext cx="11094415" cy="292608"/>
+          </a:xfrm>
+          <a:prstGeom prst="rect">
+            <a:avLst/>
+          </a:prstGeom>
+          <a:noFill/>
+          <a:ln/>
+        </p:spPr>
+        <p:txBody>
+          <a:bodyPr wrap="square" lIns="0" tIns="0" rIns="0" bIns="0" rtlCol="0" anchor="t"/>
+          <a:lstStyle/>
+          <a:p>
+            <a:pPr algn="l" indent="0" marL="0">
+              <a:buNone/>
+            </a:pPr>
+            <a:r>
+              <a:rPr lang="en-US" sz="1300" dirty="0">
+                <a:solidFill>
+                  <a:schemeClr val="tx1"/>
+                </a:solidFill>
+              </a:rPr>
+              <a:t>① 安装：从 GitHub Releases 下载对应平台安装包；或在源码目录运行 npm run web，用浏览器打开。</a:t>
+            </a:r>
+            <a:endParaRPr lang="en-US" sz="1300" dirty="0"/>
+          </a:p>
+        </p:txBody>
+      </p:sp>
+      <p:sp>
+        <p:nvSpPr>
+          <p:cNvPr id="5" name="badge-237"/>
+          <p:cNvSpPr/>
+          <p:nvPr/>
+        </p:nvSpPr>
+        <p:spPr>
+          <a:xfrm>
+            <a:off x="548640" y="1901952"/>
+            <a:ext cx="347472" cy="347472"/>
+          </a:xfrm>
+          <a:prstGeom prst="ellipse">
+            <a:avLst/>
+          </a:prstGeom>
+          <a:solidFill>
+            <a:schemeClr val="accent2"/>
+          </a:solidFill>
+          <a:ln w="6350">
+            <a:solidFill>
+              <a:schemeClr val="accent2"/>
+            </a:solidFill>
+          </a:ln>
+        </p:spPr>
+        <p:txBody>
+          <a:bodyPr wrap="square" lIns="0" tIns="0" rIns="0" bIns="0" rtlCol="0" anchor="ctr"/>
+          <a:lstStyle/>
+          <a:p>
+            <a:pPr algn="ctr" indent="0" marL="0">
+              <a:buNone/>
+            </a:pPr>
+            <a:r>
+              <a:rPr lang="en-US" sz="1200" b="1" dirty="0">
+                <a:solidFill>
+                  <a:schemeClr val="bg1"/>
+                </a:solidFill>
+              </a:rPr>
+              <a:t>2</a:t>
+            </a:r>
+            <a:endParaRPr lang="en-US" sz="1200" dirty="0"/>
+          </a:p>
+        </p:txBody>
+      </p:sp>
+      <p:sp>
+        <p:nvSpPr>
+          <p:cNvPr id="6" name="label-238"/>
+          <p:cNvSpPr txBox="1"/>
+          <p:nvPr/>
+        </p:nvSpPr>
+        <p:spPr>
+          <a:xfrm>
+            <a:off x="1005840" y="1883664"/>
+            <a:ext cx="3027578" cy="384048"/>
+          </a:xfrm>
+          <a:prstGeom prst="rect">
+            <a:avLst/>
+          </a:prstGeom>
+          <a:noFill/>
+          <a:ln/>
+        </p:spPr>
+        <p:txBody>
+          <a:bodyPr wrap="square" lIns="0" tIns="0" rIns="0" bIns="0" rtlCol="0" anchor="ctr"/>
+          <a:lstStyle/>
+          <a:p>
+            <a:pPr algn="l" indent="0" marL="0">
+              <a:buNone/>
+            </a:pPr>
+            <a:r>
+              <a:rPr lang="en-US" sz="1600" b="1" dirty="0">
+                <a:solidFill>
+                  <a:schemeClr val="tx2"/>
+                </a:solidFill>
+              </a:rPr>
+              <a:t>配置运行时</a:t>
+            </a:r>
+            <a:endParaRPr lang="en-US" sz="1600" dirty="0"/>
+          </a:p>
+        </p:txBody>
+      </p:sp>
+      <p:sp>
+        <p:nvSpPr>
+          <p:cNvPr id="7" name="label-239"/>
+          <p:cNvSpPr txBox="1"/>
+          <p:nvPr/>
+        </p:nvSpPr>
+        <p:spPr>
+          <a:xfrm>
+            <a:off x="548640" y="2304288"/>
+            <a:ext cx="3484778" cy="502920"/>
+          </a:xfrm>
+          <a:prstGeom prst="rect">
+            <a:avLst/>
+          </a:prstGeom>
+          <a:noFill/>
+          <a:ln/>
+        </p:spPr>
+        <p:txBody>
+          <a:bodyPr wrap="square" lIns="0" tIns="0" rIns="0" bIns="0" rtlCol="0" anchor="t"/>
+          <a:lstStyle/>
+          <a:p>
+            <a:pPr algn="l" indent="0" marL="0">
+              <a:buNone/>
+            </a:pPr>
+            <a:r>
+              <a:rPr lang="en-US" sz="1200" dirty="0">
+                <a:solidFill>
+                  <a:schemeClr val="tx1"/>
+                </a:solidFill>
+              </a:rPr>
+              <a:t>安装后打开“运行时（模型配置）”，绑定本机 AI 命令行工具或填写模型 API。</a:t>
+            </a:r>
+            <a:endParaRPr lang="en-US" sz="1200" dirty="0"/>
+          </a:p>
+        </p:txBody>
+      </p:sp>
+      <p:sp>
+        <p:nvSpPr>
+          <p:cNvPr id="8" name="badge-240"/>
+          <p:cNvSpPr/>
+          <p:nvPr/>
+        </p:nvSpPr>
+        <p:spPr>
+          <a:xfrm>
+            <a:off x="4353458" y="1901952"/>
+            <a:ext cx="347472" cy="347472"/>
+          </a:xfrm>
+          <a:prstGeom prst="ellipse">
+            <a:avLst/>
+          </a:prstGeom>
+          <a:solidFill>
+            <a:schemeClr val="accent2"/>
+          </a:solidFill>
+          <a:ln w="6350">
+            <a:solidFill>
+              <a:schemeClr val="accent2"/>
+            </a:solidFill>
+          </a:ln>
+        </p:spPr>
+        <p:txBody>
+          <a:bodyPr wrap="square" lIns="0" tIns="0" rIns="0" bIns="0" rtlCol="0" anchor="ctr"/>
+          <a:lstStyle/>
+          <a:p>
+            <a:pPr algn="ctr" indent="0" marL="0">
+              <a:buNone/>
+            </a:pPr>
+            <a:r>
+              <a:rPr lang="en-US" sz="1200" b="1" dirty="0">
+                <a:solidFill>
+                  <a:schemeClr val="bg1"/>
+                </a:solidFill>
+              </a:rPr>
+              <a:t>3</a:t>
+            </a:r>
+            <a:endParaRPr lang="en-US" sz="1200" dirty="0"/>
+          </a:p>
+        </p:txBody>
+      </p:sp>
+      <p:sp>
+        <p:nvSpPr>
+          <p:cNvPr id="9" name="label-241"/>
+          <p:cNvSpPr txBox="1"/>
+          <p:nvPr/>
+        </p:nvSpPr>
+        <p:spPr>
+          <a:xfrm>
+            <a:off x="4810658" y="1883664"/>
+            <a:ext cx="3027578" cy="384048"/>
+          </a:xfrm>
+          <a:prstGeom prst="rect">
+            <a:avLst/>
+          </a:prstGeom>
+          <a:noFill/>
+          <a:ln/>
+        </p:spPr>
+        <p:txBody>
+          <a:bodyPr wrap="square" lIns="0" tIns="0" rIns="0" bIns="0" rtlCol="0" anchor="ctr"/>
+          <a:lstStyle/>
+          <a:p>
+            <a:pPr algn="l" indent="0" marL="0">
+              <a:buNone/>
+            </a:pPr>
+            <a:r>
+              <a:rPr lang="en-US" sz="1600" b="1" dirty="0">
+                <a:solidFill>
+                  <a:schemeClr val="tx2"/>
+                </a:solidFill>
+              </a:rPr>
+              <a:t>提问</a:t>
+            </a:r>
+            <a:endParaRPr lang="en-US" sz="1600" dirty="0"/>
+          </a:p>
+        </p:txBody>
+      </p:sp>
+      <p:sp>
+        <p:nvSpPr>
+          <p:cNvPr id="10" name="label-242"/>
+          <p:cNvSpPr txBox="1"/>
+          <p:nvPr/>
+        </p:nvSpPr>
+        <p:spPr>
+          <a:xfrm>
+            <a:off x="4353458" y="2304288"/>
+            <a:ext cx="3484778" cy="502920"/>
+          </a:xfrm>
+          <a:prstGeom prst="rect">
+            <a:avLst/>
+          </a:prstGeom>
+          <a:noFill/>
+          <a:ln/>
+        </p:spPr>
+        <p:txBody>
+          <a:bodyPr wrap="square" lIns="0" tIns="0" rIns="0" bIns="0" rtlCol="0" anchor="t"/>
+          <a:lstStyle/>
+          <a:p>
+            <a:pPr algn="l" indent="0" marL="0">
+              <a:buNone/>
+            </a:pPr>
+            <a:r>
+              <a:rPr lang="en-US" sz="1200" dirty="0">
+                <a:solidFill>
+                  <a:schemeClr val="tx1"/>
+                </a:solidFill>
+              </a:rPr>
+              <a:t>直接提问；输入 @ 点名专家，或交给科研小队。</a:t>
+            </a:r>
+            <a:endParaRPr lang="en-US" sz="1200" dirty="0"/>
+          </a:p>
+        </p:txBody>
+      </p:sp>
+      <p:sp>
+        <p:nvSpPr>
+          <p:cNvPr id="11" name="badge-243"/>
+          <p:cNvSpPr/>
+          <p:nvPr/>
+        </p:nvSpPr>
+        <p:spPr>
+          <a:xfrm>
+            <a:off x="8158277" y="1901952"/>
+            <a:ext cx="347472" cy="347472"/>
+          </a:xfrm>
+          <a:prstGeom prst="ellipse">
+            <a:avLst/>
+          </a:prstGeom>
+          <a:solidFill>
+            <a:schemeClr val="accent2"/>
+          </a:solidFill>
+          <a:ln w="6350">
+            <a:solidFill>
+              <a:schemeClr val="accent2"/>
+            </a:solidFill>
+          </a:ln>
+        </p:spPr>
+        <p:txBody>
+          <a:bodyPr wrap="square" lIns="0" tIns="0" rIns="0" bIns="0" rtlCol="0" anchor="ctr"/>
+          <a:lstStyle/>
+          <a:p>
+            <a:pPr algn="ctr" indent="0" marL="0">
+              <a:buNone/>
+            </a:pPr>
+            <a:r>
+              <a:rPr lang="en-US" sz="1200" b="1" dirty="0">
+                <a:solidFill>
+                  <a:schemeClr val="bg1"/>
+                </a:solidFill>
+              </a:rPr>
+              <a:t>4</a:t>
+            </a:r>
+            <a:endParaRPr lang="en-US" sz="1200" dirty="0"/>
+          </a:p>
+        </p:txBody>
+      </p:sp>
+      <p:sp>
+        <p:nvSpPr>
+          <p:cNvPr id="12" name="label-244"/>
+          <p:cNvSpPr txBox="1"/>
+          <p:nvPr/>
+        </p:nvSpPr>
+        <p:spPr>
+          <a:xfrm>
+            <a:off x="8615477" y="1883664"/>
+            <a:ext cx="3027578" cy="384048"/>
+          </a:xfrm>
+          <a:prstGeom prst="rect">
+            <a:avLst/>
+          </a:prstGeom>
+          <a:noFill/>
+          <a:ln/>
+        </p:spPr>
+        <p:txBody>
+          <a:bodyPr wrap="square" lIns="0" tIns="0" rIns="0" bIns="0" rtlCol="0" anchor="ctr"/>
+          <a:lstStyle/>
+          <a:p>
+            <a:pPr algn="l" indent="0" marL="0">
+              <a:buNone/>
+            </a:pPr>
+            <a:r>
+              <a:rPr lang="en-US" sz="1600" b="1" dirty="0">
+                <a:solidFill>
+                  <a:schemeClr val="tx2"/>
+                </a:solidFill>
+              </a:rPr>
+              <a:t>查看证据</a:t>
+            </a:r>
+            <a:endParaRPr lang="en-US" sz="1600" dirty="0"/>
+          </a:p>
+        </p:txBody>
+      </p:sp>
+      <p:sp>
+        <p:nvSpPr>
+          <p:cNvPr id="13" name="label-245"/>
+          <p:cNvSpPr txBox="1"/>
+          <p:nvPr/>
+        </p:nvSpPr>
+        <p:spPr>
+          <a:xfrm>
+            <a:off x="8158277" y="2304288"/>
+            <a:ext cx="3484778" cy="502920"/>
+          </a:xfrm>
+          <a:prstGeom prst="rect">
+            <a:avLst/>
+          </a:prstGeom>
+          <a:noFill/>
+          <a:ln/>
+        </p:spPr>
+        <p:txBody>
+          <a:bodyPr wrap="square" lIns="0" tIns="0" rIns="0" bIns="0" rtlCol="0" anchor="t"/>
+          <a:lstStyle/>
+          <a:p>
+            <a:pPr algn="l" indent="0" marL="0">
+              <a:buNone/>
+            </a:pPr>
+            <a:r>
+              <a:rPr lang="en-US" sz="1200" dirty="0">
+                <a:solidFill>
+                  <a:schemeClr val="tx1"/>
+                </a:solidFill>
+              </a:rPr>
+              <a:t>查看每条证据的来源与状态（3.0 证据页）。</a:t>
+            </a:r>
+            <a:endParaRPr lang="en-US" sz="1200" dirty="0"/>
+          </a:p>
+        </p:txBody>
+      </p:sp>
+      <p:pic>
+        <p:nvPicPr>
+          <p:cNvPr id="14" name="screenshot-246" descr="自动检测到本机的 Claude Code">    </p:cNvPr>
+          <p:cNvPicPr>
+            <a:picLocks noChangeAspect="1"/>
+          </p:cNvPicPr>
+          <p:nvPr/>
+        </p:nvPicPr>
+        <p:blipFill>
+          <a:blip r:embed="rId1"/>
+          <a:stretch>
+            <a:fillRect/>
+          </a:stretch>
+        </p:blipFill>
+        <p:spPr>
+          <a:xfrm>
+            <a:off x="927854" y="2880360"/>
+            <a:ext cx="2726350" cy="2834640"/>
+          </a:xfrm>
+          <a:prstGeom prst="rect">
+            <a:avLst/>
+          </a:prstGeom>
+        </p:spPr>
+      </p:pic>
+      <p:sp>
+        <p:nvSpPr>
+          <p:cNvPr id="15" name="frame-247"/>
+          <p:cNvSpPr/>
+          <p:nvPr/>
+        </p:nvSpPr>
+        <p:spPr>
+          <a:xfrm>
+            <a:off x="927854" y="2880360"/>
+            <a:ext cx="2726350" cy="2834640"/>
+          </a:xfrm>
+          <a:prstGeom prst="rect">
+            <a:avLst/>
+          </a:prstGeom>
+          <a:solidFill>
+            <a:srgbClr val="FFFFFF">
+              <a:alpha val="0"/>
+            </a:srgbClr>
+          </a:solidFill>
+          <a:ln w="9525">
+            <a:solidFill>
+              <a:srgbClr val="D5DCE4"/>
+            </a:solidFill>
+            <a:prstDash val="solid"/>
+          </a:ln>
+        </p:spPr>
+      </p:sp>
+      <p:sp>
+        <p:nvSpPr>
+          <p:cNvPr id="16" name="label-248"/>
+          <p:cNvSpPr txBox="1"/>
+          <p:nvPr/>
+        </p:nvSpPr>
+        <p:spPr>
+          <a:xfrm>
+            <a:off x="927854" y="5788152"/>
+            <a:ext cx="2726350" cy="292608"/>
+          </a:xfrm>
+          <a:prstGeom prst="rect">
+            <a:avLst/>
+          </a:prstGeom>
+          <a:noFill/>
+          <a:ln/>
+        </p:spPr>
+        <p:txBody>
+          <a:bodyPr wrap="square" lIns="0" tIns="0" rIns="0" bIns="0" rtlCol="0" anchor="t"/>
+          <a:lstStyle/>
+          <a:p>
+            <a:pPr algn="ctr" indent="0" marL="0">
+              <a:buNone/>
+            </a:pPr>
+            <a:r>
+              <a:rPr lang="en-US" sz="1100" dirty="0">
+                <a:solidFill>
+                  <a:schemeClr val="accent6"/>
+                </a:solidFill>
+              </a:rPr>
+              <a:t>自动检测到本机的 Claude Code</a:t>
+            </a:r>
+            <a:endParaRPr lang="en-US" sz="1100" dirty="0"/>
+          </a:p>
+        </p:txBody>
+      </p:sp>
+      <p:pic>
+        <p:nvPicPr>
+          <p:cNvPr id="17" name="screenshot-249" descr="usage-ask-mention.jpg">    </p:cNvPr>
+          <p:cNvPicPr>
+            <a:picLocks noChangeAspect="1"/>
+          </p:cNvPicPr>
+          <p:nvPr/>
+        </p:nvPicPr>
+        <p:blipFill>
+          <a:blip r:embed="rId2"/>
+          <a:stretch>
+            <a:fillRect/>
+          </a:stretch>
+        </p:blipFill>
+        <p:spPr>
+          <a:xfrm>
+            <a:off x="4353458" y="2880360"/>
+            <a:ext cx="3484778" cy="867323"/>
+          </a:xfrm>
+          <a:prstGeom prst="rect">
+            <a:avLst/>
+          </a:prstGeom>
+        </p:spPr>
+      </p:pic>
+      <p:sp>
+        <p:nvSpPr>
+          <p:cNvPr id="18" name="frame-250"/>
+          <p:cNvSpPr/>
+          <p:nvPr/>
+        </p:nvSpPr>
+        <p:spPr>
+          <a:xfrm>
+            <a:off x="4353458" y="2880360"/>
+            <a:ext cx="3484778" cy="867323"/>
+          </a:xfrm>
+          <a:prstGeom prst="rect">
+            <a:avLst/>
+          </a:prstGeom>
+          <a:solidFill>
+            <a:srgbClr val="FFFFFF">
+              <a:alpha val="0"/>
+            </a:srgbClr>
+          </a:solidFill>
+          <a:ln w="9525">
+            <a:solidFill>
+              <a:srgbClr val="D5DCE4"/>
+            </a:solidFill>
+            <a:prstDash val="solid"/>
+          </a:ln>
+        </p:spPr>
+      </p:sp>
+      <p:pic>
+        <p:nvPicPr>
+          <p:cNvPr id="19" name="screenshot-251" descr="@ 点名专家；工具调用逐步可查">    </p:cNvPr>
+          <p:cNvPicPr>
+            <a:picLocks noChangeAspect="1"/>
+          </p:cNvPicPr>
+          <p:nvPr/>
+        </p:nvPicPr>
+        <p:blipFill>
+          <a:blip r:embed="rId3"/>
+          <a:stretch>
+            <a:fillRect/>
+          </a:stretch>
+        </p:blipFill>
+        <p:spPr>
+          <a:xfrm>
+            <a:off x="4353458" y="3931920"/>
+            <a:ext cx="3484778" cy="1184825"/>
+          </a:xfrm>
+          <a:prstGeom prst="rect">
+            <a:avLst/>
+          </a:prstGeom>
+        </p:spPr>
+      </p:pic>
+      <p:sp>
+        <p:nvSpPr>
+          <p:cNvPr id="20" name="frame-252"/>
+          <p:cNvSpPr/>
+          <p:nvPr/>
+        </p:nvSpPr>
+        <p:spPr>
+          <a:xfrm>
+            <a:off x="4353458" y="3931920"/>
+            <a:ext cx="3484778" cy="1184825"/>
+          </a:xfrm>
+          <a:prstGeom prst="rect">
+            <a:avLst/>
+          </a:prstGeom>
+          <a:solidFill>
+            <a:srgbClr val="FFFFFF">
+              <a:alpha val="0"/>
+            </a:srgbClr>
+          </a:solidFill>
+          <a:ln w="9525">
+            <a:solidFill>
+              <a:srgbClr val="D5DCE4"/>
+            </a:solidFill>
+            <a:prstDash val="solid"/>
+          </a:ln>
+        </p:spPr>
+      </p:sp>
+      <p:sp>
+        <p:nvSpPr>
+          <p:cNvPr id="21" name="label-253"/>
+          <p:cNvSpPr txBox="1"/>
+          <p:nvPr/>
+        </p:nvSpPr>
+        <p:spPr>
+          <a:xfrm>
+            <a:off x="4353458" y="5189897"/>
+            <a:ext cx="3484778" cy="292608"/>
+          </a:xfrm>
+          <a:prstGeom prst="rect">
+            <a:avLst/>
+          </a:prstGeom>
+          <a:noFill/>
+          <a:ln/>
+        </p:spPr>
+        <p:txBody>
+          <a:bodyPr wrap="square" lIns="0" tIns="0" rIns="0" bIns="0" rtlCol="0" anchor="t"/>
+          <a:lstStyle/>
+          <a:p>
+            <a:pPr algn="ctr" indent="0" marL="0">
+              <a:buNone/>
+            </a:pPr>
+            <a:r>
+              <a:rPr lang="en-US" sz="1100" dirty="0">
+                <a:solidFill>
+                  <a:schemeClr val="accent6"/>
+                </a:solidFill>
+              </a:rPr>
+              <a:t>@ 点名专家；工具调用逐步可查</a:t>
+            </a:r>
+            <a:endParaRPr lang="en-US" sz="1100" dirty="0"/>
+          </a:p>
+        </p:txBody>
+      </p:sp>
+      <p:pic>
+        <p:nvPicPr>
+          <p:cNvPr id="22" name="screenshot-254" descr="3.0 证据页：来源、状态、历史">    </p:cNvPr>
+          <p:cNvPicPr>
+            <a:picLocks noChangeAspect="1"/>
+          </p:cNvPicPr>
+          <p:nvPr/>
+        </p:nvPicPr>
+        <p:blipFill>
+          <a:blip r:embed="rId4"/>
+          <a:stretch>
+            <a:fillRect/>
+          </a:stretch>
+        </p:blipFill>
+        <p:spPr>
+          <a:xfrm>
+            <a:off x="8158277" y="2880360"/>
+            <a:ext cx="3484778" cy="2462577"/>
+          </a:xfrm>
+          <a:prstGeom prst="rect">
+            <a:avLst/>
+          </a:prstGeom>
+        </p:spPr>
+      </p:pic>
+      <p:sp>
+        <p:nvSpPr>
+          <p:cNvPr id="23" name="frame-255"/>
+          <p:cNvSpPr/>
+          <p:nvPr/>
+        </p:nvSpPr>
+        <p:spPr>
+          <a:xfrm>
+            <a:off x="8158277" y="2880360"/>
+            <a:ext cx="3484778" cy="2462577"/>
+          </a:xfrm>
+          <a:prstGeom prst="rect">
+            <a:avLst/>
+          </a:prstGeom>
+          <a:solidFill>
+            <a:srgbClr val="FFFFFF">
+              <a:alpha val="0"/>
+            </a:srgbClr>
+          </a:solidFill>
+          <a:ln w="9525">
+            <a:solidFill>
+              <a:srgbClr val="D5DCE4"/>
+            </a:solidFill>
+            <a:prstDash val="solid"/>
+          </a:ln>
+        </p:spPr>
+      </p:sp>
+      <p:sp>
+        <p:nvSpPr>
+          <p:cNvPr id="24" name="label-256"/>
+          <p:cNvSpPr txBox="1"/>
+          <p:nvPr/>
+        </p:nvSpPr>
+        <p:spPr>
+          <a:xfrm>
+            <a:off x="8158277" y="5416089"/>
+            <a:ext cx="3484778" cy="292608"/>
+          </a:xfrm>
+          <a:prstGeom prst="rect">
+            <a:avLst/>
+          </a:prstGeom>
+          <a:noFill/>
+          <a:ln/>
+        </p:spPr>
+        <p:txBody>
+          <a:bodyPr wrap="square" lIns="0" tIns="0" rIns="0" bIns="0" rtlCol="0" anchor="t"/>
+          <a:lstStyle/>
+          <a:p>
+            <a:pPr algn="ctr" indent="0" marL="0">
+              <a:buNone/>
+            </a:pPr>
+            <a:r>
+              <a:rPr lang="en-US" sz="1100" dirty="0">
+                <a:solidFill>
+                  <a:schemeClr val="accent6"/>
+                </a:solidFill>
+              </a:rPr>
+              <a:t>3.0 证据页：来源、状态、历史</a:t>
+            </a:r>
+            <a:endParaRPr lang="en-US" sz="1100" dirty="0"/>
+          </a:p>
+        </p:txBody>
+      </p:sp>
+      <p:sp>
+        <p:nvSpPr>
+          <p:cNvPr id="25" name="label-257"/>
+          <p:cNvSpPr txBox="1"/>
+          <p:nvPr/>
+        </p:nvSpPr>
+        <p:spPr>
+          <a:xfrm>
+            <a:off x="548640" y="6172200"/>
+            <a:ext cx="11094415" cy="256032"/>
+          </a:xfrm>
+          <a:prstGeom prst="rect">
+            <a:avLst/>
+          </a:prstGeom>
+          <a:noFill/>
+          <a:ln/>
+        </p:spPr>
+        <p:txBody>
+          <a:bodyPr wrap="square" lIns="0" tIns="0" rIns="0" bIns="0" rtlCol="0" anchor="t"/>
+          <a:lstStyle/>
+          <a:p>
+            <a:pPr algn="l" indent="0" marL="0">
+              <a:buNone/>
+            </a:pPr>
+            <a:r>
+              <a:rPr lang="en-US" sz="1050" dirty="0">
+                <a:solidFill>
+                  <a:schemeClr val="accent6"/>
+                </a:solidFill>
+              </a:rPr>
+              <a:t>演示环境使用离线示例模型生成文字；文献为 PubMed 实时检索结果。</a:t>
+            </a:r>
+            <a:endParaRPr lang="en-US" sz="1050" dirty="0"/>
+          </a:p>
+        </p:txBody>
+      </p:sp>
+      <p:sp>
+        <p:nvSpPr>
+          <p:cNvPr id="25" name="Slide Number Placeholder 0"/>
+          <p:cNvSpPr>
+            <a:spLocks noGrp="1"/>
+          </p:cNvSpPr>
+          <p:nvPr>
+            <p:ph type="sldNum" sz="quarter" idx="4294967295"/>
+          </p:nvPr>
+        </p:nvSpPr>
+        <p:spPr>
+          <a:xfrm>
+            <a:off x="11094415" y="6446520"/>
+            <a:ext cx="548640" cy="274320"/>
+          </a:xfrm>
+          <a:prstGeom prst="rect">
+            <a:avLst/>
+          </a:prstGeom>
+          <a:extLst>
+            <a:ext uri="{C572A759-6A51-4108-AA02-DFA0A04FC94B}">
+              <ma14:wrappingTextBoxFlag xmlns:ma14="http://schemas.microsoft.com/office/mac/drawingml/2011/main" val="0"/>
+            </a:ext>
+          </a:extLst>
+        </p:spPr>
+        <p:txBody>
+          <a:bodyPr/>
+          <a:lstStyle>
+            <a:lvl1pPr>
+              <a:defRPr sz="1000">
+                <a:solidFill>
+                  <a:schemeClr val="accent6"/>
+                </a:solidFill>
+              </a:defRPr>
+            </a:lvl1pPr>
+          </a:lstStyle>
+          <a:p>
+            <a:pPr algn="r"/>
+            <a:fld id="{F7021451-1387-4CA6-816F-3879F97B5CBC}" type="slidenum">
+              <a:rPr b="0" lang="en-US"/>
+              <a:t>12</a:t>
+            </a:fld>
+            <a:endParaRPr lang="en-US"/>
+          </a:p>
+        </p:txBody>
+      </p:sp>
+    </p:spTree>
+  </p:cSld>
+  <p:clrMapOvr>
+    <a:masterClrMapping/>
+  </p:clrMapOvr>
+</p:sld>
+</file>
+
+<file path=ppt/slides/slide13.xml><?xml version="1.0" encoding="utf-8"?>
+<p:sld xmlns:a="http://schemas.openxmlformats.org/drawingml/2006/main" xmlns:r="http://schemas.openxmlformats.org/officeDocument/2006/relationships" xmlns:p="http://schemas.openxmlformats.org/presentationml/2006/main">
+  <p:cSld name="Slide 13">
+    <p:spTree>
+      <p:nvGrpSpPr>
+        <p:cNvPr id="1" name=""/>
+        <p:cNvGrpSpPr/>
+        <p:nvPr/>
+      </p:nvGrpSpPr>
+      <p:grpSpPr>
+        <a:xfrm>
+          <a:off x="0" y="0"/>
+          <a:ext cx="0" cy="0"/>
+          <a:chOff x="0" y="0"/>
+          <a:chExt cx="0" cy="0"/>
+        </a:xfrm>
+      </p:grpSpPr>
+      <p:sp>
+        <p:nvSpPr>
+          <p:cNvPr id="2" name="Text 0"/>
+          <p:cNvSpPr/>
+          <p:nvPr>
+            <p:ph idx="100" type="title" hasCustomPrompt="1"/>
+          </p:nvPr>
+        </p:nvSpPr>
+        <p:spPr>
+          <a:xfrm>
+            <a:off x="548640" y="320040"/>
+            <a:ext cx="11094415" cy="640080"/>
+          </a:xfrm>
+          <a:prstGeom prst="rect">
+            <a:avLst/>
+          </a:prstGeom>
+          <a:noFill/>
+          <a:ln/>
+        </p:spPr>
+        <p:txBody>
+          <a:bodyPr wrap="square" lIns="0" tIns="0" rIns="0" bIns="0" rtlCol="0" anchor="ctr"/>
+          <a:lstStyle/>
+          <a:p>
+            <a:pPr algn="l" indent="0" marL="0">
+              <a:buNone/>
+            </a:pPr>
+            <a:r>
+              <a:rPr lang="en-US" sz="2800" b="1" dirty="0">
+                <a:solidFill>
+                  <a:schemeClr val="tx2"/>
+                </a:solidFill>
+              </a:rPr>
+              <a:t>当前进展与下一步</a:t>
+            </a:r>
+            <a:endParaRPr lang="en-US" sz="2800" dirty="0"/>
+          </a:p>
+        </p:txBody>
+      </p:sp>
+      <p:sp>
+        <p:nvSpPr>
+          <p:cNvPr id="3" name="Text 0"/>
+          <p:cNvSpPr/>
+          <p:nvPr>
+            <p:ph idx="101" type="body" hasCustomPrompt="1"/>
+          </p:nvPr>
+        </p:nvSpPr>
+        <p:spPr>
+          <a:xfrm>
+            <a:off x="548640" y="960120"/>
+            <a:ext cx="11094415" cy="411480"/>
+          </a:xfrm>
+          <a:prstGeom prst="rect">
+            <a:avLst/>
+          </a:prstGeom>
+          <a:noFill/>
+          <a:ln/>
+        </p:spPr>
+        <p:txBody>
+          <a:bodyPr wrap="square" lIns="0" tIns="0" rIns="0" bIns="0" rtlCol="0" anchor="ctr"/>
+          <a:lstStyle/>
+          <a:p>
+            <a:pPr algn="l" indent="0" marL="0">
+              <a:buNone/>
+            </a:pPr>
+            <a:r>
+              <a:rPr lang="en-US" sz="1500" dirty="0">
+                <a:solidFill>
+                  <a:schemeClr val="accent6"/>
+                </a:solidFill>
+              </a:rPr>
               <a:t>B、C 已落地；A 类三个设计中，时间证据状态机已有原型，其余两个在设计中。</a:t>
             </a:r>
             <a:endParaRPr lang="en-US" sz="1500" dirty="0"/>
@@ -4051,7 +5599,7 @@
       </p:sp>
       <p:sp>
         <p:nvSpPr>
-          <p:cNvPr id="4" name="card-250"/>
+          <p:cNvPr id="4" name="card-258"/>
           <p:cNvSpPr/>
           <p:nvPr/>
         </p:nvSpPr>
@@ -4078,7 +5626,7 @@
       </p:sp>
       <p:sp>
         <p:nvSpPr>
-          <p:cNvPr id="5" name="badge-251"/>
+          <p:cNvPr id="5" name="badge-259"/>
           <p:cNvSpPr/>
           <p:nvPr/>
         </p:nvSpPr>
@@ -4120,7 +5668,7 @@
       </p:sp>
       <p:sp>
         <p:nvSpPr>
-          <p:cNvPr id="6" name="label-252"/>
+          <p:cNvPr id="6" name="label-260"/>
           <p:cNvSpPr txBox="1"/>
           <p:nvPr/>
         </p:nvSpPr>
@@ -4156,7 +5704,7 @@
       </p:sp>
       <p:sp>
         <p:nvSpPr>
-          <p:cNvPr id="7" name="bullets-253"/>
+          <p:cNvPr id="7" name="bullets-261"/>
           <p:cNvSpPr txBox="1"/>
           <p:nvPr/>
         </p:nvSpPr>
@@ -4250,7 +5798,7 @@
       </p:sp>
       <p:sp>
         <p:nvSpPr>
-          <p:cNvPr id="8" name="card-254"/>
+          <p:cNvPr id="8" name="card-262"/>
           <p:cNvSpPr/>
           <p:nvPr/>
         </p:nvSpPr>
@@ -4277,7 +5825,7 @@
       </p:sp>
       <p:sp>
         <p:nvSpPr>
-          <p:cNvPr id="9" name="badge-255"/>
+          <p:cNvPr id="9" name="badge-263"/>
           <p:cNvSpPr/>
           <p:nvPr/>
         </p:nvSpPr>
@@ -4319,7 +5867,7 @@
       </p:sp>
       <p:sp>
         <p:nvSpPr>
-          <p:cNvPr id="10" name="label-256"/>
+          <p:cNvPr id="10" name="label-264"/>
           <p:cNvSpPr txBox="1"/>
           <p:nvPr/>
         </p:nvSpPr>
@@ -4355,7 +5903,7 @@
       </p:sp>
       <p:sp>
         <p:nvSpPr>
-          <p:cNvPr id="11" name="bullets-257"/>
+          <p:cNvPr id="11" name="bullets-265"/>
           <p:cNvSpPr txBox="1"/>
           <p:nvPr/>
         </p:nvSpPr>
@@ -4431,7 +5979,7 @@
       </p:sp>
       <p:sp>
         <p:nvSpPr>
-          <p:cNvPr id="12" name="card-258"/>
+          <p:cNvPr id="12" name="card-266"/>
           <p:cNvSpPr/>
           <p:nvPr/>
         </p:nvSpPr>
@@ -4458,7 +6006,7 @@
       </p:sp>
       <p:sp>
         <p:nvSpPr>
-          <p:cNvPr id="13" name="badge-259"/>
+          <p:cNvPr id="13" name="badge-267"/>
           <p:cNvSpPr/>
           <p:nvPr/>
         </p:nvSpPr>
@@ -4500,7 +6048,7 @@
       </p:sp>
       <p:sp>
         <p:nvSpPr>
-          <p:cNvPr id="14" name="label-260"/>
+          <p:cNvPr id="14" name="label-268"/>
           <p:cNvSpPr txBox="1"/>
           <p:nvPr/>
         </p:nvSpPr>
@@ -4536,7 +6084,7 @@
       </p:sp>
       <p:sp>
         <p:nvSpPr>
-          <p:cNvPr id="15" name="bullets-261"/>
+          <p:cNvPr id="15" name="bullets-269"/>
           <p:cNvSpPr txBox="1"/>
           <p:nvPr/>
         </p:nvSpPr>
@@ -4630,7 +6178,7 @@
       </p:sp>
       <p:sp>
         <p:nvSpPr>
-          <p:cNvPr id="16" name="ask-262"/>
+          <p:cNvPr id="16" name="ask-270"/>
           <p:cNvSpPr/>
           <p:nvPr/>
         </p:nvSpPr>
@@ -4657,7 +6205,7 @@
       </p:sp>
       <p:sp>
         <p:nvSpPr>
-          <p:cNvPr id="17" name="label-263"/>
+          <p:cNvPr id="17" name="label-271"/>
           <p:cNvSpPr txBox="1"/>
           <p:nvPr/>
         </p:nvSpPr>
@@ -4730,7 +6278,7 @@
             <a:pPr algn="r"/>
             <a:fld id="{F7021451-1387-4CA6-816F-3879F97B5CBC}" type="slidenum">
               <a:rPr b="0" lang="en-US"/>
-              <a:t>12</a:t>
+              <a:t>13</a:t>
             </a:fld>
             <a:endParaRPr lang="en-US"/>
           </a:p>
@@ -14105,7 +15653,7 @@
         <p:spPr>
           <a:xfrm>
             <a:off x="6583680" y="1554480"/>
-            <a:ext cx="2438248" cy="2697480"/>
+            <a:ext cx="2438248" cy="2743200"/>
           </a:xfrm>
           <a:prstGeom prst="roundRect">
             <a:avLst>
@@ -14262,7 +15810,7 @@
         <p:spPr>
           <a:xfrm>
             <a:off x="9204808" y="1554480"/>
-            <a:ext cx="2438248" cy="2697480"/>
+            <a:ext cx="2438248" cy="2743200"/>
           </a:xfrm>
           <a:prstGeom prst="roundRect">
             <a:avLst>
@@ -14412,18 +15960,18 @@
       </p:sp>
       <p:sp>
         <p:nvSpPr>
-          <p:cNvPr id="24" name="card-173"/>
-          <p:cNvSpPr/>
-          <p:nvPr/>
-        </p:nvSpPr>
-        <p:spPr>
-          <a:xfrm>
-            <a:off x="6583680" y="4389120"/>
-            <a:ext cx="5059375" cy="1371600"/>
+          <p:cNvPr id="24" name="box-173"/>
+          <p:cNvSpPr/>
+          <p:nvPr/>
+        </p:nvSpPr>
+        <p:spPr>
+          <a:xfrm>
+            <a:off x="6583680" y="4434840"/>
+            <a:ext cx="5059375" cy="1325880"/>
           </a:xfrm>
           <a:prstGeom prst="roundRect">
             <a:avLst>
-              <a:gd name="adj" fmla="val 6667"/>
+              <a:gd name="adj" fmla="val 5517"/>
             </a:avLst>
           </a:prstGeom>
           <a:solidFill>
@@ -14431,87 +15979,46 @@
           </a:solidFill>
           <a:ln w="12700">
             <a:solidFill>
-              <a:srgbClr val="FBF4EC"/>
+              <a:srgbClr val="C9792A"/>
             </a:solidFill>
-            <a:prstDash val="solid"/>
           </a:ln>
         </p:spPr>
-      </p:sp>
-      <p:sp>
-        <p:nvSpPr>
-          <p:cNvPr id="25" name="label-174"/>
-          <p:cNvSpPr txBox="1"/>
-          <p:nvPr/>
-        </p:nvSpPr>
-        <p:spPr>
-          <a:xfrm>
-            <a:off x="6766560" y="4480560"/>
-            <a:ext cx="4693615" cy="292608"/>
-          </a:xfrm>
-          <a:prstGeom prst="rect">
-            <a:avLst/>
-          </a:prstGeom>
-          <a:noFill/>
-          <a:ln/>
-        </p:spPr>
-        <p:txBody>
-          <a:bodyPr wrap="square" lIns="0" tIns="0" rIns="0" bIns="0" rtlCol="0" anchor="t"/>
-          <a:lstStyle/>
-          <a:p>
-            <a:pPr algn="l" indent="0" marL="0">
-              <a:buNone/>
-            </a:pPr>
-            <a:r>
-              <a:rPr lang="en-US" sz="1250" b="1" dirty="0">
+        <p:txBody>
+          <a:bodyPr wrap="square" lIns="762" tIns="762" rIns="762" bIns="762" rtlCol="0" anchor="ctr"/>
+          <a:lstStyle/>
+          <a:p>
+            <a:pPr algn="ctr" indent="0" marL="0">
+              <a:buNone/>
+            </a:pPr>
+            <a:r>
+              <a:rPr lang="en-US" sz="1500" b="1" dirty="0">
                 <a:solidFill>
                   <a:schemeClr val="tx2"/>
                 </a:solidFill>
               </a:rPr>
-              <a:t>例：17-OHPC（Makena）预防早产</a:t>
-            </a:r>
-            <a:endParaRPr lang="en-US" sz="1250" dirty="0"/>
-          </a:p>
-        </p:txBody>
-      </p:sp>
-      <p:sp>
-        <p:nvSpPr>
-          <p:cNvPr id="26" name="label-175"/>
-          <p:cNvSpPr txBox="1"/>
-          <p:nvPr/>
-        </p:nvSpPr>
-        <p:spPr>
-          <a:xfrm>
-            <a:off x="6766560" y="4773168"/>
-            <a:ext cx="4693615" cy="960120"/>
-          </a:xfrm>
-          <a:prstGeom prst="rect">
-            <a:avLst/>
-          </a:prstGeom>
-          <a:noFill/>
-          <a:ln/>
-        </p:spPr>
-        <p:txBody>
-          <a:bodyPr wrap="square" lIns="0" tIns="0" rIns="0" bIns="0" rtlCol="0" anchor="t"/>
-          <a:lstStyle/>
-          <a:p>
-            <a:pPr algn="l" indent="0" marL="0">
-              <a:buNone/>
-            </a:pPr>
-            <a:r>
-              <a:rPr lang="en-US" sz="1100" dirty="0">
-                <a:solidFill>
-                  <a:schemeClr val="tx1"/>
-                </a:solidFill>
-              </a:rPr>
-              <a:t>已有支持：Meis 试验（NEJM 2003，PMID 12802023）。矛盾优先会主动去找最可能推翻它的证据——确证试验 PROLONG（Am J Perinatol 2020，PMID 31652479）未见效果，FDA 于 2023 年撤销批准。</a:t>
-            </a:r>
-            <a:endParaRPr lang="en-US" sz="1100" dirty="0"/>
-          </a:p>
-        </p:txBody>
-      </p:sp>
-      <p:sp>
-        <p:nvSpPr>
-          <p:cNvPr id="27" name="box-176"/>
+              <a:t>真实例子见下一页：</a:t>
+            </a:r>
+            <a:endParaRPr lang="en-US" sz="1500" dirty="0"/>
+          </a:p>
+          <a:p>
+            <a:pPr algn="ctr" indent="0" marL="0">
+              <a:buNone/>
+            </a:pPr>
+            <a:r>
+              <a:rPr lang="en-US" sz="1500" b="1" dirty="0">
+                <a:solidFill>
+                  <a:schemeClr val="tx2"/>
+                </a:solidFill>
+              </a:rPr>
+              <a:t>CETP 抑制剂与 HDL</a:t>
+            </a:r>
+            <a:endParaRPr lang="en-US" sz="1500" dirty="0"/>
+          </a:p>
+        </p:txBody>
+      </p:sp>
+      <p:sp>
+        <p:nvSpPr>
+          <p:cNvPr id="25" name="box-174"/>
           <p:cNvSpPr/>
           <p:nvPr/>
         </p:nvSpPr>
@@ -14655,7 +16162,7 @@
                   <a:schemeClr val="tx2"/>
                 </a:solidFill>
               </a:rPr>
-              <a:t>B 类设计：多智能体协作：像课题组一样分工</a:t>
+              <a:t>A 类设计 3 例子：CETP 抑制剂与 HDL</a:t>
             </a:r>
             <a:endParaRPr lang="en-US" sz="2800" dirty="0"/>
           </a:p>
@@ -14693,7 +16200,7 @@
                   <a:schemeClr val="accent6"/>
                 </a:solidFill>
               </a:rPr>
-              <a:t>B 类管“谁来做、谁把关”：像课题组一样，有人规划、有人执行、有人审查、有人成文。</a:t>
+              <a:t>在做决定之前，先去找最可能推翻结论的证据。</a:t>
             </a:r>
             <a:endParaRPr lang="en-US" sz="1500" dirty="0"/>
           </a:p>
@@ -14701,43 +16208,43 @@
       </p:sp>
       <p:sp>
         <p:nvSpPr>
-          <p:cNvPr id="4" name="box-177"/>
-          <p:cNvSpPr/>
-          <p:nvPr/>
-        </p:nvSpPr>
-        <p:spPr>
-          <a:xfrm>
-            <a:off x="548640" y="1691640"/>
-            <a:ext cx="1962851" cy="685800"/>
+          <p:cNvPr id="4" name="box-175"/>
+          <p:cNvSpPr/>
+          <p:nvPr/>
+        </p:nvSpPr>
+        <p:spPr>
+          <a:xfrm>
+            <a:off x="548640" y="1508760"/>
+            <a:ext cx="11094415" cy="475488"/>
           </a:xfrm>
           <a:prstGeom prst="roundRect">
             <a:avLst>
-              <a:gd name="adj" fmla="val 10667"/>
+              <a:gd name="adj" fmla="val 15385"/>
             </a:avLst>
           </a:prstGeom>
           <a:solidFill>
-            <a:srgbClr val="F2F5F8"/>
+            <a:schemeClr val="tx2"/>
           </a:solidFill>
           <a:ln w="6350">
             <a:solidFill>
-              <a:srgbClr val="F2F5F8"/>
+              <a:schemeClr val="tx2"/>
             </a:solidFill>
           </a:ln>
         </p:spPr>
         <p:txBody>
-          <a:bodyPr wrap="square" lIns="762" tIns="762" rIns="762" bIns="762" rtlCol="0" anchor="ctr"/>
-          <a:lstStyle/>
-          <a:p>
-            <a:pPr algn="ctr" indent="0" marL="0">
+          <a:bodyPr wrap="square" lIns="1905" tIns="1905" rIns="1905" bIns="1905" rtlCol="0" anchor="ctr"/>
+          <a:lstStyle/>
+          <a:p>
+            <a:pPr algn="l" indent="0" marL="0">
               <a:buNone/>
             </a:pPr>
             <a:r>
               <a:rPr lang="en-US" sz="1500" b="1" dirty="0">
                 <a:solidFill>
-                  <a:schemeClr val="tx2"/>
-                </a:solidFill>
-              </a:rPr>
-              <a:t>研究课题</a:t>
+                  <a:schemeClr val="bg1"/>
+                </a:solidFill>
+              </a:rPr>
+              <a:t>结论（claim）：用 CETP 抑制剂升高"好胆固醇" HDL，可以降低心血管风险。</a:t>
             </a:r>
             <a:endParaRPr lang="en-US" sz="1500" dirty="0"/>
           </a:p>
@@ -14745,470 +16252,18 @@
       </p:sp>
       <p:sp>
         <p:nvSpPr>
-          <p:cNvPr id="5" name="label-178"/>
-          <p:cNvSpPr txBox="1"/>
-          <p:nvPr/>
-        </p:nvSpPr>
-        <p:spPr>
-          <a:xfrm>
-            <a:off x="548640" y="2450592"/>
-            <a:ext cx="1962851" cy="274320"/>
-          </a:xfrm>
-          <a:prstGeom prst="rect">
-            <a:avLst/>
-          </a:prstGeom>
-          <a:noFill/>
-          <a:ln/>
-        </p:spPr>
-        <p:txBody>
-          <a:bodyPr wrap="square" lIns="0" tIns="0" rIns="0" bIns="0" rtlCol="0" anchor="t"/>
-          <a:lstStyle/>
-          <a:p>
-            <a:pPr algn="ctr" indent="0" marL="0">
-              <a:buNone/>
-            </a:pPr>
-            <a:r>
-              <a:rPr lang="en-US" sz="1150" dirty="0">
-                <a:solidFill>
-                  <a:schemeClr val="accent6"/>
-                </a:solidFill>
-              </a:rPr>
-              <a:t>用户提出</a:t>
-            </a:r>
-            <a:endParaRPr lang="en-US" sz="1150" dirty="0"/>
-          </a:p>
-        </p:txBody>
-      </p:sp>
-      <p:sp>
-        <p:nvSpPr>
-          <p:cNvPr id="6" name="arrow-179"/>
-          <p:cNvSpPr/>
-          <p:nvPr/>
-        </p:nvSpPr>
-        <p:spPr>
-          <a:xfrm>
-            <a:off x="2538923" y="2029968"/>
-            <a:ext cx="265176" cy="0"/>
-          </a:xfrm>
-          <a:prstGeom prst="line">
-            <a:avLst/>
-          </a:prstGeom>
-          <a:noFill/>
-          <a:ln w="19050">
-            <a:solidFill>
-              <a:schemeClr val="accent2"/>
-            </a:solidFill>
-            <a:prstDash val="solid"/>
-            <a:tailEnd type="triangle"/>
-          </a:ln>
-        </p:spPr>
-      </p:sp>
-      <p:sp>
-        <p:nvSpPr>
-          <p:cNvPr id="7" name="box-180"/>
-          <p:cNvSpPr/>
-          <p:nvPr/>
-        </p:nvSpPr>
-        <p:spPr>
-          <a:xfrm>
-            <a:off x="2831531" y="1691640"/>
-            <a:ext cx="1962851" cy="685800"/>
+          <p:cNvPr id="5" name="card-176"/>
+          <p:cNvSpPr/>
+          <p:nvPr/>
+        </p:nvSpPr>
+        <p:spPr>
+          <a:xfrm>
+            <a:off x="548640" y="2121408"/>
+            <a:ext cx="3794760" cy="1481328"/>
           </a:xfrm>
           <a:prstGeom prst="roundRect">
             <a:avLst>
-              <a:gd name="adj" fmla="val 10667"/>
-            </a:avLst>
-          </a:prstGeom>
-          <a:solidFill>
-            <a:srgbClr val="F2F5F8"/>
-          </a:solidFill>
-          <a:ln w="6350">
-            <a:solidFill>
-              <a:srgbClr val="F2F5F8"/>
-            </a:solidFill>
-          </a:ln>
-        </p:spPr>
-        <p:txBody>
-          <a:bodyPr wrap="square" lIns="762" tIns="762" rIns="762" bIns="762" rtlCol="0" anchor="ctr"/>
-          <a:lstStyle/>
-          <a:p>
-            <a:pPr algn="ctr" indent="0" marL="0">
-              <a:buNone/>
-            </a:pPr>
-            <a:r>
-              <a:rPr lang="en-US" sz="1500" b="1" dirty="0">
-                <a:solidFill>
-                  <a:schemeClr val="tx2"/>
-                </a:solidFill>
-              </a:rPr>
-              <a:t>队长规划</a:t>
-            </a:r>
-            <a:endParaRPr lang="en-US" sz="1500" dirty="0"/>
-          </a:p>
-        </p:txBody>
-      </p:sp>
-      <p:sp>
-        <p:nvSpPr>
-          <p:cNvPr id="8" name="label-181"/>
-          <p:cNvSpPr txBox="1"/>
-          <p:nvPr/>
-        </p:nvSpPr>
-        <p:spPr>
-          <a:xfrm>
-            <a:off x="2831531" y="2450592"/>
-            <a:ext cx="1962851" cy="274320"/>
-          </a:xfrm>
-          <a:prstGeom prst="rect">
-            <a:avLst/>
-          </a:prstGeom>
-          <a:noFill/>
-          <a:ln/>
-        </p:spPr>
-        <p:txBody>
-          <a:bodyPr wrap="square" lIns="0" tIns="0" rIns="0" bIns="0" rtlCol="0" anchor="t"/>
-          <a:lstStyle/>
-          <a:p>
-            <a:pPr algn="ctr" indent="0" marL="0">
-              <a:buNone/>
-            </a:pPr>
-            <a:r>
-              <a:rPr lang="en-US" sz="1150" dirty="0">
-                <a:solidFill>
-                  <a:schemeClr val="accent6"/>
-                </a:solidFill>
-              </a:rPr>
-              <a:t>PI 拆解任务</a:t>
-            </a:r>
-            <a:endParaRPr lang="en-US" sz="1150" dirty="0"/>
-          </a:p>
-        </p:txBody>
-      </p:sp>
-      <p:sp>
-        <p:nvSpPr>
-          <p:cNvPr id="9" name="arrow-182"/>
-          <p:cNvSpPr/>
-          <p:nvPr/>
-        </p:nvSpPr>
-        <p:spPr>
-          <a:xfrm>
-            <a:off x="4821814" y="2029968"/>
-            <a:ext cx="265176" cy="0"/>
-          </a:xfrm>
-          <a:prstGeom prst="line">
-            <a:avLst/>
-          </a:prstGeom>
-          <a:noFill/>
-          <a:ln w="19050">
-            <a:solidFill>
-              <a:schemeClr val="accent2"/>
-            </a:solidFill>
-            <a:prstDash val="solid"/>
-            <a:tailEnd type="triangle"/>
-          </a:ln>
-        </p:spPr>
-      </p:sp>
-      <p:sp>
-        <p:nvSpPr>
-          <p:cNvPr id="10" name="box-183"/>
-          <p:cNvSpPr/>
-          <p:nvPr/>
-        </p:nvSpPr>
-        <p:spPr>
-          <a:xfrm>
-            <a:off x="5114422" y="1691640"/>
-            <a:ext cx="1962851" cy="685800"/>
-          </a:xfrm>
-          <a:prstGeom prst="roundRect">
-            <a:avLst>
-              <a:gd name="adj" fmla="val 10667"/>
-            </a:avLst>
-          </a:prstGeom>
-          <a:solidFill>
-            <a:srgbClr val="F2F5F8"/>
-          </a:solidFill>
-          <a:ln w="6350">
-            <a:solidFill>
-              <a:srgbClr val="F2F5F8"/>
-            </a:solidFill>
-          </a:ln>
-        </p:spPr>
-        <p:txBody>
-          <a:bodyPr wrap="square" lIns="762" tIns="762" rIns="762" bIns="762" rtlCol="0" anchor="ctr"/>
-          <a:lstStyle/>
-          <a:p>
-            <a:pPr algn="ctr" indent="0" marL="0">
-              <a:buNone/>
-            </a:pPr>
-            <a:r>
-              <a:rPr lang="en-US" sz="1500" b="1" dirty="0">
-                <a:solidFill>
-                  <a:schemeClr val="tx2"/>
-                </a:solidFill>
-              </a:rPr>
-              <a:t>成员并行</a:t>
-            </a:r>
-            <a:endParaRPr lang="en-US" sz="1500" dirty="0"/>
-          </a:p>
-        </p:txBody>
-      </p:sp>
-      <p:sp>
-        <p:nvSpPr>
-          <p:cNvPr id="11" name="label-184"/>
-          <p:cNvSpPr txBox="1"/>
-          <p:nvPr/>
-        </p:nvSpPr>
-        <p:spPr>
-          <a:xfrm>
-            <a:off x="5114422" y="2450592"/>
-            <a:ext cx="1962851" cy="274320"/>
-          </a:xfrm>
-          <a:prstGeom prst="rect">
-            <a:avLst/>
-          </a:prstGeom>
-          <a:noFill/>
-          <a:ln/>
-        </p:spPr>
-        <p:txBody>
-          <a:bodyPr wrap="square" lIns="0" tIns="0" rIns="0" bIns="0" rtlCol="0" anchor="t"/>
-          <a:lstStyle/>
-          <a:p>
-            <a:pPr algn="ctr" indent="0" marL="0">
-              <a:buNone/>
-            </a:pPr>
-            <a:r>
-              <a:rPr lang="en-US" sz="1150" dirty="0">
-                <a:solidFill>
-                  <a:schemeClr val="accent6"/>
-                </a:solidFill>
-              </a:rPr>
-              <a:t>领域专家执行</a:t>
-            </a:r>
-            <a:endParaRPr lang="en-US" sz="1150" dirty="0"/>
-          </a:p>
-        </p:txBody>
-      </p:sp>
-      <p:sp>
-        <p:nvSpPr>
-          <p:cNvPr id="12" name="arrow-185"/>
-          <p:cNvSpPr/>
-          <p:nvPr/>
-        </p:nvSpPr>
-        <p:spPr>
-          <a:xfrm>
-            <a:off x="7104705" y="2029968"/>
-            <a:ext cx="265176" cy="0"/>
-          </a:xfrm>
-          <a:prstGeom prst="line">
-            <a:avLst/>
-          </a:prstGeom>
-          <a:noFill/>
-          <a:ln w="19050">
-            <a:solidFill>
-              <a:schemeClr val="accent2"/>
-            </a:solidFill>
-            <a:prstDash val="solid"/>
-            <a:tailEnd type="triangle"/>
-          </a:ln>
-        </p:spPr>
-      </p:sp>
-      <p:sp>
-        <p:nvSpPr>
-          <p:cNvPr id="13" name="box-186"/>
-          <p:cNvSpPr/>
-          <p:nvPr/>
-        </p:nvSpPr>
-        <p:spPr>
-          <a:xfrm>
-            <a:off x="7397313" y="1691640"/>
-            <a:ext cx="1962851" cy="685800"/>
-          </a:xfrm>
-          <a:prstGeom prst="roundRect">
-            <a:avLst>
-              <a:gd name="adj" fmla="val 10667"/>
-            </a:avLst>
-          </a:prstGeom>
-          <a:solidFill>
-            <a:srgbClr val="E3F3F1"/>
-          </a:solidFill>
-          <a:ln w="12700">
-            <a:solidFill>
-              <a:srgbClr val="0E8A7E"/>
-            </a:solidFill>
-          </a:ln>
-        </p:spPr>
-        <p:txBody>
-          <a:bodyPr wrap="square" lIns="762" tIns="762" rIns="762" bIns="762" rtlCol="0" anchor="ctr"/>
-          <a:lstStyle/>
-          <a:p>
-            <a:pPr algn="ctr" indent="0" marL="0">
-              <a:buNone/>
-            </a:pPr>
-            <a:r>
-              <a:rPr lang="en-US" sz="1500" b="1" dirty="0">
-                <a:solidFill>
-                  <a:schemeClr val="tx2"/>
-                </a:solidFill>
-              </a:rPr>
-              <a:t>质量门</a:t>
-            </a:r>
-            <a:endParaRPr lang="en-US" sz="1500" dirty="0"/>
-          </a:p>
-        </p:txBody>
-      </p:sp>
-      <p:sp>
-        <p:nvSpPr>
-          <p:cNvPr id="14" name="label-187"/>
-          <p:cNvSpPr txBox="1"/>
-          <p:nvPr/>
-        </p:nvSpPr>
-        <p:spPr>
-          <a:xfrm>
-            <a:off x="7397313" y="2450592"/>
-            <a:ext cx="1962851" cy="274320"/>
-          </a:xfrm>
-          <a:prstGeom prst="rect">
-            <a:avLst/>
-          </a:prstGeom>
-          <a:noFill/>
-          <a:ln/>
-        </p:spPr>
-        <p:txBody>
-          <a:bodyPr wrap="square" lIns="0" tIns="0" rIns="0" bIns="0" rtlCol="0" anchor="t"/>
-          <a:lstStyle/>
-          <a:p>
-            <a:pPr algn="ctr" indent="0" marL="0">
-              <a:buNone/>
-            </a:pPr>
-            <a:r>
-              <a:rPr lang="en-US" sz="1150" dirty="0">
-                <a:solidFill>
-                  <a:schemeClr val="accent6"/>
-                </a:solidFill>
-              </a:rPr>
-              <a:t>规则 + 审查员</a:t>
-            </a:r>
-            <a:endParaRPr lang="en-US" sz="1150" dirty="0"/>
-          </a:p>
-        </p:txBody>
-      </p:sp>
-      <p:sp>
-        <p:nvSpPr>
-          <p:cNvPr id="15" name="arrow-188"/>
-          <p:cNvSpPr/>
-          <p:nvPr/>
-        </p:nvSpPr>
-        <p:spPr>
-          <a:xfrm>
-            <a:off x="9387596" y="2029968"/>
-            <a:ext cx="265176" cy="0"/>
-          </a:xfrm>
-          <a:prstGeom prst="line">
-            <a:avLst/>
-          </a:prstGeom>
-          <a:noFill/>
-          <a:ln w="19050">
-            <a:solidFill>
-              <a:schemeClr val="accent2"/>
-            </a:solidFill>
-            <a:prstDash val="solid"/>
-            <a:tailEnd type="triangle"/>
-          </a:ln>
-        </p:spPr>
-      </p:sp>
-      <p:sp>
-        <p:nvSpPr>
-          <p:cNvPr id="16" name="box-189"/>
-          <p:cNvSpPr/>
-          <p:nvPr/>
-        </p:nvSpPr>
-        <p:spPr>
-          <a:xfrm>
-            <a:off x="9680204" y="1691640"/>
-            <a:ext cx="1962851" cy="685800"/>
-          </a:xfrm>
-          <a:prstGeom prst="roundRect">
-            <a:avLst>
-              <a:gd name="adj" fmla="val 10667"/>
-            </a:avLst>
-          </a:prstGeom>
-          <a:solidFill>
-            <a:srgbClr val="F2F5F8"/>
-          </a:solidFill>
-          <a:ln w="6350">
-            <a:solidFill>
-              <a:srgbClr val="F2F5F8"/>
-            </a:solidFill>
-          </a:ln>
-        </p:spPr>
-        <p:txBody>
-          <a:bodyPr wrap="square" lIns="762" tIns="762" rIns="762" bIns="762" rtlCol="0" anchor="ctr"/>
-          <a:lstStyle/>
-          <a:p>
-            <a:pPr algn="ctr" indent="0" marL="0">
-              <a:buNone/>
-            </a:pPr>
-            <a:r>
-              <a:rPr lang="en-US" sz="1500" b="1" dirty="0">
-                <a:solidFill>
-                  <a:schemeClr val="tx2"/>
-                </a:solidFill>
-              </a:rPr>
-              <a:t>综合报告</a:t>
-            </a:r>
-            <a:endParaRPr lang="en-US" sz="1500" dirty="0"/>
-          </a:p>
-        </p:txBody>
-      </p:sp>
-      <p:sp>
-        <p:nvSpPr>
-          <p:cNvPr id="17" name="label-190"/>
-          <p:cNvSpPr txBox="1"/>
-          <p:nvPr/>
-        </p:nvSpPr>
-        <p:spPr>
-          <a:xfrm>
-            <a:off x="9680204" y="2450592"/>
-            <a:ext cx="1962851" cy="274320"/>
-          </a:xfrm>
-          <a:prstGeom prst="rect">
-            <a:avLst/>
-          </a:prstGeom>
-          <a:noFill/>
-          <a:ln/>
-        </p:spPr>
-        <p:txBody>
-          <a:bodyPr wrap="square" lIns="0" tIns="0" rIns="0" bIns="0" rtlCol="0" anchor="t"/>
-          <a:lstStyle/>
-          <a:p>
-            <a:pPr algn="ctr" indent="0" marL="0">
-              <a:buNone/>
-            </a:pPr>
-            <a:r>
-              <a:rPr lang="en-US" sz="1150" dirty="0">
-                <a:solidFill>
-                  <a:schemeClr val="accent6"/>
-                </a:solidFill>
-              </a:rPr>
-              <a:t>写作专家成文</a:t>
-            </a:r>
-            <a:endParaRPr lang="en-US" sz="1150" dirty="0"/>
-          </a:p>
-        </p:txBody>
-      </p:sp>
-      <p:sp>
-        <p:nvSpPr>
-          <p:cNvPr id="18" name="card-191"/>
-          <p:cNvSpPr/>
-          <p:nvPr/>
-        </p:nvSpPr>
-        <p:spPr>
-          <a:xfrm>
-            <a:off x="548640" y="2971800"/>
-            <a:ext cx="2602154" cy="1965960"/>
-          </a:xfrm>
-          <a:prstGeom prst="roundRect">
-            <a:avLst>
-              <a:gd name="adj" fmla="val 4651"/>
+              <a:gd name="adj" fmla="val 6173"/>
             </a:avLst>
           </a:prstGeom>
           <a:solidFill>
@@ -15224,56 +16279,14 @@
       </p:sp>
       <p:sp>
         <p:nvSpPr>
-          <p:cNvPr id="19" name="badge-192"/>
-          <p:cNvSpPr/>
-          <p:nvPr/>
-        </p:nvSpPr>
-        <p:spPr>
-          <a:xfrm>
-            <a:off x="777240" y="3154680"/>
-            <a:ext cx="365760" cy="365760"/>
-          </a:xfrm>
-          <a:prstGeom prst="ellipse">
-            <a:avLst/>
-          </a:prstGeom>
-          <a:solidFill>
-            <a:schemeClr val="accent2"/>
-          </a:solidFill>
-          <a:ln>
-            <a:solidFill>
-              <a:schemeClr val="accent2"/>
-            </a:solidFill>
-          </a:ln>
-        </p:spPr>
-        <p:txBody>
-          <a:bodyPr wrap="square" lIns="0" tIns="0" rIns="0" bIns="0" rtlCol="0" anchor="ctr"/>
-          <a:lstStyle/>
-          <a:p>
-            <a:pPr algn="ctr" indent="0" marL="0">
-              <a:buNone/>
-            </a:pPr>
-            <a:r>
-              <a:rPr lang="en-US" sz="1400" b="1" dirty="0">
-                <a:solidFill>
-                  <a:schemeClr val="bg1"/>
-                </a:solidFill>
-              </a:rPr>
-              <a:t>1</a:t>
-            </a:r>
-            <a:endParaRPr lang="en-US" sz="1400" dirty="0"/>
-          </a:p>
-        </p:txBody>
-      </p:sp>
-      <p:sp>
-        <p:nvSpPr>
-          <p:cNvPr id="20" name="label-193"/>
+          <p:cNvPr id="6" name="label-177"/>
           <p:cNvSpPr txBox="1"/>
           <p:nvPr/>
         </p:nvSpPr>
         <p:spPr>
           <a:xfrm>
-            <a:off x="1234440" y="3136392"/>
-            <a:ext cx="1779194" cy="411480"/>
+            <a:off x="731520" y="2212848"/>
+            <a:ext cx="3429000" cy="274320"/>
           </a:xfrm>
           <a:prstGeom prst="rect">
             <a:avLst/>
@@ -15282,34 +16295,34 @@
           <a:ln/>
         </p:spPr>
         <p:txBody>
-          <a:bodyPr wrap="square" lIns="0" tIns="0" rIns="0" bIns="0" rtlCol="0" anchor="ctr"/>
+          <a:bodyPr wrap="square" lIns="0" tIns="0" rIns="0" bIns="0" rtlCol="0" anchor="t"/>
           <a:lstStyle/>
           <a:p>
             <a:pPr algn="l" indent="0" marL="0">
               <a:buNone/>
             </a:pPr>
             <a:r>
-              <a:rPr lang="en-US" sz="1500" b="1" dirty="0">
-                <a:solidFill>
-                  <a:schemeClr val="tx2"/>
-                </a:solidFill>
-              </a:rPr>
-              <a:t>队长（PI）</a:t>
-            </a:r>
-            <a:endParaRPr lang="en-US" sz="1500" dirty="0"/>
-          </a:p>
-        </p:txBody>
-      </p:sp>
-      <p:sp>
-        <p:nvSpPr>
-          <p:cNvPr id="21" name="label-194"/>
+              <a:rPr lang="en-US" sz="1250" b="1" dirty="0">
+                <a:solidFill>
+                  <a:schemeClr val="accent6"/>
+                </a:solidFill>
+              </a:rPr>
+              <a:t>按相关性检索会看到什么：</a:t>
+            </a:r>
+            <a:endParaRPr lang="en-US" sz="1250" dirty="0"/>
+          </a:p>
+        </p:txBody>
+      </p:sp>
+      <p:sp>
+        <p:nvSpPr>
+          <p:cNvPr id="7" name="label-178"/>
           <p:cNvSpPr txBox="1"/>
           <p:nvPr/>
         </p:nvSpPr>
         <p:spPr>
           <a:xfrm>
-            <a:off x="777240" y="3657600"/>
-            <a:ext cx="2190674" cy="1188720"/>
+            <a:off x="731520" y="2514600"/>
+            <a:ext cx="3429000" cy="1051560"/>
           </a:xfrm>
           <a:prstGeom prst="rect">
             <a:avLst/>
@@ -15325,39 +16338,39 @@
               <a:buNone/>
             </a:pPr>
             <a:r>
-              <a:rPr lang="en-US" sz="1250" dirty="0">
+              <a:rPr lang="en-US" sz="1150" dirty="0">
                 <a:solidFill>
                   <a:schemeClr val="tx1"/>
                 </a:solidFill>
               </a:rPr>
-              <a:t>把课题拆成有依赖的任务；可要求先审批计划，再开始执行。</a:t>
-            </a:r>
-            <a:endParaRPr lang="en-US" sz="1250" dirty="0"/>
-          </a:p>
-        </p:txBody>
-      </p:sp>
-      <p:sp>
-        <p:nvSpPr>
-          <p:cNvPr id="22" name="card-195"/>
-          <p:cNvSpPr/>
-          <p:nvPr/>
-        </p:nvSpPr>
-        <p:spPr>
-          <a:xfrm>
-            <a:off x="3379394" y="2971800"/>
-            <a:ext cx="2602154" cy="1965960"/>
+              <a:t>HDL 越高、心血管风险越低的观察性研究，以及 CETP 抑制剂能大幅升高 HDL 的研究，看起来全都支持这个结论。</a:t>
+            </a:r>
+            <a:endParaRPr lang="en-US" sz="1150" dirty="0"/>
+          </a:p>
+        </p:txBody>
+      </p:sp>
+      <p:sp>
+        <p:nvSpPr>
+          <p:cNvPr id="8" name="card-179"/>
+          <p:cNvSpPr/>
+          <p:nvPr/>
+        </p:nvSpPr>
+        <p:spPr>
+          <a:xfrm>
+            <a:off x="548640" y="3712464"/>
+            <a:ext cx="3794760" cy="1481328"/>
           </a:xfrm>
           <a:prstGeom prst="roundRect">
             <a:avLst>
-              <a:gd name="adj" fmla="val 4651"/>
+              <a:gd name="adj" fmla="val 6173"/>
             </a:avLst>
           </a:prstGeom>
           <a:solidFill>
-            <a:schemeClr val="bg2"/>
+            <a:srgbClr val="FBF4EC"/>
           </a:solidFill>
           <a:ln w="12700">
             <a:solidFill>
-              <a:schemeClr val="bg2"/>
+              <a:srgbClr val="FBF4EC"/>
             </a:solidFill>
             <a:prstDash val="solid"/>
           </a:ln>
@@ -15365,56 +16378,14 @@
       </p:sp>
       <p:sp>
         <p:nvSpPr>
-          <p:cNvPr id="23" name="badge-196"/>
-          <p:cNvSpPr/>
-          <p:nvPr/>
-        </p:nvSpPr>
-        <p:spPr>
-          <a:xfrm>
-            <a:off x="3607994" y="3154680"/>
-            <a:ext cx="365760" cy="365760"/>
-          </a:xfrm>
-          <a:prstGeom prst="ellipse">
-            <a:avLst/>
-          </a:prstGeom>
-          <a:solidFill>
-            <a:schemeClr val="accent2"/>
-          </a:solidFill>
-          <a:ln>
-            <a:solidFill>
-              <a:schemeClr val="accent2"/>
-            </a:solidFill>
-          </a:ln>
-        </p:spPr>
-        <p:txBody>
-          <a:bodyPr wrap="square" lIns="0" tIns="0" rIns="0" bIns="0" rtlCol="0" anchor="ctr"/>
-          <a:lstStyle/>
-          <a:p>
-            <a:pPr algn="ctr" indent="0" marL="0">
-              <a:buNone/>
-            </a:pPr>
-            <a:r>
-              <a:rPr lang="en-US" sz="1400" b="1" dirty="0">
-                <a:solidFill>
-                  <a:schemeClr val="bg1"/>
-                </a:solidFill>
-              </a:rPr>
-              <a:t>2</a:t>
-            </a:r>
-            <a:endParaRPr lang="en-US" sz="1400" dirty="0"/>
-          </a:p>
-        </p:txBody>
-      </p:sp>
-      <p:sp>
-        <p:nvSpPr>
-          <p:cNvPr id="24" name="label-197"/>
+          <p:cNvPr id="9" name="label-180"/>
           <p:cNvSpPr txBox="1"/>
           <p:nvPr/>
         </p:nvSpPr>
         <p:spPr>
           <a:xfrm>
-            <a:off x="4065194" y="3136392"/>
-            <a:ext cx="1779194" cy="411480"/>
+            <a:off x="731520" y="3785616"/>
+            <a:ext cx="3429000" cy="274320"/>
           </a:xfrm>
           <a:prstGeom prst="rect">
             <a:avLst/>
@@ -15423,34 +16394,34 @@
           <a:ln/>
         </p:spPr>
         <p:txBody>
-          <a:bodyPr wrap="square" lIns="0" tIns="0" rIns="0" bIns="0" rtlCol="0" anchor="ctr"/>
+          <a:bodyPr wrap="square" lIns="0" tIns="0" rIns="0" bIns="0" rtlCol="0" anchor="t"/>
           <a:lstStyle/>
           <a:p>
             <a:pPr algn="l" indent="0" marL="0">
               <a:buNone/>
             </a:pPr>
             <a:r>
-              <a:rPr lang="en-US" sz="1500" b="1" dirty="0">
-                <a:solidFill>
-                  <a:schemeClr val="tx2"/>
-                </a:solidFill>
-              </a:rPr>
-              <a:t>领域专家成员</a:t>
-            </a:r>
-            <a:endParaRPr lang="en-US" sz="1500" dirty="0"/>
-          </a:p>
-        </p:txBody>
-      </p:sp>
-      <p:sp>
-        <p:nvSpPr>
-          <p:cNvPr id="25" name="label-198"/>
+              <a:rPr lang="en-US" sz="1250" b="1" dirty="0">
+                <a:solidFill>
+                  <a:schemeClr val="accent3"/>
+                </a:solidFill>
+              </a:rPr>
+              <a:t>后来发生了什么：</a:t>
+            </a:r>
+            <a:endParaRPr lang="en-US" sz="1250" dirty="0"/>
+          </a:p>
+        </p:txBody>
+      </p:sp>
+      <p:sp>
+        <p:nvSpPr>
+          <p:cNvPr id="10" name="bullets-181"/>
           <p:cNvSpPr txBox="1"/>
           <p:nvPr/>
         </p:nvSpPr>
         <p:spPr>
           <a:xfrm>
-            <a:off x="3607994" y="3657600"/>
-            <a:ext cx="2190674" cy="1188720"/>
+            <a:off x="731520" y="4078224"/>
+            <a:ext cx="3429000" cy="1097280"/>
           </a:xfrm>
           <a:prstGeom prst="rect">
             <a:avLst/>
@@ -15462,552 +16433,840 @@
           <a:bodyPr wrap="square" lIns="0" tIns="0" rIns="0" bIns="0" rtlCol="0" anchor="t"/>
           <a:lstStyle/>
           <a:p>
+            <a:pPr marL="177800" indent="-177800">
+              <a:spcAft>
+                <a:spcPts val="400"/>
+              </a:spcAft>
+              <a:buSzPct val="100000"/>
+              <a:buChar char="•"/>
+            </a:pPr>
+            <a:r>
+              <a:rPr lang="en-US" sz="1050" dirty="0">
+                <a:solidFill>
+                  <a:schemeClr val="tx1"/>
+                </a:solidFill>
+              </a:rPr>
+              <a:t>ACCELERATE 试验（伊塞曲匹，NCT01687998）于 2012 年 10 月开始入组，共 12,092 人，最终因疗效不足终止（NEJM 2017，PMID 28514624）。</a:t>
+            </a:r>
+            <a:endParaRPr lang="en-US" sz="1050" dirty="0"/>
+          </a:p>
+          <a:p>
+            <a:pPr marL="177800" indent="-177800">
+              <a:spcAft>
+                <a:spcPts val="400"/>
+              </a:spcAft>
+              <a:buSzPct val="100000"/>
+              <a:buChar char="•"/>
+            </a:pPr>
+            <a:r>
+              <a:rPr lang="en-US" sz="1050" dirty="0">
+                <a:solidFill>
+                  <a:schemeClr val="tx1"/>
+                </a:solidFill>
+              </a:rPr>
+              <a:t>同类药物达塞曲匹的 dal-OUTCOMES 试验也没有显示获益（NEJM 2012，PMID 23126252）。</a:t>
+            </a:r>
+            <a:endParaRPr lang="en-US" sz="1050" dirty="0"/>
+          </a:p>
+        </p:txBody>
+      </p:sp>
+      <p:sp>
+        <p:nvSpPr>
+          <p:cNvPr id="11" name="label-182"/>
+          <p:cNvSpPr txBox="1"/>
+          <p:nvPr/>
+        </p:nvSpPr>
+        <p:spPr>
+          <a:xfrm>
+            <a:off x="4572000" y="2121408"/>
+            <a:ext cx="7071055" cy="274320"/>
+          </a:xfrm>
+          <a:prstGeom prst="rect">
+            <a:avLst/>
+          </a:prstGeom>
+          <a:noFill/>
+          <a:ln/>
+        </p:spPr>
+        <p:txBody>
+          <a:bodyPr wrap="square" lIns="0" tIns="0" rIns="0" bIns="0" rtlCol="0" anchor="t"/>
+          <a:lstStyle/>
+          <a:p>
             <a:pPr algn="l" indent="0" marL="0">
               <a:buNone/>
             </a:pPr>
             <a:r>
-              <a:rPr lang="en-US" sz="1250" dirty="0">
-                <a:solidFill>
-                  <a:schemeClr val="tx1"/>
-                </a:solidFill>
-              </a:rPr>
-              <a:t>26 位领域专家角色并行工作；交接时每条发现都必须附证据编号。</a:t>
+              <a:rPr lang="en-US" sz="1250" b="1" dirty="0">
+                <a:solidFill>
+                  <a:schemeClr val="accent1"/>
+                </a:solidFill>
+              </a:rPr>
+              <a:t>按矛盾优先，会先去找这些证据：</a:t>
             </a:r>
             <a:endParaRPr lang="en-US" sz="1250" dirty="0"/>
           </a:p>
         </p:txBody>
       </p:sp>
-      <p:sp>
-        <p:nvSpPr>
-          <p:cNvPr id="26" name="card-199"/>
-          <p:cNvSpPr/>
-          <p:nvPr/>
-        </p:nvSpPr>
-        <p:spPr>
-          <a:xfrm>
-            <a:off x="6210148" y="2971800"/>
-            <a:ext cx="2602154" cy="1965960"/>
+      <p:graphicFrame>
+        <p:nvGraphicFramePr>
+          <p:cNvPr id="10" name="table-183"/>
+          <p:cNvGraphicFramePr>
+            <a:graphicFrameLocks noGrp="1"/>
+          </p:cNvGraphicFramePr>
+          <p:nvPr>
+            <p:extLst>
+              <p:ext uri="{D42A27DB-BD31-4B8C-83A1-F6EECF244321}">
+                <p14:modId xmlns:p14="http://schemas.microsoft.com/office/powerpoint/2010/main" val="1579011935"/>
+              </p:ext>
+            </p:extLst>
+          </p:nvPr>
+        </p:nvGraphicFramePr>
+        <p:xfrm>
+          <a:off x="4572000" y="2432304"/>
+          <a:ext cx="7071055" cy="914400"/>
+        </p:xfrm>
+        <a:graphic>
+          <a:graphicData uri="http://schemas.openxmlformats.org/drawingml/2006/table">
+            <a:tbl>
+              <a:tblPr/>
+              <a:tblGrid>
+                <a:gridCol w="2194560"/>
+                <a:gridCol w="4876495"/>
+              </a:tblGrid>
+              <a:tr h="329184">
+                <a:tc>
+                  <a:txBody>
+                    <a:bodyPr/>
+                    <a:lstStyle/>
+                    <a:p>
+                      <a:pPr indent="0" marL="0">
+                        <a:buNone/>
+                      </a:pPr>
+                      <a:r>
+                        <a:rPr lang="en-US" sz="1150" b="1" dirty="0">
+                          <a:solidFill>
+                            <a:srgbClr val="FFFFFF"/>
+                          </a:solidFill>
+                          <a:latin typeface="Microsoft YaHei" pitchFamily="34" charset="0"/>
+                          <a:ea typeface="Microsoft YaHei" pitchFamily="34" charset="-122"/>
+                          <a:cs typeface="Microsoft YaHei" pitchFamily="34" charset="-120"/>
+                        </a:rPr>
+                        <a:t>A3 的四个优先项</a:t>
+                      </a:r>
+                      <a:endParaRPr lang="en-US" sz="1150" dirty="0">
+                        <a:latin typeface="Microsoft YaHei" charset="0"/>
+                        <a:ea typeface="Microsoft YaHei" charset="0"/>
+                        <a:cs typeface="Microsoft YaHei" charset="0"/>
+                      </a:endParaRPr>
+                    </a:p>
+                  </a:txBody>
+                  <a:tcPr marL="91440" marR="91440" marT="36576" marB="36576" anchor="ctr">
+                    <a:lnL w="9525" cap="flat" cmpd="sng" algn="ctr">
+                      <a:solidFill>
+                        <a:srgbClr val="D5DCE4"/>
+                      </a:solidFill>
+                      <a:prstDash val="solid"/>
+                      <a:round/>
+                      <a:headEnd type="none" w="med" len="med"/>
+                      <a:tailEnd type="none" w="med" len="med"/>
+                    </a:lnL>
+                    <a:lnR w="9525" cap="flat" cmpd="sng" algn="ctr">
+                      <a:solidFill>
+                        <a:srgbClr val="D5DCE4"/>
+                      </a:solidFill>
+                      <a:prstDash val="solid"/>
+                      <a:round/>
+                      <a:headEnd type="none" w="med" len="med"/>
+                      <a:tailEnd type="none" w="med" len="med"/>
+                    </a:lnR>
+                    <a:lnT w="9525" cap="flat" cmpd="sng" algn="ctr">
+                      <a:solidFill>
+                        <a:srgbClr val="D5DCE4"/>
+                      </a:solidFill>
+                      <a:prstDash val="solid"/>
+                      <a:round/>
+                      <a:headEnd type="none" w="med" len="med"/>
+                      <a:tailEnd type="none" w="med" len="med"/>
+                    </a:lnT>
+                    <a:lnB w="9525" cap="flat" cmpd="sng" algn="ctr">
+                      <a:solidFill>
+                        <a:srgbClr val="D5DCE4"/>
+                      </a:solidFill>
+                      <a:prstDash val="solid"/>
+                      <a:round/>
+                      <a:headEnd type="none" w="med" len="med"/>
+                      <a:tailEnd type="none" w="med" len="med"/>
+                    </a:lnB>
+                    <a:solidFill>
+                      <a:srgbClr val="0E8A7E"/>
+                    </a:solidFill>
+                  </a:tcPr>
+                </a:tc>
+                <a:tc>
+                  <a:txBody>
+                    <a:bodyPr/>
+                    <a:lstStyle/>
+                    <a:p>
+                      <a:pPr indent="0" marL="0">
+                        <a:buNone/>
+                      </a:pPr>
+                      <a:r>
+                        <a:rPr lang="en-US" sz="1150" b="1" dirty="0">
+                          <a:solidFill>
+                            <a:srgbClr val="FFFFFF"/>
+                          </a:solidFill>
+                          <a:latin typeface="Microsoft YaHei" pitchFamily="34" charset="0"/>
+                          <a:ea typeface="Microsoft YaHei" pitchFamily="34" charset="-122"/>
+                          <a:cs typeface="Microsoft YaHei" pitchFamily="34" charset="-120"/>
+                        </a:rPr>
+                        <a:t>对应的真实证据</a:t>
+                      </a:r>
+                      <a:endParaRPr lang="en-US" sz="1150" dirty="0">
+                        <a:latin typeface="Microsoft YaHei" charset="0"/>
+                        <a:ea typeface="Microsoft YaHei" charset="0"/>
+                        <a:cs typeface="Microsoft YaHei" charset="0"/>
+                      </a:endParaRPr>
+                    </a:p>
+                  </a:txBody>
+                  <a:tcPr marL="91440" marR="91440" marT="36576" marB="36576" anchor="ctr">
+                    <a:lnL w="9525" cap="flat" cmpd="sng" algn="ctr">
+                      <a:solidFill>
+                        <a:srgbClr val="D5DCE4"/>
+                      </a:solidFill>
+                      <a:prstDash val="solid"/>
+                      <a:round/>
+                      <a:headEnd type="none" w="med" len="med"/>
+                      <a:tailEnd type="none" w="med" len="med"/>
+                    </a:lnL>
+                    <a:lnR w="9525" cap="flat" cmpd="sng" algn="ctr">
+                      <a:solidFill>
+                        <a:srgbClr val="D5DCE4"/>
+                      </a:solidFill>
+                      <a:prstDash val="solid"/>
+                      <a:round/>
+                      <a:headEnd type="none" w="med" len="med"/>
+                      <a:tailEnd type="none" w="med" len="med"/>
+                    </a:lnR>
+                    <a:lnT w="9525" cap="flat" cmpd="sng" algn="ctr">
+                      <a:solidFill>
+                        <a:srgbClr val="D5DCE4"/>
+                      </a:solidFill>
+                      <a:prstDash val="solid"/>
+                      <a:round/>
+                      <a:headEnd type="none" w="med" len="med"/>
+                      <a:tailEnd type="none" w="med" len="med"/>
+                    </a:lnT>
+                    <a:lnB w="9525" cap="flat" cmpd="sng" algn="ctr">
+                      <a:solidFill>
+                        <a:srgbClr val="D5DCE4"/>
+                      </a:solidFill>
+                      <a:prstDash val="solid"/>
+                      <a:round/>
+                      <a:headEnd type="none" w="med" len="med"/>
+                      <a:tailEnd type="none" w="med" len="med"/>
+                    </a:lnB>
+                    <a:solidFill>
+                      <a:srgbClr val="0E8A7E"/>
+                    </a:solidFill>
+                  </a:tcPr>
+                </a:tc>
+              </a:tr>
+              <a:tr h="566928">
+                <a:tc>
+                  <a:txBody>
+                    <a:bodyPr/>
+                    <a:lstStyle/>
+                    <a:p>
+                      <a:pPr indent="0" marL="0">
+                        <a:buNone/>
+                      </a:pPr>
+                      <a:r>
+                        <a:rPr lang="en-US" sz="1100" b="1" dirty="0">
+                          <a:solidFill>
+                            <a:srgbClr val="0F2A44"/>
+                          </a:solidFill>
+                          <a:latin typeface="Microsoft YaHei" pitchFamily="34" charset="0"/>
+                          <a:ea typeface="Microsoft YaHei" pitchFamily="34" charset="-122"/>
+                          <a:cs typeface="Microsoft YaHei" pitchFamily="34" charset="-120"/>
+                        </a:rPr>
+                        <a:t>与现有结论矛盾的证据</a:t>
+                      </a:r>
+                      <a:endParaRPr lang="en-US" sz="1100" dirty="0">
+                        <a:latin typeface="Microsoft YaHei" charset="0"/>
+                        <a:ea typeface="Microsoft YaHei" charset="0"/>
+                        <a:cs typeface="Microsoft YaHei" charset="0"/>
+                      </a:endParaRPr>
+                    </a:p>
+                  </a:txBody>
+                  <a:tcPr marL="91440" marR="91440" marT="36576" marB="36576" anchor="ctr">
+                    <a:lnL w="9525" cap="flat" cmpd="sng" algn="ctr">
+                      <a:solidFill>
+                        <a:srgbClr val="D5DCE4"/>
+                      </a:solidFill>
+                      <a:prstDash val="solid"/>
+                      <a:round/>
+                      <a:headEnd type="none" w="med" len="med"/>
+                      <a:tailEnd type="none" w="med" len="med"/>
+                    </a:lnL>
+                    <a:lnR w="9525" cap="flat" cmpd="sng" algn="ctr">
+                      <a:solidFill>
+                        <a:srgbClr val="D5DCE4"/>
+                      </a:solidFill>
+                      <a:prstDash val="solid"/>
+                      <a:round/>
+                      <a:headEnd type="none" w="med" len="med"/>
+                      <a:tailEnd type="none" w="med" len="med"/>
+                    </a:lnR>
+                    <a:lnT w="9525" cap="flat" cmpd="sng" algn="ctr">
+                      <a:solidFill>
+                        <a:srgbClr val="D5DCE4"/>
+                      </a:solidFill>
+                      <a:prstDash val="solid"/>
+                      <a:round/>
+                      <a:headEnd type="none" w="med" len="med"/>
+                      <a:tailEnd type="none" w="med" len="med"/>
+                    </a:lnT>
+                    <a:lnB w="9525" cap="flat" cmpd="sng" algn="ctr">
+                      <a:solidFill>
+                        <a:srgbClr val="D5DCE4"/>
+                      </a:solidFill>
+                      <a:prstDash val="solid"/>
+                      <a:round/>
+                      <a:headEnd type="none" w="med" len="med"/>
+                      <a:tailEnd type="none" w="med" len="med"/>
+                    </a:lnB>
+                    <a:solidFill>
+                      <a:srgbClr val="FFFFFF"/>
+                    </a:solidFill>
+                  </a:tcPr>
+                </a:tc>
+                <a:tc>
+                  <a:txBody>
+                    <a:bodyPr/>
+                    <a:lstStyle/>
+                    <a:p>
+                      <a:pPr indent="0" marL="0">
+                        <a:buNone/>
+                      </a:pPr>
+                      <a:r>
+                        <a:rPr lang="en-US" sz="1100" dirty="0">
+                          <a:solidFill>
+                            <a:srgbClr val="1B2533"/>
+                          </a:solidFill>
+                          <a:latin typeface="Microsoft YaHei" pitchFamily="34" charset="0"/>
+                          <a:ea typeface="Microsoft YaHei" pitchFamily="34" charset="-122"/>
+                          <a:cs typeface="Microsoft YaHei" pitchFamily="34" charset="-120"/>
+                        </a:rPr>
+                        <a:t>托彻普（torcetrapib）的 ILLUMINATE 试验（NEJM 2007，PMID 17984165）：心血管事件和死亡反而增加</a:t>
+                      </a:r>
+                      <a:endParaRPr lang="en-US" sz="1100" dirty="0">
+                        <a:latin typeface="Microsoft YaHei" charset="0"/>
+                        <a:ea typeface="Microsoft YaHei" charset="0"/>
+                        <a:cs typeface="Microsoft YaHei" charset="0"/>
+                      </a:endParaRPr>
+                    </a:p>
+                  </a:txBody>
+                  <a:tcPr marL="91440" marR="91440" marT="36576" marB="36576" anchor="ctr">
+                    <a:lnL w="9525" cap="flat" cmpd="sng" algn="ctr">
+                      <a:solidFill>
+                        <a:srgbClr val="D5DCE4"/>
+                      </a:solidFill>
+                      <a:prstDash val="solid"/>
+                      <a:round/>
+                      <a:headEnd type="none" w="med" len="med"/>
+                      <a:tailEnd type="none" w="med" len="med"/>
+                    </a:lnL>
+                    <a:lnR w="9525" cap="flat" cmpd="sng" algn="ctr">
+                      <a:solidFill>
+                        <a:srgbClr val="D5DCE4"/>
+                      </a:solidFill>
+                      <a:prstDash val="solid"/>
+                      <a:round/>
+                      <a:headEnd type="none" w="med" len="med"/>
+                      <a:tailEnd type="none" w="med" len="med"/>
+                    </a:lnR>
+                    <a:lnT w="9525" cap="flat" cmpd="sng" algn="ctr">
+                      <a:solidFill>
+                        <a:srgbClr val="D5DCE4"/>
+                      </a:solidFill>
+                      <a:prstDash val="solid"/>
+                      <a:round/>
+                      <a:headEnd type="none" w="med" len="med"/>
+                      <a:tailEnd type="none" w="med" len="med"/>
+                    </a:lnT>
+                    <a:lnB w="9525" cap="flat" cmpd="sng" algn="ctr">
+                      <a:solidFill>
+                        <a:srgbClr val="D5DCE4"/>
+                      </a:solidFill>
+                      <a:prstDash val="solid"/>
+                      <a:round/>
+                      <a:headEnd type="none" w="med" len="med"/>
+                      <a:tailEnd type="none" w="med" len="med"/>
+                    </a:lnB>
+                    <a:solidFill>
+                      <a:srgbClr val="FFFFFF"/>
+                    </a:solidFill>
+                  </a:tcPr>
+                </a:tc>
+              </a:tr>
+              <a:tr h="822960">
+                <a:tc>
+                  <a:txBody>
+                    <a:bodyPr/>
+                    <a:lstStyle/>
+                    <a:p>
+                      <a:pPr indent="0" marL="0">
+                        <a:buNone/>
+                      </a:pPr>
+                      <a:r>
+                        <a:rPr lang="en-US" sz="1100" b="1" dirty="0">
+                          <a:solidFill>
+                            <a:srgbClr val="0F2A44"/>
+                          </a:solidFill>
+                          <a:latin typeface="Microsoft YaHei" pitchFamily="34" charset="0"/>
+                          <a:ea typeface="Microsoft YaHei" pitchFamily="34" charset="-122"/>
+                          <a:cs typeface="Microsoft YaHei" pitchFamily="34" charset="-120"/>
+                        </a:rPr>
+                        <a:t>与已有来源最不依赖的证据</a:t>
+                      </a:r>
+                      <a:endParaRPr lang="en-US" sz="1100" dirty="0">
+                        <a:latin typeface="Microsoft YaHei" charset="0"/>
+                        <a:ea typeface="Microsoft YaHei" charset="0"/>
+                        <a:cs typeface="Microsoft YaHei" charset="0"/>
+                      </a:endParaRPr>
+                    </a:p>
+                  </a:txBody>
+                  <a:tcPr marL="91440" marR="91440" marT="36576" marB="36576" anchor="ctr">
+                    <a:lnL w="9525" cap="flat" cmpd="sng" algn="ctr">
+                      <a:solidFill>
+                        <a:srgbClr val="D5DCE4"/>
+                      </a:solidFill>
+                      <a:prstDash val="solid"/>
+                      <a:round/>
+                      <a:headEnd type="none" w="med" len="med"/>
+                      <a:tailEnd type="none" w="med" len="med"/>
+                    </a:lnL>
+                    <a:lnR w="9525" cap="flat" cmpd="sng" algn="ctr">
+                      <a:solidFill>
+                        <a:srgbClr val="D5DCE4"/>
+                      </a:solidFill>
+                      <a:prstDash val="solid"/>
+                      <a:round/>
+                      <a:headEnd type="none" w="med" len="med"/>
+                      <a:tailEnd type="none" w="med" len="med"/>
+                    </a:lnR>
+                    <a:lnT w="9525" cap="flat" cmpd="sng" algn="ctr">
+                      <a:solidFill>
+                        <a:srgbClr val="D5DCE4"/>
+                      </a:solidFill>
+                      <a:prstDash val="solid"/>
+                      <a:round/>
+                      <a:headEnd type="none" w="med" len="med"/>
+                      <a:tailEnd type="none" w="med" len="med"/>
+                    </a:lnT>
+                    <a:lnB w="9525" cap="flat" cmpd="sng" algn="ctr">
+                      <a:solidFill>
+                        <a:srgbClr val="D5DCE4"/>
+                      </a:solidFill>
+                      <a:prstDash val="solid"/>
+                      <a:round/>
+                      <a:headEnd type="none" w="med" len="med"/>
+                      <a:tailEnd type="none" w="med" len="med"/>
+                    </a:lnB>
+                    <a:solidFill>
+                      <a:srgbClr val="FFFFFF"/>
+                    </a:solidFill>
+                  </a:tcPr>
+                </a:tc>
+                <a:tc>
+                  <a:txBody>
+                    <a:bodyPr/>
+                    <a:lstStyle/>
+                    <a:p>
+                      <a:pPr indent="0" marL="0">
+                        <a:buNone/>
+                      </a:pPr>
+                      <a:r>
+                        <a:rPr lang="en-US" sz="1100" dirty="0">
+                          <a:solidFill>
+                            <a:srgbClr val="1B2533"/>
+                          </a:solidFill>
+                          <a:latin typeface="Microsoft YaHei" pitchFamily="34" charset="0"/>
+                          <a:ea typeface="Microsoft YaHei" pitchFamily="34" charset="-122"/>
+                          <a:cs typeface="Microsoft YaHei" pitchFamily="34" charset="-120"/>
+                        </a:rPr>
+                        <a:t>孟德尔随机化研究（Voight 等，Lancet 2012，PMID 22607825）：用基因数据检验，基因决定的 HDL 升高并不降低心肌梗死风险。这是独立于观察性研究的另一类证据</a:t>
+                      </a:r>
+                      <a:endParaRPr lang="en-US" sz="1100" dirty="0">
+                        <a:latin typeface="Microsoft YaHei" charset="0"/>
+                        <a:ea typeface="Microsoft YaHei" charset="0"/>
+                        <a:cs typeface="Microsoft YaHei" charset="0"/>
+                      </a:endParaRPr>
+                    </a:p>
+                  </a:txBody>
+                  <a:tcPr marL="91440" marR="91440" marT="36576" marB="36576" anchor="ctr">
+                    <a:lnL w="9525" cap="flat" cmpd="sng" algn="ctr">
+                      <a:solidFill>
+                        <a:srgbClr val="D5DCE4"/>
+                      </a:solidFill>
+                      <a:prstDash val="solid"/>
+                      <a:round/>
+                      <a:headEnd type="none" w="med" len="med"/>
+                      <a:tailEnd type="none" w="med" len="med"/>
+                    </a:lnL>
+                    <a:lnR w="9525" cap="flat" cmpd="sng" algn="ctr">
+                      <a:solidFill>
+                        <a:srgbClr val="D5DCE4"/>
+                      </a:solidFill>
+                      <a:prstDash val="solid"/>
+                      <a:round/>
+                      <a:headEnd type="none" w="med" len="med"/>
+                      <a:tailEnd type="none" w="med" len="med"/>
+                    </a:lnR>
+                    <a:lnT w="9525" cap="flat" cmpd="sng" algn="ctr">
+                      <a:solidFill>
+                        <a:srgbClr val="D5DCE4"/>
+                      </a:solidFill>
+                      <a:prstDash val="solid"/>
+                      <a:round/>
+                      <a:headEnd type="none" w="med" len="med"/>
+                      <a:tailEnd type="none" w="med" len="med"/>
+                    </a:lnT>
+                    <a:lnB w="9525" cap="flat" cmpd="sng" algn="ctr">
+                      <a:solidFill>
+                        <a:srgbClr val="D5DCE4"/>
+                      </a:solidFill>
+                      <a:prstDash val="solid"/>
+                      <a:round/>
+                      <a:headEnd type="none" w="med" len="med"/>
+                      <a:tailEnd type="none" w="med" len="med"/>
+                    </a:lnB>
+                    <a:solidFill>
+                      <a:srgbClr val="FFFFFF"/>
+                    </a:solidFill>
+                  </a:tcPr>
+                </a:tc>
+              </a:tr>
+              <a:tr h="411480">
+                <a:tc>
+                  <a:txBody>
+                    <a:bodyPr/>
+                    <a:lstStyle/>
+                    <a:p>
+                      <a:pPr indent="0" marL="0">
+                        <a:buNone/>
+                      </a:pPr>
+                      <a:r>
+                        <a:rPr lang="en-US" sz="1100" b="1" dirty="0">
+                          <a:solidFill>
+                            <a:srgbClr val="0F2A44"/>
+                          </a:solidFill>
+                          <a:latin typeface="Microsoft YaHei" pitchFamily="34" charset="0"/>
+                          <a:ea typeface="Microsoft YaHei" pitchFamily="34" charset="-122"/>
+                          <a:cs typeface="Microsoft YaHei" pitchFamily="34" charset="-120"/>
+                        </a:rPr>
+                        <a:t>最可能改变当前结论的证据</a:t>
+                      </a:r>
+                      <a:endParaRPr lang="en-US" sz="1100" dirty="0">
+                        <a:latin typeface="Microsoft YaHei" charset="0"/>
+                        <a:ea typeface="Microsoft YaHei" charset="0"/>
+                        <a:cs typeface="Microsoft YaHei" charset="0"/>
+                      </a:endParaRPr>
+                    </a:p>
+                  </a:txBody>
+                  <a:tcPr marL="91440" marR="91440" marT="36576" marB="36576" anchor="ctr">
+                    <a:lnL w="9525" cap="flat" cmpd="sng" algn="ctr">
+                      <a:solidFill>
+                        <a:srgbClr val="D5DCE4"/>
+                      </a:solidFill>
+                      <a:prstDash val="solid"/>
+                      <a:round/>
+                      <a:headEnd type="none" w="med" len="med"/>
+                      <a:tailEnd type="none" w="med" len="med"/>
+                    </a:lnL>
+                    <a:lnR w="9525" cap="flat" cmpd="sng" algn="ctr">
+                      <a:solidFill>
+                        <a:srgbClr val="D5DCE4"/>
+                      </a:solidFill>
+                      <a:prstDash val="solid"/>
+                      <a:round/>
+                      <a:headEnd type="none" w="med" len="med"/>
+                      <a:tailEnd type="none" w="med" len="med"/>
+                    </a:lnR>
+                    <a:lnT w="9525" cap="flat" cmpd="sng" algn="ctr">
+                      <a:solidFill>
+                        <a:srgbClr val="D5DCE4"/>
+                      </a:solidFill>
+                      <a:prstDash val="solid"/>
+                      <a:round/>
+                      <a:headEnd type="none" w="med" len="med"/>
+                      <a:tailEnd type="none" w="med" len="med"/>
+                    </a:lnT>
+                    <a:lnB w="9525" cap="flat" cmpd="sng" algn="ctr">
+                      <a:solidFill>
+                        <a:srgbClr val="D5DCE4"/>
+                      </a:solidFill>
+                      <a:prstDash val="solid"/>
+                      <a:round/>
+                      <a:headEnd type="none" w="med" len="med"/>
+                      <a:tailEnd type="none" w="med" len="med"/>
+                    </a:lnB>
+                    <a:solidFill>
+                      <a:srgbClr val="FFFFFF"/>
+                    </a:solidFill>
+                  </a:tcPr>
+                </a:tc>
+                <a:tc>
+                  <a:txBody>
+                    <a:bodyPr/>
+                    <a:lstStyle/>
+                    <a:p>
+                      <a:pPr indent="0" marL="0">
+                        <a:buNone/>
+                      </a:pPr>
+                      <a:r>
+                        <a:rPr lang="en-US" sz="1100" dirty="0">
+                          <a:solidFill>
+                            <a:srgbClr val="1B2533"/>
+                          </a:solidFill>
+                          <a:latin typeface="Microsoft YaHei" pitchFamily="34" charset="0"/>
+                          <a:ea typeface="Microsoft YaHei" pitchFamily="34" charset="-122"/>
+                          <a:cs typeface="Microsoft YaHei" pitchFamily="34" charset="-120"/>
+                        </a:rPr>
+                        <a:t>以临床硬终点为结局的大型随机试验</a:t>
+                      </a:r>
+                      <a:endParaRPr lang="en-US" sz="1100" dirty="0">
+                        <a:latin typeface="Microsoft YaHei" charset="0"/>
+                        <a:ea typeface="Microsoft YaHei" charset="0"/>
+                        <a:cs typeface="Microsoft YaHei" charset="0"/>
+                      </a:endParaRPr>
+                    </a:p>
+                  </a:txBody>
+                  <a:tcPr marL="91440" marR="91440" marT="36576" marB="36576" anchor="ctr">
+                    <a:lnL w="9525" cap="flat" cmpd="sng" algn="ctr">
+                      <a:solidFill>
+                        <a:srgbClr val="D5DCE4"/>
+                      </a:solidFill>
+                      <a:prstDash val="solid"/>
+                      <a:round/>
+                      <a:headEnd type="none" w="med" len="med"/>
+                      <a:tailEnd type="none" w="med" len="med"/>
+                    </a:lnL>
+                    <a:lnR w="9525" cap="flat" cmpd="sng" algn="ctr">
+                      <a:solidFill>
+                        <a:srgbClr val="D5DCE4"/>
+                      </a:solidFill>
+                      <a:prstDash val="solid"/>
+                      <a:round/>
+                      <a:headEnd type="none" w="med" len="med"/>
+                      <a:tailEnd type="none" w="med" len="med"/>
+                    </a:lnR>
+                    <a:lnT w="9525" cap="flat" cmpd="sng" algn="ctr">
+                      <a:solidFill>
+                        <a:srgbClr val="D5DCE4"/>
+                      </a:solidFill>
+                      <a:prstDash val="solid"/>
+                      <a:round/>
+                      <a:headEnd type="none" w="med" len="med"/>
+                      <a:tailEnd type="none" w="med" len="med"/>
+                    </a:lnT>
+                    <a:lnB w="9525" cap="flat" cmpd="sng" algn="ctr">
+                      <a:solidFill>
+                        <a:srgbClr val="D5DCE4"/>
+                      </a:solidFill>
+                      <a:prstDash val="solid"/>
+                      <a:round/>
+                      <a:headEnd type="none" w="med" len="med"/>
+                      <a:tailEnd type="none" w="med" len="med"/>
+                    </a:lnB>
+                    <a:solidFill>
+                      <a:srgbClr val="FFFFFF"/>
+                    </a:solidFill>
+                  </a:tcPr>
+                </a:tc>
+              </a:tr>
+              <a:tr h="566928">
+                <a:tc>
+                  <a:txBody>
+                    <a:bodyPr/>
+                    <a:lstStyle/>
+                    <a:p>
+                      <a:pPr indent="0" marL="0">
+                        <a:buNone/>
+                      </a:pPr>
+                      <a:r>
+                        <a:rPr lang="en-US" sz="1100" b="1" dirty="0">
+                          <a:solidFill>
+                            <a:srgbClr val="0F2A44"/>
+                          </a:solidFill>
+                          <a:latin typeface="Microsoft YaHei" pitchFamily="34" charset="0"/>
+                          <a:ea typeface="Microsoft YaHei" pitchFamily="34" charset="-122"/>
+                          <a:cs typeface="Microsoft YaHei" pitchFamily="34" charset="-120"/>
+                        </a:rPr>
+                        <a:t>预期信息增益最高的证据</a:t>
+                      </a:r>
+                      <a:endParaRPr lang="en-US" sz="1100" dirty="0">
+                        <a:latin typeface="Microsoft YaHei" charset="0"/>
+                        <a:ea typeface="Microsoft YaHei" charset="0"/>
+                        <a:cs typeface="Microsoft YaHei" charset="0"/>
+                      </a:endParaRPr>
+                    </a:p>
+                  </a:txBody>
+                  <a:tcPr marL="91440" marR="91440" marT="36576" marB="36576" anchor="ctr">
+                    <a:lnL w="9525" cap="flat" cmpd="sng" algn="ctr">
+                      <a:solidFill>
+                        <a:srgbClr val="D5DCE4"/>
+                      </a:solidFill>
+                      <a:prstDash val="solid"/>
+                      <a:round/>
+                      <a:headEnd type="none" w="med" len="med"/>
+                      <a:tailEnd type="none" w="med" len="med"/>
+                    </a:lnL>
+                    <a:lnR w="9525" cap="flat" cmpd="sng" algn="ctr">
+                      <a:solidFill>
+                        <a:srgbClr val="D5DCE4"/>
+                      </a:solidFill>
+                      <a:prstDash val="solid"/>
+                      <a:round/>
+                      <a:headEnd type="none" w="med" len="med"/>
+                      <a:tailEnd type="none" w="med" len="med"/>
+                    </a:lnR>
+                    <a:lnT w="9525" cap="flat" cmpd="sng" algn="ctr">
+                      <a:solidFill>
+                        <a:srgbClr val="D5DCE4"/>
+                      </a:solidFill>
+                      <a:prstDash val="solid"/>
+                      <a:round/>
+                      <a:headEnd type="none" w="med" len="med"/>
+                      <a:tailEnd type="none" w="med" len="med"/>
+                    </a:lnT>
+                    <a:lnB w="9525" cap="flat" cmpd="sng" algn="ctr">
+                      <a:solidFill>
+                        <a:srgbClr val="D5DCE4"/>
+                      </a:solidFill>
+                      <a:prstDash val="solid"/>
+                      <a:round/>
+                      <a:headEnd type="none" w="med" len="med"/>
+                      <a:tailEnd type="none" w="med" len="med"/>
+                    </a:lnB>
+                    <a:solidFill>
+                      <a:srgbClr val="FFFFFF"/>
+                    </a:solidFill>
+                  </a:tcPr>
+                </a:tc>
+                <a:tc>
+                  <a:txBody>
+                    <a:bodyPr/>
+                    <a:lstStyle/>
+                    <a:p>
+                      <a:pPr indent="0" marL="0">
+                        <a:buNone/>
+                      </a:pPr>
+                      <a:r>
+                        <a:rPr lang="en-US" sz="1100" dirty="0">
+                          <a:solidFill>
+                            <a:srgbClr val="1B2533"/>
+                          </a:solidFill>
+                          <a:latin typeface="Microsoft YaHei" pitchFamily="34" charset="0"/>
+                          <a:ea typeface="Microsoft YaHei" pitchFamily="34" charset="-122"/>
+                          <a:cs typeface="Microsoft YaHei" pitchFamily="34" charset="-120"/>
+                        </a:rPr>
+                        <a:t>以上两类（基因证据、硬终点试验），而不是再多一篇"HDL 与风险相关"的观察性研究</a:t>
+                      </a:r>
+                      <a:endParaRPr lang="en-US" sz="1100" dirty="0">
+                        <a:latin typeface="Microsoft YaHei" charset="0"/>
+                        <a:ea typeface="Microsoft YaHei" charset="0"/>
+                        <a:cs typeface="Microsoft YaHei" charset="0"/>
+                      </a:endParaRPr>
+                    </a:p>
+                  </a:txBody>
+                  <a:tcPr marL="91440" marR="91440" marT="36576" marB="36576" anchor="ctr">
+                    <a:lnL w="9525" cap="flat" cmpd="sng" algn="ctr">
+                      <a:solidFill>
+                        <a:srgbClr val="D5DCE4"/>
+                      </a:solidFill>
+                      <a:prstDash val="solid"/>
+                      <a:round/>
+                      <a:headEnd type="none" w="med" len="med"/>
+                      <a:tailEnd type="none" w="med" len="med"/>
+                    </a:lnL>
+                    <a:lnR w="9525" cap="flat" cmpd="sng" algn="ctr">
+                      <a:solidFill>
+                        <a:srgbClr val="D5DCE4"/>
+                      </a:solidFill>
+                      <a:prstDash val="solid"/>
+                      <a:round/>
+                      <a:headEnd type="none" w="med" len="med"/>
+                      <a:tailEnd type="none" w="med" len="med"/>
+                    </a:lnR>
+                    <a:lnT w="9525" cap="flat" cmpd="sng" algn="ctr">
+                      <a:solidFill>
+                        <a:srgbClr val="D5DCE4"/>
+                      </a:solidFill>
+                      <a:prstDash val="solid"/>
+                      <a:round/>
+                      <a:headEnd type="none" w="med" len="med"/>
+                      <a:tailEnd type="none" w="med" len="med"/>
+                    </a:lnT>
+                    <a:lnB w="9525" cap="flat" cmpd="sng" algn="ctr">
+                      <a:solidFill>
+                        <a:srgbClr val="D5DCE4"/>
+                      </a:solidFill>
+                      <a:prstDash val="solid"/>
+                      <a:round/>
+                      <a:headEnd type="none" w="med" len="med"/>
+                      <a:tailEnd type="none" w="med" len="med"/>
+                    </a:lnB>
+                    <a:solidFill>
+                      <a:srgbClr val="FFFFFF"/>
+                    </a:solidFill>
+                  </a:tcPr>
+                </a:tc>
+              </a:tr>
+            </a:tbl>
+          </a:graphicData>
+        </a:graphic>
+      </p:graphicFrame>
+      <p:sp>
+        <p:nvSpPr>
+          <p:cNvPr id="13" name="box-184"/>
+          <p:cNvSpPr/>
+          <p:nvPr/>
+        </p:nvSpPr>
+        <p:spPr>
+          <a:xfrm>
+            <a:off x="548640" y="5349240"/>
+            <a:ext cx="11094415" cy="804672"/>
           </a:xfrm>
           <a:prstGeom prst="roundRect">
             <a:avLst>
-              <a:gd name="adj" fmla="val 4651"/>
+              <a:gd name="adj" fmla="val 9091"/>
             </a:avLst>
           </a:prstGeom>
           <a:solidFill>
-            <a:schemeClr val="bg2"/>
+            <a:srgbClr val="E3F3F1"/>
           </a:solidFill>
           <a:ln w="12700">
             <a:solidFill>
-              <a:schemeClr val="bg2"/>
-            </a:solidFill>
-            <a:prstDash val="solid"/>
-          </a:ln>
-        </p:spPr>
-      </p:sp>
-      <p:sp>
-        <p:nvSpPr>
-          <p:cNvPr id="27" name="badge-200"/>
-          <p:cNvSpPr/>
-          <p:nvPr/>
-        </p:nvSpPr>
-        <p:spPr>
-          <a:xfrm>
-            <a:off x="6438748" y="3154680"/>
-            <a:ext cx="365760" cy="365760"/>
-          </a:xfrm>
-          <a:prstGeom prst="ellipse">
-            <a:avLst/>
-          </a:prstGeom>
-          <a:solidFill>
-            <a:schemeClr val="accent2"/>
-          </a:solidFill>
-          <a:ln>
-            <a:solidFill>
-              <a:schemeClr val="accent2"/>
+              <a:srgbClr val="0E8A7E"/>
             </a:solidFill>
           </a:ln>
         </p:spPr>
         <p:txBody>
-          <a:bodyPr wrap="square" lIns="0" tIns="0" rIns="0" bIns="0" rtlCol="0" anchor="ctr"/>
-          <a:lstStyle/>
-          <a:p>
-            <a:pPr algn="ctr" indent="0" marL="0">
-              <a:buNone/>
-            </a:pPr>
-            <a:r>
-              <a:rPr lang="en-US" sz="1400" b="1" dirty="0">
-                <a:solidFill>
-                  <a:schemeClr val="bg1"/>
-                </a:solidFill>
-              </a:rPr>
-              <a:t>3</a:t>
-            </a:r>
-            <a:endParaRPr lang="en-US" sz="1400" dirty="0"/>
-          </a:p>
-        </p:txBody>
-      </p:sp>
-      <p:sp>
-        <p:nvSpPr>
-          <p:cNvPr id="28" name="label-201"/>
-          <p:cNvSpPr txBox="1"/>
-          <p:nvPr/>
-        </p:nvSpPr>
-        <p:spPr>
-          <a:xfrm>
-            <a:off x="6895948" y="3136392"/>
-            <a:ext cx="1779194" cy="411480"/>
-          </a:xfrm>
-          <a:prstGeom prst="rect">
-            <a:avLst/>
-          </a:prstGeom>
-          <a:noFill/>
-          <a:ln/>
-        </p:spPr>
-        <p:txBody>
-          <a:bodyPr wrap="square" lIns="0" tIns="0" rIns="0" bIns="0" rtlCol="0" anchor="ctr"/>
+          <a:bodyPr wrap="square" lIns="1905" tIns="1905" rIns="1905" bIns="1905" rtlCol="0" anchor="ctr"/>
           <a:lstStyle/>
           <a:p>
             <a:pPr algn="l" indent="0" marL="0">
               <a:buNone/>
             </a:pPr>
             <a:r>
-              <a:rPr lang="en-US" sz="1500" b="1" dirty="0">
+              <a:rPr lang="en-US" sz="1250" b="1" dirty="0">
                 <a:solidFill>
                   <a:schemeClr val="tx2"/>
                 </a:solidFill>
               </a:rPr>
-              <a:t>质量门</a:t>
-            </a:r>
-            <a:endParaRPr lang="en-US" sz="1500" dirty="0"/>
-          </a:p>
-        </p:txBody>
-      </p:sp>
-      <p:sp>
-        <p:nvSpPr>
-          <p:cNvPr id="29" name="label-202"/>
-          <p:cNvSpPr txBox="1"/>
-          <p:nvPr/>
-        </p:nvSpPr>
-        <p:spPr>
-          <a:xfrm>
-            <a:off x="6438748" y="3657600"/>
-            <a:ext cx="2190674" cy="1188720"/>
-          </a:xfrm>
-          <a:prstGeom prst="rect">
-            <a:avLst/>
-          </a:prstGeom>
-          <a:noFill/>
-          <a:ln/>
-        </p:spPr>
-        <p:txBody>
-          <a:bodyPr wrap="square" lIns="0" tIns="0" rIns="0" bIns="0" rtlCol="0" anchor="t"/>
-          <a:lstStyle/>
-          <a:p>
-            <a:pPr algn="l" indent="0" marL="0">
-              <a:buNone/>
-            </a:pPr>
-            <a:r>
-              <a:rPr lang="en-US" sz="1250" dirty="0">
-                <a:solidFill>
-                  <a:schemeClr val="tx1"/>
-                </a:solidFill>
-              </a:rPr>
-              <a:t>规则检查 + 科研审查员；工具失败不算“阴性结果”。</a:t>
+              <a:t>这个例子要讲的一句话：在 ACCELERATE 开始入组之前，ILLUMINATE（2007）和孟德尔随机化研究（2012 年 8 月刊出）都已经发表。只按相关性检索，它们会淹没在大量支持性文献里；矛盾优先会把它们放到决策者面前。</a:t>
             </a:r>
             <a:endParaRPr lang="en-US" sz="1250" dirty="0"/>
-          </a:p>
-        </p:txBody>
-      </p:sp>
-      <p:sp>
-        <p:nvSpPr>
-          <p:cNvPr id="30" name="card-203"/>
-          <p:cNvSpPr/>
-          <p:nvPr/>
-        </p:nvSpPr>
-        <p:spPr>
-          <a:xfrm>
-            <a:off x="9040901" y="2971800"/>
-            <a:ext cx="2602154" cy="1965960"/>
-          </a:xfrm>
-          <a:prstGeom prst="roundRect">
-            <a:avLst>
-              <a:gd name="adj" fmla="val 4651"/>
-            </a:avLst>
-          </a:prstGeom>
-          <a:solidFill>
-            <a:schemeClr val="bg2"/>
-          </a:solidFill>
-          <a:ln w="12700">
-            <a:solidFill>
-              <a:schemeClr val="bg2"/>
-            </a:solidFill>
-            <a:prstDash val="solid"/>
-          </a:ln>
-        </p:spPr>
-      </p:sp>
-      <p:sp>
-        <p:nvSpPr>
-          <p:cNvPr id="31" name="badge-204"/>
-          <p:cNvSpPr/>
-          <p:nvPr/>
-        </p:nvSpPr>
-        <p:spPr>
-          <a:xfrm>
-            <a:off x="9269501" y="3154680"/>
-            <a:ext cx="365760" cy="365760"/>
-          </a:xfrm>
-          <a:prstGeom prst="ellipse">
-            <a:avLst/>
-          </a:prstGeom>
-          <a:solidFill>
-            <a:schemeClr val="accent2"/>
-          </a:solidFill>
-          <a:ln>
-            <a:solidFill>
-              <a:schemeClr val="accent2"/>
-            </a:solidFill>
-          </a:ln>
-        </p:spPr>
-        <p:txBody>
-          <a:bodyPr wrap="square" lIns="0" tIns="0" rIns="0" bIns="0" rtlCol="0" anchor="ctr"/>
-          <a:lstStyle/>
-          <a:p>
-            <a:pPr algn="ctr" indent="0" marL="0">
-              <a:buNone/>
-            </a:pPr>
-            <a:r>
-              <a:rPr lang="en-US" sz="1400" b="1" dirty="0">
-                <a:solidFill>
-                  <a:schemeClr val="bg1"/>
-                </a:solidFill>
-              </a:rPr>
-              <a:t>4</a:t>
-            </a:r>
-            <a:endParaRPr lang="en-US" sz="1400" dirty="0"/>
-          </a:p>
-        </p:txBody>
-      </p:sp>
-      <p:sp>
-        <p:nvSpPr>
-          <p:cNvPr id="32" name="label-205"/>
-          <p:cNvSpPr txBox="1"/>
-          <p:nvPr/>
-        </p:nvSpPr>
-        <p:spPr>
-          <a:xfrm>
-            <a:off x="9726701" y="3136392"/>
-            <a:ext cx="1779194" cy="411480"/>
-          </a:xfrm>
-          <a:prstGeom prst="rect">
-            <a:avLst/>
-          </a:prstGeom>
-          <a:noFill/>
-          <a:ln/>
-        </p:spPr>
-        <p:txBody>
-          <a:bodyPr wrap="square" lIns="0" tIns="0" rIns="0" bIns="0" rtlCol="0" anchor="ctr"/>
-          <a:lstStyle/>
-          <a:p>
-            <a:pPr algn="l" indent="0" marL="0">
-              <a:buNone/>
-            </a:pPr>
-            <a:r>
-              <a:rPr lang="en-US" sz="1500" b="1" dirty="0">
-                <a:solidFill>
-                  <a:schemeClr val="tx2"/>
-                </a:solidFill>
-              </a:rPr>
-              <a:t>写作专家</a:t>
-            </a:r>
-            <a:endParaRPr lang="en-US" sz="1500" dirty="0"/>
-          </a:p>
-        </p:txBody>
-      </p:sp>
-      <p:sp>
-        <p:nvSpPr>
-          <p:cNvPr id="33" name="label-206"/>
-          <p:cNvSpPr txBox="1"/>
-          <p:nvPr/>
-        </p:nvSpPr>
-        <p:spPr>
-          <a:xfrm>
-            <a:off x="9269501" y="3657600"/>
-            <a:ext cx="2190674" cy="1188720"/>
-          </a:xfrm>
-          <a:prstGeom prst="rect">
-            <a:avLst/>
-          </a:prstGeom>
-          <a:noFill/>
-          <a:ln/>
-        </p:spPr>
-        <p:txBody>
-          <a:bodyPr wrap="square" lIns="0" tIns="0" rIns="0" bIns="0" rtlCol="0" anchor="t"/>
-          <a:lstStyle/>
-          <a:p>
-            <a:pPr algn="l" indent="0" marL="0">
-              <a:buNone/>
-            </a:pPr>
-            <a:r>
-              <a:rPr lang="en-US" sz="1250" dirty="0">
-                <a:solidFill>
-                  <a:schemeClr val="tx1"/>
-                </a:solidFill>
-              </a:rPr>
-              <a:t>把通过质量门的发现综合成报告，结论附证据编号。</a:t>
-            </a:r>
-            <a:endParaRPr lang="en-US" sz="1250" dirty="0"/>
-          </a:p>
-        </p:txBody>
-      </p:sp>
-      <p:sp>
-        <p:nvSpPr>
-          <p:cNvPr id="34" name="label-207"/>
-          <p:cNvSpPr txBox="1"/>
-          <p:nvPr/>
-        </p:nvSpPr>
-        <p:spPr>
-          <a:xfrm>
-            <a:off x="548640" y="5120640"/>
-            <a:ext cx="3698138" cy="548640"/>
-          </a:xfrm>
-          <a:prstGeom prst="rect">
-            <a:avLst/>
-          </a:prstGeom>
-          <a:noFill/>
-          <a:ln/>
-        </p:spPr>
-        <p:txBody>
-          <a:bodyPr wrap="square" lIns="0" tIns="0" rIns="0" bIns="0" rtlCol="0" anchor="t"/>
-          <a:lstStyle/>
-          <a:p>
-            <a:pPr algn="ctr" indent="0" marL="0">
-              <a:buNone/>
-            </a:pPr>
-            <a:r>
-              <a:rPr lang="en-US" sz="2800" b="1" dirty="0">
-                <a:solidFill>
-                  <a:schemeClr val="accent2"/>
-                </a:solidFill>
-              </a:rPr>
-              <a:t>26 位</a:t>
-            </a:r>
-            <a:endParaRPr lang="en-US" sz="2800" dirty="0"/>
-          </a:p>
-        </p:txBody>
-      </p:sp>
-      <p:sp>
-        <p:nvSpPr>
-          <p:cNvPr id="35" name="label-208"/>
-          <p:cNvSpPr txBox="1"/>
-          <p:nvPr/>
-        </p:nvSpPr>
-        <p:spPr>
-          <a:xfrm>
-            <a:off x="548640" y="5669280"/>
-            <a:ext cx="3698138" cy="274320"/>
-          </a:xfrm>
-          <a:prstGeom prst="rect">
-            <a:avLst/>
-          </a:prstGeom>
-          <a:noFill/>
-          <a:ln/>
-        </p:spPr>
-        <p:txBody>
-          <a:bodyPr wrap="square" lIns="0" tIns="0" rIns="0" bIns="0" rtlCol="0" anchor="t"/>
-          <a:lstStyle/>
-          <a:p>
-            <a:pPr algn="ctr" indent="0" marL="0">
-              <a:buNone/>
-            </a:pPr>
-            <a:r>
-              <a:rPr lang="en-US" sz="1200" dirty="0">
-                <a:solidFill>
-                  <a:schemeClr val="accent6"/>
-                </a:solidFill>
-              </a:rPr>
-              <a:t>领域专家角色</a:t>
-            </a:r>
-            <a:endParaRPr lang="en-US" sz="1200" dirty="0"/>
-          </a:p>
-        </p:txBody>
-      </p:sp>
-      <p:sp>
-        <p:nvSpPr>
-          <p:cNvPr id="36" name="label-209"/>
-          <p:cNvSpPr txBox="1"/>
-          <p:nvPr/>
-        </p:nvSpPr>
-        <p:spPr>
-          <a:xfrm>
-            <a:off x="4246778" y="5120640"/>
-            <a:ext cx="3698138" cy="548640"/>
-          </a:xfrm>
-          <a:prstGeom prst="rect">
-            <a:avLst/>
-          </a:prstGeom>
-          <a:noFill/>
-          <a:ln/>
-        </p:spPr>
-        <p:txBody>
-          <a:bodyPr wrap="square" lIns="0" tIns="0" rIns="0" bIns="0" rtlCol="0" anchor="t"/>
-          <a:lstStyle/>
-          <a:p>
-            <a:pPr algn="ctr" indent="0" marL="0">
-              <a:buNone/>
-            </a:pPr>
-            <a:r>
-              <a:rPr lang="en-US" sz="2800" b="1" dirty="0">
-                <a:solidFill>
-                  <a:schemeClr val="accent2"/>
-                </a:solidFill>
-              </a:rPr>
-              <a:t>15 个</a:t>
-            </a:r>
-            <a:endParaRPr lang="en-US" sz="2800" dirty="0"/>
-          </a:p>
-        </p:txBody>
-      </p:sp>
-      <p:sp>
-        <p:nvSpPr>
-          <p:cNvPr id="37" name="label-210"/>
-          <p:cNvSpPr txBox="1"/>
-          <p:nvPr/>
-        </p:nvSpPr>
-        <p:spPr>
-          <a:xfrm>
-            <a:off x="4246778" y="5669280"/>
-            <a:ext cx="3698138" cy="274320"/>
-          </a:xfrm>
-          <a:prstGeom prst="rect">
-            <a:avLst/>
-          </a:prstGeom>
-          <a:noFill/>
-          <a:ln/>
-        </p:spPr>
-        <p:txBody>
-          <a:bodyPr wrap="square" lIns="0" tIns="0" rIns="0" bIns="0" rtlCol="0" anchor="t"/>
-          <a:lstStyle/>
-          <a:p>
-            <a:pPr algn="ctr" indent="0" marL="0">
-              <a:buNone/>
-            </a:pPr>
-            <a:r>
-              <a:rPr lang="en-US" sz="1200" dirty="0">
-                <a:solidFill>
-                  <a:schemeClr val="accent6"/>
-                </a:solidFill>
-              </a:rPr>
-              <a:t>团队模板</a:t>
-            </a:r>
-            <a:endParaRPr lang="en-US" sz="1200" dirty="0"/>
-          </a:p>
-        </p:txBody>
-      </p:sp>
-      <p:sp>
-        <p:nvSpPr>
-          <p:cNvPr id="38" name="label-211"/>
-          <p:cNvSpPr txBox="1"/>
-          <p:nvPr/>
-        </p:nvSpPr>
-        <p:spPr>
-          <a:xfrm>
-            <a:off x="7944917" y="5120640"/>
-            <a:ext cx="3698138" cy="548640"/>
-          </a:xfrm>
-          <a:prstGeom prst="rect">
-            <a:avLst/>
-          </a:prstGeom>
-          <a:noFill/>
-          <a:ln/>
-        </p:spPr>
-        <p:txBody>
-          <a:bodyPr wrap="square" lIns="0" tIns="0" rIns="0" bIns="0" rtlCol="0" anchor="t"/>
-          <a:lstStyle/>
-          <a:p>
-            <a:pPr algn="ctr" indent="0" marL="0">
-              <a:buNone/>
-            </a:pPr>
-            <a:r>
-              <a:rPr lang="en-US" sz="2800" b="1" dirty="0">
-                <a:solidFill>
-                  <a:schemeClr val="accent2"/>
-                </a:solidFill>
-              </a:rPr>
-              <a:t>@</a:t>
-            </a:r>
-            <a:endParaRPr lang="en-US" sz="2800" dirty="0"/>
-          </a:p>
-        </p:txBody>
-      </p:sp>
-      <p:sp>
-        <p:nvSpPr>
-          <p:cNvPr id="39" name="label-212"/>
-          <p:cNvSpPr txBox="1"/>
-          <p:nvPr/>
-        </p:nvSpPr>
-        <p:spPr>
-          <a:xfrm>
-            <a:off x="7944917" y="5669280"/>
-            <a:ext cx="3698138" cy="274320"/>
-          </a:xfrm>
-          <a:prstGeom prst="rect">
-            <a:avLst/>
-          </a:prstGeom>
-          <a:noFill/>
-          <a:ln/>
-        </p:spPr>
-        <p:txBody>
-          <a:bodyPr wrap="square" lIns="0" tIns="0" rIns="0" bIns="0" rtlCol="0" anchor="t"/>
-          <a:lstStyle/>
-          <a:p>
-            <a:pPr algn="ctr" indent="0" marL="0">
-              <a:buNone/>
-            </a:pPr>
-            <a:r>
-              <a:rPr lang="en-US" sz="1200" dirty="0">
-                <a:solidFill>
-                  <a:schemeClr val="accent6"/>
-                </a:solidFill>
-              </a:rPr>
-              <a:t>直接点名专家</a:t>
-            </a:r>
-            <a:endParaRPr lang="en-US" sz="1200" dirty="0"/>
-          </a:p>
-        </p:txBody>
-      </p:sp>
-      <p:sp>
-        <p:nvSpPr>
-          <p:cNvPr id="40" name="label-213"/>
-          <p:cNvSpPr txBox="1"/>
-          <p:nvPr/>
-        </p:nvSpPr>
-        <p:spPr>
-          <a:xfrm>
-            <a:off x="548640" y="6144768"/>
-            <a:ext cx="11094415" cy="256032"/>
-          </a:xfrm>
-          <a:prstGeom prst="rect">
-            <a:avLst/>
-          </a:prstGeom>
-          <a:noFill/>
-          <a:ln/>
-        </p:spPr>
-        <p:txBody>
-          <a:bodyPr wrap="square" lIns="0" tIns="0" rIns="0" bIns="0" rtlCol="0" anchor="t"/>
-          <a:lstStyle/>
-          <a:p>
-            <a:pPr algn="l" indent="0" marL="0">
-              <a:buNone/>
-            </a:pPr>
-            <a:r>
-              <a:rPr lang="en-US" sz="1000" dirty="0">
-                <a:solidFill>
-                  <a:schemeClr val="accent6"/>
-                </a:solidFill>
-              </a:rPr>
-              <a:t>实现状态：2.x 已具备，3.0 继续完善。</a:t>
-            </a:r>
-            <a:endParaRPr lang="en-US" sz="1000" dirty="0"/>
           </a:p>
         </p:txBody>
       </p:sp>
